--- a/sglang_direct_kv/artifacts/slides/agent_aware_kv_movement_manager_deck.pptx
+++ b/sglang_direct_kv/artifacts/slides/agent_aware_kv_movement_manager_deck.pptx
@@ -2,18 +2,19 @@
 <file path=ppt/presentation.xml><?xml version="1.0" encoding="utf-8"?>
 <p:presentation xmlns:p="http://schemas.openxmlformats.org/presentationml/2006/main">
   <p:sldMasterIdLst>
-    <p:sldMasterId xmlns:r="http://schemas.openxmlformats.org/officeDocument/2006/relationships" id="2147483648" r:id="Rfa00eb11843d4bc2"/>
+    <p:sldMasterId xmlns:r="http://schemas.openxmlformats.org/officeDocument/2006/relationships" id="2147483648" r:id="Rea2f3b2e08af44f7"/>
   </p:sldMasterIdLst>
   <p:notesMasterIdLst>
-    <p:notesMasterId xmlns:r="http://schemas.openxmlformats.org/officeDocument/2006/relationships" r:id="Rc4fa7c2f6d094a3c"/>
+    <p:notesMasterId xmlns:r="http://schemas.openxmlformats.org/officeDocument/2006/relationships" r:id="Rede9b1d8cd8847b6"/>
   </p:notesMasterIdLst>
   <p:sldIdLst>
-    <p:sldId xmlns:r="http://schemas.openxmlformats.org/officeDocument/2006/relationships" id="256" r:id="Re7c71b2ccdfb4b68"/>
-    <p:sldId xmlns:r="http://schemas.openxmlformats.org/officeDocument/2006/relationships" id="257" r:id="R536e8eeb992a49ab"/>
-    <p:sldId xmlns:r="http://schemas.openxmlformats.org/officeDocument/2006/relationships" id="258" r:id="R9db42e922a8b4c3a"/>
-    <p:sldId xmlns:r="http://schemas.openxmlformats.org/officeDocument/2006/relationships" id="259" r:id="R78d83a6c878d4765"/>
-    <p:sldId xmlns:r="http://schemas.openxmlformats.org/officeDocument/2006/relationships" id="260" r:id="Rb546ab3200894731"/>
-    <p:sldId xmlns:r="http://schemas.openxmlformats.org/officeDocument/2006/relationships" id="261" r:id="Rb5e8ac821d534cb3"/>
+    <p:sldId xmlns:r="http://schemas.openxmlformats.org/officeDocument/2006/relationships" id="256" r:id="R47780e98d4ba4e89"/>
+    <p:sldId xmlns:r="http://schemas.openxmlformats.org/officeDocument/2006/relationships" id="257" r:id="R93251a3c4ceb449c"/>
+    <p:sldId xmlns:r="http://schemas.openxmlformats.org/officeDocument/2006/relationships" id="258" r:id="R842fadeab3894f37"/>
+    <p:sldId xmlns:r="http://schemas.openxmlformats.org/officeDocument/2006/relationships" id="259" r:id="Rffe7b6e06a754a9d"/>
+    <p:sldId xmlns:r="http://schemas.openxmlformats.org/officeDocument/2006/relationships" id="260" r:id="R01057d24ff7e4320"/>
+    <p:sldId xmlns:r="http://schemas.openxmlformats.org/officeDocument/2006/relationships" id="261" r:id="R7677af7031d44c2c"/>
+    <p:sldId xmlns:r="http://schemas.openxmlformats.org/officeDocument/2006/relationships" id="262" r:id="Rf7c85b66392b4b72"/>
   </p:sldIdLst>
   <p:sldSz cx="12192000" cy="6858000"/>
   <p:notesSz cx="6858000" cy="9144000"/>
@@ -470,6 +471,11 @@
               <a:t>Local report: /Users/oluwolejaiyeoba/Documents/GitHub/agentic_hardware/sglang_direct_kv/artifacts/results/latest_master_report.html</a:t>
             </a:r>
           </a:p>
+          <a:p xmlns:a="http://schemas.openxmlformats.org/drawingml/2006/main">
+            <a:r>
+              <a:t>Backup report: /Users/oluwolejaiyeoba/Documents/GitHub/agentic_hardware/backups/latest_master_report-1.html</a:t>
+            </a:r>
+          </a:p>
         </p:txBody>
       </p:sp>
       <p:sp>
@@ -560,6 +566,11 @@
               <a:t>Local report: /Users/oluwolejaiyeoba/Documents/GitHub/agentic_hardware/sglang_direct_kv/artifacts/results/latest_master_report.html</a:t>
             </a:r>
           </a:p>
+          <a:p xmlns:a="http://schemas.openxmlformats.org/drawingml/2006/main">
+            <a:r>
+              <a:t>Backup report: /Users/oluwolejaiyeoba/Documents/GitHub/agentic_hardware/backups/latest_master_report-1.html</a:t>
+            </a:r>
+          </a:p>
         </p:txBody>
       </p:sp>
       <p:sp>
@@ -650,6 +661,11 @@
               <a:t>Local report: /Users/oluwolejaiyeoba/Documents/GitHub/agentic_hardware/sglang_direct_kv/artifacts/results/latest_master_report.html</a:t>
             </a:r>
           </a:p>
+          <a:p xmlns:a="http://schemas.openxmlformats.org/drawingml/2006/main">
+            <a:r>
+              <a:t>Backup report: /Users/oluwolejaiyeoba/Documents/GitHub/agentic_hardware/backups/latest_master_report-1.html</a:t>
+            </a:r>
+          </a:p>
         </p:txBody>
       </p:sp>
       <p:sp>
@@ -717,12 +733,12 @@
           <a:lstStyle xmlns:a="http://schemas.openxmlformats.org/drawingml/2006/main"/>
           <a:p xmlns:a="http://schemas.openxmlformats.org/drawingml/2006/main">
             <a:r>
-              <a:t>This is the aggregate evidence slide. The current controlled no-prefetch run reports 8 no-prefetch replay H2D gaps and 8 late H2D finishes.</a:t>
-            </a:r>
-          </a:p>
-          <a:p xmlns:a="http://schemas.openxmlformats.org/drawingml/2006/main">
-            <a:r>
-              <a:t>Measured claim source: Global Replay H2D Readiness table and dot plot in latest_master_report.html.</a:t>
+              <a:t>This slide is the global prefetch-attempt evidence. The backup report shows 114 matched prefetch attempts, 112 late, and 98.25% late.</a:t>
+            </a:r>
+          </a:p>
+          <a:p xmlns:a="http://schemas.openxmlformats.org/drawingml/2006/main">
+            <a:r>
+              <a:t>Use it to show that software prefetch through the normal serving path often misses tight replay windows.</a:t>
             </a:r>
           </a:p>
           <a:p xmlns:a="http://schemas.openxmlformats.org/drawingml/2006/main">
@@ -738,6 +754,11 @@
           <a:p xmlns:a="http://schemas.openxmlformats.org/drawingml/2006/main">
             <a:r>
               <a:t>Local report: /Users/oluwolejaiyeoba/Documents/GitHub/agentic_hardware/sglang_direct_kv/artifacts/results/latest_master_report.html</a:t>
+            </a:r>
+          </a:p>
+          <a:p xmlns:a="http://schemas.openxmlformats.org/drawingml/2006/main">
+            <a:r>
+              <a:t>Backup report: /Users/oluwolejaiyeoba/Documents/GitHub/agentic_hardware/backups/latest_master_report-1.html</a:t>
             </a:r>
           </a:p>
         </p:txBody>
@@ -807,12 +828,12 @@
           <a:lstStyle xmlns:a="http://schemas.openxmlformats.org/drawingml/2006/main"/>
           <a:p xmlns:a="http://schemas.openxmlformats.org/drawingml/2006/main">
             <a:r>
-              <a:t>This chart separates replay due, client submit, SGLang receive, scheduler queue/admit, H2D start, and H2D finish.</a:t>
-            </a:r>
-          </a:p>
-          <a:p xmlns:a="http://schemas.openxmlformats.org/drawingml/2006/main">
-            <a:r>
-              <a:t>The key manager takeaway: a hint-aware design should influence scheduling and priority, not merely request more copies.</a:t>
+              <a:t>This is the aggregate evidence slide. The current controlled no-prefetch run reports 8 no-prefetch replay H2D gaps and 8 late H2D finishes.</a:t>
+            </a:r>
+          </a:p>
+          <a:p xmlns:a="http://schemas.openxmlformats.org/drawingml/2006/main">
+            <a:r>
+              <a:t>Measured claim source: Global Replay H2D Readiness table and dot plot in latest_master_report.html.</a:t>
             </a:r>
           </a:p>
           <a:p xmlns:a="http://schemas.openxmlformats.org/drawingml/2006/main">
@@ -828,6 +849,11 @@
           <a:p xmlns:a="http://schemas.openxmlformats.org/drawingml/2006/main">
             <a:r>
               <a:t>Local report: /Users/oluwolejaiyeoba/Documents/GitHub/agentic_hardware/sglang_direct_kv/artifacts/results/latest_master_report.html</a:t>
+            </a:r>
+          </a:p>
+          <a:p xmlns:a="http://schemas.openxmlformats.org/drawingml/2006/main">
+            <a:r>
+              <a:t>Backup report: /Users/oluwolejaiyeoba/Documents/GitHub/agentic_hardware/backups/latest_master_report-1.html</a:t>
             </a:r>
           </a:p>
         </p:txBody>
@@ -897,6 +923,101 @@
           <a:lstStyle xmlns:a="http://schemas.openxmlformats.org/drawingml/2006/main"/>
           <a:p xmlns:a="http://schemas.openxmlformats.org/drawingml/2006/main">
             <a:r>
+              <a:t>This chart separates replay due, client submit, SGLang receive, scheduler queue/admit, H2D start, and H2D finish.</a:t>
+            </a:r>
+          </a:p>
+          <a:p xmlns:a="http://schemas.openxmlformats.org/drawingml/2006/main">
+            <a:r>
+              <a:t>The key manager takeaway: a hint-aware design should influence scheduling and priority, not merely request more copies.</a:t>
+            </a:r>
+          </a:p>
+          <a:p xmlns:a="http://schemas.openxmlformats.org/drawingml/2006/main">
+            <a:r>
+              <a:t/>
+            </a:r>
+          </a:p>
+          <a:p xmlns:a="http://schemas.openxmlformats.org/drawingml/2006/main">
+            <a:r>
+              <a:t>[Sources]</a:t>
+            </a:r>
+          </a:p>
+          <a:p xmlns:a="http://schemas.openxmlformats.org/drawingml/2006/main">
+            <a:r>
+              <a:t>Local report: /Users/oluwolejaiyeoba/Documents/GitHub/agentic_hardware/sglang_direct_kv/artifacts/results/latest_master_report.html</a:t>
+            </a:r>
+          </a:p>
+          <a:p xmlns:a="http://schemas.openxmlformats.org/drawingml/2006/main">
+            <a:r>
+              <a:t>Backup report: /Users/oluwolejaiyeoba/Documents/GitHub/agentic_hardware/backups/latest_master_report-1.html</a:t>
+            </a:r>
+          </a:p>
+        </p:txBody>
+      </p:sp>
+      <p:sp>
+        <p:nvSpPr>
+          <p:cNvPr id="4" name="Slide Number Placeholder 3"/>
+          <p:cNvSpPr>
+            <a:spLocks xmlns:a="http://schemas.openxmlformats.org/drawingml/2006/main" noGrp="1"/>
+          </p:cNvSpPr>
+          <p:nvPr>
+            <p:ph type="sldNum" idx="5"/>
+          </p:nvPr>
+        </p:nvSpPr>
+        <p:spPr/>
+        <p:txBody>
+          <a:bodyPr xmlns:a="http://schemas.openxmlformats.org/drawingml/2006/main"/>
+          <a:lstStyle xmlns:a="http://schemas.openxmlformats.org/drawingml/2006/main"/>
+          <a:p xmlns:a="http://schemas.openxmlformats.org/drawingml/2006/main"/>
+        </p:txBody>
+      </p:sp>
+    </p:spTree>
+  </p:cSld>
+  <p:clrMapOvr>
+    <a:masterClrMapping xmlns:a="http://schemas.openxmlformats.org/drawingml/2006/main"/>
+  </p:clrMapOvr>
+</p:notes>
+</file>
+
+<file path=ppt/notesSlides/notesSlide7.xml><?xml version="1.0" encoding="utf-8"?>
+<p:notes xmlns:p="http://schemas.openxmlformats.org/presentationml/2006/main">
+  <p:cSld>
+    <p:spTree>
+      <p:nvGrpSpPr>
+        <p:cNvPr id="1" name=""/>
+        <p:cNvGrpSpPr/>
+        <p:nvPr/>
+      </p:nvGrpSpPr>
+      <p:grpSpPr>
+        <a:xfrm xmlns:a="http://schemas.openxmlformats.org/drawingml/2006/main"/>
+      </p:grpSpPr>
+      <p:sp>
+        <p:nvSpPr>
+          <p:cNvPr id="2" name="Slide Image Placeholder 1"/>
+          <p:cNvSpPr>
+            <a:spLocks xmlns:a="http://schemas.openxmlformats.org/drawingml/2006/main" noGrp="1"/>
+          </p:cNvSpPr>
+          <p:nvPr>
+            <p:ph type="sldImg" idx="0"/>
+          </p:nvPr>
+        </p:nvSpPr>
+        <p:spPr/>
+      </p:sp>
+      <p:sp>
+        <p:nvSpPr>
+          <p:cNvPr id="3" name="Notes Placeholder 2"/>
+          <p:cNvSpPr>
+            <a:spLocks xmlns:a="http://schemas.openxmlformats.org/drawingml/2006/main" noGrp="1"/>
+          </p:cNvSpPr>
+          <p:nvPr>
+            <p:ph type="body" idx="1"/>
+          </p:nvPr>
+        </p:nvSpPr>
+        <p:spPr/>
+        <p:txBody>
+          <a:bodyPr xmlns:a="http://schemas.openxmlformats.org/drawingml/2006/main"/>
+          <a:lstStyle xmlns:a="http://schemas.openxmlformats.org/drawingml/2006/main"/>
+          <a:p xmlns:a="http://schemas.openxmlformats.org/drawingml/2006/main">
+            <a:r>
               <a:t>Closing slide. This translates observed software/runtime behavior into concrete hardware support candidates.</a:t>
             </a:r>
           </a:p>
@@ -918,6 +1039,11 @@
           <a:p xmlns:a="http://schemas.openxmlformats.org/drawingml/2006/main">
             <a:r>
               <a:t>Local report: /Users/oluwolejaiyeoba/Documents/GitHub/agentic_hardware/sglang_direct_kv/artifacts/results/latest_master_report.html</a:t>
+            </a:r>
+          </a:p>
+          <a:p xmlns:a="http://schemas.openxmlformats.org/drawingml/2006/main">
+            <a:r>
+              <a:t>Backup report: /Users/oluwolejaiyeoba/Documents/GitHub/agentic_hardware/backups/latest_master_report-1.html</a:t>
             </a:r>
           </a:p>
         </p:txBody>
@@ -985,7 +1111,7 @@
   </p:cSld>
   <p:clrMap bg1="lt1" tx1="dk1" bg2="lt2" tx2="dk2" accent1="accent1" accent2="accent2" accent3="accent3" accent4="accent4" accent5="accent5" accent6="accent6" hlink="hlink" folHlink="folHlink"/>
   <p:sldLayoutIdLst>
-    <p:sldLayoutId xmlns:r="http://schemas.openxmlformats.org/officeDocument/2006/relationships" id="2147483649" r:id="R1fb5cc151ed64635"/>
+    <p:sldLayoutId xmlns:r="http://schemas.openxmlformats.org/officeDocument/2006/relationships" id="2147483649" r:id="R2785d58bf67c4c75"/>
   </p:sldLayoutIdLst>
   <p:txStyles>
     <p:titleStyle>
@@ -1536,7 +1662,7 @@
           <p:cNvPr id="19" name="">
             <a:extLst xmlns:a="http://schemas.openxmlformats.org/drawingml/2006/main">
               <a:ext uri="{FF2B5EF4-FFF2-40B4-BE49-F238E27FC236}">
-                <a16:creationId xmlns:a16="http://schemas.microsoft.com/office/drawing/2014/main" id="{E1EADB0F-49D7-4CE2-B0A9-A801DB2828FD}"/>
+                <a16:creationId xmlns:a16="http://schemas.microsoft.com/office/drawing/2014/main" id="{20958EC4-084F-43BB-A1DF-CD70852880F9}"/>
               </a:ext>
             </a:extLst>
           </p:cNvPr>
@@ -1586,7 +1712,7 @@
           <p:cNvPr id="2" name="">
             <a:extLst xmlns:a="http://schemas.openxmlformats.org/drawingml/2006/main">
               <a:ext uri="{FF2B5EF4-FFF2-40B4-BE49-F238E27FC236}">
-                <a16:creationId xmlns:a16="http://schemas.microsoft.com/office/drawing/2014/main" id="{6BFC5422-B85A-4062-A80A-91899F478BBE}"/>
+                <a16:creationId xmlns:a16="http://schemas.microsoft.com/office/drawing/2014/main" id="{B66BBBD2-6EE6-4ECA-8239-23AF8406C37A}"/>
               </a:ext>
             </a:extLst>
           </p:cNvPr>
@@ -1636,7 +1762,7 @@
           <p:cNvPr id="3" name="">
             <a:extLst xmlns:a="http://schemas.openxmlformats.org/drawingml/2006/main">
               <a:ext uri="{FF2B5EF4-FFF2-40B4-BE49-F238E27FC236}">
-                <a16:creationId xmlns:a16="http://schemas.microsoft.com/office/drawing/2014/main" id="{2346B395-41D7-4DA8-8046-43DE515C5FD5}"/>
+                <a16:creationId xmlns:a16="http://schemas.microsoft.com/office/drawing/2014/main" id="{9A24E77F-CD02-47D5-AAEF-DE45FC5B0CC6}"/>
               </a:ext>
             </a:extLst>
           </p:cNvPr>
@@ -1671,7 +1797,7 @@
           <p:cNvPr id="4" name="">
             <a:extLst xmlns:a="http://schemas.openxmlformats.org/drawingml/2006/main">
               <a:ext uri="{FF2B5EF4-FFF2-40B4-BE49-F238E27FC236}">
-                <a16:creationId xmlns:a16="http://schemas.microsoft.com/office/drawing/2014/main" id="{5CDCA6F9-0A55-44C6-BCFF-2BB2ED5EA59D}"/>
+                <a16:creationId xmlns:a16="http://schemas.microsoft.com/office/drawing/2014/main" id="{DE5EC0E3-6AB8-4D2E-9C63-CB8E4A05C396}"/>
               </a:ext>
             </a:extLst>
           </p:cNvPr>
@@ -1721,7 +1847,7 @@
           <p:cNvPr id="5" name="">
             <a:extLst xmlns:a="http://schemas.openxmlformats.org/drawingml/2006/main">
               <a:ext uri="{FF2B5EF4-FFF2-40B4-BE49-F238E27FC236}">
-                <a16:creationId xmlns:a16="http://schemas.microsoft.com/office/drawing/2014/main" id="{3D25C52C-49AD-49B3-9C94-F3D7DAE7E6D5}"/>
+                <a16:creationId xmlns:a16="http://schemas.microsoft.com/office/drawing/2014/main" id="{BB8B087B-1ECE-4428-B50C-16198F8AC04F}"/>
               </a:ext>
             </a:extLst>
           </p:cNvPr>
@@ -1771,7 +1897,7 @@
           <p:cNvPr id="6" name="">
             <a:extLst xmlns:a="http://schemas.openxmlformats.org/drawingml/2006/main">
               <a:ext uri="{FF2B5EF4-FFF2-40B4-BE49-F238E27FC236}">
-                <a16:creationId xmlns:a16="http://schemas.microsoft.com/office/drawing/2014/main" id="{314C0130-DBE0-4468-ACCF-D258A71299FE}"/>
+                <a16:creationId xmlns:a16="http://schemas.microsoft.com/office/drawing/2014/main" id="{CF7FCF74-2AB3-4C7F-83B6-CB6784D717B2}"/>
               </a:ext>
             </a:extLst>
           </p:cNvPr>
@@ -1806,7 +1932,7 @@
           <p:cNvPr id="7" name="">
             <a:extLst xmlns:a="http://schemas.openxmlformats.org/drawingml/2006/main">
               <a:ext uri="{FF2B5EF4-FFF2-40B4-BE49-F238E27FC236}">
-                <a16:creationId xmlns:a16="http://schemas.microsoft.com/office/drawing/2014/main" id="{1E08C2FC-5508-4010-BA3C-B3341B774DCB}"/>
+                <a16:creationId xmlns:a16="http://schemas.microsoft.com/office/drawing/2014/main" id="{589F69EF-6C4C-4083-8A32-48E931A86499}"/>
               </a:ext>
             </a:extLst>
           </p:cNvPr>
@@ -1856,7 +1982,7 @@
           <p:cNvPr id="8" name="">
             <a:extLst xmlns:a="http://schemas.openxmlformats.org/drawingml/2006/main">
               <a:ext uri="{FF2B5EF4-FFF2-40B4-BE49-F238E27FC236}">
-                <a16:creationId xmlns:a16="http://schemas.microsoft.com/office/drawing/2014/main" id="{F88700EC-2951-4905-8B22-F2C2CCCD6C61}"/>
+                <a16:creationId xmlns:a16="http://schemas.microsoft.com/office/drawing/2014/main" id="{0AF886A2-E72D-4E46-8EBF-9AC24BAAC2BC}"/>
               </a:ext>
             </a:extLst>
           </p:cNvPr>
@@ -1906,7 +2032,7 @@
           <p:cNvPr id="9" name="">
             <a:extLst xmlns:a="http://schemas.openxmlformats.org/drawingml/2006/main">
               <a:ext uri="{FF2B5EF4-FFF2-40B4-BE49-F238E27FC236}">
-                <a16:creationId xmlns:a16="http://schemas.microsoft.com/office/drawing/2014/main" id="{83552F68-4D7F-4B17-9DA3-30D866BF7066}"/>
+                <a16:creationId xmlns:a16="http://schemas.microsoft.com/office/drawing/2014/main" id="{85150986-ADBA-4011-98F3-5CE43E19C2DA}"/>
               </a:ext>
             </a:extLst>
           </p:cNvPr>
@@ -1941,7 +2067,7 @@
           <p:cNvPr id="10" name="">
             <a:extLst xmlns:a="http://schemas.openxmlformats.org/drawingml/2006/main">
               <a:ext uri="{FF2B5EF4-FFF2-40B4-BE49-F238E27FC236}">
-                <a16:creationId xmlns:a16="http://schemas.microsoft.com/office/drawing/2014/main" id="{9AAC68FE-02A0-47AD-AF3E-534568F2E09B}"/>
+                <a16:creationId xmlns:a16="http://schemas.microsoft.com/office/drawing/2014/main" id="{B2E751F7-8EA2-4655-B922-69DC2007FDF7}"/>
               </a:ext>
             </a:extLst>
           </p:cNvPr>
@@ -1991,7 +2117,7 @@
           <p:cNvPr id="11" name="">
             <a:extLst xmlns:a="http://schemas.openxmlformats.org/drawingml/2006/main">
               <a:ext uri="{FF2B5EF4-FFF2-40B4-BE49-F238E27FC236}">
-                <a16:creationId xmlns:a16="http://schemas.microsoft.com/office/drawing/2014/main" id="{180A168D-AEE5-450F-BCFA-A89B32B0E7D3}"/>
+                <a16:creationId xmlns:a16="http://schemas.microsoft.com/office/drawing/2014/main" id="{BED304B6-3BAC-45A6-9F6C-53E46FA450C9}"/>
               </a:ext>
             </a:extLst>
           </p:cNvPr>
@@ -2041,7 +2167,7 @@
           <p:cNvPr id="12" name="">
             <a:extLst xmlns:a="http://schemas.openxmlformats.org/drawingml/2006/main">
               <a:ext uri="{FF2B5EF4-FFF2-40B4-BE49-F238E27FC236}">
-                <a16:creationId xmlns:a16="http://schemas.microsoft.com/office/drawing/2014/main" id="{6598B410-883B-415E-8838-FCDF98902BC1}"/>
+                <a16:creationId xmlns:a16="http://schemas.microsoft.com/office/drawing/2014/main" id="{E64430C5-FA62-4ACA-8146-EAFD2DADB5F3}"/>
               </a:ext>
             </a:extLst>
           </p:cNvPr>
@@ -2076,7 +2202,7 @@
           <p:cNvPr id="13" name="">
             <a:extLst xmlns:a="http://schemas.openxmlformats.org/drawingml/2006/main">
               <a:ext uri="{FF2B5EF4-FFF2-40B4-BE49-F238E27FC236}">
-                <a16:creationId xmlns:a16="http://schemas.microsoft.com/office/drawing/2014/main" id="{10D09B33-DD66-4D3C-AD0D-19A3433E7FA1}"/>
+                <a16:creationId xmlns:a16="http://schemas.microsoft.com/office/drawing/2014/main" id="{5F3E27A1-E09F-4C1E-95A0-40BDC32B69E7}"/>
               </a:ext>
             </a:extLst>
           </p:cNvPr>
@@ -2126,7 +2252,7 @@
           <p:cNvPr id="14" name="">
             <a:extLst xmlns:a="http://schemas.openxmlformats.org/drawingml/2006/main">
               <a:ext uri="{FF2B5EF4-FFF2-40B4-BE49-F238E27FC236}">
-                <a16:creationId xmlns:a16="http://schemas.microsoft.com/office/drawing/2014/main" id="{AAC68ADA-B8F2-44E8-B318-0A3C714D159B}"/>
+                <a16:creationId xmlns:a16="http://schemas.microsoft.com/office/drawing/2014/main" id="{BB2B1A88-8AE0-4005-A8C8-2C92055BC963}"/>
               </a:ext>
             </a:extLst>
           </p:cNvPr>
@@ -2161,7 +2287,7 @@
           <p:cNvPr id="15" name="">
             <a:extLst xmlns:a="http://schemas.openxmlformats.org/drawingml/2006/main">
               <a:ext uri="{FF2B5EF4-FFF2-40B4-BE49-F238E27FC236}">
-                <a16:creationId xmlns:a16="http://schemas.microsoft.com/office/drawing/2014/main" id="{1CA53E67-9E98-4171-855B-32CCCA087FD3}"/>
+                <a16:creationId xmlns:a16="http://schemas.microsoft.com/office/drawing/2014/main" id="{9DF9BA3E-33EB-43D1-A170-376786FF6407}"/>
               </a:ext>
             </a:extLst>
           </p:cNvPr>
@@ -2211,7 +2337,7 @@
           <p:cNvPr id="16" name="">
             <a:extLst xmlns:a="http://schemas.openxmlformats.org/drawingml/2006/main">
               <a:ext uri="{FF2B5EF4-FFF2-40B4-BE49-F238E27FC236}">
-                <a16:creationId xmlns:a16="http://schemas.microsoft.com/office/drawing/2014/main" id="{FDA69DF9-D559-4C38-9F63-2B043D1A6646}"/>
+                <a16:creationId xmlns:a16="http://schemas.microsoft.com/office/drawing/2014/main" id="{1D4D829E-C3B5-4F3D-8D8B-D1A6A987F3FB}"/>
               </a:ext>
             </a:extLst>
           </p:cNvPr>
@@ -2261,7 +2387,7 @@
           <p:cNvPr id="17" name="">
             <a:extLst xmlns:a="http://schemas.openxmlformats.org/drawingml/2006/main">
               <a:ext uri="{FF2B5EF4-FFF2-40B4-BE49-F238E27FC236}">
-                <a16:creationId xmlns:a16="http://schemas.microsoft.com/office/drawing/2014/main" id="{23E669C1-2E8F-418E-88EA-2B0D78BE8D75}"/>
+                <a16:creationId xmlns:a16="http://schemas.microsoft.com/office/drawing/2014/main" id="{22F9DADA-61E4-4736-AAFD-9F448C83B97A}"/>
               </a:ext>
             </a:extLst>
           </p:cNvPr>
@@ -2311,7 +2437,7 @@
           <p:cNvPr id="18" name="">
             <a:extLst xmlns:a="http://schemas.openxmlformats.org/drawingml/2006/main">
               <a:ext uri="{FF2B5EF4-FFF2-40B4-BE49-F238E27FC236}">
-                <a16:creationId xmlns:a16="http://schemas.microsoft.com/office/drawing/2014/main" id="{1143D428-A9F1-40B3-B4C4-7C187E29F973}"/>
+                <a16:creationId xmlns:a16="http://schemas.microsoft.com/office/drawing/2014/main" id="{B57BD7DA-0E88-4657-B260-F843302001AD}"/>
               </a:ext>
             </a:extLst>
           </p:cNvPr>
@@ -2359,7 +2485,7 @@
     </p:spTree>
     <p:extLst>
       <p:ext uri="{BB962C8B-B14F-4D97-AF65-F5344CB8AC3E}">
-        <p14:creationId xmlns:p14="http://schemas.microsoft.com/office/powerpoint/2010/main" val="1913860813"/>
+        <p14:creationId xmlns:p14="http://schemas.microsoft.com/office/powerpoint/2010/main" val="468445094"/>
       </p:ext>
     </p:extLst>
   </p:cSld>
@@ -2390,7 +2516,7 @@
           <p:cNvPr id="26" name="">
             <a:extLst xmlns:a="http://schemas.openxmlformats.org/drawingml/2006/main">
               <a:ext uri="{FF2B5EF4-FFF2-40B4-BE49-F238E27FC236}">
-                <a16:creationId xmlns:a16="http://schemas.microsoft.com/office/drawing/2014/main" id="{2B9816FF-82DB-47D8-BFD4-C0F521FF65D3}"/>
+                <a16:creationId xmlns:a16="http://schemas.microsoft.com/office/drawing/2014/main" id="{5B304212-966E-44B6-8F26-05EBEC3CDA44}"/>
               </a:ext>
             </a:extLst>
           </p:cNvPr>
@@ -2440,7 +2566,7 @@
           <p:cNvPr id="2" name="">
             <a:extLst xmlns:a="http://schemas.openxmlformats.org/drawingml/2006/main">
               <a:ext uri="{FF2B5EF4-FFF2-40B4-BE49-F238E27FC236}">
-                <a16:creationId xmlns:a16="http://schemas.microsoft.com/office/drawing/2014/main" id="{F25883DB-1BD9-4D0F-94F9-03E265D58787}"/>
+                <a16:creationId xmlns:a16="http://schemas.microsoft.com/office/drawing/2014/main" id="{B7C767E8-0849-45F5-8D52-B4AB742D0800}"/>
               </a:ext>
             </a:extLst>
           </p:cNvPr>
@@ -2490,7 +2616,7 @@
           <p:cNvPr id="3" name="">
             <a:extLst xmlns:a="http://schemas.openxmlformats.org/drawingml/2006/main">
               <a:ext uri="{FF2B5EF4-FFF2-40B4-BE49-F238E27FC236}">
-                <a16:creationId xmlns:a16="http://schemas.microsoft.com/office/drawing/2014/main" id="{3BDD7703-BC4A-4289-AB95-7815F69B8A67}"/>
+                <a16:creationId xmlns:a16="http://schemas.microsoft.com/office/drawing/2014/main" id="{65934149-74FB-4362-932E-00984051B5CC}"/>
               </a:ext>
             </a:extLst>
           </p:cNvPr>
@@ -2525,7 +2651,7 @@
           <p:cNvPr id="4" name="">
             <a:extLst xmlns:a="http://schemas.openxmlformats.org/drawingml/2006/main">
               <a:ext uri="{FF2B5EF4-FFF2-40B4-BE49-F238E27FC236}">
-                <a16:creationId xmlns:a16="http://schemas.microsoft.com/office/drawing/2014/main" id="{FE46C4BD-9069-429D-80DE-D9FEE72A444B}"/>
+                <a16:creationId xmlns:a16="http://schemas.microsoft.com/office/drawing/2014/main" id="{BF92E4E6-4CE4-4DA4-90DF-A8DAFFA0F10B}"/>
               </a:ext>
             </a:extLst>
           </p:cNvPr>
@@ -2575,7 +2701,7 @@
           <p:cNvPr id="5" name="">
             <a:extLst xmlns:a="http://schemas.openxmlformats.org/drawingml/2006/main">
               <a:ext uri="{FF2B5EF4-FFF2-40B4-BE49-F238E27FC236}">
-                <a16:creationId xmlns:a16="http://schemas.microsoft.com/office/drawing/2014/main" id="{3D4B8AE5-3311-4E84-AF9D-7308ED14B4E8}"/>
+                <a16:creationId xmlns:a16="http://schemas.microsoft.com/office/drawing/2014/main" id="{705A6D02-8F02-4A1E-B67B-3C8DD6639D01}"/>
               </a:ext>
             </a:extLst>
           </p:cNvPr>
@@ -2606,7 +2732,7 @@
           <p:cNvPr id="6" name="">
             <a:extLst xmlns:a="http://schemas.openxmlformats.org/drawingml/2006/main">
               <a:ext uri="{FF2B5EF4-FFF2-40B4-BE49-F238E27FC236}">
-                <a16:creationId xmlns:a16="http://schemas.microsoft.com/office/drawing/2014/main" id="{6538A279-057D-4E2E-93AC-AB75E01A0DBF}"/>
+                <a16:creationId xmlns:a16="http://schemas.microsoft.com/office/drawing/2014/main" id="{3A2B59A9-B308-4E3E-9279-DACB36CB6F4C}"/>
               </a:ext>
             </a:extLst>
           </p:cNvPr>
@@ -2656,7 +2782,7 @@
           <p:cNvPr id="7" name="">
             <a:extLst xmlns:a="http://schemas.openxmlformats.org/drawingml/2006/main">
               <a:ext uri="{FF2B5EF4-FFF2-40B4-BE49-F238E27FC236}">
-                <a16:creationId xmlns:a16="http://schemas.microsoft.com/office/drawing/2014/main" id="{879039AE-5D83-4BF9-9BF3-57DEEF1E8989}"/>
+                <a16:creationId xmlns:a16="http://schemas.microsoft.com/office/drawing/2014/main" id="{823DF2F5-C198-4BC6-878B-21A46003FB84}"/>
               </a:ext>
             </a:extLst>
           </p:cNvPr>
@@ -2687,7 +2813,7 @@
           <p:cNvPr id="8" name="">
             <a:extLst xmlns:a="http://schemas.openxmlformats.org/drawingml/2006/main">
               <a:ext uri="{FF2B5EF4-FFF2-40B4-BE49-F238E27FC236}">
-                <a16:creationId xmlns:a16="http://schemas.microsoft.com/office/drawing/2014/main" id="{6D188110-02BD-4907-84D6-7BA362270349}"/>
+                <a16:creationId xmlns:a16="http://schemas.microsoft.com/office/drawing/2014/main" id="{2FA0C711-3EC2-4004-8707-E9942CD12346}"/>
               </a:ext>
             </a:extLst>
           </p:cNvPr>
@@ -2737,7 +2863,7 @@
           <p:cNvPr id="9" name="">
             <a:extLst xmlns:a="http://schemas.openxmlformats.org/drawingml/2006/main">
               <a:ext uri="{FF2B5EF4-FFF2-40B4-BE49-F238E27FC236}">
-                <a16:creationId xmlns:a16="http://schemas.microsoft.com/office/drawing/2014/main" id="{3E9ED247-F8A6-414A-8A3B-D629DB2914F5}"/>
+                <a16:creationId xmlns:a16="http://schemas.microsoft.com/office/drawing/2014/main" id="{BF0E8A9E-C64B-4EAA-BBF8-583CB1DF4FEA}"/>
               </a:ext>
             </a:extLst>
           </p:cNvPr>
@@ -2768,7 +2894,7 @@
           <p:cNvPr id="10" name="">
             <a:extLst xmlns:a="http://schemas.openxmlformats.org/drawingml/2006/main">
               <a:ext uri="{FF2B5EF4-FFF2-40B4-BE49-F238E27FC236}">
-                <a16:creationId xmlns:a16="http://schemas.microsoft.com/office/drawing/2014/main" id="{0F0C1390-3EDD-47AD-B7C1-4D49BA5DB898}"/>
+                <a16:creationId xmlns:a16="http://schemas.microsoft.com/office/drawing/2014/main" id="{5B063394-4E0A-4ACC-B624-84E082594B77}"/>
               </a:ext>
             </a:extLst>
           </p:cNvPr>
@@ -2818,7 +2944,7 @@
           <p:cNvPr id="11" name="">
             <a:extLst xmlns:a="http://schemas.openxmlformats.org/drawingml/2006/main">
               <a:ext uri="{FF2B5EF4-FFF2-40B4-BE49-F238E27FC236}">
-                <a16:creationId xmlns:a16="http://schemas.microsoft.com/office/drawing/2014/main" id="{4B627C1F-3A22-4047-9B73-43ED06EE6CAB}"/>
+                <a16:creationId xmlns:a16="http://schemas.microsoft.com/office/drawing/2014/main" id="{E7D7D880-0AC8-48F1-93B7-D6559F8D4A8B}"/>
               </a:ext>
             </a:extLst>
           </p:cNvPr>
@@ -2849,7 +2975,7 @@
           <p:cNvPr id="12" name="">
             <a:extLst xmlns:a="http://schemas.openxmlformats.org/drawingml/2006/main">
               <a:ext uri="{FF2B5EF4-FFF2-40B4-BE49-F238E27FC236}">
-                <a16:creationId xmlns:a16="http://schemas.microsoft.com/office/drawing/2014/main" id="{49006351-E643-42D5-858A-ED49B635FBAA}"/>
+                <a16:creationId xmlns:a16="http://schemas.microsoft.com/office/drawing/2014/main" id="{7BE8E679-ADDB-4925-B4CF-C41A7CA918FA}"/>
               </a:ext>
             </a:extLst>
           </p:cNvPr>
@@ -2899,7 +3025,7 @@
           <p:cNvPr id="13" name="">
             <a:extLst xmlns:a="http://schemas.openxmlformats.org/drawingml/2006/main">
               <a:ext uri="{FF2B5EF4-FFF2-40B4-BE49-F238E27FC236}">
-                <a16:creationId xmlns:a16="http://schemas.microsoft.com/office/drawing/2014/main" id="{CD53DA4A-4D9C-417F-AC68-92D9F9EA6C5A}"/>
+                <a16:creationId xmlns:a16="http://schemas.microsoft.com/office/drawing/2014/main" id="{D4A0AFAA-1A9D-4D87-A732-A83E2648C18B}"/>
               </a:ext>
             </a:extLst>
           </p:cNvPr>
@@ -2949,7 +3075,7 @@
           <p:cNvPr id="14" name="">
             <a:extLst xmlns:a="http://schemas.openxmlformats.org/drawingml/2006/main">
               <a:ext uri="{FF2B5EF4-FFF2-40B4-BE49-F238E27FC236}">
-                <a16:creationId xmlns:a16="http://schemas.microsoft.com/office/drawing/2014/main" id="{AD167537-B8AD-4AF9-9845-06CFB72A3685}"/>
+                <a16:creationId xmlns:a16="http://schemas.microsoft.com/office/drawing/2014/main" id="{7FEDF2CE-312F-40F4-A22A-BA6916369483}"/>
               </a:ext>
             </a:extLst>
           </p:cNvPr>
@@ -2984,7 +3110,7 @@
           <p:cNvPr id="15" name="">
             <a:extLst xmlns:a="http://schemas.openxmlformats.org/drawingml/2006/main">
               <a:ext uri="{FF2B5EF4-FFF2-40B4-BE49-F238E27FC236}">
-                <a16:creationId xmlns:a16="http://schemas.microsoft.com/office/drawing/2014/main" id="{BECA992A-F1A9-44AE-BCFF-FA7EF834B5E2}"/>
+                <a16:creationId xmlns:a16="http://schemas.microsoft.com/office/drawing/2014/main" id="{A9090AA3-28D2-4F87-89FE-DFA241B0007F}"/>
               </a:ext>
             </a:extLst>
           </p:cNvPr>
@@ -3034,7 +3160,7 @@
           <p:cNvPr id="16" name="">
             <a:extLst xmlns:a="http://schemas.openxmlformats.org/drawingml/2006/main">
               <a:ext uri="{FF2B5EF4-FFF2-40B4-BE49-F238E27FC236}">
-                <a16:creationId xmlns:a16="http://schemas.microsoft.com/office/drawing/2014/main" id="{176B00C8-7327-4FE3-A4D3-76B174DD0338}"/>
+                <a16:creationId xmlns:a16="http://schemas.microsoft.com/office/drawing/2014/main" id="{3815F2C9-5625-48F2-A652-A91309A84376}"/>
               </a:ext>
             </a:extLst>
           </p:cNvPr>
@@ -3065,7 +3191,7 @@
           <p:cNvPr id="17" name="">
             <a:extLst xmlns:a="http://schemas.openxmlformats.org/drawingml/2006/main">
               <a:ext uri="{FF2B5EF4-FFF2-40B4-BE49-F238E27FC236}">
-                <a16:creationId xmlns:a16="http://schemas.microsoft.com/office/drawing/2014/main" id="{F0957BDD-4FAD-4766-AA4E-9BA9BDB9B31C}"/>
+                <a16:creationId xmlns:a16="http://schemas.microsoft.com/office/drawing/2014/main" id="{2787C321-2A85-43AB-8EA6-64CD02863F8C}"/>
               </a:ext>
             </a:extLst>
           </p:cNvPr>
@@ -3115,7 +3241,7 @@
           <p:cNvPr id="18" name="">
             <a:extLst xmlns:a="http://schemas.openxmlformats.org/drawingml/2006/main">
               <a:ext uri="{FF2B5EF4-FFF2-40B4-BE49-F238E27FC236}">
-                <a16:creationId xmlns:a16="http://schemas.microsoft.com/office/drawing/2014/main" id="{D313D257-40BF-4374-9F9B-62998477244A}"/>
+                <a16:creationId xmlns:a16="http://schemas.microsoft.com/office/drawing/2014/main" id="{06599CE1-73D1-4EA2-A7DC-C294D366267B}"/>
               </a:ext>
             </a:extLst>
           </p:cNvPr>
@@ -3146,7 +3272,7 @@
           <p:cNvPr id="19" name="">
             <a:extLst xmlns:a="http://schemas.openxmlformats.org/drawingml/2006/main">
               <a:ext uri="{FF2B5EF4-FFF2-40B4-BE49-F238E27FC236}">
-                <a16:creationId xmlns:a16="http://schemas.microsoft.com/office/drawing/2014/main" id="{74376744-BFA4-4D97-862D-F1DDD59A22D6}"/>
+                <a16:creationId xmlns:a16="http://schemas.microsoft.com/office/drawing/2014/main" id="{9CCAA3CE-315E-4226-8F0B-54282A0E12CF}"/>
               </a:ext>
             </a:extLst>
           </p:cNvPr>
@@ -3196,7 +3322,7 @@
           <p:cNvPr id="20" name="">
             <a:extLst xmlns:a="http://schemas.openxmlformats.org/drawingml/2006/main">
               <a:ext uri="{FF2B5EF4-FFF2-40B4-BE49-F238E27FC236}">
-                <a16:creationId xmlns:a16="http://schemas.microsoft.com/office/drawing/2014/main" id="{677C9423-A854-44EC-B675-5A0B40431DB1}"/>
+                <a16:creationId xmlns:a16="http://schemas.microsoft.com/office/drawing/2014/main" id="{69C77716-AC4D-438B-819E-3C6E03A895AD}"/>
               </a:ext>
             </a:extLst>
           </p:cNvPr>
@@ -3227,7 +3353,7 @@
           <p:cNvPr id="21" name="">
             <a:extLst xmlns:a="http://schemas.openxmlformats.org/drawingml/2006/main">
               <a:ext uri="{FF2B5EF4-FFF2-40B4-BE49-F238E27FC236}">
-                <a16:creationId xmlns:a16="http://schemas.microsoft.com/office/drawing/2014/main" id="{2A14B436-7026-47C6-A5CD-0F91E359CE9A}"/>
+                <a16:creationId xmlns:a16="http://schemas.microsoft.com/office/drawing/2014/main" id="{0D760743-DAF0-47B2-BE49-F25DE27A8F08}"/>
               </a:ext>
             </a:extLst>
           </p:cNvPr>
@@ -3277,7 +3403,7 @@
           <p:cNvPr id="22" name="">
             <a:extLst xmlns:a="http://schemas.openxmlformats.org/drawingml/2006/main">
               <a:ext uri="{FF2B5EF4-FFF2-40B4-BE49-F238E27FC236}">
-                <a16:creationId xmlns:a16="http://schemas.microsoft.com/office/drawing/2014/main" id="{D7091C2F-BF4F-4848-85B0-F66C27909D12}"/>
+                <a16:creationId xmlns:a16="http://schemas.microsoft.com/office/drawing/2014/main" id="{9DFE107B-59B8-4E4F-B26A-CC3CE2124A79}"/>
               </a:ext>
             </a:extLst>
           </p:cNvPr>
@@ -3308,7 +3434,7 @@
           <p:cNvPr id="23" name="">
             <a:extLst xmlns:a="http://schemas.openxmlformats.org/drawingml/2006/main">
               <a:ext uri="{FF2B5EF4-FFF2-40B4-BE49-F238E27FC236}">
-                <a16:creationId xmlns:a16="http://schemas.microsoft.com/office/drawing/2014/main" id="{64CDA3F0-A3C5-4265-A88D-24BEED9A7B0F}"/>
+                <a16:creationId xmlns:a16="http://schemas.microsoft.com/office/drawing/2014/main" id="{2112F94A-343E-4C13-9FCA-922739F3E044}"/>
               </a:ext>
             </a:extLst>
           </p:cNvPr>
@@ -3358,7 +3484,7 @@
           <p:cNvPr id="24" name="">
             <a:extLst xmlns:a="http://schemas.openxmlformats.org/drawingml/2006/main">
               <a:ext uri="{FF2B5EF4-FFF2-40B4-BE49-F238E27FC236}">
-                <a16:creationId xmlns:a16="http://schemas.microsoft.com/office/drawing/2014/main" id="{86321EF2-579C-428C-9265-2F02C44B6580}"/>
+                <a16:creationId xmlns:a16="http://schemas.microsoft.com/office/drawing/2014/main" id="{1822698B-ACCB-4A5D-B2C5-4CAA67B92AD7}"/>
               </a:ext>
             </a:extLst>
           </p:cNvPr>
@@ -3408,7 +3534,7 @@
           <p:cNvPr id="25" name="">
             <a:extLst xmlns:a="http://schemas.openxmlformats.org/drawingml/2006/main">
               <a:ext uri="{FF2B5EF4-FFF2-40B4-BE49-F238E27FC236}">
-                <a16:creationId xmlns:a16="http://schemas.microsoft.com/office/drawing/2014/main" id="{93540BE4-AE03-4F46-BBAB-24A7E0B53686}"/>
+                <a16:creationId xmlns:a16="http://schemas.microsoft.com/office/drawing/2014/main" id="{F8DD5701-4380-4B90-A7B8-797450EE8224}"/>
               </a:ext>
             </a:extLst>
           </p:cNvPr>
@@ -3456,7 +3582,7 @@
     </p:spTree>
     <p:extLst>
       <p:ext uri="{BB962C8B-B14F-4D97-AF65-F5344CB8AC3E}">
-        <p14:creationId xmlns:p14="http://schemas.microsoft.com/office/powerpoint/2010/main" val="1450084744"/>
+        <p14:creationId xmlns:p14="http://schemas.microsoft.com/office/powerpoint/2010/main" val="139990614"/>
       </p:ext>
     </p:extLst>
   </p:cSld>
@@ -3487,7 +3613,7 @@
           <p:cNvPr id="9" name="">
             <a:extLst xmlns:a="http://schemas.openxmlformats.org/drawingml/2006/main">
               <a:ext uri="{FF2B5EF4-FFF2-40B4-BE49-F238E27FC236}">
-                <a16:creationId xmlns:a16="http://schemas.microsoft.com/office/drawing/2014/main" id="{38163A18-99A0-4379-85A1-D0A45360C536}"/>
+                <a16:creationId xmlns:a16="http://schemas.microsoft.com/office/drawing/2014/main" id="{DB3ADE53-E13F-41F7-A79A-14D52B544E70}"/>
               </a:ext>
             </a:extLst>
           </p:cNvPr>
@@ -3537,7 +3663,7 @@
           <p:cNvPr id="2" name="">
             <a:extLst xmlns:a="http://schemas.openxmlformats.org/drawingml/2006/main">
               <a:ext uri="{FF2B5EF4-FFF2-40B4-BE49-F238E27FC236}">
-                <a16:creationId xmlns:a16="http://schemas.microsoft.com/office/drawing/2014/main" id="{6312A94F-C273-4BEE-B9FE-11AC2B57953B}"/>
+                <a16:creationId xmlns:a16="http://schemas.microsoft.com/office/drawing/2014/main" id="{B493FE3B-4FFB-4768-9A74-4B4E5A626C93}"/>
               </a:ext>
             </a:extLst>
           </p:cNvPr>
@@ -3587,7 +3713,7 @@
           <p:cNvPr id="3" name="">
             <a:extLst xmlns:a="http://schemas.openxmlformats.org/drawingml/2006/main">
               <a:ext uri="{FF2B5EF4-FFF2-40B4-BE49-F238E27FC236}">
-                <a16:creationId xmlns:a16="http://schemas.microsoft.com/office/drawing/2014/main" id="{EBEC1DAE-30AC-4B83-9111-C74AFA4E3600}"/>
+                <a16:creationId xmlns:a16="http://schemas.microsoft.com/office/drawing/2014/main" id="{950B79B7-8E04-4876-A622-AEA2BFF9DCB4}"/>
               </a:ext>
             </a:extLst>
           </p:cNvPr>
@@ -3626,7 +3752,7 @@
           <p:nvPr/>
         </p:nvPicPr>
         <p:blipFill>
-          <a:blip xmlns:r="http://schemas.openxmlformats.org/officeDocument/2006/relationships" xmlns:a="http://schemas.openxmlformats.org/drawingml/2006/main" r:embed="R904f5982cc054184"/>
+          <a:blip xmlns:r="http://schemas.openxmlformats.org/officeDocument/2006/relationships" xmlns:a="http://schemas.openxmlformats.org/drawingml/2006/main" r:embed="Rd205bdf265774c30"/>
           <a:stretch xmlns:a="http://schemas.openxmlformats.org/drawingml/2006/main"/>
         </p:blipFill>
         <p:spPr>
@@ -3644,7 +3770,7 @@
           <p:cNvPr id="5" name="">
             <a:extLst xmlns:a="http://schemas.openxmlformats.org/drawingml/2006/main">
               <a:ext uri="{FF2B5EF4-FFF2-40B4-BE49-F238E27FC236}">
-                <a16:creationId xmlns:a16="http://schemas.microsoft.com/office/drawing/2014/main" id="{60AA29D9-33AE-4A38-B932-CE380C312566}"/>
+                <a16:creationId xmlns:a16="http://schemas.microsoft.com/office/drawing/2014/main" id="{52D6755A-EA72-432A-8A67-F04EE0EB7C18}"/>
               </a:ext>
             </a:extLst>
           </p:cNvPr>
@@ -3694,7 +3820,7 @@
           <p:cNvPr id="6" name="">
             <a:extLst xmlns:a="http://schemas.openxmlformats.org/drawingml/2006/main">
               <a:ext uri="{FF2B5EF4-FFF2-40B4-BE49-F238E27FC236}">
-                <a16:creationId xmlns:a16="http://schemas.microsoft.com/office/drawing/2014/main" id="{ECACF17E-B070-4BD0-8684-EAE2AF9349DE}"/>
+                <a16:creationId xmlns:a16="http://schemas.microsoft.com/office/drawing/2014/main" id="{C795AD1A-DCCC-4772-A762-235967C0BB5C}"/>
               </a:ext>
             </a:extLst>
           </p:cNvPr>
@@ -3744,7 +3870,7 @@
           <p:cNvPr id="7" name="">
             <a:extLst xmlns:a="http://schemas.openxmlformats.org/drawingml/2006/main">
               <a:ext uri="{FF2B5EF4-FFF2-40B4-BE49-F238E27FC236}">
-                <a16:creationId xmlns:a16="http://schemas.microsoft.com/office/drawing/2014/main" id="{4AA7C600-DBF5-41D8-8509-1E9C7981BE13}"/>
+                <a16:creationId xmlns:a16="http://schemas.microsoft.com/office/drawing/2014/main" id="{5F937485-B4BC-4C65-9DE2-6B6DE76B5420}"/>
               </a:ext>
             </a:extLst>
           </p:cNvPr>
@@ -3794,7 +3920,7 @@
           <p:cNvPr id="8" name="">
             <a:extLst xmlns:a="http://schemas.openxmlformats.org/drawingml/2006/main">
               <a:ext uri="{FF2B5EF4-FFF2-40B4-BE49-F238E27FC236}">
-                <a16:creationId xmlns:a16="http://schemas.microsoft.com/office/drawing/2014/main" id="{68F852B1-CB83-4FE9-AB51-DBE332E7B921}"/>
+                <a16:creationId xmlns:a16="http://schemas.microsoft.com/office/drawing/2014/main" id="{708DB562-E129-4645-A1BB-4BE0C85A4DAE}"/>
               </a:ext>
             </a:extLst>
           </p:cNvPr>
@@ -3842,7 +3968,7 @@
     </p:spTree>
     <p:extLst>
       <p:ext uri="{BB962C8B-B14F-4D97-AF65-F5344CB8AC3E}">
-        <p14:creationId xmlns:p14="http://schemas.microsoft.com/office/powerpoint/2010/main" val="910424356"/>
+        <p14:creationId xmlns:p14="http://schemas.microsoft.com/office/powerpoint/2010/main" val="1359854724"/>
       </p:ext>
     </p:extLst>
   </p:cSld>
@@ -3870,10 +3996,10 @@
       </p:grpSpPr>
       <p:sp>
         <p:nvSpPr>
-          <p:cNvPr id="12" name="">
-            <a:extLst xmlns:a="http://schemas.openxmlformats.org/drawingml/2006/main">
-              <a:ext uri="{FF2B5EF4-FFF2-40B4-BE49-F238E27FC236}">
-                <a16:creationId xmlns:a16="http://schemas.microsoft.com/office/drawing/2014/main" id="{836188FE-90CB-4A27-B381-1AD956EE46DC}"/>
+          <p:cNvPr id="16" name="">
+            <a:extLst xmlns:a="http://schemas.openxmlformats.org/drawingml/2006/main">
+              <a:ext uri="{FF2B5EF4-FFF2-40B4-BE49-F238E27FC236}">
+                <a16:creationId xmlns:a16="http://schemas.microsoft.com/office/drawing/2014/main" id="{AB2DC89D-F5AD-4BE0-8539-A09A028F752D}"/>
               </a:ext>
             </a:extLst>
           </p:cNvPr>
@@ -3913,7 +4039,7 @@
                   <a:srgbClr val="0F172A"/>
                 </a:solidFill>
               </a:rPr>
-              <a:t>Replay-side KV loads missed the deadline in this run</a:t>
+              <a:t>Software prefetch often missed the agent replay deadline</a:t>
             </a:r>
           </a:p>
         </p:txBody>
@@ -3923,7 +4049,7 @@
           <p:cNvPr id="2" name="">
             <a:extLst xmlns:a="http://schemas.openxmlformats.org/drawingml/2006/main">
               <a:ext uri="{FF2B5EF4-FFF2-40B4-BE49-F238E27FC236}">
-                <a16:creationId xmlns:a16="http://schemas.microsoft.com/office/drawing/2014/main" id="{B87C5E26-241B-4EBD-8478-3E89BEB517E6}"/>
+                <a16:creationId xmlns:a16="http://schemas.microsoft.com/office/drawing/2014/main" id="{B8CFC005-2488-4C43-A4D4-8DA48077A7DD}"/>
               </a:ext>
             </a:extLst>
           </p:cNvPr>
@@ -3963,7 +4089,7 @@
                   <a:srgbClr val="64748B"/>
                 </a:solidFill>
               </a:rPr>
-              <a:t>The aggregate view shows whether KV H2D finished before or after replay was due.</a:t>
+              <a:t>Across live prefetch attempts, nearly every hint completed after the agent had already resumed.</a:t>
             </a:r>
           </a:p>
         </p:txBody>
@@ -3973,7 +4099,7 @@
           <p:cNvPr id="3" name="">
             <a:extLst xmlns:a="http://schemas.openxmlformats.org/drawingml/2006/main">
               <a:ext uri="{FF2B5EF4-FFF2-40B4-BE49-F238E27FC236}">
-                <a16:creationId xmlns:a16="http://schemas.microsoft.com/office/drawing/2014/main" id="{C117C6C8-4513-44D6-BA61-040BC00ED473}"/>
+                <a16:creationId xmlns:a16="http://schemas.microsoft.com/office/drawing/2014/main" id="{5F646132-09D9-4A24-A5FD-C9849F83B36C}"/>
               </a:ext>
             </a:extLst>
           </p:cNvPr>
@@ -3985,11 +4111,11 @@
         <p:spPr>
           <a:xfrm xmlns:a="http://schemas.openxmlformats.org/drawingml/2006/main">
             <a:off x="323850" y="1428750"/>
-            <a:ext cx="8724900" cy="3867150"/>
+            <a:ext cx="8572500" cy="3886200"/>
           </a:xfrm>
           <a:prstGeom xmlns:a="http://schemas.openxmlformats.org/drawingml/2006/main" prst="roundRect">
             <a:avLst>
-              <a:gd name="adj" fmla="val 1478"/>
+              <a:gd name="adj" fmla="val 1471"/>
             </a:avLst>
           </a:prstGeom>
           <a:solidFill xmlns:a="http://schemas.openxmlformats.org/drawingml/2006/main">
@@ -4005,20 +4131,20 @@
       </p:sp>
       <p:pic>
         <p:nvPicPr>
-          <p:cNvPr id="15" name=""/>
+          <p:cNvPr id="19" name=""/>
           <p:cNvPicPr>
             <a:picLocks xmlns:a="http://schemas.openxmlformats.org/drawingml/2006/main" noChangeAspect="1"/>
           </p:cNvPicPr>
           <p:nvPr/>
         </p:nvPicPr>
         <p:blipFill>
-          <a:blip xmlns:r="http://schemas.openxmlformats.org/officeDocument/2006/relationships" xmlns:a="http://schemas.openxmlformats.org/drawingml/2006/main" r:embed="R569416af77ed4c3b"/>
+          <a:blip xmlns:r="http://schemas.openxmlformats.org/officeDocument/2006/relationships" xmlns:a="http://schemas.openxmlformats.org/drawingml/2006/main" r:embed="Rd8aac8461c814508"/>
           <a:stretch xmlns:a="http://schemas.openxmlformats.org/drawingml/2006/main"/>
         </p:blipFill>
         <p:spPr>
           <a:xfrm xmlns:a="http://schemas.openxmlformats.org/drawingml/2006/main">
-            <a:off x="400050" y="1795905"/>
-            <a:ext cx="8572500" cy="3132841"/>
+            <a:off x="400050" y="1890170"/>
+            <a:ext cx="8420100" cy="2963361"/>
           </a:xfrm>
           <a:prstGeom xmlns:a="http://schemas.openxmlformats.org/drawingml/2006/main" prst="rect">
             <a:avLst/>
@@ -4030,23 +4156,23 @@
           <p:cNvPr id="5" name="">
             <a:extLst xmlns:a="http://schemas.openxmlformats.org/drawingml/2006/main">
               <a:ext uri="{FF2B5EF4-FFF2-40B4-BE49-F238E27FC236}">
-                <a16:creationId xmlns:a16="http://schemas.microsoft.com/office/drawing/2014/main" id="{90792A0B-0123-47FF-8221-95836A8E622E}"/>
-              </a:ext>
-            </a:extLst>
-          </p:cNvPr>
-          <p:cNvSpPr>
-            <a:spLocks xmlns:a="http://schemas.openxmlformats.org/drawingml/2006/main" noGrp="1"/>
-          </p:cNvSpPr>
-          <p:nvPr/>
-        </p:nvSpPr>
-        <p:spPr>
-          <a:xfrm xmlns:a="http://schemas.openxmlformats.org/drawingml/2006/main">
-            <a:off x="9258300" y="1847850"/>
-            <a:ext cx="2095500" cy="1104900"/>
+                <a16:creationId xmlns:a16="http://schemas.microsoft.com/office/drawing/2014/main" id="{DAEFECA4-A6EB-4280-AA42-E6BAD723BACB}"/>
+              </a:ext>
+            </a:extLst>
+          </p:cNvPr>
+          <p:cNvSpPr>
+            <a:spLocks xmlns:a="http://schemas.openxmlformats.org/drawingml/2006/main" noGrp="1"/>
+          </p:cNvSpPr>
+          <p:nvPr/>
+        </p:nvSpPr>
+        <p:spPr>
+          <a:xfrm xmlns:a="http://schemas.openxmlformats.org/drawingml/2006/main">
+            <a:off x="9124950" y="1600200"/>
+            <a:ext cx="2228850" cy="1295400"/>
           </a:xfrm>
           <a:prstGeom xmlns:a="http://schemas.openxmlformats.org/drawingml/2006/main" prst="roundRect">
             <a:avLst>
-              <a:gd name="adj" fmla="val 5172"/>
+              <a:gd name="adj" fmla="val 4412"/>
             </a:avLst>
           </a:prstGeom>
           <a:solidFill xmlns:a="http://schemas.openxmlformats.org/drawingml/2006/main">
@@ -4065,19 +4191,19 @@
           <p:cNvPr id="6" name="">
             <a:extLst xmlns:a="http://schemas.openxmlformats.org/drawingml/2006/main">
               <a:ext uri="{FF2B5EF4-FFF2-40B4-BE49-F238E27FC236}">
-                <a16:creationId xmlns:a16="http://schemas.microsoft.com/office/drawing/2014/main" id="{2FE54ECA-C630-47F5-94F7-80416BE380D9}"/>
-              </a:ext>
-            </a:extLst>
-          </p:cNvPr>
-          <p:cNvSpPr>
-            <a:spLocks xmlns:a="http://schemas.openxmlformats.org/drawingml/2006/main" noGrp="1"/>
-          </p:cNvSpPr>
-          <p:nvPr/>
-        </p:nvSpPr>
-        <p:spPr>
-          <a:xfrm xmlns:a="http://schemas.openxmlformats.org/drawingml/2006/main">
-            <a:off x="9505950" y="2076450"/>
-            <a:ext cx="1600200" cy="476250"/>
+                <a16:creationId xmlns:a16="http://schemas.microsoft.com/office/drawing/2014/main" id="{630A0F74-3141-49BF-81A1-E2A2FFBDA679}"/>
+              </a:ext>
+            </a:extLst>
+          </p:cNvPr>
+          <p:cNvSpPr>
+            <a:spLocks xmlns:a="http://schemas.openxmlformats.org/drawingml/2006/main" noGrp="1"/>
+          </p:cNvSpPr>
+          <p:nvPr/>
+        </p:nvSpPr>
+        <p:spPr>
+          <a:xfrm xmlns:a="http://schemas.openxmlformats.org/drawingml/2006/main">
+            <a:off x="9296400" y="1809750"/>
+            <a:ext cx="1885950" cy="438150"/>
           </a:xfrm>
           <a:prstGeom xmlns:a="http://schemas.openxmlformats.org/drawingml/2006/main" prst="rect">
             <a:avLst/>
@@ -4093,19 +4219,19 @@
           <a:lstStyle xmlns:a="http://schemas.openxmlformats.org/drawingml/2006/main"/>
           <a:p xmlns:a="http://schemas.openxmlformats.org/drawingml/2006/main">
             <a:pPr algn="ctr">
-              <a:defRPr sz="3600" b="1">
+              <a:defRPr sz="2700" b="1">
                 <a:solidFill>
                   <a:srgbClr val="B91C1C"/>
                 </a:solidFill>
               </a:defRPr>
             </a:pPr>
             <a:r>
-              <a:rPr sz="3600" b="1">
+              <a:rPr sz="2700" b="1">
                 <a:solidFill>
                   <a:srgbClr val="B91C1C"/>
                 </a:solidFill>
               </a:rPr>
-              <a:t>8 / 8</a:t>
+              <a:t>112 of 114</a:t>
             </a:r>
           </a:p>
         </p:txBody>
@@ -4115,19 +4241,204 @@
           <p:cNvPr id="7" name="">
             <a:extLst xmlns:a="http://schemas.openxmlformats.org/drawingml/2006/main">
               <a:ext uri="{FF2B5EF4-FFF2-40B4-BE49-F238E27FC236}">
-                <a16:creationId xmlns:a16="http://schemas.microsoft.com/office/drawing/2014/main" id="{97F3314B-0F90-4F2A-AAA5-9570C38859E1}"/>
-              </a:ext>
-            </a:extLst>
-          </p:cNvPr>
-          <p:cNvSpPr>
-            <a:spLocks xmlns:a="http://schemas.openxmlformats.org/drawingml/2006/main" noGrp="1"/>
-          </p:cNvSpPr>
-          <p:nvPr/>
-        </p:nvSpPr>
-        <p:spPr>
-          <a:xfrm xmlns:a="http://schemas.openxmlformats.org/drawingml/2006/main">
-            <a:off x="9505950" y="2628900"/>
-            <a:ext cx="1600200" cy="266700"/>
+                <a16:creationId xmlns:a16="http://schemas.microsoft.com/office/drawing/2014/main" id="{24B4DBF1-0DBE-441B-A570-748E3F755D4C}"/>
+              </a:ext>
+            </a:extLst>
+          </p:cNvPr>
+          <p:cNvSpPr>
+            <a:spLocks xmlns:a="http://schemas.openxmlformats.org/drawingml/2006/main" noGrp="1"/>
+          </p:cNvSpPr>
+          <p:nvPr/>
+        </p:nvSpPr>
+        <p:spPr>
+          <a:xfrm xmlns:a="http://schemas.openxmlformats.org/drawingml/2006/main">
+            <a:off x="9353550" y="2324100"/>
+            <a:ext cx="1771650" cy="228600"/>
+          </a:xfrm>
+          <a:prstGeom xmlns:a="http://schemas.openxmlformats.org/drawingml/2006/main" prst="rect">
+            <a:avLst/>
+          </a:prstGeom>
+          <a:noFill xmlns:a="http://schemas.openxmlformats.org/drawingml/2006/main"/>
+          <a:ln xmlns:a="http://schemas.openxmlformats.org/drawingml/2006/main" w="0">
+            <a:noFill/>
+            <a:prstDash val="solid"/>
+          </a:ln>
+        </p:spPr>
+        <p:txBody>
+          <a:bodyPr xmlns:a="http://schemas.openxmlformats.org/drawingml/2006/main" anchor="t"/>
+          <a:lstStyle xmlns:a="http://schemas.openxmlformats.org/drawingml/2006/main"/>
+          <a:p xmlns:a="http://schemas.openxmlformats.org/drawingml/2006/main">
+            <a:pPr algn="ctr">
+              <a:defRPr sz="1350" b="0">
+                <a:solidFill>
+                  <a:srgbClr val="334155"/>
+                </a:solidFill>
+              </a:defRPr>
+            </a:pPr>
+            <a:r>
+              <a:rPr sz="1350" b="0">
+                <a:solidFill>
+                  <a:srgbClr val="334155"/>
+                </a:solidFill>
+              </a:rPr>
+              <a:t>prefetch attempts</a:t>
+            </a:r>
+          </a:p>
+        </p:txBody>
+      </p:sp>
+      <p:sp>
+        <p:nvSpPr>
+          <p:cNvPr id="8" name="">
+            <a:extLst xmlns:a="http://schemas.openxmlformats.org/drawingml/2006/main">
+              <a:ext uri="{FF2B5EF4-FFF2-40B4-BE49-F238E27FC236}">
+                <a16:creationId xmlns:a16="http://schemas.microsoft.com/office/drawing/2014/main" id="{48355EA9-4C13-40C2-87B6-973A4FA0269D}"/>
+              </a:ext>
+            </a:extLst>
+          </p:cNvPr>
+          <p:cNvSpPr>
+            <a:spLocks xmlns:a="http://schemas.openxmlformats.org/drawingml/2006/main" noGrp="1"/>
+          </p:cNvSpPr>
+          <p:nvPr/>
+        </p:nvSpPr>
+        <p:spPr>
+          <a:xfrm xmlns:a="http://schemas.openxmlformats.org/drawingml/2006/main">
+            <a:off x="9353550" y="2571750"/>
+            <a:ext cx="1771650" cy="228600"/>
+          </a:xfrm>
+          <a:prstGeom xmlns:a="http://schemas.openxmlformats.org/drawingml/2006/main" prst="rect">
+            <a:avLst/>
+          </a:prstGeom>
+          <a:noFill xmlns:a="http://schemas.openxmlformats.org/drawingml/2006/main"/>
+          <a:ln xmlns:a="http://schemas.openxmlformats.org/drawingml/2006/main" w="0">
+            <a:noFill/>
+            <a:prstDash val="solid"/>
+          </a:ln>
+        </p:spPr>
+        <p:txBody>
+          <a:bodyPr xmlns:a="http://schemas.openxmlformats.org/drawingml/2006/main" anchor="t"/>
+          <a:lstStyle xmlns:a="http://schemas.openxmlformats.org/drawingml/2006/main"/>
+          <a:p xmlns:a="http://schemas.openxmlformats.org/drawingml/2006/main">
+            <a:pPr algn="ctr">
+              <a:defRPr sz="1350" b="0">
+                <a:solidFill>
+                  <a:srgbClr val="334155"/>
+                </a:solidFill>
+              </a:defRPr>
+            </a:pPr>
+            <a:r>
+              <a:rPr sz="1350" b="0">
+                <a:solidFill>
+                  <a:srgbClr val="334155"/>
+                </a:solidFill>
+              </a:rPr>
+              <a:t>were late</a:t>
+            </a:r>
+          </a:p>
+        </p:txBody>
+      </p:sp>
+      <p:sp>
+        <p:nvSpPr>
+          <p:cNvPr id="9" name="">
+            <a:extLst xmlns:a="http://schemas.openxmlformats.org/drawingml/2006/main">
+              <a:ext uri="{FF2B5EF4-FFF2-40B4-BE49-F238E27FC236}">
+                <a16:creationId xmlns:a16="http://schemas.microsoft.com/office/drawing/2014/main" id="{21517459-C31F-4DFD-912F-D56AB4829B27}"/>
+              </a:ext>
+            </a:extLst>
+          </p:cNvPr>
+          <p:cNvSpPr>
+            <a:spLocks xmlns:a="http://schemas.openxmlformats.org/drawingml/2006/main" noGrp="1"/>
+          </p:cNvSpPr>
+          <p:nvPr/>
+        </p:nvSpPr>
+        <p:spPr>
+          <a:xfrm xmlns:a="http://schemas.openxmlformats.org/drawingml/2006/main">
+            <a:off x="9124950" y="3143250"/>
+            <a:ext cx="2228850" cy="1066800"/>
+          </a:xfrm>
+          <a:prstGeom xmlns:a="http://schemas.openxmlformats.org/drawingml/2006/main" prst="roundRect">
+            <a:avLst>
+              <a:gd name="adj" fmla="val 5357"/>
+            </a:avLst>
+          </a:prstGeom>
+          <a:solidFill xmlns:a="http://schemas.openxmlformats.org/drawingml/2006/main">
+            <a:srgbClr val="FFF7ED"/>
+          </a:solidFill>
+          <a:ln xmlns:a="http://schemas.openxmlformats.org/drawingml/2006/main" w="9525">
+            <a:solidFill>
+              <a:srgbClr val="FED7AA"/>
+            </a:solidFill>
+            <a:prstDash val="solid"/>
+          </a:ln>
+        </p:spPr>
+      </p:sp>
+      <p:sp>
+        <p:nvSpPr>
+          <p:cNvPr id="10" name="">
+            <a:extLst xmlns:a="http://schemas.openxmlformats.org/drawingml/2006/main">
+              <a:ext uri="{FF2B5EF4-FFF2-40B4-BE49-F238E27FC236}">
+                <a16:creationId xmlns:a16="http://schemas.microsoft.com/office/drawing/2014/main" id="{CC2AB3B5-2F41-4374-9EEF-154ADC9DB725}"/>
+              </a:ext>
+            </a:extLst>
+          </p:cNvPr>
+          <p:cNvSpPr>
+            <a:spLocks xmlns:a="http://schemas.openxmlformats.org/drawingml/2006/main" noGrp="1"/>
+          </p:cNvSpPr>
+          <p:nvPr/>
+        </p:nvSpPr>
+        <p:spPr>
+          <a:xfrm xmlns:a="http://schemas.openxmlformats.org/drawingml/2006/main">
+            <a:off x="9353550" y="3333750"/>
+            <a:ext cx="1771650" cy="419100"/>
+          </a:xfrm>
+          <a:prstGeom xmlns:a="http://schemas.openxmlformats.org/drawingml/2006/main" prst="rect">
+            <a:avLst/>
+          </a:prstGeom>
+          <a:noFill xmlns:a="http://schemas.openxmlformats.org/drawingml/2006/main"/>
+          <a:ln xmlns:a="http://schemas.openxmlformats.org/drawingml/2006/main" w="0">
+            <a:noFill/>
+            <a:prstDash val="solid"/>
+          </a:ln>
+        </p:spPr>
+        <p:txBody>
+          <a:bodyPr xmlns:a="http://schemas.openxmlformats.org/drawingml/2006/main" anchor="t"/>
+          <a:lstStyle xmlns:a="http://schemas.openxmlformats.org/drawingml/2006/main"/>
+          <a:p xmlns:a="http://schemas.openxmlformats.org/drawingml/2006/main">
+            <a:pPr algn="ctr">
+              <a:defRPr sz="3000" b="1">
+                <a:solidFill>
+                  <a:srgbClr val="C2410C"/>
+                </a:solidFill>
+              </a:defRPr>
+            </a:pPr>
+            <a:r>
+              <a:rPr sz="3000" b="1">
+                <a:solidFill>
+                  <a:srgbClr val="C2410C"/>
+                </a:solidFill>
+              </a:rPr>
+              <a:t>98.25%</a:t>
+            </a:r>
+          </a:p>
+        </p:txBody>
+      </p:sp>
+      <p:sp>
+        <p:nvSpPr>
+          <p:cNvPr id="11" name="">
+            <a:extLst xmlns:a="http://schemas.openxmlformats.org/drawingml/2006/main">
+              <a:ext uri="{FF2B5EF4-FFF2-40B4-BE49-F238E27FC236}">
+                <a16:creationId xmlns:a16="http://schemas.microsoft.com/office/drawing/2014/main" id="{9BCC6BA4-2D5E-4772-B54E-872AD8CDCCDC}"/>
+              </a:ext>
+            </a:extLst>
+          </p:cNvPr>
+          <p:cNvSpPr>
+            <a:spLocks xmlns:a="http://schemas.openxmlformats.org/drawingml/2006/main" noGrp="1"/>
+          </p:cNvSpPr>
+          <p:nvPr/>
+        </p:nvSpPr>
+        <p:spPr>
+          <a:xfrm xmlns:a="http://schemas.openxmlformats.org/drawingml/2006/main">
+            <a:off x="9353550" y="3829050"/>
+            <a:ext cx="1771650" cy="285750"/>
           </a:xfrm>
           <a:prstGeom xmlns:a="http://schemas.openxmlformats.org/drawingml/2006/main" prst="rect">
             <a:avLst/>
@@ -4155,29 +4466,29 @@
                   <a:srgbClr val="334155"/>
                 </a:solidFill>
               </a:rPr>
-              <a:t>H2D loads finished late</a:t>
-            </a:r>
-          </a:p>
-        </p:txBody>
-      </p:sp>
-      <p:sp>
-        <p:nvSpPr>
-          <p:cNvPr id="8" name="">
-            <a:extLst xmlns:a="http://schemas.openxmlformats.org/drawingml/2006/main">
-              <a:ext uri="{FF2B5EF4-FFF2-40B4-BE49-F238E27FC236}">
-                <a16:creationId xmlns:a16="http://schemas.microsoft.com/office/drawing/2014/main" id="{8F4B3A82-B3CB-4F20-BE6A-D0DFB1CBFB16}"/>
-              </a:ext>
-            </a:extLst>
-          </p:cNvPr>
-          <p:cNvSpPr>
-            <a:spLocks xmlns:a="http://schemas.openxmlformats.org/drawingml/2006/main" noGrp="1"/>
-          </p:cNvSpPr>
-          <p:nvPr/>
-        </p:nvSpPr>
-        <p:spPr>
-          <a:xfrm xmlns:a="http://schemas.openxmlformats.org/drawingml/2006/main">
-            <a:off x="9258300" y="3524250"/>
-            <a:ext cx="2095500" cy="742950"/>
+              <a:t>missed replay due deadline</a:t>
+            </a:r>
+          </a:p>
+        </p:txBody>
+      </p:sp>
+      <p:sp>
+        <p:nvSpPr>
+          <p:cNvPr id="12" name="">
+            <a:extLst xmlns:a="http://schemas.openxmlformats.org/drawingml/2006/main">
+              <a:ext uri="{FF2B5EF4-FFF2-40B4-BE49-F238E27FC236}">
+                <a16:creationId xmlns:a16="http://schemas.microsoft.com/office/drawing/2014/main" id="{C2CCD508-2D55-4BA3-9A16-94D2FAB9249E}"/>
+              </a:ext>
+            </a:extLst>
+          </p:cNvPr>
+          <p:cNvSpPr>
+            <a:spLocks xmlns:a="http://schemas.openxmlformats.org/drawingml/2006/main" noGrp="1"/>
+          </p:cNvSpPr>
+          <p:nvPr/>
+        </p:nvSpPr>
+        <p:spPr>
+          <a:xfrm xmlns:a="http://schemas.openxmlformats.org/drawingml/2006/main">
+            <a:off x="9124950" y="4514850"/>
+            <a:ext cx="2247900" cy="685800"/>
           </a:xfrm>
           <a:prstGeom xmlns:a="http://schemas.openxmlformats.org/drawingml/2006/main" prst="rect">
             <a:avLst/>
@@ -4193,29 +4504,29 @@
           <a:lstStyle xmlns:a="http://schemas.openxmlformats.org/drawingml/2006/main"/>
           <a:p xmlns:a="http://schemas.openxmlformats.org/drawingml/2006/main">
             <a:pPr algn="l">
-              <a:defRPr sz="1575" b="0">
+              <a:defRPr sz="1500" b="0">
                 <a:solidFill>
                   <a:srgbClr val="334155"/>
                 </a:solidFill>
               </a:defRPr>
             </a:pPr>
             <a:r>
-              <a:rPr sz="1575" b="0">
+              <a:rPr sz="1500" b="0">
                 <a:solidFill>
                   <a:srgbClr val="334155"/>
                 </a:solidFill>
               </a:rPr>
-              <a:t>All visible replay-side KV loads finished below the 0 ms deadline line.</a:t>
-            </a:r>
-          </a:p>
-        </p:txBody>
-      </p:sp>
-      <p:sp>
-        <p:nvSpPr>
-          <p:cNvPr id="9" name="">
-            <a:extLst xmlns:a="http://schemas.openxmlformats.org/drawingml/2006/main">
-              <a:ext uri="{FF2B5EF4-FFF2-40B4-BE49-F238E27FC236}">
-                <a16:creationId xmlns:a16="http://schemas.microsoft.com/office/drawing/2014/main" id="{8E81CAC6-A636-46AE-B27D-9D6BD94352AB}"/>
+              <a:t>This shows that semantic knowledge alone is not enough if the movement path cannot act on hints predictably.</a:t>
+            </a:r>
+          </a:p>
+        </p:txBody>
+      </p:sp>
+      <p:sp>
+        <p:nvSpPr>
+          <p:cNvPr id="13" name="">
+            <a:extLst xmlns:a="http://schemas.openxmlformats.org/drawingml/2006/main">
+              <a:ext uri="{FF2B5EF4-FFF2-40B4-BE49-F238E27FC236}">
+                <a16:creationId xmlns:a16="http://schemas.microsoft.com/office/drawing/2014/main" id="{F32D7477-79BE-488A-AE55-6CC1F7610B93}"/>
               </a:ext>
             </a:extLst>
           </p:cNvPr>
@@ -4255,17 +4566,17 @@
                   <a:srgbClr val="64748B"/>
                 </a:solidFill>
               </a:rPr>
-              <a:t>Source: latest_master_report.html, Global Replay H2D Readiness</a:t>
-            </a:r>
-          </a:p>
-        </p:txBody>
-      </p:sp>
-      <p:sp>
-        <p:nvSpPr>
-          <p:cNvPr id="10" name="">
-            <a:extLst xmlns:a="http://schemas.openxmlformats.org/drawingml/2006/main">
-              <a:ext uri="{FF2B5EF4-FFF2-40B4-BE49-F238E27FC236}">
-                <a16:creationId xmlns:a16="http://schemas.microsoft.com/office/drawing/2014/main" id="{495E486E-DFBA-4005-8F65-E8B5E87301F2}"/>
+              <a:t>Source: backups/latest_master_report-1.html, Global Prefetch Margin</a:t>
+            </a:r>
+          </a:p>
+        </p:txBody>
+      </p:sp>
+      <p:sp>
+        <p:nvSpPr>
+          <p:cNvPr id="14" name="">
+            <a:extLst xmlns:a="http://schemas.openxmlformats.org/drawingml/2006/main">
+              <a:ext uri="{FF2B5EF4-FFF2-40B4-BE49-F238E27FC236}">
+                <a16:creationId xmlns:a16="http://schemas.microsoft.com/office/drawing/2014/main" id="{113422D1-3A7B-4DC6-9436-92AFF1C23ACA}"/>
               </a:ext>
             </a:extLst>
           </p:cNvPr>
@@ -4312,10 +4623,10 @@
       </p:sp>
       <p:sp>
         <p:nvSpPr>
-          <p:cNvPr id="11" name="">
-            <a:extLst xmlns:a="http://schemas.openxmlformats.org/drawingml/2006/main">
-              <a:ext uri="{FF2B5EF4-FFF2-40B4-BE49-F238E27FC236}">
-                <a16:creationId xmlns:a16="http://schemas.microsoft.com/office/drawing/2014/main" id="{D229F21F-B13D-423C-BD8B-1D71BD3347C9}"/>
+          <p:cNvPr id="15" name="">
+            <a:extLst xmlns:a="http://schemas.openxmlformats.org/drawingml/2006/main">
+              <a:ext uri="{FF2B5EF4-FFF2-40B4-BE49-F238E27FC236}">
+                <a16:creationId xmlns:a16="http://schemas.microsoft.com/office/drawing/2014/main" id="{390EF232-7664-4AFE-A323-CD44E0C519C8}"/>
               </a:ext>
             </a:extLst>
           </p:cNvPr>
@@ -4363,7 +4674,7 @@
     </p:spTree>
     <p:extLst>
       <p:ext uri="{BB962C8B-B14F-4D97-AF65-F5344CB8AC3E}">
-        <p14:creationId xmlns:p14="http://schemas.microsoft.com/office/powerpoint/2010/main" val="70773192"/>
+        <p14:creationId xmlns:p14="http://schemas.microsoft.com/office/powerpoint/2010/main" val="1853662573"/>
       </p:ext>
     </p:extLst>
   </p:cSld>
@@ -4391,10 +4702,10 @@
       </p:grpSpPr>
       <p:sp>
         <p:nvSpPr>
-          <p:cNvPr id="9" name="">
-            <a:extLst xmlns:a="http://schemas.openxmlformats.org/drawingml/2006/main">
-              <a:ext uri="{FF2B5EF4-FFF2-40B4-BE49-F238E27FC236}">
-                <a16:creationId xmlns:a16="http://schemas.microsoft.com/office/drawing/2014/main" id="{44749EED-AAFA-4359-A1A6-2D727E5F9620}"/>
+          <p:cNvPr id="12" name="">
+            <a:extLst xmlns:a="http://schemas.openxmlformats.org/drawingml/2006/main">
+              <a:ext uri="{FF2B5EF4-FFF2-40B4-BE49-F238E27FC236}">
+                <a16:creationId xmlns:a16="http://schemas.microsoft.com/office/drawing/2014/main" id="{5534C85D-6057-4C88-9AF6-4E72E7179DF7}"/>
               </a:ext>
             </a:extLst>
           </p:cNvPr>
@@ -4434,7 +4745,7 @@
                   <a:srgbClr val="0F172A"/>
                 </a:solidFill>
               </a:rPr>
-              <a:t>The delay is not just copy time</a:t>
+              <a:t>Replay-side KV loads missed the deadline in this run</a:t>
             </a:r>
           </a:p>
         </p:txBody>
@@ -4444,7 +4755,7 @@
           <p:cNvPr id="2" name="">
             <a:extLst xmlns:a="http://schemas.openxmlformats.org/drawingml/2006/main">
               <a:ext uri="{FF2B5EF4-FFF2-40B4-BE49-F238E27FC236}">
-                <a16:creationId xmlns:a16="http://schemas.microsoft.com/office/drawing/2014/main" id="{B163D638-3F9A-42F4-BF35-5ACCD656D1F7}"/>
+                <a16:creationId xmlns:a16="http://schemas.microsoft.com/office/drawing/2014/main" id="{86799D49-2C48-4D81-A49C-E339934F262C}"/>
               </a:ext>
             </a:extLst>
           </p:cNvPr>
@@ -4484,7 +4795,7 @@
                   <a:srgbClr val="64748B"/>
                 </a:solidFill>
               </a:rPr>
-              <a:t>The request enters normal software/runtime scheduling before visible KV H2D begins.</a:t>
+              <a:t>The aggregate view shows whether KV H2D finished before or after replay was due.</a:t>
             </a:r>
           </a:p>
         </p:txBody>
@@ -4494,23 +4805,23 @@
           <p:cNvPr id="3" name="">
             <a:extLst xmlns:a="http://schemas.openxmlformats.org/drawingml/2006/main">
               <a:ext uri="{FF2B5EF4-FFF2-40B4-BE49-F238E27FC236}">
-                <a16:creationId xmlns:a16="http://schemas.microsoft.com/office/drawing/2014/main" id="{689E3C96-1CAE-4F4A-B014-9ACD151D0297}"/>
-              </a:ext>
-            </a:extLst>
-          </p:cNvPr>
-          <p:cNvSpPr>
-            <a:spLocks xmlns:a="http://schemas.openxmlformats.org/drawingml/2006/main" noGrp="1"/>
-          </p:cNvSpPr>
-          <p:nvPr/>
-        </p:nvSpPr>
-        <p:spPr>
-          <a:xfrm xmlns:a="http://schemas.openxmlformats.org/drawingml/2006/main">
-            <a:off x="323850" y="1333500"/>
-            <a:ext cx="10820400" cy="4343400"/>
+                <a16:creationId xmlns:a16="http://schemas.microsoft.com/office/drawing/2014/main" id="{23F3C2D0-CCA3-4772-8CF8-0D091A9C4F66}"/>
+              </a:ext>
+            </a:extLst>
+          </p:cNvPr>
+          <p:cNvSpPr>
+            <a:spLocks xmlns:a="http://schemas.openxmlformats.org/drawingml/2006/main" noGrp="1"/>
+          </p:cNvSpPr>
+          <p:nvPr/>
+        </p:nvSpPr>
+        <p:spPr>
+          <a:xfrm xmlns:a="http://schemas.openxmlformats.org/drawingml/2006/main">
+            <a:off x="323850" y="1428750"/>
+            <a:ext cx="8724900" cy="3867150"/>
           </a:xfrm>
           <a:prstGeom xmlns:a="http://schemas.openxmlformats.org/drawingml/2006/main" prst="roundRect">
             <a:avLst>
-              <a:gd name="adj" fmla="val 1316"/>
+              <a:gd name="adj" fmla="val 1478"/>
             </a:avLst>
           </a:prstGeom>
           <a:solidFill xmlns:a="http://schemas.openxmlformats.org/drawingml/2006/main">
@@ -4526,20 +4837,20 @@
       </p:sp>
       <p:pic>
         <p:nvPicPr>
-          <p:cNvPr id="12" name=""/>
+          <p:cNvPr id="15" name=""/>
           <p:cNvPicPr>
             <a:picLocks xmlns:a="http://schemas.openxmlformats.org/drawingml/2006/main" noChangeAspect="1"/>
           </p:cNvPicPr>
           <p:nvPr/>
         </p:nvPicPr>
         <p:blipFill>
-          <a:blip xmlns:r="http://schemas.openxmlformats.org/officeDocument/2006/relationships" xmlns:a="http://schemas.openxmlformats.org/drawingml/2006/main" r:embed="R483368439f72412f"/>
+          <a:blip xmlns:r="http://schemas.openxmlformats.org/officeDocument/2006/relationships" xmlns:a="http://schemas.openxmlformats.org/drawingml/2006/main" r:embed="Rd0e0a79e4b864b1d"/>
           <a:stretch xmlns:a="http://schemas.openxmlformats.org/drawingml/2006/main"/>
         </p:blipFill>
         <p:spPr>
           <a:xfrm xmlns:a="http://schemas.openxmlformats.org/drawingml/2006/main">
-            <a:off x="1247835" y="1409700"/>
-            <a:ext cx="8972430" cy="4191000"/>
+            <a:off x="400050" y="1795905"/>
+            <a:ext cx="8572500" cy="3132841"/>
           </a:xfrm>
           <a:prstGeom xmlns:a="http://schemas.openxmlformats.org/drawingml/2006/main" prst="rect">
             <a:avLst/>
@@ -4551,19 +4862,154 @@
           <p:cNvPr id="5" name="">
             <a:extLst xmlns:a="http://schemas.openxmlformats.org/drawingml/2006/main">
               <a:ext uri="{FF2B5EF4-FFF2-40B4-BE49-F238E27FC236}">
-                <a16:creationId xmlns:a16="http://schemas.microsoft.com/office/drawing/2014/main" id="{46F4E18E-174D-4B0B-A9A4-161FD760894A}"/>
-              </a:ext>
-            </a:extLst>
-          </p:cNvPr>
-          <p:cNvSpPr>
-            <a:spLocks xmlns:a="http://schemas.openxmlformats.org/drawingml/2006/main" noGrp="1"/>
-          </p:cNvSpPr>
-          <p:nvPr/>
-        </p:nvSpPr>
-        <p:spPr>
-          <a:xfrm xmlns:a="http://schemas.openxmlformats.org/drawingml/2006/main">
-            <a:off x="685800" y="5791200"/>
-            <a:ext cx="9906000" cy="228600"/>
+                <a16:creationId xmlns:a16="http://schemas.microsoft.com/office/drawing/2014/main" id="{09EB8D9C-DBE0-4610-9A70-682BB6E8C8CF}"/>
+              </a:ext>
+            </a:extLst>
+          </p:cNvPr>
+          <p:cNvSpPr>
+            <a:spLocks xmlns:a="http://schemas.openxmlformats.org/drawingml/2006/main" noGrp="1"/>
+          </p:cNvSpPr>
+          <p:nvPr/>
+        </p:nvSpPr>
+        <p:spPr>
+          <a:xfrm xmlns:a="http://schemas.openxmlformats.org/drawingml/2006/main">
+            <a:off x="9258300" y="1847850"/>
+            <a:ext cx="2095500" cy="1104900"/>
+          </a:xfrm>
+          <a:prstGeom xmlns:a="http://schemas.openxmlformats.org/drawingml/2006/main" prst="roundRect">
+            <a:avLst>
+              <a:gd name="adj" fmla="val 5172"/>
+            </a:avLst>
+          </a:prstGeom>
+          <a:solidFill xmlns:a="http://schemas.openxmlformats.org/drawingml/2006/main">
+            <a:srgbClr val="FEF2F2"/>
+          </a:solidFill>
+          <a:ln xmlns:a="http://schemas.openxmlformats.org/drawingml/2006/main" w="9525">
+            <a:solidFill>
+              <a:srgbClr val="FECACA"/>
+            </a:solidFill>
+            <a:prstDash val="solid"/>
+          </a:ln>
+        </p:spPr>
+      </p:sp>
+      <p:sp>
+        <p:nvSpPr>
+          <p:cNvPr id="6" name="">
+            <a:extLst xmlns:a="http://schemas.openxmlformats.org/drawingml/2006/main">
+              <a:ext uri="{FF2B5EF4-FFF2-40B4-BE49-F238E27FC236}">
+                <a16:creationId xmlns:a16="http://schemas.microsoft.com/office/drawing/2014/main" id="{32DBEFC6-75E3-4F15-8AA6-15842CAFCF79}"/>
+              </a:ext>
+            </a:extLst>
+          </p:cNvPr>
+          <p:cNvSpPr>
+            <a:spLocks xmlns:a="http://schemas.openxmlformats.org/drawingml/2006/main" noGrp="1"/>
+          </p:cNvSpPr>
+          <p:nvPr/>
+        </p:nvSpPr>
+        <p:spPr>
+          <a:xfrm xmlns:a="http://schemas.openxmlformats.org/drawingml/2006/main">
+            <a:off x="9505950" y="2076450"/>
+            <a:ext cx="1600200" cy="476250"/>
+          </a:xfrm>
+          <a:prstGeom xmlns:a="http://schemas.openxmlformats.org/drawingml/2006/main" prst="rect">
+            <a:avLst/>
+          </a:prstGeom>
+          <a:noFill xmlns:a="http://schemas.openxmlformats.org/drawingml/2006/main"/>
+          <a:ln xmlns:a="http://schemas.openxmlformats.org/drawingml/2006/main" w="0">
+            <a:noFill/>
+            <a:prstDash val="solid"/>
+          </a:ln>
+        </p:spPr>
+        <p:txBody>
+          <a:bodyPr xmlns:a="http://schemas.openxmlformats.org/drawingml/2006/main" anchor="t"/>
+          <a:lstStyle xmlns:a="http://schemas.openxmlformats.org/drawingml/2006/main"/>
+          <a:p xmlns:a="http://schemas.openxmlformats.org/drawingml/2006/main">
+            <a:pPr algn="ctr">
+              <a:defRPr sz="3600" b="1">
+                <a:solidFill>
+                  <a:srgbClr val="B91C1C"/>
+                </a:solidFill>
+              </a:defRPr>
+            </a:pPr>
+            <a:r>
+              <a:rPr sz="3600" b="1">
+                <a:solidFill>
+                  <a:srgbClr val="B91C1C"/>
+                </a:solidFill>
+              </a:rPr>
+              <a:t>8 / 8</a:t>
+            </a:r>
+          </a:p>
+        </p:txBody>
+      </p:sp>
+      <p:sp>
+        <p:nvSpPr>
+          <p:cNvPr id="7" name="">
+            <a:extLst xmlns:a="http://schemas.openxmlformats.org/drawingml/2006/main">
+              <a:ext uri="{FF2B5EF4-FFF2-40B4-BE49-F238E27FC236}">
+                <a16:creationId xmlns:a16="http://schemas.microsoft.com/office/drawing/2014/main" id="{20E4A944-32A2-42B0-8057-20678AF1C78C}"/>
+              </a:ext>
+            </a:extLst>
+          </p:cNvPr>
+          <p:cNvSpPr>
+            <a:spLocks xmlns:a="http://schemas.openxmlformats.org/drawingml/2006/main" noGrp="1"/>
+          </p:cNvSpPr>
+          <p:nvPr/>
+        </p:nvSpPr>
+        <p:spPr>
+          <a:xfrm xmlns:a="http://schemas.openxmlformats.org/drawingml/2006/main">
+            <a:off x="9505950" y="2628900"/>
+            <a:ext cx="1600200" cy="266700"/>
+          </a:xfrm>
+          <a:prstGeom xmlns:a="http://schemas.openxmlformats.org/drawingml/2006/main" prst="rect">
+            <a:avLst/>
+          </a:prstGeom>
+          <a:noFill xmlns:a="http://schemas.openxmlformats.org/drawingml/2006/main"/>
+          <a:ln xmlns:a="http://schemas.openxmlformats.org/drawingml/2006/main" w="0">
+            <a:noFill/>
+            <a:prstDash val="solid"/>
+          </a:ln>
+        </p:spPr>
+        <p:txBody>
+          <a:bodyPr xmlns:a="http://schemas.openxmlformats.org/drawingml/2006/main" anchor="t"/>
+          <a:lstStyle xmlns:a="http://schemas.openxmlformats.org/drawingml/2006/main"/>
+          <a:p xmlns:a="http://schemas.openxmlformats.org/drawingml/2006/main">
+            <a:pPr algn="ctr">
+              <a:defRPr sz="1275" b="0">
+                <a:solidFill>
+                  <a:srgbClr val="334155"/>
+                </a:solidFill>
+              </a:defRPr>
+            </a:pPr>
+            <a:r>
+              <a:rPr sz="1275" b="0">
+                <a:solidFill>
+                  <a:srgbClr val="334155"/>
+                </a:solidFill>
+              </a:rPr>
+              <a:t>H2D loads finished late</a:t>
+            </a:r>
+          </a:p>
+        </p:txBody>
+      </p:sp>
+      <p:sp>
+        <p:nvSpPr>
+          <p:cNvPr id="8" name="">
+            <a:extLst xmlns:a="http://schemas.openxmlformats.org/drawingml/2006/main">
+              <a:ext uri="{FF2B5EF4-FFF2-40B4-BE49-F238E27FC236}">
+                <a16:creationId xmlns:a16="http://schemas.microsoft.com/office/drawing/2014/main" id="{AAB635A4-D551-40A1-A651-F0C1A4721D11}"/>
+              </a:ext>
+            </a:extLst>
+          </p:cNvPr>
+          <p:cNvSpPr>
+            <a:spLocks xmlns:a="http://schemas.openxmlformats.org/drawingml/2006/main" noGrp="1"/>
+          </p:cNvSpPr>
+          <p:nvPr/>
+        </p:nvSpPr>
+        <p:spPr>
+          <a:xfrm xmlns:a="http://schemas.openxmlformats.org/drawingml/2006/main">
+            <a:off x="9258300" y="3524250"/>
+            <a:ext cx="2095500" cy="742950"/>
           </a:xfrm>
           <a:prstGeom xmlns:a="http://schemas.openxmlformats.org/drawingml/2006/main" prst="rect">
             <a:avLst/>
@@ -4579,29 +5025,29 @@
           <a:lstStyle xmlns:a="http://schemas.openxmlformats.org/drawingml/2006/main"/>
           <a:p xmlns:a="http://schemas.openxmlformats.org/drawingml/2006/main">
             <a:pPr algn="l">
-              <a:defRPr sz="1275" b="0">
+              <a:defRPr sz="1575" b="0">
                 <a:solidFill>
                   <a:srgbClr val="334155"/>
                 </a:solidFill>
               </a:defRPr>
             </a:pPr>
             <a:r>
-              <a:rPr sz="1275" b="0">
+              <a:rPr sz="1575" b="0">
                 <a:solidFill>
                   <a:srgbClr val="334155"/>
                 </a:solidFill>
               </a:rPr>
-              <a:t>The stage markers separate submission, SGLang receive, scheduler queue/admit, and visible KV H2D movement.</a:t>
-            </a:r>
-          </a:p>
-        </p:txBody>
-      </p:sp>
-      <p:sp>
-        <p:nvSpPr>
-          <p:cNvPr id="6" name="">
-            <a:extLst xmlns:a="http://schemas.openxmlformats.org/drawingml/2006/main">
-              <a:ext uri="{FF2B5EF4-FFF2-40B4-BE49-F238E27FC236}">
-                <a16:creationId xmlns:a16="http://schemas.microsoft.com/office/drawing/2014/main" id="{4DA01D03-AC89-4290-93F6-7272C633CFD8}"/>
+              <a:t>All visible replay-side KV loads finished below the 0 ms deadline line.</a:t>
+            </a:r>
+          </a:p>
+        </p:txBody>
+      </p:sp>
+      <p:sp>
+        <p:nvSpPr>
+          <p:cNvPr id="9" name="">
+            <a:extLst xmlns:a="http://schemas.openxmlformats.org/drawingml/2006/main">
+              <a:ext uri="{FF2B5EF4-FFF2-40B4-BE49-F238E27FC236}">
+                <a16:creationId xmlns:a16="http://schemas.microsoft.com/office/drawing/2014/main" id="{CCA28ACA-C086-4CF9-AEA2-7496619A528C}"/>
               </a:ext>
             </a:extLst>
           </p:cNvPr>
@@ -4641,17 +5087,17 @@
                   <a:srgbClr val="64748B"/>
                 </a:solidFill>
               </a:rPr>
-              <a:t>Source: latest_master_report.html, Replay Queue Timeline vs H2D Start</a:t>
-            </a:r>
-          </a:p>
-        </p:txBody>
-      </p:sp>
-      <p:sp>
-        <p:nvSpPr>
-          <p:cNvPr id="7" name="">
-            <a:extLst xmlns:a="http://schemas.openxmlformats.org/drawingml/2006/main">
-              <a:ext uri="{FF2B5EF4-FFF2-40B4-BE49-F238E27FC236}">
-                <a16:creationId xmlns:a16="http://schemas.microsoft.com/office/drawing/2014/main" id="{1B4A36DA-B42D-4D5A-A089-4ACBB72920F9}"/>
+              <a:t>Source: latest_master_report.html, Global Replay H2D Readiness</a:t>
+            </a:r>
+          </a:p>
+        </p:txBody>
+      </p:sp>
+      <p:sp>
+        <p:nvSpPr>
+          <p:cNvPr id="10" name="">
+            <a:extLst xmlns:a="http://schemas.openxmlformats.org/drawingml/2006/main">
+              <a:ext uri="{FF2B5EF4-FFF2-40B4-BE49-F238E27FC236}">
+                <a16:creationId xmlns:a16="http://schemas.microsoft.com/office/drawing/2014/main" id="{9C7AF322-8E11-44C4-BDDA-936770C74CD4}"/>
               </a:ext>
             </a:extLst>
           </p:cNvPr>
@@ -4698,10 +5144,10 @@
       </p:sp>
       <p:sp>
         <p:nvSpPr>
-          <p:cNvPr id="8" name="">
-            <a:extLst xmlns:a="http://schemas.openxmlformats.org/drawingml/2006/main">
-              <a:ext uri="{FF2B5EF4-FFF2-40B4-BE49-F238E27FC236}">
-                <a16:creationId xmlns:a16="http://schemas.microsoft.com/office/drawing/2014/main" id="{C48ADDF0-503B-4A28-A3ED-65B32E8D5405}"/>
+          <p:cNvPr id="11" name="">
+            <a:extLst xmlns:a="http://schemas.openxmlformats.org/drawingml/2006/main">
+              <a:ext uri="{FF2B5EF4-FFF2-40B4-BE49-F238E27FC236}">
+                <a16:creationId xmlns:a16="http://schemas.microsoft.com/office/drawing/2014/main" id="{838BF824-E912-4F8D-91EA-516D138F72BE}"/>
               </a:ext>
             </a:extLst>
           </p:cNvPr>
@@ -4749,7 +5195,7 @@
     </p:spTree>
     <p:extLst>
       <p:ext uri="{BB962C8B-B14F-4D97-AF65-F5344CB8AC3E}">
-        <p14:creationId xmlns:p14="http://schemas.microsoft.com/office/powerpoint/2010/main" val="909645832"/>
+        <p14:creationId xmlns:p14="http://schemas.microsoft.com/office/powerpoint/2010/main" val="493676356"/>
       </p:ext>
     </p:extLst>
   </p:cSld>
@@ -4777,10 +5223,10 @@
       </p:grpSpPr>
       <p:sp>
         <p:nvSpPr>
-          <p:cNvPr id="27" name="">
-            <a:extLst xmlns:a="http://schemas.openxmlformats.org/drawingml/2006/main">
-              <a:ext uri="{FF2B5EF4-FFF2-40B4-BE49-F238E27FC236}">
-                <a16:creationId xmlns:a16="http://schemas.microsoft.com/office/drawing/2014/main" id="{7380A958-21D8-4D56-810F-DA3B104E3F16}"/>
+          <p:cNvPr id="9" name="">
+            <a:extLst xmlns:a="http://schemas.openxmlformats.org/drawingml/2006/main">
+              <a:ext uri="{FF2B5EF4-FFF2-40B4-BE49-F238E27FC236}">
+                <a16:creationId xmlns:a16="http://schemas.microsoft.com/office/drawing/2014/main" id="{6B33F2E9-22AF-4380-9DFA-4409422ECDA1}"/>
               </a:ext>
             </a:extLst>
           </p:cNvPr>
@@ -4820,7 +5266,7 @@
                   <a:srgbClr val="0F172A"/>
                 </a:solidFill>
               </a:rPr>
-              <a:t>Hardware support can make hints enforceable</a:t>
+              <a:t>The delay is not just copy time</a:t>
             </a:r>
           </a:p>
         </p:txBody>
@@ -4830,7 +5276,7 @@
           <p:cNvPr id="2" name="">
             <a:extLst xmlns:a="http://schemas.openxmlformats.org/drawingml/2006/main">
               <a:ext uri="{FF2B5EF4-FFF2-40B4-BE49-F238E27FC236}">
-                <a16:creationId xmlns:a16="http://schemas.microsoft.com/office/drawing/2014/main" id="{E0BBC465-D4D3-4B81-987D-F3A9108A37A2}"/>
+                <a16:creationId xmlns:a16="http://schemas.microsoft.com/office/drawing/2014/main" id="{007CDDEA-822B-4BE8-A35D-12140A59A157}"/>
               </a:ext>
             </a:extLst>
           </p:cNvPr>
@@ -4870,6 +5316,392 @@
                   <a:srgbClr val="64748B"/>
                 </a:solidFill>
               </a:rPr>
+              <a:t>The request enters normal software/runtime scheduling before visible KV H2D begins.</a:t>
+            </a:r>
+          </a:p>
+        </p:txBody>
+      </p:sp>
+      <p:sp>
+        <p:nvSpPr>
+          <p:cNvPr id="3" name="">
+            <a:extLst xmlns:a="http://schemas.openxmlformats.org/drawingml/2006/main">
+              <a:ext uri="{FF2B5EF4-FFF2-40B4-BE49-F238E27FC236}">
+                <a16:creationId xmlns:a16="http://schemas.microsoft.com/office/drawing/2014/main" id="{EB20A60D-E2AE-4FD5-9116-4E0AAB127BE3}"/>
+              </a:ext>
+            </a:extLst>
+          </p:cNvPr>
+          <p:cNvSpPr>
+            <a:spLocks xmlns:a="http://schemas.openxmlformats.org/drawingml/2006/main" noGrp="1"/>
+          </p:cNvSpPr>
+          <p:nvPr/>
+        </p:nvSpPr>
+        <p:spPr>
+          <a:xfrm xmlns:a="http://schemas.openxmlformats.org/drawingml/2006/main">
+            <a:off x="323850" y="1333500"/>
+            <a:ext cx="10820400" cy="4343400"/>
+          </a:xfrm>
+          <a:prstGeom xmlns:a="http://schemas.openxmlformats.org/drawingml/2006/main" prst="roundRect">
+            <a:avLst>
+              <a:gd name="adj" fmla="val 1316"/>
+            </a:avLst>
+          </a:prstGeom>
+          <a:solidFill xmlns:a="http://schemas.openxmlformats.org/drawingml/2006/main">
+            <a:srgbClr val="FFFFFF"/>
+          </a:solidFill>
+          <a:ln xmlns:a="http://schemas.openxmlformats.org/drawingml/2006/main" w="9525">
+            <a:solidFill>
+              <a:srgbClr val="E5E7EB"/>
+            </a:solidFill>
+            <a:prstDash val="solid"/>
+          </a:ln>
+        </p:spPr>
+      </p:sp>
+      <p:pic>
+        <p:nvPicPr>
+          <p:cNvPr id="12" name=""/>
+          <p:cNvPicPr>
+            <a:picLocks xmlns:a="http://schemas.openxmlformats.org/drawingml/2006/main" noChangeAspect="1"/>
+          </p:cNvPicPr>
+          <p:nvPr/>
+        </p:nvPicPr>
+        <p:blipFill>
+          <a:blip xmlns:r="http://schemas.openxmlformats.org/officeDocument/2006/relationships" xmlns:a="http://schemas.openxmlformats.org/drawingml/2006/main" r:embed="Rfaf9b8baf3cf40c3"/>
+          <a:stretch xmlns:a="http://schemas.openxmlformats.org/drawingml/2006/main"/>
+        </p:blipFill>
+        <p:spPr>
+          <a:xfrm xmlns:a="http://schemas.openxmlformats.org/drawingml/2006/main">
+            <a:off x="1247835" y="1409700"/>
+            <a:ext cx="8972430" cy="4191000"/>
+          </a:xfrm>
+          <a:prstGeom xmlns:a="http://schemas.openxmlformats.org/drawingml/2006/main" prst="rect">
+            <a:avLst/>
+          </a:prstGeom>
+        </p:spPr>
+      </p:pic>
+      <p:sp>
+        <p:nvSpPr>
+          <p:cNvPr id="5" name="">
+            <a:extLst xmlns:a="http://schemas.openxmlformats.org/drawingml/2006/main">
+              <a:ext uri="{FF2B5EF4-FFF2-40B4-BE49-F238E27FC236}">
+                <a16:creationId xmlns:a16="http://schemas.microsoft.com/office/drawing/2014/main" id="{52CCAF75-ACAB-4ECF-BA7E-9C3A5A71F52D}"/>
+              </a:ext>
+            </a:extLst>
+          </p:cNvPr>
+          <p:cNvSpPr>
+            <a:spLocks xmlns:a="http://schemas.openxmlformats.org/drawingml/2006/main" noGrp="1"/>
+          </p:cNvSpPr>
+          <p:nvPr/>
+        </p:nvSpPr>
+        <p:spPr>
+          <a:xfrm xmlns:a="http://schemas.openxmlformats.org/drawingml/2006/main">
+            <a:off x="685800" y="5791200"/>
+            <a:ext cx="9906000" cy="228600"/>
+          </a:xfrm>
+          <a:prstGeom xmlns:a="http://schemas.openxmlformats.org/drawingml/2006/main" prst="rect">
+            <a:avLst/>
+          </a:prstGeom>
+          <a:noFill xmlns:a="http://schemas.openxmlformats.org/drawingml/2006/main"/>
+          <a:ln xmlns:a="http://schemas.openxmlformats.org/drawingml/2006/main" w="0">
+            <a:noFill/>
+            <a:prstDash val="solid"/>
+          </a:ln>
+        </p:spPr>
+        <p:txBody>
+          <a:bodyPr xmlns:a="http://schemas.openxmlformats.org/drawingml/2006/main" anchor="t"/>
+          <a:lstStyle xmlns:a="http://schemas.openxmlformats.org/drawingml/2006/main"/>
+          <a:p xmlns:a="http://schemas.openxmlformats.org/drawingml/2006/main">
+            <a:pPr algn="l">
+              <a:defRPr sz="1275" b="0">
+                <a:solidFill>
+                  <a:srgbClr val="334155"/>
+                </a:solidFill>
+              </a:defRPr>
+            </a:pPr>
+            <a:r>
+              <a:rPr sz="1275" b="0">
+                <a:solidFill>
+                  <a:srgbClr val="334155"/>
+                </a:solidFill>
+              </a:rPr>
+              <a:t>The stage markers separate submission, SGLang receive, scheduler queue/admit, and visible KV H2D movement.</a:t>
+            </a:r>
+          </a:p>
+        </p:txBody>
+      </p:sp>
+      <p:sp>
+        <p:nvSpPr>
+          <p:cNvPr id="6" name="">
+            <a:extLst xmlns:a="http://schemas.openxmlformats.org/drawingml/2006/main">
+              <a:ext uri="{FF2B5EF4-FFF2-40B4-BE49-F238E27FC236}">
+                <a16:creationId xmlns:a16="http://schemas.microsoft.com/office/drawing/2014/main" id="{6EA3970D-492D-4BCD-B104-13E317CD2DDD}"/>
+              </a:ext>
+            </a:extLst>
+          </p:cNvPr>
+          <p:cNvSpPr>
+            <a:spLocks xmlns:a="http://schemas.openxmlformats.org/drawingml/2006/main" noGrp="1"/>
+          </p:cNvSpPr>
+          <p:nvPr/>
+        </p:nvSpPr>
+        <p:spPr>
+          <a:xfrm xmlns:a="http://schemas.openxmlformats.org/drawingml/2006/main">
+            <a:off x="400050" y="6153150"/>
+            <a:ext cx="7810500" cy="190500"/>
+          </a:xfrm>
+          <a:prstGeom xmlns:a="http://schemas.openxmlformats.org/drawingml/2006/main" prst="rect">
+            <a:avLst/>
+          </a:prstGeom>
+          <a:noFill xmlns:a="http://schemas.openxmlformats.org/drawingml/2006/main"/>
+          <a:ln xmlns:a="http://schemas.openxmlformats.org/drawingml/2006/main" w="0">
+            <a:noFill/>
+            <a:prstDash val="solid"/>
+          </a:ln>
+        </p:spPr>
+        <p:txBody>
+          <a:bodyPr xmlns:a="http://schemas.openxmlformats.org/drawingml/2006/main" anchor="t"/>
+          <a:lstStyle xmlns:a="http://schemas.openxmlformats.org/drawingml/2006/main"/>
+          <a:p xmlns:a="http://schemas.openxmlformats.org/drawingml/2006/main">
+            <a:pPr algn="l">
+              <a:defRPr sz="825" b="0">
+                <a:solidFill>
+                  <a:srgbClr val="64748B"/>
+                </a:solidFill>
+              </a:defRPr>
+            </a:pPr>
+            <a:r>
+              <a:rPr sz="825" b="0">
+                <a:solidFill>
+                  <a:srgbClr val="64748B"/>
+                </a:solidFill>
+              </a:rPr>
+              <a:t>Source: latest_master_report.html, Replay Queue Timeline vs H2D Start</a:t>
+            </a:r>
+          </a:p>
+        </p:txBody>
+      </p:sp>
+      <p:sp>
+        <p:nvSpPr>
+          <p:cNvPr id="7" name="">
+            <a:extLst xmlns:a="http://schemas.openxmlformats.org/drawingml/2006/main">
+              <a:ext uri="{FF2B5EF4-FFF2-40B4-BE49-F238E27FC236}">
+                <a16:creationId xmlns:a16="http://schemas.microsoft.com/office/drawing/2014/main" id="{EC8C91D9-929F-42A0-8700-6F1C5641E667}"/>
+              </a:ext>
+            </a:extLst>
+          </p:cNvPr>
+          <p:cNvSpPr>
+            <a:spLocks xmlns:a="http://schemas.openxmlformats.org/drawingml/2006/main" noGrp="1"/>
+          </p:cNvSpPr>
+          <p:nvPr/>
+        </p:nvSpPr>
+        <p:spPr>
+          <a:xfrm xmlns:a="http://schemas.openxmlformats.org/drawingml/2006/main">
+            <a:off x="400050" y="6381750"/>
+            <a:ext cx="3429000" cy="228600"/>
+          </a:xfrm>
+          <a:prstGeom xmlns:a="http://schemas.openxmlformats.org/drawingml/2006/main" prst="rect">
+            <a:avLst/>
+          </a:prstGeom>
+          <a:noFill xmlns:a="http://schemas.openxmlformats.org/drawingml/2006/main"/>
+          <a:ln xmlns:a="http://schemas.openxmlformats.org/drawingml/2006/main" w="0">
+            <a:noFill/>
+            <a:prstDash val="solid"/>
+          </a:ln>
+        </p:spPr>
+        <p:txBody>
+          <a:bodyPr xmlns:a="http://schemas.openxmlformats.org/drawingml/2006/main" anchor="t"/>
+          <a:lstStyle xmlns:a="http://schemas.openxmlformats.org/drawingml/2006/main"/>
+          <a:p xmlns:a="http://schemas.openxmlformats.org/drawingml/2006/main">
+            <a:pPr algn="l">
+              <a:defRPr sz="975" b="0">
+                <a:solidFill>
+                  <a:srgbClr val="64748B"/>
+                </a:solidFill>
+              </a:defRPr>
+            </a:pPr>
+            <a:r>
+              <a:rPr sz="975" b="0">
+                <a:solidFill>
+                  <a:srgbClr val="64748B"/>
+                </a:solidFill>
+              </a:rPr>
+              <a:t>Agent-aware KV movement</a:t>
+            </a:r>
+          </a:p>
+        </p:txBody>
+      </p:sp>
+      <p:sp>
+        <p:nvSpPr>
+          <p:cNvPr id="8" name="">
+            <a:extLst xmlns:a="http://schemas.openxmlformats.org/drawingml/2006/main">
+              <a:ext uri="{FF2B5EF4-FFF2-40B4-BE49-F238E27FC236}">
+                <a16:creationId xmlns:a16="http://schemas.microsoft.com/office/drawing/2014/main" id="{5B973A3F-0BDD-4E18-949B-C7E167527435}"/>
+              </a:ext>
+            </a:extLst>
+          </p:cNvPr>
+          <p:cNvSpPr>
+            <a:spLocks xmlns:a="http://schemas.openxmlformats.org/drawingml/2006/main" noGrp="1"/>
+          </p:cNvSpPr>
+          <p:nvPr/>
+        </p:nvSpPr>
+        <p:spPr>
+          <a:xfrm xmlns:a="http://schemas.openxmlformats.org/drawingml/2006/main">
+            <a:off x="11334750" y="6381750"/>
+            <a:ext cx="457200" cy="228600"/>
+          </a:xfrm>
+          <a:prstGeom xmlns:a="http://schemas.openxmlformats.org/drawingml/2006/main" prst="rect">
+            <a:avLst/>
+          </a:prstGeom>
+          <a:noFill xmlns:a="http://schemas.openxmlformats.org/drawingml/2006/main"/>
+          <a:ln xmlns:a="http://schemas.openxmlformats.org/drawingml/2006/main" w="0">
+            <a:noFill/>
+            <a:prstDash val="solid"/>
+          </a:ln>
+        </p:spPr>
+        <p:txBody>
+          <a:bodyPr xmlns:a="http://schemas.openxmlformats.org/drawingml/2006/main" anchor="t"/>
+          <a:lstStyle xmlns:a="http://schemas.openxmlformats.org/drawingml/2006/main"/>
+          <a:p xmlns:a="http://schemas.openxmlformats.org/drawingml/2006/main">
+            <a:pPr algn="r">
+              <a:defRPr sz="975" b="0">
+                <a:solidFill>
+                  <a:srgbClr val="64748B"/>
+                </a:solidFill>
+              </a:defRPr>
+            </a:pPr>
+            <a:r>
+              <a:rPr sz="975" b="0">
+                <a:solidFill>
+                  <a:srgbClr val="64748B"/>
+                </a:solidFill>
+              </a:rPr>
+              <a:t>06</a:t>
+            </a:r>
+          </a:p>
+        </p:txBody>
+      </p:sp>
+    </p:spTree>
+    <p:extLst>
+      <p:ext uri="{BB962C8B-B14F-4D97-AF65-F5344CB8AC3E}">
+        <p14:creationId xmlns:p14="http://schemas.microsoft.com/office/powerpoint/2010/main" val="1941687296"/>
+      </p:ext>
+    </p:extLst>
+  </p:cSld>
+</p:sld>
+</file>
+
+<file path=ppt/slides/slide7.xml><?xml version="1.0" encoding="utf-8"?>
+<p:sld xmlns:p="http://schemas.openxmlformats.org/presentationml/2006/main">
+  <p:cSld>
+    <p:bg>
+      <p:bgPr>
+        <a:solidFill xmlns:a="http://schemas.openxmlformats.org/drawingml/2006/main">
+          <a:srgbClr val="FFFFFF"/>
+        </a:solidFill>
+      </p:bgPr>
+    </p:bg>
+    <p:spTree>
+      <p:nvGrpSpPr>
+        <p:cNvPr id="1" name=""/>
+        <p:cNvGrpSpPr/>
+        <p:nvPr/>
+      </p:nvGrpSpPr>
+      <p:grpSpPr>
+        <a:xfrm xmlns:a="http://schemas.openxmlformats.org/drawingml/2006/main"/>
+      </p:grpSpPr>
+      <p:sp>
+        <p:nvSpPr>
+          <p:cNvPr id="27" name="">
+            <a:extLst xmlns:a="http://schemas.openxmlformats.org/drawingml/2006/main">
+              <a:ext uri="{FF2B5EF4-FFF2-40B4-BE49-F238E27FC236}">
+                <a16:creationId xmlns:a16="http://schemas.microsoft.com/office/drawing/2014/main" id="{A2BE1C4D-F180-497C-9B55-9DF703CC105B}"/>
+              </a:ext>
+            </a:extLst>
+          </p:cNvPr>
+          <p:cNvSpPr>
+            <a:spLocks xmlns:a="http://schemas.openxmlformats.org/drawingml/2006/main" noGrp="1"/>
+          </p:cNvSpPr>
+          <p:nvPr/>
+        </p:nvSpPr>
+        <p:spPr>
+          <a:xfrm xmlns:a="http://schemas.openxmlformats.org/drawingml/2006/main">
+            <a:off x="400050" y="323850"/>
+            <a:ext cx="10668000" cy="800100"/>
+          </a:xfrm>
+          <a:prstGeom xmlns:a="http://schemas.openxmlformats.org/drawingml/2006/main" prst="rect">
+            <a:avLst/>
+          </a:prstGeom>
+          <a:noFill xmlns:a="http://schemas.openxmlformats.org/drawingml/2006/main"/>
+          <a:ln xmlns:a="http://schemas.openxmlformats.org/drawingml/2006/main" w="0">
+            <a:noFill/>
+            <a:prstDash val="solid"/>
+          </a:ln>
+        </p:spPr>
+        <p:txBody>
+          <a:bodyPr xmlns:a="http://schemas.openxmlformats.org/drawingml/2006/main" anchor="t"/>
+          <a:lstStyle xmlns:a="http://schemas.openxmlformats.org/drawingml/2006/main"/>
+          <a:p xmlns:a="http://schemas.openxmlformats.org/drawingml/2006/main">
+            <a:pPr algn="l">
+              <a:defRPr sz="2850" b="1">
+                <a:solidFill>
+                  <a:srgbClr val="0F172A"/>
+                </a:solidFill>
+              </a:defRPr>
+            </a:pPr>
+            <a:r>
+              <a:rPr sz="2850" b="1">
+                <a:solidFill>
+                  <a:srgbClr val="0F172A"/>
+                </a:solidFill>
+              </a:rPr>
+              <a:t>Hardware support can make hints enforceable</a:t>
+            </a:r>
+          </a:p>
+        </p:txBody>
+      </p:sp>
+      <p:sp>
+        <p:nvSpPr>
+          <p:cNvPr id="2" name="">
+            <a:extLst xmlns:a="http://schemas.openxmlformats.org/drawingml/2006/main">
+              <a:ext uri="{FF2B5EF4-FFF2-40B4-BE49-F238E27FC236}">
+                <a16:creationId xmlns:a16="http://schemas.microsoft.com/office/drawing/2014/main" id="{FDFEB5C5-96BB-407E-A3CB-A841012521AB}"/>
+              </a:ext>
+            </a:extLst>
+          </p:cNvPr>
+          <p:cNvSpPr>
+            <a:spLocks xmlns:a="http://schemas.openxmlformats.org/drawingml/2006/main" noGrp="1"/>
+          </p:cNvSpPr>
+          <p:nvPr/>
+        </p:nvSpPr>
+        <p:spPr>
+          <a:xfrm xmlns:a="http://schemas.openxmlformats.org/drawingml/2006/main">
+            <a:off x="419100" y="1028700"/>
+            <a:ext cx="9715500" cy="419100"/>
+          </a:xfrm>
+          <a:prstGeom xmlns:a="http://schemas.openxmlformats.org/drawingml/2006/main" prst="rect">
+            <a:avLst/>
+          </a:prstGeom>
+          <a:noFill xmlns:a="http://schemas.openxmlformats.org/drawingml/2006/main"/>
+          <a:ln xmlns:a="http://schemas.openxmlformats.org/drawingml/2006/main" w="0">
+            <a:noFill/>
+            <a:prstDash val="solid"/>
+          </a:ln>
+        </p:spPr>
+        <p:txBody>
+          <a:bodyPr xmlns:a="http://schemas.openxmlformats.org/drawingml/2006/main" anchor="t"/>
+          <a:lstStyle xmlns:a="http://schemas.openxmlformats.org/drawingml/2006/main"/>
+          <a:p xmlns:a="http://schemas.openxmlformats.org/drawingml/2006/main">
+            <a:pPr algn="l">
+              <a:defRPr sz="1350" b="0">
+                <a:solidFill>
+                  <a:srgbClr val="64748B"/>
+                </a:solidFill>
+              </a:defRPr>
+            </a:pPr>
+            <a:r>
+              <a:rPr sz="1350" b="0">
+                <a:solidFill>
+                  <a:srgbClr val="64748B"/>
+                </a:solidFill>
+              </a:rPr>
               <a:t>The opportunity is to treat KV as deadline-sensitive memory, not generic bytes.</a:t>
             </a:r>
           </a:p>
@@ -4880,7 +5712,7 @@
           <p:cNvPr id="3" name="">
             <a:extLst xmlns:a="http://schemas.openxmlformats.org/drawingml/2006/main">
               <a:ext uri="{FF2B5EF4-FFF2-40B4-BE49-F238E27FC236}">
-                <a16:creationId xmlns:a16="http://schemas.microsoft.com/office/drawing/2014/main" id="{C65FEDFF-8CD4-4B69-931F-79230A0784CD}"/>
+                <a16:creationId xmlns:a16="http://schemas.microsoft.com/office/drawing/2014/main" id="{B189A253-142F-4314-BEDF-01EC237F564B}"/>
               </a:ext>
             </a:extLst>
           </p:cNvPr>
@@ -4915,7 +5747,7 @@
           <p:cNvPr id="4" name="">
             <a:extLst xmlns:a="http://schemas.openxmlformats.org/drawingml/2006/main">
               <a:ext uri="{FF2B5EF4-FFF2-40B4-BE49-F238E27FC236}">
-                <a16:creationId xmlns:a16="http://schemas.microsoft.com/office/drawing/2014/main" id="{16F44E9C-4F1D-4CD0-8C6C-68C40579B600}"/>
+                <a16:creationId xmlns:a16="http://schemas.microsoft.com/office/drawing/2014/main" id="{E13F40C2-F53F-4B35-99EA-6BEEB34BC4AE}"/>
               </a:ext>
             </a:extLst>
           </p:cNvPr>
@@ -4965,7 +5797,7 @@
           <p:cNvPr id="5" name="">
             <a:extLst xmlns:a="http://schemas.openxmlformats.org/drawingml/2006/main">
               <a:ext uri="{FF2B5EF4-FFF2-40B4-BE49-F238E27FC236}">
-                <a16:creationId xmlns:a16="http://schemas.microsoft.com/office/drawing/2014/main" id="{16571620-FC13-4163-84EB-F9438D82BE77}"/>
+                <a16:creationId xmlns:a16="http://schemas.microsoft.com/office/drawing/2014/main" id="{0A559254-5351-4076-A45F-854D6A5184FE}"/>
               </a:ext>
             </a:extLst>
           </p:cNvPr>
@@ -5015,7 +5847,7 @@
           <p:cNvPr id="6" name="">
             <a:extLst xmlns:a="http://schemas.openxmlformats.org/drawingml/2006/main">
               <a:ext uri="{FF2B5EF4-FFF2-40B4-BE49-F238E27FC236}">
-                <a16:creationId xmlns:a16="http://schemas.microsoft.com/office/drawing/2014/main" id="{51141F60-1187-40BC-AC1C-F04B47B3DB10}"/>
+                <a16:creationId xmlns:a16="http://schemas.microsoft.com/office/drawing/2014/main" id="{90F71924-6EF4-4DF2-BF23-9D145012EAFE}"/>
               </a:ext>
             </a:extLst>
           </p:cNvPr>
@@ -5065,7 +5897,7 @@
           <p:cNvPr id="7" name="">
             <a:extLst xmlns:a="http://schemas.openxmlformats.org/drawingml/2006/main">
               <a:ext uri="{FF2B5EF4-FFF2-40B4-BE49-F238E27FC236}">
-                <a16:creationId xmlns:a16="http://schemas.microsoft.com/office/drawing/2014/main" id="{52396A88-72F3-4692-9023-691166B6CC85}"/>
+                <a16:creationId xmlns:a16="http://schemas.microsoft.com/office/drawing/2014/main" id="{3419EDEF-517D-4AEC-82A9-E8F9E1AD7BD3}"/>
               </a:ext>
             </a:extLst>
           </p:cNvPr>
@@ -5100,7 +5932,7 @@
           <p:cNvPr id="8" name="">
             <a:extLst xmlns:a="http://schemas.openxmlformats.org/drawingml/2006/main">
               <a:ext uri="{FF2B5EF4-FFF2-40B4-BE49-F238E27FC236}">
-                <a16:creationId xmlns:a16="http://schemas.microsoft.com/office/drawing/2014/main" id="{9E97AC1E-4865-4BA0-AD0B-A52C0A616800}"/>
+                <a16:creationId xmlns:a16="http://schemas.microsoft.com/office/drawing/2014/main" id="{F2F02250-E0AD-4464-9CCD-7EAD258BA051}"/>
               </a:ext>
             </a:extLst>
           </p:cNvPr>
@@ -5150,7 +5982,7 @@
           <p:cNvPr id="9" name="">
             <a:extLst xmlns:a="http://schemas.openxmlformats.org/drawingml/2006/main">
               <a:ext uri="{FF2B5EF4-FFF2-40B4-BE49-F238E27FC236}">
-                <a16:creationId xmlns:a16="http://schemas.microsoft.com/office/drawing/2014/main" id="{7A51730D-310B-4A06-826C-DF13DDB55022}"/>
+                <a16:creationId xmlns:a16="http://schemas.microsoft.com/office/drawing/2014/main" id="{127FC27C-F73F-44F0-A1D1-2B9FFE2DADB9}"/>
               </a:ext>
             </a:extLst>
           </p:cNvPr>
@@ -5200,7 +6032,7 @@
           <p:cNvPr id="10" name="">
             <a:extLst xmlns:a="http://schemas.openxmlformats.org/drawingml/2006/main">
               <a:ext uri="{FF2B5EF4-FFF2-40B4-BE49-F238E27FC236}">
-                <a16:creationId xmlns:a16="http://schemas.microsoft.com/office/drawing/2014/main" id="{02443E85-1F0B-4129-B741-56427019BF1C}"/>
+                <a16:creationId xmlns:a16="http://schemas.microsoft.com/office/drawing/2014/main" id="{2E8A391C-8952-435C-9385-764BE90C3DD9}"/>
               </a:ext>
             </a:extLst>
           </p:cNvPr>
@@ -5250,7 +6082,7 @@
           <p:cNvPr id="11" name="">
             <a:extLst xmlns:a="http://schemas.openxmlformats.org/drawingml/2006/main">
               <a:ext uri="{FF2B5EF4-FFF2-40B4-BE49-F238E27FC236}">
-                <a16:creationId xmlns:a16="http://schemas.microsoft.com/office/drawing/2014/main" id="{07F62A97-C8E7-4CC7-A043-A7C0C43A3315}"/>
+                <a16:creationId xmlns:a16="http://schemas.microsoft.com/office/drawing/2014/main" id="{98F10325-6651-4906-9E8E-D7DDC30F1AD5}"/>
               </a:ext>
             </a:extLst>
           </p:cNvPr>
@@ -5285,7 +6117,7 @@
           <p:cNvPr id="12" name="">
             <a:extLst xmlns:a="http://schemas.openxmlformats.org/drawingml/2006/main">
               <a:ext uri="{FF2B5EF4-FFF2-40B4-BE49-F238E27FC236}">
-                <a16:creationId xmlns:a16="http://schemas.microsoft.com/office/drawing/2014/main" id="{B0DF029C-4FE1-4F63-BF15-9F53D517972C}"/>
+                <a16:creationId xmlns:a16="http://schemas.microsoft.com/office/drawing/2014/main" id="{16BBEC16-C93A-4A28-9FB6-2AFD9C402574}"/>
               </a:ext>
             </a:extLst>
           </p:cNvPr>
@@ -5335,7 +6167,7 @@
           <p:cNvPr id="13" name="">
             <a:extLst xmlns:a="http://schemas.openxmlformats.org/drawingml/2006/main">
               <a:ext uri="{FF2B5EF4-FFF2-40B4-BE49-F238E27FC236}">
-                <a16:creationId xmlns:a16="http://schemas.microsoft.com/office/drawing/2014/main" id="{C15E1012-4A57-4D19-80EB-4662875D2DD7}"/>
+                <a16:creationId xmlns:a16="http://schemas.microsoft.com/office/drawing/2014/main" id="{817F95AA-408D-4AD5-8A66-6ABFA8A70FE3}"/>
               </a:ext>
             </a:extLst>
           </p:cNvPr>
@@ -5385,7 +6217,7 @@
           <p:cNvPr id="14" name="">
             <a:extLst xmlns:a="http://schemas.openxmlformats.org/drawingml/2006/main">
               <a:ext uri="{FF2B5EF4-FFF2-40B4-BE49-F238E27FC236}">
-                <a16:creationId xmlns:a16="http://schemas.microsoft.com/office/drawing/2014/main" id="{9CAF74D2-55D4-499A-A235-1B719FA08AB6}"/>
+                <a16:creationId xmlns:a16="http://schemas.microsoft.com/office/drawing/2014/main" id="{5E399707-AE93-4850-97DF-847587CBE247}"/>
               </a:ext>
             </a:extLst>
           </p:cNvPr>
@@ -5435,7 +6267,7 @@
           <p:cNvPr id="15" name="">
             <a:extLst xmlns:a="http://schemas.openxmlformats.org/drawingml/2006/main">
               <a:ext uri="{FF2B5EF4-FFF2-40B4-BE49-F238E27FC236}">
-                <a16:creationId xmlns:a16="http://schemas.microsoft.com/office/drawing/2014/main" id="{D8E20F58-62C8-4B32-A2FC-6F3726F8F75D}"/>
+                <a16:creationId xmlns:a16="http://schemas.microsoft.com/office/drawing/2014/main" id="{2F0A63E3-8DD6-48C1-9D8F-A618D4B3D3FB}"/>
               </a:ext>
             </a:extLst>
           </p:cNvPr>
@@ -5470,7 +6302,7 @@
           <p:cNvPr id="16" name="">
             <a:extLst xmlns:a="http://schemas.openxmlformats.org/drawingml/2006/main">
               <a:ext uri="{FF2B5EF4-FFF2-40B4-BE49-F238E27FC236}">
-                <a16:creationId xmlns:a16="http://schemas.microsoft.com/office/drawing/2014/main" id="{EF2B1653-FFE9-4C4A-9CC9-83D0720D1C81}"/>
+                <a16:creationId xmlns:a16="http://schemas.microsoft.com/office/drawing/2014/main" id="{7292E7AD-34E6-4B8B-8EE8-F3E5DBC7E112}"/>
               </a:ext>
             </a:extLst>
           </p:cNvPr>
@@ -5520,7 +6352,7 @@
           <p:cNvPr id="17" name="">
             <a:extLst xmlns:a="http://schemas.openxmlformats.org/drawingml/2006/main">
               <a:ext uri="{FF2B5EF4-FFF2-40B4-BE49-F238E27FC236}">
-                <a16:creationId xmlns:a16="http://schemas.microsoft.com/office/drawing/2014/main" id="{DEB3D779-949B-489A-B903-2DB3F222D0A1}"/>
+                <a16:creationId xmlns:a16="http://schemas.microsoft.com/office/drawing/2014/main" id="{38601DF0-6589-45DE-BA89-22AF5DC1FFFF}"/>
               </a:ext>
             </a:extLst>
           </p:cNvPr>
@@ -5570,7 +6402,7 @@
           <p:cNvPr id="18" name="">
             <a:extLst xmlns:a="http://schemas.openxmlformats.org/drawingml/2006/main">
               <a:ext uri="{FF2B5EF4-FFF2-40B4-BE49-F238E27FC236}">
-                <a16:creationId xmlns:a16="http://schemas.microsoft.com/office/drawing/2014/main" id="{F28DF708-F949-4919-B1A8-2E18E0059F9F}"/>
+                <a16:creationId xmlns:a16="http://schemas.microsoft.com/office/drawing/2014/main" id="{EEDAA903-BC2C-4C49-B7DE-E1358D1F88FC}"/>
               </a:ext>
             </a:extLst>
           </p:cNvPr>
@@ -5620,7 +6452,7 @@
           <p:cNvPr id="19" name="">
             <a:extLst xmlns:a="http://schemas.openxmlformats.org/drawingml/2006/main">
               <a:ext uri="{FF2B5EF4-FFF2-40B4-BE49-F238E27FC236}">
-                <a16:creationId xmlns:a16="http://schemas.microsoft.com/office/drawing/2014/main" id="{95234086-D6EA-40CB-9426-D98DB7E68F1A}"/>
+                <a16:creationId xmlns:a16="http://schemas.microsoft.com/office/drawing/2014/main" id="{6D97EEB9-A53B-4D4A-838C-CC0645445F6A}"/>
               </a:ext>
             </a:extLst>
           </p:cNvPr>
@@ -5655,7 +6487,7 @@
           <p:cNvPr id="20" name="">
             <a:extLst xmlns:a="http://schemas.openxmlformats.org/drawingml/2006/main">
               <a:ext uri="{FF2B5EF4-FFF2-40B4-BE49-F238E27FC236}">
-                <a16:creationId xmlns:a16="http://schemas.microsoft.com/office/drawing/2014/main" id="{E45E27C1-B197-4969-A8CF-56D7EEFB3C5B}"/>
+                <a16:creationId xmlns:a16="http://schemas.microsoft.com/office/drawing/2014/main" id="{9D825824-019A-4516-A8AC-EEC5BFCC0570}"/>
               </a:ext>
             </a:extLst>
           </p:cNvPr>
@@ -5705,7 +6537,7 @@
           <p:cNvPr id="21" name="">
             <a:extLst xmlns:a="http://schemas.openxmlformats.org/drawingml/2006/main">
               <a:ext uri="{FF2B5EF4-FFF2-40B4-BE49-F238E27FC236}">
-                <a16:creationId xmlns:a16="http://schemas.microsoft.com/office/drawing/2014/main" id="{A76049FD-BFEA-4754-B809-5744FD3B3D1A}"/>
+                <a16:creationId xmlns:a16="http://schemas.microsoft.com/office/drawing/2014/main" id="{AC7637CB-CD0A-46FA-B51E-35AF59467BDF}"/>
               </a:ext>
             </a:extLst>
           </p:cNvPr>
@@ -5755,7 +6587,7 @@
           <p:cNvPr id="22" name="">
             <a:extLst xmlns:a="http://schemas.openxmlformats.org/drawingml/2006/main">
               <a:ext uri="{FF2B5EF4-FFF2-40B4-BE49-F238E27FC236}">
-                <a16:creationId xmlns:a16="http://schemas.microsoft.com/office/drawing/2014/main" id="{00ACEDB5-8430-42E5-9157-83F404087C00}"/>
+                <a16:creationId xmlns:a16="http://schemas.microsoft.com/office/drawing/2014/main" id="{4A8695E7-33FA-453E-B233-7B9F5B6260C3}"/>
               </a:ext>
             </a:extLst>
           </p:cNvPr>
@@ -5790,7 +6622,7 @@
           <p:cNvPr id="23" name="">
             <a:extLst xmlns:a="http://schemas.openxmlformats.org/drawingml/2006/main">
               <a:ext uri="{FF2B5EF4-FFF2-40B4-BE49-F238E27FC236}">
-                <a16:creationId xmlns:a16="http://schemas.microsoft.com/office/drawing/2014/main" id="{78B63F66-465D-46D8-8E28-414BEA6BC881}"/>
+                <a16:creationId xmlns:a16="http://schemas.microsoft.com/office/drawing/2014/main" id="{920336A3-EF52-437B-9FBD-956D02203DE7}"/>
               </a:ext>
             </a:extLst>
           </p:cNvPr>
@@ -5840,7 +6672,7 @@
           <p:cNvPr id="24" name="">
             <a:extLst xmlns:a="http://schemas.openxmlformats.org/drawingml/2006/main">
               <a:ext uri="{FF2B5EF4-FFF2-40B4-BE49-F238E27FC236}">
-                <a16:creationId xmlns:a16="http://schemas.microsoft.com/office/drawing/2014/main" id="{000E93F5-43D2-4659-A1A3-A1E8D8437416}"/>
+                <a16:creationId xmlns:a16="http://schemas.microsoft.com/office/drawing/2014/main" id="{05169DE4-E961-4784-9003-5BC12D55EC16}"/>
               </a:ext>
             </a:extLst>
           </p:cNvPr>
@@ -5890,7 +6722,7 @@
           <p:cNvPr id="25" name="">
             <a:extLst xmlns:a="http://schemas.openxmlformats.org/drawingml/2006/main">
               <a:ext uri="{FF2B5EF4-FFF2-40B4-BE49-F238E27FC236}">
-                <a16:creationId xmlns:a16="http://schemas.microsoft.com/office/drawing/2014/main" id="{4944D63C-558E-4078-8DC1-0DA95B1AAB36}"/>
+                <a16:creationId xmlns:a16="http://schemas.microsoft.com/office/drawing/2014/main" id="{654D1ADC-64EA-4539-97DC-E9A46EB095E1}"/>
               </a:ext>
             </a:extLst>
           </p:cNvPr>
@@ -5940,7 +6772,7 @@
           <p:cNvPr id="26" name="">
             <a:extLst xmlns:a="http://schemas.openxmlformats.org/drawingml/2006/main">
               <a:ext uri="{FF2B5EF4-FFF2-40B4-BE49-F238E27FC236}">
-                <a16:creationId xmlns:a16="http://schemas.microsoft.com/office/drawing/2014/main" id="{2BE5284F-FC69-4537-9B91-88C3CAA364AF}"/>
+                <a16:creationId xmlns:a16="http://schemas.microsoft.com/office/drawing/2014/main" id="{43017583-E283-4DFA-91DD-2C4B2C539622}"/>
               </a:ext>
             </a:extLst>
           </p:cNvPr>
@@ -5980,7 +6812,7 @@
                   <a:srgbClr val="64748B"/>
                 </a:solidFill>
               </a:rPr>
-              <a:t>06</a:t>
+              <a:t>07</a:t>
             </a:r>
           </a:p>
         </p:txBody>
@@ -5988,7 +6820,7 @@
     </p:spTree>
     <p:extLst>
       <p:ext uri="{BB962C8B-B14F-4D97-AF65-F5344CB8AC3E}">
-        <p14:creationId xmlns:p14="http://schemas.microsoft.com/office/powerpoint/2010/main" val="1560740317"/>
+        <p14:creationId xmlns:p14="http://schemas.microsoft.com/office/powerpoint/2010/main" val="576995225"/>
       </p:ext>
     </p:extLst>
   </p:cSld>

--- a/sglang_direct_kv/artifacts/slides/agent_aware_kv_movement_manager_deck.pptx
+++ b/sglang_direct_kv/artifacts/slides/agent_aware_kv_movement_manager_deck.pptx
@@ -2,19 +2,20 @@
 <file path=ppt/presentation.xml><?xml version="1.0" encoding="utf-8"?>
 <p:presentation xmlns:p="http://schemas.openxmlformats.org/presentationml/2006/main">
   <p:sldMasterIdLst>
-    <p:sldMasterId xmlns:r="http://schemas.openxmlformats.org/officeDocument/2006/relationships" id="2147483648" r:id="Rea2f3b2e08af44f7"/>
+    <p:sldMasterId xmlns:r="http://schemas.openxmlformats.org/officeDocument/2006/relationships" id="2147483648" r:id="R192ec0c512534232"/>
   </p:sldMasterIdLst>
   <p:notesMasterIdLst>
-    <p:notesMasterId xmlns:r="http://schemas.openxmlformats.org/officeDocument/2006/relationships" r:id="Rede9b1d8cd8847b6"/>
+    <p:notesMasterId xmlns:r="http://schemas.openxmlformats.org/officeDocument/2006/relationships" r:id="R53a9988d234a45d6"/>
   </p:notesMasterIdLst>
   <p:sldIdLst>
-    <p:sldId xmlns:r="http://schemas.openxmlformats.org/officeDocument/2006/relationships" id="256" r:id="R47780e98d4ba4e89"/>
-    <p:sldId xmlns:r="http://schemas.openxmlformats.org/officeDocument/2006/relationships" id="257" r:id="R93251a3c4ceb449c"/>
-    <p:sldId xmlns:r="http://schemas.openxmlformats.org/officeDocument/2006/relationships" id="258" r:id="R842fadeab3894f37"/>
-    <p:sldId xmlns:r="http://schemas.openxmlformats.org/officeDocument/2006/relationships" id="259" r:id="Rffe7b6e06a754a9d"/>
-    <p:sldId xmlns:r="http://schemas.openxmlformats.org/officeDocument/2006/relationships" id="260" r:id="R01057d24ff7e4320"/>
-    <p:sldId xmlns:r="http://schemas.openxmlformats.org/officeDocument/2006/relationships" id="261" r:id="R7677af7031d44c2c"/>
-    <p:sldId xmlns:r="http://schemas.openxmlformats.org/officeDocument/2006/relationships" id="262" r:id="Rf7c85b66392b4b72"/>
+    <p:sldId xmlns:r="http://schemas.openxmlformats.org/officeDocument/2006/relationships" id="256" r:id="Re34d58e080024f18"/>
+    <p:sldId xmlns:r="http://schemas.openxmlformats.org/officeDocument/2006/relationships" id="257" r:id="Rb6cb70b5173140e1"/>
+    <p:sldId xmlns:r="http://schemas.openxmlformats.org/officeDocument/2006/relationships" id="258" r:id="R082ef5d2f2c54649"/>
+    <p:sldId xmlns:r="http://schemas.openxmlformats.org/officeDocument/2006/relationships" id="259" r:id="R7b9b19be8672452f"/>
+    <p:sldId xmlns:r="http://schemas.openxmlformats.org/officeDocument/2006/relationships" id="260" r:id="R847a68fd188f45c0"/>
+    <p:sldId xmlns:r="http://schemas.openxmlformats.org/officeDocument/2006/relationships" id="261" r:id="Rc609a81787d342cf"/>
+    <p:sldId xmlns:r="http://schemas.openxmlformats.org/officeDocument/2006/relationships" id="262" r:id="R8a1021d62f06433b"/>
+    <p:sldId xmlns:r="http://schemas.openxmlformats.org/officeDocument/2006/relationships" id="263" r:id="R9976faeb41d04066"/>
   </p:sldIdLst>
   <p:sldSz cx="12192000" cy="6858000"/>
   <p:notesSz cx="6858000" cy="9144000"/>
@@ -453,7 +454,7 @@
           </a:p>
           <a:p xmlns:a="http://schemas.openxmlformats.org/drawingml/2006/main">
             <a:r>
-              <a:t>The goal statement is based on the project framing discussed in this thread.</a:t>
+              <a:t>Goal: Coding agents naturally pause during tool calls, then resume with tight latency expectations. Current memory movement paths are largely context-agnostic: they can move KV pages, but they do not know which agent needs them, when they are needed, or whether missing the deadline will stall replay. This project aims to quantify that gap and prototype hint-guided KV movement as a path toward smarter DMA engines, KV-aware memory scheduling, and hardware/runtime co-design.</a:t>
             </a:r>
           </a:p>
           <a:p xmlns:a="http://schemas.openxmlformats.org/drawingml/2006/main">
@@ -543,12 +544,12 @@
           <a:lstStyle xmlns:a="http://schemas.openxmlformats.org/drawingml/2006/main"/>
           <a:p xmlns:a="http://schemas.openxmlformats.org/drawingml/2006/main">
             <a:r>
-              <a:t>This slide frames the hardware opportunity: hints must become enforceable by the memory movement path.</a:t>
-            </a:r>
-          </a:p>
-          <a:p xmlns:a="http://schemas.openxmlformats.org/drawingml/2006/main">
-            <a:r>
-              <a:t>Hardware examples include SDMA, CPU-side DMA, NIC DMA, SSD DMA, and copy/migration engines.</a:t>
+              <a:t>This slide explains the two traffic feeds. Synthetic runs let us control pressure and timing; real DeepAgents/SWE-bench traces preserve realistic coding-agent prompts and tool gaps.</a:t>
+            </a:r>
+          </a:p>
+          <a:p xmlns:a="http://schemas.openxmlformats.org/drawingml/2006/main">
+            <a:r>
+              <a:t>The setup flow image comes from latest_master_report.html.</a:t>
             </a:r>
           </a:p>
           <a:p xmlns:a="http://schemas.openxmlformats.org/drawingml/2006/main">
@@ -638,12 +639,12 @@
           <a:lstStyle xmlns:a="http://schemas.openxmlformats.org/drawingml/2006/main"/>
           <a:p xmlns:a="http://schemas.openxmlformats.org/drawingml/2006/main">
             <a:r>
-              <a:t>Use this as the narrative chart. It shows the initial model turn, tool wait, replay path, replay-side H2D, recompute, prefill, and decode.</a:t>
-            </a:r>
-          </a:p>
-          <a:p xmlns:a="http://schemas.openxmlformats.org/drawingml/2006/main">
-            <a:r>
-              <a:t>The image is a cropped view of the Readable Phase Timeline in latest_master_report.html.</a:t>
+              <a:t>This slide frames the hardware opportunity: hints must become enforceable by the memory movement path.</a:t>
+            </a:r>
+          </a:p>
+          <a:p xmlns:a="http://schemas.openxmlformats.org/drawingml/2006/main">
+            <a:r>
+              <a:t>Hardware examples include SDMA, CPU-side DMA, NIC DMA, SSD DMA, and copy/migration engines.</a:t>
             </a:r>
           </a:p>
           <a:p xmlns:a="http://schemas.openxmlformats.org/drawingml/2006/main">
@@ -733,12 +734,12 @@
           <a:lstStyle xmlns:a="http://schemas.openxmlformats.org/drawingml/2006/main"/>
           <a:p xmlns:a="http://schemas.openxmlformats.org/drawingml/2006/main">
             <a:r>
-              <a:t>This slide is the global prefetch-attempt evidence. The backup report shows 114 matched prefetch attempts, 112 late, and 98.25% late.</a:t>
-            </a:r>
-          </a:p>
-          <a:p xmlns:a="http://schemas.openxmlformats.org/drawingml/2006/main">
-            <a:r>
-              <a:t>Use it to show that software prefetch through the normal serving path often misses tight replay windows.</a:t>
+              <a:t>Use this as the narrative chart. It shows the initial model turn, tool wait, replay path, replay-side H2D, recompute, prefill, and decode.</a:t>
+            </a:r>
+          </a:p>
+          <a:p xmlns:a="http://schemas.openxmlformats.org/drawingml/2006/main">
+            <a:r>
+              <a:t>The image is a cropped view of the Readable Phase Timeline in latest_master_report.html.</a:t>
             </a:r>
           </a:p>
           <a:p xmlns:a="http://schemas.openxmlformats.org/drawingml/2006/main">
@@ -828,12 +829,12 @@
           <a:lstStyle xmlns:a="http://schemas.openxmlformats.org/drawingml/2006/main"/>
           <a:p xmlns:a="http://schemas.openxmlformats.org/drawingml/2006/main">
             <a:r>
-              <a:t>This is the aggregate evidence slide. The current controlled no-prefetch run reports 8 no-prefetch replay H2D gaps and 8 late H2D finishes.</a:t>
-            </a:r>
-          </a:p>
-          <a:p xmlns:a="http://schemas.openxmlformats.org/drawingml/2006/main">
-            <a:r>
-              <a:t>Measured claim source: Global Replay H2D Readiness table and dot plot in latest_master_report.html.</a:t>
+              <a:t>This slide is the global prefetch-attempt evidence. The backup report shows 114 matched prefetch attempts, 112 late, and 98.25% late.</a:t>
+            </a:r>
+          </a:p>
+          <a:p xmlns:a="http://schemas.openxmlformats.org/drawingml/2006/main">
+            <a:r>
+              <a:t>Use it to show that software prefetch through the normal serving path often misses tight replay windows.</a:t>
             </a:r>
           </a:p>
           <a:p xmlns:a="http://schemas.openxmlformats.org/drawingml/2006/main">
@@ -923,12 +924,12 @@
           <a:lstStyle xmlns:a="http://schemas.openxmlformats.org/drawingml/2006/main"/>
           <a:p xmlns:a="http://schemas.openxmlformats.org/drawingml/2006/main">
             <a:r>
-              <a:t>This chart separates replay due, client submit, SGLang receive, scheduler queue/admit, H2D start, and H2D finish.</a:t>
-            </a:r>
-          </a:p>
-          <a:p xmlns:a="http://schemas.openxmlformats.org/drawingml/2006/main">
-            <a:r>
-              <a:t>The key manager takeaway: a hint-aware design should influence scheduling and priority, not merely request more copies.</a:t>
+              <a:t>This is the aggregate evidence slide. The current controlled no-prefetch run reports 8 no-prefetch replay H2D gaps and 8 late H2D finishes.</a:t>
+            </a:r>
+          </a:p>
+          <a:p xmlns:a="http://schemas.openxmlformats.org/drawingml/2006/main">
+            <a:r>
+              <a:t>Measured claim source: Global Replay H2D Readiness table and dot plot in latest_master_report.html.</a:t>
             </a:r>
           </a:p>
           <a:p xmlns:a="http://schemas.openxmlformats.org/drawingml/2006/main">
@@ -979,6 +980,101 @@
 </file>
 
 <file path=ppt/notesSlides/notesSlide7.xml><?xml version="1.0" encoding="utf-8"?>
+<p:notes xmlns:p="http://schemas.openxmlformats.org/presentationml/2006/main">
+  <p:cSld>
+    <p:spTree>
+      <p:nvGrpSpPr>
+        <p:cNvPr id="1" name=""/>
+        <p:cNvGrpSpPr/>
+        <p:nvPr/>
+      </p:nvGrpSpPr>
+      <p:grpSpPr>
+        <a:xfrm xmlns:a="http://schemas.openxmlformats.org/drawingml/2006/main"/>
+      </p:grpSpPr>
+      <p:sp>
+        <p:nvSpPr>
+          <p:cNvPr id="2" name="Slide Image Placeholder 1"/>
+          <p:cNvSpPr>
+            <a:spLocks xmlns:a="http://schemas.openxmlformats.org/drawingml/2006/main" noGrp="1"/>
+          </p:cNvSpPr>
+          <p:nvPr>
+            <p:ph type="sldImg" idx="0"/>
+          </p:nvPr>
+        </p:nvSpPr>
+        <p:spPr/>
+      </p:sp>
+      <p:sp>
+        <p:nvSpPr>
+          <p:cNvPr id="3" name="Notes Placeholder 2"/>
+          <p:cNvSpPr>
+            <a:spLocks xmlns:a="http://schemas.openxmlformats.org/drawingml/2006/main" noGrp="1"/>
+          </p:cNvSpPr>
+          <p:nvPr>
+            <p:ph type="body" idx="1"/>
+          </p:nvPr>
+        </p:nvSpPr>
+        <p:spPr/>
+        <p:txBody>
+          <a:bodyPr xmlns:a="http://schemas.openxmlformats.org/drawingml/2006/main"/>
+          <a:lstStyle xmlns:a="http://schemas.openxmlformats.org/drawingml/2006/main"/>
+          <a:p xmlns:a="http://schemas.openxmlformats.org/drawingml/2006/main">
+            <a:r>
+              <a:t>This chart separates replay due, client submit, SGLang receive, scheduler queue/admit, H2D start, and H2D finish.</a:t>
+            </a:r>
+          </a:p>
+          <a:p xmlns:a="http://schemas.openxmlformats.org/drawingml/2006/main">
+            <a:r>
+              <a:t>The key manager takeaway: a hint-aware design should influence scheduling and priority, not merely request more copies.</a:t>
+            </a:r>
+          </a:p>
+          <a:p xmlns:a="http://schemas.openxmlformats.org/drawingml/2006/main">
+            <a:r>
+              <a:t/>
+            </a:r>
+          </a:p>
+          <a:p xmlns:a="http://schemas.openxmlformats.org/drawingml/2006/main">
+            <a:r>
+              <a:t>[Sources]</a:t>
+            </a:r>
+          </a:p>
+          <a:p xmlns:a="http://schemas.openxmlformats.org/drawingml/2006/main">
+            <a:r>
+              <a:t>Local report: /Users/oluwolejaiyeoba/Documents/GitHub/agentic_hardware/sglang_direct_kv/artifacts/results/latest_master_report.html</a:t>
+            </a:r>
+          </a:p>
+          <a:p xmlns:a="http://schemas.openxmlformats.org/drawingml/2006/main">
+            <a:r>
+              <a:t>Backup report: /Users/oluwolejaiyeoba/Documents/GitHub/agentic_hardware/backups/latest_master_report-1.html</a:t>
+            </a:r>
+          </a:p>
+        </p:txBody>
+      </p:sp>
+      <p:sp>
+        <p:nvSpPr>
+          <p:cNvPr id="4" name="Slide Number Placeholder 3"/>
+          <p:cNvSpPr>
+            <a:spLocks xmlns:a="http://schemas.openxmlformats.org/drawingml/2006/main" noGrp="1"/>
+          </p:cNvSpPr>
+          <p:nvPr>
+            <p:ph type="sldNum" idx="5"/>
+          </p:nvPr>
+        </p:nvSpPr>
+        <p:spPr/>
+        <p:txBody>
+          <a:bodyPr xmlns:a="http://schemas.openxmlformats.org/drawingml/2006/main"/>
+          <a:lstStyle xmlns:a="http://schemas.openxmlformats.org/drawingml/2006/main"/>
+          <a:p xmlns:a="http://schemas.openxmlformats.org/drawingml/2006/main"/>
+        </p:txBody>
+      </p:sp>
+    </p:spTree>
+  </p:cSld>
+  <p:clrMapOvr>
+    <a:masterClrMapping xmlns:a="http://schemas.openxmlformats.org/drawingml/2006/main"/>
+  </p:clrMapOvr>
+</p:notes>
+</file>
+
+<file path=ppt/notesSlides/notesSlide8.xml><?xml version="1.0" encoding="utf-8"?>
 <p:notes xmlns:p="http://schemas.openxmlformats.org/presentationml/2006/main">
   <p:cSld>
     <p:spTree>
@@ -1111,7 +1207,7 @@
   </p:cSld>
   <p:clrMap bg1="lt1" tx1="dk1" bg2="lt2" tx2="dk2" accent1="accent1" accent2="accent2" accent3="accent3" accent4="accent4" accent5="accent5" accent6="accent6" hlink="hlink" folHlink="folHlink"/>
   <p:sldLayoutIdLst>
-    <p:sldLayoutId xmlns:r="http://schemas.openxmlformats.org/officeDocument/2006/relationships" id="2147483649" r:id="R2785d58bf67c4c75"/>
+    <p:sldLayoutId xmlns:r="http://schemas.openxmlformats.org/officeDocument/2006/relationships" id="2147483649" r:id="R7ea18fb3123640b4"/>
   </p:sldLayoutIdLst>
   <p:txStyles>
     <p:titleStyle>
@@ -1659,10 +1755,10 @@
       </p:grpSpPr>
       <p:sp>
         <p:nvSpPr>
-          <p:cNvPr id="19" name="">
-            <a:extLst xmlns:a="http://schemas.openxmlformats.org/drawingml/2006/main">
-              <a:ext uri="{FF2B5EF4-FFF2-40B4-BE49-F238E27FC236}">
-                <a16:creationId xmlns:a16="http://schemas.microsoft.com/office/drawing/2014/main" id="{20958EC4-084F-43BB-A1DF-CD70852880F9}"/>
+          <p:cNvPr id="16" name="">
+            <a:extLst xmlns:a="http://schemas.openxmlformats.org/drawingml/2006/main">
+              <a:ext uri="{FF2B5EF4-FFF2-40B4-BE49-F238E27FC236}">
+                <a16:creationId xmlns:a16="http://schemas.microsoft.com/office/drawing/2014/main" id="{0BA751AA-DA07-48DE-8EC8-BFDC164BC590}"/>
               </a:ext>
             </a:extLst>
           </p:cNvPr>
@@ -1712,19 +1808,19 @@
           <p:cNvPr id="2" name="">
             <a:extLst xmlns:a="http://schemas.openxmlformats.org/drawingml/2006/main">
               <a:ext uri="{FF2B5EF4-FFF2-40B4-BE49-F238E27FC236}">
-                <a16:creationId xmlns:a16="http://schemas.microsoft.com/office/drawing/2014/main" id="{B66BBBD2-6EE6-4ECA-8239-23AF8406C37A}"/>
-              </a:ext>
-            </a:extLst>
-          </p:cNvPr>
-          <p:cNvSpPr>
-            <a:spLocks xmlns:a="http://schemas.openxmlformats.org/drawingml/2006/main" noGrp="1"/>
-          </p:cNvSpPr>
-          <p:nvPr/>
-        </p:nvSpPr>
-        <p:spPr>
-          <a:xfrm xmlns:a="http://schemas.openxmlformats.org/drawingml/2006/main">
-            <a:off x="438150" y="1885950"/>
-            <a:ext cx="6667500" cy="895350"/>
+                <a16:creationId xmlns:a16="http://schemas.microsoft.com/office/drawing/2014/main" id="{0AF7E61D-5A88-4467-A5F9-BD9A46BF6CCC}"/>
+              </a:ext>
+            </a:extLst>
+          </p:cNvPr>
+          <p:cNvSpPr>
+            <a:spLocks xmlns:a="http://schemas.openxmlformats.org/drawingml/2006/main" noGrp="1"/>
+          </p:cNvSpPr>
+          <p:nvPr/>
+        </p:nvSpPr>
+        <p:spPr>
+          <a:xfrm xmlns:a="http://schemas.openxmlformats.org/drawingml/2006/main">
+            <a:off x="438150" y="1714500"/>
+            <a:ext cx="10287000" cy="1219200"/>
           </a:xfrm>
           <a:prstGeom xmlns:a="http://schemas.openxmlformats.org/drawingml/2006/main" prst="rect">
             <a:avLst/>
@@ -1740,19 +1836,19 @@
           <a:lstStyle xmlns:a="http://schemas.openxmlformats.org/drawingml/2006/main"/>
           <a:p xmlns:a="http://schemas.openxmlformats.org/drawingml/2006/main">
             <a:pPr algn="l">
-              <a:defRPr sz="1800" b="0">
+              <a:defRPr sz="1575" b="0">
                 <a:solidFill>
                   <a:srgbClr val="334155"/>
                 </a:solidFill>
               </a:defRPr>
             </a:pPr>
             <a:r>
-              <a:rPr sz="1800" b="0">
+              <a:rPr sz="1575" b="0">
                 <a:solidFill>
                   <a:srgbClr val="334155"/>
                 </a:solidFill>
               </a:rPr>
-              <a:t>Coding agents pause during tool calls, then resume with tight latency expectations. The question is whether the memory system can move the right KV before replay arrives.</a:t>
+              <a:t>Coding agents naturally pause during tool calls, then resume with tight latency expectations. Current memory movement paths are largely context-agnostic: they can move KV pages, but they do not know which agent needs them, when they are needed, or whether missing the deadline will stall replay. This project aims to quantify that gap and prototype hint-guided KV movement as a path toward smarter DMA engines, KV-aware memory scheduling, and hardware/runtime co-design.</a:t>
             </a:r>
           </a:p>
         </p:txBody>
@@ -1762,18 +1858,18 @@
           <p:cNvPr id="3" name="">
             <a:extLst xmlns:a="http://schemas.openxmlformats.org/drawingml/2006/main">
               <a:ext uri="{FF2B5EF4-FFF2-40B4-BE49-F238E27FC236}">
-                <a16:creationId xmlns:a16="http://schemas.microsoft.com/office/drawing/2014/main" id="{9A24E77F-CD02-47D5-AAEF-DE45FC5B0CC6}"/>
-              </a:ext>
-            </a:extLst>
-          </p:cNvPr>
-          <p:cNvSpPr>
-            <a:spLocks xmlns:a="http://schemas.openxmlformats.org/drawingml/2006/main" noGrp="1"/>
-          </p:cNvSpPr>
-          <p:nvPr/>
-        </p:nvSpPr>
-        <p:spPr>
-          <a:xfrm xmlns:a="http://schemas.openxmlformats.org/drawingml/2006/main">
-            <a:off x="495300" y="3714750"/>
+                <a16:creationId xmlns:a16="http://schemas.microsoft.com/office/drawing/2014/main" id="{489BCDC5-8D32-4F24-8012-C090C9A6F95A}"/>
+              </a:ext>
+            </a:extLst>
+          </p:cNvPr>
+          <p:cNvSpPr>
+            <a:spLocks xmlns:a="http://schemas.openxmlformats.org/drawingml/2006/main" noGrp="1"/>
+          </p:cNvSpPr>
+          <p:nvPr/>
+        </p:nvSpPr>
+        <p:spPr>
+          <a:xfrm xmlns:a="http://schemas.openxmlformats.org/drawingml/2006/main">
+            <a:off x="495300" y="3829050"/>
             <a:ext cx="1619250" cy="781050"/>
           </a:xfrm>
           <a:prstGeom xmlns:a="http://schemas.openxmlformats.org/drawingml/2006/main" prst="roundRect">
@@ -1797,18 +1893,18 @@
           <p:cNvPr id="4" name="">
             <a:extLst xmlns:a="http://schemas.openxmlformats.org/drawingml/2006/main">
               <a:ext uri="{FF2B5EF4-FFF2-40B4-BE49-F238E27FC236}">
-                <a16:creationId xmlns:a16="http://schemas.microsoft.com/office/drawing/2014/main" id="{DE5EC0E3-6AB8-4D2E-9C63-CB8E4A05C396}"/>
-              </a:ext>
-            </a:extLst>
-          </p:cNvPr>
-          <p:cNvSpPr>
-            <a:spLocks xmlns:a="http://schemas.openxmlformats.org/drawingml/2006/main" noGrp="1"/>
-          </p:cNvSpPr>
-          <p:nvPr/>
-        </p:nvSpPr>
-        <p:spPr>
-          <a:xfrm xmlns:a="http://schemas.openxmlformats.org/drawingml/2006/main">
-            <a:off x="628650" y="3857625"/>
+                <a16:creationId xmlns:a16="http://schemas.microsoft.com/office/drawing/2014/main" id="{397A9E5F-7E4F-4B2D-AEED-A576C8F70253}"/>
+              </a:ext>
+            </a:extLst>
+          </p:cNvPr>
+          <p:cNvSpPr>
+            <a:spLocks xmlns:a="http://schemas.openxmlformats.org/drawingml/2006/main" noGrp="1"/>
+          </p:cNvSpPr>
+          <p:nvPr/>
+        </p:nvSpPr>
+        <p:spPr>
+          <a:xfrm xmlns:a="http://schemas.openxmlformats.org/drawingml/2006/main">
+            <a:off x="628650" y="3971925"/>
             <a:ext cx="1352550" cy="590550"/>
           </a:xfrm>
           <a:prstGeom xmlns:a="http://schemas.openxmlformats.org/drawingml/2006/main" prst="rect">
@@ -1847,18 +1943,18 @@
           <p:cNvPr id="5" name="">
             <a:extLst xmlns:a="http://schemas.openxmlformats.org/drawingml/2006/main">
               <a:ext uri="{FF2B5EF4-FFF2-40B4-BE49-F238E27FC236}">
-                <a16:creationId xmlns:a16="http://schemas.microsoft.com/office/drawing/2014/main" id="{BB8B087B-1ECE-4428-B50C-16198F8AC04F}"/>
-              </a:ext>
-            </a:extLst>
-          </p:cNvPr>
-          <p:cNvSpPr>
-            <a:spLocks xmlns:a="http://schemas.openxmlformats.org/drawingml/2006/main" noGrp="1"/>
-          </p:cNvSpPr>
-          <p:nvPr/>
-        </p:nvSpPr>
-        <p:spPr>
-          <a:xfrm xmlns:a="http://schemas.openxmlformats.org/drawingml/2006/main">
-            <a:off x="2228850" y="3914775"/>
+                <a16:creationId xmlns:a16="http://schemas.microsoft.com/office/drawing/2014/main" id="{2CBA0617-FF1F-4852-8AB9-E69708A179D1}"/>
+              </a:ext>
+            </a:extLst>
+          </p:cNvPr>
+          <p:cNvSpPr>
+            <a:spLocks xmlns:a="http://schemas.openxmlformats.org/drawingml/2006/main" noGrp="1"/>
+          </p:cNvSpPr>
+          <p:nvPr/>
+        </p:nvSpPr>
+        <p:spPr>
+          <a:xfrm xmlns:a="http://schemas.openxmlformats.org/drawingml/2006/main">
+            <a:off x="2228850" y="4029075"/>
             <a:ext cx="381000" cy="381000"/>
           </a:xfrm>
           <a:prstGeom xmlns:a="http://schemas.openxmlformats.org/drawingml/2006/main" prst="rect">
@@ -1897,18 +1993,18 @@
           <p:cNvPr id="6" name="">
             <a:extLst xmlns:a="http://schemas.openxmlformats.org/drawingml/2006/main">
               <a:ext uri="{FF2B5EF4-FFF2-40B4-BE49-F238E27FC236}">
-                <a16:creationId xmlns:a16="http://schemas.microsoft.com/office/drawing/2014/main" id="{CF7FCF74-2AB3-4C7F-83B6-CB6784D717B2}"/>
-              </a:ext>
-            </a:extLst>
-          </p:cNvPr>
-          <p:cNvSpPr>
-            <a:spLocks xmlns:a="http://schemas.openxmlformats.org/drawingml/2006/main" noGrp="1"/>
-          </p:cNvSpPr>
-          <p:nvPr/>
-        </p:nvSpPr>
-        <p:spPr>
-          <a:xfrm xmlns:a="http://schemas.openxmlformats.org/drawingml/2006/main">
-            <a:off x="2714625" y="3714750"/>
+                <a16:creationId xmlns:a16="http://schemas.microsoft.com/office/drawing/2014/main" id="{4DED71BA-614D-4160-88F5-7CFE73003F2C}"/>
+              </a:ext>
+            </a:extLst>
+          </p:cNvPr>
+          <p:cNvSpPr>
+            <a:spLocks xmlns:a="http://schemas.openxmlformats.org/drawingml/2006/main" noGrp="1"/>
+          </p:cNvSpPr>
+          <p:nvPr/>
+        </p:nvSpPr>
+        <p:spPr>
+          <a:xfrm xmlns:a="http://schemas.openxmlformats.org/drawingml/2006/main">
+            <a:off x="2714625" y="3829050"/>
             <a:ext cx="1619250" cy="781050"/>
           </a:xfrm>
           <a:prstGeom xmlns:a="http://schemas.openxmlformats.org/drawingml/2006/main" prst="roundRect">
@@ -1932,18 +2028,18 @@
           <p:cNvPr id="7" name="">
             <a:extLst xmlns:a="http://schemas.openxmlformats.org/drawingml/2006/main">
               <a:ext uri="{FF2B5EF4-FFF2-40B4-BE49-F238E27FC236}">
-                <a16:creationId xmlns:a16="http://schemas.microsoft.com/office/drawing/2014/main" id="{589F69EF-6C4C-4083-8A32-48E931A86499}"/>
-              </a:ext>
-            </a:extLst>
-          </p:cNvPr>
-          <p:cNvSpPr>
-            <a:spLocks xmlns:a="http://schemas.openxmlformats.org/drawingml/2006/main" noGrp="1"/>
-          </p:cNvSpPr>
-          <p:nvPr/>
-        </p:nvSpPr>
-        <p:spPr>
-          <a:xfrm xmlns:a="http://schemas.openxmlformats.org/drawingml/2006/main">
-            <a:off x="2847975" y="3857625"/>
+                <a16:creationId xmlns:a16="http://schemas.microsoft.com/office/drawing/2014/main" id="{B5A77795-127A-4B6D-ABF0-0C3705669DF6}"/>
+              </a:ext>
+            </a:extLst>
+          </p:cNvPr>
+          <p:cNvSpPr>
+            <a:spLocks xmlns:a="http://schemas.openxmlformats.org/drawingml/2006/main" noGrp="1"/>
+          </p:cNvSpPr>
+          <p:nvPr/>
+        </p:nvSpPr>
+        <p:spPr>
+          <a:xfrm xmlns:a="http://schemas.openxmlformats.org/drawingml/2006/main">
+            <a:off x="2847975" y="3971925"/>
             <a:ext cx="1352550" cy="590550"/>
           </a:xfrm>
           <a:prstGeom xmlns:a="http://schemas.openxmlformats.org/drawingml/2006/main" prst="rect">
@@ -1982,18 +2078,18 @@
           <p:cNvPr id="8" name="">
             <a:extLst xmlns:a="http://schemas.openxmlformats.org/drawingml/2006/main">
               <a:ext uri="{FF2B5EF4-FFF2-40B4-BE49-F238E27FC236}">
-                <a16:creationId xmlns:a16="http://schemas.microsoft.com/office/drawing/2014/main" id="{0AF886A2-E72D-4E46-8EBF-9AC24BAAC2BC}"/>
-              </a:ext>
-            </a:extLst>
-          </p:cNvPr>
-          <p:cNvSpPr>
-            <a:spLocks xmlns:a="http://schemas.openxmlformats.org/drawingml/2006/main" noGrp="1"/>
-          </p:cNvSpPr>
-          <p:nvPr/>
-        </p:nvSpPr>
-        <p:spPr>
-          <a:xfrm xmlns:a="http://schemas.openxmlformats.org/drawingml/2006/main">
-            <a:off x="4448175" y="3914775"/>
+                <a16:creationId xmlns:a16="http://schemas.microsoft.com/office/drawing/2014/main" id="{BC15575F-1D32-4544-A13A-2F29689DBCDA}"/>
+              </a:ext>
+            </a:extLst>
+          </p:cNvPr>
+          <p:cNvSpPr>
+            <a:spLocks xmlns:a="http://schemas.openxmlformats.org/drawingml/2006/main" noGrp="1"/>
+          </p:cNvSpPr>
+          <p:nvPr/>
+        </p:nvSpPr>
+        <p:spPr>
+          <a:xfrm xmlns:a="http://schemas.openxmlformats.org/drawingml/2006/main">
+            <a:off x="4448175" y="4029075"/>
             <a:ext cx="381000" cy="381000"/>
           </a:xfrm>
           <a:prstGeom xmlns:a="http://schemas.openxmlformats.org/drawingml/2006/main" prst="rect">
@@ -2032,18 +2128,18 @@
           <p:cNvPr id="9" name="">
             <a:extLst xmlns:a="http://schemas.openxmlformats.org/drawingml/2006/main">
               <a:ext uri="{FF2B5EF4-FFF2-40B4-BE49-F238E27FC236}">
-                <a16:creationId xmlns:a16="http://schemas.microsoft.com/office/drawing/2014/main" id="{85150986-ADBA-4011-98F3-5CE43E19C2DA}"/>
-              </a:ext>
-            </a:extLst>
-          </p:cNvPr>
-          <p:cNvSpPr>
-            <a:spLocks xmlns:a="http://schemas.openxmlformats.org/drawingml/2006/main" noGrp="1"/>
-          </p:cNvSpPr>
-          <p:nvPr/>
-        </p:nvSpPr>
-        <p:spPr>
-          <a:xfrm xmlns:a="http://schemas.openxmlformats.org/drawingml/2006/main">
-            <a:off x="4933950" y="3714750"/>
+                <a16:creationId xmlns:a16="http://schemas.microsoft.com/office/drawing/2014/main" id="{C2C81932-2E11-4600-88F8-567227A2CE43}"/>
+              </a:ext>
+            </a:extLst>
+          </p:cNvPr>
+          <p:cNvSpPr>
+            <a:spLocks xmlns:a="http://schemas.openxmlformats.org/drawingml/2006/main" noGrp="1"/>
+          </p:cNvSpPr>
+          <p:nvPr/>
+        </p:nvSpPr>
+        <p:spPr>
+          <a:xfrm xmlns:a="http://schemas.openxmlformats.org/drawingml/2006/main">
+            <a:off x="4933950" y="3829050"/>
             <a:ext cx="1619250" cy="781050"/>
           </a:xfrm>
           <a:prstGeom xmlns:a="http://schemas.openxmlformats.org/drawingml/2006/main" prst="roundRect">
@@ -2067,18 +2163,18 @@
           <p:cNvPr id="10" name="">
             <a:extLst xmlns:a="http://schemas.openxmlformats.org/drawingml/2006/main">
               <a:ext uri="{FF2B5EF4-FFF2-40B4-BE49-F238E27FC236}">
-                <a16:creationId xmlns:a16="http://schemas.microsoft.com/office/drawing/2014/main" id="{B2E751F7-8EA2-4655-B922-69DC2007FDF7}"/>
-              </a:ext>
-            </a:extLst>
-          </p:cNvPr>
-          <p:cNvSpPr>
-            <a:spLocks xmlns:a="http://schemas.openxmlformats.org/drawingml/2006/main" noGrp="1"/>
-          </p:cNvSpPr>
-          <p:nvPr/>
-        </p:nvSpPr>
-        <p:spPr>
-          <a:xfrm xmlns:a="http://schemas.openxmlformats.org/drawingml/2006/main">
-            <a:off x="5067300" y="3857625"/>
+                <a16:creationId xmlns:a16="http://schemas.microsoft.com/office/drawing/2014/main" id="{D71F2028-771E-47D1-A353-D13A3F5A790A}"/>
+              </a:ext>
+            </a:extLst>
+          </p:cNvPr>
+          <p:cNvSpPr>
+            <a:spLocks xmlns:a="http://schemas.openxmlformats.org/drawingml/2006/main" noGrp="1"/>
+          </p:cNvSpPr>
+          <p:nvPr/>
+        </p:nvSpPr>
+        <p:spPr>
+          <a:xfrm xmlns:a="http://schemas.openxmlformats.org/drawingml/2006/main">
+            <a:off x="5067300" y="3971925"/>
             <a:ext cx="1352550" cy="590550"/>
           </a:xfrm>
           <a:prstGeom xmlns:a="http://schemas.openxmlformats.org/drawingml/2006/main" prst="rect">
@@ -2117,18 +2213,18 @@
           <p:cNvPr id="11" name="">
             <a:extLst xmlns:a="http://schemas.openxmlformats.org/drawingml/2006/main">
               <a:ext uri="{FF2B5EF4-FFF2-40B4-BE49-F238E27FC236}">
-                <a16:creationId xmlns:a16="http://schemas.microsoft.com/office/drawing/2014/main" id="{BED304B6-3BAC-45A6-9F6C-53E46FA450C9}"/>
-              </a:ext>
-            </a:extLst>
-          </p:cNvPr>
-          <p:cNvSpPr>
-            <a:spLocks xmlns:a="http://schemas.openxmlformats.org/drawingml/2006/main" noGrp="1"/>
-          </p:cNvSpPr>
-          <p:nvPr/>
-        </p:nvSpPr>
-        <p:spPr>
-          <a:xfrm xmlns:a="http://schemas.openxmlformats.org/drawingml/2006/main">
-            <a:off x="6667500" y="3914775"/>
+                <a16:creationId xmlns:a16="http://schemas.microsoft.com/office/drawing/2014/main" id="{912F86DB-BDE7-4917-B774-60BD3883D174}"/>
+              </a:ext>
+            </a:extLst>
+          </p:cNvPr>
+          <p:cNvSpPr>
+            <a:spLocks xmlns:a="http://schemas.openxmlformats.org/drawingml/2006/main" noGrp="1"/>
+          </p:cNvSpPr>
+          <p:nvPr/>
+        </p:nvSpPr>
+        <p:spPr>
+          <a:xfrm xmlns:a="http://schemas.openxmlformats.org/drawingml/2006/main">
+            <a:off x="6667500" y="4029075"/>
             <a:ext cx="381000" cy="381000"/>
           </a:xfrm>
           <a:prstGeom xmlns:a="http://schemas.openxmlformats.org/drawingml/2006/main" prst="rect">
@@ -2167,18 +2263,18 @@
           <p:cNvPr id="12" name="">
             <a:extLst xmlns:a="http://schemas.openxmlformats.org/drawingml/2006/main">
               <a:ext uri="{FF2B5EF4-FFF2-40B4-BE49-F238E27FC236}">
-                <a16:creationId xmlns:a16="http://schemas.microsoft.com/office/drawing/2014/main" id="{E64430C5-FA62-4ACA-8146-EAFD2DADB5F3}"/>
-              </a:ext>
-            </a:extLst>
-          </p:cNvPr>
-          <p:cNvSpPr>
-            <a:spLocks xmlns:a="http://schemas.openxmlformats.org/drawingml/2006/main" noGrp="1"/>
-          </p:cNvSpPr>
-          <p:nvPr/>
-        </p:nvSpPr>
-        <p:spPr>
-          <a:xfrm xmlns:a="http://schemas.openxmlformats.org/drawingml/2006/main">
-            <a:off x="7153275" y="3714750"/>
+                <a16:creationId xmlns:a16="http://schemas.microsoft.com/office/drawing/2014/main" id="{5D68CDBA-9A29-40DE-8885-0AFC21686D79}"/>
+              </a:ext>
+            </a:extLst>
+          </p:cNvPr>
+          <p:cNvSpPr>
+            <a:spLocks xmlns:a="http://schemas.openxmlformats.org/drawingml/2006/main" noGrp="1"/>
+          </p:cNvSpPr>
+          <p:nvPr/>
+        </p:nvSpPr>
+        <p:spPr>
+          <a:xfrm xmlns:a="http://schemas.openxmlformats.org/drawingml/2006/main">
+            <a:off x="7153275" y="3829050"/>
             <a:ext cx="1619250" cy="781050"/>
           </a:xfrm>
           <a:prstGeom xmlns:a="http://schemas.openxmlformats.org/drawingml/2006/main" prst="roundRect">
@@ -2202,18 +2298,18 @@
           <p:cNvPr id="13" name="">
             <a:extLst xmlns:a="http://schemas.openxmlformats.org/drawingml/2006/main">
               <a:ext uri="{FF2B5EF4-FFF2-40B4-BE49-F238E27FC236}">
-                <a16:creationId xmlns:a16="http://schemas.microsoft.com/office/drawing/2014/main" id="{5F3E27A1-E09F-4C1E-95A0-40BDC32B69E7}"/>
-              </a:ext>
-            </a:extLst>
-          </p:cNvPr>
-          <p:cNvSpPr>
-            <a:spLocks xmlns:a="http://schemas.openxmlformats.org/drawingml/2006/main" noGrp="1"/>
-          </p:cNvSpPr>
-          <p:nvPr/>
-        </p:nvSpPr>
-        <p:spPr>
-          <a:xfrm xmlns:a="http://schemas.openxmlformats.org/drawingml/2006/main">
-            <a:off x="7286625" y="3857625"/>
+                <a16:creationId xmlns:a16="http://schemas.microsoft.com/office/drawing/2014/main" id="{A38CD4DA-A930-489C-9310-14F05BA6BA5E}"/>
+              </a:ext>
+            </a:extLst>
+          </p:cNvPr>
+          <p:cNvSpPr>
+            <a:spLocks xmlns:a="http://schemas.openxmlformats.org/drawingml/2006/main" noGrp="1"/>
+          </p:cNvSpPr>
+          <p:nvPr/>
+        </p:nvSpPr>
+        <p:spPr>
+          <a:xfrm xmlns:a="http://schemas.openxmlformats.org/drawingml/2006/main">
+            <a:off x="7286625" y="3971925"/>
             <a:ext cx="1352550" cy="590550"/>
           </a:xfrm>
           <a:prstGeom xmlns:a="http://schemas.openxmlformats.org/drawingml/2006/main" prst="rect">
@@ -2252,142 +2348,7 @@
           <p:cNvPr id="14" name="">
             <a:extLst xmlns:a="http://schemas.openxmlformats.org/drawingml/2006/main">
               <a:ext uri="{FF2B5EF4-FFF2-40B4-BE49-F238E27FC236}">
-                <a16:creationId xmlns:a16="http://schemas.microsoft.com/office/drawing/2014/main" id="{BB2B1A88-8AE0-4005-A8C8-2C92055BC963}"/>
-              </a:ext>
-            </a:extLst>
-          </p:cNvPr>
-          <p:cNvSpPr>
-            <a:spLocks xmlns:a="http://schemas.openxmlformats.org/drawingml/2006/main" noGrp="1"/>
-          </p:cNvSpPr>
-          <p:nvPr/>
-        </p:nvSpPr>
-        <p:spPr>
-          <a:xfrm xmlns:a="http://schemas.openxmlformats.org/drawingml/2006/main">
-            <a:off x="8839200" y="3105150"/>
-            <a:ext cx="2647950" cy="1847850"/>
-          </a:xfrm>
-          <a:prstGeom xmlns:a="http://schemas.openxmlformats.org/drawingml/2006/main" prst="roundRect">
-            <a:avLst>
-              <a:gd name="adj" fmla="val 3093"/>
-            </a:avLst>
-          </a:prstGeom>
-          <a:solidFill xmlns:a="http://schemas.openxmlformats.org/drawingml/2006/main">
-            <a:srgbClr val="F8FAFC"/>
-          </a:solidFill>
-          <a:ln xmlns:a="http://schemas.openxmlformats.org/drawingml/2006/main" w="9525">
-            <a:solidFill>
-              <a:srgbClr val="CBD5E1"/>
-            </a:solidFill>
-            <a:prstDash val="solid"/>
-          </a:ln>
-        </p:spPr>
-      </p:sp>
-      <p:sp>
-        <p:nvSpPr>
-          <p:cNvPr id="15" name="">
-            <a:extLst xmlns:a="http://schemas.openxmlformats.org/drawingml/2006/main">
-              <a:ext uri="{FF2B5EF4-FFF2-40B4-BE49-F238E27FC236}">
-                <a16:creationId xmlns:a16="http://schemas.microsoft.com/office/drawing/2014/main" id="{9DF9BA3E-33EB-43D1-A170-376786FF6407}"/>
-              </a:ext>
-            </a:extLst>
-          </p:cNvPr>
-          <p:cNvSpPr>
-            <a:spLocks xmlns:a="http://schemas.openxmlformats.org/drawingml/2006/main" noGrp="1"/>
-          </p:cNvSpPr>
-          <p:nvPr/>
-        </p:nvSpPr>
-        <p:spPr>
-          <a:xfrm xmlns:a="http://schemas.openxmlformats.org/drawingml/2006/main">
-            <a:off x="9086850" y="3371850"/>
-            <a:ext cx="2095500" cy="266700"/>
-          </a:xfrm>
-          <a:prstGeom xmlns:a="http://schemas.openxmlformats.org/drawingml/2006/main" prst="rect">
-            <a:avLst/>
-          </a:prstGeom>
-          <a:noFill xmlns:a="http://schemas.openxmlformats.org/drawingml/2006/main"/>
-          <a:ln xmlns:a="http://schemas.openxmlformats.org/drawingml/2006/main" w="0">
-            <a:noFill/>
-            <a:prstDash val="solid"/>
-          </a:ln>
-        </p:spPr>
-        <p:txBody>
-          <a:bodyPr xmlns:a="http://schemas.openxmlformats.org/drawingml/2006/main" anchor="t"/>
-          <a:lstStyle xmlns:a="http://schemas.openxmlformats.org/drawingml/2006/main"/>
-          <a:p xmlns:a="http://schemas.openxmlformats.org/drawingml/2006/main">
-            <a:pPr algn="l">
-              <a:defRPr sz="1800" b="1">
-                <a:solidFill>
-                  <a:srgbClr val="0F172A"/>
-                </a:solidFill>
-              </a:defRPr>
-            </a:pPr>
-            <a:r>
-              <a:rPr sz="1800" b="1">
-                <a:solidFill>
-                  <a:srgbClr val="0F172A"/>
-                </a:solidFill>
-              </a:rPr>
-              <a:t>Project goal</a:t>
-            </a:r>
-          </a:p>
-        </p:txBody>
-      </p:sp>
-      <p:sp>
-        <p:nvSpPr>
-          <p:cNvPr id="16" name="">
-            <a:extLst xmlns:a="http://schemas.openxmlformats.org/drawingml/2006/main">
-              <a:ext uri="{FF2B5EF4-FFF2-40B4-BE49-F238E27FC236}">
-                <a16:creationId xmlns:a16="http://schemas.microsoft.com/office/drawing/2014/main" id="{1D4D829E-C3B5-4F3D-8D8B-D1A6A987F3FB}"/>
-              </a:ext>
-            </a:extLst>
-          </p:cNvPr>
-          <p:cNvSpPr>
-            <a:spLocks xmlns:a="http://schemas.openxmlformats.org/drawingml/2006/main" noGrp="1"/>
-          </p:cNvSpPr>
-          <p:nvPr/>
-        </p:nvSpPr>
-        <p:spPr>
-          <a:xfrm xmlns:a="http://schemas.openxmlformats.org/drawingml/2006/main">
-            <a:off x="9086850" y="3752850"/>
-            <a:ext cx="2095500" cy="914400"/>
-          </a:xfrm>
-          <a:prstGeom xmlns:a="http://schemas.openxmlformats.org/drawingml/2006/main" prst="rect">
-            <a:avLst/>
-          </a:prstGeom>
-          <a:noFill xmlns:a="http://schemas.openxmlformats.org/drawingml/2006/main"/>
-          <a:ln xmlns:a="http://schemas.openxmlformats.org/drawingml/2006/main" w="0">
-            <a:noFill/>
-            <a:prstDash val="solid"/>
-          </a:ln>
-        </p:spPr>
-        <p:txBody>
-          <a:bodyPr xmlns:a="http://schemas.openxmlformats.org/drawingml/2006/main" anchor="t"/>
-          <a:lstStyle xmlns:a="http://schemas.openxmlformats.org/drawingml/2006/main"/>
-          <a:p xmlns:a="http://schemas.openxmlformats.org/drawingml/2006/main">
-            <a:pPr algn="l">
-              <a:defRPr sz="1350" b="0">
-                <a:solidFill>
-                  <a:srgbClr val="334155"/>
-                </a:solidFill>
-              </a:defRPr>
-            </a:pPr>
-            <a:r>
-              <a:rPr sz="1350" b="0">
-                <a:solidFill>
-                  <a:srgbClr val="334155"/>
-                </a:solidFill>
-              </a:rPr>
-              <a:t>Quantify the gap and prototype hint-guided KV movement as a path toward smarter DMA engines and runtime co-design.</a:t>
-            </a:r>
-          </a:p>
-        </p:txBody>
-      </p:sp>
-      <p:sp>
-        <p:nvSpPr>
-          <p:cNvPr id="17" name="">
-            <a:extLst xmlns:a="http://schemas.openxmlformats.org/drawingml/2006/main">
-              <a:ext uri="{FF2B5EF4-FFF2-40B4-BE49-F238E27FC236}">
-                <a16:creationId xmlns:a16="http://schemas.microsoft.com/office/drawing/2014/main" id="{22F9DADA-61E4-4736-AAFD-9F448C83B97A}"/>
+                <a16:creationId xmlns:a16="http://schemas.microsoft.com/office/drawing/2014/main" id="{80F15CE9-1606-4C61-A104-B79AFF4814FA}"/>
               </a:ext>
             </a:extLst>
           </p:cNvPr>
@@ -2434,10 +2395,10 @@
       </p:sp>
       <p:sp>
         <p:nvSpPr>
-          <p:cNvPr id="18" name="">
-            <a:extLst xmlns:a="http://schemas.openxmlformats.org/drawingml/2006/main">
-              <a:ext uri="{FF2B5EF4-FFF2-40B4-BE49-F238E27FC236}">
-                <a16:creationId xmlns:a16="http://schemas.microsoft.com/office/drawing/2014/main" id="{B57BD7DA-0E88-4657-B260-F843302001AD}"/>
+          <p:cNvPr id="15" name="">
+            <a:extLst xmlns:a="http://schemas.openxmlformats.org/drawingml/2006/main">
+              <a:ext uri="{FF2B5EF4-FFF2-40B4-BE49-F238E27FC236}">
+                <a16:creationId xmlns:a16="http://schemas.microsoft.com/office/drawing/2014/main" id="{FE975BE0-7819-490A-A228-0064DC6F914F}"/>
               </a:ext>
             </a:extLst>
           </p:cNvPr>
@@ -2485,7 +2446,7 @@
     </p:spTree>
     <p:extLst>
       <p:ext uri="{BB962C8B-B14F-4D97-AF65-F5344CB8AC3E}">
-        <p14:creationId xmlns:p14="http://schemas.microsoft.com/office/powerpoint/2010/main" val="468445094"/>
+        <p14:creationId xmlns:p14="http://schemas.microsoft.com/office/powerpoint/2010/main" val="1549167142"/>
       </p:ext>
     </p:extLst>
   </p:cSld>
@@ -2513,10 +2474,10 @@
       </p:grpSpPr>
       <p:sp>
         <p:nvSpPr>
-          <p:cNvPr id="26" name="">
-            <a:extLst xmlns:a="http://schemas.openxmlformats.org/drawingml/2006/main">
-              <a:ext uri="{FF2B5EF4-FFF2-40B4-BE49-F238E27FC236}">
-                <a16:creationId xmlns:a16="http://schemas.microsoft.com/office/drawing/2014/main" id="{5B304212-966E-44B6-8F26-05EBEC3CDA44}"/>
+          <p:cNvPr id="14" name="">
+            <a:extLst xmlns:a="http://schemas.openxmlformats.org/drawingml/2006/main">
+              <a:ext uri="{FF2B5EF4-FFF2-40B4-BE49-F238E27FC236}">
+                <a16:creationId xmlns:a16="http://schemas.microsoft.com/office/drawing/2014/main" id="{C16AA59A-BD22-4C13-B0C5-FAB2879E3C46}"/>
               </a:ext>
             </a:extLst>
           </p:cNvPr>
@@ -2556,7 +2517,7 @@
                   <a:srgbClr val="0F172A"/>
                 </a:solidFill>
               </a:rPr>
-              <a:t>Today’s DMA engines move bytes, not intent</a:t>
+              <a:t>The testbed uses both controlled and real agent traffic</a:t>
             </a:r>
           </a:p>
         </p:txBody>
@@ -2566,7 +2527,7 @@
           <p:cNvPr id="2" name="">
             <a:extLst xmlns:a="http://schemas.openxmlformats.org/drawingml/2006/main">
               <a:ext uri="{FF2B5EF4-FFF2-40B4-BE49-F238E27FC236}">
-                <a16:creationId xmlns:a16="http://schemas.microsoft.com/office/drawing/2014/main" id="{B7C767E8-0849-45F5-8D52-B4AB742D0800}"/>
+                <a16:creationId xmlns:a16="http://schemas.microsoft.com/office/drawing/2014/main" id="{4B9124A5-F0DF-4F8B-A6F7-5C00736C990F}"/>
               </a:ext>
             </a:extLst>
           </p:cNvPr>
@@ -2606,7 +2567,7 @@
                   <a:srgbClr val="64748B"/>
                 </a:solidFill>
               </a:rPr>
-              <a:t>The hardware path is fast, but it usually lacks agent/session semantics.</a:t>
+              <a:t>Synthetic request generators give clean knobs; SWE-bench/DeepAgents traces give realistic coding-agent behavior.</a:t>
             </a:r>
           </a:p>
         </p:txBody>
@@ -2616,23 +2577,80 @@
           <p:cNvPr id="3" name="">
             <a:extLst xmlns:a="http://schemas.openxmlformats.org/drawingml/2006/main">
               <a:ext uri="{FF2B5EF4-FFF2-40B4-BE49-F238E27FC236}">
-                <a16:creationId xmlns:a16="http://schemas.microsoft.com/office/drawing/2014/main" id="{65934149-74FB-4362-932E-00984051B5CC}"/>
-              </a:ext>
-            </a:extLst>
-          </p:cNvPr>
-          <p:cNvSpPr>
-            <a:spLocks xmlns:a="http://schemas.openxmlformats.org/drawingml/2006/main" noGrp="1"/>
-          </p:cNvSpPr>
-          <p:nvPr/>
-        </p:nvSpPr>
-        <p:spPr>
-          <a:xfrm xmlns:a="http://schemas.openxmlformats.org/drawingml/2006/main">
-            <a:off x="552450" y="1790700"/>
-            <a:ext cx="4953000" cy="3429000"/>
+                <a16:creationId xmlns:a16="http://schemas.microsoft.com/office/drawing/2014/main" id="{23DA23A4-2D27-48C3-B1E5-D14DD439DBE8}"/>
+              </a:ext>
+            </a:extLst>
+          </p:cNvPr>
+          <p:cNvSpPr>
+            <a:spLocks xmlns:a="http://schemas.openxmlformats.org/drawingml/2006/main" noGrp="1"/>
+          </p:cNvSpPr>
+          <p:nvPr/>
+        </p:nvSpPr>
+        <p:spPr>
+          <a:xfrm xmlns:a="http://schemas.openxmlformats.org/drawingml/2006/main">
+            <a:off x="419100" y="1428750"/>
+            <a:ext cx="11353800" cy="1790700"/>
           </a:xfrm>
           <a:prstGeom xmlns:a="http://schemas.openxmlformats.org/drawingml/2006/main" prst="roundRect">
             <a:avLst>
-              <a:gd name="adj" fmla="val 1667"/>
+              <a:gd name="adj" fmla="val 3191"/>
+            </a:avLst>
+          </a:prstGeom>
+          <a:solidFill xmlns:a="http://schemas.openxmlformats.org/drawingml/2006/main">
+            <a:srgbClr val="FFFFFF"/>
+          </a:solidFill>
+          <a:ln xmlns:a="http://schemas.openxmlformats.org/drawingml/2006/main" w="9525">
+            <a:solidFill>
+              <a:srgbClr val="E5E7EB"/>
+            </a:solidFill>
+            <a:prstDash val="solid"/>
+          </a:ln>
+        </p:spPr>
+      </p:sp>
+      <p:pic>
+        <p:nvPicPr>
+          <p:cNvPr id="17" name=""/>
+          <p:cNvPicPr>
+            <a:picLocks xmlns:a="http://schemas.openxmlformats.org/drawingml/2006/main" noChangeAspect="1"/>
+          </p:cNvPicPr>
+          <p:nvPr/>
+        </p:nvPicPr>
+        <p:blipFill>
+          <a:blip xmlns:r="http://schemas.openxmlformats.org/officeDocument/2006/relationships" xmlns:a="http://schemas.openxmlformats.org/drawingml/2006/main" r:embed="Rc652ccb7afff48c1"/>
+          <a:stretch xmlns:a="http://schemas.openxmlformats.org/drawingml/2006/main"/>
+        </p:blipFill>
+        <p:spPr>
+          <a:xfrm xmlns:a="http://schemas.openxmlformats.org/drawingml/2006/main">
+            <a:off x="496830" y="1504950"/>
+            <a:ext cx="11198340" cy="1638300"/>
+          </a:xfrm>
+          <a:prstGeom xmlns:a="http://schemas.openxmlformats.org/drawingml/2006/main" prst="rect">
+            <a:avLst/>
+          </a:prstGeom>
+        </p:spPr>
+      </p:pic>
+      <p:sp>
+        <p:nvSpPr>
+          <p:cNvPr id="5" name="">
+            <a:extLst xmlns:a="http://schemas.openxmlformats.org/drawingml/2006/main">
+              <a:ext uri="{FF2B5EF4-FFF2-40B4-BE49-F238E27FC236}">
+                <a16:creationId xmlns:a16="http://schemas.microsoft.com/office/drawing/2014/main" id="{799AB612-0BB8-4FFC-A7E6-0A1437B9CD6B}"/>
+              </a:ext>
+            </a:extLst>
+          </p:cNvPr>
+          <p:cNvSpPr>
+            <a:spLocks xmlns:a="http://schemas.openxmlformats.org/drawingml/2006/main" noGrp="1"/>
+          </p:cNvSpPr>
+          <p:nvPr/>
+        </p:nvSpPr>
+        <p:spPr>
+          <a:xfrm xmlns:a="http://schemas.openxmlformats.org/drawingml/2006/main">
+            <a:off x="819150" y="3733800"/>
+            <a:ext cx="4552950" cy="1428750"/>
+          </a:xfrm>
+          <a:prstGeom xmlns:a="http://schemas.openxmlformats.org/drawingml/2006/main" prst="roundRect">
+            <a:avLst>
+              <a:gd name="adj" fmla="val 4000"/>
             </a:avLst>
           </a:prstGeom>
           <a:solidFill xmlns:a="http://schemas.openxmlformats.org/drawingml/2006/main">
@@ -2648,22 +2666,22 @@
       </p:sp>
       <p:sp>
         <p:nvSpPr>
-          <p:cNvPr id="4" name="">
-            <a:extLst xmlns:a="http://schemas.openxmlformats.org/drawingml/2006/main">
-              <a:ext uri="{FF2B5EF4-FFF2-40B4-BE49-F238E27FC236}">
-                <a16:creationId xmlns:a16="http://schemas.microsoft.com/office/drawing/2014/main" id="{BF92E4E6-4CE4-4DA4-90DF-A8DAFFA0F10B}"/>
-              </a:ext>
-            </a:extLst>
-          </p:cNvPr>
-          <p:cNvSpPr>
-            <a:spLocks xmlns:a="http://schemas.openxmlformats.org/drawingml/2006/main" noGrp="1"/>
-          </p:cNvSpPr>
-          <p:nvPr/>
-        </p:nvSpPr>
-        <p:spPr>
-          <a:xfrm xmlns:a="http://schemas.openxmlformats.org/drawingml/2006/main">
-            <a:off x="838200" y="2076450"/>
-            <a:ext cx="4191000" cy="323850"/>
+          <p:cNvPr id="6" name="">
+            <a:extLst xmlns:a="http://schemas.openxmlformats.org/drawingml/2006/main">
+              <a:ext uri="{FF2B5EF4-FFF2-40B4-BE49-F238E27FC236}">
+                <a16:creationId xmlns:a16="http://schemas.microsoft.com/office/drawing/2014/main" id="{73569E6B-4898-4726-9DC8-63A85BA77CE6}"/>
+              </a:ext>
+            </a:extLst>
+          </p:cNvPr>
+          <p:cNvSpPr>
+            <a:spLocks xmlns:a="http://schemas.openxmlformats.org/drawingml/2006/main" noGrp="1"/>
+          </p:cNvSpPr>
+          <p:nvPr/>
+        </p:nvSpPr>
+        <p:spPr>
+          <a:xfrm xmlns:a="http://schemas.openxmlformats.org/drawingml/2006/main">
+            <a:off x="1104900" y="3962400"/>
+            <a:ext cx="3714750" cy="285750"/>
           </a:xfrm>
           <a:prstGeom xmlns:a="http://schemas.openxmlformats.org/drawingml/2006/main" prst="rect">
             <a:avLst/>
@@ -2679,72 +2697,41 @@
           <a:lstStyle xmlns:a="http://schemas.openxmlformats.org/drawingml/2006/main"/>
           <a:p xmlns:a="http://schemas.openxmlformats.org/drawingml/2006/main">
             <a:pPr algn="l">
-              <a:defRPr sz="1950" b="1">
+              <a:defRPr sz="1800" b="1">
                 <a:solidFill>
                   <a:srgbClr val="0F172A"/>
                 </a:solidFill>
               </a:defRPr>
             </a:pPr>
             <a:r>
-              <a:rPr sz="1950" b="1">
+              <a:rPr sz="1800" b="1">
                 <a:solidFill>
                   <a:srgbClr val="0F172A"/>
                 </a:solidFill>
               </a:rPr>
-              <a:t>Context-agnostic movement</a:t>
-            </a:r>
-          </a:p>
-        </p:txBody>
-      </p:sp>
-      <p:sp>
-        <p:nvSpPr>
-          <p:cNvPr id="5" name="">
-            <a:extLst xmlns:a="http://schemas.openxmlformats.org/drawingml/2006/main">
-              <a:ext uri="{FF2B5EF4-FFF2-40B4-BE49-F238E27FC236}">
-                <a16:creationId xmlns:a16="http://schemas.microsoft.com/office/drawing/2014/main" id="{705A6D02-8F02-4A1E-B67B-3C8DD6639D01}"/>
-              </a:ext>
-            </a:extLst>
-          </p:cNvPr>
-          <p:cNvSpPr>
-            <a:spLocks xmlns:a="http://schemas.openxmlformats.org/drawingml/2006/main" noGrp="1"/>
-          </p:cNvSpPr>
-          <p:nvPr/>
-        </p:nvSpPr>
-        <p:spPr>
-          <a:xfrm xmlns:a="http://schemas.openxmlformats.org/drawingml/2006/main">
-            <a:off x="876300" y="2781300"/>
-            <a:ext cx="85725" cy="85725"/>
-          </a:xfrm>
-          <a:prstGeom xmlns:a="http://schemas.openxmlformats.org/drawingml/2006/main" prst="ellipse">
-            <a:avLst/>
-          </a:prstGeom>
-          <a:solidFill xmlns:a="http://schemas.openxmlformats.org/drawingml/2006/main">
-            <a:srgbClr val="64748B"/>
-          </a:solidFill>
-          <a:ln xmlns:a="http://schemas.openxmlformats.org/drawingml/2006/main" w="0">
-            <a:noFill/>
-            <a:prstDash val="solid"/>
-          </a:ln>
-        </p:spPr>
-      </p:sp>
-      <p:sp>
-        <p:nvSpPr>
-          <p:cNvPr id="6" name="">
-            <a:extLst xmlns:a="http://schemas.openxmlformats.org/drawingml/2006/main">
-              <a:ext uri="{FF2B5EF4-FFF2-40B4-BE49-F238E27FC236}">
-                <a16:creationId xmlns:a16="http://schemas.microsoft.com/office/drawing/2014/main" id="{3A2B59A9-B308-4E3E-9279-DACB36CB6F4C}"/>
-              </a:ext>
-            </a:extLst>
-          </p:cNvPr>
-          <p:cNvSpPr>
-            <a:spLocks xmlns:a="http://schemas.openxmlformats.org/drawingml/2006/main" noGrp="1"/>
-          </p:cNvSpPr>
-          <p:nvPr/>
-        </p:nvSpPr>
-        <p:spPr>
-          <a:xfrm xmlns:a="http://schemas.openxmlformats.org/drawingml/2006/main">
-            <a:off x="1104900" y="2705100"/>
-            <a:ext cx="3771900" cy="400050"/>
+              <a:t>Controlled synthetic path</a:t>
+            </a:r>
+          </a:p>
+        </p:txBody>
+      </p:sp>
+      <p:sp>
+        <p:nvSpPr>
+          <p:cNvPr id="7" name="">
+            <a:extLst xmlns:a="http://schemas.openxmlformats.org/drawingml/2006/main">
+              <a:ext uri="{FF2B5EF4-FFF2-40B4-BE49-F238E27FC236}">
+                <a16:creationId xmlns:a16="http://schemas.microsoft.com/office/drawing/2014/main" id="{8AEF6E1E-6D4F-46A0-8C33-15A81B8F2806}"/>
+              </a:ext>
+            </a:extLst>
+          </p:cNvPr>
+          <p:cNvSpPr>
+            <a:spLocks xmlns:a="http://schemas.openxmlformats.org/drawingml/2006/main" noGrp="1"/>
+          </p:cNvSpPr>
+          <p:nvPr/>
+        </p:nvSpPr>
+        <p:spPr>
+          <a:xfrm xmlns:a="http://schemas.openxmlformats.org/drawingml/2006/main">
+            <a:off x="1104900" y="4362450"/>
+            <a:ext cx="3695700" cy="552450"/>
           </a:xfrm>
           <a:prstGeom xmlns:a="http://schemas.openxmlformats.org/drawingml/2006/main" prst="rect">
             <a:avLst/>
@@ -2760,338 +2747,45 @@
           <a:lstStyle xmlns:a="http://schemas.openxmlformats.org/drawingml/2006/main"/>
           <a:p xmlns:a="http://schemas.openxmlformats.org/drawingml/2006/main">
             <a:pPr algn="l">
-              <a:defRPr sz="1500" b="0">
+              <a:defRPr sz="1350" b="0">
                 <a:solidFill>
                   <a:srgbClr val="334155"/>
                 </a:solidFill>
               </a:defRPr>
             </a:pPr>
             <a:r>
-              <a:rPr sz="1500" b="0">
+              <a:rPr sz="1350" b="0">
                 <a:solidFill>
                   <a:srgbClr val="334155"/>
                 </a:solidFill>
               </a:rPr>
-              <a:t>sees memory ranges</a:t>
-            </a:r>
-          </a:p>
-        </p:txBody>
-      </p:sp>
-      <p:sp>
-        <p:nvSpPr>
-          <p:cNvPr id="7" name="">
-            <a:extLst xmlns:a="http://schemas.openxmlformats.org/drawingml/2006/main">
-              <a:ext uri="{FF2B5EF4-FFF2-40B4-BE49-F238E27FC236}">
-                <a16:creationId xmlns:a16="http://schemas.microsoft.com/office/drawing/2014/main" id="{823DF2F5-C198-4BC6-878B-21A46003FB84}"/>
-              </a:ext>
-            </a:extLst>
-          </p:cNvPr>
-          <p:cNvSpPr>
-            <a:spLocks xmlns:a="http://schemas.openxmlformats.org/drawingml/2006/main" noGrp="1"/>
-          </p:cNvSpPr>
-          <p:nvPr/>
-        </p:nvSpPr>
-        <p:spPr>
-          <a:xfrm xmlns:a="http://schemas.openxmlformats.org/drawingml/2006/main">
-            <a:off x="876300" y="3295650"/>
-            <a:ext cx="85725" cy="85725"/>
-          </a:xfrm>
-          <a:prstGeom xmlns:a="http://schemas.openxmlformats.org/drawingml/2006/main" prst="ellipse">
-            <a:avLst/>
-          </a:prstGeom>
-          <a:solidFill xmlns:a="http://schemas.openxmlformats.org/drawingml/2006/main">
-            <a:srgbClr val="64748B"/>
-          </a:solidFill>
-          <a:ln xmlns:a="http://schemas.openxmlformats.org/drawingml/2006/main" w="0">
-            <a:noFill/>
-            <a:prstDash val="solid"/>
-          </a:ln>
-        </p:spPr>
+              <a:t>Synthetic request generator creates known prompt sizes, tool-wait windows, filler pressure, and replay deadlines.</a:t>
+            </a:r>
+          </a:p>
+        </p:txBody>
       </p:sp>
       <p:sp>
         <p:nvSpPr>
           <p:cNvPr id="8" name="">
             <a:extLst xmlns:a="http://schemas.openxmlformats.org/drawingml/2006/main">
               <a:ext uri="{FF2B5EF4-FFF2-40B4-BE49-F238E27FC236}">
-                <a16:creationId xmlns:a16="http://schemas.microsoft.com/office/drawing/2014/main" id="{2FA0C711-3EC2-4004-8707-E9942CD12346}"/>
-              </a:ext>
-            </a:extLst>
-          </p:cNvPr>
-          <p:cNvSpPr>
-            <a:spLocks xmlns:a="http://schemas.openxmlformats.org/drawingml/2006/main" noGrp="1"/>
-          </p:cNvSpPr>
-          <p:nvPr/>
-        </p:nvSpPr>
-        <p:spPr>
-          <a:xfrm xmlns:a="http://schemas.openxmlformats.org/drawingml/2006/main">
-            <a:off x="1104900" y="3219450"/>
-            <a:ext cx="3771900" cy="400050"/>
-          </a:xfrm>
-          <a:prstGeom xmlns:a="http://schemas.openxmlformats.org/drawingml/2006/main" prst="rect">
-            <a:avLst/>
-          </a:prstGeom>
-          <a:noFill xmlns:a="http://schemas.openxmlformats.org/drawingml/2006/main"/>
-          <a:ln xmlns:a="http://schemas.openxmlformats.org/drawingml/2006/main" w="0">
-            <a:noFill/>
-            <a:prstDash val="solid"/>
-          </a:ln>
-        </p:spPr>
-        <p:txBody>
-          <a:bodyPr xmlns:a="http://schemas.openxmlformats.org/drawingml/2006/main" anchor="t"/>
-          <a:lstStyle xmlns:a="http://schemas.openxmlformats.org/drawingml/2006/main"/>
-          <a:p xmlns:a="http://schemas.openxmlformats.org/drawingml/2006/main">
-            <a:pPr algn="l">
-              <a:defRPr sz="1500" b="0">
-                <a:solidFill>
-                  <a:srgbClr val="334155"/>
-                </a:solidFill>
-              </a:defRPr>
-            </a:pPr>
-            <a:r>
-              <a:rPr sz="1500" b="0">
-                <a:solidFill>
-                  <a:srgbClr val="334155"/>
-                </a:solidFill>
-              </a:rPr>
-              <a:t>does not know the agent session</a:t>
-            </a:r>
-          </a:p>
-        </p:txBody>
-      </p:sp>
-      <p:sp>
-        <p:nvSpPr>
-          <p:cNvPr id="9" name="">
-            <a:extLst xmlns:a="http://schemas.openxmlformats.org/drawingml/2006/main">
-              <a:ext uri="{FF2B5EF4-FFF2-40B4-BE49-F238E27FC236}">
-                <a16:creationId xmlns:a16="http://schemas.microsoft.com/office/drawing/2014/main" id="{BF0E8A9E-C64B-4EAA-BBF8-583CB1DF4FEA}"/>
-              </a:ext>
-            </a:extLst>
-          </p:cNvPr>
-          <p:cNvSpPr>
-            <a:spLocks xmlns:a="http://schemas.openxmlformats.org/drawingml/2006/main" noGrp="1"/>
-          </p:cNvSpPr>
-          <p:nvPr/>
-        </p:nvSpPr>
-        <p:spPr>
-          <a:xfrm xmlns:a="http://schemas.openxmlformats.org/drawingml/2006/main">
-            <a:off x="876300" y="3810000"/>
-            <a:ext cx="85725" cy="85725"/>
-          </a:xfrm>
-          <a:prstGeom xmlns:a="http://schemas.openxmlformats.org/drawingml/2006/main" prst="ellipse">
-            <a:avLst/>
-          </a:prstGeom>
-          <a:solidFill xmlns:a="http://schemas.openxmlformats.org/drawingml/2006/main">
-            <a:srgbClr val="64748B"/>
-          </a:solidFill>
-          <a:ln xmlns:a="http://schemas.openxmlformats.org/drawingml/2006/main" w="0">
-            <a:noFill/>
-            <a:prstDash val="solid"/>
-          </a:ln>
-        </p:spPr>
-      </p:sp>
-      <p:sp>
-        <p:nvSpPr>
-          <p:cNvPr id="10" name="">
-            <a:extLst xmlns:a="http://schemas.openxmlformats.org/drawingml/2006/main">
-              <a:ext uri="{FF2B5EF4-FFF2-40B4-BE49-F238E27FC236}">
-                <a16:creationId xmlns:a16="http://schemas.microsoft.com/office/drawing/2014/main" id="{5B063394-4E0A-4ACC-B624-84E082594B77}"/>
-              </a:ext>
-            </a:extLst>
-          </p:cNvPr>
-          <p:cNvSpPr>
-            <a:spLocks xmlns:a="http://schemas.openxmlformats.org/drawingml/2006/main" noGrp="1"/>
-          </p:cNvSpPr>
-          <p:nvPr/>
-        </p:nvSpPr>
-        <p:spPr>
-          <a:xfrm xmlns:a="http://schemas.openxmlformats.org/drawingml/2006/main">
-            <a:off x="1104900" y="3733800"/>
-            <a:ext cx="3771900" cy="400050"/>
-          </a:xfrm>
-          <a:prstGeom xmlns:a="http://schemas.openxmlformats.org/drawingml/2006/main" prst="rect">
-            <a:avLst/>
-          </a:prstGeom>
-          <a:noFill xmlns:a="http://schemas.openxmlformats.org/drawingml/2006/main"/>
-          <a:ln xmlns:a="http://schemas.openxmlformats.org/drawingml/2006/main" w="0">
-            <a:noFill/>
-            <a:prstDash val="solid"/>
-          </a:ln>
-        </p:spPr>
-        <p:txBody>
-          <a:bodyPr xmlns:a="http://schemas.openxmlformats.org/drawingml/2006/main" anchor="t"/>
-          <a:lstStyle xmlns:a="http://schemas.openxmlformats.org/drawingml/2006/main"/>
-          <a:p xmlns:a="http://schemas.openxmlformats.org/drawingml/2006/main">
-            <a:pPr algn="l">
-              <a:defRPr sz="1500" b="0">
-                <a:solidFill>
-                  <a:srgbClr val="334155"/>
-                </a:solidFill>
-              </a:defRPr>
-            </a:pPr>
-            <a:r>
-              <a:rPr sz="1500" b="0">
-                <a:solidFill>
-                  <a:srgbClr val="334155"/>
-                </a:solidFill>
-              </a:rPr>
-              <a:t>does not know replay deadline</a:t>
-            </a:r>
-          </a:p>
-        </p:txBody>
-      </p:sp>
-      <p:sp>
-        <p:nvSpPr>
-          <p:cNvPr id="11" name="">
-            <a:extLst xmlns:a="http://schemas.openxmlformats.org/drawingml/2006/main">
-              <a:ext uri="{FF2B5EF4-FFF2-40B4-BE49-F238E27FC236}">
-                <a16:creationId xmlns:a16="http://schemas.microsoft.com/office/drawing/2014/main" id="{E7D7D880-0AC8-48F1-93B7-D6559F8D4A8B}"/>
-              </a:ext>
-            </a:extLst>
-          </p:cNvPr>
-          <p:cNvSpPr>
-            <a:spLocks xmlns:a="http://schemas.openxmlformats.org/drawingml/2006/main" noGrp="1"/>
-          </p:cNvSpPr>
-          <p:nvPr/>
-        </p:nvSpPr>
-        <p:spPr>
-          <a:xfrm xmlns:a="http://schemas.openxmlformats.org/drawingml/2006/main">
-            <a:off x="876300" y="4324350"/>
-            <a:ext cx="85725" cy="85725"/>
-          </a:xfrm>
-          <a:prstGeom xmlns:a="http://schemas.openxmlformats.org/drawingml/2006/main" prst="ellipse">
-            <a:avLst/>
-          </a:prstGeom>
-          <a:solidFill xmlns:a="http://schemas.openxmlformats.org/drawingml/2006/main">
-            <a:srgbClr val="64748B"/>
-          </a:solidFill>
-          <a:ln xmlns:a="http://schemas.openxmlformats.org/drawingml/2006/main" w="0">
-            <a:noFill/>
-            <a:prstDash val="solid"/>
-          </a:ln>
-        </p:spPr>
-      </p:sp>
-      <p:sp>
-        <p:nvSpPr>
-          <p:cNvPr id="12" name="">
-            <a:extLst xmlns:a="http://schemas.openxmlformats.org/drawingml/2006/main">
-              <a:ext uri="{FF2B5EF4-FFF2-40B4-BE49-F238E27FC236}">
-                <a16:creationId xmlns:a16="http://schemas.microsoft.com/office/drawing/2014/main" id="{7BE8E679-ADDB-4925-B4CF-C41A7CA918FA}"/>
-              </a:ext>
-            </a:extLst>
-          </p:cNvPr>
-          <p:cNvSpPr>
-            <a:spLocks xmlns:a="http://schemas.openxmlformats.org/drawingml/2006/main" noGrp="1"/>
-          </p:cNvSpPr>
-          <p:nvPr/>
-        </p:nvSpPr>
-        <p:spPr>
-          <a:xfrm xmlns:a="http://schemas.openxmlformats.org/drawingml/2006/main">
-            <a:off x="1104900" y="4248150"/>
-            <a:ext cx="3771900" cy="400050"/>
-          </a:xfrm>
-          <a:prstGeom xmlns:a="http://schemas.openxmlformats.org/drawingml/2006/main" prst="rect">
-            <a:avLst/>
-          </a:prstGeom>
-          <a:noFill xmlns:a="http://schemas.openxmlformats.org/drawingml/2006/main"/>
-          <a:ln xmlns:a="http://schemas.openxmlformats.org/drawingml/2006/main" w="0">
-            <a:noFill/>
-            <a:prstDash val="solid"/>
-          </a:ln>
-        </p:spPr>
-        <p:txBody>
-          <a:bodyPr xmlns:a="http://schemas.openxmlformats.org/drawingml/2006/main" anchor="t"/>
-          <a:lstStyle xmlns:a="http://schemas.openxmlformats.org/drawingml/2006/main"/>
-          <a:p xmlns:a="http://schemas.openxmlformats.org/drawingml/2006/main">
-            <a:pPr algn="l">
-              <a:defRPr sz="1500" b="0">
-                <a:solidFill>
-                  <a:srgbClr val="334155"/>
-                </a:solidFill>
-              </a:defRPr>
-            </a:pPr>
-            <a:r>
-              <a:rPr sz="1500" b="0">
-                <a:solidFill>
-                  <a:srgbClr val="334155"/>
-                </a:solidFill>
-              </a:rPr>
-              <a:t>does not protect useful prefetched KV</a:t>
-            </a:r>
-          </a:p>
-        </p:txBody>
-      </p:sp>
-      <p:sp>
-        <p:nvSpPr>
-          <p:cNvPr id="13" name="">
-            <a:extLst xmlns:a="http://schemas.openxmlformats.org/drawingml/2006/main">
-              <a:ext uri="{FF2B5EF4-FFF2-40B4-BE49-F238E27FC236}">
-                <a16:creationId xmlns:a16="http://schemas.microsoft.com/office/drawing/2014/main" id="{D4A0AFAA-1A9D-4D87-A732-A83E2648C18B}"/>
-              </a:ext>
-            </a:extLst>
-          </p:cNvPr>
-          <p:cNvSpPr>
-            <a:spLocks xmlns:a="http://schemas.openxmlformats.org/drawingml/2006/main" noGrp="1"/>
-          </p:cNvSpPr>
-          <p:nvPr/>
-        </p:nvSpPr>
-        <p:spPr>
-          <a:xfrm xmlns:a="http://schemas.openxmlformats.org/drawingml/2006/main">
-            <a:off x="5753100" y="3086100"/>
-            <a:ext cx="666750" cy="666750"/>
-          </a:xfrm>
-          <a:prstGeom xmlns:a="http://schemas.openxmlformats.org/drawingml/2006/main" prst="rect">
-            <a:avLst/>
-          </a:prstGeom>
-          <a:noFill xmlns:a="http://schemas.openxmlformats.org/drawingml/2006/main"/>
-          <a:ln xmlns:a="http://schemas.openxmlformats.org/drawingml/2006/main" w="0">
-            <a:noFill/>
-            <a:prstDash val="solid"/>
-          </a:ln>
-        </p:spPr>
-        <p:txBody>
-          <a:bodyPr xmlns:a="http://schemas.openxmlformats.org/drawingml/2006/main" anchor="t"/>
-          <a:lstStyle xmlns:a="http://schemas.openxmlformats.org/drawingml/2006/main"/>
-          <a:p xmlns:a="http://schemas.openxmlformats.org/drawingml/2006/main">
-            <a:pPr algn="ctr">
-              <a:defRPr sz="4050" b="1">
-                <a:solidFill>
-                  <a:srgbClr val="64748B"/>
-                </a:solidFill>
-              </a:defRPr>
-            </a:pPr>
-            <a:r>
-              <a:rPr sz="4050" b="1">
-                <a:solidFill>
-                  <a:srgbClr val="64748B"/>
-                </a:solidFill>
-              </a:rPr>
-              <a:t>→</a:t>
-            </a:r>
-          </a:p>
-        </p:txBody>
-      </p:sp>
-      <p:sp>
-        <p:nvSpPr>
-          <p:cNvPr id="14" name="">
-            <a:extLst xmlns:a="http://schemas.openxmlformats.org/drawingml/2006/main">
-              <a:ext uri="{FF2B5EF4-FFF2-40B4-BE49-F238E27FC236}">
-                <a16:creationId xmlns:a16="http://schemas.microsoft.com/office/drawing/2014/main" id="{7FEDF2CE-312F-40F4-A22A-BA6916369483}"/>
-              </a:ext>
-            </a:extLst>
-          </p:cNvPr>
-          <p:cNvSpPr>
-            <a:spLocks xmlns:a="http://schemas.openxmlformats.org/drawingml/2006/main" noGrp="1"/>
-          </p:cNvSpPr>
-          <p:nvPr/>
-        </p:nvSpPr>
-        <p:spPr>
-          <a:xfrm xmlns:a="http://schemas.openxmlformats.org/drawingml/2006/main">
-            <a:off x="6686550" y="1790700"/>
-            <a:ext cx="4953000" cy="3429000"/>
+                <a16:creationId xmlns:a16="http://schemas.microsoft.com/office/drawing/2014/main" id="{95E25240-55B1-4486-8F1A-F8C93598E1E3}"/>
+              </a:ext>
+            </a:extLst>
+          </p:cNvPr>
+          <p:cNvSpPr>
+            <a:spLocks xmlns:a="http://schemas.openxmlformats.org/drawingml/2006/main" noGrp="1"/>
+          </p:cNvSpPr>
+          <p:nvPr/>
+        </p:nvSpPr>
+        <p:spPr>
+          <a:xfrm xmlns:a="http://schemas.openxmlformats.org/drawingml/2006/main">
+            <a:off x="6096000" y="3733800"/>
+            <a:ext cx="4552950" cy="1428750"/>
           </a:xfrm>
           <a:prstGeom xmlns:a="http://schemas.openxmlformats.org/drawingml/2006/main" prst="roundRect">
             <a:avLst>
-              <a:gd name="adj" fmla="val 1667"/>
+              <a:gd name="adj" fmla="val 4000"/>
             </a:avLst>
           </a:prstGeom>
           <a:solidFill xmlns:a="http://schemas.openxmlformats.org/drawingml/2006/main">
@@ -3107,22 +2801,22 @@
       </p:sp>
       <p:sp>
         <p:nvSpPr>
-          <p:cNvPr id="15" name="">
-            <a:extLst xmlns:a="http://schemas.openxmlformats.org/drawingml/2006/main">
-              <a:ext uri="{FF2B5EF4-FFF2-40B4-BE49-F238E27FC236}">
-                <a16:creationId xmlns:a16="http://schemas.microsoft.com/office/drawing/2014/main" id="{A9090AA3-28D2-4F87-89FE-DFA241B0007F}"/>
-              </a:ext>
-            </a:extLst>
-          </p:cNvPr>
-          <p:cNvSpPr>
-            <a:spLocks xmlns:a="http://schemas.openxmlformats.org/drawingml/2006/main" noGrp="1"/>
-          </p:cNvSpPr>
-          <p:nvPr/>
-        </p:nvSpPr>
-        <p:spPr>
-          <a:xfrm xmlns:a="http://schemas.openxmlformats.org/drawingml/2006/main">
-            <a:off x="6972300" y="2076450"/>
-            <a:ext cx="4000500" cy="323850"/>
+          <p:cNvPr id="9" name="">
+            <a:extLst xmlns:a="http://schemas.openxmlformats.org/drawingml/2006/main">
+              <a:ext uri="{FF2B5EF4-FFF2-40B4-BE49-F238E27FC236}">
+                <a16:creationId xmlns:a16="http://schemas.microsoft.com/office/drawing/2014/main" id="{3F461627-3B8C-4FEA-A511-73B437BFC36F}"/>
+              </a:ext>
+            </a:extLst>
+          </p:cNvPr>
+          <p:cNvSpPr>
+            <a:spLocks xmlns:a="http://schemas.openxmlformats.org/drawingml/2006/main" noGrp="1"/>
+          </p:cNvSpPr>
+          <p:nvPr/>
+        </p:nvSpPr>
+        <p:spPr>
+          <a:xfrm xmlns:a="http://schemas.openxmlformats.org/drawingml/2006/main">
+            <a:off x="6381750" y="3962400"/>
+            <a:ext cx="3714750" cy="285750"/>
           </a:xfrm>
           <a:prstGeom xmlns:a="http://schemas.openxmlformats.org/drawingml/2006/main" prst="rect">
             <a:avLst/>
@@ -3138,72 +2832,41 @@
           <a:lstStyle xmlns:a="http://schemas.openxmlformats.org/drawingml/2006/main"/>
           <a:p xmlns:a="http://schemas.openxmlformats.org/drawingml/2006/main">
             <a:pPr algn="l">
-              <a:defRPr sz="1950" b="1">
+              <a:defRPr sz="1800" b="1">
                 <a:solidFill>
                   <a:srgbClr val="0F172A"/>
                 </a:solidFill>
               </a:defRPr>
             </a:pPr>
             <a:r>
-              <a:rPr sz="1950" b="1">
+              <a:rPr sz="1800" b="1">
                 <a:solidFill>
                   <a:srgbClr val="0F172A"/>
                 </a:solidFill>
               </a:rPr>
-              <a:t>Hint-aware movement</a:t>
-            </a:r>
-          </a:p>
-        </p:txBody>
-      </p:sp>
-      <p:sp>
-        <p:nvSpPr>
-          <p:cNvPr id="16" name="">
-            <a:extLst xmlns:a="http://schemas.openxmlformats.org/drawingml/2006/main">
-              <a:ext uri="{FF2B5EF4-FFF2-40B4-BE49-F238E27FC236}">
-                <a16:creationId xmlns:a16="http://schemas.microsoft.com/office/drawing/2014/main" id="{3815F2C9-5625-48F2-A652-A91309A84376}"/>
-              </a:ext>
-            </a:extLst>
-          </p:cNvPr>
-          <p:cNvSpPr>
-            <a:spLocks xmlns:a="http://schemas.openxmlformats.org/drawingml/2006/main" noGrp="1"/>
-          </p:cNvSpPr>
-          <p:nvPr/>
-        </p:nvSpPr>
-        <p:spPr>
-          <a:xfrm xmlns:a="http://schemas.openxmlformats.org/drawingml/2006/main">
-            <a:off x="7010400" y="2781300"/>
-            <a:ext cx="85725" cy="85725"/>
-          </a:xfrm>
-          <a:prstGeom xmlns:a="http://schemas.openxmlformats.org/drawingml/2006/main" prst="ellipse">
-            <a:avLst/>
-          </a:prstGeom>
-          <a:solidFill xmlns:a="http://schemas.openxmlformats.org/drawingml/2006/main">
-            <a:srgbClr val="2563EB"/>
-          </a:solidFill>
-          <a:ln xmlns:a="http://schemas.openxmlformats.org/drawingml/2006/main" w="0">
-            <a:noFill/>
-            <a:prstDash val="solid"/>
-          </a:ln>
-        </p:spPr>
-      </p:sp>
-      <p:sp>
-        <p:nvSpPr>
-          <p:cNvPr id="17" name="">
-            <a:extLst xmlns:a="http://schemas.openxmlformats.org/drawingml/2006/main">
-              <a:ext uri="{FF2B5EF4-FFF2-40B4-BE49-F238E27FC236}">
-                <a16:creationId xmlns:a16="http://schemas.microsoft.com/office/drawing/2014/main" id="{2787C321-2A85-43AB-8EA6-64CD02863F8C}"/>
-              </a:ext>
-            </a:extLst>
-          </p:cNvPr>
-          <p:cNvSpPr>
-            <a:spLocks xmlns:a="http://schemas.openxmlformats.org/drawingml/2006/main" noGrp="1"/>
-          </p:cNvSpPr>
-          <p:nvPr/>
-        </p:nvSpPr>
-        <p:spPr>
-          <a:xfrm xmlns:a="http://schemas.openxmlformats.org/drawingml/2006/main">
-            <a:off x="7239000" y="2705100"/>
-            <a:ext cx="3771900" cy="400050"/>
+              <a:t>Real coding-agent path</a:t>
+            </a:r>
+          </a:p>
+        </p:txBody>
+      </p:sp>
+      <p:sp>
+        <p:nvSpPr>
+          <p:cNvPr id="10" name="">
+            <a:extLst xmlns:a="http://schemas.openxmlformats.org/drawingml/2006/main">
+              <a:ext uri="{FF2B5EF4-FFF2-40B4-BE49-F238E27FC236}">
+                <a16:creationId xmlns:a16="http://schemas.microsoft.com/office/drawing/2014/main" id="{8976D35C-DC30-436E-8209-6C0F2DE23B81}"/>
+              </a:ext>
+            </a:extLst>
+          </p:cNvPr>
+          <p:cNvSpPr>
+            <a:spLocks xmlns:a="http://schemas.openxmlformats.org/drawingml/2006/main" noGrp="1"/>
+          </p:cNvSpPr>
+          <p:nvPr/>
+        </p:nvSpPr>
+        <p:spPr>
+          <a:xfrm xmlns:a="http://schemas.openxmlformats.org/drawingml/2006/main">
+            <a:off x="6381750" y="4362450"/>
+            <a:ext cx="3695700" cy="552450"/>
           </a:xfrm>
           <a:prstGeom xmlns:a="http://schemas.openxmlformats.org/drawingml/2006/main" prst="rect">
             <a:avLst/>
@@ -3219,72 +2882,41 @@
           <a:lstStyle xmlns:a="http://schemas.openxmlformats.org/drawingml/2006/main"/>
           <a:p xmlns:a="http://schemas.openxmlformats.org/drawingml/2006/main">
             <a:pPr algn="l">
-              <a:defRPr sz="1500" b="0">
+              <a:defRPr sz="1350" b="0">
                 <a:solidFill>
                   <a:srgbClr val="334155"/>
                 </a:solidFill>
               </a:defRPr>
             </a:pPr>
             <a:r>
-              <a:rPr sz="1500" b="0">
+              <a:rPr sz="1350" b="0">
                 <a:solidFill>
                   <a:srgbClr val="334155"/>
                 </a:solidFill>
               </a:rPr>
-              <a:t>tags KV by session and priority</a:t>
-            </a:r>
-          </a:p>
-        </p:txBody>
-      </p:sp>
-      <p:sp>
-        <p:nvSpPr>
-          <p:cNvPr id="18" name="">
-            <a:extLst xmlns:a="http://schemas.openxmlformats.org/drawingml/2006/main">
-              <a:ext uri="{FF2B5EF4-FFF2-40B4-BE49-F238E27FC236}">
-                <a16:creationId xmlns:a16="http://schemas.microsoft.com/office/drawing/2014/main" id="{06599CE1-73D1-4EA2-A7DC-C294D366267B}"/>
-              </a:ext>
-            </a:extLst>
-          </p:cNvPr>
-          <p:cNvSpPr>
-            <a:spLocks xmlns:a="http://schemas.openxmlformats.org/drawingml/2006/main" noGrp="1"/>
-          </p:cNvSpPr>
-          <p:nvPr/>
-        </p:nvSpPr>
-        <p:spPr>
-          <a:xfrm xmlns:a="http://schemas.openxmlformats.org/drawingml/2006/main">
-            <a:off x="7010400" y="3295650"/>
-            <a:ext cx="85725" cy="85725"/>
-          </a:xfrm>
-          <a:prstGeom xmlns:a="http://schemas.openxmlformats.org/drawingml/2006/main" prst="ellipse">
-            <a:avLst/>
-          </a:prstGeom>
-          <a:solidFill xmlns:a="http://schemas.openxmlformats.org/drawingml/2006/main">
-            <a:srgbClr val="A855F7"/>
-          </a:solidFill>
-          <a:ln xmlns:a="http://schemas.openxmlformats.org/drawingml/2006/main" w="0">
-            <a:noFill/>
-            <a:prstDash val="solid"/>
-          </a:ln>
-        </p:spPr>
-      </p:sp>
-      <p:sp>
-        <p:nvSpPr>
-          <p:cNvPr id="19" name="">
-            <a:extLst xmlns:a="http://schemas.openxmlformats.org/drawingml/2006/main">
-              <a:ext uri="{FF2B5EF4-FFF2-40B4-BE49-F238E27FC236}">
-                <a16:creationId xmlns:a16="http://schemas.microsoft.com/office/drawing/2014/main" id="{9CCAA3CE-315E-4226-8F0B-54282A0E12CF}"/>
-              </a:ext>
-            </a:extLst>
-          </p:cNvPr>
-          <p:cNvSpPr>
-            <a:spLocks xmlns:a="http://schemas.openxmlformats.org/drawingml/2006/main" noGrp="1"/>
-          </p:cNvSpPr>
-          <p:nvPr/>
-        </p:nvSpPr>
-        <p:spPr>
-          <a:xfrm xmlns:a="http://schemas.openxmlformats.org/drawingml/2006/main">
-            <a:off x="7239000" y="3219450"/>
-            <a:ext cx="3771900" cy="400050"/>
+              <a:t>SWE-bench / AgentBench tasks feed DeepAgents, which emits model turns and tool-call gaps into SGLang.</a:t>
+            </a:r>
+          </a:p>
+        </p:txBody>
+      </p:sp>
+      <p:sp>
+        <p:nvSpPr>
+          <p:cNvPr id="11" name="">
+            <a:extLst xmlns:a="http://schemas.openxmlformats.org/drawingml/2006/main">
+              <a:ext uri="{FF2B5EF4-FFF2-40B4-BE49-F238E27FC236}">
+                <a16:creationId xmlns:a16="http://schemas.microsoft.com/office/drawing/2014/main" id="{30B8261E-FE9F-4188-8282-64D462C2B5BA}"/>
+              </a:ext>
+            </a:extLst>
+          </p:cNvPr>
+          <p:cNvSpPr>
+            <a:spLocks xmlns:a="http://schemas.openxmlformats.org/drawingml/2006/main" noGrp="1"/>
+          </p:cNvSpPr>
+          <p:nvPr/>
+        </p:nvSpPr>
+        <p:spPr>
+          <a:xfrm xmlns:a="http://schemas.openxmlformats.org/drawingml/2006/main">
+            <a:off x="400050" y="6153150"/>
+            <a:ext cx="7810500" cy="190500"/>
           </a:xfrm>
           <a:prstGeom xmlns:a="http://schemas.openxmlformats.org/drawingml/2006/main" prst="rect">
             <a:avLst/>
@@ -3300,191 +2932,29 @@
           <a:lstStyle xmlns:a="http://schemas.openxmlformats.org/drawingml/2006/main"/>
           <a:p xmlns:a="http://schemas.openxmlformats.org/drawingml/2006/main">
             <a:pPr algn="l">
-              <a:defRPr sz="1500" b="0">
-                <a:solidFill>
-                  <a:srgbClr val="334155"/>
-                </a:solidFill>
-              </a:defRPr>
-            </a:pPr>
-            <a:r>
-              <a:rPr sz="1500" b="0">
-                <a:solidFill>
-                  <a:srgbClr val="334155"/>
-                </a:solidFill>
-              </a:rPr>
-              <a:t>schedules against replay deadlines</a:t>
-            </a:r>
-          </a:p>
-        </p:txBody>
-      </p:sp>
-      <p:sp>
-        <p:nvSpPr>
-          <p:cNvPr id="20" name="">
-            <a:extLst xmlns:a="http://schemas.openxmlformats.org/drawingml/2006/main">
-              <a:ext uri="{FF2B5EF4-FFF2-40B4-BE49-F238E27FC236}">
-                <a16:creationId xmlns:a16="http://schemas.microsoft.com/office/drawing/2014/main" id="{69C77716-AC4D-438B-819E-3C6E03A895AD}"/>
-              </a:ext>
-            </a:extLst>
-          </p:cNvPr>
-          <p:cNvSpPr>
-            <a:spLocks xmlns:a="http://schemas.openxmlformats.org/drawingml/2006/main" noGrp="1"/>
-          </p:cNvSpPr>
-          <p:nvPr/>
-        </p:nvSpPr>
-        <p:spPr>
-          <a:xfrm xmlns:a="http://schemas.openxmlformats.org/drawingml/2006/main">
-            <a:off x="7010400" y="3810000"/>
-            <a:ext cx="85725" cy="85725"/>
-          </a:xfrm>
-          <a:prstGeom xmlns:a="http://schemas.openxmlformats.org/drawingml/2006/main" prst="ellipse">
-            <a:avLst/>
-          </a:prstGeom>
-          <a:solidFill xmlns:a="http://schemas.openxmlformats.org/drawingml/2006/main">
-            <a:srgbClr val="06B6D4"/>
-          </a:solidFill>
-          <a:ln xmlns:a="http://schemas.openxmlformats.org/drawingml/2006/main" w="0">
-            <a:noFill/>
-            <a:prstDash val="solid"/>
-          </a:ln>
-        </p:spPr>
-      </p:sp>
-      <p:sp>
-        <p:nvSpPr>
-          <p:cNvPr id="21" name="">
-            <a:extLst xmlns:a="http://schemas.openxmlformats.org/drawingml/2006/main">
-              <a:ext uri="{FF2B5EF4-FFF2-40B4-BE49-F238E27FC236}">
-                <a16:creationId xmlns:a16="http://schemas.microsoft.com/office/drawing/2014/main" id="{0D760743-DAF0-47B2-BE49-F25DE27A8F08}"/>
-              </a:ext>
-            </a:extLst>
-          </p:cNvPr>
-          <p:cNvSpPr>
-            <a:spLocks xmlns:a="http://schemas.openxmlformats.org/drawingml/2006/main" noGrp="1"/>
-          </p:cNvSpPr>
-          <p:nvPr/>
-        </p:nvSpPr>
-        <p:spPr>
-          <a:xfrm xmlns:a="http://schemas.openxmlformats.org/drawingml/2006/main">
-            <a:off x="7239000" y="3733800"/>
-            <a:ext cx="3771900" cy="400050"/>
-          </a:xfrm>
-          <a:prstGeom xmlns:a="http://schemas.openxmlformats.org/drawingml/2006/main" prst="rect">
-            <a:avLst/>
-          </a:prstGeom>
-          <a:noFill xmlns:a="http://schemas.openxmlformats.org/drawingml/2006/main"/>
-          <a:ln xmlns:a="http://schemas.openxmlformats.org/drawingml/2006/main" w="0">
-            <a:noFill/>
-            <a:prstDash val="solid"/>
-          </a:ln>
-        </p:spPr>
-        <p:txBody>
-          <a:bodyPr xmlns:a="http://schemas.openxmlformats.org/drawingml/2006/main" anchor="t"/>
-          <a:lstStyle xmlns:a="http://schemas.openxmlformats.org/drawingml/2006/main"/>
-          <a:p xmlns:a="http://schemas.openxmlformats.org/drawingml/2006/main">
-            <a:pPr algn="l">
-              <a:defRPr sz="1500" b="0">
-                <a:solidFill>
-                  <a:srgbClr val="334155"/>
-                </a:solidFill>
-              </a:defRPr>
-            </a:pPr>
-            <a:r>
-              <a:rPr sz="1500" b="0">
-                <a:solidFill>
-                  <a:srgbClr val="334155"/>
-                </a:solidFill>
-              </a:rPr>
-              <a:t>moves hot KV before replay</a:t>
-            </a:r>
-          </a:p>
-        </p:txBody>
-      </p:sp>
-      <p:sp>
-        <p:nvSpPr>
-          <p:cNvPr id="22" name="">
-            <a:extLst xmlns:a="http://schemas.openxmlformats.org/drawingml/2006/main">
-              <a:ext uri="{FF2B5EF4-FFF2-40B4-BE49-F238E27FC236}">
-                <a16:creationId xmlns:a16="http://schemas.microsoft.com/office/drawing/2014/main" id="{9DFE107B-59B8-4E4F-B26A-CC3CE2124A79}"/>
-              </a:ext>
-            </a:extLst>
-          </p:cNvPr>
-          <p:cNvSpPr>
-            <a:spLocks xmlns:a="http://schemas.openxmlformats.org/drawingml/2006/main" noGrp="1"/>
-          </p:cNvSpPr>
-          <p:nvPr/>
-        </p:nvSpPr>
-        <p:spPr>
-          <a:xfrm xmlns:a="http://schemas.openxmlformats.org/drawingml/2006/main">
-            <a:off x="7010400" y="4324350"/>
-            <a:ext cx="85725" cy="85725"/>
-          </a:xfrm>
-          <a:prstGeom xmlns:a="http://schemas.openxmlformats.org/drawingml/2006/main" prst="ellipse">
-            <a:avLst/>
-          </a:prstGeom>
-          <a:solidFill xmlns:a="http://schemas.openxmlformats.org/drawingml/2006/main">
-            <a:srgbClr val="16A34A"/>
-          </a:solidFill>
-          <a:ln xmlns:a="http://schemas.openxmlformats.org/drawingml/2006/main" w="0">
-            <a:noFill/>
-            <a:prstDash val="solid"/>
-          </a:ln>
-        </p:spPr>
-      </p:sp>
-      <p:sp>
-        <p:nvSpPr>
-          <p:cNvPr id="23" name="">
-            <a:extLst xmlns:a="http://schemas.openxmlformats.org/drawingml/2006/main">
-              <a:ext uri="{FF2B5EF4-FFF2-40B4-BE49-F238E27FC236}">
-                <a16:creationId xmlns:a16="http://schemas.microsoft.com/office/drawing/2014/main" id="{2112F94A-343E-4C13-9FCA-922739F3E044}"/>
-              </a:ext>
-            </a:extLst>
-          </p:cNvPr>
-          <p:cNvSpPr>
-            <a:spLocks xmlns:a="http://schemas.openxmlformats.org/drawingml/2006/main" noGrp="1"/>
-          </p:cNvSpPr>
-          <p:nvPr/>
-        </p:nvSpPr>
-        <p:spPr>
-          <a:xfrm xmlns:a="http://schemas.openxmlformats.org/drawingml/2006/main">
-            <a:off x="7239000" y="4248150"/>
-            <a:ext cx="3771900" cy="400050"/>
-          </a:xfrm>
-          <a:prstGeom xmlns:a="http://schemas.openxmlformats.org/drawingml/2006/main" prst="rect">
-            <a:avLst/>
-          </a:prstGeom>
-          <a:noFill xmlns:a="http://schemas.openxmlformats.org/drawingml/2006/main"/>
-          <a:ln xmlns:a="http://schemas.openxmlformats.org/drawingml/2006/main" w="0">
-            <a:noFill/>
-            <a:prstDash val="solid"/>
-          </a:ln>
-        </p:spPr>
-        <p:txBody>
-          <a:bodyPr xmlns:a="http://schemas.openxmlformats.org/drawingml/2006/main" anchor="t"/>
-          <a:lstStyle xmlns:a="http://schemas.openxmlformats.org/drawingml/2006/main"/>
-          <a:p xmlns:a="http://schemas.openxmlformats.org/drawingml/2006/main">
-            <a:pPr algn="l">
-              <a:defRPr sz="1500" b="0">
-                <a:solidFill>
-                  <a:srgbClr val="334155"/>
-                </a:solidFill>
-              </a:defRPr>
-            </a:pPr>
-            <a:r>
-              <a:rPr sz="1500" b="0">
-                <a:solidFill>
-                  <a:srgbClr val="334155"/>
-                </a:solidFill>
-              </a:rPr>
-              <a:t>reports late, useful, and wasted movement</a:t>
-            </a:r>
-          </a:p>
-        </p:txBody>
-      </p:sp>
-      <p:sp>
-        <p:nvSpPr>
-          <p:cNvPr id="24" name="">
-            <a:extLst xmlns:a="http://schemas.openxmlformats.org/drawingml/2006/main">
-              <a:ext uri="{FF2B5EF4-FFF2-40B4-BE49-F238E27FC236}">
-                <a16:creationId xmlns:a16="http://schemas.microsoft.com/office/drawing/2014/main" id="{1822698B-ACCB-4A5D-B2C5-4CAA67B92AD7}"/>
+              <a:defRPr sz="825" b="0">
+                <a:solidFill>
+                  <a:srgbClr val="64748B"/>
+                </a:solidFill>
+              </a:defRPr>
+            </a:pPr>
+            <a:r>
+              <a:rPr sz="825" b="0">
+                <a:solidFill>
+                  <a:srgbClr val="64748B"/>
+                </a:solidFill>
+              </a:rPr>
+              <a:t>Source: latest_master_report.html, Experiment Setup And Manager Summary</a:t>
+            </a:r>
+          </a:p>
+        </p:txBody>
+      </p:sp>
+      <p:sp>
+        <p:nvSpPr>
+          <p:cNvPr id="12" name="">
+            <a:extLst xmlns:a="http://schemas.openxmlformats.org/drawingml/2006/main">
+              <a:ext uri="{FF2B5EF4-FFF2-40B4-BE49-F238E27FC236}">
+                <a16:creationId xmlns:a16="http://schemas.microsoft.com/office/drawing/2014/main" id="{EF074449-55C4-4A01-8526-7E76E1D0CD37}"/>
               </a:ext>
             </a:extLst>
           </p:cNvPr>
@@ -3531,10 +3001,10 @@
       </p:sp>
       <p:sp>
         <p:nvSpPr>
-          <p:cNvPr id="25" name="">
-            <a:extLst xmlns:a="http://schemas.openxmlformats.org/drawingml/2006/main">
-              <a:ext uri="{FF2B5EF4-FFF2-40B4-BE49-F238E27FC236}">
-                <a16:creationId xmlns:a16="http://schemas.microsoft.com/office/drawing/2014/main" id="{F8DD5701-4380-4B90-A7B8-797450EE8224}"/>
+          <p:cNvPr id="13" name="">
+            <a:extLst xmlns:a="http://schemas.openxmlformats.org/drawingml/2006/main">
+              <a:ext uri="{FF2B5EF4-FFF2-40B4-BE49-F238E27FC236}">
+                <a16:creationId xmlns:a16="http://schemas.microsoft.com/office/drawing/2014/main" id="{1896B789-3AC2-4CCA-B654-0E840877A6C5}"/>
               </a:ext>
             </a:extLst>
           </p:cNvPr>
@@ -3582,7 +3052,7 @@
     </p:spTree>
     <p:extLst>
       <p:ext uri="{BB962C8B-B14F-4D97-AF65-F5344CB8AC3E}">
-        <p14:creationId xmlns:p14="http://schemas.microsoft.com/office/powerpoint/2010/main" val="139990614"/>
+        <p14:creationId xmlns:p14="http://schemas.microsoft.com/office/powerpoint/2010/main" val="2140125121"/>
       </p:ext>
     </p:extLst>
   </p:cSld>
@@ -3610,10 +3080,10 @@
       </p:grpSpPr>
       <p:sp>
         <p:nvSpPr>
-          <p:cNvPr id="9" name="">
-            <a:extLst xmlns:a="http://schemas.openxmlformats.org/drawingml/2006/main">
-              <a:ext uri="{FF2B5EF4-FFF2-40B4-BE49-F238E27FC236}">
-                <a16:creationId xmlns:a16="http://schemas.microsoft.com/office/drawing/2014/main" id="{DB3ADE53-E13F-41F7-A79A-14D52B544E70}"/>
+          <p:cNvPr id="26" name="">
+            <a:extLst xmlns:a="http://schemas.openxmlformats.org/drawingml/2006/main">
+              <a:ext uri="{FF2B5EF4-FFF2-40B4-BE49-F238E27FC236}">
+                <a16:creationId xmlns:a16="http://schemas.microsoft.com/office/drawing/2014/main" id="{276BD223-2F6F-4FCA-901E-CC583D9A8DFF}"/>
               </a:ext>
             </a:extLst>
           </p:cNvPr>
@@ -3653,7 +3123,7 @@
                   <a:srgbClr val="0F172A"/>
                 </a:solidFill>
               </a:rPr>
-              <a:t>The replay path exposes the bottleneck</a:t>
+              <a:t>Today’s DMA engines move bytes, not intent</a:t>
             </a:r>
           </a:p>
         </p:txBody>
@@ -3663,7 +3133,7 @@
           <p:cNvPr id="2" name="">
             <a:extLst xmlns:a="http://schemas.openxmlformats.org/drawingml/2006/main">
               <a:ext uri="{FF2B5EF4-FFF2-40B4-BE49-F238E27FC236}">
-                <a16:creationId xmlns:a16="http://schemas.microsoft.com/office/drawing/2014/main" id="{B493FE3B-4FFB-4768-9A74-4B4E5A626C93}"/>
+                <a16:creationId xmlns:a16="http://schemas.microsoft.com/office/drawing/2014/main" id="{F6906ED2-FB7A-457A-8812-64E49C4E2BA9}"/>
               </a:ext>
             </a:extLst>
           </p:cNvPr>
@@ -3703,7 +3173,7 @@
                   <a:srgbClr val="64748B"/>
                 </a:solidFill>
               </a:rPr>
-              <a:t>One tool-gap row shows where replay spends time before the first useful token.</a:t>
+              <a:t>The hardware path is fast, but it usually lacks agent/session semantics.</a:t>
             </a:r>
           </a:p>
         </p:txBody>
@@ -3713,76 +3183,135 @@
           <p:cNvPr id="3" name="">
             <a:extLst xmlns:a="http://schemas.openxmlformats.org/drawingml/2006/main">
               <a:ext uri="{FF2B5EF4-FFF2-40B4-BE49-F238E27FC236}">
-                <a16:creationId xmlns:a16="http://schemas.microsoft.com/office/drawing/2014/main" id="{950B79B7-8E04-4876-A622-AEA2BFF9DCB4}"/>
-              </a:ext>
-            </a:extLst>
-          </p:cNvPr>
-          <p:cNvSpPr>
-            <a:spLocks xmlns:a="http://schemas.openxmlformats.org/drawingml/2006/main" noGrp="1"/>
-          </p:cNvSpPr>
-          <p:nvPr/>
-        </p:nvSpPr>
-        <p:spPr>
-          <a:xfrm xmlns:a="http://schemas.openxmlformats.org/drawingml/2006/main">
-            <a:off x="323850" y="1371600"/>
-            <a:ext cx="11201400" cy="4438650"/>
+                <a16:creationId xmlns:a16="http://schemas.microsoft.com/office/drawing/2014/main" id="{1D16494C-F1F1-47B3-8B02-312BC2770EC3}"/>
+              </a:ext>
+            </a:extLst>
+          </p:cNvPr>
+          <p:cNvSpPr>
+            <a:spLocks xmlns:a="http://schemas.openxmlformats.org/drawingml/2006/main" noGrp="1"/>
+          </p:cNvSpPr>
+          <p:nvPr/>
+        </p:nvSpPr>
+        <p:spPr>
+          <a:xfrm xmlns:a="http://schemas.openxmlformats.org/drawingml/2006/main">
+            <a:off x="552450" y="1790700"/>
+            <a:ext cx="4953000" cy="3429000"/>
           </a:xfrm>
           <a:prstGeom xmlns:a="http://schemas.openxmlformats.org/drawingml/2006/main" prst="roundRect">
             <a:avLst>
-              <a:gd name="adj" fmla="val 1288"/>
+              <a:gd name="adj" fmla="val 1667"/>
             </a:avLst>
           </a:prstGeom>
           <a:solidFill xmlns:a="http://schemas.openxmlformats.org/drawingml/2006/main">
-            <a:srgbClr val="FFFFFF"/>
+            <a:srgbClr val="F8FAFC"/>
           </a:solidFill>
           <a:ln xmlns:a="http://schemas.openxmlformats.org/drawingml/2006/main" w="9525">
             <a:solidFill>
-              <a:srgbClr val="E5E7EB"/>
+              <a:srgbClr val="CBD5E1"/>
             </a:solidFill>
             <a:prstDash val="solid"/>
           </a:ln>
         </p:spPr>
       </p:sp>
-      <p:pic>
-        <p:nvPicPr>
-          <p:cNvPr id="12" name=""/>
-          <p:cNvPicPr>
-            <a:picLocks xmlns:a="http://schemas.openxmlformats.org/drawingml/2006/main" noChangeAspect="1"/>
-          </p:cNvPicPr>
-          <p:nvPr/>
-        </p:nvPicPr>
-        <p:blipFill>
-          <a:blip xmlns:r="http://schemas.openxmlformats.org/officeDocument/2006/relationships" xmlns:a="http://schemas.openxmlformats.org/drawingml/2006/main" r:embed="Rd205bdf265774c30"/>
-          <a:stretch xmlns:a="http://schemas.openxmlformats.org/drawingml/2006/main"/>
-        </p:blipFill>
-        <p:spPr>
-          <a:xfrm xmlns:a="http://schemas.openxmlformats.org/drawingml/2006/main">
-            <a:off x="400050" y="1448639"/>
-            <a:ext cx="11049000" cy="4284571"/>
-          </a:xfrm>
-          <a:prstGeom xmlns:a="http://schemas.openxmlformats.org/drawingml/2006/main" prst="rect">
-            <a:avLst/>
-          </a:prstGeom>
-        </p:spPr>
-      </p:pic>
+      <p:sp>
+        <p:nvSpPr>
+          <p:cNvPr id="4" name="">
+            <a:extLst xmlns:a="http://schemas.openxmlformats.org/drawingml/2006/main">
+              <a:ext uri="{FF2B5EF4-FFF2-40B4-BE49-F238E27FC236}">
+                <a16:creationId xmlns:a16="http://schemas.microsoft.com/office/drawing/2014/main" id="{70BA4936-E19D-4E08-A1B8-917B7AAB8C28}"/>
+              </a:ext>
+            </a:extLst>
+          </p:cNvPr>
+          <p:cNvSpPr>
+            <a:spLocks xmlns:a="http://schemas.openxmlformats.org/drawingml/2006/main" noGrp="1"/>
+          </p:cNvSpPr>
+          <p:nvPr/>
+        </p:nvSpPr>
+        <p:spPr>
+          <a:xfrm xmlns:a="http://schemas.openxmlformats.org/drawingml/2006/main">
+            <a:off x="838200" y="2076450"/>
+            <a:ext cx="4191000" cy="323850"/>
+          </a:xfrm>
+          <a:prstGeom xmlns:a="http://schemas.openxmlformats.org/drawingml/2006/main" prst="rect">
+            <a:avLst/>
+          </a:prstGeom>
+          <a:noFill xmlns:a="http://schemas.openxmlformats.org/drawingml/2006/main"/>
+          <a:ln xmlns:a="http://schemas.openxmlformats.org/drawingml/2006/main" w="0">
+            <a:noFill/>
+            <a:prstDash val="solid"/>
+          </a:ln>
+        </p:spPr>
+        <p:txBody>
+          <a:bodyPr xmlns:a="http://schemas.openxmlformats.org/drawingml/2006/main" anchor="t"/>
+          <a:lstStyle xmlns:a="http://schemas.openxmlformats.org/drawingml/2006/main"/>
+          <a:p xmlns:a="http://schemas.openxmlformats.org/drawingml/2006/main">
+            <a:pPr algn="l">
+              <a:defRPr sz="1950" b="1">
+                <a:solidFill>
+                  <a:srgbClr val="0F172A"/>
+                </a:solidFill>
+              </a:defRPr>
+            </a:pPr>
+            <a:r>
+              <a:rPr sz="1950" b="1">
+                <a:solidFill>
+                  <a:srgbClr val="0F172A"/>
+                </a:solidFill>
+              </a:rPr>
+              <a:t>Context-agnostic movement</a:t>
+            </a:r>
+          </a:p>
+        </p:txBody>
+      </p:sp>
       <p:sp>
         <p:nvSpPr>
           <p:cNvPr id="5" name="">
             <a:extLst xmlns:a="http://schemas.openxmlformats.org/drawingml/2006/main">
               <a:ext uri="{FF2B5EF4-FFF2-40B4-BE49-F238E27FC236}">
-                <a16:creationId xmlns:a16="http://schemas.microsoft.com/office/drawing/2014/main" id="{52D6755A-EA72-432A-8A67-F04EE0EB7C18}"/>
-              </a:ext>
-            </a:extLst>
-          </p:cNvPr>
-          <p:cNvSpPr>
-            <a:spLocks xmlns:a="http://schemas.openxmlformats.org/drawingml/2006/main" noGrp="1"/>
-          </p:cNvSpPr>
-          <p:nvPr/>
-        </p:nvSpPr>
-        <p:spPr>
-          <a:xfrm xmlns:a="http://schemas.openxmlformats.org/drawingml/2006/main">
-            <a:off x="685800" y="5829300"/>
-            <a:ext cx="9810750" cy="228600"/>
+                <a16:creationId xmlns:a16="http://schemas.microsoft.com/office/drawing/2014/main" id="{C50D260D-CA1C-4FC4-BEB1-28F543C4B578}"/>
+              </a:ext>
+            </a:extLst>
+          </p:cNvPr>
+          <p:cNvSpPr>
+            <a:spLocks xmlns:a="http://schemas.openxmlformats.org/drawingml/2006/main" noGrp="1"/>
+          </p:cNvSpPr>
+          <p:nvPr/>
+        </p:nvSpPr>
+        <p:spPr>
+          <a:xfrm xmlns:a="http://schemas.openxmlformats.org/drawingml/2006/main">
+            <a:off x="876300" y="2781300"/>
+            <a:ext cx="85725" cy="85725"/>
+          </a:xfrm>
+          <a:prstGeom xmlns:a="http://schemas.openxmlformats.org/drawingml/2006/main" prst="ellipse">
+            <a:avLst/>
+          </a:prstGeom>
+          <a:solidFill xmlns:a="http://schemas.openxmlformats.org/drawingml/2006/main">
+            <a:srgbClr val="64748B"/>
+          </a:solidFill>
+          <a:ln xmlns:a="http://schemas.openxmlformats.org/drawingml/2006/main" w="0">
+            <a:noFill/>
+            <a:prstDash val="solid"/>
+          </a:ln>
+        </p:spPr>
+      </p:sp>
+      <p:sp>
+        <p:nvSpPr>
+          <p:cNvPr id="6" name="">
+            <a:extLst xmlns:a="http://schemas.openxmlformats.org/drawingml/2006/main">
+              <a:ext uri="{FF2B5EF4-FFF2-40B4-BE49-F238E27FC236}">
+                <a16:creationId xmlns:a16="http://schemas.microsoft.com/office/drawing/2014/main" id="{699B30B7-9799-4B0E-9532-7B75D66D6A38}"/>
+              </a:ext>
+            </a:extLst>
+          </p:cNvPr>
+          <p:cNvSpPr>
+            <a:spLocks xmlns:a="http://schemas.openxmlformats.org/drawingml/2006/main" noGrp="1"/>
+          </p:cNvSpPr>
+          <p:nvPr/>
+        </p:nvSpPr>
+        <p:spPr>
+          <a:xfrm xmlns:a="http://schemas.openxmlformats.org/drawingml/2006/main">
+            <a:off x="1104900" y="2705100"/>
+            <a:ext cx="3771900" cy="400050"/>
           </a:xfrm>
           <a:prstGeom xmlns:a="http://schemas.openxmlformats.org/drawingml/2006/main" prst="rect">
             <a:avLst/>
@@ -3798,41 +3327,72 @@
           <a:lstStyle xmlns:a="http://schemas.openxmlformats.org/drawingml/2006/main"/>
           <a:p xmlns:a="http://schemas.openxmlformats.org/drawingml/2006/main">
             <a:pPr algn="l">
-              <a:defRPr sz="1275" b="0">
+              <a:defRPr sz="1500" b="0">
                 <a:solidFill>
                   <a:srgbClr val="334155"/>
                 </a:solidFill>
               </a:defRPr>
             </a:pPr>
             <a:r>
-              <a:rPr sz="1275" b="0">
+              <a:rPr sz="1500" b="0">
                 <a:solidFill>
                   <a:srgbClr val="334155"/>
                 </a:solidFill>
               </a:rPr>
-              <a:t>Read left to right: model turn → tool wait → replay path. Cyan is host-to-device KV load; magenta/gold are work before first token.</a:t>
-            </a:r>
-          </a:p>
-        </p:txBody>
-      </p:sp>
-      <p:sp>
-        <p:nvSpPr>
-          <p:cNvPr id="6" name="">
-            <a:extLst xmlns:a="http://schemas.openxmlformats.org/drawingml/2006/main">
-              <a:ext uri="{FF2B5EF4-FFF2-40B4-BE49-F238E27FC236}">
-                <a16:creationId xmlns:a16="http://schemas.microsoft.com/office/drawing/2014/main" id="{C795AD1A-DCCC-4772-A762-235967C0BB5C}"/>
-              </a:ext>
-            </a:extLst>
-          </p:cNvPr>
-          <p:cNvSpPr>
-            <a:spLocks xmlns:a="http://schemas.openxmlformats.org/drawingml/2006/main" noGrp="1"/>
-          </p:cNvSpPr>
-          <p:nvPr/>
-        </p:nvSpPr>
-        <p:spPr>
-          <a:xfrm xmlns:a="http://schemas.openxmlformats.org/drawingml/2006/main">
-            <a:off x="400050" y="6153150"/>
-            <a:ext cx="7810500" cy="190500"/>
+              <a:t>sees memory ranges</a:t>
+            </a:r>
+          </a:p>
+        </p:txBody>
+      </p:sp>
+      <p:sp>
+        <p:nvSpPr>
+          <p:cNvPr id="7" name="">
+            <a:extLst xmlns:a="http://schemas.openxmlformats.org/drawingml/2006/main">
+              <a:ext uri="{FF2B5EF4-FFF2-40B4-BE49-F238E27FC236}">
+                <a16:creationId xmlns:a16="http://schemas.microsoft.com/office/drawing/2014/main" id="{76C394B8-600B-4AD1-804A-E8B29D7D3A1D}"/>
+              </a:ext>
+            </a:extLst>
+          </p:cNvPr>
+          <p:cNvSpPr>
+            <a:spLocks xmlns:a="http://schemas.openxmlformats.org/drawingml/2006/main" noGrp="1"/>
+          </p:cNvSpPr>
+          <p:nvPr/>
+        </p:nvSpPr>
+        <p:spPr>
+          <a:xfrm xmlns:a="http://schemas.openxmlformats.org/drawingml/2006/main">
+            <a:off x="876300" y="3295650"/>
+            <a:ext cx="85725" cy="85725"/>
+          </a:xfrm>
+          <a:prstGeom xmlns:a="http://schemas.openxmlformats.org/drawingml/2006/main" prst="ellipse">
+            <a:avLst/>
+          </a:prstGeom>
+          <a:solidFill xmlns:a="http://schemas.openxmlformats.org/drawingml/2006/main">
+            <a:srgbClr val="64748B"/>
+          </a:solidFill>
+          <a:ln xmlns:a="http://schemas.openxmlformats.org/drawingml/2006/main" w="0">
+            <a:noFill/>
+            <a:prstDash val="solid"/>
+          </a:ln>
+        </p:spPr>
+      </p:sp>
+      <p:sp>
+        <p:nvSpPr>
+          <p:cNvPr id="8" name="">
+            <a:extLst xmlns:a="http://schemas.openxmlformats.org/drawingml/2006/main">
+              <a:ext uri="{FF2B5EF4-FFF2-40B4-BE49-F238E27FC236}">
+                <a16:creationId xmlns:a16="http://schemas.microsoft.com/office/drawing/2014/main" id="{C838E098-87EE-46B4-80AB-4B2D847618D8}"/>
+              </a:ext>
+            </a:extLst>
+          </p:cNvPr>
+          <p:cNvSpPr>
+            <a:spLocks xmlns:a="http://schemas.openxmlformats.org/drawingml/2006/main" noGrp="1"/>
+          </p:cNvSpPr>
+          <p:nvPr/>
+        </p:nvSpPr>
+        <p:spPr>
+          <a:xfrm xmlns:a="http://schemas.openxmlformats.org/drawingml/2006/main">
+            <a:off x="1104900" y="3219450"/>
+            <a:ext cx="3771900" cy="400050"/>
           </a:xfrm>
           <a:prstGeom xmlns:a="http://schemas.openxmlformats.org/drawingml/2006/main" prst="rect">
             <a:avLst/>
@@ -3848,29 +3408,650 @@
           <a:lstStyle xmlns:a="http://schemas.openxmlformats.org/drawingml/2006/main"/>
           <a:p xmlns:a="http://schemas.openxmlformats.org/drawingml/2006/main">
             <a:pPr algn="l">
-              <a:defRPr sz="825" b="0">
+              <a:defRPr sz="1500" b="0">
+                <a:solidFill>
+                  <a:srgbClr val="334155"/>
+                </a:solidFill>
+              </a:defRPr>
+            </a:pPr>
+            <a:r>
+              <a:rPr sz="1500" b="0">
+                <a:solidFill>
+                  <a:srgbClr val="334155"/>
+                </a:solidFill>
+              </a:rPr>
+              <a:t>does not know the agent session</a:t>
+            </a:r>
+          </a:p>
+        </p:txBody>
+      </p:sp>
+      <p:sp>
+        <p:nvSpPr>
+          <p:cNvPr id="9" name="">
+            <a:extLst xmlns:a="http://schemas.openxmlformats.org/drawingml/2006/main">
+              <a:ext uri="{FF2B5EF4-FFF2-40B4-BE49-F238E27FC236}">
+                <a16:creationId xmlns:a16="http://schemas.microsoft.com/office/drawing/2014/main" id="{55E060FD-85F2-4033-A03E-820286F85F30}"/>
+              </a:ext>
+            </a:extLst>
+          </p:cNvPr>
+          <p:cNvSpPr>
+            <a:spLocks xmlns:a="http://schemas.openxmlformats.org/drawingml/2006/main" noGrp="1"/>
+          </p:cNvSpPr>
+          <p:nvPr/>
+        </p:nvSpPr>
+        <p:spPr>
+          <a:xfrm xmlns:a="http://schemas.openxmlformats.org/drawingml/2006/main">
+            <a:off x="876300" y="3810000"/>
+            <a:ext cx="85725" cy="85725"/>
+          </a:xfrm>
+          <a:prstGeom xmlns:a="http://schemas.openxmlformats.org/drawingml/2006/main" prst="ellipse">
+            <a:avLst/>
+          </a:prstGeom>
+          <a:solidFill xmlns:a="http://schemas.openxmlformats.org/drawingml/2006/main">
+            <a:srgbClr val="64748B"/>
+          </a:solidFill>
+          <a:ln xmlns:a="http://schemas.openxmlformats.org/drawingml/2006/main" w="0">
+            <a:noFill/>
+            <a:prstDash val="solid"/>
+          </a:ln>
+        </p:spPr>
+      </p:sp>
+      <p:sp>
+        <p:nvSpPr>
+          <p:cNvPr id="10" name="">
+            <a:extLst xmlns:a="http://schemas.openxmlformats.org/drawingml/2006/main">
+              <a:ext uri="{FF2B5EF4-FFF2-40B4-BE49-F238E27FC236}">
+                <a16:creationId xmlns:a16="http://schemas.microsoft.com/office/drawing/2014/main" id="{BB2028D3-861A-46D0-AD9C-76AFBC03D434}"/>
+              </a:ext>
+            </a:extLst>
+          </p:cNvPr>
+          <p:cNvSpPr>
+            <a:spLocks xmlns:a="http://schemas.openxmlformats.org/drawingml/2006/main" noGrp="1"/>
+          </p:cNvSpPr>
+          <p:nvPr/>
+        </p:nvSpPr>
+        <p:spPr>
+          <a:xfrm xmlns:a="http://schemas.openxmlformats.org/drawingml/2006/main">
+            <a:off x="1104900" y="3733800"/>
+            <a:ext cx="3771900" cy="400050"/>
+          </a:xfrm>
+          <a:prstGeom xmlns:a="http://schemas.openxmlformats.org/drawingml/2006/main" prst="rect">
+            <a:avLst/>
+          </a:prstGeom>
+          <a:noFill xmlns:a="http://schemas.openxmlformats.org/drawingml/2006/main"/>
+          <a:ln xmlns:a="http://schemas.openxmlformats.org/drawingml/2006/main" w="0">
+            <a:noFill/>
+            <a:prstDash val="solid"/>
+          </a:ln>
+        </p:spPr>
+        <p:txBody>
+          <a:bodyPr xmlns:a="http://schemas.openxmlformats.org/drawingml/2006/main" anchor="t"/>
+          <a:lstStyle xmlns:a="http://schemas.openxmlformats.org/drawingml/2006/main"/>
+          <a:p xmlns:a="http://schemas.openxmlformats.org/drawingml/2006/main">
+            <a:pPr algn="l">
+              <a:defRPr sz="1500" b="0">
+                <a:solidFill>
+                  <a:srgbClr val="334155"/>
+                </a:solidFill>
+              </a:defRPr>
+            </a:pPr>
+            <a:r>
+              <a:rPr sz="1500" b="0">
+                <a:solidFill>
+                  <a:srgbClr val="334155"/>
+                </a:solidFill>
+              </a:rPr>
+              <a:t>does not know replay deadline</a:t>
+            </a:r>
+          </a:p>
+        </p:txBody>
+      </p:sp>
+      <p:sp>
+        <p:nvSpPr>
+          <p:cNvPr id="11" name="">
+            <a:extLst xmlns:a="http://schemas.openxmlformats.org/drawingml/2006/main">
+              <a:ext uri="{FF2B5EF4-FFF2-40B4-BE49-F238E27FC236}">
+                <a16:creationId xmlns:a16="http://schemas.microsoft.com/office/drawing/2014/main" id="{1960C189-3D83-4249-9811-9A441B63D469}"/>
+              </a:ext>
+            </a:extLst>
+          </p:cNvPr>
+          <p:cNvSpPr>
+            <a:spLocks xmlns:a="http://schemas.openxmlformats.org/drawingml/2006/main" noGrp="1"/>
+          </p:cNvSpPr>
+          <p:nvPr/>
+        </p:nvSpPr>
+        <p:spPr>
+          <a:xfrm xmlns:a="http://schemas.openxmlformats.org/drawingml/2006/main">
+            <a:off x="876300" y="4324350"/>
+            <a:ext cx="85725" cy="85725"/>
+          </a:xfrm>
+          <a:prstGeom xmlns:a="http://schemas.openxmlformats.org/drawingml/2006/main" prst="ellipse">
+            <a:avLst/>
+          </a:prstGeom>
+          <a:solidFill xmlns:a="http://schemas.openxmlformats.org/drawingml/2006/main">
+            <a:srgbClr val="64748B"/>
+          </a:solidFill>
+          <a:ln xmlns:a="http://schemas.openxmlformats.org/drawingml/2006/main" w="0">
+            <a:noFill/>
+            <a:prstDash val="solid"/>
+          </a:ln>
+        </p:spPr>
+      </p:sp>
+      <p:sp>
+        <p:nvSpPr>
+          <p:cNvPr id="12" name="">
+            <a:extLst xmlns:a="http://schemas.openxmlformats.org/drawingml/2006/main">
+              <a:ext uri="{FF2B5EF4-FFF2-40B4-BE49-F238E27FC236}">
+                <a16:creationId xmlns:a16="http://schemas.microsoft.com/office/drawing/2014/main" id="{732FC0FF-963B-4053-B99D-D57B511B3224}"/>
+              </a:ext>
+            </a:extLst>
+          </p:cNvPr>
+          <p:cNvSpPr>
+            <a:spLocks xmlns:a="http://schemas.openxmlformats.org/drawingml/2006/main" noGrp="1"/>
+          </p:cNvSpPr>
+          <p:nvPr/>
+        </p:nvSpPr>
+        <p:spPr>
+          <a:xfrm xmlns:a="http://schemas.openxmlformats.org/drawingml/2006/main">
+            <a:off x="1104900" y="4248150"/>
+            <a:ext cx="3771900" cy="400050"/>
+          </a:xfrm>
+          <a:prstGeom xmlns:a="http://schemas.openxmlformats.org/drawingml/2006/main" prst="rect">
+            <a:avLst/>
+          </a:prstGeom>
+          <a:noFill xmlns:a="http://schemas.openxmlformats.org/drawingml/2006/main"/>
+          <a:ln xmlns:a="http://schemas.openxmlformats.org/drawingml/2006/main" w="0">
+            <a:noFill/>
+            <a:prstDash val="solid"/>
+          </a:ln>
+        </p:spPr>
+        <p:txBody>
+          <a:bodyPr xmlns:a="http://schemas.openxmlformats.org/drawingml/2006/main" anchor="t"/>
+          <a:lstStyle xmlns:a="http://schemas.openxmlformats.org/drawingml/2006/main"/>
+          <a:p xmlns:a="http://schemas.openxmlformats.org/drawingml/2006/main">
+            <a:pPr algn="l">
+              <a:defRPr sz="1500" b="0">
+                <a:solidFill>
+                  <a:srgbClr val="334155"/>
+                </a:solidFill>
+              </a:defRPr>
+            </a:pPr>
+            <a:r>
+              <a:rPr sz="1500" b="0">
+                <a:solidFill>
+                  <a:srgbClr val="334155"/>
+                </a:solidFill>
+              </a:rPr>
+              <a:t>does not protect useful prefetched KV</a:t>
+            </a:r>
+          </a:p>
+        </p:txBody>
+      </p:sp>
+      <p:sp>
+        <p:nvSpPr>
+          <p:cNvPr id="13" name="">
+            <a:extLst xmlns:a="http://schemas.openxmlformats.org/drawingml/2006/main">
+              <a:ext uri="{FF2B5EF4-FFF2-40B4-BE49-F238E27FC236}">
+                <a16:creationId xmlns:a16="http://schemas.microsoft.com/office/drawing/2014/main" id="{05D78D9E-CA03-4F8D-8923-73B0C8030FB0}"/>
+              </a:ext>
+            </a:extLst>
+          </p:cNvPr>
+          <p:cNvSpPr>
+            <a:spLocks xmlns:a="http://schemas.openxmlformats.org/drawingml/2006/main" noGrp="1"/>
+          </p:cNvSpPr>
+          <p:nvPr/>
+        </p:nvSpPr>
+        <p:spPr>
+          <a:xfrm xmlns:a="http://schemas.openxmlformats.org/drawingml/2006/main">
+            <a:off x="5753100" y="3086100"/>
+            <a:ext cx="666750" cy="666750"/>
+          </a:xfrm>
+          <a:prstGeom xmlns:a="http://schemas.openxmlformats.org/drawingml/2006/main" prst="rect">
+            <a:avLst/>
+          </a:prstGeom>
+          <a:noFill xmlns:a="http://schemas.openxmlformats.org/drawingml/2006/main"/>
+          <a:ln xmlns:a="http://schemas.openxmlformats.org/drawingml/2006/main" w="0">
+            <a:noFill/>
+            <a:prstDash val="solid"/>
+          </a:ln>
+        </p:spPr>
+        <p:txBody>
+          <a:bodyPr xmlns:a="http://schemas.openxmlformats.org/drawingml/2006/main" anchor="t"/>
+          <a:lstStyle xmlns:a="http://schemas.openxmlformats.org/drawingml/2006/main"/>
+          <a:p xmlns:a="http://schemas.openxmlformats.org/drawingml/2006/main">
+            <a:pPr algn="ctr">
+              <a:defRPr sz="4050" b="1">
                 <a:solidFill>
                   <a:srgbClr val="64748B"/>
                 </a:solidFill>
               </a:defRPr>
             </a:pPr>
             <a:r>
-              <a:rPr sz="825" b="0">
+              <a:rPr sz="4050" b="1">
                 <a:solidFill>
                   <a:srgbClr val="64748B"/>
                 </a:solidFill>
               </a:rPr>
-              <a:t>Source: latest_master_report.html controlled run</a:t>
-            </a:r>
-          </a:p>
-        </p:txBody>
-      </p:sp>
-      <p:sp>
-        <p:nvSpPr>
-          <p:cNvPr id="7" name="">
-            <a:extLst xmlns:a="http://schemas.openxmlformats.org/drawingml/2006/main">
-              <a:ext uri="{FF2B5EF4-FFF2-40B4-BE49-F238E27FC236}">
-                <a16:creationId xmlns:a16="http://schemas.microsoft.com/office/drawing/2014/main" id="{5F937485-B4BC-4C65-9DE2-6B6DE76B5420}"/>
+              <a:t>→</a:t>
+            </a:r>
+          </a:p>
+        </p:txBody>
+      </p:sp>
+      <p:sp>
+        <p:nvSpPr>
+          <p:cNvPr id="14" name="">
+            <a:extLst xmlns:a="http://schemas.openxmlformats.org/drawingml/2006/main">
+              <a:ext uri="{FF2B5EF4-FFF2-40B4-BE49-F238E27FC236}">
+                <a16:creationId xmlns:a16="http://schemas.microsoft.com/office/drawing/2014/main" id="{E1E64D29-68AA-4686-9270-A48950C5F2D4}"/>
+              </a:ext>
+            </a:extLst>
+          </p:cNvPr>
+          <p:cNvSpPr>
+            <a:spLocks xmlns:a="http://schemas.openxmlformats.org/drawingml/2006/main" noGrp="1"/>
+          </p:cNvSpPr>
+          <p:nvPr/>
+        </p:nvSpPr>
+        <p:spPr>
+          <a:xfrm xmlns:a="http://schemas.openxmlformats.org/drawingml/2006/main">
+            <a:off x="6686550" y="1790700"/>
+            <a:ext cx="4953000" cy="3429000"/>
+          </a:xfrm>
+          <a:prstGeom xmlns:a="http://schemas.openxmlformats.org/drawingml/2006/main" prst="roundRect">
+            <a:avLst>
+              <a:gd name="adj" fmla="val 1667"/>
+            </a:avLst>
+          </a:prstGeom>
+          <a:solidFill xmlns:a="http://schemas.openxmlformats.org/drawingml/2006/main">
+            <a:srgbClr val="EFF6FF"/>
+          </a:solidFill>
+          <a:ln xmlns:a="http://schemas.openxmlformats.org/drawingml/2006/main" w="9525">
+            <a:solidFill>
+              <a:srgbClr val="BFDBFE"/>
+            </a:solidFill>
+            <a:prstDash val="solid"/>
+          </a:ln>
+        </p:spPr>
+      </p:sp>
+      <p:sp>
+        <p:nvSpPr>
+          <p:cNvPr id="15" name="">
+            <a:extLst xmlns:a="http://schemas.openxmlformats.org/drawingml/2006/main">
+              <a:ext uri="{FF2B5EF4-FFF2-40B4-BE49-F238E27FC236}">
+                <a16:creationId xmlns:a16="http://schemas.microsoft.com/office/drawing/2014/main" id="{2C32DBF2-FD8F-41D3-B9E7-BDC910DE608C}"/>
+              </a:ext>
+            </a:extLst>
+          </p:cNvPr>
+          <p:cNvSpPr>
+            <a:spLocks xmlns:a="http://schemas.openxmlformats.org/drawingml/2006/main" noGrp="1"/>
+          </p:cNvSpPr>
+          <p:nvPr/>
+        </p:nvSpPr>
+        <p:spPr>
+          <a:xfrm xmlns:a="http://schemas.openxmlformats.org/drawingml/2006/main">
+            <a:off x="6972300" y="2076450"/>
+            <a:ext cx="4000500" cy="323850"/>
+          </a:xfrm>
+          <a:prstGeom xmlns:a="http://schemas.openxmlformats.org/drawingml/2006/main" prst="rect">
+            <a:avLst/>
+          </a:prstGeom>
+          <a:noFill xmlns:a="http://schemas.openxmlformats.org/drawingml/2006/main"/>
+          <a:ln xmlns:a="http://schemas.openxmlformats.org/drawingml/2006/main" w="0">
+            <a:noFill/>
+            <a:prstDash val="solid"/>
+          </a:ln>
+        </p:spPr>
+        <p:txBody>
+          <a:bodyPr xmlns:a="http://schemas.openxmlformats.org/drawingml/2006/main" anchor="t"/>
+          <a:lstStyle xmlns:a="http://schemas.openxmlformats.org/drawingml/2006/main"/>
+          <a:p xmlns:a="http://schemas.openxmlformats.org/drawingml/2006/main">
+            <a:pPr algn="l">
+              <a:defRPr sz="1950" b="1">
+                <a:solidFill>
+                  <a:srgbClr val="0F172A"/>
+                </a:solidFill>
+              </a:defRPr>
+            </a:pPr>
+            <a:r>
+              <a:rPr sz="1950" b="1">
+                <a:solidFill>
+                  <a:srgbClr val="0F172A"/>
+                </a:solidFill>
+              </a:rPr>
+              <a:t>Hint-aware movement</a:t>
+            </a:r>
+          </a:p>
+        </p:txBody>
+      </p:sp>
+      <p:sp>
+        <p:nvSpPr>
+          <p:cNvPr id="16" name="">
+            <a:extLst xmlns:a="http://schemas.openxmlformats.org/drawingml/2006/main">
+              <a:ext uri="{FF2B5EF4-FFF2-40B4-BE49-F238E27FC236}">
+                <a16:creationId xmlns:a16="http://schemas.microsoft.com/office/drawing/2014/main" id="{F87EFA5B-6075-49B6-A79E-2C496BB66906}"/>
+              </a:ext>
+            </a:extLst>
+          </p:cNvPr>
+          <p:cNvSpPr>
+            <a:spLocks xmlns:a="http://schemas.openxmlformats.org/drawingml/2006/main" noGrp="1"/>
+          </p:cNvSpPr>
+          <p:nvPr/>
+        </p:nvSpPr>
+        <p:spPr>
+          <a:xfrm xmlns:a="http://schemas.openxmlformats.org/drawingml/2006/main">
+            <a:off x="7010400" y="2781300"/>
+            <a:ext cx="85725" cy="85725"/>
+          </a:xfrm>
+          <a:prstGeom xmlns:a="http://schemas.openxmlformats.org/drawingml/2006/main" prst="ellipse">
+            <a:avLst/>
+          </a:prstGeom>
+          <a:solidFill xmlns:a="http://schemas.openxmlformats.org/drawingml/2006/main">
+            <a:srgbClr val="2563EB"/>
+          </a:solidFill>
+          <a:ln xmlns:a="http://schemas.openxmlformats.org/drawingml/2006/main" w="0">
+            <a:noFill/>
+            <a:prstDash val="solid"/>
+          </a:ln>
+        </p:spPr>
+      </p:sp>
+      <p:sp>
+        <p:nvSpPr>
+          <p:cNvPr id="17" name="">
+            <a:extLst xmlns:a="http://schemas.openxmlformats.org/drawingml/2006/main">
+              <a:ext uri="{FF2B5EF4-FFF2-40B4-BE49-F238E27FC236}">
+                <a16:creationId xmlns:a16="http://schemas.microsoft.com/office/drawing/2014/main" id="{BD1E0FBD-FFB5-4F61-B52D-73900F41B197}"/>
+              </a:ext>
+            </a:extLst>
+          </p:cNvPr>
+          <p:cNvSpPr>
+            <a:spLocks xmlns:a="http://schemas.openxmlformats.org/drawingml/2006/main" noGrp="1"/>
+          </p:cNvSpPr>
+          <p:nvPr/>
+        </p:nvSpPr>
+        <p:spPr>
+          <a:xfrm xmlns:a="http://schemas.openxmlformats.org/drawingml/2006/main">
+            <a:off x="7239000" y="2705100"/>
+            <a:ext cx="3771900" cy="400050"/>
+          </a:xfrm>
+          <a:prstGeom xmlns:a="http://schemas.openxmlformats.org/drawingml/2006/main" prst="rect">
+            <a:avLst/>
+          </a:prstGeom>
+          <a:noFill xmlns:a="http://schemas.openxmlformats.org/drawingml/2006/main"/>
+          <a:ln xmlns:a="http://schemas.openxmlformats.org/drawingml/2006/main" w="0">
+            <a:noFill/>
+            <a:prstDash val="solid"/>
+          </a:ln>
+        </p:spPr>
+        <p:txBody>
+          <a:bodyPr xmlns:a="http://schemas.openxmlformats.org/drawingml/2006/main" anchor="t"/>
+          <a:lstStyle xmlns:a="http://schemas.openxmlformats.org/drawingml/2006/main"/>
+          <a:p xmlns:a="http://schemas.openxmlformats.org/drawingml/2006/main">
+            <a:pPr algn="l">
+              <a:defRPr sz="1500" b="0">
+                <a:solidFill>
+                  <a:srgbClr val="334155"/>
+                </a:solidFill>
+              </a:defRPr>
+            </a:pPr>
+            <a:r>
+              <a:rPr sz="1500" b="0">
+                <a:solidFill>
+                  <a:srgbClr val="334155"/>
+                </a:solidFill>
+              </a:rPr>
+              <a:t>tags KV by session and priority</a:t>
+            </a:r>
+          </a:p>
+        </p:txBody>
+      </p:sp>
+      <p:sp>
+        <p:nvSpPr>
+          <p:cNvPr id="18" name="">
+            <a:extLst xmlns:a="http://schemas.openxmlformats.org/drawingml/2006/main">
+              <a:ext uri="{FF2B5EF4-FFF2-40B4-BE49-F238E27FC236}">
+                <a16:creationId xmlns:a16="http://schemas.microsoft.com/office/drawing/2014/main" id="{9F8BAC5C-5C39-41D4-8F44-9AA18A3B0C3A}"/>
+              </a:ext>
+            </a:extLst>
+          </p:cNvPr>
+          <p:cNvSpPr>
+            <a:spLocks xmlns:a="http://schemas.openxmlformats.org/drawingml/2006/main" noGrp="1"/>
+          </p:cNvSpPr>
+          <p:nvPr/>
+        </p:nvSpPr>
+        <p:spPr>
+          <a:xfrm xmlns:a="http://schemas.openxmlformats.org/drawingml/2006/main">
+            <a:off x="7010400" y="3295650"/>
+            <a:ext cx="85725" cy="85725"/>
+          </a:xfrm>
+          <a:prstGeom xmlns:a="http://schemas.openxmlformats.org/drawingml/2006/main" prst="ellipse">
+            <a:avLst/>
+          </a:prstGeom>
+          <a:solidFill xmlns:a="http://schemas.openxmlformats.org/drawingml/2006/main">
+            <a:srgbClr val="A855F7"/>
+          </a:solidFill>
+          <a:ln xmlns:a="http://schemas.openxmlformats.org/drawingml/2006/main" w="0">
+            <a:noFill/>
+            <a:prstDash val="solid"/>
+          </a:ln>
+        </p:spPr>
+      </p:sp>
+      <p:sp>
+        <p:nvSpPr>
+          <p:cNvPr id="19" name="">
+            <a:extLst xmlns:a="http://schemas.openxmlformats.org/drawingml/2006/main">
+              <a:ext uri="{FF2B5EF4-FFF2-40B4-BE49-F238E27FC236}">
+                <a16:creationId xmlns:a16="http://schemas.microsoft.com/office/drawing/2014/main" id="{FBBD1F50-4C2C-4335-9C67-055114E94591}"/>
+              </a:ext>
+            </a:extLst>
+          </p:cNvPr>
+          <p:cNvSpPr>
+            <a:spLocks xmlns:a="http://schemas.openxmlformats.org/drawingml/2006/main" noGrp="1"/>
+          </p:cNvSpPr>
+          <p:nvPr/>
+        </p:nvSpPr>
+        <p:spPr>
+          <a:xfrm xmlns:a="http://schemas.openxmlformats.org/drawingml/2006/main">
+            <a:off x="7239000" y="3219450"/>
+            <a:ext cx="3771900" cy="400050"/>
+          </a:xfrm>
+          <a:prstGeom xmlns:a="http://schemas.openxmlformats.org/drawingml/2006/main" prst="rect">
+            <a:avLst/>
+          </a:prstGeom>
+          <a:noFill xmlns:a="http://schemas.openxmlformats.org/drawingml/2006/main"/>
+          <a:ln xmlns:a="http://schemas.openxmlformats.org/drawingml/2006/main" w="0">
+            <a:noFill/>
+            <a:prstDash val="solid"/>
+          </a:ln>
+        </p:spPr>
+        <p:txBody>
+          <a:bodyPr xmlns:a="http://schemas.openxmlformats.org/drawingml/2006/main" anchor="t"/>
+          <a:lstStyle xmlns:a="http://schemas.openxmlformats.org/drawingml/2006/main"/>
+          <a:p xmlns:a="http://schemas.openxmlformats.org/drawingml/2006/main">
+            <a:pPr algn="l">
+              <a:defRPr sz="1500" b="0">
+                <a:solidFill>
+                  <a:srgbClr val="334155"/>
+                </a:solidFill>
+              </a:defRPr>
+            </a:pPr>
+            <a:r>
+              <a:rPr sz="1500" b="0">
+                <a:solidFill>
+                  <a:srgbClr val="334155"/>
+                </a:solidFill>
+              </a:rPr>
+              <a:t>schedules against replay deadlines</a:t>
+            </a:r>
+          </a:p>
+        </p:txBody>
+      </p:sp>
+      <p:sp>
+        <p:nvSpPr>
+          <p:cNvPr id="20" name="">
+            <a:extLst xmlns:a="http://schemas.openxmlformats.org/drawingml/2006/main">
+              <a:ext uri="{FF2B5EF4-FFF2-40B4-BE49-F238E27FC236}">
+                <a16:creationId xmlns:a16="http://schemas.microsoft.com/office/drawing/2014/main" id="{D003EDC9-BF09-4D4E-BD4E-E085488A4981}"/>
+              </a:ext>
+            </a:extLst>
+          </p:cNvPr>
+          <p:cNvSpPr>
+            <a:spLocks xmlns:a="http://schemas.openxmlformats.org/drawingml/2006/main" noGrp="1"/>
+          </p:cNvSpPr>
+          <p:nvPr/>
+        </p:nvSpPr>
+        <p:spPr>
+          <a:xfrm xmlns:a="http://schemas.openxmlformats.org/drawingml/2006/main">
+            <a:off x="7010400" y="3810000"/>
+            <a:ext cx="85725" cy="85725"/>
+          </a:xfrm>
+          <a:prstGeom xmlns:a="http://schemas.openxmlformats.org/drawingml/2006/main" prst="ellipse">
+            <a:avLst/>
+          </a:prstGeom>
+          <a:solidFill xmlns:a="http://schemas.openxmlformats.org/drawingml/2006/main">
+            <a:srgbClr val="06B6D4"/>
+          </a:solidFill>
+          <a:ln xmlns:a="http://schemas.openxmlformats.org/drawingml/2006/main" w="0">
+            <a:noFill/>
+            <a:prstDash val="solid"/>
+          </a:ln>
+        </p:spPr>
+      </p:sp>
+      <p:sp>
+        <p:nvSpPr>
+          <p:cNvPr id="21" name="">
+            <a:extLst xmlns:a="http://schemas.openxmlformats.org/drawingml/2006/main">
+              <a:ext uri="{FF2B5EF4-FFF2-40B4-BE49-F238E27FC236}">
+                <a16:creationId xmlns:a16="http://schemas.microsoft.com/office/drawing/2014/main" id="{11D831CD-8A59-414A-B720-9EFF3F9E0C3D}"/>
+              </a:ext>
+            </a:extLst>
+          </p:cNvPr>
+          <p:cNvSpPr>
+            <a:spLocks xmlns:a="http://schemas.openxmlformats.org/drawingml/2006/main" noGrp="1"/>
+          </p:cNvSpPr>
+          <p:nvPr/>
+        </p:nvSpPr>
+        <p:spPr>
+          <a:xfrm xmlns:a="http://schemas.openxmlformats.org/drawingml/2006/main">
+            <a:off x="7239000" y="3733800"/>
+            <a:ext cx="3771900" cy="400050"/>
+          </a:xfrm>
+          <a:prstGeom xmlns:a="http://schemas.openxmlformats.org/drawingml/2006/main" prst="rect">
+            <a:avLst/>
+          </a:prstGeom>
+          <a:noFill xmlns:a="http://schemas.openxmlformats.org/drawingml/2006/main"/>
+          <a:ln xmlns:a="http://schemas.openxmlformats.org/drawingml/2006/main" w="0">
+            <a:noFill/>
+            <a:prstDash val="solid"/>
+          </a:ln>
+        </p:spPr>
+        <p:txBody>
+          <a:bodyPr xmlns:a="http://schemas.openxmlformats.org/drawingml/2006/main" anchor="t"/>
+          <a:lstStyle xmlns:a="http://schemas.openxmlformats.org/drawingml/2006/main"/>
+          <a:p xmlns:a="http://schemas.openxmlformats.org/drawingml/2006/main">
+            <a:pPr algn="l">
+              <a:defRPr sz="1500" b="0">
+                <a:solidFill>
+                  <a:srgbClr val="334155"/>
+                </a:solidFill>
+              </a:defRPr>
+            </a:pPr>
+            <a:r>
+              <a:rPr sz="1500" b="0">
+                <a:solidFill>
+                  <a:srgbClr val="334155"/>
+                </a:solidFill>
+              </a:rPr>
+              <a:t>moves hot KV before replay</a:t>
+            </a:r>
+          </a:p>
+        </p:txBody>
+      </p:sp>
+      <p:sp>
+        <p:nvSpPr>
+          <p:cNvPr id="22" name="">
+            <a:extLst xmlns:a="http://schemas.openxmlformats.org/drawingml/2006/main">
+              <a:ext uri="{FF2B5EF4-FFF2-40B4-BE49-F238E27FC236}">
+                <a16:creationId xmlns:a16="http://schemas.microsoft.com/office/drawing/2014/main" id="{64DC2A31-72C5-4B2F-9DE8-E484282CF975}"/>
+              </a:ext>
+            </a:extLst>
+          </p:cNvPr>
+          <p:cNvSpPr>
+            <a:spLocks xmlns:a="http://schemas.openxmlformats.org/drawingml/2006/main" noGrp="1"/>
+          </p:cNvSpPr>
+          <p:nvPr/>
+        </p:nvSpPr>
+        <p:spPr>
+          <a:xfrm xmlns:a="http://schemas.openxmlformats.org/drawingml/2006/main">
+            <a:off x="7010400" y="4324350"/>
+            <a:ext cx="85725" cy="85725"/>
+          </a:xfrm>
+          <a:prstGeom xmlns:a="http://schemas.openxmlformats.org/drawingml/2006/main" prst="ellipse">
+            <a:avLst/>
+          </a:prstGeom>
+          <a:solidFill xmlns:a="http://schemas.openxmlformats.org/drawingml/2006/main">
+            <a:srgbClr val="16A34A"/>
+          </a:solidFill>
+          <a:ln xmlns:a="http://schemas.openxmlformats.org/drawingml/2006/main" w="0">
+            <a:noFill/>
+            <a:prstDash val="solid"/>
+          </a:ln>
+        </p:spPr>
+      </p:sp>
+      <p:sp>
+        <p:nvSpPr>
+          <p:cNvPr id="23" name="">
+            <a:extLst xmlns:a="http://schemas.openxmlformats.org/drawingml/2006/main">
+              <a:ext uri="{FF2B5EF4-FFF2-40B4-BE49-F238E27FC236}">
+                <a16:creationId xmlns:a16="http://schemas.microsoft.com/office/drawing/2014/main" id="{57A26081-F69A-43A0-B695-CEE2C8B2A024}"/>
+              </a:ext>
+            </a:extLst>
+          </p:cNvPr>
+          <p:cNvSpPr>
+            <a:spLocks xmlns:a="http://schemas.openxmlformats.org/drawingml/2006/main" noGrp="1"/>
+          </p:cNvSpPr>
+          <p:nvPr/>
+        </p:nvSpPr>
+        <p:spPr>
+          <a:xfrm xmlns:a="http://schemas.openxmlformats.org/drawingml/2006/main">
+            <a:off x="7239000" y="4248150"/>
+            <a:ext cx="3771900" cy="400050"/>
+          </a:xfrm>
+          <a:prstGeom xmlns:a="http://schemas.openxmlformats.org/drawingml/2006/main" prst="rect">
+            <a:avLst/>
+          </a:prstGeom>
+          <a:noFill xmlns:a="http://schemas.openxmlformats.org/drawingml/2006/main"/>
+          <a:ln xmlns:a="http://schemas.openxmlformats.org/drawingml/2006/main" w="0">
+            <a:noFill/>
+            <a:prstDash val="solid"/>
+          </a:ln>
+        </p:spPr>
+        <p:txBody>
+          <a:bodyPr xmlns:a="http://schemas.openxmlformats.org/drawingml/2006/main" anchor="t"/>
+          <a:lstStyle xmlns:a="http://schemas.openxmlformats.org/drawingml/2006/main"/>
+          <a:p xmlns:a="http://schemas.openxmlformats.org/drawingml/2006/main">
+            <a:pPr algn="l">
+              <a:defRPr sz="1500" b="0">
+                <a:solidFill>
+                  <a:srgbClr val="334155"/>
+                </a:solidFill>
+              </a:defRPr>
+            </a:pPr>
+            <a:r>
+              <a:rPr sz="1500" b="0">
+                <a:solidFill>
+                  <a:srgbClr val="334155"/>
+                </a:solidFill>
+              </a:rPr>
+              <a:t>reports late, useful, and wasted movement</a:t>
+            </a:r>
+          </a:p>
+        </p:txBody>
+      </p:sp>
+      <p:sp>
+        <p:nvSpPr>
+          <p:cNvPr id="24" name="">
+            <a:extLst xmlns:a="http://schemas.openxmlformats.org/drawingml/2006/main">
+              <a:ext uri="{FF2B5EF4-FFF2-40B4-BE49-F238E27FC236}">
+                <a16:creationId xmlns:a16="http://schemas.microsoft.com/office/drawing/2014/main" id="{1B1FC787-6117-4591-A247-C70AD4EC4EF8}"/>
               </a:ext>
             </a:extLst>
           </p:cNvPr>
@@ -3917,10 +4098,10 @@
       </p:sp>
       <p:sp>
         <p:nvSpPr>
-          <p:cNvPr id="8" name="">
-            <a:extLst xmlns:a="http://schemas.openxmlformats.org/drawingml/2006/main">
-              <a:ext uri="{FF2B5EF4-FFF2-40B4-BE49-F238E27FC236}">
-                <a16:creationId xmlns:a16="http://schemas.microsoft.com/office/drawing/2014/main" id="{708DB562-E129-4645-A1BB-4BE0C85A4DAE}"/>
+          <p:cNvPr id="25" name="">
+            <a:extLst xmlns:a="http://schemas.openxmlformats.org/drawingml/2006/main">
+              <a:ext uri="{FF2B5EF4-FFF2-40B4-BE49-F238E27FC236}">
+                <a16:creationId xmlns:a16="http://schemas.microsoft.com/office/drawing/2014/main" id="{A405F162-4C48-42E9-909F-8C847513BB90}"/>
               </a:ext>
             </a:extLst>
           </p:cNvPr>
@@ -3968,7 +4149,7 @@
     </p:spTree>
     <p:extLst>
       <p:ext uri="{BB962C8B-B14F-4D97-AF65-F5344CB8AC3E}">
-        <p14:creationId xmlns:p14="http://schemas.microsoft.com/office/powerpoint/2010/main" val="1359854724"/>
+        <p14:creationId xmlns:p14="http://schemas.microsoft.com/office/powerpoint/2010/main" val="200175440"/>
       </p:ext>
     </p:extLst>
   </p:cSld>
@@ -3996,10 +4177,10 @@
       </p:grpSpPr>
       <p:sp>
         <p:nvSpPr>
-          <p:cNvPr id="16" name="">
-            <a:extLst xmlns:a="http://schemas.openxmlformats.org/drawingml/2006/main">
-              <a:ext uri="{FF2B5EF4-FFF2-40B4-BE49-F238E27FC236}">
-                <a16:creationId xmlns:a16="http://schemas.microsoft.com/office/drawing/2014/main" id="{AB2DC89D-F5AD-4BE0-8539-A09A028F752D}"/>
+          <p:cNvPr id="9" name="">
+            <a:extLst xmlns:a="http://schemas.openxmlformats.org/drawingml/2006/main">
+              <a:ext uri="{FF2B5EF4-FFF2-40B4-BE49-F238E27FC236}">
+                <a16:creationId xmlns:a16="http://schemas.microsoft.com/office/drawing/2014/main" id="{0D95E657-4C7E-4B10-A25D-2BE6E78F0C24}"/>
               </a:ext>
             </a:extLst>
           </p:cNvPr>
@@ -4039,7 +4220,7 @@
                   <a:srgbClr val="0F172A"/>
                 </a:solidFill>
               </a:rPr>
-              <a:t>Software prefetch often missed the agent replay deadline</a:t>
+              <a:t>The replay path exposes the bottleneck</a:t>
             </a:r>
           </a:p>
         </p:txBody>
@@ -4049,7 +4230,7 @@
           <p:cNvPr id="2" name="">
             <a:extLst xmlns:a="http://schemas.openxmlformats.org/drawingml/2006/main">
               <a:ext uri="{FF2B5EF4-FFF2-40B4-BE49-F238E27FC236}">
-                <a16:creationId xmlns:a16="http://schemas.microsoft.com/office/drawing/2014/main" id="{B8CFC005-2488-4C43-A4D4-8DA48077A7DD}"/>
+                <a16:creationId xmlns:a16="http://schemas.microsoft.com/office/drawing/2014/main" id="{179CB9E9-F6EC-4D0F-BAF3-166CDC45C672}"/>
               </a:ext>
             </a:extLst>
           </p:cNvPr>
@@ -4089,7 +4270,7 @@
                   <a:srgbClr val="64748B"/>
                 </a:solidFill>
               </a:rPr>
-              <a:t>Across live prefetch attempts, nearly every hint completed after the agent had already resumed.</a:t>
+              <a:t>One tool-gap row shows where replay spends time before the first useful token.</a:t>
             </a:r>
           </a:p>
         </p:txBody>
@@ -4099,23 +4280,23 @@
           <p:cNvPr id="3" name="">
             <a:extLst xmlns:a="http://schemas.openxmlformats.org/drawingml/2006/main">
               <a:ext uri="{FF2B5EF4-FFF2-40B4-BE49-F238E27FC236}">
-                <a16:creationId xmlns:a16="http://schemas.microsoft.com/office/drawing/2014/main" id="{5F646132-09D9-4A24-A5FD-C9849F83B36C}"/>
-              </a:ext>
-            </a:extLst>
-          </p:cNvPr>
-          <p:cNvSpPr>
-            <a:spLocks xmlns:a="http://schemas.openxmlformats.org/drawingml/2006/main" noGrp="1"/>
-          </p:cNvSpPr>
-          <p:nvPr/>
-        </p:nvSpPr>
-        <p:spPr>
-          <a:xfrm xmlns:a="http://schemas.openxmlformats.org/drawingml/2006/main">
-            <a:off x="323850" y="1428750"/>
-            <a:ext cx="8572500" cy="3886200"/>
+                <a16:creationId xmlns:a16="http://schemas.microsoft.com/office/drawing/2014/main" id="{7FB6521F-C60B-498F-99E2-1DB3FF66CB10}"/>
+              </a:ext>
+            </a:extLst>
+          </p:cNvPr>
+          <p:cNvSpPr>
+            <a:spLocks xmlns:a="http://schemas.openxmlformats.org/drawingml/2006/main" noGrp="1"/>
+          </p:cNvSpPr>
+          <p:nvPr/>
+        </p:nvSpPr>
+        <p:spPr>
+          <a:xfrm xmlns:a="http://schemas.openxmlformats.org/drawingml/2006/main">
+            <a:off x="323850" y="1371600"/>
+            <a:ext cx="11201400" cy="4438650"/>
           </a:xfrm>
           <a:prstGeom xmlns:a="http://schemas.openxmlformats.org/drawingml/2006/main" prst="roundRect">
             <a:avLst>
-              <a:gd name="adj" fmla="val 1471"/>
+              <a:gd name="adj" fmla="val 1288"/>
             </a:avLst>
           </a:prstGeom>
           <a:solidFill xmlns:a="http://schemas.openxmlformats.org/drawingml/2006/main">
@@ -4131,20 +4312,20 @@
       </p:sp>
       <p:pic>
         <p:nvPicPr>
-          <p:cNvPr id="19" name=""/>
+          <p:cNvPr id="12" name=""/>
           <p:cNvPicPr>
             <a:picLocks xmlns:a="http://schemas.openxmlformats.org/drawingml/2006/main" noChangeAspect="1"/>
           </p:cNvPicPr>
           <p:nvPr/>
         </p:nvPicPr>
         <p:blipFill>
-          <a:blip xmlns:r="http://schemas.openxmlformats.org/officeDocument/2006/relationships" xmlns:a="http://schemas.openxmlformats.org/drawingml/2006/main" r:embed="Rd8aac8461c814508"/>
+          <a:blip xmlns:r="http://schemas.openxmlformats.org/officeDocument/2006/relationships" xmlns:a="http://schemas.openxmlformats.org/drawingml/2006/main" r:embed="R7e766f32f879457e"/>
           <a:stretch xmlns:a="http://schemas.openxmlformats.org/drawingml/2006/main"/>
         </p:blipFill>
         <p:spPr>
           <a:xfrm xmlns:a="http://schemas.openxmlformats.org/drawingml/2006/main">
-            <a:off x="400050" y="1890170"/>
-            <a:ext cx="8420100" cy="2963361"/>
+            <a:off x="400050" y="1448639"/>
+            <a:ext cx="11049000" cy="4284571"/>
           </a:xfrm>
           <a:prstGeom xmlns:a="http://schemas.openxmlformats.org/drawingml/2006/main" prst="rect">
             <a:avLst/>
@@ -4156,377 +4337,57 @@
           <p:cNvPr id="5" name="">
             <a:extLst xmlns:a="http://schemas.openxmlformats.org/drawingml/2006/main">
               <a:ext uri="{FF2B5EF4-FFF2-40B4-BE49-F238E27FC236}">
-                <a16:creationId xmlns:a16="http://schemas.microsoft.com/office/drawing/2014/main" id="{DAEFECA4-A6EB-4280-AA42-E6BAD723BACB}"/>
-              </a:ext>
-            </a:extLst>
-          </p:cNvPr>
-          <p:cNvSpPr>
-            <a:spLocks xmlns:a="http://schemas.openxmlformats.org/drawingml/2006/main" noGrp="1"/>
-          </p:cNvSpPr>
-          <p:nvPr/>
-        </p:nvSpPr>
-        <p:spPr>
-          <a:xfrm xmlns:a="http://schemas.openxmlformats.org/drawingml/2006/main">
-            <a:off x="9124950" y="1600200"/>
-            <a:ext cx="2228850" cy="1295400"/>
-          </a:xfrm>
-          <a:prstGeom xmlns:a="http://schemas.openxmlformats.org/drawingml/2006/main" prst="roundRect">
-            <a:avLst>
-              <a:gd name="adj" fmla="val 4412"/>
-            </a:avLst>
-          </a:prstGeom>
-          <a:solidFill xmlns:a="http://schemas.openxmlformats.org/drawingml/2006/main">
-            <a:srgbClr val="FEF2F2"/>
-          </a:solidFill>
-          <a:ln xmlns:a="http://schemas.openxmlformats.org/drawingml/2006/main" w="9525">
-            <a:solidFill>
-              <a:srgbClr val="FECACA"/>
-            </a:solidFill>
-            <a:prstDash val="solid"/>
-          </a:ln>
-        </p:spPr>
+                <a16:creationId xmlns:a16="http://schemas.microsoft.com/office/drawing/2014/main" id="{E2E5464B-FB44-4566-944F-80AAD20B35E8}"/>
+              </a:ext>
+            </a:extLst>
+          </p:cNvPr>
+          <p:cNvSpPr>
+            <a:spLocks xmlns:a="http://schemas.openxmlformats.org/drawingml/2006/main" noGrp="1"/>
+          </p:cNvSpPr>
+          <p:nvPr/>
+        </p:nvSpPr>
+        <p:spPr>
+          <a:xfrm xmlns:a="http://schemas.openxmlformats.org/drawingml/2006/main">
+            <a:off x="685800" y="5829300"/>
+            <a:ext cx="9810750" cy="228600"/>
+          </a:xfrm>
+          <a:prstGeom xmlns:a="http://schemas.openxmlformats.org/drawingml/2006/main" prst="rect">
+            <a:avLst/>
+          </a:prstGeom>
+          <a:noFill xmlns:a="http://schemas.openxmlformats.org/drawingml/2006/main"/>
+          <a:ln xmlns:a="http://schemas.openxmlformats.org/drawingml/2006/main" w="0">
+            <a:noFill/>
+            <a:prstDash val="solid"/>
+          </a:ln>
+        </p:spPr>
+        <p:txBody>
+          <a:bodyPr xmlns:a="http://schemas.openxmlformats.org/drawingml/2006/main" anchor="t"/>
+          <a:lstStyle xmlns:a="http://schemas.openxmlformats.org/drawingml/2006/main"/>
+          <a:p xmlns:a="http://schemas.openxmlformats.org/drawingml/2006/main">
+            <a:pPr algn="l">
+              <a:defRPr sz="1275" b="0">
+                <a:solidFill>
+                  <a:srgbClr val="334155"/>
+                </a:solidFill>
+              </a:defRPr>
+            </a:pPr>
+            <a:r>
+              <a:rPr sz="1275" b="0">
+                <a:solidFill>
+                  <a:srgbClr val="334155"/>
+                </a:solidFill>
+              </a:rPr>
+              <a:t>Read left to right: model turn → tool wait → replay path. Cyan is host-to-device KV load; magenta/gold are work before first token.</a:t>
+            </a:r>
+          </a:p>
+        </p:txBody>
       </p:sp>
       <p:sp>
         <p:nvSpPr>
           <p:cNvPr id="6" name="">
             <a:extLst xmlns:a="http://schemas.openxmlformats.org/drawingml/2006/main">
               <a:ext uri="{FF2B5EF4-FFF2-40B4-BE49-F238E27FC236}">
-                <a16:creationId xmlns:a16="http://schemas.microsoft.com/office/drawing/2014/main" id="{630A0F74-3141-49BF-81A1-E2A2FFBDA679}"/>
-              </a:ext>
-            </a:extLst>
-          </p:cNvPr>
-          <p:cNvSpPr>
-            <a:spLocks xmlns:a="http://schemas.openxmlformats.org/drawingml/2006/main" noGrp="1"/>
-          </p:cNvSpPr>
-          <p:nvPr/>
-        </p:nvSpPr>
-        <p:spPr>
-          <a:xfrm xmlns:a="http://schemas.openxmlformats.org/drawingml/2006/main">
-            <a:off x="9296400" y="1809750"/>
-            <a:ext cx="1885950" cy="438150"/>
-          </a:xfrm>
-          <a:prstGeom xmlns:a="http://schemas.openxmlformats.org/drawingml/2006/main" prst="rect">
-            <a:avLst/>
-          </a:prstGeom>
-          <a:noFill xmlns:a="http://schemas.openxmlformats.org/drawingml/2006/main"/>
-          <a:ln xmlns:a="http://schemas.openxmlformats.org/drawingml/2006/main" w="0">
-            <a:noFill/>
-            <a:prstDash val="solid"/>
-          </a:ln>
-        </p:spPr>
-        <p:txBody>
-          <a:bodyPr xmlns:a="http://schemas.openxmlformats.org/drawingml/2006/main" anchor="t"/>
-          <a:lstStyle xmlns:a="http://schemas.openxmlformats.org/drawingml/2006/main"/>
-          <a:p xmlns:a="http://schemas.openxmlformats.org/drawingml/2006/main">
-            <a:pPr algn="ctr">
-              <a:defRPr sz="2700" b="1">
-                <a:solidFill>
-                  <a:srgbClr val="B91C1C"/>
-                </a:solidFill>
-              </a:defRPr>
-            </a:pPr>
-            <a:r>
-              <a:rPr sz="2700" b="1">
-                <a:solidFill>
-                  <a:srgbClr val="B91C1C"/>
-                </a:solidFill>
-              </a:rPr>
-              <a:t>112 of 114</a:t>
-            </a:r>
-          </a:p>
-        </p:txBody>
-      </p:sp>
-      <p:sp>
-        <p:nvSpPr>
-          <p:cNvPr id="7" name="">
-            <a:extLst xmlns:a="http://schemas.openxmlformats.org/drawingml/2006/main">
-              <a:ext uri="{FF2B5EF4-FFF2-40B4-BE49-F238E27FC236}">
-                <a16:creationId xmlns:a16="http://schemas.microsoft.com/office/drawing/2014/main" id="{24B4DBF1-0DBE-441B-A570-748E3F755D4C}"/>
-              </a:ext>
-            </a:extLst>
-          </p:cNvPr>
-          <p:cNvSpPr>
-            <a:spLocks xmlns:a="http://schemas.openxmlformats.org/drawingml/2006/main" noGrp="1"/>
-          </p:cNvSpPr>
-          <p:nvPr/>
-        </p:nvSpPr>
-        <p:spPr>
-          <a:xfrm xmlns:a="http://schemas.openxmlformats.org/drawingml/2006/main">
-            <a:off x="9353550" y="2324100"/>
-            <a:ext cx="1771650" cy="228600"/>
-          </a:xfrm>
-          <a:prstGeom xmlns:a="http://schemas.openxmlformats.org/drawingml/2006/main" prst="rect">
-            <a:avLst/>
-          </a:prstGeom>
-          <a:noFill xmlns:a="http://schemas.openxmlformats.org/drawingml/2006/main"/>
-          <a:ln xmlns:a="http://schemas.openxmlformats.org/drawingml/2006/main" w="0">
-            <a:noFill/>
-            <a:prstDash val="solid"/>
-          </a:ln>
-        </p:spPr>
-        <p:txBody>
-          <a:bodyPr xmlns:a="http://schemas.openxmlformats.org/drawingml/2006/main" anchor="t"/>
-          <a:lstStyle xmlns:a="http://schemas.openxmlformats.org/drawingml/2006/main"/>
-          <a:p xmlns:a="http://schemas.openxmlformats.org/drawingml/2006/main">
-            <a:pPr algn="ctr">
-              <a:defRPr sz="1350" b="0">
-                <a:solidFill>
-                  <a:srgbClr val="334155"/>
-                </a:solidFill>
-              </a:defRPr>
-            </a:pPr>
-            <a:r>
-              <a:rPr sz="1350" b="0">
-                <a:solidFill>
-                  <a:srgbClr val="334155"/>
-                </a:solidFill>
-              </a:rPr>
-              <a:t>prefetch attempts</a:t>
-            </a:r>
-          </a:p>
-        </p:txBody>
-      </p:sp>
-      <p:sp>
-        <p:nvSpPr>
-          <p:cNvPr id="8" name="">
-            <a:extLst xmlns:a="http://schemas.openxmlformats.org/drawingml/2006/main">
-              <a:ext uri="{FF2B5EF4-FFF2-40B4-BE49-F238E27FC236}">
-                <a16:creationId xmlns:a16="http://schemas.microsoft.com/office/drawing/2014/main" id="{48355EA9-4C13-40C2-87B6-973A4FA0269D}"/>
-              </a:ext>
-            </a:extLst>
-          </p:cNvPr>
-          <p:cNvSpPr>
-            <a:spLocks xmlns:a="http://schemas.openxmlformats.org/drawingml/2006/main" noGrp="1"/>
-          </p:cNvSpPr>
-          <p:nvPr/>
-        </p:nvSpPr>
-        <p:spPr>
-          <a:xfrm xmlns:a="http://schemas.openxmlformats.org/drawingml/2006/main">
-            <a:off x="9353550" y="2571750"/>
-            <a:ext cx="1771650" cy="228600"/>
-          </a:xfrm>
-          <a:prstGeom xmlns:a="http://schemas.openxmlformats.org/drawingml/2006/main" prst="rect">
-            <a:avLst/>
-          </a:prstGeom>
-          <a:noFill xmlns:a="http://schemas.openxmlformats.org/drawingml/2006/main"/>
-          <a:ln xmlns:a="http://schemas.openxmlformats.org/drawingml/2006/main" w="0">
-            <a:noFill/>
-            <a:prstDash val="solid"/>
-          </a:ln>
-        </p:spPr>
-        <p:txBody>
-          <a:bodyPr xmlns:a="http://schemas.openxmlformats.org/drawingml/2006/main" anchor="t"/>
-          <a:lstStyle xmlns:a="http://schemas.openxmlformats.org/drawingml/2006/main"/>
-          <a:p xmlns:a="http://schemas.openxmlformats.org/drawingml/2006/main">
-            <a:pPr algn="ctr">
-              <a:defRPr sz="1350" b="0">
-                <a:solidFill>
-                  <a:srgbClr val="334155"/>
-                </a:solidFill>
-              </a:defRPr>
-            </a:pPr>
-            <a:r>
-              <a:rPr sz="1350" b="0">
-                <a:solidFill>
-                  <a:srgbClr val="334155"/>
-                </a:solidFill>
-              </a:rPr>
-              <a:t>were late</a:t>
-            </a:r>
-          </a:p>
-        </p:txBody>
-      </p:sp>
-      <p:sp>
-        <p:nvSpPr>
-          <p:cNvPr id="9" name="">
-            <a:extLst xmlns:a="http://schemas.openxmlformats.org/drawingml/2006/main">
-              <a:ext uri="{FF2B5EF4-FFF2-40B4-BE49-F238E27FC236}">
-                <a16:creationId xmlns:a16="http://schemas.microsoft.com/office/drawing/2014/main" id="{21517459-C31F-4DFD-912F-D56AB4829B27}"/>
-              </a:ext>
-            </a:extLst>
-          </p:cNvPr>
-          <p:cNvSpPr>
-            <a:spLocks xmlns:a="http://schemas.openxmlformats.org/drawingml/2006/main" noGrp="1"/>
-          </p:cNvSpPr>
-          <p:nvPr/>
-        </p:nvSpPr>
-        <p:spPr>
-          <a:xfrm xmlns:a="http://schemas.openxmlformats.org/drawingml/2006/main">
-            <a:off x="9124950" y="3143250"/>
-            <a:ext cx="2228850" cy="1066800"/>
-          </a:xfrm>
-          <a:prstGeom xmlns:a="http://schemas.openxmlformats.org/drawingml/2006/main" prst="roundRect">
-            <a:avLst>
-              <a:gd name="adj" fmla="val 5357"/>
-            </a:avLst>
-          </a:prstGeom>
-          <a:solidFill xmlns:a="http://schemas.openxmlformats.org/drawingml/2006/main">
-            <a:srgbClr val="FFF7ED"/>
-          </a:solidFill>
-          <a:ln xmlns:a="http://schemas.openxmlformats.org/drawingml/2006/main" w="9525">
-            <a:solidFill>
-              <a:srgbClr val="FED7AA"/>
-            </a:solidFill>
-            <a:prstDash val="solid"/>
-          </a:ln>
-        </p:spPr>
-      </p:sp>
-      <p:sp>
-        <p:nvSpPr>
-          <p:cNvPr id="10" name="">
-            <a:extLst xmlns:a="http://schemas.openxmlformats.org/drawingml/2006/main">
-              <a:ext uri="{FF2B5EF4-FFF2-40B4-BE49-F238E27FC236}">
-                <a16:creationId xmlns:a16="http://schemas.microsoft.com/office/drawing/2014/main" id="{CC2AB3B5-2F41-4374-9EEF-154ADC9DB725}"/>
-              </a:ext>
-            </a:extLst>
-          </p:cNvPr>
-          <p:cNvSpPr>
-            <a:spLocks xmlns:a="http://schemas.openxmlformats.org/drawingml/2006/main" noGrp="1"/>
-          </p:cNvSpPr>
-          <p:nvPr/>
-        </p:nvSpPr>
-        <p:spPr>
-          <a:xfrm xmlns:a="http://schemas.openxmlformats.org/drawingml/2006/main">
-            <a:off x="9353550" y="3333750"/>
-            <a:ext cx="1771650" cy="419100"/>
-          </a:xfrm>
-          <a:prstGeom xmlns:a="http://schemas.openxmlformats.org/drawingml/2006/main" prst="rect">
-            <a:avLst/>
-          </a:prstGeom>
-          <a:noFill xmlns:a="http://schemas.openxmlformats.org/drawingml/2006/main"/>
-          <a:ln xmlns:a="http://schemas.openxmlformats.org/drawingml/2006/main" w="0">
-            <a:noFill/>
-            <a:prstDash val="solid"/>
-          </a:ln>
-        </p:spPr>
-        <p:txBody>
-          <a:bodyPr xmlns:a="http://schemas.openxmlformats.org/drawingml/2006/main" anchor="t"/>
-          <a:lstStyle xmlns:a="http://schemas.openxmlformats.org/drawingml/2006/main"/>
-          <a:p xmlns:a="http://schemas.openxmlformats.org/drawingml/2006/main">
-            <a:pPr algn="ctr">
-              <a:defRPr sz="3000" b="1">
-                <a:solidFill>
-                  <a:srgbClr val="C2410C"/>
-                </a:solidFill>
-              </a:defRPr>
-            </a:pPr>
-            <a:r>
-              <a:rPr sz="3000" b="1">
-                <a:solidFill>
-                  <a:srgbClr val="C2410C"/>
-                </a:solidFill>
-              </a:rPr>
-              <a:t>98.25%</a:t>
-            </a:r>
-          </a:p>
-        </p:txBody>
-      </p:sp>
-      <p:sp>
-        <p:nvSpPr>
-          <p:cNvPr id="11" name="">
-            <a:extLst xmlns:a="http://schemas.openxmlformats.org/drawingml/2006/main">
-              <a:ext uri="{FF2B5EF4-FFF2-40B4-BE49-F238E27FC236}">
-                <a16:creationId xmlns:a16="http://schemas.microsoft.com/office/drawing/2014/main" id="{9BCC6BA4-2D5E-4772-B54E-872AD8CDCCDC}"/>
-              </a:ext>
-            </a:extLst>
-          </p:cNvPr>
-          <p:cNvSpPr>
-            <a:spLocks xmlns:a="http://schemas.openxmlformats.org/drawingml/2006/main" noGrp="1"/>
-          </p:cNvSpPr>
-          <p:nvPr/>
-        </p:nvSpPr>
-        <p:spPr>
-          <a:xfrm xmlns:a="http://schemas.openxmlformats.org/drawingml/2006/main">
-            <a:off x="9353550" y="3829050"/>
-            <a:ext cx="1771650" cy="285750"/>
-          </a:xfrm>
-          <a:prstGeom xmlns:a="http://schemas.openxmlformats.org/drawingml/2006/main" prst="rect">
-            <a:avLst/>
-          </a:prstGeom>
-          <a:noFill xmlns:a="http://schemas.openxmlformats.org/drawingml/2006/main"/>
-          <a:ln xmlns:a="http://schemas.openxmlformats.org/drawingml/2006/main" w="0">
-            <a:noFill/>
-            <a:prstDash val="solid"/>
-          </a:ln>
-        </p:spPr>
-        <p:txBody>
-          <a:bodyPr xmlns:a="http://schemas.openxmlformats.org/drawingml/2006/main" anchor="t"/>
-          <a:lstStyle xmlns:a="http://schemas.openxmlformats.org/drawingml/2006/main"/>
-          <a:p xmlns:a="http://schemas.openxmlformats.org/drawingml/2006/main">
-            <a:pPr algn="ctr">
-              <a:defRPr sz="1275" b="0">
-                <a:solidFill>
-                  <a:srgbClr val="334155"/>
-                </a:solidFill>
-              </a:defRPr>
-            </a:pPr>
-            <a:r>
-              <a:rPr sz="1275" b="0">
-                <a:solidFill>
-                  <a:srgbClr val="334155"/>
-                </a:solidFill>
-              </a:rPr>
-              <a:t>missed replay due deadline</a:t>
-            </a:r>
-          </a:p>
-        </p:txBody>
-      </p:sp>
-      <p:sp>
-        <p:nvSpPr>
-          <p:cNvPr id="12" name="">
-            <a:extLst xmlns:a="http://schemas.openxmlformats.org/drawingml/2006/main">
-              <a:ext uri="{FF2B5EF4-FFF2-40B4-BE49-F238E27FC236}">
-                <a16:creationId xmlns:a16="http://schemas.microsoft.com/office/drawing/2014/main" id="{C2CCD508-2D55-4BA3-9A16-94D2FAB9249E}"/>
-              </a:ext>
-            </a:extLst>
-          </p:cNvPr>
-          <p:cNvSpPr>
-            <a:spLocks xmlns:a="http://schemas.openxmlformats.org/drawingml/2006/main" noGrp="1"/>
-          </p:cNvSpPr>
-          <p:nvPr/>
-        </p:nvSpPr>
-        <p:spPr>
-          <a:xfrm xmlns:a="http://schemas.openxmlformats.org/drawingml/2006/main">
-            <a:off x="9124950" y="4514850"/>
-            <a:ext cx="2247900" cy="685800"/>
-          </a:xfrm>
-          <a:prstGeom xmlns:a="http://schemas.openxmlformats.org/drawingml/2006/main" prst="rect">
-            <a:avLst/>
-          </a:prstGeom>
-          <a:noFill xmlns:a="http://schemas.openxmlformats.org/drawingml/2006/main"/>
-          <a:ln xmlns:a="http://schemas.openxmlformats.org/drawingml/2006/main" w="0">
-            <a:noFill/>
-            <a:prstDash val="solid"/>
-          </a:ln>
-        </p:spPr>
-        <p:txBody>
-          <a:bodyPr xmlns:a="http://schemas.openxmlformats.org/drawingml/2006/main" anchor="t"/>
-          <a:lstStyle xmlns:a="http://schemas.openxmlformats.org/drawingml/2006/main"/>
-          <a:p xmlns:a="http://schemas.openxmlformats.org/drawingml/2006/main">
-            <a:pPr algn="l">
-              <a:defRPr sz="1500" b="0">
-                <a:solidFill>
-                  <a:srgbClr val="334155"/>
-                </a:solidFill>
-              </a:defRPr>
-            </a:pPr>
-            <a:r>
-              <a:rPr sz="1500" b="0">
-                <a:solidFill>
-                  <a:srgbClr val="334155"/>
-                </a:solidFill>
-              </a:rPr>
-              <a:t>This shows that semantic knowledge alone is not enough if the movement path cannot act on hints predictably.</a:t>
-            </a:r>
-          </a:p>
-        </p:txBody>
-      </p:sp>
-      <p:sp>
-        <p:nvSpPr>
-          <p:cNvPr id="13" name="">
-            <a:extLst xmlns:a="http://schemas.openxmlformats.org/drawingml/2006/main">
-              <a:ext uri="{FF2B5EF4-FFF2-40B4-BE49-F238E27FC236}">
-                <a16:creationId xmlns:a16="http://schemas.microsoft.com/office/drawing/2014/main" id="{F32D7477-79BE-488A-AE55-6CC1F7610B93}"/>
+                <a16:creationId xmlns:a16="http://schemas.microsoft.com/office/drawing/2014/main" id="{79B6D2BD-6F9A-4649-91D0-47DE8B472083}"/>
               </a:ext>
             </a:extLst>
           </p:cNvPr>
@@ -4566,17 +4427,17 @@
                   <a:srgbClr val="64748B"/>
                 </a:solidFill>
               </a:rPr>
-              <a:t>Source: backups/latest_master_report-1.html, Global Prefetch Margin</a:t>
-            </a:r>
-          </a:p>
-        </p:txBody>
-      </p:sp>
-      <p:sp>
-        <p:nvSpPr>
-          <p:cNvPr id="14" name="">
-            <a:extLst xmlns:a="http://schemas.openxmlformats.org/drawingml/2006/main">
-              <a:ext uri="{FF2B5EF4-FFF2-40B4-BE49-F238E27FC236}">
-                <a16:creationId xmlns:a16="http://schemas.microsoft.com/office/drawing/2014/main" id="{113422D1-3A7B-4DC6-9436-92AFF1C23ACA}"/>
+              <a:t>Source: latest_master_report.html controlled run</a:t>
+            </a:r>
+          </a:p>
+        </p:txBody>
+      </p:sp>
+      <p:sp>
+        <p:nvSpPr>
+          <p:cNvPr id="7" name="">
+            <a:extLst xmlns:a="http://schemas.openxmlformats.org/drawingml/2006/main">
+              <a:ext uri="{FF2B5EF4-FFF2-40B4-BE49-F238E27FC236}">
+                <a16:creationId xmlns:a16="http://schemas.microsoft.com/office/drawing/2014/main" id="{13660B54-4055-4DC6-9BA2-FC76F671A702}"/>
               </a:ext>
             </a:extLst>
           </p:cNvPr>
@@ -4623,10 +4484,10 @@
       </p:sp>
       <p:sp>
         <p:nvSpPr>
-          <p:cNvPr id="15" name="">
-            <a:extLst xmlns:a="http://schemas.openxmlformats.org/drawingml/2006/main">
-              <a:ext uri="{FF2B5EF4-FFF2-40B4-BE49-F238E27FC236}">
-                <a16:creationId xmlns:a16="http://schemas.microsoft.com/office/drawing/2014/main" id="{390EF232-7664-4AFE-A323-CD44E0C519C8}"/>
+          <p:cNvPr id="8" name="">
+            <a:extLst xmlns:a="http://schemas.openxmlformats.org/drawingml/2006/main">
+              <a:ext uri="{FF2B5EF4-FFF2-40B4-BE49-F238E27FC236}">
+                <a16:creationId xmlns:a16="http://schemas.microsoft.com/office/drawing/2014/main" id="{9350C413-6416-4BDE-B2F3-0DD7B05784EA}"/>
               </a:ext>
             </a:extLst>
           </p:cNvPr>
@@ -4674,7 +4535,7 @@
     </p:spTree>
     <p:extLst>
       <p:ext uri="{BB962C8B-B14F-4D97-AF65-F5344CB8AC3E}">
-        <p14:creationId xmlns:p14="http://schemas.microsoft.com/office/powerpoint/2010/main" val="1853662573"/>
+        <p14:creationId xmlns:p14="http://schemas.microsoft.com/office/powerpoint/2010/main" val="1443224644"/>
       </p:ext>
     </p:extLst>
   </p:cSld>
@@ -4702,10 +4563,10 @@
       </p:grpSpPr>
       <p:sp>
         <p:nvSpPr>
-          <p:cNvPr id="12" name="">
-            <a:extLst xmlns:a="http://schemas.openxmlformats.org/drawingml/2006/main">
-              <a:ext uri="{FF2B5EF4-FFF2-40B4-BE49-F238E27FC236}">
-                <a16:creationId xmlns:a16="http://schemas.microsoft.com/office/drawing/2014/main" id="{5534C85D-6057-4C88-9AF6-4E72E7179DF7}"/>
+          <p:cNvPr id="16" name="">
+            <a:extLst xmlns:a="http://schemas.openxmlformats.org/drawingml/2006/main">
+              <a:ext uri="{FF2B5EF4-FFF2-40B4-BE49-F238E27FC236}">
+                <a16:creationId xmlns:a16="http://schemas.microsoft.com/office/drawing/2014/main" id="{81780E68-F39D-4CAA-B684-B6B63967E843}"/>
               </a:ext>
             </a:extLst>
           </p:cNvPr>
@@ -4745,7 +4606,7 @@
                   <a:srgbClr val="0F172A"/>
                 </a:solidFill>
               </a:rPr>
-              <a:t>Replay-side KV loads missed the deadline in this run</a:t>
+              <a:t>Software prefetch often missed the agent replay deadline</a:t>
             </a:r>
           </a:p>
         </p:txBody>
@@ -4755,7 +4616,7 @@
           <p:cNvPr id="2" name="">
             <a:extLst xmlns:a="http://schemas.openxmlformats.org/drawingml/2006/main">
               <a:ext uri="{FF2B5EF4-FFF2-40B4-BE49-F238E27FC236}">
-                <a16:creationId xmlns:a16="http://schemas.microsoft.com/office/drawing/2014/main" id="{86799D49-2C48-4D81-A49C-E339934F262C}"/>
+                <a16:creationId xmlns:a16="http://schemas.microsoft.com/office/drawing/2014/main" id="{7E2DD1F0-53AB-4698-A3F4-05058BB281B2}"/>
               </a:ext>
             </a:extLst>
           </p:cNvPr>
@@ -4795,7 +4656,7 @@
                   <a:srgbClr val="64748B"/>
                 </a:solidFill>
               </a:rPr>
-              <a:t>The aggregate view shows whether KV H2D finished before or after replay was due.</a:t>
+              <a:t>Across live prefetch attempts, nearly every hint completed after the agent had already resumed.</a:t>
             </a:r>
           </a:p>
         </p:txBody>
@@ -4805,7 +4666,7 @@
           <p:cNvPr id="3" name="">
             <a:extLst xmlns:a="http://schemas.openxmlformats.org/drawingml/2006/main">
               <a:ext uri="{FF2B5EF4-FFF2-40B4-BE49-F238E27FC236}">
-                <a16:creationId xmlns:a16="http://schemas.microsoft.com/office/drawing/2014/main" id="{23F3C2D0-CCA3-4772-8CF8-0D091A9C4F66}"/>
+                <a16:creationId xmlns:a16="http://schemas.microsoft.com/office/drawing/2014/main" id="{9682BCD0-3A5E-4FD1-9388-6917E642E1A3}"/>
               </a:ext>
             </a:extLst>
           </p:cNvPr>
@@ -4817,11 +4678,11 @@
         <p:spPr>
           <a:xfrm xmlns:a="http://schemas.openxmlformats.org/drawingml/2006/main">
             <a:off x="323850" y="1428750"/>
-            <a:ext cx="8724900" cy="3867150"/>
+            <a:ext cx="8572500" cy="3886200"/>
           </a:xfrm>
           <a:prstGeom xmlns:a="http://schemas.openxmlformats.org/drawingml/2006/main" prst="roundRect">
             <a:avLst>
-              <a:gd name="adj" fmla="val 1478"/>
+              <a:gd name="adj" fmla="val 1471"/>
             </a:avLst>
           </a:prstGeom>
           <a:solidFill xmlns:a="http://schemas.openxmlformats.org/drawingml/2006/main">
@@ -4837,20 +4698,20 @@
       </p:sp>
       <p:pic>
         <p:nvPicPr>
-          <p:cNvPr id="15" name=""/>
+          <p:cNvPr id="19" name=""/>
           <p:cNvPicPr>
             <a:picLocks xmlns:a="http://schemas.openxmlformats.org/drawingml/2006/main" noChangeAspect="1"/>
           </p:cNvPicPr>
           <p:nvPr/>
         </p:nvPicPr>
         <p:blipFill>
-          <a:blip xmlns:r="http://schemas.openxmlformats.org/officeDocument/2006/relationships" xmlns:a="http://schemas.openxmlformats.org/drawingml/2006/main" r:embed="Rd0e0a79e4b864b1d"/>
+          <a:blip xmlns:r="http://schemas.openxmlformats.org/officeDocument/2006/relationships" xmlns:a="http://schemas.openxmlformats.org/drawingml/2006/main" r:embed="R2b32a3f26fd14672"/>
           <a:stretch xmlns:a="http://schemas.openxmlformats.org/drawingml/2006/main"/>
         </p:blipFill>
         <p:spPr>
           <a:xfrm xmlns:a="http://schemas.openxmlformats.org/drawingml/2006/main">
-            <a:off x="400050" y="1795905"/>
-            <a:ext cx="8572500" cy="3132841"/>
+            <a:off x="400050" y="1890170"/>
+            <a:ext cx="8420100" cy="2963361"/>
           </a:xfrm>
           <a:prstGeom xmlns:a="http://schemas.openxmlformats.org/drawingml/2006/main" prst="rect">
             <a:avLst/>
@@ -4862,23 +4723,23 @@
           <p:cNvPr id="5" name="">
             <a:extLst xmlns:a="http://schemas.openxmlformats.org/drawingml/2006/main">
               <a:ext uri="{FF2B5EF4-FFF2-40B4-BE49-F238E27FC236}">
-                <a16:creationId xmlns:a16="http://schemas.microsoft.com/office/drawing/2014/main" id="{09EB8D9C-DBE0-4610-9A70-682BB6E8C8CF}"/>
-              </a:ext>
-            </a:extLst>
-          </p:cNvPr>
-          <p:cNvSpPr>
-            <a:spLocks xmlns:a="http://schemas.openxmlformats.org/drawingml/2006/main" noGrp="1"/>
-          </p:cNvSpPr>
-          <p:nvPr/>
-        </p:nvSpPr>
-        <p:spPr>
-          <a:xfrm xmlns:a="http://schemas.openxmlformats.org/drawingml/2006/main">
-            <a:off x="9258300" y="1847850"/>
-            <a:ext cx="2095500" cy="1104900"/>
+                <a16:creationId xmlns:a16="http://schemas.microsoft.com/office/drawing/2014/main" id="{5814B9E2-EC79-4017-A3AC-79C6DAE7C64A}"/>
+              </a:ext>
+            </a:extLst>
+          </p:cNvPr>
+          <p:cNvSpPr>
+            <a:spLocks xmlns:a="http://schemas.openxmlformats.org/drawingml/2006/main" noGrp="1"/>
+          </p:cNvSpPr>
+          <p:nvPr/>
+        </p:nvSpPr>
+        <p:spPr>
+          <a:xfrm xmlns:a="http://schemas.openxmlformats.org/drawingml/2006/main">
+            <a:off x="9124950" y="1600200"/>
+            <a:ext cx="2228850" cy="1295400"/>
           </a:xfrm>
           <a:prstGeom xmlns:a="http://schemas.openxmlformats.org/drawingml/2006/main" prst="roundRect">
             <a:avLst>
-              <a:gd name="adj" fmla="val 5172"/>
+              <a:gd name="adj" fmla="val 4412"/>
             </a:avLst>
           </a:prstGeom>
           <a:solidFill xmlns:a="http://schemas.openxmlformats.org/drawingml/2006/main">
@@ -4897,19 +4758,19 @@
           <p:cNvPr id="6" name="">
             <a:extLst xmlns:a="http://schemas.openxmlformats.org/drawingml/2006/main">
               <a:ext uri="{FF2B5EF4-FFF2-40B4-BE49-F238E27FC236}">
-                <a16:creationId xmlns:a16="http://schemas.microsoft.com/office/drawing/2014/main" id="{32DBEFC6-75E3-4F15-8AA6-15842CAFCF79}"/>
-              </a:ext>
-            </a:extLst>
-          </p:cNvPr>
-          <p:cNvSpPr>
-            <a:spLocks xmlns:a="http://schemas.openxmlformats.org/drawingml/2006/main" noGrp="1"/>
-          </p:cNvSpPr>
-          <p:nvPr/>
-        </p:nvSpPr>
-        <p:spPr>
-          <a:xfrm xmlns:a="http://schemas.openxmlformats.org/drawingml/2006/main">
-            <a:off x="9505950" y="2076450"/>
-            <a:ext cx="1600200" cy="476250"/>
+                <a16:creationId xmlns:a16="http://schemas.microsoft.com/office/drawing/2014/main" id="{D14983F6-72A1-48B7-8E39-1862299D5ECA}"/>
+              </a:ext>
+            </a:extLst>
+          </p:cNvPr>
+          <p:cNvSpPr>
+            <a:spLocks xmlns:a="http://schemas.openxmlformats.org/drawingml/2006/main" noGrp="1"/>
+          </p:cNvSpPr>
+          <p:nvPr/>
+        </p:nvSpPr>
+        <p:spPr>
+          <a:xfrm xmlns:a="http://schemas.openxmlformats.org/drawingml/2006/main">
+            <a:off x="9296400" y="1809750"/>
+            <a:ext cx="1885950" cy="438150"/>
           </a:xfrm>
           <a:prstGeom xmlns:a="http://schemas.openxmlformats.org/drawingml/2006/main" prst="rect">
             <a:avLst/>
@@ -4925,19 +4786,19 @@
           <a:lstStyle xmlns:a="http://schemas.openxmlformats.org/drawingml/2006/main"/>
           <a:p xmlns:a="http://schemas.openxmlformats.org/drawingml/2006/main">
             <a:pPr algn="ctr">
-              <a:defRPr sz="3600" b="1">
+              <a:defRPr sz="2700" b="1">
                 <a:solidFill>
                   <a:srgbClr val="B91C1C"/>
                 </a:solidFill>
               </a:defRPr>
             </a:pPr>
             <a:r>
-              <a:rPr sz="3600" b="1">
+              <a:rPr sz="2700" b="1">
                 <a:solidFill>
                   <a:srgbClr val="B91C1C"/>
                 </a:solidFill>
               </a:rPr>
-              <a:t>8 / 8</a:t>
+              <a:t>112 of 114</a:t>
             </a:r>
           </a:p>
         </p:txBody>
@@ -4947,19 +4808,204 @@
           <p:cNvPr id="7" name="">
             <a:extLst xmlns:a="http://schemas.openxmlformats.org/drawingml/2006/main">
               <a:ext uri="{FF2B5EF4-FFF2-40B4-BE49-F238E27FC236}">
-                <a16:creationId xmlns:a16="http://schemas.microsoft.com/office/drawing/2014/main" id="{20E4A944-32A2-42B0-8057-20678AF1C78C}"/>
-              </a:ext>
-            </a:extLst>
-          </p:cNvPr>
-          <p:cNvSpPr>
-            <a:spLocks xmlns:a="http://schemas.openxmlformats.org/drawingml/2006/main" noGrp="1"/>
-          </p:cNvSpPr>
-          <p:nvPr/>
-        </p:nvSpPr>
-        <p:spPr>
-          <a:xfrm xmlns:a="http://schemas.openxmlformats.org/drawingml/2006/main">
-            <a:off x="9505950" y="2628900"/>
-            <a:ext cx="1600200" cy="266700"/>
+                <a16:creationId xmlns:a16="http://schemas.microsoft.com/office/drawing/2014/main" id="{4CF89ED6-8534-4D62-AF86-67892F93CBFD}"/>
+              </a:ext>
+            </a:extLst>
+          </p:cNvPr>
+          <p:cNvSpPr>
+            <a:spLocks xmlns:a="http://schemas.openxmlformats.org/drawingml/2006/main" noGrp="1"/>
+          </p:cNvSpPr>
+          <p:nvPr/>
+        </p:nvSpPr>
+        <p:spPr>
+          <a:xfrm xmlns:a="http://schemas.openxmlformats.org/drawingml/2006/main">
+            <a:off x="9353550" y="2324100"/>
+            <a:ext cx="1771650" cy="228600"/>
+          </a:xfrm>
+          <a:prstGeom xmlns:a="http://schemas.openxmlformats.org/drawingml/2006/main" prst="rect">
+            <a:avLst/>
+          </a:prstGeom>
+          <a:noFill xmlns:a="http://schemas.openxmlformats.org/drawingml/2006/main"/>
+          <a:ln xmlns:a="http://schemas.openxmlformats.org/drawingml/2006/main" w="0">
+            <a:noFill/>
+            <a:prstDash val="solid"/>
+          </a:ln>
+        </p:spPr>
+        <p:txBody>
+          <a:bodyPr xmlns:a="http://schemas.openxmlformats.org/drawingml/2006/main" anchor="t"/>
+          <a:lstStyle xmlns:a="http://schemas.openxmlformats.org/drawingml/2006/main"/>
+          <a:p xmlns:a="http://schemas.openxmlformats.org/drawingml/2006/main">
+            <a:pPr algn="ctr">
+              <a:defRPr sz="1350" b="0">
+                <a:solidFill>
+                  <a:srgbClr val="334155"/>
+                </a:solidFill>
+              </a:defRPr>
+            </a:pPr>
+            <a:r>
+              <a:rPr sz="1350" b="0">
+                <a:solidFill>
+                  <a:srgbClr val="334155"/>
+                </a:solidFill>
+              </a:rPr>
+              <a:t>prefetch attempts</a:t>
+            </a:r>
+          </a:p>
+        </p:txBody>
+      </p:sp>
+      <p:sp>
+        <p:nvSpPr>
+          <p:cNvPr id="8" name="">
+            <a:extLst xmlns:a="http://schemas.openxmlformats.org/drawingml/2006/main">
+              <a:ext uri="{FF2B5EF4-FFF2-40B4-BE49-F238E27FC236}">
+                <a16:creationId xmlns:a16="http://schemas.microsoft.com/office/drawing/2014/main" id="{E83491FB-3825-4EA4-9258-C5366DDA66E9}"/>
+              </a:ext>
+            </a:extLst>
+          </p:cNvPr>
+          <p:cNvSpPr>
+            <a:spLocks xmlns:a="http://schemas.openxmlformats.org/drawingml/2006/main" noGrp="1"/>
+          </p:cNvSpPr>
+          <p:nvPr/>
+        </p:nvSpPr>
+        <p:spPr>
+          <a:xfrm xmlns:a="http://schemas.openxmlformats.org/drawingml/2006/main">
+            <a:off x="9353550" y="2571750"/>
+            <a:ext cx="1771650" cy="228600"/>
+          </a:xfrm>
+          <a:prstGeom xmlns:a="http://schemas.openxmlformats.org/drawingml/2006/main" prst="rect">
+            <a:avLst/>
+          </a:prstGeom>
+          <a:noFill xmlns:a="http://schemas.openxmlformats.org/drawingml/2006/main"/>
+          <a:ln xmlns:a="http://schemas.openxmlformats.org/drawingml/2006/main" w="0">
+            <a:noFill/>
+            <a:prstDash val="solid"/>
+          </a:ln>
+        </p:spPr>
+        <p:txBody>
+          <a:bodyPr xmlns:a="http://schemas.openxmlformats.org/drawingml/2006/main" anchor="t"/>
+          <a:lstStyle xmlns:a="http://schemas.openxmlformats.org/drawingml/2006/main"/>
+          <a:p xmlns:a="http://schemas.openxmlformats.org/drawingml/2006/main">
+            <a:pPr algn="ctr">
+              <a:defRPr sz="1350" b="0">
+                <a:solidFill>
+                  <a:srgbClr val="334155"/>
+                </a:solidFill>
+              </a:defRPr>
+            </a:pPr>
+            <a:r>
+              <a:rPr sz="1350" b="0">
+                <a:solidFill>
+                  <a:srgbClr val="334155"/>
+                </a:solidFill>
+              </a:rPr>
+              <a:t>were late</a:t>
+            </a:r>
+          </a:p>
+        </p:txBody>
+      </p:sp>
+      <p:sp>
+        <p:nvSpPr>
+          <p:cNvPr id="9" name="">
+            <a:extLst xmlns:a="http://schemas.openxmlformats.org/drawingml/2006/main">
+              <a:ext uri="{FF2B5EF4-FFF2-40B4-BE49-F238E27FC236}">
+                <a16:creationId xmlns:a16="http://schemas.microsoft.com/office/drawing/2014/main" id="{7FCB1E35-7C1A-4DE9-AFAA-0E85147FB2E6}"/>
+              </a:ext>
+            </a:extLst>
+          </p:cNvPr>
+          <p:cNvSpPr>
+            <a:spLocks xmlns:a="http://schemas.openxmlformats.org/drawingml/2006/main" noGrp="1"/>
+          </p:cNvSpPr>
+          <p:nvPr/>
+        </p:nvSpPr>
+        <p:spPr>
+          <a:xfrm xmlns:a="http://schemas.openxmlformats.org/drawingml/2006/main">
+            <a:off x="9124950" y="3143250"/>
+            <a:ext cx="2228850" cy="1066800"/>
+          </a:xfrm>
+          <a:prstGeom xmlns:a="http://schemas.openxmlformats.org/drawingml/2006/main" prst="roundRect">
+            <a:avLst>
+              <a:gd name="adj" fmla="val 5357"/>
+            </a:avLst>
+          </a:prstGeom>
+          <a:solidFill xmlns:a="http://schemas.openxmlformats.org/drawingml/2006/main">
+            <a:srgbClr val="FFF7ED"/>
+          </a:solidFill>
+          <a:ln xmlns:a="http://schemas.openxmlformats.org/drawingml/2006/main" w="9525">
+            <a:solidFill>
+              <a:srgbClr val="FED7AA"/>
+            </a:solidFill>
+            <a:prstDash val="solid"/>
+          </a:ln>
+        </p:spPr>
+      </p:sp>
+      <p:sp>
+        <p:nvSpPr>
+          <p:cNvPr id="10" name="">
+            <a:extLst xmlns:a="http://schemas.openxmlformats.org/drawingml/2006/main">
+              <a:ext uri="{FF2B5EF4-FFF2-40B4-BE49-F238E27FC236}">
+                <a16:creationId xmlns:a16="http://schemas.microsoft.com/office/drawing/2014/main" id="{678C4100-DD6B-4132-8CE2-A97F8DE72B4B}"/>
+              </a:ext>
+            </a:extLst>
+          </p:cNvPr>
+          <p:cNvSpPr>
+            <a:spLocks xmlns:a="http://schemas.openxmlformats.org/drawingml/2006/main" noGrp="1"/>
+          </p:cNvSpPr>
+          <p:nvPr/>
+        </p:nvSpPr>
+        <p:spPr>
+          <a:xfrm xmlns:a="http://schemas.openxmlformats.org/drawingml/2006/main">
+            <a:off x="9353550" y="3333750"/>
+            <a:ext cx="1771650" cy="419100"/>
+          </a:xfrm>
+          <a:prstGeom xmlns:a="http://schemas.openxmlformats.org/drawingml/2006/main" prst="rect">
+            <a:avLst/>
+          </a:prstGeom>
+          <a:noFill xmlns:a="http://schemas.openxmlformats.org/drawingml/2006/main"/>
+          <a:ln xmlns:a="http://schemas.openxmlformats.org/drawingml/2006/main" w="0">
+            <a:noFill/>
+            <a:prstDash val="solid"/>
+          </a:ln>
+        </p:spPr>
+        <p:txBody>
+          <a:bodyPr xmlns:a="http://schemas.openxmlformats.org/drawingml/2006/main" anchor="t"/>
+          <a:lstStyle xmlns:a="http://schemas.openxmlformats.org/drawingml/2006/main"/>
+          <a:p xmlns:a="http://schemas.openxmlformats.org/drawingml/2006/main">
+            <a:pPr algn="ctr">
+              <a:defRPr sz="3000" b="1">
+                <a:solidFill>
+                  <a:srgbClr val="C2410C"/>
+                </a:solidFill>
+              </a:defRPr>
+            </a:pPr>
+            <a:r>
+              <a:rPr sz="3000" b="1">
+                <a:solidFill>
+                  <a:srgbClr val="C2410C"/>
+                </a:solidFill>
+              </a:rPr>
+              <a:t>98.25%</a:t>
+            </a:r>
+          </a:p>
+        </p:txBody>
+      </p:sp>
+      <p:sp>
+        <p:nvSpPr>
+          <p:cNvPr id="11" name="">
+            <a:extLst xmlns:a="http://schemas.openxmlformats.org/drawingml/2006/main">
+              <a:ext uri="{FF2B5EF4-FFF2-40B4-BE49-F238E27FC236}">
+                <a16:creationId xmlns:a16="http://schemas.microsoft.com/office/drawing/2014/main" id="{C341851C-F33D-4E45-A148-1D4450CAD2BC}"/>
+              </a:ext>
+            </a:extLst>
+          </p:cNvPr>
+          <p:cNvSpPr>
+            <a:spLocks xmlns:a="http://schemas.openxmlformats.org/drawingml/2006/main" noGrp="1"/>
+          </p:cNvSpPr>
+          <p:nvPr/>
+        </p:nvSpPr>
+        <p:spPr>
+          <a:xfrm xmlns:a="http://schemas.openxmlformats.org/drawingml/2006/main">
+            <a:off x="9353550" y="3829050"/>
+            <a:ext cx="1771650" cy="285750"/>
           </a:xfrm>
           <a:prstGeom xmlns:a="http://schemas.openxmlformats.org/drawingml/2006/main" prst="rect">
             <a:avLst/>
@@ -4987,29 +5033,29 @@
                   <a:srgbClr val="334155"/>
                 </a:solidFill>
               </a:rPr>
-              <a:t>H2D loads finished late</a:t>
-            </a:r>
-          </a:p>
-        </p:txBody>
-      </p:sp>
-      <p:sp>
-        <p:nvSpPr>
-          <p:cNvPr id="8" name="">
-            <a:extLst xmlns:a="http://schemas.openxmlformats.org/drawingml/2006/main">
-              <a:ext uri="{FF2B5EF4-FFF2-40B4-BE49-F238E27FC236}">
-                <a16:creationId xmlns:a16="http://schemas.microsoft.com/office/drawing/2014/main" id="{AAB635A4-D551-40A1-A651-F0C1A4721D11}"/>
-              </a:ext>
-            </a:extLst>
-          </p:cNvPr>
-          <p:cNvSpPr>
-            <a:spLocks xmlns:a="http://schemas.openxmlformats.org/drawingml/2006/main" noGrp="1"/>
-          </p:cNvSpPr>
-          <p:nvPr/>
-        </p:nvSpPr>
-        <p:spPr>
-          <a:xfrm xmlns:a="http://schemas.openxmlformats.org/drawingml/2006/main">
-            <a:off x="9258300" y="3524250"/>
-            <a:ext cx="2095500" cy="742950"/>
+              <a:t>missed replay due deadline</a:t>
+            </a:r>
+          </a:p>
+        </p:txBody>
+      </p:sp>
+      <p:sp>
+        <p:nvSpPr>
+          <p:cNvPr id="12" name="">
+            <a:extLst xmlns:a="http://schemas.openxmlformats.org/drawingml/2006/main">
+              <a:ext uri="{FF2B5EF4-FFF2-40B4-BE49-F238E27FC236}">
+                <a16:creationId xmlns:a16="http://schemas.microsoft.com/office/drawing/2014/main" id="{937611C3-918F-479B-AEF3-D12A7B01AA32}"/>
+              </a:ext>
+            </a:extLst>
+          </p:cNvPr>
+          <p:cNvSpPr>
+            <a:spLocks xmlns:a="http://schemas.openxmlformats.org/drawingml/2006/main" noGrp="1"/>
+          </p:cNvSpPr>
+          <p:nvPr/>
+        </p:nvSpPr>
+        <p:spPr>
+          <a:xfrm xmlns:a="http://schemas.openxmlformats.org/drawingml/2006/main">
+            <a:off x="9124950" y="4514850"/>
+            <a:ext cx="2247900" cy="685800"/>
           </a:xfrm>
           <a:prstGeom xmlns:a="http://schemas.openxmlformats.org/drawingml/2006/main" prst="rect">
             <a:avLst/>
@@ -5025,29 +5071,29 @@
           <a:lstStyle xmlns:a="http://schemas.openxmlformats.org/drawingml/2006/main"/>
           <a:p xmlns:a="http://schemas.openxmlformats.org/drawingml/2006/main">
             <a:pPr algn="l">
-              <a:defRPr sz="1575" b="0">
+              <a:defRPr sz="1500" b="0">
                 <a:solidFill>
                   <a:srgbClr val="334155"/>
                 </a:solidFill>
               </a:defRPr>
             </a:pPr>
             <a:r>
-              <a:rPr sz="1575" b="0">
+              <a:rPr sz="1500" b="0">
                 <a:solidFill>
                   <a:srgbClr val="334155"/>
                 </a:solidFill>
               </a:rPr>
-              <a:t>All visible replay-side KV loads finished below the 0 ms deadline line.</a:t>
-            </a:r>
-          </a:p>
-        </p:txBody>
-      </p:sp>
-      <p:sp>
-        <p:nvSpPr>
-          <p:cNvPr id="9" name="">
-            <a:extLst xmlns:a="http://schemas.openxmlformats.org/drawingml/2006/main">
-              <a:ext uri="{FF2B5EF4-FFF2-40B4-BE49-F238E27FC236}">
-                <a16:creationId xmlns:a16="http://schemas.microsoft.com/office/drawing/2014/main" id="{CCA28ACA-C086-4CF9-AEA2-7496619A528C}"/>
+              <a:t>This shows that semantic knowledge alone is not enough if the movement path cannot act on hints predictably.</a:t>
+            </a:r>
+          </a:p>
+        </p:txBody>
+      </p:sp>
+      <p:sp>
+        <p:nvSpPr>
+          <p:cNvPr id="13" name="">
+            <a:extLst xmlns:a="http://schemas.openxmlformats.org/drawingml/2006/main">
+              <a:ext uri="{FF2B5EF4-FFF2-40B4-BE49-F238E27FC236}">
+                <a16:creationId xmlns:a16="http://schemas.microsoft.com/office/drawing/2014/main" id="{10AD9847-D479-484A-BCA1-D22732B5D21A}"/>
               </a:ext>
             </a:extLst>
           </p:cNvPr>
@@ -5087,17 +5133,17 @@
                   <a:srgbClr val="64748B"/>
                 </a:solidFill>
               </a:rPr>
-              <a:t>Source: latest_master_report.html, Global Replay H2D Readiness</a:t>
-            </a:r>
-          </a:p>
-        </p:txBody>
-      </p:sp>
-      <p:sp>
-        <p:nvSpPr>
-          <p:cNvPr id="10" name="">
-            <a:extLst xmlns:a="http://schemas.openxmlformats.org/drawingml/2006/main">
-              <a:ext uri="{FF2B5EF4-FFF2-40B4-BE49-F238E27FC236}">
-                <a16:creationId xmlns:a16="http://schemas.microsoft.com/office/drawing/2014/main" id="{9C7AF322-8E11-44C4-BDDA-936770C74CD4}"/>
+              <a:t>Source: backups/latest_master_report-1.html, Global Prefetch Margin</a:t>
+            </a:r>
+          </a:p>
+        </p:txBody>
+      </p:sp>
+      <p:sp>
+        <p:nvSpPr>
+          <p:cNvPr id="14" name="">
+            <a:extLst xmlns:a="http://schemas.openxmlformats.org/drawingml/2006/main">
+              <a:ext uri="{FF2B5EF4-FFF2-40B4-BE49-F238E27FC236}">
+                <a16:creationId xmlns:a16="http://schemas.microsoft.com/office/drawing/2014/main" id="{EE5E3AF0-892B-4742-9853-4623B4DE2826}"/>
               </a:ext>
             </a:extLst>
           </p:cNvPr>
@@ -5144,10 +5190,10 @@
       </p:sp>
       <p:sp>
         <p:nvSpPr>
-          <p:cNvPr id="11" name="">
-            <a:extLst xmlns:a="http://schemas.openxmlformats.org/drawingml/2006/main">
-              <a:ext uri="{FF2B5EF4-FFF2-40B4-BE49-F238E27FC236}">
-                <a16:creationId xmlns:a16="http://schemas.microsoft.com/office/drawing/2014/main" id="{838BF824-E912-4F8D-91EA-516D138F72BE}"/>
+          <p:cNvPr id="15" name="">
+            <a:extLst xmlns:a="http://schemas.openxmlformats.org/drawingml/2006/main">
+              <a:ext uri="{FF2B5EF4-FFF2-40B4-BE49-F238E27FC236}">
+                <a16:creationId xmlns:a16="http://schemas.microsoft.com/office/drawing/2014/main" id="{D1C7EACD-9FD3-4C5C-B71F-E3087E5AF3B8}"/>
               </a:ext>
             </a:extLst>
           </p:cNvPr>
@@ -5195,7 +5241,7 @@
     </p:spTree>
     <p:extLst>
       <p:ext uri="{BB962C8B-B14F-4D97-AF65-F5344CB8AC3E}">
-        <p14:creationId xmlns:p14="http://schemas.microsoft.com/office/powerpoint/2010/main" val="493676356"/>
+        <p14:creationId xmlns:p14="http://schemas.microsoft.com/office/powerpoint/2010/main" val="800335588"/>
       </p:ext>
     </p:extLst>
   </p:cSld>
@@ -5223,10 +5269,10 @@
       </p:grpSpPr>
       <p:sp>
         <p:nvSpPr>
-          <p:cNvPr id="9" name="">
-            <a:extLst xmlns:a="http://schemas.openxmlformats.org/drawingml/2006/main">
-              <a:ext uri="{FF2B5EF4-FFF2-40B4-BE49-F238E27FC236}">
-                <a16:creationId xmlns:a16="http://schemas.microsoft.com/office/drawing/2014/main" id="{6B33F2E9-22AF-4380-9DFA-4409422ECDA1}"/>
+          <p:cNvPr id="12" name="">
+            <a:extLst xmlns:a="http://schemas.openxmlformats.org/drawingml/2006/main">
+              <a:ext uri="{FF2B5EF4-FFF2-40B4-BE49-F238E27FC236}">
+                <a16:creationId xmlns:a16="http://schemas.microsoft.com/office/drawing/2014/main" id="{730089FF-3EF7-4EB2-A563-392526D1DD11}"/>
               </a:ext>
             </a:extLst>
           </p:cNvPr>
@@ -5266,7 +5312,7 @@
                   <a:srgbClr val="0F172A"/>
                 </a:solidFill>
               </a:rPr>
-              <a:t>The delay is not just copy time</a:t>
+              <a:t>Replay-side KV loads missed the deadline in this run</a:t>
             </a:r>
           </a:p>
         </p:txBody>
@@ -5276,7 +5322,7 @@
           <p:cNvPr id="2" name="">
             <a:extLst xmlns:a="http://schemas.openxmlformats.org/drawingml/2006/main">
               <a:ext uri="{FF2B5EF4-FFF2-40B4-BE49-F238E27FC236}">
-                <a16:creationId xmlns:a16="http://schemas.microsoft.com/office/drawing/2014/main" id="{007CDDEA-822B-4BE8-A35D-12140A59A157}"/>
+                <a16:creationId xmlns:a16="http://schemas.microsoft.com/office/drawing/2014/main" id="{F69214AA-04BD-4EA8-9984-B1E14896D56D}"/>
               </a:ext>
             </a:extLst>
           </p:cNvPr>
@@ -5316,7 +5362,7 @@
                   <a:srgbClr val="64748B"/>
                 </a:solidFill>
               </a:rPr>
-              <a:t>The request enters normal software/runtime scheduling before visible KV H2D begins.</a:t>
+              <a:t>The aggregate view shows whether KV H2D finished before or after replay was due.</a:t>
             </a:r>
           </a:p>
         </p:txBody>
@@ -5326,23 +5372,23 @@
           <p:cNvPr id="3" name="">
             <a:extLst xmlns:a="http://schemas.openxmlformats.org/drawingml/2006/main">
               <a:ext uri="{FF2B5EF4-FFF2-40B4-BE49-F238E27FC236}">
-                <a16:creationId xmlns:a16="http://schemas.microsoft.com/office/drawing/2014/main" id="{EB20A60D-E2AE-4FD5-9116-4E0AAB127BE3}"/>
-              </a:ext>
-            </a:extLst>
-          </p:cNvPr>
-          <p:cNvSpPr>
-            <a:spLocks xmlns:a="http://schemas.openxmlformats.org/drawingml/2006/main" noGrp="1"/>
-          </p:cNvSpPr>
-          <p:nvPr/>
-        </p:nvSpPr>
-        <p:spPr>
-          <a:xfrm xmlns:a="http://schemas.openxmlformats.org/drawingml/2006/main">
-            <a:off x="323850" y="1333500"/>
-            <a:ext cx="10820400" cy="4343400"/>
+                <a16:creationId xmlns:a16="http://schemas.microsoft.com/office/drawing/2014/main" id="{AE4A1B50-C618-4D62-8AE9-3D3498F67C55}"/>
+              </a:ext>
+            </a:extLst>
+          </p:cNvPr>
+          <p:cNvSpPr>
+            <a:spLocks xmlns:a="http://schemas.openxmlformats.org/drawingml/2006/main" noGrp="1"/>
+          </p:cNvSpPr>
+          <p:nvPr/>
+        </p:nvSpPr>
+        <p:spPr>
+          <a:xfrm xmlns:a="http://schemas.openxmlformats.org/drawingml/2006/main">
+            <a:off x="323850" y="1428750"/>
+            <a:ext cx="8724900" cy="3867150"/>
           </a:xfrm>
           <a:prstGeom xmlns:a="http://schemas.openxmlformats.org/drawingml/2006/main" prst="roundRect">
             <a:avLst>
-              <a:gd name="adj" fmla="val 1316"/>
+              <a:gd name="adj" fmla="val 1478"/>
             </a:avLst>
           </a:prstGeom>
           <a:solidFill xmlns:a="http://schemas.openxmlformats.org/drawingml/2006/main">
@@ -5358,20 +5404,20 @@
       </p:sp>
       <p:pic>
         <p:nvPicPr>
-          <p:cNvPr id="12" name=""/>
+          <p:cNvPr id="15" name=""/>
           <p:cNvPicPr>
             <a:picLocks xmlns:a="http://schemas.openxmlformats.org/drawingml/2006/main" noChangeAspect="1"/>
           </p:cNvPicPr>
           <p:nvPr/>
         </p:nvPicPr>
         <p:blipFill>
-          <a:blip xmlns:r="http://schemas.openxmlformats.org/officeDocument/2006/relationships" xmlns:a="http://schemas.openxmlformats.org/drawingml/2006/main" r:embed="Rfaf9b8baf3cf40c3"/>
+          <a:blip xmlns:r="http://schemas.openxmlformats.org/officeDocument/2006/relationships" xmlns:a="http://schemas.openxmlformats.org/drawingml/2006/main" r:embed="R0f2ba06b4cb54345"/>
           <a:stretch xmlns:a="http://schemas.openxmlformats.org/drawingml/2006/main"/>
         </p:blipFill>
         <p:spPr>
           <a:xfrm xmlns:a="http://schemas.openxmlformats.org/drawingml/2006/main">
-            <a:off x="1247835" y="1409700"/>
-            <a:ext cx="8972430" cy="4191000"/>
+            <a:off x="400050" y="1795905"/>
+            <a:ext cx="8572500" cy="3132841"/>
           </a:xfrm>
           <a:prstGeom xmlns:a="http://schemas.openxmlformats.org/drawingml/2006/main" prst="rect">
             <a:avLst/>
@@ -5383,19 +5429,154 @@
           <p:cNvPr id="5" name="">
             <a:extLst xmlns:a="http://schemas.openxmlformats.org/drawingml/2006/main">
               <a:ext uri="{FF2B5EF4-FFF2-40B4-BE49-F238E27FC236}">
-                <a16:creationId xmlns:a16="http://schemas.microsoft.com/office/drawing/2014/main" id="{52CCAF75-ACAB-4ECF-BA7E-9C3A5A71F52D}"/>
-              </a:ext>
-            </a:extLst>
-          </p:cNvPr>
-          <p:cNvSpPr>
-            <a:spLocks xmlns:a="http://schemas.openxmlformats.org/drawingml/2006/main" noGrp="1"/>
-          </p:cNvSpPr>
-          <p:nvPr/>
-        </p:nvSpPr>
-        <p:spPr>
-          <a:xfrm xmlns:a="http://schemas.openxmlformats.org/drawingml/2006/main">
-            <a:off x="685800" y="5791200"/>
-            <a:ext cx="9906000" cy="228600"/>
+                <a16:creationId xmlns:a16="http://schemas.microsoft.com/office/drawing/2014/main" id="{1A371C9C-4E11-4364-9B17-A686138A5B12}"/>
+              </a:ext>
+            </a:extLst>
+          </p:cNvPr>
+          <p:cNvSpPr>
+            <a:spLocks xmlns:a="http://schemas.openxmlformats.org/drawingml/2006/main" noGrp="1"/>
+          </p:cNvSpPr>
+          <p:nvPr/>
+        </p:nvSpPr>
+        <p:spPr>
+          <a:xfrm xmlns:a="http://schemas.openxmlformats.org/drawingml/2006/main">
+            <a:off x="9258300" y="1847850"/>
+            <a:ext cx="2095500" cy="1104900"/>
+          </a:xfrm>
+          <a:prstGeom xmlns:a="http://schemas.openxmlformats.org/drawingml/2006/main" prst="roundRect">
+            <a:avLst>
+              <a:gd name="adj" fmla="val 5172"/>
+            </a:avLst>
+          </a:prstGeom>
+          <a:solidFill xmlns:a="http://schemas.openxmlformats.org/drawingml/2006/main">
+            <a:srgbClr val="FEF2F2"/>
+          </a:solidFill>
+          <a:ln xmlns:a="http://schemas.openxmlformats.org/drawingml/2006/main" w="9525">
+            <a:solidFill>
+              <a:srgbClr val="FECACA"/>
+            </a:solidFill>
+            <a:prstDash val="solid"/>
+          </a:ln>
+        </p:spPr>
+      </p:sp>
+      <p:sp>
+        <p:nvSpPr>
+          <p:cNvPr id="6" name="">
+            <a:extLst xmlns:a="http://schemas.openxmlformats.org/drawingml/2006/main">
+              <a:ext uri="{FF2B5EF4-FFF2-40B4-BE49-F238E27FC236}">
+                <a16:creationId xmlns:a16="http://schemas.microsoft.com/office/drawing/2014/main" id="{36F17F41-E0DB-4F2D-91B2-2ABBFBF44484}"/>
+              </a:ext>
+            </a:extLst>
+          </p:cNvPr>
+          <p:cNvSpPr>
+            <a:spLocks xmlns:a="http://schemas.openxmlformats.org/drawingml/2006/main" noGrp="1"/>
+          </p:cNvSpPr>
+          <p:nvPr/>
+        </p:nvSpPr>
+        <p:spPr>
+          <a:xfrm xmlns:a="http://schemas.openxmlformats.org/drawingml/2006/main">
+            <a:off x="9505950" y="2076450"/>
+            <a:ext cx="1600200" cy="476250"/>
+          </a:xfrm>
+          <a:prstGeom xmlns:a="http://schemas.openxmlformats.org/drawingml/2006/main" prst="rect">
+            <a:avLst/>
+          </a:prstGeom>
+          <a:noFill xmlns:a="http://schemas.openxmlformats.org/drawingml/2006/main"/>
+          <a:ln xmlns:a="http://schemas.openxmlformats.org/drawingml/2006/main" w="0">
+            <a:noFill/>
+            <a:prstDash val="solid"/>
+          </a:ln>
+        </p:spPr>
+        <p:txBody>
+          <a:bodyPr xmlns:a="http://schemas.openxmlformats.org/drawingml/2006/main" anchor="t"/>
+          <a:lstStyle xmlns:a="http://schemas.openxmlformats.org/drawingml/2006/main"/>
+          <a:p xmlns:a="http://schemas.openxmlformats.org/drawingml/2006/main">
+            <a:pPr algn="ctr">
+              <a:defRPr sz="3600" b="1">
+                <a:solidFill>
+                  <a:srgbClr val="B91C1C"/>
+                </a:solidFill>
+              </a:defRPr>
+            </a:pPr>
+            <a:r>
+              <a:rPr sz="3600" b="1">
+                <a:solidFill>
+                  <a:srgbClr val="B91C1C"/>
+                </a:solidFill>
+              </a:rPr>
+              <a:t>8 / 8</a:t>
+            </a:r>
+          </a:p>
+        </p:txBody>
+      </p:sp>
+      <p:sp>
+        <p:nvSpPr>
+          <p:cNvPr id="7" name="">
+            <a:extLst xmlns:a="http://schemas.openxmlformats.org/drawingml/2006/main">
+              <a:ext uri="{FF2B5EF4-FFF2-40B4-BE49-F238E27FC236}">
+                <a16:creationId xmlns:a16="http://schemas.microsoft.com/office/drawing/2014/main" id="{AD784674-C112-4C68-884F-54630FFCB04F}"/>
+              </a:ext>
+            </a:extLst>
+          </p:cNvPr>
+          <p:cNvSpPr>
+            <a:spLocks xmlns:a="http://schemas.openxmlformats.org/drawingml/2006/main" noGrp="1"/>
+          </p:cNvSpPr>
+          <p:nvPr/>
+        </p:nvSpPr>
+        <p:spPr>
+          <a:xfrm xmlns:a="http://schemas.openxmlformats.org/drawingml/2006/main">
+            <a:off x="9505950" y="2628900"/>
+            <a:ext cx="1600200" cy="266700"/>
+          </a:xfrm>
+          <a:prstGeom xmlns:a="http://schemas.openxmlformats.org/drawingml/2006/main" prst="rect">
+            <a:avLst/>
+          </a:prstGeom>
+          <a:noFill xmlns:a="http://schemas.openxmlformats.org/drawingml/2006/main"/>
+          <a:ln xmlns:a="http://schemas.openxmlformats.org/drawingml/2006/main" w="0">
+            <a:noFill/>
+            <a:prstDash val="solid"/>
+          </a:ln>
+        </p:spPr>
+        <p:txBody>
+          <a:bodyPr xmlns:a="http://schemas.openxmlformats.org/drawingml/2006/main" anchor="t"/>
+          <a:lstStyle xmlns:a="http://schemas.openxmlformats.org/drawingml/2006/main"/>
+          <a:p xmlns:a="http://schemas.openxmlformats.org/drawingml/2006/main">
+            <a:pPr algn="ctr">
+              <a:defRPr sz="1275" b="0">
+                <a:solidFill>
+                  <a:srgbClr val="334155"/>
+                </a:solidFill>
+              </a:defRPr>
+            </a:pPr>
+            <a:r>
+              <a:rPr sz="1275" b="0">
+                <a:solidFill>
+                  <a:srgbClr val="334155"/>
+                </a:solidFill>
+              </a:rPr>
+              <a:t>H2D loads finished late</a:t>
+            </a:r>
+          </a:p>
+        </p:txBody>
+      </p:sp>
+      <p:sp>
+        <p:nvSpPr>
+          <p:cNvPr id="8" name="">
+            <a:extLst xmlns:a="http://schemas.openxmlformats.org/drawingml/2006/main">
+              <a:ext uri="{FF2B5EF4-FFF2-40B4-BE49-F238E27FC236}">
+                <a16:creationId xmlns:a16="http://schemas.microsoft.com/office/drawing/2014/main" id="{5696626B-1B9A-4E38-9996-6831E6BE7B30}"/>
+              </a:ext>
+            </a:extLst>
+          </p:cNvPr>
+          <p:cNvSpPr>
+            <a:spLocks xmlns:a="http://schemas.openxmlformats.org/drawingml/2006/main" noGrp="1"/>
+          </p:cNvSpPr>
+          <p:nvPr/>
+        </p:nvSpPr>
+        <p:spPr>
+          <a:xfrm xmlns:a="http://schemas.openxmlformats.org/drawingml/2006/main">
+            <a:off x="9258300" y="3524250"/>
+            <a:ext cx="2095500" cy="742950"/>
           </a:xfrm>
           <a:prstGeom xmlns:a="http://schemas.openxmlformats.org/drawingml/2006/main" prst="rect">
             <a:avLst/>
@@ -5411,29 +5592,29 @@
           <a:lstStyle xmlns:a="http://schemas.openxmlformats.org/drawingml/2006/main"/>
           <a:p xmlns:a="http://schemas.openxmlformats.org/drawingml/2006/main">
             <a:pPr algn="l">
-              <a:defRPr sz="1275" b="0">
+              <a:defRPr sz="1575" b="0">
                 <a:solidFill>
                   <a:srgbClr val="334155"/>
                 </a:solidFill>
               </a:defRPr>
             </a:pPr>
             <a:r>
-              <a:rPr sz="1275" b="0">
+              <a:rPr sz="1575" b="0">
                 <a:solidFill>
                   <a:srgbClr val="334155"/>
                 </a:solidFill>
               </a:rPr>
-              <a:t>The stage markers separate submission, SGLang receive, scheduler queue/admit, and visible KV H2D movement.</a:t>
-            </a:r>
-          </a:p>
-        </p:txBody>
-      </p:sp>
-      <p:sp>
-        <p:nvSpPr>
-          <p:cNvPr id="6" name="">
-            <a:extLst xmlns:a="http://schemas.openxmlformats.org/drawingml/2006/main">
-              <a:ext uri="{FF2B5EF4-FFF2-40B4-BE49-F238E27FC236}">
-                <a16:creationId xmlns:a16="http://schemas.microsoft.com/office/drawing/2014/main" id="{6EA3970D-492D-4BCD-B104-13E317CD2DDD}"/>
+              <a:t>All visible replay-side KV loads finished below the 0 ms deadline line.</a:t>
+            </a:r>
+          </a:p>
+        </p:txBody>
+      </p:sp>
+      <p:sp>
+        <p:nvSpPr>
+          <p:cNvPr id="9" name="">
+            <a:extLst xmlns:a="http://schemas.openxmlformats.org/drawingml/2006/main">
+              <a:ext uri="{FF2B5EF4-FFF2-40B4-BE49-F238E27FC236}">
+                <a16:creationId xmlns:a16="http://schemas.microsoft.com/office/drawing/2014/main" id="{1E232D0A-F346-4EDA-A96E-84CF28C84C86}"/>
               </a:ext>
             </a:extLst>
           </p:cNvPr>
@@ -5473,17 +5654,17 @@
                   <a:srgbClr val="64748B"/>
                 </a:solidFill>
               </a:rPr>
-              <a:t>Source: latest_master_report.html, Replay Queue Timeline vs H2D Start</a:t>
-            </a:r>
-          </a:p>
-        </p:txBody>
-      </p:sp>
-      <p:sp>
-        <p:nvSpPr>
-          <p:cNvPr id="7" name="">
-            <a:extLst xmlns:a="http://schemas.openxmlformats.org/drawingml/2006/main">
-              <a:ext uri="{FF2B5EF4-FFF2-40B4-BE49-F238E27FC236}">
-                <a16:creationId xmlns:a16="http://schemas.microsoft.com/office/drawing/2014/main" id="{EC8C91D9-929F-42A0-8700-6F1C5641E667}"/>
+              <a:t>Source: latest_master_report.html, Global Replay H2D Readiness</a:t>
+            </a:r>
+          </a:p>
+        </p:txBody>
+      </p:sp>
+      <p:sp>
+        <p:nvSpPr>
+          <p:cNvPr id="10" name="">
+            <a:extLst xmlns:a="http://schemas.openxmlformats.org/drawingml/2006/main">
+              <a:ext uri="{FF2B5EF4-FFF2-40B4-BE49-F238E27FC236}">
+                <a16:creationId xmlns:a16="http://schemas.microsoft.com/office/drawing/2014/main" id="{D1E0DFE4-1036-4BB6-A5DE-4FDBCDE1CAF3}"/>
               </a:ext>
             </a:extLst>
           </p:cNvPr>
@@ -5530,10 +5711,10 @@
       </p:sp>
       <p:sp>
         <p:nvSpPr>
-          <p:cNvPr id="8" name="">
-            <a:extLst xmlns:a="http://schemas.openxmlformats.org/drawingml/2006/main">
-              <a:ext uri="{FF2B5EF4-FFF2-40B4-BE49-F238E27FC236}">
-                <a16:creationId xmlns:a16="http://schemas.microsoft.com/office/drawing/2014/main" id="{5B973A3F-0BDD-4E18-949B-C7E167527435}"/>
+          <p:cNvPr id="11" name="">
+            <a:extLst xmlns:a="http://schemas.openxmlformats.org/drawingml/2006/main">
+              <a:ext uri="{FF2B5EF4-FFF2-40B4-BE49-F238E27FC236}">
+                <a16:creationId xmlns:a16="http://schemas.microsoft.com/office/drawing/2014/main" id="{AC8F3249-58A3-4AB5-A2E4-D605E8D80C07}"/>
               </a:ext>
             </a:extLst>
           </p:cNvPr>
@@ -5581,7 +5762,7 @@
     </p:spTree>
     <p:extLst>
       <p:ext uri="{BB962C8B-B14F-4D97-AF65-F5344CB8AC3E}">
-        <p14:creationId xmlns:p14="http://schemas.microsoft.com/office/powerpoint/2010/main" val="1941687296"/>
+        <p14:creationId xmlns:p14="http://schemas.microsoft.com/office/powerpoint/2010/main" val="998169477"/>
       </p:ext>
     </p:extLst>
   </p:cSld>
@@ -5609,10 +5790,10 @@
       </p:grpSpPr>
       <p:sp>
         <p:nvSpPr>
-          <p:cNvPr id="27" name="">
-            <a:extLst xmlns:a="http://schemas.openxmlformats.org/drawingml/2006/main">
-              <a:ext uri="{FF2B5EF4-FFF2-40B4-BE49-F238E27FC236}">
-                <a16:creationId xmlns:a16="http://schemas.microsoft.com/office/drawing/2014/main" id="{A2BE1C4D-F180-497C-9B55-9DF703CC105B}"/>
+          <p:cNvPr id="9" name="">
+            <a:extLst xmlns:a="http://schemas.openxmlformats.org/drawingml/2006/main">
+              <a:ext uri="{FF2B5EF4-FFF2-40B4-BE49-F238E27FC236}">
+                <a16:creationId xmlns:a16="http://schemas.microsoft.com/office/drawing/2014/main" id="{80F5894F-5131-46F7-91F1-0C00A3681BE2}"/>
               </a:ext>
             </a:extLst>
           </p:cNvPr>
@@ -5652,7 +5833,7 @@
                   <a:srgbClr val="0F172A"/>
                 </a:solidFill>
               </a:rPr>
-              <a:t>Hardware support can make hints enforceable</a:t>
+              <a:t>The delay is not just copy time</a:t>
             </a:r>
           </a:p>
         </p:txBody>
@@ -5662,7 +5843,7 @@
           <p:cNvPr id="2" name="">
             <a:extLst xmlns:a="http://schemas.openxmlformats.org/drawingml/2006/main">
               <a:ext uri="{FF2B5EF4-FFF2-40B4-BE49-F238E27FC236}">
-                <a16:creationId xmlns:a16="http://schemas.microsoft.com/office/drawing/2014/main" id="{FDFEB5C5-96BB-407E-A3CB-A841012521AB}"/>
+                <a16:creationId xmlns:a16="http://schemas.microsoft.com/office/drawing/2014/main" id="{846B80E5-9E21-4D4C-82F0-3A4036037912}"/>
               </a:ext>
             </a:extLst>
           </p:cNvPr>
@@ -5702,6 +5883,392 @@
                   <a:srgbClr val="64748B"/>
                 </a:solidFill>
               </a:rPr>
+              <a:t>The request enters normal software/runtime scheduling before visible KV H2D begins.</a:t>
+            </a:r>
+          </a:p>
+        </p:txBody>
+      </p:sp>
+      <p:sp>
+        <p:nvSpPr>
+          <p:cNvPr id="3" name="">
+            <a:extLst xmlns:a="http://schemas.openxmlformats.org/drawingml/2006/main">
+              <a:ext uri="{FF2B5EF4-FFF2-40B4-BE49-F238E27FC236}">
+                <a16:creationId xmlns:a16="http://schemas.microsoft.com/office/drawing/2014/main" id="{D6E3F474-BA41-4836-9119-2368AE4B636B}"/>
+              </a:ext>
+            </a:extLst>
+          </p:cNvPr>
+          <p:cNvSpPr>
+            <a:spLocks xmlns:a="http://schemas.openxmlformats.org/drawingml/2006/main" noGrp="1"/>
+          </p:cNvSpPr>
+          <p:nvPr/>
+        </p:nvSpPr>
+        <p:spPr>
+          <a:xfrm xmlns:a="http://schemas.openxmlformats.org/drawingml/2006/main">
+            <a:off x="323850" y="1333500"/>
+            <a:ext cx="10820400" cy="4343400"/>
+          </a:xfrm>
+          <a:prstGeom xmlns:a="http://schemas.openxmlformats.org/drawingml/2006/main" prst="roundRect">
+            <a:avLst>
+              <a:gd name="adj" fmla="val 1316"/>
+            </a:avLst>
+          </a:prstGeom>
+          <a:solidFill xmlns:a="http://schemas.openxmlformats.org/drawingml/2006/main">
+            <a:srgbClr val="FFFFFF"/>
+          </a:solidFill>
+          <a:ln xmlns:a="http://schemas.openxmlformats.org/drawingml/2006/main" w="9525">
+            <a:solidFill>
+              <a:srgbClr val="E5E7EB"/>
+            </a:solidFill>
+            <a:prstDash val="solid"/>
+          </a:ln>
+        </p:spPr>
+      </p:sp>
+      <p:pic>
+        <p:nvPicPr>
+          <p:cNvPr id="12" name=""/>
+          <p:cNvPicPr>
+            <a:picLocks xmlns:a="http://schemas.openxmlformats.org/drawingml/2006/main" noChangeAspect="1"/>
+          </p:cNvPicPr>
+          <p:nvPr/>
+        </p:nvPicPr>
+        <p:blipFill>
+          <a:blip xmlns:r="http://schemas.openxmlformats.org/officeDocument/2006/relationships" xmlns:a="http://schemas.openxmlformats.org/drawingml/2006/main" r:embed="Ref412272abe94d6b"/>
+          <a:stretch xmlns:a="http://schemas.openxmlformats.org/drawingml/2006/main"/>
+        </p:blipFill>
+        <p:spPr>
+          <a:xfrm xmlns:a="http://schemas.openxmlformats.org/drawingml/2006/main">
+            <a:off x="1247835" y="1409700"/>
+            <a:ext cx="8972430" cy="4191000"/>
+          </a:xfrm>
+          <a:prstGeom xmlns:a="http://schemas.openxmlformats.org/drawingml/2006/main" prst="rect">
+            <a:avLst/>
+          </a:prstGeom>
+        </p:spPr>
+      </p:pic>
+      <p:sp>
+        <p:nvSpPr>
+          <p:cNvPr id="5" name="">
+            <a:extLst xmlns:a="http://schemas.openxmlformats.org/drawingml/2006/main">
+              <a:ext uri="{FF2B5EF4-FFF2-40B4-BE49-F238E27FC236}">
+                <a16:creationId xmlns:a16="http://schemas.microsoft.com/office/drawing/2014/main" id="{2A59EC7B-C8E7-4154-9901-3398C0CA970B}"/>
+              </a:ext>
+            </a:extLst>
+          </p:cNvPr>
+          <p:cNvSpPr>
+            <a:spLocks xmlns:a="http://schemas.openxmlformats.org/drawingml/2006/main" noGrp="1"/>
+          </p:cNvSpPr>
+          <p:nvPr/>
+        </p:nvSpPr>
+        <p:spPr>
+          <a:xfrm xmlns:a="http://schemas.openxmlformats.org/drawingml/2006/main">
+            <a:off x="685800" y="5791200"/>
+            <a:ext cx="9906000" cy="228600"/>
+          </a:xfrm>
+          <a:prstGeom xmlns:a="http://schemas.openxmlformats.org/drawingml/2006/main" prst="rect">
+            <a:avLst/>
+          </a:prstGeom>
+          <a:noFill xmlns:a="http://schemas.openxmlformats.org/drawingml/2006/main"/>
+          <a:ln xmlns:a="http://schemas.openxmlformats.org/drawingml/2006/main" w="0">
+            <a:noFill/>
+            <a:prstDash val="solid"/>
+          </a:ln>
+        </p:spPr>
+        <p:txBody>
+          <a:bodyPr xmlns:a="http://schemas.openxmlformats.org/drawingml/2006/main" anchor="t"/>
+          <a:lstStyle xmlns:a="http://schemas.openxmlformats.org/drawingml/2006/main"/>
+          <a:p xmlns:a="http://schemas.openxmlformats.org/drawingml/2006/main">
+            <a:pPr algn="l">
+              <a:defRPr sz="1275" b="0">
+                <a:solidFill>
+                  <a:srgbClr val="334155"/>
+                </a:solidFill>
+              </a:defRPr>
+            </a:pPr>
+            <a:r>
+              <a:rPr sz="1275" b="0">
+                <a:solidFill>
+                  <a:srgbClr val="334155"/>
+                </a:solidFill>
+              </a:rPr>
+              <a:t>The stage markers separate submission, SGLang receive, scheduler queue/admit, and visible KV H2D movement.</a:t>
+            </a:r>
+          </a:p>
+        </p:txBody>
+      </p:sp>
+      <p:sp>
+        <p:nvSpPr>
+          <p:cNvPr id="6" name="">
+            <a:extLst xmlns:a="http://schemas.openxmlformats.org/drawingml/2006/main">
+              <a:ext uri="{FF2B5EF4-FFF2-40B4-BE49-F238E27FC236}">
+                <a16:creationId xmlns:a16="http://schemas.microsoft.com/office/drawing/2014/main" id="{3E44DF2C-3346-4BE2-956C-B298DF0850E2}"/>
+              </a:ext>
+            </a:extLst>
+          </p:cNvPr>
+          <p:cNvSpPr>
+            <a:spLocks xmlns:a="http://schemas.openxmlformats.org/drawingml/2006/main" noGrp="1"/>
+          </p:cNvSpPr>
+          <p:nvPr/>
+        </p:nvSpPr>
+        <p:spPr>
+          <a:xfrm xmlns:a="http://schemas.openxmlformats.org/drawingml/2006/main">
+            <a:off x="400050" y="6153150"/>
+            <a:ext cx="7810500" cy="190500"/>
+          </a:xfrm>
+          <a:prstGeom xmlns:a="http://schemas.openxmlformats.org/drawingml/2006/main" prst="rect">
+            <a:avLst/>
+          </a:prstGeom>
+          <a:noFill xmlns:a="http://schemas.openxmlformats.org/drawingml/2006/main"/>
+          <a:ln xmlns:a="http://schemas.openxmlformats.org/drawingml/2006/main" w="0">
+            <a:noFill/>
+            <a:prstDash val="solid"/>
+          </a:ln>
+        </p:spPr>
+        <p:txBody>
+          <a:bodyPr xmlns:a="http://schemas.openxmlformats.org/drawingml/2006/main" anchor="t"/>
+          <a:lstStyle xmlns:a="http://schemas.openxmlformats.org/drawingml/2006/main"/>
+          <a:p xmlns:a="http://schemas.openxmlformats.org/drawingml/2006/main">
+            <a:pPr algn="l">
+              <a:defRPr sz="825" b="0">
+                <a:solidFill>
+                  <a:srgbClr val="64748B"/>
+                </a:solidFill>
+              </a:defRPr>
+            </a:pPr>
+            <a:r>
+              <a:rPr sz="825" b="0">
+                <a:solidFill>
+                  <a:srgbClr val="64748B"/>
+                </a:solidFill>
+              </a:rPr>
+              <a:t>Source: latest_master_report.html, Replay Queue Timeline vs H2D Start</a:t>
+            </a:r>
+          </a:p>
+        </p:txBody>
+      </p:sp>
+      <p:sp>
+        <p:nvSpPr>
+          <p:cNvPr id="7" name="">
+            <a:extLst xmlns:a="http://schemas.openxmlformats.org/drawingml/2006/main">
+              <a:ext uri="{FF2B5EF4-FFF2-40B4-BE49-F238E27FC236}">
+                <a16:creationId xmlns:a16="http://schemas.microsoft.com/office/drawing/2014/main" id="{B9F8E16B-04C3-4B8E-861F-3C30CF056A3C}"/>
+              </a:ext>
+            </a:extLst>
+          </p:cNvPr>
+          <p:cNvSpPr>
+            <a:spLocks xmlns:a="http://schemas.openxmlformats.org/drawingml/2006/main" noGrp="1"/>
+          </p:cNvSpPr>
+          <p:nvPr/>
+        </p:nvSpPr>
+        <p:spPr>
+          <a:xfrm xmlns:a="http://schemas.openxmlformats.org/drawingml/2006/main">
+            <a:off x="400050" y="6381750"/>
+            <a:ext cx="3429000" cy="228600"/>
+          </a:xfrm>
+          <a:prstGeom xmlns:a="http://schemas.openxmlformats.org/drawingml/2006/main" prst="rect">
+            <a:avLst/>
+          </a:prstGeom>
+          <a:noFill xmlns:a="http://schemas.openxmlformats.org/drawingml/2006/main"/>
+          <a:ln xmlns:a="http://schemas.openxmlformats.org/drawingml/2006/main" w="0">
+            <a:noFill/>
+            <a:prstDash val="solid"/>
+          </a:ln>
+        </p:spPr>
+        <p:txBody>
+          <a:bodyPr xmlns:a="http://schemas.openxmlformats.org/drawingml/2006/main" anchor="t"/>
+          <a:lstStyle xmlns:a="http://schemas.openxmlformats.org/drawingml/2006/main"/>
+          <a:p xmlns:a="http://schemas.openxmlformats.org/drawingml/2006/main">
+            <a:pPr algn="l">
+              <a:defRPr sz="975" b="0">
+                <a:solidFill>
+                  <a:srgbClr val="64748B"/>
+                </a:solidFill>
+              </a:defRPr>
+            </a:pPr>
+            <a:r>
+              <a:rPr sz="975" b="0">
+                <a:solidFill>
+                  <a:srgbClr val="64748B"/>
+                </a:solidFill>
+              </a:rPr>
+              <a:t>Agent-aware KV movement</a:t>
+            </a:r>
+          </a:p>
+        </p:txBody>
+      </p:sp>
+      <p:sp>
+        <p:nvSpPr>
+          <p:cNvPr id="8" name="">
+            <a:extLst xmlns:a="http://schemas.openxmlformats.org/drawingml/2006/main">
+              <a:ext uri="{FF2B5EF4-FFF2-40B4-BE49-F238E27FC236}">
+                <a16:creationId xmlns:a16="http://schemas.microsoft.com/office/drawing/2014/main" id="{C9FC36C5-9EB7-41AD-B5BB-DDA61C8EF0DC}"/>
+              </a:ext>
+            </a:extLst>
+          </p:cNvPr>
+          <p:cNvSpPr>
+            <a:spLocks xmlns:a="http://schemas.openxmlformats.org/drawingml/2006/main" noGrp="1"/>
+          </p:cNvSpPr>
+          <p:nvPr/>
+        </p:nvSpPr>
+        <p:spPr>
+          <a:xfrm xmlns:a="http://schemas.openxmlformats.org/drawingml/2006/main">
+            <a:off x="11334750" y="6381750"/>
+            <a:ext cx="457200" cy="228600"/>
+          </a:xfrm>
+          <a:prstGeom xmlns:a="http://schemas.openxmlformats.org/drawingml/2006/main" prst="rect">
+            <a:avLst/>
+          </a:prstGeom>
+          <a:noFill xmlns:a="http://schemas.openxmlformats.org/drawingml/2006/main"/>
+          <a:ln xmlns:a="http://schemas.openxmlformats.org/drawingml/2006/main" w="0">
+            <a:noFill/>
+            <a:prstDash val="solid"/>
+          </a:ln>
+        </p:spPr>
+        <p:txBody>
+          <a:bodyPr xmlns:a="http://schemas.openxmlformats.org/drawingml/2006/main" anchor="t"/>
+          <a:lstStyle xmlns:a="http://schemas.openxmlformats.org/drawingml/2006/main"/>
+          <a:p xmlns:a="http://schemas.openxmlformats.org/drawingml/2006/main">
+            <a:pPr algn="r">
+              <a:defRPr sz="975" b="0">
+                <a:solidFill>
+                  <a:srgbClr val="64748B"/>
+                </a:solidFill>
+              </a:defRPr>
+            </a:pPr>
+            <a:r>
+              <a:rPr sz="975" b="0">
+                <a:solidFill>
+                  <a:srgbClr val="64748B"/>
+                </a:solidFill>
+              </a:rPr>
+              <a:t>07</a:t>
+            </a:r>
+          </a:p>
+        </p:txBody>
+      </p:sp>
+    </p:spTree>
+    <p:extLst>
+      <p:ext uri="{BB962C8B-B14F-4D97-AF65-F5344CB8AC3E}">
+        <p14:creationId xmlns:p14="http://schemas.microsoft.com/office/powerpoint/2010/main" val="170264637"/>
+      </p:ext>
+    </p:extLst>
+  </p:cSld>
+</p:sld>
+</file>
+
+<file path=ppt/slides/slide8.xml><?xml version="1.0" encoding="utf-8"?>
+<p:sld xmlns:p="http://schemas.openxmlformats.org/presentationml/2006/main">
+  <p:cSld>
+    <p:bg>
+      <p:bgPr>
+        <a:solidFill xmlns:a="http://schemas.openxmlformats.org/drawingml/2006/main">
+          <a:srgbClr val="FFFFFF"/>
+        </a:solidFill>
+      </p:bgPr>
+    </p:bg>
+    <p:spTree>
+      <p:nvGrpSpPr>
+        <p:cNvPr id="1" name=""/>
+        <p:cNvGrpSpPr/>
+        <p:nvPr/>
+      </p:nvGrpSpPr>
+      <p:grpSpPr>
+        <a:xfrm xmlns:a="http://schemas.openxmlformats.org/drawingml/2006/main"/>
+      </p:grpSpPr>
+      <p:sp>
+        <p:nvSpPr>
+          <p:cNvPr id="27" name="">
+            <a:extLst xmlns:a="http://schemas.openxmlformats.org/drawingml/2006/main">
+              <a:ext uri="{FF2B5EF4-FFF2-40B4-BE49-F238E27FC236}">
+                <a16:creationId xmlns:a16="http://schemas.microsoft.com/office/drawing/2014/main" id="{3EE85317-04F6-4116-93DA-3FFE5143D331}"/>
+              </a:ext>
+            </a:extLst>
+          </p:cNvPr>
+          <p:cNvSpPr>
+            <a:spLocks xmlns:a="http://schemas.openxmlformats.org/drawingml/2006/main" noGrp="1"/>
+          </p:cNvSpPr>
+          <p:nvPr/>
+        </p:nvSpPr>
+        <p:spPr>
+          <a:xfrm xmlns:a="http://schemas.openxmlformats.org/drawingml/2006/main">
+            <a:off x="400050" y="323850"/>
+            <a:ext cx="10668000" cy="800100"/>
+          </a:xfrm>
+          <a:prstGeom xmlns:a="http://schemas.openxmlformats.org/drawingml/2006/main" prst="rect">
+            <a:avLst/>
+          </a:prstGeom>
+          <a:noFill xmlns:a="http://schemas.openxmlformats.org/drawingml/2006/main"/>
+          <a:ln xmlns:a="http://schemas.openxmlformats.org/drawingml/2006/main" w="0">
+            <a:noFill/>
+            <a:prstDash val="solid"/>
+          </a:ln>
+        </p:spPr>
+        <p:txBody>
+          <a:bodyPr xmlns:a="http://schemas.openxmlformats.org/drawingml/2006/main" anchor="t"/>
+          <a:lstStyle xmlns:a="http://schemas.openxmlformats.org/drawingml/2006/main"/>
+          <a:p xmlns:a="http://schemas.openxmlformats.org/drawingml/2006/main">
+            <a:pPr algn="l">
+              <a:defRPr sz="2850" b="1">
+                <a:solidFill>
+                  <a:srgbClr val="0F172A"/>
+                </a:solidFill>
+              </a:defRPr>
+            </a:pPr>
+            <a:r>
+              <a:rPr sz="2850" b="1">
+                <a:solidFill>
+                  <a:srgbClr val="0F172A"/>
+                </a:solidFill>
+              </a:rPr>
+              <a:t>Hardware support can make hints enforceable</a:t>
+            </a:r>
+          </a:p>
+        </p:txBody>
+      </p:sp>
+      <p:sp>
+        <p:nvSpPr>
+          <p:cNvPr id="2" name="">
+            <a:extLst xmlns:a="http://schemas.openxmlformats.org/drawingml/2006/main">
+              <a:ext uri="{FF2B5EF4-FFF2-40B4-BE49-F238E27FC236}">
+                <a16:creationId xmlns:a16="http://schemas.microsoft.com/office/drawing/2014/main" id="{9F9DEA1B-541B-4CE6-A378-0CBF0DD5A856}"/>
+              </a:ext>
+            </a:extLst>
+          </p:cNvPr>
+          <p:cNvSpPr>
+            <a:spLocks xmlns:a="http://schemas.openxmlformats.org/drawingml/2006/main" noGrp="1"/>
+          </p:cNvSpPr>
+          <p:nvPr/>
+        </p:nvSpPr>
+        <p:spPr>
+          <a:xfrm xmlns:a="http://schemas.openxmlformats.org/drawingml/2006/main">
+            <a:off x="419100" y="1028700"/>
+            <a:ext cx="9715500" cy="419100"/>
+          </a:xfrm>
+          <a:prstGeom xmlns:a="http://schemas.openxmlformats.org/drawingml/2006/main" prst="rect">
+            <a:avLst/>
+          </a:prstGeom>
+          <a:noFill xmlns:a="http://schemas.openxmlformats.org/drawingml/2006/main"/>
+          <a:ln xmlns:a="http://schemas.openxmlformats.org/drawingml/2006/main" w="0">
+            <a:noFill/>
+            <a:prstDash val="solid"/>
+          </a:ln>
+        </p:spPr>
+        <p:txBody>
+          <a:bodyPr xmlns:a="http://schemas.openxmlformats.org/drawingml/2006/main" anchor="t"/>
+          <a:lstStyle xmlns:a="http://schemas.openxmlformats.org/drawingml/2006/main"/>
+          <a:p xmlns:a="http://schemas.openxmlformats.org/drawingml/2006/main">
+            <a:pPr algn="l">
+              <a:defRPr sz="1350" b="0">
+                <a:solidFill>
+                  <a:srgbClr val="64748B"/>
+                </a:solidFill>
+              </a:defRPr>
+            </a:pPr>
+            <a:r>
+              <a:rPr sz="1350" b="0">
+                <a:solidFill>
+                  <a:srgbClr val="64748B"/>
+                </a:solidFill>
+              </a:rPr>
               <a:t>The opportunity is to treat KV as deadline-sensitive memory, not generic bytes.</a:t>
             </a:r>
           </a:p>
@@ -5712,7 +6279,7 @@
           <p:cNvPr id="3" name="">
             <a:extLst xmlns:a="http://schemas.openxmlformats.org/drawingml/2006/main">
               <a:ext uri="{FF2B5EF4-FFF2-40B4-BE49-F238E27FC236}">
-                <a16:creationId xmlns:a16="http://schemas.microsoft.com/office/drawing/2014/main" id="{B189A253-142F-4314-BEDF-01EC237F564B}"/>
+                <a16:creationId xmlns:a16="http://schemas.microsoft.com/office/drawing/2014/main" id="{7151633E-80A2-405B-8B97-A86CA62171FF}"/>
               </a:ext>
             </a:extLst>
           </p:cNvPr>
@@ -5747,7 +6314,7 @@
           <p:cNvPr id="4" name="">
             <a:extLst xmlns:a="http://schemas.openxmlformats.org/drawingml/2006/main">
               <a:ext uri="{FF2B5EF4-FFF2-40B4-BE49-F238E27FC236}">
-                <a16:creationId xmlns:a16="http://schemas.microsoft.com/office/drawing/2014/main" id="{E13F40C2-F53F-4B35-99EA-6BEEB34BC4AE}"/>
+                <a16:creationId xmlns:a16="http://schemas.microsoft.com/office/drawing/2014/main" id="{E918F2D8-774E-4C5D-945B-D823781B9837}"/>
               </a:ext>
             </a:extLst>
           </p:cNvPr>
@@ -5797,7 +6364,7 @@
           <p:cNvPr id="5" name="">
             <a:extLst xmlns:a="http://schemas.openxmlformats.org/drawingml/2006/main">
               <a:ext uri="{FF2B5EF4-FFF2-40B4-BE49-F238E27FC236}">
-                <a16:creationId xmlns:a16="http://schemas.microsoft.com/office/drawing/2014/main" id="{0A559254-5351-4076-A45F-854D6A5184FE}"/>
+                <a16:creationId xmlns:a16="http://schemas.microsoft.com/office/drawing/2014/main" id="{0E9BFFDD-49C0-4203-8BC7-00969028AC00}"/>
               </a:ext>
             </a:extLst>
           </p:cNvPr>
@@ -5847,7 +6414,7 @@
           <p:cNvPr id="6" name="">
             <a:extLst xmlns:a="http://schemas.openxmlformats.org/drawingml/2006/main">
               <a:ext uri="{FF2B5EF4-FFF2-40B4-BE49-F238E27FC236}">
-                <a16:creationId xmlns:a16="http://schemas.microsoft.com/office/drawing/2014/main" id="{90F71924-6EF4-4DF2-BF23-9D145012EAFE}"/>
+                <a16:creationId xmlns:a16="http://schemas.microsoft.com/office/drawing/2014/main" id="{B820E52D-ED10-4E03-A975-DBFF96C7226A}"/>
               </a:ext>
             </a:extLst>
           </p:cNvPr>
@@ -5897,7 +6464,7 @@
           <p:cNvPr id="7" name="">
             <a:extLst xmlns:a="http://schemas.openxmlformats.org/drawingml/2006/main">
               <a:ext uri="{FF2B5EF4-FFF2-40B4-BE49-F238E27FC236}">
-                <a16:creationId xmlns:a16="http://schemas.microsoft.com/office/drawing/2014/main" id="{3419EDEF-517D-4AEC-82A9-E8F9E1AD7BD3}"/>
+                <a16:creationId xmlns:a16="http://schemas.microsoft.com/office/drawing/2014/main" id="{19CF921B-28C8-44AC-BC85-6FD6076928C1}"/>
               </a:ext>
             </a:extLst>
           </p:cNvPr>
@@ -5932,7 +6499,7 @@
           <p:cNvPr id="8" name="">
             <a:extLst xmlns:a="http://schemas.openxmlformats.org/drawingml/2006/main">
               <a:ext uri="{FF2B5EF4-FFF2-40B4-BE49-F238E27FC236}">
-                <a16:creationId xmlns:a16="http://schemas.microsoft.com/office/drawing/2014/main" id="{F2F02250-E0AD-4464-9CCD-7EAD258BA051}"/>
+                <a16:creationId xmlns:a16="http://schemas.microsoft.com/office/drawing/2014/main" id="{6EE998F5-2400-4951-A644-AC2F66AE89D2}"/>
               </a:ext>
             </a:extLst>
           </p:cNvPr>
@@ -5982,7 +6549,7 @@
           <p:cNvPr id="9" name="">
             <a:extLst xmlns:a="http://schemas.openxmlformats.org/drawingml/2006/main">
               <a:ext uri="{FF2B5EF4-FFF2-40B4-BE49-F238E27FC236}">
-                <a16:creationId xmlns:a16="http://schemas.microsoft.com/office/drawing/2014/main" id="{127FC27C-F73F-44F0-A1D1-2B9FFE2DADB9}"/>
+                <a16:creationId xmlns:a16="http://schemas.microsoft.com/office/drawing/2014/main" id="{E75F76FB-6A4F-42CA-AEA3-84C3BDFA72BC}"/>
               </a:ext>
             </a:extLst>
           </p:cNvPr>
@@ -6032,7 +6599,7 @@
           <p:cNvPr id="10" name="">
             <a:extLst xmlns:a="http://schemas.openxmlformats.org/drawingml/2006/main">
               <a:ext uri="{FF2B5EF4-FFF2-40B4-BE49-F238E27FC236}">
-                <a16:creationId xmlns:a16="http://schemas.microsoft.com/office/drawing/2014/main" id="{2E8A391C-8952-435C-9385-764BE90C3DD9}"/>
+                <a16:creationId xmlns:a16="http://schemas.microsoft.com/office/drawing/2014/main" id="{0248757A-DB28-4561-A1D6-F0D79881F2A6}"/>
               </a:ext>
             </a:extLst>
           </p:cNvPr>
@@ -6082,7 +6649,7 @@
           <p:cNvPr id="11" name="">
             <a:extLst xmlns:a="http://schemas.openxmlformats.org/drawingml/2006/main">
               <a:ext uri="{FF2B5EF4-FFF2-40B4-BE49-F238E27FC236}">
-                <a16:creationId xmlns:a16="http://schemas.microsoft.com/office/drawing/2014/main" id="{98F10325-6651-4906-9E8E-D7DDC30F1AD5}"/>
+                <a16:creationId xmlns:a16="http://schemas.microsoft.com/office/drawing/2014/main" id="{A4DDD330-5DF7-4EA4-9D76-B075106F0E85}"/>
               </a:ext>
             </a:extLst>
           </p:cNvPr>
@@ -6117,7 +6684,7 @@
           <p:cNvPr id="12" name="">
             <a:extLst xmlns:a="http://schemas.openxmlformats.org/drawingml/2006/main">
               <a:ext uri="{FF2B5EF4-FFF2-40B4-BE49-F238E27FC236}">
-                <a16:creationId xmlns:a16="http://schemas.microsoft.com/office/drawing/2014/main" id="{16BBEC16-C93A-4A28-9FB6-2AFD9C402574}"/>
+                <a16:creationId xmlns:a16="http://schemas.microsoft.com/office/drawing/2014/main" id="{60132940-81CA-47DF-9385-425FFDACD504}"/>
               </a:ext>
             </a:extLst>
           </p:cNvPr>
@@ -6167,7 +6734,7 @@
           <p:cNvPr id="13" name="">
             <a:extLst xmlns:a="http://schemas.openxmlformats.org/drawingml/2006/main">
               <a:ext uri="{FF2B5EF4-FFF2-40B4-BE49-F238E27FC236}">
-                <a16:creationId xmlns:a16="http://schemas.microsoft.com/office/drawing/2014/main" id="{817F95AA-408D-4AD5-8A66-6ABFA8A70FE3}"/>
+                <a16:creationId xmlns:a16="http://schemas.microsoft.com/office/drawing/2014/main" id="{5D554875-5F1D-4960-9753-330273947C4A}"/>
               </a:ext>
             </a:extLst>
           </p:cNvPr>
@@ -6217,7 +6784,7 @@
           <p:cNvPr id="14" name="">
             <a:extLst xmlns:a="http://schemas.openxmlformats.org/drawingml/2006/main">
               <a:ext uri="{FF2B5EF4-FFF2-40B4-BE49-F238E27FC236}">
-                <a16:creationId xmlns:a16="http://schemas.microsoft.com/office/drawing/2014/main" id="{5E399707-AE93-4850-97DF-847587CBE247}"/>
+                <a16:creationId xmlns:a16="http://schemas.microsoft.com/office/drawing/2014/main" id="{5F665F7A-CC19-47A7-84B1-E596DDE5E7A3}"/>
               </a:ext>
             </a:extLst>
           </p:cNvPr>
@@ -6267,7 +6834,7 @@
           <p:cNvPr id="15" name="">
             <a:extLst xmlns:a="http://schemas.openxmlformats.org/drawingml/2006/main">
               <a:ext uri="{FF2B5EF4-FFF2-40B4-BE49-F238E27FC236}">
-                <a16:creationId xmlns:a16="http://schemas.microsoft.com/office/drawing/2014/main" id="{2F0A63E3-8DD6-48C1-9D8F-A618D4B3D3FB}"/>
+                <a16:creationId xmlns:a16="http://schemas.microsoft.com/office/drawing/2014/main" id="{37D3B592-850C-4E80-844A-E4FB533B7AAD}"/>
               </a:ext>
             </a:extLst>
           </p:cNvPr>
@@ -6302,7 +6869,7 @@
           <p:cNvPr id="16" name="">
             <a:extLst xmlns:a="http://schemas.openxmlformats.org/drawingml/2006/main">
               <a:ext uri="{FF2B5EF4-FFF2-40B4-BE49-F238E27FC236}">
-                <a16:creationId xmlns:a16="http://schemas.microsoft.com/office/drawing/2014/main" id="{7292E7AD-34E6-4B8B-8EE8-F3E5DBC7E112}"/>
+                <a16:creationId xmlns:a16="http://schemas.microsoft.com/office/drawing/2014/main" id="{3B0DBBDB-B571-4E9B-A74D-6200C3937EFE}"/>
               </a:ext>
             </a:extLst>
           </p:cNvPr>
@@ -6352,7 +6919,7 @@
           <p:cNvPr id="17" name="">
             <a:extLst xmlns:a="http://schemas.openxmlformats.org/drawingml/2006/main">
               <a:ext uri="{FF2B5EF4-FFF2-40B4-BE49-F238E27FC236}">
-                <a16:creationId xmlns:a16="http://schemas.microsoft.com/office/drawing/2014/main" id="{38601DF0-6589-45DE-BA89-22AF5DC1FFFF}"/>
+                <a16:creationId xmlns:a16="http://schemas.microsoft.com/office/drawing/2014/main" id="{0D3F9C76-623A-40D0-B579-E8BC94D384E4}"/>
               </a:ext>
             </a:extLst>
           </p:cNvPr>
@@ -6402,7 +6969,7 @@
           <p:cNvPr id="18" name="">
             <a:extLst xmlns:a="http://schemas.openxmlformats.org/drawingml/2006/main">
               <a:ext uri="{FF2B5EF4-FFF2-40B4-BE49-F238E27FC236}">
-                <a16:creationId xmlns:a16="http://schemas.microsoft.com/office/drawing/2014/main" id="{EEDAA903-BC2C-4C49-B7DE-E1358D1F88FC}"/>
+                <a16:creationId xmlns:a16="http://schemas.microsoft.com/office/drawing/2014/main" id="{12E5A710-689F-4D32-AE20-B9E6EBF3DA73}"/>
               </a:ext>
             </a:extLst>
           </p:cNvPr>
@@ -6452,7 +7019,7 @@
           <p:cNvPr id="19" name="">
             <a:extLst xmlns:a="http://schemas.openxmlformats.org/drawingml/2006/main">
               <a:ext uri="{FF2B5EF4-FFF2-40B4-BE49-F238E27FC236}">
-                <a16:creationId xmlns:a16="http://schemas.microsoft.com/office/drawing/2014/main" id="{6D97EEB9-A53B-4D4A-838C-CC0645445F6A}"/>
+                <a16:creationId xmlns:a16="http://schemas.microsoft.com/office/drawing/2014/main" id="{24D053D8-723C-4C4E-9E6B-07F074FC4090}"/>
               </a:ext>
             </a:extLst>
           </p:cNvPr>
@@ -6487,7 +7054,7 @@
           <p:cNvPr id="20" name="">
             <a:extLst xmlns:a="http://schemas.openxmlformats.org/drawingml/2006/main">
               <a:ext uri="{FF2B5EF4-FFF2-40B4-BE49-F238E27FC236}">
-                <a16:creationId xmlns:a16="http://schemas.microsoft.com/office/drawing/2014/main" id="{9D825824-019A-4516-A8AC-EEC5BFCC0570}"/>
+                <a16:creationId xmlns:a16="http://schemas.microsoft.com/office/drawing/2014/main" id="{11D7581F-4374-4238-B2BA-419A2E80AC70}"/>
               </a:ext>
             </a:extLst>
           </p:cNvPr>
@@ -6537,7 +7104,7 @@
           <p:cNvPr id="21" name="">
             <a:extLst xmlns:a="http://schemas.openxmlformats.org/drawingml/2006/main">
               <a:ext uri="{FF2B5EF4-FFF2-40B4-BE49-F238E27FC236}">
-                <a16:creationId xmlns:a16="http://schemas.microsoft.com/office/drawing/2014/main" id="{AC7637CB-CD0A-46FA-B51E-35AF59467BDF}"/>
+                <a16:creationId xmlns:a16="http://schemas.microsoft.com/office/drawing/2014/main" id="{884DB8A4-B899-404A-B2C2-4D372D89AEC5}"/>
               </a:ext>
             </a:extLst>
           </p:cNvPr>
@@ -6587,7 +7154,7 @@
           <p:cNvPr id="22" name="">
             <a:extLst xmlns:a="http://schemas.openxmlformats.org/drawingml/2006/main">
               <a:ext uri="{FF2B5EF4-FFF2-40B4-BE49-F238E27FC236}">
-                <a16:creationId xmlns:a16="http://schemas.microsoft.com/office/drawing/2014/main" id="{4A8695E7-33FA-453E-B233-7B9F5B6260C3}"/>
+                <a16:creationId xmlns:a16="http://schemas.microsoft.com/office/drawing/2014/main" id="{2BB10AAA-D317-4FDE-9D2A-EBA2D5BFCC07}"/>
               </a:ext>
             </a:extLst>
           </p:cNvPr>
@@ -6622,7 +7189,7 @@
           <p:cNvPr id="23" name="">
             <a:extLst xmlns:a="http://schemas.openxmlformats.org/drawingml/2006/main">
               <a:ext uri="{FF2B5EF4-FFF2-40B4-BE49-F238E27FC236}">
-                <a16:creationId xmlns:a16="http://schemas.microsoft.com/office/drawing/2014/main" id="{920336A3-EF52-437B-9FBD-956D02203DE7}"/>
+                <a16:creationId xmlns:a16="http://schemas.microsoft.com/office/drawing/2014/main" id="{E7577C74-0F57-4E07-B242-5626D85C497E}"/>
               </a:ext>
             </a:extLst>
           </p:cNvPr>
@@ -6672,7 +7239,7 @@
           <p:cNvPr id="24" name="">
             <a:extLst xmlns:a="http://schemas.openxmlformats.org/drawingml/2006/main">
               <a:ext uri="{FF2B5EF4-FFF2-40B4-BE49-F238E27FC236}">
-                <a16:creationId xmlns:a16="http://schemas.microsoft.com/office/drawing/2014/main" id="{05169DE4-E961-4784-9003-5BC12D55EC16}"/>
+                <a16:creationId xmlns:a16="http://schemas.microsoft.com/office/drawing/2014/main" id="{4554A24C-2E4B-4A1B-869C-C2589BF225C1}"/>
               </a:ext>
             </a:extLst>
           </p:cNvPr>
@@ -6722,7 +7289,7 @@
           <p:cNvPr id="25" name="">
             <a:extLst xmlns:a="http://schemas.openxmlformats.org/drawingml/2006/main">
               <a:ext uri="{FF2B5EF4-FFF2-40B4-BE49-F238E27FC236}">
-                <a16:creationId xmlns:a16="http://schemas.microsoft.com/office/drawing/2014/main" id="{654D1ADC-64EA-4539-97DC-E9A46EB095E1}"/>
+                <a16:creationId xmlns:a16="http://schemas.microsoft.com/office/drawing/2014/main" id="{9C964D50-B3C3-416D-BA42-29BA6A4F76C4}"/>
               </a:ext>
             </a:extLst>
           </p:cNvPr>
@@ -6772,7 +7339,7 @@
           <p:cNvPr id="26" name="">
             <a:extLst xmlns:a="http://schemas.openxmlformats.org/drawingml/2006/main">
               <a:ext uri="{FF2B5EF4-FFF2-40B4-BE49-F238E27FC236}">
-                <a16:creationId xmlns:a16="http://schemas.microsoft.com/office/drawing/2014/main" id="{43017583-E283-4DFA-91DD-2C4B2C539622}"/>
+                <a16:creationId xmlns:a16="http://schemas.microsoft.com/office/drawing/2014/main" id="{98B46ED2-5A57-4087-92BB-9C4D2AEEDD6C}"/>
               </a:ext>
             </a:extLst>
           </p:cNvPr>
@@ -6812,7 +7379,7 @@
                   <a:srgbClr val="64748B"/>
                 </a:solidFill>
               </a:rPr>
-              <a:t>07</a:t>
+              <a:t>08</a:t>
             </a:r>
           </a:p>
         </p:txBody>
@@ -6820,7 +7387,7 @@
     </p:spTree>
     <p:extLst>
       <p:ext uri="{BB962C8B-B14F-4D97-AF65-F5344CB8AC3E}">
-        <p14:creationId xmlns:p14="http://schemas.microsoft.com/office/powerpoint/2010/main" val="576995225"/>
+        <p14:creationId xmlns:p14="http://schemas.microsoft.com/office/powerpoint/2010/main" val="208989562"/>
       </p:ext>
     </p:extLst>
   </p:cSld>

--- a/sglang_direct_kv/artifacts/slides/agent_aware_kv_movement_manager_deck.pptx
+++ b/sglang_direct_kv/artifacts/slides/agent_aware_kv_movement_manager_deck.pptx
@@ -2,20 +2,20 @@
 <file path=ppt/presentation.xml><?xml version="1.0" encoding="utf-8"?>
 <p:presentation xmlns:p="http://schemas.openxmlformats.org/presentationml/2006/main">
   <p:sldMasterIdLst>
-    <p:sldMasterId xmlns:r="http://schemas.openxmlformats.org/officeDocument/2006/relationships" id="2147483648" r:id="R192ec0c512534232"/>
+    <p:sldMasterId xmlns:r="http://schemas.openxmlformats.org/officeDocument/2006/relationships" id="2147483648" r:id="R601185fe15184d04"/>
   </p:sldMasterIdLst>
   <p:notesMasterIdLst>
-    <p:notesMasterId xmlns:r="http://schemas.openxmlformats.org/officeDocument/2006/relationships" r:id="R53a9988d234a45d6"/>
+    <p:notesMasterId xmlns:r="http://schemas.openxmlformats.org/officeDocument/2006/relationships" r:id="Rb5f852de8d444456"/>
   </p:notesMasterIdLst>
   <p:sldIdLst>
-    <p:sldId xmlns:r="http://schemas.openxmlformats.org/officeDocument/2006/relationships" id="256" r:id="Re34d58e080024f18"/>
-    <p:sldId xmlns:r="http://schemas.openxmlformats.org/officeDocument/2006/relationships" id="257" r:id="Rb6cb70b5173140e1"/>
-    <p:sldId xmlns:r="http://schemas.openxmlformats.org/officeDocument/2006/relationships" id="258" r:id="R082ef5d2f2c54649"/>
-    <p:sldId xmlns:r="http://schemas.openxmlformats.org/officeDocument/2006/relationships" id="259" r:id="R7b9b19be8672452f"/>
-    <p:sldId xmlns:r="http://schemas.openxmlformats.org/officeDocument/2006/relationships" id="260" r:id="R847a68fd188f45c0"/>
-    <p:sldId xmlns:r="http://schemas.openxmlformats.org/officeDocument/2006/relationships" id="261" r:id="Rc609a81787d342cf"/>
-    <p:sldId xmlns:r="http://schemas.openxmlformats.org/officeDocument/2006/relationships" id="262" r:id="R8a1021d62f06433b"/>
-    <p:sldId xmlns:r="http://schemas.openxmlformats.org/officeDocument/2006/relationships" id="263" r:id="R9976faeb41d04066"/>
+    <p:sldId xmlns:r="http://schemas.openxmlformats.org/officeDocument/2006/relationships" id="256" r:id="R7daa26312cdc4e89"/>
+    <p:sldId xmlns:r="http://schemas.openxmlformats.org/officeDocument/2006/relationships" id="257" r:id="Rcf8d371f12da4fd9"/>
+    <p:sldId xmlns:r="http://schemas.openxmlformats.org/officeDocument/2006/relationships" id="258" r:id="R4387e18435334843"/>
+    <p:sldId xmlns:r="http://schemas.openxmlformats.org/officeDocument/2006/relationships" id="259" r:id="R7535cc3ff9094265"/>
+    <p:sldId xmlns:r="http://schemas.openxmlformats.org/officeDocument/2006/relationships" id="260" r:id="R92d0645070fd4a7e"/>
+    <p:sldId xmlns:r="http://schemas.openxmlformats.org/officeDocument/2006/relationships" id="261" r:id="Rd105dad3ca234f13"/>
+    <p:sldId xmlns:r="http://schemas.openxmlformats.org/officeDocument/2006/relationships" id="262" r:id="R855ed48d2828471d"/>
+    <p:sldId xmlns:r="http://schemas.openxmlformats.org/officeDocument/2006/relationships" id="263" r:id="R5b0c6fdbfb354bb6"/>
   </p:sldIdLst>
   <p:sldSz cx="12192000" cy="6858000"/>
   <p:notesSz cx="6858000" cy="9144000"/>
@@ -1207,7 +1207,7 @@
   </p:cSld>
   <p:clrMap bg1="lt1" tx1="dk1" bg2="lt2" tx2="dk2" accent1="accent1" accent2="accent2" accent3="accent3" accent4="accent4" accent5="accent5" accent6="accent6" hlink="hlink" folHlink="folHlink"/>
   <p:sldLayoutIdLst>
-    <p:sldLayoutId xmlns:r="http://schemas.openxmlformats.org/officeDocument/2006/relationships" id="2147483649" r:id="R7ea18fb3123640b4"/>
+    <p:sldLayoutId xmlns:r="http://schemas.openxmlformats.org/officeDocument/2006/relationships" id="2147483649" r:id="R406961d316ec4559"/>
   </p:sldLayoutIdLst>
   <p:txStyles>
     <p:titleStyle>
@@ -1758,7 +1758,7 @@
           <p:cNvPr id="16" name="">
             <a:extLst xmlns:a="http://schemas.openxmlformats.org/drawingml/2006/main">
               <a:ext uri="{FF2B5EF4-FFF2-40B4-BE49-F238E27FC236}">
-                <a16:creationId xmlns:a16="http://schemas.microsoft.com/office/drawing/2014/main" id="{0BA751AA-DA07-48DE-8EC8-BFDC164BC590}"/>
+                <a16:creationId xmlns:a16="http://schemas.microsoft.com/office/drawing/2014/main" id="{62FB2137-23A7-4BBA-82A2-4DADBBC59E9A}"/>
               </a:ext>
             </a:extLst>
           </p:cNvPr>
@@ -1808,7 +1808,7 @@
           <p:cNvPr id="2" name="">
             <a:extLst xmlns:a="http://schemas.openxmlformats.org/drawingml/2006/main">
               <a:ext uri="{FF2B5EF4-FFF2-40B4-BE49-F238E27FC236}">
-                <a16:creationId xmlns:a16="http://schemas.microsoft.com/office/drawing/2014/main" id="{0AF7E61D-5A88-4467-A5F9-BD9A46BF6CCC}"/>
+                <a16:creationId xmlns:a16="http://schemas.microsoft.com/office/drawing/2014/main" id="{6E355E9F-8557-4B62-BDF4-23539AB16002}"/>
               </a:ext>
             </a:extLst>
           </p:cNvPr>
@@ -1858,7 +1858,7 @@
           <p:cNvPr id="3" name="">
             <a:extLst xmlns:a="http://schemas.openxmlformats.org/drawingml/2006/main">
               <a:ext uri="{FF2B5EF4-FFF2-40B4-BE49-F238E27FC236}">
-                <a16:creationId xmlns:a16="http://schemas.microsoft.com/office/drawing/2014/main" id="{489BCDC5-8D32-4F24-8012-C090C9A6F95A}"/>
+                <a16:creationId xmlns:a16="http://schemas.microsoft.com/office/drawing/2014/main" id="{DA1F0853-039D-4C86-A71F-E072698AE8FC}"/>
               </a:ext>
             </a:extLst>
           </p:cNvPr>
@@ -1893,7 +1893,7 @@
           <p:cNvPr id="4" name="">
             <a:extLst xmlns:a="http://schemas.openxmlformats.org/drawingml/2006/main">
               <a:ext uri="{FF2B5EF4-FFF2-40B4-BE49-F238E27FC236}">
-                <a16:creationId xmlns:a16="http://schemas.microsoft.com/office/drawing/2014/main" id="{397A9E5F-7E4F-4B2D-AEED-A576C8F70253}"/>
+                <a16:creationId xmlns:a16="http://schemas.microsoft.com/office/drawing/2014/main" id="{7A3A1910-124C-474A-B3E8-DD5CE2C8B126}"/>
               </a:ext>
             </a:extLst>
           </p:cNvPr>
@@ -1943,7 +1943,7 @@
           <p:cNvPr id="5" name="">
             <a:extLst xmlns:a="http://schemas.openxmlformats.org/drawingml/2006/main">
               <a:ext uri="{FF2B5EF4-FFF2-40B4-BE49-F238E27FC236}">
-                <a16:creationId xmlns:a16="http://schemas.microsoft.com/office/drawing/2014/main" id="{2CBA0617-FF1F-4852-8AB9-E69708A179D1}"/>
+                <a16:creationId xmlns:a16="http://schemas.microsoft.com/office/drawing/2014/main" id="{2CBB6CA9-B912-4BEE-A8A5-D071D5EF73D4}"/>
               </a:ext>
             </a:extLst>
           </p:cNvPr>
@@ -1993,7 +1993,7 @@
           <p:cNvPr id="6" name="">
             <a:extLst xmlns:a="http://schemas.openxmlformats.org/drawingml/2006/main">
               <a:ext uri="{FF2B5EF4-FFF2-40B4-BE49-F238E27FC236}">
-                <a16:creationId xmlns:a16="http://schemas.microsoft.com/office/drawing/2014/main" id="{4DED71BA-614D-4160-88F5-7CFE73003F2C}"/>
+                <a16:creationId xmlns:a16="http://schemas.microsoft.com/office/drawing/2014/main" id="{4BE85BCF-32F8-4954-89A0-9F8DD5B43FC4}"/>
               </a:ext>
             </a:extLst>
           </p:cNvPr>
@@ -2028,7 +2028,7 @@
           <p:cNvPr id="7" name="">
             <a:extLst xmlns:a="http://schemas.openxmlformats.org/drawingml/2006/main">
               <a:ext uri="{FF2B5EF4-FFF2-40B4-BE49-F238E27FC236}">
-                <a16:creationId xmlns:a16="http://schemas.microsoft.com/office/drawing/2014/main" id="{B5A77795-127A-4B6D-ABF0-0C3705669DF6}"/>
+                <a16:creationId xmlns:a16="http://schemas.microsoft.com/office/drawing/2014/main" id="{994E34FD-E5DA-45F3-8D66-AED20147FE33}"/>
               </a:ext>
             </a:extLst>
           </p:cNvPr>
@@ -2078,7 +2078,7 @@
           <p:cNvPr id="8" name="">
             <a:extLst xmlns:a="http://schemas.openxmlformats.org/drawingml/2006/main">
               <a:ext uri="{FF2B5EF4-FFF2-40B4-BE49-F238E27FC236}">
-                <a16:creationId xmlns:a16="http://schemas.microsoft.com/office/drawing/2014/main" id="{BC15575F-1D32-4544-A13A-2F29689DBCDA}"/>
+                <a16:creationId xmlns:a16="http://schemas.microsoft.com/office/drawing/2014/main" id="{0938EB14-B8AB-429A-9E3E-CD9B37BDFED5}"/>
               </a:ext>
             </a:extLst>
           </p:cNvPr>
@@ -2128,7 +2128,7 @@
           <p:cNvPr id="9" name="">
             <a:extLst xmlns:a="http://schemas.openxmlformats.org/drawingml/2006/main">
               <a:ext uri="{FF2B5EF4-FFF2-40B4-BE49-F238E27FC236}">
-                <a16:creationId xmlns:a16="http://schemas.microsoft.com/office/drawing/2014/main" id="{C2C81932-2E11-4600-88F8-567227A2CE43}"/>
+                <a16:creationId xmlns:a16="http://schemas.microsoft.com/office/drawing/2014/main" id="{D8B1CD77-A766-4286-B4E6-001C63E22EDB}"/>
               </a:ext>
             </a:extLst>
           </p:cNvPr>
@@ -2163,7 +2163,7 @@
           <p:cNvPr id="10" name="">
             <a:extLst xmlns:a="http://schemas.openxmlformats.org/drawingml/2006/main">
               <a:ext uri="{FF2B5EF4-FFF2-40B4-BE49-F238E27FC236}">
-                <a16:creationId xmlns:a16="http://schemas.microsoft.com/office/drawing/2014/main" id="{D71F2028-771E-47D1-A353-D13A3F5A790A}"/>
+                <a16:creationId xmlns:a16="http://schemas.microsoft.com/office/drawing/2014/main" id="{96FBC1C6-BE07-422E-A6E4-6A7593983BB1}"/>
               </a:ext>
             </a:extLst>
           </p:cNvPr>
@@ -2213,7 +2213,7 @@
           <p:cNvPr id="11" name="">
             <a:extLst xmlns:a="http://schemas.openxmlformats.org/drawingml/2006/main">
               <a:ext uri="{FF2B5EF4-FFF2-40B4-BE49-F238E27FC236}">
-                <a16:creationId xmlns:a16="http://schemas.microsoft.com/office/drawing/2014/main" id="{912F86DB-BDE7-4917-B774-60BD3883D174}"/>
+                <a16:creationId xmlns:a16="http://schemas.microsoft.com/office/drawing/2014/main" id="{F6DCC0D0-5871-40D0-93AB-45F2D4D8F76D}"/>
               </a:ext>
             </a:extLst>
           </p:cNvPr>
@@ -2263,7 +2263,7 @@
           <p:cNvPr id="12" name="">
             <a:extLst xmlns:a="http://schemas.openxmlformats.org/drawingml/2006/main">
               <a:ext uri="{FF2B5EF4-FFF2-40B4-BE49-F238E27FC236}">
-                <a16:creationId xmlns:a16="http://schemas.microsoft.com/office/drawing/2014/main" id="{5D68CDBA-9A29-40DE-8885-0AFC21686D79}"/>
+                <a16:creationId xmlns:a16="http://schemas.microsoft.com/office/drawing/2014/main" id="{3FB49F3C-BA29-48A8-A6B6-CFDB96C7267A}"/>
               </a:ext>
             </a:extLst>
           </p:cNvPr>
@@ -2298,7 +2298,7 @@
           <p:cNvPr id="13" name="">
             <a:extLst xmlns:a="http://schemas.openxmlformats.org/drawingml/2006/main">
               <a:ext uri="{FF2B5EF4-FFF2-40B4-BE49-F238E27FC236}">
-                <a16:creationId xmlns:a16="http://schemas.microsoft.com/office/drawing/2014/main" id="{A38CD4DA-A930-489C-9310-14F05BA6BA5E}"/>
+                <a16:creationId xmlns:a16="http://schemas.microsoft.com/office/drawing/2014/main" id="{A5F29790-1E4C-4B81-AE33-A255BA16910C}"/>
               </a:ext>
             </a:extLst>
           </p:cNvPr>
@@ -2348,7 +2348,7 @@
           <p:cNvPr id="14" name="">
             <a:extLst xmlns:a="http://schemas.openxmlformats.org/drawingml/2006/main">
               <a:ext uri="{FF2B5EF4-FFF2-40B4-BE49-F238E27FC236}">
-                <a16:creationId xmlns:a16="http://schemas.microsoft.com/office/drawing/2014/main" id="{80F15CE9-1606-4C61-A104-B79AFF4814FA}"/>
+                <a16:creationId xmlns:a16="http://schemas.microsoft.com/office/drawing/2014/main" id="{B7AFF103-0AE0-4CB2-9144-92FA8E6068EC}"/>
               </a:ext>
             </a:extLst>
           </p:cNvPr>
@@ -2398,7 +2398,7 @@
           <p:cNvPr id="15" name="">
             <a:extLst xmlns:a="http://schemas.openxmlformats.org/drawingml/2006/main">
               <a:ext uri="{FF2B5EF4-FFF2-40B4-BE49-F238E27FC236}">
-                <a16:creationId xmlns:a16="http://schemas.microsoft.com/office/drawing/2014/main" id="{FE975BE0-7819-490A-A228-0064DC6F914F}"/>
+                <a16:creationId xmlns:a16="http://schemas.microsoft.com/office/drawing/2014/main" id="{072DEE50-D0D2-4EAE-9D61-55BBCE5FEDE9}"/>
               </a:ext>
             </a:extLst>
           </p:cNvPr>
@@ -2446,7 +2446,7 @@
     </p:spTree>
     <p:extLst>
       <p:ext uri="{BB962C8B-B14F-4D97-AF65-F5344CB8AC3E}">
-        <p14:creationId xmlns:p14="http://schemas.microsoft.com/office/powerpoint/2010/main" val="1549167142"/>
+        <p14:creationId xmlns:p14="http://schemas.microsoft.com/office/powerpoint/2010/main" val="1117321373"/>
       </p:ext>
     </p:extLst>
   </p:cSld>
@@ -2477,7 +2477,7 @@
           <p:cNvPr id="14" name="">
             <a:extLst xmlns:a="http://schemas.openxmlformats.org/drawingml/2006/main">
               <a:ext uri="{FF2B5EF4-FFF2-40B4-BE49-F238E27FC236}">
-                <a16:creationId xmlns:a16="http://schemas.microsoft.com/office/drawing/2014/main" id="{C16AA59A-BD22-4C13-B0C5-FAB2879E3C46}"/>
+                <a16:creationId xmlns:a16="http://schemas.microsoft.com/office/drawing/2014/main" id="{60536CB3-FB5C-45C9-B3EA-E43F0F619E87}"/>
               </a:ext>
             </a:extLst>
           </p:cNvPr>
@@ -2527,7 +2527,7 @@
           <p:cNvPr id="2" name="">
             <a:extLst xmlns:a="http://schemas.openxmlformats.org/drawingml/2006/main">
               <a:ext uri="{FF2B5EF4-FFF2-40B4-BE49-F238E27FC236}">
-                <a16:creationId xmlns:a16="http://schemas.microsoft.com/office/drawing/2014/main" id="{4B9124A5-F0DF-4F8B-A6F7-5C00736C990F}"/>
+                <a16:creationId xmlns:a16="http://schemas.microsoft.com/office/drawing/2014/main" id="{547E3963-FC62-4FBB-B3C5-20C3EC71709A}"/>
               </a:ext>
             </a:extLst>
           </p:cNvPr>
@@ -2577,7 +2577,7 @@
           <p:cNvPr id="3" name="">
             <a:extLst xmlns:a="http://schemas.openxmlformats.org/drawingml/2006/main">
               <a:ext uri="{FF2B5EF4-FFF2-40B4-BE49-F238E27FC236}">
-                <a16:creationId xmlns:a16="http://schemas.microsoft.com/office/drawing/2014/main" id="{23DA23A4-2D27-48C3-B1E5-D14DD439DBE8}"/>
+                <a16:creationId xmlns:a16="http://schemas.microsoft.com/office/drawing/2014/main" id="{71592BEF-D46E-4C83-A1B6-40C1089E11D8}"/>
               </a:ext>
             </a:extLst>
           </p:cNvPr>
@@ -2616,7 +2616,7 @@
           <p:nvPr/>
         </p:nvPicPr>
         <p:blipFill>
-          <a:blip xmlns:r="http://schemas.openxmlformats.org/officeDocument/2006/relationships" xmlns:a="http://schemas.openxmlformats.org/drawingml/2006/main" r:embed="Rc652ccb7afff48c1"/>
+          <a:blip xmlns:r="http://schemas.openxmlformats.org/officeDocument/2006/relationships" xmlns:a="http://schemas.openxmlformats.org/drawingml/2006/main" r:embed="Rb38c1f58a5844237"/>
           <a:stretch xmlns:a="http://schemas.openxmlformats.org/drawingml/2006/main"/>
         </p:blipFill>
         <p:spPr>
@@ -2634,7 +2634,7 @@
           <p:cNvPr id="5" name="">
             <a:extLst xmlns:a="http://schemas.openxmlformats.org/drawingml/2006/main">
               <a:ext uri="{FF2B5EF4-FFF2-40B4-BE49-F238E27FC236}">
-                <a16:creationId xmlns:a16="http://schemas.microsoft.com/office/drawing/2014/main" id="{799AB612-0BB8-4FFC-A7E6-0A1437B9CD6B}"/>
+                <a16:creationId xmlns:a16="http://schemas.microsoft.com/office/drawing/2014/main" id="{BBBD5418-8F0D-4E65-B2E8-951F265D5E67}"/>
               </a:ext>
             </a:extLst>
           </p:cNvPr>
@@ -2669,7 +2669,7 @@
           <p:cNvPr id="6" name="">
             <a:extLst xmlns:a="http://schemas.openxmlformats.org/drawingml/2006/main">
               <a:ext uri="{FF2B5EF4-FFF2-40B4-BE49-F238E27FC236}">
-                <a16:creationId xmlns:a16="http://schemas.microsoft.com/office/drawing/2014/main" id="{73569E6B-4898-4726-9DC8-63A85BA77CE6}"/>
+                <a16:creationId xmlns:a16="http://schemas.microsoft.com/office/drawing/2014/main" id="{95185ACD-37DA-414E-962D-89434056A095}"/>
               </a:ext>
             </a:extLst>
           </p:cNvPr>
@@ -2719,7 +2719,7 @@
           <p:cNvPr id="7" name="">
             <a:extLst xmlns:a="http://schemas.openxmlformats.org/drawingml/2006/main">
               <a:ext uri="{FF2B5EF4-FFF2-40B4-BE49-F238E27FC236}">
-                <a16:creationId xmlns:a16="http://schemas.microsoft.com/office/drawing/2014/main" id="{8AEF6E1E-6D4F-46A0-8C33-15A81B8F2806}"/>
+                <a16:creationId xmlns:a16="http://schemas.microsoft.com/office/drawing/2014/main" id="{7A771A9A-534B-4A69-84DE-567DA5974CAE}"/>
               </a:ext>
             </a:extLst>
           </p:cNvPr>
@@ -2769,7 +2769,7 @@
           <p:cNvPr id="8" name="">
             <a:extLst xmlns:a="http://schemas.openxmlformats.org/drawingml/2006/main">
               <a:ext uri="{FF2B5EF4-FFF2-40B4-BE49-F238E27FC236}">
-                <a16:creationId xmlns:a16="http://schemas.microsoft.com/office/drawing/2014/main" id="{95E25240-55B1-4486-8F1A-F8C93598E1E3}"/>
+                <a16:creationId xmlns:a16="http://schemas.microsoft.com/office/drawing/2014/main" id="{FB394521-18CF-475E-9BF0-49C76FF7EC9D}"/>
               </a:ext>
             </a:extLst>
           </p:cNvPr>
@@ -2804,7 +2804,7 @@
           <p:cNvPr id="9" name="">
             <a:extLst xmlns:a="http://schemas.openxmlformats.org/drawingml/2006/main">
               <a:ext uri="{FF2B5EF4-FFF2-40B4-BE49-F238E27FC236}">
-                <a16:creationId xmlns:a16="http://schemas.microsoft.com/office/drawing/2014/main" id="{3F461627-3B8C-4FEA-A511-73B437BFC36F}"/>
+                <a16:creationId xmlns:a16="http://schemas.microsoft.com/office/drawing/2014/main" id="{A753475D-A3FA-4D43-AB47-7C732BD2768D}"/>
               </a:ext>
             </a:extLst>
           </p:cNvPr>
@@ -2854,7 +2854,7 @@
           <p:cNvPr id="10" name="">
             <a:extLst xmlns:a="http://schemas.openxmlformats.org/drawingml/2006/main">
               <a:ext uri="{FF2B5EF4-FFF2-40B4-BE49-F238E27FC236}">
-                <a16:creationId xmlns:a16="http://schemas.microsoft.com/office/drawing/2014/main" id="{8976D35C-DC30-436E-8209-6C0F2DE23B81}"/>
+                <a16:creationId xmlns:a16="http://schemas.microsoft.com/office/drawing/2014/main" id="{C8E20A24-58CC-4010-8319-CC48E82E0AD2}"/>
               </a:ext>
             </a:extLst>
           </p:cNvPr>
@@ -2904,7 +2904,7 @@
           <p:cNvPr id="11" name="">
             <a:extLst xmlns:a="http://schemas.openxmlformats.org/drawingml/2006/main">
               <a:ext uri="{FF2B5EF4-FFF2-40B4-BE49-F238E27FC236}">
-                <a16:creationId xmlns:a16="http://schemas.microsoft.com/office/drawing/2014/main" id="{30B8261E-FE9F-4188-8282-64D462C2B5BA}"/>
+                <a16:creationId xmlns:a16="http://schemas.microsoft.com/office/drawing/2014/main" id="{BA32AE1C-3E0B-4743-93E7-508D8D1D0A0D}"/>
               </a:ext>
             </a:extLst>
           </p:cNvPr>
@@ -2954,7 +2954,7 @@
           <p:cNvPr id="12" name="">
             <a:extLst xmlns:a="http://schemas.openxmlformats.org/drawingml/2006/main">
               <a:ext uri="{FF2B5EF4-FFF2-40B4-BE49-F238E27FC236}">
-                <a16:creationId xmlns:a16="http://schemas.microsoft.com/office/drawing/2014/main" id="{EF074449-55C4-4A01-8526-7E76E1D0CD37}"/>
+                <a16:creationId xmlns:a16="http://schemas.microsoft.com/office/drawing/2014/main" id="{36B91FA5-5950-4DE6-9285-A14986342A28}"/>
               </a:ext>
             </a:extLst>
           </p:cNvPr>
@@ -3004,7 +3004,7 @@
           <p:cNvPr id="13" name="">
             <a:extLst xmlns:a="http://schemas.openxmlformats.org/drawingml/2006/main">
               <a:ext uri="{FF2B5EF4-FFF2-40B4-BE49-F238E27FC236}">
-                <a16:creationId xmlns:a16="http://schemas.microsoft.com/office/drawing/2014/main" id="{1896B789-3AC2-4CCA-B654-0E840877A6C5}"/>
+                <a16:creationId xmlns:a16="http://schemas.microsoft.com/office/drawing/2014/main" id="{AA6111C1-B653-4800-85A1-2AF3F854544A}"/>
               </a:ext>
             </a:extLst>
           </p:cNvPr>
@@ -3052,7 +3052,7 @@
     </p:spTree>
     <p:extLst>
       <p:ext uri="{BB962C8B-B14F-4D97-AF65-F5344CB8AC3E}">
-        <p14:creationId xmlns:p14="http://schemas.microsoft.com/office/powerpoint/2010/main" val="2140125121"/>
+        <p14:creationId xmlns:p14="http://schemas.microsoft.com/office/powerpoint/2010/main" val="1498469192"/>
       </p:ext>
     </p:extLst>
   </p:cSld>
@@ -3083,7 +3083,7 @@
           <p:cNvPr id="26" name="">
             <a:extLst xmlns:a="http://schemas.openxmlformats.org/drawingml/2006/main">
               <a:ext uri="{FF2B5EF4-FFF2-40B4-BE49-F238E27FC236}">
-                <a16:creationId xmlns:a16="http://schemas.microsoft.com/office/drawing/2014/main" id="{276BD223-2F6F-4FCA-901E-CC583D9A8DFF}"/>
+                <a16:creationId xmlns:a16="http://schemas.microsoft.com/office/drawing/2014/main" id="{5E5547E2-F8D1-41D3-BBFA-0FCED9F37510}"/>
               </a:ext>
             </a:extLst>
           </p:cNvPr>
@@ -3133,7 +3133,7 @@
           <p:cNvPr id="2" name="">
             <a:extLst xmlns:a="http://schemas.openxmlformats.org/drawingml/2006/main">
               <a:ext uri="{FF2B5EF4-FFF2-40B4-BE49-F238E27FC236}">
-                <a16:creationId xmlns:a16="http://schemas.microsoft.com/office/drawing/2014/main" id="{F6906ED2-FB7A-457A-8812-64E49C4E2BA9}"/>
+                <a16:creationId xmlns:a16="http://schemas.microsoft.com/office/drawing/2014/main" id="{118B0EAB-8AC2-4D72-B5BB-214EB5A7BAD9}"/>
               </a:ext>
             </a:extLst>
           </p:cNvPr>
@@ -3183,7 +3183,7 @@
           <p:cNvPr id="3" name="">
             <a:extLst xmlns:a="http://schemas.openxmlformats.org/drawingml/2006/main">
               <a:ext uri="{FF2B5EF4-FFF2-40B4-BE49-F238E27FC236}">
-                <a16:creationId xmlns:a16="http://schemas.microsoft.com/office/drawing/2014/main" id="{1D16494C-F1F1-47B3-8B02-312BC2770EC3}"/>
+                <a16:creationId xmlns:a16="http://schemas.microsoft.com/office/drawing/2014/main" id="{B78CB1B7-6F9B-4CBD-A056-E71D80CFAE44}"/>
               </a:ext>
             </a:extLst>
           </p:cNvPr>
@@ -3218,7 +3218,7 @@
           <p:cNvPr id="4" name="">
             <a:extLst xmlns:a="http://schemas.openxmlformats.org/drawingml/2006/main">
               <a:ext uri="{FF2B5EF4-FFF2-40B4-BE49-F238E27FC236}">
-                <a16:creationId xmlns:a16="http://schemas.microsoft.com/office/drawing/2014/main" id="{70BA4936-E19D-4E08-A1B8-917B7AAB8C28}"/>
+                <a16:creationId xmlns:a16="http://schemas.microsoft.com/office/drawing/2014/main" id="{386281B8-C2FD-48CF-93BF-A9E028834111}"/>
               </a:ext>
             </a:extLst>
           </p:cNvPr>
@@ -3268,7 +3268,7 @@
           <p:cNvPr id="5" name="">
             <a:extLst xmlns:a="http://schemas.openxmlformats.org/drawingml/2006/main">
               <a:ext uri="{FF2B5EF4-FFF2-40B4-BE49-F238E27FC236}">
-                <a16:creationId xmlns:a16="http://schemas.microsoft.com/office/drawing/2014/main" id="{C50D260D-CA1C-4FC4-BEB1-28F543C4B578}"/>
+                <a16:creationId xmlns:a16="http://schemas.microsoft.com/office/drawing/2014/main" id="{8389FD71-FA2A-4B4A-826E-3870DE69CD7C}"/>
               </a:ext>
             </a:extLst>
           </p:cNvPr>
@@ -3299,7 +3299,7 @@
           <p:cNvPr id="6" name="">
             <a:extLst xmlns:a="http://schemas.openxmlformats.org/drawingml/2006/main">
               <a:ext uri="{FF2B5EF4-FFF2-40B4-BE49-F238E27FC236}">
-                <a16:creationId xmlns:a16="http://schemas.microsoft.com/office/drawing/2014/main" id="{699B30B7-9799-4B0E-9532-7B75D66D6A38}"/>
+                <a16:creationId xmlns:a16="http://schemas.microsoft.com/office/drawing/2014/main" id="{5D01BB43-31B8-4899-91CA-91A20B1E3477}"/>
               </a:ext>
             </a:extLst>
           </p:cNvPr>
@@ -3349,7 +3349,7 @@
           <p:cNvPr id="7" name="">
             <a:extLst xmlns:a="http://schemas.openxmlformats.org/drawingml/2006/main">
               <a:ext uri="{FF2B5EF4-FFF2-40B4-BE49-F238E27FC236}">
-                <a16:creationId xmlns:a16="http://schemas.microsoft.com/office/drawing/2014/main" id="{76C394B8-600B-4AD1-804A-E8B29D7D3A1D}"/>
+                <a16:creationId xmlns:a16="http://schemas.microsoft.com/office/drawing/2014/main" id="{15E6D17C-A55F-4F53-BC96-5892BD12C8FC}"/>
               </a:ext>
             </a:extLst>
           </p:cNvPr>
@@ -3380,7 +3380,7 @@
           <p:cNvPr id="8" name="">
             <a:extLst xmlns:a="http://schemas.openxmlformats.org/drawingml/2006/main">
               <a:ext uri="{FF2B5EF4-FFF2-40B4-BE49-F238E27FC236}">
-                <a16:creationId xmlns:a16="http://schemas.microsoft.com/office/drawing/2014/main" id="{C838E098-87EE-46B4-80AB-4B2D847618D8}"/>
+                <a16:creationId xmlns:a16="http://schemas.microsoft.com/office/drawing/2014/main" id="{75AED1F2-493B-4BD8-ABE7-5E7F44F072AF}"/>
               </a:ext>
             </a:extLst>
           </p:cNvPr>
@@ -3430,7 +3430,7 @@
           <p:cNvPr id="9" name="">
             <a:extLst xmlns:a="http://schemas.openxmlformats.org/drawingml/2006/main">
               <a:ext uri="{FF2B5EF4-FFF2-40B4-BE49-F238E27FC236}">
-                <a16:creationId xmlns:a16="http://schemas.microsoft.com/office/drawing/2014/main" id="{55E060FD-85F2-4033-A03E-820286F85F30}"/>
+                <a16:creationId xmlns:a16="http://schemas.microsoft.com/office/drawing/2014/main" id="{4621232E-C824-4D6B-9CD4-259D2A91EE65}"/>
               </a:ext>
             </a:extLst>
           </p:cNvPr>
@@ -3461,7 +3461,7 @@
           <p:cNvPr id="10" name="">
             <a:extLst xmlns:a="http://schemas.openxmlformats.org/drawingml/2006/main">
               <a:ext uri="{FF2B5EF4-FFF2-40B4-BE49-F238E27FC236}">
-                <a16:creationId xmlns:a16="http://schemas.microsoft.com/office/drawing/2014/main" id="{BB2028D3-861A-46D0-AD9C-76AFBC03D434}"/>
+                <a16:creationId xmlns:a16="http://schemas.microsoft.com/office/drawing/2014/main" id="{887923AB-C389-47A4-AE18-81ABC92E0E1A}"/>
               </a:ext>
             </a:extLst>
           </p:cNvPr>
@@ -3511,7 +3511,7 @@
           <p:cNvPr id="11" name="">
             <a:extLst xmlns:a="http://schemas.openxmlformats.org/drawingml/2006/main">
               <a:ext uri="{FF2B5EF4-FFF2-40B4-BE49-F238E27FC236}">
-                <a16:creationId xmlns:a16="http://schemas.microsoft.com/office/drawing/2014/main" id="{1960C189-3D83-4249-9811-9A441B63D469}"/>
+                <a16:creationId xmlns:a16="http://schemas.microsoft.com/office/drawing/2014/main" id="{C0F9230A-43FE-462A-8492-B1C3E76104CC}"/>
               </a:ext>
             </a:extLst>
           </p:cNvPr>
@@ -3542,7 +3542,7 @@
           <p:cNvPr id="12" name="">
             <a:extLst xmlns:a="http://schemas.openxmlformats.org/drawingml/2006/main">
               <a:ext uri="{FF2B5EF4-FFF2-40B4-BE49-F238E27FC236}">
-                <a16:creationId xmlns:a16="http://schemas.microsoft.com/office/drawing/2014/main" id="{732FC0FF-963B-4053-B99D-D57B511B3224}"/>
+                <a16:creationId xmlns:a16="http://schemas.microsoft.com/office/drawing/2014/main" id="{3EEC4E6B-B8D9-4381-9935-5DE9FFE9AF5C}"/>
               </a:ext>
             </a:extLst>
           </p:cNvPr>
@@ -3592,7 +3592,7 @@
           <p:cNvPr id="13" name="">
             <a:extLst xmlns:a="http://schemas.openxmlformats.org/drawingml/2006/main">
               <a:ext uri="{FF2B5EF4-FFF2-40B4-BE49-F238E27FC236}">
-                <a16:creationId xmlns:a16="http://schemas.microsoft.com/office/drawing/2014/main" id="{05D78D9E-CA03-4F8D-8923-73B0C8030FB0}"/>
+                <a16:creationId xmlns:a16="http://schemas.microsoft.com/office/drawing/2014/main" id="{94E08F4C-EB1C-41D7-A96C-79C55BB2A616}"/>
               </a:ext>
             </a:extLst>
           </p:cNvPr>
@@ -3642,7 +3642,7 @@
           <p:cNvPr id="14" name="">
             <a:extLst xmlns:a="http://schemas.openxmlformats.org/drawingml/2006/main">
               <a:ext uri="{FF2B5EF4-FFF2-40B4-BE49-F238E27FC236}">
-                <a16:creationId xmlns:a16="http://schemas.microsoft.com/office/drawing/2014/main" id="{E1E64D29-68AA-4686-9270-A48950C5F2D4}"/>
+                <a16:creationId xmlns:a16="http://schemas.microsoft.com/office/drawing/2014/main" id="{4D190A19-6641-450E-97DA-6C4CF783BCA6}"/>
               </a:ext>
             </a:extLst>
           </p:cNvPr>
@@ -3677,7 +3677,7 @@
           <p:cNvPr id="15" name="">
             <a:extLst xmlns:a="http://schemas.openxmlformats.org/drawingml/2006/main">
               <a:ext uri="{FF2B5EF4-FFF2-40B4-BE49-F238E27FC236}">
-                <a16:creationId xmlns:a16="http://schemas.microsoft.com/office/drawing/2014/main" id="{2C32DBF2-FD8F-41D3-B9E7-BDC910DE608C}"/>
+                <a16:creationId xmlns:a16="http://schemas.microsoft.com/office/drawing/2014/main" id="{F064D7E3-AC43-489C-A2EE-A637224F5984}"/>
               </a:ext>
             </a:extLst>
           </p:cNvPr>
@@ -3727,7 +3727,7 @@
           <p:cNvPr id="16" name="">
             <a:extLst xmlns:a="http://schemas.openxmlformats.org/drawingml/2006/main">
               <a:ext uri="{FF2B5EF4-FFF2-40B4-BE49-F238E27FC236}">
-                <a16:creationId xmlns:a16="http://schemas.microsoft.com/office/drawing/2014/main" id="{F87EFA5B-6075-49B6-A79E-2C496BB66906}"/>
+                <a16:creationId xmlns:a16="http://schemas.microsoft.com/office/drawing/2014/main" id="{F5B7FD58-A639-478D-BD1C-08D1B331A1D3}"/>
               </a:ext>
             </a:extLst>
           </p:cNvPr>
@@ -3758,7 +3758,7 @@
           <p:cNvPr id="17" name="">
             <a:extLst xmlns:a="http://schemas.openxmlformats.org/drawingml/2006/main">
               <a:ext uri="{FF2B5EF4-FFF2-40B4-BE49-F238E27FC236}">
-                <a16:creationId xmlns:a16="http://schemas.microsoft.com/office/drawing/2014/main" id="{BD1E0FBD-FFB5-4F61-B52D-73900F41B197}"/>
+                <a16:creationId xmlns:a16="http://schemas.microsoft.com/office/drawing/2014/main" id="{E46B2366-7F83-43DF-87C5-0D734CE8A58E}"/>
               </a:ext>
             </a:extLst>
           </p:cNvPr>
@@ -3808,7 +3808,7 @@
           <p:cNvPr id="18" name="">
             <a:extLst xmlns:a="http://schemas.openxmlformats.org/drawingml/2006/main">
               <a:ext uri="{FF2B5EF4-FFF2-40B4-BE49-F238E27FC236}">
-                <a16:creationId xmlns:a16="http://schemas.microsoft.com/office/drawing/2014/main" id="{9F8BAC5C-5C39-41D4-8F44-9AA18A3B0C3A}"/>
+                <a16:creationId xmlns:a16="http://schemas.microsoft.com/office/drawing/2014/main" id="{063C8164-8C0C-4E53-B48F-C72F28B5142F}"/>
               </a:ext>
             </a:extLst>
           </p:cNvPr>
@@ -3839,7 +3839,7 @@
           <p:cNvPr id="19" name="">
             <a:extLst xmlns:a="http://schemas.openxmlformats.org/drawingml/2006/main">
               <a:ext uri="{FF2B5EF4-FFF2-40B4-BE49-F238E27FC236}">
-                <a16:creationId xmlns:a16="http://schemas.microsoft.com/office/drawing/2014/main" id="{FBBD1F50-4C2C-4335-9C67-055114E94591}"/>
+                <a16:creationId xmlns:a16="http://schemas.microsoft.com/office/drawing/2014/main" id="{8462A991-5144-4887-BD51-FB468D56540D}"/>
               </a:ext>
             </a:extLst>
           </p:cNvPr>
@@ -3889,7 +3889,7 @@
           <p:cNvPr id="20" name="">
             <a:extLst xmlns:a="http://schemas.openxmlformats.org/drawingml/2006/main">
               <a:ext uri="{FF2B5EF4-FFF2-40B4-BE49-F238E27FC236}">
-                <a16:creationId xmlns:a16="http://schemas.microsoft.com/office/drawing/2014/main" id="{D003EDC9-BF09-4D4E-BD4E-E085488A4981}"/>
+                <a16:creationId xmlns:a16="http://schemas.microsoft.com/office/drawing/2014/main" id="{B78EF5C9-1024-45F4-B8FB-852282DA1E4B}"/>
               </a:ext>
             </a:extLst>
           </p:cNvPr>
@@ -3920,7 +3920,7 @@
           <p:cNvPr id="21" name="">
             <a:extLst xmlns:a="http://schemas.openxmlformats.org/drawingml/2006/main">
               <a:ext uri="{FF2B5EF4-FFF2-40B4-BE49-F238E27FC236}">
-                <a16:creationId xmlns:a16="http://schemas.microsoft.com/office/drawing/2014/main" id="{11D831CD-8A59-414A-B720-9EFF3F9E0C3D}"/>
+                <a16:creationId xmlns:a16="http://schemas.microsoft.com/office/drawing/2014/main" id="{BC9514C3-1E44-46AD-A651-D137C9269369}"/>
               </a:ext>
             </a:extLst>
           </p:cNvPr>
@@ -3970,7 +3970,7 @@
           <p:cNvPr id="22" name="">
             <a:extLst xmlns:a="http://schemas.openxmlformats.org/drawingml/2006/main">
               <a:ext uri="{FF2B5EF4-FFF2-40B4-BE49-F238E27FC236}">
-                <a16:creationId xmlns:a16="http://schemas.microsoft.com/office/drawing/2014/main" id="{64DC2A31-72C5-4B2F-9DE8-E484282CF975}"/>
+                <a16:creationId xmlns:a16="http://schemas.microsoft.com/office/drawing/2014/main" id="{BF7A70BF-7DD1-4696-B309-DF85A47E2B77}"/>
               </a:ext>
             </a:extLst>
           </p:cNvPr>
@@ -4001,7 +4001,7 @@
           <p:cNvPr id="23" name="">
             <a:extLst xmlns:a="http://schemas.openxmlformats.org/drawingml/2006/main">
               <a:ext uri="{FF2B5EF4-FFF2-40B4-BE49-F238E27FC236}">
-                <a16:creationId xmlns:a16="http://schemas.microsoft.com/office/drawing/2014/main" id="{57A26081-F69A-43A0-B695-CEE2C8B2A024}"/>
+                <a16:creationId xmlns:a16="http://schemas.microsoft.com/office/drawing/2014/main" id="{18E23812-C9D8-4191-B32C-BC0064E98036}"/>
               </a:ext>
             </a:extLst>
           </p:cNvPr>
@@ -4051,7 +4051,7 @@
           <p:cNvPr id="24" name="">
             <a:extLst xmlns:a="http://schemas.openxmlformats.org/drawingml/2006/main">
               <a:ext uri="{FF2B5EF4-FFF2-40B4-BE49-F238E27FC236}">
-                <a16:creationId xmlns:a16="http://schemas.microsoft.com/office/drawing/2014/main" id="{1B1FC787-6117-4591-A247-C70AD4EC4EF8}"/>
+                <a16:creationId xmlns:a16="http://schemas.microsoft.com/office/drawing/2014/main" id="{99D051D7-325E-4400-87BB-A05491DC788C}"/>
               </a:ext>
             </a:extLst>
           </p:cNvPr>
@@ -4101,7 +4101,7 @@
           <p:cNvPr id="25" name="">
             <a:extLst xmlns:a="http://schemas.openxmlformats.org/drawingml/2006/main">
               <a:ext uri="{FF2B5EF4-FFF2-40B4-BE49-F238E27FC236}">
-                <a16:creationId xmlns:a16="http://schemas.microsoft.com/office/drawing/2014/main" id="{A405F162-4C48-42E9-909F-8C847513BB90}"/>
+                <a16:creationId xmlns:a16="http://schemas.microsoft.com/office/drawing/2014/main" id="{FA277944-A3E3-4A02-A665-7198791EFB1C}"/>
               </a:ext>
             </a:extLst>
           </p:cNvPr>
@@ -4149,7 +4149,7 @@
     </p:spTree>
     <p:extLst>
       <p:ext uri="{BB962C8B-B14F-4D97-AF65-F5344CB8AC3E}">
-        <p14:creationId xmlns:p14="http://schemas.microsoft.com/office/powerpoint/2010/main" val="200175440"/>
+        <p14:creationId xmlns:p14="http://schemas.microsoft.com/office/powerpoint/2010/main" val="1355220629"/>
       </p:ext>
     </p:extLst>
   </p:cSld>
@@ -4177,10 +4177,10 @@
       </p:grpSpPr>
       <p:sp>
         <p:nvSpPr>
-          <p:cNvPr id="9" name="">
-            <a:extLst xmlns:a="http://schemas.openxmlformats.org/drawingml/2006/main">
-              <a:ext uri="{FF2B5EF4-FFF2-40B4-BE49-F238E27FC236}">
-                <a16:creationId xmlns:a16="http://schemas.microsoft.com/office/drawing/2014/main" id="{0D95E657-4C7E-4B10-A25D-2BE6E78F0C24}"/>
+          <p:cNvPr id="8" name="">
+            <a:extLst xmlns:a="http://schemas.openxmlformats.org/drawingml/2006/main">
+              <a:ext uri="{FF2B5EF4-FFF2-40B4-BE49-F238E27FC236}">
+                <a16:creationId xmlns:a16="http://schemas.microsoft.com/office/drawing/2014/main" id="{544E4C8F-8A61-4A07-AC1F-3F6066AEE8BA}"/>
               </a:ext>
             </a:extLst>
           </p:cNvPr>
@@ -4230,7 +4230,7 @@
           <p:cNvPr id="2" name="">
             <a:extLst xmlns:a="http://schemas.openxmlformats.org/drawingml/2006/main">
               <a:ext uri="{FF2B5EF4-FFF2-40B4-BE49-F238E27FC236}">
-                <a16:creationId xmlns:a16="http://schemas.microsoft.com/office/drawing/2014/main" id="{179CB9E9-F6EC-4D0F-BAF3-166CDC45C672}"/>
+                <a16:creationId xmlns:a16="http://schemas.microsoft.com/office/drawing/2014/main" id="{8EE3802A-0C4C-4FD0-A291-B7D741582B0C}"/>
               </a:ext>
             </a:extLst>
           </p:cNvPr>
@@ -4270,7 +4270,7 @@
                   <a:srgbClr val="64748B"/>
                 </a:solidFill>
               </a:rPr>
-              <a:t>One tool-gap row shows where replay spends time before the first useful token.</a:t>
+              <a:t>Several tool-gap sessions show where replay spends time before the first useful token.</a:t>
             </a:r>
           </a:p>
         </p:txBody>
@@ -4280,23 +4280,23 @@
           <p:cNvPr id="3" name="">
             <a:extLst xmlns:a="http://schemas.openxmlformats.org/drawingml/2006/main">
               <a:ext uri="{FF2B5EF4-FFF2-40B4-BE49-F238E27FC236}">
-                <a16:creationId xmlns:a16="http://schemas.microsoft.com/office/drawing/2014/main" id="{7FB6521F-C60B-498F-99E2-1DB3FF66CB10}"/>
-              </a:ext>
-            </a:extLst>
-          </p:cNvPr>
-          <p:cNvSpPr>
-            <a:spLocks xmlns:a="http://schemas.openxmlformats.org/drawingml/2006/main" noGrp="1"/>
-          </p:cNvSpPr>
-          <p:nvPr/>
-        </p:nvSpPr>
-        <p:spPr>
-          <a:xfrm xmlns:a="http://schemas.openxmlformats.org/drawingml/2006/main">
-            <a:off x="323850" y="1371600"/>
-            <a:ext cx="11201400" cy="4438650"/>
+                <a16:creationId xmlns:a16="http://schemas.microsoft.com/office/drawing/2014/main" id="{E9E67C26-5CD8-4172-9AE2-3F1208A66164}"/>
+              </a:ext>
+            </a:extLst>
+          </p:cNvPr>
+          <p:cNvSpPr>
+            <a:spLocks xmlns:a="http://schemas.openxmlformats.org/drawingml/2006/main" noGrp="1"/>
+          </p:cNvSpPr>
+          <p:nvPr/>
+        </p:nvSpPr>
+        <p:spPr>
+          <a:xfrm xmlns:a="http://schemas.openxmlformats.org/drawingml/2006/main">
+            <a:off x="228600" y="1181100"/>
+            <a:ext cx="11734800" cy="4972050"/>
           </a:xfrm>
           <a:prstGeom xmlns:a="http://schemas.openxmlformats.org/drawingml/2006/main" prst="roundRect">
             <a:avLst>
-              <a:gd name="adj" fmla="val 1288"/>
+              <a:gd name="adj" fmla="val 1149"/>
             </a:avLst>
           </a:prstGeom>
           <a:solidFill xmlns:a="http://schemas.openxmlformats.org/drawingml/2006/main">
@@ -4312,20 +4312,20 @@
       </p:sp>
       <p:pic>
         <p:nvPicPr>
-          <p:cNvPr id="12" name=""/>
+          <p:cNvPr id="11" name=""/>
           <p:cNvPicPr>
             <a:picLocks xmlns:a="http://schemas.openxmlformats.org/drawingml/2006/main" noChangeAspect="1"/>
           </p:cNvPicPr>
           <p:nvPr/>
         </p:nvPicPr>
         <p:blipFill>
-          <a:blip xmlns:r="http://schemas.openxmlformats.org/officeDocument/2006/relationships" xmlns:a="http://schemas.openxmlformats.org/drawingml/2006/main" r:embed="R7e766f32f879457e"/>
+          <a:blip xmlns:r="http://schemas.openxmlformats.org/officeDocument/2006/relationships" xmlns:a="http://schemas.openxmlformats.org/drawingml/2006/main" r:embed="R17ca1f81781040ea"/>
           <a:stretch xmlns:a="http://schemas.openxmlformats.org/drawingml/2006/main"/>
         </p:blipFill>
         <p:spPr>
           <a:xfrm xmlns:a="http://schemas.openxmlformats.org/drawingml/2006/main">
-            <a:off x="400050" y="1448639"/>
-            <a:ext cx="11049000" cy="4284571"/>
+            <a:off x="304800" y="1285315"/>
+            <a:ext cx="11582400" cy="4763619"/>
           </a:xfrm>
           <a:prstGeom xmlns:a="http://schemas.openxmlformats.org/drawingml/2006/main" prst="rect">
             <a:avLst/>
@@ -4337,57 +4337,7 @@
           <p:cNvPr id="5" name="">
             <a:extLst xmlns:a="http://schemas.openxmlformats.org/drawingml/2006/main">
               <a:ext uri="{FF2B5EF4-FFF2-40B4-BE49-F238E27FC236}">
-                <a16:creationId xmlns:a16="http://schemas.microsoft.com/office/drawing/2014/main" id="{E2E5464B-FB44-4566-944F-80AAD20B35E8}"/>
-              </a:ext>
-            </a:extLst>
-          </p:cNvPr>
-          <p:cNvSpPr>
-            <a:spLocks xmlns:a="http://schemas.openxmlformats.org/drawingml/2006/main" noGrp="1"/>
-          </p:cNvSpPr>
-          <p:nvPr/>
-        </p:nvSpPr>
-        <p:spPr>
-          <a:xfrm xmlns:a="http://schemas.openxmlformats.org/drawingml/2006/main">
-            <a:off x="685800" y="5829300"/>
-            <a:ext cx="9810750" cy="228600"/>
-          </a:xfrm>
-          <a:prstGeom xmlns:a="http://schemas.openxmlformats.org/drawingml/2006/main" prst="rect">
-            <a:avLst/>
-          </a:prstGeom>
-          <a:noFill xmlns:a="http://schemas.openxmlformats.org/drawingml/2006/main"/>
-          <a:ln xmlns:a="http://schemas.openxmlformats.org/drawingml/2006/main" w="0">
-            <a:noFill/>
-            <a:prstDash val="solid"/>
-          </a:ln>
-        </p:spPr>
-        <p:txBody>
-          <a:bodyPr xmlns:a="http://schemas.openxmlformats.org/drawingml/2006/main" anchor="t"/>
-          <a:lstStyle xmlns:a="http://schemas.openxmlformats.org/drawingml/2006/main"/>
-          <a:p xmlns:a="http://schemas.openxmlformats.org/drawingml/2006/main">
-            <a:pPr algn="l">
-              <a:defRPr sz="1275" b="0">
-                <a:solidFill>
-                  <a:srgbClr val="334155"/>
-                </a:solidFill>
-              </a:defRPr>
-            </a:pPr>
-            <a:r>
-              <a:rPr sz="1275" b="0">
-                <a:solidFill>
-                  <a:srgbClr val="334155"/>
-                </a:solidFill>
-              </a:rPr>
-              <a:t>Read left to right: model turn → tool wait → replay path. Cyan is host-to-device KV load; magenta/gold are work before first token.</a:t>
-            </a:r>
-          </a:p>
-        </p:txBody>
-      </p:sp>
-      <p:sp>
-        <p:nvSpPr>
-          <p:cNvPr id="6" name="">
-            <a:extLst xmlns:a="http://schemas.openxmlformats.org/drawingml/2006/main">
-              <a:ext uri="{FF2B5EF4-FFF2-40B4-BE49-F238E27FC236}">
-                <a16:creationId xmlns:a16="http://schemas.microsoft.com/office/drawing/2014/main" id="{79B6D2BD-6F9A-4649-91D0-47DE8B472083}"/>
+                <a16:creationId xmlns:a16="http://schemas.microsoft.com/office/drawing/2014/main" id="{6B6ABFDA-3D76-4248-8F4B-E976567063D2}"/>
               </a:ext>
             </a:extLst>
           </p:cNvPr>
@@ -4434,10 +4384,10 @@
       </p:sp>
       <p:sp>
         <p:nvSpPr>
-          <p:cNvPr id="7" name="">
-            <a:extLst xmlns:a="http://schemas.openxmlformats.org/drawingml/2006/main">
-              <a:ext uri="{FF2B5EF4-FFF2-40B4-BE49-F238E27FC236}">
-                <a16:creationId xmlns:a16="http://schemas.microsoft.com/office/drawing/2014/main" id="{13660B54-4055-4DC6-9BA2-FC76F671A702}"/>
+          <p:cNvPr id="6" name="">
+            <a:extLst xmlns:a="http://schemas.openxmlformats.org/drawingml/2006/main">
+              <a:ext uri="{FF2B5EF4-FFF2-40B4-BE49-F238E27FC236}">
+                <a16:creationId xmlns:a16="http://schemas.microsoft.com/office/drawing/2014/main" id="{5BD9A2D0-8755-45BB-BEBB-FABF7E0BD5E0}"/>
               </a:ext>
             </a:extLst>
           </p:cNvPr>
@@ -4484,10 +4434,10 @@
       </p:sp>
       <p:sp>
         <p:nvSpPr>
-          <p:cNvPr id="8" name="">
-            <a:extLst xmlns:a="http://schemas.openxmlformats.org/drawingml/2006/main">
-              <a:ext uri="{FF2B5EF4-FFF2-40B4-BE49-F238E27FC236}">
-                <a16:creationId xmlns:a16="http://schemas.microsoft.com/office/drawing/2014/main" id="{9350C413-6416-4BDE-B2F3-0DD7B05784EA}"/>
+          <p:cNvPr id="7" name="">
+            <a:extLst xmlns:a="http://schemas.openxmlformats.org/drawingml/2006/main">
+              <a:ext uri="{FF2B5EF4-FFF2-40B4-BE49-F238E27FC236}">
+                <a16:creationId xmlns:a16="http://schemas.microsoft.com/office/drawing/2014/main" id="{D8ECD703-E2C7-4EE9-8797-2021C2220D16}"/>
               </a:ext>
             </a:extLst>
           </p:cNvPr>
@@ -4535,7 +4485,7 @@
     </p:spTree>
     <p:extLst>
       <p:ext uri="{BB962C8B-B14F-4D97-AF65-F5344CB8AC3E}">
-        <p14:creationId xmlns:p14="http://schemas.microsoft.com/office/powerpoint/2010/main" val="1443224644"/>
+        <p14:creationId xmlns:p14="http://schemas.microsoft.com/office/powerpoint/2010/main" val="638383710"/>
       </p:ext>
     </p:extLst>
   </p:cSld>
@@ -4566,7 +4516,7 @@
           <p:cNvPr id="16" name="">
             <a:extLst xmlns:a="http://schemas.openxmlformats.org/drawingml/2006/main">
               <a:ext uri="{FF2B5EF4-FFF2-40B4-BE49-F238E27FC236}">
-                <a16:creationId xmlns:a16="http://schemas.microsoft.com/office/drawing/2014/main" id="{81780E68-F39D-4CAA-B684-B6B63967E843}"/>
+                <a16:creationId xmlns:a16="http://schemas.microsoft.com/office/drawing/2014/main" id="{0AF20165-E0EE-4304-8FC5-39BD9A5E2F4A}"/>
               </a:ext>
             </a:extLst>
           </p:cNvPr>
@@ -4616,7 +4566,7 @@
           <p:cNvPr id="2" name="">
             <a:extLst xmlns:a="http://schemas.openxmlformats.org/drawingml/2006/main">
               <a:ext uri="{FF2B5EF4-FFF2-40B4-BE49-F238E27FC236}">
-                <a16:creationId xmlns:a16="http://schemas.microsoft.com/office/drawing/2014/main" id="{7E2DD1F0-53AB-4698-A3F4-05058BB281B2}"/>
+                <a16:creationId xmlns:a16="http://schemas.microsoft.com/office/drawing/2014/main" id="{A079478B-24A7-4DDC-A3E5-89C182630F86}"/>
               </a:ext>
             </a:extLst>
           </p:cNvPr>
@@ -4666,7 +4616,7 @@
           <p:cNvPr id="3" name="">
             <a:extLst xmlns:a="http://schemas.openxmlformats.org/drawingml/2006/main">
               <a:ext uri="{FF2B5EF4-FFF2-40B4-BE49-F238E27FC236}">
-                <a16:creationId xmlns:a16="http://schemas.microsoft.com/office/drawing/2014/main" id="{9682BCD0-3A5E-4FD1-9388-6917E642E1A3}"/>
+                <a16:creationId xmlns:a16="http://schemas.microsoft.com/office/drawing/2014/main" id="{0DCB7E3C-21C8-4407-9248-F61AFD86DC9A}"/>
               </a:ext>
             </a:extLst>
           </p:cNvPr>
@@ -4705,7 +4655,7 @@
           <p:nvPr/>
         </p:nvPicPr>
         <p:blipFill>
-          <a:blip xmlns:r="http://schemas.openxmlformats.org/officeDocument/2006/relationships" xmlns:a="http://schemas.openxmlformats.org/drawingml/2006/main" r:embed="R2b32a3f26fd14672"/>
+          <a:blip xmlns:r="http://schemas.openxmlformats.org/officeDocument/2006/relationships" xmlns:a="http://schemas.openxmlformats.org/drawingml/2006/main" r:embed="R4354e2c2031a4581"/>
           <a:stretch xmlns:a="http://schemas.openxmlformats.org/drawingml/2006/main"/>
         </p:blipFill>
         <p:spPr>
@@ -4723,7 +4673,7 @@
           <p:cNvPr id="5" name="">
             <a:extLst xmlns:a="http://schemas.openxmlformats.org/drawingml/2006/main">
               <a:ext uri="{FF2B5EF4-FFF2-40B4-BE49-F238E27FC236}">
-                <a16:creationId xmlns:a16="http://schemas.microsoft.com/office/drawing/2014/main" id="{5814B9E2-EC79-4017-A3AC-79C6DAE7C64A}"/>
+                <a16:creationId xmlns:a16="http://schemas.microsoft.com/office/drawing/2014/main" id="{3DC1BF31-9B2E-484B-B32A-151A763D1862}"/>
               </a:ext>
             </a:extLst>
           </p:cNvPr>
@@ -4758,7 +4708,7 @@
           <p:cNvPr id="6" name="">
             <a:extLst xmlns:a="http://schemas.openxmlformats.org/drawingml/2006/main">
               <a:ext uri="{FF2B5EF4-FFF2-40B4-BE49-F238E27FC236}">
-                <a16:creationId xmlns:a16="http://schemas.microsoft.com/office/drawing/2014/main" id="{D14983F6-72A1-48B7-8E39-1862299D5ECA}"/>
+                <a16:creationId xmlns:a16="http://schemas.microsoft.com/office/drawing/2014/main" id="{F9BC519B-CC45-4A8F-9111-EBE43D6E6BAB}"/>
               </a:ext>
             </a:extLst>
           </p:cNvPr>
@@ -4808,7 +4758,7 @@
           <p:cNvPr id="7" name="">
             <a:extLst xmlns:a="http://schemas.openxmlformats.org/drawingml/2006/main">
               <a:ext uri="{FF2B5EF4-FFF2-40B4-BE49-F238E27FC236}">
-                <a16:creationId xmlns:a16="http://schemas.microsoft.com/office/drawing/2014/main" id="{4CF89ED6-8534-4D62-AF86-67892F93CBFD}"/>
+                <a16:creationId xmlns:a16="http://schemas.microsoft.com/office/drawing/2014/main" id="{3BCD2609-8C0B-4DBF-B08A-5A3699130D0B}"/>
               </a:ext>
             </a:extLst>
           </p:cNvPr>
@@ -4858,7 +4808,7 @@
           <p:cNvPr id="8" name="">
             <a:extLst xmlns:a="http://schemas.openxmlformats.org/drawingml/2006/main">
               <a:ext uri="{FF2B5EF4-FFF2-40B4-BE49-F238E27FC236}">
-                <a16:creationId xmlns:a16="http://schemas.microsoft.com/office/drawing/2014/main" id="{E83491FB-3825-4EA4-9258-C5366DDA66E9}"/>
+                <a16:creationId xmlns:a16="http://schemas.microsoft.com/office/drawing/2014/main" id="{BC65F419-9551-41C2-8C85-21B638A49B33}"/>
               </a:ext>
             </a:extLst>
           </p:cNvPr>
@@ -4908,7 +4858,7 @@
           <p:cNvPr id="9" name="">
             <a:extLst xmlns:a="http://schemas.openxmlformats.org/drawingml/2006/main">
               <a:ext uri="{FF2B5EF4-FFF2-40B4-BE49-F238E27FC236}">
-                <a16:creationId xmlns:a16="http://schemas.microsoft.com/office/drawing/2014/main" id="{7FCB1E35-7C1A-4DE9-AFAA-0E85147FB2E6}"/>
+                <a16:creationId xmlns:a16="http://schemas.microsoft.com/office/drawing/2014/main" id="{3C50A6A6-2CB8-45A4-B4FF-3452DA3B7DBB}"/>
               </a:ext>
             </a:extLst>
           </p:cNvPr>
@@ -4943,7 +4893,7 @@
           <p:cNvPr id="10" name="">
             <a:extLst xmlns:a="http://schemas.openxmlformats.org/drawingml/2006/main">
               <a:ext uri="{FF2B5EF4-FFF2-40B4-BE49-F238E27FC236}">
-                <a16:creationId xmlns:a16="http://schemas.microsoft.com/office/drawing/2014/main" id="{678C4100-DD6B-4132-8CE2-A97F8DE72B4B}"/>
+                <a16:creationId xmlns:a16="http://schemas.microsoft.com/office/drawing/2014/main" id="{01E8DD12-6009-4562-971F-5BD7CF3F4501}"/>
               </a:ext>
             </a:extLst>
           </p:cNvPr>
@@ -4993,7 +4943,7 @@
           <p:cNvPr id="11" name="">
             <a:extLst xmlns:a="http://schemas.openxmlformats.org/drawingml/2006/main">
               <a:ext uri="{FF2B5EF4-FFF2-40B4-BE49-F238E27FC236}">
-                <a16:creationId xmlns:a16="http://schemas.microsoft.com/office/drawing/2014/main" id="{C341851C-F33D-4E45-A148-1D4450CAD2BC}"/>
+                <a16:creationId xmlns:a16="http://schemas.microsoft.com/office/drawing/2014/main" id="{19C77AE1-BBF2-4A8F-928E-2BA8A7A1BCF6}"/>
               </a:ext>
             </a:extLst>
           </p:cNvPr>
@@ -5043,7 +4993,7 @@
           <p:cNvPr id="12" name="">
             <a:extLst xmlns:a="http://schemas.openxmlformats.org/drawingml/2006/main">
               <a:ext uri="{FF2B5EF4-FFF2-40B4-BE49-F238E27FC236}">
-                <a16:creationId xmlns:a16="http://schemas.microsoft.com/office/drawing/2014/main" id="{937611C3-918F-479B-AEF3-D12A7B01AA32}"/>
+                <a16:creationId xmlns:a16="http://schemas.microsoft.com/office/drawing/2014/main" id="{CF4C2D29-6799-4FA9-8F1B-7A5E3A91E9AD}"/>
               </a:ext>
             </a:extLst>
           </p:cNvPr>
@@ -5093,7 +5043,7 @@
           <p:cNvPr id="13" name="">
             <a:extLst xmlns:a="http://schemas.openxmlformats.org/drawingml/2006/main">
               <a:ext uri="{FF2B5EF4-FFF2-40B4-BE49-F238E27FC236}">
-                <a16:creationId xmlns:a16="http://schemas.microsoft.com/office/drawing/2014/main" id="{10AD9847-D479-484A-BCA1-D22732B5D21A}"/>
+                <a16:creationId xmlns:a16="http://schemas.microsoft.com/office/drawing/2014/main" id="{857506D5-7B57-4F4B-B55F-89BE0F8F7CA5}"/>
               </a:ext>
             </a:extLst>
           </p:cNvPr>
@@ -5143,7 +5093,7 @@
           <p:cNvPr id="14" name="">
             <a:extLst xmlns:a="http://schemas.openxmlformats.org/drawingml/2006/main">
               <a:ext uri="{FF2B5EF4-FFF2-40B4-BE49-F238E27FC236}">
-                <a16:creationId xmlns:a16="http://schemas.microsoft.com/office/drawing/2014/main" id="{EE5E3AF0-892B-4742-9853-4623B4DE2826}"/>
+                <a16:creationId xmlns:a16="http://schemas.microsoft.com/office/drawing/2014/main" id="{3E784F4F-1AB5-4D61-B3FD-1982361AD487}"/>
               </a:ext>
             </a:extLst>
           </p:cNvPr>
@@ -5193,7 +5143,7 @@
           <p:cNvPr id="15" name="">
             <a:extLst xmlns:a="http://schemas.openxmlformats.org/drawingml/2006/main">
               <a:ext uri="{FF2B5EF4-FFF2-40B4-BE49-F238E27FC236}">
-                <a16:creationId xmlns:a16="http://schemas.microsoft.com/office/drawing/2014/main" id="{D1C7EACD-9FD3-4C5C-B71F-E3087E5AF3B8}"/>
+                <a16:creationId xmlns:a16="http://schemas.microsoft.com/office/drawing/2014/main" id="{112A6333-9B24-4DFD-B8B4-F8D4E1718959}"/>
               </a:ext>
             </a:extLst>
           </p:cNvPr>
@@ -5241,7 +5191,7 @@
     </p:spTree>
     <p:extLst>
       <p:ext uri="{BB962C8B-B14F-4D97-AF65-F5344CB8AC3E}">
-        <p14:creationId xmlns:p14="http://schemas.microsoft.com/office/powerpoint/2010/main" val="800335588"/>
+        <p14:creationId xmlns:p14="http://schemas.microsoft.com/office/powerpoint/2010/main" val="536714194"/>
       </p:ext>
     </p:extLst>
   </p:cSld>
@@ -5272,7 +5222,7 @@
           <p:cNvPr id="12" name="">
             <a:extLst xmlns:a="http://schemas.openxmlformats.org/drawingml/2006/main">
               <a:ext uri="{FF2B5EF4-FFF2-40B4-BE49-F238E27FC236}">
-                <a16:creationId xmlns:a16="http://schemas.microsoft.com/office/drawing/2014/main" id="{730089FF-3EF7-4EB2-A563-392526D1DD11}"/>
+                <a16:creationId xmlns:a16="http://schemas.microsoft.com/office/drawing/2014/main" id="{190A680A-6C87-4520-83DA-2DCDF1D1B767}"/>
               </a:ext>
             </a:extLst>
           </p:cNvPr>
@@ -5322,7 +5272,7 @@
           <p:cNvPr id="2" name="">
             <a:extLst xmlns:a="http://schemas.openxmlformats.org/drawingml/2006/main">
               <a:ext uri="{FF2B5EF4-FFF2-40B4-BE49-F238E27FC236}">
-                <a16:creationId xmlns:a16="http://schemas.microsoft.com/office/drawing/2014/main" id="{F69214AA-04BD-4EA8-9984-B1E14896D56D}"/>
+                <a16:creationId xmlns:a16="http://schemas.microsoft.com/office/drawing/2014/main" id="{C93026AD-F4B1-40CF-8401-EC7071FEB63C}"/>
               </a:ext>
             </a:extLst>
           </p:cNvPr>
@@ -5372,7 +5322,7 @@
           <p:cNvPr id="3" name="">
             <a:extLst xmlns:a="http://schemas.openxmlformats.org/drawingml/2006/main">
               <a:ext uri="{FF2B5EF4-FFF2-40B4-BE49-F238E27FC236}">
-                <a16:creationId xmlns:a16="http://schemas.microsoft.com/office/drawing/2014/main" id="{AE4A1B50-C618-4D62-8AE9-3D3498F67C55}"/>
+                <a16:creationId xmlns:a16="http://schemas.microsoft.com/office/drawing/2014/main" id="{2AD938CD-B4BE-4673-A59E-76121FF0D858}"/>
               </a:ext>
             </a:extLst>
           </p:cNvPr>
@@ -5411,7 +5361,7 @@
           <p:nvPr/>
         </p:nvPicPr>
         <p:blipFill>
-          <a:blip xmlns:r="http://schemas.openxmlformats.org/officeDocument/2006/relationships" xmlns:a="http://schemas.openxmlformats.org/drawingml/2006/main" r:embed="R0f2ba06b4cb54345"/>
+          <a:blip xmlns:r="http://schemas.openxmlformats.org/officeDocument/2006/relationships" xmlns:a="http://schemas.openxmlformats.org/drawingml/2006/main" r:embed="Ra2c93e584e3f462c"/>
           <a:stretch xmlns:a="http://schemas.openxmlformats.org/drawingml/2006/main"/>
         </p:blipFill>
         <p:spPr>
@@ -5429,7 +5379,7 @@
           <p:cNvPr id="5" name="">
             <a:extLst xmlns:a="http://schemas.openxmlformats.org/drawingml/2006/main">
               <a:ext uri="{FF2B5EF4-FFF2-40B4-BE49-F238E27FC236}">
-                <a16:creationId xmlns:a16="http://schemas.microsoft.com/office/drawing/2014/main" id="{1A371C9C-4E11-4364-9B17-A686138A5B12}"/>
+                <a16:creationId xmlns:a16="http://schemas.microsoft.com/office/drawing/2014/main" id="{B695C50C-6379-4C4F-A015-0D80A7546505}"/>
               </a:ext>
             </a:extLst>
           </p:cNvPr>
@@ -5464,7 +5414,7 @@
           <p:cNvPr id="6" name="">
             <a:extLst xmlns:a="http://schemas.openxmlformats.org/drawingml/2006/main">
               <a:ext uri="{FF2B5EF4-FFF2-40B4-BE49-F238E27FC236}">
-                <a16:creationId xmlns:a16="http://schemas.microsoft.com/office/drawing/2014/main" id="{36F17F41-E0DB-4F2D-91B2-2ABBFBF44484}"/>
+                <a16:creationId xmlns:a16="http://schemas.microsoft.com/office/drawing/2014/main" id="{6C572B9C-D3B8-4B6C-B370-AF2614355B5C}"/>
               </a:ext>
             </a:extLst>
           </p:cNvPr>
@@ -5514,7 +5464,7 @@
           <p:cNvPr id="7" name="">
             <a:extLst xmlns:a="http://schemas.openxmlformats.org/drawingml/2006/main">
               <a:ext uri="{FF2B5EF4-FFF2-40B4-BE49-F238E27FC236}">
-                <a16:creationId xmlns:a16="http://schemas.microsoft.com/office/drawing/2014/main" id="{AD784674-C112-4C68-884F-54630FFCB04F}"/>
+                <a16:creationId xmlns:a16="http://schemas.microsoft.com/office/drawing/2014/main" id="{D037560F-DF01-4DA9-A258-0C7B9D62C918}"/>
               </a:ext>
             </a:extLst>
           </p:cNvPr>
@@ -5564,7 +5514,7 @@
           <p:cNvPr id="8" name="">
             <a:extLst xmlns:a="http://schemas.openxmlformats.org/drawingml/2006/main">
               <a:ext uri="{FF2B5EF4-FFF2-40B4-BE49-F238E27FC236}">
-                <a16:creationId xmlns:a16="http://schemas.microsoft.com/office/drawing/2014/main" id="{5696626B-1B9A-4E38-9996-6831E6BE7B30}"/>
+                <a16:creationId xmlns:a16="http://schemas.microsoft.com/office/drawing/2014/main" id="{A4FAE60E-DA33-4D21-A086-508F19EA4058}"/>
               </a:ext>
             </a:extLst>
           </p:cNvPr>
@@ -5614,7 +5564,7 @@
           <p:cNvPr id="9" name="">
             <a:extLst xmlns:a="http://schemas.openxmlformats.org/drawingml/2006/main">
               <a:ext uri="{FF2B5EF4-FFF2-40B4-BE49-F238E27FC236}">
-                <a16:creationId xmlns:a16="http://schemas.microsoft.com/office/drawing/2014/main" id="{1E232D0A-F346-4EDA-A96E-84CF28C84C86}"/>
+                <a16:creationId xmlns:a16="http://schemas.microsoft.com/office/drawing/2014/main" id="{F561D74B-A36E-4C13-B040-79B5535EA70E}"/>
               </a:ext>
             </a:extLst>
           </p:cNvPr>
@@ -5664,7 +5614,7 @@
           <p:cNvPr id="10" name="">
             <a:extLst xmlns:a="http://schemas.openxmlformats.org/drawingml/2006/main">
               <a:ext uri="{FF2B5EF4-FFF2-40B4-BE49-F238E27FC236}">
-                <a16:creationId xmlns:a16="http://schemas.microsoft.com/office/drawing/2014/main" id="{D1E0DFE4-1036-4BB6-A5DE-4FDBCDE1CAF3}"/>
+                <a16:creationId xmlns:a16="http://schemas.microsoft.com/office/drawing/2014/main" id="{F38AFE03-07BE-42F7-8C6B-6C61FA6C0DF2}"/>
               </a:ext>
             </a:extLst>
           </p:cNvPr>
@@ -5714,7 +5664,7 @@
           <p:cNvPr id="11" name="">
             <a:extLst xmlns:a="http://schemas.openxmlformats.org/drawingml/2006/main">
               <a:ext uri="{FF2B5EF4-FFF2-40B4-BE49-F238E27FC236}">
-                <a16:creationId xmlns:a16="http://schemas.microsoft.com/office/drawing/2014/main" id="{AC8F3249-58A3-4AB5-A2E4-D605E8D80C07}"/>
+                <a16:creationId xmlns:a16="http://schemas.microsoft.com/office/drawing/2014/main" id="{7C15C74F-4137-45C4-B354-6FE2585C1AD5}"/>
               </a:ext>
             </a:extLst>
           </p:cNvPr>
@@ -5762,7 +5712,7 @@
     </p:spTree>
     <p:extLst>
       <p:ext uri="{BB962C8B-B14F-4D97-AF65-F5344CB8AC3E}">
-        <p14:creationId xmlns:p14="http://schemas.microsoft.com/office/powerpoint/2010/main" val="998169477"/>
+        <p14:creationId xmlns:p14="http://schemas.microsoft.com/office/powerpoint/2010/main" val="1783712166"/>
       </p:ext>
     </p:extLst>
   </p:cSld>
@@ -5793,7 +5743,7 @@
           <p:cNvPr id="9" name="">
             <a:extLst xmlns:a="http://schemas.openxmlformats.org/drawingml/2006/main">
               <a:ext uri="{FF2B5EF4-FFF2-40B4-BE49-F238E27FC236}">
-                <a16:creationId xmlns:a16="http://schemas.microsoft.com/office/drawing/2014/main" id="{80F5894F-5131-46F7-91F1-0C00A3681BE2}"/>
+                <a16:creationId xmlns:a16="http://schemas.microsoft.com/office/drawing/2014/main" id="{AD34BA47-CE24-45EA-ACA5-F72718419167}"/>
               </a:ext>
             </a:extLst>
           </p:cNvPr>
@@ -5843,7 +5793,7 @@
           <p:cNvPr id="2" name="">
             <a:extLst xmlns:a="http://schemas.openxmlformats.org/drawingml/2006/main">
               <a:ext uri="{FF2B5EF4-FFF2-40B4-BE49-F238E27FC236}">
-                <a16:creationId xmlns:a16="http://schemas.microsoft.com/office/drawing/2014/main" id="{846B80E5-9E21-4D4C-82F0-3A4036037912}"/>
+                <a16:creationId xmlns:a16="http://schemas.microsoft.com/office/drawing/2014/main" id="{5B0F4813-4052-427E-B4B4-54A0F19C16B3}"/>
               </a:ext>
             </a:extLst>
           </p:cNvPr>
@@ -5893,7 +5843,7 @@
           <p:cNvPr id="3" name="">
             <a:extLst xmlns:a="http://schemas.openxmlformats.org/drawingml/2006/main">
               <a:ext uri="{FF2B5EF4-FFF2-40B4-BE49-F238E27FC236}">
-                <a16:creationId xmlns:a16="http://schemas.microsoft.com/office/drawing/2014/main" id="{D6E3F474-BA41-4836-9119-2368AE4B636B}"/>
+                <a16:creationId xmlns:a16="http://schemas.microsoft.com/office/drawing/2014/main" id="{50BE40A2-F16C-4E9B-938C-C66B055368B8}"/>
               </a:ext>
             </a:extLst>
           </p:cNvPr>
@@ -5932,7 +5882,7 @@
           <p:nvPr/>
         </p:nvPicPr>
         <p:blipFill>
-          <a:blip xmlns:r="http://schemas.openxmlformats.org/officeDocument/2006/relationships" xmlns:a="http://schemas.openxmlformats.org/drawingml/2006/main" r:embed="Ref412272abe94d6b"/>
+          <a:blip xmlns:r="http://schemas.openxmlformats.org/officeDocument/2006/relationships" xmlns:a="http://schemas.openxmlformats.org/drawingml/2006/main" r:embed="R93b30e23c1444876"/>
           <a:stretch xmlns:a="http://schemas.openxmlformats.org/drawingml/2006/main"/>
         </p:blipFill>
         <p:spPr>
@@ -5950,7 +5900,7 @@
           <p:cNvPr id="5" name="">
             <a:extLst xmlns:a="http://schemas.openxmlformats.org/drawingml/2006/main">
               <a:ext uri="{FF2B5EF4-FFF2-40B4-BE49-F238E27FC236}">
-                <a16:creationId xmlns:a16="http://schemas.microsoft.com/office/drawing/2014/main" id="{2A59EC7B-C8E7-4154-9901-3398C0CA970B}"/>
+                <a16:creationId xmlns:a16="http://schemas.microsoft.com/office/drawing/2014/main" id="{425B79C7-BB4C-4E43-87FB-A7F8A1348FF4}"/>
               </a:ext>
             </a:extLst>
           </p:cNvPr>
@@ -6000,7 +5950,7 @@
           <p:cNvPr id="6" name="">
             <a:extLst xmlns:a="http://schemas.openxmlformats.org/drawingml/2006/main">
               <a:ext uri="{FF2B5EF4-FFF2-40B4-BE49-F238E27FC236}">
-                <a16:creationId xmlns:a16="http://schemas.microsoft.com/office/drawing/2014/main" id="{3E44DF2C-3346-4BE2-956C-B298DF0850E2}"/>
+                <a16:creationId xmlns:a16="http://schemas.microsoft.com/office/drawing/2014/main" id="{FD08FBB6-172F-497D-805E-73B299197DCB}"/>
               </a:ext>
             </a:extLst>
           </p:cNvPr>
@@ -6050,7 +6000,7 @@
           <p:cNvPr id="7" name="">
             <a:extLst xmlns:a="http://schemas.openxmlformats.org/drawingml/2006/main">
               <a:ext uri="{FF2B5EF4-FFF2-40B4-BE49-F238E27FC236}">
-                <a16:creationId xmlns:a16="http://schemas.microsoft.com/office/drawing/2014/main" id="{B9F8E16B-04C3-4B8E-861F-3C30CF056A3C}"/>
+                <a16:creationId xmlns:a16="http://schemas.microsoft.com/office/drawing/2014/main" id="{DDCB3123-3084-4FBF-A172-9714BB8AA28B}"/>
               </a:ext>
             </a:extLst>
           </p:cNvPr>
@@ -6100,7 +6050,7 @@
           <p:cNvPr id="8" name="">
             <a:extLst xmlns:a="http://schemas.openxmlformats.org/drawingml/2006/main">
               <a:ext uri="{FF2B5EF4-FFF2-40B4-BE49-F238E27FC236}">
-                <a16:creationId xmlns:a16="http://schemas.microsoft.com/office/drawing/2014/main" id="{C9FC36C5-9EB7-41AD-B5BB-DDA61C8EF0DC}"/>
+                <a16:creationId xmlns:a16="http://schemas.microsoft.com/office/drawing/2014/main" id="{68E3CB3B-BD33-441A-ADF5-E5BCCFB45869}"/>
               </a:ext>
             </a:extLst>
           </p:cNvPr>
@@ -6148,7 +6098,7 @@
     </p:spTree>
     <p:extLst>
       <p:ext uri="{BB962C8B-B14F-4D97-AF65-F5344CB8AC3E}">
-        <p14:creationId xmlns:p14="http://schemas.microsoft.com/office/powerpoint/2010/main" val="170264637"/>
+        <p14:creationId xmlns:p14="http://schemas.microsoft.com/office/powerpoint/2010/main" val="1536878427"/>
       </p:ext>
     </p:extLst>
   </p:cSld>
@@ -6179,7 +6129,7 @@
           <p:cNvPr id="27" name="">
             <a:extLst xmlns:a="http://schemas.openxmlformats.org/drawingml/2006/main">
               <a:ext uri="{FF2B5EF4-FFF2-40B4-BE49-F238E27FC236}">
-                <a16:creationId xmlns:a16="http://schemas.microsoft.com/office/drawing/2014/main" id="{3EE85317-04F6-4116-93DA-3FFE5143D331}"/>
+                <a16:creationId xmlns:a16="http://schemas.microsoft.com/office/drawing/2014/main" id="{61F03D19-B314-49C9-93B7-17D739F54B37}"/>
               </a:ext>
             </a:extLst>
           </p:cNvPr>
@@ -6229,7 +6179,7 @@
           <p:cNvPr id="2" name="">
             <a:extLst xmlns:a="http://schemas.openxmlformats.org/drawingml/2006/main">
               <a:ext uri="{FF2B5EF4-FFF2-40B4-BE49-F238E27FC236}">
-                <a16:creationId xmlns:a16="http://schemas.microsoft.com/office/drawing/2014/main" id="{9F9DEA1B-541B-4CE6-A378-0CBF0DD5A856}"/>
+                <a16:creationId xmlns:a16="http://schemas.microsoft.com/office/drawing/2014/main" id="{422DBAC9-FDE6-4FDE-B8D0-9A3FFBF85AC4}"/>
               </a:ext>
             </a:extLst>
           </p:cNvPr>
@@ -6279,7 +6229,7 @@
           <p:cNvPr id="3" name="">
             <a:extLst xmlns:a="http://schemas.openxmlformats.org/drawingml/2006/main">
               <a:ext uri="{FF2B5EF4-FFF2-40B4-BE49-F238E27FC236}">
-                <a16:creationId xmlns:a16="http://schemas.microsoft.com/office/drawing/2014/main" id="{7151633E-80A2-405B-8B97-A86CA62171FF}"/>
+                <a16:creationId xmlns:a16="http://schemas.microsoft.com/office/drawing/2014/main" id="{43BC88E1-0D73-4D03-9CAC-F3B531859556}"/>
               </a:ext>
             </a:extLst>
           </p:cNvPr>
@@ -6314,7 +6264,7 @@
           <p:cNvPr id="4" name="">
             <a:extLst xmlns:a="http://schemas.openxmlformats.org/drawingml/2006/main">
               <a:ext uri="{FF2B5EF4-FFF2-40B4-BE49-F238E27FC236}">
-                <a16:creationId xmlns:a16="http://schemas.microsoft.com/office/drawing/2014/main" id="{E918F2D8-774E-4C5D-945B-D823781B9837}"/>
+                <a16:creationId xmlns:a16="http://schemas.microsoft.com/office/drawing/2014/main" id="{222B10D5-AF3D-4827-A1AC-B1FBFF89CC7E}"/>
               </a:ext>
             </a:extLst>
           </p:cNvPr>
@@ -6364,7 +6314,7 @@
           <p:cNvPr id="5" name="">
             <a:extLst xmlns:a="http://schemas.openxmlformats.org/drawingml/2006/main">
               <a:ext uri="{FF2B5EF4-FFF2-40B4-BE49-F238E27FC236}">
-                <a16:creationId xmlns:a16="http://schemas.microsoft.com/office/drawing/2014/main" id="{0E9BFFDD-49C0-4203-8BC7-00969028AC00}"/>
+                <a16:creationId xmlns:a16="http://schemas.microsoft.com/office/drawing/2014/main" id="{58BB3263-32B0-4E80-AF90-F9B6A205F391}"/>
               </a:ext>
             </a:extLst>
           </p:cNvPr>
@@ -6414,7 +6364,7 @@
           <p:cNvPr id="6" name="">
             <a:extLst xmlns:a="http://schemas.openxmlformats.org/drawingml/2006/main">
               <a:ext uri="{FF2B5EF4-FFF2-40B4-BE49-F238E27FC236}">
-                <a16:creationId xmlns:a16="http://schemas.microsoft.com/office/drawing/2014/main" id="{B820E52D-ED10-4E03-A975-DBFF96C7226A}"/>
+                <a16:creationId xmlns:a16="http://schemas.microsoft.com/office/drawing/2014/main" id="{8A37FC77-050B-42B2-9D70-25BD66C6DF04}"/>
               </a:ext>
             </a:extLst>
           </p:cNvPr>
@@ -6464,7 +6414,7 @@
           <p:cNvPr id="7" name="">
             <a:extLst xmlns:a="http://schemas.openxmlformats.org/drawingml/2006/main">
               <a:ext uri="{FF2B5EF4-FFF2-40B4-BE49-F238E27FC236}">
-                <a16:creationId xmlns:a16="http://schemas.microsoft.com/office/drawing/2014/main" id="{19CF921B-28C8-44AC-BC85-6FD6076928C1}"/>
+                <a16:creationId xmlns:a16="http://schemas.microsoft.com/office/drawing/2014/main" id="{10F939C6-350E-4DD0-8DBC-0A14254C2D51}"/>
               </a:ext>
             </a:extLst>
           </p:cNvPr>
@@ -6499,7 +6449,7 @@
           <p:cNvPr id="8" name="">
             <a:extLst xmlns:a="http://schemas.openxmlformats.org/drawingml/2006/main">
               <a:ext uri="{FF2B5EF4-FFF2-40B4-BE49-F238E27FC236}">
-                <a16:creationId xmlns:a16="http://schemas.microsoft.com/office/drawing/2014/main" id="{6EE998F5-2400-4951-A644-AC2F66AE89D2}"/>
+                <a16:creationId xmlns:a16="http://schemas.microsoft.com/office/drawing/2014/main" id="{522D388B-FE0B-44F8-A3D2-A7622CAD89AC}"/>
               </a:ext>
             </a:extLst>
           </p:cNvPr>
@@ -6549,7 +6499,7 @@
           <p:cNvPr id="9" name="">
             <a:extLst xmlns:a="http://schemas.openxmlformats.org/drawingml/2006/main">
               <a:ext uri="{FF2B5EF4-FFF2-40B4-BE49-F238E27FC236}">
-                <a16:creationId xmlns:a16="http://schemas.microsoft.com/office/drawing/2014/main" id="{E75F76FB-6A4F-42CA-AEA3-84C3BDFA72BC}"/>
+                <a16:creationId xmlns:a16="http://schemas.microsoft.com/office/drawing/2014/main" id="{676812D0-C0A4-4237-8DDE-4304B1999C5F}"/>
               </a:ext>
             </a:extLst>
           </p:cNvPr>
@@ -6599,7 +6549,7 @@
           <p:cNvPr id="10" name="">
             <a:extLst xmlns:a="http://schemas.openxmlformats.org/drawingml/2006/main">
               <a:ext uri="{FF2B5EF4-FFF2-40B4-BE49-F238E27FC236}">
-                <a16:creationId xmlns:a16="http://schemas.microsoft.com/office/drawing/2014/main" id="{0248757A-DB28-4561-A1D6-F0D79881F2A6}"/>
+                <a16:creationId xmlns:a16="http://schemas.microsoft.com/office/drawing/2014/main" id="{83FD98FB-17CA-433A-9B12-3225E58B1C23}"/>
               </a:ext>
             </a:extLst>
           </p:cNvPr>
@@ -6649,7 +6599,7 @@
           <p:cNvPr id="11" name="">
             <a:extLst xmlns:a="http://schemas.openxmlformats.org/drawingml/2006/main">
               <a:ext uri="{FF2B5EF4-FFF2-40B4-BE49-F238E27FC236}">
-                <a16:creationId xmlns:a16="http://schemas.microsoft.com/office/drawing/2014/main" id="{A4DDD330-5DF7-4EA4-9D76-B075106F0E85}"/>
+                <a16:creationId xmlns:a16="http://schemas.microsoft.com/office/drawing/2014/main" id="{BF679420-27F7-44FD-8A9E-3C7812354433}"/>
               </a:ext>
             </a:extLst>
           </p:cNvPr>
@@ -6684,7 +6634,7 @@
           <p:cNvPr id="12" name="">
             <a:extLst xmlns:a="http://schemas.openxmlformats.org/drawingml/2006/main">
               <a:ext uri="{FF2B5EF4-FFF2-40B4-BE49-F238E27FC236}">
-                <a16:creationId xmlns:a16="http://schemas.microsoft.com/office/drawing/2014/main" id="{60132940-81CA-47DF-9385-425FFDACD504}"/>
+                <a16:creationId xmlns:a16="http://schemas.microsoft.com/office/drawing/2014/main" id="{84F5B24D-276A-4D7B-A395-99CA6762265E}"/>
               </a:ext>
             </a:extLst>
           </p:cNvPr>
@@ -6734,7 +6684,7 @@
           <p:cNvPr id="13" name="">
             <a:extLst xmlns:a="http://schemas.openxmlformats.org/drawingml/2006/main">
               <a:ext uri="{FF2B5EF4-FFF2-40B4-BE49-F238E27FC236}">
-                <a16:creationId xmlns:a16="http://schemas.microsoft.com/office/drawing/2014/main" id="{5D554875-5F1D-4960-9753-330273947C4A}"/>
+                <a16:creationId xmlns:a16="http://schemas.microsoft.com/office/drawing/2014/main" id="{975C0F49-D890-4035-BE6A-96170D42C97A}"/>
               </a:ext>
             </a:extLst>
           </p:cNvPr>
@@ -6784,7 +6734,7 @@
           <p:cNvPr id="14" name="">
             <a:extLst xmlns:a="http://schemas.openxmlformats.org/drawingml/2006/main">
               <a:ext uri="{FF2B5EF4-FFF2-40B4-BE49-F238E27FC236}">
-                <a16:creationId xmlns:a16="http://schemas.microsoft.com/office/drawing/2014/main" id="{5F665F7A-CC19-47A7-84B1-E596DDE5E7A3}"/>
+                <a16:creationId xmlns:a16="http://schemas.microsoft.com/office/drawing/2014/main" id="{21F43EB0-1BB2-4940-ACB3-BB21BFDC6FF8}"/>
               </a:ext>
             </a:extLst>
           </p:cNvPr>
@@ -6834,7 +6784,7 @@
           <p:cNvPr id="15" name="">
             <a:extLst xmlns:a="http://schemas.openxmlformats.org/drawingml/2006/main">
               <a:ext uri="{FF2B5EF4-FFF2-40B4-BE49-F238E27FC236}">
-                <a16:creationId xmlns:a16="http://schemas.microsoft.com/office/drawing/2014/main" id="{37D3B592-850C-4E80-844A-E4FB533B7AAD}"/>
+                <a16:creationId xmlns:a16="http://schemas.microsoft.com/office/drawing/2014/main" id="{5EB820F3-C7D8-4BCE-B52B-3DC1A09E028E}"/>
               </a:ext>
             </a:extLst>
           </p:cNvPr>
@@ -6869,7 +6819,7 @@
           <p:cNvPr id="16" name="">
             <a:extLst xmlns:a="http://schemas.openxmlformats.org/drawingml/2006/main">
               <a:ext uri="{FF2B5EF4-FFF2-40B4-BE49-F238E27FC236}">
-                <a16:creationId xmlns:a16="http://schemas.microsoft.com/office/drawing/2014/main" id="{3B0DBBDB-B571-4E9B-A74D-6200C3937EFE}"/>
+                <a16:creationId xmlns:a16="http://schemas.microsoft.com/office/drawing/2014/main" id="{D3DC714F-3CAA-4D27-8AE5-1AA2C1D4745D}"/>
               </a:ext>
             </a:extLst>
           </p:cNvPr>
@@ -6919,7 +6869,7 @@
           <p:cNvPr id="17" name="">
             <a:extLst xmlns:a="http://schemas.openxmlformats.org/drawingml/2006/main">
               <a:ext uri="{FF2B5EF4-FFF2-40B4-BE49-F238E27FC236}">
-                <a16:creationId xmlns:a16="http://schemas.microsoft.com/office/drawing/2014/main" id="{0D3F9C76-623A-40D0-B579-E8BC94D384E4}"/>
+                <a16:creationId xmlns:a16="http://schemas.microsoft.com/office/drawing/2014/main" id="{9096600A-8334-40EC-816A-F388A1541D62}"/>
               </a:ext>
             </a:extLst>
           </p:cNvPr>
@@ -6969,7 +6919,7 @@
           <p:cNvPr id="18" name="">
             <a:extLst xmlns:a="http://schemas.openxmlformats.org/drawingml/2006/main">
               <a:ext uri="{FF2B5EF4-FFF2-40B4-BE49-F238E27FC236}">
-                <a16:creationId xmlns:a16="http://schemas.microsoft.com/office/drawing/2014/main" id="{12E5A710-689F-4D32-AE20-B9E6EBF3DA73}"/>
+                <a16:creationId xmlns:a16="http://schemas.microsoft.com/office/drawing/2014/main" id="{2F754845-FB42-4D52-BBC5-4368763B264E}"/>
               </a:ext>
             </a:extLst>
           </p:cNvPr>
@@ -7019,7 +6969,7 @@
           <p:cNvPr id="19" name="">
             <a:extLst xmlns:a="http://schemas.openxmlformats.org/drawingml/2006/main">
               <a:ext uri="{FF2B5EF4-FFF2-40B4-BE49-F238E27FC236}">
-                <a16:creationId xmlns:a16="http://schemas.microsoft.com/office/drawing/2014/main" id="{24D053D8-723C-4C4E-9E6B-07F074FC4090}"/>
+                <a16:creationId xmlns:a16="http://schemas.microsoft.com/office/drawing/2014/main" id="{89ACCDB8-C66A-4B31-9C50-1951024BB6BA}"/>
               </a:ext>
             </a:extLst>
           </p:cNvPr>
@@ -7054,7 +7004,7 @@
           <p:cNvPr id="20" name="">
             <a:extLst xmlns:a="http://schemas.openxmlformats.org/drawingml/2006/main">
               <a:ext uri="{FF2B5EF4-FFF2-40B4-BE49-F238E27FC236}">
-                <a16:creationId xmlns:a16="http://schemas.microsoft.com/office/drawing/2014/main" id="{11D7581F-4374-4238-B2BA-419A2E80AC70}"/>
+                <a16:creationId xmlns:a16="http://schemas.microsoft.com/office/drawing/2014/main" id="{6CA90AF3-7EA5-4215-87ED-D257120CB4FE}"/>
               </a:ext>
             </a:extLst>
           </p:cNvPr>
@@ -7104,7 +7054,7 @@
           <p:cNvPr id="21" name="">
             <a:extLst xmlns:a="http://schemas.openxmlformats.org/drawingml/2006/main">
               <a:ext uri="{FF2B5EF4-FFF2-40B4-BE49-F238E27FC236}">
-                <a16:creationId xmlns:a16="http://schemas.microsoft.com/office/drawing/2014/main" id="{884DB8A4-B899-404A-B2C2-4D372D89AEC5}"/>
+                <a16:creationId xmlns:a16="http://schemas.microsoft.com/office/drawing/2014/main" id="{F4EDDA31-E0F5-4ECA-A01B-D7BCFE7C4D12}"/>
               </a:ext>
             </a:extLst>
           </p:cNvPr>
@@ -7154,7 +7104,7 @@
           <p:cNvPr id="22" name="">
             <a:extLst xmlns:a="http://schemas.openxmlformats.org/drawingml/2006/main">
               <a:ext uri="{FF2B5EF4-FFF2-40B4-BE49-F238E27FC236}">
-                <a16:creationId xmlns:a16="http://schemas.microsoft.com/office/drawing/2014/main" id="{2BB10AAA-D317-4FDE-9D2A-EBA2D5BFCC07}"/>
+                <a16:creationId xmlns:a16="http://schemas.microsoft.com/office/drawing/2014/main" id="{2767C2BD-42FF-4888-9BBB-EAD96C895477}"/>
               </a:ext>
             </a:extLst>
           </p:cNvPr>
@@ -7189,7 +7139,7 @@
           <p:cNvPr id="23" name="">
             <a:extLst xmlns:a="http://schemas.openxmlformats.org/drawingml/2006/main">
               <a:ext uri="{FF2B5EF4-FFF2-40B4-BE49-F238E27FC236}">
-                <a16:creationId xmlns:a16="http://schemas.microsoft.com/office/drawing/2014/main" id="{E7577C74-0F57-4E07-B242-5626D85C497E}"/>
+                <a16:creationId xmlns:a16="http://schemas.microsoft.com/office/drawing/2014/main" id="{839C8DDC-B4DA-4FDB-A4B3-93959ABE4A38}"/>
               </a:ext>
             </a:extLst>
           </p:cNvPr>
@@ -7239,7 +7189,7 @@
           <p:cNvPr id="24" name="">
             <a:extLst xmlns:a="http://schemas.openxmlformats.org/drawingml/2006/main">
               <a:ext uri="{FF2B5EF4-FFF2-40B4-BE49-F238E27FC236}">
-                <a16:creationId xmlns:a16="http://schemas.microsoft.com/office/drawing/2014/main" id="{4554A24C-2E4B-4A1B-869C-C2589BF225C1}"/>
+                <a16:creationId xmlns:a16="http://schemas.microsoft.com/office/drawing/2014/main" id="{0F060A64-FB81-41A5-9494-CE9171E5D55B}"/>
               </a:ext>
             </a:extLst>
           </p:cNvPr>
@@ -7289,7 +7239,7 @@
           <p:cNvPr id="25" name="">
             <a:extLst xmlns:a="http://schemas.openxmlformats.org/drawingml/2006/main">
               <a:ext uri="{FF2B5EF4-FFF2-40B4-BE49-F238E27FC236}">
-                <a16:creationId xmlns:a16="http://schemas.microsoft.com/office/drawing/2014/main" id="{9C964D50-B3C3-416D-BA42-29BA6A4F76C4}"/>
+                <a16:creationId xmlns:a16="http://schemas.microsoft.com/office/drawing/2014/main" id="{86C3D3FD-8B08-46D1-B7A2-E86B05EDF00C}"/>
               </a:ext>
             </a:extLst>
           </p:cNvPr>
@@ -7339,7 +7289,7 @@
           <p:cNvPr id="26" name="">
             <a:extLst xmlns:a="http://schemas.openxmlformats.org/drawingml/2006/main">
               <a:ext uri="{FF2B5EF4-FFF2-40B4-BE49-F238E27FC236}">
-                <a16:creationId xmlns:a16="http://schemas.microsoft.com/office/drawing/2014/main" id="{98B46ED2-5A57-4087-92BB-9C4D2AEEDD6C}"/>
+                <a16:creationId xmlns:a16="http://schemas.microsoft.com/office/drawing/2014/main" id="{FB1221F1-3248-47B5-B168-B0BA9978C2EB}"/>
               </a:ext>
             </a:extLst>
           </p:cNvPr>
@@ -7387,7 +7337,7 @@
     </p:spTree>
     <p:extLst>
       <p:ext uri="{BB962C8B-B14F-4D97-AF65-F5344CB8AC3E}">
-        <p14:creationId xmlns:p14="http://schemas.microsoft.com/office/powerpoint/2010/main" val="208989562"/>
+        <p14:creationId xmlns:p14="http://schemas.microsoft.com/office/powerpoint/2010/main" val="1514225622"/>
       </p:ext>
     </p:extLst>
   </p:cSld>

--- a/sglang_direct_kv/artifacts/slides/agent_aware_kv_movement_manager_deck.pptx
+++ b/sglang_direct_kv/artifacts/slides/agent_aware_kv_movement_manager_deck.pptx
@@ -2,20 +2,21 @@
 <file path=ppt/presentation.xml><?xml version="1.0" encoding="utf-8"?>
 <p:presentation xmlns:p="http://schemas.openxmlformats.org/presentationml/2006/main">
   <p:sldMasterIdLst>
-    <p:sldMasterId xmlns:r="http://schemas.openxmlformats.org/officeDocument/2006/relationships" id="2147483648" r:id="R601185fe15184d04"/>
+    <p:sldMasterId xmlns:r="http://schemas.openxmlformats.org/officeDocument/2006/relationships" id="2147483648" r:id="R19be7142173d40bb"/>
   </p:sldMasterIdLst>
   <p:notesMasterIdLst>
-    <p:notesMasterId xmlns:r="http://schemas.openxmlformats.org/officeDocument/2006/relationships" r:id="Rb5f852de8d444456"/>
+    <p:notesMasterId xmlns:r="http://schemas.openxmlformats.org/officeDocument/2006/relationships" r:id="Rba21d89858f145ff"/>
   </p:notesMasterIdLst>
   <p:sldIdLst>
-    <p:sldId xmlns:r="http://schemas.openxmlformats.org/officeDocument/2006/relationships" id="256" r:id="R7daa26312cdc4e89"/>
-    <p:sldId xmlns:r="http://schemas.openxmlformats.org/officeDocument/2006/relationships" id="257" r:id="Rcf8d371f12da4fd9"/>
-    <p:sldId xmlns:r="http://schemas.openxmlformats.org/officeDocument/2006/relationships" id="258" r:id="R4387e18435334843"/>
-    <p:sldId xmlns:r="http://schemas.openxmlformats.org/officeDocument/2006/relationships" id="259" r:id="R7535cc3ff9094265"/>
-    <p:sldId xmlns:r="http://schemas.openxmlformats.org/officeDocument/2006/relationships" id="260" r:id="R92d0645070fd4a7e"/>
-    <p:sldId xmlns:r="http://schemas.openxmlformats.org/officeDocument/2006/relationships" id="261" r:id="Rd105dad3ca234f13"/>
-    <p:sldId xmlns:r="http://schemas.openxmlformats.org/officeDocument/2006/relationships" id="262" r:id="R855ed48d2828471d"/>
-    <p:sldId xmlns:r="http://schemas.openxmlformats.org/officeDocument/2006/relationships" id="263" r:id="R5b0c6fdbfb354bb6"/>
+    <p:sldId xmlns:r="http://schemas.openxmlformats.org/officeDocument/2006/relationships" id="256" r:id="Ra4670e6b3a7147e5"/>
+    <p:sldId xmlns:r="http://schemas.openxmlformats.org/officeDocument/2006/relationships" id="257" r:id="Rcb75cfb42c684b3c"/>
+    <p:sldId xmlns:r="http://schemas.openxmlformats.org/officeDocument/2006/relationships" id="258" r:id="R2e30584c14604f2f"/>
+    <p:sldId xmlns:r="http://schemas.openxmlformats.org/officeDocument/2006/relationships" id="259" r:id="R7ee322f34d4440df"/>
+    <p:sldId xmlns:r="http://schemas.openxmlformats.org/officeDocument/2006/relationships" id="260" r:id="R824a8ef9527341ce"/>
+    <p:sldId xmlns:r="http://schemas.openxmlformats.org/officeDocument/2006/relationships" id="261" r:id="Rad13eff0818a4233"/>
+    <p:sldId xmlns:r="http://schemas.openxmlformats.org/officeDocument/2006/relationships" id="262" r:id="Rdcd3ddad9e594b9d"/>
+    <p:sldId xmlns:r="http://schemas.openxmlformats.org/officeDocument/2006/relationships" id="263" r:id="Rc2b8ab27cb76421a"/>
+    <p:sldId xmlns:r="http://schemas.openxmlformats.org/officeDocument/2006/relationships" id="264" r:id="Re6c9d8d0764d4a11"/>
   </p:sldIdLst>
   <p:sldSz cx="12192000" cy="6858000"/>
   <p:notesSz cx="6858000" cy="9144000"/>
@@ -639,12 +640,12 @@
           <a:lstStyle xmlns:a="http://schemas.openxmlformats.org/drawingml/2006/main"/>
           <a:p xmlns:a="http://schemas.openxmlformats.org/drawingml/2006/main">
             <a:r>
-              <a:t>This slide frames the hardware opportunity: hints must become enforceable by the memory movement path.</a:t>
-            </a:r>
-          </a:p>
-          <a:p xmlns:a="http://schemas.openxmlformats.org/drawingml/2006/main">
-            <a:r>
-              <a:t>Hardware examples include SDMA, CPU-side DMA, NIC DMA, SSD DMA, and copy/migration engines.</a:t>
+              <a:t>This slide summarizes the concrete prototype setup used for the current manager report.</a:t>
+            </a:r>
+          </a:p>
+          <a:p xmlns:a="http://schemas.openxmlformats.org/drawingml/2006/main">
+            <a:r>
+              <a:t>Hardware/runtime values are from the latest master report setup section and the project run configuration: Qwen2.5-Coder-7B, A10G-class single GPU, 24 GB GDDR6 GPU memory, 16 GB HiCache host KV shelf, context length 32768, max total tokens 12288, mem fraction static 0.72, tensor parallel size 1.</a:t>
             </a:r>
           </a:p>
           <a:p xmlns:a="http://schemas.openxmlformats.org/drawingml/2006/main">
@@ -734,12 +735,12 @@
           <a:lstStyle xmlns:a="http://schemas.openxmlformats.org/drawingml/2006/main"/>
           <a:p xmlns:a="http://schemas.openxmlformats.org/drawingml/2006/main">
             <a:r>
-              <a:t>Use this as the narrative chart. It shows the initial model turn, tool wait, replay path, replay-side H2D, recompute, prefill, and decode.</a:t>
-            </a:r>
-          </a:p>
-          <a:p xmlns:a="http://schemas.openxmlformats.org/drawingml/2006/main">
-            <a:r>
-              <a:t>The image is a cropped view of the Readable Phase Timeline in latest_master_report.html.</a:t>
+              <a:t>This slide frames the hardware opportunity: hints must become enforceable by the memory movement path.</a:t>
+            </a:r>
+          </a:p>
+          <a:p xmlns:a="http://schemas.openxmlformats.org/drawingml/2006/main">
+            <a:r>
+              <a:t>Hardware examples include SDMA, CPU-side DMA, NIC DMA, SSD DMA, and copy/migration engines.</a:t>
             </a:r>
           </a:p>
           <a:p xmlns:a="http://schemas.openxmlformats.org/drawingml/2006/main">
@@ -829,12 +830,12 @@
           <a:lstStyle xmlns:a="http://schemas.openxmlformats.org/drawingml/2006/main"/>
           <a:p xmlns:a="http://schemas.openxmlformats.org/drawingml/2006/main">
             <a:r>
-              <a:t>This slide is the global prefetch-attempt evidence. The backup report shows 114 matched prefetch attempts, 112 late, and 98.25% late.</a:t>
-            </a:r>
-          </a:p>
-          <a:p xmlns:a="http://schemas.openxmlformats.org/drawingml/2006/main">
-            <a:r>
-              <a:t>Use it to show that software prefetch through the normal serving path often misses tight replay windows.</a:t>
+              <a:t>Use this as the narrative chart. It shows the initial model turn, tool wait, replay path, replay-side H2D, recompute, prefill, and decode.</a:t>
+            </a:r>
+          </a:p>
+          <a:p xmlns:a="http://schemas.openxmlformats.org/drawingml/2006/main">
+            <a:r>
+              <a:t>The image is a cropped view of the Readable Phase Timeline in latest_master_report.html.</a:t>
             </a:r>
           </a:p>
           <a:p xmlns:a="http://schemas.openxmlformats.org/drawingml/2006/main">
@@ -924,12 +925,12 @@
           <a:lstStyle xmlns:a="http://schemas.openxmlformats.org/drawingml/2006/main"/>
           <a:p xmlns:a="http://schemas.openxmlformats.org/drawingml/2006/main">
             <a:r>
-              <a:t>This is the aggregate evidence slide. The current controlled no-prefetch run reports 8 no-prefetch replay H2D gaps and 8 late H2D finishes.</a:t>
-            </a:r>
-          </a:p>
-          <a:p xmlns:a="http://schemas.openxmlformats.org/drawingml/2006/main">
-            <a:r>
-              <a:t>Measured claim source: Global Replay H2D Readiness table and dot plot in latest_master_report.html.</a:t>
+              <a:t>This slide is the global prefetch-attempt evidence. The backup report shows 114 matched prefetch attempts, 112 late, and 98.25% late.</a:t>
+            </a:r>
+          </a:p>
+          <a:p xmlns:a="http://schemas.openxmlformats.org/drawingml/2006/main">
+            <a:r>
+              <a:t>Use it to show that software prefetch through the normal serving path often misses tight replay windows.</a:t>
             </a:r>
           </a:p>
           <a:p xmlns:a="http://schemas.openxmlformats.org/drawingml/2006/main">
@@ -1019,12 +1020,12 @@
           <a:lstStyle xmlns:a="http://schemas.openxmlformats.org/drawingml/2006/main"/>
           <a:p xmlns:a="http://schemas.openxmlformats.org/drawingml/2006/main">
             <a:r>
-              <a:t>This chart separates replay due, client submit, SGLang receive, scheduler queue/admit, H2D start, and H2D finish.</a:t>
-            </a:r>
-          </a:p>
-          <a:p xmlns:a="http://schemas.openxmlformats.org/drawingml/2006/main">
-            <a:r>
-              <a:t>The key manager takeaway: a hint-aware design should influence scheduling and priority, not merely request more copies.</a:t>
+              <a:t>This is the aggregate evidence slide. The current controlled no-prefetch run reports 8 no-prefetch replay H2D gaps and 8 late H2D finishes.</a:t>
+            </a:r>
+          </a:p>
+          <a:p xmlns:a="http://schemas.openxmlformats.org/drawingml/2006/main">
+            <a:r>
+              <a:t>Measured claim source: Global Replay H2D Readiness table and dot plot in latest_master_report.html.</a:t>
             </a:r>
           </a:p>
           <a:p xmlns:a="http://schemas.openxmlformats.org/drawingml/2006/main">
@@ -1075,6 +1076,101 @@
 </file>
 
 <file path=ppt/notesSlides/notesSlide8.xml><?xml version="1.0" encoding="utf-8"?>
+<p:notes xmlns:p="http://schemas.openxmlformats.org/presentationml/2006/main">
+  <p:cSld>
+    <p:spTree>
+      <p:nvGrpSpPr>
+        <p:cNvPr id="1" name=""/>
+        <p:cNvGrpSpPr/>
+        <p:nvPr/>
+      </p:nvGrpSpPr>
+      <p:grpSpPr>
+        <a:xfrm xmlns:a="http://schemas.openxmlformats.org/drawingml/2006/main"/>
+      </p:grpSpPr>
+      <p:sp>
+        <p:nvSpPr>
+          <p:cNvPr id="2" name="Slide Image Placeholder 1"/>
+          <p:cNvSpPr>
+            <a:spLocks xmlns:a="http://schemas.openxmlformats.org/drawingml/2006/main" noGrp="1"/>
+          </p:cNvSpPr>
+          <p:nvPr>
+            <p:ph type="sldImg" idx="0"/>
+          </p:nvPr>
+        </p:nvSpPr>
+        <p:spPr/>
+      </p:sp>
+      <p:sp>
+        <p:nvSpPr>
+          <p:cNvPr id="3" name="Notes Placeholder 2"/>
+          <p:cNvSpPr>
+            <a:spLocks xmlns:a="http://schemas.openxmlformats.org/drawingml/2006/main" noGrp="1"/>
+          </p:cNvSpPr>
+          <p:nvPr>
+            <p:ph type="body" idx="1"/>
+          </p:nvPr>
+        </p:nvSpPr>
+        <p:spPr/>
+        <p:txBody>
+          <a:bodyPr xmlns:a="http://schemas.openxmlformats.org/drawingml/2006/main"/>
+          <a:lstStyle xmlns:a="http://schemas.openxmlformats.org/drawingml/2006/main"/>
+          <a:p xmlns:a="http://schemas.openxmlformats.org/drawingml/2006/main">
+            <a:r>
+              <a:t>This chart separates replay due, client submit, SGLang receive, scheduler queue/admit, H2D start, and H2D finish.</a:t>
+            </a:r>
+          </a:p>
+          <a:p xmlns:a="http://schemas.openxmlformats.org/drawingml/2006/main">
+            <a:r>
+              <a:t>The key manager takeaway: a hint-aware design should influence scheduling and priority, not merely request more copies.</a:t>
+            </a:r>
+          </a:p>
+          <a:p xmlns:a="http://schemas.openxmlformats.org/drawingml/2006/main">
+            <a:r>
+              <a:t/>
+            </a:r>
+          </a:p>
+          <a:p xmlns:a="http://schemas.openxmlformats.org/drawingml/2006/main">
+            <a:r>
+              <a:t>[Sources]</a:t>
+            </a:r>
+          </a:p>
+          <a:p xmlns:a="http://schemas.openxmlformats.org/drawingml/2006/main">
+            <a:r>
+              <a:t>Local report: /Users/oluwolejaiyeoba/Documents/GitHub/agentic_hardware/sglang_direct_kv/artifacts/results/latest_master_report.html</a:t>
+            </a:r>
+          </a:p>
+          <a:p xmlns:a="http://schemas.openxmlformats.org/drawingml/2006/main">
+            <a:r>
+              <a:t>Backup report: /Users/oluwolejaiyeoba/Documents/GitHub/agentic_hardware/backups/latest_master_report-1.html</a:t>
+            </a:r>
+          </a:p>
+        </p:txBody>
+      </p:sp>
+      <p:sp>
+        <p:nvSpPr>
+          <p:cNvPr id="4" name="Slide Number Placeholder 3"/>
+          <p:cNvSpPr>
+            <a:spLocks xmlns:a="http://schemas.openxmlformats.org/drawingml/2006/main" noGrp="1"/>
+          </p:cNvSpPr>
+          <p:nvPr>
+            <p:ph type="sldNum" idx="5"/>
+          </p:nvPr>
+        </p:nvSpPr>
+        <p:spPr/>
+        <p:txBody>
+          <a:bodyPr xmlns:a="http://schemas.openxmlformats.org/drawingml/2006/main"/>
+          <a:lstStyle xmlns:a="http://schemas.openxmlformats.org/drawingml/2006/main"/>
+          <a:p xmlns:a="http://schemas.openxmlformats.org/drawingml/2006/main"/>
+        </p:txBody>
+      </p:sp>
+    </p:spTree>
+  </p:cSld>
+  <p:clrMapOvr>
+    <a:masterClrMapping xmlns:a="http://schemas.openxmlformats.org/drawingml/2006/main"/>
+  </p:clrMapOvr>
+</p:notes>
+</file>
+
+<file path=ppt/notesSlides/notesSlide9.xml><?xml version="1.0" encoding="utf-8"?>
 <p:notes xmlns:p="http://schemas.openxmlformats.org/presentationml/2006/main">
   <p:cSld>
     <p:spTree>
@@ -1207,7 +1303,7 @@
   </p:cSld>
   <p:clrMap bg1="lt1" tx1="dk1" bg2="lt2" tx2="dk2" accent1="accent1" accent2="accent2" accent3="accent3" accent4="accent4" accent5="accent5" accent6="accent6" hlink="hlink" folHlink="folHlink"/>
   <p:sldLayoutIdLst>
-    <p:sldLayoutId xmlns:r="http://schemas.openxmlformats.org/officeDocument/2006/relationships" id="2147483649" r:id="R406961d316ec4559"/>
+    <p:sldLayoutId xmlns:r="http://schemas.openxmlformats.org/officeDocument/2006/relationships" id="2147483649" r:id="R719b5a8e665343a0"/>
   </p:sldLayoutIdLst>
   <p:txStyles>
     <p:titleStyle>
@@ -1758,7 +1854,7 @@
           <p:cNvPr id="16" name="">
             <a:extLst xmlns:a="http://schemas.openxmlformats.org/drawingml/2006/main">
               <a:ext uri="{FF2B5EF4-FFF2-40B4-BE49-F238E27FC236}">
-                <a16:creationId xmlns:a16="http://schemas.microsoft.com/office/drawing/2014/main" id="{62FB2137-23A7-4BBA-82A2-4DADBBC59E9A}"/>
+                <a16:creationId xmlns:a16="http://schemas.microsoft.com/office/drawing/2014/main" id="{89AB6631-AFEA-47DA-9BBC-FF6B8570C3F8}"/>
               </a:ext>
             </a:extLst>
           </p:cNvPr>
@@ -1808,7 +1904,7 @@
           <p:cNvPr id="2" name="">
             <a:extLst xmlns:a="http://schemas.openxmlformats.org/drawingml/2006/main">
               <a:ext uri="{FF2B5EF4-FFF2-40B4-BE49-F238E27FC236}">
-                <a16:creationId xmlns:a16="http://schemas.microsoft.com/office/drawing/2014/main" id="{6E355E9F-8557-4B62-BDF4-23539AB16002}"/>
+                <a16:creationId xmlns:a16="http://schemas.microsoft.com/office/drawing/2014/main" id="{CD2E1BA6-5ED2-4A7E-9869-DB6DEBE41C2B}"/>
               </a:ext>
             </a:extLst>
           </p:cNvPr>
@@ -1858,7 +1954,7 @@
           <p:cNvPr id="3" name="">
             <a:extLst xmlns:a="http://schemas.openxmlformats.org/drawingml/2006/main">
               <a:ext uri="{FF2B5EF4-FFF2-40B4-BE49-F238E27FC236}">
-                <a16:creationId xmlns:a16="http://schemas.microsoft.com/office/drawing/2014/main" id="{DA1F0853-039D-4C86-A71F-E072698AE8FC}"/>
+                <a16:creationId xmlns:a16="http://schemas.microsoft.com/office/drawing/2014/main" id="{3C0A07E2-34CF-4C22-B9FA-07890AC6AB8C}"/>
               </a:ext>
             </a:extLst>
           </p:cNvPr>
@@ -1893,7 +1989,7 @@
           <p:cNvPr id="4" name="">
             <a:extLst xmlns:a="http://schemas.openxmlformats.org/drawingml/2006/main">
               <a:ext uri="{FF2B5EF4-FFF2-40B4-BE49-F238E27FC236}">
-                <a16:creationId xmlns:a16="http://schemas.microsoft.com/office/drawing/2014/main" id="{7A3A1910-124C-474A-B3E8-DD5CE2C8B126}"/>
+                <a16:creationId xmlns:a16="http://schemas.microsoft.com/office/drawing/2014/main" id="{1648394F-91DB-45DA-BBAE-B60F8A965E42}"/>
               </a:ext>
             </a:extLst>
           </p:cNvPr>
@@ -1943,7 +2039,7 @@
           <p:cNvPr id="5" name="">
             <a:extLst xmlns:a="http://schemas.openxmlformats.org/drawingml/2006/main">
               <a:ext uri="{FF2B5EF4-FFF2-40B4-BE49-F238E27FC236}">
-                <a16:creationId xmlns:a16="http://schemas.microsoft.com/office/drawing/2014/main" id="{2CBB6CA9-B912-4BEE-A8A5-D071D5EF73D4}"/>
+                <a16:creationId xmlns:a16="http://schemas.microsoft.com/office/drawing/2014/main" id="{C87513AA-AF0E-42F1-9E33-F49502313A2E}"/>
               </a:ext>
             </a:extLst>
           </p:cNvPr>
@@ -1993,7 +2089,7 @@
           <p:cNvPr id="6" name="">
             <a:extLst xmlns:a="http://schemas.openxmlformats.org/drawingml/2006/main">
               <a:ext uri="{FF2B5EF4-FFF2-40B4-BE49-F238E27FC236}">
-                <a16:creationId xmlns:a16="http://schemas.microsoft.com/office/drawing/2014/main" id="{4BE85BCF-32F8-4954-89A0-9F8DD5B43FC4}"/>
+                <a16:creationId xmlns:a16="http://schemas.microsoft.com/office/drawing/2014/main" id="{EA340BD4-41AB-47F8-ABE6-C5B1A39DC980}"/>
               </a:ext>
             </a:extLst>
           </p:cNvPr>
@@ -2028,7 +2124,7 @@
           <p:cNvPr id="7" name="">
             <a:extLst xmlns:a="http://schemas.openxmlformats.org/drawingml/2006/main">
               <a:ext uri="{FF2B5EF4-FFF2-40B4-BE49-F238E27FC236}">
-                <a16:creationId xmlns:a16="http://schemas.microsoft.com/office/drawing/2014/main" id="{994E34FD-E5DA-45F3-8D66-AED20147FE33}"/>
+                <a16:creationId xmlns:a16="http://schemas.microsoft.com/office/drawing/2014/main" id="{61675222-4D7B-4B73-A335-FBCBD2354C0F}"/>
               </a:ext>
             </a:extLst>
           </p:cNvPr>
@@ -2078,7 +2174,7 @@
           <p:cNvPr id="8" name="">
             <a:extLst xmlns:a="http://schemas.openxmlformats.org/drawingml/2006/main">
               <a:ext uri="{FF2B5EF4-FFF2-40B4-BE49-F238E27FC236}">
-                <a16:creationId xmlns:a16="http://schemas.microsoft.com/office/drawing/2014/main" id="{0938EB14-B8AB-429A-9E3E-CD9B37BDFED5}"/>
+                <a16:creationId xmlns:a16="http://schemas.microsoft.com/office/drawing/2014/main" id="{894274B6-8C74-430D-81F2-BA691606E10E}"/>
               </a:ext>
             </a:extLst>
           </p:cNvPr>
@@ -2128,7 +2224,7 @@
           <p:cNvPr id="9" name="">
             <a:extLst xmlns:a="http://schemas.openxmlformats.org/drawingml/2006/main">
               <a:ext uri="{FF2B5EF4-FFF2-40B4-BE49-F238E27FC236}">
-                <a16:creationId xmlns:a16="http://schemas.microsoft.com/office/drawing/2014/main" id="{D8B1CD77-A766-4286-B4E6-001C63E22EDB}"/>
+                <a16:creationId xmlns:a16="http://schemas.microsoft.com/office/drawing/2014/main" id="{0C0CDA4E-B18E-4383-B251-648A79852200}"/>
               </a:ext>
             </a:extLst>
           </p:cNvPr>
@@ -2163,7 +2259,7 @@
           <p:cNvPr id="10" name="">
             <a:extLst xmlns:a="http://schemas.openxmlformats.org/drawingml/2006/main">
               <a:ext uri="{FF2B5EF4-FFF2-40B4-BE49-F238E27FC236}">
-                <a16:creationId xmlns:a16="http://schemas.microsoft.com/office/drawing/2014/main" id="{96FBC1C6-BE07-422E-A6E4-6A7593983BB1}"/>
+                <a16:creationId xmlns:a16="http://schemas.microsoft.com/office/drawing/2014/main" id="{5A85D7F3-3F78-4469-A17E-EF12464463E0}"/>
               </a:ext>
             </a:extLst>
           </p:cNvPr>
@@ -2213,7 +2309,7 @@
           <p:cNvPr id="11" name="">
             <a:extLst xmlns:a="http://schemas.openxmlformats.org/drawingml/2006/main">
               <a:ext uri="{FF2B5EF4-FFF2-40B4-BE49-F238E27FC236}">
-                <a16:creationId xmlns:a16="http://schemas.microsoft.com/office/drawing/2014/main" id="{F6DCC0D0-5871-40D0-93AB-45F2D4D8F76D}"/>
+                <a16:creationId xmlns:a16="http://schemas.microsoft.com/office/drawing/2014/main" id="{117CBBF6-E44B-4D98-BE3D-040824E513AB}"/>
               </a:ext>
             </a:extLst>
           </p:cNvPr>
@@ -2263,7 +2359,7 @@
           <p:cNvPr id="12" name="">
             <a:extLst xmlns:a="http://schemas.openxmlformats.org/drawingml/2006/main">
               <a:ext uri="{FF2B5EF4-FFF2-40B4-BE49-F238E27FC236}">
-                <a16:creationId xmlns:a16="http://schemas.microsoft.com/office/drawing/2014/main" id="{3FB49F3C-BA29-48A8-A6B6-CFDB96C7267A}"/>
+                <a16:creationId xmlns:a16="http://schemas.microsoft.com/office/drawing/2014/main" id="{993CC2AD-90AC-4059-8A8E-5ED70C879908}"/>
               </a:ext>
             </a:extLst>
           </p:cNvPr>
@@ -2298,7 +2394,7 @@
           <p:cNvPr id="13" name="">
             <a:extLst xmlns:a="http://schemas.openxmlformats.org/drawingml/2006/main">
               <a:ext uri="{FF2B5EF4-FFF2-40B4-BE49-F238E27FC236}">
-                <a16:creationId xmlns:a16="http://schemas.microsoft.com/office/drawing/2014/main" id="{A5F29790-1E4C-4B81-AE33-A255BA16910C}"/>
+                <a16:creationId xmlns:a16="http://schemas.microsoft.com/office/drawing/2014/main" id="{3095EACB-17E5-4C38-8715-09651E39272E}"/>
               </a:ext>
             </a:extLst>
           </p:cNvPr>
@@ -2348,7 +2444,7 @@
           <p:cNvPr id="14" name="">
             <a:extLst xmlns:a="http://schemas.openxmlformats.org/drawingml/2006/main">
               <a:ext uri="{FF2B5EF4-FFF2-40B4-BE49-F238E27FC236}">
-                <a16:creationId xmlns:a16="http://schemas.microsoft.com/office/drawing/2014/main" id="{B7AFF103-0AE0-4CB2-9144-92FA8E6068EC}"/>
+                <a16:creationId xmlns:a16="http://schemas.microsoft.com/office/drawing/2014/main" id="{55C271DD-7013-4AC2-A618-FAFD564FFB5B}"/>
               </a:ext>
             </a:extLst>
           </p:cNvPr>
@@ -2398,7 +2494,7 @@
           <p:cNvPr id="15" name="">
             <a:extLst xmlns:a="http://schemas.openxmlformats.org/drawingml/2006/main">
               <a:ext uri="{FF2B5EF4-FFF2-40B4-BE49-F238E27FC236}">
-                <a16:creationId xmlns:a16="http://schemas.microsoft.com/office/drawing/2014/main" id="{072DEE50-D0D2-4EAE-9D61-55BBCE5FEDE9}"/>
+                <a16:creationId xmlns:a16="http://schemas.microsoft.com/office/drawing/2014/main" id="{2325E4FA-4CED-4BA2-996D-77F42AD2F933}"/>
               </a:ext>
             </a:extLst>
           </p:cNvPr>
@@ -2446,7 +2542,7 @@
     </p:spTree>
     <p:extLst>
       <p:ext uri="{BB962C8B-B14F-4D97-AF65-F5344CB8AC3E}">
-        <p14:creationId xmlns:p14="http://schemas.microsoft.com/office/powerpoint/2010/main" val="1117321373"/>
+        <p14:creationId xmlns:p14="http://schemas.microsoft.com/office/powerpoint/2010/main" val="8711797"/>
       </p:ext>
     </p:extLst>
   </p:cSld>
@@ -2477,7 +2573,7 @@
           <p:cNvPr id="14" name="">
             <a:extLst xmlns:a="http://schemas.openxmlformats.org/drawingml/2006/main">
               <a:ext uri="{FF2B5EF4-FFF2-40B4-BE49-F238E27FC236}">
-                <a16:creationId xmlns:a16="http://schemas.microsoft.com/office/drawing/2014/main" id="{60536CB3-FB5C-45C9-B3EA-E43F0F619E87}"/>
+                <a16:creationId xmlns:a16="http://schemas.microsoft.com/office/drawing/2014/main" id="{6CB27B2F-8040-4F21-961B-9500B53F2B95}"/>
               </a:ext>
             </a:extLst>
           </p:cNvPr>
@@ -2527,7 +2623,7 @@
           <p:cNvPr id="2" name="">
             <a:extLst xmlns:a="http://schemas.openxmlformats.org/drawingml/2006/main">
               <a:ext uri="{FF2B5EF4-FFF2-40B4-BE49-F238E27FC236}">
-                <a16:creationId xmlns:a16="http://schemas.microsoft.com/office/drawing/2014/main" id="{547E3963-FC62-4FBB-B3C5-20C3EC71709A}"/>
+                <a16:creationId xmlns:a16="http://schemas.microsoft.com/office/drawing/2014/main" id="{8BE0CD20-7C43-4401-83DB-44D5D4436DE0}"/>
               </a:ext>
             </a:extLst>
           </p:cNvPr>
@@ -2577,7 +2673,7 @@
           <p:cNvPr id="3" name="">
             <a:extLst xmlns:a="http://schemas.openxmlformats.org/drawingml/2006/main">
               <a:ext uri="{FF2B5EF4-FFF2-40B4-BE49-F238E27FC236}">
-                <a16:creationId xmlns:a16="http://schemas.microsoft.com/office/drawing/2014/main" id="{71592BEF-D46E-4C83-A1B6-40C1089E11D8}"/>
+                <a16:creationId xmlns:a16="http://schemas.microsoft.com/office/drawing/2014/main" id="{5D7E99B7-5D14-40BA-B62E-DBFA0442E552}"/>
               </a:ext>
             </a:extLst>
           </p:cNvPr>
@@ -2616,7 +2712,7 @@
           <p:nvPr/>
         </p:nvPicPr>
         <p:blipFill>
-          <a:blip xmlns:r="http://schemas.openxmlformats.org/officeDocument/2006/relationships" xmlns:a="http://schemas.openxmlformats.org/drawingml/2006/main" r:embed="Rb38c1f58a5844237"/>
+          <a:blip xmlns:r="http://schemas.openxmlformats.org/officeDocument/2006/relationships" xmlns:a="http://schemas.openxmlformats.org/drawingml/2006/main" r:embed="Ra2a90ef8e5c54102"/>
           <a:stretch xmlns:a="http://schemas.openxmlformats.org/drawingml/2006/main"/>
         </p:blipFill>
         <p:spPr>
@@ -2634,7 +2730,7 @@
           <p:cNvPr id="5" name="">
             <a:extLst xmlns:a="http://schemas.openxmlformats.org/drawingml/2006/main">
               <a:ext uri="{FF2B5EF4-FFF2-40B4-BE49-F238E27FC236}">
-                <a16:creationId xmlns:a16="http://schemas.microsoft.com/office/drawing/2014/main" id="{BBBD5418-8F0D-4E65-B2E8-951F265D5E67}"/>
+                <a16:creationId xmlns:a16="http://schemas.microsoft.com/office/drawing/2014/main" id="{E61BC007-10AA-43D8-B0C3-84D773F62802}"/>
               </a:ext>
             </a:extLst>
           </p:cNvPr>
@@ -2669,7 +2765,7 @@
           <p:cNvPr id="6" name="">
             <a:extLst xmlns:a="http://schemas.openxmlformats.org/drawingml/2006/main">
               <a:ext uri="{FF2B5EF4-FFF2-40B4-BE49-F238E27FC236}">
-                <a16:creationId xmlns:a16="http://schemas.microsoft.com/office/drawing/2014/main" id="{95185ACD-37DA-414E-962D-89434056A095}"/>
+                <a16:creationId xmlns:a16="http://schemas.microsoft.com/office/drawing/2014/main" id="{9EF09307-6CAE-46ED-8EAB-C36C590D6288}"/>
               </a:ext>
             </a:extLst>
           </p:cNvPr>
@@ -2719,7 +2815,7 @@
           <p:cNvPr id="7" name="">
             <a:extLst xmlns:a="http://schemas.openxmlformats.org/drawingml/2006/main">
               <a:ext uri="{FF2B5EF4-FFF2-40B4-BE49-F238E27FC236}">
-                <a16:creationId xmlns:a16="http://schemas.microsoft.com/office/drawing/2014/main" id="{7A771A9A-534B-4A69-84DE-567DA5974CAE}"/>
+                <a16:creationId xmlns:a16="http://schemas.microsoft.com/office/drawing/2014/main" id="{AF787D38-6392-4A06-B3A9-6986C0CA2148}"/>
               </a:ext>
             </a:extLst>
           </p:cNvPr>
@@ -2769,7 +2865,7 @@
           <p:cNvPr id="8" name="">
             <a:extLst xmlns:a="http://schemas.openxmlformats.org/drawingml/2006/main">
               <a:ext uri="{FF2B5EF4-FFF2-40B4-BE49-F238E27FC236}">
-                <a16:creationId xmlns:a16="http://schemas.microsoft.com/office/drawing/2014/main" id="{FB394521-18CF-475E-9BF0-49C76FF7EC9D}"/>
+                <a16:creationId xmlns:a16="http://schemas.microsoft.com/office/drawing/2014/main" id="{172D2B5F-C810-4BE6-AAAB-B8A6A26685E1}"/>
               </a:ext>
             </a:extLst>
           </p:cNvPr>
@@ -2804,7 +2900,7 @@
           <p:cNvPr id="9" name="">
             <a:extLst xmlns:a="http://schemas.openxmlformats.org/drawingml/2006/main">
               <a:ext uri="{FF2B5EF4-FFF2-40B4-BE49-F238E27FC236}">
-                <a16:creationId xmlns:a16="http://schemas.microsoft.com/office/drawing/2014/main" id="{A753475D-A3FA-4D43-AB47-7C732BD2768D}"/>
+                <a16:creationId xmlns:a16="http://schemas.microsoft.com/office/drawing/2014/main" id="{C65CEB16-2BB3-4C23-8421-2B780C439C1B}"/>
               </a:ext>
             </a:extLst>
           </p:cNvPr>
@@ -2854,7 +2950,7 @@
           <p:cNvPr id="10" name="">
             <a:extLst xmlns:a="http://schemas.openxmlformats.org/drawingml/2006/main">
               <a:ext uri="{FF2B5EF4-FFF2-40B4-BE49-F238E27FC236}">
-                <a16:creationId xmlns:a16="http://schemas.microsoft.com/office/drawing/2014/main" id="{C8E20A24-58CC-4010-8319-CC48E82E0AD2}"/>
+                <a16:creationId xmlns:a16="http://schemas.microsoft.com/office/drawing/2014/main" id="{14AEDEF9-1183-4714-A9B2-3AABCBFA1917}"/>
               </a:ext>
             </a:extLst>
           </p:cNvPr>
@@ -2904,7 +3000,7 @@
           <p:cNvPr id="11" name="">
             <a:extLst xmlns:a="http://schemas.openxmlformats.org/drawingml/2006/main">
               <a:ext uri="{FF2B5EF4-FFF2-40B4-BE49-F238E27FC236}">
-                <a16:creationId xmlns:a16="http://schemas.microsoft.com/office/drawing/2014/main" id="{BA32AE1C-3E0B-4743-93E7-508D8D1D0A0D}"/>
+                <a16:creationId xmlns:a16="http://schemas.microsoft.com/office/drawing/2014/main" id="{496224DD-FCCD-48FA-9429-08C67D7CE35C}"/>
               </a:ext>
             </a:extLst>
           </p:cNvPr>
@@ -2954,7 +3050,7 @@
           <p:cNvPr id="12" name="">
             <a:extLst xmlns:a="http://schemas.openxmlformats.org/drawingml/2006/main">
               <a:ext uri="{FF2B5EF4-FFF2-40B4-BE49-F238E27FC236}">
-                <a16:creationId xmlns:a16="http://schemas.microsoft.com/office/drawing/2014/main" id="{36B91FA5-5950-4DE6-9285-A14986342A28}"/>
+                <a16:creationId xmlns:a16="http://schemas.microsoft.com/office/drawing/2014/main" id="{25605FB8-6F0B-4027-B004-B6FD775B0E51}"/>
               </a:ext>
             </a:extLst>
           </p:cNvPr>
@@ -3004,7 +3100,7 @@
           <p:cNvPr id="13" name="">
             <a:extLst xmlns:a="http://schemas.openxmlformats.org/drawingml/2006/main">
               <a:ext uri="{FF2B5EF4-FFF2-40B4-BE49-F238E27FC236}">
-                <a16:creationId xmlns:a16="http://schemas.microsoft.com/office/drawing/2014/main" id="{AA6111C1-B653-4800-85A1-2AF3F854544A}"/>
+                <a16:creationId xmlns:a16="http://schemas.microsoft.com/office/drawing/2014/main" id="{9AC283EB-EEDD-4D3A-B0E1-F25EF72181D8}"/>
               </a:ext>
             </a:extLst>
           </p:cNvPr>
@@ -3052,7 +3148,7 @@
     </p:spTree>
     <p:extLst>
       <p:ext uri="{BB962C8B-B14F-4D97-AF65-F5344CB8AC3E}">
-        <p14:creationId xmlns:p14="http://schemas.microsoft.com/office/powerpoint/2010/main" val="1498469192"/>
+        <p14:creationId xmlns:p14="http://schemas.microsoft.com/office/powerpoint/2010/main" val="551079583"/>
       </p:ext>
     </p:extLst>
   </p:cSld>
@@ -3080,10 +3176,10 @@
       </p:grpSpPr>
       <p:sp>
         <p:nvSpPr>
-          <p:cNvPr id="26" name="">
-            <a:extLst xmlns:a="http://schemas.openxmlformats.org/drawingml/2006/main">
-              <a:ext uri="{FF2B5EF4-FFF2-40B4-BE49-F238E27FC236}">
-                <a16:creationId xmlns:a16="http://schemas.microsoft.com/office/drawing/2014/main" id="{5E5547E2-F8D1-41D3-BBFA-0FCED9F37510}"/>
+          <p:cNvPr id="44" name="">
+            <a:extLst xmlns:a="http://schemas.openxmlformats.org/drawingml/2006/main">
+              <a:ext uri="{FF2B5EF4-FFF2-40B4-BE49-F238E27FC236}">
+                <a16:creationId xmlns:a16="http://schemas.microsoft.com/office/drawing/2014/main" id="{B9938FF0-0F20-4264-B181-F91D0D45DB02}"/>
               </a:ext>
             </a:extLst>
           </p:cNvPr>
@@ -3123,7 +3219,7 @@
                   <a:srgbClr val="0F172A"/>
                 </a:solidFill>
               </a:rPr>
-              <a:t>Today’s DMA engines move bytes, not intent</a:t>
+              <a:t>The prototype runs real prompts through SGLang</a:t>
             </a:r>
           </a:p>
         </p:txBody>
@@ -3133,7 +3229,7 @@
           <p:cNvPr id="2" name="">
             <a:extLst xmlns:a="http://schemas.openxmlformats.org/drawingml/2006/main">
               <a:ext uri="{FF2B5EF4-FFF2-40B4-BE49-F238E27FC236}">
-                <a16:creationId xmlns:a16="http://schemas.microsoft.com/office/drawing/2014/main" id="{118B0EAB-8AC2-4D72-B5BB-214EB5A7BAD9}"/>
+                <a16:creationId xmlns:a16="http://schemas.microsoft.com/office/drawing/2014/main" id="{666A5885-EC20-4295-9E23-FEF1A9CA0F42}"/>
               </a:ext>
             </a:extLst>
           </p:cNvPr>
@@ -3173,7 +3269,7 @@
                   <a:srgbClr val="64748B"/>
                 </a:solidFill>
               </a:rPr>
-              <a:t>The hardware path is fast, but it usually lacks agent/session semantics.</a:t>
+              <a:t>Concrete setup behind the charts: traffic source, serving stack, one GPU, model, and host-side KV cache.</a:t>
             </a:r>
           </a:p>
         </p:txBody>
@@ -3183,23 +3279,23 @@
           <p:cNvPr id="3" name="">
             <a:extLst xmlns:a="http://schemas.openxmlformats.org/drawingml/2006/main">
               <a:ext uri="{FF2B5EF4-FFF2-40B4-BE49-F238E27FC236}">
-                <a16:creationId xmlns:a16="http://schemas.microsoft.com/office/drawing/2014/main" id="{B78CB1B7-6F9B-4CBD-A056-E71D80CFAE44}"/>
-              </a:ext>
-            </a:extLst>
-          </p:cNvPr>
-          <p:cNvSpPr>
-            <a:spLocks xmlns:a="http://schemas.openxmlformats.org/drawingml/2006/main" noGrp="1"/>
-          </p:cNvSpPr>
-          <p:nvPr/>
-        </p:nvSpPr>
-        <p:spPr>
-          <a:xfrm xmlns:a="http://schemas.openxmlformats.org/drawingml/2006/main">
-            <a:off x="552450" y="1790700"/>
-            <a:ext cx="4953000" cy="3429000"/>
+                <a16:creationId xmlns:a16="http://schemas.microsoft.com/office/drawing/2014/main" id="{4252BA33-7C75-49ED-B351-BE8DF49C4285}"/>
+              </a:ext>
+            </a:extLst>
+          </p:cNvPr>
+          <p:cNvSpPr>
+            <a:spLocks xmlns:a="http://schemas.openxmlformats.org/drawingml/2006/main" noGrp="1"/>
+          </p:cNvSpPr>
+          <p:nvPr/>
+        </p:nvSpPr>
+        <p:spPr>
+          <a:xfrm xmlns:a="http://schemas.openxmlformats.org/drawingml/2006/main">
+            <a:off x="514350" y="1752600"/>
+            <a:ext cx="1695450" cy="914400"/>
           </a:xfrm>
           <a:prstGeom xmlns:a="http://schemas.openxmlformats.org/drawingml/2006/main" prst="roundRect">
             <a:avLst>
-              <a:gd name="adj" fmla="val 1667"/>
+              <a:gd name="adj" fmla="val 6250"/>
             </a:avLst>
           </a:prstGeom>
           <a:solidFill xmlns:a="http://schemas.openxmlformats.org/drawingml/2006/main">
@@ -3218,47 +3314,64 @@
           <p:cNvPr id="4" name="">
             <a:extLst xmlns:a="http://schemas.openxmlformats.org/drawingml/2006/main">
               <a:ext uri="{FF2B5EF4-FFF2-40B4-BE49-F238E27FC236}">
-                <a16:creationId xmlns:a16="http://schemas.microsoft.com/office/drawing/2014/main" id="{386281B8-C2FD-48CF-93BF-A9E028834111}"/>
-              </a:ext>
-            </a:extLst>
-          </p:cNvPr>
-          <p:cNvSpPr>
-            <a:spLocks xmlns:a="http://schemas.openxmlformats.org/drawingml/2006/main" noGrp="1"/>
-          </p:cNvSpPr>
-          <p:nvPr/>
-        </p:nvSpPr>
-        <p:spPr>
-          <a:xfrm xmlns:a="http://schemas.openxmlformats.org/drawingml/2006/main">
-            <a:off x="838200" y="2076450"/>
-            <a:ext cx="4191000" cy="323850"/>
-          </a:xfrm>
-          <a:prstGeom xmlns:a="http://schemas.openxmlformats.org/drawingml/2006/main" prst="rect">
-            <a:avLst/>
-          </a:prstGeom>
-          <a:noFill xmlns:a="http://schemas.openxmlformats.org/drawingml/2006/main"/>
-          <a:ln xmlns:a="http://schemas.openxmlformats.org/drawingml/2006/main" w="0">
-            <a:noFill/>
-            <a:prstDash val="solid"/>
-          </a:ln>
-        </p:spPr>
-        <p:txBody>
-          <a:bodyPr xmlns:a="http://schemas.openxmlformats.org/drawingml/2006/main" anchor="t"/>
-          <a:lstStyle xmlns:a="http://schemas.openxmlformats.org/drawingml/2006/main"/>
-          <a:p xmlns:a="http://schemas.openxmlformats.org/drawingml/2006/main">
-            <a:pPr algn="l">
-              <a:defRPr sz="1950" b="1">
+                <a16:creationId xmlns:a16="http://schemas.microsoft.com/office/drawing/2014/main" id="{F98EBC35-3657-49C3-9C36-97F46493A0EC}"/>
+              </a:ext>
+            </a:extLst>
+          </p:cNvPr>
+          <p:cNvSpPr>
+            <a:spLocks xmlns:a="http://schemas.openxmlformats.org/drawingml/2006/main" noGrp="1"/>
+          </p:cNvSpPr>
+          <p:nvPr/>
+        </p:nvSpPr>
+        <p:spPr>
+          <a:xfrm xmlns:a="http://schemas.openxmlformats.org/drawingml/2006/main">
+            <a:off x="647700" y="1895475"/>
+            <a:ext cx="1428750" cy="723900"/>
+          </a:xfrm>
+          <a:prstGeom xmlns:a="http://schemas.openxmlformats.org/drawingml/2006/main" prst="rect">
+            <a:avLst/>
+          </a:prstGeom>
+          <a:noFill xmlns:a="http://schemas.openxmlformats.org/drawingml/2006/main"/>
+          <a:ln xmlns:a="http://schemas.openxmlformats.org/drawingml/2006/main" w="0">
+            <a:noFill/>
+            <a:prstDash val="solid"/>
+          </a:ln>
+        </p:spPr>
+        <p:txBody>
+          <a:bodyPr xmlns:a="http://schemas.openxmlformats.org/drawingml/2006/main" anchor="ctr"/>
+          <a:lstStyle xmlns:a="http://schemas.openxmlformats.org/drawingml/2006/main"/>
+          <a:p xmlns:a="http://schemas.openxmlformats.org/drawingml/2006/main">
+            <a:pPr algn="ctr">
+              <a:defRPr sz="1500" b="1">
                 <a:solidFill>
                   <a:srgbClr val="0F172A"/>
                 </a:solidFill>
               </a:defRPr>
             </a:pPr>
             <a:r>
-              <a:rPr sz="1950" b="1">
+              <a:rPr sz="1500" b="1">
                 <a:solidFill>
                   <a:srgbClr val="0F172A"/>
                 </a:solidFill>
               </a:rPr>
-              <a:t>Context-agnostic movement</a:t>
+              <a:t>Synthetic</a:t>
+            </a:r>
+          </a:p>
+          <a:p xmlns:a="http://schemas.openxmlformats.org/drawingml/2006/main">
+            <a:pPr algn="ctr">
+              <a:defRPr sz="1500" b="1">
+                <a:solidFill>
+                  <a:srgbClr val="0F172A"/>
+                </a:solidFill>
+              </a:defRPr>
+            </a:pPr>
+            <a:r>
+              <a:rPr sz="1500" b="1">
+                <a:solidFill>
+                  <a:srgbClr val="0F172A"/>
+                </a:solidFill>
+              </a:rPr>
+              <a:t>request generator</a:t>
             </a:r>
           </a:p>
         </p:txBody>
@@ -3268,397 +3381,73 @@
           <p:cNvPr id="5" name="">
             <a:extLst xmlns:a="http://schemas.openxmlformats.org/drawingml/2006/main">
               <a:ext uri="{FF2B5EF4-FFF2-40B4-BE49-F238E27FC236}">
-                <a16:creationId xmlns:a16="http://schemas.microsoft.com/office/drawing/2014/main" id="{8389FD71-FA2A-4B4A-826E-3870DE69CD7C}"/>
-              </a:ext>
-            </a:extLst>
-          </p:cNvPr>
-          <p:cNvSpPr>
-            <a:spLocks xmlns:a="http://schemas.openxmlformats.org/drawingml/2006/main" noGrp="1"/>
-          </p:cNvSpPr>
-          <p:nvPr/>
-        </p:nvSpPr>
-        <p:spPr>
-          <a:xfrm xmlns:a="http://schemas.openxmlformats.org/drawingml/2006/main">
-            <a:off x="876300" y="2781300"/>
-            <a:ext cx="85725" cy="85725"/>
-          </a:xfrm>
-          <a:prstGeom xmlns:a="http://schemas.openxmlformats.org/drawingml/2006/main" prst="ellipse">
-            <a:avLst/>
-          </a:prstGeom>
-          <a:solidFill xmlns:a="http://schemas.openxmlformats.org/drawingml/2006/main">
-            <a:srgbClr val="64748B"/>
-          </a:solidFill>
-          <a:ln xmlns:a="http://schemas.openxmlformats.org/drawingml/2006/main" w="0">
-            <a:noFill/>
-            <a:prstDash val="solid"/>
-          </a:ln>
-        </p:spPr>
+                <a16:creationId xmlns:a16="http://schemas.microsoft.com/office/drawing/2014/main" id="{53865425-AED9-4487-8238-03D950554468}"/>
+              </a:ext>
+            </a:extLst>
+          </p:cNvPr>
+          <p:cNvSpPr>
+            <a:spLocks xmlns:a="http://schemas.openxmlformats.org/drawingml/2006/main" noGrp="1"/>
+          </p:cNvSpPr>
+          <p:nvPr/>
+        </p:nvSpPr>
+        <p:spPr>
+          <a:xfrm xmlns:a="http://schemas.openxmlformats.org/drawingml/2006/main">
+            <a:off x="2286000" y="2038350"/>
+            <a:ext cx="381000" cy="342900"/>
+          </a:xfrm>
+          <a:prstGeom xmlns:a="http://schemas.openxmlformats.org/drawingml/2006/main" prst="rect">
+            <a:avLst/>
+          </a:prstGeom>
+          <a:noFill xmlns:a="http://schemas.openxmlformats.org/drawingml/2006/main"/>
+          <a:ln xmlns:a="http://schemas.openxmlformats.org/drawingml/2006/main" w="0">
+            <a:noFill/>
+            <a:prstDash val="solid"/>
+          </a:ln>
+        </p:spPr>
+        <p:txBody>
+          <a:bodyPr xmlns:a="http://schemas.openxmlformats.org/drawingml/2006/main" anchor="t"/>
+          <a:lstStyle xmlns:a="http://schemas.openxmlformats.org/drawingml/2006/main"/>
+          <a:p xmlns:a="http://schemas.openxmlformats.org/drawingml/2006/main">
+            <a:pPr algn="ctr">
+              <a:defRPr sz="2250" b="1">
+                <a:solidFill>
+                  <a:srgbClr val="64748B"/>
+                </a:solidFill>
+              </a:defRPr>
+            </a:pPr>
+            <a:r>
+              <a:rPr sz="2250" b="1">
+                <a:solidFill>
+                  <a:srgbClr val="64748B"/>
+                </a:solidFill>
+              </a:rPr>
+              <a:t>→</a:t>
+            </a:r>
+          </a:p>
+        </p:txBody>
       </p:sp>
       <p:sp>
         <p:nvSpPr>
           <p:cNvPr id="6" name="">
             <a:extLst xmlns:a="http://schemas.openxmlformats.org/drawingml/2006/main">
               <a:ext uri="{FF2B5EF4-FFF2-40B4-BE49-F238E27FC236}">
-                <a16:creationId xmlns:a16="http://schemas.microsoft.com/office/drawing/2014/main" id="{5D01BB43-31B8-4899-91CA-91A20B1E3477}"/>
-              </a:ext>
-            </a:extLst>
-          </p:cNvPr>
-          <p:cNvSpPr>
-            <a:spLocks xmlns:a="http://schemas.openxmlformats.org/drawingml/2006/main" noGrp="1"/>
-          </p:cNvSpPr>
-          <p:nvPr/>
-        </p:nvSpPr>
-        <p:spPr>
-          <a:xfrm xmlns:a="http://schemas.openxmlformats.org/drawingml/2006/main">
-            <a:off x="1104900" y="2705100"/>
-            <a:ext cx="3771900" cy="400050"/>
-          </a:xfrm>
-          <a:prstGeom xmlns:a="http://schemas.openxmlformats.org/drawingml/2006/main" prst="rect">
-            <a:avLst/>
-          </a:prstGeom>
-          <a:noFill xmlns:a="http://schemas.openxmlformats.org/drawingml/2006/main"/>
-          <a:ln xmlns:a="http://schemas.openxmlformats.org/drawingml/2006/main" w="0">
-            <a:noFill/>
-            <a:prstDash val="solid"/>
-          </a:ln>
-        </p:spPr>
-        <p:txBody>
-          <a:bodyPr xmlns:a="http://schemas.openxmlformats.org/drawingml/2006/main" anchor="t"/>
-          <a:lstStyle xmlns:a="http://schemas.openxmlformats.org/drawingml/2006/main"/>
-          <a:p xmlns:a="http://schemas.openxmlformats.org/drawingml/2006/main">
-            <a:pPr algn="l">
-              <a:defRPr sz="1500" b="0">
-                <a:solidFill>
-                  <a:srgbClr val="334155"/>
-                </a:solidFill>
-              </a:defRPr>
-            </a:pPr>
-            <a:r>
-              <a:rPr sz="1500" b="0">
-                <a:solidFill>
-                  <a:srgbClr val="334155"/>
-                </a:solidFill>
-              </a:rPr>
-              <a:t>sees memory ranges</a:t>
-            </a:r>
-          </a:p>
-        </p:txBody>
-      </p:sp>
-      <p:sp>
-        <p:nvSpPr>
-          <p:cNvPr id="7" name="">
-            <a:extLst xmlns:a="http://schemas.openxmlformats.org/drawingml/2006/main">
-              <a:ext uri="{FF2B5EF4-FFF2-40B4-BE49-F238E27FC236}">
-                <a16:creationId xmlns:a16="http://schemas.microsoft.com/office/drawing/2014/main" id="{15E6D17C-A55F-4F53-BC96-5892BD12C8FC}"/>
-              </a:ext>
-            </a:extLst>
-          </p:cNvPr>
-          <p:cNvSpPr>
-            <a:spLocks xmlns:a="http://schemas.openxmlformats.org/drawingml/2006/main" noGrp="1"/>
-          </p:cNvSpPr>
-          <p:nvPr/>
-        </p:nvSpPr>
-        <p:spPr>
-          <a:xfrm xmlns:a="http://schemas.openxmlformats.org/drawingml/2006/main">
-            <a:off x="876300" y="3295650"/>
-            <a:ext cx="85725" cy="85725"/>
-          </a:xfrm>
-          <a:prstGeom xmlns:a="http://schemas.openxmlformats.org/drawingml/2006/main" prst="ellipse">
-            <a:avLst/>
-          </a:prstGeom>
-          <a:solidFill xmlns:a="http://schemas.openxmlformats.org/drawingml/2006/main">
-            <a:srgbClr val="64748B"/>
-          </a:solidFill>
-          <a:ln xmlns:a="http://schemas.openxmlformats.org/drawingml/2006/main" w="0">
-            <a:noFill/>
-            <a:prstDash val="solid"/>
-          </a:ln>
-        </p:spPr>
-      </p:sp>
-      <p:sp>
-        <p:nvSpPr>
-          <p:cNvPr id="8" name="">
-            <a:extLst xmlns:a="http://schemas.openxmlformats.org/drawingml/2006/main">
-              <a:ext uri="{FF2B5EF4-FFF2-40B4-BE49-F238E27FC236}">
-                <a16:creationId xmlns:a16="http://schemas.microsoft.com/office/drawing/2014/main" id="{75AED1F2-493B-4BD8-ABE7-5E7F44F072AF}"/>
-              </a:ext>
-            </a:extLst>
-          </p:cNvPr>
-          <p:cNvSpPr>
-            <a:spLocks xmlns:a="http://schemas.openxmlformats.org/drawingml/2006/main" noGrp="1"/>
-          </p:cNvSpPr>
-          <p:nvPr/>
-        </p:nvSpPr>
-        <p:spPr>
-          <a:xfrm xmlns:a="http://schemas.openxmlformats.org/drawingml/2006/main">
-            <a:off x="1104900" y="3219450"/>
-            <a:ext cx="3771900" cy="400050"/>
-          </a:xfrm>
-          <a:prstGeom xmlns:a="http://schemas.openxmlformats.org/drawingml/2006/main" prst="rect">
-            <a:avLst/>
-          </a:prstGeom>
-          <a:noFill xmlns:a="http://schemas.openxmlformats.org/drawingml/2006/main"/>
-          <a:ln xmlns:a="http://schemas.openxmlformats.org/drawingml/2006/main" w="0">
-            <a:noFill/>
-            <a:prstDash val="solid"/>
-          </a:ln>
-        </p:spPr>
-        <p:txBody>
-          <a:bodyPr xmlns:a="http://schemas.openxmlformats.org/drawingml/2006/main" anchor="t"/>
-          <a:lstStyle xmlns:a="http://schemas.openxmlformats.org/drawingml/2006/main"/>
-          <a:p xmlns:a="http://schemas.openxmlformats.org/drawingml/2006/main">
-            <a:pPr algn="l">
-              <a:defRPr sz="1500" b="0">
-                <a:solidFill>
-                  <a:srgbClr val="334155"/>
-                </a:solidFill>
-              </a:defRPr>
-            </a:pPr>
-            <a:r>
-              <a:rPr sz="1500" b="0">
-                <a:solidFill>
-                  <a:srgbClr val="334155"/>
-                </a:solidFill>
-              </a:rPr>
-              <a:t>does not know the agent session</a:t>
-            </a:r>
-          </a:p>
-        </p:txBody>
-      </p:sp>
-      <p:sp>
-        <p:nvSpPr>
-          <p:cNvPr id="9" name="">
-            <a:extLst xmlns:a="http://schemas.openxmlformats.org/drawingml/2006/main">
-              <a:ext uri="{FF2B5EF4-FFF2-40B4-BE49-F238E27FC236}">
-                <a16:creationId xmlns:a16="http://schemas.microsoft.com/office/drawing/2014/main" id="{4621232E-C824-4D6B-9CD4-259D2A91EE65}"/>
-              </a:ext>
-            </a:extLst>
-          </p:cNvPr>
-          <p:cNvSpPr>
-            <a:spLocks xmlns:a="http://schemas.openxmlformats.org/drawingml/2006/main" noGrp="1"/>
-          </p:cNvSpPr>
-          <p:nvPr/>
-        </p:nvSpPr>
-        <p:spPr>
-          <a:xfrm xmlns:a="http://schemas.openxmlformats.org/drawingml/2006/main">
-            <a:off x="876300" y="3810000"/>
-            <a:ext cx="85725" cy="85725"/>
-          </a:xfrm>
-          <a:prstGeom xmlns:a="http://schemas.openxmlformats.org/drawingml/2006/main" prst="ellipse">
-            <a:avLst/>
-          </a:prstGeom>
-          <a:solidFill xmlns:a="http://schemas.openxmlformats.org/drawingml/2006/main">
-            <a:srgbClr val="64748B"/>
-          </a:solidFill>
-          <a:ln xmlns:a="http://schemas.openxmlformats.org/drawingml/2006/main" w="0">
-            <a:noFill/>
-            <a:prstDash val="solid"/>
-          </a:ln>
-        </p:spPr>
-      </p:sp>
-      <p:sp>
-        <p:nvSpPr>
-          <p:cNvPr id="10" name="">
-            <a:extLst xmlns:a="http://schemas.openxmlformats.org/drawingml/2006/main">
-              <a:ext uri="{FF2B5EF4-FFF2-40B4-BE49-F238E27FC236}">
-                <a16:creationId xmlns:a16="http://schemas.microsoft.com/office/drawing/2014/main" id="{887923AB-C389-47A4-AE18-81ABC92E0E1A}"/>
-              </a:ext>
-            </a:extLst>
-          </p:cNvPr>
-          <p:cNvSpPr>
-            <a:spLocks xmlns:a="http://schemas.openxmlformats.org/drawingml/2006/main" noGrp="1"/>
-          </p:cNvSpPr>
-          <p:nvPr/>
-        </p:nvSpPr>
-        <p:spPr>
-          <a:xfrm xmlns:a="http://schemas.openxmlformats.org/drawingml/2006/main">
-            <a:off x="1104900" y="3733800"/>
-            <a:ext cx="3771900" cy="400050"/>
-          </a:xfrm>
-          <a:prstGeom xmlns:a="http://schemas.openxmlformats.org/drawingml/2006/main" prst="rect">
-            <a:avLst/>
-          </a:prstGeom>
-          <a:noFill xmlns:a="http://schemas.openxmlformats.org/drawingml/2006/main"/>
-          <a:ln xmlns:a="http://schemas.openxmlformats.org/drawingml/2006/main" w="0">
-            <a:noFill/>
-            <a:prstDash val="solid"/>
-          </a:ln>
-        </p:spPr>
-        <p:txBody>
-          <a:bodyPr xmlns:a="http://schemas.openxmlformats.org/drawingml/2006/main" anchor="t"/>
-          <a:lstStyle xmlns:a="http://schemas.openxmlformats.org/drawingml/2006/main"/>
-          <a:p xmlns:a="http://schemas.openxmlformats.org/drawingml/2006/main">
-            <a:pPr algn="l">
-              <a:defRPr sz="1500" b="0">
-                <a:solidFill>
-                  <a:srgbClr val="334155"/>
-                </a:solidFill>
-              </a:defRPr>
-            </a:pPr>
-            <a:r>
-              <a:rPr sz="1500" b="0">
-                <a:solidFill>
-                  <a:srgbClr val="334155"/>
-                </a:solidFill>
-              </a:rPr>
-              <a:t>does not know replay deadline</a:t>
-            </a:r>
-          </a:p>
-        </p:txBody>
-      </p:sp>
-      <p:sp>
-        <p:nvSpPr>
-          <p:cNvPr id="11" name="">
-            <a:extLst xmlns:a="http://schemas.openxmlformats.org/drawingml/2006/main">
-              <a:ext uri="{FF2B5EF4-FFF2-40B4-BE49-F238E27FC236}">
-                <a16:creationId xmlns:a16="http://schemas.microsoft.com/office/drawing/2014/main" id="{C0F9230A-43FE-462A-8492-B1C3E76104CC}"/>
-              </a:ext>
-            </a:extLst>
-          </p:cNvPr>
-          <p:cNvSpPr>
-            <a:spLocks xmlns:a="http://schemas.openxmlformats.org/drawingml/2006/main" noGrp="1"/>
-          </p:cNvSpPr>
-          <p:nvPr/>
-        </p:nvSpPr>
-        <p:spPr>
-          <a:xfrm xmlns:a="http://schemas.openxmlformats.org/drawingml/2006/main">
-            <a:off x="876300" y="4324350"/>
-            <a:ext cx="85725" cy="85725"/>
-          </a:xfrm>
-          <a:prstGeom xmlns:a="http://schemas.openxmlformats.org/drawingml/2006/main" prst="ellipse">
-            <a:avLst/>
-          </a:prstGeom>
-          <a:solidFill xmlns:a="http://schemas.openxmlformats.org/drawingml/2006/main">
-            <a:srgbClr val="64748B"/>
-          </a:solidFill>
-          <a:ln xmlns:a="http://schemas.openxmlformats.org/drawingml/2006/main" w="0">
-            <a:noFill/>
-            <a:prstDash val="solid"/>
-          </a:ln>
-        </p:spPr>
-      </p:sp>
-      <p:sp>
-        <p:nvSpPr>
-          <p:cNvPr id="12" name="">
-            <a:extLst xmlns:a="http://schemas.openxmlformats.org/drawingml/2006/main">
-              <a:ext uri="{FF2B5EF4-FFF2-40B4-BE49-F238E27FC236}">
-                <a16:creationId xmlns:a16="http://schemas.microsoft.com/office/drawing/2014/main" id="{3EEC4E6B-B8D9-4381-9935-5DE9FFE9AF5C}"/>
-              </a:ext>
-            </a:extLst>
-          </p:cNvPr>
-          <p:cNvSpPr>
-            <a:spLocks xmlns:a="http://schemas.openxmlformats.org/drawingml/2006/main" noGrp="1"/>
-          </p:cNvSpPr>
-          <p:nvPr/>
-        </p:nvSpPr>
-        <p:spPr>
-          <a:xfrm xmlns:a="http://schemas.openxmlformats.org/drawingml/2006/main">
-            <a:off x="1104900" y="4248150"/>
-            <a:ext cx="3771900" cy="400050"/>
-          </a:xfrm>
-          <a:prstGeom xmlns:a="http://schemas.openxmlformats.org/drawingml/2006/main" prst="rect">
-            <a:avLst/>
-          </a:prstGeom>
-          <a:noFill xmlns:a="http://schemas.openxmlformats.org/drawingml/2006/main"/>
-          <a:ln xmlns:a="http://schemas.openxmlformats.org/drawingml/2006/main" w="0">
-            <a:noFill/>
-            <a:prstDash val="solid"/>
-          </a:ln>
-        </p:spPr>
-        <p:txBody>
-          <a:bodyPr xmlns:a="http://schemas.openxmlformats.org/drawingml/2006/main" anchor="t"/>
-          <a:lstStyle xmlns:a="http://schemas.openxmlformats.org/drawingml/2006/main"/>
-          <a:p xmlns:a="http://schemas.openxmlformats.org/drawingml/2006/main">
-            <a:pPr algn="l">
-              <a:defRPr sz="1500" b="0">
-                <a:solidFill>
-                  <a:srgbClr val="334155"/>
-                </a:solidFill>
-              </a:defRPr>
-            </a:pPr>
-            <a:r>
-              <a:rPr sz="1500" b="0">
-                <a:solidFill>
-                  <a:srgbClr val="334155"/>
-                </a:solidFill>
-              </a:rPr>
-              <a:t>does not protect useful prefetched KV</a:t>
-            </a:r>
-          </a:p>
-        </p:txBody>
-      </p:sp>
-      <p:sp>
-        <p:nvSpPr>
-          <p:cNvPr id="13" name="">
-            <a:extLst xmlns:a="http://schemas.openxmlformats.org/drawingml/2006/main">
-              <a:ext uri="{FF2B5EF4-FFF2-40B4-BE49-F238E27FC236}">
-                <a16:creationId xmlns:a16="http://schemas.microsoft.com/office/drawing/2014/main" id="{94E08F4C-EB1C-41D7-A96C-79C55BB2A616}"/>
-              </a:ext>
-            </a:extLst>
-          </p:cNvPr>
-          <p:cNvSpPr>
-            <a:spLocks xmlns:a="http://schemas.openxmlformats.org/drawingml/2006/main" noGrp="1"/>
-          </p:cNvSpPr>
-          <p:nvPr/>
-        </p:nvSpPr>
-        <p:spPr>
-          <a:xfrm xmlns:a="http://schemas.openxmlformats.org/drawingml/2006/main">
-            <a:off x="5753100" y="3086100"/>
-            <a:ext cx="666750" cy="666750"/>
-          </a:xfrm>
-          <a:prstGeom xmlns:a="http://schemas.openxmlformats.org/drawingml/2006/main" prst="rect">
-            <a:avLst/>
-          </a:prstGeom>
-          <a:noFill xmlns:a="http://schemas.openxmlformats.org/drawingml/2006/main"/>
-          <a:ln xmlns:a="http://schemas.openxmlformats.org/drawingml/2006/main" w="0">
-            <a:noFill/>
-            <a:prstDash val="solid"/>
-          </a:ln>
-        </p:spPr>
-        <p:txBody>
-          <a:bodyPr xmlns:a="http://schemas.openxmlformats.org/drawingml/2006/main" anchor="t"/>
-          <a:lstStyle xmlns:a="http://schemas.openxmlformats.org/drawingml/2006/main"/>
-          <a:p xmlns:a="http://schemas.openxmlformats.org/drawingml/2006/main">
-            <a:pPr algn="ctr">
-              <a:defRPr sz="4050" b="1">
-                <a:solidFill>
-                  <a:srgbClr val="64748B"/>
-                </a:solidFill>
-              </a:defRPr>
-            </a:pPr>
-            <a:r>
-              <a:rPr sz="4050" b="1">
-                <a:solidFill>
-                  <a:srgbClr val="64748B"/>
-                </a:solidFill>
-              </a:rPr>
-              <a:t>→</a:t>
-            </a:r>
-          </a:p>
-        </p:txBody>
-      </p:sp>
-      <p:sp>
-        <p:nvSpPr>
-          <p:cNvPr id="14" name="">
-            <a:extLst xmlns:a="http://schemas.openxmlformats.org/drawingml/2006/main">
-              <a:ext uri="{FF2B5EF4-FFF2-40B4-BE49-F238E27FC236}">
-                <a16:creationId xmlns:a16="http://schemas.microsoft.com/office/drawing/2014/main" id="{4D190A19-6641-450E-97DA-6C4CF783BCA6}"/>
-              </a:ext>
-            </a:extLst>
-          </p:cNvPr>
-          <p:cNvSpPr>
-            <a:spLocks xmlns:a="http://schemas.openxmlformats.org/drawingml/2006/main" noGrp="1"/>
-          </p:cNvSpPr>
-          <p:nvPr/>
-        </p:nvSpPr>
-        <p:spPr>
-          <a:xfrm xmlns:a="http://schemas.openxmlformats.org/drawingml/2006/main">
-            <a:off x="6686550" y="1790700"/>
-            <a:ext cx="4953000" cy="3429000"/>
+                <a16:creationId xmlns:a16="http://schemas.microsoft.com/office/drawing/2014/main" id="{EA3BAC1B-2E40-454A-BD72-11C078AF958F}"/>
+              </a:ext>
+            </a:extLst>
+          </p:cNvPr>
+          <p:cNvSpPr>
+            <a:spLocks xmlns:a="http://schemas.openxmlformats.org/drawingml/2006/main" noGrp="1"/>
+          </p:cNvSpPr>
+          <p:nvPr/>
+        </p:nvSpPr>
+        <p:spPr>
+          <a:xfrm xmlns:a="http://schemas.openxmlformats.org/drawingml/2006/main">
+            <a:off x="2724150" y="1752600"/>
+            <a:ext cx="1695450" cy="914400"/>
           </a:xfrm>
           <a:prstGeom xmlns:a="http://schemas.openxmlformats.org/drawingml/2006/main" prst="roundRect">
             <a:avLst>
-              <a:gd name="adj" fmla="val 1667"/>
+              <a:gd name="adj" fmla="val 6250"/>
             </a:avLst>
           </a:prstGeom>
           <a:solidFill xmlns:a="http://schemas.openxmlformats.org/drawingml/2006/main">
@@ -3674,22 +3463,580 @@
       </p:sp>
       <p:sp>
         <p:nvSpPr>
+          <p:cNvPr id="7" name="">
+            <a:extLst xmlns:a="http://schemas.openxmlformats.org/drawingml/2006/main">
+              <a:ext uri="{FF2B5EF4-FFF2-40B4-BE49-F238E27FC236}">
+                <a16:creationId xmlns:a16="http://schemas.microsoft.com/office/drawing/2014/main" id="{ECBF0D6F-AF21-49EE-8EF6-1F7BA4930291}"/>
+              </a:ext>
+            </a:extLst>
+          </p:cNvPr>
+          <p:cNvSpPr>
+            <a:spLocks xmlns:a="http://schemas.openxmlformats.org/drawingml/2006/main" noGrp="1"/>
+          </p:cNvSpPr>
+          <p:nvPr/>
+        </p:nvSpPr>
+        <p:spPr>
+          <a:xfrm xmlns:a="http://schemas.openxmlformats.org/drawingml/2006/main">
+            <a:off x="2857500" y="1895475"/>
+            <a:ext cx="1428750" cy="723900"/>
+          </a:xfrm>
+          <a:prstGeom xmlns:a="http://schemas.openxmlformats.org/drawingml/2006/main" prst="rect">
+            <a:avLst/>
+          </a:prstGeom>
+          <a:noFill xmlns:a="http://schemas.openxmlformats.org/drawingml/2006/main"/>
+          <a:ln xmlns:a="http://schemas.openxmlformats.org/drawingml/2006/main" w="0">
+            <a:noFill/>
+            <a:prstDash val="solid"/>
+          </a:ln>
+        </p:spPr>
+        <p:txBody>
+          <a:bodyPr xmlns:a="http://schemas.openxmlformats.org/drawingml/2006/main" anchor="ctr"/>
+          <a:lstStyle xmlns:a="http://schemas.openxmlformats.org/drawingml/2006/main"/>
+          <a:p xmlns:a="http://schemas.openxmlformats.org/drawingml/2006/main">
+            <a:pPr algn="ctr">
+              <a:defRPr sz="1500" b="1">
+                <a:solidFill>
+                  <a:srgbClr val="0F172A"/>
+                </a:solidFill>
+              </a:defRPr>
+            </a:pPr>
+            <a:r>
+              <a:rPr sz="1500" b="1">
+                <a:solidFill>
+                  <a:srgbClr val="0F172A"/>
+                </a:solidFill>
+              </a:rPr>
+              <a:t>SWE-bench /</a:t>
+            </a:r>
+          </a:p>
+          <a:p xmlns:a="http://schemas.openxmlformats.org/drawingml/2006/main">
+            <a:pPr algn="ctr">
+              <a:defRPr sz="1500" b="1">
+                <a:solidFill>
+                  <a:srgbClr val="0F172A"/>
+                </a:solidFill>
+              </a:defRPr>
+            </a:pPr>
+            <a:r>
+              <a:rPr sz="1500" b="1">
+                <a:solidFill>
+                  <a:srgbClr val="0F172A"/>
+                </a:solidFill>
+              </a:rPr>
+              <a:t>DeepAgents traces</a:t>
+            </a:r>
+          </a:p>
+        </p:txBody>
+      </p:sp>
+      <p:sp>
+        <p:nvSpPr>
+          <p:cNvPr id="8" name="">
+            <a:extLst xmlns:a="http://schemas.openxmlformats.org/drawingml/2006/main">
+              <a:ext uri="{FF2B5EF4-FFF2-40B4-BE49-F238E27FC236}">
+                <a16:creationId xmlns:a16="http://schemas.microsoft.com/office/drawing/2014/main" id="{742E2C10-0F4A-44A4-9850-DBD332945658}"/>
+              </a:ext>
+            </a:extLst>
+          </p:cNvPr>
+          <p:cNvSpPr>
+            <a:spLocks xmlns:a="http://schemas.openxmlformats.org/drawingml/2006/main" noGrp="1"/>
+          </p:cNvSpPr>
+          <p:nvPr/>
+        </p:nvSpPr>
+        <p:spPr>
+          <a:xfrm xmlns:a="http://schemas.openxmlformats.org/drawingml/2006/main">
+            <a:off x="4495800" y="2038350"/>
+            <a:ext cx="381000" cy="342900"/>
+          </a:xfrm>
+          <a:prstGeom xmlns:a="http://schemas.openxmlformats.org/drawingml/2006/main" prst="rect">
+            <a:avLst/>
+          </a:prstGeom>
+          <a:noFill xmlns:a="http://schemas.openxmlformats.org/drawingml/2006/main"/>
+          <a:ln xmlns:a="http://schemas.openxmlformats.org/drawingml/2006/main" w="0">
+            <a:noFill/>
+            <a:prstDash val="solid"/>
+          </a:ln>
+        </p:spPr>
+        <p:txBody>
+          <a:bodyPr xmlns:a="http://schemas.openxmlformats.org/drawingml/2006/main" anchor="t"/>
+          <a:lstStyle xmlns:a="http://schemas.openxmlformats.org/drawingml/2006/main"/>
+          <a:p xmlns:a="http://schemas.openxmlformats.org/drawingml/2006/main">
+            <a:pPr algn="ctr">
+              <a:defRPr sz="2250" b="1">
+                <a:solidFill>
+                  <a:srgbClr val="64748B"/>
+                </a:solidFill>
+              </a:defRPr>
+            </a:pPr>
+            <a:r>
+              <a:rPr sz="2250" b="1">
+                <a:solidFill>
+                  <a:srgbClr val="64748B"/>
+                </a:solidFill>
+              </a:rPr>
+              <a:t>→</a:t>
+            </a:r>
+          </a:p>
+        </p:txBody>
+      </p:sp>
+      <p:sp>
+        <p:nvSpPr>
+          <p:cNvPr id="9" name="">
+            <a:extLst xmlns:a="http://schemas.openxmlformats.org/drawingml/2006/main">
+              <a:ext uri="{FF2B5EF4-FFF2-40B4-BE49-F238E27FC236}">
+                <a16:creationId xmlns:a16="http://schemas.microsoft.com/office/drawing/2014/main" id="{6165527A-BBB6-46A6-AC5B-04F1BA7C7596}"/>
+              </a:ext>
+            </a:extLst>
+          </p:cNvPr>
+          <p:cNvSpPr>
+            <a:spLocks xmlns:a="http://schemas.openxmlformats.org/drawingml/2006/main" noGrp="1"/>
+          </p:cNvSpPr>
+          <p:nvPr/>
+        </p:nvSpPr>
+        <p:spPr>
+          <a:xfrm xmlns:a="http://schemas.openxmlformats.org/drawingml/2006/main">
+            <a:off x="4933950" y="1752600"/>
+            <a:ext cx="1695450" cy="914400"/>
+          </a:xfrm>
+          <a:prstGeom xmlns:a="http://schemas.openxmlformats.org/drawingml/2006/main" prst="roundRect">
+            <a:avLst>
+              <a:gd name="adj" fmla="val 6250"/>
+            </a:avLst>
+          </a:prstGeom>
+          <a:solidFill xmlns:a="http://schemas.openxmlformats.org/drawingml/2006/main">
+            <a:srgbClr val="F5F3FF"/>
+          </a:solidFill>
+          <a:ln xmlns:a="http://schemas.openxmlformats.org/drawingml/2006/main" w="9525">
+            <a:solidFill>
+              <a:srgbClr val="C4B5FD"/>
+            </a:solidFill>
+            <a:prstDash val="solid"/>
+          </a:ln>
+        </p:spPr>
+      </p:sp>
+      <p:sp>
+        <p:nvSpPr>
+          <p:cNvPr id="10" name="">
+            <a:extLst xmlns:a="http://schemas.openxmlformats.org/drawingml/2006/main">
+              <a:ext uri="{FF2B5EF4-FFF2-40B4-BE49-F238E27FC236}">
+                <a16:creationId xmlns:a16="http://schemas.microsoft.com/office/drawing/2014/main" id="{35A642AE-6B86-4F6F-8B07-248D65E71965}"/>
+              </a:ext>
+            </a:extLst>
+          </p:cNvPr>
+          <p:cNvSpPr>
+            <a:spLocks xmlns:a="http://schemas.openxmlformats.org/drawingml/2006/main" noGrp="1"/>
+          </p:cNvSpPr>
+          <p:nvPr/>
+        </p:nvSpPr>
+        <p:spPr>
+          <a:xfrm xmlns:a="http://schemas.openxmlformats.org/drawingml/2006/main">
+            <a:off x="5067300" y="1895475"/>
+            <a:ext cx="1428750" cy="723900"/>
+          </a:xfrm>
+          <a:prstGeom xmlns:a="http://schemas.openxmlformats.org/drawingml/2006/main" prst="rect">
+            <a:avLst/>
+          </a:prstGeom>
+          <a:noFill xmlns:a="http://schemas.openxmlformats.org/drawingml/2006/main"/>
+          <a:ln xmlns:a="http://schemas.openxmlformats.org/drawingml/2006/main" w="0">
+            <a:noFill/>
+            <a:prstDash val="solid"/>
+          </a:ln>
+        </p:spPr>
+        <p:txBody>
+          <a:bodyPr xmlns:a="http://schemas.openxmlformats.org/drawingml/2006/main" anchor="ctr"/>
+          <a:lstStyle xmlns:a="http://schemas.openxmlformats.org/drawingml/2006/main"/>
+          <a:p xmlns:a="http://schemas.openxmlformats.org/drawingml/2006/main">
+            <a:pPr algn="ctr">
+              <a:defRPr sz="1500" b="1">
+                <a:solidFill>
+                  <a:srgbClr val="0F172A"/>
+                </a:solidFill>
+              </a:defRPr>
+            </a:pPr>
+            <a:r>
+              <a:rPr sz="1500" b="1">
+                <a:solidFill>
+                  <a:srgbClr val="0F172A"/>
+                </a:solidFill>
+              </a:rPr>
+              <a:t>SGLang</a:t>
+            </a:r>
+          </a:p>
+          <a:p xmlns:a="http://schemas.openxmlformats.org/drawingml/2006/main">
+            <a:pPr algn="ctr">
+              <a:defRPr sz="1500" b="1">
+                <a:solidFill>
+                  <a:srgbClr val="0F172A"/>
+                </a:solidFill>
+              </a:defRPr>
+            </a:pPr>
+            <a:r>
+              <a:rPr sz="1500" b="1">
+                <a:solidFill>
+                  <a:srgbClr val="0F172A"/>
+                </a:solidFill>
+              </a:rPr>
+              <a:t>OpenAI server</a:t>
+            </a:r>
+          </a:p>
+        </p:txBody>
+      </p:sp>
+      <p:sp>
+        <p:nvSpPr>
+          <p:cNvPr id="11" name="">
+            <a:extLst xmlns:a="http://schemas.openxmlformats.org/drawingml/2006/main">
+              <a:ext uri="{FF2B5EF4-FFF2-40B4-BE49-F238E27FC236}">
+                <a16:creationId xmlns:a16="http://schemas.microsoft.com/office/drawing/2014/main" id="{A8BCA6D7-D66F-4A12-826F-826A5497A6F0}"/>
+              </a:ext>
+            </a:extLst>
+          </p:cNvPr>
+          <p:cNvSpPr>
+            <a:spLocks xmlns:a="http://schemas.openxmlformats.org/drawingml/2006/main" noGrp="1"/>
+          </p:cNvSpPr>
+          <p:nvPr/>
+        </p:nvSpPr>
+        <p:spPr>
+          <a:xfrm xmlns:a="http://schemas.openxmlformats.org/drawingml/2006/main">
+            <a:off x="6705600" y="2038350"/>
+            <a:ext cx="381000" cy="342900"/>
+          </a:xfrm>
+          <a:prstGeom xmlns:a="http://schemas.openxmlformats.org/drawingml/2006/main" prst="rect">
+            <a:avLst/>
+          </a:prstGeom>
+          <a:noFill xmlns:a="http://schemas.openxmlformats.org/drawingml/2006/main"/>
+          <a:ln xmlns:a="http://schemas.openxmlformats.org/drawingml/2006/main" w="0">
+            <a:noFill/>
+            <a:prstDash val="solid"/>
+          </a:ln>
+        </p:spPr>
+        <p:txBody>
+          <a:bodyPr xmlns:a="http://schemas.openxmlformats.org/drawingml/2006/main" anchor="t"/>
+          <a:lstStyle xmlns:a="http://schemas.openxmlformats.org/drawingml/2006/main"/>
+          <a:p xmlns:a="http://schemas.openxmlformats.org/drawingml/2006/main">
+            <a:pPr algn="ctr">
+              <a:defRPr sz="2250" b="1">
+                <a:solidFill>
+                  <a:srgbClr val="64748B"/>
+                </a:solidFill>
+              </a:defRPr>
+            </a:pPr>
+            <a:r>
+              <a:rPr sz="2250" b="1">
+                <a:solidFill>
+                  <a:srgbClr val="64748B"/>
+                </a:solidFill>
+              </a:rPr>
+              <a:t>→</a:t>
+            </a:r>
+          </a:p>
+        </p:txBody>
+      </p:sp>
+      <p:sp>
+        <p:nvSpPr>
+          <p:cNvPr id="12" name="">
+            <a:extLst xmlns:a="http://schemas.openxmlformats.org/drawingml/2006/main">
+              <a:ext uri="{FF2B5EF4-FFF2-40B4-BE49-F238E27FC236}">
+                <a16:creationId xmlns:a16="http://schemas.microsoft.com/office/drawing/2014/main" id="{9BECE95C-3025-4C7E-B35C-C10B68456BFA}"/>
+              </a:ext>
+            </a:extLst>
+          </p:cNvPr>
+          <p:cNvSpPr>
+            <a:spLocks xmlns:a="http://schemas.openxmlformats.org/drawingml/2006/main" noGrp="1"/>
+          </p:cNvSpPr>
+          <p:nvPr/>
+        </p:nvSpPr>
+        <p:spPr>
+          <a:xfrm xmlns:a="http://schemas.openxmlformats.org/drawingml/2006/main">
+            <a:off x="7143750" y="1752600"/>
+            <a:ext cx="1695450" cy="914400"/>
+          </a:xfrm>
+          <a:prstGeom xmlns:a="http://schemas.openxmlformats.org/drawingml/2006/main" prst="roundRect">
+            <a:avLst>
+              <a:gd name="adj" fmla="val 6250"/>
+            </a:avLst>
+          </a:prstGeom>
+          <a:solidFill xmlns:a="http://schemas.openxmlformats.org/drawingml/2006/main">
+            <a:srgbClr val="ECFEFF"/>
+          </a:solidFill>
+          <a:ln xmlns:a="http://schemas.openxmlformats.org/drawingml/2006/main" w="9525">
+            <a:solidFill>
+              <a:srgbClr val="67E8F9"/>
+            </a:solidFill>
+            <a:prstDash val="solid"/>
+          </a:ln>
+        </p:spPr>
+      </p:sp>
+      <p:sp>
+        <p:nvSpPr>
+          <p:cNvPr id="13" name="">
+            <a:extLst xmlns:a="http://schemas.openxmlformats.org/drawingml/2006/main">
+              <a:ext uri="{FF2B5EF4-FFF2-40B4-BE49-F238E27FC236}">
+                <a16:creationId xmlns:a16="http://schemas.microsoft.com/office/drawing/2014/main" id="{CCD669CF-D297-4A20-886F-683876E48792}"/>
+              </a:ext>
+            </a:extLst>
+          </p:cNvPr>
+          <p:cNvSpPr>
+            <a:spLocks xmlns:a="http://schemas.openxmlformats.org/drawingml/2006/main" noGrp="1"/>
+          </p:cNvSpPr>
+          <p:nvPr/>
+        </p:nvSpPr>
+        <p:spPr>
+          <a:xfrm xmlns:a="http://schemas.openxmlformats.org/drawingml/2006/main">
+            <a:off x="7277100" y="1895475"/>
+            <a:ext cx="1428750" cy="723900"/>
+          </a:xfrm>
+          <a:prstGeom xmlns:a="http://schemas.openxmlformats.org/drawingml/2006/main" prst="rect">
+            <a:avLst/>
+          </a:prstGeom>
+          <a:noFill xmlns:a="http://schemas.openxmlformats.org/drawingml/2006/main"/>
+          <a:ln xmlns:a="http://schemas.openxmlformats.org/drawingml/2006/main" w="0">
+            <a:noFill/>
+            <a:prstDash val="solid"/>
+          </a:ln>
+        </p:spPr>
+        <p:txBody>
+          <a:bodyPr xmlns:a="http://schemas.openxmlformats.org/drawingml/2006/main" anchor="ctr"/>
+          <a:lstStyle xmlns:a="http://schemas.openxmlformats.org/drawingml/2006/main"/>
+          <a:p xmlns:a="http://schemas.openxmlformats.org/drawingml/2006/main">
+            <a:pPr algn="ctr">
+              <a:defRPr sz="1500" b="1">
+                <a:solidFill>
+                  <a:srgbClr val="0F172A"/>
+                </a:solidFill>
+              </a:defRPr>
+            </a:pPr>
+            <a:r>
+              <a:rPr sz="1500" b="1">
+                <a:solidFill>
+                  <a:srgbClr val="0F172A"/>
+                </a:solidFill>
+              </a:rPr>
+              <a:t>Qwen Coder</a:t>
+            </a:r>
+          </a:p>
+          <a:p xmlns:a="http://schemas.openxmlformats.org/drawingml/2006/main">
+            <a:pPr algn="ctr">
+              <a:defRPr sz="1500" b="1">
+                <a:solidFill>
+                  <a:srgbClr val="0F172A"/>
+                </a:solidFill>
+              </a:defRPr>
+            </a:pPr>
+            <a:r>
+              <a:rPr sz="1500" b="1">
+                <a:solidFill>
+                  <a:srgbClr val="0F172A"/>
+                </a:solidFill>
+              </a:rPr>
+              <a:t>7B Instruct</a:t>
+            </a:r>
+          </a:p>
+        </p:txBody>
+      </p:sp>
+      <p:sp>
+        <p:nvSpPr>
+          <p:cNvPr id="14" name="">
+            <a:extLst xmlns:a="http://schemas.openxmlformats.org/drawingml/2006/main">
+              <a:ext uri="{FF2B5EF4-FFF2-40B4-BE49-F238E27FC236}">
+                <a16:creationId xmlns:a16="http://schemas.microsoft.com/office/drawing/2014/main" id="{E5834862-26C5-4D5C-8088-D96A016D2ED4}"/>
+              </a:ext>
+            </a:extLst>
+          </p:cNvPr>
+          <p:cNvSpPr>
+            <a:spLocks xmlns:a="http://schemas.openxmlformats.org/drawingml/2006/main" noGrp="1"/>
+          </p:cNvSpPr>
+          <p:nvPr/>
+        </p:nvSpPr>
+        <p:spPr>
+          <a:xfrm xmlns:a="http://schemas.openxmlformats.org/drawingml/2006/main">
+            <a:off x="8915400" y="2038350"/>
+            <a:ext cx="381000" cy="342900"/>
+          </a:xfrm>
+          <a:prstGeom xmlns:a="http://schemas.openxmlformats.org/drawingml/2006/main" prst="rect">
+            <a:avLst/>
+          </a:prstGeom>
+          <a:noFill xmlns:a="http://schemas.openxmlformats.org/drawingml/2006/main"/>
+          <a:ln xmlns:a="http://schemas.openxmlformats.org/drawingml/2006/main" w="0">
+            <a:noFill/>
+            <a:prstDash val="solid"/>
+          </a:ln>
+        </p:spPr>
+        <p:txBody>
+          <a:bodyPr xmlns:a="http://schemas.openxmlformats.org/drawingml/2006/main" anchor="t"/>
+          <a:lstStyle xmlns:a="http://schemas.openxmlformats.org/drawingml/2006/main"/>
+          <a:p xmlns:a="http://schemas.openxmlformats.org/drawingml/2006/main">
+            <a:pPr algn="ctr">
+              <a:defRPr sz="2250" b="1">
+                <a:solidFill>
+                  <a:srgbClr val="64748B"/>
+                </a:solidFill>
+              </a:defRPr>
+            </a:pPr>
+            <a:r>
+              <a:rPr sz="2250" b="1">
+                <a:solidFill>
+                  <a:srgbClr val="64748B"/>
+                </a:solidFill>
+              </a:rPr>
+              <a:t>→</a:t>
+            </a:r>
+          </a:p>
+        </p:txBody>
+      </p:sp>
+      <p:sp>
+        <p:nvSpPr>
           <p:cNvPr id="15" name="">
             <a:extLst xmlns:a="http://schemas.openxmlformats.org/drawingml/2006/main">
               <a:ext uri="{FF2B5EF4-FFF2-40B4-BE49-F238E27FC236}">
-                <a16:creationId xmlns:a16="http://schemas.microsoft.com/office/drawing/2014/main" id="{F064D7E3-AC43-489C-A2EE-A637224F5984}"/>
-              </a:ext>
-            </a:extLst>
-          </p:cNvPr>
-          <p:cNvSpPr>
-            <a:spLocks xmlns:a="http://schemas.openxmlformats.org/drawingml/2006/main" noGrp="1"/>
-          </p:cNvSpPr>
-          <p:nvPr/>
-        </p:nvSpPr>
-        <p:spPr>
-          <a:xfrm xmlns:a="http://schemas.openxmlformats.org/drawingml/2006/main">
-            <a:off x="6972300" y="2076450"/>
-            <a:ext cx="4000500" cy="323850"/>
+                <a16:creationId xmlns:a16="http://schemas.microsoft.com/office/drawing/2014/main" id="{88269B3C-EAA4-43B1-BC45-15875BF50027}"/>
+              </a:ext>
+            </a:extLst>
+          </p:cNvPr>
+          <p:cNvSpPr>
+            <a:spLocks xmlns:a="http://schemas.openxmlformats.org/drawingml/2006/main" noGrp="1"/>
+          </p:cNvSpPr>
+          <p:nvPr/>
+        </p:nvSpPr>
+        <p:spPr>
+          <a:xfrm xmlns:a="http://schemas.openxmlformats.org/drawingml/2006/main">
+            <a:off x="9353550" y="1752600"/>
+            <a:ext cx="1695450" cy="914400"/>
+          </a:xfrm>
+          <a:prstGeom xmlns:a="http://schemas.openxmlformats.org/drawingml/2006/main" prst="roundRect">
+            <a:avLst>
+              <a:gd name="adj" fmla="val 6250"/>
+            </a:avLst>
+          </a:prstGeom>
+          <a:solidFill xmlns:a="http://schemas.openxmlformats.org/drawingml/2006/main">
+            <a:srgbClr val="F0FDF4"/>
+          </a:solidFill>
+          <a:ln xmlns:a="http://schemas.openxmlformats.org/drawingml/2006/main" w="9525">
+            <a:solidFill>
+              <a:srgbClr val="86EFAC"/>
+            </a:solidFill>
+            <a:prstDash val="solid"/>
+          </a:ln>
+        </p:spPr>
+      </p:sp>
+      <p:sp>
+        <p:nvSpPr>
+          <p:cNvPr id="16" name="">
+            <a:extLst xmlns:a="http://schemas.openxmlformats.org/drawingml/2006/main">
+              <a:ext uri="{FF2B5EF4-FFF2-40B4-BE49-F238E27FC236}">
+                <a16:creationId xmlns:a16="http://schemas.microsoft.com/office/drawing/2014/main" id="{FE135ED4-EB5D-4FE4-B6FD-1D1456301317}"/>
+              </a:ext>
+            </a:extLst>
+          </p:cNvPr>
+          <p:cNvSpPr>
+            <a:spLocks xmlns:a="http://schemas.openxmlformats.org/drawingml/2006/main" noGrp="1"/>
+          </p:cNvSpPr>
+          <p:nvPr/>
+        </p:nvSpPr>
+        <p:spPr>
+          <a:xfrm xmlns:a="http://schemas.openxmlformats.org/drawingml/2006/main">
+            <a:off x="9486900" y="1895475"/>
+            <a:ext cx="1428750" cy="723900"/>
+          </a:xfrm>
+          <a:prstGeom xmlns:a="http://schemas.openxmlformats.org/drawingml/2006/main" prst="rect">
+            <a:avLst/>
+          </a:prstGeom>
+          <a:noFill xmlns:a="http://schemas.openxmlformats.org/drawingml/2006/main"/>
+          <a:ln xmlns:a="http://schemas.openxmlformats.org/drawingml/2006/main" w="0">
+            <a:noFill/>
+            <a:prstDash val="solid"/>
+          </a:ln>
+        </p:spPr>
+        <p:txBody>
+          <a:bodyPr xmlns:a="http://schemas.openxmlformats.org/drawingml/2006/main" anchor="ctr"/>
+          <a:lstStyle xmlns:a="http://schemas.openxmlformats.org/drawingml/2006/main"/>
+          <a:p xmlns:a="http://schemas.openxmlformats.org/drawingml/2006/main">
+            <a:pPr algn="ctr">
+              <a:defRPr sz="1500" b="1">
+                <a:solidFill>
+                  <a:srgbClr val="0F172A"/>
+                </a:solidFill>
+              </a:defRPr>
+            </a:pPr>
+            <a:r>
+              <a:rPr sz="1500" b="1">
+                <a:solidFill>
+                  <a:srgbClr val="0F172A"/>
+                </a:solidFill>
+              </a:rPr>
+              <a:t>GPU KV cache</a:t>
+            </a:r>
+          </a:p>
+          <a:p xmlns:a="http://schemas.openxmlformats.org/drawingml/2006/main">
+            <a:pPr algn="ctr">
+              <a:defRPr sz="1500" b="1">
+                <a:solidFill>
+                  <a:srgbClr val="0F172A"/>
+                </a:solidFill>
+              </a:defRPr>
+            </a:pPr>
+            <a:r>
+              <a:rPr sz="1500" b="1">
+                <a:solidFill>
+                  <a:srgbClr val="0F172A"/>
+                </a:solidFill>
+              </a:rPr>
+              <a:t>+ HiCache</a:t>
+            </a:r>
+          </a:p>
+        </p:txBody>
+      </p:sp>
+      <p:sp>
+        <p:nvSpPr>
+          <p:cNvPr id="17" name="">
+            <a:extLst xmlns:a="http://schemas.openxmlformats.org/drawingml/2006/main">
+              <a:ext uri="{FF2B5EF4-FFF2-40B4-BE49-F238E27FC236}">
+                <a16:creationId xmlns:a16="http://schemas.microsoft.com/office/drawing/2014/main" id="{889DEB2C-E9D9-4E64-99A4-42CF436C86A9}"/>
+              </a:ext>
+            </a:extLst>
+          </p:cNvPr>
+          <p:cNvSpPr>
+            <a:spLocks xmlns:a="http://schemas.openxmlformats.org/drawingml/2006/main" noGrp="1"/>
+          </p:cNvSpPr>
+          <p:nvPr/>
+        </p:nvSpPr>
+        <p:spPr>
+          <a:xfrm xmlns:a="http://schemas.openxmlformats.org/drawingml/2006/main">
+            <a:off x="666750" y="3390900"/>
+            <a:ext cx="2343150" cy="895350"/>
+          </a:xfrm>
+          <a:prstGeom xmlns:a="http://schemas.openxmlformats.org/drawingml/2006/main" prst="roundRect">
+            <a:avLst>
+              <a:gd name="adj" fmla="val 6383"/>
+            </a:avLst>
+          </a:prstGeom>
+          <a:solidFill xmlns:a="http://schemas.openxmlformats.org/drawingml/2006/main">
+            <a:srgbClr val="F8FAFC"/>
+          </a:solidFill>
+          <a:ln xmlns:a="http://schemas.openxmlformats.org/drawingml/2006/main" w="9525">
+            <a:solidFill>
+              <a:srgbClr val="CBD5E1"/>
+            </a:solidFill>
+            <a:prstDash val="solid"/>
+          </a:ln>
+        </p:spPr>
+      </p:sp>
+      <p:sp>
+        <p:nvSpPr>
+          <p:cNvPr id="18" name="">
+            <a:extLst xmlns:a="http://schemas.openxmlformats.org/drawingml/2006/main">
+              <a:ext uri="{FF2B5EF4-FFF2-40B4-BE49-F238E27FC236}">
+                <a16:creationId xmlns:a16="http://schemas.microsoft.com/office/drawing/2014/main" id="{1065E258-09D9-47CE-A725-714AD2958B02}"/>
+              </a:ext>
+            </a:extLst>
+          </p:cNvPr>
+          <p:cNvSpPr>
+            <a:spLocks xmlns:a="http://schemas.openxmlformats.org/drawingml/2006/main" noGrp="1"/>
+          </p:cNvSpPr>
+          <p:nvPr/>
+        </p:nvSpPr>
+        <p:spPr>
+          <a:xfrm xmlns:a="http://schemas.openxmlformats.org/drawingml/2006/main">
+            <a:off x="819150" y="3524250"/>
+            <a:ext cx="2038350" cy="209550"/>
           </a:xfrm>
           <a:prstGeom xmlns:a="http://schemas.openxmlformats.org/drawingml/2006/main" prst="rect">
             <a:avLst/>
@@ -3705,72 +4052,126 @@
           <a:lstStyle xmlns:a="http://schemas.openxmlformats.org/drawingml/2006/main"/>
           <a:p xmlns:a="http://schemas.openxmlformats.org/drawingml/2006/main">
             <a:pPr algn="l">
-              <a:defRPr sz="1950" b="1">
+              <a:defRPr sz="1125" b="1">
+                <a:solidFill>
+                  <a:srgbClr val="64748B"/>
+                </a:solidFill>
+              </a:defRPr>
+            </a:pPr>
+            <a:r>
+              <a:rPr sz="1125" b="1">
+                <a:solidFill>
+                  <a:srgbClr val="64748B"/>
+                </a:solidFill>
+              </a:rPr>
+              <a:t>GPU</a:t>
+            </a:r>
+          </a:p>
+        </p:txBody>
+      </p:sp>
+      <p:sp>
+        <p:nvSpPr>
+          <p:cNvPr id="19" name="">
+            <a:extLst xmlns:a="http://schemas.openxmlformats.org/drawingml/2006/main">
+              <a:ext uri="{FF2B5EF4-FFF2-40B4-BE49-F238E27FC236}">
+                <a16:creationId xmlns:a16="http://schemas.microsoft.com/office/drawing/2014/main" id="{8538A6C4-9B9D-43E4-B569-5B697E9A7D67}"/>
+              </a:ext>
+            </a:extLst>
+          </p:cNvPr>
+          <p:cNvSpPr>
+            <a:spLocks xmlns:a="http://schemas.openxmlformats.org/drawingml/2006/main" noGrp="1"/>
+          </p:cNvSpPr>
+          <p:nvPr/>
+        </p:nvSpPr>
+        <p:spPr>
+          <a:xfrm xmlns:a="http://schemas.openxmlformats.org/drawingml/2006/main">
+            <a:off x="819150" y="3790950"/>
+            <a:ext cx="2038350" cy="400050"/>
+          </a:xfrm>
+          <a:prstGeom xmlns:a="http://schemas.openxmlformats.org/drawingml/2006/main" prst="rect">
+            <a:avLst/>
+          </a:prstGeom>
+          <a:noFill xmlns:a="http://schemas.openxmlformats.org/drawingml/2006/main"/>
+          <a:ln xmlns:a="http://schemas.openxmlformats.org/drawingml/2006/main" w="0">
+            <a:noFill/>
+            <a:prstDash val="solid"/>
+          </a:ln>
+        </p:spPr>
+        <p:txBody>
+          <a:bodyPr xmlns:a="http://schemas.openxmlformats.org/drawingml/2006/main" anchor="t"/>
+          <a:lstStyle xmlns:a="http://schemas.openxmlformats.org/drawingml/2006/main"/>
+          <a:p xmlns:a="http://schemas.openxmlformats.org/drawingml/2006/main">
+            <a:pPr algn="l">
+              <a:defRPr sz="1575" b="1">
                 <a:solidFill>
                   <a:srgbClr val="0F172A"/>
                 </a:solidFill>
               </a:defRPr>
             </a:pPr>
             <a:r>
-              <a:rPr sz="1950" b="1">
+              <a:rPr sz="1575" b="1">
                 <a:solidFill>
                   <a:srgbClr val="0F172A"/>
                 </a:solidFill>
               </a:rPr>
-              <a:t>Hint-aware movement</a:t>
-            </a:r>
-          </a:p>
-        </p:txBody>
-      </p:sp>
-      <p:sp>
-        <p:nvSpPr>
-          <p:cNvPr id="16" name="">
-            <a:extLst xmlns:a="http://schemas.openxmlformats.org/drawingml/2006/main">
-              <a:ext uri="{FF2B5EF4-FFF2-40B4-BE49-F238E27FC236}">
-                <a16:creationId xmlns:a16="http://schemas.microsoft.com/office/drawing/2014/main" id="{F5B7FD58-A639-478D-BD1C-08D1B331A1D3}"/>
-              </a:ext>
-            </a:extLst>
-          </p:cNvPr>
-          <p:cNvSpPr>
-            <a:spLocks xmlns:a="http://schemas.openxmlformats.org/drawingml/2006/main" noGrp="1"/>
-          </p:cNvSpPr>
-          <p:nvPr/>
-        </p:nvSpPr>
-        <p:spPr>
-          <a:xfrm xmlns:a="http://schemas.openxmlformats.org/drawingml/2006/main">
-            <a:off x="7010400" y="2781300"/>
-            <a:ext cx="85725" cy="85725"/>
-          </a:xfrm>
-          <a:prstGeom xmlns:a="http://schemas.openxmlformats.org/drawingml/2006/main" prst="ellipse">
-            <a:avLst/>
+              <a:t>NVIDIA A10G class</a:t>
+            </a:r>
+          </a:p>
+        </p:txBody>
+      </p:sp>
+      <p:sp>
+        <p:nvSpPr>
+          <p:cNvPr id="20" name="">
+            <a:extLst xmlns:a="http://schemas.openxmlformats.org/drawingml/2006/main">
+              <a:ext uri="{FF2B5EF4-FFF2-40B4-BE49-F238E27FC236}">
+                <a16:creationId xmlns:a16="http://schemas.microsoft.com/office/drawing/2014/main" id="{61F94492-CC60-4B04-A783-33590DF5C96B}"/>
+              </a:ext>
+            </a:extLst>
+          </p:cNvPr>
+          <p:cNvSpPr>
+            <a:spLocks xmlns:a="http://schemas.openxmlformats.org/drawingml/2006/main" noGrp="1"/>
+          </p:cNvSpPr>
+          <p:nvPr/>
+        </p:nvSpPr>
+        <p:spPr>
+          <a:xfrm xmlns:a="http://schemas.openxmlformats.org/drawingml/2006/main">
+            <a:off x="3238500" y="3390900"/>
+            <a:ext cx="2343150" cy="895350"/>
+          </a:xfrm>
+          <a:prstGeom xmlns:a="http://schemas.openxmlformats.org/drawingml/2006/main" prst="roundRect">
+            <a:avLst>
+              <a:gd name="adj" fmla="val 6383"/>
+            </a:avLst>
           </a:prstGeom>
           <a:solidFill xmlns:a="http://schemas.openxmlformats.org/drawingml/2006/main">
-            <a:srgbClr val="2563EB"/>
+            <a:srgbClr val="F8FAFC"/>
           </a:solidFill>
-          <a:ln xmlns:a="http://schemas.openxmlformats.org/drawingml/2006/main" w="0">
-            <a:noFill/>
-            <a:prstDash val="solid"/>
-          </a:ln>
-        </p:spPr>
-      </p:sp>
-      <p:sp>
-        <p:nvSpPr>
-          <p:cNvPr id="17" name="">
-            <a:extLst xmlns:a="http://schemas.openxmlformats.org/drawingml/2006/main">
-              <a:ext uri="{FF2B5EF4-FFF2-40B4-BE49-F238E27FC236}">
-                <a16:creationId xmlns:a16="http://schemas.microsoft.com/office/drawing/2014/main" id="{E46B2366-7F83-43DF-87C5-0D734CE8A58E}"/>
-              </a:ext>
-            </a:extLst>
-          </p:cNvPr>
-          <p:cNvSpPr>
-            <a:spLocks xmlns:a="http://schemas.openxmlformats.org/drawingml/2006/main" noGrp="1"/>
-          </p:cNvSpPr>
-          <p:nvPr/>
-        </p:nvSpPr>
-        <p:spPr>
-          <a:xfrm xmlns:a="http://schemas.openxmlformats.org/drawingml/2006/main">
-            <a:off x="7239000" y="2705100"/>
-            <a:ext cx="3771900" cy="400050"/>
+          <a:ln xmlns:a="http://schemas.openxmlformats.org/drawingml/2006/main" w="9525">
+            <a:solidFill>
+              <a:srgbClr val="CBD5E1"/>
+            </a:solidFill>
+            <a:prstDash val="solid"/>
+          </a:ln>
+        </p:spPr>
+      </p:sp>
+      <p:sp>
+        <p:nvSpPr>
+          <p:cNvPr id="21" name="">
+            <a:extLst xmlns:a="http://schemas.openxmlformats.org/drawingml/2006/main">
+              <a:ext uri="{FF2B5EF4-FFF2-40B4-BE49-F238E27FC236}">
+                <a16:creationId xmlns:a16="http://schemas.microsoft.com/office/drawing/2014/main" id="{54CE13CA-14BD-4ECB-A21B-BDD93603921A}"/>
+              </a:ext>
+            </a:extLst>
+          </p:cNvPr>
+          <p:cNvSpPr>
+            <a:spLocks xmlns:a="http://schemas.openxmlformats.org/drawingml/2006/main" noGrp="1"/>
+          </p:cNvSpPr>
+          <p:nvPr/>
+        </p:nvSpPr>
+        <p:spPr>
+          <a:xfrm xmlns:a="http://schemas.openxmlformats.org/drawingml/2006/main">
+            <a:off x="3390900" y="3524250"/>
+            <a:ext cx="2038350" cy="209550"/>
           </a:xfrm>
           <a:prstGeom xmlns:a="http://schemas.openxmlformats.org/drawingml/2006/main" prst="rect">
             <a:avLst/>
@@ -3786,72 +4187,126 @@
           <a:lstStyle xmlns:a="http://schemas.openxmlformats.org/drawingml/2006/main"/>
           <a:p xmlns:a="http://schemas.openxmlformats.org/drawingml/2006/main">
             <a:pPr algn="l">
-              <a:defRPr sz="1500" b="0">
-                <a:solidFill>
-                  <a:srgbClr val="334155"/>
-                </a:solidFill>
-              </a:defRPr>
-            </a:pPr>
-            <a:r>
-              <a:rPr sz="1500" b="0">
-                <a:solidFill>
-                  <a:srgbClr val="334155"/>
-                </a:solidFill>
-              </a:rPr>
-              <a:t>tags KV by session and priority</a:t>
-            </a:r>
-          </a:p>
-        </p:txBody>
-      </p:sp>
-      <p:sp>
-        <p:nvSpPr>
-          <p:cNvPr id="18" name="">
-            <a:extLst xmlns:a="http://schemas.openxmlformats.org/drawingml/2006/main">
-              <a:ext uri="{FF2B5EF4-FFF2-40B4-BE49-F238E27FC236}">
-                <a16:creationId xmlns:a16="http://schemas.microsoft.com/office/drawing/2014/main" id="{063C8164-8C0C-4E53-B48F-C72F28B5142F}"/>
-              </a:ext>
-            </a:extLst>
-          </p:cNvPr>
-          <p:cNvSpPr>
-            <a:spLocks xmlns:a="http://schemas.openxmlformats.org/drawingml/2006/main" noGrp="1"/>
-          </p:cNvSpPr>
-          <p:nvPr/>
-        </p:nvSpPr>
-        <p:spPr>
-          <a:xfrm xmlns:a="http://schemas.openxmlformats.org/drawingml/2006/main">
-            <a:off x="7010400" y="3295650"/>
-            <a:ext cx="85725" cy="85725"/>
-          </a:xfrm>
-          <a:prstGeom xmlns:a="http://schemas.openxmlformats.org/drawingml/2006/main" prst="ellipse">
-            <a:avLst/>
+              <a:defRPr sz="1125" b="1">
+                <a:solidFill>
+                  <a:srgbClr val="64748B"/>
+                </a:solidFill>
+              </a:defRPr>
+            </a:pPr>
+            <a:r>
+              <a:rPr sz="1125" b="1">
+                <a:solidFill>
+                  <a:srgbClr val="64748B"/>
+                </a:solidFill>
+              </a:rPr>
+              <a:t>GPU memory</a:t>
+            </a:r>
+          </a:p>
+        </p:txBody>
+      </p:sp>
+      <p:sp>
+        <p:nvSpPr>
+          <p:cNvPr id="22" name="">
+            <a:extLst xmlns:a="http://schemas.openxmlformats.org/drawingml/2006/main">
+              <a:ext uri="{FF2B5EF4-FFF2-40B4-BE49-F238E27FC236}">
+                <a16:creationId xmlns:a16="http://schemas.microsoft.com/office/drawing/2014/main" id="{6DC72D05-0552-45D2-8F90-69F7D878CFFC}"/>
+              </a:ext>
+            </a:extLst>
+          </p:cNvPr>
+          <p:cNvSpPr>
+            <a:spLocks xmlns:a="http://schemas.openxmlformats.org/drawingml/2006/main" noGrp="1"/>
+          </p:cNvSpPr>
+          <p:nvPr/>
+        </p:nvSpPr>
+        <p:spPr>
+          <a:xfrm xmlns:a="http://schemas.openxmlformats.org/drawingml/2006/main">
+            <a:off x="3390900" y="3790950"/>
+            <a:ext cx="2038350" cy="400050"/>
+          </a:xfrm>
+          <a:prstGeom xmlns:a="http://schemas.openxmlformats.org/drawingml/2006/main" prst="rect">
+            <a:avLst/>
+          </a:prstGeom>
+          <a:noFill xmlns:a="http://schemas.openxmlformats.org/drawingml/2006/main"/>
+          <a:ln xmlns:a="http://schemas.openxmlformats.org/drawingml/2006/main" w="0">
+            <a:noFill/>
+            <a:prstDash val="solid"/>
+          </a:ln>
+        </p:spPr>
+        <p:txBody>
+          <a:bodyPr xmlns:a="http://schemas.openxmlformats.org/drawingml/2006/main" anchor="t"/>
+          <a:lstStyle xmlns:a="http://schemas.openxmlformats.org/drawingml/2006/main"/>
+          <a:p xmlns:a="http://schemas.openxmlformats.org/drawingml/2006/main">
+            <a:pPr algn="l">
+              <a:defRPr sz="1575" b="1">
+                <a:solidFill>
+                  <a:srgbClr val="0F172A"/>
+                </a:solidFill>
+              </a:defRPr>
+            </a:pPr>
+            <a:r>
+              <a:rPr sz="1575" b="1">
+                <a:solidFill>
+                  <a:srgbClr val="0F172A"/>
+                </a:solidFill>
+              </a:rPr>
+              <a:t>24 GB GDDR6</a:t>
+            </a:r>
+          </a:p>
+        </p:txBody>
+      </p:sp>
+      <p:sp>
+        <p:nvSpPr>
+          <p:cNvPr id="23" name="">
+            <a:extLst xmlns:a="http://schemas.openxmlformats.org/drawingml/2006/main">
+              <a:ext uri="{FF2B5EF4-FFF2-40B4-BE49-F238E27FC236}">
+                <a16:creationId xmlns:a16="http://schemas.microsoft.com/office/drawing/2014/main" id="{22F17FD1-088C-4ED1-B362-98C026E35639}"/>
+              </a:ext>
+            </a:extLst>
+          </p:cNvPr>
+          <p:cNvSpPr>
+            <a:spLocks xmlns:a="http://schemas.openxmlformats.org/drawingml/2006/main" noGrp="1"/>
+          </p:cNvSpPr>
+          <p:nvPr/>
+        </p:nvSpPr>
+        <p:spPr>
+          <a:xfrm xmlns:a="http://schemas.openxmlformats.org/drawingml/2006/main">
+            <a:off x="5810250" y="3390900"/>
+            <a:ext cx="2343150" cy="895350"/>
+          </a:xfrm>
+          <a:prstGeom xmlns:a="http://schemas.openxmlformats.org/drawingml/2006/main" prst="roundRect">
+            <a:avLst>
+              <a:gd name="adj" fmla="val 6383"/>
+            </a:avLst>
           </a:prstGeom>
           <a:solidFill xmlns:a="http://schemas.openxmlformats.org/drawingml/2006/main">
-            <a:srgbClr val="A855F7"/>
+            <a:srgbClr val="FFF7ED"/>
           </a:solidFill>
-          <a:ln xmlns:a="http://schemas.openxmlformats.org/drawingml/2006/main" w="0">
-            <a:noFill/>
-            <a:prstDash val="solid"/>
-          </a:ln>
-        </p:spPr>
-      </p:sp>
-      <p:sp>
-        <p:nvSpPr>
-          <p:cNvPr id="19" name="">
-            <a:extLst xmlns:a="http://schemas.openxmlformats.org/drawingml/2006/main">
-              <a:ext uri="{FF2B5EF4-FFF2-40B4-BE49-F238E27FC236}">
-                <a16:creationId xmlns:a16="http://schemas.microsoft.com/office/drawing/2014/main" id="{8462A991-5144-4887-BD51-FB468D56540D}"/>
-              </a:ext>
-            </a:extLst>
-          </p:cNvPr>
-          <p:cNvSpPr>
-            <a:spLocks xmlns:a="http://schemas.openxmlformats.org/drawingml/2006/main" noGrp="1"/>
-          </p:cNvSpPr>
-          <p:nvPr/>
-        </p:nvSpPr>
-        <p:spPr>
-          <a:xfrm xmlns:a="http://schemas.openxmlformats.org/drawingml/2006/main">
-            <a:off x="7239000" y="3219450"/>
-            <a:ext cx="3771900" cy="400050"/>
+          <a:ln xmlns:a="http://schemas.openxmlformats.org/drawingml/2006/main" w="9525">
+            <a:solidFill>
+              <a:srgbClr val="FED7AA"/>
+            </a:solidFill>
+            <a:prstDash val="solid"/>
+          </a:ln>
+        </p:spPr>
+      </p:sp>
+      <p:sp>
+        <p:nvSpPr>
+          <p:cNvPr id="24" name="">
+            <a:extLst xmlns:a="http://schemas.openxmlformats.org/drawingml/2006/main">
+              <a:ext uri="{FF2B5EF4-FFF2-40B4-BE49-F238E27FC236}">
+                <a16:creationId xmlns:a16="http://schemas.microsoft.com/office/drawing/2014/main" id="{FDD4CA0F-6156-469D-ACF1-5D1403B11CA8}"/>
+              </a:ext>
+            </a:extLst>
+          </p:cNvPr>
+          <p:cNvSpPr>
+            <a:spLocks xmlns:a="http://schemas.openxmlformats.org/drawingml/2006/main" noGrp="1"/>
+          </p:cNvSpPr>
+          <p:nvPr/>
+        </p:nvSpPr>
+        <p:spPr>
+          <a:xfrm xmlns:a="http://schemas.openxmlformats.org/drawingml/2006/main">
+            <a:off x="5962650" y="3524250"/>
+            <a:ext cx="2038350" cy="209550"/>
           </a:xfrm>
           <a:prstGeom xmlns:a="http://schemas.openxmlformats.org/drawingml/2006/main" prst="rect">
             <a:avLst/>
@@ -3867,72 +4322,126 @@
           <a:lstStyle xmlns:a="http://schemas.openxmlformats.org/drawingml/2006/main"/>
           <a:p xmlns:a="http://schemas.openxmlformats.org/drawingml/2006/main">
             <a:pPr algn="l">
-              <a:defRPr sz="1500" b="0">
-                <a:solidFill>
-                  <a:srgbClr val="334155"/>
-                </a:solidFill>
-              </a:defRPr>
-            </a:pPr>
-            <a:r>
-              <a:rPr sz="1500" b="0">
-                <a:solidFill>
-                  <a:srgbClr val="334155"/>
-                </a:solidFill>
-              </a:rPr>
-              <a:t>schedules against replay deadlines</a:t>
-            </a:r>
-          </a:p>
-        </p:txBody>
-      </p:sp>
-      <p:sp>
-        <p:nvSpPr>
-          <p:cNvPr id="20" name="">
-            <a:extLst xmlns:a="http://schemas.openxmlformats.org/drawingml/2006/main">
-              <a:ext uri="{FF2B5EF4-FFF2-40B4-BE49-F238E27FC236}">
-                <a16:creationId xmlns:a16="http://schemas.microsoft.com/office/drawing/2014/main" id="{B78EF5C9-1024-45F4-B8FB-852282DA1E4B}"/>
-              </a:ext>
-            </a:extLst>
-          </p:cNvPr>
-          <p:cNvSpPr>
-            <a:spLocks xmlns:a="http://schemas.openxmlformats.org/drawingml/2006/main" noGrp="1"/>
-          </p:cNvSpPr>
-          <p:nvPr/>
-        </p:nvSpPr>
-        <p:spPr>
-          <a:xfrm xmlns:a="http://schemas.openxmlformats.org/drawingml/2006/main">
-            <a:off x="7010400" y="3810000"/>
-            <a:ext cx="85725" cy="85725"/>
-          </a:xfrm>
-          <a:prstGeom xmlns:a="http://schemas.openxmlformats.org/drawingml/2006/main" prst="ellipse">
-            <a:avLst/>
+              <a:defRPr sz="1125" b="1">
+                <a:solidFill>
+                  <a:srgbClr val="64748B"/>
+                </a:solidFill>
+              </a:defRPr>
+            </a:pPr>
+            <a:r>
+              <a:rPr sz="1125" b="1">
+                <a:solidFill>
+                  <a:srgbClr val="64748B"/>
+                </a:solidFill>
+              </a:rPr>
+              <a:t>HiCache host KV shelf</a:t>
+            </a:r>
+          </a:p>
+        </p:txBody>
+      </p:sp>
+      <p:sp>
+        <p:nvSpPr>
+          <p:cNvPr id="25" name="">
+            <a:extLst xmlns:a="http://schemas.openxmlformats.org/drawingml/2006/main">
+              <a:ext uri="{FF2B5EF4-FFF2-40B4-BE49-F238E27FC236}">
+                <a16:creationId xmlns:a16="http://schemas.microsoft.com/office/drawing/2014/main" id="{A2DC7A80-EAC3-4C1C-AA0B-D48325846CC8}"/>
+              </a:ext>
+            </a:extLst>
+          </p:cNvPr>
+          <p:cNvSpPr>
+            <a:spLocks xmlns:a="http://schemas.openxmlformats.org/drawingml/2006/main" noGrp="1"/>
+          </p:cNvSpPr>
+          <p:nvPr/>
+        </p:nvSpPr>
+        <p:spPr>
+          <a:xfrm xmlns:a="http://schemas.openxmlformats.org/drawingml/2006/main">
+            <a:off x="5962650" y="3790950"/>
+            <a:ext cx="2038350" cy="400050"/>
+          </a:xfrm>
+          <a:prstGeom xmlns:a="http://schemas.openxmlformats.org/drawingml/2006/main" prst="rect">
+            <a:avLst/>
+          </a:prstGeom>
+          <a:noFill xmlns:a="http://schemas.openxmlformats.org/drawingml/2006/main"/>
+          <a:ln xmlns:a="http://schemas.openxmlformats.org/drawingml/2006/main" w="0">
+            <a:noFill/>
+            <a:prstDash val="solid"/>
+          </a:ln>
+        </p:spPr>
+        <p:txBody>
+          <a:bodyPr xmlns:a="http://schemas.openxmlformats.org/drawingml/2006/main" anchor="t"/>
+          <a:lstStyle xmlns:a="http://schemas.openxmlformats.org/drawingml/2006/main"/>
+          <a:p xmlns:a="http://schemas.openxmlformats.org/drawingml/2006/main">
+            <a:pPr algn="l">
+              <a:defRPr sz="1575" b="1">
+                <a:solidFill>
+                  <a:srgbClr val="0F172A"/>
+                </a:solidFill>
+              </a:defRPr>
+            </a:pPr>
+            <a:r>
+              <a:rPr sz="1575" b="1">
+                <a:solidFill>
+                  <a:srgbClr val="0F172A"/>
+                </a:solidFill>
+              </a:rPr>
+              <a:t>16 GB configured</a:t>
+            </a:r>
+          </a:p>
+        </p:txBody>
+      </p:sp>
+      <p:sp>
+        <p:nvSpPr>
+          <p:cNvPr id="26" name="">
+            <a:extLst xmlns:a="http://schemas.openxmlformats.org/drawingml/2006/main">
+              <a:ext uri="{FF2B5EF4-FFF2-40B4-BE49-F238E27FC236}">
+                <a16:creationId xmlns:a16="http://schemas.microsoft.com/office/drawing/2014/main" id="{ADFFCE07-20A1-486F-BA59-05E53EC68E06}"/>
+              </a:ext>
+            </a:extLst>
+          </p:cNvPr>
+          <p:cNvSpPr>
+            <a:spLocks xmlns:a="http://schemas.openxmlformats.org/drawingml/2006/main" noGrp="1"/>
+          </p:cNvSpPr>
+          <p:nvPr/>
+        </p:nvSpPr>
+        <p:spPr>
+          <a:xfrm xmlns:a="http://schemas.openxmlformats.org/drawingml/2006/main">
+            <a:off x="8382000" y="3390900"/>
+            <a:ext cx="2343150" cy="895350"/>
+          </a:xfrm>
+          <a:prstGeom xmlns:a="http://schemas.openxmlformats.org/drawingml/2006/main" prst="roundRect">
+            <a:avLst>
+              <a:gd name="adj" fmla="val 6383"/>
+            </a:avLst>
           </a:prstGeom>
           <a:solidFill xmlns:a="http://schemas.openxmlformats.org/drawingml/2006/main">
-            <a:srgbClr val="06B6D4"/>
+            <a:srgbClr val="F8FAFC"/>
           </a:solidFill>
-          <a:ln xmlns:a="http://schemas.openxmlformats.org/drawingml/2006/main" w="0">
-            <a:noFill/>
-            <a:prstDash val="solid"/>
-          </a:ln>
-        </p:spPr>
-      </p:sp>
-      <p:sp>
-        <p:nvSpPr>
-          <p:cNvPr id="21" name="">
-            <a:extLst xmlns:a="http://schemas.openxmlformats.org/drawingml/2006/main">
-              <a:ext uri="{FF2B5EF4-FFF2-40B4-BE49-F238E27FC236}">
-                <a16:creationId xmlns:a16="http://schemas.microsoft.com/office/drawing/2014/main" id="{BC9514C3-1E44-46AD-A651-D137C9269369}"/>
-              </a:ext>
-            </a:extLst>
-          </p:cNvPr>
-          <p:cNvSpPr>
-            <a:spLocks xmlns:a="http://schemas.openxmlformats.org/drawingml/2006/main" noGrp="1"/>
-          </p:cNvSpPr>
-          <p:nvPr/>
-        </p:nvSpPr>
-        <p:spPr>
-          <a:xfrm xmlns:a="http://schemas.openxmlformats.org/drawingml/2006/main">
-            <a:off x="7239000" y="3733800"/>
-            <a:ext cx="3771900" cy="400050"/>
+          <a:ln xmlns:a="http://schemas.openxmlformats.org/drawingml/2006/main" w="9525">
+            <a:solidFill>
+              <a:srgbClr val="CBD5E1"/>
+            </a:solidFill>
+            <a:prstDash val="solid"/>
+          </a:ln>
+        </p:spPr>
+      </p:sp>
+      <p:sp>
+        <p:nvSpPr>
+          <p:cNvPr id="27" name="">
+            <a:extLst xmlns:a="http://schemas.openxmlformats.org/drawingml/2006/main">
+              <a:ext uri="{FF2B5EF4-FFF2-40B4-BE49-F238E27FC236}">
+                <a16:creationId xmlns:a16="http://schemas.microsoft.com/office/drawing/2014/main" id="{6D8C4E72-9451-447F-B294-9B40C02B25ED}"/>
+              </a:ext>
+            </a:extLst>
+          </p:cNvPr>
+          <p:cNvSpPr>
+            <a:spLocks xmlns:a="http://schemas.openxmlformats.org/drawingml/2006/main" noGrp="1"/>
+          </p:cNvSpPr>
+          <p:nvPr/>
+        </p:nvSpPr>
+        <p:spPr>
+          <a:xfrm xmlns:a="http://schemas.openxmlformats.org/drawingml/2006/main">
+            <a:off x="8534400" y="3524250"/>
+            <a:ext cx="2038350" cy="209550"/>
           </a:xfrm>
           <a:prstGeom xmlns:a="http://schemas.openxmlformats.org/drawingml/2006/main" prst="rect">
             <a:avLst/>
@@ -3948,72 +4457,126 @@
           <a:lstStyle xmlns:a="http://schemas.openxmlformats.org/drawingml/2006/main"/>
           <a:p xmlns:a="http://schemas.openxmlformats.org/drawingml/2006/main">
             <a:pPr algn="l">
-              <a:defRPr sz="1500" b="0">
-                <a:solidFill>
-                  <a:srgbClr val="334155"/>
-                </a:solidFill>
-              </a:defRPr>
-            </a:pPr>
-            <a:r>
-              <a:rPr sz="1500" b="0">
-                <a:solidFill>
-                  <a:srgbClr val="334155"/>
-                </a:solidFill>
-              </a:rPr>
-              <a:t>moves hot KV before replay</a:t>
-            </a:r>
-          </a:p>
-        </p:txBody>
-      </p:sp>
-      <p:sp>
-        <p:nvSpPr>
-          <p:cNvPr id="22" name="">
-            <a:extLst xmlns:a="http://schemas.openxmlformats.org/drawingml/2006/main">
-              <a:ext uri="{FF2B5EF4-FFF2-40B4-BE49-F238E27FC236}">
-                <a16:creationId xmlns:a16="http://schemas.microsoft.com/office/drawing/2014/main" id="{BF7A70BF-7DD1-4696-B309-DF85A47E2B77}"/>
-              </a:ext>
-            </a:extLst>
-          </p:cNvPr>
-          <p:cNvSpPr>
-            <a:spLocks xmlns:a="http://schemas.openxmlformats.org/drawingml/2006/main" noGrp="1"/>
-          </p:cNvSpPr>
-          <p:nvPr/>
-        </p:nvSpPr>
-        <p:spPr>
-          <a:xfrm xmlns:a="http://schemas.openxmlformats.org/drawingml/2006/main">
-            <a:off x="7010400" y="4324350"/>
-            <a:ext cx="85725" cy="85725"/>
-          </a:xfrm>
-          <a:prstGeom xmlns:a="http://schemas.openxmlformats.org/drawingml/2006/main" prst="ellipse">
-            <a:avLst/>
+              <a:defRPr sz="1125" b="1">
+                <a:solidFill>
+                  <a:srgbClr val="64748B"/>
+                </a:solidFill>
+              </a:defRPr>
+            </a:pPr>
+            <a:r>
+              <a:rPr sz="1125" b="1">
+                <a:solidFill>
+                  <a:srgbClr val="64748B"/>
+                </a:solidFill>
+              </a:rPr>
+              <a:t>Context length</a:t>
+            </a:r>
+          </a:p>
+        </p:txBody>
+      </p:sp>
+      <p:sp>
+        <p:nvSpPr>
+          <p:cNvPr id="28" name="">
+            <a:extLst xmlns:a="http://schemas.openxmlformats.org/drawingml/2006/main">
+              <a:ext uri="{FF2B5EF4-FFF2-40B4-BE49-F238E27FC236}">
+                <a16:creationId xmlns:a16="http://schemas.microsoft.com/office/drawing/2014/main" id="{405CA7D9-D69B-46F2-BFCF-88D57F1575A5}"/>
+              </a:ext>
+            </a:extLst>
+          </p:cNvPr>
+          <p:cNvSpPr>
+            <a:spLocks xmlns:a="http://schemas.openxmlformats.org/drawingml/2006/main" noGrp="1"/>
+          </p:cNvSpPr>
+          <p:nvPr/>
+        </p:nvSpPr>
+        <p:spPr>
+          <a:xfrm xmlns:a="http://schemas.openxmlformats.org/drawingml/2006/main">
+            <a:off x="8534400" y="3790950"/>
+            <a:ext cx="2038350" cy="400050"/>
+          </a:xfrm>
+          <a:prstGeom xmlns:a="http://schemas.openxmlformats.org/drawingml/2006/main" prst="rect">
+            <a:avLst/>
+          </a:prstGeom>
+          <a:noFill xmlns:a="http://schemas.openxmlformats.org/drawingml/2006/main"/>
+          <a:ln xmlns:a="http://schemas.openxmlformats.org/drawingml/2006/main" w="0">
+            <a:noFill/>
+            <a:prstDash val="solid"/>
+          </a:ln>
+        </p:spPr>
+        <p:txBody>
+          <a:bodyPr xmlns:a="http://schemas.openxmlformats.org/drawingml/2006/main" anchor="t"/>
+          <a:lstStyle xmlns:a="http://schemas.openxmlformats.org/drawingml/2006/main"/>
+          <a:p xmlns:a="http://schemas.openxmlformats.org/drawingml/2006/main">
+            <a:pPr algn="l">
+              <a:defRPr sz="1575" b="1">
+                <a:solidFill>
+                  <a:srgbClr val="0F172A"/>
+                </a:solidFill>
+              </a:defRPr>
+            </a:pPr>
+            <a:r>
+              <a:rPr sz="1575" b="1">
+                <a:solidFill>
+                  <a:srgbClr val="0F172A"/>
+                </a:solidFill>
+              </a:rPr>
+              <a:t>32,768 tokens</a:t>
+            </a:r>
+          </a:p>
+        </p:txBody>
+      </p:sp>
+      <p:sp>
+        <p:nvSpPr>
+          <p:cNvPr id="29" name="">
+            <a:extLst xmlns:a="http://schemas.openxmlformats.org/drawingml/2006/main">
+              <a:ext uri="{FF2B5EF4-FFF2-40B4-BE49-F238E27FC236}">
+                <a16:creationId xmlns:a16="http://schemas.microsoft.com/office/drawing/2014/main" id="{41B97843-2DF7-4B6A-81F7-FAC3AC9540AA}"/>
+              </a:ext>
+            </a:extLst>
+          </p:cNvPr>
+          <p:cNvSpPr>
+            <a:spLocks xmlns:a="http://schemas.openxmlformats.org/drawingml/2006/main" noGrp="1"/>
+          </p:cNvSpPr>
+          <p:nvPr/>
+        </p:nvSpPr>
+        <p:spPr>
+          <a:xfrm xmlns:a="http://schemas.openxmlformats.org/drawingml/2006/main">
+            <a:off x="666750" y="4572000"/>
+            <a:ext cx="2343150" cy="895350"/>
+          </a:xfrm>
+          <a:prstGeom xmlns:a="http://schemas.openxmlformats.org/drawingml/2006/main" prst="roundRect">
+            <a:avLst>
+              <a:gd name="adj" fmla="val 6383"/>
+            </a:avLst>
           </a:prstGeom>
           <a:solidFill xmlns:a="http://schemas.openxmlformats.org/drawingml/2006/main">
-            <a:srgbClr val="16A34A"/>
+            <a:srgbClr val="F8FAFC"/>
           </a:solidFill>
-          <a:ln xmlns:a="http://schemas.openxmlformats.org/drawingml/2006/main" w="0">
-            <a:noFill/>
-            <a:prstDash val="solid"/>
-          </a:ln>
-        </p:spPr>
-      </p:sp>
-      <p:sp>
-        <p:nvSpPr>
-          <p:cNvPr id="23" name="">
-            <a:extLst xmlns:a="http://schemas.openxmlformats.org/drawingml/2006/main">
-              <a:ext uri="{FF2B5EF4-FFF2-40B4-BE49-F238E27FC236}">
-                <a16:creationId xmlns:a16="http://schemas.microsoft.com/office/drawing/2014/main" id="{18E23812-C9D8-4191-B32C-BC0064E98036}"/>
-              </a:ext>
-            </a:extLst>
-          </p:cNvPr>
-          <p:cNvSpPr>
-            <a:spLocks xmlns:a="http://schemas.openxmlformats.org/drawingml/2006/main" noGrp="1"/>
-          </p:cNvSpPr>
-          <p:nvPr/>
-        </p:nvSpPr>
-        <p:spPr>
-          <a:xfrm xmlns:a="http://schemas.openxmlformats.org/drawingml/2006/main">
-            <a:off x="7239000" y="4248150"/>
-            <a:ext cx="3771900" cy="400050"/>
+          <a:ln xmlns:a="http://schemas.openxmlformats.org/drawingml/2006/main" w="9525">
+            <a:solidFill>
+              <a:srgbClr val="CBD5E1"/>
+            </a:solidFill>
+            <a:prstDash val="solid"/>
+          </a:ln>
+        </p:spPr>
+      </p:sp>
+      <p:sp>
+        <p:nvSpPr>
+          <p:cNvPr id="30" name="">
+            <a:extLst xmlns:a="http://schemas.openxmlformats.org/drawingml/2006/main">
+              <a:ext uri="{FF2B5EF4-FFF2-40B4-BE49-F238E27FC236}">
+                <a16:creationId xmlns:a16="http://schemas.microsoft.com/office/drawing/2014/main" id="{CC4BEF0F-D456-49B7-A2E6-4623A8C42998}"/>
+              </a:ext>
+            </a:extLst>
+          </p:cNvPr>
+          <p:cNvSpPr>
+            <a:spLocks xmlns:a="http://schemas.openxmlformats.org/drawingml/2006/main" noGrp="1"/>
+          </p:cNvSpPr>
+          <p:nvPr/>
+        </p:nvSpPr>
+        <p:spPr>
+          <a:xfrm xmlns:a="http://schemas.openxmlformats.org/drawingml/2006/main">
+            <a:off x="819150" y="4705350"/>
+            <a:ext cx="2038350" cy="209550"/>
           </a:xfrm>
           <a:prstGeom xmlns:a="http://schemas.openxmlformats.org/drawingml/2006/main" prst="rect">
             <a:avLst/>
@@ -4029,29 +4592,534 @@
           <a:lstStyle xmlns:a="http://schemas.openxmlformats.org/drawingml/2006/main"/>
           <a:p xmlns:a="http://schemas.openxmlformats.org/drawingml/2006/main">
             <a:pPr algn="l">
-              <a:defRPr sz="1500" b="0">
-                <a:solidFill>
-                  <a:srgbClr val="334155"/>
-                </a:solidFill>
-              </a:defRPr>
-            </a:pPr>
-            <a:r>
-              <a:rPr sz="1500" b="0">
-                <a:solidFill>
-                  <a:srgbClr val="334155"/>
-                </a:solidFill>
-              </a:rPr>
-              <a:t>reports late, useful, and wasted movement</a:t>
-            </a:r>
-          </a:p>
-        </p:txBody>
-      </p:sp>
-      <p:sp>
-        <p:nvSpPr>
-          <p:cNvPr id="24" name="">
-            <a:extLst xmlns:a="http://schemas.openxmlformats.org/drawingml/2006/main">
-              <a:ext uri="{FF2B5EF4-FFF2-40B4-BE49-F238E27FC236}">
-                <a16:creationId xmlns:a16="http://schemas.microsoft.com/office/drawing/2014/main" id="{99D051D7-325E-4400-87BB-A05491DC788C}"/>
+              <a:defRPr sz="1125" b="1">
+                <a:solidFill>
+                  <a:srgbClr val="64748B"/>
+                </a:solidFill>
+              </a:defRPr>
+            </a:pPr>
+            <a:r>
+              <a:rPr sz="1125" b="1">
+                <a:solidFill>
+                  <a:srgbClr val="64748B"/>
+                </a:solidFill>
+              </a:rPr>
+              <a:t>Max total tokens</a:t>
+            </a:r>
+          </a:p>
+        </p:txBody>
+      </p:sp>
+      <p:sp>
+        <p:nvSpPr>
+          <p:cNvPr id="31" name="">
+            <a:extLst xmlns:a="http://schemas.openxmlformats.org/drawingml/2006/main">
+              <a:ext uri="{FF2B5EF4-FFF2-40B4-BE49-F238E27FC236}">
+                <a16:creationId xmlns:a16="http://schemas.microsoft.com/office/drawing/2014/main" id="{A9754C85-FC10-4202-8CB1-A3E616119D44}"/>
+              </a:ext>
+            </a:extLst>
+          </p:cNvPr>
+          <p:cNvSpPr>
+            <a:spLocks xmlns:a="http://schemas.openxmlformats.org/drawingml/2006/main" noGrp="1"/>
+          </p:cNvSpPr>
+          <p:nvPr/>
+        </p:nvSpPr>
+        <p:spPr>
+          <a:xfrm xmlns:a="http://schemas.openxmlformats.org/drawingml/2006/main">
+            <a:off x="819150" y="4972050"/>
+            <a:ext cx="2038350" cy="400050"/>
+          </a:xfrm>
+          <a:prstGeom xmlns:a="http://schemas.openxmlformats.org/drawingml/2006/main" prst="rect">
+            <a:avLst/>
+          </a:prstGeom>
+          <a:noFill xmlns:a="http://schemas.openxmlformats.org/drawingml/2006/main"/>
+          <a:ln xmlns:a="http://schemas.openxmlformats.org/drawingml/2006/main" w="0">
+            <a:noFill/>
+            <a:prstDash val="solid"/>
+          </a:ln>
+        </p:spPr>
+        <p:txBody>
+          <a:bodyPr xmlns:a="http://schemas.openxmlformats.org/drawingml/2006/main" anchor="t"/>
+          <a:lstStyle xmlns:a="http://schemas.openxmlformats.org/drawingml/2006/main"/>
+          <a:p xmlns:a="http://schemas.openxmlformats.org/drawingml/2006/main">
+            <a:pPr algn="l">
+              <a:defRPr sz="1575" b="1">
+                <a:solidFill>
+                  <a:srgbClr val="0F172A"/>
+                </a:solidFill>
+              </a:defRPr>
+            </a:pPr>
+            <a:r>
+              <a:rPr sz="1575" b="1">
+                <a:solidFill>
+                  <a:srgbClr val="0F172A"/>
+                </a:solidFill>
+              </a:rPr>
+              <a:t>12,288</a:t>
+            </a:r>
+          </a:p>
+        </p:txBody>
+      </p:sp>
+      <p:sp>
+        <p:nvSpPr>
+          <p:cNvPr id="32" name="">
+            <a:extLst xmlns:a="http://schemas.openxmlformats.org/drawingml/2006/main">
+              <a:ext uri="{FF2B5EF4-FFF2-40B4-BE49-F238E27FC236}">
+                <a16:creationId xmlns:a16="http://schemas.microsoft.com/office/drawing/2014/main" id="{A7F17BEC-E133-4646-95E0-0FCF8C2E7BAB}"/>
+              </a:ext>
+            </a:extLst>
+          </p:cNvPr>
+          <p:cNvSpPr>
+            <a:spLocks xmlns:a="http://schemas.openxmlformats.org/drawingml/2006/main" noGrp="1"/>
+          </p:cNvSpPr>
+          <p:nvPr/>
+        </p:nvSpPr>
+        <p:spPr>
+          <a:xfrm xmlns:a="http://schemas.openxmlformats.org/drawingml/2006/main">
+            <a:off x="3238500" y="4572000"/>
+            <a:ext cx="2343150" cy="895350"/>
+          </a:xfrm>
+          <a:prstGeom xmlns:a="http://schemas.openxmlformats.org/drawingml/2006/main" prst="roundRect">
+            <a:avLst>
+              <a:gd name="adj" fmla="val 6383"/>
+            </a:avLst>
+          </a:prstGeom>
+          <a:solidFill xmlns:a="http://schemas.openxmlformats.org/drawingml/2006/main">
+            <a:srgbClr val="F8FAFC"/>
+          </a:solidFill>
+          <a:ln xmlns:a="http://schemas.openxmlformats.org/drawingml/2006/main" w="9525">
+            <a:solidFill>
+              <a:srgbClr val="CBD5E1"/>
+            </a:solidFill>
+            <a:prstDash val="solid"/>
+          </a:ln>
+        </p:spPr>
+      </p:sp>
+      <p:sp>
+        <p:nvSpPr>
+          <p:cNvPr id="33" name="">
+            <a:extLst xmlns:a="http://schemas.openxmlformats.org/drawingml/2006/main">
+              <a:ext uri="{FF2B5EF4-FFF2-40B4-BE49-F238E27FC236}">
+                <a16:creationId xmlns:a16="http://schemas.microsoft.com/office/drawing/2014/main" id="{350AD7A1-E70A-4B76-AE21-C3E1F6FD0BB1}"/>
+              </a:ext>
+            </a:extLst>
+          </p:cNvPr>
+          <p:cNvSpPr>
+            <a:spLocks xmlns:a="http://schemas.openxmlformats.org/drawingml/2006/main" noGrp="1"/>
+          </p:cNvSpPr>
+          <p:nvPr/>
+        </p:nvSpPr>
+        <p:spPr>
+          <a:xfrm xmlns:a="http://schemas.openxmlformats.org/drawingml/2006/main">
+            <a:off x="3390900" y="4705350"/>
+            <a:ext cx="2038350" cy="209550"/>
+          </a:xfrm>
+          <a:prstGeom xmlns:a="http://schemas.openxmlformats.org/drawingml/2006/main" prst="rect">
+            <a:avLst/>
+          </a:prstGeom>
+          <a:noFill xmlns:a="http://schemas.openxmlformats.org/drawingml/2006/main"/>
+          <a:ln xmlns:a="http://schemas.openxmlformats.org/drawingml/2006/main" w="0">
+            <a:noFill/>
+            <a:prstDash val="solid"/>
+          </a:ln>
+        </p:spPr>
+        <p:txBody>
+          <a:bodyPr xmlns:a="http://schemas.openxmlformats.org/drawingml/2006/main" anchor="t"/>
+          <a:lstStyle xmlns:a="http://schemas.openxmlformats.org/drawingml/2006/main"/>
+          <a:p xmlns:a="http://schemas.openxmlformats.org/drawingml/2006/main">
+            <a:pPr algn="l">
+              <a:defRPr sz="1125" b="1">
+                <a:solidFill>
+                  <a:srgbClr val="64748B"/>
+                </a:solidFill>
+              </a:defRPr>
+            </a:pPr>
+            <a:r>
+              <a:rPr sz="1125" b="1">
+                <a:solidFill>
+                  <a:srgbClr val="64748B"/>
+                </a:solidFill>
+              </a:rPr>
+              <a:t>Memory fraction static</a:t>
+            </a:r>
+          </a:p>
+        </p:txBody>
+      </p:sp>
+      <p:sp>
+        <p:nvSpPr>
+          <p:cNvPr id="34" name="">
+            <a:extLst xmlns:a="http://schemas.openxmlformats.org/drawingml/2006/main">
+              <a:ext uri="{FF2B5EF4-FFF2-40B4-BE49-F238E27FC236}">
+                <a16:creationId xmlns:a16="http://schemas.microsoft.com/office/drawing/2014/main" id="{244897F8-B1A4-41EA-8E6A-4451749CF97D}"/>
+              </a:ext>
+            </a:extLst>
+          </p:cNvPr>
+          <p:cNvSpPr>
+            <a:spLocks xmlns:a="http://schemas.openxmlformats.org/drawingml/2006/main" noGrp="1"/>
+          </p:cNvSpPr>
+          <p:nvPr/>
+        </p:nvSpPr>
+        <p:spPr>
+          <a:xfrm xmlns:a="http://schemas.openxmlformats.org/drawingml/2006/main">
+            <a:off x="3390900" y="4972050"/>
+            <a:ext cx="2038350" cy="400050"/>
+          </a:xfrm>
+          <a:prstGeom xmlns:a="http://schemas.openxmlformats.org/drawingml/2006/main" prst="rect">
+            <a:avLst/>
+          </a:prstGeom>
+          <a:noFill xmlns:a="http://schemas.openxmlformats.org/drawingml/2006/main"/>
+          <a:ln xmlns:a="http://schemas.openxmlformats.org/drawingml/2006/main" w="0">
+            <a:noFill/>
+            <a:prstDash val="solid"/>
+          </a:ln>
+        </p:spPr>
+        <p:txBody>
+          <a:bodyPr xmlns:a="http://schemas.openxmlformats.org/drawingml/2006/main" anchor="t"/>
+          <a:lstStyle xmlns:a="http://schemas.openxmlformats.org/drawingml/2006/main"/>
+          <a:p xmlns:a="http://schemas.openxmlformats.org/drawingml/2006/main">
+            <a:pPr algn="l">
+              <a:defRPr sz="1575" b="1">
+                <a:solidFill>
+                  <a:srgbClr val="0F172A"/>
+                </a:solidFill>
+              </a:defRPr>
+            </a:pPr>
+            <a:r>
+              <a:rPr sz="1575" b="1">
+                <a:solidFill>
+                  <a:srgbClr val="0F172A"/>
+                </a:solidFill>
+              </a:rPr>
+              <a:t>0.72</a:t>
+            </a:r>
+          </a:p>
+        </p:txBody>
+      </p:sp>
+      <p:sp>
+        <p:nvSpPr>
+          <p:cNvPr id="35" name="">
+            <a:extLst xmlns:a="http://schemas.openxmlformats.org/drawingml/2006/main">
+              <a:ext uri="{FF2B5EF4-FFF2-40B4-BE49-F238E27FC236}">
+                <a16:creationId xmlns:a16="http://schemas.microsoft.com/office/drawing/2014/main" id="{5EFD6AC4-1235-417C-BAE7-66AFB43CCD03}"/>
+              </a:ext>
+            </a:extLst>
+          </p:cNvPr>
+          <p:cNvSpPr>
+            <a:spLocks xmlns:a="http://schemas.openxmlformats.org/drawingml/2006/main" noGrp="1"/>
+          </p:cNvSpPr>
+          <p:nvPr/>
+        </p:nvSpPr>
+        <p:spPr>
+          <a:xfrm xmlns:a="http://schemas.openxmlformats.org/drawingml/2006/main">
+            <a:off x="5810250" y="4572000"/>
+            <a:ext cx="2343150" cy="895350"/>
+          </a:xfrm>
+          <a:prstGeom xmlns:a="http://schemas.openxmlformats.org/drawingml/2006/main" prst="roundRect">
+            <a:avLst>
+              <a:gd name="adj" fmla="val 6383"/>
+            </a:avLst>
+          </a:prstGeom>
+          <a:solidFill xmlns:a="http://schemas.openxmlformats.org/drawingml/2006/main">
+            <a:srgbClr val="F8FAFC"/>
+          </a:solidFill>
+          <a:ln xmlns:a="http://schemas.openxmlformats.org/drawingml/2006/main" w="9525">
+            <a:solidFill>
+              <a:srgbClr val="CBD5E1"/>
+            </a:solidFill>
+            <a:prstDash val="solid"/>
+          </a:ln>
+        </p:spPr>
+      </p:sp>
+      <p:sp>
+        <p:nvSpPr>
+          <p:cNvPr id="36" name="">
+            <a:extLst xmlns:a="http://schemas.openxmlformats.org/drawingml/2006/main">
+              <a:ext uri="{FF2B5EF4-FFF2-40B4-BE49-F238E27FC236}">
+                <a16:creationId xmlns:a16="http://schemas.microsoft.com/office/drawing/2014/main" id="{BE96BD14-DB99-4797-8699-56A7AB8440F0}"/>
+              </a:ext>
+            </a:extLst>
+          </p:cNvPr>
+          <p:cNvSpPr>
+            <a:spLocks xmlns:a="http://schemas.openxmlformats.org/drawingml/2006/main" noGrp="1"/>
+          </p:cNvSpPr>
+          <p:nvPr/>
+        </p:nvSpPr>
+        <p:spPr>
+          <a:xfrm xmlns:a="http://schemas.openxmlformats.org/drawingml/2006/main">
+            <a:off x="5962650" y="4705350"/>
+            <a:ext cx="2038350" cy="209550"/>
+          </a:xfrm>
+          <a:prstGeom xmlns:a="http://schemas.openxmlformats.org/drawingml/2006/main" prst="rect">
+            <a:avLst/>
+          </a:prstGeom>
+          <a:noFill xmlns:a="http://schemas.openxmlformats.org/drawingml/2006/main"/>
+          <a:ln xmlns:a="http://schemas.openxmlformats.org/drawingml/2006/main" w="0">
+            <a:noFill/>
+            <a:prstDash val="solid"/>
+          </a:ln>
+        </p:spPr>
+        <p:txBody>
+          <a:bodyPr xmlns:a="http://schemas.openxmlformats.org/drawingml/2006/main" anchor="t"/>
+          <a:lstStyle xmlns:a="http://schemas.openxmlformats.org/drawingml/2006/main"/>
+          <a:p xmlns:a="http://schemas.openxmlformats.org/drawingml/2006/main">
+            <a:pPr algn="l">
+              <a:defRPr sz="1125" b="1">
+                <a:solidFill>
+                  <a:srgbClr val="64748B"/>
+                </a:solidFill>
+              </a:defRPr>
+            </a:pPr>
+            <a:r>
+              <a:rPr sz="1125" b="1">
+                <a:solidFill>
+                  <a:srgbClr val="64748B"/>
+                </a:solidFill>
+              </a:rPr>
+              <a:t>Tensor parallel</a:t>
+            </a:r>
+          </a:p>
+        </p:txBody>
+      </p:sp>
+      <p:sp>
+        <p:nvSpPr>
+          <p:cNvPr id="37" name="">
+            <a:extLst xmlns:a="http://schemas.openxmlformats.org/drawingml/2006/main">
+              <a:ext uri="{FF2B5EF4-FFF2-40B4-BE49-F238E27FC236}">
+                <a16:creationId xmlns:a16="http://schemas.microsoft.com/office/drawing/2014/main" id="{E9E2EE5B-A33F-4D85-AF12-9285EF750602}"/>
+              </a:ext>
+            </a:extLst>
+          </p:cNvPr>
+          <p:cNvSpPr>
+            <a:spLocks xmlns:a="http://schemas.openxmlformats.org/drawingml/2006/main" noGrp="1"/>
+          </p:cNvSpPr>
+          <p:nvPr/>
+        </p:nvSpPr>
+        <p:spPr>
+          <a:xfrm xmlns:a="http://schemas.openxmlformats.org/drawingml/2006/main">
+            <a:off x="5962650" y="4972050"/>
+            <a:ext cx="2038350" cy="400050"/>
+          </a:xfrm>
+          <a:prstGeom xmlns:a="http://schemas.openxmlformats.org/drawingml/2006/main" prst="rect">
+            <a:avLst/>
+          </a:prstGeom>
+          <a:noFill xmlns:a="http://schemas.openxmlformats.org/drawingml/2006/main"/>
+          <a:ln xmlns:a="http://schemas.openxmlformats.org/drawingml/2006/main" w="0">
+            <a:noFill/>
+            <a:prstDash val="solid"/>
+          </a:ln>
+        </p:spPr>
+        <p:txBody>
+          <a:bodyPr xmlns:a="http://schemas.openxmlformats.org/drawingml/2006/main" anchor="t"/>
+          <a:lstStyle xmlns:a="http://schemas.openxmlformats.org/drawingml/2006/main"/>
+          <a:p xmlns:a="http://schemas.openxmlformats.org/drawingml/2006/main">
+            <a:pPr algn="l">
+              <a:defRPr sz="1575" b="1">
+                <a:solidFill>
+                  <a:srgbClr val="0F172A"/>
+                </a:solidFill>
+              </a:defRPr>
+            </a:pPr>
+            <a:r>
+              <a:rPr sz="1575" b="1">
+                <a:solidFill>
+                  <a:srgbClr val="0F172A"/>
+                </a:solidFill>
+              </a:rPr>
+              <a:t>TP = 1</a:t>
+            </a:r>
+          </a:p>
+        </p:txBody>
+      </p:sp>
+      <p:sp>
+        <p:nvSpPr>
+          <p:cNvPr id="38" name="">
+            <a:extLst xmlns:a="http://schemas.openxmlformats.org/drawingml/2006/main">
+              <a:ext uri="{FF2B5EF4-FFF2-40B4-BE49-F238E27FC236}">
+                <a16:creationId xmlns:a16="http://schemas.microsoft.com/office/drawing/2014/main" id="{5CA26C4B-0846-4464-B08F-0938C1540D2D}"/>
+              </a:ext>
+            </a:extLst>
+          </p:cNvPr>
+          <p:cNvSpPr>
+            <a:spLocks xmlns:a="http://schemas.openxmlformats.org/drawingml/2006/main" noGrp="1"/>
+          </p:cNvSpPr>
+          <p:nvPr/>
+        </p:nvSpPr>
+        <p:spPr>
+          <a:xfrm xmlns:a="http://schemas.openxmlformats.org/drawingml/2006/main">
+            <a:off x="8382000" y="4572000"/>
+            <a:ext cx="2343150" cy="895350"/>
+          </a:xfrm>
+          <a:prstGeom xmlns:a="http://schemas.openxmlformats.org/drawingml/2006/main" prst="roundRect">
+            <a:avLst>
+              <a:gd name="adj" fmla="val 6383"/>
+            </a:avLst>
+          </a:prstGeom>
+          <a:solidFill xmlns:a="http://schemas.openxmlformats.org/drawingml/2006/main">
+            <a:srgbClr val="FFF7ED"/>
+          </a:solidFill>
+          <a:ln xmlns:a="http://schemas.openxmlformats.org/drawingml/2006/main" w="9525">
+            <a:solidFill>
+              <a:srgbClr val="FED7AA"/>
+            </a:solidFill>
+            <a:prstDash val="solid"/>
+          </a:ln>
+        </p:spPr>
+      </p:sp>
+      <p:sp>
+        <p:nvSpPr>
+          <p:cNvPr id="39" name="">
+            <a:extLst xmlns:a="http://schemas.openxmlformats.org/drawingml/2006/main">
+              <a:ext uri="{FF2B5EF4-FFF2-40B4-BE49-F238E27FC236}">
+                <a16:creationId xmlns:a16="http://schemas.microsoft.com/office/drawing/2014/main" id="{A7DBFD87-09A0-47C7-8F31-7F56059BE18C}"/>
+              </a:ext>
+            </a:extLst>
+          </p:cNvPr>
+          <p:cNvSpPr>
+            <a:spLocks xmlns:a="http://schemas.openxmlformats.org/drawingml/2006/main" noGrp="1"/>
+          </p:cNvSpPr>
+          <p:nvPr/>
+        </p:nvSpPr>
+        <p:spPr>
+          <a:xfrm xmlns:a="http://schemas.openxmlformats.org/drawingml/2006/main">
+            <a:off x="8534400" y="4705350"/>
+            <a:ext cx="2038350" cy="209550"/>
+          </a:xfrm>
+          <a:prstGeom xmlns:a="http://schemas.openxmlformats.org/drawingml/2006/main" prst="rect">
+            <a:avLst/>
+          </a:prstGeom>
+          <a:noFill xmlns:a="http://schemas.openxmlformats.org/drawingml/2006/main"/>
+          <a:ln xmlns:a="http://schemas.openxmlformats.org/drawingml/2006/main" w="0">
+            <a:noFill/>
+            <a:prstDash val="solid"/>
+          </a:ln>
+        </p:spPr>
+        <p:txBody>
+          <a:bodyPr xmlns:a="http://schemas.openxmlformats.org/drawingml/2006/main" anchor="t"/>
+          <a:lstStyle xmlns:a="http://schemas.openxmlformats.org/drawingml/2006/main"/>
+          <a:p xmlns:a="http://schemas.openxmlformats.org/drawingml/2006/main">
+            <a:pPr algn="l">
+              <a:defRPr sz="1125" b="1">
+                <a:solidFill>
+                  <a:srgbClr val="64748B"/>
+                </a:solidFill>
+              </a:defRPr>
+            </a:pPr>
+            <a:r>
+              <a:rPr sz="1125" b="1">
+                <a:solidFill>
+                  <a:srgbClr val="64748B"/>
+                </a:solidFill>
+              </a:rPr>
+              <a:t>HiCache policy</a:t>
+            </a:r>
+          </a:p>
+        </p:txBody>
+      </p:sp>
+      <p:sp>
+        <p:nvSpPr>
+          <p:cNvPr id="40" name="">
+            <a:extLst xmlns:a="http://schemas.openxmlformats.org/drawingml/2006/main">
+              <a:ext uri="{FF2B5EF4-FFF2-40B4-BE49-F238E27FC236}">
+                <a16:creationId xmlns:a16="http://schemas.microsoft.com/office/drawing/2014/main" id="{0FB1D28C-C353-4897-8692-216DEFFBE27C}"/>
+              </a:ext>
+            </a:extLst>
+          </p:cNvPr>
+          <p:cNvSpPr>
+            <a:spLocks xmlns:a="http://schemas.openxmlformats.org/drawingml/2006/main" noGrp="1"/>
+          </p:cNvSpPr>
+          <p:nvPr/>
+        </p:nvSpPr>
+        <p:spPr>
+          <a:xfrm xmlns:a="http://schemas.openxmlformats.org/drawingml/2006/main">
+            <a:off x="8534400" y="4972050"/>
+            <a:ext cx="2038350" cy="400050"/>
+          </a:xfrm>
+          <a:prstGeom xmlns:a="http://schemas.openxmlformats.org/drawingml/2006/main" prst="rect">
+            <a:avLst/>
+          </a:prstGeom>
+          <a:noFill xmlns:a="http://schemas.openxmlformats.org/drawingml/2006/main"/>
+          <a:ln xmlns:a="http://schemas.openxmlformats.org/drawingml/2006/main" w="0">
+            <a:noFill/>
+            <a:prstDash val="solid"/>
+          </a:ln>
+        </p:spPr>
+        <p:txBody>
+          <a:bodyPr xmlns:a="http://schemas.openxmlformats.org/drawingml/2006/main" anchor="t"/>
+          <a:lstStyle xmlns:a="http://schemas.openxmlformats.org/drawingml/2006/main"/>
+          <a:p xmlns:a="http://schemas.openxmlformats.org/drawingml/2006/main">
+            <a:pPr algn="l">
+              <a:defRPr sz="1350" b="1">
+                <a:solidFill>
+                  <a:srgbClr val="0F172A"/>
+                </a:solidFill>
+              </a:defRPr>
+            </a:pPr>
+            <a:r>
+              <a:rPr sz="1350" b="1">
+                <a:solidFill>
+                  <a:srgbClr val="0F172A"/>
+                </a:solidFill>
+              </a:rPr>
+              <a:t>direct + write-through</a:t>
+            </a:r>
+          </a:p>
+        </p:txBody>
+      </p:sp>
+      <p:sp>
+        <p:nvSpPr>
+          <p:cNvPr id="41" name="">
+            <a:extLst xmlns:a="http://schemas.openxmlformats.org/drawingml/2006/main">
+              <a:ext uri="{FF2B5EF4-FFF2-40B4-BE49-F238E27FC236}">
+                <a16:creationId xmlns:a16="http://schemas.microsoft.com/office/drawing/2014/main" id="{B37AB779-6B5A-414A-9739-A84555C867D9}"/>
+              </a:ext>
+            </a:extLst>
+          </p:cNvPr>
+          <p:cNvSpPr>
+            <a:spLocks xmlns:a="http://schemas.openxmlformats.org/drawingml/2006/main" noGrp="1"/>
+          </p:cNvSpPr>
+          <p:nvPr/>
+        </p:nvSpPr>
+        <p:spPr>
+          <a:xfrm xmlns:a="http://schemas.openxmlformats.org/drawingml/2006/main">
+            <a:off x="400050" y="6153150"/>
+            <a:ext cx="7810500" cy="190500"/>
+          </a:xfrm>
+          <a:prstGeom xmlns:a="http://schemas.openxmlformats.org/drawingml/2006/main" prst="rect">
+            <a:avLst/>
+          </a:prstGeom>
+          <a:noFill xmlns:a="http://schemas.openxmlformats.org/drawingml/2006/main"/>
+          <a:ln xmlns:a="http://schemas.openxmlformats.org/drawingml/2006/main" w="0">
+            <a:noFill/>
+            <a:prstDash val="solid"/>
+          </a:ln>
+        </p:spPr>
+        <p:txBody>
+          <a:bodyPr xmlns:a="http://schemas.openxmlformats.org/drawingml/2006/main" anchor="t"/>
+          <a:lstStyle xmlns:a="http://schemas.openxmlformats.org/drawingml/2006/main"/>
+          <a:p xmlns:a="http://schemas.openxmlformats.org/drawingml/2006/main">
+            <a:pPr algn="l">
+              <a:defRPr sz="825" b="0">
+                <a:solidFill>
+                  <a:srgbClr val="64748B"/>
+                </a:solidFill>
+              </a:defRPr>
+            </a:pPr>
+            <a:r>
+              <a:rPr sz="825" b="0">
+                <a:solidFill>
+                  <a:srgbClr val="64748B"/>
+                </a:solidFill>
+              </a:rPr>
+              <a:t>Source: latest_master_report.html setup section and run configuration</a:t>
+            </a:r>
+          </a:p>
+        </p:txBody>
+      </p:sp>
+      <p:sp>
+        <p:nvSpPr>
+          <p:cNvPr id="42" name="">
+            <a:extLst xmlns:a="http://schemas.openxmlformats.org/drawingml/2006/main">
+              <a:ext uri="{FF2B5EF4-FFF2-40B4-BE49-F238E27FC236}">
+                <a16:creationId xmlns:a16="http://schemas.microsoft.com/office/drawing/2014/main" id="{8016548A-B701-4197-843A-DDA7EA877897}"/>
               </a:ext>
             </a:extLst>
           </p:cNvPr>
@@ -4098,10 +5166,10 @@
       </p:sp>
       <p:sp>
         <p:nvSpPr>
-          <p:cNvPr id="25" name="">
-            <a:extLst xmlns:a="http://schemas.openxmlformats.org/drawingml/2006/main">
-              <a:ext uri="{FF2B5EF4-FFF2-40B4-BE49-F238E27FC236}">
-                <a16:creationId xmlns:a16="http://schemas.microsoft.com/office/drawing/2014/main" id="{FA277944-A3E3-4A02-A665-7198791EFB1C}"/>
+          <p:cNvPr id="43" name="">
+            <a:extLst xmlns:a="http://schemas.openxmlformats.org/drawingml/2006/main">
+              <a:ext uri="{FF2B5EF4-FFF2-40B4-BE49-F238E27FC236}">
+                <a16:creationId xmlns:a16="http://schemas.microsoft.com/office/drawing/2014/main" id="{A8C76464-C988-4F8A-896B-8D2BD05EDF8E}"/>
               </a:ext>
             </a:extLst>
           </p:cNvPr>
@@ -4149,7 +5217,7 @@
     </p:spTree>
     <p:extLst>
       <p:ext uri="{BB962C8B-B14F-4D97-AF65-F5344CB8AC3E}">
-        <p14:creationId xmlns:p14="http://schemas.microsoft.com/office/powerpoint/2010/main" val="1355220629"/>
+        <p14:creationId xmlns:p14="http://schemas.microsoft.com/office/powerpoint/2010/main" val="369989740"/>
       </p:ext>
     </p:extLst>
   </p:cSld>
@@ -4177,10 +5245,10 @@
       </p:grpSpPr>
       <p:sp>
         <p:nvSpPr>
-          <p:cNvPr id="8" name="">
-            <a:extLst xmlns:a="http://schemas.openxmlformats.org/drawingml/2006/main">
-              <a:ext uri="{FF2B5EF4-FFF2-40B4-BE49-F238E27FC236}">
-                <a16:creationId xmlns:a16="http://schemas.microsoft.com/office/drawing/2014/main" id="{544E4C8F-8A61-4A07-AC1F-3F6066AEE8BA}"/>
+          <p:cNvPr id="26" name="">
+            <a:extLst xmlns:a="http://schemas.openxmlformats.org/drawingml/2006/main">
+              <a:ext uri="{FF2B5EF4-FFF2-40B4-BE49-F238E27FC236}">
+                <a16:creationId xmlns:a16="http://schemas.microsoft.com/office/drawing/2014/main" id="{646684DD-B17D-41CA-9CEE-147E4AFC5947}"/>
               </a:ext>
             </a:extLst>
           </p:cNvPr>
@@ -4220,7 +5288,7 @@
                   <a:srgbClr val="0F172A"/>
                 </a:solidFill>
               </a:rPr>
-              <a:t>The replay path exposes the bottleneck</a:t>
+              <a:t>Today’s DMA engines move bytes, not intent</a:t>
             </a:r>
           </a:p>
         </p:txBody>
@@ -4230,7 +5298,7 @@
           <p:cNvPr id="2" name="">
             <a:extLst xmlns:a="http://schemas.openxmlformats.org/drawingml/2006/main">
               <a:ext uri="{FF2B5EF4-FFF2-40B4-BE49-F238E27FC236}">
-                <a16:creationId xmlns:a16="http://schemas.microsoft.com/office/drawing/2014/main" id="{8EE3802A-0C4C-4FD0-A291-B7D741582B0C}"/>
+                <a16:creationId xmlns:a16="http://schemas.microsoft.com/office/drawing/2014/main" id="{7BE35B10-839A-44A6-A08D-9B594F750766}"/>
               </a:ext>
             </a:extLst>
           </p:cNvPr>
@@ -4270,7 +5338,7 @@
                   <a:srgbClr val="64748B"/>
                 </a:solidFill>
               </a:rPr>
-              <a:t>Several tool-gap sessions show where replay spends time before the first useful token.</a:t>
+              <a:t>The hardware path is fast, but it usually lacks agent/session semantics.</a:t>
             </a:r>
           </a:p>
         </p:txBody>
@@ -4280,76 +5348,135 @@
           <p:cNvPr id="3" name="">
             <a:extLst xmlns:a="http://schemas.openxmlformats.org/drawingml/2006/main">
               <a:ext uri="{FF2B5EF4-FFF2-40B4-BE49-F238E27FC236}">
-                <a16:creationId xmlns:a16="http://schemas.microsoft.com/office/drawing/2014/main" id="{E9E67C26-5CD8-4172-9AE2-3F1208A66164}"/>
-              </a:ext>
-            </a:extLst>
-          </p:cNvPr>
-          <p:cNvSpPr>
-            <a:spLocks xmlns:a="http://schemas.openxmlformats.org/drawingml/2006/main" noGrp="1"/>
-          </p:cNvSpPr>
-          <p:nvPr/>
-        </p:nvSpPr>
-        <p:spPr>
-          <a:xfrm xmlns:a="http://schemas.openxmlformats.org/drawingml/2006/main">
-            <a:off x="228600" y="1181100"/>
-            <a:ext cx="11734800" cy="4972050"/>
+                <a16:creationId xmlns:a16="http://schemas.microsoft.com/office/drawing/2014/main" id="{5BF69A02-3270-49F6-A368-B524D41D2AE5}"/>
+              </a:ext>
+            </a:extLst>
+          </p:cNvPr>
+          <p:cNvSpPr>
+            <a:spLocks xmlns:a="http://schemas.openxmlformats.org/drawingml/2006/main" noGrp="1"/>
+          </p:cNvSpPr>
+          <p:nvPr/>
+        </p:nvSpPr>
+        <p:spPr>
+          <a:xfrm xmlns:a="http://schemas.openxmlformats.org/drawingml/2006/main">
+            <a:off x="552450" y="1790700"/>
+            <a:ext cx="4953000" cy="3429000"/>
           </a:xfrm>
           <a:prstGeom xmlns:a="http://schemas.openxmlformats.org/drawingml/2006/main" prst="roundRect">
             <a:avLst>
-              <a:gd name="adj" fmla="val 1149"/>
+              <a:gd name="adj" fmla="val 1667"/>
             </a:avLst>
           </a:prstGeom>
           <a:solidFill xmlns:a="http://schemas.openxmlformats.org/drawingml/2006/main">
-            <a:srgbClr val="FFFFFF"/>
+            <a:srgbClr val="F8FAFC"/>
           </a:solidFill>
           <a:ln xmlns:a="http://schemas.openxmlformats.org/drawingml/2006/main" w="9525">
             <a:solidFill>
-              <a:srgbClr val="E5E7EB"/>
+              <a:srgbClr val="CBD5E1"/>
             </a:solidFill>
             <a:prstDash val="solid"/>
           </a:ln>
         </p:spPr>
       </p:sp>
-      <p:pic>
-        <p:nvPicPr>
-          <p:cNvPr id="11" name=""/>
-          <p:cNvPicPr>
-            <a:picLocks xmlns:a="http://schemas.openxmlformats.org/drawingml/2006/main" noChangeAspect="1"/>
-          </p:cNvPicPr>
-          <p:nvPr/>
-        </p:nvPicPr>
-        <p:blipFill>
-          <a:blip xmlns:r="http://schemas.openxmlformats.org/officeDocument/2006/relationships" xmlns:a="http://schemas.openxmlformats.org/drawingml/2006/main" r:embed="R17ca1f81781040ea"/>
-          <a:stretch xmlns:a="http://schemas.openxmlformats.org/drawingml/2006/main"/>
-        </p:blipFill>
-        <p:spPr>
-          <a:xfrm xmlns:a="http://schemas.openxmlformats.org/drawingml/2006/main">
-            <a:off x="304800" y="1285315"/>
-            <a:ext cx="11582400" cy="4763619"/>
-          </a:xfrm>
-          <a:prstGeom xmlns:a="http://schemas.openxmlformats.org/drawingml/2006/main" prst="rect">
-            <a:avLst/>
-          </a:prstGeom>
-        </p:spPr>
-      </p:pic>
+      <p:sp>
+        <p:nvSpPr>
+          <p:cNvPr id="4" name="">
+            <a:extLst xmlns:a="http://schemas.openxmlformats.org/drawingml/2006/main">
+              <a:ext uri="{FF2B5EF4-FFF2-40B4-BE49-F238E27FC236}">
+                <a16:creationId xmlns:a16="http://schemas.microsoft.com/office/drawing/2014/main" id="{542E02A1-093E-48E7-BEAC-31C429AB4169}"/>
+              </a:ext>
+            </a:extLst>
+          </p:cNvPr>
+          <p:cNvSpPr>
+            <a:spLocks xmlns:a="http://schemas.openxmlformats.org/drawingml/2006/main" noGrp="1"/>
+          </p:cNvSpPr>
+          <p:nvPr/>
+        </p:nvSpPr>
+        <p:spPr>
+          <a:xfrm xmlns:a="http://schemas.openxmlformats.org/drawingml/2006/main">
+            <a:off x="838200" y="2076450"/>
+            <a:ext cx="4191000" cy="323850"/>
+          </a:xfrm>
+          <a:prstGeom xmlns:a="http://schemas.openxmlformats.org/drawingml/2006/main" prst="rect">
+            <a:avLst/>
+          </a:prstGeom>
+          <a:noFill xmlns:a="http://schemas.openxmlformats.org/drawingml/2006/main"/>
+          <a:ln xmlns:a="http://schemas.openxmlformats.org/drawingml/2006/main" w="0">
+            <a:noFill/>
+            <a:prstDash val="solid"/>
+          </a:ln>
+        </p:spPr>
+        <p:txBody>
+          <a:bodyPr xmlns:a="http://schemas.openxmlformats.org/drawingml/2006/main" anchor="t"/>
+          <a:lstStyle xmlns:a="http://schemas.openxmlformats.org/drawingml/2006/main"/>
+          <a:p xmlns:a="http://schemas.openxmlformats.org/drawingml/2006/main">
+            <a:pPr algn="l">
+              <a:defRPr sz="1950" b="1">
+                <a:solidFill>
+                  <a:srgbClr val="0F172A"/>
+                </a:solidFill>
+              </a:defRPr>
+            </a:pPr>
+            <a:r>
+              <a:rPr sz="1950" b="1">
+                <a:solidFill>
+                  <a:srgbClr val="0F172A"/>
+                </a:solidFill>
+              </a:rPr>
+              <a:t>Context-agnostic movement</a:t>
+            </a:r>
+          </a:p>
+        </p:txBody>
+      </p:sp>
       <p:sp>
         <p:nvSpPr>
           <p:cNvPr id="5" name="">
             <a:extLst xmlns:a="http://schemas.openxmlformats.org/drawingml/2006/main">
               <a:ext uri="{FF2B5EF4-FFF2-40B4-BE49-F238E27FC236}">
-                <a16:creationId xmlns:a16="http://schemas.microsoft.com/office/drawing/2014/main" id="{6B6ABFDA-3D76-4248-8F4B-E976567063D2}"/>
-              </a:ext>
-            </a:extLst>
-          </p:cNvPr>
-          <p:cNvSpPr>
-            <a:spLocks xmlns:a="http://schemas.openxmlformats.org/drawingml/2006/main" noGrp="1"/>
-          </p:cNvSpPr>
-          <p:nvPr/>
-        </p:nvSpPr>
-        <p:spPr>
-          <a:xfrm xmlns:a="http://schemas.openxmlformats.org/drawingml/2006/main">
-            <a:off x="400050" y="6153150"/>
-            <a:ext cx="7810500" cy="190500"/>
+                <a16:creationId xmlns:a16="http://schemas.microsoft.com/office/drawing/2014/main" id="{D88B9067-A442-45ED-8A5E-5161725FA48C}"/>
+              </a:ext>
+            </a:extLst>
+          </p:cNvPr>
+          <p:cNvSpPr>
+            <a:spLocks xmlns:a="http://schemas.openxmlformats.org/drawingml/2006/main" noGrp="1"/>
+          </p:cNvSpPr>
+          <p:nvPr/>
+        </p:nvSpPr>
+        <p:spPr>
+          <a:xfrm xmlns:a="http://schemas.openxmlformats.org/drawingml/2006/main">
+            <a:off x="876300" y="2781300"/>
+            <a:ext cx="85725" cy="85725"/>
+          </a:xfrm>
+          <a:prstGeom xmlns:a="http://schemas.openxmlformats.org/drawingml/2006/main" prst="ellipse">
+            <a:avLst/>
+          </a:prstGeom>
+          <a:solidFill xmlns:a="http://schemas.openxmlformats.org/drawingml/2006/main">
+            <a:srgbClr val="64748B"/>
+          </a:solidFill>
+          <a:ln xmlns:a="http://schemas.openxmlformats.org/drawingml/2006/main" w="0">
+            <a:noFill/>
+            <a:prstDash val="solid"/>
+          </a:ln>
+        </p:spPr>
+      </p:sp>
+      <p:sp>
+        <p:nvSpPr>
+          <p:cNvPr id="6" name="">
+            <a:extLst xmlns:a="http://schemas.openxmlformats.org/drawingml/2006/main">
+              <a:ext uri="{FF2B5EF4-FFF2-40B4-BE49-F238E27FC236}">
+                <a16:creationId xmlns:a16="http://schemas.microsoft.com/office/drawing/2014/main" id="{4C1E20FB-7845-41CC-9EE4-5546E377A9D1}"/>
+              </a:ext>
+            </a:extLst>
+          </p:cNvPr>
+          <p:cNvSpPr>
+            <a:spLocks xmlns:a="http://schemas.openxmlformats.org/drawingml/2006/main" noGrp="1"/>
+          </p:cNvSpPr>
+          <p:nvPr/>
+        </p:nvSpPr>
+        <p:spPr>
+          <a:xfrm xmlns:a="http://schemas.openxmlformats.org/drawingml/2006/main">
+            <a:off x="1104900" y="2705100"/>
+            <a:ext cx="3771900" cy="400050"/>
           </a:xfrm>
           <a:prstGeom xmlns:a="http://schemas.openxmlformats.org/drawingml/2006/main" prst="rect">
             <a:avLst/>
@@ -4365,29 +5492,731 @@
           <a:lstStyle xmlns:a="http://schemas.openxmlformats.org/drawingml/2006/main"/>
           <a:p xmlns:a="http://schemas.openxmlformats.org/drawingml/2006/main">
             <a:pPr algn="l">
-              <a:defRPr sz="825" b="0">
-                <a:solidFill>
-                  <a:srgbClr val="64748B"/>
-                </a:solidFill>
-              </a:defRPr>
-            </a:pPr>
-            <a:r>
-              <a:rPr sz="825" b="0">
-                <a:solidFill>
-                  <a:srgbClr val="64748B"/>
-                </a:solidFill>
-              </a:rPr>
-              <a:t>Source: latest_master_report.html controlled run</a:t>
-            </a:r>
-          </a:p>
-        </p:txBody>
-      </p:sp>
-      <p:sp>
-        <p:nvSpPr>
-          <p:cNvPr id="6" name="">
-            <a:extLst xmlns:a="http://schemas.openxmlformats.org/drawingml/2006/main">
-              <a:ext uri="{FF2B5EF4-FFF2-40B4-BE49-F238E27FC236}">
-                <a16:creationId xmlns:a16="http://schemas.microsoft.com/office/drawing/2014/main" id="{5BD9A2D0-8755-45BB-BEBB-FABF7E0BD5E0}"/>
+              <a:defRPr sz="1500" b="0">
+                <a:solidFill>
+                  <a:srgbClr val="334155"/>
+                </a:solidFill>
+              </a:defRPr>
+            </a:pPr>
+            <a:r>
+              <a:rPr sz="1500" b="0">
+                <a:solidFill>
+                  <a:srgbClr val="334155"/>
+                </a:solidFill>
+              </a:rPr>
+              <a:t>sees memory ranges</a:t>
+            </a:r>
+          </a:p>
+        </p:txBody>
+      </p:sp>
+      <p:sp>
+        <p:nvSpPr>
+          <p:cNvPr id="7" name="">
+            <a:extLst xmlns:a="http://schemas.openxmlformats.org/drawingml/2006/main">
+              <a:ext uri="{FF2B5EF4-FFF2-40B4-BE49-F238E27FC236}">
+                <a16:creationId xmlns:a16="http://schemas.microsoft.com/office/drawing/2014/main" id="{581C252A-5319-4380-9B1F-2D482582AFC8}"/>
+              </a:ext>
+            </a:extLst>
+          </p:cNvPr>
+          <p:cNvSpPr>
+            <a:spLocks xmlns:a="http://schemas.openxmlformats.org/drawingml/2006/main" noGrp="1"/>
+          </p:cNvSpPr>
+          <p:nvPr/>
+        </p:nvSpPr>
+        <p:spPr>
+          <a:xfrm xmlns:a="http://schemas.openxmlformats.org/drawingml/2006/main">
+            <a:off x="876300" y="3295650"/>
+            <a:ext cx="85725" cy="85725"/>
+          </a:xfrm>
+          <a:prstGeom xmlns:a="http://schemas.openxmlformats.org/drawingml/2006/main" prst="ellipse">
+            <a:avLst/>
+          </a:prstGeom>
+          <a:solidFill xmlns:a="http://schemas.openxmlformats.org/drawingml/2006/main">
+            <a:srgbClr val="64748B"/>
+          </a:solidFill>
+          <a:ln xmlns:a="http://schemas.openxmlformats.org/drawingml/2006/main" w="0">
+            <a:noFill/>
+            <a:prstDash val="solid"/>
+          </a:ln>
+        </p:spPr>
+      </p:sp>
+      <p:sp>
+        <p:nvSpPr>
+          <p:cNvPr id="8" name="">
+            <a:extLst xmlns:a="http://schemas.openxmlformats.org/drawingml/2006/main">
+              <a:ext uri="{FF2B5EF4-FFF2-40B4-BE49-F238E27FC236}">
+                <a16:creationId xmlns:a16="http://schemas.microsoft.com/office/drawing/2014/main" id="{2CFE2979-5975-4A8C-9CB2-D5DD59DFA1B0}"/>
+              </a:ext>
+            </a:extLst>
+          </p:cNvPr>
+          <p:cNvSpPr>
+            <a:spLocks xmlns:a="http://schemas.openxmlformats.org/drawingml/2006/main" noGrp="1"/>
+          </p:cNvSpPr>
+          <p:nvPr/>
+        </p:nvSpPr>
+        <p:spPr>
+          <a:xfrm xmlns:a="http://schemas.openxmlformats.org/drawingml/2006/main">
+            <a:off x="1104900" y="3219450"/>
+            <a:ext cx="3771900" cy="400050"/>
+          </a:xfrm>
+          <a:prstGeom xmlns:a="http://schemas.openxmlformats.org/drawingml/2006/main" prst="rect">
+            <a:avLst/>
+          </a:prstGeom>
+          <a:noFill xmlns:a="http://schemas.openxmlformats.org/drawingml/2006/main"/>
+          <a:ln xmlns:a="http://schemas.openxmlformats.org/drawingml/2006/main" w="0">
+            <a:noFill/>
+            <a:prstDash val="solid"/>
+          </a:ln>
+        </p:spPr>
+        <p:txBody>
+          <a:bodyPr xmlns:a="http://schemas.openxmlformats.org/drawingml/2006/main" anchor="t"/>
+          <a:lstStyle xmlns:a="http://schemas.openxmlformats.org/drawingml/2006/main"/>
+          <a:p xmlns:a="http://schemas.openxmlformats.org/drawingml/2006/main">
+            <a:pPr algn="l">
+              <a:defRPr sz="1500" b="0">
+                <a:solidFill>
+                  <a:srgbClr val="334155"/>
+                </a:solidFill>
+              </a:defRPr>
+            </a:pPr>
+            <a:r>
+              <a:rPr sz="1500" b="0">
+                <a:solidFill>
+                  <a:srgbClr val="334155"/>
+                </a:solidFill>
+              </a:rPr>
+              <a:t>does not know the agent session</a:t>
+            </a:r>
+          </a:p>
+        </p:txBody>
+      </p:sp>
+      <p:sp>
+        <p:nvSpPr>
+          <p:cNvPr id="9" name="">
+            <a:extLst xmlns:a="http://schemas.openxmlformats.org/drawingml/2006/main">
+              <a:ext uri="{FF2B5EF4-FFF2-40B4-BE49-F238E27FC236}">
+                <a16:creationId xmlns:a16="http://schemas.microsoft.com/office/drawing/2014/main" id="{7B73D51C-CF48-458C-B7DC-949B7D9561C9}"/>
+              </a:ext>
+            </a:extLst>
+          </p:cNvPr>
+          <p:cNvSpPr>
+            <a:spLocks xmlns:a="http://schemas.openxmlformats.org/drawingml/2006/main" noGrp="1"/>
+          </p:cNvSpPr>
+          <p:nvPr/>
+        </p:nvSpPr>
+        <p:spPr>
+          <a:xfrm xmlns:a="http://schemas.openxmlformats.org/drawingml/2006/main">
+            <a:off x="876300" y="3810000"/>
+            <a:ext cx="85725" cy="85725"/>
+          </a:xfrm>
+          <a:prstGeom xmlns:a="http://schemas.openxmlformats.org/drawingml/2006/main" prst="ellipse">
+            <a:avLst/>
+          </a:prstGeom>
+          <a:solidFill xmlns:a="http://schemas.openxmlformats.org/drawingml/2006/main">
+            <a:srgbClr val="64748B"/>
+          </a:solidFill>
+          <a:ln xmlns:a="http://schemas.openxmlformats.org/drawingml/2006/main" w="0">
+            <a:noFill/>
+            <a:prstDash val="solid"/>
+          </a:ln>
+        </p:spPr>
+      </p:sp>
+      <p:sp>
+        <p:nvSpPr>
+          <p:cNvPr id="10" name="">
+            <a:extLst xmlns:a="http://schemas.openxmlformats.org/drawingml/2006/main">
+              <a:ext uri="{FF2B5EF4-FFF2-40B4-BE49-F238E27FC236}">
+                <a16:creationId xmlns:a16="http://schemas.microsoft.com/office/drawing/2014/main" id="{6A7DF84F-942B-418C-986F-9879EF4E77FF}"/>
+              </a:ext>
+            </a:extLst>
+          </p:cNvPr>
+          <p:cNvSpPr>
+            <a:spLocks xmlns:a="http://schemas.openxmlformats.org/drawingml/2006/main" noGrp="1"/>
+          </p:cNvSpPr>
+          <p:nvPr/>
+        </p:nvSpPr>
+        <p:spPr>
+          <a:xfrm xmlns:a="http://schemas.openxmlformats.org/drawingml/2006/main">
+            <a:off x="1104900" y="3733800"/>
+            <a:ext cx="3771900" cy="400050"/>
+          </a:xfrm>
+          <a:prstGeom xmlns:a="http://schemas.openxmlformats.org/drawingml/2006/main" prst="rect">
+            <a:avLst/>
+          </a:prstGeom>
+          <a:noFill xmlns:a="http://schemas.openxmlformats.org/drawingml/2006/main"/>
+          <a:ln xmlns:a="http://schemas.openxmlformats.org/drawingml/2006/main" w="0">
+            <a:noFill/>
+            <a:prstDash val="solid"/>
+          </a:ln>
+        </p:spPr>
+        <p:txBody>
+          <a:bodyPr xmlns:a="http://schemas.openxmlformats.org/drawingml/2006/main" anchor="t"/>
+          <a:lstStyle xmlns:a="http://schemas.openxmlformats.org/drawingml/2006/main"/>
+          <a:p xmlns:a="http://schemas.openxmlformats.org/drawingml/2006/main">
+            <a:pPr algn="l">
+              <a:defRPr sz="1500" b="0">
+                <a:solidFill>
+                  <a:srgbClr val="334155"/>
+                </a:solidFill>
+              </a:defRPr>
+            </a:pPr>
+            <a:r>
+              <a:rPr sz="1500" b="0">
+                <a:solidFill>
+                  <a:srgbClr val="334155"/>
+                </a:solidFill>
+              </a:rPr>
+              <a:t>does not know replay deadline</a:t>
+            </a:r>
+          </a:p>
+        </p:txBody>
+      </p:sp>
+      <p:sp>
+        <p:nvSpPr>
+          <p:cNvPr id="11" name="">
+            <a:extLst xmlns:a="http://schemas.openxmlformats.org/drawingml/2006/main">
+              <a:ext uri="{FF2B5EF4-FFF2-40B4-BE49-F238E27FC236}">
+                <a16:creationId xmlns:a16="http://schemas.microsoft.com/office/drawing/2014/main" id="{1745A46A-0A53-4DCE-B958-E756CACE0B8B}"/>
+              </a:ext>
+            </a:extLst>
+          </p:cNvPr>
+          <p:cNvSpPr>
+            <a:spLocks xmlns:a="http://schemas.openxmlformats.org/drawingml/2006/main" noGrp="1"/>
+          </p:cNvSpPr>
+          <p:nvPr/>
+        </p:nvSpPr>
+        <p:spPr>
+          <a:xfrm xmlns:a="http://schemas.openxmlformats.org/drawingml/2006/main">
+            <a:off x="876300" y="4324350"/>
+            <a:ext cx="85725" cy="85725"/>
+          </a:xfrm>
+          <a:prstGeom xmlns:a="http://schemas.openxmlformats.org/drawingml/2006/main" prst="ellipse">
+            <a:avLst/>
+          </a:prstGeom>
+          <a:solidFill xmlns:a="http://schemas.openxmlformats.org/drawingml/2006/main">
+            <a:srgbClr val="64748B"/>
+          </a:solidFill>
+          <a:ln xmlns:a="http://schemas.openxmlformats.org/drawingml/2006/main" w="0">
+            <a:noFill/>
+            <a:prstDash val="solid"/>
+          </a:ln>
+        </p:spPr>
+      </p:sp>
+      <p:sp>
+        <p:nvSpPr>
+          <p:cNvPr id="12" name="">
+            <a:extLst xmlns:a="http://schemas.openxmlformats.org/drawingml/2006/main">
+              <a:ext uri="{FF2B5EF4-FFF2-40B4-BE49-F238E27FC236}">
+                <a16:creationId xmlns:a16="http://schemas.microsoft.com/office/drawing/2014/main" id="{749C45ED-8CD3-4BAD-A51B-575D7C6D6711}"/>
+              </a:ext>
+            </a:extLst>
+          </p:cNvPr>
+          <p:cNvSpPr>
+            <a:spLocks xmlns:a="http://schemas.openxmlformats.org/drawingml/2006/main" noGrp="1"/>
+          </p:cNvSpPr>
+          <p:nvPr/>
+        </p:nvSpPr>
+        <p:spPr>
+          <a:xfrm xmlns:a="http://schemas.openxmlformats.org/drawingml/2006/main">
+            <a:off x="1104900" y="4248150"/>
+            <a:ext cx="3771900" cy="400050"/>
+          </a:xfrm>
+          <a:prstGeom xmlns:a="http://schemas.openxmlformats.org/drawingml/2006/main" prst="rect">
+            <a:avLst/>
+          </a:prstGeom>
+          <a:noFill xmlns:a="http://schemas.openxmlformats.org/drawingml/2006/main"/>
+          <a:ln xmlns:a="http://schemas.openxmlformats.org/drawingml/2006/main" w="0">
+            <a:noFill/>
+            <a:prstDash val="solid"/>
+          </a:ln>
+        </p:spPr>
+        <p:txBody>
+          <a:bodyPr xmlns:a="http://schemas.openxmlformats.org/drawingml/2006/main" anchor="t"/>
+          <a:lstStyle xmlns:a="http://schemas.openxmlformats.org/drawingml/2006/main"/>
+          <a:p xmlns:a="http://schemas.openxmlformats.org/drawingml/2006/main">
+            <a:pPr algn="l">
+              <a:defRPr sz="1500" b="0">
+                <a:solidFill>
+                  <a:srgbClr val="334155"/>
+                </a:solidFill>
+              </a:defRPr>
+            </a:pPr>
+            <a:r>
+              <a:rPr sz="1500" b="0">
+                <a:solidFill>
+                  <a:srgbClr val="334155"/>
+                </a:solidFill>
+              </a:rPr>
+              <a:t>does not protect useful prefetched KV</a:t>
+            </a:r>
+          </a:p>
+        </p:txBody>
+      </p:sp>
+      <p:sp>
+        <p:nvSpPr>
+          <p:cNvPr id="13" name="">
+            <a:extLst xmlns:a="http://schemas.openxmlformats.org/drawingml/2006/main">
+              <a:ext uri="{FF2B5EF4-FFF2-40B4-BE49-F238E27FC236}">
+                <a16:creationId xmlns:a16="http://schemas.microsoft.com/office/drawing/2014/main" id="{64C7BEE5-73CD-45C1-A81A-8A3306B89692}"/>
+              </a:ext>
+            </a:extLst>
+          </p:cNvPr>
+          <p:cNvSpPr>
+            <a:spLocks xmlns:a="http://schemas.openxmlformats.org/drawingml/2006/main" noGrp="1"/>
+          </p:cNvSpPr>
+          <p:nvPr/>
+        </p:nvSpPr>
+        <p:spPr>
+          <a:xfrm xmlns:a="http://schemas.openxmlformats.org/drawingml/2006/main">
+            <a:off x="5753100" y="3086100"/>
+            <a:ext cx="666750" cy="666750"/>
+          </a:xfrm>
+          <a:prstGeom xmlns:a="http://schemas.openxmlformats.org/drawingml/2006/main" prst="rect">
+            <a:avLst/>
+          </a:prstGeom>
+          <a:noFill xmlns:a="http://schemas.openxmlformats.org/drawingml/2006/main"/>
+          <a:ln xmlns:a="http://schemas.openxmlformats.org/drawingml/2006/main" w="0">
+            <a:noFill/>
+            <a:prstDash val="solid"/>
+          </a:ln>
+        </p:spPr>
+        <p:txBody>
+          <a:bodyPr xmlns:a="http://schemas.openxmlformats.org/drawingml/2006/main" anchor="t"/>
+          <a:lstStyle xmlns:a="http://schemas.openxmlformats.org/drawingml/2006/main"/>
+          <a:p xmlns:a="http://schemas.openxmlformats.org/drawingml/2006/main">
+            <a:pPr algn="ctr">
+              <a:defRPr sz="4050" b="1">
+                <a:solidFill>
+                  <a:srgbClr val="64748B"/>
+                </a:solidFill>
+              </a:defRPr>
+            </a:pPr>
+            <a:r>
+              <a:rPr sz="4050" b="1">
+                <a:solidFill>
+                  <a:srgbClr val="64748B"/>
+                </a:solidFill>
+              </a:rPr>
+              <a:t>→</a:t>
+            </a:r>
+          </a:p>
+        </p:txBody>
+      </p:sp>
+      <p:sp>
+        <p:nvSpPr>
+          <p:cNvPr id="14" name="">
+            <a:extLst xmlns:a="http://schemas.openxmlformats.org/drawingml/2006/main">
+              <a:ext uri="{FF2B5EF4-FFF2-40B4-BE49-F238E27FC236}">
+                <a16:creationId xmlns:a16="http://schemas.microsoft.com/office/drawing/2014/main" id="{EFEA93E8-754D-4930-A8F3-C17E32EC60C4}"/>
+              </a:ext>
+            </a:extLst>
+          </p:cNvPr>
+          <p:cNvSpPr>
+            <a:spLocks xmlns:a="http://schemas.openxmlformats.org/drawingml/2006/main" noGrp="1"/>
+          </p:cNvSpPr>
+          <p:nvPr/>
+        </p:nvSpPr>
+        <p:spPr>
+          <a:xfrm xmlns:a="http://schemas.openxmlformats.org/drawingml/2006/main">
+            <a:off x="6686550" y="1790700"/>
+            <a:ext cx="4953000" cy="3429000"/>
+          </a:xfrm>
+          <a:prstGeom xmlns:a="http://schemas.openxmlformats.org/drawingml/2006/main" prst="roundRect">
+            <a:avLst>
+              <a:gd name="adj" fmla="val 1667"/>
+            </a:avLst>
+          </a:prstGeom>
+          <a:solidFill xmlns:a="http://schemas.openxmlformats.org/drawingml/2006/main">
+            <a:srgbClr val="EFF6FF"/>
+          </a:solidFill>
+          <a:ln xmlns:a="http://schemas.openxmlformats.org/drawingml/2006/main" w="9525">
+            <a:solidFill>
+              <a:srgbClr val="BFDBFE"/>
+            </a:solidFill>
+            <a:prstDash val="solid"/>
+          </a:ln>
+        </p:spPr>
+      </p:sp>
+      <p:sp>
+        <p:nvSpPr>
+          <p:cNvPr id="15" name="">
+            <a:extLst xmlns:a="http://schemas.openxmlformats.org/drawingml/2006/main">
+              <a:ext uri="{FF2B5EF4-FFF2-40B4-BE49-F238E27FC236}">
+                <a16:creationId xmlns:a16="http://schemas.microsoft.com/office/drawing/2014/main" id="{3479463A-7096-480C-9D12-86C556D54384}"/>
+              </a:ext>
+            </a:extLst>
+          </p:cNvPr>
+          <p:cNvSpPr>
+            <a:spLocks xmlns:a="http://schemas.openxmlformats.org/drawingml/2006/main" noGrp="1"/>
+          </p:cNvSpPr>
+          <p:nvPr/>
+        </p:nvSpPr>
+        <p:spPr>
+          <a:xfrm xmlns:a="http://schemas.openxmlformats.org/drawingml/2006/main">
+            <a:off x="6972300" y="2076450"/>
+            <a:ext cx="4000500" cy="323850"/>
+          </a:xfrm>
+          <a:prstGeom xmlns:a="http://schemas.openxmlformats.org/drawingml/2006/main" prst="rect">
+            <a:avLst/>
+          </a:prstGeom>
+          <a:noFill xmlns:a="http://schemas.openxmlformats.org/drawingml/2006/main"/>
+          <a:ln xmlns:a="http://schemas.openxmlformats.org/drawingml/2006/main" w="0">
+            <a:noFill/>
+            <a:prstDash val="solid"/>
+          </a:ln>
+        </p:spPr>
+        <p:txBody>
+          <a:bodyPr xmlns:a="http://schemas.openxmlformats.org/drawingml/2006/main" anchor="t"/>
+          <a:lstStyle xmlns:a="http://schemas.openxmlformats.org/drawingml/2006/main"/>
+          <a:p xmlns:a="http://schemas.openxmlformats.org/drawingml/2006/main">
+            <a:pPr algn="l">
+              <a:defRPr sz="1950" b="1">
+                <a:solidFill>
+                  <a:srgbClr val="0F172A"/>
+                </a:solidFill>
+              </a:defRPr>
+            </a:pPr>
+            <a:r>
+              <a:rPr sz="1950" b="1">
+                <a:solidFill>
+                  <a:srgbClr val="0F172A"/>
+                </a:solidFill>
+              </a:rPr>
+              <a:t>Hint-aware movement</a:t>
+            </a:r>
+          </a:p>
+        </p:txBody>
+      </p:sp>
+      <p:sp>
+        <p:nvSpPr>
+          <p:cNvPr id="16" name="">
+            <a:extLst xmlns:a="http://schemas.openxmlformats.org/drawingml/2006/main">
+              <a:ext uri="{FF2B5EF4-FFF2-40B4-BE49-F238E27FC236}">
+                <a16:creationId xmlns:a16="http://schemas.microsoft.com/office/drawing/2014/main" id="{CB536808-FA20-492D-9F4A-6D6DFE2AB68A}"/>
+              </a:ext>
+            </a:extLst>
+          </p:cNvPr>
+          <p:cNvSpPr>
+            <a:spLocks xmlns:a="http://schemas.openxmlformats.org/drawingml/2006/main" noGrp="1"/>
+          </p:cNvSpPr>
+          <p:nvPr/>
+        </p:nvSpPr>
+        <p:spPr>
+          <a:xfrm xmlns:a="http://schemas.openxmlformats.org/drawingml/2006/main">
+            <a:off x="7010400" y="2781300"/>
+            <a:ext cx="85725" cy="85725"/>
+          </a:xfrm>
+          <a:prstGeom xmlns:a="http://schemas.openxmlformats.org/drawingml/2006/main" prst="ellipse">
+            <a:avLst/>
+          </a:prstGeom>
+          <a:solidFill xmlns:a="http://schemas.openxmlformats.org/drawingml/2006/main">
+            <a:srgbClr val="2563EB"/>
+          </a:solidFill>
+          <a:ln xmlns:a="http://schemas.openxmlformats.org/drawingml/2006/main" w="0">
+            <a:noFill/>
+            <a:prstDash val="solid"/>
+          </a:ln>
+        </p:spPr>
+      </p:sp>
+      <p:sp>
+        <p:nvSpPr>
+          <p:cNvPr id="17" name="">
+            <a:extLst xmlns:a="http://schemas.openxmlformats.org/drawingml/2006/main">
+              <a:ext uri="{FF2B5EF4-FFF2-40B4-BE49-F238E27FC236}">
+                <a16:creationId xmlns:a16="http://schemas.microsoft.com/office/drawing/2014/main" id="{67403ECC-6F6A-4ACF-8948-91C5C1C50847}"/>
+              </a:ext>
+            </a:extLst>
+          </p:cNvPr>
+          <p:cNvSpPr>
+            <a:spLocks xmlns:a="http://schemas.openxmlformats.org/drawingml/2006/main" noGrp="1"/>
+          </p:cNvSpPr>
+          <p:nvPr/>
+        </p:nvSpPr>
+        <p:spPr>
+          <a:xfrm xmlns:a="http://schemas.openxmlformats.org/drawingml/2006/main">
+            <a:off x="7239000" y="2705100"/>
+            <a:ext cx="3771900" cy="400050"/>
+          </a:xfrm>
+          <a:prstGeom xmlns:a="http://schemas.openxmlformats.org/drawingml/2006/main" prst="rect">
+            <a:avLst/>
+          </a:prstGeom>
+          <a:noFill xmlns:a="http://schemas.openxmlformats.org/drawingml/2006/main"/>
+          <a:ln xmlns:a="http://schemas.openxmlformats.org/drawingml/2006/main" w="0">
+            <a:noFill/>
+            <a:prstDash val="solid"/>
+          </a:ln>
+        </p:spPr>
+        <p:txBody>
+          <a:bodyPr xmlns:a="http://schemas.openxmlformats.org/drawingml/2006/main" anchor="t"/>
+          <a:lstStyle xmlns:a="http://schemas.openxmlformats.org/drawingml/2006/main"/>
+          <a:p xmlns:a="http://schemas.openxmlformats.org/drawingml/2006/main">
+            <a:pPr algn="l">
+              <a:defRPr sz="1500" b="0">
+                <a:solidFill>
+                  <a:srgbClr val="334155"/>
+                </a:solidFill>
+              </a:defRPr>
+            </a:pPr>
+            <a:r>
+              <a:rPr sz="1500" b="0">
+                <a:solidFill>
+                  <a:srgbClr val="334155"/>
+                </a:solidFill>
+              </a:rPr>
+              <a:t>tags KV by session and priority</a:t>
+            </a:r>
+          </a:p>
+        </p:txBody>
+      </p:sp>
+      <p:sp>
+        <p:nvSpPr>
+          <p:cNvPr id="18" name="">
+            <a:extLst xmlns:a="http://schemas.openxmlformats.org/drawingml/2006/main">
+              <a:ext uri="{FF2B5EF4-FFF2-40B4-BE49-F238E27FC236}">
+                <a16:creationId xmlns:a16="http://schemas.microsoft.com/office/drawing/2014/main" id="{5706EF25-E15F-4FB4-B811-772C2D797440}"/>
+              </a:ext>
+            </a:extLst>
+          </p:cNvPr>
+          <p:cNvSpPr>
+            <a:spLocks xmlns:a="http://schemas.openxmlformats.org/drawingml/2006/main" noGrp="1"/>
+          </p:cNvSpPr>
+          <p:nvPr/>
+        </p:nvSpPr>
+        <p:spPr>
+          <a:xfrm xmlns:a="http://schemas.openxmlformats.org/drawingml/2006/main">
+            <a:off x="7010400" y="3295650"/>
+            <a:ext cx="85725" cy="85725"/>
+          </a:xfrm>
+          <a:prstGeom xmlns:a="http://schemas.openxmlformats.org/drawingml/2006/main" prst="ellipse">
+            <a:avLst/>
+          </a:prstGeom>
+          <a:solidFill xmlns:a="http://schemas.openxmlformats.org/drawingml/2006/main">
+            <a:srgbClr val="A855F7"/>
+          </a:solidFill>
+          <a:ln xmlns:a="http://schemas.openxmlformats.org/drawingml/2006/main" w="0">
+            <a:noFill/>
+            <a:prstDash val="solid"/>
+          </a:ln>
+        </p:spPr>
+      </p:sp>
+      <p:sp>
+        <p:nvSpPr>
+          <p:cNvPr id="19" name="">
+            <a:extLst xmlns:a="http://schemas.openxmlformats.org/drawingml/2006/main">
+              <a:ext uri="{FF2B5EF4-FFF2-40B4-BE49-F238E27FC236}">
+                <a16:creationId xmlns:a16="http://schemas.microsoft.com/office/drawing/2014/main" id="{91498836-E12D-4E21-9EB0-9B57AD99E1EA}"/>
+              </a:ext>
+            </a:extLst>
+          </p:cNvPr>
+          <p:cNvSpPr>
+            <a:spLocks xmlns:a="http://schemas.openxmlformats.org/drawingml/2006/main" noGrp="1"/>
+          </p:cNvSpPr>
+          <p:nvPr/>
+        </p:nvSpPr>
+        <p:spPr>
+          <a:xfrm xmlns:a="http://schemas.openxmlformats.org/drawingml/2006/main">
+            <a:off x="7239000" y="3219450"/>
+            <a:ext cx="3771900" cy="400050"/>
+          </a:xfrm>
+          <a:prstGeom xmlns:a="http://schemas.openxmlformats.org/drawingml/2006/main" prst="rect">
+            <a:avLst/>
+          </a:prstGeom>
+          <a:noFill xmlns:a="http://schemas.openxmlformats.org/drawingml/2006/main"/>
+          <a:ln xmlns:a="http://schemas.openxmlformats.org/drawingml/2006/main" w="0">
+            <a:noFill/>
+            <a:prstDash val="solid"/>
+          </a:ln>
+        </p:spPr>
+        <p:txBody>
+          <a:bodyPr xmlns:a="http://schemas.openxmlformats.org/drawingml/2006/main" anchor="t"/>
+          <a:lstStyle xmlns:a="http://schemas.openxmlformats.org/drawingml/2006/main"/>
+          <a:p xmlns:a="http://schemas.openxmlformats.org/drawingml/2006/main">
+            <a:pPr algn="l">
+              <a:defRPr sz="1500" b="0">
+                <a:solidFill>
+                  <a:srgbClr val="334155"/>
+                </a:solidFill>
+              </a:defRPr>
+            </a:pPr>
+            <a:r>
+              <a:rPr sz="1500" b="0">
+                <a:solidFill>
+                  <a:srgbClr val="334155"/>
+                </a:solidFill>
+              </a:rPr>
+              <a:t>schedules against replay deadlines</a:t>
+            </a:r>
+          </a:p>
+        </p:txBody>
+      </p:sp>
+      <p:sp>
+        <p:nvSpPr>
+          <p:cNvPr id="20" name="">
+            <a:extLst xmlns:a="http://schemas.openxmlformats.org/drawingml/2006/main">
+              <a:ext uri="{FF2B5EF4-FFF2-40B4-BE49-F238E27FC236}">
+                <a16:creationId xmlns:a16="http://schemas.microsoft.com/office/drawing/2014/main" id="{24DA658C-BDE2-4ED2-91CD-8985D0A4A44C}"/>
+              </a:ext>
+            </a:extLst>
+          </p:cNvPr>
+          <p:cNvSpPr>
+            <a:spLocks xmlns:a="http://schemas.openxmlformats.org/drawingml/2006/main" noGrp="1"/>
+          </p:cNvSpPr>
+          <p:nvPr/>
+        </p:nvSpPr>
+        <p:spPr>
+          <a:xfrm xmlns:a="http://schemas.openxmlformats.org/drawingml/2006/main">
+            <a:off x="7010400" y="3810000"/>
+            <a:ext cx="85725" cy="85725"/>
+          </a:xfrm>
+          <a:prstGeom xmlns:a="http://schemas.openxmlformats.org/drawingml/2006/main" prst="ellipse">
+            <a:avLst/>
+          </a:prstGeom>
+          <a:solidFill xmlns:a="http://schemas.openxmlformats.org/drawingml/2006/main">
+            <a:srgbClr val="06B6D4"/>
+          </a:solidFill>
+          <a:ln xmlns:a="http://schemas.openxmlformats.org/drawingml/2006/main" w="0">
+            <a:noFill/>
+            <a:prstDash val="solid"/>
+          </a:ln>
+        </p:spPr>
+      </p:sp>
+      <p:sp>
+        <p:nvSpPr>
+          <p:cNvPr id="21" name="">
+            <a:extLst xmlns:a="http://schemas.openxmlformats.org/drawingml/2006/main">
+              <a:ext uri="{FF2B5EF4-FFF2-40B4-BE49-F238E27FC236}">
+                <a16:creationId xmlns:a16="http://schemas.microsoft.com/office/drawing/2014/main" id="{3109D8DE-B82D-4B66-BEA5-D33F101DF0B9}"/>
+              </a:ext>
+            </a:extLst>
+          </p:cNvPr>
+          <p:cNvSpPr>
+            <a:spLocks xmlns:a="http://schemas.openxmlformats.org/drawingml/2006/main" noGrp="1"/>
+          </p:cNvSpPr>
+          <p:nvPr/>
+        </p:nvSpPr>
+        <p:spPr>
+          <a:xfrm xmlns:a="http://schemas.openxmlformats.org/drawingml/2006/main">
+            <a:off x="7239000" y="3733800"/>
+            <a:ext cx="3771900" cy="400050"/>
+          </a:xfrm>
+          <a:prstGeom xmlns:a="http://schemas.openxmlformats.org/drawingml/2006/main" prst="rect">
+            <a:avLst/>
+          </a:prstGeom>
+          <a:noFill xmlns:a="http://schemas.openxmlformats.org/drawingml/2006/main"/>
+          <a:ln xmlns:a="http://schemas.openxmlformats.org/drawingml/2006/main" w="0">
+            <a:noFill/>
+            <a:prstDash val="solid"/>
+          </a:ln>
+        </p:spPr>
+        <p:txBody>
+          <a:bodyPr xmlns:a="http://schemas.openxmlformats.org/drawingml/2006/main" anchor="t"/>
+          <a:lstStyle xmlns:a="http://schemas.openxmlformats.org/drawingml/2006/main"/>
+          <a:p xmlns:a="http://schemas.openxmlformats.org/drawingml/2006/main">
+            <a:pPr algn="l">
+              <a:defRPr sz="1500" b="0">
+                <a:solidFill>
+                  <a:srgbClr val="334155"/>
+                </a:solidFill>
+              </a:defRPr>
+            </a:pPr>
+            <a:r>
+              <a:rPr sz="1500" b="0">
+                <a:solidFill>
+                  <a:srgbClr val="334155"/>
+                </a:solidFill>
+              </a:rPr>
+              <a:t>moves hot KV before replay</a:t>
+            </a:r>
+          </a:p>
+        </p:txBody>
+      </p:sp>
+      <p:sp>
+        <p:nvSpPr>
+          <p:cNvPr id="22" name="">
+            <a:extLst xmlns:a="http://schemas.openxmlformats.org/drawingml/2006/main">
+              <a:ext uri="{FF2B5EF4-FFF2-40B4-BE49-F238E27FC236}">
+                <a16:creationId xmlns:a16="http://schemas.microsoft.com/office/drawing/2014/main" id="{3AFC8DFD-9737-4F56-B8BA-6813B1DAF62B}"/>
+              </a:ext>
+            </a:extLst>
+          </p:cNvPr>
+          <p:cNvSpPr>
+            <a:spLocks xmlns:a="http://schemas.openxmlformats.org/drawingml/2006/main" noGrp="1"/>
+          </p:cNvSpPr>
+          <p:nvPr/>
+        </p:nvSpPr>
+        <p:spPr>
+          <a:xfrm xmlns:a="http://schemas.openxmlformats.org/drawingml/2006/main">
+            <a:off x="7010400" y="4324350"/>
+            <a:ext cx="85725" cy="85725"/>
+          </a:xfrm>
+          <a:prstGeom xmlns:a="http://schemas.openxmlformats.org/drawingml/2006/main" prst="ellipse">
+            <a:avLst/>
+          </a:prstGeom>
+          <a:solidFill xmlns:a="http://schemas.openxmlformats.org/drawingml/2006/main">
+            <a:srgbClr val="16A34A"/>
+          </a:solidFill>
+          <a:ln xmlns:a="http://schemas.openxmlformats.org/drawingml/2006/main" w="0">
+            <a:noFill/>
+            <a:prstDash val="solid"/>
+          </a:ln>
+        </p:spPr>
+      </p:sp>
+      <p:sp>
+        <p:nvSpPr>
+          <p:cNvPr id="23" name="">
+            <a:extLst xmlns:a="http://schemas.openxmlformats.org/drawingml/2006/main">
+              <a:ext uri="{FF2B5EF4-FFF2-40B4-BE49-F238E27FC236}">
+                <a16:creationId xmlns:a16="http://schemas.microsoft.com/office/drawing/2014/main" id="{16140D05-F4BE-47B2-88D3-3219B5C0BD50}"/>
+              </a:ext>
+            </a:extLst>
+          </p:cNvPr>
+          <p:cNvSpPr>
+            <a:spLocks xmlns:a="http://schemas.openxmlformats.org/drawingml/2006/main" noGrp="1"/>
+          </p:cNvSpPr>
+          <p:nvPr/>
+        </p:nvSpPr>
+        <p:spPr>
+          <a:xfrm xmlns:a="http://schemas.openxmlformats.org/drawingml/2006/main">
+            <a:off x="7239000" y="4248150"/>
+            <a:ext cx="3771900" cy="400050"/>
+          </a:xfrm>
+          <a:prstGeom xmlns:a="http://schemas.openxmlformats.org/drawingml/2006/main" prst="rect">
+            <a:avLst/>
+          </a:prstGeom>
+          <a:noFill xmlns:a="http://schemas.openxmlformats.org/drawingml/2006/main"/>
+          <a:ln xmlns:a="http://schemas.openxmlformats.org/drawingml/2006/main" w="0">
+            <a:noFill/>
+            <a:prstDash val="solid"/>
+          </a:ln>
+        </p:spPr>
+        <p:txBody>
+          <a:bodyPr xmlns:a="http://schemas.openxmlformats.org/drawingml/2006/main" anchor="t"/>
+          <a:lstStyle xmlns:a="http://schemas.openxmlformats.org/drawingml/2006/main"/>
+          <a:p xmlns:a="http://schemas.openxmlformats.org/drawingml/2006/main">
+            <a:pPr algn="l">
+              <a:defRPr sz="1500" b="0">
+                <a:solidFill>
+                  <a:srgbClr val="334155"/>
+                </a:solidFill>
+              </a:defRPr>
+            </a:pPr>
+            <a:r>
+              <a:rPr sz="1500" b="0">
+                <a:solidFill>
+                  <a:srgbClr val="334155"/>
+                </a:solidFill>
+              </a:rPr>
+              <a:t>reports late, useful, and wasted movement</a:t>
+            </a:r>
+          </a:p>
+        </p:txBody>
+      </p:sp>
+      <p:sp>
+        <p:nvSpPr>
+          <p:cNvPr id="24" name="">
+            <a:extLst xmlns:a="http://schemas.openxmlformats.org/drawingml/2006/main">
+              <a:ext uri="{FF2B5EF4-FFF2-40B4-BE49-F238E27FC236}">
+                <a16:creationId xmlns:a16="http://schemas.microsoft.com/office/drawing/2014/main" id="{F613DA12-8B36-4E88-BB0A-199A23649269}"/>
               </a:ext>
             </a:extLst>
           </p:cNvPr>
@@ -4434,10 +6263,10 @@
       </p:sp>
       <p:sp>
         <p:nvSpPr>
-          <p:cNvPr id="7" name="">
-            <a:extLst xmlns:a="http://schemas.openxmlformats.org/drawingml/2006/main">
-              <a:ext uri="{FF2B5EF4-FFF2-40B4-BE49-F238E27FC236}">
-                <a16:creationId xmlns:a16="http://schemas.microsoft.com/office/drawing/2014/main" id="{D8ECD703-E2C7-4EE9-8797-2021C2220D16}"/>
+          <p:cNvPr id="25" name="">
+            <a:extLst xmlns:a="http://schemas.openxmlformats.org/drawingml/2006/main">
+              <a:ext uri="{FF2B5EF4-FFF2-40B4-BE49-F238E27FC236}">
+                <a16:creationId xmlns:a16="http://schemas.microsoft.com/office/drawing/2014/main" id="{A192BBB2-FB50-4264-8DF9-1BE806F27E57}"/>
               </a:ext>
             </a:extLst>
           </p:cNvPr>
@@ -4485,7 +6314,7 @@
     </p:spTree>
     <p:extLst>
       <p:ext uri="{BB962C8B-B14F-4D97-AF65-F5344CB8AC3E}">
-        <p14:creationId xmlns:p14="http://schemas.microsoft.com/office/powerpoint/2010/main" val="638383710"/>
+        <p14:creationId xmlns:p14="http://schemas.microsoft.com/office/powerpoint/2010/main" val="1757269179"/>
       </p:ext>
     </p:extLst>
   </p:cSld>
@@ -4513,10 +6342,10 @@
       </p:grpSpPr>
       <p:sp>
         <p:nvSpPr>
-          <p:cNvPr id="16" name="">
-            <a:extLst xmlns:a="http://schemas.openxmlformats.org/drawingml/2006/main">
-              <a:ext uri="{FF2B5EF4-FFF2-40B4-BE49-F238E27FC236}">
-                <a16:creationId xmlns:a16="http://schemas.microsoft.com/office/drawing/2014/main" id="{0AF20165-E0EE-4304-8FC5-39BD9A5E2F4A}"/>
+          <p:cNvPr id="8" name="">
+            <a:extLst xmlns:a="http://schemas.openxmlformats.org/drawingml/2006/main">
+              <a:ext uri="{FF2B5EF4-FFF2-40B4-BE49-F238E27FC236}">
+                <a16:creationId xmlns:a16="http://schemas.microsoft.com/office/drawing/2014/main" id="{54F3CE87-51EC-4277-82B3-968BEA504941}"/>
               </a:ext>
             </a:extLst>
           </p:cNvPr>
@@ -4556,7 +6385,7 @@
                   <a:srgbClr val="0F172A"/>
                 </a:solidFill>
               </a:rPr>
-              <a:t>Software prefetch often missed the agent replay deadline</a:t>
+              <a:t>The replay path exposes the bottleneck</a:t>
             </a:r>
           </a:p>
         </p:txBody>
@@ -4566,7 +6395,7 @@
           <p:cNvPr id="2" name="">
             <a:extLst xmlns:a="http://schemas.openxmlformats.org/drawingml/2006/main">
               <a:ext uri="{FF2B5EF4-FFF2-40B4-BE49-F238E27FC236}">
-                <a16:creationId xmlns:a16="http://schemas.microsoft.com/office/drawing/2014/main" id="{A079478B-24A7-4DDC-A3E5-89C182630F86}"/>
+                <a16:creationId xmlns:a16="http://schemas.microsoft.com/office/drawing/2014/main" id="{4FDC9E96-0B75-4292-AB48-CCF4331077CA}"/>
               </a:ext>
             </a:extLst>
           </p:cNvPr>
@@ -4606,7 +6435,7 @@
                   <a:srgbClr val="64748B"/>
                 </a:solidFill>
               </a:rPr>
-              <a:t>Across live prefetch attempts, nearly every hint completed after the agent had already resumed.</a:t>
+              <a:t>Several tool-gap sessions show where replay spends time before the first useful token.</a:t>
             </a:r>
           </a:p>
         </p:txBody>
@@ -4616,23 +6445,23 @@
           <p:cNvPr id="3" name="">
             <a:extLst xmlns:a="http://schemas.openxmlformats.org/drawingml/2006/main">
               <a:ext uri="{FF2B5EF4-FFF2-40B4-BE49-F238E27FC236}">
-                <a16:creationId xmlns:a16="http://schemas.microsoft.com/office/drawing/2014/main" id="{0DCB7E3C-21C8-4407-9248-F61AFD86DC9A}"/>
-              </a:ext>
-            </a:extLst>
-          </p:cNvPr>
-          <p:cNvSpPr>
-            <a:spLocks xmlns:a="http://schemas.openxmlformats.org/drawingml/2006/main" noGrp="1"/>
-          </p:cNvSpPr>
-          <p:nvPr/>
-        </p:nvSpPr>
-        <p:spPr>
-          <a:xfrm xmlns:a="http://schemas.openxmlformats.org/drawingml/2006/main">
-            <a:off x="323850" y="1428750"/>
-            <a:ext cx="8572500" cy="3886200"/>
+                <a16:creationId xmlns:a16="http://schemas.microsoft.com/office/drawing/2014/main" id="{AC93ED74-AEE4-4F44-9237-FDDC9C117B31}"/>
+              </a:ext>
+            </a:extLst>
+          </p:cNvPr>
+          <p:cNvSpPr>
+            <a:spLocks xmlns:a="http://schemas.openxmlformats.org/drawingml/2006/main" noGrp="1"/>
+          </p:cNvSpPr>
+          <p:nvPr/>
+        </p:nvSpPr>
+        <p:spPr>
+          <a:xfrm xmlns:a="http://schemas.openxmlformats.org/drawingml/2006/main">
+            <a:off x="228600" y="1181100"/>
+            <a:ext cx="11734800" cy="4972050"/>
           </a:xfrm>
           <a:prstGeom xmlns:a="http://schemas.openxmlformats.org/drawingml/2006/main" prst="roundRect">
             <a:avLst>
-              <a:gd name="adj" fmla="val 1471"/>
+              <a:gd name="adj" fmla="val 1149"/>
             </a:avLst>
           </a:prstGeom>
           <a:solidFill xmlns:a="http://schemas.openxmlformats.org/drawingml/2006/main">
@@ -4648,20 +6477,20 @@
       </p:sp>
       <p:pic>
         <p:nvPicPr>
-          <p:cNvPr id="19" name=""/>
+          <p:cNvPr id="11" name=""/>
           <p:cNvPicPr>
             <a:picLocks xmlns:a="http://schemas.openxmlformats.org/drawingml/2006/main" noChangeAspect="1"/>
           </p:cNvPicPr>
           <p:nvPr/>
         </p:nvPicPr>
         <p:blipFill>
-          <a:blip xmlns:r="http://schemas.openxmlformats.org/officeDocument/2006/relationships" xmlns:a="http://schemas.openxmlformats.org/drawingml/2006/main" r:embed="R4354e2c2031a4581"/>
+          <a:blip xmlns:r="http://schemas.openxmlformats.org/officeDocument/2006/relationships" xmlns:a="http://schemas.openxmlformats.org/drawingml/2006/main" r:embed="Rfac2162f30804ea9"/>
           <a:stretch xmlns:a="http://schemas.openxmlformats.org/drawingml/2006/main"/>
         </p:blipFill>
         <p:spPr>
           <a:xfrm xmlns:a="http://schemas.openxmlformats.org/drawingml/2006/main">
-            <a:off x="400050" y="1890170"/>
-            <a:ext cx="8420100" cy="2963361"/>
+            <a:off x="304800" y="1285315"/>
+            <a:ext cx="11582400" cy="4763619"/>
           </a:xfrm>
           <a:prstGeom xmlns:a="http://schemas.openxmlformats.org/drawingml/2006/main" prst="rect">
             <a:avLst/>
@@ -4673,377 +6502,7 @@
           <p:cNvPr id="5" name="">
             <a:extLst xmlns:a="http://schemas.openxmlformats.org/drawingml/2006/main">
               <a:ext uri="{FF2B5EF4-FFF2-40B4-BE49-F238E27FC236}">
-                <a16:creationId xmlns:a16="http://schemas.microsoft.com/office/drawing/2014/main" id="{3DC1BF31-9B2E-484B-B32A-151A763D1862}"/>
-              </a:ext>
-            </a:extLst>
-          </p:cNvPr>
-          <p:cNvSpPr>
-            <a:spLocks xmlns:a="http://schemas.openxmlformats.org/drawingml/2006/main" noGrp="1"/>
-          </p:cNvSpPr>
-          <p:nvPr/>
-        </p:nvSpPr>
-        <p:spPr>
-          <a:xfrm xmlns:a="http://schemas.openxmlformats.org/drawingml/2006/main">
-            <a:off x="9124950" y="1600200"/>
-            <a:ext cx="2228850" cy="1295400"/>
-          </a:xfrm>
-          <a:prstGeom xmlns:a="http://schemas.openxmlformats.org/drawingml/2006/main" prst="roundRect">
-            <a:avLst>
-              <a:gd name="adj" fmla="val 4412"/>
-            </a:avLst>
-          </a:prstGeom>
-          <a:solidFill xmlns:a="http://schemas.openxmlformats.org/drawingml/2006/main">
-            <a:srgbClr val="FEF2F2"/>
-          </a:solidFill>
-          <a:ln xmlns:a="http://schemas.openxmlformats.org/drawingml/2006/main" w="9525">
-            <a:solidFill>
-              <a:srgbClr val="FECACA"/>
-            </a:solidFill>
-            <a:prstDash val="solid"/>
-          </a:ln>
-        </p:spPr>
-      </p:sp>
-      <p:sp>
-        <p:nvSpPr>
-          <p:cNvPr id="6" name="">
-            <a:extLst xmlns:a="http://schemas.openxmlformats.org/drawingml/2006/main">
-              <a:ext uri="{FF2B5EF4-FFF2-40B4-BE49-F238E27FC236}">
-                <a16:creationId xmlns:a16="http://schemas.microsoft.com/office/drawing/2014/main" id="{F9BC519B-CC45-4A8F-9111-EBE43D6E6BAB}"/>
-              </a:ext>
-            </a:extLst>
-          </p:cNvPr>
-          <p:cNvSpPr>
-            <a:spLocks xmlns:a="http://schemas.openxmlformats.org/drawingml/2006/main" noGrp="1"/>
-          </p:cNvSpPr>
-          <p:nvPr/>
-        </p:nvSpPr>
-        <p:spPr>
-          <a:xfrm xmlns:a="http://schemas.openxmlformats.org/drawingml/2006/main">
-            <a:off x="9296400" y="1809750"/>
-            <a:ext cx="1885950" cy="438150"/>
-          </a:xfrm>
-          <a:prstGeom xmlns:a="http://schemas.openxmlformats.org/drawingml/2006/main" prst="rect">
-            <a:avLst/>
-          </a:prstGeom>
-          <a:noFill xmlns:a="http://schemas.openxmlformats.org/drawingml/2006/main"/>
-          <a:ln xmlns:a="http://schemas.openxmlformats.org/drawingml/2006/main" w="0">
-            <a:noFill/>
-            <a:prstDash val="solid"/>
-          </a:ln>
-        </p:spPr>
-        <p:txBody>
-          <a:bodyPr xmlns:a="http://schemas.openxmlformats.org/drawingml/2006/main" anchor="t"/>
-          <a:lstStyle xmlns:a="http://schemas.openxmlformats.org/drawingml/2006/main"/>
-          <a:p xmlns:a="http://schemas.openxmlformats.org/drawingml/2006/main">
-            <a:pPr algn="ctr">
-              <a:defRPr sz="2700" b="1">
-                <a:solidFill>
-                  <a:srgbClr val="B91C1C"/>
-                </a:solidFill>
-              </a:defRPr>
-            </a:pPr>
-            <a:r>
-              <a:rPr sz="2700" b="1">
-                <a:solidFill>
-                  <a:srgbClr val="B91C1C"/>
-                </a:solidFill>
-              </a:rPr>
-              <a:t>112 of 114</a:t>
-            </a:r>
-          </a:p>
-        </p:txBody>
-      </p:sp>
-      <p:sp>
-        <p:nvSpPr>
-          <p:cNvPr id="7" name="">
-            <a:extLst xmlns:a="http://schemas.openxmlformats.org/drawingml/2006/main">
-              <a:ext uri="{FF2B5EF4-FFF2-40B4-BE49-F238E27FC236}">
-                <a16:creationId xmlns:a16="http://schemas.microsoft.com/office/drawing/2014/main" id="{3BCD2609-8C0B-4DBF-B08A-5A3699130D0B}"/>
-              </a:ext>
-            </a:extLst>
-          </p:cNvPr>
-          <p:cNvSpPr>
-            <a:spLocks xmlns:a="http://schemas.openxmlformats.org/drawingml/2006/main" noGrp="1"/>
-          </p:cNvSpPr>
-          <p:nvPr/>
-        </p:nvSpPr>
-        <p:spPr>
-          <a:xfrm xmlns:a="http://schemas.openxmlformats.org/drawingml/2006/main">
-            <a:off x="9353550" y="2324100"/>
-            <a:ext cx="1771650" cy="228600"/>
-          </a:xfrm>
-          <a:prstGeom xmlns:a="http://schemas.openxmlformats.org/drawingml/2006/main" prst="rect">
-            <a:avLst/>
-          </a:prstGeom>
-          <a:noFill xmlns:a="http://schemas.openxmlformats.org/drawingml/2006/main"/>
-          <a:ln xmlns:a="http://schemas.openxmlformats.org/drawingml/2006/main" w="0">
-            <a:noFill/>
-            <a:prstDash val="solid"/>
-          </a:ln>
-        </p:spPr>
-        <p:txBody>
-          <a:bodyPr xmlns:a="http://schemas.openxmlformats.org/drawingml/2006/main" anchor="t"/>
-          <a:lstStyle xmlns:a="http://schemas.openxmlformats.org/drawingml/2006/main"/>
-          <a:p xmlns:a="http://schemas.openxmlformats.org/drawingml/2006/main">
-            <a:pPr algn="ctr">
-              <a:defRPr sz="1350" b="0">
-                <a:solidFill>
-                  <a:srgbClr val="334155"/>
-                </a:solidFill>
-              </a:defRPr>
-            </a:pPr>
-            <a:r>
-              <a:rPr sz="1350" b="0">
-                <a:solidFill>
-                  <a:srgbClr val="334155"/>
-                </a:solidFill>
-              </a:rPr>
-              <a:t>prefetch attempts</a:t>
-            </a:r>
-          </a:p>
-        </p:txBody>
-      </p:sp>
-      <p:sp>
-        <p:nvSpPr>
-          <p:cNvPr id="8" name="">
-            <a:extLst xmlns:a="http://schemas.openxmlformats.org/drawingml/2006/main">
-              <a:ext uri="{FF2B5EF4-FFF2-40B4-BE49-F238E27FC236}">
-                <a16:creationId xmlns:a16="http://schemas.microsoft.com/office/drawing/2014/main" id="{BC65F419-9551-41C2-8C85-21B638A49B33}"/>
-              </a:ext>
-            </a:extLst>
-          </p:cNvPr>
-          <p:cNvSpPr>
-            <a:spLocks xmlns:a="http://schemas.openxmlformats.org/drawingml/2006/main" noGrp="1"/>
-          </p:cNvSpPr>
-          <p:nvPr/>
-        </p:nvSpPr>
-        <p:spPr>
-          <a:xfrm xmlns:a="http://schemas.openxmlformats.org/drawingml/2006/main">
-            <a:off x="9353550" y="2571750"/>
-            <a:ext cx="1771650" cy="228600"/>
-          </a:xfrm>
-          <a:prstGeom xmlns:a="http://schemas.openxmlformats.org/drawingml/2006/main" prst="rect">
-            <a:avLst/>
-          </a:prstGeom>
-          <a:noFill xmlns:a="http://schemas.openxmlformats.org/drawingml/2006/main"/>
-          <a:ln xmlns:a="http://schemas.openxmlformats.org/drawingml/2006/main" w="0">
-            <a:noFill/>
-            <a:prstDash val="solid"/>
-          </a:ln>
-        </p:spPr>
-        <p:txBody>
-          <a:bodyPr xmlns:a="http://schemas.openxmlformats.org/drawingml/2006/main" anchor="t"/>
-          <a:lstStyle xmlns:a="http://schemas.openxmlformats.org/drawingml/2006/main"/>
-          <a:p xmlns:a="http://schemas.openxmlformats.org/drawingml/2006/main">
-            <a:pPr algn="ctr">
-              <a:defRPr sz="1350" b="0">
-                <a:solidFill>
-                  <a:srgbClr val="334155"/>
-                </a:solidFill>
-              </a:defRPr>
-            </a:pPr>
-            <a:r>
-              <a:rPr sz="1350" b="0">
-                <a:solidFill>
-                  <a:srgbClr val="334155"/>
-                </a:solidFill>
-              </a:rPr>
-              <a:t>were late</a:t>
-            </a:r>
-          </a:p>
-        </p:txBody>
-      </p:sp>
-      <p:sp>
-        <p:nvSpPr>
-          <p:cNvPr id="9" name="">
-            <a:extLst xmlns:a="http://schemas.openxmlformats.org/drawingml/2006/main">
-              <a:ext uri="{FF2B5EF4-FFF2-40B4-BE49-F238E27FC236}">
-                <a16:creationId xmlns:a16="http://schemas.microsoft.com/office/drawing/2014/main" id="{3C50A6A6-2CB8-45A4-B4FF-3452DA3B7DBB}"/>
-              </a:ext>
-            </a:extLst>
-          </p:cNvPr>
-          <p:cNvSpPr>
-            <a:spLocks xmlns:a="http://schemas.openxmlformats.org/drawingml/2006/main" noGrp="1"/>
-          </p:cNvSpPr>
-          <p:nvPr/>
-        </p:nvSpPr>
-        <p:spPr>
-          <a:xfrm xmlns:a="http://schemas.openxmlformats.org/drawingml/2006/main">
-            <a:off x="9124950" y="3143250"/>
-            <a:ext cx="2228850" cy="1066800"/>
-          </a:xfrm>
-          <a:prstGeom xmlns:a="http://schemas.openxmlformats.org/drawingml/2006/main" prst="roundRect">
-            <a:avLst>
-              <a:gd name="adj" fmla="val 5357"/>
-            </a:avLst>
-          </a:prstGeom>
-          <a:solidFill xmlns:a="http://schemas.openxmlformats.org/drawingml/2006/main">
-            <a:srgbClr val="FFF7ED"/>
-          </a:solidFill>
-          <a:ln xmlns:a="http://schemas.openxmlformats.org/drawingml/2006/main" w="9525">
-            <a:solidFill>
-              <a:srgbClr val="FED7AA"/>
-            </a:solidFill>
-            <a:prstDash val="solid"/>
-          </a:ln>
-        </p:spPr>
-      </p:sp>
-      <p:sp>
-        <p:nvSpPr>
-          <p:cNvPr id="10" name="">
-            <a:extLst xmlns:a="http://schemas.openxmlformats.org/drawingml/2006/main">
-              <a:ext uri="{FF2B5EF4-FFF2-40B4-BE49-F238E27FC236}">
-                <a16:creationId xmlns:a16="http://schemas.microsoft.com/office/drawing/2014/main" id="{01E8DD12-6009-4562-971F-5BD7CF3F4501}"/>
-              </a:ext>
-            </a:extLst>
-          </p:cNvPr>
-          <p:cNvSpPr>
-            <a:spLocks xmlns:a="http://schemas.openxmlformats.org/drawingml/2006/main" noGrp="1"/>
-          </p:cNvSpPr>
-          <p:nvPr/>
-        </p:nvSpPr>
-        <p:spPr>
-          <a:xfrm xmlns:a="http://schemas.openxmlformats.org/drawingml/2006/main">
-            <a:off x="9353550" y="3333750"/>
-            <a:ext cx="1771650" cy="419100"/>
-          </a:xfrm>
-          <a:prstGeom xmlns:a="http://schemas.openxmlformats.org/drawingml/2006/main" prst="rect">
-            <a:avLst/>
-          </a:prstGeom>
-          <a:noFill xmlns:a="http://schemas.openxmlformats.org/drawingml/2006/main"/>
-          <a:ln xmlns:a="http://schemas.openxmlformats.org/drawingml/2006/main" w="0">
-            <a:noFill/>
-            <a:prstDash val="solid"/>
-          </a:ln>
-        </p:spPr>
-        <p:txBody>
-          <a:bodyPr xmlns:a="http://schemas.openxmlformats.org/drawingml/2006/main" anchor="t"/>
-          <a:lstStyle xmlns:a="http://schemas.openxmlformats.org/drawingml/2006/main"/>
-          <a:p xmlns:a="http://schemas.openxmlformats.org/drawingml/2006/main">
-            <a:pPr algn="ctr">
-              <a:defRPr sz="3000" b="1">
-                <a:solidFill>
-                  <a:srgbClr val="C2410C"/>
-                </a:solidFill>
-              </a:defRPr>
-            </a:pPr>
-            <a:r>
-              <a:rPr sz="3000" b="1">
-                <a:solidFill>
-                  <a:srgbClr val="C2410C"/>
-                </a:solidFill>
-              </a:rPr>
-              <a:t>98.25%</a:t>
-            </a:r>
-          </a:p>
-        </p:txBody>
-      </p:sp>
-      <p:sp>
-        <p:nvSpPr>
-          <p:cNvPr id="11" name="">
-            <a:extLst xmlns:a="http://schemas.openxmlformats.org/drawingml/2006/main">
-              <a:ext uri="{FF2B5EF4-FFF2-40B4-BE49-F238E27FC236}">
-                <a16:creationId xmlns:a16="http://schemas.microsoft.com/office/drawing/2014/main" id="{19C77AE1-BBF2-4A8F-928E-2BA8A7A1BCF6}"/>
-              </a:ext>
-            </a:extLst>
-          </p:cNvPr>
-          <p:cNvSpPr>
-            <a:spLocks xmlns:a="http://schemas.openxmlformats.org/drawingml/2006/main" noGrp="1"/>
-          </p:cNvSpPr>
-          <p:nvPr/>
-        </p:nvSpPr>
-        <p:spPr>
-          <a:xfrm xmlns:a="http://schemas.openxmlformats.org/drawingml/2006/main">
-            <a:off x="9353550" y="3829050"/>
-            <a:ext cx="1771650" cy="285750"/>
-          </a:xfrm>
-          <a:prstGeom xmlns:a="http://schemas.openxmlformats.org/drawingml/2006/main" prst="rect">
-            <a:avLst/>
-          </a:prstGeom>
-          <a:noFill xmlns:a="http://schemas.openxmlformats.org/drawingml/2006/main"/>
-          <a:ln xmlns:a="http://schemas.openxmlformats.org/drawingml/2006/main" w="0">
-            <a:noFill/>
-            <a:prstDash val="solid"/>
-          </a:ln>
-        </p:spPr>
-        <p:txBody>
-          <a:bodyPr xmlns:a="http://schemas.openxmlformats.org/drawingml/2006/main" anchor="t"/>
-          <a:lstStyle xmlns:a="http://schemas.openxmlformats.org/drawingml/2006/main"/>
-          <a:p xmlns:a="http://schemas.openxmlformats.org/drawingml/2006/main">
-            <a:pPr algn="ctr">
-              <a:defRPr sz="1275" b="0">
-                <a:solidFill>
-                  <a:srgbClr val="334155"/>
-                </a:solidFill>
-              </a:defRPr>
-            </a:pPr>
-            <a:r>
-              <a:rPr sz="1275" b="0">
-                <a:solidFill>
-                  <a:srgbClr val="334155"/>
-                </a:solidFill>
-              </a:rPr>
-              <a:t>missed replay due deadline</a:t>
-            </a:r>
-          </a:p>
-        </p:txBody>
-      </p:sp>
-      <p:sp>
-        <p:nvSpPr>
-          <p:cNvPr id="12" name="">
-            <a:extLst xmlns:a="http://schemas.openxmlformats.org/drawingml/2006/main">
-              <a:ext uri="{FF2B5EF4-FFF2-40B4-BE49-F238E27FC236}">
-                <a16:creationId xmlns:a16="http://schemas.microsoft.com/office/drawing/2014/main" id="{CF4C2D29-6799-4FA9-8F1B-7A5E3A91E9AD}"/>
-              </a:ext>
-            </a:extLst>
-          </p:cNvPr>
-          <p:cNvSpPr>
-            <a:spLocks xmlns:a="http://schemas.openxmlformats.org/drawingml/2006/main" noGrp="1"/>
-          </p:cNvSpPr>
-          <p:nvPr/>
-        </p:nvSpPr>
-        <p:spPr>
-          <a:xfrm xmlns:a="http://schemas.openxmlformats.org/drawingml/2006/main">
-            <a:off x="9124950" y="4514850"/>
-            <a:ext cx="2247900" cy="685800"/>
-          </a:xfrm>
-          <a:prstGeom xmlns:a="http://schemas.openxmlformats.org/drawingml/2006/main" prst="rect">
-            <a:avLst/>
-          </a:prstGeom>
-          <a:noFill xmlns:a="http://schemas.openxmlformats.org/drawingml/2006/main"/>
-          <a:ln xmlns:a="http://schemas.openxmlformats.org/drawingml/2006/main" w="0">
-            <a:noFill/>
-            <a:prstDash val="solid"/>
-          </a:ln>
-        </p:spPr>
-        <p:txBody>
-          <a:bodyPr xmlns:a="http://schemas.openxmlformats.org/drawingml/2006/main" anchor="t"/>
-          <a:lstStyle xmlns:a="http://schemas.openxmlformats.org/drawingml/2006/main"/>
-          <a:p xmlns:a="http://schemas.openxmlformats.org/drawingml/2006/main">
-            <a:pPr algn="l">
-              <a:defRPr sz="1500" b="0">
-                <a:solidFill>
-                  <a:srgbClr val="334155"/>
-                </a:solidFill>
-              </a:defRPr>
-            </a:pPr>
-            <a:r>
-              <a:rPr sz="1500" b="0">
-                <a:solidFill>
-                  <a:srgbClr val="334155"/>
-                </a:solidFill>
-              </a:rPr>
-              <a:t>This shows that semantic knowledge alone is not enough if the movement path cannot act on hints predictably.</a:t>
-            </a:r>
-          </a:p>
-        </p:txBody>
-      </p:sp>
-      <p:sp>
-        <p:nvSpPr>
-          <p:cNvPr id="13" name="">
-            <a:extLst xmlns:a="http://schemas.openxmlformats.org/drawingml/2006/main">
-              <a:ext uri="{FF2B5EF4-FFF2-40B4-BE49-F238E27FC236}">
-                <a16:creationId xmlns:a16="http://schemas.microsoft.com/office/drawing/2014/main" id="{857506D5-7B57-4F4B-B55F-89BE0F8F7CA5}"/>
+                <a16:creationId xmlns:a16="http://schemas.microsoft.com/office/drawing/2014/main" id="{48E901A1-CC5A-4483-A730-EB6E0073EA84}"/>
               </a:ext>
             </a:extLst>
           </p:cNvPr>
@@ -5083,17 +6542,17 @@
                   <a:srgbClr val="64748B"/>
                 </a:solidFill>
               </a:rPr>
-              <a:t>Source: backups/latest_master_report-1.html, Global Prefetch Margin</a:t>
-            </a:r>
-          </a:p>
-        </p:txBody>
-      </p:sp>
-      <p:sp>
-        <p:nvSpPr>
-          <p:cNvPr id="14" name="">
-            <a:extLst xmlns:a="http://schemas.openxmlformats.org/drawingml/2006/main">
-              <a:ext uri="{FF2B5EF4-FFF2-40B4-BE49-F238E27FC236}">
-                <a16:creationId xmlns:a16="http://schemas.microsoft.com/office/drawing/2014/main" id="{3E784F4F-1AB5-4D61-B3FD-1982361AD487}"/>
+              <a:t>Source: latest_master_report.html controlled run</a:t>
+            </a:r>
+          </a:p>
+        </p:txBody>
+      </p:sp>
+      <p:sp>
+        <p:nvSpPr>
+          <p:cNvPr id="6" name="">
+            <a:extLst xmlns:a="http://schemas.openxmlformats.org/drawingml/2006/main">
+              <a:ext uri="{FF2B5EF4-FFF2-40B4-BE49-F238E27FC236}">
+                <a16:creationId xmlns:a16="http://schemas.microsoft.com/office/drawing/2014/main" id="{A2417F06-F3DB-4472-9509-5CC9E2B51728}"/>
               </a:ext>
             </a:extLst>
           </p:cNvPr>
@@ -5140,10 +6599,10 @@
       </p:sp>
       <p:sp>
         <p:nvSpPr>
-          <p:cNvPr id="15" name="">
-            <a:extLst xmlns:a="http://schemas.openxmlformats.org/drawingml/2006/main">
-              <a:ext uri="{FF2B5EF4-FFF2-40B4-BE49-F238E27FC236}">
-                <a16:creationId xmlns:a16="http://schemas.microsoft.com/office/drawing/2014/main" id="{112A6333-9B24-4DFD-B8B4-F8D4E1718959}"/>
+          <p:cNvPr id="7" name="">
+            <a:extLst xmlns:a="http://schemas.openxmlformats.org/drawingml/2006/main">
+              <a:ext uri="{FF2B5EF4-FFF2-40B4-BE49-F238E27FC236}">
+                <a16:creationId xmlns:a16="http://schemas.microsoft.com/office/drawing/2014/main" id="{6FEB3ECD-9BCD-407D-9BC8-10C880D5621A}"/>
               </a:ext>
             </a:extLst>
           </p:cNvPr>
@@ -5191,7 +6650,7 @@
     </p:spTree>
     <p:extLst>
       <p:ext uri="{BB962C8B-B14F-4D97-AF65-F5344CB8AC3E}">
-        <p14:creationId xmlns:p14="http://schemas.microsoft.com/office/powerpoint/2010/main" val="536714194"/>
+        <p14:creationId xmlns:p14="http://schemas.microsoft.com/office/powerpoint/2010/main" val="1900830495"/>
       </p:ext>
     </p:extLst>
   </p:cSld>
@@ -5219,10 +6678,10 @@
       </p:grpSpPr>
       <p:sp>
         <p:nvSpPr>
-          <p:cNvPr id="12" name="">
-            <a:extLst xmlns:a="http://schemas.openxmlformats.org/drawingml/2006/main">
-              <a:ext uri="{FF2B5EF4-FFF2-40B4-BE49-F238E27FC236}">
-                <a16:creationId xmlns:a16="http://schemas.microsoft.com/office/drawing/2014/main" id="{190A680A-6C87-4520-83DA-2DCDF1D1B767}"/>
+          <p:cNvPr id="16" name="">
+            <a:extLst xmlns:a="http://schemas.openxmlformats.org/drawingml/2006/main">
+              <a:ext uri="{FF2B5EF4-FFF2-40B4-BE49-F238E27FC236}">
+                <a16:creationId xmlns:a16="http://schemas.microsoft.com/office/drawing/2014/main" id="{E2D3BE00-4DD1-46E3-AD91-95B642BD463B}"/>
               </a:ext>
             </a:extLst>
           </p:cNvPr>
@@ -5262,7 +6721,7 @@
                   <a:srgbClr val="0F172A"/>
                 </a:solidFill>
               </a:rPr>
-              <a:t>Replay-side KV loads missed the deadline in this run</a:t>
+              <a:t>Software prefetch often missed the agent replay deadline</a:t>
             </a:r>
           </a:p>
         </p:txBody>
@@ -5272,7 +6731,7 @@
           <p:cNvPr id="2" name="">
             <a:extLst xmlns:a="http://schemas.openxmlformats.org/drawingml/2006/main">
               <a:ext uri="{FF2B5EF4-FFF2-40B4-BE49-F238E27FC236}">
-                <a16:creationId xmlns:a16="http://schemas.microsoft.com/office/drawing/2014/main" id="{C93026AD-F4B1-40CF-8401-EC7071FEB63C}"/>
+                <a16:creationId xmlns:a16="http://schemas.microsoft.com/office/drawing/2014/main" id="{A4CEC726-DE17-48DB-BEFA-A2D16E07D88C}"/>
               </a:ext>
             </a:extLst>
           </p:cNvPr>
@@ -5312,7 +6771,7 @@
                   <a:srgbClr val="64748B"/>
                 </a:solidFill>
               </a:rPr>
-              <a:t>The aggregate view shows whether KV H2D finished before or after replay was due.</a:t>
+              <a:t>Across live prefetch attempts, nearly every hint completed after the agent had already resumed.</a:t>
             </a:r>
           </a:p>
         </p:txBody>
@@ -5322,7 +6781,7 @@
           <p:cNvPr id="3" name="">
             <a:extLst xmlns:a="http://schemas.openxmlformats.org/drawingml/2006/main">
               <a:ext uri="{FF2B5EF4-FFF2-40B4-BE49-F238E27FC236}">
-                <a16:creationId xmlns:a16="http://schemas.microsoft.com/office/drawing/2014/main" id="{2AD938CD-B4BE-4673-A59E-76121FF0D858}"/>
+                <a16:creationId xmlns:a16="http://schemas.microsoft.com/office/drawing/2014/main" id="{5ACB51C7-14FA-48FD-8775-4756525FA965}"/>
               </a:ext>
             </a:extLst>
           </p:cNvPr>
@@ -5334,11 +6793,11 @@
         <p:spPr>
           <a:xfrm xmlns:a="http://schemas.openxmlformats.org/drawingml/2006/main">
             <a:off x="323850" y="1428750"/>
-            <a:ext cx="8724900" cy="3867150"/>
+            <a:ext cx="8572500" cy="3886200"/>
           </a:xfrm>
           <a:prstGeom xmlns:a="http://schemas.openxmlformats.org/drawingml/2006/main" prst="roundRect">
             <a:avLst>
-              <a:gd name="adj" fmla="val 1478"/>
+              <a:gd name="adj" fmla="val 1471"/>
             </a:avLst>
           </a:prstGeom>
           <a:solidFill xmlns:a="http://schemas.openxmlformats.org/drawingml/2006/main">
@@ -5354,20 +6813,20 @@
       </p:sp>
       <p:pic>
         <p:nvPicPr>
-          <p:cNvPr id="15" name=""/>
+          <p:cNvPr id="19" name=""/>
           <p:cNvPicPr>
             <a:picLocks xmlns:a="http://schemas.openxmlformats.org/drawingml/2006/main" noChangeAspect="1"/>
           </p:cNvPicPr>
           <p:nvPr/>
         </p:nvPicPr>
         <p:blipFill>
-          <a:blip xmlns:r="http://schemas.openxmlformats.org/officeDocument/2006/relationships" xmlns:a="http://schemas.openxmlformats.org/drawingml/2006/main" r:embed="Ra2c93e584e3f462c"/>
+          <a:blip xmlns:r="http://schemas.openxmlformats.org/officeDocument/2006/relationships" xmlns:a="http://schemas.openxmlformats.org/drawingml/2006/main" r:embed="R0302a95fac6a4540"/>
           <a:stretch xmlns:a="http://schemas.openxmlformats.org/drawingml/2006/main"/>
         </p:blipFill>
         <p:spPr>
           <a:xfrm xmlns:a="http://schemas.openxmlformats.org/drawingml/2006/main">
-            <a:off x="400050" y="1795905"/>
-            <a:ext cx="8572500" cy="3132841"/>
+            <a:off x="400050" y="1890170"/>
+            <a:ext cx="8420100" cy="2963361"/>
           </a:xfrm>
           <a:prstGeom xmlns:a="http://schemas.openxmlformats.org/drawingml/2006/main" prst="rect">
             <a:avLst/>
@@ -5379,23 +6838,23 @@
           <p:cNvPr id="5" name="">
             <a:extLst xmlns:a="http://schemas.openxmlformats.org/drawingml/2006/main">
               <a:ext uri="{FF2B5EF4-FFF2-40B4-BE49-F238E27FC236}">
-                <a16:creationId xmlns:a16="http://schemas.microsoft.com/office/drawing/2014/main" id="{B695C50C-6379-4C4F-A015-0D80A7546505}"/>
-              </a:ext>
-            </a:extLst>
-          </p:cNvPr>
-          <p:cNvSpPr>
-            <a:spLocks xmlns:a="http://schemas.openxmlformats.org/drawingml/2006/main" noGrp="1"/>
-          </p:cNvSpPr>
-          <p:nvPr/>
-        </p:nvSpPr>
-        <p:spPr>
-          <a:xfrm xmlns:a="http://schemas.openxmlformats.org/drawingml/2006/main">
-            <a:off x="9258300" y="1847850"/>
-            <a:ext cx="2095500" cy="1104900"/>
+                <a16:creationId xmlns:a16="http://schemas.microsoft.com/office/drawing/2014/main" id="{EC94354D-3908-4943-9BA9-8B9465579C4B}"/>
+              </a:ext>
+            </a:extLst>
+          </p:cNvPr>
+          <p:cNvSpPr>
+            <a:spLocks xmlns:a="http://schemas.openxmlformats.org/drawingml/2006/main" noGrp="1"/>
+          </p:cNvSpPr>
+          <p:nvPr/>
+        </p:nvSpPr>
+        <p:spPr>
+          <a:xfrm xmlns:a="http://schemas.openxmlformats.org/drawingml/2006/main">
+            <a:off x="9124950" y="1600200"/>
+            <a:ext cx="2228850" cy="1295400"/>
           </a:xfrm>
           <a:prstGeom xmlns:a="http://schemas.openxmlformats.org/drawingml/2006/main" prst="roundRect">
             <a:avLst>
-              <a:gd name="adj" fmla="val 5172"/>
+              <a:gd name="adj" fmla="val 4412"/>
             </a:avLst>
           </a:prstGeom>
           <a:solidFill xmlns:a="http://schemas.openxmlformats.org/drawingml/2006/main">
@@ -5414,19 +6873,19 @@
           <p:cNvPr id="6" name="">
             <a:extLst xmlns:a="http://schemas.openxmlformats.org/drawingml/2006/main">
               <a:ext uri="{FF2B5EF4-FFF2-40B4-BE49-F238E27FC236}">
-                <a16:creationId xmlns:a16="http://schemas.microsoft.com/office/drawing/2014/main" id="{6C572B9C-D3B8-4B6C-B370-AF2614355B5C}"/>
-              </a:ext>
-            </a:extLst>
-          </p:cNvPr>
-          <p:cNvSpPr>
-            <a:spLocks xmlns:a="http://schemas.openxmlformats.org/drawingml/2006/main" noGrp="1"/>
-          </p:cNvSpPr>
-          <p:nvPr/>
-        </p:nvSpPr>
-        <p:spPr>
-          <a:xfrm xmlns:a="http://schemas.openxmlformats.org/drawingml/2006/main">
-            <a:off x="9505950" y="2076450"/>
-            <a:ext cx="1600200" cy="476250"/>
+                <a16:creationId xmlns:a16="http://schemas.microsoft.com/office/drawing/2014/main" id="{A8439B89-BC18-4A23-8B4B-6D774229F523}"/>
+              </a:ext>
+            </a:extLst>
+          </p:cNvPr>
+          <p:cNvSpPr>
+            <a:spLocks xmlns:a="http://schemas.openxmlformats.org/drawingml/2006/main" noGrp="1"/>
+          </p:cNvSpPr>
+          <p:nvPr/>
+        </p:nvSpPr>
+        <p:spPr>
+          <a:xfrm xmlns:a="http://schemas.openxmlformats.org/drawingml/2006/main">
+            <a:off x="9296400" y="1809750"/>
+            <a:ext cx="1885950" cy="438150"/>
           </a:xfrm>
           <a:prstGeom xmlns:a="http://schemas.openxmlformats.org/drawingml/2006/main" prst="rect">
             <a:avLst/>
@@ -5442,19 +6901,19 @@
           <a:lstStyle xmlns:a="http://schemas.openxmlformats.org/drawingml/2006/main"/>
           <a:p xmlns:a="http://schemas.openxmlformats.org/drawingml/2006/main">
             <a:pPr algn="ctr">
-              <a:defRPr sz="3600" b="1">
+              <a:defRPr sz="2700" b="1">
                 <a:solidFill>
                   <a:srgbClr val="B91C1C"/>
                 </a:solidFill>
               </a:defRPr>
             </a:pPr>
             <a:r>
-              <a:rPr sz="3600" b="1">
+              <a:rPr sz="2700" b="1">
                 <a:solidFill>
                   <a:srgbClr val="B91C1C"/>
                 </a:solidFill>
               </a:rPr>
-              <a:t>8 / 8</a:t>
+              <a:t>112 of 114</a:t>
             </a:r>
           </a:p>
         </p:txBody>
@@ -5464,19 +6923,204 @@
           <p:cNvPr id="7" name="">
             <a:extLst xmlns:a="http://schemas.openxmlformats.org/drawingml/2006/main">
               <a:ext uri="{FF2B5EF4-FFF2-40B4-BE49-F238E27FC236}">
-                <a16:creationId xmlns:a16="http://schemas.microsoft.com/office/drawing/2014/main" id="{D037560F-DF01-4DA9-A258-0C7B9D62C918}"/>
-              </a:ext>
-            </a:extLst>
-          </p:cNvPr>
-          <p:cNvSpPr>
-            <a:spLocks xmlns:a="http://schemas.openxmlformats.org/drawingml/2006/main" noGrp="1"/>
-          </p:cNvSpPr>
-          <p:nvPr/>
-        </p:nvSpPr>
-        <p:spPr>
-          <a:xfrm xmlns:a="http://schemas.openxmlformats.org/drawingml/2006/main">
-            <a:off x="9505950" y="2628900"/>
-            <a:ext cx="1600200" cy="266700"/>
+                <a16:creationId xmlns:a16="http://schemas.microsoft.com/office/drawing/2014/main" id="{032F41C6-A6E9-4269-A5F5-2A34F08C5B55}"/>
+              </a:ext>
+            </a:extLst>
+          </p:cNvPr>
+          <p:cNvSpPr>
+            <a:spLocks xmlns:a="http://schemas.openxmlformats.org/drawingml/2006/main" noGrp="1"/>
+          </p:cNvSpPr>
+          <p:nvPr/>
+        </p:nvSpPr>
+        <p:spPr>
+          <a:xfrm xmlns:a="http://schemas.openxmlformats.org/drawingml/2006/main">
+            <a:off x="9353550" y="2324100"/>
+            <a:ext cx="1771650" cy="228600"/>
+          </a:xfrm>
+          <a:prstGeom xmlns:a="http://schemas.openxmlformats.org/drawingml/2006/main" prst="rect">
+            <a:avLst/>
+          </a:prstGeom>
+          <a:noFill xmlns:a="http://schemas.openxmlformats.org/drawingml/2006/main"/>
+          <a:ln xmlns:a="http://schemas.openxmlformats.org/drawingml/2006/main" w="0">
+            <a:noFill/>
+            <a:prstDash val="solid"/>
+          </a:ln>
+        </p:spPr>
+        <p:txBody>
+          <a:bodyPr xmlns:a="http://schemas.openxmlformats.org/drawingml/2006/main" anchor="t"/>
+          <a:lstStyle xmlns:a="http://schemas.openxmlformats.org/drawingml/2006/main"/>
+          <a:p xmlns:a="http://schemas.openxmlformats.org/drawingml/2006/main">
+            <a:pPr algn="ctr">
+              <a:defRPr sz="1350" b="0">
+                <a:solidFill>
+                  <a:srgbClr val="334155"/>
+                </a:solidFill>
+              </a:defRPr>
+            </a:pPr>
+            <a:r>
+              <a:rPr sz="1350" b="0">
+                <a:solidFill>
+                  <a:srgbClr val="334155"/>
+                </a:solidFill>
+              </a:rPr>
+              <a:t>prefetch attempts</a:t>
+            </a:r>
+          </a:p>
+        </p:txBody>
+      </p:sp>
+      <p:sp>
+        <p:nvSpPr>
+          <p:cNvPr id="8" name="">
+            <a:extLst xmlns:a="http://schemas.openxmlformats.org/drawingml/2006/main">
+              <a:ext uri="{FF2B5EF4-FFF2-40B4-BE49-F238E27FC236}">
+                <a16:creationId xmlns:a16="http://schemas.microsoft.com/office/drawing/2014/main" id="{482042DA-551E-45B7-94E1-7B10492B43CF}"/>
+              </a:ext>
+            </a:extLst>
+          </p:cNvPr>
+          <p:cNvSpPr>
+            <a:spLocks xmlns:a="http://schemas.openxmlformats.org/drawingml/2006/main" noGrp="1"/>
+          </p:cNvSpPr>
+          <p:nvPr/>
+        </p:nvSpPr>
+        <p:spPr>
+          <a:xfrm xmlns:a="http://schemas.openxmlformats.org/drawingml/2006/main">
+            <a:off x="9353550" y="2571750"/>
+            <a:ext cx="1771650" cy="228600"/>
+          </a:xfrm>
+          <a:prstGeom xmlns:a="http://schemas.openxmlformats.org/drawingml/2006/main" prst="rect">
+            <a:avLst/>
+          </a:prstGeom>
+          <a:noFill xmlns:a="http://schemas.openxmlformats.org/drawingml/2006/main"/>
+          <a:ln xmlns:a="http://schemas.openxmlformats.org/drawingml/2006/main" w="0">
+            <a:noFill/>
+            <a:prstDash val="solid"/>
+          </a:ln>
+        </p:spPr>
+        <p:txBody>
+          <a:bodyPr xmlns:a="http://schemas.openxmlformats.org/drawingml/2006/main" anchor="t"/>
+          <a:lstStyle xmlns:a="http://schemas.openxmlformats.org/drawingml/2006/main"/>
+          <a:p xmlns:a="http://schemas.openxmlformats.org/drawingml/2006/main">
+            <a:pPr algn="ctr">
+              <a:defRPr sz="1350" b="0">
+                <a:solidFill>
+                  <a:srgbClr val="334155"/>
+                </a:solidFill>
+              </a:defRPr>
+            </a:pPr>
+            <a:r>
+              <a:rPr sz="1350" b="0">
+                <a:solidFill>
+                  <a:srgbClr val="334155"/>
+                </a:solidFill>
+              </a:rPr>
+              <a:t>were late</a:t>
+            </a:r>
+          </a:p>
+        </p:txBody>
+      </p:sp>
+      <p:sp>
+        <p:nvSpPr>
+          <p:cNvPr id="9" name="">
+            <a:extLst xmlns:a="http://schemas.openxmlformats.org/drawingml/2006/main">
+              <a:ext uri="{FF2B5EF4-FFF2-40B4-BE49-F238E27FC236}">
+                <a16:creationId xmlns:a16="http://schemas.microsoft.com/office/drawing/2014/main" id="{D7E65C6D-2B72-412A-B4BB-EA56ADEE250A}"/>
+              </a:ext>
+            </a:extLst>
+          </p:cNvPr>
+          <p:cNvSpPr>
+            <a:spLocks xmlns:a="http://schemas.openxmlformats.org/drawingml/2006/main" noGrp="1"/>
+          </p:cNvSpPr>
+          <p:nvPr/>
+        </p:nvSpPr>
+        <p:spPr>
+          <a:xfrm xmlns:a="http://schemas.openxmlformats.org/drawingml/2006/main">
+            <a:off x="9124950" y="3143250"/>
+            <a:ext cx="2228850" cy="1066800"/>
+          </a:xfrm>
+          <a:prstGeom xmlns:a="http://schemas.openxmlformats.org/drawingml/2006/main" prst="roundRect">
+            <a:avLst>
+              <a:gd name="adj" fmla="val 5357"/>
+            </a:avLst>
+          </a:prstGeom>
+          <a:solidFill xmlns:a="http://schemas.openxmlformats.org/drawingml/2006/main">
+            <a:srgbClr val="FFF7ED"/>
+          </a:solidFill>
+          <a:ln xmlns:a="http://schemas.openxmlformats.org/drawingml/2006/main" w="9525">
+            <a:solidFill>
+              <a:srgbClr val="FED7AA"/>
+            </a:solidFill>
+            <a:prstDash val="solid"/>
+          </a:ln>
+        </p:spPr>
+      </p:sp>
+      <p:sp>
+        <p:nvSpPr>
+          <p:cNvPr id="10" name="">
+            <a:extLst xmlns:a="http://schemas.openxmlformats.org/drawingml/2006/main">
+              <a:ext uri="{FF2B5EF4-FFF2-40B4-BE49-F238E27FC236}">
+                <a16:creationId xmlns:a16="http://schemas.microsoft.com/office/drawing/2014/main" id="{2954A896-3C5D-4A55-A2DD-124F4F285F79}"/>
+              </a:ext>
+            </a:extLst>
+          </p:cNvPr>
+          <p:cNvSpPr>
+            <a:spLocks xmlns:a="http://schemas.openxmlformats.org/drawingml/2006/main" noGrp="1"/>
+          </p:cNvSpPr>
+          <p:nvPr/>
+        </p:nvSpPr>
+        <p:spPr>
+          <a:xfrm xmlns:a="http://schemas.openxmlformats.org/drawingml/2006/main">
+            <a:off x="9353550" y="3333750"/>
+            <a:ext cx="1771650" cy="419100"/>
+          </a:xfrm>
+          <a:prstGeom xmlns:a="http://schemas.openxmlformats.org/drawingml/2006/main" prst="rect">
+            <a:avLst/>
+          </a:prstGeom>
+          <a:noFill xmlns:a="http://schemas.openxmlformats.org/drawingml/2006/main"/>
+          <a:ln xmlns:a="http://schemas.openxmlformats.org/drawingml/2006/main" w="0">
+            <a:noFill/>
+            <a:prstDash val="solid"/>
+          </a:ln>
+        </p:spPr>
+        <p:txBody>
+          <a:bodyPr xmlns:a="http://schemas.openxmlformats.org/drawingml/2006/main" anchor="t"/>
+          <a:lstStyle xmlns:a="http://schemas.openxmlformats.org/drawingml/2006/main"/>
+          <a:p xmlns:a="http://schemas.openxmlformats.org/drawingml/2006/main">
+            <a:pPr algn="ctr">
+              <a:defRPr sz="3000" b="1">
+                <a:solidFill>
+                  <a:srgbClr val="C2410C"/>
+                </a:solidFill>
+              </a:defRPr>
+            </a:pPr>
+            <a:r>
+              <a:rPr sz="3000" b="1">
+                <a:solidFill>
+                  <a:srgbClr val="C2410C"/>
+                </a:solidFill>
+              </a:rPr>
+              <a:t>98.25%</a:t>
+            </a:r>
+          </a:p>
+        </p:txBody>
+      </p:sp>
+      <p:sp>
+        <p:nvSpPr>
+          <p:cNvPr id="11" name="">
+            <a:extLst xmlns:a="http://schemas.openxmlformats.org/drawingml/2006/main">
+              <a:ext uri="{FF2B5EF4-FFF2-40B4-BE49-F238E27FC236}">
+                <a16:creationId xmlns:a16="http://schemas.microsoft.com/office/drawing/2014/main" id="{F7166217-FF0B-4F1A-A440-2CE481CA1F30}"/>
+              </a:ext>
+            </a:extLst>
+          </p:cNvPr>
+          <p:cNvSpPr>
+            <a:spLocks xmlns:a="http://schemas.openxmlformats.org/drawingml/2006/main" noGrp="1"/>
+          </p:cNvSpPr>
+          <p:nvPr/>
+        </p:nvSpPr>
+        <p:spPr>
+          <a:xfrm xmlns:a="http://schemas.openxmlformats.org/drawingml/2006/main">
+            <a:off x="9353550" y="3829050"/>
+            <a:ext cx="1771650" cy="285750"/>
           </a:xfrm>
           <a:prstGeom xmlns:a="http://schemas.openxmlformats.org/drawingml/2006/main" prst="rect">
             <a:avLst/>
@@ -5504,29 +7148,29 @@
                   <a:srgbClr val="334155"/>
                 </a:solidFill>
               </a:rPr>
-              <a:t>H2D loads finished late</a:t>
-            </a:r>
-          </a:p>
-        </p:txBody>
-      </p:sp>
-      <p:sp>
-        <p:nvSpPr>
-          <p:cNvPr id="8" name="">
-            <a:extLst xmlns:a="http://schemas.openxmlformats.org/drawingml/2006/main">
-              <a:ext uri="{FF2B5EF4-FFF2-40B4-BE49-F238E27FC236}">
-                <a16:creationId xmlns:a16="http://schemas.microsoft.com/office/drawing/2014/main" id="{A4FAE60E-DA33-4D21-A086-508F19EA4058}"/>
-              </a:ext>
-            </a:extLst>
-          </p:cNvPr>
-          <p:cNvSpPr>
-            <a:spLocks xmlns:a="http://schemas.openxmlformats.org/drawingml/2006/main" noGrp="1"/>
-          </p:cNvSpPr>
-          <p:nvPr/>
-        </p:nvSpPr>
-        <p:spPr>
-          <a:xfrm xmlns:a="http://schemas.openxmlformats.org/drawingml/2006/main">
-            <a:off x="9258300" y="3524250"/>
-            <a:ext cx="2095500" cy="742950"/>
+              <a:t>missed replay due deadline</a:t>
+            </a:r>
+          </a:p>
+        </p:txBody>
+      </p:sp>
+      <p:sp>
+        <p:nvSpPr>
+          <p:cNvPr id="12" name="">
+            <a:extLst xmlns:a="http://schemas.openxmlformats.org/drawingml/2006/main">
+              <a:ext uri="{FF2B5EF4-FFF2-40B4-BE49-F238E27FC236}">
+                <a16:creationId xmlns:a16="http://schemas.microsoft.com/office/drawing/2014/main" id="{DEC42A3A-304C-4902-96B6-66305CBD2913}"/>
+              </a:ext>
+            </a:extLst>
+          </p:cNvPr>
+          <p:cNvSpPr>
+            <a:spLocks xmlns:a="http://schemas.openxmlformats.org/drawingml/2006/main" noGrp="1"/>
+          </p:cNvSpPr>
+          <p:nvPr/>
+        </p:nvSpPr>
+        <p:spPr>
+          <a:xfrm xmlns:a="http://schemas.openxmlformats.org/drawingml/2006/main">
+            <a:off x="9124950" y="4514850"/>
+            <a:ext cx="2247900" cy="685800"/>
           </a:xfrm>
           <a:prstGeom xmlns:a="http://schemas.openxmlformats.org/drawingml/2006/main" prst="rect">
             <a:avLst/>
@@ -5542,29 +7186,29 @@
           <a:lstStyle xmlns:a="http://schemas.openxmlformats.org/drawingml/2006/main"/>
           <a:p xmlns:a="http://schemas.openxmlformats.org/drawingml/2006/main">
             <a:pPr algn="l">
-              <a:defRPr sz="1575" b="0">
+              <a:defRPr sz="1500" b="0">
                 <a:solidFill>
                   <a:srgbClr val="334155"/>
                 </a:solidFill>
               </a:defRPr>
             </a:pPr>
             <a:r>
-              <a:rPr sz="1575" b="0">
+              <a:rPr sz="1500" b="0">
                 <a:solidFill>
                   <a:srgbClr val="334155"/>
                 </a:solidFill>
               </a:rPr>
-              <a:t>All visible replay-side KV loads finished below the 0 ms deadline line.</a:t>
-            </a:r>
-          </a:p>
-        </p:txBody>
-      </p:sp>
-      <p:sp>
-        <p:nvSpPr>
-          <p:cNvPr id="9" name="">
-            <a:extLst xmlns:a="http://schemas.openxmlformats.org/drawingml/2006/main">
-              <a:ext uri="{FF2B5EF4-FFF2-40B4-BE49-F238E27FC236}">
-                <a16:creationId xmlns:a16="http://schemas.microsoft.com/office/drawing/2014/main" id="{F561D74B-A36E-4C13-B040-79B5535EA70E}"/>
+              <a:t>This shows that semantic knowledge alone is not enough if the movement path cannot act on hints predictably.</a:t>
+            </a:r>
+          </a:p>
+        </p:txBody>
+      </p:sp>
+      <p:sp>
+        <p:nvSpPr>
+          <p:cNvPr id="13" name="">
+            <a:extLst xmlns:a="http://schemas.openxmlformats.org/drawingml/2006/main">
+              <a:ext uri="{FF2B5EF4-FFF2-40B4-BE49-F238E27FC236}">
+                <a16:creationId xmlns:a16="http://schemas.microsoft.com/office/drawing/2014/main" id="{0AA22665-380D-4EEB-AA08-886F4009D3F9}"/>
               </a:ext>
             </a:extLst>
           </p:cNvPr>
@@ -5604,17 +7248,17 @@
                   <a:srgbClr val="64748B"/>
                 </a:solidFill>
               </a:rPr>
-              <a:t>Source: latest_master_report.html, Global Replay H2D Readiness</a:t>
-            </a:r>
-          </a:p>
-        </p:txBody>
-      </p:sp>
-      <p:sp>
-        <p:nvSpPr>
-          <p:cNvPr id="10" name="">
-            <a:extLst xmlns:a="http://schemas.openxmlformats.org/drawingml/2006/main">
-              <a:ext uri="{FF2B5EF4-FFF2-40B4-BE49-F238E27FC236}">
-                <a16:creationId xmlns:a16="http://schemas.microsoft.com/office/drawing/2014/main" id="{F38AFE03-07BE-42F7-8C6B-6C61FA6C0DF2}"/>
+              <a:t>Source: backups/latest_master_report-1.html, Global Prefetch Margin</a:t>
+            </a:r>
+          </a:p>
+        </p:txBody>
+      </p:sp>
+      <p:sp>
+        <p:nvSpPr>
+          <p:cNvPr id="14" name="">
+            <a:extLst xmlns:a="http://schemas.openxmlformats.org/drawingml/2006/main">
+              <a:ext uri="{FF2B5EF4-FFF2-40B4-BE49-F238E27FC236}">
+                <a16:creationId xmlns:a16="http://schemas.microsoft.com/office/drawing/2014/main" id="{186E5304-69F0-4CC3-8E27-ED0AA9F83B72}"/>
               </a:ext>
             </a:extLst>
           </p:cNvPr>
@@ -5661,10 +7305,10 @@
       </p:sp>
       <p:sp>
         <p:nvSpPr>
-          <p:cNvPr id="11" name="">
-            <a:extLst xmlns:a="http://schemas.openxmlformats.org/drawingml/2006/main">
-              <a:ext uri="{FF2B5EF4-FFF2-40B4-BE49-F238E27FC236}">
-                <a16:creationId xmlns:a16="http://schemas.microsoft.com/office/drawing/2014/main" id="{7C15C74F-4137-45C4-B354-6FE2585C1AD5}"/>
+          <p:cNvPr id="15" name="">
+            <a:extLst xmlns:a="http://schemas.openxmlformats.org/drawingml/2006/main">
+              <a:ext uri="{FF2B5EF4-FFF2-40B4-BE49-F238E27FC236}">
+                <a16:creationId xmlns:a16="http://schemas.microsoft.com/office/drawing/2014/main" id="{A0E4E615-8C88-4F05-9A0B-5D0196305BEC}"/>
               </a:ext>
             </a:extLst>
           </p:cNvPr>
@@ -5712,7 +7356,7 @@
     </p:spTree>
     <p:extLst>
       <p:ext uri="{BB962C8B-B14F-4D97-AF65-F5344CB8AC3E}">
-        <p14:creationId xmlns:p14="http://schemas.microsoft.com/office/powerpoint/2010/main" val="1783712166"/>
+        <p14:creationId xmlns:p14="http://schemas.microsoft.com/office/powerpoint/2010/main" val="1811837155"/>
       </p:ext>
     </p:extLst>
   </p:cSld>
@@ -5740,10 +7384,10 @@
       </p:grpSpPr>
       <p:sp>
         <p:nvSpPr>
-          <p:cNvPr id="9" name="">
-            <a:extLst xmlns:a="http://schemas.openxmlformats.org/drawingml/2006/main">
-              <a:ext uri="{FF2B5EF4-FFF2-40B4-BE49-F238E27FC236}">
-                <a16:creationId xmlns:a16="http://schemas.microsoft.com/office/drawing/2014/main" id="{AD34BA47-CE24-45EA-ACA5-F72718419167}"/>
+          <p:cNvPr id="12" name="">
+            <a:extLst xmlns:a="http://schemas.openxmlformats.org/drawingml/2006/main">
+              <a:ext uri="{FF2B5EF4-FFF2-40B4-BE49-F238E27FC236}">
+                <a16:creationId xmlns:a16="http://schemas.microsoft.com/office/drawing/2014/main" id="{70AA618B-EF38-4F91-916B-41E6B3B042FF}"/>
               </a:ext>
             </a:extLst>
           </p:cNvPr>
@@ -5783,7 +7427,7 @@
                   <a:srgbClr val="0F172A"/>
                 </a:solidFill>
               </a:rPr>
-              <a:t>The delay is not just copy time</a:t>
+              <a:t>Replay-side KV loads missed the deadline in this run</a:t>
             </a:r>
           </a:p>
         </p:txBody>
@@ -5793,7 +7437,7 @@
           <p:cNvPr id="2" name="">
             <a:extLst xmlns:a="http://schemas.openxmlformats.org/drawingml/2006/main">
               <a:ext uri="{FF2B5EF4-FFF2-40B4-BE49-F238E27FC236}">
-                <a16:creationId xmlns:a16="http://schemas.microsoft.com/office/drawing/2014/main" id="{5B0F4813-4052-427E-B4B4-54A0F19C16B3}"/>
+                <a16:creationId xmlns:a16="http://schemas.microsoft.com/office/drawing/2014/main" id="{FBAB8E2C-FD64-4D86-ADAE-EF18D8D8E24F}"/>
               </a:ext>
             </a:extLst>
           </p:cNvPr>
@@ -5833,7 +7477,7 @@
                   <a:srgbClr val="64748B"/>
                 </a:solidFill>
               </a:rPr>
-              <a:t>The request enters normal software/runtime scheduling before visible KV H2D begins.</a:t>
+              <a:t>The aggregate view shows whether KV H2D finished before or after replay was due.</a:t>
             </a:r>
           </a:p>
         </p:txBody>
@@ -5843,23 +7487,23 @@
           <p:cNvPr id="3" name="">
             <a:extLst xmlns:a="http://schemas.openxmlformats.org/drawingml/2006/main">
               <a:ext uri="{FF2B5EF4-FFF2-40B4-BE49-F238E27FC236}">
-                <a16:creationId xmlns:a16="http://schemas.microsoft.com/office/drawing/2014/main" id="{50BE40A2-F16C-4E9B-938C-C66B055368B8}"/>
-              </a:ext>
-            </a:extLst>
-          </p:cNvPr>
-          <p:cNvSpPr>
-            <a:spLocks xmlns:a="http://schemas.openxmlformats.org/drawingml/2006/main" noGrp="1"/>
-          </p:cNvSpPr>
-          <p:nvPr/>
-        </p:nvSpPr>
-        <p:spPr>
-          <a:xfrm xmlns:a="http://schemas.openxmlformats.org/drawingml/2006/main">
-            <a:off x="323850" y="1333500"/>
-            <a:ext cx="10820400" cy="4343400"/>
+                <a16:creationId xmlns:a16="http://schemas.microsoft.com/office/drawing/2014/main" id="{2E330626-E3C5-4A3A-ABC5-D106FA0805C4}"/>
+              </a:ext>
+            </a:extLst>
+          </p:cNvPr>
+          <p:cNvSpPr>
+            <a:spLocks xmlns:a="http://schemas.openxmlformats.org/drawingml/2006/main" noGrp="1"/>
+          </p:cNvSpPr>
+          <p:nvPr/>
+        </p:nvSpPr>
+        <p:spPr>
+          <a:xfrm xmlns:a="http://schemas.openxmlformats.org/drawingml/2006/main">
+            <a:off x="323850" y="1428750"/>
+            <a:ext cx="8724900" cy="3867150"/>
           </a:xfrm>
           <a:prstGeom xmlns:a="http://schemas.openxmlformats.org/drawingml/2006/main" prst="roundRect">
             <a:avLst>
-              <a:gd name="adj" fmla="val 1316"/>
+              <a:gd name="adj" fmla="val 1478"/>
             </a:avLst>
           </a:prstGeom>
           <a:solidFill xmlns:a="http://schemas.openxmlformats.org/drawingml/2006/main">
@@ -5875,20 +7519,20 @@
       </p:sp>
       <p:pic>
         <p:nvPicPr>
-          <p:cNvPr id="12" name=""/>
+          <p:cNvPr id="15" name=""/>
           <p:cNvPicPr>
             <a:picLocks xmlns:a="http://schemas.openxmlformats.org/drawingml/2006/main" noChangeAspect="1"/>
           </p:cNvPicPr>
           <p:nvPr/>
         </p:nvPicPr>
         <p:blipFill>
-          <a:blip xmlns:r="http://schemas.openxmlformats.org/officeDocument/2006/relationships" xmlns:a="http://schemas.openxmlformats.org/drawingml/2006/main" r:embed="R93b30e23c1444876"/>
+          <a:blip xmlns:r="http://schemas.openxmlformats.org/officeDocument/2006/relationships" xmlns:a="http://schemas.openxmlformats.org/drawingml/2006/main" r:embed="R9be63e229c60453a"/>
           <a:stretch xmlns:a="http://schemas.openxmlformats.org/drawingml/2006/main"/>
         </p:blipFill>
         <p:spPr>
           <a:xfrm xmlns:a="http://schemas.openxmlformats.org/drawingml/2006/main">
-            <a:off x="1247835" y="1409700"/>
-            <a:ext cx="8972430" cy="4191000"/>
+            <a:off x="400050" y="1795905"/>
+            <a:ext cx="8572500" cy="3132841"/>
           </a:xfrm>
           <a:prstGeom xmlns:a="http://schemas.openxmlformats.org/drawingml/2006/main" prst="rect">
             <a:avLst/>
@@ -5900,19 +7544,154 @@
           <p:cNvPr id="5" name="">
             <a:extLst xmlns:a="http://schemas.openxmlformats.org/drawingml/2006/main">
               <a:ext uri="{FF2B5EF4-FFF2-40B4-BE49-F238E27FC236}">
-                <a16:creationId xmlns:a16="http://schemas.microsoft.com/office/drawing/2014/main" id="{425B79C7-BB4C-4E43-87FB-A7F8A1348FF4}"/>
-              </a:ext>
-            </a:extLst>
-          </p:cNvPr>
-          <p:cNvSpPr>
-            <a:spLocks xmlns:a="http://schemas.openxmlformats.org/drawingml/2006/main" noGrp="1"/>
-          </p:cNvSpPr>
-          <p:nvPr/>
-        </p:nvSpPr>
-        <p:spPr>
-          <a:xfrm xmlns:a="http://schemas.openxmlformats.org/drawingml/2006/main">
-            <a:off x="685800" y="5791200"/>
-            <a:ext cx="9906000" cy="228600"/>
+                <a16:creationId xmlns:a16="http://schemas.microsoft.com/office/drawing/2014/main" id="{DCC59742-449F-4E22-B140-61B04664DADF}"/>
+              </a:ext>
+            </a:extLst>
+          </p:cNvPr>
+          <p:cNvSpPr>
+            <a:spLocks xmlns:a="http://schemas.openxmlformats.org/drawingml/2006/main" noGrp="1"/>
+          </p:cNvSpPr>
+          <p:nvPr/>
+        </p:nvSpPr>
+        <p:spPr>
+          <a:xfrm xmlns:a="http://schemas.openxmlformats.org/drawingml/2006/main">
+            <a:off x="9258300" y="1847850"/>
+            <a:ext cx="2095500" cy="1104900"/>
+          </a:xfrm>
+          <a:prstGeom xmlns:a="http://schemas.openxmlformats.org/drawingml/2006/main" prst="roundRect">
+            <a:avLst>
+              <a:gd name="adj" fmla="val 5172"/>
+            </a:avLst>
+          </a:prstGeom>
+          <a:solidFill xmlns:a="http://schemas.openxmlformats.org/drawingml/2006/main">
+            <a:srgbClr val="FEF2F2"/>
+          </a:solidFill>
+          <a:ln xmlns:a="http://schemas.openxmlformats.org/drawingml/2006/main" w="9525">
+            <a:solidFill>
+              <a:srgbClr val="FECACA"/>
+            </a:solidFill>
+            <a:prstDash val="solid"/>
+          </a:ln>
+        </p:spPr>
+      </p:sp>
+      <p:sp>
+        <p:nvSpPr>
+          <p:cNvPr id="6" name="">
+            <a:extLst xmlns:a="http://schemas.openxmlformats.org/drawingml/2006/main">
+              <a:ext uri="{FF2B5EF4-FFF2-40B4-BE49-F238E27FC236}">
+                <a16:creationId xmlns:a16="http://schemas.microsoft.com/office/drawing/2014/main" id="{13DF3E7E-B41F-41E9-BF57-716F50ED1C32}"/>
+              </a:ext>
+            </a:extLst>
+          </p:cNvPr>
+          <p:cNvSpPr>
+            <a:spLocks xmlns:a="http://schemas.openxmlformats.org/drawingml/2006/main" noGrp="1"/>
+          </p:cNvSpPr>
+          <p:nvPr/>
+        </p:nvSpPr>
+        <p:spPr>
+          <a:xfrm xmlns:a="http://schemas.openxmlformats.org/drawingml/2006/main">
+            <a:off x="9505950" y="2076450"/>
+            <a:ext cx="1600200" cy="476250"/>
+          </a:xfrm>
+          <a:prstGeom xmlns:a="http://schemas.openxmlformats.org/drawingml/2006/main" prst="rect">
+            <a:avLst/>
+          </a:prstGeom>
+          <a:noFill xmlns:a="http://schemas.openxmlformats.org/drawingml/2006/main"/>
+          <a:ln xmlns:a="http://schemas.openxmlformats.org/drawingml/2006/main" w="0">
+            <a:noFill/>
+            <a:prstDash val="solid"/>
+          </a:ln>
+        </p:spPr>
+        <p:txBody>
+          <a:bodyPr xmlns:a="http://schemas.openxmlformats.org/drawingml/2006/main" anchor="t"/>
+          <a:lstStyle xmlns:a="http://schemas.openxmlformats.org/drawingml/2006/main"/>
+          <a:p xmlns:a="http://schemas.openxmlformats.org/drawingml/2006/main">
+            <a:pPr algn="ctr">
+              <a:defRPr sz="3600" b="1">
+                <a:solidFill>
+                  <a:srgbClr val="B91C1C"/>
+                </a:solidFill>
+              </a:defRPr>
+            </a:pPr>
+            <a:r>
+              <a:rPr sz="3600" b="1">
+                <a:solidFill>
+                  <a:srgbClr val="B91C1C"/>
+                </a:solidFill>
+              </a:rPr>
+              <a:t>8 / 8</a:t>
+            </a:r>
+          </a:p>
+        </p:txBody>
+      </p:sp>
+      <p:sp>
+        <p:nvSpPr>
+          <p:cNvPr id="7" name="">
+            <a:extLst xmlns:a="http://schemas.openxmlformats.org/drawingml/2006/main">
+              <a:ext uri="{FF2B5EF4-FFF2-40B4-BE49-F238E27FC236}">
+                <a16:creationId xmlns:a16="http://schemas.microsoft.com/office/drawing/2014/main" id="{83C52F6A-7360-457A-8440-FB39A167AA19}"/>
+              </a:ext>
+            </a:extLst>
+          </p:cNvPr>
+          <p:cNvSpPr>
+            <a:spLocks xmlns:a="http://schemas.openxmlformats.org/drawingml/2006/main" noGrp="1"/>
+          </p:cNvSpPr>
+          <p:nvPr/>
+        </p:nvSpPr>
+        <p:spPr>
+          <a:xfrm xmlns:a="http://schemas.openxmlformats.org/drawingml/2006/main">
+            <a:off x="9505950" y="2628900"/>
+            <a:ext cx="1600200" cy="266700"/>
+          </a:xfrm>
+          <a:prstGeom xmlns:a="http://schemas.openxmlformats.org/drawingml/2006/main" prst="rect">
+            <a:avLst/>
+          </a:prstGeom>
+          <a:noFill xmlns:a="http://schemas.openxmlformats.org/drawingml/2006/main"/>
+          <a:ln xmlns:a="http://schemas.openxmlformats.org/drawingml/2006/main" w="0">
+            <a:noFill/>
+            <a:prstDash val="solid"/>
+          </a:ln>
+        </p:spPr>
+        <p:txBody>
+          <a:bodyPr xmlns:a="http://schemas.openxmlformats.org/drawingml/2006/main" anchor="t"/>
+          <a:lstStyle xmlns:a="http://schemas.openxmlformats.org/drawingml/2006/main"/>
+          <a:p xmlns:a="http://schemas.openxmlformats.org/drawingml/2006/main">
+            <a:pPr algn="ctr">
+              <a:defRPr sz="1275" b="0">
+                <a:solidFill>
+                  <a:srgbClr val="334155"/>
+                </a:solidFill>
+              </a:defRPr>
+            </a:pPr>
+            <a:r>
+              <a:rPr sz="1275" b="0">
+                <a:solidFill>
+                  <a:srgbClr val="334155"/>
+                </a:solidFill>
+              </a:rPr>
+              <a:t>H2D loads finished late</a:t>
+            </a:r>
+          </a:p>
+        </p:txBody>
+      </p:sp>
+      <p:sp>
+        <p:nvSpPr>
+          <p:cNvPr id="8" name="">
+            <a:extLst xmlns:a="http://schemas.openxmlformats.org/drawingml/2006/main">
+              <a:ext uri="{FF2B5EF4-FFF2-40B4-BE49-F238E27FC236}">
+                <a16:creationId xmlns:a16="http://schemas.microsoft.com/office/drawing/2014/main" id="{A344BDC2-22DD-4CF8-AAD0-491BE8AC87A9}"/>
+              </a:ext>
+            </a:extLst>
+          </p:cNvPr>
+          <p:cNvSpPr>
+            <a:spLocks xmlns:a="http://schemas.openxmlformats.org/drawingml/2006/main" noGrp="1"/>
+          </p:cNvSpPr>
+          <p:nvPr/>
+        </p:nvSpPr>
+        <p:spPr>
+          <a:xfrm xmlns:a="http://schemas.openxmlformats.org/drawingml/2006/main">
+            <a:off x="9258300" y="3524250"/>
+            <a:ext cx="2095500" cy="742950"/>
           </a:xfrm>
           <a:prstGeom xmlns:a="http://schemas.openxmlformats.org/drawingml/2006/main" prst="rect">
             <a:avLst/>
@@ -5928,29 +7707,29 @@
           <a:lstStyle xmlns:a="http://schemas.openxmlformats.org/drawingml/2006/main"/>
           <a:p xmlns:a="http://schemas.openxmlformats.org/drawingml/2006/main">
             <a:pPr algn="l">
-              <a:defRPr sz="1275" b="0">
+              <a:defRPr sz="1575" b="0">
                 <a:solidFill>
                   <a:srgbClr val="334155"/>
                 </a:solidFill>
               </a:defRPr>
             </a:pPr>
             <a:r>
-              <a:rPr sz="1275" b="0">
+              <a:rPr sz="1575" b="0">
                 <a:solidFill>
                   <a:srgbClr val="334155"/>
                 </a:solidFill>
               </a:rPr>
-              <a:t>The stage markers separate submission, SGLang receive, scheduler queue/admit, and visible KV H2D movement.</a:t>
-            </a:r>
-          </a:p>
-        </p:txBody>
-      </p:sp>
-      <p:sp>
-        <p:nvSpPr>
-          <p:cNvPr id="6" name="">
-            <a:extLst xmlns:a="http://schemas.openxmlformats.org/drawingml/2006/main">
-              <a:ext uri="{FF2B5EF4-FFF2-40B4-BE49-F238E27FC236}">
-                <a16:creationId xmlns:a16="http://schemas.microsoft.com/office/drawing/2014/main" id="{FD08FBB6-172F-497D-805E-73B299197DCB}"/>
+              <a:t>All visible replay-side KV loads finished below the 0 ms deadline line.</a:t>
+            </a:r>
+          </a:p>
+        </p:txBody>
+      </p:sp>
+      <p:sp>
+        <p:nvSpPr>
+          <p:cNvPr id="9" name="">
+            <a:extLst xmlns:a="http://schemas.openxmlformats.org/drawingml/2006/main">
+              <a:ext uri="{FF2B5EF4-FFF2-40B4-BE49-F238E27FC236}">
+                <a16:creationId xmlns:a16="http://schemas.microsoft.com/office/drawing/2014/main" id="{570D357B-C522-4B23-8905-45AF27F1AC1A}"/>
               </a:ext>
             </a:extLst>
           </p:cNvPr>
@@ -5990,17 +7769,17 @@
                   <a:srgbClr val="64748B"/>
                 </a:solidFill>
               </a:rPr>
-              <a:t>Source: latest_master_report.html, Replay Queue Timeline vs H2D Start</a:t>
-            </a:r>
-          </a:p>
-        </p:txBody>
-      </p:sp>
-      <p:sp>
-        <p:nvSpPr>
-          <p:cNvPr id="7" name="">
-            <a:extLst xmlns:a="http://schemas.openxmlformats.org/drawingml/2006/main">
-              <a:ext uri="{FF2B5EF4-FFF2-40B4-BE49-F238E27FC236}">
-                <a16:creationId xmlns:a16="http://schemas.microsoft.com/office/drawing/2014/main" id="{DDCB3123-3084-4FBF-A172-9714BB8AA28B}"/>
+              <a:t>Source: latest_master_report.html, Global Replay H2D Readiness</a:t>
+            </a:r>
+          </a:p>
+        </p:txBody>
+      </p:sp>
+      <p:sp>
+        <p:nvSpPr>
+          <p:cNvPr id="10" name="">
+            <a:extLst xmlns:a="http://schemas.openxmlformats.org/drawingml/2006/main">
+              <a:ext uri="{FF2B5EF4-FFF2-40B4-BE49-F238E27FC236}">
+                <a16:creationId xmlns:a16="http://schemas.microsoft.com/office/drawing/2014/main" id="{2F7503C8-5A98-44E2-A89C-F86A3B330A3B}"/>
               </a:ext>
             </a:extLst>
           </p:cNvPr>
@@ -6047,10 +7826,10 @@
       </p:sp>
       <p:sp>
         <p:nvSpPr>
-          <p:cNvPr id="8" name="">
-            <a:extLst xmlns:a="http://schemas.openxmlformats.org/drawingml/2006/main">
-              <a:ext uri="{FF2B5EF4-FFF2-40B4-BE49-F238E27FC236}">
-                <a16:creationId xmlns:a16="http://schemas.microsoft.com/office/drawing/2014/main" id="{68E3CB3B-BD33-441A-ADF5-E5BCCFB45869}"/>
+          <p:cNvPr id="11" name="">
+            <a:extLst xmlns:a="http://schemas.openxmlformats.org/drawingml/2006/main">
+              <a:ext uri="{FF2B5EF4-FFF2-40B4-BE49-F238E27FC236}">
+                <a16:creationId xmlns:a16="http://schemas.microsoft.com/office/drawing/2014/main" id="{EC3D20A8-B027-4867-811A-B3F41179943C}"/>
               </a:ext>
             </a:extLst>
           </p:cNvPr>
@@ -6098,7 +7877,7 @@
     </p:spTree>
     <p:extLst>
       <p:ext uri="{BB962C8B-B14F-4D97-AF65-F5344CB8AC3E}">
-        <p14:creationId xmlns:p14="http://schemas.microsoft.com/office/powerpoint/2010/main" val="1536878427"/>
+        <p14:creationId xmlns:p14="http://schemas.microsoft.com/office/powerpoint/2010/main" val="1589967240"/>
       </p:ext>
     </p:extLst>
   </p:cSld>
@@ -6126,10 +7905,10 @@
       </p:grpSpPr>
       <p:sp>
         <p:nvSpPr>
-          <p:cNvPr id="27" name="">
-            <a:extLst xmlns:a="http://schemas.openxmlformats.org/drawingml/2006/main">
-              <a:ext uri="{FF2B5EF4-FFF2-40B4-BE49-F238E27FC236}">
-                <a16:creationId xmlns:a16="http://schemas.microsoft.com/office/drawing/2014/main" id="{61F03D19-B314-49C9-93B7-17D739F54B37}"/>
+          <p:cNvPr id="9" name="">
+            <a:extLst xmlns:a="http://schemas.openxmlformats.org/drawingml/2006/main">
+              <a:ext uri="{FF2B5EF4-FFF2-40B4-BE49-F238E27FC236}">
+                <a16:creationId xmlns:a16="http://schemas.microsoft.com/office/drawing/2014/main" id="{431F8236-5F19-4701-9E52-DA82679C3C78}"/>
               </a:ext>
             </a:extLst>
           </p:cNvPr>
@@ -6169,7 +7948,7 @@
                   <a:srgbClr val="0F172A"/>
                 </a:solidFill>
               </a:rPr>
-              <a:t>Hardware support can make hints enforceable</a:t>
+              <a:t>The delay is not just copy time</a:t>
             </a:r>
           </a:p>
         </p:txBody>
@@ -6179,7 +7958,7 @@
           <p:cNvPr id="2" name="">
             <a:extLst xmlns:a="http://schemas.openxmlformats.org/drawingml/2006/main">
               <a:ext uri="{FF2B5EF4-FFF2-40B4-BE49-F238E27FC236}">
-                <a16:creationId xmlns:a16="http://schemas.microsoft.com/office/drawing/2014/main" id="{422DBAC9-FDE6-4FDE-B8D0-9A3FFBF85AC4}"/>
+                <a16:creationId xmlns:a16="http://schemas.microsoft.com/office/drawing/2014/main" id="{3139F9F3-84F4-46C4-B05C-DE22630AD849}"/>
               </a:ext>
             </a:extLst>
           </p:cNvPr>
@@ -6219,6 +7998,392 @@
                   <a:srgbClr val="64748B"/>
                 </a:solidFill>
               </a:rPr>
+              <a:t>The request enters normal software/runtime scheduling before visible KV H2D begins.</a:t>
+            </a:r>
+          </a:p>
+        </p:txBody>
+      </p:sp>
+      <p:sp>
+        <p:nvSpPr>
+          <p:cNvPr id="3" name="">
+            <a:extLst xmlns:a="http://schemas.openxmlformats.org/drawingml/2006/main">
+              <a:ext uri="{FF2B5EF4-FFF2-40B4-BE49-F238E27FC236}">
+                <a16:creationId xmlns:a16="http://schemas.microsoft.com/office/drawing/2014/main" id="{F98BBA99-C6D7-4819-A4A4-936ACFB7EC53}"/>
+              </a:ext>
+            </a:extLst>
+          </p:cNvPr>
+          <p:cNvSpPr>
+            <a:spLocks xmlns:a="http://schemas.openxmlformats.org/drawingml/2006/main" noGrp="1"/>
+          </p:cNvSpPr>
+          <p:nvPr/>
+        </p:nvSpPr>
+        <p:spPr>
+          <a:xfrm xmlns:a="http://schemas.openxmlformats.org/drawingml/2006/main">
+            <a:off x="323850" y="1333500"/>
+            <a:ext cx="10820400" cy="4343400"/>
+          </a:xfrm>
+          <a:prstGeom xmlns:a="http://schemas.openxmlformats.org/drawingml/2006/main" prst="roundRect">
+            <a:avLst>
+              <a:gd name="adj" fmla="val 1316"/>
+            </a:avLst>
+          </a:prstGeom>
+          <a:solidFill xmlns:a="http://schemas.openxmlformats.org/drawingml/2006/main">
+            <a:srgbClr val="FFFFFF"/>
+          </a:solidFill>
+          <a:ln xmlns:a="http://schemas.openxmlformats.org/drawingml/2006/main" w="9525">
+            <a:solidFill>
+              <a:srgbClr val="E5E7EB"/>
+            </a:solidFill>
+            <a:prstDash val="solid"/>
+          </a:ln>
+        </p:spPr>
+      </p:sp>
+      <p:pic>
+        <p:nvPicPr>
+          <p:cNvPr id="12" name=""/>
+          <p:cNvPicPr>
+            <a:picLocks xmlns:a="http://schemas.openxmlformats.org/drawingml/2006/main" noChangeAspect="1"/>
+          </p:cNvPicPr>
+          <p:nvPr/>
+        </p:nvPicPr>
+        <p:blipFill>
+          <a:blip xmlns:r="http://schemas.openxmlformats.org/officeDocument/2006/relationships" xmlns:a="http://schemas.openxmlformats.org/drawingml/2006/main" r:embed="R8c1aed6ad210448d"/>
+          <a:stretch xmlns:a="http://schemas.openxmlformats.org/drawingml/2006/main"/>
+        </p:blipFill>
+        <p:spPr>
+          <a:xfrm xmlns:a="http://schemas.openxmlformats.org/drawingml/2006/main">
+            <a:off x="1247835" y="1409700"/>
+            <a:ext cx="8972430" cy="4191000"/>
+          </a:xfrm>
+          <a:prstGeom xmlns:a="http://schemas.openxmlformats.org/drawingml/2006/main" prst="rect">
+            <a:avLst/>
+          </a:prstGeom>
+        </p:spPr>
+      </p:pic>
+      <p:sp>
+        <p:nvSpPr>
+          <p:cNvPr id="5" name="">
+            <a:extLst xmlns:a="http://schemas.openxmlformats.org/drawingml/2006/main">
+              <a:ext uri="{FF2B5EF4-FFF2-40B4-BE49-F238E27FC236}">
+                <a16:creationId xmlns:a16="http://schemas.microsoft.com/office/drawing/2014/main" id="{F01342CA-81E0-4D4F-A653-267F08F4F658}"/>
+              </a:ext>
+            </a:extLst>
+          </p:cNvPr>
+          <p:cNvSpPr>
+            <a:spLocks xmlns:a="http://schemas.openxmlformats.org/drawingml/2006/main" noGrp="1"/>
+          </p:cNvSpPr>
+          <p:nvPr/>
+        </p:nvSpPr>
+        <p:spPr>
+          <a:xfrm xmlns:a="http://schemas.openxmlformats.org/drawingml/2006/main">
+            <a:off x="685800" y="5791200"/>
+            <a:ext cx="9906000" cy="228600"/>
+          </a:xfrm>
+          <a:prstGeom xmlns:a="http://schemas.openxmlformats.org/drawingml/2006/main" prst="rect">
+            <a:avLst/>
+          </a:prstGeom>
+          <a:noFill xmlns:a="http://schemas.openxmlformats.org/drawingml/2006/main"/>
+          <a:ln xmlns:a="http://schemas.openxmlformats.org/drawingml/2006/main" w="0">
+            <a:noFill/>
+            <a:prstDash val="solid"/>
+          </a:ln>
+        </p:spPr>
+        <p:txBody>
+          <a:bodyPr xmlns:a="http://schemas.openxmlformats.org/drawingml/2006/main" anchor="t"/>
+          <a:lstStyle xmlns:a="http://schemas.openxmlformats.org/drawingml/2006/main"/>
+          <a:p xmlns:a="http://schemas.openxmlformats.org/drawingml/2006/main">
+            <a:pPr algn="l">
+              <a:defRPr sz="1275" b="0">
+                <a:solidFill>
+                  <a:srgbClr val="334155"/>
+                </a:solidFill>
+              </a:defRPr>
+            </a:pPr>
+            <a:r>
+              <a:rPr sz="1275" b="0">
+                <a:solidFill>
+                  <a:srgbClr val="334155"/>
+                </a:solidFill>
+              </a:rPr>
+              <a:t>The stage markers separate submission, SGLang receive, scheduler queue/admit, and visible KV H2D movement.</a:t>
+            </a:r>
+          </a:p>
+        </p:txBody>
+      </p:sp>
+      <p:sp>
+        <p:nvSpPr>
+          <p:cNvPr id="6" name="">
+            <a:extLst xmlns:a="http://schemas.openxmlformats.org/drawingml/2006/main">
+              <a:ext uri="{FF2B5EF4-FFF2-40B4-BE49-F238E27FC236}">
+                <a16:creationId xmlns:a16="http://schemas.microsoft.com/office/drawing/2014/main" id="{940D003E-7BEE-4EC5-A130-939FD5C9AD61}"/>
+              </a:ext>
+            </a:extLst>
+          </p:cNvPr>
+          <p:cNvSpPr>
+            <a:spLocks xmlns:a="http://schemas.openxmlformats.org/drawingml/2006/main" noGrp="1"/>
+          </p:cNvSpPr>
+          <p:nvPr/>
+        </p:nvSpPr>
+        <p:spPr>
+          <a:xfrm xmlns:a="http://schemas.openxmlformats.org/drawingml/2006/main">
+            <a:off x="400050" y="6153150"/>
+            <a:ext cx="7810500" cy="190500"/>
+          </a:xfrm>
+          <a:prstGeom xmlns:a="http://schemas.openxmlformats.org/drawingml/2006/main" prst="rect">
+            <a:avLst/>
+          </a:prstGeom>
+          <a:noFill xmlns:a="http://schemas.openxmlformats.org/drawingml/2006/main"/>
+          <a:ln xmlns:a="http://schemas.openxmlformats.org/drawingml/2006/main" w="0">
+            <a:noFill/>
+            <a:prstDash val="solid"/>
+          </a:ln>
+        </p:spPr>
+        <p:txBody>
+          <a:bodyPr xmlns:a="http://schemas.openxmlformats.org/drawingml/2006/main" anchor="t"/>
+          <a:lstStyle xmlns:a="http://schemas.openxmlformats.org/drawingml/2006/main"/>
+          <a:p xmlns:a="http://schemas.openxmlformats.org/drawingml/2006/main">
+            <a:pPr algn="l">
+              <a:defRPr sz="825" b="0">
+                <a:solidFill>
+                  <a:srgbClr val="64748B"/>
+                </a:solidFill>
+              </a:defRPr>
+            </a:pPr>
+            <a:r>
+              <a:rPr sz="825" b="0">
+                <a:solidFill>
+                  <a:srgbClr val="64748B"/>
+                </a:solidFill>
+              </a:rPr>
+              <a:t>Source: latest_master_report.html, Replay Queue Timeline vs H2D Start</a:t>
+            </a:r>
+          </a:p>
+        </p:txBody>
+      </p:sp>
+      <p:sp>
+        <p:nvSpPr>
+          <p:cNvPr id="7" name="">
+            <a:extLst xmlns:a="http://schemas.openxmlformats.org/drawingml/2006/main">
+              <a:ext uri="{FF2B5EF4-FFF2-40B4-BE49-F238E27FC236}">
+                <a16:creationId xmlns:a16="http://schemas.microsoft.com/office/drawing/2014/main" id="{72B9AC0E-AE27-4207-AA20-F5F9C3559210}"/>
+              </a:ext>
+            </a:extLst>
+          </p:cNvPr>
+          <p:cNvSpPr>
+            <a:spLocks xmlns:a="http://schemas.openxmlformats.org/drawingml/2006/main" noGrp="1"/>
+          </p:cNvSpPr>
+          <p:nvPr/>
+        </p:nvSpPr>
+        <p:spPr>
+          <a:xfrm xmlns:a="http://schemas.openxmlformats.org/drawingml/2006/main">
+            <a:off x="400050" y="6381750"/>
+            <a:ext cx="3429000" cy="228600"/>
+          </a:xfrm>
+          <a:prstGeom xmlns:a="http://schemas.openxmlformats.org/drawingml/2006/main" prst="rect">
+            <a:avLst/>
+          </a:prstGeom>
+          <a:noFill xmlns:a="http://schemas.openxmlformats.org/drawingml/2006/main"/>
+          <a:ln xmlns:a="http://schemas.openxmlformats.org/drawingml/2006/main" w="0">
+            <a:noFill/>
+            <a:prstDash val="solid"/>
+          </a:ln>
+        </p:spPr>
+        <p:txBody>
+          <a:bodyPr xmlns:a="http://schemas.openxmlformats.org/drawingml/2006/main" anchor="t"/>
+          <a:lstStyle xmlns:a="http://schemas.openxmlformats.org/drawingml/2006/main"/>
+          <a:p xmlns:a="http://schemas.openxmlformats.org/drawingml/2006/main">
+            <a:pPr algn="l">
+              <a:defRPr sz="975" b="0">
+                <a:solidFill>
+                  <a:srgbClr val="64748B"/>
+                </a:solidFill>
+              </a:defRPr>
+            </a:pPr>
+            <a:r>
+              <a:rPr sz="975" b="0">
+                <a:solidFill>
+                  <a:srgbClr val="64748B"/>
+                </a:solidFill>
+              </a:rPr>
+              <a:t>Agent-aware KV movement</a:t>
+            </a:r>
+          </a:p>
+        </p:txBody>
+      </p:sp>
+      <p:sp>
+        <p:nvSpPr>
+          <p:cNvPr id="8" name="">
+            <a:extLst xmlns:a="http://schemas.openxmlformats.org/drawingml/2006/main">
+              <a:ext uri="{FF2B5EF4-FFF2-40B4-BE49-F238E27FC236}">
+                <a16:creationId xmlns:a16="http://schemas.microsoft.com/office/drawing/2014/main" id="{15F71398-B653-4B92-91A1-FA5F8DCDC495}"/>
+              </a:ext>
+            </a:extLst>
+          </p:cNvPr>
+          <p:cNvSpPr>
+            <a:spLocks xmlns:a="http://schemas.openxmlformats.org/drawingml/2006/main" noGrp="1"/>
+          </p:cNvSpPr>
+          <p:nvPr/>
+        </p:nvSpPr>
+        <p:spPr>
+          <a:xfrm xmlns:a="http://schemas.openxmlformats.org/drawingml/2006/main">
+            <a:off x="11334750" y="6381750"/>
+            <a:ext cx="457200" cy="228600"/>
+          </a:xfrm>
+          <a:prstGeom xmlns:a="http://schemas.openxmlformats.org/drawingml/2006/main" prst="rect">
+            <a:avLst/>
+          </a:prstGeom>
+          <a:noFill xmlns:a="http://schemas.openxmlformats.org/drawingml/2006/main"/>
+          <a:ln xmlns:a="http://schemas.openxmlformats.org/drawingml/2006/main" w="0">
+            <a:noFill/>
+            <a:prstDash val="solid"/>
+          </a:ln>
+        </p:spPr>
+        <p:txBody>
+          <a:bodyPr xmlns:a="http://schemas.openxmlformats.org/drawingml/2006/main" anchor="t"/>
+          <a:lstStyle xmlns:a="http://schemas.openxmlformats.org/drawingml/2006/main"/>
+          <a:p xmlns:a="http://schemas.openxmlformats.org/drawingml/2006/main">
+            <a:pPr algn="r">
+              <a:defRPr sz="975" b="0">
+                <a:solidFill>
+                  <a:srgbClr val="64748B"/>
+                </a:solidFill>
+              </a:defRPr>
+            </a:pPr>
+            <a:r>
+              <a:rPr sz="975" b="0">
+                <a:solidFill>
+                  <a:srgbClr val="64748B"/>
+                </a:solidFill>
+              </a:rPr>
+              <a:t>08</a:t>
+            </a:r>
+          </a:p>
+        </p:txBody>
+      </p:sp>
+    </p:spTree>
+    <p:extLst>
+      <p:ext uri="{BB962C8B-B14F-4D97-AF65-F5344CB8AC3E}">
+        <p14:creationId xmlns:p14="http://schemas.microsoft.com/office/powerpoint/2010/main" val="1447223750"/>
+      </p:ext>
+    </p:extLst>
+  </p:cSld>
+</p:sld>
+</file>
+
+<file path=ppt/slides/slide9.xml><?xml version="1.0" encoding="utf-8"?>
+<p:sld xmlns:p="http://schemas.openxmlformats.org/presentationml/2006/main">
+  <p:cSld>
+    <p:bg>
+      <p:bgPr>
+        <a:solidFill xmlns:a="http://schemas.openxmlformats.org/drawingml/2006/main">
+          <a:srgbClr val="FFFFFF"/>
+        </a:solidFill>
+      </p:bgPr>
+    </p:bg>
+    <p:spTree>
+      <p:nvGrpSpPr>
+        <p:cNvPr id="1" name=""/>
+        <p:cNvGrpSpPr/>
+        <p:nvPr/>
+      </p:nvGrpSpPr>
+      <p:grpSpPr>
+        <a:xfrm xmlns:a="http://schemas.openxmlformats.org/drawingml/2006/main"/>
+      </p:grpSpPr>
+      <p:sp>
+        <p:nvSpPr>
+          <p:cNvPr id="27" name="">
+            <a:extLst xmlns:a="http://schemas.openxmlformats.org/drawingml/2006/main">
+              <a:ext uri="{FF2B5EF4-FFF2-40B4-BE49-F238E27FC236}">
+                <a16:creationId xmlns:a16="http://schemas.microsoft.com/office/drawing/2014/main" id="{2AD63010-72F3-43BC-874A-B4C35AFD7869}"/>
+              </a:ext>
+            </a:extLst>
+          </p:cNvPr>
+          <p:cNvSpPr>
+            <a:spLocks xmlns:a="http://schemas.openxmlformats.org/drawingml/2006/main" noGrp="1"/>
+          </p:cNvSpPr>
+          <p:nvPr/>
+        </p:nvSpPr>
+        <p:spPr>
+          <a:xfrm xmlns:a="http://schemas.openxmlformats.org/drawingml/2006/main">
+            <a:off x="400050" y="323850"/>
+            <a:ext cx="10668000" cy="800100"/>
+          </a:xfrm>
+          <a:prstGeom xmlns:a="http://schemas.openxmlformats.org/drawingml/2006/main" prst="rect">
+            <a:avLst/>
+          </a:prstGeom>
+          <a:noFill xmlns:a="http://schemas.openxmlformats.org/drawingml/2006/main"/>
+          <a:ln xmlns:a="http://schemas.openxmlformats.org/drawingml/2006/main" w="0">
+            <a:noFill/>
+            <a:prstDash val="solid"/>
+          </a:ln>
+        </p:spPr>
+        <p:txBody>
+          <a:bodyPr xmlns:a="http://schemas.openxmlformats.org/drawingml/2006/main" anchor="t"/>
+          <a:lstStyle xmlns:a="http://schemas.openxmlformats.org/drawingml/2006/main"/>
+          <a:p xmlns:a="http://schemas.openxmlformats.org/drawingml/2006/main">
+            <a:pPr algn="l">
+              <a:defRPr sz="2850" b="1">
+                <a:solidFill>
+                  <a:srgbClr val="0F172A"/>
+                </a:solidFill>
+              </a:defRPr>
+            </a:pPr>
+            <a:r>
+              <a:rPr sz="2850" b="1">
+                <a:solidFill>
+                  <a:srgbClr val="0F172A"/>
+                </a:solidFill>
+              </a:rPr>
+              <a:t>Hardware support can make hints enforceable</a:t>
+            </a:r>
+          </a:p>
+        </p:txBody>
+      </p:sp>
+      <p:sp>
+        <p:nvSpPr>
+          <p:cNvPr id="2" name="">
+            <a:extLst xmlns:a="http://schemas.openxmlformats.org/drawingml/2006/main">
+              <a:ext uri="{FF2B5EF4-FFF2-40B4-BE49-F238E27FC236}">
+                <a16:creationId xmlns:a16="http://schemas.microsoft.com/office/drawing/2014/main" id="{BF388ED5-EC26-49D5-980F-3A91AAC602EA}"/>
+              </a:ext>
+            </a:extLst>
+          </p:cNvPr>
+          <p:cNvSpPr>
+            <a:spLocks xmlns:a="http://schemas.openxmlformats.org/drawingml/2006/main" noGrp="1"/>
+          </p:cNvSpPr>
+          <p:nvPr/>
+        </p:nvSpPr>
+        <p:spPr>
+          <a:xfrm xmlns:a="http://schemas.openxmlformats.org/drawingml/2006/main">
+            <a:off x="419100" y="1028700"/>
+            <a:ext cx="9715500" cy="419100"/>
+          </a:xfrm>
+          <a:prstGeom xmlns:a="http://schemas.openxmlformats.org/drawingml/2006/main" prst="rect">
+            <a:avLst/>
+          </a:prstGeom>
+          <a:noFill xmlns:a="http://schemas.openxmlformats.org/drawingml/2006/main"/>
+          <a:ln xmlns:a="http://schemas.openxmlformats.org/drawingml/2006/main" w="0">
+            <a:noFill/>
+            <a:prstDash val="solid"/>
+          </a:ln>
+        </p:spPr>
+        <p:txBody>
+          <a:bodyPr xmlns:a="http://schemas.openxmlformats.org/drawingml/2006/main" anchor="t"/>
+          <a:lstStyle xmlns:a="http://schemas.openxmlformats.org/drawingml/2006/main"/>
+          <a:p xmlns:a="http://schemas.openxmlformats.org/drawingml/2006/main">
+            <a:pPr algn="l">
+              <a:defRPr sz="1350" b="0">
+                <a:solidFill>
+                  <a:srgbClr val="64748B"/>
+                </a:solidFill>
+              </a:defRPr>
+            </a:pPr>
+            <a:r>
+              <a:rPr sz="1350" b="0">
+                <a:solidFill>
+                  <a:srgbClr val="64748B"/>
+                </a:solidFill>
+              </a:rPr>
               <a:t>The opportunity is to treat KV as deadline-sensitive memory, not generic bytes.</a:t>
             </a:r>
           </a:p>
@@ -6229,7 +8394,7 @@
           <p:cNvPr id="3" name="">
             <a:extLst xmlns:a="http://schemas.openxmlformats.org/drawingml/2006/main">
               <a:ext uri="{FF2B5EF4-FFF2-40B4-BE49-F238E27FC236}">
-                <a16:creationId xmlns:a16="http://schemas.microsoft.com/office/drawing/2014/main" id="{43BC88E1-0D73-4D03-9CAC-F3B531859556}"/>
+                <a16:creationId xmlns:a16="http://schemas.microsoft.com/office/drawing/2014/main" id="{E0092D56-1D70-4C0D-9171-499148EB32D4}"/>
               </a:ext>
             </a:extLst>
           </p:cNvPr>
@@ -6264,7 +8429,7 @@
           <p:cNvPr id="4" name="">
             <a:extLst xmlns:a="http://schemas.openxmlformats.org/drawingml/2006/main">
               <a:ext uri="{FF2B5EF4-FFF2-40B4-BE49-F238E27FC236}">
-                <a16:creationId xmlns:a16="http://schemas.microsoft.com/office/drawing/2014/main" id="{222B10D5-AF3D-4827-A1AC-B1FBFF89CC7E}"/>
+                <a16:creationId xmlns:a16="http://schemas.microsoft.com/office/drawing/2014/main" id="{FFA6716C-D257-4B7C-BE30-575D01AD6F3F}"/>
               </a:ext>
             </a:extLst>
           </p:cNvPr>
@@ -6314,7 +8479,7 @@
           <p:cNvPr id="5" name="">
             <a:extLst xmlns:a="http://schemas.openxmlformats.org/drawingml/2006/main">
               <a:ext uri="{FF2B5EF4-FFF2-40B4-BE49-F238E27FC236}">
-                <a16:creationId xmlns:a16="http://schemas.microsoft.com/office/drawing/2014/main" id="{58BB3263-32B0-4E80-AF90-F9B6A205F391}"/>
+                <a16:creationId xmlns:a16="http://schemas.microsoft.com/office/drawing/2014/main" id="{8952EEFE-705B-4BF3-AD38-A155B63F8E00}"/>
               </a:ext>
             </a:extLst>
           </p:cNvPr>
@@ -6364,7 +8529,7 @@
           <p:cNvPr id="6" name="">
             <a:extLst xmlns:a="http://schemas.openxmlformats.org/drawingml/2006/main">
               <a:ext uri="{FF2B5EF4-FFF2-40B4-BE49-F238E27FC236}">
-                <a16:creationId xmlns:a16="http://schemas.microsoft.com/office/drawing/2014/main" id="{8A37FC77-050B-42B2-9D70-25BD66C6DF04}"/>
+                <a16:creationId xmlns:a16="http://schemas.microsoft.com/office/drawing/2014/main" id="{F2C79B21-6E3E-4DA4-B3C7-AB0E0B4C940D}"/>
               </a:ext>
             </a:extLst>
           </p:cNvPr>
@@ -6414,7 +8579,7 @@
           <p:cNvPr id="7" name="">
             <a:extLst xmlns:a="http://schemas.openxmlformats.org/drawingml/2006/main">
               <a:ext uri="{FF2B5EF4-FFF2-40B4-BE49-F238E27FC236}">
-                <a16:creationId xmlns:a16="http://schemas.microsoft.com/office/drawing/2014/main" id="{10F939C6-350E-4DD0-8DBC-0A14254C2D51}"/>
+                <a16:creationId xmlns:a16="http://schemas.microsoft.com/office/drawing/2014/main" id="{072CDDCC-8365-4E38-812E-A3405E3F9F82}"/>
               </a:ext>
             </a:extLst>
           </p:cNvPr>
@@ -6449,7 +8614,7 @@
           <p:cNvPr id="8" name="">
             <a:extLst xmlns:a="http://schemas.openxmlformats.org/drawingml/2006/main">
               <a:ext uri="{FF2B5EF4-FFF2-40B4-BE49-F238E27FC236}">
-                <a16:creationId xmlns:a16="http://schemas.microsoft.com/office/drawing/2014/main" id="{522D388B-FE0B-44F8-A3D2-A7622CAD89AC}"/>
+                <a16:creationId xmlns:a16="http://schemas.microsoft.com/office/drawing/2014/main" id="{521C4A3C-E8A9-48B7-8777-B7ACE410042B}"/>
               </a:ext>
             </a:extLst>
           </p:cNvPr>
@@ -6499,7 +8664,7 @@
           <p:cNvPr id="9" name="">
             <a:extLst xmlns:a="http://schemas.openxmlformats.org/drawingml/2006/main">
               <a:ext uri="{FF2B5EF4-FFF2-40B4-BE49-F238E27FC236}">
-                <a16:creationId xmlns:a16="http://schemas.microsoft.com/office/drawing/2014/main" id="{676812D0-C0A4-4237-8DDE-4304B1999C5F}"/>
+                <a16:creationId xmlns:a16="http://schemas.microsoft.com/office/drawing/2014/main" id="{CEDDC49B-9888-4BA0-8EF4-9C70F4297D43}"/>
               </a:ext>
             </a:extLst>
           </p:cNvPr>
@@ -6549,7 +8714,7 @@
           <p:cNvPr id="10" name="">
             <a:extLst xmlns:a="http://schemas.openxmlformats.org/drawingml/2006/main">
               <a:ext uri="{FF2B5EF4-FFF2-40B4-BE49-F238E27FC236}">
-                <a16:creationId xmlns:a16="http://schemas.microsoft.com/office/drawing/2014/main" id="{83FD98FB-17CA-433A-9B12-3225E58B1C23}"/>
+                <a16:creationId xmlns:a16="http://schemas.microsoft.com/office/drawing/2014/main" id="{7A943085-BFFD-4E65-B50A-35BA44D2D35F}"/>
               </a:ext>
             </a:extLst>
           </p:cNvPr>
@@ -6599,7 +8764,7 @@
           <p:cNvPr id="11" name="">
             <a:extLst xmlns:a="http://schemas.openxmlformats.org/drawingml/2006/main">
               <a:ext uri="{FF2B5EF4-FFF2-40B4-BE49-F238E27FC236}">
-                <a16:creationId xmlns:a16="http://schemas.microsoft.com/office/drawing/2014/main" id="{BF679420-27F7-44FD-8A9E-3C7812354433}"/>
+                <a16:creationId xmlns:a16="http://schemas.microsoft.com/office/drawing/2014/main" id="{BCA44681-C801-4B02-AE19-1E6E116E3845}"/>
               </a:ext>
             </a:extLst>
           </p:cNvPr>
@@ -6634,7 +8799,7 @@
           <p:cNvPr id="12" name="">
             <a:extLst xmlns:a="http://schemas.openxmlformats.org/drawingml/2006/main">
               <a:ext uri="{FF2B5EF4-FFF2-40B4-BE49-F238E27FC236}">
-                <a16:creationId xmlns:a16="http://schemas.microsoft.com/office/drawing/2014/main" id="{84F5B24D-276A-4D7B-A395-99CA6762265E}"/>
+                <a16:creationId xmlns:a16="http://schemas.microsoft.com/office/drawing/2014/main" id="{815A6AD4-39FF-4C1F-91AF-2B0BB446CFE9}"/>
               </a:ext>
             </a:extLst>
           </p:cNvPr>
@@ -6684,7 +8849,7 @@
           <p:cNvPr id="13" name="">
             <a:extLst xmlns:a="http://schemas.openxmlformats.org/drawingml/2006/main">
               <a:ext uri="{FF2B5EF4-FFF2-40B4-BE49-F238E27FC236}">
-                <a16:creationId xmlns:a16="http://schemas.microsoft.com/office/drawing/2014/main" id="{975C0F49-D890-4035-BE6A-96170D42C97A}"/>
+                <a16:creationId xmlns:a16="http://schemas.microsoft.com/office/drawing/2014/main" id="{1FBAC9FC-5A16-4D00-BF0A-705157BA3A26}"/>
               </a:ext>
             </a:extLst>
           </p:cNvPr>
@@ -6734,7 +8899,7 @@
           <p:cNvPr id="14" name="">
             <a:extLst xmlns:a="http://schemas.openxmlformats.org/drawingml/2006/main">
               <a:ext uri="{FF2B5EF4-FFF2-40B4-BE49-F238E27FC236}">
-                <a16:creationId xmlns:a16="http://schemas.microsoft.com/office/drawing/2014/main" id="{21F43EB0-1BB2-4940-ACB3-BB21BFDC6FF8}"/>
+                <a16:creationId xmlns:a16="http://schemas.microsoft.com/office/drawing/2014/main" id="{2A6D27E1-ACD8-4452-9B41-B79EF6C0FC2A}"/>
               </a:ext>
             </a:extLst>
           </p:cNvPr>
@@ -6784,7 +8949,7 @@
           <p:cNvPr id="15" name="">
             <a:extLst xmlns:a="http://schemas.openxmlformats.org/drawingml/2006/main">
               <a:ext uri="{FF2B5EF4-FFF2-40B4-BE49-F238E27FC236}">
-                <a16:creationId xmlns:a16="http://schemas.microsoft.com/office/drawing/2014/main" id="{5EB820F3-C7D8-4BCE-B52B-3DC1A09E028E}"/>
+                <a16:creationId xmlns:a16="http://schemas.microsoft.com/office/drawing/2014/main" id="{AB485DD5-B630-47AD-88A4-F9549735FCEC}"/>
               </a:ext>
             </a:extLst>
           </p:cNvPr>
@@ -6819,7 +8984,7 @@
           <p:cNvPr id="16" name="">
             <a:extLst xmlns:a="http://schemas.openxmlformats.org/drawingml/2006/main">
               <a:ext uri="{FF2B5EF4-FFF2-40B4-BE49-F238E27FC236}">
-                <a16:creationId xmlns:a16="http://schemas.microsoft.com/office/drawing/2014/main" id="{D3DC714F-3CAA-4D27-8AE5-1AA2C1D4745D}"/>
+                <a16:creationId xmlns:a16="http://schemas.microsoft.com/office/drawing/2014/main" id="{D89EA56F-C88E-4520-B75B-49894E4BC3CA}"/>
               </a:ext>
             </a:extLst>
           </p:cNvPr>
@@ -6869,7 +9034,7 @@
           <p:cNvPr id="17" name="">
             <a:extLst xmlns:a="http://schemas.openxmlformats.org/drawingml/2006/main">
               <a:ext uri="{FF2B5EF4-FFF2-40B4-BE49-F238E27FC236}">
-                <a16:creationId xmlns:a16="http://schemas.microsoft.com/office/drawing/2014/main" id="{9096600A-8334-40EC-816A-F388A1541D62}"/>
+                <a16:creationId xmlns:a16="http://schemas.microsoft.com/office/drawing/2014/main" id="{EC379D16-E777-410C-A09D-A97E765A70F4}"/>
               </a:ext>
             </a:extLst>
           </p:cNvPr>
@@ -6919,7 +9084,7 @@
           <p:cNvPr id="18" name="">
             <a:extLst xmlns:a="http://schemas.openxmlformats.org/drawingml/2006/main">
               <a:ext uri="{FF2B5EF4-FFF2-40B4-BE49-F238E27FC236}">
-                <a16:creationId xmlns:a16="http://schemas.microsoft.com/office/drawing/2014/main" id="{2F754845-FB42-4D52-BBC5-4368763B264E}"/>
+                <a16:creationId xmlns:a16="http://schemas.microsoft.com/office/drawing/2014/main" id="{C96EF447-5860-49BF-8461-2669CDE2134E}"/>
               </a:ext>
             </a:extLst>
           </p:cNvPr>
@@ -6969,7 +9134,7 @@
           <p:cNvPr id="19" name="">
             <a:extLst xmlns:a="http://schemas.openxmlformats.org/drawingml/2006/main">
               <a:ext uri="{FF2B5EF4-FFF2-40B4-BE49-F238E27FC236}">
-                <a16:creationId xmlns:a16="http://schemas.microsoft.com/office/drawing/2014/main" id="{89ACCDB8-C66A-4B31-9C50-1951024BB6BA}"/>
+                <a16:creationId xmlns:a16="http://schemas.microsoft.com/office/drawing/2014/main" id="{51A0AA63-D822-4C25-BEC4-C669493AB867}"/>
               </a:ext>
             </a:extLst>
           </p:cNvPr>
@@ -7004,7 +9169,7 @@
           <p:cNvPr id="20" name="">
             <a:extLst xmlns:a="http://schemas.openxmlformats.org/drawingml/2006/main">
               <a:ext uri="{FF2B5EF4-FFF2-40B4-BE49-F238E27FC236}">
-                <a16:creationId xmlns:a16="http://schemas.microsoft.com/office/drawing/2014/main" id="{6CA90AF3-7EA5-4215-87ED-D257120CB4FE}"/>
+                <a16:creationId xmlns:a16="http://schemas.microsoft.com/office/drawing/2014/main" id="{F26F4CD2-582F-4BEC-A10B-8A85D0C6F639}"/>
               </a:ext>
             </a:extLst>
           </p:cNvPr>
@@ -7054,7 +9219,7 @@
           <p:cNvPr id="21" name="">
             <a:extLst xmlns:a="http://schemas.openxmlformats.org/drawingml/2006/main">
               <a:ext uri="{FF2B5EF4-FFF2-40B4-BE49-F238E27FC236}">
-                <a16:creationId xmlns:a16="http://schemas.microsoft.com/office/drawing/2014/main" id="{F4EDDA31-E0F5-4ECA-A01B-D7BCFE7C4D12}"/>
+                <a16:creationId xmlns:a16="http://schemas.microsoft.com/office/drawing/2014/main" id="{63BA5230-1DD5-49A7-9603-3D058128A753}"/>
               </a:ext>
             </a:extLst>
           </p:cNvPr>
@@ -7104,7 +9269,7 @@
           <p:cNvPr id="22" name="">
             <a:extLst xmlns:a="http://schemas.openxmlformats.org/drawingml/2006/main">
               <a:ext uri="{FF2B5EF4-FFF2-40B4-BE49-F238E27FC236}">
-                <a16:creationId xmlns:a16="http://schemas.microsoft.com/office/drawing/2014/main" id="{2767C2BD-42FF-4888-9BBB-EAD96C895477}"/>
+                <a16:creationId xmlns:a16="http://schemas.microsoft.com/office/drawing/2014/main" id="{92C74EE2-975A-4EA1-B681-BA97DC7E281E}"/>
               </a:ext>
             </a:extLst>
           </p:cNvPr>
@@ -7139,7 +9304,7 @@
           <p:cNvPr id="23" name="">
             <a:extLst xmlns:a="http://schemas.openxmlformats.org/drawingml/2006/main">
               <a:ext uri="{FF2B5EF4-FFF2-40B4-BE49-F238E27FC236}">
-                <a16:creationId xmlns:a16="http://schemas.microsoft.com/office/drawing/2014/main" id="{839C8DDC-B4DA-4FDB-A4B3-93959ABE4A38}"/>
+                <a16:creationId xmlns:a16="http://schemas.microsoft.com/office/drawing/2014/main" id="{B3FA8EC8-7CB9-4549-B017-929BA7A67E65}"/>
               </a:ext>
             </a:extLst>
           </p:cNvPr>
@@ -7189,7 +9354,7 @@
           <p:cNvPr id="24" name="">
             <a:extLst xmlns:a="http://schemas.openxmlformats.org/drawingml/2006/main">
               <a:ext uri="{FF2B5EF4-FFF2-40B4-BE49-F238E27FC236}">
-                <a16:creationId xmlns:a16="http://schemas.microsoft.com/office/drawing/2014/main" id="{0F060A64-FB81-41A5-9494-CE9171E5D55B}"/>
+                <a16:creationId xmlns:a16="http://schemas.microsoft.com/office/drawing/2014/main" id="{8913022B-5B61-4A3E-9A1A-041A7FC87F85}"/>
               </a:ext>
             </a:extLst>
           </p:cNvPr>
@@ -7239,7 +9404,7 @@
           <p:cNvPr id="25" name="">
             <a:extLst xmlns:a="http://schemas.openxmlformats.org/drawingml/2006/main">
               <a:ext uri="{FF2B5EF4-FFF2-40B4-BE49-F238E27FC236}">
-                <a16:creationId xmlns:a16="http://schemas.microsoft.com/office/drawing/2014/main" id="{86C3D3FD-8B08-46D1-B7A2-E86B05EDF00C}"/>
+                <a16:creationId xmlns:a16="http://schemas.microsoft.com/office/drawing/2014/main" id="{8DF687F8-FE0C-4D96-8896-0CE270921034}"/>
               </a:ext>
             </a:extLst>
           </p:cNvPr>
@@ -7289,7 +9454,7 @@
           <p:cNvPr id="26" name="">
             <a:extLst xmlns:a="http://schemas.openxmlformats.org/drawingml/2006/main">
               <a:ext uri="{FF2B5EF4-FFF2-40B4-BE49-F238E27FC236}">
-                <a16:creationId xmlns:a16="http://schemas.microsoft.com/office/drawing/2014/main" id="{FB1221F1-3248-47B5-B168-B0BA9978C2EB}"/>
+                <a16:creationId xmlns:a16="http://schemas.microsoft.com/office/drawing/2014/main" id="{11FC1CEA-31E3-4096-96DD-7104301FBC81}"/>
               </a:ext>
             </a:extLst>
           </p:cNvPr>
@@ -7329,7 +9494,7 @@
                   <a:srgbClr val="64748B"/>
                 </a:solidFill>
               </a:rPr>
-              <a:t>08</a:t>
+              <a:t>09</a:t>
             </a:r>
           </a:p>
         </p:txBody>
@@ -7337,7 +9502,7 @@
     </p:spTree>
     <p:extLst>
       <p:ext uri="{BB962C8B-B14F-4D97-AF65-F5344CB8AC3E}">
-        <p14:creationId xmlns:p14="http://schemas.microsoft.com/office/powerpoint/2010/main" val="1514225622"/>
+        <p14:creationId xmlns:p14="http://schemas.microsoft.com/office/powerpoint/2010/main" val="14380816"/>
       </p:ext>
     </p:extLst>
   </p:cSld>

--- a/sglang_direct_kv/artifacts/slides/agent_aware_kv_movement_manager_deck.pptx
+++ b/sglang_direct_kv/artifacts/slides/agent_aware_kv_movement_manager_deck.pptx
@@ -2,21 +2,22 @@
 <file path=ppt/presentation.xml><?xml version="1.0" encoding="utf-8"?>
 <p:presentation xmlns:p="http://schemas.openxmlformats.org/presentationml/2006/main">
   <p:sldMasterIdLst>
-    <p:sldMasterId xmlns:r="http://schemas.openxmlformats.org/officeDocument/2006/relationships" id="2147483648" r:id="R19be7142173d40bb"/>
+    <p:sldMasterId xmlns:r="http://schemas.openxmlformats.org/officeDocument/2006/relationships" id="2147483648" r:id="R81f7908685dd4af7"/>
   </p:sldMasterIdLst>
   <p:notesMasterIdLst>
-    <p:notesMasterId xmlns:r="http://schemas.openxmlformats.org/officeDocument/2006/relationships" r:id="Rba21d89858f145ff"/>
+    <p:notesMasterId xmlns:r="http://schemas.openxmlformats.org/officeDocument/2006/relationships" r:id="R9bf995b93cff43a1"/>
   </p:notesMasterIdLst>
   <p:sldIdLst>
-    <p:sldId xmlns:r="http://schemas.openxmlformats.org/officeDocument/2006/relationships" id="256" r:id="Ra4670e6b3a7147e5"/>
-    <p:sldId xmlns:r="http://schemas.openxmlformats.org/officeDocument/2006/relationships" id="257" r:id="Rcb75cfb42c684b3c"/>
-    <p:sldId xmlns:r="http://schemas.openxmlformats.org/officeDocument/2006/relationships" id="258" r:id="R2e30584c14604f2f"/>
-    <p:sldId xmlns:r="http://schemas.openxmlformats.org/officeDocument/2006/relationships" id="259" r:id="R7ee322f34d4440df"/>
-    <p:sldId xmlns:r="http://schemas.openxmlformats.org/officeDocument/2006/relationships" id="260" r:id="R824a8ef9527341ce"/>
-    <p:sldId xmlns:r="http://schemas.openxmlformats.org/officeDocument/2006/relationships" id="261" r:id="Rad13eff0818a4233"/>
-    <p:sldId xmlns:r="http://schemas.openxmlformats.org/officeDocument/2006/relationships" id="262" r:id="Rdcd3ddad9e594b9d"/>
-    <p:sldId xmlns:r="http://schemas.openxmlformats.org/officeDocument/2006/relationships" id="263" r:id="Rc2b8ab27cb76421a"/>
-    <p:sldId xmlns:r="http://schemas.openxmlformats.org/officeDocument/2006/relationships" id="264" r:id="Re6c9d8d0764d4a11"/>
+    <p:sldId xmlns:r="http://schemas.openxmlformats.org/officeDocument/2006/relationships" id="256" r:id="R5043122217e246e0"/>
+    <p:sldId xmlns:r="http://schemas.openxmlformats.org/officeDocument/2006/relationships" id="257" r:id="R949be3ffd5af4b38"/>
+    <p:sldId xmlns:r="http://schemas.openxmlformats.org/officeDocument/2006/relationships" id="258" r:id="Reb3225402559474e"/>
+    <p:sldId xmlns:r="http://schemas.openxmlformats.org/officeDocument/2006/relationships" id="259" r:id="Rc204ca3e16054227"/>
+    <p:sldId xmlns:r="http://schemas.openxmlformats.org/officeDocument/2006/relationships" id="260" r:id="R0f7cd9bd96804f26"/>
+    <p:sldId xmlns:r="http://schemas.openxmlformats.org/officeDocument/2006/relationships" id="261" r:id="Rb861bc28d4d04e19"/>
+    <p:sldId xmlns:r="http://schemas.openxmlformats.org/officeDocument/2006/relationships" id="262" r:id="R14f4b2ec08204fa2"/>
+    <p:sldId xmlns:r="http://schemas.openxmlformats.org/officeDocument/2006/relationships" id="263" r:id="R63b994510f124db4"/>
+    <p:sldId xmlns:r="http://schemas.openxmlformats.org/officeDocument/2006/relationships" id="264" r:id="Rd2427f5a625c413a"/>
+    <p:sldId xmlns:r="http://schemas.openxmlformats.org/officeDocument/2006/relationships" id="265" r:id="Rd8de39e89037461c"/>
   </p:sldIdLst>
   <p:sldSz cx="12192000" cy="6858000"/>
   <p:notesSz cx="6858000" cy="9144000"/>
@@ -505,6 +506,101 @@
 </p:notes>
 </file>
 
+<file path=ppt/notesSlides/notesSlide10.xml><?xml version="1.0" encoding="utf-8"?>
+<p:notes xmlns:p="http://schemas.openxmlformats.org/presentationml/2006/main">
+  <p:cSld>
+    <p:spTree>
+      <p:nvGrpSpPr>
+        <p:cNvPr id="1" name=""/>
+        <p:cNvGrpSpPr/>
+        <p:nvPr/>
+      </p:nvGrpSpPr>
+      <p:grpSpPr>
+        <a:xfrm xmlns:a="http://schemas.openxmlformats.org/drawingml/2006/main"/>
+      </p:grpSpPr>
+      <p:sp>
+        <p:nvSpPr>
+          <p:cNvPr id="2" name="Slide Image Placeholder 1"/>
+          <p:cNvSpPr>
+            <a:spLocks xmlns:a="http://schemas.openxmlformats.org/drawingml/2006/main" noGrp="1"/>
+          </p:cNvSpPr>
+          <p:nvPr>
+            <p:ph type="sldImg" idx="0"/>
+          </p:nvPr>
+        </p:nvSpPr>
+        <p:spPr/>
+      </p:sp>
+      <p:sp>
+        <p:nvSpPr>
+          <p:cNvPr id="3" name="Notes Placeholder 2"/>
+          <p:cNvSpPr>
+            <a:spLocks xmlns:a="http://schemas.openxmlformats.org/drawingml/2006/main" noGrp="1"/>
+          </p:cNvSpPr>
+          <p:nvPr>
+            <p:ph type="body" idx="1"/>
+          </p:nvPr>
+        </p:nvSpPr>
+        <p:spPr/>
+        <p:txBody>
+          <a:bodyPr xmlns:a="http://schemas.openxmlformats.org/drawingml/2006/main"/>
+          <a:lstStyle xmlns:a="http://schemas.openxmlformats.org/drawingml/2006/main"/>
+          <a:p xmlns:a="http://schemas.openxmlformats.org/drawingml/2006/main">
+            <a:r>
+              <a:t>Closing slide. This translates observed software/runtime behavior into concrete hardware support candidates.</a:t>
+            </a:r>
+          </a:p>
+          <a:p xmlns:a="http://schemas.openxmlformats.org/drawingml/2006/main">
+            <a:r>
+              <a:t>Hardware ideas come from the project proposal: KV metadata, deadline-aware queues, priority-aware migration, residency protection, and telemetry.</a:t>
+            </a:r>
+          </a:p>
+          <a:p xmlns:a="http://schemas.openxmlformats.org/drawingml/2006/main">
+            <a:r>
+              <a:t/>
+            </a:r>
+          </a:p>
+          <a:p xmlns:a="http://schemas.openxmlformats.org/drawingml/2006/main">
+            <a:r>
+              <a:t>[Sources]</a:t>
+            </a:r>
+          </a:p>
+          <a:p xmlns:a="http://schemas.openxmlformats.org/drawingml/2006/main">
+            <a:r>
+              <a:t>Local report: /Users/oluwolejaiyeoba/Documents/GitHub/agentic_hardware/sglang_direct_kv/artifacts/results/latest_master_report.html</a:t>
+            </a:r>
+          </a:p>
+          <a:p xmlns:a="http://schemas.openxmlformats.org/drawingml/2006/main">
+            <a:r>
+              <a:t>Backup report: /Users/oluwolejaiyeoba/Documents/GitHub/agentic_hardware/backups/latest_master_report-1.html</a:t>
+            </a:r>
+          </a:p>
+        </p:txBody>
+      </p:sp>
+      <p:sp>
+        <p:nvSpPr>
+          <p:cNvPr id="4" name="Slide Number Placeholder 3"/>
+          <p:cNvSpPr>
+            <a:spLocks xmlns:a="http://schemas.openxmlformats.org/drawingml/2006/main" noGrp="1"/>
+          </p:cNvSpPr>
+          <p:nvPr>
+            <p:ph type="sldNum" idx="5"/>
+          </p:nvPr>
+        </p:nvSpPr>
+        <p:spPr/>
+        <p:txBody>
+          <a:bodyPr xmlns:a="http://schemas.openxmlformats.org/drawingml/2006/main"/>
+          <a:lstStyle xmlns:a="http://schemas.openxmlformats.org/drawingml/2006/main"/>
+          <a:p xmlns:a="http://schemas.openxmlformats.org/drawingml/2006/main"/>
+        </p:txBody>
+      </p:sp>
+    </p:spTree>
+  </p:cSld>
+  <p:clrMapOvr>
+    <a:masterClrMapping xmlns:a="http://schemas.openxmlformats.org/drawingml/2006/main"/>
+  </p:clrMapOvr>
+</p:notes>
+</file>
+
 <file path=ppt/notesSlides/notesSlide2.xml><?xml version="1.0" encoding="utf-8"?>
 <p:notes xmlns:p="http://schemas.openxmlformats.org/presentationml/2006/main">
   <p:cSld>
@@ -1020,12 +1116,17 @@
           <a:lstStyle xmlns:a="http://schemas.openxmlformats.org/drawingml/2006/main"/>
           <a:p xmlns:a="http://schemas.openxmlformats.org/drawingml/2006/main">
             <a:r>
-              <a:t>This is the aggregate evidence slide. The current controlled no-prefetch run reports 8 no-prefetch replay H2D gaps and 8 late H2D finishes.</a:t>
-            </a:r>
-          </a:p>
-          <a:p xmlns:a="http://schemas.openxmlformats.org/drawingml/2006/main">
-            <a:r>
-              <a:t>Measured claim source: Global Replay H2D Readiness table and dot plot in latest_master_report.html.</a:t>
+              <a:t>This slide uses the synthetic profiled mechanism timeline. It is not the clean performance run; it is useful for mechanism attribution.</a:t>
+            </a:r>
+          </a:p>
+          <a:p xmlns:a="http://schemas.openxmlformats.org/drawingml/2006/main">
+            <a:r>
+              <a:t>The report states: KV copy ready before replay in 0 / 6 sessions; profiler CUDA HtoD visible in 3 / 6 sessions; replay reloaded KV in 6 / 6 sessions.</a:t>
+            </a:r>
+          </a:p>
+          <a:p xmlns:a="http://schemas.openxmlformats.org/drawingml/2006/main">
+            <a:r>
+              <a:t>Manager takeaway: the software hint path can exist and still miss replay because the movement/readiness path is not deadline-enforced.</a:t>
             </a:r>
           </a:p>
           <a:p xmlns:a="http://schemas.openxmlformats.org/drawingml/2006/main">
@@ -1115,12 +1216,12 @@
           <a:lstStyle xmlns:a="http://schemas.openxmlformats.org/drawingml/2006/main"/>
           <a:p xmlns:a="http://schemas.openxmlformats.org/drawingml/2006/main">
             <a:r>
-              <a:t>This chart separates replay due, client submit, SGLang receive, scheduler queue/admit, H2D start, and H2D finish.</a:t>
-            </a:r>
-          </a:p>
-          <a:p xmlns:a="http://schemas.openxmlformats.org/drawingml/2006/main">
-            <a:r>
-              <a:t>The key manager takeaway: a hint-aware design should influence scheduling and priority, not merely request more copies.</a:t>
+              <a:t>This is the aggregate evidence slide. The current controlled no-prefetch run reports 8 no-prefetch replay H2D gaps and 8 late H2D finishes.</a:t>
+            </a:r>
+          </a:p>
+          <a:p xmlns:a="http://schemas.openxmlformats.org/drawingml/2006/main">
+            <a:r>
+              <a:t>Measured claim source: Global Replay H2D Readiness table and dot plot in latest_master_report.html.</a:t>
             </a:r>
           </a:p>
           <a:p xmlns:a="http://schemas.openxmlformats.org/drawingml/2006/main">
@@ -1210,12 +1311,12 @@
           <a:lstStyle xmlns:a="http://schemas.openxmlformats.org/drawingml/2006/main"/>
           <a:p xmlns:a="http://schemas.openxmlformats.org/drawingml/2006/main">
             <a:r>
-              <a:t>Closing slide. This translates observed software/runtime behavior into concrete hardware support candidates.</a:t>
-            </a:r>
-          </a:p>
-          <a:p xmlns:a="http://schemas.openxmlformats.org/drawingml/2006/main">
-            <a:r>
-              <a:t>Hardware ideas come from the project proposal: KV metadata, deadline-aware queues, priority-aware migration, residency protection, and telemetry.</a:t>
+              <a:t>This chart separates replay due, client submit, SGLang receive, scheduler queue/admit, H2D start, and H2D finish.</a:t>
+            </a:r>
+          </a:p>
+          <a:p xmlns:a="http://schemas.openxmlformats.org/drawingml/2006/main">
+            <a:r>
+              <a:t>The key manager takeaway: a hint-aware design should influence scheduling and priority, not merely request more copies.</a:t>
             </a:r>
           </a:p>
           <a:p xmlns:a="http://schemas.openxmlformats.org/drawingml/2006/main">
@@ -1303,7 +1404,7 @@
   </p:cSld>
   <p:clrMap bg1="lt1" tx1="dk1" bg2="lt2" tx2="dk2" accent1="accent1" accent2="accent2" accent3="accent3" accent4="accent4" accent5="accent5" accent6="accent6" hlink="hlink" folHlink="folHlink"/>
   <p:sldLayoutIdLst>
-    <p:sldLayoutId xmlns:r="http://schemas.openxmlformats.org/officeDocument/2006/relationships" id="2147483649" r:id="R719b5a8e665343a0"/>
+    <p:sldLayoutId xmlns:r="http://schemas.openxmlformats.org/officeDocument/2006/relationships" id="2147483649" r:id="Recf639b5bb7d478d"/>
   </p:sldLayoutIdLst>
   <p:txStyles>
     <p:titleStyle>
@@ -1854,7 +1955,7 @@
           <p:cNvPr id="16" name="">
             <a:extLst xmlns:a="http://schemas.openxmlformats.org/drawingml/2006/main">
               <a:ext uri="{FF2B5EF4-FFF2-40B4-BE49-F238E27FC236}">
-                <a16:creationId xmlns:a16="http://schemas.microsoft.com/office/drawing/2014/main" id="{89AB6631-AFEA-47DA-9BBC-FF6B8570C3F8}"/>
+                <a16:creationId xmlns:a16="http://schemas.microsoft.com/office/drawing/2014/main" id="{85F46643-F4F6-4A04-8CA7-1547CB28FE72}"/>
               </a:ext>
             </a:extLst>
           </p:cNvPr>
@@ -1904,7 +2005,7 @@
           <p:cNvPr id="2" name="">
             <a:extLst xmlns:a="http://schemas.openxmlformats.org/drawingml/2006/main">
               <a:ext uri="{FF2B5EF4-FFF2-40B4-BE49-F238E27FC236}">
-                <a16:creationId xmlns:a16="http://schemas.microsoft.com/office/drawing/2014/main" id="{CD2E1BA6-5ED2-4A7E-9869-DB6DEBE41C2B}"/>
+                <a16:creationId xmlns:a16="http://schemas.microsoft.com/office/drawing/2014/main" id="{A39D2D10-3AF2-4A10-AD6D-F6311B97AAD8}"/>
               </a:ext>
             </a:extLst>
           </p:cNvPr>
@@ -1954,7 +2055,7 @@
           <p:cNvPr id="3" name="">
             <a:extLst xmlns:a="http://schemas.openxmlformats.org/drawingml/2006/main">
               <a:ext uri="{FF2B5EF4-FFF2-40B4-BE49-F238E27FC236}">
-                <a16:creationId xmlns:a16="http://schemas.microsoft.com/office/drawing/2014/main" id="{3C0A07E2-34CF-4C22-B9FA-07890AC6AB8C}"/>
+                <a16:creationId xmlns:a16="http://schemas.microsoft.com/office/drawing/2014/main" id="{34055EDF-ECC8-4583-8871-0E6C64480FF3}"/>
               </a:ext>
             </a:extLst>
           </p:cNvPr>
@@ -1989,7 +2090,7 @@
           <p:cNvPr id="4" name="">
             <a:extLst xmlns:a="http://schemas.openxmlformats.org/drawingml/2006/main">
               <a:ext uri="{FF2B5EF4-FFF2-40B4-BE49-F238E27FC236}">
-                <a16:creationId xmlns:a16="http://schemas.microsoft.com/office/drawing/2014/main" id="{1648394F-91DB-45DA-BBAE-B60F8A965E42}"/>
+                <a16:creationId xmlns:a16="http://schemas.microsoft.com/office/drawing/2014/main" id="{32AC8851-0915-4322-8524-BEC697C18FC7}"/>
               </a:ext>
             </a:extLst>
           </p:cNvPr>
@@ -2039,7 +2140,7 @@
           <p:cNvPr id="5" name="">
             <a:extLst xmlns:a="http://schemas.openxmlformats.org/drawingml/2006/main">
               <a:ext uri="{FF2B5EF4-FFF2-40B4-BE49-F238E27FC236}">
-                <a16:creationId xmlns:a16="http://schemas.microsoft.com/office/drawing/2014/main" id="{C87513AA-AF0E-42F1-9E33-F49502313A2E}"/>
+                <a16:creationId xmlns:a16="http://schemas.microsoft.com/office/drawing/2014/main" id="{11C60858-B7DB-438F-9716-42CC9A9F4674}"/>
               </a:ext>
             </a:extLst>
           </p:cNvPr>
@@ -2089,7 +2190,7 @@
           <p:cNvPr id="6" name="">
             <a:extLst xmlns:a="http://schemas.openxmlformats.org/drawingml/2006/main">
               <a:ext uri="{FF2B5EF4-FFF2-40B4-BE49-F238E27FC236}">
-                <a16:creationId xmlns:a16="http://schemas.microsoft.com/office/drawing/2014/main" id="{EA340BD4-41AB-47F8-ABE6-C5B1A39DC980}"/>
+                <a16:creationId xmlns:a16="http://schemas.microsoft.com/office/drawing/2014/main" id="{1212EFB5-5A1D-477D-8B89-C3BBEFA111EE}"/>
               </a:ext>
             </a:extLst>
           </p:cNvPr>
@@ -2124,7 +2225,7 @@
           <p:cNvPr id="7" name="">
             <a:extLst xmlns:a="http://schemas.openxmlformats.org/drawingml/2006/main">
               <a:ext uri="{FF2B5EF4-FFF2-40B4-BE49-F238E27FC236}">
-                <a16:creationId xmlns:a16="http://schemas.microsoft.com/office/drawing/2014/main" id="{61675222-4D7B-4B73-A335-FBCBD2354C0F}"/>
+                <a16:creationId xmlns:a16="http://schemas.microsoft.com/office/drawing/2014/main" id="{4832C5F6-966E-490D-99F8-A6F96C637637}"/>
               </a:ext>
             </a:extLst>
           </p:cNvPr>
@@ -2174,7 +2275,7 @@
           <p:cNvPr id="8" name="">
             <a:extLst xmlns:a="http://schemas.openxmlformats.org/drawingml/2006/main">
               <a:ext uri="{FF2B5EF4-FFF2-40B4-BE49-F238E27FC236}">
-                <a16:creationId xmlns:a16="http://schemas.microsoft.com/office/drawing/2014/main" id="{894274B6-8C74-430D-81F2-BA691606E10E}"/>
+                <a16:creationId xmlns:a16="http://schemas.microsoft.com/office/drawing/2014/main" id="{F0DBDEF0-E7B0-4124-A1D6-01168DDD7C2B}"/>
               </a:ext>
             </a:extLst>
           </p:cNvPr>
@@ -2224,7 +2325,7 @@
           <p:cNvPr id="9" name="">
             <a:extLst xmlns:a="http://schemas.openxmlformats.org/drawingml/2006/main">
               <a:ext uri="{FF2B5EF4-FFF2-40B4-BE49-F238E27FC236}">
-                <a16:creationId xmlns:a16="http://schemas.microsoft.com/office/drawing/2014/main" id="{0C0CDA4E-B18E-4383-B251-648A79852200}"/>
+                <a16:creationId xmlns:a16="http://schemas.microsoft.com/office/drawing/2014/main" id="{02F32A8D-B537-4B1C-9175-93CB92306FCC}"/>
               </a:ext>
             </a:extLst>
           </p:cNvPr>
@@ -2259,7 +2360,7 @@
           <p:cNvPr id="10" name="">
             <a:extLst xmlns:a="http://schemas.openxmlformats.org/drawingml/2006/main">
               <a:ext uri="{FF2B5EF4-FFF2-40B4-BE49-F238E27FC236}">
-                <a16:creationId xmlns:a16="http://schemas.microsoft.com/office/drawing/2014/main" id="{5A85D7F3-3F78-4469-A17E-EF12464463E0}"/>
+                <a16:creationId xmlns:a16="http://schemas.microsoft.com/office/drawing/2014/main" id="{6F9DC534-FC1E-46B8-82B5-02B92F61016F}"/>
               </a:ext>
             </a:extLst>
           </p:cNvPr>
@@ -2309,7 +2410,7 @@
           <p:cNvPr id="11" name="">
             <a:extLst xmlns:a="http://schemas.openxmlformats.org/drawingml/2006/main">
               <a:ext uri="{FF2B5EF4-FFF2-40B4-BE49-F238E27FC236}">
-                <a16:creationId xmlns:a16="http://schemas.microsoft.com/office/drawing/2014/main" id="{117CBBF6-E44B-4D98-BE3D-040824E513AB}"/>
+                <a16:creationId xmlns:a16="http://schemas.microsoft.com/office/drawing/2014/main" id="{AF7CDDBA-61B5-4884-B435-1C4E6F5FAAD0}"/>
               </a:ext>
             </a:extLst>
           </p:cNvPr>
@@ -2359,7 +2460,7 @@
           <p:cNvPr id="12" name="">
             <a:extLst xmlns:a="http://schemas.openxmlformats.org/drawingml/2006/main">
               <a:ext uri="{FF2B5EF4-FFF2-40B4-BE49-F238E27FC236}">
-                <a16:creationId xmlns:a16="http://schemas.microsoft.com/office/drawing/2014/main" id="{993CC2AD-90AC-4059-8A8E-5ED70C879908}"/>
+                <a16:creationId xmlns:a16="http://schemas.microsoft.com/office/drawing/2014/main" id="{3A623E41-0542-4F36-934E-DC3C319DAA33}"/>
               </a:ext>
             </a:extLst>
           </p:cNvPr>
@@ -2394,7 +2495,7 @@
           <p:cNvPr id="13" name="">
             <a:extLst xmlns:a="http://schemas.openxmlformats.org/drawingml/2006/main">
               <a:ext uri="{FF2B5EF4-FFF2-40B4-BE49-F238E27FC236}">
-                <a16:creationId xmlns:a16="http://schemas.microsoft.com/office/drawing/2014/main" id="{3095EACB-17E5-4C38-8715-09651E39272E}"/>
+                <a16:creationId xmlns:a16="http://schemas.microsoft.com/office/drawing/2014/main" id="{7927A2F8-A5AB-451F-BC8B-293E4AB39C0E}"/>
               </a:ext>
             </a:extLst>
           </p:cNvPr>
@@ -2444,7 +2545,7 @@
           <p:cNvPr id="14" name="">
             <a:extLst xmlns:a="http://schemas.openxmlformats.org/drawingml/2006/main">
               <a:ext uri="{FF2B5EF4-FFF2-40B4-BE49-F238E27FC236}">
-                <a16:creationId xmlns:a16="http://schemas.microsoft.com/office/drawing/2014/main" id="{55C271DD-7013-4AC2-A618-FAFD564FFB5B}"/>
+                <a16:creationId xmlns:a16="http://schemas.microsoft.com/office/drawing/2014/main" id="{B4D9D0EE-B683-4B93-BA60-B95B916B4AEB}"/>
               </a:ext>
             </a:extLst>
           </p:cNvPr>
@@ -2494,7 +2595,7 @@
           <p:cNvPr id="15" name="">
             <a:extLst xmlns:a="http://schemas.openxmlformats.org/drawingml/2006/main">
               <a:ext uri="{FF2B5EF4-FFF2-40B4-BE49-F238E27FC236}">
-                <a16:creationId xmlns:a16="http://schemas.microsoft.com/office/drawing/2014/main" id="{2325E4FA-4CED-4BA2-996D-77F42AD2F933}"/>
+                <a16:creationId xmlns:a16="http://schemas.microsoft.com/office/drawing/2014/main" id="{310D2551-AA2F-4C09-B4C8-E721B8D386AB}"/>
               </a:ext>
             </a:extLst>
           </p:cNvPr>
@@ -2542,7 +2643,1246 @@
     </p:spTree>
     <p:extLst>
       <p:ext uri="{BB962C8B-B14F-4D97-AF65-F5344CB8AC3E}">
-        <p14:creationId xmlns:p14="http://schemas.microsoft.com/office/powerpoint/2010/main" val="8711797"/>
+        <p14:creationId xmlns:p14="http://schemas.microsoft.com/office/powerpoint/2010/main" val="1553111577"/>
+      </p:ext>
+    </p:extLst>
+  </p:cSld>
+</p:sld>
+</file>
+
+<file path=ppt/slides/slide10.xml><?xml version="1.0" encoding="utf-8"?>
+<p:sld xmlns:p="http://schemas.openxmlformats.org/presentationml/2006/main">
+  <p:cSld>
+    <p:bg>
+      <p:bgPr>
+        <a:solidFill xmlns:a="http://schemas.openxmlformats.org/drawingml/2006/main">
+          <a:srgbClr val="FFFFFF"/>
+        </a:solidFill>
+      </p:bgPr>
+    </p:bg>
+    <p:spTree>
+      <p:nvGrpSpPr>
+        <p:cNvPr id="1" name=""/>
+        <p:cNvGrpSpPr/>
+        <p:nvPr/>
+      </p:nvGrpSpPr>
+      <p:grpSpPr>
+        <a:xfrm xmlns:a="http://schemas.openxmlformats.org/drawingml/2006/main"/>
+      </p:grpSpPr>
+      <p:sp>
+        <p:nvSpPr>
+          <p:cNvPr id="27" name="">
+            <a:extLst xmlns:a="http://schemas.openxmlformats.org/drawingml/2006/main">
+              <a:ext uri="{FF2B5EF4-FFF2-40B4-BE49-F238E27FC236}">
+                <a16:creationId xmlns:a16="http://schemas.microsoft.com/office/drawing/2014/main" id="{66440635-592A-4EEC-B999-6B63790201B2}"/>
+              </a:ext>
+            </a:extLst>
+          </p:cNvPr>
+          <p:cNvSpPr>
+            <a:spLocks xmlns:a="http://schemas.openxmlformats.org/drawingml/2006/main" noGrp="1"/>
+          </p:cNvSpPr>
+          <p:nvPr/>
+        </p:nvSpPr>
+        <p:spPr>
+          <a:xfrm xmlns:a="http://schemas.openxmlformats.org/drawingml/2006/main">
+            <a:off x="400050" y="323850"/>
+            <a:ext cx="10668000" cy="800100"/>
+          </a:xfrm>
+          <a:prstGeom xmlns:a="http://schemas.openxmlformats.org/drawingml/2006/main" prst="rect">
+            <a:avLst/>
+          </a:prstGeom>
+          <a:noFill xmlns:a="http://schemas.openxmlformats.org/drawingml/2006/main"/>
+          <a:ln xmlns:a="http://schemas.openxmlformats.org/drawingml/2006/main" w="0">
+            <a:noFill/>
+            <a:prstDash val="solid"/>
+          </a:ln>
+        </p:spPr>
+        <p:txBody>
+          <a:bodyPr xmlns:a="http://schemas.openxmlformats.org/drawingml/2006/main" anchor="t"/>
+          <a:lstStyle xmlns:a="http://schemas.openxmlformats.org/drawingml/2006/main"/>
+          <a:p xmlns:a="http://schemas.openxmlformats.org/drawingml/2006/main">
+            <a:pPr algn="l">
+              <a:defRPr sz="2850" b="1">
+                <a:solidFill>
+                  <a:srgbClr val="0F172A"/>
+                </a:solidFill>
+              </a:defRPr>
+            </a:pPr>
+            <a:r>
+              <a:rPr sz="2850" b="1">
+                <a:solidFill>
+                  <a:srgbClr val="0F172A"/>
+                </a:solidFill>
+              </a:rPr>
+              <a:t>Hardware support can make hints enforceable</a:t>
+            </a:r>
+          </a:p>
+        </p:txBody>
+      </p:sp>
+      <p:sp>
+        <p:nvSpPr>
+          <p:cNvPr id="2" name="">
+            <a:extLst xmlns:a="http://schemas.openxmlformats.org/drawingml/2006/main">
+              <a:ext uri="{FF2B5EF4-FFF2-40B4-BE49-F238E27FC236}">
+                <a16:creationId xmlns:a16="http://schemas.microsoft.com/office/drawing/2014/main" id="{775D5695-BBCC-4521-AB34-4C410A0379B4}"/>
+              </a:ext>
+            </a:extLst>
+          </p:cNvPr>
+          <p:cNvSpPr>
+            <a:spLocks xmlns:a="http://schemas.openxmlformats.org/drawingml/2006/main" noGrp="1"/>
+          </p:cNvSpPr>
+          <p:nvPr/>
+        </p:nvSpPr>
+        <p:spPr>
+          <a:xfrm xmlns:a="http://schemas.openxmlformats.org/drawingml/2006/main">
+            <a:off x="419100" y="1028700"/>
+            <a:ext cx="9715500" cy="419100"/>
+          </a:xfrm>
+          <a:prstGeom xmlns:a="http://schemas.openxmlformats.org/drawingml/2006/main" prst="rect">
+            <a:avLst/>
+          </a:prstGeom>
+          <a:noFill xmlns:a="http://schemas.openxmlformats.org/drawingml/2006/main"/>
+          <a:ln xmlns:a="http://schemas.openxmlformats.org/drawingml/2006/main" w="0">
+            <a:noFill/>
+            <a:prstDash val="solid"/>
+          </a:ln>
+        </p:spPr>
+        <p:txBody>
+          <a:bodyPr xmlns:a="http://schemas.openxmlformats.org/drawingml/2006/main" anchor="t"/>
+          <a:lstStyle xmlns:a="http://schemas.openxmlformats.org/drawingml/2006/main"/>
+          <a:p xmlns:a="http://schemas.openxmlformats.org/drawingml/2006/main">
+            <a:pPr algn="l">
+              <a:defRPr sz="1350" b="0">
+                <a:solidFill>
+                  <a:srgbClr val="64748B"/>
+                </a:solidFill>
+              </a:defRPr>
+            </a:pPr>
+            <a:r>
+              <a:rPr sz="1350" b="0">
+                <a:solidFill>
+                  <a:srgbClr val="64748B"/>
+                </a:solidFill>
+              </a:rPr>
+              <a:t>The opportunity is to treat KV as deadline-sensitive memory, not generic bytes.</a:t>
+            </a:r>
+          </a:p>
+        </p:txBody>
+      </p:sp>
+      <p:sp>
+        <p:nvSpPr>
+          <p:cNvPr id="3" name="">
+            <a:extLst xmlns:a="http://schemas.openxmlformats.org/drawingml/2006/main">
+              <a:ext uri="{FF2B5EF4-FFF2-40B4-BE49-F238E27FC236}">
+                <a16:creationId xmlns:a16="http://schemas.microsoft.com/office/drawing/2014/main" id="{B919F1E8-595D-45ED-A9EF-2BBAEF6635C8}"/>
+              </a:ext>
+            </a:extLst>
+          </p:cNvPr>
+          <p:cNvSpPr>
+            <a:spLocks xmlns:a="http://schemas.openxmlformats.org/drawingml/2006/main" noGrp="1"/>
+          </p:cNvSpPr>
+          <p:nvPr/>
+        </p:nvSpPr>
+        <p:spPr>
+          <a:xfrm xmlns:a="http://schemas.openxmlformats.org/drawingml/2006/main">
+            <a:off x="552450" y="1962150"/>
+            <a:ext cx="1695450" cy="1695450"/>
+          </a:xfrm>
+          <a:prstGeom xmlns:a="http://schemas.openxmlformats.org/drawingml/2006/main" prst="roundRect">
+            <a:avLst>
+              <a:gd name="adj" fmla="val 3371"/>
+            </a:avLst>
+          </a:prstGeom>
+          <a:solidFill xmlns:a="http://schemas.openxmlformats.org/drawingml/2006/main">
+            <a:srgbClr val="EFF6FF"/>
+          </a:solidFill>
+          <a:ln xmlns:a="http://schemas.openxmlformats.org/drawingml/2006/main" w="9525">
+            <a:solidFill>
+              <a:srgbClr val="2563EB"/>
+            </a:solidFill>
+            <a:prstDash val="solid"/>
+          </a:ln>
+        </p:spPr>
+      </p:sp>
+      <p:sp>
+        <p:nvSpPr>
+          <p:cNvPr id="4" name="">
+            <a:extLst xmlns:a="http://schemas.openxmlformats.org/drawingml/2006/main">
+              <a:ext uri="{FF2B5EF4-FFF2-40B4-BE49-F238E27FC236}">
+                <a16:creationId xmlns:a16="http://schemas.microsoft.com/office/drawing/2014/main" id="{BC918451-9840-418E-A215-090B3A5301CB}"/>
+              </a:ext>
+            </a:extLst>
+          </p:cNvPr>
+          <p:cNvSpPr>
+            <a:spLocks xmlns:a="http://schemas.openxmlformats.org/drawingml/2006/main" noGrp="1"/>
+          </p:cNvSpPr>
+          <p:nvPr/>
+        </p:nvSpPr>
+        <p:spPr>
+          <a:xfrm xmlns:a="http://schemas.openxmlformats.org/drawingml/2006/main">
+            <a:off x="704850" y="2228850"/>
+            <a:ext cx="1390650" cy="323850"/>
+          </a:xfrm>
+          <a:prstGeom xmlns:a="http://schemas.openxmlformats.org/drawingml/2006/main" prst="rect">
+            <a:avLst/>
+          </a:prstGeom>
+          <a:noFill xmlns:a="http://schemas.openxmlformats.org/drawingml/2006/main"/>
+          <a:ln xmlns:a="http://schemas.openxmlformats.org/drawingml/2006/main" w="0">
+            <a:noFill/>
+            <a:prstDash val="solid"/>
+          </a:ln>
+        </p:spPr>
+        <p:txBody>
+          <a:bodyPr xmlns:a="http://schemas.openxmlformats.org/drawingml/2006/main" anchor="t"/>
+          <a:lstStyle xmlns:a="http://schemas.openxmlformats.org/drawingml/2006/main"/>
+          <a:p xmlns:a="http://schemas.openxmlformats.org/drawingml/2006/main">
+            <a:pPr algn="ctr">
+              <a:defRPr sz="1650" b="1">
+                <a:solidFill>
+                  <a:srgbClr val="0F172A"/>
+                </a:solidFill>
+              </a:defRPr>
+            </a:pPr>
+            <a:r>
+              <a:rPr sz="1650" b="1">
+                <a:solidFill>
+                  <a:srgbClr val="0F172A"/>
+                </a:solidFill>
+              </a:rPr>
+              <a:t>Runtime hint</a:t>
+            </a:r>
+          </a:p>
+        </p:txBody>
+      </p:sp>
+      <p:sp>
+        <p:nvSpPr>
+          <p:cNvPr id="5" name="">
+            <a:extLst xmlns:a="http://schemas.openxmlformats.org/drawingml/2006/main">
+              <a:ext uri="{FF2B5EF4-FFF2-40B4-BE49-F238E27FC236}">
+                <a16:creationId xmlns:a16="http://schemas.microsoft.com/office/drawing/2014/main" id="{5C14670C-522D-49B1-852B-3208D7C87FF2}"/>
+              </a:ext>
+            </a:extLst>
+          </p:cNvPr>
+          <p:cNvSpPr>
+            <a:spLocks xmlns:a="http://schemas.openxmlformats.org/drawingml/2006/main" noGrp="1"/>
+          </p:cNvSpPr>
+          <p:nvPr/>
+        </p:nvSpPr>
+        <p:spPr>
+          <a:xfrm xmlns:a="http://schemas.openxmlformats.org/drawingml/2006/main">
+            <a:off x="723900" y="2838450"/>
+            <a:ext cx="1352550" cy="533400"/>
+          </a:xfrm>
+          <a:prstGeom xmlns:a="http://schemas.openxmlformats.org/drawingml/2006/main" prst="rect">
+            <a:avLst/>
+          </a:prstGeom>
+          <a:noFill xmlns:a="http://schemas.openxmlformats.org/drawingml/2006/main"/>
+          <a:ln xmlns:a="http://schemas.openxmlformats.org/drawingml/2006/main" w="0">
+            <a:noFill/>
+            <a:prstDash val="solid"/>
+          </a:ln>
+        </p:spPr>
+        <p:txBody>
+          <a:bodyPr xmlns:a="http://schemas.openxmlformats.org/drawingml/2006/main" anchor="t"/>
+          <a:lstStyle xmlns:a="http://schemas.openxmlformats.org/drawingml/2006/main"/>
+          <a:p xmlns:a="http://schemas.openxmlformats.org/drawingml/2006/main">
+            <a:pPr algn="ctr">
+              <a:defRPr sz="1275" b="0">
+                <a:solidFill>
+                  <a:srgbClr val="334155"/>
+                </a:solidFill>
+              </a:defRPr>
+            </a:pPr>
+            <a:r>
+              <a:rPr sz="1275" b="0">
+                <a:solidFill>
+                  <a:srgbClr val="334155"/>
+                </a:solidFill>
+              </a:rPr>
+              <a:t>session, priority, deadline</a:t>
+            </a:r>
+          </a:p>
+        </p:txBody>
+      </p:sp>
+      <p:sp>
+        <p:nvSpPr>
+          <p:cNvPr id="6" name="">
+            <a:extLst xmlns:a="http://schemas.openxmlformats.org/drawingml/2006/main">
+              <a:ext uri="{FF2B5EF4-FFF2-40B4-BE49-F238E27FC236}">
+                <a16:creationId xmlns:a16="http://schemas.microsoft.com/office/drawing/2014/main" id="{ED09A8D7-54E5-4C23-89EA-B88811642562}"/>
+              </a:ext>
+            </a:extLst>
+          </p:cNvPr>
+          <p:cNvSpPr>
+            <a:spLocks xmlns:a="http://schemas.openxmlformats.org/drawingml/2006/main" noGrp="1"/>
+          </p:cNvSpPr>
+          <p:nvPr/>
+        </p:nvSpPr>
+        <p:spPr>
+          <a:xfrm xmlns:a="http://schemas.openxmlformats.org/drawingml/2006/main">
+            <a:off x="2305050" y="2552700"/>
+            <a:ext cx="476250" cy="476250"/>
+          </a:xfrm>
+          <a:prstGeom xmlns:a="http://schemas.openxmlformats.org/drawingml/2006/main" prst="rect">
+            <a:avLst/>
+          </a:prstGeom>
+          <a:noFill xmlns:a="http://schemas.openxmlformats.org/drawingml/2006/main"/>
+          <a:ln xmlns:a="http://schemas.openxmlformats.org/drawingml/2006/main" w="0">
+            <a:noFill/>
+            <a:prstDash val="solid"/>
+          </a:ln>
+        </p:spPr>
+        <p:txBody>
+          <a:bodyPr xmlns:a="http://schemas.openxmlformats.org/drawingml/2006/main" anchor="t"/>
+          <a:lstStyle xmlns:a="http://schemas.openxmlformats.org/drawingml/2006/main"/>
+          <a:p xmlns:a="http://schemas.openxmlformats.org/drawingml/2006/main">
+            <a:pPr algn="ctr">
+              <a:defRPr sz="2550" b="1">
+                <a:solidFill>
+                  <a:srgbClr val="64748B"/>
+                </a:solidFill>
+              </a:defRPr>
+            </a:pPr>
+            <a:r>
+              <a:rPr sz="2550" b="1">
+                <a:solidFill>
+                  <a:srgbClr val="64748B"/>
+                </a:solidFill>
+              </a:rPr>
+              <a:t>→</a:t>
+            </a:r>
+          </a:p>
+        </p:txBody>
+      </p:sp>
+      <p:sp>
+        <p:nvSpPr>
+          <p:cNvPr id="7" name="">
+            <a:extLst xmlns:a="http://schemas.openxmlformats.org/drawingml/2006/main">
+              <a:ext uri="{FF2B5EF4-FFF2-40B4-BE49-F238E27FC236}">
+                <a16:creationId xmlns:a16="http://schemas.microsoft.com/office/drawing/2014/main" id="{9AAB7A8C-8B1D-4A7A-93E9-049E17493353}"/>
+              </a:ext>
+            </a:extLst>
+          </p:cNvPr>
+          <p:cNvSpPr>
+            <a:spLocks xmlns:a="http://schemas.openxmlformats.org/drawingml/2006/main" noGrp="1"/>
+          </p:cNvSpPr>
+          <p:nvPr/>
+        </p:nvSpPr>
+        <p:spPr>
+          <a:xfrm xmlns:a="http://schemas.openxmlformats.org/drawingml/2006/main">
+            <a:off x="2857500" y="1962150"/>
+            <a:ext cx="1695450" cy="1695450"/>
+          </a:xfrm>
+          <a:prstGeom xmlns:a="http://schemas.openxmlformats.org/drawingml/2006/main" prst="roundRect">
+            <a:avLst>
+              <a:gd name="adj" fmla="val 3371"/>
+            </a:avLst>
+          </a:prstGeom>
+          <a:solidFill xmlns:a="http://schemas.openxmlformats.org/drawingml/2006/main">
+            <a:srgbClr val="F5F3FF"/>
+          </a:solidFill>
+          <a:ln xmlns:a="http://schemas.openxmlformats.org/drawingml/2006/main" w="9525">
+            <a:solidFill>
+              <a:srgbClr val="A855F7"/>
+            </a:solidFill>
+            <a:prstDash val="solid"/>
+          </a:ln>
+        </p:spPr>
+      </p:sp>
+      <p:sp>
+        <p:nvSpPr>
+          <p:cNvPr id="8" name="">
+            <a:extLst xmlns:a="http://schemas.openxmlformats.org/drawingml/2006/main">
+              <a:ext uri="{FF2B5EF4-FFF2-40B4-BE49-F238E27FC236}">
+                <a16:creationId xmlns:a16="http://schemas.microsoft.com/office/drawing/2014/main" id="{E41ABD46-71E0-4DB9-B747-77B06D5B3516}"/>
+              </a:ext>
+            </a:extLst>
+          </p:cNvPr>
+          <p:cNvSpPr>
+            <a:spLocks xmlns:a="http://schemas.openxmlformats.org/drawingml/2006/main" noGrp="1"/>
+          </p:cNvSpPr>
+          <p:nvPr/>
+        </p:nvSpPr>
+        <p:spPr>
+          <a:xfrm xmlns:a="http://schemas.openxmlformats.org/drawingml/2006/main">
+            <a:off x="3009900" y="2228850"/>
+            <a:ext cx="1390650" cy="323850"/>
+          </a:xfrm>
+          <a:prstGeom xmlns:a="http://schemas.openxmlformats.org/drawingml/2006/main" prst="rect">
+            <a:avLst/>
+          </a:prstGeom>
+          <a:noFill xmlns:a="http://schemas.openxmlformats.org/drawingml/2006/main"/>
+          <a:ln xmlns:a="http://schemas.openxmlformats.org/drawingml/2006/main" w="0">
+            <a:noFill/>
+            <a:prstDash val="solid"/>
+          </a:ln>
+        </p:spPr>
+        <p:txBody>
+          <a:bodyPr xmlns:a="http://schemas.openxmlformats.org/drawingml/2006/main" anchor="t"/>
+          <a:lstStyle xmlns:a="http://schemas.openxmlformats.org/drawingml/2006/main"/>
+          <a:p xmlns:a="http://schemas.openxmlformats.org/drawingml/2006/main">
+            <a:pPr algn="ctr">
+              <a:defRPr sz="1650" b="1">
+                <a:solidFill>
+                  <a:srgbClr val="0F172A"/>
+                </a:solidFill>
+              </a:defRPr>
+            </a:pPr>
+            <a:r>
+              <a:rPr sz="1650" b="1">
+                <a:solidFill>
+                  <a:srgbClr val="0F172A"/>
+                </a:solidFill>
+              </a:rPr>
+              <a:t>KV-aware queue</a:t>
+            </a:r>
+          </a:p>
+        </p:txBody>
+      </p:sp>
+      <p:sp>
+        <p:nvSpPr>
+          <p:cNvPr id="9" name="">
+            <a:extLst xmlns:a="http://schemas.openxmlformats.org/drawingml/2006/main">
+              <a:ext uri="{FF2B5EF4-FFF2-40B4-BE49-F238E27FC236}">
+                <a16:creationId xmlns:a16="http://schemas.microsoft.com/office/drawing/2014/main" id="{096A9AAE-E82C-4720-812A-0D4946B0FCEE}"/>
+              </a:ext>
+            </a:extLst>
+          </p:cNvPr>
+          <p:cNvSpPr>
+            <a:spLocks xmlns:a="http://schemas.openxmlformats.org/drawingml/2006/main" noGrp="1"/>
+          </p:cNvSpPr>
+          <p:nvPr/>
+        </p:nvSpPr>
+        <p:spPr>
+          <a:xfrm xmlns:a="http://schemas.openxmlformats.org/drawingml/2006/main">
+            <a:off x="3028950" y="2838450"/>
+            <a:ext cx="1352550" cy="533400"/>
+          </a:xfrm>
+          <a:prstGeom xmlns:a="http://schemas.openxmlformats.org/drawingml/2006/main" prst="rect">
+            <a:avLst/>
+          </a:prstGeom>
+          <a:noFill xmlns:a="http://schemas.openxmlformats.org/drawingml/2006/main"/>
+          <a:ln xmlns:a="http://schemas.openxmlformats.org/drawingml/2006/main" w="0">
+            <a:noFill/>
+            <a:prstDash val="solid"/>
+          </a:ln>
+        </p:spPr>
+        <p:txBody>
+          <a:bodyPr xmlns:a="http://schemas.openxmlformats.org/drawingml/2006/main" anchor="t"/>
+          <a:lstStyle xmlns:a="http://schemas.openxmlformats.org/drawingml/2006/main"/>
+          <a:p xmlns:a="http://schemas.openxmlformats.org/drawingml/2006/main">
+            <a:pPr algn="ctr">
+              <a:defRPr sz="1275" b="0">
+                <a:solidFill>
+                  <a:srgbClr val="334155"/>
+                </a:solidFill>
+              </a:defRPr>
+            </a:pPr>
+            <a:r>
+              <a:rPr sz="1275" b="0">
+                <a:solidFill>
+                  <a:srgbClr val="334155"/>
+                </a:solidFill>
+              </a:rPr>
+              <a:t>order urgent KV first</a:t>
+            </a:r>
+          </a:p>
+        </p:txBody>
+      </p:sp>
+      <p:sp>
+        <p:nvSpPr>
+          <p:cNvPr id="10" name="">
+            <a:extLst xmlns:a="http://schemas.openxmlformats.org/drawingml/2006/main">
+              <a:ext uri="{FF2B5EF4-FFF2-40B4-BE49-F238E27FC236}">
+                <a16:creationId xmlns:a16="http://schemas.microsoft.com/office/drawing/2014/main" id="{61160B5E-283D-4B39-9E26-86AF1A21E97E}"/>
+              </a:ext>
+            </a:extLst>
+          </p:cNvPr>
+          <p:cNvSpPr>
+            <a:spLocks xmlns:a="http://schemas.openxmlformats.org/drawingml/2006/main" noGrp="1"/>
+          </p:cNvSpPr>
+          <p:nvPr/>
+        </p:nvSpPr>
+        <p:spPr>
+          <a:xfrm xmlns:a="http://schemas.openxmlformats.org/drawingml/2006/main">
+            <a:off x="4610100" y="2552700"/>
+            <a:ext cx="476250" cy="476250"/>
+          </a:xfrm>
+          <a:prstGeom xmlns:a="http://schemas.openxmlformats.org/drawingml/2006/main" prst="rect">
+            <a:avLst/>
+          </a:prstGeom>
+          <a:noFill xmlns:a="http://schemas.openxmlformats.org/drawingml/2006/main"/>
+          <a:ln xmlns:a="http://schemas.openxmlformats.org/drawingml/2006/main" w="0">
+            <a:noFill/>
+            <a:prstDash val="solid"/>
+          </a:ln>
+        </p:spPr>
+        <p:txBody>
+          <a:bodyPr xmlns:a="http://schemas.openxmlformats.org/drawingml/2006/main" anchor="t"/>
+          <a:lstStyle xmlns:a="http://schemas.openxmlformats.org/drawingml/2006/main"/>
+          <a:p xmlns:a="http://schemas.openxmlformats.org/drawingml/2006/main">
+            <a:pPr algn="ctr">
+              <a:defRPr sz="2550" b="1">
+                <a:solidFill>
+                  <a:srgbClr val="64748B"/>
+                </a:solidFill>
+              </a:defRPr>
+            </a:pPr>
+            <a:r>
+              <a:rPr sz="2550" b="1">
+                <a:solidFill>
+                  <a:srgbClr val="64748B"/>
+                </a:solidFill>
+              </a:rPr>
+              <a:t>→</a:t>
+            </a:r>
+          </a:p>
+        </p:txBody>
+      </p:sp>
+      <p:sp>
+        <p:nvSpPr>
+          <p:cNvPr id="11" name="">
+            <a:extLst xmlns:a="http://schemas.openxmlformats.org/drawingml/2006/main">
+              <a:ext uri="{FF2B5EF4-FFF2-40B4-BE49-F238E27FC236}">
+                <a16:creationId xmlns:a16="http://schemas.microsoft.com/office/drawing/2014/main" id="{DEA0A620-1499-4C8C-9779-5B81C1E9B8D7}"/>
+              </a:ext>
+            </a:extLst>
+          </p:cNvPr>
+          <p:cNvSpPr>
+            <a:spLocks xmlns:a="http://schemas.openxmlformats.org/drawingml/2006/main" noGrp="1"/>
+          </p:cNvSpPr>
+          <p:nvPr/>
+        </p:nvSpPr>
+        <p:spPr>
+          <a:xfrm xmlns:a="http://schemas.openxmlformats.org/drawingml/2006/main">
+            <a:off x="5162550" y="1962150"/>
+            <a:ext cx="1695450" cy="1695450"/>
+          </a:xfrm>
+          <a:prstGeom xmlns:a="http://schemas.openxmlformats.org/drawingml/2006/main" prst="roundRect">
+            <a:avLst>
+              <a:gd name="adj" fmla="val 3371"/>
+            </a:avLst>
+          </a:prstGeom>
+          <a:solidFill xmlns:a="http://schemas.openxmlformats.org/drawingml/2006/main">
+            <a:srgbClr val="ECFEFF"/>
+          </a:solidFill>
+          <a:ln xmlns:a="http://schemas.openxmlformats.org/drawingml/2006/main" w="9525">
+            <a:solidFill>
+              <a:srgbClr val="06B6D4"/>
+            </a:solidFill>
+            <a:prstDash val="solid"/>
+          </a:ln>
+        </p:spPr>
+      </p:sp>
+      <p:sp>
+        <p:nvSpPr>
+          <p:cNvPr id="12" name="">
+            <a:extLst xmlns:a="http://schemas.openxmlformats.org/drawingml/2006/main">
+              <a:ext uri="{FF2B5EF4-FFF2-40B4-BE49-F238E27FC236}">
+                <a16:creationId xmlns:a16="http://schemas.microsoft.com/office/drawing/2014/main" id="{0E271240-12AD-4197-9874-59AD12A972F5}"/>
+              </a:ext>
+            </a:extLst>
+          </p:cNvPr>
+          <p:cNvSpPr>
+            <a:spLocks xmlns:a="http://schemas.openxmlformats.org/drawingml/2006/main" noGrp="1"/>
+          </p:cNvSpPr>
+          <p:nvPr/>
+        </p:nvSpPr>
+        <p:spPr>
+          <a:xfrm xmlns:a="http://schemas.openxmlformats.org/drawingml/2006/main">
+            <a:off x="5314950" y="2228850"/>
+            <a:ext cx="1390650" cy="323850"/>
+          </a:xfrm>
+          <a:prstGeom xmlns:a="http://schemas.openxmlformats.org/drawingml/2006/main" prst="rect">
+            <a:avLst/>
+          </a:prstGeom>
+          <a:noFill xmlns:a="http://schemas.openxmlformats.org/drawingml/2006/main"/>
+          <a:ln xmlns:a="http://schemas.openxmlformats.org/drawingml/2006/main" w="0">
+            <a:noFill/>
+            <a:prstDash val="solid"/>
+          </a:ln>
+        </p:spPr>
+        <p:txBody>
+          <a:bodyPr xmlns:a="http://schemas.openxmlformats.org/drawingml/2006/main" anchor="t"/>
+          <a:lstStyle xmlns:a="http://schemas.openxmlformats.org/drawingml/2006/main"/>
+          <a:p xmlns:a="http://schemas.openxmlformats.org/drawingml/2006/main">
+            <a:pPr algn="ctr">
+              <a:defRPr sz="1650" b="1">
+                <a:solidFill>
+                  <a:srgbClr val="0F172A"/>
+                </a:solidFill>
+              </a:defRPr>
+            </a:pPr>
+            <a:r>
+              <a:rPr sz="1650" b="1">
+                <a:solidFill>
+                  <a:srgbClr val="0F172A"/>
+                </a:solidFill>
+              </a:rPr>
+              <a:t>DMA / copy engine</a:t>
+            </a:r>
+          </a:p>
+        </p:txBody>
+      </p:sp>
+      <p:sp>
+        <p:nvSpPr>
+          <p:cNvPr id="13" name="">
+            <a:extLst xmlns:a="http://schemas.openxmlformats.org/drawingml/2006/main">
+              <a:ext uri="{FF2B5EF4-FFF2-40B4-BE49-F238E27FC236}">
+                <a16:creationId xmlns:a16="http://schemas.microsoft.com/office/drawing/2014/main" id="{1442192C-9A8F-4A32-881C-9D2D6FCB6197}"/>
+              </a:ext>
+            </a:extLst>
+          </p:cNvPr>
+          <p:cNvSpPr>
+            <a:spLocks xmlns:a="http://schemas.openxmlformats.org/drawingml/2006/main" noGrp="1"/>
+          </p:cNvSpPr>
+          <p:nvPr/>
+        </p:nvSpPr>
+        <p:spPr>
+          <a:xfrm xmlns:a="http://schemas.openxmlformats.org/drawingml/2006/main">
+            <a:off x="5334000" y="2838450"/>
+            <a:ext cx="1352550" cy="533400"/>
+          </a:xfrm>
+          <a:prstGeom xmlns:a="http://schemas.openxmlformats.org/drawingml/2006/main" prst="rect">
+            <a:avLst/>
+          </a:prstGeom>
+          <a:noFill xmlns:a="http://schemas.openxmlformats.org/drawingml/2006/main"/>
+          <a:ln xmlns:a="http://schemas.openxmlformats.org/drawingml/2006/main" w="0">
+            <a:noFill/>
+            <a:prstDash val="solid"/>
+          </a:ln>
+        </p:spPr>
+        <p:txBody>
+          <a:bodyPr xmlns:a="http://schemas.openxmlformats.org/drawingml/2006/main" anchor="t"/>
+          <a:lstStyle xmlns:a="http://schemas.openxmlformats.org/drawingml/2006/main"/>
+          <a:p xmlns:a="http://schemas.openxmlformats.org/drawingml/2006/main">
+            <a:pPr algn="ctr">
+              <a:defRPr sz="1275" b="0">
+                <a:solidFill>
+                  <a:srgbClr val="334155"/>
+                </a:solidFill>
+              </a:defRPr>
+            </a:pPr>
+            <a:r>
+              <a:rPr sz="1275" b="0">
+                <a:solidFill>
+                  <a:srgbClr val="334155"/>
+                </a:solidFill>
+              </a:rPr>
+              <a:t>throttle and prioritize</a:t>
+            </a:r>
+          </a:p>
+        </p:txBody>
+      </p:sp>
+      <p:sp>
+        <p:nvSpPr>
+          <p:cNvPr id="14" name="">
+            <a:extLst xmlns:a="http://schemas.openxmlformats.org/drawingml/2006/main">
+              <a:ext uri="{FF2B5EF4-FFF2-40B4-BE49-F238E27FC236}">
+                <a16:creationId xmlns:a16="http://schemas.microsoft.com/office/drawing/2014/main" id="{3010C93D-115D-416A-ACC6-E3A292715326}"/>
+              </a:ext>
+            </a:extLst>
+          </p:cNvPr>
+          <p:cNvSpPr>
+            <a:spLocks xmlns:a="http://schemas.openxmlformats.org/drawingml/2006/main" noGrp="1"/>
+          </p:cNvSpPr>
+          <p:nvPr/>
+        </p:nvSpPr>
+        <p:spPr>
+          <a:xfrm xmlns:a="http://schemas.openxmlformats.org/drawingml/2006/main">
+            <a:off x="6915150" y="2552700"/>
+            <a:ext cx="476250" cy="476250"/>
+          </a:xfrm>
+          <a:prstGeom xmlns:a="http://schemas.openxmlformats.org/drawingml/2006/main" prst="rect">
+            <a:avLst/>
+          </a:prstGeom>
+          <a:noFill xmlns:a="http://schemas.openxmlformats.org/drawingml/2006/main"/>
+          <a:ln xmlns:a="http://schemas.openxmlformats.org/drawingml/2006/main" w="0">
+            <a:noFill/>
+            <a:prstDash val="solid"/>
+          </a:ln>
+        </p:spPr>
+        <p:txBody>
+          <a:bodyPr xmlns:a="http://schemas.openxmlformats.org/drawingml/2006/main" anchor="t"/>
+          <a:lstStyle xmlns:a="http://schemas.openxmlformats.org/drawingml/2006/main"/>
+          <a:p xmlns:a="http://schemas.openxmlformats.org/drawingml/2006/main">
+            <a:pPr algn="ctr">
+              <a:defRPr sz="2550" b="1">
+                <a:solidFill>
+                  <a:srgbClr val="64748B"/>
+                </a:solidFill>
+              </a:defRPr>
+            </a:pPr>
+            <a:r>
+              <a:rPr sz="2550" b="1">
+                <a:solidFill>
+                  <a:srgbClr val="64748B"/>
+                </a:solidFill>
+              </a:rPr>
+              <a:t>→</a:t>
+            </a:r>
+          </a:p>
+        </p:txBody>
+      </p:sp>
+      <p:sp>
+        <p:nvSpPr>
+          <p:cNvPr id="15" name="">
+            <a:extLst xmlns:a="http://schemas.openxmlformats.org/drawingml/2006/main">
+              <a:ext uri="{FF2B5EF4-FFF2-40B4-BE49-F238E27FC236}">
+                <a16:creationId xmlns:a16="http://schemas.microsoft.com/office/drawing/2014/main" id="{D6D3D268-BEEF-4778-BD26-EFD53C4FB867}"/>
+              </a:ext>
+            </a:extLst>
+          </p:cNvPr>
+          <p:cNvSpPr>
+            <a:spLocks xmlns:a="http://schemas.openxmlformats.org/drawingml/2006/main" noGrp="1"/>
+          </p:cNvSpPr>
+          <p:nvPr/>
+        </p:nvSpPr>
+        <p:spPr>
+          <a:xfrm xmlns:a="http://schemas.openxmlformats.org/drawingml/2006/main">
+            <a:off x="7467600" y="1962150"/>
+            <a:ext cx="1695450" cy="1695450"/>
+          </a:xfrm>
+          <a:prstGeom xmlns:a="http://schemas.openxmlformats.org/drawingml/2006/main" prst="roundRect">
+            <a:avLst>
+              <a:gd name="adj" fmla="val 3371"/>
+            </a:avLst>
+          </a:prstGeom>
+          <a:solidFill xmlns:a="http://schemas.openxmlformats.org/drawingml/2006/main">
+            <a:srgbClr val="F0FDF4"/>
+          </a:solidFill>
+          <a:ln xmlns:a="http://schemas.openxmlformats.org/drawingml/2006/main" w="9525">
+            <a:solidFill>
+              <a:srgbClr val="16A34A"/>
+            </a:solidFill>
+            <a:prstDash val="solid"/>
+          </a:ln>
+        </p:spPr>
+      </p:sp>
+      <p:sp>
+        <p:nvSpPr>
+          <p:cNvPr id="16" name="">
+            <a:extLst xmlns:a="http://schemas.openxmlformats.org/drawingml/2006/main">
+              <a:ext uri="{FF2B5EF4-FFF2-40B4-BE49-F238E27FC236}">
+                <a16:creationId xmlns:a16="http://schemas.microsoft.com/office/drawing/2014/main" id="{2B5178BF-995A-4A29-80E0-D4F85A2FAFF9}"/>
+              </a:ext>
+            </a:extLst>
+          </p:cNvPr>
+          <p:cNvSpPr>
+            <a:spLocks xmlns:a="http://schemas.openxmlformats.org/drawingml/2006/main" noGrp="1"/>
+          </p:cNvSpPr>
+          <p:nvPr/>
+        </p:nvSpPr>
+        <p:spPr>
+          <a:xfrm xmlns:a="http://schemas.openxmlformats.org/drawingml/2006/main">
+            <a:off x="7620000" y="2228850"/>
+            <a:ext cx="1390650" cy="323850"/>
+          </a:xfrm>
+          <a:prstGeom xmlns:a="http://schemas.openxmlformats.org/drawingml/2006/main" prst="rect">
+            <a:avLst/>
+          </a:prstGeom>
+          <a:noFill xmlns:a="http://schemas.openxmlformats.org/drawingml/2006/main"/>
+          <a:ln xmlns:a="http://schemas.openxmlformats.org/drawingml/2006/main" w="0">
+            <a:noFill/>
+            <a:prstDash val="solid"/>
+          </a:ln>
+        </p:spPr>
+        <p:txBody>
+          <a:bodyPr xmlns:a="http://schemas.openxmlformats.org/drawingml/2006/main" anchor="t"/>
+          <a:lstStyle xmlns:a="http://schemas.openxmlformats.org/drawingml/2006/main"/>
+          <a:p xmlns:a="http://schemas.openxmlformats.org/drawingml/2006/main">
+            <a:pPr algn="ctr">
+              <a:defRPr sz="1650" b="1">
+                <a:solidFill>
+                  <a:srgbClr val="0F172A"/>
+                </a:solidFill>
+              </a:defRPr>
+            </a:pPr>
+            <a:r>
+              <a:rPr sz="1650" b="1">
+                <a:solidFill>
+                  <a:srgbClr val="0F172A"/>
+                </a:solidFill>
+              </a:rPr>
+              <a:t>Residency control</a:t>
+            </a:r>
+          </a:p>
+        </p:txBody>
+      </p:sp>
+      <p:sp>
+        <p:nvSpPr>
+          <p:cNvPr id="17" name="">
+            <a:extLst xmlns:a="http://schemas.openxmlformats.org/drawingml/2006/main">
+              <a:ext uri="{FF2B5EF4-FFF2-40B4-BE49-F238E27FC236}">
+                <a16:creationId xmlns:a16="http://schemas.microsoft.com/office/drawing/2014/main" id="{DADF1759-77D3-4754-A043-87D046C82E1B}"/>
+              </a:ext>
+            </a:extLst>
+          </p:cNvPr>
+          <p:cNvSpPr>
+            <a:spLocks xmlns:a="http://schemas.openxmlformats.org/drawingml/2006/main" noGrp="1"/>
+          </p:cNvSpPr>
+          <p:nvPr/>
+        </p:nvSpPr>
+        <p:spPr>
+          <a:xfrm xmlns:a="http://schemas.openxmlformats.org/drawingml/2006/main">
+            <a:off x="7639050" y="2838450"/>
+            <a:ext cx="1352550" cy="533400"/>
+          </a:xfrm>
+          <a:prstGeom xmlns:a="http://schemas.openxmlformats.org/drawingml/2006/main" prst="rect">
+            <a:avLst/>
+          </a:prstGeom>
+          <a:noFill xmlns:a="http://schemas.openxmlformats.org/drawingml/2006/main"/>
+          <a:ln xmlns:a="http://schemas.openxmlformats.org/drawingml/2006/main" w="0">
+            <a:noFill/>
+            <a:prstDash val="solid"/>
+          </a:ln>
+        </p:spPr>
+        <p:txBody>
+          <a:bodyPr xmlns:a="http://schemas.openxmlformats.org/drawingml/2006/main" anchor="t"/>
+          <a:lstStyle xmlns:a="http://schemas.openxmlformats.org/drawingml/2006/main"/>
+          <a:p xmlns:a="http://schemas.openxmlformats.org/drawingml/2006/main">
+            <a:pPr algn="ctr">
+              <a:defRPr sz="1275" b="0">
+                <a:solidFill>
+                  <a:srgbClr val="334155"/>
+                </a:solidFill>
+              </a:defRPr>
+            </a:pPr>
+            <a:r>
+              <a:rPr sz="1275" b="0">
+                <a:solidFill>
+                  <a:srgbClr val="334155"/>
+                </a:solidFill>
+              </a:rPr>
+              <a:t>protect useful KV</a:t>
+            </a:r>
+          </a:p>
+        </p:txBody>
+      </p:sp>
+      <p:sp>
+        <p:nvSpPr>
+          <p:cNvPr id="18" name="">
+            <a:extLst xmlns:a="http://schemas.openxmlformats.org/drawingml/2006/main">
+              <a:ext uri="{FF2B5EF4-FFF2-40B4-BE49-F238E27FC236}">
+                <a16:creationId xmlns:a16="http://schemas.microsoft.com/office/drawing/2014/main" id="{DC98FF0B-2B17-4F70-88FE-8304DEF05A22}"/>
+              </a:ext>
+            </a:extLst>
+          </p:cNvPr>
+          <p:cNvSpPr>
+            <a:spLocks xmlns:a="http://schemas.openxmlformats.org/drawingml/2006/main" noGrp="1"/>
+          </p:cNvSpPr>
+          <p:nvPr/>
+        </p:nvSpPr>
+        <p:spPr>
+          <a:xfrm xmlns:a="http://schemas.openxmlformats.org/drawingml/2006/main">
+            <a:off x="9220200" y="2552700"/>
+            <a:ext cx="476250" cy="476250"/>
+          </a:xfrm>
+          <a:prstGeom xmlns:a="http://schemas.openxmlformats.org/drawingml/2006/main" prst="rect">
+            <a:avLst/>
+          </a:prstGeom>
+          <a:noFill xmlns:a="http://schemas.openxmlformats.org/drawingml/2006/main"/>
+          <a:ln xmlns:a="http://schemas.openxmlformats.org/drawingml/2006/main" w="0">
+            <a:noFill/>
+            <a:prstDash val="solid"/>
+          </a:ln>
+        </p:spPr>
+        <p:txBody>
+          <a:bodyPr xmlns:a="http://schemas.openxmlformats.org/drawingml/2006/main" anchor="t"/>
+          <a:lstStyle xmlns:a="http://schemas.openxmlformats.org/drawingml/2006/main"/>
+          <a:p xmlns:a="http://schemas.openxmlformats.org/drawingml/2006/main">
+            <a:pPr algn="ctr">
+              <a:defRPr sz="2550" b="1">
+                <a:solidFill>
+                  <a:srgbClr val="64748B"/>
+                </a:solidFill>
+              </a:defRPr>
+            </a:pPr>
+            <a:r>
+              <a:rPr sz="2550" b="1">
+                <a:solidFill>
+                  <a:srgbClr val="64748B"/>
+                </a:solidFill>
+              </a:rPr>
+              <a:t>→</a:t>
+            </a:r>
+          </a:p>
+        </p:txBody>
+      </p:sp>
+      <p:sp>
+        <p:nvSpPr>
+          <p:cNvPr id="19" name="">
+            <a:extLst xmlns:a="http://schemas.openxmlformats.org/drawingml/2006/main">
+              <a:ext uri="{FF2B5EF4-FFF2-40B4-BE49-F238E27FC236}">
+                <a16:creationId xmlns:a16="http://schemas.microsoft.com/office/drawing/2014/main" id="{E66DFCA9-8FD9-449C-831F-CD33CEE05208}"/>
+              </a:ext>
+            </a:extLst>
+          </p:cNvPr>
+          <p:cNvSpPr>
+            <a:spLocks xmlns:a="http://schemas.openxmlformats.org/drawingml/2006/main" noGrp="1"/>
+          </p:cNvSpPr>
+          <p:nvPr/>
+        </p:nvSpPr>
+        <p:spPr>
+          <a:xfrm xmlns:a="http://schemas.openxmlformats.org/drawingml/2006/main">
+            <a:off x="9772650" y="1962150"/>
+            <a:ext cx="1695450" cy="1695450"/>
+          </a:xfrm>
+          <a:prstGeom xmlns:a="http://schemas.openxmlformats.org/drawingml/2006/main" prst="roundRect">
+            <a:avLst>
+              <a:gd name="adj" fmla="val 3371"/>
+            </a:avLst>
+          </a:prstGeom>
+          <a:solidFill xmlns:a="http://schemas.openxmlformats.org/drawingml/2006/main">
+            <a:srgbClr val="FFF7ED"/>
+          </a:solidFill>
+          <a:ln xmlns:a="http://schemas.openxmlformats.org/drawingml/2006/main" w="9525">
+            <a:solidFill>
+              <a:srgbClr val="F97316"/>
+            </a:solidFill>
+            <a:prstDash val="solid"/>
+          </a:ln>
+        </p:spPr>
+      </p:sp>
+      <p:sp>
+        <p:nvSpPr>
+          <p:cNvPr id="20" name="">
+            <a:extLst xmlns:a="http://schemas.openxmlformats.org/drawingml/2006/main">
+              <a:ext uri="{FF2B5EF4-FFF2-40B4-BE49-F238E27FC236}">
+                <a16:creationId xmlns:a16="http://schemas.microsoft.com/office/drawing/2014/main" id="{EDD22A59-6806-4DE5-AF11-5F338F6FE749}"/>
+              </a:ext>
+            </a:extLst>
+          </p:cNvPr>
+          <p:cNvSpPr>
+            <a:spLocks xmlns:a="http://schemas.openxmlformats.org/drawingml/2006/main" noGrp="1"/>
+          </p:cNvSpPr>
+          <p:nvPr/>
+        </p:nvSpPr>
+        <p:spPr>
+          <a:xfrm xmlns:a="http://schemas.openxmlformats.org/drawingml/2006/main">
+            <a:off x="9925050" y="2228850"/>
+            <a:ext cx="1390650" cy="323850"/>
+          </a:xfrm>
+          <a:prstGeom xmlns:a="http://schemas.openxmlformats.org/drawingml/2006/main" prst="rect">
+            <a:avLst/>
+          </a:prstGeom>
+          <a:noFill xmlns:a="http://schemas.openxmlformats.org/drawingml/2006/main"/>
+          <a:ln xmlns:a="http://schemas.openxmlformats.org/drawingml/2006/main" w="0">
+            <a:noFill/>
+            <a:prstDash val="solid"/>
+          </a:ln>
+        </p:spPr>
+        <p:txBody>
+          <a:bodyPr xmlns:a="http://schemas.openxmlformats.org/drawingml/2006/main" anchor="t"/>
+          <a:lstStyle xmlns:a="http://schemas.openxmlformats.org/drawingml/2006/main"/>
+          <a:p xmlns:a="http://schemas.openxmlformats.org/drawingml/2006/main">
+            <a:pPr algn="ctr">
+              <a:defRPr sz="1650" b="1">
+                <a:solidFill>
+                  <a:srgbClr val="0F172A"/>
+                </a:solidFill>
+              </a:defRPr>
+            </a:pPr>
+            <a:r>
+              <a:rPr sz="1650" b="1">
+                <a:solidFill>
+                  <a:srgbClr val="0F172A"/>
+                </a:solidFill>
+              </a:rPr>
+              <a:t>Telemetry</a:t>
+            </a:r>
+          </a:p>
+        </p:txBody>
+      </p:sp>
+      <p:sp>
+        <p:nvSpPr>
+          <p:cNvPr id="21" name="">
+            <a:extLst xmlns:a="http://schemas.openxmlformats.org/drawingml/2006/main">
+              <a:ext uri="{FF2B5EF4-FFF2-40B4-BE49-F238E27FC236}">
+                <a16:creationId xmlns:a16="http://schemas.microsoft.com/office/drawing/2014/main" id="{E32FC3B7-0FAE-46F3-AF72-228EF272B6FC}"/>
+              </a:ext>
+            </a:extLst>
+          </p:cNvPr>
+          <p:cNvSpPr>
+            <a:spLocks xmlns:a="http://schemas.openxmlformats.org/drawingml/2006/main" noGrp="1"/>
+          </p:cNvSpPr>
+          <p:nvPr/>
+        </p:nvSpPr>
+        <p:spPr>
+          <a:xfrm xmlns:a="http://schemas.openxmlformats.org/drawingml/2006/main">
+            <a:off x="9944100" y="2838450"/>
+            <a:ext cx="1352550" cy="533400"/>
+          </a:xfrm>
+          <a:prstGeom xmlns:a="http://schemas.openxmlformats.org/drawingml/2006/main" prst="rect">
+            <a:avLst/>
+          </a:prstGeom>
+          <a:noFill xmlns:a="http://schemas.openxmlformats.org/drawingml/2006/main"/>
+          <a:ln xmlns:a="http://schemas.openxmlformats.org/drawingml/2006/main" w="0">
+            <a:noFill/>
+            <a:prstDash val="solid"/>
+          </a:ln>
+        </p:spPr>
+        <p:txBody>
+          <a:bodyPr xmlns:a="http://schemas.openxmlformats.org/drawingml/2006/main" anchor="t"/>
+          <a:lstStyle xmlns:a="http://schemas.openxmlformats.org/drawingml/2006/main"/>
+          <a:p xmlns:a="http://schemas.openxmlformats.org/drawingml/2006/main">
+            <a:pPr algn="ctr">
+              <a:defRPr sz="1275" b="0">
+                <a:solidFill>
+                  <a:srgbClr val="334155"/>
+                </a:solidFill>
+              </a:defRPr>
+            </a:pPr>
+            <a:r>
+              <a:rPr sz="1275" b="0">
+                <a:solidFill>
+                  <a:srgbClr val="334155"/>
+                </a:solidFill>
+              </a:rPr>
+              <a:t>late / useful / wasted</a:t>
+            </a:r>
+          </a:p>
+        </p:txBody>
+      </p:sp>
+      <p:sp>
+        <p:nvSpPr>
+          <p:cNvPr id="22" name="">
+            <a:extLst xmlns:a="http://schemas.openxmlformats.org/drawingml/2006/main">
+              <a:ext uri="{FF2B5EF4-FFF2-40B4-BE49-F238E27FC236}">
+                <a16:creationId xmlns:a16="http://schemas.microsoft.com/office/drawing/2014/main" id="{BD658E17-8C90-4FF7-9B43-8CCD1DF156C1}"/>
+              </a:ext>
+            </a:extLst>
+          </p:cNvPr>
+          <p:cNvSpPr>
+            <a:spLocks xmlns:a="http://schemas.openxmlformats.org/drawingml/2006/main" noGrp="1"/>
+          </p:cNvSpPr>
+          <p:nvPr/>
+        </p:nvSpPr>
+        <p:spPr>
+          <a:xfrm xmlns:a="http://schemas.openxmlformats.org/drawingml/2006/main">
+            <a:off x="2000250" y="4514850"/>
+            <a:ext cx="8191500" cy="800100"/>
+          </a:xfrm>
+          <a:prstGeom xmlns:a="http://schemas.openxmlformats.org/drawingml/2006/main" prst="roundRect">
+            <a:avLst>
+              <a:gd name="adj" fmla="val 7143"/>
+            </a:avLst>
+          </a:prstGeom>
+          <a:solidFill xmlns:a="http://schemas.openxmlformats.org/drawingml/2006/main">
+            <a:srgbClr val="F8FAFC"/>
+          </a:solidFill>
+          <a:ln xmlns:a="http://schemas.openxmlformats.org/drawingml/2006/main" w="9525">
+            <a:solidFill>
+              <a:srgbClr val="CBD5E1"/>
+            </a:solidFill>
+            <a:prstDash val="solid"/>
+          </a:ln>
+        </p:spPr>
+      </p:sp>
+      <p:sp>
+        <p:nvSpPr>
+          <p:cNvPr id="23" name="">
+            <a:extLst xmlns:a="http://schemas.openxmlformats.org/drawingml/2006/main">
+              <a:ext uri="{FF2B5EF4-FFF2-40B4-BE49-F238E27FC236}">
+                <a16:creationId xmlns:a16="http://schemas.microsoft.com/office/drawing/2014/main" id="{484D4CAF-69BB-4328-B8B0-B6BC5C6425FE}"/>
+              </a:ext>
+            </a:extLst>
+          </p:cNvPr>
+          <p:cNvSpPr>
+            <a:spLocks xmlns:a="http://schemas.openxmlformats.org/drawingml/2006/main" noGrp="1"/>
+          </p:cNvSpPr>
+          <p:nvPr/>
+        </p:nvSpPr>
+        <p:spPr>
+          <a:xfrm xmlns:a="http://schemas.openxmlformats.org/drawingml/2006/main">
+            <a:off x="2247900" y="4743450"/>
+            <a:ext cx="2476500" cy="247650"/>
+          </a:xfrm>
+          <a:prstGeom xmlns:a="http://schemas.openxmlformats.org/drawingml/2006/main" prst="rect">
+            <a:avLst/>
+          </a:prstGeom>
+          <a:noFill xmlns:a="http://schemas.openxmlformats.org/drawingml/2006/main"/>
+          <a:ln xmlns:a="http://schemas.openxmlformats.org/drawingml/2006/main" w="0">
+            <a:noFill/>
+            <a:prstDash val="solid"/>
+          </a:ln>
+        </p:spPr>
+        <p:txBody>
+          <a:bodyPr xmlns:a="http://schemas.openxmlformats.org/drawingml/2006/main" anchor="t"/>
+          <a:lstStyle xmlns:a="http://schemas.openxmlformats.org/drawingml/2006/main"/>
+          <a:p xmlns:a="http://schemas.openxmlformats.org/drawingml/2006/main">
+            <a:pPr algn="l">
+              <a:defRPr sz="1650" b="1">
+                <a:solidFill>
+                  <a:srgbClr val="0F172A"/>
+                </a:solidFill>
+              </a:defRPr>
+            </a:pPr>
+            <a:r>
+              <a:rPr sz="1650" b="1">
+                <a:solidFill>
+                  <a:srgbClr val="0F172A"/>
+                </a:solidFill>
+              </a:rPr>
+              <a:t>Resulting research question</a:t>
+            </a:r>
+          </a:p>
+        </p:txBody>
+      </p:sp>
+      <p:sp>
+        <p:nvSpPr>
+          <p:cNvPr id="24" name="">
+            <a:extLst xmlns:a="http://schemas.openxmlformats.org/drawingml/2006/main">
+              <a:ext uri="{FF2B5EF4-FFF2-40B4-BE49-F238E27FC236}">
+                <a16:creationId xmlns:a16="http://schemas.microsoft.com/office/drawing/2014/main" id="{9193DF78-1B62-4618-9334-0768AD22B07E}"/>
+              </a:ext>
+            </a:extLst>
+          </p:cNvPr>
+          <p:cNvSpPr>
+            <a:spLocks xmlns:a="http://schemas.openxmlformats.org/drawingml/2006/main" noGrp="1"/>
+          </p:cNvSpPr>
+          <p:nvPr/>
+        </p:nvSpPr>
+        <p:spPr>
+          <a:xfrm xmlns:a="http://schemas.openxmlformats.org/drawingml/2006/main">
+            <a:off x="4953000" y="4686300"/>
+            <a:ext cx="4762500" cy="419100"/>
+          </a:xfrm>
+          <a:prstGeom xmlns:a="http://schemas.openxmlformats.org/drawingml/2006/main" prst="rect">
+            <a:avLst/>
+          </a:prstGeom>
+          <a:noFill xmlns:a="http://schemas.openxmlformats.org/drawingml/2006/main"/>
+          <a:ln xmlns:a="http://schemas.openxmlformats.org/drawingml/2006/main" w="0">
+            <a:noFill/>
+            <a:prstDash val="solid"/>
+          </a:ln>
+        </p:spPr>
+        <p:txBody>
+          <a:bodyPr xmlns:a="http://schemas.openxmlformats.org/drawingml/2006/main" anchor="t"/>
+          <a:lstStyle xmlns:a="http://schemas.openxmlformats.org/drawingml/2006/main"/>
+          <a:p xmlns:a="http://schemas.openxmlformats.org/drawingml/2006/main">
+            <a:pPr algn="l">
+              <a:defRPr sz="1425" b="0">
+                <a:solidFill>
+                  <a:srgbClr val="334155"/>
+                </a:solidFill>
+              </a:defRPr>
+            </a:pPr>
+            <a:r>
+              <a:rPr sz="1425" b="0">
+                <a:solidFill>
+                  <a:srgbClr val="334155"/>
+                </a:solidFill>
+              </a:rPr>
+              <a:t>How much replay latency and wasted movement can be avoided when KV movement has session context, priority, deadline, protection, and telemetry?</a:t>
+            </a:r>
+          </a:p>
+        </p:txBody>
+      </p:sp>
+      <p:sp>
+        <p:nvSpPr>
+          <p:cNvPr id="25" name="">
+            <a:extLst xmlns:a="http://schemas.openxmlformats.org/drawingml/2006/main">
+              <a:ext uri="{FF2B5EF4-FFF2-40B4-BE49-F238E27FC236}">
+                <a16:creationId xmlns:a16="http://schemas.microsoft.com/office/drawing/2014/main" id="{541AF021-097C-4ECC-8CE5-1D49324AC31C}"/>
+              </a:ext>
+            </a:extLst>
+          </p:cNvPr>
+          <p:cNvSpPr>
+            <a:spLocks xmlns:a="http://schemas.openxmlformats.org/drawingml/2006/main" noGrp="1"/>
+          </p:cNvSpPr>
+          <p:nvPr/>
+        </p:nvSpPr>
+        <p:spPr>
+          <a:xfrm xmlns:a="http://schemas.openxmlformats.org/drawingml/2006/main">
+            <a:off x="400050" y="6381750"/>
+            <a:ext cx="3429000" cy="228600"/>
+          </a:xfrm>
+          <a:prstGeom xmlns:a="http://schemas.openxmlformats.org/drawingml/2006/main" prst="rect">
+            <a:avLst/>
+          </a:prstGeom>
+          <a:noFill xmlns:a="http://schemas.openxmlformats.org/drawingml/2006/main"/>
+          <a:ln xmlns:a="http://schemas.openxmlformats.org/drawingml/2006/main" w="0">
+            <a:noFill/>
+            <a:prstDash val="solid"/>
+          </a:ln>
+        </p:spPr>
+        <p:txBody>
+          <a:bodyPr xmlns:a="http://schemas.openxmlformats.org/drawingml/2006/main" anchor="t"/>
+          <a:lstStyle xmlns:a="http://schemas.openxmlformats.org/drawingml/2006/main"/>
+          <a:p xmlns:a="http://schemas.openxmlformats.org/drawingml/2006/main">
+            <a:pPr algn="l">
+              <a:defRPr sz="975" b="0">
+                <a:solidFill>
+                  <a:srgbClr val="64748B"/>
+                </a:solidFill>
+              </a:defRPr>
+            </a:pPr>
+            <a:r>
+              <a:rPr sz="975" b="0">
+                <a:solidFill>
+                  <a:srgbClr val="64748B"/>
+                </a:solidFill>
+              </a:rPr>
+              <a:t>Agent-aware KV movement</a:t>
+            </a:r>
+          </a:p>
+        </p:txBody>
+      </p:sp>
+      <p:sp>
+        <p:nvSpPr>
+          <p:cNvPr id="26" name="">
+            <a:extLst xmlns:a="http://schemas.openxmlformats.org/drawingml/2006/main">
+              <a:ext uri="{FF2B5EF4-FFF2-40B4-BE49-F238E27FC236}">
+                <a16:creationId xmlns:a16="http://schemas.microsoft.com/office/drawing/2014/main" id="{C27257B0-D38C-44BA-BFBC-4EBF115ABA38}"/>
+              </a:ext>
+            </a:extLst>
+          </p:cNvPr>
+          <p:cNvSpPr>
+            <a:spLocks xmlns:a="http://schemas.openxmlformats.org/drawingml/2006/main" noGrp="1"/>
+          </p:cNvSpPr>
+          <p:nvPr/>
+        </p:nvSpPr>
+        <p:spPr>
+          <a:xfrm xmlns:a="http://schemas.openxmlformats.org/drawingml/2006/main">
+            <a:off x="11334750" y="6381750"/>
+            <a:ext cx="457200" cy="228600"/>
+          </a:xfrm>
+          <a:prstGeom xmlns:a="http://schemas.openxmlformats.org/drawingml/2006/main" prst="rect">
+            <a:avLst/>
+          </a:prstGeom>
+          <a:noFill xmlns:a="http://schemas.openxmlformats.org/drawingml/2006/main"/>
+          <a:ln xmlns:a="http://schemas.openxmlformats.org/drawingml/2006/main" w="0">
+            <a:noFill/>
+            <a:prstDash val="solid"/>
+          </a:ln>
+        </p:spPr>
+        <p:txBody>
+          <a:bodyPr xmlns:a="http://schemas.openxmlformats.org/drawingml/2006/main" anchor="t"/>
+          <a:lstStyle xmlns:a="http://schemas.openxmlformats.org/drawingml/2006/main"/>
+          <a:p xmlns:a="http://schemas.openxmlformats.org/drawingml/2006/main">
+            <a:pPr algn="r">
+              <a:defRPr sz="975" b="0">
+                <a:solidFill>
+                  <a:srgbClr val="64748B"/>
+                </a:solidFill>
+              </a:defRPr>
+            </a:pPr>
+            <a:r>
+              <a:rPr sz="975" b="0">
+                <a:solidFill>
+                  <a:srgbClr val="64748B"/>
+                </a:solidFill>
+              </a:rPr>
+              <a:t>10</a:t>
+            </a:r>
+          </a:p>
+        </p:txBody>
+      </p:sp>
+    </p:spTree>
+    <p:extLst>
+      <p:ext uri="{BB962C8B-B14F-4D97-AF65-F5344CB8AC3E}">
+        <p14:creationId xmlns:p14="http://schemas.microsoft.com/office/powerpoint/2010/main" val="1440689964"/>
       </p:ext>
     </p:extLst>
   </p:cSld>
@@ -2573,7 +3913,7 @@
           <p:cNvPr id="14" name="">
             <a:extLst xmlns:a="http://schemas.openxmlformats.org/drawingml/2006/main">
               <a:ext uri="{FF2B5EF4-FFF2-40B4-BE49-F238E27FC236}">
-                <a16:creationId xmlns:a16="http://schemas.microsoft.com/office/drawing/2014/main" id="{6CB27B2F-8040-4F21-961B-9500B53F2B95}"/>
+                <a16:creationId xmlns:a16="http://schemas.microsoft.com/office/drawing/2014/main" id="{40984737-2804-4F5C-8D6F-A7130D683613}"/>
               </a:ext>
             </a:extLst>
           </p:cNvPr>
@@ -2623,7 +3963,7 @@
           <p:cNvPr id="2" name="">
             <a:extLst xmlns:a="http://schemas.openxmlformats.org/drawingml/2006/main">
               <a:ext uri="{FF2B5EF4-FFF2-40B4-BE49-F238E27FC236}">
-                <a16:creationId xmlns:a16="http://schemas.microsoft.com/office/drawing/2014/main" id="{8BE0CD20-7C43-4401-83DB-44D5D4436DE0}"/>
+                <a16:creationId xmlns:a16="http://schemas.microsoft.com/office/drawing/2014/main" id="{32A9F450-C1E6-45BF-A8A7-BDCCD8676BE5}"/>
               </a:ext>
             </a:extLst>
           </p:cNvPr>
@@ -2673,7 +4013,7 @@
           <p:cNvPr id="3" name="">
             <a:extLst xmlns:a="http://schemas.openxmlformats.org/drawingml/2006/main">
               <a:ext uri="{FF2B5EF4-FFF2-40B4-BE49-F238E27FC236}">
-                <a16:creationId xmlns:a16="http://schemas.microsoft.com/office/drawing/2014/main" id="{5D7E99B7-5D14-40BA-B62E-DBFA0442E552}"/>
+                <a16:creationId xmlns:a16="http://schemas.microsoft.com/office/drawing/2014/main" id="{94607A23-EA65-4AEB-A8CE-175850697BFC}"/>
               </a:ext>
             </a:extLst>
           </p:cNvPr>
@@ -2712,7 +4052,7 @@
           <p:nvPr/>
         </p:nvPicPr>
         <p:blipFill>
-          <a:blip xmlns:r="http://schemas.openxmlformats.org/officeDocument/2006/relationships" xmlns:a="http://schemas.openxmlformats.org/drawingml/2006/main" r:embed="Ra2a90ef8e5c54102"/>
+          <a:blip xmlns:r="http://schemas.openxmlformats.org/officeDocument/2006/relationships" xmlns:a="http://schemas.openxmlformats.org/drawingml/2006/main" r:embed="R2c43e457889e46f4"/>
           <a:stretch xmlns:a="http://schemas.openxmlformats.org/drawingml/2006/main"/>
         </p:blipFill>
         <p:spPr>
@@ -2730,7 +4070,7 @@
           <p:cNvPr id="5" name="">
             <a:extLst xmlns:a="http://schemas.openxmlformats.org/drawingml/2006/main">
               <a:ext uri="{FF2B5EF4-FFF2-40B4-BE49-F238E27FC236}">
-                <a16:creationId xmlns:a16="http://schemas.microsoft.com/office/drawing/2014/main" id="{E61BC007-10AA-43D8-B0C3-84D773F62802}"/>
+                <a16:creationId xmlns:a16="http://schemas.microsoft.com/office/drawing/2014/main" id="{BC4FC63D-821B-4768-B73E-C928C535061F}"/>
               </a:ext>
             </a:extLst>
           </p:cNvPr>
@@ -2765,7 +4105,7 @@
           <p:cNvPr id="6" name="">
             <a:extLst xmlns:a="http://schemas.openxmlformats.org/drawingml/2006/main">
               <a:ext uri="{FF2B5EF4-FFF2-40B4-BE49-F238E27FC236}">
-                <a16:creationId xmlns:a16="http://schemas.microsoft.com/office/drawing/2014/main" id="{9EF09307-6CAE-46ED-8EAB-C36C590D6288}"/>
+                <a16:creationId xmlns:a16="http://schemas.microsoft.com/office/drawing/2014/main" id="{88F344BF-32B1-4A1C-953F-BC26A485B69A}"/>
               </a:ext>
             </a:extLst>
           </p:cNvPr>
@@ -2815,7 +4155,7 @@
           <p:cNvPr id="7" name="">
             <a:extLst xmlns:a="http://schemas.openxmlformats.org/drawingml/2006/main">
               <a:ext uri="{FF2B5EF4-FFF2-40B4-BE49-F238E27FC236}">
-                <a16:creationId xmlns:a16="http://schemas.microsoft.com/office/drawing/2014/main" id="{AF787D38-6392-4A06-B3A9-6986C0CA2148}"/>
+                <a16:creationId xmlns:a16="http://schemas.microsoft.com/office/drawing/2014/main" id="{86232BA6-D3FD-4002-9D6D-BAC26115EEBC}"/>
               </a:ext>
             </a:extLst>
           </p:cNvPr>
@@ -2865,7 +4205,7 @@
           <p:cNvPr id="8" name="">
             <a:extLst xmlns:a="http://schemas.openxmlformats.org/drawingml/2006/main">
               <a:ext uri="{FF2B5EF4-FFF2-40B4-BE49-F238E27FC236}">
-                <a16:creationId xmlns:a16="http://schemas.microsoft.com/office/drawing/2014/main" id="{172D2B5F-C810-4BE6-AAAB-B8A6A26685E1}"/>
+                <a16:creationId xmlns:a16="http://schemas.microsoft.com/office/drawing/2014/main" id="{C2633EB5-5D84-4E1E-9618-24461180B6EC}"/>
               </a:ext>
             </a:extLst>
           </p:cNvPr>
@@ -2900,7 +4240,7 @@
           <p:cNvPr id="9" name="">
             <a:extLst xmlns:a="http://schemas.openxmlformats.org/drawingml/2006/main">
               <a:ext uri="{FF2B5EF4-FFF2-40B4-BE49-F238E27FC236}">
-                <a16:creationId xmlns:a16="http://schemas.microsoft.com/office/drawing/2014/main" id="{C65CEB16-2BB3-4C23-8421-2B780C439C1B}"/>
+                <a16:creationId xmlns:a16="http://schemas.microsoft.com/office/drawing/2014/main" id="{730A4D98-E39D-4326-A0FA-2C86AB217588}"/>
               </a:ext>
             </a:extLst>
           </p:cNvPr>
@@ -2950,7 +4290,7 @@
           <p:cNvPr id="10" name="">
             <a:extLst xmlns:a="http://schemas.openxmlformats.org/drawingml/2006/main">
               <a:ext uri="{FF2B5EF4-FFF2-40B4-BE49-F238E27FC236}">
-                <a16:creationId xmlns:a16="http://schemas.microsoft.com/office/drawing/2014/main" id="{14AEDEF9-1183-4714-A9B2-3AABCBFA1917}"/>
+                <a16:creationId xmlns:a16="http://schemas.microsoft.com/office/drawing/2014/main" id="{8983C995-92D5-4767-A959-047139EEEF91}"/>
               </a:ext>
             </a:extLst>
           </p:cNvPr>
@@ -3000,7 +4340,7 @@
           <p:cNvPr id="11" name="">
             <a:extLst xmlns:a="http://schemas.openxmlformats.org/drawingml/2006/main">
               <a:ext uri="{FF2B5EF4-FFF2-40B4-BE49-F238E27FC236}">
-                <a16:creationId xmlns:a16="http://schemas.microsoft.com/office/drawing/2014/main" id="{496224DD-FCCD-48FA-9429-08C67D7CE35C}"/>
+                <a16:creationId xmlns:a16="http://schemas.microsoft.com/office/drawing/2014/main" id="{C92AF838-1D9C-4F9B-BAE3-61D8D61A2277}"/>
               </a:ext>
             </a:extLst>
           </p:cNvPr>
@@ -3050,7 +4390,7 @@
           <p:cNvPr id="12" name="">
             <a:extLst xmlns:a="http://schemas.openxmlformats.org/drawingml/2006/main">
               <a:ext uri="{FF2B5EF4-FFF2-40B4-BE49-F238E27FC236}">
-                <a16:creationId xmlns:a16="http://schemas.microsoft.com/office/drawing/2014/main" id="{25605FB8-6F0B-4027-B004-B6FD775B0E51}"/>
+                <a16:creationId xmlns:a16="http://schemas.microsoft.com/office/drawing/2014/main" id="{A7AC3A2F-A592-4CFD-8AC0-F20D19046F98}"/>
               </a:ext>
             </a:extLst>
           </p:cNvPr>
@@ -3100,7 +4440,7 @@
           <p:cNvPr id="13" name="">
             <a:extLst xmlns:a="http://schemas.openxmlformats.org/drawingml/2006/main">
               <a:ext uri="{FF2B5EF4-FFF2-40B4-BE49-F238E27FC236}">
-                <a16:creationId xmlns:a16="http://schemas.microsoft.com/office/drawing/2014/main" id="{9AC283EB-EEDD-4D3A-B0E1-F25EF72181D8}"/>
+                <a16:creationId xmlns:a16="http://schemas.microsoft.com/office/drawing/2014/main" id="{14B51456-28B4-4C39-831B-70344476944E}"/>
               </a:ext>
             </a:extLst>
           </p:cNvPr>
@@ -3148,7 +4488,7 @@
     </p:spTree>
     <p:extLst>
       <p:ext uri="{BB962C8B-B14F-4D97-AF65-F5344CB8AC3E}">
-        <p14:creationId xmlns:p14="http://schemas.microsoft.com/office/powerpoint/2010/main" val="551079583"/>
+        <p14:creationId xmlns:p14="http://schemas.microsoft.com/office/powerpoint/2010/main" val="1622963902"/>
       </p:ext>
     </p:extLst>
   </p:cSld>
@@ -3179,7 +4519,7 @@
           <p:cNvPr id="44" name="">
             <a:extLst xmlns:a="http://schemas.openxmlformats.org/drawingml/2006/main">
               <a:ext uri="{FF2B5EF4-FFF2-40B4-BE49-F238E27FC236}">
-                <a16:creationId xmlns:a16="http://schemas.microsoft.com/office/drawing/2014/main" id="{B9938FF0-0F20-4264-B181-F91D0D45DB02}"/>
+                <a16:creationId xmlns:a16="http://schemas.microsoft.com/office/drawing/2014/main" id="{EF8665A4-8A1F-41A2-8AE9-EC5292A66A6A}"/>
               </a:ext>
             </a:extLst>
           </p:cNvPr>
@@ -3229,7 +4569,7 @@
           <p:cNvPr id="2" name="">
             <a:extLst xmlns:a="http://schemas.openxmlformats.org/drawingml/2006/main">
               <a:ext uri="{FF2B5EF4-FFF2-40B4-BE49-F238E27FC236}">
-                <a16:creationId xmlns:a16="http://schemas.microsoft.com/office/drawing/2014/main" id="{666A5885-EC20-4295-9E23-FEF1A9CA0F42}"/>
+                <a16:creationId xmlns:a16="http://schemas.microsoft.com/office/drawing/2014/main" id="{7B82B209-E4B7-40FF-9CD4-63C3561263E1}"/>
               </a:ext>
             </a:extLst>
           </p:cNvPr>
@@ -3279,7 +4619,7 @@
           <p:cNvPr id="3" name="">
             <a:extLst xmlns:a="http://schemas.openxmlformats.org/drawingml/2006/main">
               <a:ext uri="{FF2B5EF4-FFF2-40B4-BE49-F238E27FC236}">
-                <a16:creationId xmlns:a16="http://schemas.microsoft.com/office/drawing/2014/main" id="{4252BA33-7C75-49ED-B351-BE8DF49C4285}"/>
+                <a16:creationId xmlns:a16="http://schemas.microsoft.com/office/drawing/2014/main" id="{BD930137-9889-414B-91E6-1E211626CCC7}"/>
               </a:ext>
             </a:extLst>
           </p:cNvPr>
@@ -3314,7 +4654,7 @@
           <p:cNvPr id="4" name="">
             <a:extLst xmlns:a="http://schemas.openxmlformats.org/drawingml/2006/main">
               <a:ext uri="{FF2B5EF4-FFF2-40B4-BE49-F238E27FC236}">
-                <a16:creationId xmlns:a16="http://schemas.microsoft.com/office/drawing/2014/main" id="{F98EBC35-3657-49C3-9C36-97F46493A0EC}"/>
+                <a16:creationId xmlns:a16="http://schemas.microsoft.com/office/drawing/2014/main" id="{E246D9F4-D0A7-4F73-B492-1ECCF97C904B}"/>
               </a:ext>
             </a:extLst>
           </p:cNvPr>
@@ -3381,7 +4721,7 @@
           <p:cNvPr id="5" name="">
             <a:extLst xmlns:a="http://schemas.openxmlformats.org/drawingml/2006/main">
               <a:ext uri="{FF2B5EF4-FFF2-40B4-BE49-F238E27FC236}">
-                <a16:creationId xmlns:a16="http://schemas.microsoft.com/office/drawing/2014/main" id="{53865425-AED9-4487-8238-03D950554468}"/>
+                <a16:creationId xmlns:a16="http://schemas.microsoft.com/office/drawing/2014/main" id="{6E3711EA-FFD8-48C5-9751-1CED0C0FB15D}"/>
               </a:ext>
             </a:extLst>
           </p:cNvPr>
@@ -3431,7 +4771,7 @@
           <p:cNvPr id="6" name="">
             <a:extLst xmlns:a="http://schemas.openxmlformats.org/drawingml/2006/main">
               <a:ext uri="{FF2B5EF4-FFF2-40B4-BE49-F238E27FC236}">
-                <a16:creationId xmlns:a16="http://schemas.microsoft.com/office/drawing/2014/main" id="{EA3BAC1B-2E40-454A-BD72-11C078AF958F}"/>
+                <a16:creationId xmlns:a16="http://schemas.microsoft.com/office/drawing/2014/main" id="{900975EA-B461-4630-9A72-AE9AE1496D15}"/>
               </a:ext>
             </a:extLst>
           </p:cNvPr>
@@ -3466,7 +4806,7 @@
           <p:cNvPr id="7" name="">
             <a:extLst xmlns:a="http://schemas.openxmlformats.org/drawingml/2006/main">
               <a:ext uri="{FF2B5EF4-FFF2-40B4-BE49-F238E27FC236}">
-                <a16:creationId xmlns:a16="http://schemas.microsoft.com/office/drawing/2014/main" id="{ECBF0D6F-AF21-49EE-8EF6-1F7BA4930291}"/>
+                <a16:creationId xmlns:a16="http://schemas.microsoft.com/office/drawing/2014/main" id="{FF4C8B94-0EBF-4FF0-B484-8B95ABC1CC0B}"/>
               </a:ext>
             </a:extLst>
           </p:cNvPr>
@@ -3533,7 +4873,7 @@
           <p:cNvPr id="8" name="">
             <a:extLst xmlns:a="http://schemas.openxmlformats.org/drawingml/2006/main">
               <a:ext uri="{FF2B5EF4-FFF2-40B4-BE49-F238E27FC236}">
-                <a16:creationId xmlns:a16="http://schemas.microsoft.com/office/drawing/2014/main" id="{742E2C10-0F4A-44A4-9850-DBD332945658}"/>
+                <a16:creationId xmlns:a16="http://schemas.microsoft.com/office/drawing/2014/main" id="{1EEDF11C-A031-45D2-ACC8-2607C5DE64CA}"/>
               </a:ext>
             </a:extLst>
           </p:cNvPr>
@@ -3583,7 +4923,7 @@
           <p:cNvPr id="9" name="">
             <a:extLst xmlns:a="http://schemas.openxmlformats.org/drawingml/2006/main">
               <a:ext uri="{FF2B5EF4-FFF2-40B4-BE49-F238E27FC236}">
-                <a16:creationId xmlns:a16="http://schemas.microsoft.com/office/drawing/2014/main" id="{6165527A-BBB6-46A6-AC5B-04F1BA7C7596}"/>
+                <a16:creationId xmlns:a16="http://schemas.microsoft.com/office/drawing/2014/main" id="{C1F9E7C9-0395-4D86-920F-8620B1FDF7C6}"/>
               </a:ext>
             </a:extLst>
           </p:cNvPr>
@@ -3618,7 +4958,7 @@
           <p:cNvPr id="10" name="">
             <a:extLst xmlns:a="http://schemas.openxmlformats.org/drawingml/2006/main">
               <a:ext uri="{FF2B5EF4-FFF2-40B4-BE49-F238E27FC236}">
-                <a16:creationId xmlns:a16="http://schemas.microsoft.com/office/drawing/2014/main" id="{35A642AE-6B86-4F6F-8B07-248D65E71965}"/>
+                <a16:creationId xmlns:a16="http://schemas.microsoft.com/office/drawing/2014/main" id="{78A1FE14-F8B7-49C0-B887-94FC0661A57A}"/>
               </a:ext>
             </a:extLst>
           </p:cNvPr>
@@ -3685,7 +5025,7 @@
           <p:cNvPr id="11" name="">
             <a:extLst xmlns:a="http://schemas.openxmlformats.org/drawingml/2006/main">
               <a:ext uri="{FF2B5EF4-FFF2-40B4-BE49-F238E27FC236}">
-                <a16:creationId xmlns:a16="http://schemas.microsoft.com/office/drawing/2014/main" id="{A8BCA6D7-D66F-4A12-826F-826A5497A6F0}"/>
+                <a16:creationId xmlns:a16="http://schemas.microsoft.com/office/drawing/2014/main" id="{B44567CF-497A-4EDF-93E6-C5AA4D1C2644}"/>
               </a:ext>
             </a:extLst>
           </p:cNvPr>
@@ -3735,7 +5075,7 @@
           <p:cNvPr id="12" name="">
             <a:extLst xmlns:a="http://schemas.openxmlformats.org/drawingml/2006/main">
               <a:ext uri="{FF2B5EF4-FFF2-40B4-BE49-F238E27FC236}">
-                <a16:creationId xmlns:a16="http://schemas.microsoft.com/office/drawing/2014/main" id="{9BECE95C-3025-4C7E-B35C-C10B68456BFA}"/>
+                <a16:creationId xmlns:a16="http://schemas.microsoft.com/office/drawing/2014/main" id="{3430779C-1C67-4490-B52C-75BEBD409A0A}"/>
               </a:ext>
             </a:extLst>
           </p:cNvPr>
@@ -3770,7 +5110,7 @@
           <p:cNvPr id="13" name="">
             <a:extLst xmlns:a="http://schemas.openxmlformats.org/drawingml/2006/main">
               <a:ext uri="{FF2B5EF4-FFF2-40B4-BE49-F238E27FC236}">
-                <a16:creationId xmlns:a16="http://schemas.microsoft.com/office/drawing/2014/main" id="{CCD669CF-D297-4A20-886F-683876E48792}"/>
+                <a16:creationId xmlns:a16="http://schemas.microsoft.com/office/drawing/2014/main" id="{846109AE-6081-46C1-8FD7-26D91229852B}"/>
               </a:ext>
             </a:extLst>
           </p:cNvPr>
@@ -3837,7 +5177,7 @@
           <p:cNvPr id="14" name="">
             <a:extLst xmlns:a="http://schemas.openxmlformats.org/drawingml/2006/main">
               <a:ext uri="{FF2B5EF4-FFF2-40B4-BE49-F238E27FC236}">
-                <a16:creationId xmlns:a16="http://schemas.microsoft.com/office/drawing/2014/main" id="{E5834862-26C5-4D5C-8088-D96A016D2ED4}"/>
+                <a16:creationId xmlns:a16="http://schemas.microsoft.com/office/drawing/2014/main" id="{9709B589-91E4-4CF5-B385-D7B1C00E1EA7}"/>
               </a:ext>
             </a:extLst>
           </p:cNvPr>
@@ -3887,7 +5227,7 @@
           <p:cNvPr id="15" name="">
             <a:extLst xmlns:a="http://schemas.openxmlformats.org/drawingml/2006/main">
               <a:ext uri="{FF2B5EF4-FFF2-40B4-BE49-F238E27FC236}">
-                <a16:creationId xmlns:a16="http://schemas.microsoft.com/office/drawing/2014/main" id="{88269B3C-EAA4-43B1-BC45-15875BF50027}"/>
+                <a16:creationId xmlns:a16="http://schemas.microsoft.com/office/drawing/2014/main" id="{AADC263F-24E2-464C-B234-077FED9BF253}"/>
               </a:ext>
             </a:extLst>
           </p:cNvPr>
@@ -3922,7 +5262,7 @@
           <p:cNvPr id="16" name="">
             <a:extLst xmlns:a="http://schemas.openxmlformats.org/drawingml/2006/main">
               <a:ext uri="{FF2B5EF4-FFF2-40B4-BE49-F238E27FC236}">
-                <a16:creationId xmlns:a16="http://schemas.microsoft.com/office/drawing/2014/main" id="{FE135ED4-EB5D-4FE4-B6FD-1D1456301317}"/>
+                <a16:creationId xmlns:a16="http://schemas.microsoft.com/office/drawing/2014/main" id="{F5A42442-B4F0-4A4A-BD67-AAF55CF9D5FC}"/>
               </a:ext>
             </a:extLst>
           </p:cNvPr>
@@ -3989,7 +5329,7 @@
           <p:cNvPr id="17" name="">
             <a:extLst xmlns:a="http://schemas.openxmlformats.org/drawingml/2006/main">
               <a:ext uri="{FF2B5EF4-FFF2-40B4-BE49-F238E27FC236}">
-                <a16:creationId xmlns:a16="http://schemas.microsoft.com/office/drawing/2014/main" id="{889DEB2C-E9D9-4E64-99A4-42CF436C86A9}"/>
+                <a16:creationId xmlns:a16="http://schemas.microsoft.com/office/drawing/2014/main" id="{12823D04-8CB7-4E4B-AE74-F2EF4526E5F0}"/>
               </a:ext>
             </a:extLst>
           </p:cNvPr>
@@ -4024,7 +5364,7 @@
           <p:cNvPr id="18" name="">
             <a:extLst xmlns:a="http://schemas.openxmlformats.org/drawingml/2006/main">
               <a:ext uri="{FF2B5EF4-FFF2-40B4-BE49-F238E27FC236}">
-                <a16:creationId xmlns:a16="http://schemas.microsoft.com/office/drawing/2014/main" id="{1065E258-09D9-47CE-A725-714AD2958B02}"/>
+                <a16:creationId xmlns:a16="http://schemas.microsoft.com/office/drawing/2014/main" id="{00D85002-2124-4B6E-8EF2-68436AAF3913}"/>
               </a:ext>
             </a:extLst>
           </p:cNvPr>
@@ -4074,7 +5414,7 @@
           <p:cNvPr id="19" name="">
             <a:extLst xmlns:a="http://schemas.openxmlformats.org/drawingml/2006/main">
               <a:ext uri="{FF2B5EF4-FFF2-40B4-BE49-F238E27FC236}">
-                <a16:creationId xmlns:a16="http://schemas.microsoft.com/office/drawing/2014/main" id="{8538A6C4-9B9D-43E4-B569-5B697E9A7D67}"/>
+                <a16:creationId xmlns:a16="http://schemas.microsoft.com/office/drawing/2014/main" id="{4EDB3108-7301-4BD0-898B-6937C4F36EC8}"/>
               </a:ext>
             </a:extLst>
           </p:cNvPr>
@@ -4124,7 +5464,7 @@
           <p:cNvPr id="20" name="">
             <a:extLst xmlns:a="http://schemas.openxmlformats.org/drawingml/2006/main">
               <a:ext uri="{FF2B5EF4-FFF2-40B4-BE49-F238E27FC236}">
-                <a16:creationId xmlns:a16="http://schemas.microsoft.com/office/drawing/2014/main" id="{61F94492-CC60-4B04-A783-33590DF5C96B}"/>
+                <a16:creationId xmlns:a16="http://schemas.microsoft.com/office/drawing/2014/main" id="{90DB8BA5-0C06-4EAE-80E9-BCB86D1CF17D}"/>
               </a:ext>
             </a:extLst>
           </p:cNvPr>
@@ -4159,7 +5499,7 @@
           <p:cNvPr id="21" name="">
             <a:extLst xmlns:a="http://schemas.openxmlformats.org/drawingml/2006/main">
               <a:ext uri="{FF2B5EF4-FFF2-40B4-BE49-F238E27FC236}">
-                <a16:creationId xmlns:a16="http://schemas.microsoft.com/office/drawing/2014/main" id="{54CE13CA-14BD-4ECB-A21B-BDD93603921A}"/>
+                <a16:creationId xmlns:a16="http://schemas.microsoft.com/office/drawing/2014/main" id="{93126720-994B-4833-AD4C-B49CE7294532}"/>
               </a:ext>
             </a:extLst>
           </p:cNvPr>
@@ -4209,7 +5549,7 @@
           <p:cNvPr id="22" name="">
             <a:extLst xmlns:a="http://schemas.openxmlformats.org/drawingml/2006/main">
               <a:ext uri="{FF2B5EF4-FFF2-40B4-BE49-F238E27FC236}">
-                <a16:creationId xmlns:a16="http://schemas.microsoft.com/office/drawing/2014/main" id="{6DC72D05-0552-45D2-8F90-69F7D878CFFC}"/>
+                <a16:creationId xmlns:a16="http://schemas.microsoft.com/office/drawing/2014/main" id="{A4203075-2C51-4A56-A279-C95B3C391611}"/>
               </a:ext>
             </a:extLst>
           </p:cNvPr>
@@ -4259,7 +5599,7 @@
           <p:cNvPr id="23" name="">
             <a:extLst xmlns:a="http://schemas.openxmlformats.org/drawingml/2006/main">
               <a:ext uri="{FF2B5EF4-FFF2-40B4-BE49-F238E27FC236}">
-                <a16:creationId xmlns:a16="http://schemas.microsoft.com/office/drawing/2014/main" id="{22F17FD1-088C-4ED1-B362-98C026E35639}"/>
+                <a16:creationId xmlns:a16="http://schemas.microsoft.com/office/drawing/2014/main" id="{990C3556-84E9-4869-8D49-C5E2A012D714}"/>
               </a:ext>
             </a:extLst>
           </p:cNvPr>
@@ -4294,7 +5634,7 @@
           <p:cNvPr id="24" name="">
             <a:extLst xmlns:a="http://schemas.openxmlformats.org/drawingml/2006/main">
               <a:ext uri="{FF2B5EF4-FFF2-40B4-BE49-F238E27FC236}">
-                <a16:creationId xmlns:a16="http://schemas.microsoft.com/office/drawing/2014/main" id="{FDD4CA0F-6156-469D-ACF1-5D1403B11CA8}"/>
+                <a16:creationId xmlns:a16="http://schemas.microsoft.com/office/drawing/2014/main" id="{909045E5-36D8-48AD-9C16-A6D656926AF5}"/>
               </a:ext>
             </a:extLst>
           </p:cNvPr>
@@ -4344,7 +5684,7 @@
           <p:cNvPr id="25" name="">
             <a:extLst xmlns:a="http://schemas.openxmlformats.org/drawingml/2006/main">
               <a:ext uri="{FF2B5EF4-FFF2-40B4-BE49-F238E27FC236}">
-                <a16:creationId xmlns:a16="http://schemas.microsoft.com/office/drawing/2014/main" id="{A2DC7A80-EAC3-4C1C-AA0B-D48325846CC8}"/>
+                <a16:creationId xmlns:a16="http://schemas.microsoft.com/office/drawing/2014/main" id="{0095C367-5847-4C83-9DA5-AD89BDC40112}"/>
               </a:ext>
             </a:extLst>
           </p:cNvPr>
@@ -4394,7 +5734,7 @@
           <p:cNvPr id="26" name="">
             <a:extLst xmlns:a="http://schemas.openxmlformats.org/drawingml/2006/main">
               <a:ext uri="{FF2B5EF4-FFF2-40B4-BE49-F238E27FC236}">
-                <a16:creationId xmlns:a16="http://schemas.microsoft.com/office/drawing/2014/main" id="{ADFFCE07-20A1-486F-BA59-05E53EC68E06}"/>
+                <a16:creationId xmlns:a16="http://schemas.microsoft.com/office/drawing/2014/main" id="{84784A40-F4E0-45EA-9798-9D69442DE958}"/>
               </a:ext>
             </a:extLst>
           </p:cNvPr>
@@ -4429,7 +5769,7 @@
           <p:cNvPr id="27" name="">
             <a:extLst xmlns:a="http://schemas.openxmlformats.org/drawingml/2006/main">
               <a:ext uri="{FF2B5EF4-FFF2-40B4-BE49-F238E27FC236}">
-                <a16:creationId xmlns:a16="http://schemas.microsoft.com/office/drawing/2014/main" id="{6D8C4E72-9451-447F-B294-9B40C02B25ED}"/>
+                <a16:creationId xmlns:a16="http://schemas.microsoft.com/office/drawing/2014/main" id="{153618BF-A8C1-4470-B4C0-E35D77B48A38}"/>
               </a:ext>
             </a:extLst>
           </p:cNvPr>
@@ -4479,7 +5819,7 @@
           <p:cNvPr id="28" name="">
             <a:extLst xmlns:a="http://schemas.openxmlformats.org/drawingml/2006/main">
               <a:ext uri="{FF2B5EF4-FFF2-40B4-BE49-F238E27FC236}">
-                <a16:creationId xmlns:a16="http://schemas.microsoft.com/office/drawing/2014/main" id="{405CA7D9-D69B-46F2-BFCF-88D57F1575A5}"/>
+                <a16:creationId xmlns:a16="http://schemas.microsoft.com/office/drawing/2014/main" id="{64BE7D69-4ABE-4791-8FD4-1DD66DD145B9}"/>
               </a:ext>
             </a:extLst>
           </p:cNvPr>
@@ -4529,7 +5869,7 @@
           <p:cNvPr id="29" name="">
             <a:extLst xmlns:a="http://schemas.openxmlformats.org/drawingml/2006/main">
               <a:ext uri="{FF2B5EF4-FFF2-40B4-BE49-F238E27FC236}">
-                <a16:creationId xmlns:a16="http://schemas.microsoft.com/office/drawing/2014/main" id="{41B97843-2DF7-4B6A-81F7-FAC3AC9540AA}"/>
+                <a16:creationId xmlns:a16="http://schemas.microsoft.com/office/drawing/2014/main" id="{8461D877-27C7-4781-BCBE-4ADA4A1E043A}"/>
               </a:ext>
             </a:extLst>
           </p:cNvPr>
@@ -4564,7 +5904,7 @@
           <p:cNvPr id="30" name="">
             <a:extLst xmlns:a="http://schemas.openxmlformats.org/drawingml/2006/main">
               <a:ext uri="{FF2B5EF4-FFF2-40B4-BE49-F238E27FC236}">
-                <a16:creationId xmlns:a16="http://schemas.microsoft.com/office/drawing/2014/main" id="{CC4BEF0F-D456-49B7-A2E6-4623A8C42998}"/>
+                <a16:creationId xmlns:a16="http://schemas.microsoft.com/office/drawing/2014/main" id="{390BF2CA-CFD9-4E5B-BDD6-95EC93F4E775}"/>
               </a:ext>
             </a:extLst>
           </p:cNvPr>
@@ -4614,7 +5954,7 @@
           <p:cNvPr id="31" name="">
             <a:extLst xmlns:a="http://schemas.openxmlformats.org/drawingml/2006/main">
               <a:ext uri="{FF2B5EF4-FFF2-40B4-BE49-F238E27FC236}">
-                <a16:creationId xmlns:a16="http://schemas.microsoft.com/office/drawing/2014/main" id="{A9754C85-FC10-4202-8CB1-A3E616119D44}"/>
+                <a16:creationId xmlns:a16="http://schemas.microsoft.com/office/drawing/2014/main" id="{2C47FED7-0FDA-40A5-968C-EF3524EE82BA}"/>
               </a:ext>
             </a:extLst>
           </p:cNvPr>
@@ -4664,7 +6004,7 @@
           <p:cNvPr id="32" name="">
             <a:extLst xmlns:a="http://schemas.openxmlformats.org/drawingml/2006/main">
               <a:ext uri="{FF2B5EF4-FFF2-40B4-BE49-F238E27FC236}">
-                <a16:creationId xmlns:a16="http://schemas.microsoft.com/office/drawing/2014/main" id="{A7F17BEC-E133-4646-95E0-0FCF8C2E7BAB}"/>
+                <a16:creationId xmlns:a16="http://schemas.microsoft.com/office/drawing/2014/main" id="{A0AE2487-355F-48ED-A54D-E6A9FB5ACC81}"/>
               </a:ext>
             </a:extLst>
           </p:cNvPr>
@@ -4699,7 +6039,7 @@
           <p:cNvPr id="33" name="">
             <a:extLst xmlns:a="http://schemas.openxmlformats.org/drawingml/2006/main">
               <a:ext uri="{FF2B5EF4-FFF2-40B4-BE49-F238E27FC236}">
-                <a16:creationId xmlns:a16="http://schemas.microsoft.com/office/drawing/2014/main" id="{350AD7A1-E70A-4B76-AE21-C3E1F6FD0BB1}"/>
+                <a16:creationId xmlns:a16="http://schemas.microsoft.com/office/drawing/2014/main" id="{F5FA3C2F-C829-4FCC-AE42-F29B1F3F4DA1}"/>
               </a:ext>
             </a:extLst>
           </p:cNvPr>
@@ -4749,7 +6089,7 @@
           <p:cNvPr id="34" name="">
             <a:extLst xmlns:a="http://schemas.openxmlformats.org/drawingml/2006/main">
               <a:ext uri="{FF2B5EF4-FFF2-40B4-BE49-F238E27FC236}">
-                <a16:creationId xmlns:a16="http://schemas.microsoft.com/office/drawing/2014/main" id="{244897F8-B1A4-41EA-8E6A-4451749CF97D}"/>
+                <a16:creationId xmlns:a16="http://schemas.microsoft.com/office/drawing/2014/main" id="{BB79FE45-059B-484B-B137-70F66B196C78}"/>
               </a:ext>
             </a:extLst>
           </p:cNvPr>
@@ -4799,7 +6139,7 @@
           <p:cNvPr id="35" name="">
             <a:extLst xmlns:a="http://schemas.openxmlformats.org/drawingml/2006/main">
               <a:ext uri="{FF2B5EF4-FFF2-40B4-BE49-F238E27FC236}">
-                <a16:creationId xmlns:a16="http://schemas.microsoft.com/office/drawing/2014/main" id="{5EFD6AC4-1235-417C-BAE7-66AFB43CCD03}"/>
+                <a16:creationId xmlns:a16="http://schemas.microsoft.com/office/drawing/2014/main" id="{636673F7-669C-486E-980D-7B0CD1989B59}"/>
               </a:ext>
             </a:extLst>
           </p:cNvPr>
@@ -4834,7 +6174,7 @@
           <p:cNvPr id="36" name="">
             <a:extLst xmlns:a="http://schemas.openxmlformats.org/drawingml/2006/main">
               <a:ext uri="{FF2B5EF4-FFF2-40B4-BE49-F238E27FC236}">
-                <a16:creationId xmlns:a16="http://schemas.microsoft.com/office/drawing/2014/main" id="{BE96BD14-DB99-4797-8699-56A7AB8440F0}"/>
+                <a16:creationId xmlns:a16="http://schemas.microsoft.com/office/drawing/2014/main" id="{1C90BBA7-C151-4B66-BDF1-DEFEEEA1C979}"/>
               </a:ext>
             </a:extLst>
           </p:cNvPr>
@@ -4884,7 +6224,7 @@
           <p:cNvPr id="37" name="">
             <a:extLst xmlns:a="http://schemas.openxmlformats.org/drawingml/2006/main">
               <a:ext uri="{FF2B5EF4-FFF2-40B4-BE49-F238E27FC236}">
-                <a16:creationId xmlns:a16="http://schemas.microsoft.com/office/drawing/2014/main" id="{E9E2EE5B-A33F-4D85-AF12-9285EF750602}"/>
+                <a16:creationId xmlns:a16="http://schemas.microsoft.com/office/drawing/2014/main" id="{53D36C85-6A9E-4ECC-BF4B-1159DEF7EB4F}"/>
               </a:ext>
             </a:extLst>
           </p:cNvPr>
@@ -4934,7 +6274,7 @@
           <p:cNvPr id="38" name="">
             <a:extLst xmlns:a="http://schemas.openxmlformats.org/drawingml/2006/main">
               <a:ext uri="{FF2B5EF4-FFF2-40B4-BE49-F238E27FC236}">
-                <a16:creationId xmlns:a16="http://schemas.microsoft.com/office/drawing/2014/main" id="{5CA26C4B-0846-4464-B08F-0938C1540D2D}"/>
+                <a16:creationId xmlns:a16="http://schemas.microsoft.com/office/drawing/2014/main" id="{4CBEAFFA-FD18-4F02-9BE7-3023F7A40D12}"/>
               </a:ext>
             </a:extLst>
           </p:cNvPr>
@@ -4969,7 +6309,7 @@
           <p:cNvPr id="39" name="">
             <a:extLst xmlns:a="http://schemas.openxmlformats.org/drawingml/2006/main">
               <a:ext uri="{FF2B5EF4-FFF2-40B4-BE49-F238E27FC236}">
-                <a16:creationId xmlns:a16="http://schemas.microsoft.com/office/drawing/2014/main" id="{A7DBFD87-09A0-47C7-8F31-7F56059BE18C}"/>
+                <a16:creationId xmlns:a16="http://schemas.microsoft.com/office/drawing/2014/main" id="{BDB9E5F6-1B47-4019-BDB0-E665E50694F7}"/>
               </a:ext>
             </a:extLst>
           </p:cNvPr>
@@ -5019,7 +6359,7 @@
           <p:cNvPr id="40" name="">
             <a:extLst xmlns:a="http://schemas.openxmlformats.org/drawingml/2006/main">
               <a:ext uri="{FF2B5EF4-FFF2-40B4-BE49-F238E27FC236}">
-                <a16:creationId xmlns:a16="http://schemas.microsoft.com/office/drawing/2014/main" id="{0FB1D28C-C353-4897-8692-216DEFFBE27C}"/>
+                <a16:creationId xmlns:a16="http://schemas.microsoft.com/office/drawing/2014/main" id="{BCD4693D-0B85-4852-9AE1-67100EC38E13}"/>
               </a:ext>
             </a:extLst>
           </p:cNvPr>
@@ -5069,7 +6409,7 @@
           <p:cNvPr id="41" name="">
             <a:extLst xmlns:a="http://schemas.openxmlformats.org/drawingml/2006/main">
               <a:ext uri="{FF2B5EF4-FFF2-40B4-BE49-F238E27FC236}">
-                <a16:creationId xmlns:a16="http://schemas.microsoft.com/office/drawing/2014/main" id="{B37AB779-6B5A-414A-9739-A84555C867D9}"/>
+                <a16:creationId xmlns:a16="http://schemas.microsoft.com/office/drawing/2014/main" id="{9D64CF76-FB15-4EC6-ADE6-D3C57FCB8512}"/>
               </a:ext>
             </a:extLst>
           </p:cNvPr>
@@ -5119,7 +6459,7 @@
           <p:cNvPr id="42" name="">
             <a:extLst xmlns:a="http://schemas.openxmlformats.org/drawingml/2006/main">
               <a:ext uri="{FF2B5EF4-FFF2-40B4-BE49-F238E27FC236}">
-                <a16:creationId xmlns:a16="http://schemas.microsoft.com/office/drawing/2014/main" id="{8016548A-B701-4197-843A-DDA7EA877897}"/>
+                <a16:creationId xmlns:a16="http://schemas.microsoft.com/office/drawing/2014/main" id="{F83092EF-C7D1-4DD4-AD04-403C45AF8AD3}"/>
               </a:ext>
             </a:extLst>
           </p:cNvPr>
@@ -5169,7 +6509,7 @@
           <p:cNvPr id="43" name="">
             <a:extLst xmlns:a="http://schemas.openxmlformats.org/drawingml/2006/main">
               <a:ext uri="{FF2B5EF4-FFF2-40B4-BE49-F238E27FC236}">
-                <a16:creationId xmlns:a16="http://schemas.microsoft.com/office/drawing/2014/main" id="{A8C76464-C988-4F8A-896B-8D2BD05EDF8E}"/>
+                <a16:creationId xmlns:a16="http://schemas.microsoft.com/office/drawing/2014/main" id="{72C50B5B-5D46-424D-9DCB-1041EC5CE587}"/>
               </a:ext>
             </a:extLst>
           </p:cNvPr>
@@ -5217,7 +6557,7 @@
     </p:spTree>
     <p:extLst>
       <p:ext uri="{BB962C8B-B14F-4D97-AF65-F5344CB8AC3E}">
-        <p14:creationId xmlns:p14="http://schemas.microsoft.com/office/powerpoint/2010/main" val="369989740"/>
+        <p14:creationId xmlns:p14="http://schemas.microsoft.com/office/powerpoint/2010/main" val="191738990"/>
       </p:ext>
     </p:extLst>
   </p:cSld>
@@ -5248,7 +6588,7 @@
           <p:cNvPr id="26" name="">
             <a:extLst xmlns:a="http://schemas.openxmlformats.org/drawingml/2006/main">
               <a:ext uri="{FF2B5EF4-FFF2-40B4-BE49-F238E27FC236}">
-                <a16:creationId xmlns:a16="http://schemas.microsoft.com/office/drawing/2014/main" id="{646684DD-B17D-41CA-9CEE-147E4AFC5947}"/>
+                <a16:creationId xmlns:a16="http://schemas.microsoft.com/office/drawing/2014/main" id="{FC9904DF-E872-4045-A561-59C33C009C8B}"/>
               </a:ext>
             </a:extLst>
           </p:cNvPr>
@@ -5298,7 +6638,7 @@
           <p:cNvPr id="2" name="">
             <a:extLst xmlns:a="http://schemas.openxmlformats.org/drawingml/2006/main">
               <a:ext uri="{FF2B5EF4-FFF2-40B4-BE49-F238E27FC236}">
-                <a16:creationId xmlns:a16="http://schemas.microsoft.com/office/drawing/2014/main" id="{7BE35B10-839A-44A6-A08D-9B594F750766}"/>
+                <a16:creationId xmlns:a16="http://schemas.microsoft.com/office/drawing/2014/main" id="{A56AB9AC-A3CB-4B18-BED9-CD9E80758276}"/>
               </a:ext>
             </a:extLst>
           </p:cNvPr>
@@ -5348,7 +6688,7 @@
           <p:cNvPr id="3" name="">
             <a:extLst xmlns:a="http://schemas.openxmlformats.org/drawingml/2006/main">
               <a:ext uri="{FF2B5EF4-FFF2-40B4-BE49-F238E27FC236}">
-                <a16:creationId xmlns:a16="http://schemas.microsoft.com/office/drawing/2014/main" id="{5BF69A02-3270-49F6-A368-B524D41D2AE5}"/>
+                <a16:creationId xmlns:a16="http://schemas.microsoft.com/office/drawing/2014/main" id="{5F4B55C9-65DA-4685-81A3-C27CDBD432C2}"/>
               </a:ext>
             </a:extLst>
           </p:cNvPr>
@@ -5383,7 +6723,7 @@
           <p:cNvPr id="4" name="">
             <a:extLst xmlns:a="http://schemas.openxmlformats.org/drawingml/2006/main">
               <a:ext uri="{FF2B5EF4-FFF2-40B4-BE49-F238E27FC236}">
-                <a16:creationId xmlns:a16="http://schemas.microsoft.com/office/drawing/2014/main" id="{542E02A1-093E-48E7-BEAC-31C429AB4169}"/>
+                <a16:creationId xmlns:a16="http://schemas.microsoft.com/office/drawing/2014/main" id="{93F0BB8C-C628-4F65-BE8F-1889250FF303}"/>
               </a:ext>
             </a:extLst>
           </p:cNvPr>
@@ -5433,7 +6773,7 @@
           <p:cNvPr id="5" name="">
             <a:extLst xmlns:a="http://schemas.openxmlformats.org/drawingml/2006/main">
               <a:ext uri="{FF2B5EF4-FFF2-40B4-BE49-F238E27FC236}">
-                <a16:creationId xmlns:a16="http://schemas.microsoft.com/office/drawing/2014/main" id="{D88B9067-A442-45ED-8A5E-5161725FA48C}"/>
+                <a16:creationId xmlns:a16="http://schemas.microsoft.com/office/drawing/2014/main" id="{0F6329F6-D543-4769-ACD9-8F3B99378530}"/>
               </a:ext>
             </a:extLst>
           </p:cNvPr>
@@ -5464,7 +6804,7 @@
           <p:cNvPr id="6" name="">
             <a:extLst xmlns:a="http://schemas.openxmlformats.org/drawingml/2006/main">
               <a:ext uri="{FF2B5EF4-FFF2-40B4-BE49-F238E27FC236}">
-                <a16:creationId xmlns:a16="http://schemas.microsoft.com/office/drawing/2014/main" id="{4C1E20FB-7845-41CC-9EE4-5546E377A9D1}"/>
+                <a16:creationId xmlns:a16="http://schemas.microsoft.com/office/drawing/2014/main" id="{8E8AC30A-8C12-4000-AB09-1C85346A041F}"/>
               </a:ext>
             </a:extLst>
           </p:cNvPr>
@@ -5514,7 +6854,7 @@
           <p:cNvPr id="7" name="">
             <a:extLst xmlns:a="http://schemas.openxmlformats.org/drawingml/2006/main">
               <a:ext uri="{FF2B5EF4-FFF2-40B4-BE49-F238E27FC236}">
-                <a16:creationId xmlns:a16="http://schemas.microsoft.com/office/drawing/2014/main" id="{581C252A-5319-4380-9B1F-2D482582AFC8}"/>
+                <a16:creationId xmlns:a16="http://schemas.microsoft.com/office/drawing/2014/main" id="{D540C6D3-4E7B-4110-86F9-DDF2E685B486}"/>
               </a:ext>
             </a:extLst>
           </p:cNvPr>
@@ -5545,7 +6885,7 @@
           <p:cNvPr id="8" name="">
             <a:extLst xmlns:a="http://schemas.openxmlformats.org/drawingml/2006/main">
               <a:ext uri="{FF2B5EF4-FFF2-40B4-BE49-F238E27FC236}">
-                <a16:creationId xmlns:a16="http://schemas.microsoft.com/office/drawing/2014/main" id="{2CFE2979-5975-4A8C-9CB2-D5DD59DFA1B0}"/>
+                <a16:creationId xmlns:a16="http://schemas.microsoft.com/office/drawing/2014/main" id="{C4D255D1-B9FB-4A5C-A046-259AF007BC25}"/>
               </a:ext>
             </a:extLst>
           </p:cNvPr>
@@ -5595,7 +6935,7 @@
           <p:cNvPr id="9" name="">
             <a:extLst xmlns:a="http://schemas.openxmlformats.org/drawingml/2006/main">
               <a:ext uri="{FF2B5EF4-FFF2-40B4-BE49-F238E27FC236}">
-                <a16:creationId xmlns:a16="http://schemas.microsoft.com/office/drawing/2014/main" id="{7B73D51C-CF48-458C-B7DC-949B7D9561C9}"/>
+                <a16:creationId xmlns:a16="http://schemas.microsoft.com/office/drawing/2014/main" id="{EE07DE1B-FD83-472C-9C54-7BFD8C2A2AE5}"/>
               </a:ext>
             </a:extLst>
           </p:cNvPr>
@@ -5626,7 +6966,7 @@
           <p:cNvPr id="10" name="">
             <a:extLst xmlns:a="http://schemas.openxmlformats.org/drawingml/2006/main">
               <a:ext uri="{FF2B5EF4-FFF2-40B4-BE49-F238E27FC236}">
-                <a16:creationId xmlns:a16="http://schemas.microsoft.com/office/drawing/2014/main" id="{6A7DF84F-942B-418C-986F-9879EF4E77FF}"/>
+                <a16:creationId xmlns:a16="http://schemas.microsoft.com/office/drawing/2014/main" id="{65864CE6-4F40-4B3B-9DCF-1989D3A55C2F}"/>
               </a:ext>
             </a:extLst>
           </p:cNvPr>
@@ -5676,7 +7016,7 @@
           <p:cNvPr id="11" name="">
             <a:extLst xmlns:a="http://schemas.openxmlformats.org/drawingml/2006/main">
               <a:ext uri="{FF2B5EF4-FFF2-40B4-BE49-F238E27FC236}">
-                <a16:creationId xmlns:a16="http://schemas.microsoft.com/office/drawing/2014/main" id="{1745A46A-0A53-4DCE-B958-E756CACE0B8B}"/>
+                <a16:creationId xmlns:a16="http://schemas.microsoft.com/office/drawing/2014/main" id="{A2A5A1B3-EF58-427A-A302-7488677A4CAC}"/>
               </a:ext>
             </a:extLst>
           </p:cNvPr>
@@ -5707,7 +7047,7 @@
           <p:cNvPr id="12" name="">
             <a:extLst xmlns:a="http://schemas.openxmlformats.org/drawingml/2006/main">
               <a:ext uri="{FF2B5EF4-FFF2-40B4-BE49-F238E27FC236}">
-                <a16:creationId xmlns:a16="http://schemas.microsoft.com/office/drawing/2014/main" id="{749C45ED-8CD3-4BAD-A51B-575D7C6D6711}"/>
+                <a16:creationId xmlns:a16="http://schemas.microsoft.com/office/drawing/2014/main" id="{0BDF1B09-1858-46A3-91CC-0696BDFDAD35}"/>
               </a:ext>
             </a:extLst>
           </p:cNvPr>
@@ -5757,7 +7097,7 @@
           <p:cNvPr id="13" name="">
             <a:extLst xmlns:a="http://schemas.openxmlformats.org/drawingml/2006/main">
               <a:ext uri="{FF2B5EF4-FFF2-40B4-BE49-F238E27FC236}">
-                <a16:creationId xmlns:a16="http://schemas.microsoft.com/office/drawing/2014/main" id="{64C7BEE5-73CD-45C1-A81A-8A3306B89692}"/>
+                <a16:creationId xmlns:a16="http://schemas.microsoft.com/office/drawing/2014/main" id="{EA0F9C3A-4953-4E69-839E-61F413213550}"/>
               </a:ext>
             </a:extLst>
           </p:cNvPr>
@@ -5807,7 +7147,7 @@
           <p:cNvPr id="14" name="">
             <a:extLst xmlns:a="http://schemas.openxmlformats.org/drawingml/2006/main">
               <a:ext uri="{FF2B5EF4-FFF2-40B4-BE49-F238E27FC236}">
-                <a16:creationId xmlns:a16="http://schemas.microsoft.com/office/drawing/2014/main" id="{EFEA93E8-754D-4930-A8F3-C17E32EC60C4}"/>
+                <a16:creationId xmlns:a16="http://schemas.microsoft.com/office/drawing/2014/main" id="{6DE10328-14AA-45F7-93F6-C7C579DD01CF}"/>
               </a:ext>
             </a:extLst>
           </p:cNvPr>
@@ -5842,7 +7182,7 @@
           <p:cNvPr id="15" name="">
             <a:extLst xmlns:a="http://schemas.openxmlformats.org/drawingml/2006/main">
               <a:ext uri="{FF2B5EF4-FFF2-40B4-BE49-F238E27FC236}">
-                <a16:creationId xmlns:a16="http://schemas.microsoft.com/office/drawing/2014/main" id="{3479463A-7096-480C-9D12-86C556D54384}"/>
+                <a16:creationId xmlns:a16="http://schemas.microsoft.com/office/drawing/2014/main" id="{85664607-2746-401F-9495-DF7B130A9A9B}"/>
               </a:ext>
             </a:extLst>
           </p:cNvPr>
@@ -5892,7 +7232,7 @@
           <p:cNvPr id="16" name="">
             <a:extLst xmlns:a="http://schemas.openxmlformats.org/drawingml/2006/main">
               <a:ext uri="{FF2B5EF4-FFF2-40B4-BE49-F238E27FC236}">
-                <a16:creationId xmlns:a16="http://schemas.microsoft.com/office/drawing/2014/main" id="{CB536808-FA20-492D-9F4A-6D6DFE2AB68A}"/>
+                <a16:creationId xmlns:a16="http://schemas.microsoft.com/office/drawing/2014/main" id="{B175B546-3EB1-47C9-9BE3-6ACB71470822}"/>
               </a:ext>
             </a:extLst>
           </p:cNvPr>
@@ -5923,7 +7263,7 @@
           <p:cNvPr id="17" name="">
             <a:extLst xmlns:a="http://schemas.openxmlformats.org/drawingml/2006/main">
               <a:ext uri="{FF2B5EF4-FFF2-40B4-BE49-F238E27FC236}">
-                <a16:creationId xmlns:a16="http://schemas.microsoft.com/office/drawing/2014/main" id="{67403ECC-6F6A-4ACF-8948-91C5C1C50847}"/>
+                <a16:creationId xmlns:a16="http://schemas.microsoft.com/office/drawing/2014/main" id="{9DA6C38D-A402-4C55-BAC2-CB4567160A4E}"/>
               </a:ext>
             </a:extLst>
           </p:cNvPr>
@@ -5973,7 +7313,7 @@
           <p:cNvPr id="18" name="">
             <a:extLst xmlns:a="http://schemas.openxmlformats.org/drawingml/2006/main">
               <a:ext uri="{FF2B5EF4-FFF2-40B4-BE49-F238E27FC236}">
-                <a16:creationId xmlns:a16="http://schemas.microsoft.com/office/drawing/2014/main" id="{5706EF25-E15F-4FB4-B811-772C2D797440}"/>
+                <a16:creationId xmlns:a16="http://schemas.microsoft.com/office/drawing/2014/main" id="{8E6D2637-CA3C-4CBB-A3BA-91448A4F9892}"/>
               </a:ext>
             </a:extLst>
           </p:cNvPr>
@@ -6004,7 +7344,7 @@
           <p:cNvPr id="19" name="">
             <a:extLst xmlns:a="http://schemas.openxmlformats.org/drawingml/2006/main">
               <a:ext uri="{FF2B5EF4-FFF2-40B4-BE49-F238E27FC236}">
-                <a16:creationId xmlns:a16="http://schemas.microsoft.com/office/drawing/2014/main" id="{91498836-E12D-4E21-9EB0-9B57AD99E1EA}"/>
+                <a16:creationId xmlns:a16="http://schemas.microsoft.com/office/drawing/2014/main" id="{6D4A5B4F-F585-4DD7-A281-967B03522D9D}"/>
               </a:ext>
             </a:extLst>
           </p:cNvPr>
@@ -6054,7 +7394,7 @@
           <p:cNvPr id="20" name="">
             <a:extLst xmlns:a="http://schemas.openxmlformats.org/drawingml/2006/main">
               <a:ext uri="{FF2B5EF4-FFF2-40B4-BE49-F238E27FC236}">
-                <a16:creationId xmlns:a16="http://schemas.microsoft.com/office/drawing/2014/main" id="{24DA658C-BDE2-4ED2-91CD-8985D0A4A44C}"/>
+                <a16:creationId xmlns:a16="http://schemas.microsoft.com/office/drawing/2014/main" id="{C96109B9-C728-459C-8471-3AA8370E8687}"/>
               </a:ext>
             </a:extLst>
           </p:cNvPr>
@@ -6085,7 +7425,7 @@
           <p:cNvPr id="21" name="">
             <a:extLst xmlns:a="http://schemas.openxmlformats.org/drawingml/2006/main">
               <a:ext uri="{FF2B5EF4-FFF2-40B4-BE49-F238E27FC236}">
-                <a16:creationId xmlns:a16="http://schemas.microsoft.com/office/drawing/2014/main" id="{3109D8DE-B82D-4B66-BEA5-D33F101DF0B9}"/>
+                <a16:creationId xmlns:a16="http://schemas.microsoft.com/office/drawing/2014/main" id="{F9682262-66E1-46F2-8B4D-7DB191D7D6C6}"/>
               </a:ext>
             </a:extLst>
           </p:cNvPr>
@@ -6135,7 +7475,7 @@
           <p:cNvPr id="22" name="">
             <a:extLst xmlns:a="http://schemas.openxmlformats.org/drawingml/2006/main">
               <a:ext uri="{FF2B5EF4-FFF2-40B4-BE49-F238E27FC236}">
-                <a16:creationId xmlns:a16="http://schemas.microsoft.com/office/drawing/2014/main" id="{3AFC8DFD-9737-4F56-B8BA-6813B1DAF62B}"/>
+                <a16:creationId xmlns:a16="http://schemas.microsoft.com/office/drawing/2014/main" id="{1D93A7D0-ED24-458B-AC6C-B4AC0F7C06C2}"/>
               </a:ext>
             </a:extLst>
           </p:cNvPr>
@@ -6166,7 +7506,7 @@
           <p:cNvPr id="23" name="">
             <a:extLst xmlns:a="http://schemas.openxmlformats.org/drawingml/2006/main">
               <a:ext uri="{FF2B5EF4-FFF2-40B4-BE49-F238E27FC236}">
-                <a16:creationId xmlns:a16="http://schemas.microsoft.com/office/drawing/2014/main" id="{16140D05-F4BE-47B2-88D3-3219B5C0BD50}"/>
+                <a16:creationId xmlns:a16="http://schemas.microsoft.com/office/drawing/2014/main" id="{8851CE3D-3CD3-48EC-A723-3EB79E938B3D}"/>
               </a:ext>
             </a:extLst>
           </p:cNvPr>
@@ -6216,7 +7556,7 @@
           <p:cNvPr id="24" name="">
             <a:extLst xmlns:a="http://schemas.openxmlformats.org/drawingml/2006/main">
               <a:ext uri="{FF2B5EF4-FFF2-40B4-BE49-F238E27FC236}">
-                <a16:creationId xmlns:a16="http://schemas.microsoft.com/office/drawing/2014/main" id="{F613DA12-8B36-4E88-BB0A-199A23649269}"/>
+                <a16:creationId xmlns:a16="http://schemas.microsoft.com/office/drawing/2014/main" id="{449C23BF-4ED4-42CE-BB79-0F8EE0A2EDE7}"/>
               </a:ext>
             </a:extLst>
           </p:cNvPr>
@@ -6266,7 +7606,7 @@
           <p:cNvPr id="25" name="">
             <a:extLst xmlns:a="http://schemas.openxmlformats.org/drawingml/2006/main">
               <a:ext uri="{FF2B5EF4-FFF2-40B4-BE49-F238E27FC236}">
-                <a16:creationId xmlns:a16="http://schemas.microsoft.com/office/drawing/2014/main" id="{A192BBB2-FB50-4264-8DF9-1BE806F27E57}"/>
+                <a16:creationId xmlns:a16="http://schemas.microsoft.com/office/drawing/2014/main" id="{0E14A752-2D97-46AF-A739-2274E50B8EAB}"/>
               </a:ext>
             </a:extLst>
           </p:cNvPr>
@@ -6314,7 +7654,7 @@
     </p:spTree>
     <p:extLst>
       <p:ext uri="{BB962C8B-B14F-4D97-AF65-F5344CB8AC3E}">
-        <p14:creationId xmlns:p14="http://schemas.microsoft.com/office/powerpoint/2010/main" val="1757269179"/>
+        <p14:creationId xmlns:p14="http://schemas.microsoft.com/office/powerpoint/2010/main" val="1169519708"/>
       </p:ext>
     </p:extLst>
   </p:cSld>
@@ -6345,7 +7685,7 @@
           <p:cNvPr id="8" name="">
             <a:extLst xmlns:a="http://schemas.openxmlformats.org/drawingml/2006/main">
               <a:ext uri="{FF2B5EF4-FFF2-40B4-BE49-F238E27FC236}">
-                <a16:creationId xmlns:a16="http://schemas.microsoft.com/office/drawing/2014/main" id="{54F3CE87-51EC-4277-82B3-968BEA504941}"/>
+                <a16:creationId xmlns:a16="http://schemas.microsoft.com/office/drawing/2014/main" id="{064E0F9E-2978-4805-8A99-42194A0191ED}"/>
               </a:ext>
             </a:extLst>
           </p:cNvPr>
@@ -6395,7 +7735,7 @@
           <p:cNvPr id="2" name="">
             <a:extLst xmlns:a="http://schemas.openxmlformats.org/drawingml/2006/main">
               <a:ext uri="{FF2B5EF4-FFF2-40B4-BE49-F238E27FC236}">
-                <a16:creationId xmlns:a16="http://schemas.microsoft.com/office/drawing/2014/main" id="{4FDC9E96-0B75-4292-AB48-CCF4331077CA}"/>
+                <a16:creationId xmlns:a16="http://schemas.microsoft.com/office/drawing/2014/main" id="{65345122-7962-4FEF-A84A-AEF2D086BF75}"/>
               </a:ext>
             </a:extLst>
           </p:cNvPr>
@@ -6445,7 +7785,7 @@
           <p:cNvPr id="3" name="">
             <a:extLst xmlns:a="http://schemas.openxmlformats.org/drawingml/2006/main">
               <a:ext uri="{FF2B5EF4-FFF2-40B4-BE49-F238E27FC236}">
-                <a16:creationId xmlns:a16="http://schemas.microsoft.com/office/drawing/2014/main" id="{AC93ED74-AEE4-4F44-9237-FDDC9C117B31}"/>
+                <a16:creationId xmlns:a16="http://schemas.microsoft.com/office/drawing/2014/main" id="{211862FF-9821-4999-B6EE-DE5A7F7B676D}"/>
               </a:ext>
             </a:extLst>
           </p:cNvPr>
@@ -6484,7 +7824,7 @@
           <p:nvPr/>
         </p:nvPicPr>
         <p:blipFill>
-          <a:blip xmlns:r="http://schemas.openxmlformats.org/officeDocument/2006/relationships" xmlns:a="http://schemas.openxmlformats.org/drawingml/2006/main" r:embed="Rfac2162f30804ea9"/>
+          <a:blip xmlns:r="http://schemas.openxmlformats.org/officeDocument/2006/relationships" xmlns:a="http://schemas.openxmlformats.org/drawingml/2006/main" r:embed="Ra60f92ac3142478a"/>
           <a:stretch xmlns:a="http://schemas.openxmlformats.org/drawingml/2006/main"/>
         </p:blipFill>
         <p:spPr>
@@ -6502,7 +7842,7 @@
           <p:cNvPr id="5" name="">
             <a:extLst xmlns:a="http://schemas.openxmlformats.org/drawingml/2006/main">
               <a:ext uri="{FF2B5EF4-FFF2-40B4-BE49-F238E27FC236}">
-                <a16:creationId xmlns:a16="http://schemas.microsoft.com/office/drawing/2014/main" id="{48E901A1-CC5A-4483-A730-EB6E0073EA84}"/>
+                <a16:creationId xmlns:a16="http://schemas.microsoft.com/office/drawing/2014/main" id="{3CA55B69-90C1-4D6A-95AC-BC1D51880B4F}"/>
               </a:ext>
             </a:extLst>
           </p:cNvPr>
@@ -6552,7 +7892,7 @@
           <p:cNvPr id="6" name="">
             <a:extLst xmlns:a="http://schemas.openxmlformats.org/drawingml/2006/main">
               <a:ext uri="{FF2B5EF4-FFF2-40B4-BE49-F238E27FC236}">
-                <a16:creationId xmlns:a16="http://schemas.microsoft.com/office/drawing/2014/main" id="{A2417F06-F3DB-4472-9509-5CC9E2B51728}"/>
+                <a16:creationId xmlns:a16="http://schemas.microsoft.com/office/drawing/2014/main" id="{4F4852C3-0125-4FCB-848D-A08A5D953547}"/>
               </a:ext>
             </a:extLst>
           </p:cNvPr>
@@ -6602,7 +7942,7 @@
           <p:cNvPr id="7" name="">
             <a:extLst xmlns:a="http://schemas.openxmlformats.org/drawingml/2006/main">
               <a:ext uri="{FF2B5EF4-FFF2-40B4-BE49-F238E27FC236}">
-                <a16:creationId xmlns:a16="http://schemas.microsoft.com/office/drawing/2014/main" id="{6FEB3ECD-9BCD-407D-9BC8-10C880D5621A}"/>
+                <a16:creationId xmlns:a16="http://schemas.microsoft.com/office/drawing/2014/main" id="{9F2F6E27-0464-4F0B-9055-B8DF8EDA32E3}"/>
               </a:ext>
             </a:extLst>
           </p:cNvPr>
@@ -6650,7 +7990,7 @@
     </p:spTree>
     <p:extLst>
       <p:ext uri="{BB962C8B-B14F-4D97-AF65-F5344CB8AC3E}">
-        <p14:creationId xmlns:p14="http://schemas.microsoft.com/office/powerpoint/2010/main" val="1900830495"/>
+        <p14:creationId xmlns:p14="http://schemas.microsoft.com/office/powerpoint/2010/main" val="387956659"/>
       </p:ext>
     </p:extLst>
   </p:cSld>
@@ -6681,7 +8021,7 @@
           <p:cNvPr id="16" name="">
             <a:extLst xmlns:a="http://schemas.openxmlformats.org/drawingml/2006/main">
               <a:ext uri="{FF2B5EF4-FFF2-40B4-BE49-F238E27FC236}">
-                <a16:creationId xmlns:a16="http://schemas.microsoft.com/office/drawing/2014/main" id="{E2D3BE00-4DD1-46E3-AD91-95B642BD463B}"/>
+                <a16:creationId xmlns:a16="http://schemas.microsoft.com/office/drawing/2014/main" id="{547E4C7B-A4A8-4569-A66F-28CC2434A6F3}"/>
               </a:ext>
             </a:extLst>
           </p:cNvPr>
@@ -6731,7 +8071,7 @@
           <p:cNvPr id="2" name="">
             <a:extLst xmlns:a="http://schemas.openxmlformats.org/drawingml/2006/main">
               <a:ext uri="{FF2B5EF4-FFF2-40B4-BE49-F238E27FC236}">
-                <a16:creationId xmlns:a16="http://schemas.microsoft.com/office/drawing/2014/main" id="{A4CEC726-DE17-48DB-BEFA-A2D16E07D88C}"/>
+                <a16:creationId xmlns:a16="http://schemas.microsoft.com/office/drawing/2014/main" id="{7B7A393E-CE68-49D4-9F0E-EA8C04916D77}"/>
               </a:ext>
             </a:extLst>
           </p:cNvPr>
@@ -6781,7 +8121,7 @@
           <p:cNvPr id="3" name="">
             <a:extLst xmlns:a="http://schemas.openxmlformats.org/drawingml/2006/main">
               <a:ext uri="{FF2B5EF4-FFF2-40B4-BE49-F238E27FC236}">
-                <a16:creationId xmlns:a16="http://schemas.microsoft.com/office/drawing/2014/main" id="{5ACB51C7-14FA-48FD-8775-4756525FA965}"/>
+                <a16:creationId xmlns:a16="http://schemas.microsoft.com/office/drawing/2014/main" id="{DC792BF2-6CB7-4A2B-99D0-3B906B1CCA4E}"/>
               </a:ext>
             </a:extLst>
           </p:cNvPr>
@@ -6820,7 +8160,7 @@
           <p:nvPr/>
         </p:nvPicPr>
         <p:blipFill>
-          <a:blip xmlns:r="http://schemas.openxmlformats.org/officeDocument/2006/relationships" xmlns:a="http://schemas.openxmlformats.org/drawingml/2006/main" r:embed="R0302a95fac6a4540"/>
+          <a:blip xmlns:r="http://schemas.openxmlformats.org/officeDocument/2006/relationships" xmlns:a="http://schemas.openxmlformats.org/drawingml/2006/main" r:embed="Rb6d142085d9b42ab"/>
           <a:stretch xmlns:a="http://schemas.openxmlformats.org/drawingml/2006/main"/>
         </p:blipFill>
         <p:spPr>
@@ -6838,7 +8178,7 @@
           <p:cNvPr id="5" name="">
             <a:extLst xmlns:a="http://schemas.openxmlformats.org/drawingml/2006/main">
               <a:ext uri="{FF2B5EF4-FFF2-40B4-BE49-F238E27FC236}">
-                <a16:creationId xmlns:a16="http://schemas.microsoft.com/office/drawing/2014/main" id="{EC94354D-3908-4943-9BA9-8B9465579C4B}"/>
+                <a16:creationId xmlns:a16="http://schemas.microsoft.com/office/drawing/2014/main" id="{05CB8AE5-5131-4AD4-B2EF-9E24EEEE37C4}"/>
               </a:ext>
             </a:extLst>
           </p:cNvPr>
@@ -6873,7 +8213,7 @@
           <p:cNvPr id="6" name="">
             <a:extLst xmlns:a="http://schemas.openxmlformats.org/drawingml/2006/main">
               <a:ext uri="{FF2B5EF4-FFF2-40B4-BE49-F238E27FC236}">
-                <a16:creationId xmlns:a16="http://schemas.microsoft.com/office/drawing/2014/main" id="{A8439B89-BC18-4A23-8B4B-6D774229F523}"/>
+                <a16:creationId xmlns:a16="http://schemas.microsoft.com/office/drawing/2014/main" id="{6359ED24-9912-4890-92AA-3DF7546EAA7D}"/>
               </a:ext>
             </a:extLst>
           </p:cNvPr>
@@ -6923,7 +8263,7 @@
           <p:cNvPr id="7" name="">
             <a:extLst xmlns:a="http://schemas.openxmlformats.org/drawingml/2006/main">
               <a:ext uri="{FF2B5EF4-FFF2-40B4-BE49-F238E27FC236}">
-                <a16:creationId xmlns:a16="http://schemas.microsoft.com/office/drawing/2014/main" id="{032F41C6-A6E9-4269-A5F5-2A34F08C5B55}"/>
+                <a16:creationId xmlns:a16="http://schemas.microsoft.com/office/drawing/2014/main" id="{8A7E27C9-65A6-4FC3-B283-FCD79A8C472D}"/>
               </a:ext>
             </a:extLst>
           </p:cNvPr>
@@ -6973,7 +8313,7 @@
           <p:cNvPr id="8" name="">
             <a:extLst xmlns:a="http://schemas.openxmlformats.org/drawingml/2006/main">
               <a:ext uri="{FF2B5EF4-FFF2-40B4-BE49-F238E27FC236}">
-                <a16:creationId xmlns:a16="http://schemas.microsoft.com/office/drawing/2014/main" id="{482042DA-551E-45B7-94E1-7B10492B43CF}"/>
+                <a16:creationId xmlns:a16="http://schemas.microsoft.com/office/drawing/2014/main" id="{6DF60C98-54B1-4FAF-AAF3-5150F35B0E16}"/>
               </a:ext>
             </a:extLst>
           </p:cNvPr>
@@ -7023,7 +8363,7 @@
           <p:cNvPr id="9" name="">
             <a:extLst xmlns:a="http://schemas.openxmlformats.org/drawingml/2006/main">
               <a:ext uri="{FF2B5EF4-FFF2-40B4-BE49-F238E27FC236}">
-                <a16:creationId xmlns:a16="http://schemas.microsoft.com/office/drawing/2014/main" id="{D7E65C6D-2B72-412A-B4BB-EA56ADEE250A}"/>
+                <a16:creationId xmlns:a16="http://schemas.microsoft.com/office/drawing/2014/main" id="{1919D814-B982-4DF7-A54D-8169F905CDF3}"/>
               </a:ext>
             </a:extLst>
           </p:cNvPr>
@@ -7058,7 +8398,7 @@
           <p:cNvPr id="10" name="">
             <a:extLst xmlns:a="http://schemas.openxmlformats.org/drawingml/2006/main">
               <a:ext uri="{FF2B5EF4-FFF2-40B4-BE49-F238E27FC236}">
-                <a16:creationId xmlns:a16="http://schemas.microsoft.com/office/drawing/2014/main" id="{2954A896-3C5D-4A55-A2DD-124F4F285F79}"/>
+                <a16:creationId xmlns:a16="http://schemas.microsoft.com/office/drawing/2014/main" id="{598FCF1A-44BB-4AB0-B3D7-D8D4ADC9E975}"/>
               </a:ext>
             </a:extLst>
           </p:cNvPr>
@@ -7108,7 +8448,7 @@
           <p:cNvPr id="11" name="">
             <a:extLst xmlns:a="http://schemas.openxmlformats.org/drawingml/2006/main">
               <a:ext uri="{FF2B5EF4-FFF2-40B4-BE49-F238E27FC236}">
-                <a16:creationId xmlns:a16="http://schemas.microsoft.com/office/drawing/2014/main" id="{F7166217-FF0B-4F1A-A440-2CE481CA1F30}"/>
+                <a16:creationId xmlns:a16="http://schemas.microsoft.com/office/drawing/2014/main" id="{1D21F941-8D67-49BB-BF57-979B2B831DFE}"/>
               </a:ext>
             </a:extLst>
           </p:cNvPr>
@@ -7158,7 +8498,7 @@
           <p:cNvPr id="12" name="">
             <a:extLst xmlns:a="http://schemas.openxmlformats.org/drawingml/2006/main">
               <a:ext uri="{FF2B5EF4-FFF2-40B4-BE49-F238E27FC236}">
-                <a16:creationId xmlns:a16="http://schemas.microsoft.com/office/drawing/2014/main" id="{DEC42A3A-304C-4902-96B6-66305CBD2913}"/>
+                <a16:creationId xmlns:a16="http://schemas.microsoft.com/office/drawing/2014/main" id="{B5295529-18D6-4E15-8626-C9C1B70DA4DA}"/>
               </a:ext>
             </a:extLst>
           </p:cNvPr>
@@ -7208,7 +8548,7 @@
           <p:cNvPr id="13" name="">
             <a:extLst xmlns:a="http://schemas.openxmlformats.org/drawingml/2006/main">
               <a:ext uri="{FF2B5EF4-FFF2-40B4-BE49-F238E27FC236}">
-                <a16:creationId xmlns:a16="http://schemas.microsoft.com/office/drawing/2014/main" id="{0AA22665-380D-4EEB-AA08-886F4009D3F9}"/>
+                <a16:creationId xmlns:a16="http://schemas.microsoft.com/office/drawing/2014/main" id="{0BF5292F-7FAC-4E8F-B45F-4AA1FDC55F96}"/>
               </a:ext>
             </a:extLst>
           </p:cNvPr>
@@ -7258,7 +8598,7 @@
           <p:cNvPr id="14" name="">
             <a:extLst xmlns:a="http://schemas.openxmlformats.org/drawingml/2006/main">
               <a:ext uri="{FF2B5EF4-FFF2-40B4-BE49-F238E27FC236}">
-                <a16:creationId xmlns:a16="http://schemas.microsoft.com/office/drawing/2014/main" id="{186E5304-69F0-4CC3-8E27-ED0AA9F83B72}"/>
+                <a16:creationId xmlns:a16="http://schemas.microsoft.com/office/drawing/2014/main" id="{F21CFDE2-0351-41F8-9FB4-D929694D5C7E}"/>
               </a:ext>
             </a:extLst>
           </p:cNvPr>
@@ -7308,7 +8648,7 @@
           <p:cNvPr id="15" name="">
             <a:extLst xmlns:a="http://schemas.openxmlformats.org/drawingml/2006/main">
               <a:ext uri="{FF2B5EF4-FFF2-40B4-BE49-F238E27FC236}">
-                <a16:creationId xmlns:a16="http://schemas.microsoft.com/office/drawing/2014/main" id="{A0E4E615-8C88-4F05-9A0B-5D0196305BEC}"/>
+                <a16:creationId xmlns:a16="http://schemas.microsoft.com/office/drawing/2014/main" id="{531F7D17-3789-49A6-8D03-DBE0C3099972}"/>
               </a:ext>
             </a:extLst>
           </p:cNvPr>
@@ -7356,7 +8696,7 @@
     </p:spTree>
     <p:extLst>
       <p:ext uri="{BB962C8B-B14F-4D97-AF65-F5344CB8AC3E}">
-        <p14:creationId xmlns:p14="http://schemas.microsoft.com/office/powerpoint/2010/main" val="1811837155"/>
+        <p14:creationId xmlns:p14="http://schemas.microsoft.com/office/powerpoint/2010/main" val="1166197037"/>
       </p:ext>
     </p:extLst>
   </p:cSld>
@@ -7384,10 +8724,10 @@
       </p:grpSpPr>
       <p:sp>
         <p:nvSpPr>
-          <p:cNvPr id="12" name="">
-            <a:extLst xmlns:a="http://schemas.openxmlformats.org/drawingml/2006/main">
-              <a:ext uri="{FF2B5EF4-FFF2-40B4-BE49-F238E27FC236}">
-                <a16:creationId xmlns:a16="http://schemas.microsoft.com/office/drawing/2014/main" id="{70AA618B-EF38-4F91-916B-41E6B3B042FF}"/>
+          <p:cNvPr id="19" name="">
+            <a:extLst xmlns:a="http://schemas.openxmlformats.org/drawingml/2006/main">
+              <a:ext uri="{FF2B5EF4-FFF2-40B4-BE49-F238E27FC236}">
+                <a16:creationId xmlns:a16="http://schemas.microsoft.com/office/drawing/2014/main" id="{8A4613DF-F9B4-4BFC-8D6D-B0DA39BE49E7}"/>
               </a:ext>
             </a:extLst>
           </p:cNvPr>
@@ -7427,7 +8767,7 @@
                   <a:srgbClr val="0F172A"/>
                 </a:solidFill>
               </a:rPr>
-              <a:t>Replay-side KV loads missed the deadline in this run</a:t>
+              <a:t>Mechanism traces show why prefetch misses</a:t>
             </a:r>
           </a:p>
         </p:txBody>
@@ -7437,7 +8777,7 @@
           <p:cNvPr id="2" name="">
             <a:extLst xmlns:a="http://schemas.openxmlformats.org/drawingml/2006/main">
               <a:ext uri="{FF2B5EF4-FFF2-40B4-BE49-F238E27FC236}">
-                <a16:creationId xmlns:a16="http://schemas.microsoft.com/office/drawing/2014/main" id="{FBAB8E2C-FD64-4D86-ADAE-EF18D8D8E24F}"/>
+                <a16:creationId xmlns:a16="http://schemas.microsoft.com/office/drawing/2014/main" id="{E199B795-95D7-4E93-85A6-D5A3C9C003DB}"/>
               </a:ext>
             </a:extLst>
           </p:cNvPr>
@@ -7477,7 +8817,7 @@
                   <a:srgbClr val="64748B"/>
                 </a:solidFill>
               </a:rPr>
-              <a:t>The aggregate view shows whether KV H2D finished before or after replay was due.</a:t>
+              <a:t>In the profiled synthetic run, the hint path existed, but KV copy/readiness still landed too late for replay.</a:t>
             </a:r>
           </a:p>
         </p:txBody>
@@ -7487,23 +8827,23 @@
           <p:cNvPr id="3" name="">
             <a:extLst xmlns:a="http://schemas.openxmlformats.org/drawingml/2006/main">
               <a:ext uri="{FF2B5EF4-FFF2-40B4-BE49-F238E27FC236}">
-                <a16:creationId xmlns:a16="http://schemas.microsoft.com/office/drawing/2014/main" id="{2E330626-E3C5-4A3A-ABC5-D106FA0805C4}"/>
-              </a:ext>
-            </a:extLst>
-          </p:cNvPr>
-          <p:cNvSpPr>
-            <a:spLocks xmlns:a="http://schemas.openxmlformats.org/drawingml/2006/main" noGrp="1"/>
-          </p:cNvSpPr>
-          <p:nvPr/>
-        </p:nvSpPr>
-        <p:spPr>
-          <a:xfrm xmlns:a="http://schemas.openxmlformats.org/drawingml/2006/main">
-            <a:off x="323850" y="1428750"/>
-            <a:ext cx="8724900" cy="3867150"/>
+                <a16:creationId xmlns:a16="http://schemas.microsoft.com/office/drawing/2014/main" id="{CC5A896C-106A-488E-9F35-4329E8164F93}"/>
+              </a:ext>
+            </a:extLst>
+          </p:cNvPr>
+          <p:cNvSpPr>
+            <a:spLocks xmlns:a="http://schemas.openxmlformats.org/drawingml/2006/main" noGrp="1"/>
+          </p:cNvSpPr>
+          <p:nvPr/>
+        </p:nvSpPr>
+        <p:spPr>
+          <a:xfrm xmlns:a="http://schemas.openxmlformats.org/drawingml/2006/main">
+            <a:off x="247650" y="1447800"/>
+            <a:ext cx="7677150" cy="3581400"/>
           </a:xfrm>
           <a:prstGeom xmlns:a="http://schemas.openxmlformats.org/drawingml/2006/main" prst="roundRect">
             <a:avLst>
-              <a:gd name="adj" fmla="val 1478"/>
+              <a:gd name="adj" fmla="val 1596"/>
             </a:avLst>
           </a:prstGeom>
           <a:solidFill xmlns:a="http://schemas.openxmlformats.org/drawingml/2006/main">
@@ -7519,20 +8859,20 @@
       </p:sp>
       <p:pic>
         <p:nvPicPr>
-          <p:cNvPr id="15" name=""/>
+          <p:cNvPr id="22" name=""/>
           <p:cNvPicPr>
             <a:picLocks xmlns:a="http://schemas.openxmlformats.org/drawingml/2006/main" noChangeAspect="1"/>
           </p:cNvPicPr>
           <p:nvPr/>
         </p:nvPicPr>
         <p:blipFill>
-          <a:blip xmlns:r="http://schemas.openxmlformats.org/officeDocument/2006/relationships" xmlns:a="http://schemas.openxmlformats.org/drawingml/2006/main" r:embed="R9be63e229c60453a"/>
+          <a:blip xmlns:r="http://schemas.openxmlformats.org/officeDocument/2006/relationships" xmlns:a="http://schemas.openxmlformats.org/drawingml/2006/main" r:embed="Raa64803f388a4bec"/>
           <a:stretch xmlns:a="http://schemas.openxmlformats.org/drawingml/2006/main"/>
         </p:blipFill>
         <p:spPr>
           <a:xfrm xmlns:a="http://schemas.openxmlformats.org/drawingml/2006/main">
-            <a:off x="400050" y="1795905"/>
-            <a:ext cx="8572500" cy="3132841"/>
+            <a:off x="323850" y="1858963"/>
+            <a:ext cx="7524750" cy="2759075"/>
           </a:xfrm>
           <a:prstGeom xmlns:a="http://schemas.openxmlformats.org/drawingml/2006/main" prst="rect">
             <a:avLst/>
@@ -7544,23 +8884,23 @@
           <p:cNvPr id="5" name="">
             <a:extLst xmlns:a="http://schemas.openxmlformats.org/drawingml/2006/main">
               <a:ext uri="{FF2B5EF4-FFF2-40B4-BE49-F238E27FC236}">
-                <a16:creationId xmlns:a16="http://schemas.microsoft.com/office/drawing/2014/main" id="{DCC59742-449F-4E22-B140-61B04664DADF}"/>
-              </a:ext>
-            </a:extLst>
-          </p:cNvPr>
-          <p:cNvSpPr>
-            <a:spLocks xmlns:a="http://schemas.openxmlformats.org/drawingml/2006/main" noGrp="1"/>
-          </p:cNvSpPr>
-          <p:nvPr/>
-        </p:nvSpPr>
-        <p:spPr>
-          <a:xfrm xmlns:a="http://schemas.openxmlformats.org/drawingml/2006/main">
-            <a:off x="9258300" y="1847850"/>
-            <a:ext cx="2095500" cy="1104900"/>
+                <a16:creationId xmlns:a16="http://schemas.microsoft.com/office/drawing/2014/main" id="{81FC3205-5B72-496C-8891-43F05149FC5D}"/>
+              </a:ext>
+            </a:extLst>
+          </p:cNvPr>
+          <p:cNvSpPr>
+            <a:spLocks xmlns:a="http://schemas.openxmlformats.org/drawingml/2006/main" noGrp="1"/>
+          </p:cNvSpPr>
+          <p:nvPr/>
+        </p:nvSpPr>
+        <p:spPr>
+          <a:xfrm xmlns:a="http://schemas.openxmlformats.org/drawingml/2006/main">
+            <a:off x="8191500" y="1619250"/>
+            <a:ext cx="3124200" cy="781050"/>
           </a:xfrm>
           <a:prstGeom xmlns:a="http://schemas.openxmlformats.org/drawingml/2006/main" prst="roundRect">
             <a:avLst>
-              <a:gd name="adj" fmla="val 5172"/>
+              <a:gd name="adj" fmla="val 7317"/>
             </a:avLst>
           </a:prstGeom>
           <a:solidFill xmlns:a="http://schemas.openxmlformats.org/drawingml/2006/main">
@@ -7579,19 +8919,19 @@
           <p:cNvPr id="6" name="">
             <a:extLst xmlns:a="http://schemas.openxmlformats.org/drawingml/2006/main">
               <a:ext uri="{FF2B5EF4-FFF2-40B4-BE49-F238E27FC236}">
-                <a16:creationId xmlns:a16="http://schemas.microsoft.com/office/drawing/2014/main" id="{13DF3E7E-B41F-41E9-BF57-716F50ED1C32}"/>
-              </a:ext>
-            </a:extLst>
-          </p:cNvPr>
-          <p:cNvSpPr>
-            <a:spLocks xmlns:a="http://schemas.openxmlformats.org/drawingml/2006/main" noGrp="1"/>
-          </p:cNvSpPr>
-          <p:nvPr/>
-        </p:nvSpPr>
-        <p:spPr>
-          <a:xfrm xmlns:a="http://schemas.openxmlformats.org/drawingml/2006/main">
-            <a:off x="9505950" y="2076450"/>
-            <a:ext cx="1600200" cy="476250"/>
+                <a16:creationId xmlns:a16="http://schemas.microsoft.com/office/drawing/2014/main" id="{7A690524-3B70-4D47-B64D-A1A40154F528}"/>
+              </a:ext>
+            </a:extLst>
+          </p:cNvPr>
+          <p:cNvSpPr>
+            <a:spLocks xmlns:a="http://schemas.openxmlformats.org/drawingml/2006/main" noGrp="1"/>
+          </p:cNvSpPr>
+          <p:nvPr/>
+        </p:nvSpPr>
+        <p:spPr>
+          <a:xfrm xmlns:a="http://schemas.openxmlformats.org/drawingml/2006/main">
+            <a:off x="8420100" y="1790700"/>
+            <a:ext cx="2667000" cy="323850"/>
           </a:xfrm>
           <a:prstGeom xmlns:a="http://schemas.openxmlformats.org/drawingml/2006/main" prst="rect">
             <a:avLst/>
@@ -7607,19 +8947,19 @@
           <a:lstStyle xmlns:a="http://schemas.openxmlformats.org/drawingml/2006/main"/>
           <a:p xmlns:a="http://schemas.openxmlformats.org/drawingml/2006/main">
             <a:pPr algn="ctr">
-              <a:defRPr sz="3600" b="1">
+              <a:defRPr sz="2550" b="1">
                 <a:solidFill>
                   <a:srgbClr val="B91C1C"/>
                 </a:solidFill>
               </a:defRPr>
             </a:pPr>
             <a:r>
-              <a:rPr sz="3600" b="1">
+              <a:rPr sz="2550" b="1">
                 <a:solidFill>
                   <a:srgbClr val="B91C1C"/>
                 </a:solidFill>
               </a:rPr>
-              <a:t>8 / 8</a:t>
+              <a:t>0 / 6</a:t>
             </a:r>
           </a:p>
         </p:txBody>
@@ -7629,19 +8969,339 @@
           <p:cNvPr id="7" name="">
             <a:extLst xmlns:a="http://schemas.openxmlformats.org/drawingml/2006/main">
               <a:ext uri="{FF2B5EF4-FFF2-40B4-BE49-F238E27FC236}">
-                <a16:creationId xmlns:a16="http://schemas.microsoft.com/office/drawing/2014/main" id="{83C52F6A-7360-457A-8440-FB39A167AA19}"/>
-              </a:ext>
-            </a:extLst>
-          </p:cNvPr>
-          <p:cNvSpPr>
-            <a:spLocks xmlns:a="http://schemas.openxmlformats.org/drawingml/2006/main" noGrp="1"/>
-          </p:cNvSpPr>
-          <p:nvPr/>
-        </p:nvSpPr>
-        <p:spPr>
-          <a:xfrm xmlns:a="http://schemas.openxmlformats.org/drawingml/2006/main">
-            <a:off x="9505950" y="2628900"/>
-            <a:ext cx="1600200" cy="266700"/>
+                <a16:creationId xmlns:a16="http://schemas.microsoft.com/office/drawing/2014/main" id="{E21206F9-DD38-4C31-8A60-F2B680E96ACA}"/>
+              </a:ext>
+            </a:extLst>
+          </p:cNvPr>
+          <p:cNvSpPr>
+            <a:spLocks xmlns:a="http://schemas.openxmlformats.org/drawingml/2006/main" noGrp="1"/>
+          </p:cNvSpPr>
+          <p:nvPr/>
+        </p:nvSpPr>
+        <p:spPr>
+          <a:xfrm xmlns:a="http://schemas.openxmlformats.org/drawingml/2006/main">
+            <a:off x="8420100" y="2152650"/>
+            <a:ext cx="2667000" cy="190500"/>
+          </a:xfrm>
+          <a:prstGeom xmlns:a="http://schemas.openxmlformats.org/drawingml/2006/main" prst="rect">
+            <a:avLst/>
+          </a:prstGeom>
+          <a:noFill xmlns:a="http://schemas.openxmlformats.org/drawingml/2006/main"/>
+          <a:ln xmlns:a="http://schemas.openxmlformats.org/drawingml/2006/main" w="0">
+            <a:noFill/>
+            <a:prstDash val="solid"/>
+          </a:ln>
+        </p:spPr>
+        <p:txBody>
+          <a:bodyPr xmlns:a="http://schemas.openxmlformats.org/drawingml/2006/main" anchor="t"/>
+          <a:lstStyle xmlns:a="http://schemas.openxmlformats.org/drawingml/2006/main"/>
+          <a:p xmlns:a="http://schemas.openxmlformats.org/drawingml/2006/main">
+            <a:pPr algn="ctr">
+              <a:defRPr sz="1200" b="0">
+                <a:solidFill>
+                  <a:srgbClr val="334155"/>
+                </a:solidFill>
+              </a:defRPr>
+            </a:pPr>
+            <a:r>
+              <a:rPr sz="1200" b="0">
+                <a:solidFill>
+                  <a:srgbClr val="334155"/>
+                </a:solidFill>
+              </a:rPr>
+              <a:t>ready before replay</a:t>
+            </a:r>
+          </a:p>
+        </p:txBody>
+      </p:sp>
+      <p:sp>
+        <p:nvSpPr>
+          <p:cNvPr id="8" name="">
+            <a:extLst xmlns:a="http://schemas.openxmlformats.org/drawingml/2006/main">
+              <a:ext uri="{FF2B5EF4-FFF2-40B4-BE49-F238E27FC236}">
+                <a16:creationId xmlns:a16="http://schemas.microsoft.com/office/drawing/2014/main" id="{1A22EED6-326F-4475-8BDB-8EA9AD5A7614}"/>
+              </a:ext>
+            </a:extLst>
+          </p:cNvPr>
+          <p:cNvSpPr>
+            <a:spLocks xmlns:a="http://schemas.openxmlformats.org/drawingml/2006/main" noGrp="1"/>
+          </p:cNvSpPr>
+          <p:nvPr/>
+        </p:nvSpPr>
+        <p:spPr>
+          <a:xfrm xmlns:a="http://schemas.openxmlformats.org/drawingml/2006/main">
+            <a:off x="8191500" y="2647950"/>
+            <a:ext cx="3124200" cy="781050"/>
+          </a:xfrm>
+          <a:prstGeom xmlns:a="http://schemas.openxmlformats.org/drawingml/2006/main" prst="roundRect">
+            <a:avLst>
+              <a:gd name="adj" fmla="val 7317"/>
+            </a:avLst>
+          </a:prstGeom>
+          <a:solidFill xmlns:a="http://schemas.openxmlformats.org/drawingml/2006/main">
+            <a:srgbClr val="ECFEFF"/>
+          </a:solidFill>
+          <a:ln xmlns:a="http://schemas.openxmlformats.org/drawingml/2006/main" w="9525">
+            <a:solidFill>
+              <a:srgbClr val="67E8F9"/>
+            </a:solidFill>
+            <a:prstDash val="solid"/>
+          </a:ln>
+        </p:spPr>
+      </p:sp>
+      <p:sp>
+        <p:nvSpPr>
+          <p:cNvPr id="9" name="">
+            <a:extLst xmlns:a="http://schemas.openxmlformats.org/drawingml/2006/main">
+              <a:ext uri="{FF2B5EF4-FFF2-40B4-BE49-F238E27FC236}">
+                <a16:creationId xmlns:a16="http://schemas.microsoft.com/office/drawing/2014/main" id="{FD088CC6-4BE6-4B45-B08A-F200B6B62AF7}"/>
+              </a:ext>
+            </a:extLst>
+          </p:cNvPr>
+          <p:cNvSpPr>
+            <a:spLocks xmlns:a="http://schemas.openxmlformats.org/drawingml/2006/main" noGrp="1"/>
+          </p:cNvSpPr>
+          <p:nvPr/>
+        </p:nvSpPr>
+        <p:spPr>
+          <a:xfrm xmlns:a="http://schemas.openxmlformats.org/drawingml/2006/main">
+            <a:off x="8420100" y="2819400"/>
+            <a:ext cx="2667000" cy="323850"/>
+          </a:xfrm>
+          <a:prstGeom xmlns:a="http://schemas.openxmlformats.org/drawingml/2006/main" prst="rect">
+            <a:avLst/>
+          </a:prstGeom>
+          <a:noFill xmlns:a="http://schemas.openxmlformats.org/drawingml/2006/main"/>
+          <a:ln xmlns:a="http://schemas.openxmlformats.org/drawingml/2006/main" w="0">
+            <a:noFill/>
+            <a:prstDash val="solid"/>
+          </a:ln>
+        </p:spPr>
+        <p:txBody>
+          <a:bodyPr xmlns:a="http://schemas.openxmlformats.org/drawingml/2006/main" anchor="t"/>
+          <a:lstStyle xmlns:a="http://schemas.openxmlformats.org/drawingml/2006/main"/>
+          <a:p xmlns:a="http://schemas.openxmlformats.org/drawingml/2006/main">
+            <a:pPr algn="ctr">
+              <a:defRPr sz="2550" b="1">
+                <a:solidFill>
+                  <a:srgbClr val="0E7490"/>
+                </a:solidFill>
+              </a:defRPr>
+            </a:pPr>
+            <a:r>
+              <a:rPr sz="2550" b="1">
+                <a:solidFill>
+                  <a:srgbClr val="0E7490"/>
+                </a:solidFill>
+              </a:rPr>
+              <a:t>3 / 6</a:t>
+            </a:r>
+          </a:p>
+        </p:txBody>
+      </p:sp>
+      <p:sp>
+        <p:nvSpPr>
+          <p:cNvPr id="10" name="">
+            <a:extLst xmlns:a="http://schemas.openxmlformats.org/drawingml/2006/main">
+              <a:ext uri="{FF2B5EF4-FFF2-40B4-BE49-F238E27FC236}">
+                <a16:creationId xmlns:a16="http://schemas.microsoft.com/office/drawing/2014/main" id="{9DEF483D-8906-48FE-93A5-21397BB8ECCD}"/>
+              </a:ext>
+            </a:extLst>
+          </p:cNvPr>
+          <p:cNvSpPr>
+            <a:spLocks xmlns:a="http://schemas.openxmlformats.org/drawingml/2006/main" noGrp="1"/>
+          </p:cNvSpPr>
+          <p:nvPr/>
+        </p:nvSpPr>
+        <p:spPr>
+          <a:xfrm xmlns:a="http://schemas.openxmlformats.org/drawingml/2006/main">
+            <a:off x="8420100" y="3181350"/>
+            <a:ext cx="2667000" cy="190500"/>
+          </a:xfrm>
+          <a:prstGeom xmlns:a="http://schemas.openxmlformats.org/drawingml/2006/main" prst="rect">
+            <a:avLst/>
+          </a:prstGeom>
+          <a:noFill xmlns:a="http://schemas.openxmlformats.org/drawingml/2006/main"/>
+          <a:ln xmlns:a="http://schemas.openxmlformats.org/drawingml/2006/main" w="0">
+            <a:noFill/>
+            <a:prstDash val="solid"/>
+          </a:ln>
+        </p:spPr>
+        <p:txBody>
+          <a:bodyPr xmlns:a="http://schemas.openxmlformats.org/drawingml/2006/main" anchor="t"/>
+          <a:lstStyle xmlns:a="http://schemas.openxmlformats.org/drawingml/2006/main"/>
+          <a:p xmlns:a="http://schemas.openxmlformats.org/drawingml/2006/main">
+            <a:pPr algn="ctr">
+              <a:defRPr sz="1200" b="0">
+                <a:solidFill>
+                  <a:srgbClr val="334155"/>
+                </a:solidFill>
+              </a:defRPr>
+            </a:pPr>
+            <a:r>
+              <a:rPr sz="1200" b="0">
+                <a:solidFill>
+                  <a:srgbClr val="334155"/>
+                </a:solidFill>
+              </a:rPr>
+              <a:t>visible CUDA HtoD</a:t>
+            </a:r>
+          </a:p>
+        </p:txBody>
+      </p:sp>
+      <p:sp>
+        <p:nvSpPr>
+          <p:cNvPr id="11" name="">
+            <a:extLst xmlns:a="http://schemas.openxmlformats.org/drawingml/2006/main">
+              <a:ext uri="{FF2B5EF4-FFF2-40B4-BE49-F238E27FC236}">
+                <a16:creationId xmlns:a16="http://schemas.microsoft.com/office/drawing/2014/main" id="{CCD68155-73C7-4AA9-9EDE-6180850749F3}"/>
+              </a:ext>
+            </a:extLst>
+          </p:cNvPr>
+          <p:cNvSpPr>
+            <a:spLocks xmlns:a="http://schemas.openxmlformats.org/drawingml/2006/main" noGrp="1"/>
+          </p:cNvSpPr>
+          <p:nvPr/>
+        </p:nvSpPr>
+        <p:spPr>
+          <a:xfrm xmlns:a="http://schemas.openxmlformats.org/drawingml/2006/main">
+            <a:off x="8191500" y="3676650"/>
+            <a:ext cx="3124200" cy="781050"/>
+          </a:xfrm>
+          <a:prstGeom xmlns:a="http://schemas.openxmlformats.org/drawingml/2006/main" prst="roundRect">
+            <a:avLst>
+              <a:gd name="adj" fmla="val 7317"/>
+            </a:avLst>
+          </a:prstGeom>
+          <a:solidFill xmlns:a="http://schemas.openxmlformats.org/drawingml/2006/main">
+            <a:srgbClr val="FFF7ED"/>
+          </a:solidFill>
+          <a:ln xmlns:a="http://schemas.openxmlformats.org/drawingml/2006/main" w="9525">
+            <a:solidFill>
+              <a:srgbClr val="FED7AA"/>
+            </a:solidFill>
+            <a:prstDash val="solid"/>
+          </a:ln>
+        </p:spPr>
+      </p:sp>
+      <p:sp>
+        <p:nvSpPr>
+          <p:cNvPr id="12" name="">
+            <a:extLst xmlns:a="http://schemas.openxmlformats.org/drawingml/2006/main">
+              <a:ext uri="{FF2B5EF4-FFF2-40B4-BE49-F238E27FC236}">
+                <a16:creationId xmlns:a16="http://schemas.microsoft.com/office/drawing/2014/main" id="{A4B80967-9A17-46B6-8512-BAD9CE769292}"/>
+              </a:ext>
+            </a:extLst>
+          </p:cNvPr>
+          <p:cNvSpPr>
+            <a:spLocks xmlns:a="http://schemas.openxmlformats.org/drawingml/2006/main" noGrp="1"/>
+          </p:cNvSpPr>
+          <p:nvPr/>
+        </p:nvSpPr>
+        <p:spPr>
+          <a:xfrm xmlns:a="http://schemas.openxmlformats.org/drawingml/2006/main">
+            <a:off x="8420100" y="3848100"/>
+            <a:ext cx="2667000" cy="323850"/>
+          </a:xfrm>
+          <a:prstGeom xmlns:a="http://schemas.openxmlformats.org/drawingml/2006/main" prst="rect">
+            <a:avLst/>
+          </a:prstGeom>
+          <a:noFill xmlns:a="http://schemas.openxmlformats.org/drawingml/2006/main"/>
+          <a:ln xmlns:a="http://schemas.openxmlformats.org/drawingml/2006/main" w="0">
+            <a:noFill/>
+            <a:prstDash val="solid"/>
+          </a:ln>
+        </p:spPr>
+        <p:txBody>
+          <a:bodyPr xmlns:a="http://schemas.openxmlformats.org/drawingml/2006/main" anchor="t"/>
+          <a:lstStyle xmlns:a="http://schemas.openxmlformats.org/drawingml/2006/main"/>
+          <a:p xmlns:a="http://schemas.openxmlformats.org/drawingml/2006/main">
+            <a:pPr algn="ctr">
+              <a:defRPr sz="2550" b="1">
+                <a:solidFill>
+                  <a:srgbClr val="C2410C"/>
+                </a:solidFill>
+              </a:defRPr>
+            </a:pPr>
+            <a:r>
+              <a:rPr sz="2550" b="1">
+                <a:solidFill>
+                  <a:srgbClr val="C2410C"/>
+                </a:solidFill>
+              </a:rPr>
+              <a:t>6 / 6</a:t>
+            </a:r>
+          </a:p>
+        </p:txBody>
+      </p:sp>
+      <p:sp>
+        <p:nvSpPr>
+          <p:cNvPr id="13" name="">
+            <a:extLst xmlns:a="http://schemas.openxmlformats.org/drawingml/2006/main">
+              <a:ext uri="{FF2B5EF4-FFF2-40B4-BE49-F238E27FC236}">
+                <a16:creationId xmlns:a16="http://schemas.microsoft.com/office/drawing/2014/main" id="{8875D84C-EA46-4D7C-8BA3-57F7BE6A5017}"/>
+              </a:ext>
+            </a:extLst>
+          </p:cNvPr>
+          <p:cNvSpPr>
+            <a:spLocks xmlns:a="http://schemas.openxmlformats.org/drawingml/2006/main" noGrp="1"/>
+          </p:cNvSpPr>
+          <p:nvPr/>
+        </p:nvSpPr>
+        <p:spPr>
+          <a:xfrm xmlns:a="http://schemas.openxmlformats.org/drawingml/2006/main">
+            <a:off x="8420100" y="4210050"/>
+            <a:ext cx="2667000" cy="190500"/>
+          </a:xfrm>
+          <a:prstGeom xmlns:a="http://schemas.openxmlformats.org/drawingml/2006/main" prst="rect">
+            <a:avLst/>
+          </a:prstGeom>
+          <a:noFill xmlns:a="http://schemas.openxmlformats.org/drawingml/2006/main"/>
+          <a:ln xmlns:a="http://schemas.openxmlformats.org/drawingml/2006/main" w="0">
+            <a:noFill/>
+            <a:prstDash val="solid"/>
+          </a:ln>
+        </p:spPr>
+        <p:txBody>
+          <a:bodyPr xmlns:a="http://schemas.openxmlformats.org/drawingml/2006/main" anchor="t"/>
+          <a:lstStyle xmlns:a="http://schemas.openxmlformats.org/drawingml/2006/main"/>
+          <a:p xmlns:a="http://schemas.openxmlformats.org/drawingml/2006/main">
+            <a:pPr algn="ctr">
+              <a:defRPr sz="1200" b="0">
+                <a:solidFill>
+                  <a:srgbClr val="334155"/>
+                </a:solidFill>
+              </a:defRPr>
+            </a:pPr>
+            <a:r>
+              <a:rPr sz="1200" b="0">
+                <a:solidFill>
+                  <a:srgbClr val="334155"/>
+                </a:solidFill>
+              </a:rPr>
+              <a:t>replay reloaded KV</a:t>
+            </a:r>
+          </a:p>
+        </p:txBody>
+      </p:sp>
+      <p:sp>
+        <p:nvSpPr>
+          <p:cNvPr id="14" name="">
+            <a:extLst xmlns:a="http://schemas.openxmlformats.org/drawingml/2006/main">
+              <a:ext uri="{FF2B5EF4-FFF2-40B4-BE49-F238E27FC236}">
+                <a16:creationId xmlns:a16="http://schemas.microsoft.com/office/drawing/2014/main" id="{1E45C44A-479D-40F4-A04D-B60E3DFF339E}"/>
+              </a:ext>
+            </a:extLst>
+          </p:cNvPr>
+          <p:cNvSpPr>
+            <a:spLocks xmlns:a="http://schemas.openxmlformats.org/drawingml/2006/main" noGrp="1"/>
+          </p:cNvSpPr>
+          <p:nvPr/>
+        </p:nvSpPr>
+        <p:spPr>
+          <a:xfrm xmlns:a="http://schemas.openxmlformats.org/drawingml/2006/main">
+            <a:off x="8134350" y="4686300"/>
+            <a:ext cx="3314700" cy="457200"/>
           </a:xfrm>
           <a:prstGeom xmlns:a="http://schemas.openxmlformats.org/drawingml/2006/main" prst="rect">
             <a:avLst/>
@@ -7669,67 +9329,67 @@
                   <a:srgbClr val="334155"/>
                 </a:solidFill>
               </a:rPr>
-              <a:t>H2D loads finished late</a:t>
-            </a:r>
-          </a:p>
-        </p:txBody>
-      </p:sp>
-      <p:sp>
-        <p:nvSpPr>
-          <p:cNvPr id="8" name="">
-            <a:extLst xmlns:a="http://schemas.openxmlformats.org/drawingml/2006/main">
-              <a:ext uri="{FF2B5EF4-FFF2-40B4-BE49-F238E27FC236}">
-                <a16:creationId xmlns:a16="http://schemas.microsoft.com/office/drawing/2014/main" id="{A344BDC2-22DD-4CF8-AAD0-491BE8AC87A9}"/>
-              </a:ext>
-            </a:extLst>
-          </p:cNvPr>
-          <p:cNvSpPr>
-            <a:spLocks xmlns:a="http://schemas.openxmlformats.org/drawingml/2006/main" noGrp="1"/>
-          </p:cNvSpPr>
-          <p:nvPr/>
-        </p:nvSpPr>
-        <p:spPr>
-          <a:xfrm xmlns:a="http://schemas.openxmlformats.org/drawingml/2006/main">
-            <a:off x="9258300" y="3524250"/>
-            <a:ext cx="2095500" cy="742950"/>
-          </a:xfrm>
-          <a:prstGeom xmlns:a="http://schemas.openxmlformats.org/drawingml/2006/main" prst="rect">
-            <a:avLst/>
-          </a:prstGeom>
-          <a:noFill xmlns:a="http://schemas.openxmlformats.org/drawingml/2006/main"/>
-          <a:ln xmlns:a="http://schemas.openxmlformats.org/drawingml/2006/main" w="0">
-            <a:noFill/>
-            <a:prstDash val="solid"/>
-          </a:ln>
-        </p:spPr>
-        <p:txBody>
-          <a:bodyPr xmlns:a="http://schemas.openxmlformats.org/drawingml/2006/main" anchor="t"/>
-          <a:lstStyle xmlns:a="http://schemas.openxmlformats.org/drawingml/2006/main"/>
-          <a:p xmlns:a="http://schemas.openxmlformats.org/drawingml/2006/main">
-            <a:pPr algn="l">
-              <a:defRPr sz="1575" b="0">
-                <a:solidFill>
-                  <a:srgbClr val="334155"/>
-                </a:solidFill>
-              </a:defRPr>
-            </a:pPr>
-            <a:r>
-              <a:rPr sz="1575" b="0">
-                <a:solidFill>
-                  <a:srgbClr val="334155"/>
-                </a:solidFill>
-              </a:rPr>
-              <a:t>All visible replay-side KV loads finished below the 0 ms deadline line.</a:t>
-            </a:r>
-          </a:p>
-        </p:txBody>
-      </p:sp>
-      <p:sp>
-        <p:nvSpPr>
-          <p:cNvPr id="9" name="">
-            <a:extLst xmlns:a="http://schemas.openxmlformats.org/drawingml/2006/main">
-              <a:ext uri="{FF2B5EF4-FFF2-40B4-BE49-F238E27FC236}">
-                <a16:creationId xmlns:a16="http://schemas.microsoft.com/office/drawing/2014/main" id="{570D357B-C522-4B23-8905-45AF27F1AC1A}"/>
+              <a:t>The semantic hint was present, but the normal movement path did not make residency/reuse predictable before replay.</a:t>
+            </a:r>
+          </a:p>
+        </p:txBody>
+      </p:sp>
+      <p:sp>
+        <p:nvSpPr>
+          <p:cNvPr id="15" name="">
+            <a:extLst xmlns:a="http://schemas.openxmlformats.org/drawingml/2006/main">
+              <a:ext uri="{FF2B5EF4-FFF2-40B4-BE49-F238E27FC236}">
+                <a16:creationId xmlns:a16="http://schemas.microsoft.com/office/drawing/2014/main" id="{38CA4649-E6AB-4C21-AA16-7B6F683879CF}"/>
+              </a:ext>
+            </a:extLst>
+          </p:cNvPr>
+          <p:cNvSpPr>
+            <a:spLocks xmlns:a="http://schemas.openxmlformats.org/drawingml/2006/main" noGrp="1"/>
+          </p:cNvSpPr>
+          <p:nvPr/>
+        </p:nvSpPr>
+        <p:spPr>
+          <a:xfrm xmlns:a="http://schemas.openxmlformats.org/drawingml/2006/main">
+            <a:off x="685800" y="5334000"/>
+            <a:ext cx="10191750" cy="228600"/>
+          </a:xfrm>
+          <a:prstGeom xmlns:a="http://schemas.openxmlformats.org/drawingml/2006/main" prst="rect">
+            <a:avLst/>
+          </a:prstGeom>
+          <a:noFill xmlns:a="http://schemas.openxmlformats.org/drawingml/2006/main"/>
+          <a:ln xmlns:a="http://schemas.openxmlformats.org/drawingml/2006/main" w="0">
+            <a:noFill/>
+            <a:prstDash val="solid"/>
+          </a:ln>
+        </p:spPr>
+        <p:txBody>
+          <a:bodyPr xmlns:a="http://schemas.openxmlformats.org/drawingml/2006/main" anchor="t"/>
+          <a:lstStyle xmlns:a="http://schemas.openxmlformats.org/drawingml/2006/main"/>
+          <a:p xmlns:a="http://schemas.openxmlformats.org/drawingml/2006/main">
+            <a:pPr algn="ctr">
+              <a:defRPr sz="1200" b="0">
+                <a:solidFill>
+                  <a:srgbClr val="64748B"/>
+                </a:solidFill>
+              </a:defRPr>
+            </a:pPr>
+            <a:r>
+              <a:rPr sz="1200" b="0">
+                <a:solidFill>
+                  <a:srgbClr val="64748B"/>
+                </a:solidFill>
+              </a:rPr>
+              <a:t>Preliminary mechanism evidence only: useful for copy-path attribution, not clean TTFT claims.</a:t>
+            </a:r>
+          </a:p>
+        </p:txBody>
+      </p:sp>
+      <p:sp>
+        <p:nvSpPr>
+          <p:cNvPr id="16" name="">
+            <a:extLst xmlns:a="http://schemas.openxmlformats.org/drawingml/2006/main">
+              <a:ext uri="{FF2B5EF4-FFF2-40B4-BE49-F238E27FC236}">
+                <a16:creationId xmlns:a16="http://schemas.microsoft.com/office/drawing/2014/main" id="{1BE4B4EC-FF02-4814-89B3-B6A54BC2BED2}"/>
               </a:ext>
             </a:extLst>
           </p:cNvPr>
@@ -7769,17 +9429,17 @@
                   <a:srgbClr val="64748B"/>
                 </a:solidFill>
               </a:rPr>
-              <a:t>Source: latest_master_report.html, Global Replay H2D Readiness</a:t>
-            </a:r>
-          </a:p>
-        </p:txBody>
-      </p:sp>
-      <p:sp>
-        <p:nvSpPr>
-          <p:cNvPr id="10" name="">
-            <a:extLst xmlns:a="http://schemas.openxmlformats.org/drawingml/2006/main">
-              <a:ext uri="{FF2B5EF4-FFF2-40B4-BE49-F238E27FC236}">
-                <a16:creationId xmlns:a16="http://schemas.microsoft.com/office/drawing/2014/main" id="{2F7503C8-5A98-44E2-A89C-F86A3B330A3B}"/>
+              <a:t>Source: latest_synthetic_master_report.html, Profiled Mechanism Timelines</a:t>
+            </a:r>
+          </a:p>
+        </p:txBody>
+      </p:sp>
+      <p:sp>
+        <p:nvSpPr>
+          <p:cNvPr id="17" name="">
+            <a:extLst xmlns:a="http://schemas.openxmlformats.org/drawingml/2006/main">
+              <a:ext uri="{FF2B5EF4-FFF2-40B4-BE49-F238E27FC236}">
+                <a16:creationId xmlns:a16="http://schemas.microsoft.com/office/drawing/2014/main" id="{89CB325D-25F2-44B5-B04F-257AC7448D35}"/>
               </a:ext>
             </a:extLst>
           </p:cNvPr>
@@ -7826,10 +9486,10 @@
       </p:sp>
       <p:sp>
         <p:nvSpPr>
-          <p:cNvPr id="11" name="">
-            <a:extLst xmlns:a="http://schemas.openxmlformats.org/drawingml/2006/main">
-              <a:ext uri="{FF2B5EF4-FFF2-40B4-BE49-F238E27FC236}">
-                <a16:creationId xmlns:a16="http://schemas.microsoft.com/office/drawing/2014/main" id="{EC3D20A8-B027-4867-811A-B3F41179943C}"/>
+          <p:cNvPr id="18" name="">
+            <a:extLst xmlns:a="http://schemas.openxmlformats.org/drawingml/2006/main">
+              <a:ext uri="{FF2B5EF4-FFF2-40B4-BE49-F238E27FC236}">
+                <a16:creationId xmlns:a16="http://schemas.microsoft.com/office/drawing/2014/main" id="{5CC25300-651E-48A4-B342-D499D85F4F46}"/>
               </a:ext>
             </a:extLst>
           </p:cNvPr>
@@ -7877,7 +9537,7 @@
     </p:spTree>
     <p:extLst>
       <p:ext uri="{BB962C8B-B14F-4D97-AF65-F5344CB8AC3E}">
-        <p14:creationId xmlns:p14="http://schemas.microsoft.com/office/powerpoint/2010/main" val="1589967240"/>
+        <p14:creationId xmlns:p14="http://schemas.microsoft.com/office/powerpoint/2010/main" val="1434002447"/>
       </p:ext>
     </p:extLst>
   </p:cSld>
@@ -7905,10 +9565,10 @@
       </p:grpSpPr>
       <p:sp>
         <p:nvSpPr>
-          <p:cNvPr id="9" name="">
-            <a:extLst xmlns:a="http://schemas.openxmlformats.org/drawingml/2006/main">
-              <a:ext uri="{FF2B5EF4-FFF2-40B4-BE49-F238E27FC236}">
-                <a16:creationId xmlns:a16="http://schemas.microsoft.com/office/drawing/2014/main" id="{431F8236-5F19-4701-9E52-DA82679C3C78}"/>
+          <p:cNvPr id="12" name="">
+            <a:extLst xmlns:a="http://schemas.openxmlformats.org/drawingml/2006/main">
+              <a:ext uri="{FF2B5EF4-FFF2-40B4-BE49-F238E27FC236}">
+                <a16:creationId xmlns:a16="http://schemas.microsoft.com/office/drawing/2014/main" id="{D5A1DE5F-EBB2-47BE-A8C7-27DA9990ED32}"/>
               </a:ext>
             </a:extLst>
           </p:cNvPr>
@@ -7948,7 +9608,7 @@
                   <a:srgbClr val="0F172A"/>
                 </a:solidFill>
               </a:rPr>
-              <a:t>The delay is not just copy time</a:t>
+              <a:t>Replay-side KV loads missed the deadline in this run</a:t>
             </a:r>
           </a:p>
         </p:txBody>
@@ -7958,7 +9618,7 @@
           <p:cNvPr id="2" name="">
             <a:extLst xmlns:a="http://schemas.openxmlformats.org/drawingml/2006/main">
               <a:ext uri="{FF2B5EF4-FFF2-40B4-BE49-F238E27FC236}">
-                <a16:creationId xmlns:a16="http://schemas.microsoft.com/office/drawing/2014/main" id="{3139F9F3-84F4-46C4-B05C-DE22630AD849}"/>
+                <a16:creationId xmlns:a16="http://schemas.microsoft.com/office/drawing/2014/main" id="{A273795D-DF79-41E2-BDAA-0796C1265DA0}"/>
               </a:ext>
             </a:extLst>
           </p:cNvPr>
@@ -7998,7 +9658,7 @@
                   <a:srgbClr val="64748B"/>
                 </a:solidFill>
               </a:rPr>
-              <a:t>The request enters normal software/runtime scheduling before visible KV H2D begins.</a:t>
+              <a:t>The aggregate view shows whether KV H2D finished before or after replay was due.</a:t>
             </a:r>
           </a:p>
         </p:txBody>
@@ -8008,23 +9668,23 @@
           <p:cNvPr id="3" name="">
             <a:extLst xmlns:a="http://schemas.openxmlformats.org/drawingml/2006/main">
               <a:ext uri="{FF2B5EF4-FFF2-40B4-BE49-F238E27FC236}">
-                <a16:creationId xmlns:a16="http://schemas.microsoft.com/office/drawing/2014/main" id="{F98BBA99-C6D7-4819-A4A4-936ACFB7EC53}"/>
-              </a:ext>
-            </a:extLst>
-          </p:cNvPr>
-          <p:cNvSpPr>
-            <a:spLocks xmlns:a="http://schemas.openxmlformats.org/drawingml/2006/main" noGrp="1"/>
-          </p:cNvSpPr>
-          <p:nvPr/>
-        </p:nvSpPr>
-        <p:spPr>
-          <a:xfrm xmlns:a="http://schemas.openxmlformats.org/drawingml/2006/main">
-            <a:off x="323850" y="1333500"/>
-            <a:ext cx="10820400" cy="4343400"/>
+                <a16:creationId xmlns:a16="http://schemas.microsoft.com/office/drawing/2014/main" id="{A24DF1CF-A9D4-43D7-A63E-86CB8F385CA4}"/>
+              </a:ext>
+            </a:extLst>
+          </p:cNvPr>
+          <p:cNvSpPr>
+            <a:spLocks xmlns:a="http://schemas.openxmlformats.org/drawingml/2006/main" noGrp="1"/>
+          </p:cNvSpPr>
+          <p:nvPr/>
+        </p:nvSpPr>
+        <p:spPr>
+          <a:xfrm xmlns:a="http://schemas.openxmlformats.org/drawingml/2006/main">
+            <a:off x="323850" y="1428750"/>
+            <a:ext cx="8724900" cy="3867150"/>
           </a:xfrm>
           <a:prstGeom xmlns:a="http://schemas.openxmlformats.org/drawingml/2006/main" prst="roundRect">
             <a:avLst>
-              <a:gd name="adj" fmla="val 1316"/>
+              <a:gd name="adj" fmla="val 1478"/>
             </a:avLst>
           </a:prstGeom>
           <a:solidFill xmlns:a="http://schemas.openxmlformats.org/drawingml/2006/main">
@@ -8040,20 +9700,20 @@
       </p:sp>
       <p:pic>
         <p:nvPicPr>
-          <p:cNvPr id="12" name=""/>
+          <p:cNvPr id="15" name=""/>
           <p:cNvPicPr>
             <a:picLocks xmlns:a="http://schemas.openxmlformats.org/drawingml/2006/main" noChangeAspect="1"/>
           </p:cNvPicPr>
           <p:nvPr/>
         </p:nvPicPr>
         <p:blipFill>
-          <a:blip xmlns:r="http://schemas.openxmlformats.org/officeDocument/2006/relationships" xmlns:a="http://schemas.openxmlformats.org/drawingml/2006/main" r:embed="R8c1aed6ad210448d"/>
+          <a:blip xmlns:r="http://schemas.openxmlformats.org/officeDocument/2006/relationships" xmlns:a="http://schemas.openxmlformats.org/drawingml/2006/main" r:embed="R48372ffadd9244e8"/>
           <a:stretch xmlns:a="http://schemas.openxmlformats.org/drawingml/2006/main"/>
         </p:blipFill>
         <p:spPr>
           <a:xfrm xmlns:a="http://schemas.openxmlformats.org/drawingml/2006/main">
-            <a:off x="1247835" y="1409700"/>
-            <a:ext cx="8972430" cy="4191000"/>
+            <a:off x="400050" y="1795905"/>
+            <a:ext cx="8572500" cy="3132841"/>
           </a:xfrm>
           <a:prstGeom xmlns:a="http://schemas.openxmlformats.org/drawingml/2006/main" prst="rect">
             <a:avLst/>
@@ -8065,19 +9725,154 @@
           <p:cNvPr id="5" name="">
             <a:extLst xmlns:a="http://schemas.openxmlformats.org/drawingml/2006/main">
               <a:ext uri="{FF2B5EF4-FFF2-40B4-BE49-F238E27FC236}">
-                <a16:creationId xmlns:a16="http://schemas.microsoft.com/office/drawing/2014/main" id="{F01342CA-81E0-4D4F-A653-267F08F4F658}"/>
-              </a:ext>
-            </a:extLst>
-          </p:cNvPr>
-          <p:cNvSpPr>
-            <a:spLocks xmlns:a="http://schemas.openxmlformats.org/drawingml/2006/main" noGrp="1"/>
-          </p:cNvSpPr>
-          <p:nvPr/>
-        </p:nvSpPr>
-        <p:spPr>
-          <a:xfrm xmlns:a="http://schemas.openxmlformats.org/drawingml/2006/main">
-            <a:off x="685800" y="5791200"/>
-            <a:ext cx="9906000" cy="228600"/>
+                <a16:creationId xmlns:a16="http://schemas.microsoft.com/office/drawing/2014/main" id="{C061D14D-3C11-47A1-8E65-522E591A9083}"/>
+              </a:ext>
+            </a:extLst>
+          </p:cNvPr>
+          <p:cNvSpPr>
+            <a:spLocks xmlns:a="http://schemas.openxmlformats.org/drawingml/2006/main" noGrp="1"/>
+          </p:cNvSpPr>
+          <p:nvPr/>
+        </p:nvSpPr>
+        <p:spPr>
+          <a:xfrm xmlns:a="http://schemas.openxmlformats.org/drawingml/2006/main">
+            <a:off x="9258300" y="1847850"/>
+            <a:ext cx="2095500" cy="1104900"/>
+          </a:xfrm>
+          <a:prstGeom xmlns:a="http://schemas.openxmlformats.org/drawingml/2006/main" prst="roundRect">
+            <a:avLst>
+              <a:gd name="adj" fmla="val 5172"/>
+            </a:avLst>
+          </a:prstGeom>
+          <a:solidFill xmlns:a="http://schemas.openxmlformats.org/drawingml/2006/main">
+            <a:srgbClr val="FEF2F2"/>
+          </a:solidFill>
+          <a:ln xmlns:a="http://schemas.openxmlformats.org/drawingml/2006/main" w="9525">
+            <a:solidFill>
+              <a:srgbClr val="FECACA"/>
+            </a:solidFill>
+            <a:prstDash val="solid"/>
+          </a:ln>
+        </p:spPr>
+      </p:sp>
+      <p:sp>
+        <p:nvSpPr>
+          <p:cNvPr id="6" name="">
+            <a:extLst xmlns:a="http://schemas.openxmlformats.org/drawingml/2006/main">
+              <a:ext uri="{FF2B5EF4-FFF2-40B4-BE49-F238E27FC236}">
+                <a16:creationId xmlns:a16="http://schemas.microsoft.com/office/drawing/2014/main" id="{CB00F1AF-4D34-490F-A0A5-9DC095CA6716}"/>
+              </a:ext>
+            </a:extLst>
+          </p:cNvPr>
+          <p:cNvSpPr>
+            <a:spLocks xmlns:a="http://schemas.openxmlformats.org/drawingml/2006/main" noGrp="1"/>
+          </p:cNvSpPr>
+          <p:nvPr/>
+        </p:nvSpPr>
+        <p:spPr>
+          <a:xfrm xmlns:a="http://schemas.openxmlformats.org/drawingml/2006/main">
+            <a:off x="9505950" y="2076450"/>
+            <a:ext cx="1600200" cy="476250"/>
+          </a:xfrm>
+          <a:prstGeom xmlns:a="http://schemas.openxmlformats.org/drawingml/2006/main" prst="rect">
+            <a:avLst/>
+          </a:prstGeom>
+          <a:noFill xmlns:a="http://schemas.openxmlformats.org/drawingml/2006/main"/>
+          <a:ln xmlns:a="http://schemas.openxmlformats.org/drawingml/2006/main" w="0">
+            <a:noFill/>
+            <a:prstDash val="solid"/>
+          </a:ln>
+        </p:spPr>
+        <p:txBody>
+          <a:bodyPr xmlns:a="http://schemas.openxmlformats.org/drawingml/2006/main" anchor="t"/>
+          <a:lstStyle xmlns:a="http://schemas.openxmlformats.org/drawingml/2006/main"/>
+          <a:p xmlns:a="http://schemas.openxmlformats.org/drawingml/2006/main">
+            <a:pPr algn="ctr">
+              <a:defRPr sz="3600" b="1">
+                <a:solidFill>
+                  <a:srgbClr val="B91C1C"/>
+                </a:solidFill>
+              </a:defRPr>
+            </a:pPr>
+            <a:r>
+              <a:rPr sz="3600" b="1">
+                <a:solidFill>
+                  <a:srgbClr val="B91C1C"/>
+                </a:solidFill>
+              </a:rPr>
+              <a:t>8 / 8</a:t>
+            </a:r>
+          </a:p>
+        </p:txBody>
+      </p:sp>
+      <p:sp>
+        <p:nvSpPr>
+          <p:cNvPr id="7" name="">
+            <a:extLst xmlns:a="http://schemas.openxmlformats.org/drawingml/2006/main">
+              <a:ext uri="{FF2B5EF4-FFF2-40B4-BE49-F238E27FC236}">
+                <a16:creationId xmlns:a16="http://schemas.microsoft.com/office/drawing/2014/main" id="{7F74B511-1B9E-4841-94D2-DBACEA63503A}"/>
+              </a:ext>
+            </a:extLst>
+          </p:cNvPr>
+          <p:cNvSpPr>
+            <a:spLocks xmlns:a="http://schemas.openxmlformats.org/drawingml/2006/main" noGrp="1"/>
+          </p:cNvSpPr>
+          <p:nvPr/>
+        </p:nvSpPr>
+        <p:spPr>
+          <a:xfrm xmlns:a="http://schemas.openxmlformats.org/drawingml/2006/main">
+            <a:off x="9505950" y="2628900"/>
+            <a:ext cx="1600200" cy="266700"/>
+          </a:xfrm>
+          <a:prstGeom xmlns:a="http://schemas.openxmlformats.org/drawingml/2006/main" prst="rect">
+            <a:avLst/>
+          </a:prstGeom>
+          <a:noFill xmlns:a="http://schemas.openxmlformats.org/drawingml/2006/main"/>
+          <a:ln xmlns:a="http://schemas.openxmlformats.org/drawingml/2006/main" w="0">
+            <a:noFill/>
+            <a:prstDash val="solid"/>
+          </a:ln>
+        </p:spPr>
+        <p:txBody>
+          <a:bodyPr xmlns:a="http://schemas.openxmlformats.org/drawingml/2006/main" anchor="t"/>
+          <a:lstStyle xmlns:a="http://schemas.openxmlformats.org/drawingml/2006/main"/>
+          <a:p xmlns:a="http://schemas.openxmlformats.org/drawingml/2006/main">
+            <a:pPr algn="ctr">
+              <a:defRPr sz="1275" b="0">
+                <a:solidFill>
+                  <a:srgbClr val="334155"/>
+                </a:solidFill>
+              </a:defRPr>
+            </a:pPr>
+            <a:r>
+              <a:rPr sz="1275" b="0">
+                <a:solidFill>
+                  <a:srgbClr val="334155"/>
+                </a:solidFill>
+              </a:rPr>
+              <a:t>H2D loads finished late</a:t>
+            </a:r>
+          </a:p>
+        </p:txBody>
+      </p:sp>
+      <p:sp>
+        <p:nvSpPr>
+          <p:cNvPr id="8" name="">
+            <a:extLst xmlns:a="http://schemas.openxmlformats.org/drawingml/2006/main">
+              <a:ext uri="{FF2B5EF4-FFF2-40B4-BE49-F238E27FC236}">
+                <a16:creationId xmlns:a16="http://schemas.microsoft.com/office/drawing/2014/main" id="{F191A9BD-D0E6-44BE-AD05-C608F17D0DB4}"/>
+              </a:ext>
+            </a:extLst>
+          </p:cNvPr>
+          <p:cNvSpPr>
+            <a:spLocks xmlns:a="http://schemas.openxmlformats.org/drawingml/2006/main" noGrp="1"/>
+          </p:cNvSpPr>
+          <p:nvPr/>
+        </p:nvSpPr>
+        <p:spPr>
+          <a:xfrm xmlns:a="http://schemas.openxmlformats.org/drawingml/2006/main">
+            <a:off x="9258300" y="3524250"/>
+            <a:ext cx="2095500" cy="742950"/>
           </a:xfrm>
           <a:prstGeom xmlns:a="http://schemas.openxmlformats.org/drawingml/2006/main" prst="rect">
             <a:avLst/>
@@ -8093,29 +9888,29 @@
           <a:lstStyle xmlns:a="http://schemas.openxmlformats.org/drawingml/2006/main"/>
           <a:p xmlns:a="http://schemas.openxmlformats.org/drawingml/2006/main">
             <a:pPr algn="l">
-              <a:defRPr sz="1275" b="0">
+              <a:defRPr sz="1575" b="0">
                 <a:solidFill>
                   <a:srgbClr val="334155"/>
                 </a:solidFill>
               </a:defRPr>
             </a:pPr>
             <a:r>
-              <a:rPr sz="1275" b="0">
+              <a:rPr sz="1575" b="0">
                 <a:solidFill>
                   <a:srgbClr val="334155"/>
                 </a:solidFill>
               </a:rPr>
-              <a:t>The stage markers separate submission, SGLang receive, scheduler queue/admit, and visible KV H2D movement.</a:t>
-            </a:r>
-          </a:p>
-        </p:txBody>
-      </p:sp>
-      <p:sp>
-        <p:nvSpPr>
-          <p:cNvPr id="6" name="">
-            <a:extLst xmlns:a="http://schemas.openxmlformats.org/drawingml/2006/main">
-              <a:ext uri="{FF2B5EF4-FFF2-40B4-BE49-F238E27FC236}">
-                <a16:creationId xmlns:a16="http://schemas.microsoft.com/office/drawing/2014/main" id="{940D003E-7BEE-4EC5-A130-939FD5C9AD61}"/>
+              <a:t>All visible replay-side KV loads finished below the 0 ms deadline line.</a:t>
+            </a:r>
+          </a:p>
+        </p:txBody>
+      </p:sp>
+      <p:sp>
+        <p:nvSpPr>
+          <p:cNvPr id="9" name="">
+            <a:extLst xmlns:a="http://schemas.openxmlformats.org/drawingml/2006/main">
+              <a:ext uri="{FF2B5EF4-FFF2-40B4-BE49-F238E27FC236}">
+                <a16:creationId xmlns:a16="http://schemas.microsoft.com/office/drawing/2014/main" id="{9E2CC8D2-F04E-44B5-97A2-0CD12CDF4131}"/>
               </a:ext>
             </a:extLst>
           </p:cNvPr>
@@ -8155,17 +9950,17 @@
                   <a:srgbClr val="64748B"/>
                 </a:solidFill>
               </a:rPr>
-              <a:t>Source: latest_master_report.html, Replay Queue Timeline vs H2D Start</a:t>
-            </a:r>
-          </a:p>
-        </p:txBody>
-      </p:sp>
-      <p:sp>
-        <p:nvSpPr>
-          <p:cNvPr id="7" name="">
-            <a:extLst xmlns:a="http://schemas.openxmlformats.org/drawingml/2006/main">
-              <a:ext uri="{FF2B5EF4-FFF2-40B4-BE49-F238E27FC236}">
-                <a16:creationId xmlns:a16="http://schemas.microsoft.com/office/drawing/2014/main" id="{72B9AC0E-AE27-4207-AA20-F5F9C3559210}"/>
+              <a:t>Source: latest_master_report.html, Global Replay H2D Readiness</a:t>
+            </a:r>
+          </a:p>
+        </p:txBody>
+      </p:sp>
+      <p:sp>
+        <p:nvSpPr>
+          <p:cNvPr id="10" name="">
+            <a:extLst xmlns:a="http://schemas.openxmlformats.org/drawingml/2006/main">
+              <a:ext uri="{FF2B5EF4-FFF2-40B4-BE49-F238E27FC236}">
+                <a16:creationId xmlns:a16="http://schemas.microsoft.com/office/drawing/2014/main" id="{7A1CC0CE-C2D7-4B3F-BE6F-67B3578AC330}"/>
               </a:ext>
             </a:extLst>
           </p:cNvPr>
@@ -8212,10 +10007,10 @@
       </p:sp>
       <p:sp>
         <p:nvSpPr>
-          <p:cNvPr id="8" name="">
-            <a:extLst xmlns:a="http://schemas.openxmlformats.org/drawingml/2006/main">
-              <a:ext uri="{FF2B5EF4-FFF2-40B4-BE49-F238E27FC236}">
-                <a16:creationId xmlns:a16="http://schemas.microsoft.com/office/drawing/2014/main" id="{15F71398-B653-4B92-91A1-FA5F8DCDC495}"/>
+          <p:cNvPr id="11" name="">
+            <a:extLst xmlns:a="http://schemas.openxmlformats.org/drawingml/2006/main">
+              <a:ext uri="{FF2B5EF4-FFF2-40B4-BE49-F238E27FC236}">
+                <a16:creationId xmlns:a16="http://schemas.microsoft.com/office/drawing/2014/main" id="{28822C22-DF86-44B2-BCB1-C8171CF456A0}"/>
               </a:ext>
             </a:extLst>
           </p:cNvPr>
@@ -8263,7 +10058,7 @@
     </p:spTree>
     <p:extLst>
       <p:ext uri="{BB962C8B-B14F-4D97-AF65-F5344CB8AC3E}">
-        <p14:creationId xmlns:p14="http://schemas.microsoft.com/office/powerpoint/2010/main" val="1447223750"/>
+        <p14:creationId xmlns:p14="http://schemas.microsoft.com/office/powerpoint/2010/main" val="2091445207"/>
       </p:ext>
     </p:extLst>
   </p:cSld>
@@ -8291,10 +10086,10 @@
       </p:grpSpPr>
       <p:sp>
         <p:nvSpPr>
-          <p:cNvPr id="27" name="">
-            <a:extLst xmlns:a="http://schemas.openxmlformats.org/drawingml/2006/main">
-              <a:ext uri="{FF2B5EF4-FFF2-40B4-BE49-F238E27FC236}">
-                <a16:creationId xmlns:a16="http://schemas.microsoft.com/office/drawing/2014/main" id="{2AD63010-72F3-43BC-874A-B4C35AFD7869}"/>
+          <p:cNvPr id="9" name="">
+            <a:extLst xmlns:a="http://schemas.openxmlformats.org/drawingml/2006/main">
+              <a:ext uri="{FF2B5EF4-FFF2-40B4-BE49-F238E27FC236}">
+                <a16:creationId xmlns:a16="http://schemas.microsoft.com/office/drawing/2014/main" id="{6CEF5D84-8BD8-4153-9201-B8605B844B10}"/>
               </a:ext>
             </a:extLst>
           </p:cNvPr>
@@ -8334,7 +10129,7 @@
                   <a:srgbClr val="0F172A"/>
                 </a:solidFill>
               </a:rPr>
-              <a:t>Hardware support can make hints enforceable</a:t>
+              <a:t>The delay is not just copy time</a:t>
             </a:r>
           </a:p>
         </p:txBody>
@@ -8344,7 +10139,7 @@
           <p:cNvPr id="2" name="">
             <a:extLst xmlns:a="http://schemas.openxmlformats.org/drawingml/2006/main">
               <a:ext uri="{FF2B5EF4-FFF2-40B4-BE49-F238E27FC236}">
-                <a16:creationId xmlns:a16="http://schemas.microsoft.com/office/drawing/2014/main" id="{BF388ED5-EC26-49D5-980F-3A91AAC602EA}"/>
+                <a16:creationId xmlns:a16="http://schemas.microsoft.com/office/drawing/2014/main" id="{5391E6EE-7B0E-4FA2-8310-C8BBEA91CE1C}"/>
               </a:ext>
             </a:extLst>
           </p:cNvPr>
@@ -8384,7 +10179,7 @@
                   <a:srgbClr val="64748B"/>
                 </a:solidFill>
               </a:rPr>
-              <a:t>The opportunity is to treat KV as deadline-sensitive memory, not generic bytes.</a:t>
+              <a:t>The request enters normal software/runtime scheduling before visible KV H2D begins.</a:t>
             </a:r>
           </a:p>
         </p:txBody>
@@ -8394,119 +10189,91 @@
           <p:cNvPr id="3" name="">
             <a:extLst xmlns:a="http://schemas.openxmlformats.org/drawingml/2006/main">
               <a:ext uri="{FF2B5EF4-FFF2-40B4-BE49-F238E27FC236}">
-                <a16:creationId xmlns:a16="http://schemas.microsoft.com/office/drawing/2014/main" id="{E0092D56-1D70-4C0D-9171-499148EB32D4}"/>
-              </a:ext>
-            </a:extLst>
-          </p:cNvPr>
-          <p:cNvSpPr>
-            <a:spLocks xmlns:a="http://schemas.openxmlformats.org/drawingml/2006/main" noGrp="1"/>
-          </p:cNvSpPr>
-          <p:nvPr/>
-        </p:nvSpPr>
-        <p:spPr>
-          <a:xfrm xmlns:a="http://schemas.openxmlformats.org/drawingml/2006/main">
-            <a:off x="552450" y="1962150"/>
-            <a:ext cx="1695450" cy="1695450"/>
+                <a16:creationId xmlns:a16="http://schemas.microsoft.com/office/drawing/2014/main" id="{A5A495FB-4327-499E-95E7-108260CD409D}"/>
+              </a:ext>
+            </a:extLst>
+          </p:cNvPr>
+          <p:cNvSpPr>
+            <a:spLocks xmlns:a="http://schemas.openxmlformats.org/drawingml/2006/main" noGrp="1"/>
+          </p:cNvSpPr>
+          <p:nvPr/>
+        </p:nvSpPr>
+        <p:spPr>
+          <a:xfrm xmlns:a="http://schemas.openxmlformats.org/drawingml/2006/main">
+            <a:off x="323850" y="1333500"/>
+            <a:ext cx="10820400" cy="4343400"/>
           </a:xfrm>
           <a:prstGeom xmlns:a="http://schemas.openxmlformats.org/drawingml/2006/main" prst="roundRect">
             <a:avLst>
-              <a:gd name="adj" fmla="val 3371"/>
+              <a:gd name="adj" fmla="val 1316"/>
             </a:avLst>
           </a:prstGeom>
           <a:solidFill xmlns:a="http://schemas.openxmlformats.org/drawingml/2006/main">
-            <a:srgbClr val="EFF6FF"/>
+            <a:srgbClr val="FFFFFF"/>
           </a:solidFill>
           <a:ln xmlns:a="http://schemas.openxmlformats.org/drawingml/2006/main" w="9525">
             <a:solidFill>
-              <a:srgbClr val="2563EB"/>
+              <a:srgbClr val="E5E7EB"/>
             </a:solidFill>
             <a:prstDash val="solid"/>
           </a:ln>
         </p:spPr>
       </p:sp>
-      <p:sp>
-        <p:nvSpPr>
-          <p:cNvPr id="4" name="">
-            <a:extLst xmlns:a="http://schemas.openxmlformats.org/drawingml/2006/main">
-              <a:ext uri="{FF2B5EF4-FFF2-40B4-BE49-F238E27FC236}">
-                <a16:creationId xmlns:a16="http://schemas.microsoft.com/office/drawing/2014/main" id="{FFA6716C-D257-4B7C-BE30-575D01AD6F3F}"/>
-              </a:ext>
-            </a:extLst>
-          </p:cNvPr>
-          <p:cNvSpPr>
-            <a:spLocks xmlns:a="http://schemas.openxmlformats.org/drawingml/2006/main" noGrp="1"/>
-          </p:cNvSpPr>
-          <p:nvPr/>
-        </p:nvSpPr>
-        <p:spPr>
-          <a:xfrm xmlns:a="http://schemas.openxmlformats.org/drawingml/2006/main">
-            <a:off x="704850" y="2228850"/>
-            <a:ext cx="1390650" cy="323850"/>
-          </a:xfrm>
-          <a:prstGeom xmlns:a="http://schemas.openxmlformats.org/drawingml/2006/main" prst="rect">
-            <a:avLst/>
-          </a:prstGeom>
-          <a:noFill xmlns:a="http://schemas.openxmlformats.org/drawingml/2006/main"/>
-          <a:ln xmlns:a="http://schemas.openxmlformats.org/drawingml/2006/main" w="0">
-            <a:noFill/>
-            <a:prstDash val="solid"/>
-          </a:ln>
-        </p:spPr>
-        <p:txBody>
-          <a:bodyPr xmlns:a="http://schemas.openxmlformats.org/drawingml/2006/main" anchor="t"/>
-          <a:lstStyle xmlns:a="http://schemas.openxmlformats.org/drawingml/2006/main"/>
-          <a:p xmlns:a="http://schemas.openxmlformats.org/drawingml/2006/main">
-            <a:pPr algn="ctr">
-              <a:defRPr sz="1650" b="1">
-                <a:solidFill>
-                  <a:srgbClr val="0F172A"/>
-                </a:solidFill>
-              </a:defRPr>
-            </a:pPr>
-            <a:r>
-              <a:rPr sz="1650" b="1">
-                <a:solidFill>
-                  <a:srgbClr val="0F172A"/>
-                </a:solidFill>
-              </a:rPr>
-              <a:t>Runtime hint</a:t>
-            </a:r>
-          </a:p>
-        </p:txBody>
-      </p:sp>
+      <p:pic>
+        <p:nvPicPr>
+          <p:cNvPr id="12" name=""/>
+          <p:cNvPicPr>
+            <a:picLocks xmlns:a="http://schemas.openxmlformats.org/drawingml/2006/main" noChangeAspect="1"/>
+          </p:cNvPicPr>
+          <p:nvPr/>
+        </p:nvPicPr>
+        <p:blipFill>
+          <a:blip xmlns:r="http://schemas.openxmlformats.org/officeDocument/2006/relationships" xmlns:a="http://schemas.openxmlformats.org/drawingml/2006/main" r:embed="R10ab5f9d2f2746c3"/>
+          <a:stretch xmlns:a="http://schemas.openxmlformats.org/drawingml/2006/main"/>
+        </p:blipFill>
+        <p:spPr>
+          <a:xfrm xmlns:a="http://schemas.openxmlformats.org/drawingml/2006/main">
+            <a:off x="1247835" y="1409700"/>
+            <a:ext cx="8972430" cy="4191000"/>
+          </a:xfrm>
+          <a:prstGeom xmlns:a="http://schemas.openxmlformats.org/drawingml/2006/main" prst="rect">
+            <a:avLst/>
+          </a:prstGeom>
+        </p:spPr>
+      </p:pic>
       <p:sp>
         <p:nvSpPr>
           <p:cNvPr id="5" name="">
             <a:extLst xmlns:a="http://schemas.openxmlformats.org/drawingml/2006/main">
               <a:ext uri="{FF2B5EF4-FFF2-40B4-BE49-F238E27FC236}">
-                <a16:creationId xmlns:a16="http://schemas.microsoft.com/office/drawing/2014/main" id="{8952EEFE-705B-4BF3-AD38-A155B63F8E00}"/>
-              </a:ext>
-            </a:extLst>
-          </p:cNvPr>
-          <p:cNvSpPr>
-            <a:spLocks xmlns:a="http://schemas.openxmlformats.org/drawingml/2006/main" noGrp="1"/>
-          </p:cNvSpPr>
-          <p:nvPr/>
-        </p:nvSpPr>
-        <p:spPr>
-          <a:xfrm xmlns:a="http://schemas.openxmlformats.org/drawingml/2006/main">
-            <a:off x="723900" y="2838450"/>
-            <a:ext cx="1352550" cy="533400"/>
-          </a:xfrm>
-          <a:prstGeom xmlns:a="http://schemas.openxmlformats.org/drawingml/2006/main" prst="rect">
-            <a:avLst/>
-          </a:prstGeom>
-          <a:noFill xmlns:a="http://schemas.openxmlformats.org/drawingml/2006/main"/>
-          <a:ln xmlns:a="http://schemas.openxmlformats.org/drawingml/2006/main" w="0">
-            <a:noFill/>
-            <a:prstDash val="solid"/>
-          </a:ln>
-        </p:spPr>
-        <p:txBody>
-          <a:bodyPr xmlns:a="http://schemas.openxmlformats.org/drawingml/2006/main" anchor="t"/>
-          <a:lstStyle xmlns:a="http://schemas.openxmlformats.org/drawingml/2006/main"/>
-          <a:p xmlns:a="http://schemas.openxmlformats.org/drawingml/2006/main">
-            <a:pPr algn="ctr">
+                <a16:creationId xmlns:a16="http://schemas.microsoft.com/office/drawing/2014/main" id="{FD004F01-8F39-4253-A54F-0C13C4E736FA}"/>
+              </a:ext>
+            </a:extLst>
+          </p:cNvPr>
+          <p:cNvSpPr>
+            <a:spLocks xmlns:a="http://schemas.openxmlformats.org/drawingml/2006/main" noGrp="1"/>
+          </p:cNvSpPr>
+          <p:nvPr/>
+        </p:nvSpPr>
+        <p:spPr>
+          <a:xfrm xmlns:a="http://schemas.openxmlformats.org/drawingml/2006/main">
+            <a:off x="685800" y="5791200"/>
+            <a:ext cx="9906000" cy="228600"/>
+          </a:xfrm>
+          <a:prstGeom xmlns:a="http://schemas.openxmlformats.org/drawingml/2006/main" prst="rect">
+            <a:avLst/>
+          </a:prstGeom>
+          <a:noFill xmlns:a="http://schemas.openxmlformats.org/drawingml/2006/main"/>
+          <a:ln xmlns:a="http://schemas.openxmlformats.org/drawingml/2006/main" w="0">
+            <a:noFill/>
+            <a:prstDash val="solid"/>
+          </a:ln>
+        </p:spPr>
+        <p:txBody>
+          <a:bodyPr xmlns:a="http://schemas.openxmlformats.org/drawingml/2006/main" anchor="t"/>
+          <a:lstStyle xmlns:a="http://schemas.openxmlformats.org/drawingml/2006/main"/>
+          <a:p xmlns:a="http://schemas.openxmlformats.org/drawingml/2006/main">
+            <a:pPr algn="l">
               <a:defRPr sz="1275" b="0">
                 <a:solidFill>
                   <a:srgbClr val="334155"/>
@@ -8519,7 +10286,7 @@
                   <a:srgbClr val="334155"/>
                 </a:solidFill>
               </a:rPr>
-              <a:t>session, priority, deadline</a:t>
+              <a:t>The stage markers separate submission, SGLang receive, scheduler queue/admit, and visible KV H2D movement.</a:t>
             </a:r>
           </a:p>
         </p:txBody>
@@ -8529,47 +10296,47 @@
           <p:cNvPr id="6" name="">
             <a:extLst xmlns:a="http://schemas.openxmlformats.org/drawingml/2006/main">
               <a:ext uri="{FF2B5EF4-FFF2-40B4-BE49-F238E27FC236}">
-                <a16:creationId xmlns:a16="http://schemas.microsoft.com/office/drawing/2014/main" id="{F2C79B21-6E3E-4DA4-B3C7-AB0E0B4C940D}"/>
-              </a:ext>
-            </a:extLst>
-          </p:cNvPr>
-          <p:cNvSpPr>
-            <a:spLocks xmlns:a="http://schemas.openxmlformats.org/drawingml/2006/main" noGrp="1"/>
-          </p:cNvSpPr>
-          <p:nvPr/>
-        </p:nvSpPr>
-        <p:spPr>
-          <a:xfrm xmlns:a="http://schemas.openxmlformats.org/drawingml/2006/main">
-            <a:off x="2305050" y="2552700"/>
-            <a:ext cx="476250" cy="476250"/>
-          </a:xfrm>
-          <a:prstGeom xmlns:a="http://schemas.openxmlformats.org/drawingml/2006/main" prst="rect">
-            <a:avLst/>
-          </a:prstGeom>
-          <a:noFill xmlns:a="http://schemas.openxmlformats.org/drawingml/2006/main"/>
-          <a:ln xmlns:a="http://schemas.openxmlformats.org/drawingml/2006/main" w="0">
-            <a:noFill/>
-            <a:prstDash val="solid"/>
-          </a:ln>
-        </p:spPr>
-        <p:txBody>
-          <a:bodyPr xmlns:a="http://schemas.openxmlformats.org/drawingml/2006/main" anchor="t"/>
-          <a:lstStyle xmlns:a="http://schemas.openxmlformats.org/drawingml/2006/main"/>
-          <a:p xmlns:a="http://schemas.openxmlformats.org/drawingml/2006/main">
-            <a:pPr algn="ctr">
-              <a:defRPr sz="2550" b="1">
-                <a:solidFill>
-                  <a:srgbClr val="64748B"/>
-                </a:solidFill>
-              </a:defRPr>
-            </a:pPr>
-            <a:r>
-              <a:rPr sz="2550" b="1">
-                <a:solidFill>
-                  <a:srgbClr val="64748B"/>
-                </a:solidFill>
-              </a:rPr>
-              <a:t>→</a:t>
+                <a16:creationId xmlns:a16="http://schemas.microsoft.com/office/drawing/2014/main" id="{DAF4585C-DAD1-4142-887B-94740EAE2140}"/>
+              </a:ext>
+            </a:extLst>
+          </p:cNvPr>
+          <p:cNvSpPr>
+            <a:spLocks xmlns:a="http://schemas.openxmlformats.org/drawingml/2006/main" noGrp="1"/>
+          </p:cNvSpPr>
+          <p:nvPr/>
+        </p:nvSpPr>
+        <p:spPr>
+          <a:xfrm xmlns:a="http://schemas.openxmlformats.org/drawingml/2006/main">
+            <a:off x="400050" y="6153150"/>
+            <a:ext cx="7810500" cy="190500"/>
+          </a:xfrm>
+          <a:prstGeom xmlns:a="http://schemas.openxmlformats.org/drawingml/2006/main" prst="rect">
+            <a:avLst/>
+          </a:prstGeom>
+          <a:noFill xmlns:a="http://schemas.openxmlformats.org/drawingml/2006/main"/>
+          <a:ln xmlns:a="http://schemas.openxmlformats.org/drawingml/2006/main" w="0">
+            <a:noFill/>
+            <a:prstDash val="solid"/>
+          </a:ln>
+        </p:spPr>
+        <p:txBody>
+          <a:bodyPr xmlns:a="http://schemas.openxmlformats.org/drawingml/2006/main" anchor="t"/>
+          <a:lstStyle xmlns:a="http://schemas.openxmlformats.org/drawingml/2006/main"/>
+          <a:p xmlns:a="http://schemas.openxmlformats.org/drawingml/2006/main">
+            <a:pPr algn="l">
+              <a:defRPr sz="825" b="0">
+                <a:solidFill>
+                  <a:srgbClr val="64748B"/>
+                </a:solidFill>
+              </a:defRPr>
+            </a:pPr>
+            <a:r>
+              <a:rPr sz="825" b="0">
+                <a:solidFill>
+                  <a:srgbClr val="64748B"/>
+                </a:solidFill>
+              </a:rPr>
+              <a:t>Source: latest_master_report.html, Replay Queue Timeline vs H2D Start</a:t>
             </a:r>
           </a:p>
         </p:txBody>
@@ -8579,832 +10346,7 @@
           <p:cNvPr id="7" name="">
             <a:extLst xmlns:a="http://schemas.openxmlformats.org/drawingml/2006/main">
               <a:ext uri="{FF2B5EF4-FFF2-40B4-BE49-F238E27FC236}">
-                <a16:creationId xmlns:a16="http://schemas.microsoft.com/office/drawing/2014/main" id="{072CDDCC-8365-4E38-812E-A3405E3F9F82}"/>
-              </a:ext>
-            </a:extLst>
-          </p:cNvPr>
-          <p:cNvSpPr>
-            <a:spLocks xmlns:a="http://schemas.openxmlformats.org/drawingml/2006/main" noGrp="1"/>
-          </p:cNvSpPr>
-          <p:nvPr/>
-        </p:nvSpPr>
-        <p:spPr>
-          <a:xfrm xmlns:a="http://schemas.openxmlformats.org/drawingml/2006/main">
-            <a:off x="2857500" y="1962150"/>
-            <a:ext cx="1695450" cy="1695450"/>
-          </a:xfrm>
-          <a:prstGeom xmlns:a="http://schemas.openxmlformats.org/drawingml/2006/main" prst="roundRect">
-            <a:avLst>
-              <a:gd name="adj" fmla="val 3371"/>
-            </a:avLst>
-          </a:prstGeom>
-          <a:solidFill xmlns:a="http://schemas.openxmlformats.org/drawingml/2006/main">
-            <a:srgbClr val="F5F3FF"/>
-          </a:solidFill>
-          <a:ln xmlns:a="http://schemas.openxmlformats.org/drawingml/2006/main" w="9525">
-            <a:solidFill>
-              <a:srgbClr val="A855F7"/>
-            </a:solidFill>
-            <a:prstDash val="solid"/>
-          </a:ln>
-        </p:spPr>
-      </p:sp>
-      <p:sp>
-        <p:nvSpPr>
-          <p:cNvPr id="8" name="">
-            <a:extLst xmlns:a="http://schemas.openxmlformats.org/drawingml/2006/main">
-              <a:ext uri="{FF2B5EF4-FFF2-40B4-BE49-F238E27FC236}">
-                <a16:creationId xmlns:a16="http://schemas.microsoft.com/office/drawing/2014/main" id="{521C4A3C-E8A9-48B7-8777-B7ACE410042B}"/>
-              </a:ext>
-            </a:extLst>
-          </p:cNvPr>
-          <p:cNvSpPr>
-            <a:spLocks xmlns:a="http://schemas.openxmlformats.org/drawingml/2006/main" noGrp="1"/>
-          </p:cNvSpPr>
-          <p:nvPr/>
-        </p:nvSpPr>
-        <p:spPr>
-          <a:xfrm xmlns:a="http://schemas.openxmlformats.org/drawingml/2006/main">
-            <a:off x="3009900" y="2228850"/>
-            <a:ext cx="1390650" cy="323850"/>
-          </a:xfrm>
-          <a:prstGeom xmlns:a="http://schemas.openxmlformats.org/drawingml/2006/main" prst="rect">
-            <a:avLst/>
-          </a:prstGeom>
-          <a:noFill xmlns:a="http://schemas.openxmlformats.org/drawingml/2006/main"/>
-          <a:ln xmlns:a="http://schemas.openxmlformats.org/drawingml/2006/main" w="0">
-            <a:noFill/>
-            <a:prstDash val="solid"/>
-          </a:ln>
-        </p:spPr>
-        <p:txBody>
-          <a:bodyPr xmlns:a="http://schemas.openxmlformats.org/drawingml/2006/main" anchor="t"/>
-          <a:lstStyle xmlns:a="http://schemas.openxmlformats.org/drawingml/2006/main"/>
-          <a:p xmlns:a="http://schemas.openxmlformats.org/drawingml/2006/main">
-            <a:pPr algn="ctr">
-              <a:defRPr sz="1650" b="1">
-                <a:solidFill>
-                  <a:srgbClr val="0F172A"/>
-                </a:solidFill>
-              </a:defRPr>
-            </a:pPr>
-            <a:r>
-              <a:rPr sz="1650" b="1">
-                <a:solidFill>
-                  <a:srgbClr val="0F172A"/>
-                </a:solidFill>
-              </a:rPr>
-              <a:t>KV-aware queue</a:t>
-            </a:r>
-          </a:p>
-        </p:txBody>
-      </p:sp>
-      <p:sp>
-        <p:nvSpPr>
-          <p:cNvPr id="9" name="">
-            <a:extLst xmlns:a="http://schemas.openxmlformats.org/drawingml/2006/main">
-              <a:ext uri="{FF2B5EF4-FFF2-40B4-BE49-F238E27FC236}">
-                <a16:creationId xmlns:a16="http://schemas.microsoft.com/office/drawing/2014/main" id="{CEDDC49B-9888-4BA0-8EF4-9C70F4297D43}"/>
-              </a:ext>
-            </a:extLst>
-          </p:cNvPr>
-          <p:cNvSpPr>
-            <a:spLocks xmlns:a="http://schemas.openxmlformats.org/drawingml/2006/main" noGrp="1"/>
-          </p:cNvSpPr>
-          <p:nvPr/>
-        </p:nvSpPr>
-        <p:spPr>
-          <a:xfrm xmlns:a="http://schemas.openxmlformats.org/drawingml/2006/main">
-            <a:off x="3028950" y="2838450"/>
-            <a:ext cx="1352550" cy="533400"/>
-          </a:xfrm>
-          <a:prstGeom xmlns:a="http://schemas.openxmlformats.org/drawingml/2006/main" prst="rect">
-            <a:avLst/>
-          </a:prstGeom>
-          <a:noFill xmlns:a="http://schemas.openxmlformats.org/drawingml/2006/main"/>
-          <a:ln xmlns:a="http://schemas.openxmlformats.org/drawingml/2006/main" w="0">
-            <a:noFill/>
-            <a:prstDash val="solid"/>
-          </a:ln>
-        </p:spPr>
-        <p:txBody>
-          <a:bodyPr xmlns:a="http://schemas.openxmlformats.org/drawingml/2006/main" anchor="t"/>
-          <a:lstStyle xmlns:a="http://schemas.openxmlformats.org/drawingml/2006/main"/>
-          <a:p xmlns:a="http://schemas.openxmlformats.org/drawingml/2006/main">
-            <a:pPr algn="ctr">
-              <a:defRPr sz="1275" b="0">
-                <a:solidFill>
-                  <a:srgbClr val="334155"/>
-                </a:solidFill>
-              </a:defRPr>
-            </a:pPr>
-            <a:r>
-              <a:rPr sz="1275" b="0">
-                <a:solidFill>
-                  <a:srgbClr val="334155"/>
-                </a:solidFill>
-              </a:rPr>
-              <a:t>order urgent KV first</a:t>
-            </a:r>
-          </a:p>
-        </p:txBody>
-      </p:sp>
-      <p:sp>
-        <p:nvSpPr>
-          <p:cNvPr id="10" name="">
-            <a:extLst xmlns:a="http://schemas.openxmlformats.org/drawingml/2006/main">
-              <a:ext uri="{FF2B5EF4-FFF2-40B4-BE49-F238E27FC236}">
-                <a16:creationId xmlns:a16="http://schemas.microsoft.com/office/drawing/2014/main" id="{7A943085-BFFD-4E65-B50A-35BA44D2D35F}"/>
-              </a:ext>
-            </a:extLst>
-          </p:cNvPr>
-          <p:cNvSpPr>
-            <a:spLocks xmlns:a="http://schemas.openxmlformats.org/drawingml/2006/main" noGrp="1"/>
-          </p:cNvSpPr>
-          <p:nvPr/>
-        </p:nvSpPr>
-        <p:spPr>
-          <a:xfrm xmlns:a="http://schemas.openxmlformats.org/drawingml/2006/main">
-            <a:off x="4610100" y="2552700"/>
-            <a:ext cx="476250" cy="476250"/>
-          </a:xfrm>
-          <a:prstGeom xmlns:a="http://schemas.openxmlformats.org/drawingml/2006/main" prst="rect">
-            <a:avLst/>
-          </a:prstGeom>
-          <a:noFill xmlns:a="http://schemas.openxmlformats.org/drawingml/2006/main"/>
-          <a:ln xmlns:a="http://schemas.openxmlformats.org/drawingml/2006/main" w="0">
-            <a:noFill/>
-            <a:prstDash val="solid"/>
-          </a:ln>
-        </p:spPr>
-        <p:txBody>
-          <a:bodyPr xmlns:a="http://schemas.openxmlformats.org/drawingml/2006/main" anchor="t"/>
-          <a:lstStyle xmlns:a="http://schemas.openxmlformats.org/drawingml/2006/main"/>
-          <a:p xmlns:a="http://schemas.openxmlformats.org/drawingml/2006/main">
-            <a:pPr algn="ctr">
-              <a:defRPr sz="2550" b="1">
-                <a:solidFill>
-                  <a:srgbClr val="64748B"/>
-                </a:solidFill>
-              </a:defRPr>
-            </a:pPr>
-            <a:r>
-              <a:rPr sz="2550" b="1">
-                <a:solidFill>
-                  <a:srgbClr val="64748B"/>
-                </a:solidFill>
-              </a:rPr>
-              <a:t>→</a:t>
-            </a:r>
-          </a:p>
-        </p:txBody>
-      </p:sp>
-      <p:sp>
-        <p:nvSpPr>
-          <p:cNvPr id="11" name="">
-            <a:extLst xmlns:a="http://schemas.openxmlformats.org/drawingml/2006/main">
-              <a:ext uri="{FF2B5EF4-FFF2-40B4-BE49-F238E27FC236}">
-                <a16:creationId xmlns:a16="http://schemas.microsoft.com/office/drawing/2014/main" id="{BCA44681-C801-4B02-AE19-1E6E116E3845}"/>
-              </a:ext>
-            </a:extLst>
-          </p:cNvPr>
-          <p:cNvSpPr>
-            <a:spLocks xmlns:a="http://schemas.openxmlformats.org/drawingml/2006/main" noGrp="1"/>
-          </p:cNvSpPr>
-          <p:nvPr/>
-        </p:nvSpPr>
-        <p:spPr>
-          <a:xfrm xmlns:a="http://schemas.openxmlformats.org/drawingml/2006/main">
-            <a:off x="5162550" y="1962150"/>
-            <a:ext cx="1695450" cy="1695450"/>
-          </a:xfrm>
-          <a:prstGeom xmlns:a="http://schemas.openxmlformats.org/drawingml/2006/main" prst="roundRect">
-            <a:avLst>
-              <a:gd name="adj" fmla="val 3371"/>
-            </a:avLst>
-          </a:prstGeom>
-          <a:solidFill xmlns:a="http://schemas.openxmlformats.org/drawingml/2006/main">
-            <a:srgbClr val="ECFEFF"/>
-          </a:solidFill>
-          <a:ln xmlns:a="http://schemas.openxmlformats.org/drawingml/2006/main" w="9525">
-            <a:solidFill>
-              <a:srgbClr val="06B6D4"/>
-            </a:solidFill>
-            <a:prstDash val="solid"/>
-          </a:ln>
-        </p:spPr>
-      </p:sp>
-      <p:sp>
-        <p:nvSpPr>
-          <p:cNvPr id="12" name="">
-            <a:extLst xmlns:a="http://schemas.openxmlformats.org/drawingml/2006/main">
-              <a:ext uri="{FF2B5EF4-FFF2-40B4-BE49-F238E27FC236}">
-                <a16:creationId xmlns:a16="http://schemas.microsoft.com/office/drawing/2014/main" id="{815A6AD4-39FF-4C1F-91AF-2B0BB446CFE9}"/>
-              </a:ext>
-            </a:extLst>
-          </p:cNvPr>
-          <p:cNvSpPr>
-            <a:spLocks xmlns:a="http://schemas.openxmlformats.org/drawingml/2006/main" noGrp="1"/>
-          </p:cNvSpPr>
-          <p:nvPr/>
-        </p:nvSpPr>
-        <p:spPr>
-          <a:xfrm xmlns:a="http://schemas.openxmlformats.org/drawingml/2006/main">
-            <a:off x="5314950" y="2228850"/>
-            <a:ext cx="1390650" cy="323850"/>
-          </a:xfrm>
-          <a:prstGeom xmlns:a="http://schemas.openxmlformats.org/drawingml/2006/main" prst="rect">
-            <a:avLst/>
-          </a:prstGeom>
-          <a:noFill xmlns:a="http://schemas.openxmlformats.org/drawingml/2006/main"/>
-          <a:ln xmlns:a="http://schemas.openxmlformats.org/drawingml/2006/main" w="0">
-            <a:noFill/>
-            <a:prstDash val="solid"/>
-          </a:ln>
-        </p:spPr>
-        <p:txBody>
-          <a:bodyPr xmlns:a="http://schemas.openxmlformats.org/drawingml/2006/main" anchor="t"/>
-          <a:lstStyle xmlns:a="http://schemas.openxmlformats.org/drawingml/2006/main"/>
-          <a:p xmlns:a="http://schemas.openxmlformats.org/drawingml/2006/main">
-            <a:pPr algn="ctr">
-              <a:defRPr sz="1650" b="1">
-                <a:solidFill>
-                  <a:srgbClr val="0F172A"/>
-                </a:solidFill>
-              </a:defRPr>
-            </a:pPr>
-            <a:r>
-              <a:rPr sz="1650" b="1">
-                <a:solidFill>
-                  <a:srgbClr val="0F172A"/>
-                </a:solidFill>
-              </a:rPr>
-              <a:t>DMA / copy engine</a:t>
-            </a:r>
-          </a:p>
-        </p:txBody>
-      </p:sp>
-      <p:sp>
-        <p:nvSpPr>
-          <p:cNvPr id="13" name="">
-            <a:extLst xmlns:a="http://schemas.openxmlformats.org/drawingml/2006/main">
-              <a:ext uri="{FF2B5EF4-FFF2-40B4-BE49-F238E27FC236}">
-                <a16:creationId xmlns:a16="http://schemas.microsoft.com/office/drawing/2014/main" id="{1FBAC9FC-5A16-4D00-BF0A-705157BA3A26}"/>
-              </a:ext>
-            </a:extLst>
-          </p:cNvPr>
-          <p:cNvSpPr>
-            <a:spLocks xmlns:a="http://schemas.openxmlformats.org/drawingml/2006/main" noGrp="1"/>
-          </p:cNvSpPr>
-          <p:nvPr/>
-        </p:nvSpPr>
-        <p:spPr>
-          <a:xfrm xmlns:a="http://schemas.openxmlformats.org/drawingml/2006/main">
-            <a:off x="5334000" y="2838450"/>
-            <a:ext cx="1352550" cy="533400"/>
-          </a:xfrm>
-          <a:prstGeom xmlns:a="http://schemas.openxmlformats.org/drawingml/2006/main" prst="rect">
-            <a:avLst/>
-          </a:prstGeom>
-          <a:noFill xmlns:a="http://schemas.openxmlformats.org/drawingml/2006/main"/>
-          <a:ln xmlns:a="http://schemas.openxmlformats.org/drawingml/2006/main" w="0">
-            <a:noFill/>
-            <a:prstDash val="solid"/>
-          </a:ln>
-        </p:spPr>
-        <p:txBody>
-          <a:bodyPr xmlns:a="http://schemas.openxmlformats.org/drawingml/2006/main" anchor="t"/>
-          <a:lstStyle xmlns:a="http://schemas.openxmlformats.org/drawingml/2006/main"/>
-          <a:p xmlns:a="http://schemas.openxmlformats.org/drawingml/2006/main">
-            <a:pPr algn="ctr">
-              <a:defRPr sz="1275" b="0">
-                <a:solidFill>
-                  <a:srgbClr val="334155"/>
-                </a:solidFill>
-              </a:defRPr>
-            </a:pPr>
-            <a:r>
-              <a:rPr sz="1275" b="0">
-                <a:solidFill>
-                  <a:srgbClr val="334155"/>
-                </a:solidFill>
-              </a:rPr>
-              <a:t>throttle and prioritize</a:t>
-            </a:r>
-          </a:p>
-        </p:txBody>
-      </p:sp>
-      <p:sp>
-        <p:nvSpPr>
-          <p:cNvPr id="14" name="">
-            <a:extLst xmlns:a="http://schemas.openxmlformats.org/drawingml/2006/main">
-              <a:ext uri="{FF2B5EF4-FFF2-40B4-BE49-F238E27FC236}">
-                <a16:creationId xmlns:a16="http://schemas.microsoft.com/office/drawing/2014/main" id="{2A6D27E1-ACD8-4452-9B41-B79EF6C0FC2A}"/>
-              </a:ext>
-            </a:extLst>
-          </p:cNvPr>
-          <p:cNvSpPr>
-            <a:spLocks xmlns:a="http://schemas.openxmlformats.org/drawingml/2006/main" noGrp="1"/>
-          </p:cNvSpPr>
-          <p:nvPr/>
-        </p:nvSpPr>
-        <p:spPr>
-          <a:xfrm xmlns:a="http://schemas.openxmlformats.org/drawingml/2006/main">
-            <a:off x="6915150" y="2552700"/>
-            <a:ext cx="476250" cy="476250"/>
-          </a:xfrm>
-          <a:prstGeom xmlns:a="http://schemas.openxmlformats.org/drawingml/2006/main" prst="rect">
-            <a:avLst/>
-          </a:prstGeom>
-          <a:noFill xmlns:a="http://schemas.openxmlformats.org/drawingml/2006/main"/>
-          <a:ln xmlns:a="http://schemas.openxmlformats.org/drawingml/2006/main" w="0">
-            <a:noFill/>
-            <a:prstDash val="solid"/>
-          </a:ln>
-        </p:spPr>
-        <p:txBody>
-          <a:bodyPr xmlns:a="http://schemas.openxmlformats.org/drawingml/2006/main" anchor="t"/>
-          <a:lstStyle xmlns:a="http://schemas.openxmlformats.org/drawingml/2006/main"/>
-          <a:p xmlns:a="http://schemas.openxmlformats.org/drawingml/2006/main">
-            <a:pPr algn="ctr">
-              <a:defRPr sz="2550" b="1">
-                <a:solidFill>
-                  <a:srgbClr val="64748B"/>
-                </a:solidFill>
-              </a:defRPr>
-            </a:pPr>
-            <a:r>
-              <a:rPr sz="2550" b="1">
-                <a:solidFill>
-                  <a:srgbClr val="64748B"/>
-                </a:solidFill>
-              </a:rPr>
-              <a:t>→</a:t>
-            </a:r>
-          </a:p>
-        </p:txBody>
-      </p:sp>
-      <p:sp>
-        <p:nvSpPr>
-          <p:cNvPr id="15" name="">
-            <a:extLst xmlns:a="http://schemas.openxmlformats.org/drawingml/2006/main">
-              <a:ext uri="{FF2B5EF4-FFF2-40B4-BE49-F238E27FC236}">
-                <a16:creationId xmlns:a16="http://schemas.microsoft.com/office/drawing/2014/main" id="{AB485DD5-B630-47AD-88A4-F9549735FCEC}"/>
-              </a:ext>
-            </a:extLst>
-          </p:cNvPr>
-          <p:cNvSpPr>
-            <a:spLocks xmlns:a="http://schemas.openxmlformats.org/drawingml/2006/main" noGrp="1"/>
-          </p:cNvSpPr>
-          <p:nvPr/>
-        </p:nvSpPr>
-        <p:spPr>
-          <a:xfrm xmlns:a="http://schemas.openxmlformats.org/drawingml/2006/main">
-            <a:off x="7467600" y="1962150"/>
-            <a:ext cx="1695450" cy="1695450"/>
-          </a:xfrm>
-          <a:prstGeom xmlns:a="http://schemas.openxmlformats.org/drawingml/2006/main" prst="roundRect">
-            <a:avLst>
-              <a:gd name="adj" fmla="val 3371"/>
-            </a:avLst>
-          </a:prstGeom>
-          <a:solidFill xmlns:a="http://schemas.openxmlformats.org/drawingml/2006/main">
-            <a:srgbClr val="F0FDF4"/>
-          </a:solidFill>
-          <a:ln xmlns:a="http://schemas.openxmlformats.org/drawingml/2006/main" w="9525">
-            <a:solidFill>
-              <a:srgbClr val="16A34A"/>
-            </a:solidFill>
-            <a:prstDash val="solid"/>
-          </a:ln>
-        </p:spPr>
-      </p:sp>
-      <p:sp>
-        <p:nvSpPr>
-          <p:cNvPr id="16" name="">
-            <a:extLst xmlns:a="http://schemas.openxmlformats.org/drawingml/2006/main">
-              <a:ext uri="{FF2B5EF4-FFF2-40B4-BE49-F238E27FC236}">
-                <a16:creationId xmlns:a16="http://schemas.microsoft.com/office/drawing/2014/main" id="{D89EA56F-C88E-4520-B75B-49894E4BC3CA}"/>
-              </a:ext>
-            </a:extLst>
-          </p:cNvPr>
-          <p:cNvSpPr>
-            <a:spLocks xmlns:a="http://schemas.openxmlformats.org/drawingml/2006/main" noGrp="1"/>
-          </p:cNvSpPr>
-          <p:nvPr/>
-        </p:nvSpPr>
-        <p:spPr>
-          <a:xfrm xmlns:a="http://schemas.openxmlformats.org/drawingml/2006/main">
-            <a:off x="7620000" y="2228850"/>
-            <a:ext cx="1390650" cy="323850"/>
-          </a:xfrm>
-          <a:prstGeom xmlns:a="http://schemas.openxmlformats.org/drawingml/2006/main" prst="rect">
-            <a:avLst/>
-          </a:prstGeom>
-          <a:noFill xmlns:a="http://schemas.openxmlformats.org/drawingml/2006/main"/>
-          <a:ln xmlns:a="http://schemas.openxmlformats.org/drawingml/2006/main" w="0">
-            <a:noFill/>
-            <a:prstDash val="solid"/>
-          </a:ln>
-        </p:spPr>
-        <p:txBody>
-          <a:bodyPr xmlns:a="http://schemas.openxmlformats.org/drawingml/2006/main" anchor="t"/>
-          <a:lstStyle xmlns:a="http://schemas.openxmlformats.org/drawingml/2006/main"/>
-          <a:p xmlns:a="http://schemas.openxmlformats.org/drawingml/2006/main">
-            <a:pPr algn="ctr">
-              <a:defRPr sz="1650" b="1">
-                <a:solidFill>
-                  <a:srgbClr val="0F172A"/>
-                </a:solidFill>
-              </a:defRPr>
-            </a:pPr>
-            <a:r>
-              <a:rPr sz="1650" b="1">
-                <a:solidFill>
-                  <a:srgbClr val="0F172A"/>
-                </a:solidFill>
-              </a:rPr>
-              <a:t>Residency control</a:t>
-            </a:r>
-          </a:p>
-        </p:txBody>
-      </p:sp>
-      <p:sp>
-        <p:nvSpPr>
-          <p:cNvPr id="17" name="">
-            <a:extLst xmlns:a="http://schemas.openxmlformats.org/drawingml/2006/main">
-              <a:ext uri="{FF2B5EF4-FFF2-40B4-BE49-F238E27FC236}">
-                <a16:creationId xmlns:a16="http://schemas.microsoft.com/office/drawing/2014/main" id="{EC379D16-E777-410C-A09D-A97E765A70F4}"/>
-              </a:ext>
-            </a:extLst>
-          </p:cNvPr>
-          <p:cNvSpPr>
-            <a:spLocks xmlns:a="http://schemas.openxmlformats.org/drawingml/2006/main" noGrp="1"/>
-          </p:cNvSpPr>
-          <p:nvPr/>
-        </p:nvSpPr>
-        <p:spPr>
-          <a:xfrm xmlns:a="http://schemas.openxmlformats.org/drawingml/2006/main">
-            <a:off x="7639050" y="2838450"/>
-            <a:ext cx="1352550" cy="533400"/>
-          </a:xfrm>
-          <a:prstGeom xmlns:a="http://schemas.openxmlformats.org/drawingml/2006/main" prst="rect">
-            <a:avLst/>
-          </a:prstGeom>
-          <a:noFill xmlns:a="http://schemas.openxmlformats.org/drawingml/2006/main"/>
-          <a:ln xmlns:a="http://schemas.openxmlformats.org/drawingml/2006/main" w="0">
-            <a:noFill/>
-            <a:prstDash val="solid"/>
-          </a:ln>
-        </p:spPr>
-        <p:txBody>
-          <a:bodyPr xmlns:a="http://schemas.openxmlformats.org/drawingml/2006/main" anchor="t"/>
-          <a:lstStyle xmlns:a="http://schemas.openxmlformats.org/drawingml/2006/main"/>
-          <a:p xmlns:a="http://schemas.openxmlformats.org/drawingml/2006/main">
-            <a:pPr algn="ctr">
-              <a:defRPr sz="1275" b="0">
-                <a:solidFill>
-                  <a:srgbClr val="334155"/>
-                </a:solidFill>
-              </a:defRPr>
-            </a:pPr>
-            <a:r>
-              <a:rPr sz="1275" b="0">
-                <a:solidFill>
-                  <a:srgbClr val="334155"/>
-                </a:solidFill>
-              </a:rPr>
-              <a:t>protect useful KV</a:t>
-            </a:r>
-          </a:p>
-        </p:txBody>
-      </p:sp>
-      <p:sp>
-        <p:nvSpPr>
-          <p:cNvPr id="18" name="">
-            <a:extLst xmlns:a="http://schemas.openxmlformats.org/drawingml/2006/main">
-              <a:ext uri="{FF2B5EF4-FFF2-40B4-BE49-F238E27FC236}">
-                <a16:creationId xmlns:a16="http://schemas.microsoft.com/office/drawing/2014/main" id="{C96EF447-5860-49BF-8461-2669CDE2134E}"/>
-              </a:ext>
-            </a:extLst>
-          </p:cNvPr>
-          <p:cNvSpPr>
-            <a:spLocks xmlns:a="http://schemas.openxmlformats.org/drawingml/2006/main" noGrp="1"/>
-          </p:cNvSpPr>
-          <p:nvPr/>
-        </p:nvSpPr>
-        <p:spPr>
-          <a:xfrm xmlns:a="http://schemas.openxmlformats.org/drawingml/2006/main">
-            <a:off x="9220200" y="2552700"/>
-            <a:ext cx="476250" cy="476250"/>
-          </a:xfrm>
-          <a:prstGeom xmlns:a="http://schemas.openxmlformats.org/drawingml/2006/main" prst="rect">
-            <a:avLst/>
-          </a:prstGeom>
-          <a:noFill xmlns:a="http://schemas.openxmlformats.org/drawingml/2006/main"/>
-          <a:ln xmlns:a="http://schemas.openxmlformats.org/drawingml/2006/main" w="0">
-            <a:noFill/>
-            <a:prstDash val="solid"/>
-          </a:ln>
-        </p:spPr>
-        <p:txBody>
-          <a:bodyPr xmlns:a="http://schemas.openxmlformats.org/drawingml/2006/main" anchor="t"/>
-          <a:lstStyle xmlns:a="http://schemas.openxmlformats.org/drawingml/2006/main"/>
-          <a:p xmlns:a="http://schemas.openxmlformats.org/drawingml/2006/main">
-            <a:pPr algn="ctr">
-              <a:defRPr sz="2550" b="1">
-                <a:solidFill>
-                  <a:srgbClr val="64748B"/>
-                </a:solidFill>
-              </a:defRPr>
-            </a:pPr>
-            <a:r>
-              <a:rPr sz="2550" b="1">
-                <a:solidFill>
-                  <a:srgbClr val="64748B"/>
-                </a:solidFill>
-              </a:rPr>
-              <a:t>→</a:t>
-            </a:r>
-          </a:p>
-        </p:txBody>
-      </p:sp>
-      <p:sp>
-        <p:nvSpPr>
-          <p:cNvPr id="19" name="">
-            <a:extLst xmlns:a="http://schemas.openxmlformats.org/drawingml/2006/main">
-              <a:ext uri="{FF2B5EF4-FFF2-40B4-BE49-F238E27FC236}">
-                <a16:creationId xmlns:a16="http://schemas.microsoft.com/office/drawing/2014/main" id="{51A0AA63-D822-4C25-BEC4-C669493AB867}"/>
-              </a:ext>
-            </a:extLst>
-          </p:cNvPr>
-          <p:cNvSpPr>
-            <a:spLocks xmlns:a="http://schemas.openxmlformats.org/drawingml/2006/main" noGrp="1"/>
-          </p:cNvSpPr>
-          <p:nvPr/>
-        </p:nvSpPr>
-        <p:spPr>
-          <a:xfrm xmlns:a="http://schemas.openxmlformats.org/drawingml/2006/main">
-            <a:off x="9772650" y="1962150"/>
-            <a:ext cx="1695450" cy="1695450"/>
-          </a:xfrm>
-          <a:prstGeom xmlns:a="http://schemas.openxmlformats.org/drawingml/2006/main" prst="roundRect">
-            <a:avLst>
-              <a:gd name="adj" fmla="val 3371"/>
-            </a:avLst>
-          </a:prstGeom>
-          <a:solidFill xmlns:a="http://schemas.openxmlformats.org/drawingml/2006/main">
-            <a:srgbClr val="FFF7ED"/>
-          </a:solidFill>
-          <a:ln xmlns:a="http://schemas.openxmlformats.org/drawingml/2006/main" w="9525">
-            <a:solidFill>
-              <a:srgbClr val="F97316"/>
-            </a:solidFill>
-            <a:prstDash val="solid"/>
-          </a:ln>
-        </p:spPr>
-      </p:sp>
-      <p:sp>
-        <p:nvSpPr>
-          <p:cNvPr id="20" name="">
-            <a:extLst xmlns:a="http://schemas.openxmlformats.org/drawingml/2006/main">
-              <a:ext uri="{FF2B5EF4-FFF2-40B4-BE49-F238E27FC236}">
-                <a16:creationId xmlns:a16="http://schemas.microsoft.com/office/drawing/2014/main" id="{F26F4CD2-582F-4BEC-A10B-8A85D0C6F639}"/>
-              </a:ext>
-            </a:extLst>
-          </p:cNvPr>
-          <p:cNvSpPr>
-            <a:spLocks xmlns:a="http://schemas.openxmlformats.org/drawingml/2006/main" noGrp="1"/>
-          </p:cNvSpPr>
-          <p:nvPr/>
-        </p:nvSpPr>
-        <p:spPr>
-          <a:xfrm xmlns:a="http://schemas.openxmlformats.org/drawingml/2006/main">
-            <a:off x="9925050" y="2228850"/>
-            <a:ext cx="1390650" cy="323850"/>
-          </a:xfrm>
-          <a:prstGeom xmlns:a="http://schemas.openxmlformats.org/drawingml/2006/main" prst="rect">
-            <a:avLst/>
-          </a:prstGeom>
-          <a:noFill xmlns:a="http://schemas.openxmlformats.org/drawingml/2006/main"/>
-          <a:ln xmlns:a="http://schemas.openxmlformats.org/drawingml/2006/main" w="0">
-            <a:noFill/>
-            <a:prstDash val="solid"/>
-          </a:ln>
-        </p:spPr>
-        <p:txBody>
-          <a:bodyPr xmlns:a="http://schemas.openxmlformats.org/drawingml/2006/main" anchor="t"/>
-          <a:lstStyle xmlns:a="http://schemas.openxmlformats.org/drawingml/2006/main"/>
-          <a:p xmlns:a="http://schemas.openxmlformats.org/drawingml/2006/main">
-            <a:pPr algn="ctr">
-              <a:defRPr sz="1650" b="1">
-                <a:solidFill>
-                  <a:srgbClr val="0F172A"/>
-                </a:solidFill>
-              </a:defRPr>
-            </a:pPr>
-            <a:r>
-              <a:rPr sz="1650" b="1">
-                <a:solidFill>
-                  <a:srgbClr val="0F172A"/>
-                </a:solidFill>
-              </a:rPr>
-              <a:t>Telemetry</a:t>
-            </a:r>
-          </a:p>
-        </p:txBody>
-      </p:sp>
-      <p:sp>
-        <p:nvSpPr>
-          <p:cNvPr id="21" name="">
-            <a:extLst xmlns:a="http://schemas.openxmlformats.org/drawingml/2006/main">
-              <a:ext uri="{FF2B5EF4-FFF2-40B4-BE49-F238E27FC236}">
-                <a16:creationId xmlns:a16="http://schemas.microsoft.com/office/drawing/2014/main" id="{63BA5230-1DD5-49A7-9603-3D058128A753}"/>
-              </a:ext>
-            </a:extLst>
-          </p:cNvPr>
-          <p:cNvSpPr>
-            <a:spLocks xmlns:a="http://schemas.openxmlformats.org/drawingml/2006/main" noGrp="1"/>
-          </p:cNvSpPr>
-          <p:nvPr/>
-        </p:nvSpPr>
-        <p:spPr>
-          <a:xfrm xmlns:a="http://schemas.openxmlformats.org/drawingml/2006/main">
-            <a:off x="9944100" y="2838450"/>
-            <a:ext cx="1352550" cy="533400"/>
-          </a:xfrm>
-          <a:prstGeom xmlns:a="http://schemas.openxmlformats.org/drawingml/2006/main" prst="rect">
-            <a:avLst/>
-          </a:prstGeom>
-          <a:noFill xmlns:a="http://schemas.openxmlformats.org/drawingml/2006/main"/>
-          <a:ln xmlns:a="http://schemas.openxmlformats.org/drawingml/2006/main" w="0">
-            <a:noFill/>
-            <a:prstDash val="solid"/>
-          </a:ln>
-        </p:spPr>
-        <p:txBody>
-          <a:bodyPr xmlns:a="http://schemas.openxmlformats.org/drawingml/2006/main" anchor="t"/>
-          <a:lstStyle xmlns:a="http://schemas.openxmlformats.org/drawingml/2006/main"/>
-          <a:p xmlns:a="http://schemas.openxmlformats.org/drawingml/2006/main">
-            <a:pPr algn="ctr">
-              <a:defRPr sz="1275" b="0">
-                <a:solidFill>
-                  <a:srgbClr val="334155"/>
-                </a:solidFill>
-              </a:defRPr>
-            </a:pPr>
-            <a:r>
-              <a:rPr sz="1275" b="0">
-                <a:solidFill>
-                  <a:srgbClr val="334155"/>
-                </a:solidFill>
-              </a:rPr>
-              <a:t>late / useful / wasted</a:t>
-            </a:r>
-          </a:p>
-        </p:txBody>
-      </p:sp>
-      <p:sp>
-        <p:nvSpPr>
-          <p:cNvPr id="22" name="">
-            <a:extLst xmlns:a="http://schemas.openxmlformats.org/drawingml/2006/main">
-              <a:ext uri="{FF2B5EF4-FFF2-40B4-BE49-F238E27FC236}">
-                <a16:creationId xmlns:a16="http://schemas.microsoft.com/office/drawing/2014/main" id="{92C74EE2-975A-4EA1-B681-BA97DC7E281E}"/>
-              </a:ext>
-            </a:extLst>
-          </p:cNvPr>
-          <p:cNvSpPr>
-            <a:spLocks xmlns:a="http://schemas.openxmlformats.org/drawingml/2006/main" noGrp="1"/>
-          </p:cNvSpPr>
-          <p:nvPr/>
-        </p:nvSpPr>
-        <p:spPr>
-          <a:xfrm xmlns:a="http://schemas.openxmlformats.org/drawingml/2006/main">
-            <a:off x="2000250" y="4514850"/>
-            <a:ext cx="8191500" cy="800100"/>
-          </a:xfrm>
-          <a:prstGeom xmlns:a="http://schemas.openxmlformats.org/drawingml/2006/main" prst="roundRect">
-            <a:avLst>
-              <a:gd name="adj" fmla="val 7143"/>
-            </a:avLst>
-          </a:prstGeom>
-          <a:solidFill xmlns:a="http://schemas.openxmlformats.org/drawingml/2006/main">
-            <a:srgbClr val="F8FAFC"/>
-          </a:solidFill>
-          <a:ln xmlns:a="http://schemas.openxmlformats.org/drawingml/2006/main" w="9525">
-            <a:solidFill>
-              <a:srgbClr val="CBD5E1"/>
-            </a:solidFill>
-            <a:prstDash val="solid"/>
-          </a:ln>
-        </p:spPr>
-      </p:sp>
-      <p:sp>
-        <p:nvSpPr>
-          <p:cNvPr id="23" name="">
-            <a:extLst xmlns:a="http://schemas.openxmlformats.org/drawingml/2006/main">
-              <a:ext uri="{FF2B5EF4-FFF2-40B4-BE49-F238E27FC236}">
-                <a16:creationId xmlns:a16="http://schemas.microsoft.com/office/drawing/2014/main" id="{B3FA8EC8-7CB9-4549-B017-929BA7A67E65}"/>
-              </a:ext>
-            </a:extLst>
-          </p:cNvPr>
-          <p:cNvSpPr>
-            <a:spLocks xmlns:a="http://schemas.openxmlformats.org/drawingml/2006/main" noGrp="1"/>
-          </p:cNvSpPr>
-          <p:nvPr/>
-        </p:nvSpPr>
-        <p:spPr>
-          <a:xfrm xmlns:a="http://schemas.openxmlformats.org/drawingml/2006/main">
-            <a:off x="2247900" y="4743450"/>
-            <a:ext cx="2476500" cy="247650"/>
-          </a:xfrm>
-          <a:prstGeom xmlns:a="http://schemas.openxmlformats.org/drawingml/2006/main" prst="rect">
-            <a:avLst/>
-          </a:prstGeom>
-          <a:noFill xmlns:a="http://schemas.openxmlformats.org/drawingml/2006/main"/>
-          <a:ln xmlns:a="http://schemas.openxmlformats.org/drawingml/2006/main" w="0">
-            <a:noFill/>
-            <a:prstDash val="solid"/>
-          </a:ln>
-        </p:spPr>
-        <p:txBody>
-          <a:bodyPr xmlns:a="http://schemas.openxmlformats.org/drawingml/2006/main" anchor="t"/>
-          <a:lstStyle xmlns:a="http://schemas.openxmlformats.org/drawingml/2006/main"/>
-          <a:p xmlns:a="http://schemas.openxmlformats.org/drawingml/2006/main">
-            <a:pPr algn="l">
-              <a:defRPr sz="1650" b="1">
-                <a:solidFill>
-                  <a:srgbClr val="0F172A"/>
-                </a:solidFill>
-              </a:defRPr>
-            </a:pPr>
-            <a:r>
-              <a:rPr sz="1650" b="1">
-                <a:solidFill>
-                  <a:srgbClr val="0F172A"/>
-                </a:solidFill>
-              </a:rPr>
-              <a:t>Resulting research question</a:t>
-            </a:r>
-          </a:p>
-        </p:txBody>
-      </p:sp>
-      <p:sp>
-        <p:nvSpPr>
-          <p:cNvPr id="24" name="">
-            <a:extLst xmlns:a="http://schemas.openxmlformats.org/drawingml/2006/main">
-              <a:ext uri="{FF2B5EF4-FFF2-40B4-BE49-F238E27FC236}">
-                <a16:creationId xmlns:a16="http://schemas.microsoft.com/office/drawing/2014/main" id="{8913022B-5B61-4A3E-9A1A-041A7FC87F85}"/>
-              </a:ext>
-            </a:extLst>
-          </p:cNvPr>
-          <p:cNvSpPr>
-            <a:spLocks xmlns:a="http://schemas.openxmlformats.org/drawingml/2006/main" noGrp="1"/>
-          </p:cNvSpPr>
-          <p:nvPr/>
-        </p:nvSpPr>
-        <p:spPr>
-          <a:xfrm xmlns:a="http://schemas.openxmlformats.org/drawingml/2006/main">
-            <a:off x="4953000" y="4686300"/>
-            <a:ext cx="4762500" cy="419100"/>
-          </a:xfrm>
-          <a:prstGeom xmlns:a="http://schemas.openxmlformats.org/drawingml/2006/main" prst="rect">
-            <a:avLst/>
-          </a:prstGeom>
-          <a:noFill xmlns:a="http://schemas.openxmlformats.org/drawingml/2006/main"/>
-          <a:ln xmlns:a="http://schemas.openxmlformats.org/drawingml/2006/main" w="0">
-            <a:noFill/>
-            <a:prstDash val="solid"/>
-          </a:ln>
-        </p:spPr>
-        <p:txBody>
-          <a:bodyPr xmlns:a="http://schemas.openxmlformats.org/drawingml/2006/main" anchor="t"/>
-          <a:lstStyle xmlns:a="http://schemas.openxmlformats.org/drawingml/2006/main"/>
-          <a:p xmlns:a="http://schemas.openxmlformats.org/drawingml/2006/main">
-            <a:pPr algn="l">
-              <a:defRPr sz="1425" b="0">
-                <a:solidFill>
-                  <a:srgbClr val="334155"/>
-                </a:solidFill>
-              </a:defRPr>
-            </a:pPr>
-            <a:r>
-              <a:rPr sz="1425" b="0">
-                <a:solidFill>
-                  <a:srgbClr val="334155"/>
-                </a:solidFill>
-              </a:rPr>
-              <a:t>How much replay latency and wasted movement can be avoided when KV movement has session context, priority, deadline, protection, and telemetry?</a:t>
-            </a:r>
-          </a:p>
-        </p:txBody>
-      </p:sp>
-      <p:sp>
-        <p:nvSpPr>
-          <p:cNvPr id="25" name="">
-            <a:extLst xmlns:a="http://schemas.openxmlformats.org/drawingml/2006/main">
-              <a:ext uri="{FF2B5EF4-FFF2-40B4-BE49-F238E27FC236}">
-                <a16:creationId xmlns:a16="http://schemas.microsoft.com/office/drawing/2014/main" id="{8DF687F8-FE0C-4D96-8896-0CE270921034}"/>
+                <a16:creationId xmlns:a16="http://schemas.microsoft.com/office/drawing/2014/main" id="{A279A9B1-D052-4683-B54C-6582090AF322}"/>
               </a:ext>
             </a:extLst>
           </p:cNvPr>
@@ -9451,10 +10393,10 @@
       </p:sp>
       <p:sp>
         <p:nvSpPr>
-          <p:cNvPr id="26" name="">
-            <a:extLst xmlns:a="http://schemas.openxmlformats.org/drawingml/2006/main">
-              <a:ext uri="{FF2B5EF4-FFF2-40B4-BE49-F238E27FC236}">
-                <a16:creationId xmlns:a16="http://schemas.microsoft.com/office/drawing/2014/main" id="{11FC1CEA-31E3-4096-96DD-7104301FBC81}"/>
+          <p:cNvPr id="8" name="">
+            <a:extLst xmlns:a="http://schemas.openxmlformats.org/drawingml/2006/main">
+              <a:ext uri="{FF2B5EF4-FFF2-40B4-BE49-F238E27FC236}">
+                <a16:creationId xmlns:a16="http://schemas.microsoft.com/office/drawing/2014/main" id="{7CEDB7B5-4C60-4A95-9365-197E644348AC}"/>
               </a:ext>
             </a:extLst>
           </p:cNvPr>
@@ -9502,7 +10444,7 @@
     </p:spTree>
     <p:extLst>
       <p:ext uri="{BB962C8B-B14F-4D97-AF65-F5344CB8AC3E}">
-        <p14:creationId xmlns:p14="http://schemas.microsoft.com/office/powerpoint/2010/main" val="14380816"/>
+        <p14:creationId xmlns:p14="http://schemas.microsoft.com/office/powerpoint/2010/main" val="1057135405"/>
       </p:ext>
     </p:extLst>
   </p:cSld>

--- a/sglang_direct_kv/artifacts/slides/agent_aware_kv_movement_manager_deck.pptx
+++ b/sglang_direct_kv/artifacts/slides/agent_aware_kv_movement_manager_deck.pptx
@@ -2,22 +2,23 @@
 <file path=ppt/presentation.xml><?xml version="1.0" encoding="utf-8"?>
 <p:presentation xmlns:p="http://schemas.openxmlformats.org/presentationml/2006/main">
   <p:sldMasterIdLst>
-    <p:sldMasterId xmlns:r="http://schemas.openxmlformats.org/officeDocument/2006/relationships" id="2147483648" r:id="R81f7908685dd4af7"/>
+    <p:sldMasterId xmlns:r="http://schemas.openxmlformats.org/officeDocument/2006/relationships" id="2147483648" r:id="Redec65a8adea4648"/>
   </p:sldMasterIdLst>
   <p:notesMasterIdLst>
-    <p:notesMasterId xmlns:r="http://schemas.openxmlformats.org/officeDocument/2006/relationships" r:id="R9bf995b93cff43a1"/>
+    <p:notesMasterId xmlns:r="http://schemas.openxmlformats.org/officeDocument/2006/relationships" r:id="R5751310b4b6a4a24"/>
   </p:notesMasterIdLst>
   <p:sldIdLst>
-    <p:sldId xmlns:r="http://schemas.openxmlformats.org/officeDocument/2006/relationships" id="256" r:id="R5043122217e246e0"/>
-    <p:sldId xmlns:r="http://schemas.openxmlformats.org/officeDocument/2006/relationships" id="257" r:id="R949be3ffd5af4b38"/>
-    <p:sldId xmlns:r="http://schemas.openxmlformats.org/officeDocument/2006/relationships" id="258" r:id="Reb3225402559474e"/>
-    <p:sldId xmlns:r="http://schemas.openxmlformats.org/officeDocument/2006/relationships" id="259" r:id="Rc204ca3e16054227"/>
-    <p:sldId xmlns:r="http://schemas.openxmlformats.org/officeDocument/2006/relationships" id="260" r:id="R0f7cd9bd96804f26"/>
-    <p:sldId xmlns:r="http://schemas.openxmlformats.org/officeDocument/2006/relationships" id="261" r:id="Rb861bc28d4d04e19"/>
-    <p:sldId xmlns:r="http://schemas.openxmlformats.org/officeDocument/2006/relationships" id="262" r:id="R14f4b2ec08204fa2"/>
-    <p:sldId xmlns:r="http://schemas.openxmlformats.org/officeDocument/2006/relationships" id="263" r:id="R63b994510f124db4"/>
-    <p:sldId xmlns:r="http://schemas.openxmlformats.org/officeDocument/2006/relationships" id="264" r:id="Rd2427f5a625c413a"/>
-    <p:sldId xmlns:r="http://schemas.openxmlformats.org/officeDocument/2006/relationships" id="265" r:id="Rd8de39e89037461c"/>
+    <p:sldId xmlns:r="http://schemas.openxmlformats.org/officeDocument/2006/relationships" id="256" r:id="Rf93c1d25d19c43b1"/>
+    <p:sldId xmlns:r="http://schemas.openxmlformats.org/officeDocument/2006/relationships" id="257" r:id="R86b45fc1fb664aa8"/>
+    <p:sldId xmlns:r="http://schemas.openxmlformats.org/officeDocument/2006/relationships" id="258" r:id="Re37d71b1445d4472"/>
+    <p:sldId xmlns:r="http://schemas.openxmlformats.org/officeDocument/2006/relationships" id="259" r:id="Ra56e871d10224f91"/>
+    <p:sldId xmlns:r="http://schemas.openxmlformats.org/officeDocument/2006/relationships" id="260" r:id="R9a91cc9088ba41b5"/>
+    <p:sldId xmlns:r="http://schemas.openxmlformats.org/officeDocument/2006/relationships" id="261" r:id="R5cd1684a0d4f41b7"/>
+    <p:sldId xmlns:r="http://schemas.openxmlformats.org/officeDocument/2006/relationships" id="262" r:id="Re3fee97197584b71"/>
+    <p:sldId xmlns:r="http://schemas.openxmlformats.org/officeDocument/2006/relationships" id="263" r:id="R917b39da13fb4da7"/>
+    <p:sldId xmlns:r="http://schemas.openxmlformats.org/officeDocument/2006/relationships" id="264" r:id="R0f9480d59ad64571"/>
+    <p:sldId xmlns:r="http://schemas.openxmlformats.org/officeDocument/2006/relationships" id="265" r:id="R40b797a37fc74d0b"/>
+    <p:sldId xmlns:r="http://schemas.openxmlformats.org/officeDocument/2006/relationships" id="266" r:id="Rd8667c7be2864ccc"/>
   </p:sldIdLst>
   <p:sldSz cx="12192000" cy="6858000"/>
   <p:notesSz cx="6858000" cy="9144000"/>
@@ -546,6 +547,106 @@
           <a:lstStyle xmlns:a="http://schemas.openxmlformats.org/drawingml/2006/main"/>
           <a:p xmlns:a="http://schemas.openxmlformats.org/drawingml/2006/main">
             <a:r>
+              <a:t>This slide summarizes findings observed across the project so far.</a:t>
+            </a:r>
+          </a:p>
+          <a:p xmlns:a="http://schemas.openxmlformats.org/drawingml/2006/main">
+            <a:r>
+              <a:t>It connects the evidence slides to hardware implications: short tool gaps, late hints, scheduler/request-path delay, lost KV lifecycle, and replay-side H2D lateness.</a:t>
+            </a:r>
+          </a:p>
+          <a:p xmlns:a="http://schemas.openxmlformats.org/drawingml/2006/main">
+            <a:r>
+              <a:t>Manager takeaway: a smarter DMA path needs KV/session context and deadline enforcement, not only more bandwidth.</a:t>
+            </a:r>
+          </a:p>
+          <a:p xmlns:a="http://schemas.openxmlformats.org/drawingml/2006/main">
+            <a:r>
+              <a:t/>
+            </a:r>
+          </a:p>
+          <a:p xmlns:a="http://schemas.openxmlformats.org/drawingml/2006/main">
+            <a:r>
+              <a:t>[Sources]</a:t>
+            </a:r>
+          </a:p>
+          <a:p xmlns:a="http://schemas.openxmlformats.org/drawingml/2006/main">
+            <a:r>
+              <a:t>Local report: /Users/oluwolejaiyeoba/Documents/GitHub/agentic_hardware/sglang_direct_kv/artifacts/results/latest_master_report.html</a:t>
+            </a:r>
+          </a:p>
+          <a:p xmlns:a="http://schemas.openxmlformats.org/drawingml/2006/main">
+            <a:r>
+              <a:t>Backup report: /Users/oluwolejaiyeoba/Documents/GitHub/agentic_hardware/backups/latest_master_report-1.html</a:t>
+            </a:r>
+          </a:p>
+        </p:txBody>
+      </p:sp>
+      <p:sp>
+        <p:nvSpPr>
+          <p:cNvPr id="4" name="Slide Number Placeholder 3"/>
+          <p:cNvSpPr>
+            <a:spLocks xmlns:a="http://schemas.openxmlformats.org/drawingml/2006/main" noGrp="1"/>
+          </p:cNvSpPr>
+          <p:nvPr>
+            <p:ph type="sldNum" idx="5"/>
+          </p:nvPr>
+        </p:nvSpPr>
+        <p:spPr/>
+        <p:txBody>
+          <a:bodyPr xmlns:a="http://schemas.openxmlformats.org/drawingml/2006/main"/>
+          <a:lstStyle xmlns:a="http://schemas.openxmlformats.org/drawingml/2006/main"/>
+          <a:p xmlns:a="http://schemas.openxmlformats.org/drawingml/2006/main"/>
+        </p:txBody>
+      </p:sp>
+    </p:spTree>
+  </p:cSld>
+  <p:clrMapOvr>
+    <a:masterClrMapping xmlns:a="http://schemas.openxmlformats.org/drawingml/2006/main"/>
+  </p:clrMapOvr>
+</p:notes>
+</file>
+
+<file path=ppt/notesSlides/notesSlide11.xml><?xml version="1.0" encoding="utf-8"?>
+<p:notes xmlns:p="http://schemas.openxmlformats.org/presentationml/2006/main">
+  <p:cSld>
+    <p:spTree>
+      <p:nvGrpSpPr>
+        <p:cNvPr id="1" name=""/>
+        <p:cNvGrpSpPr/>
+        <p:nvPr/>
+      </p:nvGrpSpPr>
+      <p:grpSpPr>
+        <a:xfrm xmlns:a="http://schemas.openxmlformats.org/drawingml/2006/main"/>
+      </p:grpSpPr>
+      <p:sp>
+        <p:nvSpPr>
+          <p:cNvPr id="2" name="Slide Image Placeholder 1"/>
+          <p:cNvSpPr>
+            <a:spLocks xmlns:a="http://schemas.openxmlformats.org/drawingml/2006/main" noGrp="1"/>
+          </p:cNvSpPr>
+          <p:nvPr>
+            <p:ph type="sldImg" idx="0"/>
+          </p:nvPr>
+        </p:nvSpPr>
+        <p:spPr/>
+      </p:sp>
+      <p:sp>
+        <p:nvSpPr>
+          <p:cNvPr id="3" name="Notes Placeholder 2"/>
+          <p:cNvSpPr>
+            <a:spLocks xmlns:a="http://schemas.openxmlformats.org/drawingml/2006/main" noGrp="1"/>
+          </p:cNvSpPr>
+          <p:nvPr>
+            <p:ph type="body" idx="1"/>
+          </p:nvPr>
+        </p:nvSpPr>
+        <p:spPr/>
+        <p:txBody>
+          <a:bodyPr xmlns:a="http://schemas.openxmlformats.org/drawingml/2006/main"/>
+          <a:lstStyle xmlns:a="http://schemas.openxmlformats.org/drawingml/2006/main"/>
+          <a:p xmlns:a="http://schemas.openxmlformats.org/drawingml/2006/main">
+            <a:r>
               <a:t>Closing slide. This translates observed software/runtime behavior into concrete hardware support candidates.</a:t>
             </a:r>
           </a:p>
@@ -1404,7 +1505,7 @@
   </p:cSld>
   <p:clrMap bg1="lt1" tx1="dk1" bg2="lt2" tx2="dk2" accent1="accent1" accent2="accent2" accent3="accent3" accent4="accent4" accent5="accent5" accent6="accent6" hlink="hlink" folHlink="folHlink"/>
   <p:sldLayoutIdLst>
-    <p:sldLayoutId xmlns:r="http://schemas.openxmlformats.org/officeDocument/2006/relationships" id="2147483649" r:id="Recf639b5bb7d478d"/>
+    <p:sldLayoutId xmlns:r="http://schemas.openxmlformats.org/officeDocument/2006/relationships" id="2147483649" r:id="Re2203cba7e1f4be7"/>
   </p:sldLayoutIdLst>
   <p:txStyles>
     <p:titleStyle>
@@ -1955,7 +2056,7 @@
           <p:cNvPr id="16" name="">
             <a:extLst xmlns:a="http://schemas.openxmlformats.org/drawingml/2006/main">
               <a:ext uri="{FF2B5EF4-FFF2-40B4-BE49-F238E27FC236}">
-                <a16:creationId xmlns:a16="http://schemas.microsoft.com/office/drawing/2014/main" id="{85F46643-F4F6-4A04-8CA7-1547CB28FE72}"/>
+                <a16:creationId xmlns:a16="http://schemas.microsoft.com/office/drawing/2014/main" id="{419FA287-1B93-4547-B076-098D9A9E6E08}"/>
               </a:ext>
             </a:extLst>
           </p:cNvPr>
@@ -2005,7 +2106,7 @@
           <p:cNvPr id="2" name="">
             <a:extLst xmlns:a="http://schemas.openxmlformats.org/drawingml/2006/main">
               <a:ext uri="{FF2B5EF4-FFF2-40B4-BE49-F238E27FC236}">
-                <a16:creationId xmlns:a16="http://schemas.microsoft.com/office/drawing/2014/main" id="{A39D2D10-3AF2-4A10-AD6D-F6311B97AAD8}"/>
+                <a16:creationId xmlns:a16="http://schemas.microsoft.com/office/drawing/2014/main" id="{93960661-E137-4E25-B36F-BE1A243D9641}"/>
               </a:ext>
             </a:extLst>
           </p:cNvPr>
@@ -2055,7 +2156,7 @@
           <p:cNvPr id="3" name="">
             <a:extLst xmlns:a="http://schemas.openxmlformats.org/drawingml/2006/main">
               <a:ext uri="{FF2B5EF4-FFF2-40B4-BE49-F238E27FC236}">
-                <a16:creationId xmlns:a16="http://schemas.microsoft.com/office/drawing/2014/main" id="{34055EDF-ECC8-4583-8871-0E6C64480FF3}"/>
+                <a16:creationId xmlns:a16="http://schemas.microsoft.com/office/drawing/2014/main" id="{95F35314-1F49-4B1E-8057-9B8AC9AE8F56}"/>
               </a:ext>
             </a:extLst>
           </p:cNvPr>
@@ -2090,7 +2191,7 @@
           <p:cNvPr id="4" name="">
             <a:extLst xmlns:a="http://schemas.openxmlformats.org/drawingml/2006/main">
               <a:ext uri="{FF2B5EF4-FFF2-40B4-BE49-F238E27FC236}">
-                <a16:creationId xmlns:a16="http://schemas.microsoft.com/office/drawing/2014/main" id="{32AC8851-0915-4322-8524-BEC697C18FC7}"/>
+                <a16:creationId xmlns:a16="http://schemas.microsoft.com/office/drawing/2014/main" id="{9DC151AC-15E4-4A3D-9731-D15ED35D8EB5}"/>
               </a:ext>
             </a:extLst>
           </p:cNvPr>
@@ -2140,7 +2241,7 @@
           <p:cNvPr id="5" name="">
             <a:extLst xmlns:a="http://schemas.openxmlformats.org/drawingml/2006/main">
               <a:ext uri="{FF2B5EF4-FFF2-40B4-BE49-F238E27FC236}">
-                <a16:creationId xmlns:a16="http://schemas.microsoft.com/office/drawing/2014/main" id="{11C60858-B7DB-438F-9716-42CC9A9F4674}"/>
+                <a16:creationId xmlns:a16="http://schemas.microsoft.com/office/drawing/2014/main" id="{A42432D0-384C-4379-897C-E0F83EFF20E2}"/>
               </a:ext>
             </a:extLst>
           </p:cNvPr>
@@ -2190,7 +2291,7 @@
           <p:cNvPr id="6" name="">
             <a:extLst xmlns:a="http://schemas.openxmlformats.org/drawingml/2006/main">
               <a:ext uri="{FF2B5EF4-FFF2-40B4-BE49-F238E27FC236}">
-                <a16:creationId xmlns:a16="http://schemas.microsoft.com/office/drawing/2014/main" id="{1212EFB5-5A1D-477D-8B89-C3BBEFA111EE}"/>
+                <a16:creationId xmlns:a16="http://schemas.microsoft.com/office/drawing/2014/main" id="{B8B032E7-184B-4F31-A120-15F0C517854F}"/>
               </a:ext>
             </a:extLst>
           </p:cNvPr>
@@ -2225,7 +2326,7 @@
           <p:cNvPr id="7" name="">
             <a:extLst xmlns:a="http://schemas.openxmlformats.org/drawingml/2006/main">
               <a:ext uri="{FF2B5EF4-FFF2-40B4-BE49-F238E27FC236}">
-                <a16:creationId xmlns:a16="http://schemas.microsoft.com/office/drawing/2014/main" id="{4832C5F6-966E-490D-99F8-A6F96C637637}"/>
+                <a16:creationId xmlns:a16="http://schemas.microsoft.com/office/drawing/2014/main" id="{0BB5C5B5-B2D3-46DE-98F4-659F5AC44B90}"/>
               </a:ext>
             </a:extLst>
           </p:cNvPr>
@@ -2275,7 +2376,7 @@
           <p:cNvPr id="8" name="">
             <a:extLst xmlns:a="http://schemas.openxmlformats.org/drawingml/2006/main">
               <a:ext uri="{FF2B5EF4-FFF2-40B4-BE49-F238E27FC236}">
-                <a16:creationId xmlns:a16="http://schemas.microsoft.com/office/drawing/2014/main" id="{F0DBDEF0-E7B0-4124-A1D6-01168DDD7C2B}"/>
+                <a16:creationId xmlns:a16="http://schemas.microsoft.com/office/drawing/2014/main" id="{DAA21D4E-3919-4EA8-BED9-E0F3A1009172}"/>
               </a:ext>
             </a:extLst>
           </p:cNvPr>
@@ -2325,7 +2426,7 @@
           <p:cNvPr id="9" name="">
             <a:extLst xmlns:a="http://schemas.openxmlformats.org/drawingml/2006/main">
               <a:ext uri="{FF2B5EF4-FFF2-40B4-BE49-F238E27FC236}">
-                <a16:creationId xmlns:a16="http://schemas.microsoft.com/office/drawing/2014/main" id="{02F32A8D-B537-4B1C-9175-93CB92306FCC}"/>
+                <a16:creationId xmlns:a16="http://schemas.microsoft.com/office/drawing/2014/main" id="{B9209BF0-5016-4C14-A94E-4CF9DA096505}"/>
               </a:ext>
             </a:extLst>
           </p:cNvPr>
@@ -2360,7 +2461,7 @@
           <p:cNvPr id="10" name="">
             <a:extLst xmlns:a="http://schemas.openxmlformats.org/drawingml/2006/main">
               <a:ext uri="{FF2B5EF4-FFF2-40B4-BE49-F238E27FC236}">
-                <a16:creationId xmlns:a16="http://schemas.microsoft.com/office/drawing/2014/main" id="{6F9DC534-FC1E-46B8-82B5-02B92F61016F}"/>
+                <a16:creationId xmlns:a16="http://schemas.microsoft.com/office/drawing/2014/main" id="{AB00A238-5627-40E3-AA7A-F282626A07F1}"/>
               </a:ext>
             </a:extLst>
           </p:cNvPr>
@@ -2410,7 +2511,7 @@
           <p:cNvPr id="11" name="">
             <a:extLst xmlns:a="http://schemas.openxmlformats.org/drawingml/2006/main">
               <a:ext uri="{FF2B5EF4-FFF2-40B4-BE49-F238E27FC236}">
-                <a16:creationId xmlns:a16="http://schemas.microsoft.com/office/drawing/2014/main" id="{AF7CDDBA-61B5-4884-B435-1C4E6F5FAAD0}"/>
+                <a16:creationId xmlns:a16="http://schemas.microsoft.com/office/drawing/2014/main" id="{43F77D38-BE9F-44DD-8F69-E2E6CAE24DBA}"/>
               </a:ext>
             </a:extLst>
           </p:cNvPr>
@@ -2460,7 +2561,7 @@
           <p:cNvPr id="12" name="">
             <a:extLst xmlns:a="http://schemas.openxmlformats.org/drawingml/2006/main">
               <a:ext uri="{FF2B5EF4-FFF2-40B4-BE49-F238E27FC236}">
-                <a16:creationId xmlns:a16="http://schemas.microsoft.com/office/drawing/2014/main" id="{3A623E41-0542-4F36-934E-DC3C319DAA33}"/>
+                <a16:creationId xmlns:a16="http://schemas.microsoft.com/office/drawing/2014/main" id="{7F3C2120-C54B-4F03-A48F-088D4A4BCEDB}"/>
               </a:ext>
             </a:extLst>
           </p:cNvPr>
@@ -2495,7 +2596,7 @@
           <p:cNvPr id="13" name="">
             <a:extLst xmlns:a="http://schemas.openxmlformats.org/drawingml/2006/main">
               <a:ext uri="{FF2B5EF4-FFF2-40B4-BE49-F238E27FC236}">
-                <a16:creationId xmlns:a16="http://schemas.microsoft.com/office/drawing/2014/main" id="{7927A2F8-A5AB-451F-BC8B-293E4AB39C0E}"/>
+                <a16:creationId xmlns:a16="http://schemas.microsoft.com/office/drawing/2014/main" id="{7EE56297-B589-4C34-BB98-4EB0C3C099D4}"/>
               </a:ext>
             </a:extLst>
           </p:cNvPr>
@@ -2545,7 +2646,7 @@
           <p:cNvPr id="14" name="">
             <a:extLst xmlns:a="http://schemas.openxmlformats.org/drawingml/2006/main">
               <a:ext uri="{FF2B5EF4-FFF2-40B4-BE49-F238E27FC236}">
-                <a16:creationId xmlns:a16="http://schemas.microsoft.com/office/drawing/2014/main" id="{B4D9D0EE-B683-4B93-BA60-B95B916B4AEB}"/>
+                <a16:creationId xmlns:a16="http://schemas.microsoft.com/office/drawing/2014/main" id="{A4852671-FB36-473F-8639-079BB6CD731A}"/>
               </a:ext>
             </a:extLst>
           </p:cNvPr>
@@ -2595,7 +2696,7 @@
           <p:cNvPr id="15" name="">
             <a:extLst xmlns:a="http://schemas.openxmlformats.org/drawingml/2006/main">
               <a:ext uri="{FF2B5EF4-FFF2-40B4-BE49-F238E27FC236}">
-                <a16:creationId xmlns:a16="http://schemas.microsoft.com/office/drawing/2014/main" id="{310D2551-AA2F-4C09-B4C8-E721B8D386AB}"/>
+                <a16:creationId xmlns:a16="http://schemas.microsoft.com/office/drawing/2014/main" id="{F8F59266-5178-4C58-850C-9C8161C91024}"/>
               </a:ext>
             </a:extLst>
           </p:cNvPr>
@@ -2643,7 +2744,7 @@
     </p:spTree>
     <p:extLst>
       <p:ext uri="{BB962C8B-B14F-4D97-AF65-F5344CB8AC3E}">
-        <p14:creationId xmlns:p14="http://schemas.microsoft.com/office/powerpoint/2010/main" val="1553111577"/>
+        <p14:creationId xmlns:p14="http://schemas.microsoft.com/office/powerpoint/2010/main" val="1525316303"/>
       </p:ext>
     </p:extLst>
   </p:cSld>
@@ -2671,10 +2772,10 @@
       </p:grpSpPr>
       <p:sp>
         <p:nvSpPr>
-          <p:cNvPr id="27" name="">
-            <a:extLst xmlns:a="http://schemas.openxmlformats.org/drawingml/2006/main">
-              <a:ext uri="{FF2B5EF4-FFF2-40B4-BE49-F238E27FC236}">
-                <a16:creationId xmlns:a16="http://schemas.microsoft.com/office/drawing/2014/main" id="{66440635-592A-4EEC-B999-6B63790201B2}"/>
+          <p:cNvPr id="28" name="">
+            <a:extLst xmlns:a="http://schemas.openxmlformats.org/drawingml/2006/main">
+              <a:ext uri="{FF2B5EF4-FFF2-40B4-BE49-F238E27FC236}">
+                <a16:creationId xmlns:a16="http://schemas.microsoft.com/office/drawing/2014/main" id="{CFC3E667-0FFF-41E7-8122-4757F911C282}"/>
               </a:ext>
             </a:extLst>
           </p:cNvPr>
@@ -2714,7 +2815,7 @@
                   <a:srgbClr val="0F172A"/>
                 </a:solidFill>
               </a:rPr>
-              <a:t>Hardware support can make hints enforceable</a:t>
+              <a:t>Key findings make the hardware case</a:t>
             </a:r>
           </a:p>
         </p:txBody>
@@ -2724,7 +2825,7 @@
           <p:cNvPr id="2" name="">
             <a:extLst xmlns:a="http://schemas.openxmlformats.org/drawingml/2006/main">
               <a:ext uri="{FF2B5EF4-FFF2-40B4-BE49-F238E27FC236}">
-                <a16:creationId xmlns:a16="http://schemas.microsoft.com/office/drawing/2014/main" id="{775D5695-BBCC-4521-AB34-4C410A0379B4}"/>
+                <a16:creationId xmlns:a16="http://schemas.microsoft.com/office/drawing/2014/main" id="{A604714F-91AA-48B6-BE3E-FBDABB47E560}"/>
               </a:ext>
             </a:extLst>
           </p:cNvPr>
@@ -2764,6 +2865,1200 @@
                   <a:srgbClr val="64748B"/>
                 </a:solidFill>
               </a:rPr>
+              <a:t>The recurring pattern is not just missing bandwidth; it is missing context, deadlines, residency control, and telemetry.</a:t>
+            </a:r>
+          </a:p>
+        </p:txBody>
+      </p:sp>
+      <p:sp>
+        <p:nvSpPr>
+          <p:cNvPr id="3" name="">
+            <a:extLst xmlns:a="http://schemas.openxmlformats.org/drawingml/2006/main">
+              <a:ext uri="{FF2B5EF4-FFF2-40B4-BE49-F238E27FC236}">
+                <a16:creationId xmlns:a16="http://schemas.microsoft.com/office/drawing/2014/main" id="{477D2E00-72B9-4297-B770-CE6ECB30A734}"/>
+              </a:ext>
+            </a:extLst>
+          </p:cNvPr>
+          <p:cNvSpPr>
+            <a:spLocks xmlns:a="http://schemas.openxmlformats.org/drawingml/2006/main" noGrp="1"/>
+          </p:cNvSpPr>
+          <p:nvPr/>
+        </p:nvSpPr>
+        <p:spPr>
+          <a:xfrm xmlns:a="http://schemas.openxmlformats.org/drawingml/2006/main">
+            <a:off x="552450" y="1676400"/>
+            <a:ext cx="3333750" cy="1466850"/>
+          </a:xfrm>
+          <a:prstGeom xmlns:a="http://schemas.openxmlformats.org/drawingml/2006/main" prst="roundRect">
+            <a:avLst>
+              <a:gd name="adj" fmla="val 3896"/>
+            </a:avLst>
+          </a:prstGeom>
+          <a:solidFill xmlns:a="http://schemas.openxmlformats.org/drawingml/2006/main">
+            <a:srgbClr val="EFF6FF"/>
+          </a:solidFill>
+          <a:ln xmlns:a="http://schemas.openxmlformats.org/drawingml/2006/main" w="9525">
+            <a:solidFill>
+              <a:srgbClr val="BFDBFE"/>
+            </a:solidFill>
+            <a:prstDash val="solid"/>
+          </a:ln>
+        </p:spPr>
+      </p:sp>
+      <p:sp>
+        <p:nvSpPr>
+          <p:cNvPr id="4" name="">
+            <a:extLst xmlns:a="http://schemas.openxmlformats.org/drawingml/2006/main">
+              <a:ext uri="{FF2B5EF4-FFF2-40B4-BE49-F238E27FC236}">
+                <a16:creationId xmlns:a16="http://schemas.microsoft.com/office/drawing/2014/main" id="{F4EC5403-850A-42FE-9FC3-F51ABB409B5D}"/>
+              </a:ext>
+            </a:extLst>
+          </p:cNvPr>
+          <p:cNvSpPr>
+            <a:spLocks xmlns:a="http://schemas.openxmlformats.org/drawingml/2006/main" noGrp="1"/>
+          </p:cNvSpPr>
+          <p:nvPr/>
+        </p:nvSpPr>
+        <p:spPr>
+          <a:xfrm xmlns:a="http://schemas.openxmlformats.org/drawingml/2006/main">
+            <a:off x="552450" y="1676400"/>
+            <a:ext cx="66675" cy="1466850"/>
+          </a:xfrm>
+          <a:prstGeom xmlns:a="http://schemas.openxmlformats.org/drawingml/2006/main" prst="rect">
+            <a:avLst/>
+          </a:prstGeom>
+          <a:solidFill xmlns:a="http://schemas.openxmlformats.org/drawingml/2006/main">
+            <a:srgbClr val="2563EB"/>
+          </a:solidFill>
+          <a:ln xmlns:a="http://schemas.openxmlformats.org/drawingml/2006/main" w="0">
+            <a:noFill/>
+            <a:prstDash val="solid"/>
+          </a:ln>
+        </p:spPr>
+      </p:sp>
+      <p:sp>
+        <p:nvSpPr>
+          <p:cNvPr id="5" name="">
+            <a:extLst xmlns:a="http://schemas.openxmlformats.org/drawingml/2006/main">
+              <a:ext uri="{FF2B5EF4-FFF2-40B4-BE49-F238E27FC236}">
+                <a16:creationId xmlns:a16="http://schemas.microsoft.com/office/drawing/2014/main" id="{DE890471-6382-4D34-AC45-FBFE2784E417}"/>
+              </a:ext>
+            </a:extLst>
+          </p:cNvPr>
+          <p:cNvSpPr>
+            <a:spLocks xmlns:a="http://schemas.openxmlformats.org/drawingml/2006/main" noGrp="1"/>
+          </p:cNvSpPr>
+          <p:nvPr/>
+        </p:nvSpPr>
+        <p:spPr>
+          <a:xfrm xmlns:a="http://schemas.openxmlformats.org/drawingml/2006/main">
+            <a:off x="781050" y="1885950"/>
+            <a:ext cx="2933700" cy="476250"/>
+          </a:xfrm>
+          <a:prstGeom xmlns:a="http://schemas.openxmlformats.org/drawingml/2006/main" prst="rect">
+            <a:avLst/>
+          </a:prstGeom>
+          <a:noFill xmlns:a="http://schemas.openxmlformats.org/drawingml/2006/main"/>
+          <a:ln xmlns:a="http://schemas.openxmlformats.org/drawingml/2006/main" w="0">
+            <a:noFill/>
+            <a:prstDash val="solid"/>
+          </a:ln>
+        </p:spPr>
+        <p:txBody>
+          <a:bodyPr xmlns:a="http://schemas.openxmlformats.org/drawingml/2006/main" anchor="t"/>
+          <a:lstStyle xmlns:a="http://schemas.openxmlformats.org/drawingml/2006/main"/>
+          <a:p xmlns:a="http://schemas.openxmlformats.org/drawingml/2006/main">
+            <a:pPr algn="l">
+              <a:defRPr sz="1500" b="1">
+                <a:solidFill>
+                  <a:srgbClr val="0F172A"/>
+                </a:solidFill>
+              </a:defRPr>
+            </a:pPr>
+            <a:r>
+              <a:rPr sz="1500" b="1">
+                <a:solidFill>
+                  <a:srgbClr val="0F172A"/>
+                </a:solidFill>
+              </a:rPr>
+              <a:t>Agent gaps can be short</a:t>
+            </a:r>
+          </a:p>
+        </p:txBody>
+      </p:sp>
+      <p:sp>
+        <p:nvSpPr>
+          <p:cNvPr id="6" name="">
+            <a:extLst xmlns:a="http://schemas.openxmlformats.org/drawingml/2006/main">
+              <a:ext uri="{FF2B5EF4-FFF2-40B4-BE49-F238E27FC236}">
+                <a16:creationId xmlns:a16="http://schemas.microsoft.com/office/drawing/2014/main" id="{14CD1DA9-919A-438E-BE34-2F5C388972DB}"/>
+              </a:ext>
+            </a:extLst>
+          </p:cNvPr>
+          <p:cNvSpPr>
+            <a:spLocks xmlns:a="http://schemas.openxmlformats.org/drawingml/2006/main" noGrp="1"/>
+          </p:cNvSpPr>
+          <p:nvPr/>
+        </p:nvSpPr>
+        <p:spPr>
+          <a:xfrm xmlns:a="http://schemas.openxmlformats.org/drawingml/2006/main">
+            <a:off x="781050" y="2419350"/>
+            <a:ext cx="2933700" cy="552450"/>
+          </a:xfrm>
+          <a:prstGeom xmlns:a="http://schemas.openxmlformats.org/drawingml/2006/main" prst="rect">
+            <a:avLst/>
+          </a:prstGeom>
+          <a:noFill xmlns:a="http://schemas.openxmlformats.org/drawingml/2006/main"/>
+          <a:ln xmlns:a="http://schemas.openxmlformats.org/drawingml/2006/main" w="0">
+            <a:noFill/>
+            <a:prstDash val="solid"/>
+          </a:ln>
+        </p:spPr>
+        <p:txBody>
+          <a:bodyPr xmlns:a="http://schemas.openxmlformats.org/drawingml/2006/main" anchor="t"/>
+          <a:lstStyle xmlns:a="http://schemas.openxmlformats.org/drawingml/2006/main"/>
+          <a:p xmlns:a="http://schemas.openxmlformats.org/drawingml/2006/main">
+            <a:pPr algn="l">
+              <a:defRPr sz="1125" b="0">
+                <a:solidFill>
+                  <a:srgbClr val="334155"/>
+                </a:solidFill>
+              </a:defRPr>
+            </a:pPr>
+            <a:r>
+              <a:rPr sz="1125" b="0">
+                <a:solidFill>
+                  <a:srgbClr val="334155"/>
+                </a:solidFill>
+              </a:rPr>
+              <a:t>Real coding-agent tool gaps can be only tens of milliseconds, leaving little room for slow software paths.</a:t>
+            </a:r>
+          </a:p>
+        </p:txBody>
+      </p:sp>
+      <p:sp>
+        <p:nvSpPr>
+          <p:cNvPr id="7" name="">
+            <a:extLst xmlns:a="http://schemas.openxmlformats.org/drawingml/2006/main">
+              <a:ext uri="{FF2B5EF4-FFF2-40B4-BE49-F238E27FC236}">
+                <a16:creationId xmlns:a16="http://schemas.microsoft.com/office/drawing/2014/main" id="{98783914-BB9A-4EE1-9FD1-C7FC15B7DD54}"/>
+              </a:ext>
+            </a:extLst>
+          </p:cNvPr>
+          <p:cNvSpPr>
+            <a:spLocks xmlns:a="http://schemas.openxmlformats.org/drawingml/2006/main" noGrp="1"/>
+          </p:cNvSpPr>
+          <p:nvPr/>
+        </p:nvSpPr>
+        <p:spPr>
+          <a:xfrm xmlns:a="http://schemas.openxmlformats.org/drawingml/2006/main">
+            <a:off x="4438650" y="1676400"/>
+            <a:ext cx="3333750" cy="1466850"/>
+          </a:xfrm>
+          <a:prstGeom xmlns:a="http://schemas.openxmlformats.org/drawingml/2006/main" prst="roundRect">
+            <a:avLst>
+              <a:gd name="adj" fmla="val 3896"/>
+            </a:avLst>
+          </a:prstGeom>
+          <a:solidFill xmlns:a="http://schemas.openxmlformats.org/drawingml/2006/main">
+            <a:srgbClr val="F5F3FF"/>
+          </a:solidFill>
+          <a:ln xmlns:a="http://schemas.openxmlformats.org/drawingml/2006/main" w="9525">
+            <a:solidFill>
+              <a:srgbClr val="C4B5FD"/>
+            </a:solidFill>
+            <a:prstDash val="solid"/>
+          </a:ln>
+        </p:spPr>
+      </p:sp>
+      <p:sp>
+        <p:nvSpPr>
+          <p:cNvPr id="8" name="">
+            <a:extLst xmlns:a="http://schemas.openxmlformats.org/drawingml/2006/main">
+              <a:ext uri="{FF2B5EF4-FFF2-40B4-BE49-F238E27FC236}">
+                <a16:creationId xmlns:a16="http://schemas.microsoft.com/office/drawing/2014/main" id="{285C038E-7D54-4B24-9C48-7340CADEEC02}"/>
+              </a:ext>
+            </a:extLst>
+          </p:cNvPr>
+          <p:cNvSpPr>
+            <a:spLocks xmlns:a="http://schemas.openxmlformats.org/drawingml/2006/main" noGrp="1"/>
+          </p:cNvSpPr>
+          <p:nvPr/>
+        </p:nvSpPr>
+        <p:spPr>
+          <a:xfrm xmlns:a="http://schemas.openxmlformats.org/drawingml/2006/main">
+            <a:off x="4438650" y="1676400"/>
+            <a:ext cx="66675" cy="1466850"/>
+          </a:xfrm>
+          <a:prstGeom xmlns:a="http://schemas.openxmlformats.org/drawingml/2006/main" prst="rect">
+            <a:avLst/>
+          </a:prstGeom>
+          <a:solidFill xmlns:a="http://schemas.openxmlformats.org/drawingml/2006/main">
+            <a:srgbClr val="A855F7"/>
+          </a:solidFill>
+          <a:ln xmlns:a="http://schemas.openxmlformats.org/drawingml/2006/main" w="0">
+            <a:noFill/>
+            <a:prstDash val="solid"/>
+          </a:ln>
+        </p:spPr>
+      </p:sp>
+      <p:sp>
+        <p:nvSpPr>
+          <p:cNvPr id="9" name="">
+            <a:extLst xmlns:a="http://schemas.openxmlformats.org/drawingml/2006/main">
+              <a:ext uri="{FF2B5EF4-FFF2-40B4-BE49-F238E27FC236}">
+                <a16:creationId xmlns:a16="http://schemas.microsoft.com/office/drawing/2014/main" id="{5CFBB829-4CEA-4A0F-94F2-A5E8DF40A9E1}"/>
+              </a:ext>
+            </a:extLst>
+          </p:cNvPr>
+          <p:cNvSpPr>
+            <a:spLocks xmlns:a="http://schemas.openxmlformats.org/drawingml/2006/main" noGrp="1"/>
+          </p:cNvSpPr>
+          <p:nvPr/>
+        </p:nvSpPr>
+        <p:spPr>
+          <a:xfrm xmlns:a="http://schemas.openxmlformats.org/drawingml/2006/main">
+            <a:off x="4667250" y="1885950"/>
+            <a:ext cx="2933700" cy="476250"/>
+          </a:xfrm>
+          <a:prstGeom xmlns:a="http://schemas.openxmlformats.org/drawingml/2006/main" prst="rect">
+            <a:avLst/>
+          </a:prstGeom>
+          <a:noFill xmlns:a="http://schemas.openxmlformats.org/drawingml/2006/main"/>
+          <a:ln xmlns:a="http://schemas.openxmlformats.org/drawingml/2006/main" w="0">
+            <a:noFill/>
+            <a:prstDash val="solid"/>
+          </a:ln>
+        </p:spPr>
+        <p:txBody>
+          <a:bodyPr xmlns:a="http://schemas.openxmlformats.org/drawingml/2006/main" anchor="t"/>
+          <a:lstStyle xmlns:a="http://schemas.openxmlformats.org/drawingml/2006/main"/>
+          <a:p xmlns:a="http://schemas.openxmlformats.org/drawingml/2006/main">
+            <a:pPr algn="l">
+              <a:defRPr sz="1500" b="1">
+                <a:solidFill>
+                  <a:srgbClr val="0F172A"/>
+                </a:solidFill>
+              </a:defRPr>
+            </a:pPr>
+            <a:r>
+              <a:rPr sz="1500" b="1">
+                <a:solidFill>
+                  <a:srgbClr val="0F172A"/>
+                </a:solidFill>
+              </a:rPr>
+              <a:t>Correct hints can still be late</a:t>
+            </a:r>
+          </a:p>
+        </p:txBody>
+      </p:sp>
+      <p:sp>
+        <p:nvSpPr>
+          <p:cNvPr id="10" name="">
+            <a:extLst xmlns:a="http://schemas.openxmlformats.org/drawingml/2006/main">
+              <a:ext uri="{FF2B5EF4-FFF2-40B4-BE49-F238E27FC236}">
+                <a16:creationId xmlns:a16="http://schemas.microsoft.com/office/drawing/2014/main" id="{BC0EC8E2-BB2D-40F3-B127-9088BC28C524}"/>
+              </a:ext>
+            </a:extLst>
+          </p:cNvPr>
+          <p:cNvSpPr>
+            <a:spLocks xmlns:a="http://schemas.openxmlformats.org/drawingml/2006/main" noGrp="1"/>
+          </p:cNvSpPr>
+          <p:nvPr/>
+        </p:nvSpPr>
+        <p:spPr>
+          <a:xfrm xmlns:a="http://schemas.openxmlformats.org/drawingml/2006/main">
+            <a:off x="4667250" y="2419350"/>
+            <a:ext cx="2933700" cy="552450"/>
+          </a:xfrm>
+          <a:prstGeom xmlns:a="http://schemas.openxmlformats.org/drawingml/2006/main" prst="rect">
+            <a:avLst/>
+          </a:prstGeom>
+          <a:noFill xmlns:a="http://schemas.openxmlformats.org/drawingml/2006/main"/>
+          <a:ln xmlns:a="http://schemas.openxmlformats.org/drawingml/2006/main" w="0">
+            <a:noFill/>
+            <a:prstDash val="solid"/>
+          </a:ln>
+        </p:spPr>
+        <p:txBody>
+          <a:bodyPr xmlns:a="http://schemas.openxmlformats.org/drawingml/2006/main" anchor="t"/>
+          <a:lstStyle xmlns:a="http://schemas.openxmlformats.org/drawingml/2006/main"/>
+          <a:p xmlns:a="http://schemas.openxmlformats.org/drawingml/2006/main">
+            <a:pPr algn="l">
+              <a:defRPr sz="1125" b="0">
+                <a:solidFill>
+                  <a:srgbClr val="334155"/>
+                </a:solidFill>
+              </a:defRPr>
+            </a:pPr>
+            <a:r>
+              <a:rPr sz="1125" b="0">
+                <a:solidFill>
+                  <a:srgbClr val="334155"/>
+                </a:solidFill>
+              </a:rPr>
+              <a:t>The hint path can exist, but KV readiness can still miss replay deadlines in profiled traces.</a:t>
+            </a:r>
+          </a:p>
+        </p:txBody>
+      </p:sp>
+      <p:sp>
+        <p:nvSpPr>
+          <p:cNvPr id="11" name="">
+            <a:extLst xmlns:a="http://schemas.openxmlformats.org/drawingml/2006/main">
+              <a:ext uri="{FF2B5EF4-FFF2-40B4-BE49-F238E27FC236}">
+                <a16:creationId xmlns:a16="http://schemas.microsoft.com/office/drawing/2014/main" id="{B430D87C-9085-4CB3-883A-DEB6E68652BD}"/>
+              </a:ext>
+            </a:extLst>
+          </p:cNvPr>
+          <p:cNvSpPr>
+            <a:spLocks xmlns:a="http://schemas.openxmlformats.org/drawingml/2006/main" noGrp="1"/>
+          </p:cNvSpPr>
+          <p:nvPr/>
+        </p:nvSpPr>
+        <p:spPr>
+          <a:xfrm xmlns:a="http://schemas.openxmlformats.org/drawingml/2006/main">
+            <a:off x="8324850" y="1676400"/>
+            <a:ext cx="3333750" cy="1466850"/>
+          </a:xfrm>
+          <a:prstGeom xmlns:a="http://schemas.openxmlformats.org/drawingml/2006/main" prst="roundRect">
+            <a:avLst>
+              <a:gd name="adj" fmla="val 3896"/>
+            </a:avLst>
+          </a:prstGeom>
+          <a:solidFill xmlns:a="http://schemas.openxmlformats.org/drawingml/2006/main">
+            <a:srgbClr val="ECFEFF"/>
+          </a:solidFill>
+          <a:ln xmlns:a="http://schemas.openxmlformats.org/drawingml/2006/main" w="9525">
+            <a:solidFill>
+              <a:srgbClr val="67E8F9"/>
+            </a:solidFill>
+            <a:prstDash val="solid"/>
+          </a:ln>
+        </p:spPr>
+      </p:sp>
+      <p:sp>
+        <p:nvSpPr>
+          <p:cNvPr id="12" name="">
+            <a:extLst xmlns:a="http://schemas.openxmlformats.org/drawingml/2006/main">
+              <a:ext uri="{FF2B5EF4-FFF2-40B4-BE49-F238E27FC236}">
+                <a16:creationId xmlns:a16="http://schemas.microsoft.com/office/drawing/2014/main" id="{2A9A4B28-48D4-4CE2-82D5-6DACC9879CD5}"/>
+              </a:ext>
+            </a:extLst>
+          </p:cNvPr>
+          <p:cNvSpPr>
+            <a:spLocks xmlns:a="http://schemas.openxmlformats.org/drawingml/2006/main" noGrp="1"/>
+          </p:cNvSpPr>
+          <p:nvPr/>
+        </p:nvSpPr>
+        <p:spPr>
+          <a:xfrm xmlns:a="http://schemas.openxmlformats.org/drawingml/2006/main">
+            <a:off x="8324850" y="1676400"/>
+            <a:ext cx="66675" cy="1466850"/>
+          </a:xfrm>
+          <a:prstGeom xmlns:a="http://schemas.openxmlformats.org/drawingml/2006/main" prst="rect">
+            <a:avLst/>
+          </a:prstGeom>
+          <a:solidFill xmlns:a="http://schemas.openxmlformats.org/drawingml/2006/main">
+            <a:srgbClr val="06B6D4"/>
+          </a:solidFill>
+          <a:ln xmlns:a="http://schemas.openxmlformats.org/drawingml/2006/main" w="0">
+            <a:noFill/>
+            <a:prstDash val="solid"/>
+          </a:ln>
+        </p:spPr>
+      </p:sp>
+      <p:sp>
+        <p:nvSpPr>
+          <p:cNvPr id="13" name="">
+            <a:extLst xmlns:a="http://schemas.openxmlformats.org/drawingml/2006/main">
+              <a:ext uri="{FF2B5EF4-FFF2-40B4-BE49-F238E27FC236}">
+                <a16:creationId xmlns:a16="http://schemas.microsoft.com/office/drawing/2014/main" id="{86698DC2-8175-4277-83ED-B200D71C1405}"/>
+              </a:ext>
+            </a:extLst>
+          </p:cNvPr>
+          <p:cNvSpPr>
+            <a:spLocks xmlns:a="http://schemas.openxmlformats.org/drawingml/2006/main" noGrp="1"/>
+          </p:cNvSpPr>
+          <p:nvPr/>
+        </p:nvSpPr>
+        <p:spPr>
+          <a:xfrm xmlns:a="http://schemas.openxmlformats.org/drawingml/2006/main">
+            <a:off x="8553450" y="1885950"/>
+            <a:ext cx="2933700" cy="476250"/>
+          </a:xfrm>
+          <a:prstGeom xmlns:a="http://schemas.openxmlformats.org/drawingml/2006/main" prst="rect">
+            <a:avLst/>
+          </a:prstGeom>
+          <a:noFill xmlns:a="http://schemas.openxmlformats.org/drawingml/2006/main"/>
+          <a:ln xmlns:a="http://schemas.openxmlformats.org/drawingml/2006/main" w="0">
+            <a:noFill/>
+            <a:prstDash val="solid"/>
+          </a:ln>
+        </p:spPr>
+        <p:txBody>
+          <a:bodyPr xmlns:a="http://schemas.openxmlformats.org/drawingml/2006/main" anchor="t"/>
+          <a:lstStyle xmlns:a="http://schemas.openxmlformats.org/drawingml/2006/main"/>
+          <a:p xmlns:a="http://schemas.openxmlformats.org/drawingml/2006/main">
+            <a:pPr algn="l">
+              <a:defRPr sz="1500" b="1">
+                <a:solidFill>
+                  <a:srgbClr val="0F172A"/>
+                </a:solidFill>
+              </a:defRPr>
+            </a:pPr>
+            <a:r>
+              <a:rPr sz="1500" b="1">
+                <a:solidFill>
+                  <a:srgbClr val="0F172A"/>
+                </a:solidFill>
+              </a:rPr>
+              <a:t>Copy time is not the whole delay</a:t>
+            </a:r>
+          </a:p>
+        </p:txBody>
+      </p:sp>
+      <p:sp>
+        <p:nvSpPr>
+          <p:cNvPr id="14" name="">
+            <a:extLst xmlns:a="http://schemas.openxmlformats.org/drawingml/2006/main">
+              <a:ext uri="{FF2B5EF4-FFF2-40B4-BE49-F238E27FC236}">
+                <a16:creationId xmlns:a16="http://schemas.microsoft.com/office/drawing/2014/main" id="{F6EB3C76-EEA8-4CD5-8390-3AFC0EB934EB}"/>
+              </a:ext>
+            </a:extLst>
+          </p:cNvPr>
+          <p:cNvSpPr>
+            <a:spLocks xmlns:a="http://schemas.openxmlformats.org/drawingml/2006/main" noGrp="1"/>
+          </p:cNvSpPr>
+          <p:nvPr/>
+        </p:nvSpPr>
+        <p:spPr>
+          <a:xfrm xmlns:a="http://schemas.openxmlformats.org/drawingml/2006/main">
+            <a:off x="8553450" y="2419350"/>
+            <a:ext cx="2933700" cy="552450"/>
+          </a:xfrm>
+          <a:prstGeom xmlns:a="http://schemas.openxmlformats.org/drawingml/2006/main" prst="rect">
+            <a:avLst/>
+          </a:prstGeom>
+          <a:noFill xmlns:a="http://schemas.openxmlformats.org/drawingml/2006/main"/>
+          <a:ln xmlns:a="http://schemas.openxmlformats.org/drawingml/2006/main" w="0">
+            <a:noFill/>
+            <a:prstDash val="solid"/>
+          </a:ln>
+        </p:spPr>
+        <p:txBody>
+          <a:bodyPr xmlns:a="http://schemas.openxmlformats.org/drawingml/2006/main" anchor="t"/>
+          <a:lstStyle xmlns:a="http://schemas.openxmlformats.org/drawingml/2006/main"/>
+          <a:p xmlns:a="http://schemas.openxmlformats.org/drawingml/2006/main">
+            <a:pPr algn="l">
+              <a:defRPr sz="1125" b="0">
+                <a:solidFill>
+                  <a:srgbClr val="334155"/>
+                </a:solidFill>
+              </a:defRPr>
+            </a:pPr>
+            <a:r>
+              <a:rPr sz="1125" b="0">
+                <a:solidFill>
+                  <a:srgbClr val="334155"/>
+                </a:solidFill>
+              </a:rPr>
+              <a:t>Visible H2D copy can be short while end-to-end request/prefetch latency is much longer.</a:t>
+            </a:r>
+          </a:p>
+        </p:txBody>
+      </p:sp>
+      <p:sp>
+        <p:nvSpPr>
+          <p:cNvPr id="15" name="">
+            <a:extLst xmlns:a="http://schemas.openxmlformats.org/drawingml/2006/main">
+              <a:ext uri="{FF2B5EF4-FFF2-40B4-BE49-F238E27FC236}">
+                <a16:creationId xmlns:a16="http://schemas.microsoft.com/office/drawing/2014/main" id="{5BDAA012-A02D-4E6A-AB04-44160B48C85C}"/>
+              </a:ext>
+            </a:extLst>
+          </p:cNvPr>
+          <p:cNvSpPr>
+            <a:spLocks xmlns:a="http://schemas.openxmlformats.org/drawingml/2006/main" noGrp="1"/>
+          </p:cNvSpPr>
+          <p:nvPr/>
+        </p:nvSpPr>
+        <p:spPr>
+          <a:xfrm xmlns:a="http://schemas.openxmlformats.org/drawingml/2006/main">
+            <a:off x="1504950" y="3448050"/>
+            <a:ext cx="4095750" cy="1466850"/>
+          </a:xfrm>
+          <a:prstGeom xmlns:a="http://schemas.openxmlformats.org/drawingml/2006/main" prst="roundRect">
+            <a:avLst>
+              <a:gd name="adj" fmla="val 3896"/>
+            </a:avLst>
+          </a:prstGeom>
+          <a:solidFill xmlns:a="http://schemas.openxmlformats.org/drawingml/2006/main">
+            <a:srgbClr val="FFF7ED"/>
+          </a:solidFill>
+          <a:ln xmlns:a="http://schemas.openxmlformats.org/drawingml/2006/main" w="9525">
+            <a:solidFill>
+              <a:srgbClr val="FED7AA"/>
+            </a:solidFill>
+            <a:prstDash val="solid"/>
+          </a:ln>
+        </p:spPr>
+      </p:sp>
+      <p:sp>
+        <p:nvSpPr>
+          <p:cNvPr id="16" name="">
+            <a:extLst xmlns:a="http://schemas.openxmlformats.org/drawingml/2006/main">
+              <a:ext uri="{FF2B5EF4-FFF2-40B4-BE49-F238E27FC236}">
+                <a16:creationId xmlns:a16="http://schemas.microsoft.com/office/drawing/2014/main" id="{EC1B9260-9F0C-4B41-8D74-8A4C502276F3}"/>
+              </a:ext>
+            </a:extLst>
+          </p:cNvPr>
+          <p:cNvSpPr>
+            <a:spLocks xmlns:a="http://schemas.openxmlformats.org/drawingml/2006/main" noGrp="1"/>
+          </p:cNvSpPr>
+          <p:nvPr/>
+        </p:nvSpPr>
+        <p:spPr>
+          <a:xfrm xmlns:a="http://schemas.openxmlformats.org/drawingml/2006/main">
+            <a:off x="1504950" y="3448050"/>
+            <a:ext cx="66675" cy="1466850"/>
+          </a:xfrm>
+          <a:prstGeom xmlns:a="http://schemas.openxmlformats.org/drawingml/2006/main" prst="rect">
+            <a:avLst/>
+          </a:prstGeom>
+          <a:solidFill xmlns:a="http://schemas.openxmlformats.org/drawingml/2006/main">
+            <a:srgbClr val="C2410C"/>
+          </a:solidFill>
+          <a:ln xmlns:a="http://schemas.openxmlformats.org/drawingml/2006/main" w="0">
+            <a:noFill/>
+            <a:prstDash val="solid"/>
+          </a:ln>
+        </p:spPr>
+      </p:sp>
+      <p:sp>
+        <p:nvSpPr>
+          <p:cNvPr id="17" name="">
+            <a:extLst xmlns:a="http://schemas.openxmlformats.org/drawingml/2006/main">
+              <a:ext uri="{FF2B5EF4-FFF2-40B4-BE49-F238E27FC236}">
+                <a16:creationId xmlns:a16="http://schemas.microsoft.com/office/drawing/2014/main" id="{583FAA72-B3A4-45F1-932E-E579453E034D}"/>
+              </a:ext>
+            </a:extLst>
+          </p:cNvPr>
+          <p:cNvSpPr>
+            <a:spLocks xmlns:a="http://schemas.openxmlformats.org/drawingml/2006/main" noGrp="1"/>
+          </p:cNvSpPr>
+          <p:nvPr/>
+        </p:nvSpPr>
+        <p:spPr>
+          <a:xfrm xmlns:a="http://schemas.openxmlformats.org/drawingml/2006/main">
+            <a:off x="1733550" y="3657600"/>
+            <a:ext cx="3695700" cy="476250"/>
+          </a:xfrm>
+          <a:prstGeom xmlns:a="http://schemas.openxmlformats.org/drawingml/2006/main" prst="rect">
+            <a:avLst/>
+          </a:prstGeom>
+          <a:noFill xmlns:a="http://schemas.openxmlformats.org/drawingml/2006/main"/>
+          <a:ln xmlns:a="http://schemas.openxmlformats.org/drawingml/2006/main" w="0">
+            <a:noFill/>
+            <a:prstDash val="solid"/>
+          </a:ln>
+        </p:spPr>
+        <p:txBody>
+          <a:bodyPr xmlns:a="http://schemas.openxmlformats.org/drawingml/2006/main" anchor="t"/>
+          <a:lstStyle xmlns:a="http://schemas.openxmlformats.org/drawingml/2006/main"/>
+          <a:p xmlns:a="http://schemas.openxmlformats.org/drawingml/2006/main">
+            <a:pPr algn="l">
+              <a:defRPr sz="1500" b="1">
+                <a:solidFill>
+                  <a:srgbClr val="0F172A"/>
+                </a:solidFill>
+              </a:defRPr>
+            </a:pPr>
+            <a:r>
+              <a:rPr sz="1500" b="1">
+                <a:solidFill>
+                  <a:srgbClr val="0F172A"/>
+                </a:solidFill>
+              </a:rPr>
+              <a:t>KV can be lost before replay</a:t>
+            </a:r>
+          </a:p>
+        </p:txBody>
+      </p:sp>
+      <p:sp>
+        <p:nvSpPr>
+          <p:cNvPr id="18" name="">
+            <a:extLst xmlns:a="http://schemas.openxmlformats.org/drawingml/2006/main">
+              <a:ext uri="{FF2B5EF4-FFF2-40B4-BE49-F238E27FC236}">
+                <a16:creationId xmlns:a16="http://schemas.microsoft.com/office/drawing/2014/main" id="{C2A1C1C3-4EA7-4296-B0F4-0F742A763B10}"/>
+              </a:ext>
+            </a:extLst>
+          </p:cNvPr>
+          <p:cNvSpPr>
+            <a:spLocks xmlns:a="http://schemas.openxmlformats.org/drawingml/2006/main" noGrp="1"/>
+          </p:cNvSpPr>
+          <p:nvPr/>
+        </p:nvSpPr>
+        <p:spPr>
+          <a:xfrm xmlns:a="http://schemas.openxmlformats.org/drawingml/2006/main">
+            <a:off x="1733550" y="4191000"/>
+            <a:ext cx="3695700" cy="552450"/>
+          </a:xfrm>
+          <a:prstGeom xmlns:a="http://schemas.openxmlformats.org/drawingml/2006/main" prst="rect">
+            <a:avLst/>
+          </a:prstGeom>
+          <a:noFill xmlns:a="http://schemas.openxmlformats.org/drawingml/2006/main"/>
+          <a:ln xmlns:a="http://schemas.openxmlformats.org/drawingml/2006/main" w="0">
+            <a:noFill/>
+            <a:prstDash val="solid"/>
+          </a:ln>
+        </p:spPr>
+        <p:txBody>
+          <a:bodyPr xmlns:a="http://schemas.openxmlformats.org/drawingml/2006/main" anchor="t"/>
+          <a:lstStyle xmlns:a="http://schemas.openxmlformats.org/drawingml/2006/main"/>
+          <a:p xmlns:a="http://schemas.openxmlformats.org/drawingml/2006/main">
+            <a:pPr algn="l">
+              <a:defRPr sz="1125" b="0">
+                <a:solidFill>
+                  <a:srgbClr val="334155"/>
+                </a:solidFill>
+              </a:defRPr>
+            </a:pPr>
+            <a:r>
+              <a:rPr sz="1125" b="0">
+                <a:solidFill>
+                  <a:srgbClr val="334155"/>
+                </a:solidFill>
+              </a:rPr>
+              <a:t>Lifecycle traces show KV written to host, evicted from GPU, then sometimes evicted from host before replay.</a:t>
+            </a:r>
+          </a:p>
+        </p:txBody>
+      </p:sp>
+      <p:sp>
+        <p:nvSpPr>
+          <p:cNvPr id="19" name="">
+            <a:extLst xmlns:a="http://schemas.openxmlformats.org/drawingml/2006/main">
+              <a:ext uri="{FF2B5EF4-FFF2-40B4-BE49-F238E27FC236}">
+                <a16:creationId xmlns:a16="http://schemas.microsoft.com/office/drawing/2014/main" id="{128A8758-C404-4412-9F6C-5C1F77ED5FC4}"/>
+              </a:ext>
+            </a:extLst>
+          </p:cNvPr>
+          <p:cNvSpPr>
+            <a:spLocks xmlns:a="http://schemas.openxmlformats.org/drawingml/2006/main" noGrp="1"/>
+          </p:cNvSpPr>
+          <p:nvPr/>
+        </p:nvSpPr>
+        <p:spPr>
+          <a:xfrm xmlns:a="http://schemas.openxmlformats.org/drawingml/2006/main">
+            <a:off x="6591300" y="3448050"/>
+            <a:ext cx="4095750" cy="1466850"/>
+          </a:xfrm>
+          <a:prstGeom xmlns:a="http://schemas.openxmlformats.org/drawingml/2006/main" prst="roundRect">
+            <a:avLst>
+              <a:gd name="adj" fmla="val 3896"/>
+            </a:avLst>
+          </a:prstGeom>
+          <a:solidFill xmlns:a="http://schemas.openxmlformats.org/drawingml/2006/main">
+            <a:srgbClr val="FEF2F2"/>
+          </a:solidFill>
+          <a:ln xmlns:a="http://schemas.openxmlformats.org/drawingml/2006/main" w="9525">
+            <a:solidFill>
+              <a:srgbClr val="FECACA"/>
+            </a:solidFill>
+            <a:prstDash val="solid"/>
+          </a:ln>
+        </p:spPr>
+      </p:sp>
+      <p:sp>
+        <p:nvSpPr>
+          <p:cNvPr id="20" name="">
+            <a:extLst xmlns:a="http://schemas.openxmlformats.org/drawingml/2006/main">
+              <a:ext uri="{FF2B5EF4-FFF2-40B4-BE49-F238E27FC236}">
+                <a16:creationId xmlns:a16="http://schemas.microsoft.com/office/drawing/2014/main" id="{B3C75721-BC20-4175-8FD0-4D3EA7055122}"/>
+              </a:ext>
+            </a:extLst>
+          </p:cNvPr>
+          <p:cNvSpPr>
+            <a:spLocks xmlns:a="http://schemas.openxmlformats.org/drawingml/2006/main" noGrp="1"/>
+          </p:cNvSpPr>
+          <p:nvPr/>
+        </p:nvSpPr>
+        <p:spPr>
+          <a:xfrm xmlns:a="http://schemas.openxmlformats.org/drawingml/2006/main">
+            <a:off x="6591300" y="3448050"/>
+            <a:ext cx="66675" cy="1466850"/>
+          </a:xfrm>
+          <a:prstGeom xmlns:a="http://schemas.openxmlformats.org/drawingml/2006/main" prst="rect">
+            <a:avLst/>
+          </a:prstGeom>
+          <a:solidFill xmlns:a="http://schemas.openxmlformats.org/drawingml/2006/main">
+            <a:srgbClr val="B91C1C"/>
+          </a:solidFill>
+          <a:ln xmlns:a="http://schemas.openxmlformats.org/drawingml/2006/main" w="0">
+            <a:noFill/>
+            <a:prstDash val="solid"/>
+          </a:ln>
+        </p:spPr>
+      </p:sp>
+      <p:sp>
+        <p:nvSpPr>
+          <p:cNvPr id="21" name="">
+            <a:extLst xmlns:a="http://schemas.openxmlformats.org/drawingml/2006/main">
+              <a:ext uri="{FF2B5EF4-FFF2-40B4-BE49-F238E27FC236}">
+                <a16:creationId xmlns:a16="http://schemas.microsoft.com/office/drawing/2014/main" id="{C46F67E8-333A-48C5-A4E5-C6839F023971}"/>
+              </a:ext>
+            </a:extLst>
+          </p:cNvPr>
+          <p:cNvSpPr>
+            <a:spLocks xmlns:a="http://schemas.openxmlformats.org/drawingml/2006/main" noGrp="1"/>
+          </p:cNvSpPr>
+          <p:nvPr/>
+        </p:nvSpPr>
+        <p:spPr>
+          <a:xfrm xmlns:a="http://schemas.openxmlformats.org/drawingml/2006/main">
+            <a:off x="6819900" y="3657600"/>
+            <a:ext cx="3695700" cy="476250"/>
+          </a:xfrm>
+          <a:prstGeom xmlns:a="http://schemas.openxmlformats.org/drawingml/2006/main" prst="rect">
+            <a:avLst/>
+          </a:prstGeom>
+          <a:noFill xmlns:a="http://schemas.openxmlformats.org/drawingml/2006/main"/>
+          <a:ln xmlns:a="http://schemas.openxmlformats.org/drawingml/2006/main" w="0">
+            <a:noFill/>
+            <a:prstDash val="solid"/>
+          </a:ln>
+        </p:spPr>
+        <p:txBody>
+          <a:bodyPr xmlns:a="http://schemas.openxmlformats.org/drawingml/2006/main" anchor="t"/>
+          <a:lstStyle xmlns:a="http://schemas.openxmlformats.org/drawingml/2006/main"/>
+          <a:p xmlns:a="http://schemas.openxmlformats.org/drawingml/2006/main">
+            <a:pPr algn="l">
+              <a:defRPr sz="1500" b="1">
+                <a:solidFill>
+                  <a:srgbClr val="0F172A"/>
+                </a:solidFill>
+              </a:defRPr>
+            </a:pPr>
+            <a:r>
+              <a:rPr sz="1500" b="1">
+                <a:solidFill>
+                  <a:srgbClr val="0F172A"/>
+                </a:solidFill>
+              </a:rPr>
+              <a:t>Replay loads can miss the deadline</a:t>
+            </a:r>
+          </a:p>
+        </p:txBody>
+      </p:sp>
+      <p:sp>
+        <p:nvSpPr>
+          <p:cNvPr id="22" name="">
+            <a:extLst xmlns:a="http://schemas.openxmlformats.org/drawingml/2006/main">
+              <a:ext uri="{FF2B5EF4-FFF2-40B4-BE49-F238E27FC236}">
+                <a16:creationId xmlns:a16="http://schemas.microsoft.com/office/drawing/2014/main" id="{63919347-1838-4D9A-B847-25987F74239E}"/>
+              </a:ext>
+            </a:extLst>
+          </p:cNvPr>
+          <p:cNvSpPr>
+            <a:spLocks xmlns:a="http://schemas.openxmlformats.org/drawingml/2006/main" noGrp="1"/>
+          </p:cNvSpPr>
+          <p:nvPr/>
+        </p:nvSpPr>
+        <p:spPr>
+          <a:xfrm xmlns:a="http://schemas.openxmlformats.org/drawingml/2006/main">
+            <a:off x="6819900" y="4191000"/>
+            <a:ext cx="3695700" cy="552450"/>
+          </a:xfrm>
+          <a:prstGeom xmlns:a="http://schemas.openxmlformats.org/drawingml/2006/main" prst="rect">
+            <a:avLst/>
+          </a:prstGeom>
+          <a:noFill xmlns:a="http://schemas.openxmlformats.org/drawingml/2006/main"/>
+          <a:ln xmlns:a="http://schemas.openxmlformats.org/drawingml/2006/main" w="0">
+            <a:noFill/>
+            <a:prstDash val="solid"/>
+          </a:ln>
+        </p:spPr>
+        <p:txBody>
+          <a:bodyPr xmlns:a="http://schemas.openxmlformats.org/drawingml/2006/main" anchor="t"/>
+          <a:lstStyle xmlns:a="http://schemas.openxmlformats.org/drawingml/2006/main"/>
+          <a:p xmlns:a="http://schemas.openxmlformats.org/drawingml/2006/main">
+            <a:pPr algn="l">
+              <a:defRPr sz="1125" b="0">
+                <a:solidFill>
+                  <a:srgbClr val="334155"/>
+                </a:solidFill>
+              </a:defRPr>
+            </a:pPr>
+            <a:r>
+              <a:rPr sz="1125" b="0">
+                <a:solidFill>
+                  <a:srgbClr val="334155"/>
+                </a:solidFill>
+              </a:rPr>
+              <a:t>Replay-side H2D movement often starts or finishes after the agent already needed KV ready.</a:t>
+            </a:r>
+          </a:p>
+        </p:txBody>
+      </p:sp>
+      <p:sp>
+        <p:nvSpPr>
+          <p:cNvPr id="23" name="">
+            <a:extLst xmlns:a="http://schemas.openxmlformats.org/drawingml/2006/main">
+              <a:ext uri="{FF2B5EF4-FFF2-40B4-BE49-F238E27FC236}">
+                <a16:creationId xmlns:a16="http://schemas.microsoft.com/office/drawing/2014/main" id="{2518431A-585D-4CA3-81D5-6CD7834F3B57}"/>
+              </a:ext>
+            </a:extLst>
+          </p:cNvPr>
+          <p:cNvSpPr>
+            <a:spLocks xmlns:a="http://schemas.openxmlformats.org/drawingml/2006/main" noGrp="1"/>
+          </p:cNvSpPr>
+          <p:nvPr/>
+        </p:nvSpPr>
+        <p:spPr>
+          <a:xfrm xmlns:a="http://schemas.openxmlformats.org/drawingml/2006/main">
+            <a:off x="1809750" y="5257800"/>
+            <a:ext cx="8572500" cy="514350"/>
+          </a:xfrm>
+          <a:prstGeom xmlns:a="http://schemas.openxmlformats.org/drawingml/2006/main" prst="roundRect">
+            <a:avLst>
+              <a:gd name="adj" fmla="val 11111"/>
+            </a:avLst>
+          </a:prstGeom>
+          <a:solidFill xmlns:a="http://schemas.openxmlformats.org/drawingml/2006/main">
+            <a:srgbClr val="F8FAFC"/>
+          </a:solidFill>
+          <a:ln xmlns:a="http://schemas.openxmlformats.org/drawingml/2006/main" w="9525">
+            <a:solidFill>
+              <a:srgbClr val="CBD5E1"/>
+            </a:solidFill>
+            <a:prstDash val="solid"/>
+          </a:ln>
+        </p:spPr>
+      </p:sp>
+      <p:sp>
+        <p:nvSpPr>
+          <p:cNvPr id="24" name="">
+            <a:extLst xmlns:a="http://schemas.openxmlformats.org/drawingml/2006/main">
+              <a:ext uri="{FF2B5EF4-FFF2-40B4-BE49-F238E27FC236}">
+                <a16:creationId xmlns:a16="http://schemas.microsoft.com/office/drawing/2014/main" id="{C700FCBA-F89E-4CE9-B2FC-FFAFAD0ADAA1}"/>
+              </a:ext>
+            </a:extLst>
+          </p:cNvPr>
+          <p:cNvSpPr>
+            <a:spLocks xmlns:a="http://schemas.openxmlformats.org/drawingml/2006/main" noGrp="1"/>
+          </p:cNvSpPr>
+          <p:nvPr/>
+        </p:nvSpPr>
+        <p:spPr>
+          <a:xfrm xmlns:a="http://schemas.openxmlformats.org/drawingml/2006/main">
+            <a:off x="2133600" y="5410200"/>
+            <a:ext cx="7924800" cy="228600"/>
+          </a:xfrm>
+          <a:prstGeom xmlns:a="http://schemas.openxmlformats.org/drawingml/2006/main" prst="rect">
+            <a:avLst/>
+          </a:prstGeom>
+          <a:noFill xmlns:a="http://schemas.openxmlformats.org/drawingml/2006/main"/>
+          <a:ln xmlns:a="http://schemas.openxmlformats.org/drawingml/2006/main" w="0">
+            <a:noFill/>
+            <a:prstDash val="solid"/>
+          </a:ln>
+        </p:spPr>
+        <p:txBody>
+          <a:bodyPr xmlns:a="http://schemas.openxmlformats.org/drawingml/2006/main" anchor="t"/>
+          <a:lstStyle xmlns:a="http://schemas.openxmlformats.org/drawingml/2006/main"/>
+          <a:p xmlns:a="http://schemas.openxmlformats.org/drawingml/2006/main">
+            <a:pPr algn="ctr">
+              <a:defRPr sz="1350" b="1">
+                <a:solidFill>
+                  <a:srgbClr val="0F172A"/>
+                </a:solidFill>
+              </a:defRPr>
+            </a:pPr>
+            <a:r>
+              <a:rPr sz="1350" b="1">
+                <a:solidFill>
+                  <a:srgbClr val="0F172A"/>
+                </a:solidFill>
+              </a:rPr>
+              <a:t>Implication: smarter DMA needs KV/session metadata, deadline-aware scheduling, residency protection, and useful telemetry.</a:t>
+            </a:r>
+          </a:p>
+        </p:txBody>
+      </p:sp>
+      <p:sp>
+        <p:nvSpPr>
+          <p:cNvPr id="25" name="">
+            <a:extLst xmlns:a="http://schemas.openxmlformats.org/drawingml/2006/main">
+              <a:ext uri="{FF2B5EF4-FFF2-40B4-BE49-F238E27FC236}">
+                <a16:creationId xmlns:a16="http://schemas.microsoft.com/office/drawing/2014/main" id="{5C942F0D-7645-410C-94FD-9ED856FEACC4}"/>
+              </a:ext>
+            </a:extLst>
+          </p:cNvPr>
+          <p:cNvSpPr>
+            <a:spLocks xmlns:a="http://schemas.openxmlformats.org/drawingml/2006/main" noGrp="1"/>
+          </p:cNvSpPr>
+          <p:nvPr/>
+        </p:nvSpPr>
+        <p:spPr>
+          <a:xfrm xmlns:a="http://schemas.openxmlformats.org/drawingml/2006/main">
+            <a:off x="400050" y="6153150"/>
+            <a:ext cx="7810500" cy="190500"/>
+          </a:xfrm>
+          <a:prstGeom xmlns:a="http://schemas.openxmlformats.org/drawingml/2006/main" prst="rect">
+            <a:avLst/>
+          </a:prstGeom>
+          <a:noFill xmlns:a="http://schemas.openxmlformats.org/drawingml/2006/main"/>
+          <a:ln xmlns:a="http://schemas.openxmlformats.org/drawingml/2006/main" w="0">
+            <a:noFill/>
+            <a:prstDash val="solid"/>
+          </a:ln>
+        </p:spPr>
+        <p:txBody>
+          <a:bodyPr xmlns:a="http://schemas.openxmlformats.org/drawingml/2006/main" anchor="t"/>
+          <a:lstStyle xmlns:a="http://schemas.openxmlformats.org/drawingml/2006/main"/>
+          <a:p xmlns:a="http://schemas.openxmlformats.org/drawingml/2006/main">
+            <a:pPr algn="l">
+              <a:defRPr sz="825" b="0">
+                <a:solidFill>
+                  <a:srgbClr val="64748B"/>
+                </a:solidFill>
+              </a:defRPr>
+            </a:pPr>
+            <a:r>
+              <a:rPr sz="825" b="0">
+                <a:solidFill>
+                  <a:srgbClr val="64748B"/>
+                </a:solidFill>
+              </a:rPr>
+              <a:t>Source: project traces and latest master/synthetic report observations</a:t>
+            </a:r>
+          </a:p>
+        </p:txBody>
+      </p:sp>
+      <p:sp>
+        <p:nvSpPr>
+          <p:cNvPr id="26" name="">
+            <a:extLst xmlns:a="http://schemas.openxmlformats.org/drawingml/2006/main">
+              <a:ext uri="{FF2B5EF4-FFF2-40B4-BE49-F238E27FC236}">
+                <a16:creationId xmlns:a16="http://schemas.microsoft.com/office/drawing/2014/main" id="{82C8530E-6395-433C-B9E5-27DCC15BFD36}"/>
+              </a:ext>
+            </a:extLst>
+          </p:cNvPr>
+          <p:cNvSpPr>
+            <a:spLocks xmlns:a="http://schemas.openxmlformats.org/drawingml/2006/main" noGrp="1"/>
+          </p:cNvSpPr>
+          <p:nvPr/>
+        </p:nvSpPr>
+        <p:spPr>
+          <a:xfrm xmlns:a="http://schemas.openxmlformats.org/drawingml/2006/main">
+            <a:off x="400050" y="6381750"/>
+            <a:ext cx="3429000" cy="228600"/>
+          </a:xfrm>
+          <a:prstGeom xmlns:a="http://schemas.openxmlformats.org/drawingml/2006/main" prst="rect">
+            <a:avLst/>
+          </a:prstGeom>
+          <a:noFill xmlns:a="http://schemas.openxmlformats.org/drawingml/2006/main"/>
+          <a:ln xmlns:a="http://schemas.openxmlformats.org/drawingml/2006/main" w="0">
+            <a:noFill/>
+            <a:prstDash val="solid"/>
+          </a:ln>
+        </p:spPr>
+        <p:txBody>
+          <a:bodyPr xmlns:a="http://schemas.openxmlformats.org/drawingml/2006/main" anchor="t"/>
+          <a:lstStyle xmlns:a="http://schemas.openxmlformats.org/drawingml/2006/main"/>
+          <a:p xmlns:a="http://schemas.openxmlformats.org/drawingml/2006/main">
+            <a:pPr algn="l">
+              <a:defRPr sz="975" b="0">
+                <a:solidFill>
+                  <a:srgbClr val="64748B"/>
+                </a:solidFill>
+              </a:defRPr>
+            </a:pPr>
+            <a:r>
+              <a:rPr sz="975" b="0">
+                <a:solidFill>
+                  <a:srgbClr val="64748B"/>
+                </a:solidFill>
+              </a:rPr>
+              <a:t>Agent-aware KV movement</a:t>
+            </a:r>
+          </a:p>
+        </p:txBody>
+      </p:sp>
+      <p:sp>
+        <p:nvSpPr>
+          <p:cNvPr id="27" name="">
+            <a:extLst xmlns:a="http://schemas.openxmlformats.org/drawingml/2006/main">
+              <a:ext uri="{FF2B5EF4-FFF2-40B4-BE49-F238E27FC236}">
+                <a16:creationId xmlns:a16="http://schemas.microsoft.com/office/drawing/2014/main" id="{9CD4DBD8-E9D4-4D5F-AD3C-7A0FF9D2004C}"/>
+              </a:ext>
+            </a:extLst>
+          </p:cNvPr>
+          <p:cNvSpPr>
+            <a:spLocks xmlns:a="http://schemas.openxmlformats.org/drawingml/2006/main" noGrp="1"/>
+          </p:cNvSpPr>
+          <p:nvPr/>
+        </p:nvSpPr>
+        <p:spPr>
+          <a:xfrm xmlns:a="http://schemas.openxmlformats.org/drawingml/2006/main">
+            <a:off x="11334750" y="6381750"/>
+            <a:ext cx="457200" cy="228600"/>
+          </a:xfrm>
+          <a:prstGeom xmlns:a="http://schemas.openxmlformats.org/drawingml/2006/main" prst="rect">
+            <a:avLst/>
+          </a:prstGeom>
+          <a:noFill xmlns:a="http://schemas.openxmlformats.org/drawingml/2006/main"/>
+          <a:ln xmlns:a="http://schemas.openxmlformats.org/drawingml/2006/main" w="0">
+            <a:noFill/>
+            <a:prstDash val="solid"/>
+          </a:ln>
+        </p:spPr>
+        <p:txBody>
+          <a:bodyPr xmlns:a="http://schemas.openxmlformats.org/drawingml/2006/main" anchor="t"/>
+          <a:lstStyle xmlns:a="http://schemas.openxmlformats.org/drawingml/2006/main"/>
+          <a:p xmlns:a="http://schemas.openxmlformats.org/drawingml/2006/main">
+            <a:pPr algn="r">
+              <a:defRPr sz="975" b="0">
+                <a:solidFill>
+                  <a:srgbClr val="64748B"/>
+                </a:solidFill>
+              </a:defRPr>
+            </a:pPr>
+            <a:r>
+              <a:rPr sz="975" b="0">
+                <a:solidFill>
+                  <a:srgbClr val="64748B"/>
+                </a:solidFill>
+              </a:rPr>
+              <a:t>10</a:t>
+            </a:r>
+          </a:p>
+        </p:txBody>
+      </p:sp>
+    </p:spTree>
+    <p:extLst>
+      <p:ext uri="{BB962C8B-B14F-4D97-AF65-F5344CB8AC3E}">
+        <p14:creationId xmlns:p14="http://schemas.microsoft.com/office/powerpoint/2010/main" val="992531945"/>
+      </p:ext>
+    </p:extLst>
+  </p:cSld>
+</p:sld>
+</file>
+
+<file path=ppt/slides/slide11.xml><?xml version="1.0" encoding="utf-8"?>
+<p:sld xmlns:p="http://schemas.openxmlformats.org/presentationml/2006/main">
+  <p:cSld>
+    <p:bg>
+      <p:bgPr>
+        <a:solidFill xmlns:a="http://schemas.openxmlformats.org/drawingml/2006/main">
+          <a:srgbClr val="FFFFFF"/>
+        </a:solidFill>
+      </p:bgPr>
+    </p:bg>
+    <p:spTree>
+      <p:nvGrpSpPr>
+        <p:cNvPr id="1" name=""/>
+        <p:cNvGrpSpPr/>
+        <p:nvPr/>
+      </p:nvGrpSpPr>
+      <p:grpSpPr>
+        <a:xfrm xmlns:a="http://schemas.openxmlformats.org/drawingml/2006/main"/>
+      </p:grpSpPr>
+      <p:sp>
+        <p:nvSpPr>
+          <p:cNvPr id="27" name="">
+            <a:extLst xmlns:a="http://schemas.openxmlformats.org/drawingml/2006/main">
+              <a:ext uri="{FF2B5EF4-FFF2-40B4-BE49-F238E27FC236}">
+                <a16:creationId xmlns:a16="http://schemas.microsoft.com/office/drawing/2014/main" id="{B4D438DD-5867-4059-92AC-EAFBA1919051}"/>
+              </a:ext>
+            </a:extLst>
+          </p:cNvPr>
+          <p:cNvSpPr>
+            <a:spLocks xmlns:a="http://schemas.openxmlformats.org/drawingml/2006/main" noGrp="1"/>
+          </p:cNvSpPr>
+          <p:nvPr/>
+        </p:nvSpPr>
+        <p:spPr>
+          <a:xfrm xmlns:a="http://schemas.openxmlformats.org/drawingml/2006/main">
+            <a:off x="400050" y="323850"/>
+            <a:ext cx="10668000" cy="800100"/>
+          </a:xfrm>
+          <a:prstGeom xmlns:a="http://schemas.openxmlformats.org/drawingml/2006/main" prst="rect">
+            <a:avLst/>
+          </a:prstGeom>
+          <a:noFill xmlns:a="http://schemas.openxmlformats.org/drawingml/2006/main"/>
+          <a:ln xmlns:a="http://schemas.openxmlformats.org/drawingml/2006/main" w="0">
+            <a:noFill/>
+            <a:prstDash val="solid"/>
+          </a:ln>
+        </p:spPr>
+        <p:txBody>
+          <a:bodyPr xmlns:a="http://schemas.openxmlformats.org/drawingml/2006/main" anchor="t"/>
+          <a:lstStyle xmlns:a="http://schemas.openxmlformats.org/drawingml/2006/main"/>
+          <a:p xmlns:a="http://schemas.openxmlformats.org/drawingml/2006/main">
+            <a:pPr algn="l">
+              <a:defRPr sz="2850" b="1">
+                <a:solidFill>
+                  <a:srgbClr val="0F172A"/>
+                </a:solidFill>
+              </a:defRPr>
+            </a:pPr>
+            <a:r>
+              <a:rPr sz="2850" b="1">
+                <a:solidFill>
+                  <a:srgbClr val="0F172A"/>
+                </a:solidFill>
+              </a:rPr>
+              <a:t>Hardware support can make hints enforceable</a:t>
+            </a:r>
+          </a:p>
+        </p:txBody>
+      </p:sp>
+      <p:sp>
+        <p:nvSpPr>
+          <p:cNvPr id="2" name="">
+            <a:extLst xmlns:a="http://schemas.openxmlformats.org/drawingml/2006/main">
+              <a:ext uri="{FF2B5EF4-FFF2-40B4-BE49-F238E27FC236}">
+                <a16:creationId xmlns:a16="http://schemas.microsoft.com/office/drawing/2014/main" id="{135DF2C0-378A-4909-8877-0397C35027EB}"/>
+              </a:ext>
+            </a:extLst>
+          </p:cNvPr>
+          <p:cNvSpPr>
+            <a:spLocks xmlns:a="http://schemas.openxmlformats.org/drawingml/2006/main" noGrp="1"/>
+          </p:cNvSpPr>
+          <p:nvPr/>
+        </p:nvSpPr>
+        <p:spPr>
+          <a:xfrm xmlns:a="http://schemas.openxmlformats.org/drawingml/2006/main">
+            <a:off x="419100" y="1028700"/>
+            <a:ext cx="9715500" cy="419100"/>
+          </a:xfrm>
+          <a:prstGeom xmlns:a="http://schemas.openxmlformats.org/drawingml/2006/main" prst="rect">
+            <a:avLst/>
+          </a:prstGeom>
+          <a:noFill xmlns:a="http://schemas.openxmlformats.org/drawingml/2006/main"/>
+          <a:ln xmlns:a="http://schemas.openxmlformats.org/drawingml/2006/main" w="0">
+            <a:noFill/>
+            <a:prstDash val="solid"/>
+          </a:ln>
+        </p:spPr>
+        <p:txBody>
+          <a:bodyPr xmlns:a="http://schemas.openxmlformats.org/drawingml/2006/main" anchor="t"/>
+          <a:lstStyle xmlns:a="http://schemas.openxmlformats.org/drawingml/2006/main"/>
+          <a:p xmlns:a="http://schemas.openxmlformats.org/drawingml/2006/main">
+            <a:pPr algn="l">
+              <a:defRPr sz="1350" b="0">
+                <a:solidFill>
+                  <a:srgbClr val="64748B"/>
+                </a:solidFill>
+              </a:defRPr>
+            </a:pPr>
+            <a:r>
+              <a:rPr sz="1350" b="0">
+                <a:solidFill>
+                  <a:srgbClr val="64748B"/>
+                </a:solidFill>
+              </a:rPr>
               <a:t>The opportunity is to treat KV as deadline-sensitive memory, not generic bytes.</a:t>
             </a:r>
           </a:p>
@@ -2774,7 +4069,7 @@
           <p:cNvPr id="3" name="">
             <a:extLst xmlns:a="http://schemas.openxmlformats.org/drawingml/2006/main">
               <a:ext uri="{FF2B5EF4-FFF2-40B4-BE49-F238E27FC236}">
-                <a16:creationId xmlns:a16="http://schemas.microsoft.com/office/drawing/2014/main" id="{B919F1E8-595D-45ED-A9EF-2BBAEF6635C8}"/>
+                <a16:creationId xmlns:a16="http://schemas.microsoft.com/office/drawing/2014/main" id="{B69CA1E6-5AFF-4113-8922-A3D9ED6E4DE8}"/>
               </a:ext>
             </a:extLst>
           </p:cNvPr>
@@ -2809,7 +4104,7 @@
           <p:cNvPr id="4" name="">
             <a:extLst xmlns:a="http://schemas.openxmlformats.org/drawingml/2006/main">
               <a:ext uri="{FF2B5EF4-FFF2-40B4-BE49-F238E27FC236}">
-                <a16:creationId xmlns:a16="http://schemas.microsoft.com/office/drawing/2014/main" id="{BC918451-9840-418E-A215-090B3A5301CB}"/>
+                <a16:creationId xmlns:a16="http://schemas.microsoft.com/office/drawing/2014/main" id="{0903FB5C-E56D-4BBA-A60C-C9F271963CC7}"/>
               </a:ext>
             </a:extLst>
           </p:cNvPr>
@@ -2859,7 +4154,7 @@
           <p:cNvPr id="5" name="">
             <a:extLst xmlns:a="http://schemas.openxmlformats.org/drawingml/2006/main">
               <a:ext uri="{FF2B5EF4-FFF2-40B4-BE49-F238E27FC236}">
-                <a16:creationId xmlns:a16="http://schemas.microsoft.com/office/drawing/2014/main" id="{5C14670C-522D-49B1-852B-3208D7C87FF2}"/>
+                <a16:creationId xmlns:a16="http://schemas.microsoft.com/office/drawing/2014/main" id="{2F09291D-119E-45AC-9BF5-1F13E5D7798E}"/>
               </a:ext>
             </a:extLst>
           </p:cNvPr>
@@ -2909,7 +4204,7 @@
           <p:cNvPr id="6" name="">
             <a:extLst xmlns:a="http://schemas.openxmlformats.org/drawingml/2006/main">
               <a:ext uri="{FF2B5EF4-FFF2-40B4-BE49-F238E27FC236}">
-                <a16:creationId xmlns:a16="http://schemas.microsoft.com/office/drawing/2014/main" id="{ED09A8D7-54E5-4C23-89EA-B88811642562}"/>
+                <a16:creationId xmlns:a16="http://schemas.microsoft.com/office/drawing/2014/main" id="{402A50E2-B611-4286-B3A3-EC3CD844E139}"/>
               </a:ext>
             </a:extLst>
           </p:cNvPr>
@@ -2959,7 +4254,7 @@
           <p:cNvPr id="7" name="">
             <a:extLst xmlns:a="http://schemas.openxmlformats.org/drawingml/2006/main">
               <a:ext uri="{FF2B5EF4-FFF2-40B4-BE49-F238E27FC236}">
-                <a16:creationId xmlns:a16="http://schemas.microsoft.com/office/drawing/2014/main" id="{9AAB7A8C-8B1D-4A7A-93E9-049E17493353}"/>
+                <a16:creationId xmlns:a16="http://schemas.microsoft.com/office/drawing/2014/main" id="{754E0EB6-59F3-407B-8A0B-48C080FD3314}"/>
               </a:ext>
             </a:extLst>
           </p:cNvPr>
@@ -2994,7 +4289,7 @@
           <p:cNvPr id="8" name="">
             <a:extLst xmlns:a="http://schemas.openxmlformats.org/drawingml/2006/main">
               <a:ext uri="{FF2B5EF4-FFF2-40B4-BE49-F238E27FC236}">
-                <a16:creationId xmlns:a16="http://schemas.microsoft.com/office/drawing/2014/main" id="{E41ABD46-71E0-4DB9-B747-77B06D5B3516}"/>
+                <a16:creationId xmlns:a16="http://schemas.microsoft.com/office/drawing/2014/main" id="{D3BA9781-8888-4E39-A6F5-0251214760E0}"/>
               </a:ext>
             </a:extLst>
           </p:cNvPr>
@@ -3044,7 +4339,7 @@
           <p:cNvPr id="9" name="">
             <a:extLst xmlns:a="http://schemas.openxmlformats.org/drawingml/2006/main">
               <a:ext uri="{FF2B5EF4-FFF2-40B4-BE49-F238E27FC236}">
-                <a16:creationId xmlns:a16="http://schemas.microsoft.com/office/drawing/2014/main" id="{096A9AAE-E82C-4720-812A-0D4946B0FCEE}"/>
+                <a16:creationId xmlns:a16="http://schemas.microsoft.com/office/drawing/2014/main" id="{7D31D6A5-590C-4B3D-BAFE-C5FFB91D8D74}"/>
               </a:ext>
             </a:extLst>
           </p:cNvPr>
@@ -3094,7 +4389,7 @@
           <p:cNvPr id="10" name="">
             <a:extLst xmlns:a="http://schemas.openxmlformats.org/drawingml/2006/main">
               <a:ext uri="{FF2B5EF4-FFF2-40B4-BE49-F238E27FC236}">
-                <a16:creationId xmlns:a16="http://schemas.microsoft.com/office/drawing/2014/main" id="{61160B5E-283D-4B39-9E26-86AF1A21E97E}"/>
+                <a16:creationId xmlns:a16="http://schemas.microsoft.com/office/drawing/2014/main" id="{C27FC1DA-90AF-4F56-902F-97683ECEB117}"/>
               </a:ext>
             </a:extLst>
           </p:cNvPr>
@@ -3144,7 +4439,7 @@
           <p:cNvPr id="11" name="">
             <a:extLst xmlns:a="http://schemas.openxmlformats.org/drawingml/2006/main">
               <a:ext uri="{FF2B5EF4-FFF2-40B4-BE49-F238E27FC236}">
-                <a16:creationId xmlns:a16="http://schemas.microsoft.com/office/drawing/2014/main" id="{DEA0A620-1499-4C8C-9779-5B81C1E9B8D7}"/>
+                <a16:creationId xmlns:a16="http://schemas.microsoft.com/office/drawing/2014/main" id="{0ED5B989-C1AC-4026-8F4F-BCD893B91FDD}"/>
               </a:ext>
             </a:extLst>
           </p:cNvPr>
@@ -3179,7 +4474,7 @@
           <p:cNvPr id="12" name="">
             <a:extLst xmlns:a="http://schemas.openxmlformats.org/drawingml/2006/main">
               <a:ext uri="{FF2B5EF4-FFF2-40B4-BE49-F238E27FC236}">
-                <a16:creationId xmlns:a16="http://schemas.microsoft.com/office/drawing/2014/main" id="{0E271240-12AD-4197-9874-59AD12A972F5}"/>
+                <a16:creationId xmlns:a16="http://schemas.microsoft.com/office/drawing/2014/main" id="{98421532-E4E5-472C-B5F1-A96794EA36DE}"/>
               </a:ext>
             </a:extLst>
           </p:cNvPr>
@@ -3229,7 +4524,7 @@
           <p:cNvPr id="13" name="">
             <a:extLst xmlns:a="http://schemas.openxmlformats.org/drawingml/2006/main">
               <a:ext uri="{FF2B5EF4-FFF2-40B4-BE49-F238E27FC236}">
-                <a16:creationId xmlns:a16="http://schemas.microsoft.com/office/drawing/2014/main" id="{1442192C-9A8F-4A32-881C-9D2D6FCB6197}"/>
+                <a16:creationId xmlns:a16="http://schemas.microsoft.com/office/drawing/2014/main" id="{4244315C-8B4D-4875-9760-245C5EF0218D}"/>
               </a:ext>
             </a:extLst>
           </p:cNvPr>
@@ -3279,7 +4574,7 @@
           <p:cNvPr id="14" name="">
             <a:extLst xmlns:a="http://schemas.openxmlformats.org/drawingml/2006/main">
               <a:ext uri="{FF2B5EF4-FFF2-40B4-BE49-F238E27FC236}">
-                <a16:creationId xmlns:a16="http://schemas.microsoft.com/office/drawing/2014/main" id="{3010C93D-115D-416A-ACC6-E3A292715326}"/>
+                <a16:creationId xmlns:a16="http://schemas.microsoft.com/office/drawing/2014/main" id="{FC24EC58-335B-4BD9-B8E2-46B93F0028A6}"/>
               </a:ext>
             </a:extLst>
           </p:cNvPr>
@@ -3329,7 +4624,7 @@
           <p:cNvPr id="15" name="">
             <a:extLst xmlns:a="http://schemas.openxmlformats.org/drawingml/2006/main">
               <a:ext uri="{FF2B5EF4-FFF2-40B4-BE49-F238E27FC236}">
-                <a16:creationId xmlns:a16="http://schemas.microsoft.com/office/drawing/2014/main" id="{D6D3D268-BEEF-4778-BD26-EFD53C4FB867}"/>
+                <a16:creationId xmlns:a16="http://schemas.microsoft.com/office/drawing/2014/main" id="{C89898BD-6F09-4D43-AE05-352DA79EB8C3}"/>
               </a:ext>
             </a:extLst>
           </p:cNvPr>
@@ -3364,7 +4659,7 @@
           <p:cNvPr id="16" name="">
             <a:extLst xmlns:a="http://schemas.openxmlformats.org/drawingml/2006/main">
               <a:ext uri="{FF2B5EF4-FFF2-40B4-BE49-F238E27FC236}">
-                <a16:creationId xmlns:a16="http://schemas.microsoft.com/office/drawing/2014/main" id="{2B5178BF-995A-4A29-80E0-D4F85A2FAFF9}"/>
+                <a16:creationId xmlns:a16="http://schemas.microsoft.com/office/drawing/2014/main" id="{6E37C455-E33F-4D46-940A-31AEE575EB0C}"/>
               </a:ext>
             </a:extLst>
           </p:cNvPr>
@@ -3414,7 +4709,7 @@
           <p:cNvPr id="17" name="">
             <a:extLst xmlns:a="http://schemas.openxmlformats.org/drawingml/2006/main">
               <a:ext uri="{FF2B5EF4-FFF2-40B4-BE49-F238E27FC236}">
-                <a16:creationId xmlns:a16="http://schemas.microsoft.com/office/drawing/2014/main" id="{DADF1759-77D3-4754-A043-87D046C82E1B}"/>
+                <a16:creationId xmlns:a16="http://schemas.microsoft.com/office/drawing/2014/main" id="{431B839C-ECAD-4519-870E-F4A698FF9CF9}"/>
               </a:ext>
             </a:extLst>
           </p:cNvPr>
@@ -3464,7 +4759,7 @@
           <p:cNvPr id="18" name="">
             <a:extLst xmlns:a="http://schemas.openxmlformats.org/drawingml/2006/main">
               <a:ext uri="{FF2B5EF4-FFF2-40B4-BE49-F238E27FC236}">
-                <a16:creationId xmlns:a16="http://schemas.microsoft.com/office/drawing/2014/main" id="{DC98FF0B-2B17-4F70-88FE-8304DEF05A22}"/>
+                <a16:creationId xmlns:a16="http://schemas.microsoft.com/office/drawing/2014/main" id="{14E7CE19-8101-49D3-A043-C32ADB7F3FCE}"/>
               </a:ext>
             </a:extLst>
           </p:cNvPr>
@@ -3514,7 +4809,7 @@
           <p:cNvPr id="19" name="">
             <a:extLst xmlns:a="http://schemas.openxmlformats.org/drawingml/2006/main">
               <a:ext uri="{FF2B5EF4-FFF2-40B4-BE49-F238E27FC236}">
-                <a16:creationId xmlns:a16="http://schemas.microsoft.com/office/drawing/2014/main" id="{E66DFCA9-8FD9-449C-831F-CD33CEE05208}"/>
+                <a16:creationId xmlns:a16="http://schemas.microsoft.com/office/drawing/2014/main" id="{7A36D4B5-7E5F-49D1-B57E-2FF8A4DBC14A}"/>
               </a:ext>
             </a:extLst>
           </p:cNvPr>
@@ -3549,7 +4844,7 @@
           <p:cNvPr id="20" name="">
             <a:extLst xmlns:a="http://schemas.openxmlformats.org/drawingml/2006/main">
               <a:ext uri="{FF2B5EF4-FFF2-40B4-BE49-F238E27FC236}">
-                <a16:creationId xmlns:a16="http://schemas.microsoft.com/office/drawing/2014/main" id="{EDD22A59-6806-4DE5-AF11-5F338F6FE749}"/>
+                <a16:creationId xmlns:a16="http://schemas.microsoft.com/office/drawing/2014/main" id="{F32B4C1D-02A3-4683-B33C-AE53816527CE}"/>
               </a:ext>
             </a:extLst>
           </p:cNvPr>
@@ -3599,7 +4894,7 @@
           <p:cNvPr id="21" name="">
             <a:extLst xmlns:a="http://schemas.openxmlformats.org/drawingml/2006/main">
               <a:ext uri="{FF2B5EF4-FFF2-40B4-BE49-F238E27FC236}">
-                <a16:creationId xmlns:a16="http://schemas.microsoft.com/office/drawing/2014/main" id="{E32FC3B7-0FAE-46F3-AF72-228EF272B6FC}"/>
+                <a16:creationId xmlns:a16="http://schemas.microsoft.com/office/drawing/2014/main" id="{CBE5EFB3-EE0C-4058-A7C6-F2F7D9AD25EC}"/>
               </a:ext>
             </a:extLst>
           </p:cNvPr>
@@ -3649,7 +4944,7 @@
           <p:cNvPr id="22" name="">
             <a:extLst xmlns:a="http://schemas.openxmlformats.org/drawingml/2006/main">
               <a:ext uri="{FF2B5EF4-FFF2-40B4-BE49-F238E27FC236}">
-                <a16:creationId xmlns:a16="http://schemas.microsoft.com/office/drawing/2014/main" id="{BD658E17-8C90-4FF7-9B43-8CCD1DF156C1}"/>
+                <a16:creationId xmlns:a16="http://schemas.microsoft.com/office/drawing/2014/main" id="{D25D699C-52B7-4B0A-BAB9-B0A5CD902748}"/>
               </a:ext>
             </a:extLst>
           </p:cNvPr>
@@ -3684,7 +4979,7 @@
           <p:cNvPr id="23" name="">
             <a:extLst xmlns:a="http://schemas.openxmlformats.org/drawingml/2006/main">
               <a:ext uri="{FF2B5EF4-FFF2-40B4-BE49-F238E27FC236}">
-                <a16:creationId xmlns:a16="http://schemas.microsoft.com/office/drawing/2014/main" id="{484D4CAF-69BB-4328-B8B0-B6BC5C6425FE}"/>
+                <a16:creationId xmlns:a16="http://schemas.microsoft.com/office/drawing/2014/main" id="{94D50774-64CF-4228-8500-20A380EF8EC0}"/>
               </a:ext>
             </a:extLst>
           </p:cNvPr>
@@ -3734,7 +5029,7 @@
           <p:cNvPr id="24" name="">
             <a:extLst xmlns:a="http://schemas.openxmlformats.org/drawingml/2006/main">
               <a:ext uri="{FF2B5EF4-FFF2-40B4-BE49-F238E27FC236}">
-                <a16:creationId xmlns:a16="http://schemas.microsoft.com/office/drawing/2014/main" id="{9193DF78-1B62-4618-9334-0768AD22B07E}"/>
+                <a16:creationId xmlns:a16="http://schemas.microsoft.com/office/drawing/2014/main" id="{94065F4F-411E-4623-8922-7C8DE483CF3B}"/>
               </a:ext>
             </a:extLst>
           </p:cNvPr>
@@ -3784,7 +5079,7 @@
           <p:cNvPr id="25" name="">
             <a:extLst xmlns:a="http://schemas.openxmlformats.org/drawingml/2006/main">
               <a:ext uri="{FF2B5EF4-FFF2-40B4-BE49-F238E27FC236}">
-                <a16:creationId xmlns:a16="http://schemas.microsoft.com/office/drawing/2014/main" id="{541AF021-097C-4ECC-8CE5-1D49324AC31C}"/>
+                <a16:creationId xmlns:a16="http://schemas.microsoft.com/office/drawing/2014/main" id="{423F398F-3919-4D49-80A0-FFCBC0783096}"/>
               </a:ext>
             </a:extLst>
           </p:cNvPr>
@@ -3834,7 +5129,7 @@
           <p:cNvPr id="26" name="">
             <a:extLst xmlns:a="http://schemas.openxmlformats.org/drawingml/2006/main">
               <a:ext uri="{FF2B5EF4-FFF2-40B4-BE49-F238E27FC236}">
-                <a16:creationId xmlns:a16="http://schemas.microsoft.com/office/drawing/2014/main" id="{C27257B0-D38C-44BA-BFBC-4EBF115ABA38}"/>
+                <a16:creationId xmlns:a16="http://schemas.microsoft.com/office/drawing/2014/main" id="{9CB8A09B-B7D0-4544-8304-506AFD00F09E}"/>
               </a:ext>
             </a:extLst>
           </p:cNvPr>
@@ -3874,7 +5169,7 @@
                   <a:srgbClr val="64748B"/>
                 </a:solidFill>
               </a:rPr>
-              <a:t>10</a:t>
+              <a:t>11</a:t>
             </a:r>
           </a:p>
         </p:txBody>
@@ -3882,7 +5177,7 @@
     </p:spTree>
     <p:extLst>
       <p:ext uri="{BB962C8B-B14F-4D97-AF65-F5344CB8AC3E}">
-        <p14:creationId xmlns:p14="http://schemas.microsoft.com/office/powerpoint/2010/main" val="1440689964"/>
+        <p14:creationId xmlns:p14="http://schemas.microsoft.com/office/powerpoint/2010/main" val="1006525070"/>
       </p:ext>
     </p:extLst>
   </p:cSld>
@@ -3913,7 +5208,7 @@
           <p:cNvPr id="14" name="">
             <a:extLst xmlns:a="http://schemas.openxmlformats.org/drawingml/2006/main">
               <a:ext uri="{FF2B5EF4-FFF2-40B4-BE49-F238E27FC236}">
-                <a16:creationId xmlns:a16="http://schemas.microsoft.com/office/drawing/2014/main" id="{40984737-2804-4F5C-8D6F-A7130D683613}"/>
+                <a16:creationId xmlns:a16="http://schemas.microsoft.com/office/drawing/2014/main" id="{456C125E-CFA9-4E94-9033-E1275FD00BAA}"/>
               </a:ext>
             </a:extLst>
           </p:cNvPr>
@@ -3963,7 +5258,7 @@
           <p:cNvPr id="2" name="">
             <a:extLst xmlns:a="http://schemas.openxmlformats.org/drawingml/2006/main">
               <a:ext uri="{FF2B5EF4-FFF2-40B4-BE49-F238E27FC236}">
-                <a16:creationId xmlns:a16="http://schemas.microsoft.com/office/drawing/2014/main" id="{32A9F450-C1E6-45BF-A8A7-BDCCD8676BE5}"/>
+                <a16:creationId xmlns:a16="http://schemas.microsoft.com/office/drawing/2014/main" id="{8E7A96EE-0F75-4FD1-8056-A16F52052304}"/>
               </a:ext>
             </a:extLst>
           </p:cNvPr>
@@ -4013,7 +5308,7 @@
           <p:cNvPr id="3" name="">
             <a:extLst xmlns:a="http://schemas.openxmlformats.org/drawingml/2006/main">
               <a:ext uri="{FF2B5EF4-FFF2-40B4-BE49-F238E27FC236}">
-                <a16:creationId xmlns:a16="http://schemas.microsoft.com/office/drawing/2014/main" id="{94607A23-EA65-4AEB-A8CE-175850697BFC}"/>
+                <a16:creationId xmlns:a16="http://schemas.microsoft.com/office/drawing/2014/main" id="{F3B7F689-AA0F-4FCE-B8C1-7A6B4384B8DB}"/>
               </a:ext>
             </a:extLst>
           </p:cNvPr>
@@ -4052,7 +5347,7 @@
           <p:nvPr/>
         </p:nvPicPr>
         <p:blipFill>
-          <a:blip xmlns:r="http://schemas.openxmlformats.org/officeDocument/2006/relationships" xmlns:a="http://schemas.openxmlformats.org/drawingml/2006/main" r:embed="R2c43e457889e46f4"/>
+          <a:blip xmlns:r="http://schemas.openxmlformats.org/officeDocument/2006/relationships" xmlns:a="http://schemas.openxmlformats.org/drawingml/2006/main" r:embed="R22d98f0133724c22"/>
           <a:stretch xmlns:a="http://schemas.openxmlformats.org/drawingml/2006/main"/>
         </p:blipFill>
         <p:spPr>
@@ -4070,7 +5365,7 @@
           <p:cNvPr id="5" name="">
             <a:extLst xmlns:a="http://schemas.openxmlformats.org/drawingml/2006/main">
               <a:ext uri="{FF2B5EF4-FFF2-40B4-BE49-F238E27FC236}">
-                <a16:creationId xmlns:a16="http://schemas.microsoft.com/office/drawing/2014/main" id="{BC4FC63D-821B-4768-B73E-C928C535061F}"/>
+                <a16:creationId xmlns:a16="http://schemas.microsoft.com/office/drawing/2014/main" id="{20F4A1EB-FCFF-4142-826D-425B3E83E44F}"/>
               </a:ext>
             </a:extLst>
           </p:cNvPr>
@@ -4105,7 +5400,7 @@
           <p:cNvPr id="6" name="">
             <a:extLst xmlns:a="http://schemas.openxmlformats.org/drawingml/2006/main">
               <a:ext uri="{FF2B5EF4-FFF2-40B4-BE49-F238E27FC236}">
-                <a16:creationId xmlns:a16="http://schemas.microsoft.com/office/drawing/2014/main" id="{88F344BF-32B1-4A1C-953F-BC26A485B69A}"/>
+                <a16:creationId xmlns:a16="http://schemas.microsoft.com/office/drawing/2014/main" id="{B50322F1-E9E0-4F53-8B6A-956EE8493103}"/>
               </a:ext>
             </a:extLst>
           </p:cNvPr>
@@ -4155,7 +5450,7 @@
           <p:cNvPr id="7" name="">
             <a:extLst xmlns:a="http://schemas.openxmlformats.org/drawingml/2006/main">
               <a:ext uri="{FF2B5EF4-FFF2-40B4-BE49-F238E27FC236}">
-                <a16:creationId xmlns:a16="http://schemas.microsoft.com/office/drawing/2014/main" id="{86232BA6-D3FD-4002-9D6D-BAC26115EEBC}"/>
+                <a16:creationId xmlns:a16="http://schemas.microsoft.com/office/drawing/2014/main" id="{F037026E-8FEE-4C7E-A872-20694153C51E}"/>
               </a:ext>
             </a:extLst>
           </p:cNvPr>
@@ -4205,7 +5500,7 @@
           <p:cNvPr id="8" name="">
             <a:extLst xmlns:a="http://schemas.openxmlformats.org/drawingml/2006/main">
               <a:ext uri="{FF2B5EF4-FFF2-40B4-BE49-F238E27FC236}">
-                <a16:creationId xmlns:a16="http://schemas.microsoft.com/office/drawing/2014/main" id="{C2633EB5-5D84-4E1E-9618-24461180B6EC}"/>
+                <a16:creationId xmlns:a16="http://schemas.microsoft.com/office/drawing/2014/main" id="{93B05141-627F-4798-93BF-18118E8A077C}"/>
               </a:ext>
             </a:extLst>
           </p:cNvPr>
@@ -4240,7 +5535,7 @@
           <p:cNvPr id="9" name="">
             <a:extLst xmlns:a="http://schemas.openxmlformats.org/drawingml/2006/main">
               <a:ext uri="{FF2B5EF4-FFF2-40B4-BE49-F238E27FC236}">
-                <a16:creationId xmlns:a16="http://schemas.microsoft.com/office/drawing/2014/main" id="{730A4D98-E39D-4326-A0FA-2C86AB217588}"/>
+                <a16:creationId xmlns:a16="http://schemas.microsoft.com/office/drawing/2014/main" id="{1F2B60C9-1D2D-4165-98F6-7F26DC785F8B}"/>
               </a:ext>
             </a:extLst>
           </p:cNvPr>
@@ -4290,7 +5585,7 @@
           <p:cNvPr id="10" name="">
             <a:extLst xmlns:a="http://schemas.openxmlformats.org/drawingml/2006/main">
               <a:ext uri="{FF2B5EF4-FFF2-40B4-BE49-F238E27FC236}">
-                <a16:creationId xmlns:a16="http://schemas.microsoft.com/office/drawing/2014/main" id="{8983C995-92D5-4767-A959-047139EEEF91}"/>
+                <a16:creationId xmlns:a16="http://schemas.microsoft.com/office/drawing/2014/main" id="{1247DCD4-AF7B-4F5E-8890-DA45AE548019}"/>
               </a:ext>
             </a:extLst>
           </p:cNvPr>
@@ -4340,7 +5635,7 @@
           <p:cNvPr id="11" name="">
             <a:extLst xmlns:a="http://schemas.openxmlformats.org/drawingml/2006/main">
               <a:ext uri="{FF2B5EF4-FFF2-40B4-BE49-F238E27FC236}">
-                <a16:creationId xmlns:a16="http://schemas.microsoft.com/office/drawing/2014/main" id="{C92AF838-1D9C-4F9B-BAE3-61D8D61A2277}"/>
+                <a16:creationId xmlns:a16="http://schemas.microsoft.com/office/drawing/2014/main" id="{98313591-67C0-4FE4-9445-5939A47FCE4E}"/>
               </a:ext>
             </a:extLst>
           </p:cNvPr>
@@ -4390,7 +5685,7 @@
           <p:cNvPr id="12" name="">
             <a:extLst xmlns:a="http://schemas.openxmlformats.org/drawingml/2006/main">
               <a:ext uri="{FF2B5EF4-FFF2-40B4-BE49-F238E27FC236}">
-                <a16:creationId xmlns:a16="http://schemas.microsoft.com/office/drawing/2014/main" id="{A7AC3A2F-A592-4CFD-8AC0-F20D19046F98}"/>
+                <a16:creationId xmlns:a16="http://schemas.microsoft.com/office/drawing/2014/main" id="{E4692B7C-5587-4231-AB47-847B62C12152}"/>
               </a:ext>
             </a:extLst>
           </p:cNvPr>
@@ -4440,7 +5735,7 @@
           <p:cNvPr id="13" name="">
             <a:extLst xmlns:a="http://schemas.openxmlformats.org/drawingml/2006/main">
               <a:ext uri="{FF2B5EF4-FFF2-40B4-BE49-F238E27FC236}">
-                <a16:creationId xmlns:a16="http://schemas.microsoft.com/office/drawing/2014/main" id="{14B51456-28B4-4C39-831B-70344476944E}"/>
+                <a16:creationId xmlns:a16="http://schemas.microsoft.com/office/drawing/2014/main" id="{4B2933B7-7A7D-47B1-A67E-FEFD860A2404}"/>
               </a:ext>
             </a:extLst>
           </p:cNvPr>
@@ -4488,7 +5783,7 @@
     </p:spTree>
     <p:extLst>
       <p:ext uri="{BB962C8B-B14F-4D97-AF65-F5344CB8AC3E}">
-        <p14:creationId xmlns:p14="http://schemas.microsoft.com/office/powerpoint/2010/main" val="1622963902"/>
+        <p14:creationId xmlns:p14="http://schemas.microsoft.com/office/powerpoint/2010/main" val="1158222287"/>
       </p:ext>
     </p:extLst>
   </p:cSld>
@@ -4519,7 +5814,7 @@
           <p:cNvPr id="44" name="">
             <a:extLst xmlns:a="http://schemas.openxmlformats.org/drawingml/2006/main">
               <a:ext uri="{FF2B5EF4-FFF2-40B4-BE49-F238E27FC236}">
-                <a16:creationId xmlns:a16="http://schemas.microsoft.com/office/drawing/2014/main" id="{EF8665A4-8A1F-41A2-8AE9-EC5292A66A6A}"/>
+                <a16:creationId xmlns:a16="http://schemas.microsoft.com/office/drawing/2014/main" id="{5D76668C-DE85-4AAE-A4B7-F895E830E27E}"/>
               </a:ext>
             </a:extLst>
           </p:cNvPr>
@@ -4569,7 +5864,7 @@
           <p:cNvPr id="2" name="">
             <a:extLst xmlns:a="http://schemas.openxmlformats.org/drawingml/2006/main">
               <a:ext uri="{FF2B5EF4-FFF2-40B4-BE49-F238E27FC236}">
-                <a16:creationId xmlns:a16="http://schemas.microsoft.com/office/drawing/2014/main" id="{7B82B209-E4B7-40FF-9CD4-63C3561263E1}"/>
+                <a16:creationId xmlns:a16="http://schemas.microsoft.com/office/drawing/2014/main" id="{01B7B60F-19C1-4F63-BD30-2F158CBF7BB9}"/>
               </a:ext>
             </a:extLst>
           </p:cNvPr>
@@ -4619,7 +5914,7 @@
           <p:cNvPr id="3" name="">
             <a:extLst xmlns:a="http://schemas.openxmlformats.org/drawingml/2006/main">
               <a:ext uri="{FF2B5EF4-FFF2-40B4-BE49-F238E27FC236}">
-                <a16:creationId xmlns:a16="http://schemas.microsoft.com/office/drawing/2014/main" id="{BD930137-9889-414B-91E6-1E211626CCC7}"/>
+                <a16:creationId xmlns:a16="http://schemas.microsoft.com/office/drawing/2014/main" id="{B3C1B354-4E7D-46C1-BCDE-42E08F8C4E20}"/>
               </a:ext>
             </a:extLst>
           </p:cNvPr>
@@ -4654,7 +5949,7 @@
           <p:cNvPr id="4" name="">
             <a:extLst xmlns:a="http://schemas.openxmlformats.org/drawingml/2006/main">
               <a:ext uri="{FF2B5EF4-FFF2-40B4-BE49-F238E27FC236}">
-                <a16:creationId xmlns:a16="http://schemas.microsoft.com/office/drawing/2014/main" id="{E246D9F4-D0A7-4F73-B492-1ECCF97C904B}"/>
+                <a16:creationId xmlns:a16="http://schemas.microsoft.com/office/drawing/2014/main" id="{D6A78837-70DE-4325-A3D4-5FD759CEB171}"/>
               </a:ext>
             </a:extLst>
           </p:cNvPr>
@@ -4721,7 +6016,7 @@
           <p:cNvPr id="5" name="">
             <a:extLst xmlns:a="http://schemas.openxmlformats.org/drawingml/2006/main">
               <a:ext uri="{FF2B5EF4-FFF2-40B4-BE49-F238E27FC236}">
-                <a16:creationId xmlns:a16="http://schemas.microsoft.com/office/drawing/2014/main" id="{6E3711EA-FFD8-48C5-9751-1CED0C0FB15D}"/>
+                <a16:creationId xmlns:a16="http://schemas.microsoft.com/office/drawing/2014/main" id="{CB275716-2FE3-49CB-85B9-6CBBB1F723F0}"/>
               </a:ext>
             </a:extLst>
           </p:cNvPr>
@@ -4771,7 +6066,7 @@
           <p:cNvPr id="6" name="">
             <a:extLst xmlns:a="http://schemas.openxmlformats.org/drawingml/2006/main">
               <a:ext uri="{FF2B5EF4-FFF2-40B4-BE49-F238E27FC236}">
-                <a16:creationId xmlns:a16="http://schemas.microsoft.com/office/drawing/2014/main" id="{900975EA-B461-4630-9A72-AE9AE1496D15}"/>
+                <a16:creationId xmlns:a16="http://schemas.microsoft.com/office/drawing/2014/main" id="{DF8AEE1B-08EA-4B7E-AB42-72A215EB5BD4}"/>
               </a:ext>
             </a:extLst>
           </p:cNvPr>
@@ -4806,7 +6101,7 @@
           <p:cNvPr id="7" name="">
             <a:extLst xmlns:a="http://schemas.openxmlformats.org/drawingml/2006/main">
               <a:ext uri="{FF2B5EF4-FFF2-40B4-BE49-F238E27FC236}">
-                <a16:creationId xmlns:a16="http://schemas.microsoft.com/office/drawing/2014/main" id="{FF4C8B94-0EBF-4FF0-B484-8B95ABC1CC0B}"/>
+                <a16:creationId xmlns:a16="http://schemas.microsoft.com/office/drawing/2014/main" id="{2FA1B7DC-6C25-44E4-A135-A484F0AFDED2}"/>
               </a:ext>
             </a:extLst>
           </p:cNvPr>
@@ -4873,7 +6168,7 @@
           <p:cNvPr id="8" name="">
             <a:extLst xmlns:a="http://schemas.openxmlformats.org/drawingml/2006/main">
               <a:ext uri="{FF2B5EF4-FFF2-40B4-BE49-F238E27FC236}">
-                <a16:creationId xmlns:a16="http://schemas.microsoft.com/office/drawing/2014/main" id="{1EEDF11C-A031-45D2-ACC8-2607C5DE64CA}"/>
+                <a16:creationId xmlns:a16="http://schemas.microsoft.com/office/drawing/2014/main" id="{711EF777-17A7-452B-AB71-A68556732159}"/>
               </a:ext>
             </a:extLst>
           </p:cNvPr>
@@ -4923,7 +6218,7 @@
           <p:cNvPr id="9" name="">
             <a:extLst xmlns:a="http://schemas.openxmlformats.org/drawingml/2006/main">
               <a:ext uri="{FF2B5EF4-FFF2-40B4-BE49-F238E27FC236}">
-                <a16:creationId xmlns:a16="http://schemas.microsoft.com/office/drawing/2014/main" id="{C1F9E7C9-0395-4D86-920F-8620B1FDF7C6}"/>
+                <a16:creationId xmlns:a16="http://schemas.microsoft.com/office/drawing/2014/main" id="{AF8C8EF3-2879-4C48-8B31-3B98314E3E8B}"/>
               </a:ext>
             </a:extLst>
           </p:cNvPr>
@@ -4958,7 +6253,7 @@
           <p:cNvPr id="10" name="">
             <a:extLst xmlns:a="http://schemas.openxmlformats.org/drawingml/2006/main">
               <a:ext uri="{FF2B5EF4-FFF2-40B4-BE49-F238E27FC236}">
-                <a16:creationId xmlns:a16="http://schemas.microsoft.com/office/drawing/2014/main" id="{78A1FE14-F8B7-49C0-B887-94FC0661A57A}"/>
+                <a16:creationId xmlns:a16="http://schemas.microsoft.com/office/drawing/2014/main" id="{91A913B0-E03B-462C-8F0E-D182D6CC2055}"/>
               </a:ext>
             </a:extLst>
           </p:cNvPr>
@@ -5025,7 +6320,7 @@
           <p:cNvPr id="11" name="">
             <a:extLst xmlns:a="http://schemas.openxmlformats.org/drawingml/2006/main">
               <a:ext uri="{FF2B5EF4-FFF2-40B4-BE49-F238E27FC236}">
-                <a16:creationId xmlns:a16="http://schemas.microsoft.com/office/drawing/2014/main" id="{B44567CF-497A-4EDF-93E6-C5AA4D1C2644}"/>
+                <a16:creationId xmlns:a16="http://schemas.microsoft.com/office/drawing/2014/main" id="{80DD1B9A-4357-4472-845B-05F5F933D2C0}"/>
               </a:ext>
             </a:extLst>
           </p:cNvPr>
@@ -5075,7 +6370,7 @@
           <p:cNvPr id="12" name="">
             <a:extLst xmlns:a="http://schemas.openxmlformats.org/drawingml/2006/main">
               <a:ext uri="{FF2B5EF4-FFF2-40B4-BE49-F238E27FC236}">
-                <a16:creationId xmlns:a16="http://schemas.microsoft.com/office/drawing/2014/main" id="{3430779C-1C67-4490-B52C-75BEBD409A0A}"/>
+                <a16:creationId xmlns:a16="http://schemas.microsoft.com/office/drawing/2014/main" id="{D43A8042-3B7B-47CF-B8F4-CA92B631B50F}"/>
               </a:ext>
             </a:extLst>
           </p:cNvPr>
@@ -5110,7 +6405,7 @@
           <p:cNvPr id="13" name="">
             <a:extLst xmlns:a="http://schemas.openxmlformats.org/drawingml/2006/main">
               <a:ext uri="{FF2B5EF4-FFF2-40B4-BE49-F238E27FC236}">
-                <a16:creationId xmlns:a16="http://schemas.microsoft.com/office/drawing/2014/main" id="{846109AE-6081-46C1-8FD7-26D91229852B}"/>
+                <a16:creationId xmlns:a16="http://schemas.microsoft.com/office/drawing/2014/main" id="{78EED882-3252-401B-B6F1-DFB069EDF770}"/>
               </a:ext>
             </a:extLst>
           </p:cNvPr>
@@ -5177,7 +6472,7 @@
           <p:cNvPr id="14" name="">
             <a:extLst xmlns:a="http://schemas.openxmlformats.org/drawingml/2006/main">
               <a:ext uri="{FF2B5EF4-FFF2-40B4-BE49-F238E27FC236}">
-                <a16:creationId xmlns:a16="http://schemas.microsoft.com/office/drawing/2014/main" id="{9709B589-91E4-4CF5-B385-D7B1C00E1EA7}"/>
+                <a16:creationId xmlns:a16="http://schemas.microsoft.com/office/drawing/2014/main" id="{49911DA4-F8F9-4825-940F-2C3EFF421446}"/>
               </a:ext>
             </a:extLst>
           </p:cNvPr>
@@ -5227,7 +6522,7 @@
           <p:cNvPr id="15" name="">
             <a:extLst xmlns:a="http://schemas.openxmlformats.org/drawingml/2006/main">
               <a:ext uri="{FF2B5EF4-FFF2-40B4-BE49-F238E27FC236}">
-                <a16:creationId xmlns:a16="http://schemas.microsoft.com/office/drawing/2014/main" id="{AADC263F-24E2-464C-B234-077FED9BF253}"/>
+                <a16:creationId xmlns:a16="http://schemas.microsoft.com/office/drawing/2014/main" id="{22DAF0E8-D2B1-45AF-BF61-26261587C590}"/>
               </a:ext>
             </a:extLst>
           </p:cNvPr>
@@ -5262,7 +6557,7 @@
           <p:cNvPr id="16" name="">
             <a:extLst xmlns:a="http://schemas.openxmlformats.org/drawingml/2006/main">
               <a:ext uri="{FF2B5EF4-FFF2-40B4-BE49-F238E27FC236}">
-                <a16:creationId xmlns:a16="http://schemas.microsoft.com/office/drawing/2014/main" id="{F5A42442-B4F0-4A4A-BD67-AAF55CF9D5FC}"/>
+                <a16:creationId xmlns:a16="http://schemas.microsoft.com/office/drawing/2014/main" id="{7DCC1C11-80D9-4664-BC8B-5CC4FCC223EA}"/>
               </a:ext>
             </a:extLst>
           </p:cNvPr>
@@ -5329,7 +6624,7 @@
           <p:cNvPr id="17" name="">
             <a:extLst xmlns:a="http://schemas.openxmlformats.org/drawingml/2006/main">
               <a:ext uri="{FF2B5EF4-FFF2-40B4-BE49-F238E27FC236}">
-                <a16:creationId xmlns:a16="http://schemas.microsoft.com/office/drawing/2014/main" id="{12823D04-8CB7-4E4B-AE74-F2EF4526E5F0}"/>
+                <a16:creationId xmlns:a16="http://schemas.microsoft.com/office/drawing/2014/main" id="{4CE6824F-D9FD-4999-89D0-FBD2BDA9B8CE}"/>
               </a:ext>
             </a:extLst>
           </p:cNvPr>
@@ -5364,7 +6659,7 @@
           <p:cNvPr id="18" name="">
             <a:extLst xmlns:a="http://schemas.openxmlformats.org/drawingml/2006/main">
               <a:ext uri="{FF2B5EF4-FFF2-40B4-BE49-F238E27FC236}">
-                <a16:creationId xmlns:a16="http://schemas.microsoft.com/office/drawing/2014/main" id="{00D85002-2124-4B6E-8EF2-68436AAF3913}"/>
+                <a16:creationId xmlns:a16="http://schemas.microsoft.com/office/drawing/2014/main" id="{63172E0B-B5D7-4C0F-8A95-E7215FE7CA55}"/>
               </a:ext>
             </a:extLst>
           </p:cNvPr>
@@ -5414,7 +6709,7 @@
           <p:cNvPr id="19" name="">
             <a:extLst xmlns:a="http://schemas.openxmlformats.org/drawingml/2006/main">
               <a:ext uri="{FF2B5EF4-FFF2-40B4-BE49-F238E27FC236}">
-                <a16:creationId xmlns:a16="http://schemas.microsoft.com/office/drawing/2014/main" id="{4EDB3108-7301-4BD0-898B-6937C4F36EC8}"/>
+                <a16:creationId xmlns:a16="http://schemas.microsoft.com/office/drawing/2014/main" id="{D214B62A-CE92-4824-ACB6-0D5D657E6933}"/>
               </a:ext>
             </a:extLst>
           </p:cNvPr>
@@ -5464,7 +6759,7 @@
           <p:cNvPr id="20" name="">
             <a:extLst xmlns:a="http://schemas.openxmlformats.org/drawingml/2006/main">
               <a:ext uri="{FF2B5EF4-FFF2-40B4-BE49-F238E27FC236}">
-                <a16:creationId xmlns:a16="http://schemas.microsoft.com/office/drawing/2014/main" id="{90DB8BA5-0C06-4EAE-80E9-BCB86D1CF17D}"/>
+                <a16:creationId xmlns:a16="http://schemas.microsoft.com/office/drawing/2014/main" id="{D77BBA88-8E58-48EA-86BF-6044FAC55F72}"/>
               </a:ext>
             </a:extLst>
           </p:cNvPr>
@@ -5499,7 +6794,7 @@
           <p:cNvPr id="21" name="">
             <a:extLst xmlns:a="http://schemas.openxmlformats.org/drawingml/2006/main">
               <a:ext uri="{FF2B5EF4-FFF2-40B4-BE49-F238E27FC236}">
-                <a16:creationId xmlns:a16="http://schemas.microsoft.com/office/drawing/2014/main" id="{93126720-994B-4833-AD4C-B49CE7294532}"/>
+                <a16:creationId xmlns:a16="http://schemas.microsoft.com/office/drawing/2014/main" id="{8EE3806C-14E5-4ABD-A6EE-230C625A0F97}"/>
               </a:ext>
             </a:extLst>
           </p:cNvPr>
@@ -5549,7 +6844,7 @@
           <p:cNvPr id="22" name="">
             <a:extLst xmlns:a="http://schemas.openxmlformats.org/drawingml/2006/main">
               <a:ext uri="{FF2B5EF4-FFF2-40B4-BE49-F238E27FC236}">
-                <a16:creationId xmlns:a16="http://schemas.microsoft.com/office/drawing/2014/main" id="{A4203075-2C51-4A56-A279-C95B3C391611}"/>
+                <a16:creationId xmlns:a16="http://schemas.microsoft.com/office/drawing/2014/main" id="{D2506BDE-D690-41B4-AAE8-C84D8D6B40E3}"/>
               </a:ext>
             </a:extLst>
           </p:cNvPr>
@@ -5599,7 +6894,7 @@
           <p:cNvPr id="23" name="">
             <a:extLst xmlns:a="http://schemas.openxmlformats.org/drawingml/2006/main">
               <a:ext uri="{FF2B5EF4-FFF2-40B4-BE49-F238E27FC236}">
-                <a16:creationId xmlns:a16="http://schemas.microsoft.com/office/drawing/2014/main" id="{990C3556-84E9-4869-8D49-C5E2A012D714}"/>
+                <a16:creationId xmlns:a16="http://schemas.microsoft.com/office/drawing/2014/main" id="{9CCC2AF3-0EF1-44CA-B718-9F81283757B7}"/>
               </a:ext>
             </a:extLst>
           </p:cNvPr>
@@ -5634,7 +6929,7 @@
           <p:cNvPr id="24" name="">
             <a:extLst xmlns:a="http://schemas.openxmlformats.org/drawingml/2006/main">
               <a:ext uri="{FF2B5EF4-FFF2-40B4-BE49-F238E27FC236}">
-                <a16:creationId xmlns:a16="http://schemas.microsoft.com/office/drawing/2014/main" id="{909045E5-36D8-48AD-9C16-A6D656926AF5}"/>
+                <a16:creationId xmlns:a16="http://schemas.microsoft.com/office/drawing/2014/main" id="{FAF9D5E7-296A-41D1-9400-60A2C12BB9D0}"/>
               </a:ext>
             </a:extLst>
           </p:cNvPr>
@@ -5684,7 +6979,7 @@
           <p:cNvPr id="25" name="">
             <a:extLst xmlns:a="http://schemas.openxmlformats.org/drawingml/2006/main">
               <a:ext uri="{FF2B5EF4-FFF2-40B4-BE49-F238E27FC236}">
-                <a16:creationId xmlns:a16="http://schemas.microsoft.com/office/drawing/2014/main" id="{0095C367-5847-4C83-9DA5-AD89BDC40112}"/>
+                <a16:creationId xmlns:a16="http://schemas.microsoft.com/office/drawing/2014/main" id="{A91B2E25-0224-4BEE-9220-3983AFBD5860}"/>
               </a:ext>
             </a:extLst>
           </p:cNvPr>
@@ -5734,7 +7029,7 @@
           <p:cNvPr id="26" name="">
             <a:extLst xmlns:a="http://schemas.openxmlformats.org/drawingml/2006/main">
               <a:ext uri="{FF2B5EF4-FFF2-40B4-BE49-F238E27FC236}">
-                <a16:creationId xmlns:a16="http://schemas.microsoft.com/office/drawing/2014/main" id="{84784A40-F4E0-45EA-9798-9D69442DE958}"/>
+                <a16:creationId xmlns:a16="http://schemas.microsoft.com/office/drawing/2014/main" id="{B7A10C7D-29C4-4566-8A81-343126E16C38}"/>
               </a:ext>
             </a:extLst>
           </p:cNvPr>
@@ -5769,7 +7064,7 @@
           <p:cNvPr id="27" name="">
             <a:extLst xmlns:a="http://schemas.openxmlformats.org/drawingml/2006/main">
               <a:ext uri="{FF2B5EF4-FFF2-40B4-BE49-F238E27FC236}">
-                <a16:creationId xmlns:a16="http://schemas.microsoft.com/office/drawing/2014/main" id="{153618BF-A8C1-4470-B4C0-E35D77B48A38}"/>
+                <a16:creationId xmlns:a16="http://schemas.microsoft.com/office/drawing/2014/main" id="{4A0E9200-E724-4A40-8E19-8DCD591F8BAE}"/>
               </a:ext>
             </a:extLst>
           </p:cNvPr>
@@ -5819,7 +7114,7 @@
           <p:cNvPr id="28" name="">
             <a:extLst xmlns:a="http://schemas.openxmlformats.org/drawingml/2006/main">
               <a:ext uri="{FF2B5EF4-FFF2-40B4-BE49-F238E27FC236}">
-                <a16:creationId xmlns:a16="http://schemas.microsoft.com/office/drawing/2014/main" id="{64BE7D69-4ABE-4791-8FD4-1DD66DD145B9}"/>
+                <a16:creationId xmlns:a16="http://schemas.microsoft.com/office/drawing/2014/main" id="{BBCE0D59-36C7-4F7B-8D96-512502F33AAD}"/>
               </a:ext>
             </a:extLst>
           </p:cNvPr>
@@ -5869,7 +7164,7 @@
           <p:cNvPr id="29" name="">
             <a:extLst xmlns:a="http://schemas.openxmlformats.org/drawingml/2006/main">
               <a:ext uri="{FF2B5EF4-FFF2-40B4-BE49-F238E27FC236}">
-                <a16:creationId xmlns:a16="http://schemas.microsoft.com/office/drawing/2014/main" id="{8461D877-27C7-4781-BCBE-4ADA4A1E043A}"/>
+                <a16:creationId xmlns:a16="http://schemas.microsoft.com/office/drawing/2014/main" id="{DD8BB145-8065-4ACB-9589-3B72194F091A}"/>
               </a:ext>
             </a:extLst>
           </p:cNvPr>
@@ -5904,7 +7199,7 @@
           <p:cNvPr id="30" name="">
             <a:extLst xmlns:a="http://schemas.openxmlformats.org/drawingml/2006/main">
               <a:ext uri="{FF2B5EF4-FFF2-40B4-BE49-F238E27FC236}">
-                <a16:creationId xmlns:a16="http://schemas.microsoft.com/office/drawing/2014/main" id="{390BF2CA-CFD9-4E5B-BDD6-95EC93F4E775}"/>
+                <a16:creationId xmlns:a16="http://schemas.microsoft.com/office/drawing/2014/main" id="{1D5E322D-4E77-483A-9775-1058BE82596F}"/>
               </a:ext>
             </a:extLst>
           </p:cNvPr>
@@ -5954,7 +7249,7 @@
           <p:cNvPr id="31" name="">
             <a:extLst xmlns:a="http://schemas.openxmlformats.org/drawingml/2006/main">
               <a:ext uri="{FF2B5EF4-FFF2-40B4-BE49-F238E27FC236}">
-                <a16:creationId xmlns:a16="http://schemas.microsoft.com/office/drawing/2014/main" id="{2C47FED7-0FDA-40A5-968C-EF3524EE82BA}"/>
+                <a16:creationId xmlns:a16="http://schemas.microsoft.com/office/drawing/2014/main" id="{297C8B62-39BD-46FB-B2CA-5589F126F4BA}"/>
               </a:ext>
             </a:extLst>
           </p:cNvPr>
@@ -6004,7 +7299,7 @@
           <p:cNvPr id="32" name="">
             <a:extLst xmlns:a="http://schemas.openxmlformats.org/drawingml/2006/main">
               <a:ext uri="{FF2B5EF4-FFF2-40B4-BE49-F238E27FC236}">
-                <a16:creationId xmlns:a16="http://schemas.microsoft.com/office/drawing/2014/main" id="{A0AE2487-355F-48ED-A54D-E6A9FB5ACC81}"/>
+                <a16:creationId xmlns:a16="http://schemas.microsoft.com/office/drawing/2014/main" id="{A8B1EF20-752C-4036-8B01-9A12D5CC8F59}"/>
               </a:ext>
             </a:extLst>
           </p:cNvPr>
@@ -6039,7 +7334,7 @@
           <p:cNvPr id="33" name="">
             <a:extLst xmlns:a="http://schemas.openxmlformats.org/drawingml/2006/main">
               <a:ext uri="{FF2B5EF4-FFF2-40B4-BE49-F238E27FC236}">
-                <a16:creationId xmlns:a16="http://schemas.microsoft.com/office/drawing/2014/main" id="{F5FA3C2F-C829-4FCC-AE42-F29B1F3F4DA1}"/>
+                <a16:creationId xmlns:a16="http://schemas.microsoft.com/office/drawing/2014/main" id="{BFC22588-0C36-4B1D-BFC5-02B5D2C0F5C1}"/>
               </a:ext>
             </a:extLst>
           </p:cNvPr>
@@ -6089,7 +7384,7 @@
           <p:cNvPr id="34" name="">
             <a:extLst xmlns:a="http://schemas.openxmlformats.org/drawingml/2006/main">
               <a:ext uri="{FF2B5EF4-FFF2-40B4-BE49-F238E27FC236}">
-                <a16:creationId xmlns:a16="http://schemas.microsoft.com/office/drawing/2014/main" id="{BB79FE45-059B-484B-B137-70F66B196C78}"/>
+                <a16:creationId xmlns:a16="http://schemas.microsoft.com/office/drawing/2014/main" id="{2A19B398-9432-43BF-8860-3B44EDED0559}"/>
               </a:ext>
             </a:extLst>
           </p:cNvPr>
@@ -6139,7 +7434,7 @@
           <p:cNvPr id="35" name="">
             <a:extLst xmlns:a="http://schemas.openxmlformats.org/drawingml/2006/main">
               <a:ext uri="{FF2B5EF4-FFF2-40B4-BE49-F238E27FC236}">
-                <a16:creationId xmlns:a16="http://schemas.microsoft.com/office/drawing/2014/main" id="{636673F7-669C-486E-980D-7B0CD1989B59}"/>
+                <a16:creationId xmlns:a16="http://schemas.microsoft.com/office/drawing/2014/main" id="{09437138-7BE3-4608-97E0-4074355190C0}"/>
               </a:ext>
             </a:extLst>
           </p:cNvPr>
@@ -6174,7 +7469,7 @@
           <p:cNvPr id="36" name="">
             <a:extLst xmlns:a="http://schemas.openxmlformats.org/drawingml/2006/main">
               <a:ext uri="{FF2B5EF4-FFF2-40B4-BE49-F238E27FC236}">
-                <a16:creationId xmlns:a16="http://schemas.microsoft.com/office/drawing/2014/main" id="{1C90BBA7-C151-4B66-BDF1-DEFEEEA1C979}"/>
+                <a16:creationId xmlns:a16="http://schemas.microsoft.com/office/drawing/2014/main" id="{C1E6A6B1-EC17-4CCC-B944-0F10B6E57B42}"/>
               </a:ext>
             </a:extLst>
           </p:cNvPr>
@@ -6224,7 +7519,7 @@
           <p:cNvPr id="37" name="">
             <a:extLst xmlns:a="http://schemas.openxmlformats.org/drawingml/2006/main">
               <a:ext uri="{FF2B5EF4-FFF2-40B4-BE49-F238E27FC236}">
-                <a16:creationId xmlns:a16="http://schemas.microsoft.com/office/drawing/2014/main" id="{53D36C85-6A9E-4ECC-BF4B-1159DEF7EB4F}"/>
+                <a16:creationId xmlns:a16="http://schemas.microsoft.com/office/drawing/2014/main" id="{9F04F906-178A-4E85-8463-A3EBAD7C29DF}"/>
               </a:ext>
             </a:extLst>
           </p:cNvPr>
@@ -6274,7 +7569,7 @@
           <p:cNvPr id="38" name="">
             <a:extLst xmlns:a="http://schemas.openxmlformats.org/drawingml/2006/main">
               <a:ext uri="{FF2B5EF4-FFF2-40B4-BE49-F238E27FC236}">
-                <a16:creationId xmlns:a16="http://schemas.microsoft.com/office/drawing/2014/main" id="{4CBEAFFA-FD18-4F02-9BE7-3023F7A40D12}"/>
+                <a16:creationId xmlns:a16="http://schemas.microsoft.com/office/drawing/2014/main" id="{8AC64079-9D19-4EFC-80E5-DE028C22C33E}"/>
               </a:ext>
             </a:extLst>
           </p:cNvPr>
@@ -6309,7 +7604,7 @@
           <p:cNvPr id="39" name="">
             <a:extLst xmlns:a="http://schemas.openxmlformats.org/drawingml/2006/main">
               <a:ext uri="{FF2B5EF4-FFF2-40B4-BE49-F238E27FC236}">
-                <a16:creationId xmlns:a16="http://schemas.microsoft.com/office/drawing/2014/main" id="{BDB9E5F6-1B47-4019-BDB0-E665E50694F7}"/>
+                <a16:creationId xmlns:a16="http://schemas.microsoft.com/office/drawing/2014/main" id="{A90BCC01-5B9A-4A6D-A232-BCE1EE716BB5}"/>
               </a:ext>
             </a:extLst>
           </p:cNvPr>
@@ -6359,7 +7654,7 @@
           <p:cNvPr id="40" name="">
             <a:extLst xmlns:a="http://schemas.openxmlformats.org/drawingml/2006/main">
               <a:ext uri="{FF2B5EF4-FFF2-40B4-BE49-F238E27FC236}">
-                <a16:creationId xmlns:a16="http://schemas.microsoft.com/office/drawing/2014/main" id="{BCD4693D-0B85-4852-9AE1-67100EC38E13}"/>
+                <a16:creationId xmlns:a16="http://schemas.microsoft.com/office/drawing/2014/main" id="{D70B7FB8-AB0F-4845-A1A3-5B83408D94E2}"/>
               </a:ext>
             </a:extLst>
           </p:cNvPr>
@@ -6409,7 +7704,7 @@
           <p:cNvPr id="41" name="">
             <a:extLst xmlns:a="http://schemas.openxmlformats.org/drawingml/2006/main">
               <a:ext uri="{FF2B5EF4-FFF2-40B4-BE49-F238E27FC236}">
-                <a16:creationId xmlns:a16="http://schemas.microsoft.com/office/drawing/2014/main" id="{9D64CF76-FB15-4EC6-ADE6-D3C57FCB8512}"/>
+                <a16:creationId xmlns:a16="http://schemas.microsoft.com/office/drawing/2014/main" id="{7B1F3AC4-0F56-4A98-8C5F-B3C0C620DDE1}"/>
               </a:ext>
             </a:extLst>
           </p:cNvPr>
@@ -6459,7 +7754,7 @@
           <p:cNvPr id="42" name="">
             <a:extLst xmlns:a="http://schemas.openxmlformats.org/drawingml/2006/main">
               <a:ext uri="{FF2B5EF4-FFF2-40B4-BE49-F238E27FC236}">
-                <a16:creationId xmlns:a16="http://schemas.microsoft.com/office/drawing/2014/main" id="{F83092EF-C7D1-4DD4-AD04-403C45AF8AD3}"/>
+                <a16:creationId xmlns:a16="http://schemas.microsoft.com/office/drawing/2014/main" id="{DA640CEE-D46F-4360-A0B5-4FC8FBD42A24}"/>
               </a:ext>
             </a:extLst>
           </p:cNvPr>
@@ -6509,7 +7804,7 @@
           <p:cNvPr id="43" name="">
             <a:extLst xmlns:a="http://schemas.openxmlformats.org/drawingml/2006/main">
               <a:ext uri="{FF2B5EF4-FFF2-40B4-BE49-F238E27FC236}">
-                <a16:creationId xmlns:a16="http://schemas.microsoft.com/office/drawing/2014/main" id="{72C50B5B-5D46-424D-9DCB-1041EC5CE587}"/>
+                <a16:creationId xmlns:a16="http://schemas.microsoft.com/office/drawing/2014/main" id="{FDA669F1-FFD5-4FC6-ABB8-6D3AF770FCE5}"/>
               </a:ext>
             </a:extLst>
           </p:cNvPr>
@@ -6557,7 +7852,7 @@
     </p:spTree>
     <p:extLst>
       <p:ext uri="{BB962C8B-B14F-4D97-AF65-F5344CB8AC3E}">
-        <p14:creationId xmlns:p14="http://schemas.microsoft.com/office/powerpoint/2010/main" val="191738990"/>
+        <p14:creationId xmlns:p14="http://schemas.microsoft.com/office/powerpoint/2010/main" val="607571319"/>
       </p:ext>
     </p:extLst>
   </p:cSld>
@@ -6588,7 +7883,7 @@
           <p:cNvPr id="26" name="">
             <a:extLst xmlns:a="http://schemas.openxmlformats.org/drawingml/2006/main">
               <a:ext uri="{FF2B5EF4-FFF2-40B4-BE49-F238E27FC236}">
-                <a16:creationId xmlns:a16="http://schemas.microsoft.com/office/drawing/2014/main" id="{FC9904DF-E872-4045-A561-59C33C009C8B}"/>
+                <a16:creationId xmlns:a16="http://schemas.microsoft.com/office/drawing/2014/main" id="{43B133D8-36FC-41E2-9A95-30B9F70BBDEF}"/>
               </a:ext>
             </a:extLst>
           </p:cNvPr>
@@ -6638,7 +7933,7 @@
           <p:cNvPr id="2" name="">
             <a:extLst xmlns:a="http://schemas.openxmlformats.org/drawingml/2006/main">
               <a:ext uri="{FF2B5EF4-FFF2-40B4-BE49-F238E27FC236}">
-                <a16:creationId xmlns:a16="http://schemas.microsoft.com/office/drawing/2014/main" id="{A56AB9AC-A3CB-4B18-BED9-CD9E80758276}"/>
+                <a16:creationId xmlns:a16="http://schemas.microsoft.com/office/drawing/2014/main" id="{56C7D7D2-EB65-4398-B221-613AB92EB068}"/>
               </a:ext>
             </a:extLst>
           </p:cNvPr>
@@ -6688,7 +7983,7 @@
           <p:cNvPr id="3" name="">
             <a:extLst xmlns:a="http://schemas.openxmlformats.org/drawingml/2006/main">
               <a:ext uri="{FF2B5EF4-FFF2-40B4-BE49-F238E27FC236}">
-                <a16:creationId xmlns:a16="http://schemas.microsoft.com/office/drawing/2014/main" id="{5F4B55C9-65DA-4685-81A3-C27CDBD432C2}"/>
+                <a16:creationId xmlns:a16="http://schemas.microsoft.com/office/drawing/2014/main" id="{FF4FAD7E-08BC-4BCF-BAE1-8F2D3806C409}"/>
               </a:ext>
             </a:extLst>
           </p:cNvPr>
@@ -6723,7 +8018,7 @@
           <p:cNvPr id="4" name="">
             <a:extLst xmlns:a="http://schemas.openxmlformats.org/drawingml/2006/main">
               <a:ext uri="{FF2B5EF4-FFF2-40B4-BE49-F238E27FC236}">
-                <a16:creationId xmlns:a16="http://schemas.microsoft.com/office/drawing/2014/main" id="{93F0BB8C-C628-4F65-BE8F-1889250FF303}"/>
+                <a16:creationId xmlns:a16="http://schemas.microsoft.com/office/drawing/2014/main" id="{6284BA9F-915A-49BF-93D1-CEAC0692ED66}"/>
               </a:ext>
             </a:extLst>
           </p:cNvPr>
@@ -6773,7 +8068,7 @@
           <p:cNvPr id="5" name="">
             <a:extLst xmlns:a="http://schemas.openxmlformats.org/drawingml/2006/main">
               <a:ext uri="{FF2B5EF4-FFF2-40B4-BE49-F238E27FC236}">
-                <a16:creationId xmlns:a16="http://schemas.microsoft.com/office/drawing/2014/main" id="{0F6329F6-D543-4769-ACD9-8F3B99378530}"/>
+                <a16:creationId xmlns:a16="http://schemas.microsoft.com/office/drawing/2014/main" id="{7BA0716D-08AD-4DAF-A736-66D45C018D47}"/>
               </a:ext>
             </a:extLst>
           </p:cNvPr>
@@ -6804,7 +8099,7 @@
           <p:cNvPr id="6" name="">
             <a:extLst xmlns:a="http://schemas.openxmlformats.org/drawingml/2006/main">
               <a:ext uri="{FF2B5EF4-FFF2-40B4-BE49-F238E27FC236}">
-                <a16:creationId xmlns:a16="http://schemas.microsoft.com/office/drawing/2014/main" id="{8E8AC30A-8C12-4000-AB09-1C85346A041F}"/>
+                <a16:creationId xmlns:a16="http://schemas.microsoft.com/office/drawing/2014/main" id="{DFE81315-318D-43AC-A6DA-769523898FEB}"/>
               </a:ext>
             </a:extLst>
           </p:cNvPr>
@@ -6854,7 +8149,7 @@
           <p:cNvPr id="7" name="">
             <a:extLst xmlns:a="http://schemas.openxmlformats.org/drawingml/2006/main">
               <a:ext uri="{FF2B5EF4-FFF2-40B4-BE49-F238E27FC236}">
-                <a16:creationId xmlns:a16="http://schemas.microsoft.com/office/drawing/2014/main" id="{D540C6D3-4E7B-4110-86F9-DDF2E685B486}"/>
+                <a16:creationId xmlns:a16="http://schemas.microsoft.com/office/drawing/2014/main" id="{2CB513AF-5075-4586-8CEE-68D185DF134A}"/>
               </a:ext>
             </a:extLst>
           </p:cNvPr>
@@ -6885,7 +8180,7 @@
           <p:cNvPr id="8" name="">
             <a:extLst xmlns:a="http://schemas.openxmlformats.org/drawingml/2006/main">
               <a:ext uri="{FF2B5EF4-FFF2-40B4-BE49-F238E27FC236}">
-                <a16:creationId xmlns:a16="http://schemas.microsoft.com/office/drawing/2014/main" id="{C4D255D1-B9FB-4A5C-A046-259AF007BC25}"/>
+                <a16:creationId xmlns:a16="http://schemas.microsoft.com/office/drawing/2014/main" id="{7DC3254C-767F-4361-BD88-5C472F8BE027}"/>
               </a:ext>
             </a:extLst>
           </p:cNvPr>
@@ -6935,7 +8230,7 @@
           <p:cNvPr id="9" name="">
             <a:extLst xmlns:a="http://schemas.openxmlformats.org/drawingml/2006/main">
               <a:ext uri="{FF2B5EF4-FFF2-40B4-BE49-F238E27FC236}">
-                <a16:creationId xmlns:a16="http://schemas.microsoft.com/office/drawing/2014/main" id="{EE07DE1B-FD83-472C-9C54-7BFD8C2A2AE5}"/>
+                <a16:creationId xmlns:a16="http://schemas.microsoft.com/office/drawing/2014/main" id="{D0AE9A68-C86E-4A42-8EA8-4158FB3606FC}"/>
               </a:ext>
             </a:extLst>
           </p:cNvPr>
@@ -6966,7 +8261,7 @@
           <p:cNvPr id="10" name="">
             <a:extLst xmlns:a="http://schemas.openxmlformats.org/drawingml/2006/main">
               <a:ext uri="{FF2B5EF4-FFF2-40B4-BE49-F238E27FC236}">
-                <a16:creationId xmlns:a16="http://schemas.microsoft.com/office/drawing/2014/main" id="{65864CE6-4F40-4B3B-9DCF-1989D3A55C2F}"/>
+                <a16:creationId xmlns:a16="http://schemas.microsoft.com/office/drawing/2014/main" id="{B8FA3165-95C7-452F-AF68-B071B8B345A8}"/>
               </a:ext>
             </a:extLst>
           </p:cNvPr>
@@ -7016,7 +8311,7 @@
           <p:cNvPr id="11" name="">
             <a:extLst xmlns:a="http://schemas.openxmlformats.org/drawingml/2006/main">
               <a:ext uri="{FF2B5EF4-FFF2-40B4-BE49-F238E27FC236}">
-                <a16:creationId xmlns:a16="http://schemas.microsoft.com/office/drawing/2014/main" id="{A2A5A1B3-EF58-427A-A302-7488677A4CAC}"/>
+                <a16:creationId xmlns:a16="http://schemas.microsoft.com/office/drawing/2014/main" id="{8F1B2C55-920F-4198-BDBF-7A434E5A6478}"/>
               </a:ext>
             </a:extLst>
           </p:cNvPr>
@@ -7047,7 +8342,7 @@
           <p:cNvPr id="12" name="">
             <a:extLst xmlns:a="http://schemas.openxmlformats.org/drawingml/2006/main">
               <a:ext uri="{FF2B5EF4-FFF2-40B4-BE49-F238E27FC236}">
-                <a16:creationId xmlns:a16="http://schemas.microsoft.com/office/drawing/2014/main" id="{0BDF1B09-1858-46A3-91CC-0696BDFDAD35}"/>
+                <a16:creationId xmlns:a16="http://schemas.microsoft.com/office/drawing/2014/main" id="{303B1280-49D0-4236-847F-65F97891353E}"/>
               </a:ext>
             </a:extLst>
           </p:cNvPr>
@@ -7097,7 +8392,7 @@
           <p:cNvPr id="13" name="">
             <a:extLst xmlns:a="http://schemas.openxmlformats.org/drawingml/2006/main">
               <a:ext uri="{FF2B5EF4-FFF2-40B4-BE49-F238E27FC236}">
-                <a16:creationId xmlns:a16="http://schemas.microsoft.com/office/drawing/2014/main" id="{EA0F9C3A-4953-4E69-839E-61F413213550}"/>
+                <a16:creationId xmlns:a16="http://schemas.microsoft.com/office/drawing/2014/main" id="{F862CA72-161E-4011-92CE-86C96CDBA670}"/>
               </a:ext>
             </a:extLst>
           </p:cNvPr>
@@ -7147,7 +8442,7 @@
           <p:cNvPr id="14" name="">
             <a:extLst xmlns:a="http://schemas.openxmlformats.org/drawingml/2006/main">
               <a:ext uri="{FF2B5EF4-FFF2-40B4-BE49-F238E27FC236}">
-                <a16:creationId xmlns:a16="http://schemas.microsoft.com/office/drawing/2014/main" id="{6DE10328-14AA-45F7-93F6-C7C579DD01CF}"/>
+                <a16:creationId xmlns:a16="http://schemas.microsoft.com/office/drawing/2014/main" id="{97CC03F3-C3C2-43F1-BBE1-48046526646B}"/>
               </a:ext>
             </a:extLst>
           </p:cNvPr>
@@ -7182,7 +8477,7 @@
           <p:cNvPr id="15" name="">
             <a:extLst xmlns:a="http://schemas.openxmlformats.org/drawingml/2006/main">
               <a:ext uri="{FF2B5EF4-FFF2-40B4-BE49-F238E27FC236}">
-                <a16:creationId xmlns:a16="http://schemas.microsoft.com/office/drawing/2014/main" id="{85664607-2746-401F-9495-DF7B130A9A9B}"/>
+                <a16:creationId xmlns:a16="http://schemas.microsoft.com/office/drawing/2014/main" id="{5A3875DD-33B5-4BDE-B1DC-631ECB12E139}"/>
               </a:ext>
             </a:extLst>
           </p:cNvPr>
@@ -7232,7 +8527,7 @@
           <p:cNvPr id="16" name="">
             <a:extLst xmlns:a="http://schemas.openxmlformats.org/drawingml/2006/main">
               <a:ext uri="{FF2B5EF4-FFF2-40B4-BE49-F238E27FC236}">
-                <a16:creationId xmlns:a16="http://schemas.microsoft.com/office/drawing/2014/main" id="{B175B546-3EB1-47C9-9BE3-6ACB71470822}"/>
+                <a16:creationId xmlns:a16="http://schemas.microsoft.com/office/drawing/2014/main" id="{78F08C0D-B270-40FF-9360-8E8A5F9C568A}"/>
               </a:ext>
             </a:extLst>
           </p:cNvPr>
@@ -7263,7 +8558,7 @@
           <p:cNvPr id="17" name="">
             <a:extLst xmlns:a="http://schemas.openxmlformats.org/drawingml/2006/main">
               <a:ext uri="{FF2B5EF4-FFF2-40B4-BE49-F238E27FC236}">
-                <a16:creationId xmlns:a16="http://schemas.microsoft.com/office/drawing/2014/main" id="{9DA6C38D-A402-4C55-BAC2-CB4567160A4E}"/>
+                <a16:creationId xmlns:a16="http://schemas.microsoft.com/office/drawing/2014/main" id="{58BB8879-846C-4096-9BB5-417CE7F66B24}"/>
               </a:ext>
             </a:extLst>
           </p:cNvPr>
@@ -7313,7 +8608,7 @@
           <p:cNvPr id="18" name="">
             <a:extLst xmlns:a="http://schemas.openxmlformats.org/drawingml/2006/main">
               <a:ext uri="{FF2B5EF4-FFF2-40B4-BE49-F238E27FC236}">
-                <a16:creationId xmlns:a16="http://schemas.microsoft.com/office/drawing/2014/main" id="{8E6D2637-CA3C-4CBB-A3BA-91448A4F9892}"/>
+                <a16:creationId xmlns:a16="http://schemas.microsoft.com/office/drawing/2014/main" id="{55FF0281-08A3-4CCE-9676-9056E55837CA}"/>
               </a:ext>
             </a:extLst>
           </p:cNvPr>
@@ -7344,7 +8639,7 @@
           <p:cNvPr id="19" name="">
             <a:extLst xmlns:a="http://schemas.openxmlformats.org/drawingml/2006/main">
               <a:ext uri="{FF2B5EF4-FFF2-40B4-BE49-F238E27FC236}">
-                <a16:creationId xmlns:a16="http://schemas.microsoft.com/office/drawing/2014/main" id="{6D4A5B4F-F585-4DD7-A281-967B03522D9D}"/>
+                <a16:creationId xmlns:a16="http://schemas.microsoft.com/office/drawing/2014/main" id="{5A69BB1B-67C0-407C-8CC8-FA418D0B5F49}"/>
               </a:ext>
             </a:extLst>
           </p:cNvPr>
@@ -7394,7 +8689,7 @@
           <p:cNvPr id="20" name="">
             <a:extLst xmlns:a="http://schemas.openxmlformats.org/drawingml/2006/main">
               <a:ext uri="{FF2B5EF4-FFF2-40B4-BE49-F238E27FC236}">
-                <a16:creationId xmlns:a16="http://schemas.microsoft.com/office/drawing/2014/main" id="{C96109B9-C728-459C-8471-3AA8370E8687}"/>
+                <a16:creationId xmlns:a16="http://schemas.microsoft.com/office/drawing/2014/main" id="{F49B8BE5-08C5-483E-AD85-1EF8671BBA39}"/>
               </a:ext>
             </a:extLst>
           </p:cNvPr>
@@ -7425,7 +8720,7 @@
           <p:cNvPr id="21" name="">
             <a:extLst xmlns:a="http://schemas.openxmlformats.org/drawingml/2006/main">
               <a:ext uri="{FF2B5EF4-FFF2-40B4-BE49-F238E27FC236}">
-                <a16:creationId xmlns:a16="http://schemas.microsoft.com/office/drawing/2014/main" id="{F9682262-66E1-46F2-8B4D-7DB191D7D6C6}"/>
+                <a16:creationId xmlns:a16="http://schemas.microsoft.com/office/drawing/2014/main" id="{58AD7F28-6970-45A6-A405-ADF5E0AA3C7D}"/>
               </a:ext>
             </a:extLst>
           </p:cNvPr>
@@ -7475,7 +8770,7 @@
           <p:cNvPr id="22" name="">
             <a:extLst xmlns:a="http://schemas.openxmlformats.org/drawingml/2006/main">
               <a:ext uri="{FF2B5EF4-FFF2-40B4-BE49-F238E27FC236}">
-                <a16:creationId xmlns:a16="http://schemas.microsoft.com/office/drawing/2014/main" id="{1D93A7D0-ED24-458B-AC6C-B4AC0F7C06C2}"/>
+                <a16:creationId xmlns:a16="http://schemas.microsoft.com/office/drawing/2014/main" id="{11484F66-F65E-4EF9-90B6-9F0F4E22E35F}"/>
               </a:ext>
             </a:extLst>
           </p:cNvPr>
@@ -7506,7 +8801,7 @@
           <p:cNvPr id="23" name="">
             <a:extLst xmlns:a="http://schemas.openxmlformats.org/drawingml/2006/main">
               <a:ext uri="{FF2B5EF4-FFF2-40B4-BE49-F238E27FC236}">
-                <a16:creationId xmlns:a16="http://schemas.microsoft.com/office/drawing/2014/main" id="{8851CE3D-3CD3-48EC-A723-3EB79E938B3D}"/>
+                <a16:creationId xmlns:a16="http://schemas.microsoft.com/office/drawing/2014/main" id="{4675F407-ACED-4F53-88DC-C0E8AF21D0B7}"/>
               </a:ext>
             </a:extLst>
           </p:cNvPr>
@@ -7556,7 +8851,7 @@
           <p:cNvPr id="24" name="">
             <a:extLst xmlns:a="http://schemas.openxmlformats.org/drawingml/2006/main">
               <a:ext uri="{FF2B5EF4-FFF2-40B4-BE49-F238E27FC236}">
-                <a16:creationId xmlns:a16="http://schemas.microsoft.com/office/drawing/2014/main" id="{449C23BF-4ED4-42CE-BB79-0F8EE0A2EDE7}"/>
+                <a16:creationId xmlns:a16="http://schemas.microsoft.com/office/drawing/2014/main" id="{88B70E44-9E47-4FFA-92A4-970EE5B5261B}"/>
               </a:ext>
             </a:extLst>
           </p:cNvPr>
@@ -7606,7 +8901,7 @@
           <p:cNvPr id="25" name="">
             <a:extLst xmlns:a="http://schemas.openxmlformats.org/drawingml/2006/main">
               <a:ext uri="{FF2B5EF4-FFF2-40B4-BE49-F238E27FC236}">
-                <a16:creationId xmlns:a16="http://schemas.microsoft.com/office/drawing/2014/main" id="{0E14A752-2D97-46AF-A739-2274E50B8EAB}"/>
+                <a16:creationId xmlns:a16="http://schemas.microsoft.com/office/drawing/2014/main" id="{D92D41CC-74EC-4F4D-987B-E0EDB6515A5E}"/>
               </a:ext>
             </a:extLst>
           </p:cNvPr>
@@ -7654,7 +8949,7 @@
     </p:spTree>
     <p:extLst>
       <p:ext uri="{BB962C8B-B14F-4D97-AF65-F5344CB8AC3E}">
-        <p14:creationId xmlns:p14="http://schemas.microsoft.com/office/powerpoint/2010/main" val="1169519708"/>
+        <p14:creationId xmlns:p14="http://schemas.microsoft.com/office/powerpoint/2010/main" val="1921973542"/>
       </p:ext>
     </p:extLst>
   </p:cSld>
@@ -7685,7 +8980,7 @@
           <p:cNvPr id="8" name="">
             <a:extLst xmlns:a="http://schemas.openxmlformats.org/drawingml/2006/main">
               <a:ext uri="{FF2B5EF4-FFF2-40B4-BE49-F238E27FC236}">
-                <a16:creationId xmlns:a16="http://schemas.microsoft.com/office/drawing/2014/main" id="{064E0F9E-2978-4805-8A99-42194A0191ED}"/>
+                <a16:creationId xmlns:a16="http://schemas.microsoft.com/office/drawing/2014/main" id="{15C032E1-64FF-4FF7-A2EC-5631FAEDE309}"/>
               </a:ext>
             </a:extLst>
           </p:cNvPr>
@@ -7735,7 +9030,7 @@
           <p:cNvPr id="2" name="">
             <a:extLst xmlns:a="http://schemas.openxmlformats.org/drawingml/2006/main">
               <a:ext uri="{FF2B5EF4-FFF2-40B4-BE49-F238E27FC236}">
-                <a16:creationId xmlns:a16="http://schemas.microsoft.com/office/drawing/2014/main" id="{65345122-7962-4FEF-A84A-AEF2D086BF75}"/>
+                <a16:creationId xmlns:a16="http://schemas.microsoft.com/office/drawing/2014/main" id="{AD2BE603-D614-44B4-8068-05D4C85CEA53}"/>
               </a:ext>
             </a:extLst>
           </p:cNvPr>
@@ -7785,7 +9080,7 @@
           <p:cNvPr id="3" name="">
             <a:extLst xmlns:a="http://schemas.openxmlformats.org/drawingml/2006/main">
               <a:ext uri="{FF2B5EF4-FFF2-40B4-BE49-F238E27FC236}">
-                <a16:creationId xmlns:a16="http://schemas.microsoft.com/office/drawing/2014/main" id="{211862FF-9821-4999-B6EE-DE5A7F7B676D}"/>
+                <a16:creationId xmlns:a16="http://schemas.microsoft.com/office/drawing/2014/main" id="{A0B23157-8A3E-40C0-9CF9-0321EE5C4B5E}"/>
               </a:ext>
             </a:extLst>
           </p:cNvPr>
@@ -7824,7 +9119,7 @@
           <p:nvPr/>
         </p:nvPicPr>
         <p:blipFill>
-          <a:blip xmlns:r="http://schemas.openxmlformats.org/officeDocument/2006/relationships" xmlns:a="http://schemas.openxmlformats.org/drawingml/2006/main" r:embed="Ra60f92ac3142478a"/>
+          <a:blip xmlns:r="http://schemas.openxmlformats.org/officeDocument/2006/relationships" xmlns:a="http://schemas.openxmlformats.org/drawingml/2006/main" r:embed="Rf6f1a72317b649e8"/>
           <a:stretch xmlns:a="http://schemas.openxmlformats.org/drawingml/2006/main"/>
         </p:blipFill>
         <p:spPr>
@@ -7842,7 +9137,7 @@
           <p:cNvPr id="5" name="">
             <a:extLst xmlns:a="http://schemas.openxmlformats.org/drawingml/2006/main">
               <a:ext uri="{FF2B5EF4-FFF2-40B4-BE49-F238E27FC236}">
-                <a16:creationId xmlns:a16="http://schemas.microsoft.com/office/drawing/2014/main" id="{3CA55B69-90C1-4D6A-95AC-BC1D51880B4F}"/>
+                <a16:creationId xmlns:a16="http://schemas.microsoft.com/office/drawing/2014/main" id="{0C95FAF7-1A8F-4AED-B42E-99A8D1FC08CF}"/>
               </a:ext>
             </a:extLst>
           </p:cNvPr>
@@ -7892,7 +9187,7 @@
           <p:cNvPr id="6" name="">
             <a:extLst xmlns:a="http://schemas.openxmlformats.org/drawingml/2006/main">
               <a:ext uri="{FF2B5EF4-FFF2-40B4-BE49-F238E27FC236}">
-                <a16:creationId xmlns:a16="http://schemas.microsoft.com/office/drawing/2014/main" id="{4F4852C3-0125-4FCB-848D-A08A5D953547}"/>
+                <a16:creationId xmlns:a16="http://schemas.microsoft.com/office/drawing/2014/main" id="{C9EA2A8B-F625-4231-9A31-A90C894FCD1D}"/>
               </a:ext>
             </a:extLst>
           </p:cNvPr>
@@ -7942,7 +9237,7 @@
           <p:cNvPr id="7" name="">
             <a:extLst xmlns:a="http://schemas.openxmlformats.org/drawingml/2006/main">
               <a:ext uri="{FF2B5EF4-FFF2-40B4-BE49-F238E27FC236}">
-                <a16:creationId xmlns:a16="http://schemas.microsoft.com/office/drawing/2014/main" id="{9F2F6E27-0464-4F0B-9055-B8DF8EDA32E3}"/>
+                <a16:creationId xmlns:a16="http://schemas.microsoft.com/office/drawing/2014/main" id="{49CB5D53-F1CF-48C5-B053-9170DBE60679}"/>
               </a:ext>
             </a:extLst>
           </p:cNvPr>
@@ -7990,7 +9285,7 @@
     </p:spTree>
     <p:extLst>
       <p:ext uri="{BB962C8B-B14F-4D97-AF65-F5344CB8AC3E}">
-        <p14:creationId xmlns:p14="http://schemas.microsoft.com/office/powerpoint/2010/main" val="387956659"/>
+        <p14:creationId xmlns:p14="http://schemas.microsoft.com/office/powerpoint/2010/main" val="1089820716"/>
       </p:ext>
     </p:extLst>
   </p:cSld>
@@ -8021,7 +9316,7 @@
           <p:cNvPr id="16" name="">
             <a:extLst xmlns:a="http://schemas.openxmlformats.org/drawingml/2006/main">
               <a:ext uri="{FF2B5EF4-FFF2-40B4-BE49-F238E27FC236}">
-                <a16:creationId xmlns:a16="http://schemas.microsoft.com/office/drawing/2014/main" id="{547E4C7B-A4A8-4569-A66F-28CC2434A6F3}"/>
+                <a16:creationId xmlns:a16="http://schemas.microsoft.com/office/drawing/2014/main" id="{18C9C0CB-F7A7-4BE9-ACB0-1C702AA840AC}"/>
               </a:ext>
             </a:extLst>
           </p:cNvPr>
@@ -8071,7 +9366,7 @@
           <p:cNvPr id="2" name="">
             <a:extLst xmlns:a="http://schemas.openxmlformats.org/drawingml/2006/main">
               <a:ext uri="{FF2B5EF4-FFF2-40B4-BE49-F238E27FC236}">
-                <a16:creationId xmlns:a16="http://schemas.microsoft.com/office/drawing/2014/main" id="{7B7A393E-CE68-49D4-9F0E-EA8C04916D77}"/>
+                <a16:creationId xmlns:a16="http://schemas.microsoft.com/office/drawing/2014/main" id="{CD065499-DFED-430E-9547-474C4B961A42}"/>
               </a:ext>
             </a:extLst>
           </p:cNvPr>
@@ -8121,7 +9416,7 @@
           <p:cNvPr id="3" name="">
             <a:extLst xmlns:a="http://schemas.openxmlformats.org/drawingml/2006/main">
               <a:ext uri="{FF2B5EF4-FFF2-40B4-BE49-F238E27FC236}">
-                <a16:creationId xmlns:a16="http://schemas.microsoft.com/office/drawing/2014/main" id="{DC792BF2-6CB7-4A2B-99D0-3B906B1CCA4E}"/>
+                <a16:creationId xmlns:a16="http://schemas.microsoft.com/office/drawing/2014/main" id="{DA7CE27A-A994-41E8-A353-ADAC8AE6EA19}"/>
               </a:ext>
             </a:extLst>
           </p:cNvPr>
@@ -8160,7 +9455,7 @@
           <p:nvPr/>
         </p:nvPicPr>
         <p:blipFill>
-          <a:blip xmlns:r="http://schemas.openxmlformats.org/officeDocument/2006/relationships" xmlns:a="http://schemas.openxmlformats.org/drawingml/2006/main" r:embed="Rb6d142085d9b42ab"/>
+          <a:blip xmlns:r="http://schemas.openxmlformats.org/officeDocument/2006/relationships" xmlns:a="http://schemas.openxmlformats.org/drawingml/2006/main" r:embed="Rd2befd4d13e64aa4"/>
           <a:stretch xmlns:a="http://schemas.openxmlformats.org/drawingml/2006/main"/>
         </p:blipFill>
         <p:spPr>
@@ -8178,7 +9473,7 @@
           <p:cNvPr id="5" name="">
             <a:extLst xmlns:a="http://schemas.openxmlformats.org/drawingml/2006/main">
               <a:ext uri="{FF2B5EF4-FFF2-40B4-BE49-F238E27FC236}">
-                <a16:creationId xmlns:a16="http://schemas.microsoft.com/office/drawing/2014/main" id="{05CB8AE5-5131-4AD4-B2EF-9E24EEEE37C4}"/>
+                <a16:creationId xmlns:a16="http://schemas.microsoft.com/office/drawing/2014/main" id="{318EB209-A8D6-49A4-ABF0-9D0681C257FB}"/>
               </a:ext>
             </a:extLst>
           </p:cNvPr>
@@ -8213,7 +9508,7 @@
           <p:cNvPr id="6" name="">
             <a:extLst xmlns:a="http://schemas.openxmlformats.org/drawingml/2006/main">
               <a:ext uri="{FF2B5EF4-FFF2-40B4-BE49-F238E27FC236}">
-                <a16:creationId xmlns:a16="http://schemas.microsoft.com/office/drawing/2014/main" id="{6359ED24-9912-4890-92AA-3DF7546EAA7D}"/>
+                <a16:creationId xmlns:a16="http://schemas.microsoft.com/office/drawing/2014/main" id="{9D3C770C-A96A-474E-B2A6-0BC1708AC562}"/>
               </a:ext>
             </a:extLst>
           </p:cNvPr>
@@ -8263,7 +9558,7 @@
           <p:cNvPr id="7" name="">
             <a:extLst xmlns:a="http://schemas.openxmlformats.org/drawingml/2006/main">
               <a:ext uri="{FF2B5EF4-FFF2-40B4-BE49-F238E27FC236}">
-                <a16:creationId xmlns:a16="http://schemas.microsoft.com/office/drawing/2014/main" id="{8A7E27C9-65A6-4FC3-B283-FCD79A8C472D}"/>
+                <a16:creationId xmlns:a16="http://schemas.microsoft.com/office/drawing/2014/main" id="{F679ECA5-0E89-47A0-A0E1-0935EB07995F}"/>
               </a:ext>
             </a:extLst>
           </p:cNvPr>
@@ -8313,7 +9608,7 @@
           <p:cNvPr id="8" name="">
             <a:extLst xmlns:a="http://schemas.openxmlformats.org/drawingml/2006/main">
               <a:ext uri="{FF2B5EF4-FFF2-40B4-BE49-F238E27FC236}">
-                <a16:creationId xmlns:a16="http://schemas.microsoft.com/office/drawing/2014/main" id="{6DF60C98-54B1-4FAF-AAF3-5150F35B0E16}"/>
+                <a16:creationId xmlns:a16="http://schemas.microsoft.com/office/drawing/2014/main" id="{4C7571D6-00C8-4618-8C9A-684196BAE708}"/>
               </a:ext>
             </a:extLst>
           </p:cNvPr>
@@ -8363,7 +9658,7 @@
           <p:cNvPr id="9" name="">
             <a:extLst xmlns:a="http://schemas.openxmlformats.org/drawingml/2006/main">
               <a:ext uri="{FF2B5EF4-FFF2-40B4-BE49-F238E27FC236}">
-                <a16:creationId xmlns:a16="http://schemas.microsoft.com/office/drawing/2014/main" id="{1919D814-B982-4DF7-A54D-8169F905CDF3}"/>
+                <a16:creationId xmlns:a16="http://schemas.microsoft.com/office/drawing/2014/main" id="{BBD0D283-6E61-4C14-8D1E-BF66CA354F97}"/>
               </a:ext>
             </a:extLst>
           </p:cNvPr>
@@ -8398,7 +9693,7 @@
           <p:cNvPr id="10" name="">
             <a:extLst xmlns:a="http://schemas.openxmlformats.org/drawingml/2006/main">
               <a:ext uri="{FF2B5EF4-FFF2-40B4-BE49-F238E27FC236}">
-                <a16:creationId xmlns:a16="http://schemas.microsoft.com/office/drawing/2014/main" id="{598FCF1A-44BB-4AB0-B3D7-D8D4ADC9E975}"/>
+                <a16:creationId xmlns:a16="http://schemas.microsoft.com/office/drawing/2014/main" id="{8EB1FBEA-1B74-453F-998B-A7217DD2AADC}"/>
               </a:ext>
             </a:extLst>
           </p:cNvPr>
@@ -8448,7 +9743,7 @@
           <p:cNvPr id="11" name="">
             <a:extLst xmlns:a="http://schemas.openxmlformats.org/drawingml/2006/main">
               <a:ext uri="{FF2B5EF4-FFF2-40B4-BE49-F238E27FC236}">
-                <a16:creationId xmlns:a16="http://schemas.microsoft.com/office/drawing/2014/main" id="{1D21F941-8D67-49BB-BF57-979B2B831DFE}"/>
+                <a16:creationId xmlns:a16="http://schemas.microsoft.com/office/drawing/2014/main" id="{8B69C191-CF0D-479F-A0E3-BAF40514DFF8}"/>
               </a:ext>
             </a:extLst>
           </p:cNvPr>
@@ -8498,7 +9793,7 @@
           <p:cNvPr id="12" name="">
             <a:extLst xmlns:a="http://schemas.openxmlformats.org/drawingml/2006/main">
               <a:ext uri="{FF2B5EF4-FFF2-40B4-BE49-F238E27FC236}">
-                <a16:creationId xmlns:a16="http://schemas.microsoft.com/office/drawing/2014/main" id="{B5295529-18D6-4E15-8626-C9C1B70DA4DA}"/>
+                <a16:creationId xmlns:a16="http://schemas.microsoft.com/office/drawing/2014/main" id="{BC24C7C3-B06C-4DCB-AF18-92BB5AFA83C4}"/>
               </a:ext>
             </a:extLst>
           </p:cNvPr>
@@ -8548,7 +9843,7 @@
           <p:cNvPr id="13" name="">
             <a:extLst xmlns:a="http://schemas.openxmlformats.org/drawingml/2006/main">
               <a:ext uri="{FF2B5EF4-FFF2-40B4-BE49-F238E27FC236}">
-                <a16:creationId xmlns:a16="http://schemas.microsoft.com/office/drawing/2014/main" id="{0BF5292F-7FAC-4E8F-B45F-4AA1FDC55F96}"/>
+                <a16:creationId xmlns:a16="http://schemas.microsoft.com/office/drawing/2014/main" id="{BB8A9760-8712-432D-944C-9AA402984734}"/>
               </a:ext>
             </a:extLst>
           </p:cNvPr>
@@ -8598,7 +9893,7 @@
           <p:cNvPr id="14" name="">
             <a:extLst xmlns:a="http://schemas.openxmlformats.org/drawingml/2006/main">
               <a:ext uri="{FF2B5EF4-FFF2-40B4-BE49-F238E27FC236}">
-                <a16:creationId xmlns:a16="http://schemas.microsoft.com/office/drawing/2014/main" id="{F21CFDE2-0351-41F8-9FB4-D929694D5C7E}"/>
+                <a16:creationId xmlns:a16="http://schemas.microsoft.com/office/drawing/2014/main" id="{CE4B4A13-B36E-4EC3-9A7A-18288BEC6DA4}"/>
               </a:ext>
             </a:extLst>
           </p:cNvPr>
@@ -8648,7 +9943,7 @@
           <p:cNvPr id="15" name="">
             <a:extLst xmlns:a="http://schemas.openxmlformats.org/drawingml/2006/main">
               <a:ext uri="{FF2B5EF4-FFF2-40B4-BE49-F238E27FC236}">
-                <a16:creationId xmlns:a16="http://schemas.microsoft.com/office/drawing/2014/main" id="{531F7D17-3789-49A6-8D03-DBE0C3099972}"/>
+                <a16:creationId xmlns:a16="http://schemas.microsoft.com/office/drawing/2014/main" id="{3D5DA55F-FBD2-4963-82B6-87EFD35E261A}"/>
               </a:ext>
             </a:extLst>
           </p:cNvPr>
@@ -8696,7 +9991,7 @@
     </p:spTree>
     <p:extLst>
       <p:ext uri="{BB962C8B-B14F-4D97-AF65-F5344CB8AC3E}">
-        <p14:creationId xmlns:p14="http://schemas.microsoft.com/office/powerpoint/2010/main" val="1166197037"/>
+        <p14:creationId xmlns:p14="http://schemas.microsoft.com/office/powerpoint/2010/main" val="1972104334"/>
       </p:ext>
     </p:extLst>
   </p:cSld>
@@ -8727,7 +10022,7 @@
           <p:cNvPr id="19" name="">
             <a:extLst xmlns:a="http://schemas.openxmlformats.org/drawingml/2006/main">
               <a:ext uri="{FF2B5EF4-FFF2-40B4-BE49-F238E27FC236}">
-                <a16:creationId xmlns:a16="http://schemas.microsoft.com/office/drawing/2014/main" id="{8A4613DF-F9B4-4BFC-8D6D-B0DA39BE49E7}"/>
+                <a16:creationId xmlns:a16="http://schemas.microsoft.com/office/drawing/2014/main" id="{26666CC0-26A8-4AB1-B521-4069E3B45A1C}"/>
               </a:ext>
             </a:extLst>
           </p:cNvPr>
@@ -8777,7 +10072,7 @@
           <p:cNvPr id="2" name="">
             <a:extLst xmlns:a="http://schemas.openxmlformats.org/drawingml/2006/main">
               <a:ext uri="{FF2B5EF4-FFF2-40B4-BE49-F238E27FC236}">
-                <a16:creationId xmlns:a16="http://schemas.microsoft.com/office/drawing/2014/main" id="{E199B795-95D7-4E93-85A6-D5A3C9C003DB}"/>
+                <a16:creationId xmlns:a16="http://schemas.microsoft.com/office/drawing/2014/main" id="{FD442541-361D-4DAD-B60B-0D944BC75F8D}"/>
               </a:ext>
             </a:extLst>
           </p:cNvPr>
@@ -8827,7 +10122,7 @@
           <p:cNvPr id="3" name="">
             <a:extLst xmlns:a="http://schemas.openxmlformats.org/drawingml/2006/main">
               <a:ext uri="{FF2B5EF4-FFF2-40B4-BE49-F238E27FC236}">
-                <a16:creationId xmlns:a16="http://schemas.microsoft.com/office/drawing/2014/main" id="{CC5A896C-106A-488E-9F35-4329E8164F93}"/>
+                <a16:creationId xmlns:a16="http://schemas.microsoft.com/office/drawing/2014/main" id="{308A0188-0627-4041-B1BC-13289A91E5A6}"/>
               </a:ext>
             </a:extLst>
           </p:cNvPr>
@@ -8866,7 +10161,7 @@
           <p:nvPr/>
         </p:nvPicPr>
         <p:blipFill>
-          <a:blip xmlns:r="http://schemas.openxmlformats.org/officeDocument/2006/relationships" xmlns:a="http://schemas.openxmlformats.org/drawingml/2006/main" r:embed="Raa64803f388a4bec"/>
+          <a:blip xmlns:r="http://schemas.openxmlformats.org/officeDocument/2006/relationships" xmlns:a="http://schemas.openxmlformats.org/drawingml/2006/main" r:embed="Rde40053323ef4c98"/>
           <a:stretch xmlns:a="http://schemas.openxmlformats.org/drawingml/2006/main"/>
         </p:blipFill>
         <p:spPr>
@@ -8884,7 +10179,7 @@
           <p:cNvPr id="5" name="">
             <a:extLst xmlns:a="http://schemas.openxmlformats.org/drawingml/2006/main">
               <a:ext uri="{FF2B5EF4-FFF2-40B4-BE49-F238E27FC236}">
-                <a16:creationId xmlns:a16="http://schemas.microsoft.com/office/drawing/2014/main" id="{81FC3205-5B72-496C-8891-43F05149FC5D}"/>
+                <a16:creationId xmlns:a16="http://schemas.microsoft.com/office/drawing/2014/main" id="{A03E889E-AAB2-4ACC-B5AA-B2DEDCBB915A}"/>
               </a:ext>
             </a:extLst>
           </p:cNvPr>
@@ -8919,7 +10214,7 @@
           <p:cNvPr id="6" name="">
             <a:extLst xmlns:a="http://schemas.openxmlformats.org/drawingml/2006/main">
               <a:ext uri="{FF2B5EF4-FFF2-40B4-BE49-F238E27FC236}">
-                <a16:creationId xmlns:a16="http://schemas.microsoft.com/office/drawing/2014/main" id="{7A690524-3B70-4D47-B64D-A1A40154F528}"/>
+                <a16:creationId xmlns:a16="http://schemas.microsoft.com/office/drawing/2014/main" id="{DBDEA58E-EE76-4D7B-8FDD-6B8DAB743500}"/>
               </a:ext>
             </a:extLst>
           </p:cNvPr>
@@ -8969,7 +10264,7 @@
           <p:cNvPr id="7" name="">
             <a:extLst xmlns:a="http://schemas.openxmlformats.org/drawingml/2006/main">
               <a:ext uri="{FF2B5EF4-FFF2-40B4-BE49-F238E27FC236}">
-                <a16:creationId xmlns:a16="http://schemas.microsoft.com/office/drawing/2014/main" id="{E21206F9-DD38-4C31-8A60-F2B680E96ACA}"/>
+                <a16:creationId xmlns:a16="http://schemas.microsoft.com/office/drawing/2014/main" id="{8EE01444-5B72-4C5D-B91D-1A17B8CE2570}"/>
               </a:ext>
             </a:extLst>
           </p:cNvPr>
@@ -9019,7 +10314,7 @@
           <p:cNvPr id="8" name="">
             <a:extLst xmlns:a="http://schemas.openxmlformats.org/drawingml/2006/main">
               <a:ext uri="{FF2B5EF4-FFF2-40B4-BE49-F238E27FC236}">
-                <a16:creationId xmlns:a16="http://schemas.microsoft.com/office/drawing/2014/main" id="{1A22EED6-326F-4475-8BDB-8EA9AD5A7614}"/>
+                <a16:creationId xmlns:a16="http://schemas.microsoft.com/office/drawing/2014/main" id="{1184EAFA-293F-41E8-925A-A5835C5D1F63}"/>
               </a:ext>
             </a:extLst>
           </p:cNvPr>
@@ -9054,7 +10349,7 @@
           <p:cNvPr id="9" name="">
             <a:extLst xmlns:a="http://schemas.openxmlformats.org/drawingml/2006/main">
               <a:ext uri="{FF2B5EF4-FFF2-40B4-BE49-F238E27FC236}">
-                <a16:creationId xmlns:a16="http://schemas.microsoft.com/office/drawing/2014/main" id="{FD088CC6-4BE6-4B45-B08A-F200B6B62AF7}"/>
+                <a16:creationId xmlns:a16="http://schemas.microsoft.com/office/drawing/2014/main" id="{7FBF1629-2085-4B16-AD96-9E0F9A483F43}"/>
               </a:ext>
             </a:extLst>
           </p:cNvPr>
@@ -9104,7 +10399,7 @@
           <p:cNvPr id="10" name="">
             <a:extLst xmlns:a="http://schemas.openxmlformats.org/drawingml/2006/main">
               <a:ext uri="{FF2B5EF4-FFF2-40B4-BE49-F238E27FC236}">
-                <a16:creationId xmlns:a16="http://schemas.microsoft.com/office/drawing/2014/main" id="{9DEF483D-8906-48FE-93A5-21397BB8ECCD}"/>
+                <a16:creationId xmlns:a16="http://schemas.microsoft.com/office/drawing/2014/main" id="{D24D4B37-0DD8-45A6-A10D-9F4C33C4DB56}"/>
               </a:ext>
             </a:extLst>
           </p:cNvPr>
@@ -9154,7 +10449,7 @@
           <p:cNvPr id="11" name="">
             <a:extLst xmlns:a="http://schemas.openxmlformats.org/drawingml/2006/main">
               <a:ext uri="{FF2B5EF4-FFF2-40B4-BE49-F238E27FC236}">
-                <a16:creationId xmlns:a16="http://schemas.microsoft.com/office/drawing/2014/main" id="{CCD68155-73C7-4AA9-9EDE-6180850749F3}"/>
+                <a16:creationId xmlns:a16="http://schemas.microsoft.com/office/drawing/2014/main" id="{DB52334E-FD14-48C5-86F7-C80709B0A90A}"/>
               </a:ext>
             </a:extLst>
           </p:cNvPr>
@@ -9189,7 +10484,7 @@
           <p:cNvPr id="12" name="">
             <a:extLst xmlns:a="http://schemas.openxmlformats.org/drawingml/2006/main">
               <a:ext uri="{FF2B5EF4-FFF2-40B4-BE49-F238E27FC236}">
-                <a16:creationId xmlns:a16="http://schemas.microsoft.com/office/drawing/2014/main" id="{A4B80967-9A17-46B6-8512-BAD9CE769292}"/>
+                <a16:creationId xmlns:a16="http://schemas.microsoft.com/office/drawing/2014/main" id="{64C9E881-8B90-4543-8055-FBE53AED8A77}"/>
               </a:ext>
             </a:extLst>
           </p:cNvPr>
@@ -9239,7 +10534,7 @@
           <p:cNvPr id="13" name="">
             <a:extLst xmlns:a="http://schemas.openxmlformats.org/drawingml/2006/main">
               <a:ext uri="{FF2B5EF4-FFF2-40B4-BE49-F238E27FC236}">
-                <a16:creationId xmlns:a16="http://schemas.microsoft.com/office/drawing/2014/main" id="{8875D84C-EA46-4D7C-8BA3-57F7BE6A5017}"/>
+                <a16:creationId xmlns:a16="http://schemas.microsoft.com/office/drawing/2014/main" id="{168BB3AB-97C5-4234-ACCF-7BB4AA46F9E1}"/>
               </a:ext>
             </a:extLst>
           </p:cNvPr>
@@ -9289,7 +10584,7 @@
           <p:cNvPr id="14" name="">
             <a:extLst xmlns:a="http://schemas.openxmlformats.org/drawingml/2006/main">
               <a:ext uri="{FF2B5EF4-FFF2-40B4-BE49-F238E27FC236}">
-                <a16:creationId xmlns:a16="http://schemas.microsoft.com/office/drawing/2014/main" id="{1E45C44A-479D-40F4-A04D-B60E3DFF339E}"/>
+                <a16:creationId xmlns:a16="http://schemas.microsoft.com/office/drawing/2014/main" id="{E61FBC2D-62F6-4838-9992-656E6522C25A}"/>
               </a:ext>
             </a:extLst>
           </p:cNvPr>
@@ -9339,7 +10634,7 @@
           <p:cNvPr id="15" name="">
             <a:extLst xmlns:a="http://schemas.openxmlformats.org/drawingml/2006/main">
               <a:ext uri="{FF2B5EF4-FFF2-40B4-BE49-F238E27FC236}">
-                <a16:creationId xmlns:a16="http://schemas.microsoft.com/office/drawing/2014/main" id="{38CA4649-E6AB-4C21-AA16-7B6F683879CF}"/>
+                <a16:creationId xmlns:a16="http://schemas.microsoft.com/office/drawing/2014/main" id="{64818A14-D399-4193-9409-3B51A7718540}"/>
               </a:ext>
             </a:extLst>
           </p:cNvPr>
@@ -9389,7 +10684,7 @@
           <p:cNvPr id="16" name="">
             <a:extLst xmlns:a="http://schemas.openxmlformats.org/drawingml/2006/main">
               <a:ext uri="{FF2B5EF4-FFF2-40B4-BE49-F238E27FC236}">
-                <a16:creationId xmlns:a16="http://schemas.microsoft.com/office/drawing/2014/main" id="{1BE4B4EC-FF02-4814-89B3-B6A54BC2BED2}"/>
+                <a16:creationId xmlns:a16="http://schemas.microsoft.com/office/drawing/2014/main" id="{2FAB6770-DBC7-4FBE-9392-4EFE8BCF2BE5}"/>
               </a:ext>
             </a:extLst>
           </p:cNvPr>
@@ -9439,7 +10734,7 @@
           <p:cNvPr id="17" name="">
             <a:extLst xmlns:a="http://schemas.openxmlformats.org/drawingml/2006/main">
               <a:ext uri="{FF2B5EF4-FFF2-40B4-BE49-F238E27FC236}">
-                <a16:creationId xmlns:a16="http://schemas.microsoft.com/office/drawing/2014/main" id="{89CB325D-25F2-44B5-B04F-257AC7448D35}"/>
+                <a16:creationId xmlns:a16="http://schemas.microsoft.com/office/drawing/2014/main" id="{F485A3B4-6C7D-4E37-90D2-F475A271727F}"/>
               </a:ext>
             </a:extLst>
           </p:cNvPr>
@@ -9489,7 +10784,7 @@
           <p:cNvPr id="18" name="">
             <a:extLst xmlns:a="http://schemas.openxmlformats.org/drawingml/2006/main">
               <a:ext uri="{FF2B5EF4-FFF2-40B4-BE49-F238E27FC236}">
-                <a16:creationId xmlns:a16="http://schemas.microsoft.com/office/drawing/2014/main" id="{5CC25300-651E-48A4-B342-D499D85F4F46}"/>
+                <a16:creationId xmlns:a16="http://schemas.microsoft.com/office/drawing/2014/main" id="{7678EEED-E6DE-4748-989D-8755A3CA1178}"/>
               </a:ext>
             </a:extLst>
           </p:cNvPr>
@@ -9537,7 +10832,7 @@
     </p:spTree>
     <p:extLst>
       <p:ext uri="{BB962C8B-B14F-4D97-AF65-F5344CB8AC3E}">
-        <p14:creationId xmlns:p14="http://schemas.microsoft.com/office/powerpoint/2010/main" val="1434002447"/>
+        <p14:creationId xmlns:p14="http://schemas.microsoft.com/office/powerpoint/2010/main" val="509575254"/>
       </p:ext>
     </p:extLst>
   </p:cSld>
@@ -9568,7 +10863,7 @@
           <p:cNvPr id="12" name="">
             <a:extLst xmlns:a="http://schemas.openxmlformats.org/drawingml/2006/main">
               <a:ext uri="{FF2B5EF4-FFF2-40B4-BE49-F238E27FC236}">
-                <a16:creationId xmlns:a16="http://schemas.microsoft.com/office/drawing/2014/main" id="{D5A1DE5F-EBB2-47BE-A8C7-27DA9990ED32}"/>
+                <a16:creationId xmlns:a16="http://schemas.microsoft.com/office/drawing/2014/main" id="{79194F76-77AD-4342-B858-270E225A04A8}"/>
               </a:ext>
             </a:extLst>
           </p:cNvPr>
@@ -9618,7 +10913,7 @@
           <p:cNvPr id="2" name="">
             <a:extLst xmlns:a="http://schemas.openxmlformats.org/drawingml/2006/main">
               <a:ext uri="{FF2B5EF4-FFF2-40B4-BE49-F238E27FC236}">
-                <a16:creationId xmlns:a16="http://schemas.microsoft.com/office/drawing/2014/main" id="{A273795D-DF79-41E2-BDAA-0796C1265DA0}"/>
+                <a16:creationId xmlns:a16="http://schemas.microsoft.com/office/drawing/2014/main" id="{DD1C6A58-34BB-4C5B-8C71-A9C831010083}"/>
               </a:ext>
             </a:extLst>
           </p:cNvPr>
@@ -9668,7 +10963,7 @@
           <p:cNvPr id="3" name="">
             <a:extLst xmlns:a="http://schemas.openxmlformats.org/drawingml/2006/main">
               <a:ext uri="{FF2B5EF4-FFF2-40B4-BE49-F238E27FC236}">
-                <a16:creationId xmlns:a16="http://schemas.microsoft.com/office/drawing/2014/main" id="{A24DF1CF-A9D4-43D7-A63E-86CB8F385CA4}"/>
+                <a16:creationId xmlns:a16="http://schemas.microsoft.com/office/drawing/2014/main" id="{F0CF3DE8-8F26-4499-B8CE-504FA17BAA64}"/>
               </a:ext>
             </a:extLst>
           </p:cNvPr>
@@ -9707,7 +11002,7 @@
           <p:nvPr/>
         </p:nvPicPr>
         <p:blipFill>
-          <a:blip xmlns:r="http://schemas.openxmlformats.org/officeDocument/2006/relationships" xmlns:a="http://schemas.openxmlformats.org/drawingml/2006/main" r:embed="R48372ffadd9244e8"/>
+          <a:blip xmlns:r="http://schemas.openxmlformats.org/officeDocument/2006/relationships" xmlns:a="http://schemas.openxmlformats.org/drawingml/2006/main" r:embed="Rda1081e51bce4e35"/>
           <a:stretch xmlns:a="http://schemas.openxmlformats.org/drawingml/2006/main"/>
         </p:blipFill>
         <p:spPr>
@@ -9725,7 +11020,7 @@
           <p:cNvPr id="5" name="">
             <a:extLst xmlns:a="http://schemas.openxmlformats.org/drawingml/2006/main">
               <a:ext uri="{FF2B5EF4-FFF2-40B4-BE49-F238E27FC236}">
-                <a16:creationId xmlns:a16="http://schemas.microsoft.com/office/drawing/2014/main" id="{C061D14D-3C11-47A1-8E65-522E591A9083}"/>
+                <a16:creationId xmlns:a16="http://schemas.microsoft.com/office/drawing/2014/main" id="{1ECE577B-78CA-4EF9-86BA-BB1F087B87D7}"/>
               </a:ext>
             </a:extLst>
           </p:cNvPr>
@@ -9760,7 +11055,7 @@
           <p:cNvPr id="6" name="">
             <a:extLst xmlns:a="http://schemas.openxmlformats.org/drawingml/2006/main">
               <a:ext uri="{FF2B5EF4-FFF2-40B4-BE49-F238E27FC236}">
-                <a16:creationId xmlns:a16="http://schemas.microsoft.com/office/drawing/2014/main" id="{CB00F1AF-4D34-490F-A0A5-9DC095CA6716}"/>
+                <a16:creationId xmlns:a16="http://schemas.microsoft.com/office/drawing/2014/main" id="{8AC471BC-39AD-4370-AAA6-CDF8538A297C}"/>
               </a:ext>
             </a:extLst>
           </p:cNvPr>
@@ -9810,7 +11105,7 @@
           <p:cNvPr id="7" name="">
             <a:extLst xmlns:a="http://schemas.openxmlformats.org/drawingml/2006/main">
               <a:ext uri="{FF2B5EF4-FFF2-40B4-BE49-F238E27FC236}">
-                <a16:creationId xmlns:a16="http://schemas.microsoft.com/office/drawing/2014/main" id="{7F74B511-1B9E-4841-94D2-DBACEA63503A}"/>
+                <a16:creationId xmlns:a16="http://schemas.microsoft.com/office/drawing/2014/main" id="{6E25B398-9407-490F-811E-8259D8560D59}"/>
               </a:ext>
             </a:extLst>
           </p:cNvPr>
@@ -9860,7 +11155,7 @@
           <p:cNvPr id="8" name="">
             <a:extLst xmlns:a="http://schemas.openxmlformats.org/drawingml/2006/main">
               <a:ext uri="{FF2B5EF4-FFF2-40B4-BE49-F238E27FC236}">
-                <a16:creationId xmlns:a16="http://schemas.microsoft.com/office/drawing/2014/main" id="{F191A9BD-D0E6-44BE-AD05-C608F17D0DB4}"/>
+                <a16:creationId xmlns:a16="http://schemas.microsoft.com/office/drawing/2014/main" id="{68CA7BA5-8D96-4B3A-AD77-482E697A99F6}"/>
               </a:ext>
             </a:extLst>
           </p:cNvPr>
@@ -9910,7 +11205,7 @@
           <p:cNvPr id="9" name="">
             <a:extLst xmlns:a="http://schemas.openxmlformats.org/drawingml/2006/main">
               <a:ext uri="{FF2B5EF4-FFF2-40B4-BE49-F238E27FC236}">
-                <a16:creationId xmlns:a16="http://schemas.microsoft.com/office/drawing/2014/main" id="{9E2CC8D2-F04E-44B5-97A2-0CD12CDF4131}"/>
+                <a16:creationId xmlns:a16="http://schemas.microsoft.com/office/drawing/2014/main" id="{7A9A247B-CB14-480C-AE67-B1C85B258A57}"/>
               </a:ext>
             </a:extLst>
           </p:cNvPr>
@@ -9960,7 +11255,7 @@
           <p:cNvPr id="10" name="">
             <a:extLst xmlns:a="http://schemas.openxmlformats.org/drawingml/2006/main">
               <a:ext uri="{FF2B5EF4-FFF2-40B4-BE49-F238E27FC236}">
-                <a16:creationId xmlns:a16="http://schemas.microsoft.com/office/drawing/2014/main" id="{7A1CC0CE-C2D7-4B3F-BE6F-67B3578AC330}"/>
+                <a16:creationId xmlns:a16="http://schemas.microsoft.com/office/drawing/2014/main" id="{E772A7EC-2088-4785-B9BE-F51B041009D7}"/>
               </a:ext>
             </a:extLst>
           </p:cNvPr>
@@ -10010,7 +11305,7 @@
           <p:cNvPr id="11" name="">
             <a:extLst xmlns:a="http://schemas.openxmlformats.org/drawingml/2006/main">
               <a:ext uri="{FF2B5EF4-FFF2-40B4-BE49-F238E27FC236}">
-                <a16:creationId xmlns:a16="http://schemas.microsoft.com/office/drawing/2014/main" id="{28822C22-DF86-44B2-BCB1-C8171CF456A0}"/>
+                <a16:creationId xmlns:a16="http://schemas.microsoft.com/office/drawing/2014/main" id="{34E8F0D2-726D-4F0A-A523-02E78F2B8670}"/>
               </a:ext>
             </a:extLst>
           </p:cNvPr>
@@ -10058,7 +11353,7 @@
     </p:spTree>
     <p:extLst>
       <p:ext uri="{BB962C8B-B14F-4D97-AF65-F5344CB8AC3E}">
-        <p14:creationId xmlns:p14="http://schemas.microsoft.com/office/powerpoint/2010/main" val="2091445207"/>
+        <p14:creationId xmlns:p14="http://schemas.microsoft.com/office/powerpoint/2010/main" val="150420166"/>
       </p:ext>
     </p:extLst>
   </p:cSld>
@@ -10089,7 +11384,7 @@
           <p:cNvPr id="9" name="">
             <a:extLst xmlns:a="http://schemas.openxmlformats.org/drawingml/2006/main">
               <a:ext uri="{FF2B5EF4-FFF2-40B4-BE49-F238E27FC236}">
-                <a16:creationId xmlns:a16="http://schemas.microsoft.com/office/drawing/2014/main" id="{6CEF5D84-8BD8-4153-9201-B8605B844B10}"/>
+                <a16:creationId xmlns:a16="http://schemas.microsoft.com/office/drawing/2014/main" id="{2A74A09F-8021-450B-8059-AF8C0D7D7660}"/>
               </a:ext>
             </a:extLst>
           </p:cNvPr>
@@ -10139,7 +11434,7 @@
           <p:cNvPr id="2" name="">
             <a:extLst xmlns:a="http://schemas.openxmlformats.org/drawingml/2006/main">
               <a:ext uri="{FF2B5EF4-FFF2-40B4-BE49-F238E27FC236}">
-                <a16:creationId xmlns:a16="http://schemas.microsoft.com/office/drawing/2014/main" id="{5391E6EE-7B0E-4FA2-8310-C8BBEA91CE1C}"/>
+                <a16:creationId xmlns:a16="http://schemas.microsoft.com/office/drawing/2014/main" id="{274952F3-E7BD-49C8-ADDF-2121E07DA1A7}"/>
               </a:ext>
             </a:extLst>
           </p:cNvPr>
@@ -10189,7 +11484,7 @@
           <p:cNvPr id="3" name="">
             <a:extLst xmlns:a="http://schemas.openxmlformats.org/drawingml/2006/main">
               <a:ext uri="{FF2B5EF4-FFF2-40B4-BE49-F238E27FC236}">
-                <a16:creationId xmlns:a16="http://schemas.microsoft.com/office/drawing/2014/main" id="{A5A495FB-4327-499E-95E7-108260CD409D}"/>
+                <a16:creationId xmlns:a16="http://schemas.microsoft.com/office/drawing/2014/main" id="{D71116E9-2D31-4DA7-B2B6-53BF419056DD}"/>
               </a:ext>
             </a:extLst>
           </p:cNvPr>
@@ -10228,7 +11523,7 @@
           <p:nvPr/>
         </p:nvPicPr>
         <p:blipFill>
-          <a:blip xmlns:r="http://schemas.openxmlformats.org/officeDocument/2006/relationships" xmlns:a="http://schemas.openxmlformats.org/drawingml/2006/main" r:embed="R10ab5f9d2f2746c3"/>
+          <a:blip xmlns:r="http://schemas.openxmlformats.org/officeDocument/2006/relationships" xmlns:a="http://schemas.openxmlformats.org/drawingml/2006/main" r:embed="R21c512cc05b8451b"/>
           <a:stretch xmlns:a="http://schemas.openxmlformats.org/drawingml/2006/main"/>
         </p:blipFill>
         <p:spPr>
@@ -10246,7 +11541,7 @@
           <p:cNvPr id="5" name="">
             <a:extLst xmlns:a="http://schemas.openxmlformats.org/drawingml/2006/main">
               <a:ext uri="{FF2B5EF4-FFF2-40B4-BE49-F238E27FC236}">
-                <a16:creationId xmlns:a16="http://schemas.microsoft.com/office/drawing/2014/main" id="{FD004F01-8F39-4253-A54F-0C13C4E736FA}"/>
+                <a16:creationId xmlns:a16="http://schemas.microsoft.com/office/drawing/2014/main" id="{C18B1B06-F23E-4B4E-98A7-B650F50984B6}"/>
               </a:ext>
             </a:extLst>
           </p:cNvPr>
@@ -10296,7 +11591,7 @@
           <p:cNvPr id="6" name="">
             <a:extLst xmlns:a="http://schemas.openxmlformats.org/drawingml/2006/main">
               <a:ext uri="{FF2B5EF4-FFF2-40B4-BE49-F238E27FC236}">
-                <a16:creationId xmlns:a16="http://schemas.microsoft.com/office/drawing/2014/main" id="{DAF4585C-DAD1-4142-887B-94740EAE2140}"/>
+                <a16:creationId xmlns:a16="http://schemas.microsoft.com/office/drawing/2014/main" id="{392A2D30-A93C-4FCC-9CBA-59E1614FAC07}"/>
               </a:ext>
             </a:extLst>
           </p:cNvPr>
@@ -10346,7 +11641,7 @@
           <p:cNvPr id="7" name="">
             <a:extLst xmlns:a="http://schemas.openxmlformats.org/drawingml/2006/main">
               <a:ext uri="{FF2B5EF4-FFF2-40B4-BE49-F238E27FC236}">
-                <a16:creationId xmlns:a16="http://schemas.microsoft.com/office/drawing/2014/main" id="{A279A9B1-D052-4683-B54C-6582090AF322}"/>
+                <a16:creationId xmlns:a16="http://schemas.microsoft.com/office/drawing/2014/main" id="{C8345FAC-194F-46F4-88F8-FB5FA4A421BF}"/>
               </a:ext>
             </a:extLst>
           </p:cNvPr>
@@ -10396,7 +11691,7 @@
           <p:cNvPr id="8" name="">
             <a:extLst xmlns:a="http://schemas.openxmlformats.org/drawingml/2006/main">
               <a:ext uri="{FF2B5EF4-FFF2-40B4-BE49-F238E27FC236}">
-                <a16:creationId xmlns:a16="http://schemas.microsoft.com/office/drawing/2014/main" id="{7CEDB7B5-4C60-4A95-9365-197E644348AC}"/>
+                <a16:creationId xmlns:a16="http://schemas.microsoft.com/office/drawing/2014/main" id="{4EC1F2A0-D8CF-441D-8808-84F7D8004C4B}"/>
               </a:ext>
             </a:extLst>
           </p:cNvPr>
@@ -10444,7 +11739,7 @@
     </p:spTree>
     <p:extLst>
       <p:ext uri="{BB962C8B-B14F-4D97-AF65-F5344CB8AC3E}">
-        <p14:creationId xmlns:p14="http://schemas.microsoft.com/office/powerpoint/2010/main" val="1057135405"/>
+        <p14:creationId xmlns:p14="http://schemas.microsoft.com/office/powerpoint/2010/main" val="1197714083"/>
       </p:ext>
     </p:extLst>
   </p:cSld>

--- a/sglang_direct_kv/artifacts/slides/agent_aware_kv_movement_manager_deck.pptx
+++ b/sglang_direct_kv/artifacts/slides/agent_aware_kv_movement_manager_deck.pptx
@@ -2,23 +2,23 @@
 <file path=ppt/presentation.xml><?xml version="1.0" encoding="utf-8"?>
 <p:presentation xmlns:p="http://schemas.openxmlformats.org/presentationml/2006/main">
   <p:sldMasterIdLst>
-    <p:sldMasterId xmlns:r="http://schemas.openxmlformats.org/officeDocument/2006/relationships" id="2147483648" r:id="Redec65a8adea4648"/>
+    <p:sldMasterId xmlns:r="http://schemas.openxmlformats.org/officeDocument/2006/relationships" id="2147483648" r:id="R45000e4ad3794bcb"/>
   </p:sldMasterIdLst>
   <p:notesMasterIdLst>
-    <p:notesMasterId xmlns:r="http://schemas.openxmlformats.org/officeDocument/2006/relationships" r:id="R5751310b4b6a4a24"/>
+    <p:notesMasterId xmlns:r="http://schemas.openxmlformats.org/officeDocument/2006/relationships" r:id="Raa6dd049190c4e0d"/>
   </p:notesMasterIdLst>
   <p:sldIdLst>
-    <p:sldId xmlns:r="http://schemas.openxmlformats.org/officeDocument/2006/relationships" id="256" r:id="Rf93c1d25d19c43b1"/>
-    <p:sldId xmlns:r="http://schemas.openxmlformats.org/officeDocument/2006/relationships" id="257" r:id="R86b45fc1fb664aa8"/>
-    <p:sldId xmlns:r="http://schemas.openxmlformats.org/officeDocument/2006/relationships" id="258" r:id="Re37d71b1445d4472"/>
-    <p:sldId xmlns:r="http://schemas.openxmlformats.org/officeDocument/2006/relationships" id="259" r:id="Ra56e871d10224f91"/>
-    <p:sldId xmlns:r="http://schemas.openxmlformats.org/officeDocument/2006/relationships" id="260" r:id="R9a91cc9088ba41b5"/>
-    <p:sldId xmlns:r="http://schemas.openxmlformats.org/officeDocument/2006/relationships" id="261" r:id="R5cd1684a0d4f41b7"/>
-    <p:sldId xmlns:r="http://schemas.openxmlformats.org/officeDocument/2006/relationships" id="262" r:id="Re3fee97197584b71"/>
-    <p:sldId xmlns:r="http://schemas.openxmlformats.org/officeDocument/2006/relationships" id="263" r:id="R917b39da13fb4da7"/>
-    <p:sldId xmlns:r="http://schemas.openxmlformats.org/officeDocument/2006/relationships" id="264" r:id="R0f9480d59ad64571"/>
-    <p:sldId xmlns:r="http://schemas.openxmlformats.org/officeDocument/2006/relationships" id="265" r:id="R40b797a37fc74d0b"/>
-    <p:sldId xmlns:r="http://schemas.openxmlformats.org/officeDocument/2006/relationships" id="266" r:id="Rd8667c7be2864ccc"/>
+    <p:sldId xmlns:r="http://schemas.openxmlformats.org/officeDocument/2006/relationships" id="256" r:id="Rfaefc26859454b40"/>
+    <p:sldId xmlns:r="http://schemas.openxmlformats.org/officeDocument/2006/relationships" id="257" r:id="Raa8f17dc28e84c4b"/>
+    <p:sldId xmlns:r="http://schemas.openxmlformats.org/officeDocument/2006/relationships" id="258" r:id="R21b20d109ee74e2b"/>
+    <p:sldId xmlns:r="http://schemas.openxmlformats.org/officeDocument/2006/relationships" id="259" r:id="R8ee0412ca49b4362"/>
+    <p:sldId xmlns:r="http://schemas.openxmlformats.org/officeDocument/2006/relationships" id="260" r:id="R6347202f948c4353"/>
+    <p:sldId xmlns:r="http://schemas.openxmlformats.org/officeDocument/2006/relationships" id="261" r:id="R67702fa69c38430b"/>
+    <p:sldId xmlns:r="http://schemas.openxmlformats.org/officeDocument/2006/relationships" id="262" r:id="Re47c7237bc2e4826"/>
+    <p:sldId xmlns:r="http://schemas.openxmlformats.org/officeDocument/2006/relationships" id="263" r:id="Ree47d708630b4570"/>
+    <p:sldId xmlns:r="http://schemas.openxmlformats.org/officeDocument/2006/relationships" id="264" r:id="R297110dabe1f4138"/>
+    <p:sldId xmlns:r="http://schemas.openxmlformats.org/officeDocument/2006/relationships" id="265" r:id="R530ec569cb324125"/>
+    <p:sldId xmlns:r="http://schemas.openxmlformats.org/officeDocument/2006/relationships" id="266" r:id="R978d11244a7e408a"/>
   </p:sldIdLst>
   <p:sldSz cx="12192000" cy="6858000"/>
   <p:notesSz cx="6858000" cy="9144000"/>
@@ -837,12 +837,12 @@
           <a:lstStyle xmlns:a="http://schemas.openxmlformats.org/drawingml/2006/main"/>
           <a:p xmlns:a="http://schemas.openxmlformats.org/drawingml/2006/main">
             <a:r>
-              <a:t>This slide summarizes the concrete prototype setup used for the current manager report.</a:t>
-            </a:r>
-          </a:p>
-          <a:p xmlns:a="http://schemas.openxmlformats.org/drawingml/2006/main">
-            <a:r>
-              <a:t>Hardware/runtime values are from the latest master report setup section and the project run configuration: Qwen2.5-Coder-7B, A10G-class single GPU, 24 GB GDDR6 GPU memory, 16 GB HiCache host KV shelf, context length 32768, max total tokens 12288, mem fraction static 0.72, tensor parallel size 1.</a:t>
+              <a:t>This slide intentionally keeps the testbed setup simple: real software-engineering traces flow into DeepAgents and then into SGLang.</a:t>
+            </a:r>
+          </a:p>
+          <a:p xmlns:a="http://schemas.openxmlformats.org/drawingml/2006/main">
+            <a:r>
+              <a:t>Detailed hardware/runtime values are not shown on this slide to keep the experiment components clear.</a:t>
             </a:r>
           </a:p>
           <a:p xmlns:a="http://schemas.openxmlformats.org/drawingml/2006/main">
@@ -1505,7 +1505,7 @@
   </p:cSld>
   <p:clrMap bg1="lt1" tx1="dk1" bg2="lt2" tx2="dk2" accent1="accent1" accent2="accent2" accent3="accent3" accent4="accent4" accent5="accent5" accent6="accent6" hlink="hlink" folHlink="folHlink"/>
   <p:sldLayoutIdLst>
-    <p:sldLayoutId xmlns:r="http://schemas.openxmlformats.org/officeDocument/2006/relationships" id="2147483649" r:id="Re2203cba7e1f4be7"/>
+    <p:sldLayoutId xmlns:r="http://schemas.openxmlformats.org/officeDocument/2006/relationships" id="2147483649" r:id="Ree1eba763f4e46de"/>
   </p:sldLayoutIdLst>
   <p:txStyles>
     <p:titleStyle>
@@ -2056,7 +2056,7 @@
           <p:cNvPr id="16" name="">
             <a:extLst xmlns:a="http://schemas.openxmlformats.org/drawingml/2006/main">
               <a:ext uri="{FF2B5EF4-FFF2-40B4-BE49-F238E27FC236}">
-                <a16:creationId xmlns:a16="http://schemas.microsoft.com/office/drawing/2014/main" id="{419FA287-1B93-4547-B076-098D9A9E6E08}"/>
+                <a16:creationId xmlns:a16="http://schemas.microsoft.com/office/drawing/2014/main" id="{2987F92D-DB40-4AA6-908A-5E822A65D2B3}"/>
               </a:ext>
             </a:extLst>
           </p:cNvPr>
@@ -2106,7 +2106,7 @@
           <p:cNvPr id="2" name="">
             <a:extLst xmlns:a="http://schemas.openxmlformats.org/drawingml/2006/main">
               <a:ext uri="{FF2B5EF4-FFF2-40B4-BE49-F238E27FC236}">
-                <a16:creationId xmlns:a16="http://schemas.microsoft.com/office/drawing/2014/main" id="{93960661-E137-4E25-B36F-BE1A243D9641}"/>
+                <a16:creationId xmlns:a16="http://schemas.microsoft.com/office/drawing/2014/main" id="{D183278D-0C18-4EF1-8E93-F1858F496396}"/>
               </a:ext>
             </a:extLst>
           </p:cNvPr>
@@ -2156,7 +2156,7 @@
           <p:cNvPr id="3" name="">
             <a:extLst xmlns:a="http://schemas.openxmlformats.org/drawingml/2006/main">
               <a:ext uri="{FF2B5EF4-FFF2-40B4-BE49-F238E27FC236}">
-                <a16:creationId xmlns:a16="http://schemas.microsoft.com/office/drawing/2014/main" id="{95F35314-1F49-4B1E-8057-9B8AC9AE8F56}"/>
+                <a16:creationId xmlns:a16="http://schemas.microsoft.com/office/drawing/2014/main" id="{F262E1E0-779E-4145-9381-FCA88BA0D7CF}"/>
               </a:ext>
             </a:extLst>
           </p:cNvPr>
@@ -2191,7 +2191,7 @@
           <p:cNvPr id="4" name="">
             <a:extLst xmlns:a="http://schemas.openxmlformats.org/drawingml/2006/main">
               <a:ext uri="{FF2B5EF4-FFF2-40B4-BE49-F238E27FC236}">
-                <a16:creationId xmlns:a16="http://schemas.microsoft.com/office/drawing/2014/main" id="{9DC151AC-15E4-4A3D-9731-D15ED35D8EB5}"/>
+                <a16:creationId xmlns:a16="http://schemas.microsoft.com/office/drawing/2014/main" id="{A457F92E-3EE8-44B7-B68D-188065357ABB}"/>
               </a:ext>
             </a:extLst>
           </p:cNvPr>
@@ -2241,7 +2241,7 @@
           <p:cNvPr id="5" name="">
             <a:extLst xmlns:a="http://schemas.openxmlformats.org/drawingml/2006/main">
               <a:ext uri="{FF2B5EF4-FFF2-40B4-BE49-F238E27FC236}">
-                <a16:creationId xmlns:a16="http://schemas.microsoft.com/office/drawing/2014/main" id="{A42432D0-384C-4379-897C-E0F83EFF20E2}"/>
+                <a16:creationId xmlns:a16="http://schemas.microsoft.com/office/drawing/2014/main" id="{175E444D-324C-4FF4-833F-9DC32C6D60D3}"/>
               </a:ext>
             </a:extLst>
           </p:cNvPr>
@@ -2291,7 +2291,7 @@
           <p:cNvPr id="6" name="">
             <a:extLst xmlns:a="http://schemas.openxmlformats.org/drawingml/2006/main">
               <a:ext uri="{FF2B5EF4-FFF2-40B4-BE49-F238E27FC236}">
-                <a16:creationId xmlns:a16="http://schemas.microsoft.com/office/drawing/2014/main" id="{B8B032E7-184B-4F31-A120-15F0C517854F}"/>
+                <a16:creationId xmlns:a16="http://schemas.microsoft.com/office/drawing/2014/main" id="{B973C7E7-BE2B-4CD8-BAD4-9EBBA5A5F22E}"/>
               </a:ext>
             </a:extLst>
           </p:cNvPr>
@@ -2326,7 +2326,7 @@
           <p:cNvPr id="7" name="">
             <a:extLst xmlns:a="http://schemas.openxmlformats.org/drawingml/2006/main">
               <a:ext uri="{FF2B5EF4-FFF2-40B4-BE49-F238E27FC236}">
-                <a16:creationId xmlns:a16="http://schemas.microsoft.com/office/drawing/2014/main" id="{0BB5C5B5-B2D3-46DE-98F4-659F5AC44B90}"/>
+                <a16:creationId xmlns:a16="http://schemas.microsoft.com/office/drawing/2014/main" id="{607C164D-5C3C-47EA-9F45-737A86E7C081}"/>
               </a:ext>
             </a:extLst>
           </p:cNvPr>
@@ -2376,7 +2376,7 @@
           <p:cNvPr id="8" name="">
             <a:extLst xmlns:a="http://schemas.openxmlformats.org/drawingml/2006/main">
               <a:ext uri="{FF2B5EF4-FFF2-40B4-BE49-F238E27FC236}">
-                <a16:creationId xmlns:a16="http://schemas.microsoft.com/office/drawing/2014/main" id="{DAA21D4E-3919-4EA8-BED9-E0F3A1009172}"/>
+                <a16:creationId xmlns:a16="http://schemas.microsoft.com/office/drawing/2014/main" id="{E9932ADB-9685-4490-A22F-45CE24397180}"/>
               </a:ext>
             </a:extLst>
           </p:cNvPr>
@@ -2426,7 +2426,7 @@
           <p:cNvPr id="9" name="">
             <a:extLst xmlns:a="http://schemas.openxmlformats.org/drawingml/2006/main">
               <a:ext uri="{FF2B5EF4-FFF2-40B4-BE49-F238E27FC236}">
-                <a16:creationId xmlns:a16="http://schemas.microsoft.com/office/drawing/2014/main" id="{B9209BF0-5016-4C14-A94E-4CF9DA096505}"/>
+                <a16:creationId xmlns:a16="http://schemas.microsoft.com/office/drawing/2014/main" id="{BEB23E09-599A-4887-A0A4-96B0CC4E7973}"/>
               </a:ext>
             </a:extLst>
           </p:cNvPr>
@@ -2461,7 +2461,7 @@
           <p:cNvPr id="10" name="">
             <a:extLst xmlns:a="http://schemas.openxmlformats.org/drawingml/2006/main">
               <a:ext uri="{FF2B5EF4-FFF2-40B4-BE49-F238E27FC236}">
-                <a16:creationId xmlns:a16="http://schemas.microsoft.com/office/drawing/2014/main" id="{AB00A238-5627-40E3-AA7A-F282626A07F1}"/>
+                <a16:creationId xmlns:a16="http://schemas.microsoft.com/office/drawing/2014/main" id="{98F4558D-F384-4847-A690-2F06E897079B}"/>
               </a:ext>
             </a:extLst>
           </p:cNvPr>
@@ -2511,7 +2511,7 @@
           <p:cNvPr id="11" name="">
             <a:extLst xmlns:a="http://schemas.openxmlformats.org/drawingml/2006/main">
               <a:ext uri="{FF2B5EF4-FFF2-40B4-BE49-F238E27FC236}">
-                <a16:creationId xmlns:a16="http://schemas.microsoft.com/office/drawing/2014/main" id="{43F77D38-BE9F-44DD-8F69-E2E6CAE24DBA}"/>
+                <a16:creationId xmlns:a16="http://schemas.microsoft.com/office/drawing/2014/main" id="{6B3AEEC7-3DA8-4B8A-B9F4-637D4CF5B097}"/>
               </a:ext>
             </a:extLst>
           </p:cNvPr>
@@ -2561,7 +2561,7 @@
           <p:cNvPr id="12" name="">
             <a:extLst xmlns:a="http://schemas.openxmlformats.org/drawingml/2006/main">
               <a:ext uri="{FF2B5EF4-FFF2-40B4-BE49-F238E27FC236}">
-                <a16:creationId xmlns:a16="http://schemas.microsoft.com/office/drawing/2014/main" id="{7F3C2120-C54B-4F03-A48F-088D4A4BCEDB}"/>
+                <a16:creationId xmlns:a16="http://schemas.microsoft.com/office/drawing/2014/main" id="{7E216146-EA62-429F-9635-BD3D3D9350BF}"/>
               </a:ext>
             </a:extLst>
           </p:cNvPr>
@@ -2596,7 +2596,7 @@
           <p:cNvPr id="13" name="">
             <a:extLst xmlns:a="http://schemas.openxmlformats.org/drawingml/2006/main">
               <a:ext uri="{FF2B5EF4-FFF2-40B4-BE49-F238E27FC236}">
-                <a16:creationId xmlns:a16="http://schemas.microsoft.com/office/drawing/2014/main" id="{7EE56297-B589-4C34-BB98-4EB0C3C099D4}"/>
+                <a16:creationId xmlns:a16="http://schemas.microsoft.com/office/drawing/2014/main" id="{16D681A5-F09C-42AF-85FF-313C2B3DF23F}"/>
               </a:ext>
             </a:extLst>
           </p:cNvPr>
@@ -2646,7 +2646,7 @@
           <p:cNvPr id="14" name="">
             <a:extLst xmlns:a="http://schemas.openxmlformats.org/drawingml/2006/main">
               <a:ext uri="{FF2B5EF4-FFF2-40B4-BE49-F238E27FC236}">
-                <a16:creationId xmlns:a16="http://schemas.microsoft.com/office/drawing/2014/main" id="{A4852671-FB36-473F-8639-079BB6CD731A}"/>
+                <a16:creationId xmlns:a16="http://schemas.microsoft.com/office/drawing/2014/main" id="{2D49094C-910E-4862-8ED9-8D2CBA129ABC}"/>
               </a:ext>
             </a:extLst>
           </p:cNvPr>
@@ -2696,7 +2696,7 @@
           <p:cNvPr id="15" name="">
             <a:extLst xmlns:a="http://schemas.openxmlformats.org/drawingml/2006/main">
               <a:ext uri="{FF2B5EF4-FFF2-40B4-BE49-F238E27FC236}">
-                <a16:creationId xmlns:a16="http://schemas.microsoft.com/office/drawing/2014/main" id="{F8F59266-5178-4C58-850C-9C8161C91024}"/>
+                <a16:creationId xmlns:a16="http://schemas.microsoft.com/office/drawing/2014/main" id="{2B69CBF8-61AF-4B48-94DD-8F6A8C6B7902}"/>
               </a:ext>
             </a:extLst>
           </p:cNvPr>
@@ -2744,7 +2744,7 @@
     </p:spTree>
     <p:extLst>
       <p:ext uri="{BB962C8B-B14F-4D97-AF65-F5344CB8AC3E}">
-        <p14:creationId xmlns:p14="http://schemas.microsoft.com/office/powerpoint/2010/main" val="1525316303"/>
+        <p14:creationId xmlns:p14="http://schemas.microsoft.com/office/powerpoint/2010/main" val="415295932"/>
       </p:ext>
     </p:extLst>
   </p:cSld>
@@ -2775,7 +2775,7 @@
           <p:cNvPr id="28" name="">
             <a:extLst xmlns:a="http://schemas.openxmlformats.org/drawingml/2006/main">
               <a:ext uri="{FF2B5EF4-FFF2-40B4-BE49-F238E27FC236}">
-                <a16:creationId xmlns:a16="http://schemas.microsoft.com/office/drawing/2014/main" id="{CFC3E667-0FFF-41E7-8122-4757F911C282}"/>
+                <a16:creationId xmlns:a16="http://schemas.microsoft.com/office/drawing/2014/main" id="{5055E84E-DAFF-48FE-92A9-6E7BB2D957C8}"/>
               </a:ext>
             </a:extLst>
           </p:cNvPr>
@@ -2825,7 +2825,7 @@
           <p:cNvPr id="2" name="">
             <a:extLst xmlns:a="http://schemas.openxmlformats.org/drawingml/2006/main">
               <a:ext uri="{FF2B5EF4-FFF2-40B4-BE49-F238E27FC236}">
-                <a16:creationId xmlns:a16="http://schemas.microsoft.com/office/drawing/2014/main" id="{A604714F-91AA-48B6-BE3E-FBDABB47E560}"/>
+                <a16:creationId xmlns:a16="http://schemas.microsoft.com/office/drawing/2014/main" id="{C3EE8DA9-B42C-43BE-804D-25D12FA4568B}"/>
               </a:ext>
             </a:extLst>
           </p:cNvPr>
@@ -2875,7 +2875,7 @@
           <p:cNvPr id="3" name="">
             <a:extLst xmlns:a="http://schemas.openxmlformats.org/drawingml/2006/main">
               <a:ext uri="{FF2B5EF4-FFF2-40B4-BE49-F238E27FC236}">
-                <a16:creationId xmlns:a16="http://schemas.microsoft.com/office/drawing/2014/main" id="{477D2E00-72B9-4297-B770-CE6ECB30A734}"/>
+                <a16:creationId xmlns:a16="http://schemas.microsoft.com/office/drawing/2014/main" id="{105A6898-DE15-4A0F-B134-DC679F330FF9}"/>
               </a:ext>
             </a:extLst>
           </p:cNvPr>
@@ -2910,7 +2910,7 @@
           <p:cNvPr id="4" name="">
             <a:extLst xmlns:a="http://schemas.openxmlformats.org/drawingml/2006/main">
               <a:ext uri="{FF2B5EF4-FFF2-40B4-BE49-F238E27FC236}">
-                <a16:creationId xmlns:a16="http://schemas.microsoft.com/office/drawing/2014/main" id="{F4EC5403-850A-42FE-9FC3-F51ABB409B5D}"/>
+                <a16:creationId xmlns:a16="http://schemas.microsoft.com/office/drawing/2014/main" id="{07E49C5B-D7B3-4C23-B2F9-BF06231F4500}"/>
               </a:ext>
             </a:extLst>
           </p:cNvPr>
@@ -2941,7 +2941,7 @@
           <p:cNvPr id="5" name="">
             <a:extLst xmlns:a="http://schemas.openxmlformats.org/drawingml/2006/main">
               <a:ext uri="{FF2B5EF4-FFF2-40B4-BE49-F238E27FC236}">
-                <a16:creationId xmlns:a16="http://schemas.microsoft.com/office/drawing/2014/main" id="{DE890471-6382-4D34-AC45-FBFE2784E417}"/>
+                <a16:creationId xmlns:a16="http://schemas.microsoft.com/office/drawing/2014/main" id="{487B0E09-CABB-437F-8E13-C52D4D77DF97}"/>
               </a:ext>
             </a:extLst>
           </p:cNvPr>
@@ -2991,7 +2991,7 @@
           <p:cNvPr id="6" name="">
             <a:extLst xmlns:a="http://schemas.openxmlformats.org/drawingml/2006/main">
               <a:ext uri="{FF2B5EF4-FFF2-40B4-BE49-F238E27FC236}">
-                <a16:creationId xmlns:a16="http://schemas.microsoft.com/office/drawing/2014/main" id="{14CD1DA9-919A-438E-BE34-2F5C388972DB}"/>
+                <a16:creationId xmlns:a16="http://schemas.microsoft.com/office/drawing/2014/main" id="{4A8C2018-0F08-4EFE-9285-B587DED749D0}"/>
               </a:ext>
             </a:extLst>
           </p:cNvPr>
@@ -3041,7 +3041,7 @@
           <p:cNvPr id="7" name="">
             <a:extLst xmlns:a="http://schemas.openxmlformats.org/drawingml/2006/main">
               <a:ext uri="{FF2B5EF4-FFF2-40B4-BE49-F238E27FC236}">
-                <a16:creationId xmlns:a16="http://schemas.microsoft.com/office/drawing/2014/main" id="{98783914-BB9A-4EE1-9FD1-C7FC15B7DD54}"/>
+                <a16:creationId xmlns:a16="http://schemas.microsoft.com/office/drawing/2014/main" id="{E2C1F1B7-3BCC-4563-B5BD-177AC04C1D7C}"/>
               </a:ext>
             </a:extLst>
           </p:cNvPr>
@@ -3076,7 +3076,7 @@
           <p:cNvPr id="8" name="">
             <a:extLst xmlns:a="http://schemas.openxmlformats.org/drawingml/2006/main">
               <a:ext uri="{FF2B5EF4-FFF2-40B4-BE49-F238E27FC236}">
-                <a16:creationId xmlns:a16="http://schemas.microsoft.com/office/drawing/2014/main" id="{285C038E-7D54-4B24-9C48-7340CADEEC02}"/>
+                <a16:creationId xmlns:a16="http://schemas.microsoft.com/office/drawing/2014/main" id="{57F436FA-6D50-463D-937E-208DA8E7FB72}"/>
               </a:ext>
             </a:extLst>
           </p:cNvPr>
@@ -3107,7 +3107,7 @@
           <p:cNvPr id="9" name="">
             <a:extLst xmlns:a="http://schemas.openxmlformats.org/drawingml/2006/main">
               <a:ext uri="{FF2B5EF4-FFF2-40B4-BE49-F238E27FC236}">
-                <a16:creationId xmlns:a16="http://schemas.microsoft.com/office/drawing/2014/main" id="{5CFBB829-4CEA-4A0F-94F2-A5E8DF40A9E1}"/>
+                <a16:creationId xmlns:a16="http://schemas.microsoft.com/office/drawing/2014/main" id="{76397905-654D-4D97-8291-003344D7ED32}"/>
               </a:ext>
             </a:extLst>
           </p:cNvPr>
@@ -3157,7 +3157,7 @@
           <p:cNvPr id="10" name="">
             <a:extLst xmlns:a="http://schemas.openxmlformats.org/drawingml/2006/main">
               <a:ext uri="{FF2B5EF4-FFF2-40B4-BE49-F238E27FC236}">
-                <a16:creationId xmlns:a16="http://schemas.microsoft.com/office/drawing/2014/main" id="{BC0EC8E2-BB2D-40F3-B127-9088BC28C524}"/>
+                <a16:creationId xmlns:a16="http://schemas.microsoft.com/office/drawing/2014/main" id="{55238B65-11EC-4C85-8220-D1D320F89401}"/>
               </a:ext>
             </a:extLst>
           </p:cNvPr>
@@ -3207,7 +3207,7 @@
           <p:cNvPr id="11" name="">
             <a:extLst xmlns:a="http://schemas.openxmlformats.org/drawingml/2006/main">
               <a:ext uri="{FF2B5EF4-FFF2-40B4-BE49-F238E27FC236}">
-                <a16:creationId xmlns:a16="http://schemas.microsoft.com/office/drawing/2014/main" id="{B430D87C-9085-4CB3-883A-DEB6E68652BD}"/>
+                <a16:creationId xmlns:a16="http://schemas.microsoft.com/office/drawing/2014/main" id="{A9C3833E-F37A-45D1-984A-DB27DDF49C4B}"/>
               </a:ext>
             </a:extLst>
           </p:cNvPr>
@@ -3242,7 +3242,7 @@
           <p:cNvPr id="12" name="">
             <a:extLst xmlns:a="http://schemas.openxmlformats.org/drawingml/2006/main">
               <a:ext uri="{FF2B5EF4-FFF2-40B4-BE49-F238E27FC236}">
-                <a16:creationId xmlns:a16="http://schemas.microsoft.com/office/drawing/2014/main" id="{2A9A4B28-48D4-4CE2-82D5-6DACC9879CD5}"/>
+                <a16:creationId xmlns:a16="http://schemas.microsoft.com/office/drawing/2014/main" id="{6B969611-A85C-4B48-8BBB-DD20B9D7A5E4}"/>
               </a:ext>
             </a:extLst>
           </p:cNvPr>
@@ -3273,7 +3273,7 @@
           <p:cNvPr id="13" name="">
             <a:extLst xmlns:a="http://schemas.openxmlformats.org/drawingml/2006/main">
               <a:ext uri="{FF2B5EF4-FFF2-40B4-BE49-F238E27FC236}">
-                <a16:creationId xmlns:a16="http://schemas.microsoft.com/office/drawing/2014/main" id="{86698DC2-8175-4277-83ED-B200D71C1405}"/>
+                <a16:creationId xmlns:a16="http://schemas.microsoft.com/office/drawing/2014/main" id="{60690128-11FF-49E1-8ED7-50D4AAC6F43E}"/>
               </a:ext>
             </a:extLst>
           </p:cNvPr>
@@ -3323,7 +3323,7 @@
           <p:cNvPr id="14" name="">
             <a:extLst xmlns:a="http://schemas.openxmlformats.org/drawingml/2006/main">
               <a:ext uri="{FF2B5EF4-FFF2-40B4-BE49-F238E27FC236}">
-                <a16:creationId xmlns:a16="http://schemas.microsoft.com/office/drawing/2014/main" id="{F6EB3C76-EEA8-4CD5-8390-3AFC0EB934EB}"/>
+                <a16:creationId xmlns:a16="http://schemas.microsoft.com/office/drawing/2014/main" id="{50B6F3A9-4176-4A32-A862-29BE428ED4E7}"/>
               </a:ext>
             </a:extLst>
           </p:cNvPr>
@@ -3373,7 +3373,7 @@
           <p:cNvPr id="15" name="">
             <a:extLst xmlns:a="http://schemas.openxmlformats.org/drawingml/2006/main">
               <a:ext uri="{FF2B5EF4-FFF2-40B4-BE49-F238E27FC236}">
-                <a16:creationId xmlns:a16="http://schemas.microsoft.com/office/drawing/2014/main" id="{5BDAA012-A02D-4E6A-AB04-44160B48C85C}"/>
+                <a16:creationId xmlns:a16="http://schemas.microsoft.com/office/drawing/2014/main" id="{8C6B3C82-AA00-429F-9D8A-5ED1E0698A30}"/>
               </a:ext>
             </a:extLst>
           </p:cNvPr>
@@ -3408,7 +3408,7 @@
           <p:cNvPr id="16" name="">
             <a:extLst xmlns:a="http://schemas.openxmlformats.org/drawingml/2006/main">
               <a:ext uri="{FF2B5EF4-FFF2-40B4-BE49-F238E27FC236}">
-                <a16:creationId xmlns:a16="http://schemas.microsoft.com/office/drawing/2014/main" id="{EC1B9260-9F0C-4B41-8D74-8A4C502276F3}"/>
+                <a16:creationId xmlns:a16="http://schemas.microsoft.com/office/drawing/2014/main" id="{3C12ACDC-99CB-481C-80F5-983A5E219DC7}"/>
               </a:ext>
             </a:extLst>
           </p:cNvPr>
@@ -3439,7 +3439,7 @@
           <p:cNvPr id="17" name="">
             <a:extLst xmlns:a="http://schemas.openxmlformats.org/drawingml/2006/main">
               <a:ext uri="{FF2B5EF4-FFF2-40B4-BE49-F238E27FC236}">
-                <a16:creationId xmlns:a16="http://schemas.microsoft.com/office/drawing/2014/main" id="{583FAA72-B3A4-45F1-932E-E579453E034D}"/>
+                <a16:creationId xmlns:a16="http://schemas.microsoft.com/office/drawing/2014/main" id="{168A548C-9DE9-4D30-BD2E-82CF33CFA173}"/>
               </a:ext>
             </a:extLst>
           </p:cNvPr>
@@ -3489,7 +3489,7 @@
           <p:cNvPr id="18" name="">
             <a:extLst xmlns:a="http://schemas.openxmlformats.org/drawingml/2006/main">
               <a:ext uri="{FF2B5EF4-FFF2-40B4-BE49-F238E27FC236}">
-                <a16:creationId xmlns:a16="http://schemas.microsoft.com/office/drawing/2014/main" id="{C2A1C1C3-4EA7-4296-B0F4-0F742A763B10}"/>
+                <a16:creationId xmlns:a16="http://schemas.microsoft.com/office/drawing/2014/main" id="{5146A486-4DB4-4686-ACA7-85E1AB6E8507}"/>
               </a:ext>
             </a:extLst>
           </p:cNvPr>
@@ -3539,7 +3539,7 @@
           <p:cNvPr id="19" name="">
             <a:extLst xmlns:a="http://schemas.openxmlformats.org/drawingml/2006/main">
               <a:ext uri="{FF2B5EF4-FFF2-40B4-BE49-F238E27FC236}">
-                <a16:creationId xmlns:a16="http://schemas.microsoft.com/office/drawing/2014/main" id="{128A8758-C404-4412-9F6C-5C1F77ED5FC4}"/>
+                <a16:creationId xmlns:a16="http://schemas.microsoft.com/office/drawing/2014/main" id="{9ED82A97-A801-4C9A-A44D-0ED58D1E728C}"/>
               </a:ext>
             </a:extLst>
           </p:cNvPr>
@@ -3574,7 +3574,7 @@
           <p:cNvPr id="20" name="">
             <a:extLst xmlns:a="http://schemas.openxmlformats.org/drawingml/2006/main">
               <a:ext uri="{FF2B5EF4-FFF2-40B4-BE49-F238E27FC236}">
-                <a16:creationId xmlns:a16="http://schemas.microsoft.com/office/drawing/2014/main" id="{B3C75721-BC20-4175-8FD0-4D3EA7055122}"/>
+                <a16:creationId xmlns:a16="http://schemas.microsoft.com/office/drawing/2014/main" id="{3A4FC0EE-FE73-4B29-9F0D-F18624BFAC32}"/>
               </a:ext>
             </a:extLst>
           </p:cNvPr>
@@ -3605,7 +3605,7 @@
           <p:cNvPr id="21" name="">
             <a:extLst xmlns:a="http://schemas.openxmlformats.org/drawingml/2006/main">
               <a:ext uri="{FF2B5EF4-FFF2-40B4-BE49-F238E27FC236}">
-                <a16:creationId xmlns:a16="http://schemas.microsoft.com/office/drawing/2014/main" id="{C46F67E8-333A-48C5-A4E5-C6839F023971}"/>
+                <a16:creationId xmlns:a16="http://schemas.microsoft.com/office/drawing/2014/main" id="{65970081-BAAE-4CB8-B726-CF6C4D231F2E}"/>
               </a:ext>
             </a:extLst>
           </p:cNvPr>
@@ -3655,7 +3655,7 @@
           <p:cNvPr id="22" name="">
             <a:extLst xmlns:a="http://schemas.openxmlformats.org/drawingml/2006/main">
               <a:ext uri="{FF2B5EF4-FFF2-40B4-BE49-F238E27FC236}">
-                <a16:creationId xmlns:a16="http://schemas.microsoft.com/office/drawing/2014/main" id="{63919347-1838-4D9A-B847-25987F74239E}"/>
+                <a16:creationId xmlns:a16="http://schemas.microsoft.com/office/drawing/2014/main" id="{D050352D-3219-480D-A7D7-E6142467C89F}"/>
               </a:ext>
             </a:extLst>
           </p:cNvPr>
@@ -3705,7 +3705,7 @@
           <p:cNvPr id="23" name="">
             <a:extLst xmlns:a="http://schemas.openxmlformats.org/drawingml/2006/main">
               <a:ext uri="{FF2B5EF4-FFF2-40B4-BE49-F238E27FC236}">
-                <a16:creationId xmlns:a16="http://schemas.microsoft.com/office/drawing/2014/main" id="{2518431A-585D-4CA3-81D5-6CD7834F3B57}"/>
+                <a16:creationId xmlns:a16="http://schemas.microsoft.com/office/drawing/2014/main" id="{7F4B8FDC-4453-4989-A649-EFC5806DE859}"/>
               </a:ext>
             </a:extLst>
           </p:cNvPr>
@@ -3740,7 +3740,7 @@
           <p:cNvPr id="24" name="">
             <a:extLst xmlns:a="http://schemas.openxmlformats.org/drawingml/2006/main">
               <a:ext uri="{FF2B5EF4-FFF2-40B4-BE49-F238E27FC236}">
-                <a16:creationId xmlns:a16="http://schemas.microsoft.com/office/drawing/2014/main" id="{C700FCBA-F89E-4CE9-B2FC-FFAFAD0ADAA1}"/>
+                <a16:creationId xmlns:a16="http://schemas.microsoft.com/office/drawing/2014/main" id="{1462C91E-F6BF-41AC-9B10-4EC22204AD98}"/>
               </a:ext>
             </a:extLst>
           </p:cNvPr>
@@ -3790,7 +3790,7 @@
           <p:cNvPr id="25" name="">
             <a:extLst xmlns:a="http://schemas.openxmlformats.org/drawingml/2006/main">
               <a:ext uri="{FF2B5EF4-FFF2-40B4-BE49-F238E27FC236}">
-                <a16:creationId xmlns:a16="http://schemas.microsoft.com/office/drawing/2014/main" id="{5C942F0D-7645-410C-94FD-9ED856FEACC4}"/>
+                <a16:creationId xmlns:a16="http://schemas.microsoft.com/office/drawing/2014/main" id="{CEC1D895-EA4B-4A38-B4E1-087872B7C296}"/>
               </a:ext>
             </a:extLst>
           </p:cNvPr>
@@ -3840,7 +3840,7 @@
           <p:cNvPr id="26" name="">
             <a:extLst xmlns:a="http://schemas.openxmlformats.org/drawingml/2006/main">
               <a:ext uri="{FF2B5EF4-FFF2-40B4-BE49-F238E27FC236}">
-                <a16:creationId xmlns:a16="http://schemas.microsoft.com/office/drawing/2014/main" id="{82C8530E-6395-433C-B9E5-27DCC15BFD36}"/>
+                <a16:creationId xmlns:a16="http://schemas.microsoft.com/office/drawing/2014/main" id="{A8539BF1-A005-4F97-90F7-85BC05E06BE2}"/>
               </a:ext>
             </a:extLst>
           </p:cNvPr>
@@ -3890,7 +3890,7 @@
           <p:cNvPr id="27" name="">
             <a:extLst xmlns:a="http://schemas.openxmlformats.org/drawingml/2006/main">
               <a:ext uri="{FF2B5EF4-FFF2-40B4-BE49-F238E27FC236}">
-                <a16:creationId xmlns:a16="http://schemas.microsoft.com/office/drawing/2014/main" id="{9CD4DBD8-E9D4-4D5F-AD3C-7A0FF9D2004C}"/>
+                <a16:creationId xmlns:a16="http://schemas.microsoft.com/office/drawing/2014/main" id="{1B7F3815-2023-4895-B13D-8BBE1AFE645D}"/>
               </a:ext>
             </a:extLst>
           </p:cNvPr>
@@ -3938,7 +3938,7 @@
     </p:spTree>
     <p:extLst>
       <p:ext uri="{BB962C8B-B14F-4D97-AF65-F5344CB8AC3E}">
-        <p14:creationId xmlns:p14="http://schemas.microsoft.com/office/powerpoint/2010/main" val="992531945"/>
+        <p14:creationId xmlns:p14="http://schemas.microsoft.com/office/powerpoint/2010/main" val="2140973703"/>
       </p:ext>
     </p:extLst>
   </p:cSld>
@@ -3969,7 +3969,7 @@
           <p:cNvPr id="27" name="">
             <a:extLst xmlns:a="http://schemas.openxmlformats.org/drawingml/2006/main">
               <a:ext uri="{FF2B5EF4-FFF2-40B4-BE49-F238E27FC236}">
-                <a16:creationId xmlns:a16="http://schemas.microsoft.com/office/drawing/2014/main" id="{B4D438DD-5867-4059-92AC-EAFBA1919051}"/>
+                <a16:creationId xmlns:a16="http://schemas.microsoft.com/office/drawing/2014/main" id="{3965953B-6AF3-4517-BE3F-145669879961}"/>
               </a:ext>
             </a:extLst>
           </p:cNvPr>
@@ -4019,7 +4019,7 @@
           <p:cNvPr id="2" name="">
             <a:extLst xmlns:a="http://schemas.openxmlformats.org/drawingml/2006/main">
               <a:ext uri="{FF2B5EF4-FFF2-40B4-BE49-F238E27FC236}">
-                <a16:creationId xmlns:a16="http://schemas.microsoft.com/office/drawing/2014/main" id="{135DF2C0-378A-4909-8877-0397C35027EB}"/>
+                <a16:creationId xmlns:a16="http://schemas.microsoft.com/office/drawing/2014/main" id="{3E99E580-723A-40F6-90FD-B66ECF5CA047}"/>
               </a:ext>
             </a:extLst>
           </p:cNvPr>
@@ -4069,7 +4069,7 @@
           <p:cNvPr id="3" name="">
             <a:extLst xmlns:a="http://schemas.openxmlformats.org/drawingml/2006/main">
               <a:ext uri="{FF2B5EF4-FFF2-40B4-BE49-F238E27FC236}">
-                <a16:creationId xmlns:a16="http://schemas.microsoft.com/office/drawing/2014/main" id="{B69CA1E6-5AFF-4113-8922-A3D9ED6E4DE8}"/>
+                <a16:creationId xmlns:a16="http://schemas.microsoft.com/office/drawing/2014/main" id="{2AFD71DF-7962-4B49-942C-1BDC5526B2CC}"/>
               </a:ext>
             </a:extLst>
           </p:cNvPr>
@@ -4104,7 +4104,7 @@
           <p:cNvPr id="4" name="">
             <a:extLst xmlns:a="http://schemas.openxmlformats.org/drawingml/2006/main">
               <a:ext uri="{FF2B5EF4-FFF2-40B4-BE49-F238E27FC236}">
-                <a16:creationId xmlns:a16="http://schemas.microsoft.com/office/drawing/2014/main" id="{0903FB5C-E56D-4BBA-A60C-C9F271963CC7}"/>
+                <a16:creationId xmlns:a16="http://schemas.microsoft.com/office/drawing/2014/main" id="{C8D93A99-D050-47BA-8DDF-3B0DCD177CAD}"/>
               </a:ext>
             </a:extLst>
           </p:cNvPr>
@@ -4154,7 +4154,7 @@
           <p:cNvPr id="5" name="">
             <a:extLst xmlns:a="http://schemas.openxmlformats.org/drawingml/2006/main">
               <a:ext uri="{FF2B5EF4-FFF2-40B4-BE49-F238E27FC236}">
-                <a16:creationId xmlns:a16="http://schemas.microsoft.com/office/drawing/2014/main" id="{2F09291D-119E-45AC-9BF5-1F13E5D7798E}"/>
+                <a16:creationId xmlns:a16="http://schemas.microsoft.com/office/drawing/2014/main" id="{E65EBDC7-AED3-4893-AE5E-18AEB368186D}"/>
               </a:ext>
             </a:extLst>
           </p:cNvPr>
@@ -4204,7 +4204,7 @@
           <p:cNvPr id="6" name="">
             <a:extLst xmlns:a="http://schemas.openxmlformats.org/drawingml/2006/main">
               <a:ext uri="{FF2B5EF4-FFF2-40B4-BE49-F238E27FC236}">
-                <a16:creationId xmlns:a16="http://schemas.microsoft.com/office/drawing/2014/main" id="{402A50E2-B611-4286-B3A3-EC3CD844E139}"/>
+                <a16:creationId xmlns:a16="http://schemas.microsoft.com/office/drawing/2014/main" id="{2A1A6110-DC07-45E6-88BD-7FB8D97E6A9C}"/>
               </a:ext>
             </a:extLst>
           </p:cNvPr>
@@ -4254,7 +4254,7 @@
           <p:cNvPr id="7" name="">
             <a:extLst xmlns:a="http://schemas.openxmlformats.org/drawingml/2006/main">
               <a:ext uri="{FF2B5EF4-FFF2-40B4-BE49-F238E27FC236}">
-                <a16:creationId xmlns:a16="http://schemas.microsoft.com/office/drawing/2014/main" id="{754E0EB6-59F3-407B-8A0B-48C080FD3314}"/>
+                <a16:creationId xmlns:a16="http://schemas.microsoft.com/office/drawing/2014/main" id="{294D5AEB-FFD3-4071-A228-1A84305D497E}"/>
               </a:ext>
             </a:extLst>
           </p:cNvPr>
@@ -4289,7 +4289,7 @@
           <p:cNvPr id="8" name="">
             <a:extLst xmlns:a="http://schemas.openxmlformats.org/drawingml/2006/main">
               <a:ext uri="{FF2B5EF4-FFF2-40B4-BE49-F238E27FC236}">
-                <a16:creationId xmlns:a16="http://schemas.microsoft.com/office/drawing/2014/main" id="{D3BA9781-8888-4E39-A6F5-0251214760E0}"/>
+                <a16:creationId xmlns:a16="http://schemas.microsoft.com/office/drawing/2014/main" id="{F09C67A2-0915-483A-8CEA-E2731084D99C}"/>
               </a:ext>
             </a:extLst>
           </p:cNvPr>
@@ -4339,7 +4339,7 @@
           <p:cNvPr id="9" name="">
             <a:extLst xmlns:a="http://schemas.openxmlformats.org/drawingml/2006/main">
               <a:ext uri="{FF2B5EF4-FFF2-40B4-BE49-F238E27FC236}">
-                <a16:creationId xmlns:a16="http://schemas.microsoft.com/office/drawing/2014/main" id="{7D31D6A5-590C-4B3D-BAFE-C5FFB91D8D74}"/>
+                <a16:creationId xmlns:a16="http://schemas.microsoft.com/office/drawing/2014/main" id="{B9081164-85DF-4CFE-9B9B-B764F51A5154}"/>
               </a:ext>
             </a:extLst>
           </p:cNvPr>
@@ -4389,7 +4389,7 @@
           <p:cNvPr id="10" name="">
             <a:extLst xmlns:a="http://schemas.openxmlformats.org/drawingml/2006/main">
               <a:ext uri="{FF2B5EF4-FFF2-40B4-BE49-F238E27FC236}">
-                <a16:creationId xmlns:a16="http://schemas.microsoft.com/office/drawing/2014/main" id="{C27FC1DA-90AF-4F56-902F-97683ECEB117}"/>
+                <a16:creationId xmlns:a16="http://schemas.microsoft.com/office/drawing/2014/main" id="{C239E0F3-0D93-4CF4-9670-3A1F47067325}"/>
               </a:ext>
             </a:extLst>
           </p:cNvPr>
@@ -4439,7 +4439,7 @@
           <p:cNvPr id="11" name="">
             <a:extLst xmlns:a="http://schemas.openxmlformats.org/drawingml/2006/main">
               <a:ext uri="{FF2B5EF4-FFF2-40B4-BE49-F238E27FC236}">
-                <a16:creationId xmlns:a16="http://schemas.microsoft.com/office/drawing/2014/main" id="{0ED5B989-C1AC-4026-8F4F-BCD893B91FDD}"/>
+                <a16:creationId xmlns:a16="http://schemas.microsoft.com/office/drawing/2014/main" id="{5B9DDE3C-45E4-4457-9C2F-30797E098C9D}"/>
               </a:ext>
             </a:extLst>
           </p:cNvPr>
@@ -4474,7 +4474,7 @@
           <p:cNvPr id="12" name="">
             <a:extLst xmlns:a="http://schemas.openxmlformats.org/drawingml/2006/main">
               <a:ext uri="{FF2B5EF4-FFF2-40B4-BE49-F238E27FC236}">
-                <a16:creationId xmlns:a16="http://schemas.microsoft.com/office/drawing/2014/main" id="{98421532-E4E5-472C-B5F1-A96794EA36DE}"/>
+                <a16:creationId xmlns:a16="http://schemas.microsoft.com/office/drawing/2014/main" id="{295B6D78-11E9-4150-B3F2-CC643F59200F}"/>
               </a:ext>
             </a:extLst>
           </p:cNvPr>
@@ -4524,7 +4524,7 @@
           <p:cNvPr id="13" name="">
             <a:extLst xmlns:a="http://schemas.openxmlformats.org/drawingml/2006/main">
               <a:ext uri="{FF2B5EF4-FFF2-40B4-BE49-F238E27FC236}">
-                <a16:creationId xmlns:a16="http://schemas.microsoft.com/office/drawing/2014/main" id="{4244315C-8B4D-4875-9760-245C5EF0218D}"/>
+                <a16:creationId xmlns:a16="http://schemas.microsoft.com/office/drawing/2014/main" id="{918A0619-933C-4907-8250-827491304B28}"/>
               </a:ext>
             </a:extLst>
           </p:cNvPr>
@@ -4574,7 +4574,7 @@
           <p:cNvPr id="14" name="">
             <a:extLst xmlns:a="http://schemas.openxmlformats.org/drawingml/2006/main">
               <a:ext uri="{FF2B5EF4-FFF2-40B4-BE49-F238E27FC236}">
-                <a16:creationId xmlns:a16="http://schemas.microsoft.com/office/drawing/2014/main" id="{FC24EC58-335B-4BD9-B8E2-46B93F0028A6}"/>
+                <a16:creationId xmlns:a16="http://schemas.microsoft.com/office/drawing/2014/main" id="{8296BFA6-8245-4CE1-8A39-E253356FA52A}"/>
               </a:ext>
             </a:extLst>
           </p:cNvPr>
@@ -4624,7 +4624,7 @@
           <p:cNvPr id="15" name="">
             <a:extLst xmlns:a="http://schemas.openxmlformats.org/drawingml/2006/main">
               <a:ext uri="{FF2B5EF4-FFF2-40B4-BE49-F238E27FC236}">
-                <a16:creationId xmlns:a16="http://schemas.microsoft.com/office/drawing/2014/main" id="{C89898BD-6F09-4D43-AE05-352DA79EB8C3}"/>
+                <a16:creationId xmlns:a16="http://schemas.microsoft.com/office/drawing/2014/main" id="{6941993F-A81C-4C94-A479-D72FAC1270BF}"/>
               </a:ext>
             </a:extLst>
           </p:cNvPr>
@@ -4659,7 +4659,7 @@
           <p:cNvPr id="16" name="">
             <a:extLst xmlns:a="http://schemas.openxmlformats.org/drawingml/2006/main">
               <a:ext uri="{FF2B5EF4-FFF2-40B4-BE49-F238E27FC236}">
-                <a16:creationId xmlns:a16="http://schemas.microsoft.com/office/drawing/2014/main" id="{6E37C455-E33F-4D46-940A-31AEE575EB0C}"/>
+                <a16:creationId xmlns:a16="http://schemas.microsoft.com/office/drawing/2014/main" id="{CBB4C2DC-BDB4-4B3A-A857-0C4ACA8B6FE9}"/>
               </a:ext>
             </a:extLst>
           </p:cNvPr>
@@ -4709,7 +4709,7 @@
           <p:cNvPr id="17" name="">
             <a:extLst xmlns:a="http://schemas.openxmlformats.org/drawingml/2006/main">
               <a:ext uri="{FF2B5EF4-FFF2-40B4-BE49-F238E27FC236}">
-                <a16:creationId xmlns:a16="http://schemas.microsoft.com/office/drawing/2014/main" id="{431B839C-ECAD-4519-870E-F4A698FF9CF9}"/>
+                <a16:creationId xmlns:a16="http://schemas.microsoft.com/office/drawing/2014/main" id="{B34B788E-B6A6-46A7-B340-1FBA93D58FC2}"/>
               </a:ext>
             </a:extLst>
           </p:cNvPr>
@@ -4759,7 +4759,7 @@
           <p:cNvPr id="18" name="">
             <a:extLst xmlns:a="http://schemas.openxmlformats.org/drawingml/2006/main">
               <a:ext uri="{FF2B5EF4-FFF2-40B4-BE49-F238E27FC236}">
-                <a16:creationId xmlns:a16="http://schemas.microsoft.com/office/drawing/2014/main" id="{14E7CE19-8101-49D3-A043-C32ADB7F3FCE}"/>
+                <a16:creationId xmlns:a16="http://schemas.microsoft.com/office/drawing/2014/main" id="{18342C36-A309-4ED8-B8F4-6353EA01A33A}"/>
               </a:ext>
             </a:extLst>
           </p:cNvPr>
@@ -4809,7 +4809,7 @@
           <p:cNvPr id="19" name="">
             <a:extLst xmlns:a="http://schemas.openxmlformats.org/drawingml/2006/main">
               <a:ext uri="{FF2B5EF4-FFF2-40B4-BE49-F238E27FC236}">
-                <a16:creationId xmlns:a16="http://schemas.microsoft.com/office/drawing/2014/main" id="{7A36D4B5-7E5F-49D1-B57E-2FF8A4DBC14A}"/>
+                <a16:creationId xmlns:a16="http://schemas.microsoft.com/office/drawing/2014/main" id="{072C1F2C-8B44-4BED-8B14-3CCDB972036C}"/>
               </a:ext>
             </a:extLst>
           </p:cNvPr>
@@ -4844,7 +4844,7 @@
           <p:cNvPr id="20" name="">
             <a:extLst xmlns:a="http://schemas.openxmlformats.org/drawingml/2006/main">
               <a:ext uri="{FF2B5EF4-FFF2-40B4-BE49-F238E27FC236}">
-                <a16:creationId xmlns:a16="http://schemas.microsoft.com/office/drawing/2014/main" id="{F32B4C1D-02A3-4683-B33C-AE53816527CE}"/>
+                <a16:creationId xmlns:a16="http://schemas.microsoft.com/office/drawing/2014/main" id="{1E52F16F-0B50-4CC4-B5A1-5E6E896F8BAD}"/>
               </a:ext>
             </a:extLst>
           </p:cNvPr>
@@ -4894,7 +4894,7 @@
           <p:cNvPr id="21" name="">
             <a:extLst xmlns:a="http://schemas.openxmlformats.org/drawingml/2006/main">
               <a:ext uri="{FF2B5EF4-FFF2-40B4-BE49-F238E27FC236}">
-                <a16:creationId xmlns:a16="http://schemas.microsoft.com/office/drawing/2014/main" id="{CBE5EFB3-EE0C-4058-A7C6-F2F7D9AD25EC}"/>
+                <a16:creationId xmlns:a16="http://schemas.microsoft.com/office/drawing/2014/main" id="{951F7856-1542-43FE-9E38-C8B2EB36A491}"/>
               </a:ext>
             </a:extLst>
           </p:cNvPr>
@@ -4944,7 +4944,7 @@
           <p:cNvPr id="22" name="">
             <a:extLst xmlns:a="http://schemas.openxmlformats.org/drawingml/2006/main">
               <a:ext uri="{FF2B5EF4-FFF2-40B4-BE49-F238E27FC236}">
-                <a16:creationId xmlns:a16="http://schemas.microsoft.com/office/drawing/2014/main" id="{D25D699C-52B7-4B0A-BAB9-B0A5CD902748}"/>
+                <a16:creationId xmlns:a16="http://schemas.microsoft.com/office/drawing/2014/main" id="{63889E1B-E5A0-4F23-85BE-905BE01004ED}"/>
               </a:ext>
             </a:extLst>
           </p:cNvPr>
@@ -4979,7 +4979,7 @@
           <p:cNvPr id="23" name="">
             <a:extLst xmlns:a="http://schemas.openxmlformats.org/drawingml/2006/main">
               <a:ext uri="{FF2B5EF4-FFF2-40B4-BE49-F238E27FC236}">
-                <a16:creationId xmlns:a16="http://schemas.microsoft.com/office/drawing/2014/main" id="{94D50774-64CF-4228-8500-20A380EF8EC0}"/>
+                <a16:creationId xmlns:a16="http://schemas.microsoft.com/office/drawing/2014/main" id="{AD68BEE7-FDE6-47A8-9C4E-0AFD83EAEF30}"/>
               </a:ext>
             </a:extLst>
           </p:cNvPr>
@@ -5029,7 +5029,7 @@
           <p:cNvPr id="24" name="">
             <a:extLst xmlns:a="http://schemas.openxmlformats.org/drawingml/2006/main">
               <a:ext uri="{FF2B5EF4-FFF2-40B4-BE49-F238E27FC236}">
-                <a16:creationId xmlns:a16="http://schemas.microsoft.com/office/drawing/2014/main" id="{94065F4F-411E-4623-8922-7C8DE483CF3B}"/>
+                <a16:creationId xmlns:a16="http://schemas.microsoft.com/office/drawing/2014/main" id="{8972BB09-19AD-4616-A1C1-0C71BF6873CA}"/>
               </a:ext>
             </a:extLst>
           </p:cNvPr>
@@ -5079,7 +5079,7 @@
           <p:cNvPr id="25" name="">
             <a:extLst xmlns:a="http://schemas.openxmlformats.org/drawingml/2006/main">
               <a:ext uri="{FF2B5EF4-FFF2-40B4-BE49-F238E27FC236}">
-                <a16:creationId xmlns:a16="http://schemas.microsoft.com/office/drawing/2014/main" id="{423F398F-3919-4D49-80A0-FFCBC0783096}"/>
+                <a16:creationId xmlns:a16="http://schemas.microsoft.com/office/drawing/2014/main" id="{4A218EB2-8918-457E-8930-ED6111AE5399}"/>
               </a:ext>
             </a:extLst>
           </p:cNvPr>
@@ -5129,7 +5129,7 @@
           <p:cNvPr id="26" name="">
             <a:extLst xmlns:a="http://schemas.openxmlformats.org/drawingml/2006/main">
               <a:ext uri="{FF2B5EF4-FFF2-40B4-BE49-F238E27FC236}">
-                <a16:creationId xmlns:a16="http://schemas.microsoft.com/office/drawing/2014/main" id="{9CB8A09B-B7D0-4544-8304-506AFD00F09E}"/>
+                <a16:creationId xmlns:a16="http://schemas.microsoft.com/office/drawing/2014/main" id="{B0AE04BC-4E3A-40F7-A0F2-ECDE9AC535F5}"/>
               </a:ext>
             </a:extLst>
           </p:cNvPr>
@@ -5177,7 +5177,7 @@
     </p:spTree>
     <p:extLst>
       <p:ext uri="{BB962C8B-B14F-4D97-AF65-F5344CB8AC3E}">
-        <p14:creationId xmlns:p14="http://schemas.microsoft.com/office/powerpoint/2010/main" val="1006525070"/>
+        <p14:creationId xmlns:p14="http://schemas.microsoft.com/office/powerpoint/2010/main" val="1508190767"/>
       </p:ext>
     </p:extLst>
   </p:cSld>
@@ -5208,7 +5208,7 @@
           <p:cNvPr id="14" name="">
             <a:extLst xmlns:a="http://schemas.openxmlformats.org/drawingml/2006/main">
               <a:ext uri="{FF2B5EF4-FFF2-40B4-BE49-F238E27FC236}">
-                <a16:creationId xmlns:a16="http://schemas.microsoft.com/office/drawing/2014/main" id="{456C125E-CFA9-4E94-9033-E1275FD00BAA}"/>
+                <a16:creationId xmlns:a16="http://schemas.microsoft.com/office/drawing/2014/main" id="{122AE74C-4678-43CB-8323-7BC334708732}"/>
               </a:ext>
             </a:extLst>
           </p:cNvPr>
@@ -5258,7 +5258,7 @@
           <p:cNvPr id="2" name="">
             <a:extLst xmlns:a="http://schemas.openxmlformats.org/drawingml/2006/main">
               <a:ext uri="{FF2B5EF4-FFF2-40B4-BE49-F238E27FC236}">
-                <a16:creationId xmlns:a16="http://schemas.microsoft.com/office/drawing/2014/main" id="{8E7A96EE-0F75-4FD1-8056-A16F52052304}"/>
+                <a16:creationId xmlns:a16="http://schemas.microsoft.com/office/drawing/2014/main" id="{8CF3F7CC-4EC7-44DC-96F4-C0191E94391C}"/>
               </a:ext>
             </a:extLst>
           </p:cNvPr>
@@ -5308,7 +5308,7 @@
           <p:cNvPr id="3" name="">
             <a:extLst xmlns:a="http://schemas.openxmlformats.org/drawingml/2006/main">
               <a:ext uri="{FF2B5EF4-FFF2-40B4-BE49-F238E27FC236}">
-                <a16:creationId xmlns:a16="http://schemas.microsoft.com/office/drawing/2014/main" id="{F3B7F689-AA0F-4FCE-B8C1-7A6B4384B8DB}"/>
+                <a16:creationId xmlns:a16="http://schemas.microsoft.com/office/drawing/2014/main" id="{EC998F15-526A-4726-AFA3-123506ABA380}"/>
               </a:ext>
             </a:extLst>
           </p:cNvPr>
@@ -5347,7 +5347,7 @@
           <p:nvPr/>
         </p:nvPicPr>
         <p:blipFill>
-          <a:blip xmlns:r="http://schemas.openxmlformats.org/officeDocument/2006/relationships" xmlns:a="http://schemas.openxmlformats.org/drawingml/2006/main" r:embed="R22d98f0133724c22"/>
+          <a:blip xmlns:r="http://schemas.openxmlformats.org/officeDocument/2006/relationships" xmlns:a="http://schemas.openxmlformats.org/drawingml/2006/main" r:embed="R247ae4f82fac4aca"/>
           <a:stretch xmlns:a="http://schemas.openxmlformats.org/drawingml/2006/main"/>
         </p:blipFill>
         <p:spPr>
@@ -5365,7 +5365,7 @@
           <p:cNvPr id="5" name="">
             <a:extLst xmlns:a="http://schemas.openxmlformats.org/drawingml/2006/main">
               <a:ext uri="{FF2B5EF4-FFF2-40B4-BE49-F238E27FC236}">
-                <a16:creationId xmlns:a16="http://schemas.microsoft.com/office/drawing/2014/main" id="{20F4A1EB-FCFF-4142-826D-425B3E83E44F}"/>
+                <a16:creationId xmlns:a16="http://schemas.microsoft.com/office/drawing/2014/main" id="{605F64C3-AD29-4108-90C6-7C9C941134C7}"/>
               </a:ext>
             </a:extLst>
           </p:cNvPr>
@@ -5400,7 +5400,7 @@
           <p:cNvPr id="6" name="">
             <a:extLst xmlns:a="http://schemas.openxmlformats.org/drawingml/2006/main">
               <a:ext uri="{FF2B5EF4-FFF2-40B4-BE49-F238E27FC236}">
-                <a16:creationId xmlns:a16="http://schemas.microsoft.com/office/drawing/2014/main" id="{B50322F1-E9E0-4F53-8B6A-956EE8493103}"/>
+                <a16:creationId xmlns:a16="http://schemas.microsoft.com/office/drawing/2014/main" id="{AE13499B-7634-4BC5-95F3-91AC003DD403}"/>
               </a:ext>
             </a:extLst>
           </p:cNvPr>
@@ -5450,7 +5450,7 @@
           <p:cNvPr id="7" name="">
             <a:extLst xmlns:a="http://schemas.openxmlformats.org/drawingml/2006/main">
               <a:ext uri="{FF2B5EF4-FFF2-40B4-BE49-F238E27FC236}">
-                <a16:creationId xmlns:a16="http://schemas.microsoft.com/office/drawing/2014/main" id="{F037026E-8FEE-4C7E-A872-20694153C51E}"/>
+                <a16:creationId xmlns:a16="http://schemas.microsoft.com/office/drawing/2014/main" id="{F2593916-1B68-4F5D-A928-0577B3AE7131}"/>
               </a:ext>
             </a:extLst>
           </p:cNvPr>
@@ -5500,7 +5500,7 @@
           <p:cNvPr id="8" name="">
             <a:extLst xmlns:a="http://schemas.openxmlformats.org/drawingml/2006/main">
               <a:ext uri="{FF2B5EF4-FFF2-40B4-BE49-F238E27FC236}">
-                <a16:creationId xmlns:a16="http://schemas.microsoft.com/office/drawing/2014/main" id="{93B05141-627F-4798-93BF-18118E8A077C}"/>
+                <a16:creationId xmlns:a16="http://schemas.microsoft.com/office/drawing/2014/main" id="{31E3E785-3763-4100-962A-63E66851FAFB}"/>
               </a:ext>
             </a:extLst>
           </p:cNvPr>
@@ -5535,7 +5535,7 @@
           <p:cNvPr id="9" name="">
             <a:extLst xmlns:a="http://schemas.openxmlformats.org/drawingml/2006/main">
               <a:ext uri="{FF2B5EF4-FFF2-40B4-BE49-F238E27FC236}">
-                <a16:creationId xmlns:a16="http://schemas.microsoft.com/office/drawing/2014/main" id="{1F2B60C9-1D2D-4165-98F6-7F26DC785F8B}"/>
+                <a16:creationId xmlns:a16="http://schemas.microsoft.com/office/drawing/2014/main" id="{16133E4F-5277-4781-A76E-3A4F5F559784}"/>
               </a:ext>
             </a:extLst>
           </p:cNvPr>
@@ -5585,7 +5585,7 @@
           <p:cNvPr id="10" name="">
             <a:extLst xmlns:a="http://schemas.openxmlformats.org/drawingml/2006/main">
               <a:ext uri="{FF2B5EF4-FFF2-40B4-BE49-F238E27FC236}">
-                <a16:creationId xmlns:a16="http://schemas.microsoft.com/office/drawing/2014/main" id="{1247DCD4-AF7B-4F5E-8890-DA45AE548019}"/>
+                <a16:creationId xmlns:a16="http://schemas.microsoft.com/office/drawing/2014/main" id="{DBBC22DE-CEFC-4E54-995E-A302B092A06A}"/>
               </a:ext>
             </a:extLst>
           </p:cNvPr>
@@ -5635,7 +5635,7 @@
           <p:cNvPr id="11" name="">
             <a:extLst xmlns:a="http://schemas.openxmlformats.org/drawingml/2006/main">
               <a:ext uri="{FF2B5EF4-FFF2-40B4-BE49-F238E27FC236}">
-                <a16:creationId xmlns:a16="http://schemas.microsoft.com/office/drawing/2014/main" id="{98313591-67C0-4FE4-9445-5939A47FCE4E}"/>
+                <a16:creationId xmlns:a16="http://schemas.microsoft.com/office/drawing/2014/main" id="{CFCF7DCC-D1B4-4A5A-BDD4-0CD47FB5273E}"/>
               </a:ext>
             </a:extLst>
           </p:cNvPr>
@@ -5685,7 +5685,7 @@
           <p:cNvPr id="12" name="">
             <a:extLst xmlns:a="http://schemas.openxmlformats.org/drawingml/2006/main">
               <a:ext uri="{FF2B5EF4-FFF2-40B4-BE49-F238E27FC236}">
-                <a16:creationId xmlns:a16="http://schemas.microsoft.com/office/drawing/2014/main" id="{E4692B7C-5587-4231-AB47-847B62C12152}"/>
+                <a16:creationId xmlns:a16="http://schemas.microsoft.com/office/drawing/2014/main" id="{A087F5A8-1F15-480C-A956-CCE384A53627}"/>
               </a:ext>
             </a:extLst>
           </p:cNvPr>
@@ -5735,7 +5735,7 @@
           <p:cNvPr id="13" name="">
             <a:extLst xmlns:a="http://schemas.openxmlformats.org/drawingml/2006/main">
               <a:ext uri="{FF2B5EF4-FFF2-40B4-BE49-F238E27FC236}">
-                <a16:creationId xmlns:a16="http://schemas.microsoft.com/office/drawing/2014/main" id="{4B2933B7-7A7D-47B1-A67E-FEFD860A2404}"/>
+                <a16:creationId xmlns:a16="http://schemas.microsoft.com/office/drawing/2014/main" id="{01127284-94D0-4D96-927D-0537BEE953AD}"/>
               </a:ext>
             </a:extLst>
           </p:cNvPr>
@@ -5783,7 +5783,7 @@
     </p:spTree>
     <p:extLst>
       <p:ext uri="{BB962C8B-B14F-4D97-AF65-F5344CB8AC3E}">
-        <p14:creationId xmlns:p14="http://schemas.microsoft.com/office/powerpoint/2010/main" val="1158222287"/>
+        <p14:creationId xmlns:p14="http://schemas.microsoft.com/office/powerpoint/2010/main" val="2004430829"/>
       </p:ext>
     </p:extLst>
   </p:cSld>
@@ -5811,10 +5811,10 @@
       </p:grpSpPr>
       <p:sp>
         <p:nvSpPr>
-          <p:cNvPr id="44" name="">
-            <a:extLst xmlns:a="http://schemas.openxmlformats.org/drawingml/2006/main">
-              <a:ext uri="{FF2B5EF4-FFF2-40B4-BE49-F238E27FC236}">
-                <a16:creationId xmlns:a16="http://schemas.microsoft.com/office/drawing/2014/main" id="{5D76668C-DE85-4AAE-A4B7-F895E830E27E}"/>
+          <p:cNvPr id="14" name="">
+            <a:extLst xmlns:a="http://schemas.openxmlformats.org/drawingml/2006/main">
+              <a:ext uri="{FF2B5EF4-FFF2-40B4-BE49-F238E27FC236}">
+                <a16:creationId xmlns:a16="http://schemas.microsoft.com/office/drawing/2014/main" id="{8BC2481D-72DC-4C97-AEFE-67C3D9CDE632}"/>
               </a:ext>
             </a:extLst>
           </p:cNvPr>
@@ -5854,7 +5854,7 @@
                   <a:srgbClr val="0F172A"/>
                 </a:solidFill>
               </a:rPr>
-              <a:t>The prototype runs real prompts through SGLang</a:t>
+              <a:t>Experiment Testbed Setup</a:t>
             </a:r>
           </a:p>
         </p:txBody>
@@ -5864,7 +5864,7 @@
           <p:cNvPr id="2" name="">
             <a:extLst xmlns:a="http://schemas.openxmlformats.org/drawingml/2006/main">
               <a:ext uri="{FF2B5EF4-FFF2-40B4-BE49-F238E27FC236}">
-                <a16:creationId xmlns:a16="http://schemas.microsoft.com/office/drawing/2014/main" id="{01B7B60F-19C1-4F63-BD30-2F158CBF7BB9}"/>
+                <a16:creationId xmlns:a16="http://schemas.microsoft.com/office/drawing/2014/main" id="{41283567-321F-4957-B5B9-B606A18400D4}"/>
               </a:ext>
             </a:extLst>
           </p:cNvPr>
@@ -5904,7 +5904,7 @@
                   <a:srgbClr val="64748B"/>
                 </a:solidFill>
               </a:rPr>
-              <a:t>Concrete setup behind the charts: traffic source, serving stack, one GPU, model, and host-side KV cache.</a:t>
+              <a:t>Real software-engineering traces flow through DeepAgents into SGLang, where we observe tool gaps, replay requests, and KV behavior.</a:t>
             </a:r>
           </a:p>
         </p:txBody>
@@ -5914,175 +5914,23 @@
           <p:cNvPr id="3" name="">
             <a:extLst xmlns:a="http://schemas.openxmlformats.org/drawingml/2006/main">
               <a:ext uri="{FF2B5EF4-FFF2-40B4-BE49-F238E27FC236}">
-                <a16:creationId xmlns:a16="http://schemas.microsoft.com/office/drawing/2014/main" id="{B3C1B354-4E7D-46C1-BCDE-42E08F8C4E20}"/>
-              </a:ext>
-            </a:extLst>
-          </p:cNvPr>
-          <p:cNvSpPr>
-            <a:spLocks xmlns:a="http://schemas.openxmlformats.org/drawingml/2006/main" noGrp="1"/>
-          </p:cNvSpPr>
-          <p:nvPr/>
-        </p:nvSpPr>
-        <p:spPr>
-          <a:xfrm xmlns:a="http://schemas.openxmlformats.org/drawingml/2006/main">
-            <a:off x="514350" y="1752600"/>
-            <a:ext cx="1695450" cy="914400"/>
+                <a16:creationId xmlns:a16="http://schemas.microsoft.com/office/drawing/2014/main" id="{715E521E-542F-4291-A220-F1989FA38635}"/>
+              </a:ext>
+            </a:extLst>
+          </p:cNvPr>
+          <p:cNvSpPr>
+            <a:spLocks xmlns:a="http://schemas.openxmlformats.org/drawingml/2006/main" noGrp="1"/>
+          </p:cNvSpPr>
+          <p:nvPr/>
+        </p:nvSpPr>
+        <p:spPr>
+          <a:xfrm xmlns:a="http://schemas.openxmlformats.org/drawingml/2006/main">
+            <a:off x="1504950" y="2247900"/>
+            <a:ext cx="2095500" cy="1123950"/>
           </a:xfrm>
           <a:prstGeom xmlns:a="http://schemas.openxmlformats.org/drawingml/2006/main" prst="roundRect">
             <a:avLst>
-              <a:gd name="adj" fmla="val 6250"/>
-            </a:avLst>
-          </a:prstGeom>
-          <a:solidFill xmlns:a="http://schemas.openxmlformats.org/drawingml/2006/main">
-            <a:srgbClr val="F8FAFC"/>
-          </a:solidFill>
-          <a:ln xmlns:a="http://schemas.openxmlformats.org/drawingml/2006/main" w="9525">
-            <a:solidFill>
-              <a:srgbClr val="CBD5E1"/>
-            </a:solidFill>
-            <a:prstDash val="solid"/>
-          </a:ln>
-        </p:spPr>
-      </p:sp>
-      <p:sp>
-        <p:nvSpPr>
-          <p:cNvPr id="4" name="">
-            <a:extLst xmlns:a="http://schemas.openxmlformats.org/drawingml/2006/main">
-              <a:ext uri="{FF2B5EF4-FFF2-40B4-BE49-F238E27FC236}">
-                <a16:creationId xmlns:a16="http://schemas.microsoft.com/office/drawing/2014/main" id="{D6A78837-70DE-4325-A3D4-5FD759CEB171}"/>
-              </a:ext>
-            </a:extLst>
-          </p:cNvPr>
-          <p:cNvSpPr>
-            <a:spLocks xmlns:a="http://schemas.openxmlformats.org/drawingml/2006/main" noGrp="1"/>
-          </p:cNvSpPr>
-          <p:nvPr/>
-        </p:nvSpPr>
-        <p:spPr>
-          <a:xfrm xmlns:a="http://schemas.openxmlformats.org/drawingml/2006/main">
-            <a:off x="647700" y="1895475"/>
-            <a:ext cx="1428750" cy="723900"/>
-          </a:xfrm>
-          <a:prstGeom xmlns:a="http://schemas.openxmlformats.org/drawingml/2006/main" prst="rect">
-            <a:avLst/>
-          </a:prstGeom>
-          <a:noFill xmlns:a="http://schemas.openxmlformats.org/drawingml/2006/main"/>
-          <a:ln xmlns:a="http://schemas.openxmlformats.org/drawingml/2006/main" w="0">
-            <a:noFill/>
-            <a:prstDash val="solid"/>
-          </a:ln>
-        </p:spPr>
-        <p:txBody>
-          <a:bodyPr xmlns:a="http://schemas.openxmlformats.org/drawingml/2006/main" anchor="ctr"/>
-          <a:lstStyle xmlns:a="http://schemas.openxmlformats.org/drawingml/2006/main"/>
-          <a:p xmlns:a="http://schemas.openxmlformats.org/drawingml/2006/main">
-            <a:pPr algn="ctr">
-              <a:defRPr sz="1500" b="1">
-                <a:solidFill>
-                  <a:srgbClr val="0F172A"/>
-                </a:solidFill>
-              </a:defRPr>
-            </a:pPr>
-            <a:r>
-              <a:rPr sz="1500" b="1">
-                <a:solidFill>
-                  <a:srgbClr val="0F172A"/>
-                </a:solidFill>
-              </a:rPr>
-              <a:t>Synthetic</a:t>
-            </a:r>
-          </a:p>
-          <a:p xmlns:a="http://schemas.openxmlformats.org/drawingml/2006/main">
-            <a:pPr algn="ctr">
-              <a:defRPr sz="1500" b="1">
-                <a:solidFill>
-                  <a:srgbClr val="0F172A"/>
-                </a:solidFill>
-              </a:defRPr>
-            </a:pPr>
-            <a:r>
-              <a:rPr sz="1500" b="1">
-                <a:solidFill>
-                  <a:srgbClr val="0F172A"/>
-                </a:solidFill>
-              </a:rPr>
-              <a:t>request generator</a:t>
-            </a:r>
-          </a:p>
-        </p:txBody>
-      </p:sp>
-      <p:sp>
-        <p:nvSpPr>
-          <p:cNvPr id="5" name="">
-            <a:extLst xmlns:a="http://schemas.openxmlformats.org/drawingml/2006/main">
-              <a:ext uri="{FF2B5EF4-FFF2-40B4-BE49-F238E27FC236}">
-                <a16:creationId xmlns:a16="http://schemas.microsoft.com/office/drawing/2014/main" id="{CB275716-2FE3-49CB-85B9-6CBBB1F723F0}"/>
-              </a:ext>
-            </a:extLst>
-          </p:cNvPr>
-          <p:cNvSpPr>
-            <a:spLocks xmlns:a="http://schemas.openxmlformats.org/drawingml/2006/main" noGrp="1"/>
-          </p:cNvSpPr>
-          <p:nvPr/>
-        </p:nvSpPr>
-        <p:spPr>
-          <a:xfrm xmlns:a="http://schemas.openxmlformats.org/drawingml/2006/main">
-            <a:off x="2286000" y="2038350"/>
-            <a:ext cx="381000" cy="342900"/>
-          </a:xfrm>
-          <a:prstGeom xmlns:a="http://schemas.openxmlformats.org/drawingml/2006/main" prst="rect">
-            <a:avLst/>
-          </a:prstGeom>
-          <a:noFill xmlns:a="http://schemas.openxmlformats.org/drawingml/2006/main"/>
-          <a:ln xmlns:a="http://schemas.openxmlformats.org/drawingml/2006/main" w="0">
-            <a:noFill/>
-            <a:prstDash val="solid"/>
-          </a:ln>
-        </p:spPr>
-        <p:txBody>
-          <a:bodyPr xmlns:a="http://schemas.openxmlformats.org/drawingml/2006/main" anchor="t"/>
-          <a:lstStyle xmlns:a="http://schemas.openxmlformats.org/drawingml/2006/main"/>
-          <a:p xmlns:a="http://schemas.openxmlformats.org/drawingml/2006/main">
-            <a:pPr algn="ctr">
-              <a:defRPr sz="2250" b="1">
-                <a:solidFill>
-                  <a:srgbClr val="64748B"/>
-                </a:solidFill>
-              </a:defRPr>
-            </a:pPr>
-            <a:r>
-              <a:rPr sz="2250" b="1">
-                <a:solidFill>
-                  <a:srgbClr val="64748B"/>
-                </a:solidFill>
-              </a:rPr>
-              <a:t>→</a:t>
-            </a:r>
-          </a:p>
-        </p:txBody>
-      </p:sp>
-      <p:sp>
-        <p:nvSpPr>
-          <p:cNvPr id="6" name="">
-            <a:extLst xmlns:a="http://schemas.openxmlformats.org/drawingml/2006/main">
-              <a:ext uri="{FF2B5EF4-FFF2-40B4-BE49-F238E27FC236}">
-                <a16:creationId xmlns:a16="http://schemas.microsoft.com/office/drawing/2014/main" id="{DF8AEE1B-08EA-4B7E-AB42-72A215EB5BD4}"/>
-              </a:ext>
-            </a:extLst>
-          </p:cNvPr>
-          <p:cNvSpPr>
-            <a:spLocks xmlns:a="http://schemas.openxmlformats.org/drawingml/2006/main" noGrp="1"/>
-          </p:cNvSpPr>
-          <p:nvPr/>
-        </p:nvSpPr>
-        <p:spPr>
-          <a:xfrm xmlns:a="http://schemas.openxmlformats.org/drawingml/2006/main">
-            <a:off x="2724150" y="1752600"/>
-            <a:ext cx="1695450" cy="914400"/>
-          </a:xfrm>
-          <a:prstGeom xmlns:a="http://schemas.openxmlformats.org/drawingml/2006/main" prst="roundRect">
-            <a:avLst>
-              <a:gd name="adj" fmla="val 6250"/>
+              <a:gd name="adj" fmla="val 5085"/>
             </a:avLst>
           </a:prstGeom>
           <a:solidFill xmlns:a="http://schemas.openxmlformats.org/drawingml/2006/main">
@@ -6098,22 +5946,22 @@
       </p:sp>
       <p:sp>
         <p:nvSpPr>
-          <p:cNvPr id="7" name="">
-            <a:extLst xmlns:a="http://schemas.openxmlformats.org/drawingml/2006/main">
-              <a:ext uri="{FF2B5EF4-FFF2-40B4-BE49-F238E27FC236}">
-                <a16:creationId xmlns:a16="http://schemas.microsoft.com/office/drawing/2014/main" id="{2FA1B7DC-6C25-44E4-A135-A484F0AFDED2}"/>
-              </a:ext>
-            </a:extLst>
-          </p:cNvPr>
-          <p:cNvSpPr>
-            <a:spLocks xmlns:a="http://schemas.openxmlformats.org/drawingml/2006/main" noGrp="1"/>
-          </p:cNvSpPr>
-          <p:nvPr/>
-        </p:nvSpPr>
-        <p:spPr>
-          <a:xfrm xmlns:a="http://schemas.openxmlformats.org/drawingml/2006/main">
-            <a:off x="2857500" y="1895475"/>
-            <a:ext cx="1428750" cy="723900"/>
+          <p:cNvPr id="4" name="">
+            <a:extLst xmlns:a="http://schemas.openxmlformats.org/drawingml/2006/main">
+              <a:ext uri="{FF2B5EF4-FFF2-40B4-BE49-F238E27FC236}">
+                <a16:creationId xmlns:a16="http://schemas.microsoft.com/office/drawing/2014/main" id="{D4760415-2DAE-495A-8464-6A96C5BF371B}"/>
+              </a:ext>
+            </a:extLst>
+          </p:cNvPr>
+          <p:cNvSpPr>
+            <a:spLocks xmlns:a="http://schemas.openxmlformats.org/drawingml/2006/main" noGrp="1"/>
+          </p:cNvSpPr>
+          <p:nvPr/>
+        </p:nvSpPr>
+        <p:spPr>
+          <a:xfrm xmlns:a="http://schemas.openxmlformats.org/drawingml/2006/main">
+            <a:off x="1638300" y="2390775"/>
+            <a:ext cx="1828800" cy="933450"/>
           </a:xfrm>
           <a:prstGeom xmlns:a="http://schemas.openxmlformats.org/drawingml/2006/main" prst="rect">
             <a:avLst/>
@@ -6141,7 +5989,7 @@
                   <a:srgbClr val="0F172A"/>
                 </a:solidFill>
               </a:rPr>
-              <a:t>SWE-bench /</a:t>
+              <a:t>SWE-bench</a:t>
             </a:r>
           </a:p>
           <a:p xmlns:a="http://schemas.openxmlformats.org/drawingml/2006/main">
@@ -6158,29 +6006,29 @@
                   <a:srgbClr val="0F172A"/>
                 </a:solidFill>
               </a:rPr>
-              <a:t>DeepAgents traces</a:t>
-            </a:r>
-          </a:p>
-        </p:txBody>
-      </p:sp>
-      <p:sp>
-        <p:nvSpPr>
-          <p:cNvPr id="8" name="">
-            <a:extLst xmlns:a="http://schemas.openxmlformats.org/drawingml/2006/main">
-              <a:ext uri="{FF2B5EF4-FFF2-40B4-BE49-F238E27FC236}">
-                <a16:creationId xmlns:a16="http://schemas.microsoft.com/office/drawing/2014/main" id="{711EF777-17A7-452B-AB71-A68556732159}"/>
-              </a:ext>
-            </a:extLst>
-          </p:cNvPr>
-          <p:cNvSpPr>
-            <a:spLocks xmlns:a="http://schemas.openxmlformats.org/drawingml/2006/main" noGrp="1"/>
-          </p:cNvSpPr>
-          <p:nvPr/>
-        </p:nvSpPr>
-        <p:spPr>
-          <a:xfrm xmlns:a="http://schemas.openxmlformats.org/drawingml/2006/main">
-            <a:off x="4495800" y="2038350"/>
-            <a:ext cx="381000" cy="342900"/>
+              <a:t>traces</a:t>
+            </a:r>
+          </a:p>
+        </p:txBody>
+      </p:sp>
+      <p:sp>
+        <p:nvSpPr>
+          <p:cNvPr id="5" name="">
+            <a:extLst xmlns:a="http://schemas.openxmlformats.org/drawingml/2006/main">
+              <a:ext uri="{FF2B5EF4-FFF2-40B4-BE49-F238E27FC236}">
+                <a16:creationId xmlns:a16="http://schemas.microsoft.com/office/drawing/2014/main" id="{A0852961-F3FA-4C50-BDA5-EC0F67B93F89}"/>
+              </a:ext>
+            </a:extLst>
+          </p:cNvPr>
+          <p:cNvSpPr>
+            <a:spLocks xmlns:a="http://schemas.openxmlformats.org/drawingml/2006/main" noGrp="1"/>
+          </p:cNvSpPr>
+          <p:nvPr/>
+        </p:nvSpPr>
+        <p:spPr>
+          <a:xfrm xmlns:a="http://schemas.openxmlformats.org/drawingml/2006/main">
+            <a:off x="3848100" y="2609850"/>
+            <a:ext cx="742950" cy="419100"/>
           </a:xfrm>
           <a:prstGeom xmlns:a="http://schemas.openxmlformats.org/drawingml/2006/main" prst="rect">
             <a:avLst/>
@@ -6196,14 +6044,14 @@
           <a:lstStyle xmlns:a="http://schemas.openxmlformats.org/drawingml/2006/main"/>
           <a:p xmlns:a="http://schemas.openxmlformats.org/drawingml/2006/main">
             <a:pPr algn="ctr">
-              <a:defRPr sz="2250" b="1">
+              <a:defRPr sz="2850" b="1">
                 <a:solidFill>
                   <a:srgbClr val="64748B"/>
                 </a:solidFill>
               </a:defRPr>
             </a:pPr>
             <a:r>
-              <a:rPr sz="2250" b="1">
+              <a:rPr sz="2850" b="1">
                 <a:solidFill>
                   <a:srgbClr val="64748B"/>
                 </a:solidFill>
@@ -6215,26 +6063,26 @@
       </p:sp>
       <p:sp>
         <p:nvSpPr>
-          <p:cNvPr id="9" name="">
-            <a:extLst xmlns:a="http://schemas.openxmlformats.org/drawingml/2006/main">
-              <a:ext uri="{FF2B5EF4-FFF2-40B4-BE49-F238E27FC236}">
-                <a16:creationId xmlns:a16="http://schemas.microsoft.com/office/drawing/2014/main" id="{AF8C8EF3-2879-4C48-8B31-3B98314E3E8B}"/>
-              </a:ext>
-            </a:extLst>
-          </p:cNvPr>
-          <p:cNvSpPr>
-            <a:spLocks xmlns:a="http://schemas.openxmlformats.org/drawingml/2006/main" noGrp="1"/>
-          </p:cNvSpPr>
-          <p:nvPr/>
-        </p:nvSpPr>
-        <p:spPr>
-          <a:xfrm xmlns:a="http://schemas.openxmlformats.org/drawingml/2006/main">
-            <a:off x="4933950" y="1752600"/>
-            <a:ext cx="1695450" cy="914400"/>
+          <p:cNvPr id="6" name="">
+            <a:extLst xmlns:a="http://schemas.openxmlformats.org/drawingml/2006/main">
+              <a:ext uri="{FF2B5EF4-FFF2-40B4-BE49-F238E27FC236}">
+                <a16:creationId xmlns:a16="http://schemas.microsoft.com/office/drawing/2014/main" id="{01F13798-9667-47AF-B21D-FA7F7C610151}"/>
+              </a:ext>
+            </a:extLst>
+          </p:cNvPr>
+          <p:cNvSpPr>
+            <a:spLocks xmlns:a="http://schemas.openxmlformats.org/drawingml/2006/main" noGrp="1"/>
+          </p:cNvSpPr>
+          <p:nvPr/>
+        </p:nvSpPr>
+        <p:spPr>
+          <a:xfrm xmlns:a="http://schemas.openxmlformats.org/drawingml/2006/main">
+            <a:off x="5048250" y="2247900"/>
+            <a:ext cx="2095500" cy="1123950"/>
           </a:xfrm>
           <a:prstGeom xmlns:a="http://schemas.openxmlformats.org/drawingml/2006/main" prst="roundRect">
             <a:avLst>
-              <a:gd name="adj" fmla="val 6250"/>
+              <a:gd name="adj" fmla="val 5085"/>
             </a:avLst>
           </a:prstGeom>
           <a:solidFill xmlns:a="http://schemas.openxmlformats.org/drawingml/2006/main">
@@ -6250,22 +6098,22 @@
       </p:sp>
       <p:sp>
         <p:nvSpPr>
-          <p:cNvPr id="10" name="">
-            <a:extLst xmlns:a="http://schemas.openxmlformats.org/drawingml/2006/main">
-              <a:ext uri="{FF2B5EF4-FFF2-40B4-BE49-F238E27FC236}">
-                <a16:creationId xmlns:a16="http://schemas.microsoft.com/office/drawing/2014/main" id="{91A913B0-E03B-462C-8F0E-D182D6CC2055}"/>
-              </a:ext>
-            </a:extLst>
-          </p:cNvPr>
-          <p:cNvSpPr>
-            <a:spLocks xmlns:a="http://schemas.openxmlformats.org/drawingml/2006/main" noGrp="1"/>
-          </p:cNvSpPr>
-          <p:nvPr/>
-        </p:nvSpPr>
-        <p:spPr>
-          <a:xfrm xmlns:a="http://schemas.openxmlformats.org/drawingml/2006/main">
-            <a:off x="5067300" y="1895475"/>
-            <a:ext cx="1428750" cy="723900"/>
+          <p:cNvPr id="7" name="">
+            <a:extLst xmlns:a="http://schemas.openxmlformats.org/drawingml/2006/main">
+              <a:ext uri="{FF2B5EF4-FFF2-40B4-BE49-F238E27FC236}">
+                <a16:creationId xmlns:a16="http://schemas.microsoft.com/office/drawing/2014/main" id="{A6A063CC-0EAF-4FA0-8132-F0D892463971}"/>
+              </a:ext>
+            </a:extLst>
+          </p:cNvPr>
+          <p:cNvSpPr>
+            <a:spLocks xmlns:a="http://schemas.openxmlformats.org/drawingml/2006/main" noGrp="1"/>
+          </p:cNvSpPr>
+          <p:nvPr/>
+        </p:nvSpPr>
+        <p:spPr>
+          <a:xfrm xmlns:a="http://schemas.openxmlformats.org/drawingml/2006/main">
+            <a:off x="5181600" y="2390775"/>
+            <a:ext cx="1828800" cy="933450"/>
           </a:xfrm>
           <a:prstGeom xmlns:a="http://schemas.openxmlformats.org/drawingml/2006/main" prst="rect">
             <a:avLst/>
@@ -6293,69 +6141,52 @@
                   <a:srgbClr val="0F172A"/>
                 </a:solidFill>
               </a:rPr>
-              <a:t>SGLang</a:t>
-            </a:r>
-          </a:p>
+              <a:t>DeepAgents</a:t>
+            </a:r>
+          </a:p>
+        </p:txBody>
+      </p:sp>
+      <p:sp>
+        <p:nvSpPr>
+          <p:cNvPr id="8" name="">
+            <a:extLst xmlns:a="http://schemas.openxmlformats.org/drawingml/2006/main">
+              <a:ext uri="{FF2B5EF4-FFF2-40B4-BE49-F238E27FC236}">
+                <a16:creationId xmlns:a16="http://schemas.microsoft.com/office/drawing/2014/main" id="{50D597CD-399B-4695-8D67-E41962D8C628}"/>
+              </a:ext>
+            </a:extLst>
+          </p:cNvPr>
+          <p:cNvSpPr>
+            <a:spLocks xmlns:a="http://schemas.openxmlformats.org/drawingml/2006/main" noGrp="1"/>
+          </p:cNvSpPr>
+          <p:nvPr/>
+        </p:nvSpPr>
+        <p:spPr>
+          <a:xfrm xmlns:a="http://schemas.openxmlformats.org/drawingml/2006/main">
+            <a:off x="7391400" y="2609850"/>
+            <a:ext cx="742950" cy="419100"/>
+          </a:xfrm>
+          <a:prstGeom xmlns:a="http://schemas.openxmlformats.org/drawingml/2006/main" prst="rect">
+            <a:avLst/>
+          </a:prstGeom>
+          <a:noFill xmlns:a="http://schemas.openxmlformats.org/drawingml/2006/main"/>
+          <a:ln xmlns:a="http://schemas.openxmlformats.org/drawingml/2006/main" w="0">
+            <a:noFill/>
+            <a:prstDash val="solid"/>
+          </a:ln>
+        </p:spPr>
+        <p:txBody>
+          <a:bodyPr xmlns:a="http://schemas.openxmlformats.org/drawingml/2006/main" anchor="t"/>
+          <a:lstStyle xmlns:a="http://schemas.openxmlformats.org/drawingml/2006/main"/>
           <a:p xmlns:a="http://schemas.openxmlformats.org/drawingml/2006/main">
             <a:pPr algn="ctr">
-              <a:defRPr sz="1500" b="1">
-                <a:solidFill>
-                  <a:srgbClr val="0F172A"/>
-                </a:solidFill>
-              </a:defRPr>
-            </a:pPr>
-            <a:r>
-              <a:rPr sz="1500" b="1">
-                <a:solidFill>
-                  <a:srgbClr val="0F172A"/>
-                </a:solidFill>
-              </a:rPr>
-              <a:t>OpenAI server</a:t>
-            </a:r>
-          </a:p>
-        </p:txBody>
-      </p:sp>
-      <p:sp>
-        <p:nvSpPr>
-          <p:cNvPr id="11" name="">
-            <a:extLst xmlns:a="http://schemas.openxmlformats.org/drawingml/2006/main">
-              <a:ext uri="{FF2B5EF4-FFF2-40B4-BE49-F238E27FC236}">
-                <a16:creationId xmlns:a16="http://schemas.microsoft.com/office/drawing/2014/main" id="{80DD1B9A-4357-4472-845B-05F5F933D2C0}"/>
-              </a:ext>
-            </a:extLst>
-          </p:cNvPr>
-          <p:cNvSpPr>
-            <a:spLocks xmlns:a="http://schemas.openxmlformats.org/drawingml/2006/main" noGrp="1"/>
-          </p:cNvSpPr>
-          <p:nvPr/>
-        </p:nvSpPr>
-        <p:spPr>
-          <a:xfrm xmlns:a="http://schemas.openxmlformats.org/drawingml/2006/main">
-            <a:off x="6705600" y="2038350"/>
-            <a:ext cx="381000" cy="342900"/>
-          </a:xfrm>
-          <a:prstGeom xmlns:a="http://schemas.openxmlformats.org/drawingml/2006/main" prst="rect">
-            <a:avLst/>
-          </a:prstGeom>
-          <a:noFill xmlns:a="http://schemas.openxmlformats.org/drawingml/2006/main"/>
-          <a:ln xmlns:a="http://schemas.openxmlformats.org/drawingml/2006/main" w="0">
-            <a:noFill/>
-            <a:prstDash val="solid"/>
-          </a:ln>
-        </p:spPr>
-        <p:txBody>
-          <a:bodyPr xmlns:a="http://schemas.openxmlformats.org/drawingml/2006/main" anchor="t"/>
-          <a:lstStyle xmlns:a="http://schemas.openxmlformats.org/drawingml/2006/main"/>
-          <a:p xmlns:a="http://schemas.openxmlformats.org/drawingml/2006/main">
-            <a:pPr algn="ctr">
-              <a:defRPr sz="2250" b="1">
+              <a:defRPr sz="2850" b="1">
                 <a:solidFill>
                   <a:srgbClr val="64748B"/>
                 </a:solidFill>
               </a:defRPr>
             </a:pPr>
             <a:r>
-              <a:rPr sz="2250" b="1">
+              <a:rPr sz="2850" b="1">
                 <a:solidFill>
                   <a:srgbClr val="64748B"/>
                 </a:solidFill>
@@ -6367,26 +6198,26 @@
       </p:sp>
       <p:sp>
         <p:nvSpPr>
-          <p:cNvPr id="12" name="">
-            <a:extLst xmlns:a="http://schemas.openxmlformats.org/drawingml/2006/main">
-              <a:ext uri="{FF2B5EF4-FFF2-40B4-BE49-F238E27FC236}">
-                <a16:creationId xmlns:a16="http://schemas.microsoft.com/office/drawing/2014/main" id="{D43A8042-3B7B-47CF-B8F4-CA92B631B50F}"/>
-              </a:ext>
-            </a:extLst>
-          </p:cNvPr>
-          <p:cNvSpPr>
-            <a:spLocks xmlns:a="http://schemas.openxmlformats.org/drawingml/2006/main" noGrp="1"/>
-          </p:cNvSpPr>
-          <p:nvPr/>
-        </p:nvSpPr>
-        <p:spPr>
-          <a:xfrm xmlns:a="http://schemas.openxmlformats.org/drawingml/2006/main">
-            <a:off x="7143750" y="1752600"/>
-            <a:ext cx="1695450" cy="914400"/>
+          <p:cNvPr id="9" name="">
+            <a:extLst xmlns:a="http://schemas.openxmlformats.org/drawingml/2006/main">
+              <a:ext uri="{FF2B5EF4-FFF2-40B4-BE49-F238E27FC236}">
+                <a16:creationId xmlns:a16="http://schemas.microsoft.com/office/drawing/2014/main" id="{D52E4171-1596-443A-9067-991BB0DE5483}"/>
+              </a:ext>
+            </a:extLst>
+          </p:cNvPr>
+          <p:cNvSpPr>
+            <a:spLocks xmlns:a="http://schemas.openxmlformats.org/drawingml/2006/main" noGrp="1"/>
+          </p:cNvSpPr>
+          <p:nvPr/>
+        </p:nvSpPr>
+        <p:spPr>
+          <a:xfrm xmlns:a="http://schemas.openxmlformats.org/drawingml/2006/main">
+            <a:off x="8591550" y="2247900"/>
+            <a:ext cx="2095500" cy="1123950"/>
           </a:xfrm>
           <a:prstGeom xmlns:a="http://schemas.openxmlformats.org/drawingml/2006/main" prst="roundRect">
             <a:avLst>
-              <a:gd name="adj" fmla="val 6250"/>
+              <a:gd name="adj" fmla="val 5085"/>
             </a:avLst>
           </a:prstGeom>
           <a:solidFill xmlns:a="http://schemas.openxmlformats.org/drawingml/2006/main">
@@ -6402,22 +6233,22 @@
       </p:sp>
       <p:sp>
         <p:nvSpPr>
-          <p:cNvPr id="13" name="">
-            <a:extLst xmlns:a="http://schemas.openxmlformats.org/drawingml/2006/main">
-              <a:ext uri="{FF2B5EF4-FFF2-40B4-BE49-F238E27FC236}">
-                <a16:creationId xmlns:a16="http://schemas.microsoft.com/office/drawing/2014/main" id="{78EED882-3252-401B-B6F1-DFB069EDF770}"/>
-              </a:ext>
-            </a:extLst>
-          </p:cNvPr>
-          <p:cNvSpPr>
-            <a:spLocks xmlns:a="http://schemas.openxmlformats.org/drawingml/2006/main" noGrp="1"/>
-          </p:cNvSpPr>
-          <p:nvPr/>
-        </p:nvSpPr>
-        <p:spPr>
-          <a:xfrm xmlns:a="http://schemas.openxmlformats.org/drawingml/2006/main">
-            <a:off x="7277100" y="1895475"/>
-            <a:ext cx="1428750" cy="723900"/>
+          <p:cNvPr id="10" name="">
+            <a:extLst xmlns:a="http://schemas.openxmlformats.org/drawingml/2006/main">
+              <a:ext uri="{FF2B5EF4-FFF2-40B4-BE49-F238E27FC236}">
+                <a16:creationId xmlns:a16="http://schemas.microsoft.com/office/drawing/2014/main" id="{AC94E36E-192F-4531-9EC1-B2FE454A9836}"/>
+              </a:ext>
+            </a:extLst>
+          </p:cNvPr>
+          <p:cNvSpPr>
+            <a:spLocks xmlns:a="http://schemas.openxmlformats.org/drawingml/2006/main" noGrp="1"/>
+          </p:cNvSpPr>
+          <p:nvPr/>
+        </p:nvSpPr>
+        <p:spPr>
+          <a:xfrm xmlns:a="http://schemas.openxmlformats.org/drawingml/2006/main">
+            <a:off x="8724900" y="2390775"/>
+            <a:ext cx="1828800" cy="933450"/>
           </a:xfrm>
           <a:prstGeom xmlns:a="http://schemas.openxmlformats.org/drawingml/2006/main" prst="rect">
             <a:avLst/>
@@ -6445,7 +6276,7 @@
                   <a:srgbClr val="0F172A"/>
                 </a:solidFill>
               </a:rPr>
-              <a:t>Qwen Coder</a:t>
+              <a:t>SGLang</a:t>
             </a:r>
           </a:p>
           <a:p xmlns:a="http://schemas.openxmlformats.org/drawingml/2006/main">
@@ -6462,1249 +6293,17 @@
                   <a:srgbClr val="0F172A"/>
                 </a:solidFill>
               </a:rPr>
-              <a:t>7B Instruct</a:t>
-            </a:r>
-          </a:p>
-        </p:txBody>
-      </p:sp>
-      <p:sp>
-        <p:nvSpPr>
-          <p:cNvPr id="14" name="">
-            <a:extLst xmlns:a="http://schemas.openxmlformats.org/drawingml/2006/main">
-              <a:ext uri="{FF2B5EF4-FFF2-40B4-BE49-F238E27FC236}">
-                <a16:creationId xmlns:a16="http://schemas.microsoft.com/office/drawing/2014/main" id="{49911DA4-F8F9-4825-940F-2C3EFF421446}"/>
-              </a:ext>
-            </a:extLst>
-          </p:cNvPr>
-          <p:cNvSpPr>
-            <a:spLocks xmlns:a="http://schemas.openxmlformats.org/drawingml/2006/main" noGrp="1"/>
-          </p:cNvSpPr>
-          <p:nvPr/>
-        </p:nvSpPr>
-        <p:spPr>
-          <a:xfrm xmlns:a="http://schemas.openxmlformats.org/drawingml/2006/main">
-            <a:off x="8915400" y="2038350"/>
-            <a:ext cx="381000" cy="342900"/>
-          </a:xfrm>
-          <a:prstGeom xmlns:a="http://schemas.openxmlformats.org/drawingml/2006/main" prst="rect">
-            <a:avLst/>
-          </a:prstGeom>
-          <a:noFill xmlns:a="http://schemas.openxmlformats.org/drawingml/2006/main"/>
-          <a:ln xmlns:a="http://schemas.openxmlformats.org/drawingml/2006/main" w="0">
-            <a:noFill/>
-            <a:prstDash val="solid"/>
-          </a:ln>
-        </p:spPr>
-        <p:txBody>
-          <a:bodyPr xmlns:a="http://schemas.openxmlformats.org/drawingml/2006/main" anchor="t"/>
-          <a:lstStyle xmlns:a="http://schemas.openxmlformats.org/drawingml/2006/main"/>
-          <a:p xmlns:a="http://schemas.openxmlformats.org/drawingml/2006/main">
-            <a:pPr algn="ctr">
-              <a:defRPr sz="2250" b="1">
-                <a:solidFill>
-                  <a:srgbClr val="64748B"/>
-                </a:solidFill>
-              </a:defRPr>
-            </a:pPr>
-            <a:r>
-              <a:rPr sz="2250" b="1">
-                <a:solidFill>
-                  <a:srgbClr val="64748B"/>
-                </a:solidFill>
-              </a:rPr>
-              <a:t>→</a:t>
-            </a:r>
-          </a:p>
-        </p:txBody>
-      </p:sp>
-      <p:sp>
-        <p:nvSpPr>
-          <p:cNvPr id="15" name="">
-            <a:extLst xmlns:a="http://schemas.openxmlformats.org/drawingml/2006/main">
-              <a:ext uri="{FF2B5EF4-FFF2-40B4-BE49-F238E27FC236}">
-                <a16:creationId xmlns:a16="http://schemas.microsoft.com/office/drawing/2014/main" id="{22DAF0E8-D2B1-45AF-BF61-26261587C590}"/>
-              </a:ext>
-            </a:extLst>
-          </p:cNvPr>
-          <p:cNvSpPr>
-            <a:spLocks xmlns:a="http://schemas.openxmlformats.org/drawingml/2006/main" noGrp="1"/>
-          </p:cNvSpPr>
-          <p:nvPr/>
-        </p:nvSpPr>
-        <p:spPr>
-          <a:xfrm xmlns:a="http://schemas.openxmlformats.org/drawingml/2006/main">
-            <a:off x="9353550" y="1752600"/>
-            <a:ext cx="1695450" cy="914400"/>
-          </a:xfrm>
-          <a:prstGeom xmlns:a="http://schemas.openxmlformats.org/drawingml/2006/main" prst="roundRect">
-            <a:avLst>
-              <a:gd name="adj" fmla="val 6250"/>
-            </a:avLst>
-          </a:prstGeom>
-          <a:solidFill xmlns:a="http://schemas.openxmlformats.org/drawingml/2006/main">
-            <a:srgbClr val="F0FDF4"/>
-          </a:solidFill>
-          <a:ln xmlns:a="http://schemas.openxmlformats.org/drawingml/2006/main" w="9525">
-            <a:solidFill>
-              <a:srgbClr val="86EFAC"/>
-            </a:solidFill>
-            <a:prstDash val="solid"/>
-          </a:ln>
-        </p:spPr>
-      </p:sp>
-      <p:sp>
-        <p:nvSpPr>
-          <p:cNvPr id="16" name="">
-            <a:extLst xmlns:a="http://schemas.openxmlformats.org/drawingml/2006/main">
-              <a:ext uri="{FF2B5EF4-FFF2-40B4-BE49-F238E27FC236}">
-                <a16:creationId xmlns:a16="http://schemas.microsoft.com/office/drawing/2014/main" id="{7DCC1C11-80D9-4664-BC8B-5CC4FCC223EA}"/>
-              </a:ext>
-            </a:extLst>
-          </p:cNvPr>
-          <p:cNvSpPr>
-            <a:spLocks xmlns:a="http://schemas.openxmlformats.org/drawingml/2006/main" noGrp="1"/>
-          </p:cNvSpPr>
-          <p:nvPr/>
-        </p:nvSpPr>
-        <p:spPr>
-          <a:xfrm xmlns:a="http://schemas.openxmlformats.org/drawingml/2006/main">
-            <a:off x="9486900" y="1895475"/>
-            <a:ext cx="1428750" cy="723900"/>
-          </a:xfrm>
-          <a:prstGeom xmlns:a="http://schemas.openxmlformats.org/drawingml/2006/main" prst="rect">
-            <a:avLst/>
-          </a:prstGeom>
-          <a:noFill xmlns:a="http://schemas.openxmlformats.org/drawingml/2006/main"/>
-          <a:ln xmlns:a="http://schemas.openxmlformats.org/drawingml/2006/main" w="0">
-            <a:noFill/>
-            <a:prstDash val="solid"/>
-          </a:ln>
-        </p:spPr>
-        <p:txBody>
-          <a:bodyPr xmlns:a="http://schemas.openxmlformats.org/drawingml/2006/main" anchor="ctr"/>
-          <a:lstStyle xmlns:a="http://schemas.openxmlformats.org/drawingml/2006/main"/>
-          <a:p xmlns:a="http://schemas.openxmlformats.org/drawingml/2006/main">
-            <a:pPr algn="ctr">
-              <a:defRPr sz="1500" b="1">
-                <a:solidFill>
-                  <a:srgbClr val="0F172A"/>
-                </a:solidFill>
-              </a:defRPr>
-            </a:pPr>
-            <a:r>
-              <a:rPr sz="1500" b="1">
-                <a:solidFill>
-                  <a:srgbClr val="0F172A"/>
-                </a:solidFill>
-              </a:rPr>
-              <a:t>GPU KV cache</a:t>
-            </a:r>
-          </a:p>
-          <a:p xmlns:a="http://schemas.openxmlformats.org/drawingml/2006/main">
-            <a:pPr algn="ctr">
-              <a:defRPr sz="1500" b="1">
-                <a:solidFill>
-                  <a:srgbClr val="0F172A"/>
-                </a:solidFill>
-              </a:defRPr>
-            </a:pPr>
-            <a:r>
-              <a:rPr sz="1500" b="1">
-                <a:solidFill>
-                  <a:srgbClr val="0F172A"/>
-                </a:solidFill>
-              </a:rPr>
-              <a:t>+ HiCache</a:t>
-            </a:r>
-          </a:p>
-        </p:txBody>
-      </p:sp>
-      <p:sp>
-        <p:nvSpPr>
-          <p:cNvPr id="17" name="">
-            <a:extLst xmlns:a="http://schemas.openxmlformats.org/drawingml/2006/main">
-              <a:ext uri="{FF2B5EF4-FFF2-40B4-BE49-F238E27FC236}">
-                <a16:creationId xmlns:a16="http://schemas.microsoft.com/office/drawing/2014/main" id="{4CE6824F-D9FD-4999-89D0-FBD2BDA9B8CE}"/>
-              </a:ext>
-            </a:extLst>
-          </p:cNvPr>
-          <p:cNvSpPr>
-            <a:spLocks xmlns:a="http://schemas.openxmlformats.org/drawingml/2006/main" noGrp="1"/>
-          </p:cNvSpPr>
-          <p:nvPr/>
-        </p:nvSpPr>
-        <p:spPr>
-          <a:xfrm xmlns:a="http://schemas.openxmlformats.org/drawingml/2006/main">
-            <a:off x="666750" y="3390900"/>
-            <a:ext cx="2343150" cy="895350"/>
-          </a:xfrm>
-          <a:prstGeom xmlns:a="http://schemas.openxmlformats.org/drawingml/2006/main" prst="roundRect">
-            <a:avLst>
-              <a:gd name="adj" fmla="val 6383"/>
-            </a:avLst>
-          </a:prstGeom>
-          <a:solidFill xmlns:a="http://schemas.openxmlformats.org/drawingml/2006/main">
-            <a:srgbClr val="F8FAFC"/>
-          </a:solidFill>
-          <a:ln xmlns:a="http://schemas.openxmlformats.org/drawingml/2006/main" w="9525">
-            <a:solidFill>
-              <a:srgbClr val="CBD5E1"/>
-            </a:solidFill>
-            <a:prstDash val="solid"/>
-          </a:ln>
-        </p:spPr>
-      </p:sp>
-      <p:sp>
-        <p:nvSpPr>
-          <p:cNvPr id="18" name="">
-            <a:extLst xmlns:a="http://schemas.openxmlformats.org/drawingml/2006/main">
-              <a:ext uri="{FF2B5EF4-FFF2-40B4-BE49-F238E27FC236}">
-                <a16:creationId xmlns:a16="http://schemas.microsoft.com/office/drawing/2014/main" id="{63172E0B-B5D7-4C0F-8A95-E7215FE7CA55}"/>
-              </a:ext>
-            </a:extLst>
-          </p:cNvPr>
-          <p:cNvSpPr>
-            <a:spLocks xmlns:a="http://schemas.openxmlformats.org/drawingml/2006/main" noGrp="1"/>
-          </p:cNvSpPr>
-          <p:nvPr/>
-        </p:nvSpPr>
-        <p:spPr>
-          <a:xfrm xmlns:a="http://schemas.openxmlformats.org/drawingml/2006/main">
-            <a:off x="819150" y="3524250"/>
-            <a:ext cx="2038350" cy="209550"/>
-          </a:xfrm>
-          <a:prstGeom xmlns:a="http://schemas.openxmlformats.org/drawingml/2006/main" prst="rect">
-            <a:avLst/>
-          </a:prstGeom>
-          <a:noFill xmlns:a="http://schemas.openxmlformats.org/drawingml/2006/main"/>
-          <a:ln xmlns:a="http://schemas.openxmlformats.org/drawingml/2006/main" w="0">
-            <a:noFill/>
-            <a:prstDash val="solid"/>
-          </a:ln>
-        </p:spPr>
-        <p:txBody>
-          <a:bodyPr xmlns:a="http://schemas.openxmlformats.org/drawingml/2006/main" anchor="t"/>
-          <a:lstStyle xmlns:a="http://schemas.openxmlformats.org/drawingml/2006/main"/>
-          <a:p xmlns:a="http://schemas.openxmlformats.org/drawingml/2006/main">
-            <a:pPr algn="l">
-              <a:defRPr sz="1125" b="1">
-                <a:solidFill>
-                  <a:srgbClr val="64748B"/>
-                </a:solidFill>
-              </a:defRPr>
-            </a:pPr>
-            <a:r>
-              <a:rPr sz="1125" b="1">
-                <a:solidFill>
-                  <a:srgbClr val="64748B"/>
-                </a:solidFill>
-              </a:rPr>
-              <a:t>GPU</a:t>
-            </a:r>
-          </a:p>
-        </p:txBody>
-      </p:sp>
-      <p:sp>
-        <p:nvSpPr>
-          <p:cNvPr id="19" name="">
-            <a:extLst xmlns:a="http://schemas.openxmlformats.org/drawingml/2006/main">
-              <a:ext uri="{FF2B5EF4-FFF2-40B4-BE49-F238E27FC236}">
-                <a16:creationId xmlns:a16="http://schemas.microsoft.com/office/drawing/2014/main" id="{D214B62A-CE92-4824-ACB6-0D5D657E6933}"/>
-              </a:ext>
-            </a:extLst>
-          </p:cNvPr>
-          <p:cNvSpPr>
-            <a:spLocks xmlns:a="http://schemas.openxmlformats.org/drawingml/2006/main" noGrp="1"/>
-          </p:cNvSpPr>
-          <p:nvPr/>
-        </p:nvSpPr>
-        <p:spPr>
-          <a:xfrm xmlns:a="http://schemas.openxmlformats.org/drawingml/2006/main">
-            <a:off x="819150" y="3790950"/>
-            <a:ext cx="2038350" cy="400050"/>
-          </a:xfrm>
-          <a:prstGeom xmlns:a="http://schemas.openxmlformats.org/drawingml/2006/main" prst="rect">
-            <a:avLst/>
-          </a:prstGeom>
-          <a:noFill xmlns:a="http://schemas.openxmlformats.org/drawingml/2006/main"/>
-          <a:ln xmlns:a="http://schemas.openxmlformats.org/drawingml/2006/main" w="0">
-            <a:noFill/>
-            <a:prstDash val="solid"/>
-          </a:ln>
-        </p:spPr>
-        <p:txBody>
-          <a:bodyPr xmlns:a="http://schemas.openxmlformats.org/drawingml/2006/main" anchor="t"/>
-          <a:lstStyle xmlns:a="http://schemas.openxmlformats.org/drawingml/2006/main"/>
-          <a:p xmlns:a="http://schemas.openxmlformats.org/drawingml/2006/main">
-            <a:pPr algn="l">
-              <a:defRPr sz="1575" b="1">
-                <a:solidFill>
-                  <a:srgbClr val="0F172A"/>
-                </a:solidFill>
-              </a:defRPr>
-            </a:pPr>
-            <a:r>
-              <a:rPr sz="1575" b="1">
-                <a:solidFill>
-                  <a:srgbClr val="0F172A"/>
-                </a:solidFill>
-              </a:rPr>
-              <a:t>NVIDIA A10G class</a:t>
-            </a:r>
-          </a:p>
-        </p:txBody>
-      </p:sp>
-      <p:sp>
-        <p:nvSpPr>
-          <p:cNvPr id="20" name="">
-            <a:extLst xmlns:a="http://schemas.openxmlformats.org/drawingml/2006/main">
-              <a:ext uri="{FF2B5EF4-FFF2-40B4-BE49-F238E27FC236}">
-                <a16:creationId xmlns:a16="http://schemas.microsoft.com/office/drawing/2014/main" id="{D77BBA88-8E58-48EA-86BF-6044FAC55F72}"/>
-              </a:ext>
-            </a:extLst>
-          </p:cNvPr>
-          <p:cNvSpPr>
-            <a:spLocks xmlns:a="http://schemas.openxmlformats.org/drawingml/2006/main" noGrp="1"/>
-          </p:cNvSpPr>
-          <p:nvPr/>
-        </p:nvSpPr>
-        <p:spPr>
-          <a:xfrm xmlns:a="http://schemas.openxmlformats.org/drawingml/2006/main">
-            <a:off x="3238500" y="3390900"/>
-            <a:ext cx="2343150" cy="895350"/>
-          </a:xfrm>
-          <a:prstGeom xmlns:a="http://schemas.openxmlformats.org/drawingml/2006/main" prst="roundRect">
-            <a:avLst>
-              <a:gd name="adj" fmla="val 6383"/>
-            </a:avLst>
-          </a:prstGeom>
-          <a:solidFill xmlns:a="http://schemas.openxmlformats.org/drawingml/2006/main">
-            <a:srgbClr val="F8FAFC"/>
-          </a:solidFill>
-          <a:ln xmlns:a="http://schemas.openxmlformats.org/drawingml/2006/main" w="9525">
-            <a:solidFill>
-              <a:srgbClr val="CBD5E1"/>
-            </a:solidFill>
-            <a:prstDash val="solid"/>
-          </a:ln>
-        </p:spPr>
-      </p:sp>
-      <p:sp>
-        <p:nvSpPr>
-          <p:cNvPr id="21" name="">
-            <a:extLst xmlns:a="http://schemas.openxmlformats.org/drawingml/2006/main">
-              <a:ext uri="{FF2B5EF4-FFF2-40B4-BE49-F238E27FC236}">
-                <a16:creationId xmlns:a16="http://schemas.microsoft.com/office/drawing/2014/main" id="{8EE3806C-14E5-4ABD-A6EE-230C625A0F97}"/>
-              </a:ext>
-            </a:extLst>
-          </p:cNvPr>
-          <p:cNvSpPr>
-            <a:spLocks xmlns:a="http://schemas.openxmlformats.org/drawingml/2006/main" noGrp="1"/>
-          </p:cNvSpPr>
-          <p:nvPr/>
-        </p:nvSpPr>
-        <p:spPr>
-          <a:xfrm xmlns:a="http://schemas.openxmlformats.org/drawingml/2006/main">
-            <a:off x="3390900" y="3524250"/>
-            <a:ext cx="2038350" cy="209550"/>
-          </a:xfrm>
-          <a:prstGeom xmlns:a="http://schemas.openxmlformats.org/drawingml/2006/main" prst="rect">
-            <a:avLst/>
-          </a:prstGeom>
-          <a:noFill xmlns:a="http://schemas.openxmlformats.org/drawingml/2006/main"/>
-          <a:ln xmlns:a="http://schemas.openxmlformats.org/drawingml/2006/main" w="0">
-            <a:noFill/>
-            <a:prstDash val="solid"/>
-          </a:ln>
-        </p:spPr>
-        <p:txBody>
-          <a:bodyPr xmlns:a="http://schemas.openxmlformats.org/drawingml/2006/main" anchor="t"/>
-          <a:lstStyle xmlns:a="http://schemas.openxmlformats.org/drawingml/2006/main"/>
-          <a:p xmlns:a="http://schemas.openxmlformats.org/drawingml/2006/main">
-            <a:pPr algn="l">
-              <a:defRPr sz="1125" b="1">
-                <a:solidFill>
-                  <a:srgbClr val="64748B"/>
-                </a:solidFill>
-              </a:defRPr>
-            </a:pPr>
-            <a:r>
-              <a:rPr sz="1125" b="1">
-                <a:solidFill>
-                  <a:srgbClr val="64748B"/>
-                </a:solidFill>
-              </a:rPr>
-              <a:t>GPU memory</a:t>
-            </a:r>
-          </a:p>
-        </p:txBody>
-      </p:sp>
-      <p:sp>
-        <p:nvSpPr>
-          <p:cNvPr id="22" name="">
-            <a:extLst xmlns:a="http://schemas.openxmlformats.org/drawingml/2006/main">
-              <a:ext uri="{FF2B5EF4-FFF2-40B4-BE49-F238E27FC236}">
-                <a16:creationId xmlns:a16="http://schemas.microsoft.com/office/drawing/2014/main" id="{D2506BDE-D690-41B4-AAE8-C84D8D6B40E3}"/>
-              </a:ext>
-            </a:extLst>
-          </p:cNvPr>
-          <p:cNvSpPr>
-            <a:spLocks xmlns:a="http://schemas.openxmlformats.org/drawingml/2006/main" noGrp="1"/>
-          </p:cNvSpPr>
-          <p:nvPr/>
-        </p:nvSpPr>
-        <p:spPr>
-          <a:xfrm xmlns:a="http://schemas.openxmlformats.org/drawingml/2006/main">
-            <a:off x="3390900" y="3790950"/>
-            <a:ext cx="2038350" cy="400050"/>
-          </a:xfrm>
-          <a:prstGeom xmlns:a="http://schemas.openxmlformats.org/drawingml/2006/main" prst="rect">
-            <a:avLst/>
-          </a:prstGeom>
-          <a:noFill xmlns:a="http://schemas.openxmlformats.org/drawingml/2006/main"/>
-          <a:ln xmlns:a="http://schemas.openxmlformats.org/drawingml/2006/main" w="0">
-            <a:noFill/>
-            <a:prstDash val="solid"/>
-          </a:ln>
-        </p:spPr>
-        <p:txBody>
-          <a:bodyPr xmlns:a="http://schemas.openxmlformats.org/drawingml/2006/main" anchor="t"/>
-          <a:lstStyle xmlns:a="http://schemas.openxmlformats.org/drawingml/2006/main"/>
-          <a:p xmlns:a="http://schemas.openxmlformats.org/drawingml/2006/main">
-            <a:pPr algn="l">
-              <a:defRPr sz="1575" b="1">
-                <a:solidFill>
-                  <a:srgbClr val="0F172A"/>
-                </a:solidFill>
-              </a:defRPr>
-            </a:pPr>
-            <a:r>
-              <a:rPr sz="1575" b="1">
-                <a:solidFill>
-                  <a:srgbClr val="0F172A"/>
-                </a:solidFill>
-              </a:rPr>
-              <a:t>24 GB GDDR6</a:t>
-            </a:r>
-          </a:p>
-        </p:txBody>
-      </p:sp>
-      <p:sp>
-        <p:nvSpPr>
-          <p:cNvPr id="23" name="">
-            <a:extLst xmlns:a="http://schemas.openxmlformats.org/drawingml/2006/main">
-              <a:ext uri="{FF2B5EF4-FFF2-40B4-BE49-F238E27FC236}">
-                <a16:creationId xmlns:a16="http://schemas.microsoft.com/office/drawing/2014/main" id="{9CCC2AF3-0EF1-44CA-B718-9F81283757B7}"/>
-              </a:ext>
-            </a:extLst>
-          </p:cNvPr>
-          <p:cNvSpPr>
-            <a:spLocks xmlns:a="http://schemas.openxmlformats.org/drawingml/2006/main" noGrp="1"/>
-          </p:cNvSpPr>
-          <p:nvPr/>
-        </p:nvSpPr>
-        <p:spPr>
-          <a:xfrm xmlns:a="http://schemas.openxmlformats.org/drawingml/2006/main">
-            <a:off x="5810250" y="3390900"/>
-            <a:ext cx="2343150" cy="895350"/>
-          </a:xfrm>
-          <a:prstGeom xmlns:a="http://schemas.openxmlformats.org/drawingml/2006/main" prst="roundRect">
-            <a:avLst>
-              <a:gd name="adj" fmla="val 6383"/>
-            </a:avLst>
-          </a:prstGeom>
-          <a:solidFill xmlns:a="http://schemas.openxmlformats.org/drawingml/2006/main">
-            <a:srgbClr val="FFF7ED"/>
-          </a:solidFill>
-          <a:ln xmlns:a="http://schemas.openxmlformats.org/drawingml/2006/main" w="9525">
-            <a:solidFill>
-              <a:srgbClr val="FED7AA"/>
-            </a:solidFill>
-            <a:prstDash val="solid"/>
-          </a:ln>
-        </p:spPr>
-      </p:sp>
-      <p:sp>
-        <p:nvSpPr>
-          <p:cNvPr id="24" name="">
-            <a:extLst xmlns:a="http://schemas.openxmlformats.org/drawingml/2006/main">
-              <a:ext uri="{FF2B5EF4-FFF2-40B4-BE49-F238E27FC236}">
-                <a16:creationId xmlns:a16="http://schemas.microsoft.com/office/drawing/2014/main" id="{FAF9D5E7-296A-41D1-9400-60A2C12BB9D0}"/>
-              </a:ext>
-            </a:extLst>
-          </p:cNvPr>
-          <p:cNvSpPr>
-            <a:spLocks xmlns:a="http://schemas.openxmlformats.org/drawingml/2006/main" noGrp="1"/>
-          </p:cNvSpPr>
-          <p:nvPr/>
-        </p:nvSpPr>
-        <p:spPr>
-          <a:xfrm xmlns:a="http://schemas.openxmlformats.org/drawingml/2006/main">
-            <a:off x="5962650" y="3524250"/>
-            <a:ext cx="2038350" cy="209550"/>
-          </a:xfrm>
-          <a:prstGeom xmlns:a="http://schemas.openxmlformats.org/drawingml/2006/main" prst="rect">
-            <a:avLst/>
-          </a:prstGeom>
-          <a:noFill xmlns:a="http://schemas.openxmlformats.org/drawingml/2006/main"/>
-          <a:ln xmlns:a="http://schemas.openxmlformats.org/drawingml/2006/main" w="0">
-            <a:noFill/>
-            <a:prstDash val="solid"/>
-          </a:ln>
-        </p:spPr>
-        <p:txBody>
-          <a:bodyPr xmlns:a="http://schemas.openxmlformats.org/drawingml/2006/main" anchor="t"/>
-          <a:lstStyle xmlns:a="http://schemas.openxmlformats.org/drawingml/2006/main"/>
-          <a:p xmlns:a="http://schemas.openxmlformats.org/drawingml/2006/main">
-            <a:pPr algn="l">
-              <a:defRPr sz="1125" b="1">
-                <a:solidFill>
-                  <a:srgbClr val="64748B"/>
-                </a:solidFill>
-              </a:defRPr>
-            </a:pPr>
-            <a:r>
-              <a:rPr sz="1125" b="1">
-                <a:solidFill>
-                  <a:srgbClr val="64748B"/>
-                </a:solidFill>
-              </a:rPr>
-              <a:t>HiCache host KV shelf</a:t>
-            </a:r>
-          </a:p>
-        </p:txBody>
-      </p:sp>
-      <p:sp>
-        <p:nvSpPr>
-          <p:cNvPr id="25" name="">
-            <a:extLst xmlns:a="http://schemas.openxmlformats.org/drawingml/2006/main">
-              <a:ext uri="{FF2B5EF4-FFF2-40B4-BE49-F238E27FC236}">
-                <a16:creationId xmlns:a16="http://schemas.microsoft.com/office/drawing/2014/main" id="{A91B2E25-0224-4BEE-9220-3983AFBD5860}"/>
-              </a:ext>
-            </a:extLst>
-          </p:cNvPr>
-          <p:cNvSpPr>
-            <a:spLocks xmlns:a="http://schemas.openxmlformats.org/drawingml/2006/main" noGrp="1"/>
-          </p:cNvSpPr>
-          <p:nvPr/>
-        </p:nvSpPr>
-        <p:spPr>
-          <a:xfrm xmlns:a="http://schemas.openxmlformats.org/drawingml/2006/main">
-            <a:off x="5962650" y="3790950"/>
-            <a:ext cx="2038350" cy="400050"/>
-          </a:xfrm>
-          <a:prstGeom xmlns:a="http://schemas.openxmlformats.org/drawingml/2006/main" prst="rect">
-            <a:avLst/>
-          </a:prstGeom>
-          <a:noFill xmlns:a="http://schemas.openxmlformats.org/drawingml/2006/main"/>
-          <a:ln xmlns:a="http://schemas.openxmlformats.org/drawingml/2006/main" w="0">
-            <a:noFill/>
-            <a:prstDash val="solid"/>
-          </a:ln>
-        </p:spPr>
-        <p:txBody>
-          <a:bodyPr xmlns:a="http://schemas.openxmlformats.org/drawingml/2006/main" anchor="t"/>
-          <a:lstStyle xmlns:a="http://schemas.openxmlformats.org/drawingml/2006/main"/>
-          <a:p xmlns:a="http://schemas.openxmlformats.org/drawingml/2006/main">
-            <a:pPr algn="l">
-              <a:defRPr sz="1575" b="1">
-                <a:solidFill>
-                  <a:srgbClr val="0F172A"/>
-                </a:solidFill>
-              </a:defRPr>
-            </a:pPr>
-            <a:r>
-              <a:rPr sz="1575" b="1">
-                <a:solidFill>
-                  <a:srgbClr val="0F172A"/>
-                </a:solidFill>
-              </a:rPr>
-              <a:t>16 GB configured</a:t>
-            </a:r>
-          </a:p>
-        </p:txBody>
-      </p:sp>
-      <p:sp>
-        <p:nvSpPr>
-          <p:cNvPr id="26" name="">
-            <a:extLst xmlns:a="http://schemas.openxmlformats.org/drawingml/2006/main">
-              <a:ext uri="{FF2B5EF4-FFF2-40B4-BE49-F238E27FC236}">
-                <a16:creationId xmlns:a16="http://schemas.microsoft.com/office/drawing/2014/main" id="{B7A10C7D-29C4-4566-8A81-343126E16C38}"/>
-              </a:ext>
-            </a:extLst>
-          </p:cNvPr>
-          <p:cNvSpPr>
-            <a:spLocks xmlns:a="http://schemas.openxmlformats.org/drawingml/2006/main" noGrp="1"/>
-          </p:cNvSpPr>
-          <p:nvPr/>
-        </p:nvSpPr>
-        <p:spPr>
-          <a:xfrm xmlns:a="http://schemas.openxmlformats.org/drawingml/2006/main">
-            <a:off x="8382000" y="3390900"/>
-            <a:ext cx="2343150" cy="895350"/>
-          </a:xfrm>
-          <a:prstGeom xmlns:a="http://schemas.openxmlformats.org/drawingml/2006/main" prst="roundRect">
-            <a:avLst>
-              <a:gd name="adj" fmla="val 6383"/>
-            </a:avLst>
-          </a:prstGeom>
-          <a:solidFill xmlns:a="http://schemas.openxmlformats.org/drawingml/2006/main">
-            <a:srgbClr val="F8FAFC"/>
-          </a:solidFill>
-          <a:ln xmlns:a="http://schemas.openxmlformats.org/drawingml/2006/main" w="9525">
-            <a:solidFill>
-              <a:srgbClr val="CBD5E1"/>
-            </a:solidFill>
-            <a:prstDash val="solid"/>
-          </a:ln>
-        </p:spPr>
-      </p:sp>
-      <p:sp>
-        <p:nvSpPr>
-          <p:cNvPr id="27" name="">
-            <a:extLst xmlns:a="http://schemas.openxmlformats.org/drawingml/2006/main">
-              <a:ext uri="{FF2B5EF4-FFF2-40B4-BE49-F238E27FC236}">
-                <a16:creationId xmlns:a16="http://schemas.microsoft.com/office/drawing/2014/main" id="{4A0E9200-E724-4A40-8E19-8DCD591F8BAE}"/>
-              </a:ext>
-            </a:extLst>
-          </p:cNvPr>
-          <p:cNvSpPr>
-            <a:spLocks xmlns:a="http://schemas.openxmlformats.org/drawingml/2006/main" noGrp="1"/>
-          </p:cNvSpPr>
-          <p:nvPr/>
-        </p:nvSpPr>
-        <p:spPr>
-          <a:xfrm xmlns:a="http://schemas.openxmlformats.org/drawingml/2006/main">
-            <a:off x="8534400" y="3524250"/>
-            <a:ext cx="2038350" cy="209550"/>
-          </a:xfrm>
-          <a:prstGeom xmlns:a="http://schemas.openxmlformats.org/drawingml/2006/main" prst="rect">
-            <a:avLst/>
-          </a:prstGeom>
-          <a:noFill xmlns:a="http://schemas.openxmlformats.org/drawingml/2006/main"/>
-          <a:ln xmlns:a="http://schemas.openxmlformats.org/drawingml/2006/main" w="0">
-            <a:noFill/>
-            <a:prstDash val="solid"/>
-          </a:ln>
-        </p:spPr>
-        <p:txBody>
-          <a:bodyPr xmlns:a="http://schemas.openxmlformats.org/drawingml/2006/main" anchor="t"/>
-          <a:lstStyle xmlns:a="http://schemas.openxmlformats.org/drawingml/2006/main"/>
-          <a:p xmlns:a="http://schemas.openxmlformats.org/drawingml/2006/main">
-            <a:pPr algn="l">
-              <a:defRPr sz="1125" b="1">
-                <a:solidFill>
-                  <a:srgbClr val="64748B"/>
-                </a:solidFill>
-              </a:defRPr>
-            </a:pPr>
-            <a:r>
-              <a:rPr sz="1125" b="1">
-                <a:solidFill>
-                  <a:srgbClr val="64748B"/>
-                </a:solidFill>
-              </a:rPr>
-              <a:t>Context length</a:t>
-            </a:r>
-          </a:p>
-        </p:txBody>
-      </p:sp>
-      <p:sp>
-        <p:nvSpPr>
-          <p:cNvPr id="28" name="">
-            <a:extLst xmlns:a="http://schemas.openxmlformats.org/drawingml/2006/main">
-              <a:ext uri="{FF2B5EF4-FFF2-40B4-BE49-F238E27FC236}">
-                <a16:creationId xmlns:a16="http://schemas.microsoft.com/office/drawing/2014/main" id="{BBCE0D59-36C7-4F7B-8D96-512502F33AAD}"/>
-              </a:ext>
-            </a:extLst>
-          </p:cNvPr>
-          <p:cNvSpPr>
-            <a:spLocks xmlns:a="http://schemas.openxmlformats.org/drawingml/2006/main" noGrp="1"/>
-          </p:cNvSpPr>
-          <p:nvPr/>
-        </p:nvSpPr>
-        <p:spPr>
-          <a:xfrm xmlns:a="http://schemas.openxmlformats.org/drawingml/2006/main">
-            <a:off x="8534400" y="3790950"/>
-            <a:ext cx="2038350" cy="400050"/>
-          </a:xfrm>
-          <a:prstGeom xmlns:a="http://schemas.openxmlformats.org/drawingml/2006/main" prst="rect">
-            <a:avLst/>
-          </a:prstGeom>
-          <a:noFill xmlns:a="http://schemas.openxmlformats.org/drawingml/2006/main"/>
-          <a:ln xmlns:a="http://schemas.openxmlformats.org/drawingml/2006/main" w="0">
-            <a:noFill/>
-            <a:prstDash val="solid"/>
-          </a:ln>
-        </p:spPr>
-        <p:txBody>
-          <a:bodyPr xmlns:a="http://schemas.openxmlformats.org/drawingml/2006/main" anchor="t"/>
-          <a:lstStyle xmlns:a="http://schemas.openxmlformats.org/drawingml/2006/main"/>
-          <a:p xmlns:a="http://schemas.openxmlformats.org/drawingml/2006/main">
-            <a:pPr algn="l">
-              <a:defRPr sz="1575" b="1">
-                <a:solidFill>
-                  <a:srgbClr val="0F172A"/>
-                </a:solidFill>
-              </a:defRPr>
-            </a:pPr>
-            <a:r>
-              <a:rPr sz="1575" b="1">
-                <a:solidFill>
-                  <a:srgbClr val="0F172A"/>
-                </a:solidFill>
-              </a:rPr>
-              <a:t>32,768 tokens</a:t>
-            </a:r>
-          </a:p>
-        </p:txBody>
-      </p:sp>
-      <p:sp>
-        <p:nvSpPr>
-          <p:cNvPr id="29" name="">
-            <a:extLst xmlns:a="http://schemas.openxmlformats.org/drawingml/2006/main">
-              <a:ext uri="{FF2B5EF4-FFF2-40B4-BE49-F238E27FC236}">
-                <a16:creationId xmlns:a16="http://schemas.microsoft.com/office/drawing/2014/main" id="{DD8BB145-8065-4ACB-9589-3B72194F091A}"/>
-              </a:ext>
-            </a:extLst>
-          </p:cNvPr>
-          <p:cNvSpPr>
-            <a:spLocks xmlns:a="http://schemas.openxmlformats.org/drawingml/2006/main" noGrp="1"/>
-          </p:cNvSpPr>
-          <p:nvPr/>
-        </p:nvSpPr>
-        <p:spPr>
-          <a:xfrm xmlns:a="http://schemas.openxmlformats.org/drawingml/2006/main">
-            <a:off x="666750" y="4572000"/>
-            <a:ext cx="2343150" cy="895350"/>
-          </a:xfrm>
-          <a:prstGeom xmlns:a="http://schemas.openxmlformats.org/drawingml/2006/main" prst="roundRect">
-            <a:avLst>
-              <a:gd name="adj" fmla="val 6383"/>
-            </a:avLst>
-          </a:prstGeom>
-          <a:solidFill xmlns:a="http://schemas.openxmlformats.org/drawingml/2006/main">
-            <a:srgbClr val="F8FAFC"/>
-          </a:solidFill>
-          <a:ln xmlns:a="http://schemas.openxmlformats.org/drawingml/2006/main" w="9525">
-            <a:solidFill>
-              <a:srgbClr val="CBD5E1"/>
-            </a:solidFill>
-            <a:prstDash val="solid"/>
-          </a:ln>
-        </p:spPr>
-      </p:sp>
-      <p:sp>
-        <p:nvSpPr>
-          <p:cNvPr id="30" name="">
-            <a:extLst xmlns:a="http://schemas.openxmlformats.org/drawingml/2006/main">
-              <a:ext uri="{FF2B5EF4-FFF2-40B4-BE49-F238E27FC236}">
-                <a16:creationId xmlns:a16="http://schemas.microsoft.com/office/drawing/2014/main" id="{1D5E322D-4E77-483A-9775-1058BE82596F}"/>
-              </a:ext>
-            </a:extLst>
-          </p:cNvPr>
-          <p:cNvSpPr>
-            <a:spLocks xmlns:a="http://schemas.openxmlformats.org/drawingml/2006/main" noGrp="1"/>
-          </p:cNvSpPr>
-          <p:nvPr/>
-        </p:nvSpPr>
-        <p:spPr>
-          <a:xfrm xmlns:a="http://schemas.openxmlformats.org/drawingml/2006/main">
-            <a:off x="819150" y="4705350"/>
-            <a:ext cx="2038350" cy="209550"/>
-          </a:xfrm>
-          <a:prstGeom xmlns:a="http://schemas.openxmlformats.org/drawingml/2006/main" prst="rect">
-            <a:avLst/>
-          </a:prstGeom>
-          <a:noFill xmlns:a="http://schemas.openxmlformats.org/drawingml/2006/main"/>
-          <a:ln xmlns:a="http://schemas.openxmlformats.org/drawingml/2006/main" w="0">
-            <a:noFill/>
-            <a:prstDash val="solid"/>
-          </a:ln>
-        </p:spPr>
-        <p:txBody>
-          <a:bodyPr xmlns:a="http://schemas.openxmlformats.org/drawingml/2006/main" anchor="t"/>
-          <a:lstStyle xmlns:a="http://schemas.openxmlformats.org/drawingml/2006/main"/>
-          <a:p xmlns:a="http://schemas.openxmlformats.org/drawingml/2006/main">
-            <a:pPr algn="l">
-              <a:defRPr sz="1125" b="1">
-                <a:solidFill>
-                  <a:srgbClr val="64748B"/>
-                </a:solidFill>
-              </a:defRPr>
-            </a:pPr>
-            <a:r>
-              <a:rPr sz="1125" b="1">
-                <a:solidFill>
-                  <a:srgbClr val="64748B"/>
-                </a:solidFill>
-              </a:rPr>
-              <a:t>Max total tokens</a:t>
-            </a:r>
-          </a:p>
-        </p:txBody>
-      </p:sp>
-      <p:sp>
-        <p:nvSpPr>
-          <p:cNvPr id="31" name="">
-            <a:extLst xmlns:a="http://schemas.openxmlformats.org/drawingml/2006/main">
-              <a:ext uri="{FF2B5EF4-FFF2-40B4-BE49-F238E27FC236}">
-                <a16:creationId xmlns:a16="http://schemas.microsoft.com/office/drawing/2014/main" id="{297C8B62-39BD-46FB-B2CA-5589F126F4BA}"/>
-              </a:ext>
-            </a:extLst>
-          </p:cNvPr>
-          <p:cNvSpPr>
-            <a:spLocks xmlns:a="http://schemas.openxmlformats.org/drawingml/2006/main" noGrp="1"/>
-          </p:cNvSpPr>
-          <p:nvPr/>
-        </p:nvSpPr>
-        <p:spPr>
-          <a:xfrm xmlns:a="http://schemas.openxmlformats.org/drawingml/2006/main">
-            <a:off x="819150" y="4972050"/>
-            <a:ext cx="2038350" cy="400050"/>
-          </a:xfrm>
-          <a:prstGeom xmlns:a="http://schemas.openxmlformats.org/drawingml/2006/main" prst="rect">
-            <a:avLst/>
-          </a:prstGeom>
-          <a:noFill xmlns:a="http://schemas.openxmlformats.org/drawingml/2006/main"/>
-          <a:ln xmlns:a="http://schemas.openxmlformats.org/drawingml/2006/main" w="0">
-            <a:noFill/>
-            <a:prstDash val="solid"/>
-          </a:ln>
-        </p:spPr>
-        <p:txBody>
-          <a:bodyPr xmlns:a="http://schemas.openxmlformats.org/drawingml/2006/main" anchor="t"/>
-          <a:lstStyle xmlns:a="http://schemas.openxmlformats.org/drawingml/2006/main"/>
-          <a:p xmlns:a="http://schemas.openxmlformats.org/drawingml/2006/main">
-            <a:pPr algn="l">
-              <a:defRPr sz="1575" b="1">
-                <a:solidFill>
-                  <a:srgbClr val="0F172A"/>
-                </a:solidFill>
-              </a:defRPr>
-            </a:pPr>
-            <a:r>
-              <a:rPr sz="1575" b="1">
-                <a:solidFill>
-                  <a:srgbClr val="0F172A"/>
-                </a:solidFill>
-              </a:rPr>
-              <a:t>12,288</a:t>
-            </a:r>
-          </a:p>
-        </p:txBody>
-      </p:sp>
-      <p:sp>
-        <p:nvSpPr>
-          <p:cNvPr id="32" name="">
-            <a:extLst xmlns:a="http://schemas.openxmlformats.org/drawingml/2006/main">
-              <a:ext uri="{FF2B5EF4-FFF2-40B4-BE49-F238E27FC236}">
-                <a16:creationId xmlns:a16="http://schemas.microsoft.com/office/drawing/2014/main" id="{A8B1EF20-752C-4036-8B01-9A12D5CC8F59}"/>
-              </a:ext>
-            </a:extLst>
-          </p:cNvPr>
-          <p:cNvSpPr>
-            <a:spLocks xmlns:a="http://schemas.openxmlformats.org/drawingml/2006/main" noGrp="1"/>
-          </p:cNvSpPr>
-          <p:nvPr/>
-        </p:nvSpPr>
-        <p:spPr>
-          <a:xfrm xmlns:a="http://schemas.openxmlformats.org/drawingml/2006/main">
-            <a:off x="3238500" y="4572000"/>
-            <a:ext cx="2343150" cy="895350"/>
-          </a:xfrm>
-          <a:prstGeom xmlns:a="http://schemas.openxmlformats.org/drawingml/2006/main" prst="roundRect">
-            <a:avLst>
-              <a:gd name="adj" fmla="val 6383"/>
-            </a:avLst>
-          </a:prstGeom>
-          <a:solidFill xmlns:a="http://schemas.openxmlformats.org/drawingml/2006/main">
-            <a:srgbClr val="F8FAFC"/>
-          </a:solidFill>
-          <a:ln xmlns:a="http://schemas.openxmlformats.org/drawingml/2006/main" w="9525">
-            <a:solidFill>
-              <a:srgbClr val="CBD5E1"/>
-            </a:solidFill>
-            <a:prstDash val="solid"/>
-          </a:ln>
-        </p:spPr>
-      </p:sp>
-      <p:sp>
-        <p:nvSpPr>
-          <p:cNvPr id="33" name="">
-            <a:extLst xmlns:a="http://schemas.openxmlformats.org/drawingml/2006/main">
-              <a:ext uri="{FF2B5EF4-FFF2-40B4-BE49-F238E27FC236}">
-                <a16:creationId xmlns:a16="http://schemas.microsoft.com/office/drawing/2014/main" id="{BFC22588-0C36-4B1D-BFC5-02B5D2C0F5C1}"/>
-              </a:ext>
-            </a:extLst>
-          </p:cNvPr>
-          <p:cNvSpPr>
-            <a:spLocks xmlns:a="http://schemas.openxmlformats.org/drawingml/2006/main" noGrp="1"/>
-          </p:cNvSpPr>
-          <p:nvPr/>
-        </p:nvSpPr>
-        <p:spPr>
-          <a:xfrm xmlns:a="http://schemas.openxmlformats.org/drawingml/2006/main">
-            <a:off x="3390900" y="4705350"/>
-            <a:ext cx="2038350" cy="209550"/>
-          </a:xfrm>
-          <a:prstGeom xmlns:a="http://schemas.openxmlformats.org/drawingml/2006/main" prst="rect">
-            <a:avLst/>
-          </a:prstGeom>
-          <a:noFill xmlns:a="http://schemas.openxmlformats.org/drawingml/2006/main"/>
-          <a:ln xmlns:a="http://schemas.openxmlformats.org/drawingml/2006/main" w="0">
-            <a:noFill/>
-            <a:prstDash val="solid"/>
-          </a:ln>
-        </p:spPr>
-        <p:txBody>
-          <a:bodyPr xmlns:a="http://schemas.openxmlformats.org/drawingml/2006/main" anchor="t"/>
-          <a:lstStyle xmlns:a="http://schemas.openxmlformats.org/drawingml/2006/main"/>
-          <a:p xmlns:a="http://schemas.openxmlformats.org/drawingml/2006/main">
-            <a:pPr algn="l">
-              <a:defRPr sz="1125" b="1">
-                <a:solidFill>
-                  <a:srgbClr val="64748B"/>
-                </a:solidFill>
-              </a:defRPr>
-            </a:pPr>
-            <a:r>
-              <a:rPr sz="1125" b="1">
-                <a:solidFill>
-                  <a:srgbClr val="64748B"/>
-                </a:solidFill>
-              </a:rPr>
-              <a:t>Memory fraction static</a:t>
-            </a:r>
-          </a:p>
-        </p:txBody>
-      </p:sp>
-      <p:sp>
-        <p:nvSpPr>
-          <p:cNvPr id="34" name="">
-            <a:extLst xmlns:a="http://schemas.openxmlformats.org/drawingml/2006/main">
-              <a:ext uri="{FF2B5EF4-FFF2-40B4-BE49-F238E27FC236}">
-                <a16:creationId xmlns:a16="http://schemas.microsoft.com/office/drawing/2014/main" id="{2A19B398-9432-43BF-8860-3B44EDED0559}"/>
-              </a:ext>
-            </a:extLst>
-          </p:cNvPr>
-          <p:cNvSpPr>
-            <a:spLocks xmlns:a="http://schemas.openxmlformats.org/drawingml/2006/main" noGrp="1"/>
-          </p:cNvSpPr>
-          <p:nvPr/>
-        </p:nvSpPr>
-        <p:spPr>
-          <a:xfrm xmlns:a="http://schemas.openxmlformats.org/drawingml/2006/main">
-            <a:off x="3390900" y="4972050"/>
-            <a:ext cx="2038350" cy="400050"/>
-          </a:xfrm>
-          <a:prstGeom xmlns:a="http://schemas.openxmlformats.org/drawingml/2006/main" prst="rect">
-            <a:avLst/>
-          </a:prstGeom>
-          <a:noFill xmlns:a="http://schemas.openxmlformats.org/drawingml/2006/main"/>
-          <a:ln xmlns:a="http://schemas.openxmlformats.org/drawingml/2006/main" w="0">
-            <a:noFill/>
-            <a:prstDash val="solid"/>
-          </a:ln>
-        </p:spPr>
-        <p:txBody>
-          <a:bodyPr xmlns:a="http://schemas.openxmlformats.org/drawingml/2006/main" anchor="t"/>
-          <a:lstStyle xmlns:a="http://schemas.openxmlformats.org/drawingml/2006/main"/>
-          <a:p xmlns:a="http://schemas.openxmlformats.org/drawingml/2006/main">
-            <a:pPr algn="l">
-              <a:defRPr sz="1575" b="1">
-                <a:solidFill>
-                  <a:srgbClr val="0F172A"/>
-                </a:solidFill>
-              </a:defRPr>
-            </a:pPr>
-            <a:r>
-              <a:rPr sz="1575" b="1">
-                <a:solidFill>
-                  <a:srgbClr val="0F172A"/>
-                </a:solidFill>
-              </a:rPr>
-              <a:t>0.72</a:t>
-            </a:r>
-          </a:p>
-        </p:txBody>
-      </p:sp>
-      <p:sp>
-        <p:nvSpPr>
-          <p:cNvPr id="35" name="">
-            <a:extLst xmlns:a="http://schemas.openxmlformats.org/drawingml/2006/main">
-              <a:ext uri="{FF2B5EF4-FFF2-40B4-BE49-F238E27FC236}">
-                <a16:creationId xmlns:a16="http://schemas.microsoft.com/office/drawing/2014/main" id="{09437138-7BE3-4608-97E0-4074355190C0}"/>
-              </a:ext>
-            </a:extLst>
-          </p:cNvPr>
-          <p:cNvSpPr>
-            <a:spLocks xmlns:a="http://schemas.openxmlformats.org/drawingml/2006/main" noGrp="1"/>
-          </p:cNvSpPr>
-          <p:nvPr/>
-        </p:nvSpPr>
-        <p:spPr>
-          <a:xfrm xmlns:a="http://schemas.openxmlformats.org/drawingml/2006/main">
-            <a:off x="5810250" y="4572000"/>
-            <a:ext cx="2343150" cy="895350"/>
-          </a:xfrm>
-          <a:prstGeom xmlns:a="http://schemas.openxmlformats.org/drawingml/2006/main" prst="roundRect">
-            <a:avLst>
-              <a:gd name="adj" fmla="val 6383"/>
-            </a:avLst>
-          </a:prstGeom>
-          <a:solidFill xmlns:a="http://schemas.openxmlformats.org/drawingml/2006/main">
-            <a:srgbClr val="F8FAFC"/>
-          </a:solidFill>
-          <a:ln xmlns:a="http://schemas.openxmlformats.org/drawingml/2006/main" w="9525">
-            <a:solidFill>
-              <a:srgbClr val="CBD5E1"/>
-            </a:solidFill>
-            <a:prstDash val="solid"/>
-          </a:ln>
-        </p:spPr>
-      </p:sp>
-      <p:sp>
-        <p:nvSpPr>
-          <p:cNvPr id="36" name="">
-            <a:extLst xmlns:a="http://schemas.openxmlformats.org/drawingml/2006/main">
-              <a:ext uri="{FF2B5EF4-FFF2-40B4-BE49-F238E27FC236}">
-                <a16:creationId xmlns:a16="http://schemas.microsoft.com/office/drawing/2014/main" id="{C1E6A6B1-EC17-4CCC-B944-0F10B6E57B42}"/>
-              </a:ext>
-            </a:extLst>
-          </p:cNvPr>
-          <p:cNvSpPr>
-            <a:spLocks xmlns:a="http://schemas.openxmlformats.org/drawingml/2006/main" noGrp="1"/>
-          </p:cNvSpPr>
-          <p:nvPr/>
-        </p:nvSpPr>
-        <p:spPr>
-          <a:xfrm xmlns:a="http://schemas.openxmlformats.org/drawingml/2006/main">
-            <a:off x="5962650" y="4705350"/>
-            <a:ext cx="2038350" cy="209550"/>
-          </a:xfrm>
-          <a:prstGeom xmlns:a="http://schemas.openxmlformats.org/drawingml/2006/main" prst="rect">
-            <a:avLst/>
-          </a:prstGeom>
-          <a:noFill xmlns:a="http://schemas.openxmlformats.org/drawingml/2006/main"/>
-          <a:ln xmlns:a="http://schemas.openxmlformats.org/drawingml/2006/main" w="0">
-            <a:noFill/>
-            <a:prstDash val="solid"/>
-          </a:ln>
-        </p:spPr>
-        <p:txBody>
-          <a:bodyPr xmlns:a="http://schemas.openxmlformats.org/drawingml/2006/main" anchor="t"/>
-          <a:lstStyle xmlns:a="http://schemas.openxmlformats.org/drawingml/2006/main"/>
-          <a:p xmlns:a="http://schemas.openxmlformats.org/drawingml/2006/main">
-            <a:pPr algn="l">
-              <a:defRPr sz="1125" b="1">
-                <a:solidFill>
-                  <a:srgbClr val="64748B"/>
-                </a:solidFill>
-              </a:defRPr>
-            </a:pPr>
-            <a:r>
-              <a:rPr sz="1125" b="1">
-                <a:solidFill>
-                  <a:srgbClr val="64748B"/>
-                </a:solidFill>
-              </a:rPr>
-              <a:t>Tensor parallel</a:t>
-            </a:r>
-          </a:p>
-        </p:txBody>
-      </p:sp>
-      <p:sp>
-        <p:nvSpPr>
-          <p:cNvPr id="37" name="">
-            <a:extLst xmlns:a="http://schemas.openxmlformats.org/drawingml/2006/main">
-              <a:ext uri="{FF2B5EF4-FFF2-40B4-BE49-F238E27FC236}">
-                <a16:creationId xmlns:a16="http://schemas.microsoft.com/office/drawing/2014/main" id="{9F04F906-178A-4E85-8463-A3EBAD7C29DF}"/>
-              </a:ext>
-            </a:extLst>
-          </p:cNvPr>
-          <p:cNvSpPr>
-            <a:spLocks xmlns:a="http://schemas.openxmlformats.org/drawingml/2006/main" noGrp="1"/>
-          </p:cNvSpPr>
-          <p:nvPr/>
-        </p:nvSpPr>
-        <p:spPr>
-          <a:xfrm xmlns:a="http://schemas.openxmlformats.org/drawingml/2006/main">
-            <a:off x="5962650" y="4972050"/>
-            <a:ext cx="2038350" cy="400050"/>
-          </a:xfrm>
-          <a:prstGeom xmlns:a="http://schemas.openxmlformats.org/drawingml/2006/main" prst="rect">
-            <a:avLst/>
-          </a:prstGeom>
-          <a:noFill xmlns:a="http://schemas.openxmlformats.org/drawingml/2006/main"/>
-          <a:ln xmlns:a="http://schemas.openxmlformats.org/drawingml/2006/main" w="0">
-            <a:noFill/>
-            <a:prstDash val="solid"/>
-          </a:ln>
-        </p:spPr>
-        <p:txBody>
-          <a:bodyPr xmlns:a="http://schemas.openxmlformats.org/drawingml/2006/main" anchor="t"/>
-          <a:lstStyle xmlns:a="http://schemas.openxmlformats.org/drawingml/2006/main"/>
-          <a:p xmlns:a="http://schemas.openxmlformats.org/drawingml/2006/main">
-            <a:pPr algn="l">
-              <a:defRPr sz="1575" b="1">
-                <a:solidFill>
-                  <a:srgbClr val="0F172A"/>
-                </a:solidFill>
-              </a:defRPr>
-            </a:pPr>
-            <a:r>
-              <a:rPr sz="1575" b="1">
-                <a:solidFill>
-                  <a:srgbClr val="0F172A"/>
-                </a:solidFill>
-              </a:rPr>
-              <a:t>TP = 1</a:t>
-            </a:r>
-          </a:p>
-        </p:txBody>
-      </p:sp>
-      <p:sp>
-        <p:nvSpPr>
-          <p:cNvPr id="38" name="">
-            <a:extLst xmlns:a="http://schemas.openxmlformats.org/drawingml/2006/main">
-              <a:ext uri="{FF2B5EF4-FFF2-40B4-BE49-F238E27FC236}">
-                <a16:creationId xmlns:a16="http://schemas.microsoft.com/office/drawing/2014/main" id="{8AC64079-9D19-4EFC-80E5-DE028C22C33E}"/>
-              </a:ext>
-            </a:extLst>
-          </p:cNvPr>
-          <p:cNvSpPr>
-            <a:spLocks xmlns:a="http://schemas.openxmlformats.org/drawingml/2006/main" noGrp="1"/>
-          </p:cNvSpPr>
-          <p:nvPr/>
-        </p:nvSpPr>
-        <p:spPr>
-          <a:xfrm xmlns:a="http://schemas.openxmlformats.org/drawingml/2006/main">
-            <a:off x="8382000" y="4572000"/>
-            <a:ext cx="2343150" cy="895350"/>
-          </a:xfrm>
-          <a:prstGeom xmlns:a="http://schemas.openxmlformats.org/drawingml/2006/main" prst="roundRect">
-            <a:avLst>
-              <a:gd name="adj" fmla="val 6383"/>
-            </a:avLst>
-          </a:prstGeom>
-          <a:solidFill xmlns:a="http://schemas.openxmlformats.org/drawingml/2006/main">
-            <a:srgbClr val="FFF7ED"/>
-          </a:solidFill>
-          <a:ln xmlns:a="http://schemas.openxmlformats.org/drawingml/2006/main" w="9525">
-            <a:solidFill>
-              <a:srgbClr val="FED7AA"/>
-            </a:solidFill>
-            <a:prstDash val="solid"/>
-          </a:ln>
-        </p:spPr>
-      </p:sp>
-      <p:sp>
-        <p:nvSpPr>
-          <p:cNvPr id="39" name="">
-            <a:extLst xmlns:a="http://schemas.openxmlformats.org/drawingml/2006/main">
-              <a:ext uri="{FF2B5EF4-FFF2-40B4-BE49-F238E27FC236}">
-                <a16:creationId xmlns:a16="http://schemas.microsoft.com/office/drawing/2014/main" id="{A90BCC01-5B9A-4A6D-A232-BCE1EE716BB5}"/>
-              </a:ext>
-            </a:extLst>
-          </p:cNvPr>
-          <p:cNvSpPr>
-            <a:spLocks xmlns:a="http://schemas.openxmlformats.org/drawingml/2006/main" noGrp="1"/>
-          </p:cNvSpPr>
-          <p:nvPr/>
-        </p:nvSpPr>
-        <p:spPr>
-          <a:xfrm xmlns:a="http://schemas.openxmlformats.org/drawingml/2006/main">
-            <a:off x="8534400" y="4705350"/>
-            <a:ext cx="2038350" cy="209550"/>
-          </a:xfrm>
-          <a:prstGeom xmlns:a="http://schemas.openxmlformats.org/drawingml/2006/main" prst="rect">
-            <a:avLst/>
-          </a:prstGeom>
-          <a:noFill xmlns:a="http://schemas.openxmlformats.org/drawingml/2006/main"/>
-          <a:ln xmlns:a="http://schemas.openxmlformats.org/drawingml/2006/main" w="0">
-            <a:noFill/>
-            <a:prstDash val="solid"/>
-          </a:ln>
-        </p:spPr>
-        <p:txBody>
-          <a:bodyPr xmlns:a="http://schemas.openxmlformats.org/drawingml/2006/main" anchor="t"/>
-          <a:lstStyle xmlns:a="http://schemas.openxmlformats.org/drawingml/2006/main"/>
-          <a:p xmlns:a="http://schemas.openxmlformats.org/drawingml/2006/main">
-            <a:pPr algn="l">
-              <a:defRPr sz="1125" b="1">
-                <a:solidFill>
-                  <a:srgbClr val="64748B"/>
-                </a:solidFill>
-              </a:defRPr>
-            </a:pPr>
-            <a:r>
-              <a:rPr sz="1125" b="1">
-                <a:solidFill>
-                  <a:srgbClr val="64748B"/>
-                </a:solidFill>
-              </a:rPr>
-              <a:t>HiCache policy</a:t>
-            </a:r>
-          </a:p>
-        </p:txBody>
-      </p:sp>
-      <p:sp>
-        <p:nvSpPr>
-          <p:cNvPr id="40" name="">
-            <a:extLst xmlns:a="http://schemas.openxmlformats.org/drawingml/2006/main">
-              <a:ext uri="{FF2B5EF4-FFF2-40B4-BE49-F238E27FC236}">
-                <a16:creationId xmlns:a16="http://schemas.microsoft.com/office/drawing/2014/main" id="{D70B7FB8-AB0F-4845-A1A3-5B83408D94E2}"/>
-              </a:ext>
-            </a:extLst>
-          </p:cNvPr>
-          <p:cNvSpPr>
-            <a:spLocks xmlns:a="http://schemas.openxmlformats.org/drawingml/2006/main" noGrp="1"/>
-          </p:cNvSpPr>
-          <p:nvPr/>
-        </p:nvSpPr>
-        <p:spPr>
-          <a:xfrm xmlns:a="http://schemas.openxmlformats.org/drawingml/2006/main">
-            <a:off x="8534400" y="4972050"/>
-            <a:ext cx="2038350" cy="400050"/>
-          </a:xfrm>
-          <a:prstGeom xmlns:a="http://schemas.openxmlformats.org/drawingml/2006/main" prst="rect">
-            <a:avLst/>
-          </a:prstGeom>
-          <a:noFill xmlns:a="http://schemas.openxmlformats.org/drawingml/2006/main"/>
-          <a:ln xmlns:a="http://schemas.openxmlformats.org/drawingml/2006/main" w="0">
-            <a:noFill/>
-            <a:prstDash val="solid"/>
-          </a:ln>
-        </p:spPr>
-        <p:txBody>
-          <a:bodyPr xmlns:a="http://schemas.openxmlformats.org/drawingml/2006/main" anchor="t"/>
-          <a:lstStyle xmlns:a="http://schemas.openxmlformats.org/drawingml/2006/main"/>
-          <a:p xmlns:a="http://schemas.openxmlformats.org/drawingml/2006/main">
-            <a:pPr algn="l">
-              <a:defRPr sz="1350" b="1">
-                <a:solidFill>
-                  <a:srgbClr val="0F172A"/>
-                </a:solidFill>
-              </a:defRPr>
-            </a:pPr>
-            <a:r>
-              <a:rPr sz="1350" b="1">
-                <a:solidFill>
-                  <a:srgbClr val="0F172A"/>
-                </a:solidFill>
-              </a:rPr>
-              <a:t>direct + write-through</a:t>
-            </a:r>
-          </a:p>
-        </p:txBody>
-      </p:sp>
-      <p:sp>
-        <p:nvSpPr>
-          <p:cNvPr id="41" name="">
-            <a:extLst xmlns:a="http://schemas.openxmlformats.org/drawingml/2006/main">
-              <a:ext uri="{FF2B5EF4-FFF2-40B4-BE49-F238E27FC236}">
-                <a16:creationId xmlns:a16="http://schemas.microsoft.com/office/drawing/2014/main" id="{7B1F3AC4-0F56-4A98-8C5F-B3C0C620DDE1}"/>
+              <a:t>server</a:t>
+            </a:r>
+          </a:p>
+        </p:txBody>
+      </p:sp>
+      <p:sp>
+        <p:nvSpPr>
+          <p:cNvPr id="11" name="">
+            <a:extLst xmlns:a="http://schemas.openxmlformats.org/drawingml/2006/main">
+              <a:ext uri="{FF2B5EF4-FFF2-40B4-BE49-F238E27FC236}">
+                <a16:creationId xmlns:a16="http://schemas.microsoft.com/office/drawing/2014/main" id="{0F7942B0-E335-4763-A512-E904DE04BF82}"/>
               </a:ext>
             </a:extLst>
           </p:cNvPr>
@@ -7744,17 +6343,17 @@
                   <a:srgbClr val="64748B"/>
                 </a:solidFill>
               </a:rPr>
-              <a:t>Source: latest_master_report.html setup section and run configuration</a:t>
-            </a:r>
-          </a:p>
-        </p:txBody>
-      </p:sp>
-      <p:sp>
-        <p:nvSpPr>
-          <p:cNvPr id="42" name="">
-            <a:extLst xmlns:a="http://schemas.openxmlformats.org/drawingml/2006/main">
-              <a:ext uri="{FF2B5EF4-FFF2-40B4-BE49-F238E27FC236}">
-                <a16:creationId xmlns:a16="http://schemas.microsoft.com/office/drawing/2014/main" id="{DA640CEE-D46F-4360-A0B5-4FC8FBD42A24}"/>
+              <a:t>Source: latest_master_report.html, Experiment Setup And Manager Summary</a:t>
+            </a:r>
+          </a:p>
+        </p:txBody>
+      </p:sp>
+      <p:sp>
+        <p:nvSpPr>
+          <p:cNvPr id="12" name="">
+            <a:extLst xmlns:a="http://schemas.openxmlformats.org/drawingml/2006/main">
+              <a:ext uri="{FF2B5EF4-FFF2-40B4-BE49-F238E27FC236}">
+                <a16:creationId xmlns:a16="http://schemas.microsoft.com/office/drawing/2014/main" id="{A7DBC3B8-CDD7-4667-947B-B803B8D6B65C}"/>
               </a:ext>
             </a:extLst>
           </p:cNvPr>
@@ -7801,10 +6400,10 @@
       </p:sp>
       <p:sp>
         <p:nvSpPr>
-          <p:cNvPr id="43" name="">
-            <a:extLst xmlns:a="http://schemas.openxmlformats.org/drawingml/2006/main">
-              <a:ext uri="{FF2B5EF4-FFF2-40B4-BE49-F238E27FC236}">
-                <a16:creationId xmlns:a16="http://schemas.microsoft.com/office/drawing/2014/main" id="{FDA669F1-FFD5-4FC6-ABB8-6D3AF770FCE5}"/>
+          <p:cNvPr id="13" name="">
+            <a:extLst xmlns:a="http://schemas.openxmlformats.org/drawingml/2006/main">
+              <a:ext uri="{FF2B5EF4-FFF2-40B4-BE49-F238E27FC236}">
+                <a16:creationId xmlns:a16="http://schemas.microsoft.com/office/drawing/2014/main" id="{86FD3DE0-660A-4AC3-B2D8-3414F3D00F49}"/>
               </a:ext>
             </a:extLst>
           </p:cNvPr>
@@ -7852,7 +6451,7 @@
     </p:spTree>
     <p:extLst>
       <p:ext uri="{BB962C8B-B14F-4D97-AF65-F5344CB8AC3E}">
-        <p14:creationId xmlns:p14="http://schemas.microsoft.com/office/powerpoint/2010/main" val="607571319"/>
+        <p14:creationId xmlns:p14="http://schemas.microsoft.com/office/powerpoint/2010/main" val="520072162"/>
       </p:ext>
     </p:extLst>
   </p:cSld>
@@ -7883,7 +6482,7 @@
           <p:cNvPr id="26" name="">
             <a:extLst xmlns:a="http://schemas.openxmlformats.org/drawingml/2006/main">
               <a:ext uri="{FF2B5EF4-FFF2-40B4-BE49-F238E27FC236}">
-                <a16:creationId xmlns:a16="http://schemas.microsoft.com/office/drawing/2014/main" id="{43B133D8-36FC-41E2-9A95-30B9F70BBDEF}"/>
+                <a16:creationId xmlns:a16="http://schemas.microsoft.com/office/drawing/2014/main" id="{FF944E50-CB2B-4C24-B56B-F6E8CFAE32F0}"/>
               </a:ext>
             </a:extLst>
           </p:cNvPr>
@@ -7933,7 +6532,7 @@
           <p:cNvPr id="2" name="">
             <a:extLst xmlns:a="http://schemas.openxmlformats.org/drawingml/2006/main">
               <a:ext uri="{FF2B5EF4-FFF2-40B4-BE49-F238E27FC236}">
-                <a16:creationId xmlns:a16="http://schemas.microsoft.com/office/drawing/2014/main" id="{56C7D7D2-EB65-4398-B221-613AB92EB068}"/>
+                <a16:creationId xmlns:a16="http://schemas.microsoft.com/office/drawing/2014/main" id="{EAF90778-4130-4522-8E99-72BFD4B0ACAB}"/>
               </a:ext>
             </a:extLst>
           </p:cNvPr>
@@ -7983,7 +6582,7 @@
           <p:cNvPr id="3" name="">
             <a:extLst xmlns:a="http://schemas.openxmlformats.org/drawingml/2006/main">
               <a:ext uri="{FF2B5EF4-FFF2-40B4-BE49-F238E27FC236}">
-                <a16:creationId xmlns:a16="http://schemas.microsoft.com/office/drawing/2014/main" id="{FF4FAD7E-08BC-4BCF-BAE1-8F2D3806C409}"/>
+                <a16:creationId xmlns:a16="http://schemas.microsoft.com/office/drawing/2014/main" id="{AC9F4BCA-F928-4220-BEDC-D5CBA1CF50C6}"/>
               </a:ext>
             </a:extLst>
           </p:cNvPr>
@@ -8018,7 +6617,7 @@
           <p:cNvPr id="4" name="">
             <a:extLst xmlns:a="http://schemas.openxmlformats.org/drawingml/2006/main">
               <a:ext uri="{FF2B5EF4-FFF2-40B4-BE49-F238E27FC236}">
-                <a16:creationId xmlns:a16="http://schemas.microsoft.com/office/drawing/2014/main" id="{6284BA9F-915A-49BF-93D1-CEAC0692ED66}"/>
+                <a16:creationId xmlns:a16="http://schemas.microsoft.com/office/drawing/2014/main" id="{0419A695-4F67-4F86-9F67-52A3904C4BEF}"/>
               </a:ext>
             </a:extLst>
           </p:cNvPr>
@@ -8068,7 +6667,7 @@
           <p:cNvPr id="5" name="">
             <a:extLst xmlns:a="http://schemas.openxmlformats.org/drawingml/2006/main">
               <a:ext uri="{FF2B5EF4-FFF2-40B4-BE49-F238E27FC236}">
-                <a16:creationId xmlns:a16="http://schemas.microsoft.com/office/drawing/2014/main" id="{7BA0716D-08AD-4DAF-A736-66D45C018D47}"/>
+                <a16:creationId xmlns:a16="http://schemas.microsoft.com/office/drawing/2014/main" id="{90002F90-8781-432D-B568-70D637BF48D2}"/>
               </a:ext>
             </a:extLst>
           </p:cNvPr>
@@ -8099,7 +6698,7 @@
           <p:cNvPr id="6" name="">
             <a:extLst xmlns:a="http://schemas.openxmlformats.org/drawingml/2006/main">
               <a:ext uri="{FF2B5EF4-FFF2-40B4-BE49-F238E27FC236}">
-                <a16:creationId xmlns:a16="http://schemas.microsoft.com/office/drawing/2014/main" id="{DFE81315-318D-43AC-A6DA-769523898FEB}"/>
+                <a16:creationId xmlns:a16="http://schemas.microsoft.com/office/drawing/2014/main" id="{9BD870E9-0EE6-433F-BE42-CE43072233F9}"/>
               </a:ext>
             </a:extLst>
           </p:cNvPr>
@@ -8149,7 +6748,7 @@
           <p:cNvPr id="7" name="">
             <a:extLst xmlns:a="http://schemas.openxmlformats.org/drawingml/2006/main">
               <a:ext uri="{FF2B5EF4-FFF2-40B4-BE49-F238E27FC236}">
-                <a16:creationId xmlns:a16="http://schemas.microsoft.com/office/drawing/2014/main" id="{2CB513AF-5075-4586-8CEE-68D185DF134A}"/>
+                <a16:creationId xmlns:a16="http://schemas.microsoft.com/office/drawing/2014/main" id="{DA43180D-0EE3-41B0-BEBB-1D2378D11562}"/>
               </a:ext>
             </a:extLst>
           </p:cNvPr>
@@ -8180,7 +6779,7 @@
           <p:cNvPr id="8" name="">
             <a:extLst xmlns:a="http://schemas.openxmlformats.org/drawingml/2006/main">
               <a:ext uri="{FF2B5EF4-FFF2-40B4-BE49-F238E27FC236}">
-                <a16:creationId xmlns:a16="http://schemas.microsoft.com/office/drawing/2014/main" id="{7DC3254C-767F-4361-BD88-5C472F8BE027}"/>
+                <a16:creationId xmlns:a16="http://schemas.microsoft.com/office/drawing/2014/main" id="{99A651CD-2377-4FD7-A938-CD2FC1C1F66F}"/>
               </a:ext>
             </a:extLst>
           </p:cNvPr>
@@ -8230,7 +6829,7 @@
           <p:cNvPr id="9" name="">
             <a:extLst xmlns:a="http://schemas.openxmlformats.org/drawingml/2006/main">
               <a:ext uri="{FF2B5EF4-FFF2-40B4-BE49-F238E27FC236}">
-                <a16:creationId xmlns:a16="http://schemas.microsoft.com/office/drawing/2014/main" id="{D0AE9A68-C86E-4A42-8EA8-4158FB3606FC}"/>
+                <a16:creationId xmlns:a16="http://schemas.microsoft.com/office/drawing/2014/main" id="{A5699B7D-4895-4324-839E-B157B26596A0}"/>
               </a:ext>
             </a:extLst>
           </p:cNvPr>
@@ -8261,7 +6860,7 @@
           <p:cNvPr id="10" name="">
             <a:extLst xmlns:a="http://schemas.openxmlformats.org/drawingml/2006/main">
               <a:ext uri="{FF2B5EF4-FFF2-40B4-BE49-F238E27FC236}">
-                <a16:creationId xmlns:a16="http://schemas.microsoft.com/office/drawing/2014/main" id="{B8FA3165-95C7-452F-AF68-B071B8B345A8}"/>
+                <a16:creationId xmlns:a16="http://schemas.microsoft.com/office/drawing/2014/main" id="{9201B88B-7283-46B5-9A41-8D863AC0B3AB}"/>
               </a:ext>
             </a:extLst>
           </p:cNvPr>
@@ -8311,7 +6910,7 @@
           <p:cNvPr id="11" name="">
             <a:extLst xmlns:a="http://schemas.openxmlformats.org/drawingml/2006/main">
               <a:ext uri="{FF2B5EF4-FFF2-40B4-BE49-F238E27FC236}">
-                <a16:creationId xmlns:a16="http://schemas.microsoft.com/office/drawing/2014/main" id="{8F1B2C55-920F-4198-BDBF-7A434E5A6478}"/>
+                <a16:creationId xmlns:a16="http://schemas.microsoft.com/office/drawing/2014/main" id="{EF7E450D-259A-4D0E-A5FF-5A16A20E30BA}"/>
               </a:ext>
             </a:extLst>
           </p:cNvPr>
@@ -8342,7 +6941,7 @@
           <p:cNvPr id="12" name="">
             <a:extLst xmlns:a="http://schemas.openxmlformats.org/drawingml/2006/main">
               <a:ext uri="{FF2B5EF4-FFF2-40B4-BE49-F238E27FC236}">
-                <a16:creationId xmlns:a16="http://schemas.microsoft.com/office/drawing/2014/main" id="{303B1280-49D0-4236-847F-65F97891353E}"/>
+                <a16:creationId xmlns:a16="http://schemas.microsoft.com/office/drawing/2014/main" id="{354E9B81-A648-4F16-87FC-4E06FE2939EB}"/>
               </a:ext>
             </a:extLst>
           </p:cNvPr>
@@ -8392,7 +6991,7 @@
           <p:cNvPr id="13" name="">
             <a:extLst xmlns:a="http://schemas.openxmlformats.org/drawingml/2006/main">
               <a:ext uri="{FF2B5EF4-FFF2-40B4-BE49-F238E27FC236}">
-                <a16:creationId xmlns:a16="http://schemas.microsoft.com/office/drawing/2014/main" id="{F862CA72-161E-4011-92CE-86C96CDBA670}"/>
+                <a16:creationId xmlns:a16="http://schemas.microsoft.com/office/drawing/2014/main" id="{7F81AD45-9020-472A-8718-FFC8735A78E3}"/>
               </a:ext>
             </a:extLst>
           </p:cNvPr>
@@ -8442,7 +7041,7 @@
           <p:cNvPr id="14" name="">
             <a:extLst xmlns:a="http://schemas.openxmlformats.org/drawingml/2006/main">
               <a:ext uri="{FF2B5EF4-FFF2-40B4-BE49-F238E27FC236}">
-                <a16:creationId xmlns:a16="http://schemas.microsoft.com/office/drawing/2014/main" id="{97CC03F3-C3C2-43F1-BBE1-48046526646B}"/>
+                <a16:creationId xmlns:a16="http://schemas.microsoft.com/office/drawing/2014/main" id="{0BCDB1AD-53A4-47A2-B0D3-ED862C010D95}"/>
               </a:ext>
             </a:extLst>
           </p:cNvPr>
@@ -8477,7 +7076,7 @@
           <p:cNvPr id="15" name="">
             <a:extLst xmlns:a="http://schemas.openxmlformats.org/drawingml/2006/main">
               <a:ext uri="{FF2B5EF4-FFF2-40B4-BE49-F238E27FC236}">
-                <a16:creationId xmlns:a16="http://schemas.microsoft.com/office/drawing/2014/main" id="{5A3875DD-33B5-4BDE-B1DC-631ECB12E139}"/>
+                <a16:creationId xmlns:a16="http://schemas.microsoft.com/office/drawing/2014/main" id="{8FEB0E11-A01C-4401-9C3D-1D80D105F03D}"/>
               </a:ext>
             </a:extLst>
           </p:cNvPr>
@@ -8527,7 +7126,7 @@
           <p:cNvPr id="16" name="">
             <a:extLst xmlns:a="http://schemas.openxmlformats.org/drawingml/2006/main">
               <a:ext uri="{FF2B5EF4-FFF2-40B4-BE49-F238E27FC236}">
-                <a16:creationId xmlns:a16="http://schemas.microsoft.com/office/drawing/2014/main" id="{78F08C0D-B270-40FF-9360-8E8A5F9C568A}"/>
+                <a16:creationId xmlns:a16="http://schemas.microsoft.com/office/drawing/2014/main" id="{4F6C9403-4839-42D2-A1B9-92AA08C825B7}"/>
               </a:ext>
             </a:extLst>
           </p:cNvPr>
@@ -8558,7 +7157,7 @@
           <p:cNvPr id="17" name="">
             <a:extLst xmlns:a="http://schemas.openxmlformats.org/drawingml/2006/main">
               <a:ext uri="{FF2B5EF4-FFF2-40B4-BE49-F238E27FC236}">
-                <a16:creationId xmlns:a16="http://schemas.microsoft.com/office/drawing/2014/main" id="{58BB8879-846C-4096-9BB5-417CE7F66B24}"/>
+                <a16:creationId xmlns:a16="http://schemas.microsoft.com/office/drawing/2014/main" id="{B2183E7D-BAF5-464C-B628-73503964ED1C}"/>
               </a:ext>
             </a:extLst>
           </p:cNvPr>
@@ -8608,7 +7207,7 @@
           <p:cNvPr id="18" name="">
             <a:extLst xmlns:a="http://schemas.openxmlformats.org/drawingml/2006/main">
               <a:ext uri="{FF2B5EF4-FFF2-40B4-BE49-F238E27FC236}">
-                <a16:creationId xmlns:a16="http://schemas.microsoft.com/office/drawing/2014/main" id="{55FF0281-08A3-4CCE-9676-9056E55837CA}"/>
+                <a16:creationId xmlns:a16="http://schemas.microsoft.com/office/drawing/2014/main" id="{99B1C59B-1E4E-4CD2-B9E3-4C1339D01E31}"/>
               </a:ext>
             </a:extLst>
           </p:cNvPr>
@@ -8639,7 +7238,7 @@
           <p:cNvPr id="19" name="">
             <a:extLst xmlns:a="http://schemas.openxmlformats.org/drawingml/2006/main">
               <a:ext uri="{FF2B5EF4-FFF2-40B4-BE49-F238E27FC236}">
-                <a16:creationId xmlns:a16="http://schemas.microsoft.com/office/drawing/2014/main" id="{5A69BB1B-67C0-407C-8CC8-FA418D0B5F49}"/>
+                <a16:creationId xmlns:a16="http://schemas.microsoft.com/office/drawing/2014/main" id="{F6A2BAA8-DA29-471A-AF3E-3FCE3903EEF9}"/>
               </a:ext>
             </a:extLst>
           </p:cNvPr>
@@ -8689,7 +7288,7 @@
           <p:cNvPr id="20" name="">
             <a:extLst xmlns:a="http://schemas.openxmlformats.org/drawingml/2006/main">
               <a:ext uri="{FF2B5EF4-FFF2-40B4-BE49-F238E27FC236}">
-                <a16:creationId xmlns:a16="http://schemas.microsoft.com/office/drawing/2014/main" id="{F49B8BE5-08C5-483E-AD85-1EF8671BBA39}"/>
+                <a16:creationId xmlns:a16="http://schemas.microsoft.com/office/drawing/2014/main" id="{496BCE7D-9406-46F9-9AFA-DD765737D5B4}"/>
               </a:ext>
             </a:extLst>
           </p:cNvPr>
@@ -8720,7 +7319,7 @@
           <p:cNvPr id="21" name="">
             <a:extLst xmlns:a="http://schemas.openxmlformats.org/drawingml/2006/main">
               <a:ext uri="{FF2B5EF4-FFF2-40B4-BE49-F238E27FC236}">
-                <a16:creationId xmlns:a16="http://schemas.microsoft.com/office/drawing/2014/main" id="{58AD7F28-6970-45A6-A405-ADF5E0AA3C7D}"/>
+                <a16:creationId xmlns:a16="http://schemas.microsoft.com/office/drawing/2014/main" id="{9F3D2E4E-8589-4EDC-A51C-5B4F59DB88CF}"/>
               </a:ext>
             </a:extLst>
           </p:cNvPr>
@@ -8770,7 +7369,7 @@
           <p:cNvPr id="22" name="">
             <a:extLst xmlns:a="http://schemas.openxmlformats.org/drawingml/2006/main">
               <a:ext uri="{FF2B5EF4-FFF2-40B4-BE49-F238E27FC236}">
-                <a16:creationId xmlns:a16="http://schemas.microsoft.com/office/drawing/2014/main" id="{11484F66-F65E-4EF9-90B6-9F0F4E22E35F}"/>
+                <a16:creationId xmlns:a16="http://schemas.microsoft.com/office/drawing/2014/main" id="{22CB5DCE-86F0-4C24-8412-BD1BE9ECFA61}"/>
               </a:ext>
             </a:extLst>
           </p:cNvPr>
@@ -8801,7 +7400,7 @@
           <p:cNvPr id="23" name="">
             <a:extLst xmlns:a="http://schemas.openxmlformats.org/drawingml/2006/main">
               <a:ext uri="{FF2B5EF4-FFF2-40B4-BE49-F238E27FC236}">
-                <a16:creationId xmlns:a16="http://schemas.microsoft.com/office/drawing/2014/main" id="{4675F407-ACED-4F53-88DC-C0E8AF21D0B7}"/>
+                <a16:creationId xmlns:a16="http://schemas.microsoft.com/office/drawing/2014/main" id="{6F69B058-D91C-4637-9436-F1FF3F0D3810}"/>
               </a:ext>
             </a:extLst>
           </p:cNvPr>
@@ -8851,7 +7450,7 @@
           <p:cNvPr id="24" name="">
             <a:extLst xmlns:a="http://schemas.openxmlformats.org/drawingml/2006/main">
               <a:ext uri="{FF2B5EF4-FFF2-40B4-BE49-F238E27FC236}">
-                <a16:creationId xmlns:a16="http://schemas.microsoft.com/office/drawing/2014/main" id="{88B70E44-9E47-4FFA-92A4-970EE5B5261B}"/>
+                <a16:creationId xmlns:a16="http://schemas.microsoft.com/office/drawing/2014/main" id="{1D1646C6-935D-4114-928E-9731AC769993}"/>
               </a:ext>
             </a:extLst>
           </p:cNvPr>
@@ -8901,7 +7500,7 @@
           <p:cNvPr id="25" name="">
             <a:extLst xmlns:a="http://schemas.openxmlformats.org/drawingml/2006/main">
               <a:ext uri="{FF2B5EF4-FFF2-40B4-BE49-F238E27FC236}">
-                <a16:creationId xmlns:a16="http://schemas.microsoft.com/office/drawing/2014/main" id="{D92D41CC-74EC-4F4D-987B-E0EDB6515A5E}"/>
+                <a16:creationId xmlns:a16="http://schemas.microsoft.com/office/drawing/2014/main" id="{6A0FBB1D-0755-438D-90E5-5ACCDD9FDA18}"/>
               </a:ext>
             </a:extLst>
           </p:cNvPr>
@@ -8949,7 +7548,7 @@
     </p:spTree>
     <p:extLst>
       <p:ext uri="{BB962C8B-B14F-4D97-AF65-F5344CB8AC3E}">
-        <p14:creationId xmlns:p14="http://schemas.microsoft.com/office/powerpoint/2010/main" val="1921973542"/>
+        <p14:creationId xmlns:p14="http://schemas.microsoft.com/office/powerpoint/2010/main" val="652562334"/>
       </p:ext>
     </p:extLst>
   </p:cSld>
@@ -8980,7 +7579,7 @@
           <p:cNvPr id="8" name="">
             <a:extLst xmlns:a="http://schemas.openxmlformats.org/drawingml/2006/main">
               <a:ext uri="{FF2B5EF4-FFF2-40B4-BE49-F238E27FC236}">
-                <a16:creationId xmlns:a16="http://schemas.microsoft.com/office/drawing/2014/main" id="{15C032E1-64FF-4FF7-A2EC-5631FAEDE309}"/>
+                <a16:creationId xmlns:a16="http://schemas.microsoft.com/office/drawing/2014/main" id="{198D01FD-846A-43BF-AE81-696FB16EE130}"/>
               </a:ext>
             </a:extLst>
           </p:cNvPr>
@@ -9030,7 +7629,7 @@
           <p:cNvPr id="2" name="">
             <a:extLst xmlns:a="http://schemas.openxmlformats.org/drawingml/2006/main">
               <a:ext uri="{FF2B5EF4-FFF2-40B4-BE49-F238E27FC236}">
-                <a16:creationId xmlns:a16="http://schemas.microsoft.com/office/drawing/2014/main" id="{AD2BE603-D614-44B4-8068-05D4C85CEA53}"/>
+                <a16:creationId xmlns:a16="http://schemas.microsoft.com/office/drawing/2014/main" id="{E55D17CE-A4E4-462B-8868-FF0690AA75A4}"/>
               </a:ext>
             </a:extLst>
           </p:cNvPr>
@@ -9080,7 +7679,7 @@
           <p:cNvPr id="3" name="">
             <a:extLst xmlns:a="http://schemas.openxmlformats.org/drawingml/2006/main">
               <a:ext uri="{FF2B5EF4-FFF2-40B4-BE49-F238E27FC236}">
-                <a16:creationId xmlns:a16="http://schemas.microsoft.com/office/drawing/2014/main" id="{A0B23157-8A3E-40C0-9CF9-0321EE5C4B5E}"/>
+                <a16:creationId xmlns:a16="http://schemas.microsoft.com/office/drawing/2014/main" id="{9594D784-E9A8-4D23-B8C7-8712094BD5A1}"/>
               </a:ext>
             </a:extLst>
           </p:cNvPr>
@@ -9119,7 +7718,7 @@
           <p:nvPr/>
         </p:nvPicPr>
         <p:blipFill>
-          <a:blip xmlns:r="http://schemas.openxmlformats.org/officeDocument/2006/relationships" xmlns:a="http://schemas.openxmlformats.org/drawingml/2006/main" r:embed="Rf6f1a72317b649e8"/>
+          <a:blip xmlns:r="http://schemas.openxmlformats.org/officeDocument/2006/relationships" xmlns:a="http://schemas.openxmlformats.org/drawingml/2006/main" r:embed="R5d31d76e677f42a1"/>
           <a:stretch xmlns:a="http://schemas.openxmlformats.org/drawingml/2006/main"/>
         </p:blipFill>
         <p:spPr>
@@ -9137,7 +7736,7 @@
           <p:cNvPr id="5" name="">
             <a:extLst xmlns:a="http://schemas.openxmlformats.org/drawingml/2006/main">
               <a:ext uri="{FF2B5EF4-FFF2-40B4-BE49-F238E27FC236}">
-                <a16:creationId xmlns:a16="http://schemas.microsoft.com/office/drawing/2014/main" id="{0C95FAF7-1A8F-4AED-B42E-99A8D1FC08CF}"/>
+                <a16:creationId xmlns:a16="http://schemas.microsoft.com/office/drawing/2014/main" id="{94F4B900-1A43-4D7D-B9A1-ECD1F46E7815}"/>
               </a:ext>
             </a:extLst>
           </p:cNvPr>
@@ -9187,7 +7786,7 @@
           <p:cNvPr id="6" name="">
             <a:extLst xmlns:a="http://schemas.openxmlformats.org/drawingml/2006/main">
               <a:ext uri="{FF2B5EF4-FFF2-40B4-BE49-F238E27FC236}">
-                <a16:creationId xmlns:a16="http://schemas.microsoft.com/office/drawing/2014/main" id="{C9EA2A8B-F625-4231-9A31-A90C894FCD1D}"/>
+                <a16:creationId xmlns:a16="http://schemas.microsoft.com/office/drawing/2014/main" id="{0FB17993-EF78-45E3-9B75-3AE0619856FC}"/>
               </a:ext>
             </a:extLst>
           </p:cNvPr>
@@ -9237,7 +7836,7 @@
           <p:cNvPr id="7" name="">
             <a:extLst xmlns:a="http://schemas.openxmlformats.org/drawingml/2006/main">
               <a:ext uri="{FF2B5EF4-FFF2-40B4-BE49-F238E27FC236}">
-                <a16:creationId xmlns:a16="http://schemas.microsoft.com/office/drawing/2014/main" id="{49CB5D53-F1CF-48C5-B053-9170DBE60679}"/>
+                <a16:creationId xmlns:a16="http://schemas.microsoft.com/office/drawing/2014/main" id="{10AFF26E-49FC-4389-8CC6-2A34EA2FBCF4}"/>
               </a:ext>
             </a:extLst>
           </p:cNvPr>
@@ -9285,7 +7884,7 @@
     </p:spTree>
     <p:extLst>
       <p:ext uri="{BB962C8B-B14F-4D97-AF65-F5344CB8AC3E}">
-        <p14:creationId xmlns:p14="http://schemas.microsoft.com/office/powerpoint/2010/main" val="1089820716"/>
+        <p14:creationId xmlns:p14="http://schemas.microsoft.com/office/powerpoint/2010/main" val="2137336462"/>
       </p:ext>
     </p:extLst>
   </p:cSld>
@@ -9316,7 +7915,7 @@
           <p:cNvPr id="16" name="">
             <a:extLst xmlns:a="http://schemas.openxmlformats.org/drawingml/2006/main">
               <a:ext uri="{FF2B5EF4-FFF2-40B4-BE49-F238E27FC236}">
-                <a16:creationId xmlns:a16="http://schemas.microsoft.com/office/drawing/2014/main" id="{18C9C0CB-F7A7-4BE9-ACB0-1C702AA840AC}"/>
+                <a16:creationId xmlns:a16="http://schemas.microsoft.com/office/drawing/2014/main" id="{F7D4C8B6-67C2-4AD1-911A-4B1085B2CE86}"/>
               </a:ext>
             </a:extLst>
           </p:cNvPr>
@@ -9366,7 +7965,7 @@
           <p:cNvPr id="2" name="">
             <a:extLst xmlns:a="http://schemas.openxmlformats.org/drawingml/2006/main">
               <a:ext uri="{FF2B5EF4-FFF2-40B4-BE49-F238E27FC236}">
-                <a16:creationId xmlns:a16="http://schemas.microsoft.com/office/drawing/2014/main" id="{CD065499-DFED-430E-9547-474C4B961A42}"/>
+                <a16:creationId xmlns:a16="http://schemas.microsoft.com/office/drawing/2014/main" id="{9BE30A09-D3BB-4AC5-A0C5-8B312A441218}"/>
               </a:ext>
             </a:extLst>
           </p:cNvPr>
@@ -9416,7 +8015,7 @@
           <p:cNvPr id="3" name="">
             <a:extLst xmlns:a="http://schemas.openxmlformats.org/drawingml/2006/main">
               <a:ext uri="{FF2B5EF4-FFF2-40B4-BE49-F238E27FC236}">
-                <a16:creationId xmlns:a16="http://schemas.microsoft.com/office/drawing/2014/main" id="{DA7CE27A-A994-41E8-A353-ADAC8AE6EA19}"/>
+                <a16:creationId xmlns:a16="http://schemas.microsoft.com/office/drawing/2014/main" id="{970D3739-3191-4C0C-8211-7BA90F546505}"/>
               </a:ext>
             </a:extLst>
           </p:cNvPr>
@@ -9455,7 +8054,7 @@
           <p:nvPr/>
         </p:nvPicPr>
         <p:blipFill>
-          <a:blip xmlns:r="http://schemas.openxmlformats.org/officeDocument/2006/relationships" xmlns:a="http://schemas.openxmlformats.org/drawingml/2006/main" r:embed="Rd2befd4d13e64aa4"/>
+          <a:blip xmlns:r="http://schemas.openxmlformats.org/officeDocument/2006/relationships" xmlns:a="http://schemas.openxmlformats.org/drawingml/2006/main" r:embed="Re452a7c0f9424912"/>
           <a:stretch xmlns:a="http://schemas.openxmlformats.org/drawingml/2006/main"/>
         </p:blipFill>
         <p:spPr>
@@ -9473,7 +8072,7 @@
           <p:cNvPr id="5" name="">
             <a:extLst xmlns:a="http://schemas.openxmlformats.org/drawingml/2006/main">
               <a:ext uri="{FF2B5EF4-FFF2-40B4-BE49-F238E27FC236}">
-                <a16:creationId xmlns:a16="http://schemas.microsoft.com/office/drawing/2014/main" id="{318EB209-A8D6-49A4-ABF0-9D0681C257FB}"/>
+                <a16:creationId xmlns:a16="http://schemas.microsoft.com/office/drawing/2014/main" id="{014F19D1-433B-4864-9E52-C998E9F04E1E}"/>
               </a:ext>
             </a:extLst>
           </p:cNvPr>
@@ -9508,7 +8107,7 @@
           <p:cNvPr id="6" name="">
             <a:extLst xmlns:a="http://schemas.openxmlformats.org/drawingml/2006/main">
               <a:ext uri="{FF2B5EF4-FFF2-40B4-BE49-F238E27FC236}">
-                <a16:creationId xmlns:a16="http://schemas.microsoft.com/office/drawing/2014/main" id="{9D3C770C-A96A-474E-B2A6-0BC1708AC562}"/>
+                <a16:creationId xmlns:a16="http://schemas.microsoft.com/office/drawing/2014/main" id="{ADF3197A-D663-4F9F-BA11-020B55C3A0E3}"/>
               </a:ext>
             </a:extLst>
           </p:cNvPr>
@@ -9558,7 +8157,7 @@
           <p:cNvPr id="7" name="">
             <a:extLst xmlns:a="http://schemas.openxmlformats.org/drawingml/2006/main">
               <a:ext uri="{FF2B5EF4-FFF2-40B4-BE49-F238E27FC236}">
-                <a16:creationId xmlns:a16="http://schemas.microsoft.com/office/drawing/2014/main" id="{F679ECA5-0E89-47A0-A0E1-0935EB07995F}"/>
+                <a16:creationId xmlns:a16="http://schemas.microsoft.com/office/drawing/2014/main" id="{DE618CA2-E8F6-4354-86BB-B86B50EFFCCF}"/>
               </a:ext>
             </a:extLst>
           </p:cNvPr>
@@ -9608,7 +8207,7 @@
           <p:cNvPr id="8" name="">
             <a:extLst xmlns:a="http://schemas.openxmlformats.org/drawingml/2006/main">
               <a:ext uri="{FF2B5EF4-FFF2-40B4-BE49-F238E27FC236}">
-                <a16:creationId xmlns:a16="http://schemas.microsoft.com/office/drawing/2014/main" id="{4C7571D6-00C8-4618-8C9A-684196BAE708}"/>
+                <a16:creationId xmlns:a16="http://schemas.microsoft.com/office/drawing/2014/main" id="{754E9E81-14E3-44C0-A4A0-D26C9533BC6E}"/>
               </a:ext>
             </a:extLst>
           </p:cNvPr>
@@ -9658,7 +8257,7 @@
           <p:cNvPr id="9" name="">
             <a:extLst xmlns:a="http://schemas.openxmlformats.org/drawingml/2006/main">
               <a:ext uri="{FF2B5EF4-FFF2-40B4-BE49-F238E27FC236}">
-                <a16:creationId xmlns:a16="http://schemas.microsoft.com/office/drawing/2014/main" id="{BBD0D283-6E61-4C14-8D1E-BF66CA354F97}"/>
+                <a16:creationId xmlns:a16="http://schemas.microsoft.com/office/drawing/2014/main" id="{6143551E-54DD-443F-95B6-C60936CD7066}"/>
               </a:ext>
             </a:extLst>
           </p:cNvPr>
@@ -9693,7 +8292,7 @@
           <p:cNvPr id="10" name="">
             <a:extLst xmlns:a="http://schemas.openxmlformats.org/drawingml/2006/main">
               <a:ext uri="{FF2B5EF4-FFF2-40B4-BE49-F238E27FC236}">
-                <a16:creationId xmlns:a16="http://schemas.microsoft.com/office/drawing/2014/main" id="{8EB1FBEA-1B74-453F-998B-A7217DD2AADC}"/>
+                <a16:creationId xmlns:a16="http://schemas.microsoft.com/office/drawing/2014/main" id="{432EBC68-506B-454F-93F4-15E15A30EE02}"/>
               </a:ext>
             </a:extLst>
           </p:cNvPr>
@@ -9743,7 +8342,7 @@
           <p:cNvPr id="11" name="">
             <a:extLst xmlns:a="http://schemas.openxmlformats.org/drawingml/2006/main">
               <a:ext uri="{FF2B5EF4-FFF2-40B4-BE49-F238E27FC236}">
-                <a16:creationId xmlns:a16="http://schemas.microsoft.com/office/drawing/2014/main" id="{8B69C191-CF0D-479F-A0E3-BAF40514DFF8}"/>
+                <a16:creationId xmlns:a16="http://schemas.microsoft.com/office/drawing/2014/main" id="{AFF776D2-031F-4E43-B489-D3D4E5AEDA37}"/>
               </a:ext>
             </a:extLst>
           </p:cNvPr>
@@ -9793,7 +8392,7 @@
           <p:cNvPr id="12" name="">
             <a:extLst xmlns:a="http://schemas.openxmlformats.org/drawingml/2006/main">
               <a:ext uri="{FF2B5EF4-FFF2-40B4-BE49-F238E27FC236}">
-                <a16:creationId xmlns:a16="http://schemas.microsoft.com/office/drawing/2014/main" id="{BC24C7C3-B06C-4DCB-AF18-92BB5AFA83C4}"/>
+                <a16:creationId xmlns:a16="http://schemas.microsoft.com/office/drawing/2014/main" id="{1781E2E0-741A-4754-83D3-BAD992458D48}"/>
               </a:ext>
             </a:extLst>
           </p:cNvPr>
@@ -9843,7 +8442,7 @@
           <p:cNvPr id="13" name="">
             <a:extLst xmlns:a="http://schemas.openxmlformats.org/drawingml/2006/main">
               <a:ext uri="{FF2B5EF4-FFF2-40B4-BE49-F238E27FC236}">
-                <a16:creationId xmlns:a16="http://schemas.microsoft.com/office/drawing/2014/main" id="{BB8A9760-8712-432D-944C-9AA402984734}"/>
+                <a16:creationId xmlns:a16="http://schemas.microsoft.com/office/drawing/2014/main" id="{BFA7857B-E1E7-416A-A1C9-CA370250C43D}"/>
               </a:ext>
             </a:extLst>
           </p:cNvPr>
@@ -9893,7 +8492,7 @@
           <p:cNvPr id="14" name="">
             <a:extLst xmlns:a="http://schemas.openxmlformats.org/drawingml/2006/main">
               <a:ext uri="{FF2B5EF4-FFF2-40B4-BE49-F238E27FC236}">
-                <a16:creationId xmlns:a16="http://schemas.microsoft.com/office/drawing/2014/main" id="{CE4B4A13-B36E-4EC3-9A7A-18288BEC6DA4}"/>
+                <a16:creationId xmlns:a16="http://schemas.microsoft.com/office/drawing/2014/main" id="{B9235771-3F7A-4D4C-BE7F-FCAA26C9ABE5}"/>
               </a:ext>
             </a:extLst>
           </p:cNvPr>
@@ -9943,7 +8542,7 @@
           <p:cNvPr id="15" name="">
             <a:extLst xmlns:a="http://schemas.openxmlformats.org/drawingml/2006/main">
               <a:ext uri="{FF2B5EF4-FFF2-40B4-BE49-F238E27FC236}">
-                <a16:creationId xmlns:a16="http://schemas.microsoft.com/office/drawing/2014/main" id="{3D5DA55F-FBD2-4963-82B6-87EFD35E261A}"/>
+                <a16:creationId xmlns:a16="http://schemas.microsoft.com/office/drawing/2014/main" id="{AD84FF07-7947-4F0D-A7DC-ACE33B4EAFDB}"/>
               </a:ext>
             </a:extLst>
           </p:cNvPr>
@@ -9991,7 +8590,7 @@
     </p:spTree>
     <p:extLst>
       <p:ext uri="{BB962C8B-B14F-4D97-AF65-F5344CB8AC3E}">
-        <p14:creationId xmlns:p14="http://schemas.microsoft.com/office/powerpoint/2010/main" val="1972104334"/>
+        <p14:creationId xmlns:p14="http://schemas.microsoft.com/office/powerpoint/2010/main" val="1045197519"/>
       </p:ext>
     </p:extLst>
   </p:cSld>
@@ -10022,7 +8621,7 @@
           <p:cNvPr id="19" name="">
             <a:extLst xmlns:a="http://schemas.openxmlformats.org/drawingml/2006/main">
               <a:ext uri="{FF2B5EF4-FFF2-40B4-BE49-F238E27FC236}">
-                <a16:creationId xmlns:a16="http://schemas.microsoft.com/office/drawing/2014/main" id="{26666CC0-26A8-4AB1-B521-4069E3B45A1C}"/>
+                <a16:creationId xmlns:a16="http://schemas.microsoft.com/office/drawing/2014/main" id="{0D845DA4-148B-4D0C-90FB-FEE19D4AD764}"/>
               </a:ext>
             </a:extLst>
           </p:cNvPr>
@@ -10072,7 +8671,7 @@
           <p:cNvPr id="2" name="">
             <a:extLst xmlns:a="http://schemas.openxmlformats.org/drawingml/2006/main">
               <a:ext uri="{FF2B5EF4-FFF2-40B4-BE49-F238E27FC236}">
-                <a16:creationId xmlns:a16="http://schemas.microsoft.com/office/drawing/2014/main" id="{FD442541-361D-4DAD-B60B-0D944BC75F8D}"/>
+                <a16:creationId xmlns:a16="http://schemas.microsoft.com/office/drawing/2014/main" id="{FDE919A2-57A1-4766-9DB3-DC904F4D9636}"/>
               </a:ext>
             </a:extLst>
           </p:cNvPr>
@@ -10122,7 +8721,7 @@
           <p:cNvPr id="3" name="">
             <a:extLst xmlns:a="http://schemas.openxmlformats.org/drawingml/2006/main">
               <a:ext uri="{FF2B5EF4-FFF2-40B4-BE49-F238E27FC236}">
-                <a16:creationId xmlns:a16="http://schemas.microsoft.com/office/drawing/2014/main" id="{308A0188-0627-4041-B1BC-13289A91E5A6}"/>
+                <a16:creationId xmlns:a16="http://schemas.microsoft.com/office/drawing/2014/main" id="{B9DF4960-0991-4E5A-86B4-E92AAB8A1BDC}"/>
               </a:ext>
             </a:extLst>
           </p:cNvPr>
@@ -10161,7 +8760,7 @@
           <p:nvPr/>
         </p:nvPicPr>
         <p:blipFill>
-          <a:blip xmlns:r="http://schemas.openxmlformats.org/officeDocument/2006/relationships" xmlns:a="http://schemas.openxmlformats.org/drawingml/2006/main" r:embed="Rde40053323ef4c98"/>
+          <a:blip xmlns:r="http://schemas.openxmlformats.org/officeDocument/2006/relationships" xmlns:a="http://schemas.openxmlformats.org/drawingml/2006/main" r:embed="Rc50aff526565449b"/>
           <a:stretch xmlns:a="http://schemas.openxmlformats.org/drawingml/2006/main"/>
         </p:blipFill>
         <p:spPr>
@@ -10179,7 +8778,7 @@
           <p:cNvPr id="5" name="">
             <a:extLst xmlns:a="http://schemas.openxmlformats.org/drawingml/2006/main">
               <a:ext uri="{FF2B5EF4-FFF2-40B4-BE49-F238E27FC236}">
-                <a16:creationId xmlns:a16="http://schemas.microsoft.com/office/drawing/2014/main" id="{A03E889E-AAB2-4ACC-B5AA-B2DEDCBB915A}"/>
+                <a16:creationId xmlns:a16="http://schemas.microsoft.com/office/drawing/2014/main" id="{393DA3FD-8B61-4F06-9DBB-E815E174164B}"/>
               </a:ext>
             </a:extLst>
           </p:cNvPr>
@@ -10214,7 +8813,7 @@
           <p:cNvPr id="6" name="">
             <a:extLst xmlns:a="http://schemas.openxmlformats.org/drawingml/2006/main">
               <a:ext uri="{FF2B5EF4-FFF2-40B4-BE49-F238E27FC236}">
-                <a16:creationId xmlns:a16="http://schemas.microsoft.com/office/drawing/2014/main" id="{DBDEA58E-EE76-4D7B-8FDD-6B8DAB743500}"/>
+                <a16:creationId xmlns:a16="http://schemas.microsoft.com/office/drawing/2014/main" id="{9ECAE5B1-F98C-479C-A53A-99AEBD856245}"/>
               </a:ext>
             </a:extLst>
           </p:cNvPr>
@@ -10264,7 +8863,7 @@
           <p:cNvPr id="7" name="">
             <a:extLst xmlns:a="http://schemas.openxmlformats.org/drawingml/2006/main">
               <a:ext uri="{FF2B5EF4-FFF2-40B4-BE49-F238E27FC236}">
-                <a16:creationId xmlns:a16="http://schemas.microsoft.com/office/drawing/2014/main" id="{8EE01444-5B72-4C5D-B91D-1A17B8CE2570}"/>
+                <a16:creationId xmlns:a16="http://schemas.microsoft.com/office/drawing/2014/main" id="{55AFA5AE-63B1-4862-BDD9-1F5C285A5761}"/>
               </a:ext>
             </a:extLst>
           </p:cNvPr>
@@ -10314,7 +8913,7 @@
           <p:cNvPr id="8" name="">
             <a:extLst xmlns:a="http://schemas.openxmlformats.org/drawingml/2006/main">
               <a:ext uri="{FF2B5EF4-FFF2-40B4-BE49-F238E27FC236}">
-                <a16:creationId xmlns:a16="http://schemas.microsoft.com/office/drawing/2014/main" id="{1184EAFA-293F-41E8-925A-A5835C5D1F63}"/>
+                <a16:creationId xmlns:a16="http://schemas.microsoft.com/office/drawing/2014/main" id="{DADD0649-733C-437E-8E47-62EE077AF1B4}"/>
               </a:ext>
             </a:extLst>
           </p:cNvPr>
@@ -10349,7 +8948,7 @@
           <p:cNvPr id="9" name="">
             <a:extLst xmlns:a="http://schemas.openxmlformats.org/drawingml/2006/main">
               <a:ext uri="{FF2B5EF4-FFF2-40B4-BE49-F238E27FC236}">
-                <a16:creationId xmlns:a16="http://schemas.microsoft.com/office/drawing/2014/main" id="{7FBF1629-2085-4B16-AD96-9E0F9A483F43}"/>
+                <a16:creationId xmlns:a16="http://schemas.microsoft.com/office/drawing/2014/main" id="{D7AFBFC5-432C-496F-BACB-6F286E9365F6}"/>
               </a:ext>
             </a:extLst>
           </p:cNvPr>
@@ -10399,7 +8998,7 @@
           <p:cNvPr id="10" name="">
             <a:extLst xmlns:a="http://schemas.openxmlformats.org/drawingml/2006/main">
               <a:ext uri="{FF2B5EF4-FFF2-40B4-BE49-F238E27FC236}">
-                <a16:creationId xmlns:a16="http://schemas.microsoft.com/office/drawing/2014/main" id="{D24D4B37-0DD8-45A6-A10D-9F4C33C4DB56}"/>
+                <a16:creationId xmlns:a16="http://schemas.microsoft.com/office/drawing/2014/main" id="{A76320F1-5D09-43D3-9816-35CE6F472206}"/>
               </a:ext>
             </a:extLst>
           </p:cNvPr>
@@ -10449,7 +9048,7 @@
           <p:cNvPr id="11" name="">
             <a:extLst xmlns:a="http://schemas.openxmlformats.org/drawingml/2006/main">
               <a:ext uri="{FF2B5EF4-FFF2-40B4-BE49-F238E27FC236}">
-                <a16:creationId xmlns:a16="http://schemas.microsoft.com/office/drawing/2014/main" id="{DB52334E-FD14-48C5-86F7-C80709B0A90A}"/>
+                <a16:creationId xmlns:a16="http://schemas.microsoft.com/office/drawing/2014/main" id="{BB1EB466-5804-43DB-9FB5-2E7E24D09E09}"/>
               </a:ext>
             </a:extLst>
           </p:cNvPr>
@@ -10484,7 +9083,7 @@
           <p:cNvPr id="12" name="">
             <a:extLst xmlns:a="http://schemas.openxmlformats.org/drawingml/2006/main">
               <a:ext uri="{FF2B5EF4-FFF2-40B4-BE49-F238E27FC236}">
-                <a16:creationId xmlns:a16="http://schemas.microsoft.com/office/drawing/2014/main" id="{64C9E881-8B90-4543-8055-FBE53AED8A77}"/>
+                <a16:creationId xmlns:a16="http://schemas.microsoft.com/office/drawing/2014/main" id="{B3611D42-1283-4EF1-B7EA-44690F310E93}"/>
               </a:ext>
             </a:extLst>
           </p:cNvPr>
@@ -10534,7 +9133,7 @@
           <p:cNvPr id="13" name="">
             <a:extLst xmlns:a="http://schemas.openxmlformats.org/drawingml/2006/main">
               <a:ext uri="{FF2B5EF4-FFF2-40B4-BE49-F238E27FC236}">
-                <a16:creationId xmlns:a16="http://schemas.microsoft.com/office/drawing/2014/main" id="{168BB3AB-97C5-4234-ACCF-7BB4AA46F9E1}"/>
+                <a16:creationId xmlns:a16="http://schemas.microsoft.com/office/drawing/2014/main" id="{B7858114-13B0-4F4E-928F-6442B4F40DA0}"/>
               </a:ext>
             </a:extLst>
           </p:cNvPr>
@@ -10584,7 +9183,7 @@
           <p:cNvPr id="14" name="">
             <a:extLst xmlns:a="http://schemas.openxmlformats.org/drawingml/2006/main">
               <a:ext uri="{FF2B5EF4-FFF2-40B4-BE49-F238E27FC236}">
-                <a16:creationId xmlns:a16="http://schemas.microsoft.com/office/drawing/2014/main" id="{E61FBC2D-62F6-4838-9992-656E6522C25A}"/>
+                <a16:creationId xmlns:a16="http://schemas.microsoft.com/office/drawing/2014/main" id="{5FD22651-102B-4C94-A592-681B935B3EDB}"/>
               </a:ext>
             </a:extLst>
           </p:cNvPr>
@@ -10634,7 +9233,7 @@
           <p:cNvPr id="15" name="">
             <a:extLst xmlns:a="http://schemas.openxmlformats.org/drawingml/2006/main">
               <a:ext uri="{FF2B5EF4-FFF2-40B4-BE49-F238E27FC236}">
-                <a16:creationId xmlns:a16="http://schemas.microsoft.com/office/drawing/2014/main" id="{64818A14-D399-4193-9409-3B51A7718540}"/>
+                <a16:creationId xmlns:a16="http://schemas.microsoft.com/office/drawing/2014/main" id="{43F40970-FE58-420E-9837-2C8CFED0E192}"/>
               </a:ext>
             </a:extLst>
           </p:cNvPr>
@@ -10684,7 +9283,7 @@
           <p:cNvPr id="16" name="">
             <a:extLst xmlns:a="http://schemas.openxmlformats.org/drawingml/2006/main">
               <a:ext uri="{FF2B5EF4-FFF2-40B4-BE49-F238E27FC236}">
-                <a16:creationId xmlns:a16="http://schemas.microsoft.com/office/drawing/2014/main" id="{2FAB6770-DBC7-4FBE-9392-4EFE8BCF2BE5}"/>
+                <a16:creationId xmlns:a16="http://schemas.microsoft.com/office/drawing/2014/main" id="{2C08B88A-D5AA-4E8B-9400-C43CE95210A2}"/>
               </a:ext>
             </a:extLst>
           </p:cNvPr>
@@ -10734,7 +9333,7 @@
           <p:cNvPr id="17" name="">
             <a:extLst xmlns:a="http://schemas.openxmlformats.org/drawingml/2006/main">
               <a:ext uri="{FF2B5EF4-FFF2-40B4-BE49-F238E27FC236}">
-                <a16:creationId xmlns:a16="http://schemas.microsoft.com/office/drawing/2014/main" id="{F485A3B4-6C7D-4E37-90D2-F475A271727F}"/>
+                <a16:creationId xmlns:a16="http://schemas.microsoft.com/office/drawing/2014/main" id="{581A6BC5-30DA-4821-A9C5-6265FABCD3E8}"/>
               </a:ext>
             </a:extLst>
           </p:cNvPr>
@@ -10784,7 +9383,7 @@
           <p:cNvPr id="18" name="">
             <a:extLst xmlns:a="http://schemas.openxmlformats.org/drawingml/2006/main">
               <a:ext uri="{FF2B5EF4-FFF2-40B4-BE49-F238E27FC236}">
-                <a16:creationId xmlns:a16="http://schemas.microsoft.com/office/drawing/2014/main" id="{7678EEED-E6DE-4748-989D-8755A3CA1178}"/>
+                <a16:creationId xmlns:a16="http://schemas.microsoft.com/office/drawing/2014/main" id="{DD0D32F0-4E02-4AAB-A8FD-513239DAFBB6}"/>
               </a:ext>
             </a:extLst>
           </p:cNvPr>
@@ -10832,7 +9431,7 @@
     </p:spTree>
     <p:extLst>
       <p:ext uri="{BB962C8B-B14F-4D97-AF65-F5344CB8AC3E}">
-        <p14:creationId xmlns:p14="http://schemas.microsoft.com/office/powerpoint/2010/main" val="509575254"/>
+        <p14:creationId xmlns:p14="http://schemas.microsoft.com/office/powerpoint/2010/main" val="855042535"/>
       </p:ext>
     </p:extLst>
   </p:cSld>
@@ -10863,7 +9462,7 @@
           <p:cNvPr id="12" name="">
             <a:extLst xmlns:a="http://schemas.openxmlformats.org/drawingml/2006/main">
               <a:ext uri="{FF2B5EF4-FFF2-40B4-BE49-F238E27FC236}">
-                <a16:creationId xmlns:a16="http://schemas.microsoft.com/office/drawing/2014/main" id="{79194F76-77AD-4342-B858-270E225A04A8}"/>
+                <a16:creationId xmlns:a16="http://schemas.microsoft.com/office/drawing/2014/main" id="{43A15A61-C203-4F91-A698-DEFADA9814DE}"/>
               </a:ext>
             </a:extLst>
           </p:cNvPr>
@@ -10913,7 +9512,7 @@
           <p:cNvPr id="2" name="">
             <a:extLst xmlns:a="http://schemas.openxmlformats.org/drawingml/2006/main">
               <a:ext uri="{FF2B5EF4-FFF2-40B4-BE49-F238E27FC236}">
-                <a16:creationId xmlns:a16="http://schemas.microsoft.com/office/drawing/2014/main" id="{DD1C6A58-34BB-4C5B-8C71-A9C831010083}"/>
+                <a16:creationId xmlns:a16="http://schemas.microsoft.com/office/drawing/2014/main" id="{FBB70B49-D383-4BD0-8B44-0EC074E67526}"/>
               </a:ext>
             </a:extLst>
           </p:cNvPr>
@@ -10963,7 +9562,7 @@
           <p:cNvPr id="3" name="">
             <a:extLst xmlns:a="http://schemas.openxmlformats.org/drawingml/2006/main">
               <a:ext uri="{FF2B5EF4-FFF2-40B4-BE49-F238E27FC236}">
-                <a16:creationId xmlns:a16="http://schemas.microsoft.com/office/drawing/2014/main" id="{F0CF3DE8-8F26-4499-B8CE-504FA17BAA64}"/>
+                <a16:creationId xmlns:a16="http://schemas.microsoft.com/office/drawing/2014/main" id="{6FF4E5F6-4D8B-4557-A488-525B56A38F29}"/>
               </a:ext>
             </a:extLst>
           </p:cNvPr>
@@ -11002,7 +9601,7 @@
           <p:nvPr/>
         </p:nvPicPr>
         <p:blipFill>
-          <a:blip xmlns:r="http://schemas.openxmlformats.org/officeDocument/2006/relationships" xmlns:a="http://schemas.openxmlformats.org/drawingml/2006/main" r:embed="Rda1081e51bce4e35"/>
+          <a:blip xmlns:r="http://schemas.openxmlformats.org/officeDocument/2006/relationships" xmlns:a="http://schemas.openxmlformats.org/drawingml/2006/main" r:embed="R414dc66eda4f488f"/>
           <a:stretch xmlns:a="http://schemas.openxmlformats.org/drawingml/2006/main"/>
         </p:blipFill>
         <p:spPr>
@@ -11020,7 +9619,7 @@
           <p:cNvPr id="5" name="">
             <a:extLst xmlns:a="http://schemas.openxmlformats.org/drawingml/2006/main">
               <a:ext uri="{FF2B5EF4-FFF2-40B4-BE49-F238E27FC236}">
-                <a16:creationId xmlns:a16="http://schemas.microsoft.com/office/drawing/2014/main" id="{1ECE577B-78CA-4EF9-86BA-BB1F087B87D7}"/>
+                <a16:creationId xmlns:a16="http://schemas.microsoft.com/office/drawing/2014/main" id="{F080900F-EE16-4EF7-AB9F-9823444022B5}"/>
               </a:ext>
             </a:extLst>
           </p:cNvPr>
@@ -11055,7 +9654,7 @@
           <p:cNvPr id="6" name="">
             <a:extLst xmlns:a="http://schemas.openxmlformats.org/drawingml/2006/main">
               <a:ext uri="{FF2B5EF4-FFF2-40B4-BE49-F238E27FC236}">
-                <a16:creationId xmlns:a16="http://schemas.microsoft.com/office/drawing/2014/main" id="{8AC471BC-39AD-4370-AAA6-CDF8538A297C}"/>
+                <a16:creationId xmlns:a16="http://schemas.microsoft.com/office/drawing/2014/main" id="{7F2168A0-CD47-4F3C-B09D-CE2EF7A25848}"/>
               </a:ext>
             </a:extLst>
           </p:cNvPr>
@@ -11105,7 +9704,7 @@
           <p:cNvPr id="7" name="">
             <a:extLst xmlns:a="http://schemas.openxmlformats.org/drawingml/2006/main">
               <a:ext uri="{FF2B5EF4-FFF2-40B4-BE49-F238E27FC236}">
-                <a16:creationId xmlns:a16="http://schemas.microsoft.com/office/drawing/2014/main" id="{6E25B398-9407-490F-811E-8259D8560D59}"/>
+                <a16:creationId xmlns:a16="http://schemas.microsoft.com/office/drawing/2014/main" id="{F2C60DAB-0D38-4E4D-BEA2-258A21F8F246}"/>
               </a:ext>
             </a:extLst>
           </p:cNvPr>
@@ -11155,7 +9754,7 @@
           <p:cNvPr id="8" name="">
             <a:extLst xmlns:a="http://schemas.openxmlformats.org/drawingml/2006/main">
               <a:ext uri="{FF2B5EF4-FFF2-40B4-BE49-F238E27FC236}">
-                <a16:creationId xmlns:a16="http://schemas.microsoft.com/office/drawing/2014/main" id="{68CA7BA5-8D96-4B3A-AD77-482E697A99F6}"/>
+                <a16:creationId xmlns:a16="http://schemas.microsoft.com/office/drawing/2014/main" id="{C79D9AF6-77B3-41FD-821D-C8599C8BF0CB}"/>
               </a:ext>
             </a:extLst>
           </p:cNvPr>
@@ -11205,7 +9804,7 @@
           <p:cNvPr id="9" name="">
             <a:extLst xmlns:a="http://schemas.openxmlformats.org/drawingml/2006/main">
               <a:ext uri="{FF2B5EF4-FFF2-40B4-BE49-F238E27FC236}">
-                <a16:creationId xmlns:a16="http://schemas.microsoft.com/office/drawing/2014/main" id="{7A9A247B-CB14-480C-AE67-B1C85B258A57}"/>
+                <a16:creationId xmlns:a16="http://schemas.microsoft.com/office/drawing/2014/main" id="{12A5B779-5148-4152-A00C-AAB6DF1612EE}"/>
               </a:ext>
             </a:extLst>
           </p:cNvPr>
@@ -11255,7 +9854,7 @@
           <p:cNvPr id="10" name="">
             <a:extLst xmlns:a="http://schemas.openxmlformats.org/drawingml/2006/main">
               <a:ext uri="{FF2B5EF4-FFF2-40B4-BE49-F238E27FC236}">
-                <a16:creationId xmlns:a16="http://schemas.microsoft.com/office/drawing/2014/main" id="{E772A7EC-2088-4785-B9BE-F51B041009D7}"/>
+                <a16:creationId xmlns:a16="http://schemas.microsoft.com/office/drawing/2014/main" id="{A339867D-5116-4151-9C66-90BC9EEC5860}"/>
               </a:ext>
             </a:extLst>
           </p:cNvPr>
@@ -11305,7 +9904,7 @@
           <p:cNvPr id="11" name="">
             <a:extLst xmlns:a="http://schemas.openxmlformats.org/drawingml/2006/main">
               <a:ext uri="{FF2B5EF4-FFF2-40B4-BE49-F238E27FC236}">
-                <a16:creationId xmlns:a16="http://schemas.microsoft.com/office/drawing/2014/main" id="{34E8F0D2-726D-4F0A-A523-02E78F2B8670}"/>
+                <a16:creationId xmlns:a16="http://schemas.microsoft.com/office/drawing/2014/main" id="{57F364A6-CD19-4BF9-9FD1-FB0BE6230DED}"/>
               </a:ext>
             </a:extLst>
           </p:cNvPr>
@@ -11353,7 +9952,7 @@
     </p:spTree>
     <p:extLst>
       <p:ext uri="{BB962C8B-B14F-4D97-AF65-F5344CB8AC3E}">
-        <p14:creationId xmlns:p14="http://schemas.microsoft.com/office/powerpoint/2010/main" val="150420166"/>
+        <p14:creationId xmlns:p14="http://schemas.microsoft.com/office/powerpoint/2010/main" val="175379469"/>
       </p:ext>
     </p:extLst>
   </p:cSld>
@@ -11384,7 +9983,7 @@
           <p:cNvPr id="9" name="">
             <a:extLst xmlns:a="http://schemas.openxmlformats.org/drawingml/2006/main">
               <a:ext uri="{FF2B5EF4-FFF2-40B4-BE49-F238E27FC236}">
-                <a16:creationId xmlns:a16="http://schemas.microsoft.com/office/drawing/2014/main" id="{2A74A09F-8021-450B-8059-AF8C0D7D7660}"/>
+                <a16:creationId xmlns:a16="http://schemas.microsoft.com/office/drawing/2014/main" id="{927CCEDF-BF71-4CF2-90E9-63ED0A2766E2}"/>
               </a:ext>
             </a:extLst>
           </p:cNvPr>
@@ -11434,7 +10033,7 @@
           <p:cNvPr id="2" name="">
             <a:extLst xmlns:a="http://schemas.openxmlformats.org/drawingml/2006/main">
               <a:ext uri="{FF2B5EF4-FFF2-40B4-BE49-F238E27FC236}">
-                <a16:creationId xmlns:a16="http://schemas.microsoft.com/office/drawing/2014/main" id="{274952F3-E7BD-49C8-ADDF-2121E07DA1A7}"/>
+                <a16:creationId xmlns:a16="http://schemas.microsoft.com/office/drawing/2014/main" id="{324B422D-7EB4-4971-A334-678CC2F68794}"/>
               </a:ext>
             </a:extLst>
           </p:cNvPr>
@@ -11484,7 +10083,7 @@
           <p:cNvPr id="3" name="">
             <a:extLst xmlns:a="http://schemas.openxmlformats.org/drawingml/2006/main">
               <a:ext uri="{FF2B5EF4-FFF2-40B4-BE49-F238E27FC236}">
-                <a16:creationId xmlns:a16="http://schemas.microsoft.com/office/drawing/2014/main" id="{D71116E9-2D31-4DA7-B2B6-53BF419056DD}"/>
+                <a16:creationId xmlns:a16="http://schemas.microsoft.com/office/drawing/2014/main" id="{93895754-C86B-49C3-819F-101E8F7C8A46}"/>
               </a:ext>
             </a:extLst>
           </p:cNvPr>
@@ -11523,7 +10122,7 @@
           <p:nvPr/>
         </p:nvPicPr>
         <p:blipFill>
-          <a:blip xmlns:r="http://schemas.openxmlformats.org/officeDocument/2006/relationships" xmlns:a="http://schemas.openxmlformats.org/drawingml/2006/main" r:embed="R21c512cc05b8451b"/>
+          <a:blip xmlns:r="http://schemas.openxmlformats.org/officeDocument/2006/relationships" xmlns:a="http://schemas.openxmlformats.org/drawingml/2006/main" r:embed="Rb980cbeea3f84c70"/>
           <a:stretch xmlns:a="http://schemas.openxmlformats.org/drawingml/2006/main"/>
         </p:blipFill>
         <p:spPr>
@@ -11541,7 +10140,7 @@
           <p:cNvPr id="5" name="">
             <a:extLst xmlns:a="http://schemas.openxmlformats.org/drawingml/2006/main">
               <a:ext uri="{FF2B5EF4-FFF2-40B4-BE49-F238E27FC236}">
-                <a16:creationId xmlns:a16="http://schemas.microsoft.com/office/drawing/2014/main" id="{C18B1B06-F23E-4B4E-98A7-B650F50984B6}"/>
+                <a16:creationId xmlns:a16="http://schemas.microsoft.com/office/drawing/2014/main" id="{0BFE29CA-36A7-40BE-8F1B-28CF051FF307}"/>
               </a:ext>
             </a:extLst>
           </p:cNvPr>
@@ -11591,7 +10190,7 @@
           <p:cNvPr id="6" name="">
             <a:extLst xmlns:a="http://schemas.openxmlformats.org/drawingml/2006/main">
               <a:ext uri="{FF2B5EF4-FFF2-40B4-BE49-F238E27FC236}">
-                <a16:creationId xmlns:a16="http://schemas.microsoft.com/office/drawing/2014/main" id="{392A2D30-A93C-4FCC-9CBA-59E1614FAC07}"/>
+                <a16:creationId xmlns:a16="http://schemas.microsoft.com/office/drawing/2014/main" id="{E53BFD32-D62D-4B31-9FC4-57EB425895B3}"/>
               </a:ext>
             </a:extLst>
           </p:cNvPr>
@@ -11641,7 +10240,7 @@
           <p:cNvPr id="7" name="">
             <a:extLst xmlns:a="http://schemas.openxmlformats.org/drawingml/2006/main">
               <a:ext uri="{FF2B5EF4-FFF2-40B4-BE49-F238E27FC236}">
-                <a16:creationId xmlns:a16="http://schemas.microsoft.com/office/drawing/2014/main" id="{C8345FAC-194F-46F4-88F8-FB5FA4A421BF}"/>
+                <a16:creationId xmlns:a16="http://schemas.microsoft.com/office/drawing/2014/main" id="{17A978C7-1BEE-49CC-B6BB-F8911A312B42}"/>
               </a:ext>
             </a:extLst>
           </p:cNvPr>
@@ -11691,7 +10290,7 @@
           <p:cNvPr id="8" name="">
             <a:extLst xmlns:a="http://schemas.openxmlformats.org/drawingml/2006/main">
               <a:ext uri="{FF2B5EF4-FFF2-40B4-BE49-F238E27FC236}">
-                <a16:creationId xmlns:a16="http://schemas.microsoft.com/office/drawing/2014/main" id="{4EC1F2A0-D8CF-441D-8808-84F7D8004C4B}"/>
+                <a16:creationId xmlns:a16="http://schemas.microsoft.com/office/drawing/2014/main" id="{85C32EB3-7C6F-4B6A-918D-6D4169D828F8}"/>
               </a:ext>
             </a:extLst>
           </p:cNvPr>
@@ -11739,7 +10338,7 @@
     </p:spTree>
     <p:extLst>
       <p:ext uri="{BB962C8B-B14F-4D97-AF65-F5344CB8AC3E}">
-        <p14:creationId xmlns:p14="http://schemas.microsoft.com/office/powerpoint/2010/main" val="1197714083"/>
+        <p14:creationId xmlns:p14="http://schemas.microsoft.com/office/powerpoint/2010/main" val="832540945"/>
       </p:ext>
     </p:extLst>
   </p:cSld>

--- a/sglang_direct_kv/artifacts/slides/agent_aware_kv_movement_manager_deck.pptx
+++ b/sglang_direct_kv/artifacts/slides/agent_aware_kv_movement_manager_deck.pptx
@@ -2,23 +2,24 @@
 <file path=ppt/presentation.xml><?xml version="1.0" encoding="utf-8"?>
 <p:presentation xmlns:p="http://schemas.openxmlformats.org/presentationml/2006/main">
   <p:sldMasterIdLst>
-    <p:sldMasterId xmlns:r="http://schemas.openxmlformats.org/officeDocument/2006/relationships" id="2147483648" r:id="R20d915324bde41b1"/>
+    <p:sldMasterId xmlns:r="http://schemas.openxmlformats.org/officeDocument/2006/relationships" id="2147483648" r:id="R899d768b3d5f448e"/>
   </p:sldMasterIdLst>
   <p:notesMasterIdLst>
-    <p:notesMasterId xmlns:r="http://schemas.openxmlformats.org/officeDocument/2006/relationships" r:id="R23c17bbc80db48dc"/>
+    <p:notesMasterId xmlns:r="http://schemas.openxmlformats.org/officeDocument/2006/relationships" r:id="R8e3a05492f824db5"/>
   </p:notesMasterIdLst>
   <p:sldIdLst>
-    <p:sldId xmlns:r="http://schemas.openxmlformats.org/officeDocument/2006/relationships" id="256" r:id="R2ded201f67b74c16"/>
-    <p:sldId xmlns:r="http://schemas.openxmlformats.org/officeDocument/2006/relationships" id="257" r:id="R12083c949ea94ecb"/>
-    <p:sldId xmlns:r="http://schemas.openxmlformats.org/officeDocument/2006/relationships" id="258" r:id="R6efc19409d574b75"/>
-    <p:sldId xmlns:r="http://schemas.openxmlformats.org/officeDocument/2006/relationships" id="259" r:id="R823ab8db15bd4f59"/>
-    <p:sldId xmlns:r="http://schemas.openxmlformats.org/officeDocument/2006/relationships" id="260" r:id="R7afacd1f905d4341"/>
-    <p:sldId xmlns:r="http://schemas.openxmlformats.org/officeDocument/2006/relationships" id="261" r:id="R3585b33b42f7429c"/>
-    <p:sldId xmlns:r="http://schemas.openxmlformats.org/officeDocument/2006/relationships" id="262" r:id="Rf177a4c70d4d4d06"/>
-    <p:sldId xmlns:r="http://schemas.openxmlformats.org/officeDocument/2006/relationships" id="263" r:id="Rc813268d0b9a49a6"/>
-    <p:sldId xmlns:r="http://schemas.openxmlformats.org/officeDocument/2006/relationships" id="264" r:id="Rb7243a3b6898417d"/>
-    <p:sldId xmlns:r="http://schemas.openxmlformats.org/officeDocument/2006/relationships" id="265" r:id="Rc7b207a74b4d4405"/>
-    <p:sldId xmlns:r="http://schemas.openxmlformats.org/officeDocument/2006/relationships" id="266" r:id="Ree81fbcebe3641db"/>
+    <p:sldId xmlns:r="http://schemas.openxmlformats.org/officeDocument/2006/relationships" id="256" r:id="Rd377b6085a8a40c8"/>
+    <p:sldId xmlns:r="http://schemas.openxmlformats.org/officeDocument/2006/relationships" id="257" r:id="R433929d20de746ae"/>
+    <p:sldId xmlns:r="http://schemas.openxmlformats.org/officeDocument/2006/relationships" id="258" r:id="R8cd0295ac3e649c9"/>
+    <p:sldId xmlns:r="http://schemas.openxmlformats.org/officeDocument/2006/relationships" id="259" r:id="R468f87e0b6a24835"/>
+    <p:sldId xmlns:r="http://schemas.openxmlformats.org/officeDocument/2006/relationships" id="260" r:id="R07edb9ecb3394432"/>
+    <p:sldId xmlns:r="http://schemas.openxmlformats.org/officeDocument/2006/relationships" id="261" r:id="R691e92a9768f4be2"/>
+    <p:sldId xmlns:r="http://schemas.openxmlformats.org/officeDocument/2006/relationships" id="262" r:id="R344f558b43f64ed4"/>
+    <p:sldId xmlns:r="http://schemas.openxmlformats.org/officeDocument/2006/relationships" id="263" r:id="R1b3732fe2589427a"/>
+    <p:sldId xmlns:r="http://schemas.openxmlformats.org/officeDocument/2006/relationships" id="264" r:id="R791187716dc0457a"/>
+    <p:sldId xmlns:r="http://schemas.openxmlformats.org/officeDocument/2006/relationships" id="265" r:id="R9de39528184c4195"/>
+    <p:sldId xmlns:r="http://schemas.openxmlformats.org/officeDocument/2006/relationships" id="266" r:id="R15f6bf842f224442"/>
+    <p:sldId xmlns:r="http://schemas.openxmlformats.org/officeDocument/2006/relationships" id="267" r:id="Rbf0e08b5fa924679"/>
   </p:sldIdLst>
   <p:sldSz cx="12192000" cy="6858000"/>
   <p:notesSz cx="6858000" cy="9144000"/>
@@ -652,6 +653,111 @@
           <a:lstStyle xmlns:a="http://schemas.openxmlformats.org/drawingml/2006/main"/>
           <a:p xmlns:a="http://schemas.openxmlformats.org/drawingml/2006/main">
             <a:r>
+              <a:t>This slide intentionally frames benefits as ballpark expectations and research targets.</a:t>
+            </a:r>
+          </a:p>
+          <a:p xmlns:a="http://schemas.openxmlformats.org/drawingml/2006/main">
+            <a:r>
+              <a:t>The user previously asked for impact statements like 20% lower latency. Keep claims conservative until clean manager-grade measurements are available.</a:t>
+            </a:r>
+          </a:p>
+          <a:p xmlns:a="http://schemas.openxmlformats.org/drawingml/2006/main">
+            <a:r>
+              <a:t>Potential benefit ranges are internal proposal estimates based on observed late prefetch/replay H2D patterns and expected gains from deadline-aware KV movement.</a:t>
+            </a:r>
+          </a:p>
+          <a:p xmlns:a="http://schemas.openxmlformats.org/drawingml/2006/main">
+            <a:r>
+              <a:t/>
+            </a:r>
+          </a:p>
+          <a:p xmlns:a="http://schemas.openxmlformats.org/drawingml/2006/main">
+            <a:r>
+              <a:t>[Sources]</a:t>
+            </a:r>
+          </a:p>
+          <a:p xmlns:a="http://schemas.openxmlformats.org/drawingml/2006/main">
+            <a:r>
+              <a:t>Local report: /Users/oluwolejaiyeoba/Documents/GitHub/agentic_hardware/sglang_direct_kv/artifacts/results/latest_master_report.html</a:t>
+            </a:r>
+          </a:p>
+          <a:p xmlns:a="http://schemas.openxmlformats.org/drawingml/2006/main">
+            <a:r>
+              <a:t>Synthetic report: /Users/oluwolejaiyeoba/Documents/GitHub/agentic_hardware/sglang_direct_kv/artifacts/results/latest_synthetic_master_report.html</a:t>
+            </a:r>
+          </a:p>
+          <a:p xmlns:a="http://schemas.openxmlformats.org/drawingml/2006/main">
+            <a:r>
+              <a:t>Backup report: /Users/oluwolejaiyeoba/Documents/GitHub/agentic_hardware/backups/latest_master_report-1.html</a:t>
+            </a:r>
+          </a:p>
+        </p:txBody>
+      </p:sp>
+      <p:sp>
+        <p:nvSpPr>
+          <p:cNvPr id="4" name="Slide Number Placeholder 3"/>
+          <p:cNvSpPr>
+            <a:spLocks xmlns:a="http://schemas.openxmlformats.org/drawingml/2006/main" noGrp="1"/>
+          </p:cNvSpPr>
+          <p:nvPr>
+            <p:ph type="sldNum" idx="5"/>
+          </p:nvPr>
+        </p:nvSpPr>
+        <p:spPr/>
+        <p:txBody>
+          <a:bodyPr xmlns:a="http://schemas.openxmlformats.org/drawingml/2006/main"/>
+          <a:lstStyle xmlns:a="http://schemas.openxmlformats.org/drawingml/2006/main"/>
+          <a:p xmlns:a="http://schemas.openxmlformats.org/drawingml/2006/main"/>
+        </p:txBody>
+      </p:sp>
+    </p:spTree>
+  </p:cSld>
+  <p:clrMapOvr>
+    <a:masterClrMapping xmlns:a="http://schemas.openxmlformats.org/drawingml/2006/main"/>
+  </p:clrMapOvr>
+</p:notes>
+</file>
+
+<file path=ppt/notesSlides/notesSlide12.xml><?xml version="1.0" encoding="utf-8"?>
+<p:notes xmlns:p="http://schemas.openxmlformats.org/presentationml/2006/main">
+  <p:cSld>
+    <p:spTree>
+      <p:nvGrpSpPr>
+        <p:cNvPr id="1" name=""/>
+        <p:cNvGrpSpPr/>
+        <p:nvPr/>
+      </p:nvGrpSpPr>
+      <p:grpSpPr>
+        <a:xfrm xmlns:a="http://schemas.openxmlformats.org/drawingml/2006/main"/>
+      </p:grpSpPr>
+      <p:sp>
+        <p:nvSpPr>
+          <p:cNvPr id="2" name="Slide Image Placeholder 1"/>
+          <p:cNvSpPr>
+            <a:spLocks xmlns:a="http://schemas.openxmlformats.org/drawingml/2006/main" noGrp="1"/>
+          </p:cNvSpPr>
+          <p:nvPr>
+            <p:ph type="sldImg" idx="0"/>
+          </p:nvPr>
+        </p:nvSpPr>
+        <p:spPr/>
+      </p:sp>
+      <p:sp>
+        <p:nvSpPr>
+          <p:cNvPr id="3" name="Notes Placeholder 2"/>
+          <p:cNvSpPr>
+            <a:spLocks xmlns:a="http://schemas.openxmlformats.org/drawingml/2006/main" noGrp="1"/>
+          </p:cNvSpPr>
+          <p:nvPr>
+            <p:ph type="body" idx="1"/>
+          </p:nvPr>
+        </p:nvSpPr>
+        <p:spPr/>
+        <p:txBody>
+          <a:bodyPr xmlns:a="http://schemas.openxmlformats.org/drawingml/2006/main"/>
+          <a:lstStyle xmlns:a="http://schemas.openxmlformats.org/drawingml/2006/main"/>
+          <a:p xmlns:a="http://schemas.openxmlformats.org/drawingml/2006/main">
+            <a:r>
               <a:t>Closing slide. Translate the evidence into concrete hardware support candidates.</a:t>
             </a:r>
           </a:p>
@@ -1550,7 +1656,7 @@
   </p:cSld>
   <p:clrMap bg1="lt1" tx1="dk1" bg2="lt2" tx2="dk2" accent1="accent1" accent2="accent2" accent3="accent3" accent4="accent4" accent5="accent5" accent6="accent6" hlink="hlink" folHlink="folHlink"/>
   <p:sldLayoutIdLst>
-    <p:sldLayoutId xmlns:r="http://schemas.openxmlformats.org/officeDocument/2006/relationships" id="2147483649" r:id="R7a586a2ea674487b"/>
+    <p:sldLayoutId xmlns:r="http://schemas.openxmlformats.org/officeDocument/2006/relationships" id="2147483649" r:id="R9dd8673576d7441a"/>
   </p:sldLayoutIdLst>
   <p:txStyles>
     <p:titleStyle>
@@ -2101,7 +2207,7 @@
           <p:cNvPr id="12" name="">
             <a:extLst xmlns:a="http://schemas.openxmlformats.org/drawingml/2006/main">
               <a:ext uri="{FF2B5EF4-FFF2-40B4-BE49-F238E27FC236}">
-                <a16:creationId xmlns:a16="http://schemas.microsoft.com/office/drawing/2014/main" id="{3FC7523C-C444-4A2A-9304-79D6F1A41B0F}"/>
+                <a16:creationId xmlns:a16="http://schemas.microsoft.com/office/drawing/2014/main" id="{6543091D-7A1B-427B-9CB4-3A4591A94195}"/>
               </a:ext>
             </a:extLst>
           </p:cNvPr>
@@ -2151,7 +2257,7 @@
           <p:cNvPr id="2" name="">
             <a:extLst xmlns:a="http://schemas.openxmlformats.org/drawingml/2006/main">
               <a:ext uri="{FF2B5EF4-FFF2-40B4-BE49-F238E27FC236}">
-                <a16:creationId xmlns:a16="http://schemas.microsoft.com/office/drawing/2014/main" id="{B946B008-5047-4094-9B15-09B1B243DFBF}"/>
+                <a16:creationId xmlns:a16="http://schemas.microsoft.com/office/drawing/2014/main" id="{C4925A30-F28D-4A6B-BA2D-33FE19F2E34D}"/>
               </a:ext>
             </a:extLst>
           </p:cNvPr>
@@ -2201,7 +2307,7 @@
           <p:cNvPr id="3" name="">
             <a:extLst xmlns:a="http://schemas.openxmlformats.org/drawingml/2006/main">
               <a:ext uri="{FF2B5EF4-FFF2-40B4-BE49-F238E27FC236}">
-                <a16:creationId xmlns:a16="http://schemas.microsoft.com/office/drawing/2014/main" id="{9CA5556B-4CE9-4C15-A4C0-35FA6CB8E76C}"/>
+                <a16:creationId xmlns:a16="http://schemas.microsoft.com/office/drawing/2014/main" id="{F64297CF-480E-4B19-9A68-B2605682614E}"/>
               </a:ext>
             </a:extLst>
           </p:cNvPr>
@@ -2232,7 +2338,7 @@
           <p:cNvPr id="4" name="">
             <a:extLst xmlns:a="http://schemas.openxmlformats.org/drawingml/2006/main">
               <a:ext uri="{FF2B5EF4-FFF2-40B4-BE49-F238E27FC236}">
-                <a16:creationId xmlns:a16="http://schemas.microsoft.com/office/drawing/2014/main" id="{99A9D1E8-D606-4B1E-9C5C-6C498D5963E2}"/>
+                <a16:creationId xmlns:a16="http://schemas.microsoft.com/office/drawing/2014/main" id="{A9BD2C76-8565-4C6F-BF64-8C98D033D2E1}"/>
               </a:ext>
             </a:extLst>
           </p:cNvPr>
@@ -2282,7 +2388,7 @@
           <p:cNvPr id="5" name="">
             <a:extLst xmlns:a="http://schemas.openxmlformats.org/drawingml/2006/main">
               <a:ext uri="{FF2B5EF4-FFF2-40B4-BE49-F238E27FC236}">
-                <a16:creationId xmlns:a16="http://schemas.microsoft.com/office/drawing/2014/main" id="{48CE3191-F12E-4145-9661-7CC772D26E35}"/>
+                <a16:creationId xmlns:a16="http://schemas.microsoft.com/office/drawing/2014/main" id="{86B6D4D9-C071-4588-A0CB-37F3B93C48E0}"/>
               </a:ext>
             </a:extLst>
           </p:cNvPr>
@@ -2332,7 +2438,7 @@
           <p:cNvPr id="6" name="">
             <a:extLst xmlns:a="http://schemas.openxmlformats.org/drawingml/2006/main">
               <a:ext uri="{FF2B5EF4-FFF2-40B4-BE49-F238E27FC236}">
-                <a16:creationId xmlns:a16="http://schemas.microsoft.com/office/drawing/2014/main" id="{5091F809-8919-408F-9994-D8D322103088}"/>
+                <a16:creationId xmlns:a16="http://schemas.microsoft.com/office/drawing/2014/main" id="{E357A409-BDE7-44C3-87DB-064C08F832F2}"/>
               </a:ext>
             </a:extLst>
           </p:cNvPr>
@@ -2382,7 +2488,7 @@
           <p:cNvPr id="7" name="">
             <a:extLst xmlns:a="http://schemas.openxmlformats.org/drawingml/2006/main">
               <a:ext uri="{FF2B5EF4-FFF2-40B4-BE49-F238E27FC236}">
-                <a16:creationId xmlns:a16="http://schemas.microsoft.com/office/drawing/2014/main" id="{D2FA7529-45F5-44A2-B171-AA9E2E2BEB8C}"/>
+                <a16:creationId xmlns:a16="http://schemas.microsoft.com/office/drawing/2014/main" id="{C884BB1D-B896-46D3-9B02-0865E912AF12}"/>
               </a:ext>
             </a:extLst>
           </p:cNvPr>
@@ -2432,7 +2538,7 @@
           <p:cNvPr id="8" name="">
             <a:extLst xmlns:a="http://schemas.openxmlformats.org/drawingml/2006/main">
               <a:ext uri="{FF2B5EF4-FFF2-40B4-BE49-F238E27FC236}">
-                <a16:creationId xmlns:a16="http://schemas.microsoft.com/office/drawing/2014/main" id="{6FF5949B-0D9E-4816-828B-B814B90B1C1A}"/>
+                <a16:creationId xmlns:a16="http://schemas.microsoft.com/office/drawing/2014/main" id="{ED16BFC6-8729-4EFC-A995-1EFFC8A31624}"/>
               </a:ext>
             </a:extLst>
           </p:cNvPr>
@@ -2482,7 +2588,7 @@
           <p:cNvPr id="9" name="">
             <a:extLst xmlns:a="http://schemas.openxmlformats.org/drawingml/2006/main">
               <a:ext uri="{FF2B5EF4-FFF2-40B4-BE49-F238E27FC236}">
-                <a16:creationId xmlns:a16="http://schemas.microsoft.com/office/drawing/2014/main" id="{B19FC95B-2A6C-4626-9720-E6C1AE845201}"/>
+                <a16:creationId xmlns:a16="http://schemas.microsoft.com/office/drawing/2014/main" id="{057277D4-975A-446B-B44E-BD31CEE330E0}"/>
               </a:ext>
             </a:extLst>
           </p:cNvPr>
@@ -2532,7 +2638,7 @@
           <p:cNvPr id="10" name="">
             <a:extLst xmlns:a="http://schemas.openxmlformats.org/drawingml/2006/main">
               <a:ext uri="{FF2B5EF4-FFF2-40B4-BE49-F238E27FC236}">
-                <a16:creationId xmlns:a16="http://schemas.microsoft.com/office/drawing/2014/main" id="{AD0898B3-EED3-424B-9B04-9720CAB78AF9}"/>
+                <a16:creationId xmlns:a16="http://schemas.microsoft.com/office/drawing/2014/main" id="{F490E093-38BA-4121-8B63-6550B5F0EFE4}"/>
               </a:ext>
             </a:extLst>
           </p:cNvPr>
@@ -2582,7 +2688,7 @@
           <p:cNvPr id="11" name="">
             <a:extLst xmlns:a="http://schemas.openxmlformats.org/drawingml/2006/main">
               <a:ext uri="{FF2B5EF4-FFF2-40B4-BE49-F238E27FC236}">
-                <a16:creationId xmlns:a16="http://schemas.microsoft.com/office/drawing/2014/main" id="{FF683914-53E2-4ECA-A7C0-D38A2FE0CFF0}"/>
+                <a16:creationId xmlns:a16="http://schemas.microsoft.com/office/drawing/2014/main" id="{69D55FF7-F253-4A5D-B199-8A6FA18BD5E7}"/>
               </a:ext>
             </a:extLst>
           </p:cNvPr>
@@ -2630,7 +2736,7 @@
     </p:spTree>
     <p:extLst>
       <p:ext uri="{BB962C8B-B14F-4D97-AF65-F5344CB8AC3E}">
-        <p14:creationId xmlns:p14="http://schemas.microsoft.com/office/powerpoint/2010/main" val="699505266"/>
+        <p14:creationId xmlns:p14="http://schemas.microsoft.com/office/powerpoint/2010/main" val="1139630840"/>
       </p:ext>
     </p:extLst>
   </p:cSld>
@@ -2658,10 +2764,10 @@
       </p:grpSpPr>
       <p:sp>
         <p:nvSpPr>
-          <p:cNvPr id="18" name="">
-            <a:extLst xmlns:a="http://schemas.openxmlformats.org/drawingml/2006/main">
-              <a:ext uri="{FF2B5EF4-FFF2-40B4-BE49-F238E27FC236}">
-                <a16:creationId xmlns:a16="http://schemas.microsoft.com/office/drawing/2014/main" id="{91DB210A-25A4-4A0B-B0BD-8B4EC1F32DED}"/>
+          <p:cNvPr id="17" name="">
+            <a:extLst xmlns:a="http://schemas.openxmlformats.org/drawingml/2006/main">
+              <a:ext uri="{FF2B5EF4-FFF2-40B4-BE49-F238E27FC236}">
+                <a16:creationId xmlns:a16="http://schemas.microsoft.com/office/drawing/2014/main" id="{AD530860-9A8A-4888-B38D-E331E671FED7}"/>
               </a:ext>
             </a:extLst>
           </p:cNvPr>
@@ -2711,7 +2817,7 @@
           <p:cNvPr id="2" name="">
             <a:extLst xmlns:a="http://schemas.openxmlformats.org/drawingml/2006/main">
               <a:ext uri="{FF2B5EF4-FFF2-40B4-BE49-F238E27FC236}">
-                <a16:creationId xmlns:a16="http://schemas.microsoft.com/office/drawing/2014/main" id="{8F8840B8-F83C-4E9D-9179-D214E307826C}"/>
+                <a16:creationId xmlns:a16="http://schemas.microsoft.com/office/drawing/2014/main" id="{308F1D59-09FE-4477-A218-8681AD2C8542}"/>
               </a:ext>
             </a:extLst>
           </p:cNvPr>
@@ -2761,7 +2867,7 @@
           <p:cNvPr id="3" name="">
             <a:extLst xmlns:a="http://schemas.openxmlformats.org/drawingml/2006/main">
               <a:ext uri="{FF2B5EF4-FFF2-40B4-BE49-F238E27FC236}">
-                <a16:creationId xmlns:a16="http://schemas.microsoft.com/office/drawing/2014/main" id="{60E9ADB8-108A-4F0F-83FC-3452331C4160}"/>
+                <a16:creationId xmlns:a16="http://schemas.microsoft.com/office/drawing/2014/main" id="{21463CB0-08ED-4506-8BB0-A9EDC311B992}"/>
               </a:ext>
             </a:extLst>
           </p:cNvPr>
@@ -2811,7 +2917,7 @@
           <p:cNvPr id="4" name="">
             <a:extLst xmlns:a="http://schemas.openxmlformats.org/drawingml/2006/main">
               <a:ext uri="{FF2B5EF4-FFF2-40B4-BE49-F238E27FC236}">
-                <a16:creationId xmlns:a16="http://schemas.microsoft.com/office/drawing/2014/main" id="{C214AFFD-9E48-406A-A2B4-75164C2C3128}"/>
+                <a16:creationId xmlns:a16="http://schemas.microsoft.com/office/drawing/2014/main" id="{F9AA8060-D775-462E-AE4D-5E12C3A6341A}"/>
               </a:ext>
             </a:extLst>
           </p:cNvPr>
@@ -2861,7 +2967,7 @@
           <p:cNvPr id="5" name="">
             <a:extLst xmlns:a="http://schemas.openxmlformats.org/drawingml/2006/main">
               <a:ext uri="{FF2B5EF4-FFF2-40B4-BE49-F238E27FC236}">
-                <a16:creationId xmlns:a16="http://schemas.microsoft.com/office/drawing/2014/main" id="{D6AF8C16-DDC8-402E-A57C-0DDDAFACF6D3}"/>
+                <a16:creationId xmlns:a16="http://schemas.microsoft.com/office/drawing/2014/main" id="{6CD8B445-BF2E-45C2-810D-1201CED09F3A}"/>
               </a:ext>
             </a:extLst>
           </p:cNvPr>
@@ -2911,7 +3017,7 @@
           <p:cNvPr id="6" name="">
             <a:extLst xmlns:a="http://schemas.openxmlformats.org/drawingml/2006/main">
               <a:ext uri="{FF2B5EF4-FFF2-40B4-BE49-F238E27FC236}">
-                <a16:creationId xmlns:a16="http://schemas.microsoft.com/office/drawing/2014/main" id="{29EB4331-0504-4C90-BF64-467C24DA9AFA}"/>
+                <a16:creationId xmlns:a16="http://schemas.microsoft.com/office/drawing/2014/main" id="{55567DCC-79FB-499C-975B-63F2B1EB8C38}"/>
               </a:ext>
             </a:extLst>
           </p:cNvPr>
@@ -2961,7 +3067,7 @@
           <p:cNvPr id="7" name="">
             <a:extLst xmlns:a="http://schemas.openxmlformats.org/drawingml/2006/main">
               <a:ext uri="{FF2B5EF4-FFF2-40B4-BE49-F238E27FC236}">
-                <a16:creationId xmlns:a16="http://schemas.microsoft.com/office/drawing/2014/main" id="{F8B4BF22-6434-47C7-8846-D1A02281E390}"/>
+                <a16:creationId xmlns:a16="http://schemas.microsoft.com/office/drawing/2014/main" id="{11E7F8D9-EA30-4FD6-BB26-60702350C0F0}"/>
               </a:ext>
             </a:extLst>
           </p:cNvPr>
@@ -3011,7 +3117,7 @@
           <p:cNvPr id="8" name="">
             <a:extLst xmlns:a="http://schemas.openxmlformats.org/drawingml/2006/main">
               <a:ext uri="{FF2B5EF4-FFF2-40B4-BE49-F238E27FC236}">
-                <a16:creationId xmlns:a16="http://schemas.microsoft.com/office/drawing/2014/main" id="{94EEF04E-8104-46C4-A3B2-370FACB885B2}"/>
+                <a16:creationId xmlns:a16="http://schemas.microsoft.com/office/drawing/2014/main" id="{43CAEB04-AFD6-4004-B47F-915F949BAD1D}"/>
               </a:ext>
             </a:extLst>
           </p:cNvPr>
@@ -3061,7 +3167,7 @@
           <p:cNvPr id="9" name="">
             <a:extLst xmlns:a="http://schemas.openxmlformats.org/drawingml/2006/main">
               <a:ext uri="{FF2B5EF4-FFF2-40B4-BE49-F238E27FC236}">
-                <a16:creationId xmlns:a16="http://schemas.microsoft.com/office/drawing/2014/main" id="{86FA9148-DFA0-4AFB-A6C9-AFE416943730}"/>
+                <a16:creationId xmlns:a16="http://schemas.microsoft.com/office/drawing/2014/main" id="{F49A0774-6B8F-47DC-A254-E2343962B4D6}"/>
               </a:ext>
             </a:extLst>
           </p:cNvPr>
@@ -3111,7 +3217,7 @@
           <p:cNvPr id="10" name="">
             <a:extLst xmlns:a="http://schemas.openxmlformats.org/drawingml/2006/main">
               <a:ext uri="{FF2B5EF4-FFF2-40B4-BE49-F238E27FC236}">
-                <a16:creationId xmlns:a16="http://schemas.microsoft.com/office/drawing/2014/main" id="{D7E1BDAA-0E8F-4173-A340-1C568F864035}"/>
+                <a16:creationId xmlns:a16="http://schemas.microsoft.com/office/drawing/2014/main" id="{F38F8FE4-B4C6-4CFD-B527-6B4112274950}"/>
               </a:ext>
             </a:extLst>
           </p:cNvPr>
@@ -3161,7 +3267,7 @@
           <p:cNvPr id="11" name="">
             <a:extLst xmlns:a="http://schemas.openxmlformats.org/drawingml/2006/main">
               <a:ext uri="{FF2B5EF4-FFF2-40B4-BE49-F238E27FC236}">
-                <a16:creationId xmlns:a16="http://schemas.microsoft.com/office/drawing/2014/main" id="{E9A2D6CF-9D2F-43B2-AD43-9EE2B8C735FC}"/>
+                <a16:creationId xmlns:a16="http://schemas.microsoft.com/office/drawing/2014/main" id="{377DDC15-10FE-4D52-9E1B-AE16CD8A0071}"/>
               </a:ext>
             </a:extLst>
           </p:cNvPr>
@@ -3211,7 +3317,7 @@
           <p:cNvPr id="12" name="">
             <a:extLst xmlns:a="http://schemas.openxmlformats.org/drawingml/2006/main">
               <a:ext uri="{FF2B5EF4-FFF2-40B4-BE49-F238E27FC236}">
-                <a16:creationId xmlns:a16="http://schemas.microsoft.com/office/drawing/2014/main" id="{4BECB439-7726-4097-A75E-D6F16F3CCACD}"/>
+                <a16:creationId xmlns:a16="http://schemas.microsoft.com/office/drawing/2014/main" id="{C59EF465-7C4A-42EA-8AF0-9EC02FEC243D}"/>
               </a:ext>
             </a:extLst>
           </p:cNvPr>
@@ -3261,7 +3367,7 @@
           <p:cNvPr id="13" name="">
             <a:extLst xmlns:a="http://schemas.openxmlformats.org/drawingml/2006/main">
               <a:ext uri="{FF2B5EF4-FFF2-40B4-BE49-F238E27FC236}">
-                <a16:creationId xmlns:a16="http://schemas.microsoft.com/office/drawing/2014/main" id="{783577F5-4417-4D74-A8BA-851C772D5081}"/>
+                <a16:creationId xmlns:a16="http://schemas.microsoft.com/office/drawing/2014/main" id="{F4C51755-B5FD-475B-A3B4-9A05CB6DC516}"/>
               </a:ext>
             </a:extLst>
           </p:cNvPr>
@@ -3292,7 +3398,7 @@
           <p:cNvPr id="14" name="">
             <a:extLst xmlns:a="http://schemas.openxmlformats.org/drawingml/2006/main">
               <a:ext uri="{FF2B5EF4-FFF2-40B4-BE49-F238E27FC236}">
-                <a16:creationId xmlns:a16="http://schemas.microsoft.com/office/drawing/2014/main" id="{FBEABC84-4FAF-4258-A5B9-F78B0F8329AE}"/>
+                <a16:creationId xmlns:a16="http://schemas.microsoft.com/office/drawing/2014/main" id="{9CD41DA1-610C-40E8-91BC-C8C0ED4AE028}"/>
               </a:ext>
             </a:extLst>
           </p:cNvPr>
@@ -3342,57 +3448,7 @@
           <p:cNvPr id="15" name="">
             <a:extLst xmlns:a="http://schemas.openxmlformats.org/drawingml/2006/main">
               <a:ext uri="{FF2B5EF4-FFF2-40B4-BE49-F238E27FC236}">
-                <a16:creationId xmlns:a16="http://schemas.microsoft.com/office/drawing/2014/main" id="{32515FE4-0725-4A39-AAAF-04466838967F}"/>
-              </a:ext>
-            </a:extLst>
-          </p:cNvPr>
-          <p:cNvSpPr>
-            <a:spLocks xmlns:a="http://schemas.openxmlformats.org/drawingml/2006/main" noGrp="1"/>
-          </p:cNvSpPr>
-          <p:nvPr/>
-        </p:nvSpPr>
-        <p:spPr>
-          <a:xfrm xmlns:a="http://schemas.openxmlformats.org/drawingml/2006/main">
-            <a:off x="419100" y="6134100"/>
-            <a:ext cx="9334500" cy="190500"/>
-          </a:xfrm>
-          <a:prstGeom xmlns:a="http://schemas.openxmlformats.org/drawingml/2006/main" prst="rect">
-            <a:avLst/>
-          </a:prstGeom>
-          <a:noFill xmlns:a="http://schemas.openxmlformats.org/drawingml/2006/main"/>
-          <a:ln xmlns:a="http://schemas.openxmlformats.org/drawingml/2006/main" w="0">
-            <a:noFill/>
-            <a:prstDash val="solid"/>
-          </a:ln>
-        </p:spPr>
-        <p:txBody>
-          <a:bodyPr xmlns:a="http://schemas.openxmlformats.org/drawingml/2006/main" anchor="t"/>
-          <a:lstStyle xmlns:a="http://schemas.openxmlformats.org/drawingml/2006/main"/>
-          <a:p xmlns:a="http://schemas.openxmlformats.org/drawingml/2006/main">
-            <a:pPr algn="l">
-              <a:defRPr sz="825" b="0">
-                <a:solidFill>
-                  <a:srgbClr val="64748B"/>
-                </a:solidFill>
-              </a:defRPr>
-            </a:pPr>
-            <a:r>
-              <a:rPr sz="825" b="0">
-                <a:solidFill>
-                  <a:srgbClr val="64748B"/>
-                </a:solidFill>
-              </a:rPr>
-              <a:t>Source: project traces and latest master/synthetic report observations</a:t>
-            </a:r>
-          </a:p>
-        </p:txBody>
-      </p:sp>
-      <p:sp>
-        <p:nvSpPr>
-          <p:cNvPr id="16" name="">
-            <a:extLst xmlns:a="http://schemas.openxmlformats.org/drawingml/2006/main">
-              <a:ext uri="{FF2B5EF4-FFF2-40B4-BE49-F238E27FC236}">
-                <a16:creationId xmlns:a16="http://schemas.microsoft.com/office/drawing/2014/main" id="{425BDFD2-0FD2-43BA-9675-F762D8DD7511}"/>
+                <a16:creationId xmlns:a16="http://schemas.microsoft.com/office/drawing/2014/main" id="{24FFF9B2-D60F-4260-81DD-43CEAE7CA20B}"/>
               </a:ext>
             </a:extLst>
           </p:cNvPr>
@@ -3439,10 +3495,10 @@
       </p:sp>
       <p:sp>
         <p:nvSpPr>
-          <p:cNvPr id="17" name="">
-            <a:extLst xmlns:a="http://schemas.openxmlformats.org/drawingml/2006/main">
-              <a:ext uri="{FF2B5EF4-FFF2-40B4-BE49-F238E27FC236}">
-                <a16:creationId xmlns:a16="http://schemas.microsoft.com/office/drawing/2014/main" id="{027D9A8B-6529-41A8-B248-9D0F3813A1DB}"/>
+          <p:cNvPr id="16" name="">
+            <a:extLst xmlns:a="http://schemas.openxmlformats.org/drawingml/2006/main">
+              <a:ext uri="{FF2B5EF4-FFF2-40B4-BE49-F238E27FC236}">
+                <a16:creationId xmlns:a16="http://schemas.microsoft.com/office/drawing/2014/main" id="{EDC70FB8-D435-40B8-9E7F-CED5FDD8F262}"/>
               </a:ext>
             </a:extLst>
           </p:cNvPr>
@@ -3490,7 +3546,7 @@
     </p:spTree>
     <p:extLst>
       <p:ext uri="{BB962C8B-B14F-4D97-AF65-F5344CB8AC3E}">
-        <p14:creationId xmlns:p14="http://schemas.microsoft.com/office/powerpoint/2010/main" val="1565412291"/>
+        <p14:creationId xmlns:p14="http://schemas.microsoft.com/office/powerpoint/2010/main" val="1065304262"/>
       </p:ext>
     </p:extLst>
   </p:cSld>
@@ -3518,10 +3574,10 @@
       </p:grpSpPr>
       <p:sp>
         <p:nvSpPr>
-          <p:cNvPr id="15" name="">
-            <a:extLst xmlns:a="http://schemas.openxmlformats.org/drawingml/2006/main">
-              <a:ext uri="{FF2B5EF4-FFF2-40B4-BE49-F238E27FC236}">
-                <a16:creationId xmlns:a16="http://schemas.microsoft.com/office/drawing/2014/main" id="{1E6937AA-7ED1-4955-8D89-6CF767309345}"/>
+          <p:cNvPr id="17" name="">
+            <a:extLst xmlns:a="http://schemas.openxmlformats.org/drawingml/2006/main">
+              <a:ext uri="{FF2B5EF4-FFF2-40B4-BE49-F238E27FC236}">
+                <a16:creationId xmlns:a16="http://schemas.microsoft.com/office/drawing/2014/main" id="{A17E71E8-B245-4850-A7AF-52DCE50A47FB}"/>
               </a:ext>
             </a:extLst>
           </p:cNvPr>
@@ -3561,7 +3617,7 @@
                   <a:srgbClr val="0F172A"/>
                 </a:solidFill>
               </a:rPr>
-              <a:t>Hardware support can make hints enforceable</a:t>
+              <a:t>Potential hardware impact</a:t>
             </a:r>
           </a:p>
         </p:txBody>
@@ -3571,7 +3627,7 @@
           <p:cNvPr id="2" name="">
             <a:extLst xmlns:a="http://schemas.openxmlformats.org/drawingml/2006/main">
               <a:ext uri="{FF2B5EF4-FFF2-40B4-BE49-F238E27FC236}">
-                <a16:creationId xmlns:a16="http://schemas.microsoft.com/office/drawing/2014/main" id="{F54E1413-BCCA-4924-A78D-124D95775034}"/>
+                <a16:creationId xmlns:a16="http://schemas.microsoft.com/office/drawing/2014/main" id="{087D382F-2747-4FE1-A2A0-A65681099C3D}"/>
               </a:ext>
             </a:extLst>
           </p:cNvPr>
@@ -3611,7 +3667,7 @@
                   <a:srgbClr val="64748B"/>
                 </a:solidFill>
               </a:rPr>
-              <a:t>Treat KV as deadline-sensitive memory, not generic bytes.</a:t>
+              <a:t>These are ballpark research targets for tool-heavy agent workloads, not final measured claims.</a:t>
             </a:r>
           </a:p>
         </p:txBody>
@@ -3621,18 +3677,18 @@
           <p:cNvPr id="3" name="">
             <a:extLst xmlns:a="http://schemas.openxmlformats.org/drawingml/2006/main">
               <a:ext uri="{FF2B5EF4-FFF2-40B4-BE49-F238E27FC236}">
-                <a16:creationId xmlns:a16="http://schemas.microsoft.com/office/drawing/2014/main" id="{77CBAB5D-07DF-40A3-A6AE-76CFCEAA1821}"/>
-              </a:ext>
-            </a:extLst>
-          </p:cNvPr>
-          <p:cNvSpPr>
-            <a:spLocks xmlns:a="http://schemas.openxmlformats.org/drawingml/2006/main" noGrp="1"/>
-          </p:cNvSpPr>
-          <p:nvPr/>
-        </p:nvSpPr>
-        <p:spPr>
-          <a:xfrm xmlns:a="http://schemas.openxmlformats.org/drawingml/2006/main">
-            <a:off x="857250" y="1676400"/>
+                <a16:creationId xmlns:a16="http://schemas.microsoft.com/office/drawing/2014/main" id="{663BB759-66EF-4679-B1A9-1C036C6C1EB7}"/>
+              </a:ext>
+            </a:extLst>
+          </p:cNvPr>
+          <p:cNvSpPr>
+            <a:spLocks xmlns:a="http://schemas.openxmlformats.org/drawingml/2006/main" noGrp="1"/>
+          </p:cNvSpPr>
+          <p:nvPr/>
+        </p:nvSpPr>
+        <p:spPr>
+          <a:xfrm xmlns:a="http://schemas.openxmlformats.org/drawingml/2006/main">
+            <a:off x="876300" y="1562100"/>
             <a:ext cx="190500" cy="304800"/>
           </a:xfrm>
           <a:prstGeom xmlns:a="http://schemas.openxmlformats.org/drawingml/2006/main" prst="rect">
@@ -3671,19 +3727,19 @@
           <p:cNvPr id="4" name="">
             <a:extLst xmlns:a="http://schemas.openxmlformats.org/drawingml/2006/main">
               <a:ext uri="{FF2B5EF4-FFF2-40B4-BE49-F238E27FC236}">
-                <a16:creationId xmlns:a16="http://schemas.microsoft.com/office/drawing/2014/main" id="{D66BF7F1-9F5A-44F6-A824-8B0FA9A0E69A}"/>
-              </a:ext>
-            </a:extLst>
-          </p:cNvPr>
-          <p:cNvSpPr>
-            <a:spLocks xmlns:a="http://schemas.openxmlformats.org/drawingml/2006/main" noGrp="1"/>
-          </p:cNvSpPr>
-          <p:nvPr/>
-        </p:nvSpPr>
-        <p:spPr>
-          <a:xfrm xmlns:a="http://schemas.openxmlformats.org/drawingml/2006/main">
-            <a:off x="1143000" y="1695450"/>
-            <a:ext cx="9715500" cy="552450"/>
+                <a16:creationId xmlns:a16="http://schemas.microsoft.com/office/drawing/2014/main" id="{1A1E89B1-B4F3-437B-B60D-684E2E3757BA}"/>
+              </a:ext>
+            </a:extLst>
+          </p:cNvPr>
+          <p:cNvSpPr>
+            <a:spLocks xmlns:a="http://schemas.openxmlformats.org/drawingml/2006/main" noGrp="1"/>
+          </p:cNvSpPr>
+          <p:nvPr/>
+        </p:nvSpPr>
+        <p:spPr>
+          <a:xfrm xmlns:a="http://schemas.openxmlformats.org/drawingml/2006/main">
+            <a:off x="1162050" y="1581150"/>
+            <a:ext cx="9715500" cy="514350"/>
           </a:xfrm>
           <a:prstGeom xmlns:a="http://schemas.openxmlformats.org/drawingml/2006/main" prst="rect">
             <a:avLst/>
@@ -3711,7 +3767,7 @@
                   <a:srgbClr val="334155"/>
                 </a:solidFill>
               </a:rPr>
-              <a:t>KV page/session metadata: which agent owns this KV and how urgent is it?</a:t>
+              <a:t>10-30% lower post-tool replay latency when urgent KV is ready before replay.</a:t>
             </a:r>
           </a:p>
         </p:txBody>
@@ -3721,18 +3777,18 @@
           <p:cNvPr id="5" name="">
             <a:extLst xmlns:a="http://schemas.openxmlformats.org/drawingml/2006/main">
               <a:ext uri="{FF2B5EF4-FFF2-40B4-BE49-F238E27FC236}">
-                <a16:creationId xmlns:a16="http://schemas.microsoft.com/office/drawing/2014/main" id="{BF3088F7-E772-4344-8BFD-7DF675114801}"/>
-              </a:ext>
-            </a:extLst>
-          </p:cNvPr>
-          <p:cNvSpPr>
-            <a:spLocks xmlns:a="http://schemas.openxmlformats.org/drawingml/2006/main" noGrp="1"/>
-          </p:cNvSpPr>
-          <p:nvPr/>
-        </p:nvSpPr>
-        <p:spPr>
-          <a:xfrm xmlns:a="http://schemas.openxmlformats.org/drawingml/2006/main">
-            <a:off x="857250" y="2362200"/>
+                <a16:creationId xmlns:a16="http://schemas.microsoft.com/office/drawing/2014/main" id="{846EA34F-5FD7-42D3-9E0D-761201685738}"/>
+              </a:ext>
+            </a:extLst>
+          </p:cNvPr>
+          <p:cNvSpPr>
+            <a:spLocks xmlns:a="http://schemas.openxmlformats.org/drawingml/2006/main" noGrp="1"/>
+          </p:cNvSpPr>
+          <p:nvPr/>
+        </p:nvSpPr>
+        <p:spPr>
+          <a:xfrm xmlns:a="http://schemas.openxmlformats.org/drawingml/2006/main">
+            <a:off x="876300" y="2247900"/>
             <a:ext cx="190500" cy="304800"/>
           </a:xfrm>
           <a:prstGeom xmlns:a="http://schemas.openxmlformats.org/drawingml/2006/main" prst="rect">
@@ -3771,19 +3827,19 @@
           <p:cNvPr id="6" name="">
             <a:extLst xmlns:a="http://schemas.openxmlformats.org/drawingml/2006/main">
               <a:ext uri="{FF2B5EF4-FFF2-40B4-BE49-F238E27FC236}">
-                <a16:creationId xmlns:a16="http://schemas.microsoft.com/office/drawing/2014/main" id="{F3707825-552E-4DA5-BBA7-6EDE7E0AB5E7}"/>
-              </a:ext>
-            </a:extLst>
-          </p:cNvPr>
-          <p:cNvSpPr>
-            <a:spLocks xmlns:a="http://schemas.openxmlformats.org/drawingml/2006/main" noGrp="1"/>
-          </p:cNvSpPr>
-          <p:nvPr/>
-        </p:nvSpPr>
-        <p:spPr>
-          <a:xfrm xmlns:a="http://schemas.openxmlformats.org/drawingml/2006/main">
-            <a:off x="1143000" y="2381250"/>
-            <a:ext cx="9715500" cy="552450"/>
+                <a16:creationId xmlns:a16="http://schemas.microsoft.com/office/drawing/2014/main" id="{BF975120-3ECA-4B75-98F1-F38341BFB05E}"/>
+              </a:ext>
+            </a:extLst>
+          </p:cNvPr>
+          <p:cNvSpPr>
+            <a:spLocks xmlns:a="http://schemas.openxmlformats.org/drawingml/2006/main" noGrp="1"/>
+          </p:cNvSpPr>
+          <p:nvPr/>
+        </p:nvSpPr>
+        <p:spPr>
+          <a:xfrm xmlns:a="http://schemas.openxmlformats.org/drawingml/2006/main">
+            <a:off x="1162050" y="2266950"/>
+            <a:ext cx="9715500" cy="514350"/>
           </a:xfrm>
           <a:prstGeom xmlns:a="http://schemas.openxmlformats.org/drawingml/2006/main" prst="rect">
             <a:avLst/>
@@ -3811,7 +3867,7 @@
                   <a:srgbClr val="334155"/>
                 </a:solidFill>
               </a:rPr>
-              <a:t>Deadline-aware migration queue: move urgent KV before less urgent traffic.</a:t>
+              <a:t>20-50% fewer late KV reloads with deadline-aware movement scheduling.</a:t>
             </a:r>
           </a:p>
         </p:txBody>
@@ -3821,18 +3877,18 @@
           <p:cNvPr id="7" name="">
             <a:extLst xmlns:a="http://schemas.openxmlformats.org/drawingml/2006/main">
               <a:ext uri="{FF2B5EF4-FFF2-40B4-BE49-F238E27FC236}">
-                <a16:creationId xmlns:a16="http://schemas.microsoft.com/office/drawing/2014/main" id="{8943B917-1048-4752-AE70-A539A21A15B3}"/>
-              </a:ext>
-            </a:extLst>
-          </p:cNvPr>
-          <p:cNvSpPr>
-            <a:spLocks xmlns:a="http://schemas.openxmlformats.org/drawingml/2006/main" noGrp="1"/>
-          </p:cNvSpPr>
-          <p:nvPr/>
-        </p:nvSpPr>
-        <p:spPr>
-          <a:xfrm xmlns:a="http://schemas.openxmlformats.org/drawingml/2006/main">
-            <a:off x="857250" y="3048000"/>
+                <a16:creationId xmlns:a16="http://schemas.microsoft.com/office/drawing/2014/main" id="{057E3B91-29B2-48BC-AB82-048B49F42177}"/>
+              </a:ext>
+            </a:extLst>
+          </p:cNvPr>
+          <p:cNvSpPr>
+            <a:spLocks xmlns:a="http://schemas.openxmlformats.org/drawingml/2006/main" noGrp="1"/>
+          </p:cNvSpPr>
+          <p:nvPr/>
+        </p:nvSpPr>
+        <p:spPr>
+          <a:xfrm xmlns:a="http://schemas.openxmlformats.org/drawingml/2006/main">
+            <a:off x="876300" y="2933700"/>
             <a:ext cx="190500" cy="304800"/>
           </a:xfrm>
           <a:prstGeom xmlns:a="http://schemas.openxmlformats.org/drawingml/2006/main" prst="rect">
@@ -3851,6 +3907,206 @@
             <a:pPr algn="l">
               <a:defRPr sz="2025" b="1">
                 <a:solidFill>
+                  <a:srgbClr val="DC2626"/>
+                </a:solidFill>
+              </a:defRPr>
+            </a:pPr>
+            <a:r>
+              <a:rPr sz="2025" b="1">
+                <a:solidFill>
+                  <a:srgbClr val="DC2626"/>
+                </a:solidFill>
+              </a:rPr>
+              <a:t>•</a:t>
+            </a:r>
+          </a:p>
+        </p:txBody>
+      </p:sp>
+      <p:sp>
+        <p:nvSpPr>
+          <p:cNvPr id="8" name="">
+            <a:extLst xmlns:a="http://schemas.openxmlformats.org/drawingml/2006/main">
+              <a:ext uri="{FF2B5EF4-FFF2-40B4-BE49-F238E27FC236}">
+                <a16:creationId xmlns:a16="http://schemas.microsoft.com/office/drawing/2014/main" id="{C9847812-B562-4EC3-9B77-B24497214908}"/>
+              </a:ext>
+            </a:extLst>
+          </p:cNvPr>
+          <p:cNvSpPr>
+            <a:spLocks xmlns:a="http://schemas.openxmlformats.org/drawingml/2006/main" noGrp="1"/>
+          </p:cNvSpPr>
+          <p:nvPr/>
+        </p:nvSpPr>
+        <p:spPr>
+          <a:xfrm xmlns:a="http://schemas.openxmlformats.org/drawingml/2006/main">
+            <a:off x="1162050" y="2952750"/>
+            <a:ext cx="9715500" cy="514350"/>
+          </a:xfrm>
+          <a:prstGeom xmlns:a="http://schemas.openxmlformats.org/drawingml/2006/main" prst="rect">
+            <a:avLst/>
+          </a:prstGeom>
+          <a:noFill xmlns:a="http://schemas.openxmlformats.org/drawingml/2006/main"/>
+          <a:ln xmlns:a="http://schemas.openxmlformats.org/drawingml/2006/main" w="0">
+            <a:noFill/>
+            <a:prstDash val="solid"/>
+          </a:ln>
+        </p:spPr>
+        <p:txBody>
+          <a:bodyPr xmlns:a="http://schemas.openxmlformats.org/drawingml/2006/main" anchor="t"/>
+          <a:lstStyle xmlns:a="http://schemas.openxmlformats.org/drawingml/2006/main"/>
+          <a:p xmlns:a="http://schemas.openxmlformats.org/drawingml/2006/main">
+            <a:pPr algn="l">
+              <a:defRPr sz="1875" b="0">
+                <a:solidFill>
+                  <a:srgbClr val="334155"/>
+                </a:solidFill>
+              </a:defRPr>
+            </a:pPr>
+            <a:r>
+              <a:rPr sz="1875" b="0">
+                <a:solidFill>
+                  <a:srgbClr val="334155"/>
+                </a:solidFill>
+              </a:rPr>
+              <a:t>Lower tail latency by prioritizing soon-resuming agent sessions.</a:t>
+            </a:r>
+          </a:p>
+        </p:txBody>
+      </p:sp>
+      <p:sp>
+        <p:nvSpPr>
+          <p:cNvPr id="9" name="">
+            <a:extLst xmlns:a="http://schemas.openxmlformats.org/drawingml/2006/main">
+              <a:ext uri="{FF2B5EF4-FFF2-40B4-BE49-F238E27FC236}">
+                <a16:creationId xmlns:a16="http://schemas.microsoft.com/office/drawing/2014/main" id="{5CDC1431-3E15-4D87-8FF1-EAF8903922B8}"/>
+              </a:ext>
+            </a:extLst>
+          </p:cNvPr>
+          <p:cNvSpPr>
+            <a:spLocks xmlns:a="http://schemas.openxmlformats.org/drawingml/2006/main" noGrp="1"/>
+          </p:cNvSpPr>
+          <p:nvPr/>
+        </p:nvSpPr>
+        <p:spPr>
+          <a:xfrm xmlns:a="http://schemas.openxmlformats.org/drawingml/2006/main">
+            <a:off x="876300" y="3619500"/>
+            <a:ext cx="190500" cy="304800"/>
+          </a:xfrm>
+          <a:prstGeom xmlns:a="http://schemas.openxmlformats.org/drawingml/2006/main" prst="rect">
+            <a:avLst/>
+          </a:prstGeom>
+          <a:noFill xmlns:a="http://schemas.openxmlformats.org/drawingml/2006/main"/>
+          <a:ln xmlns:a="http://schemas.openxmlformats.org/drawingml/2006/main" w="0">
+            <a:noFill/>
+            <a:prstDash val="solid"/>
+          </a:ln>
+        </p:spPr>
+        <p:txBody>
+          <a:bodyPr xmlns:a="http://schemas.openxmlformats.org/drawingml/2006/main" anchor="t"/>
+          <a:lstStyle xmlns:a="http://schemas.openxmlformats.org/drawingml/2006/main"/>
+          <a:p xmlns:a="http://schemas.openxmlformats.org/drawingml/2006/main">
+            <a:pPr algn="l">
+              <a:defRPr sz="2025" b="1">
+                <a:solidFill>
+                  <a:srgbClr val="0891B2"/>
+                </a:solidFill>
+              </a:defRPr>
+            </a:pPr>
+            <a:r>
+              <a:rPr sz="2025" b="1">
+                <a:solidFill>
+                  <a:srgbClr val="0891B2"/>
+                </a:solidFill>
+              </a:rPr>
+              <a:t>•</a:t>
+            </a:r>
+          </a:p>
+        </p:txBody>
+      </p:sp>
+      <p:sp>
+        <p:nvSpPr>
+          <p:cNvPr id="10" name="">
+            <a:extLst xmlns:a="http://schemas.openxmlformats.org/drawingml/2006/main">
+              <a:ext uri="{FF2B5EF4-FFF2-40B4-BE49-F238E27FC236}">
+                <a16:creationId xmlns:a16="http://schemas.microsoft.com/office/drawing/2014/main" id="{32167948-09C3-40B4-96AA-2E9B806C6247}"/>
+              </a:ext>
+            </a:extLst>
+          </p:cNvPr>
+          <p:cNvSpPr>
+            <a:spLocks xmlns:a="http://schemas.openxmlformats.org/drawingml/2006/main" noGrp="1"/>
+          </p:cNvSpPr>
+          <p:nvPr/>
+        </p:nvSpPr>
+        <p:spPr>
+          <a:xfrm xmlns:a="http://schemas.openxmlformats.org/drawingml/2006/main">
+            <a:off x="1162050" y="3638550"/>
+            <a:ext cx="9715500" cy="514350"/>
+          </a:xfrm>
+          <a:prstGeom xmlns:a="http://schemas.openxmlformats.org/drawingml/2006/main" prst="rect">
+            <a:avLst/>
+          </a:prstGeom>
+          <a:noFill xmlns:a="http://schemas.openxmlformats.org/drawingml/2006/main"/>
+          <a:ln xmlns:a="http://schemas.openxmlformats.org/drawingml/2006/main" w="0">
+            <a:noFill/>
+            <a:prstDash val="solid"/>
+          </a:ln>
+        </p:spPr>
+        <p:txBody>
+          <a:bodyPr xmlns:a="http://schemas.openxmlformats.org/drawingml/2006/main" anchor="t"/>
+          <a:lstStyle xmlns:a="http://schemas.openxmlformats.org/drawingml/2006/main"/>
+          <a:p xmlns:a="http://schemas.openxmlformats.org/drawingml/2006/main">
+            <a:pPr algn="l">
+              <a:defRPr sz="1875" b="0">
+                <a:solidFill>
+                  <a:srgbClr val="334155"/>
+                </a:solidFill>
+              </a:defRPr>
+            </a:pPr>
+            <a:r>
+              <a:rPr sz="1875" b="0">
+                <a:solidFill>
+                  <a:srgbClr val="334155"/>
+                </a:solidFill>
+              </a:rPr>
+              <a:t>Less wasted bandwidth by avoiding too-early or evicted-before-use prefetch.</a:t>
+            </a:r>
+          </a:p>
+        </p:txBody>
+      </p:sp>
+      <p:sp>
+        <p:nvSpPr>
+          <p:cNvPr id="11" name="">
+            <a:extLst xmlns:a="http://schemas.openxmlformats.org/drawingml/2006/main">
+              <a:ext uri="{FF2B5EF4-FFF2-40B4-BE49-F238E27FC236}">
+                <a16:creationId xmlns:a16="http://schemas.microsoft.com/office/drawing/2014/main" id="{EEEA7C81-0285-467E-9749-DFCABDAA451A}"/>
+              </a:ext>
+            </a:extLst>
+          </p:cNvPr>
+          <p:cNvSpPr>
+            <a:spLocks xmlns:a="http://schemas.openxmlformats.org/drawingml/2006/main" noGrp="1"/>
+          </p:cNvSpPr>
+          <p:nvPr/>
+        </p:nvSpPr>
+        <p:spPr>
+          <a:xfrm xmlns:a="http://schemas.openxmlformats.org/drawingml/2006/main">
+            <a:off x="876300" y="4305300"/>
+            <a:ext cx="190500" cy="304800"/>
+          </a:xfrm>
+          <a:prstGeom xmlns:a="http://schemas.openxmlformats.org/drawingml/2006/main" prst="rect">
+            <a:avLst/>
+          </a:prstGeom>
+          <a:noFill xmlns:a="http://schemas.openxmlformats.org/drawingml/2006/main"/>
+          <a:ln xmlns:a="http://schemas.openxmlformats.org/drawingml/2006/main" w="0">
+            <a:noFill/>
+            <a:prstDash val="solid"/>
+          </a:ln>
+        </p:spPr>
+        <p:txBody>
+          <a:bodyPr xmlns:a="http://schemas.openxmlformats.org/drawingml/2006/main" anchor="t"/>
+          <a:lstStyle xmlns:a="http://schemas.openxmlformats.org/drawingml/2006/main"/>
+          <a:p xmlns:a="http://schemas.openxmlformats.org/drawingml/2006/main">
+            <a:pPr algn="l">
+              <a:defRPr sz="2025" b="1">
+                <a:solidFill>
                   <a:srgbClr val="16A34A"/>
                 </a:solidFill>
               </a:defRPr>
@@ -3868,22 +4124,22 @@
       </p:sp>
       <p:sp>
         <p:nvSpPr>
-          <p:cNvPr id="8" name="">
-            <a:extLst xmlns:a="http://schemas.openxmlformats.org/drawingml/2006/main">
-              <a:ext uri="{FF2B5EF4-FFF2-40B4-BE49-F238E27FC236}">
-                <a16:creationId xmlns:a16="http://schemas.microsoft.com/office/drawing/2014/main" id="{3C9A5F95-4B9F-4DD3-95CA-5A0830830D50}"/>
-              </a:ext>
-            </a:extLst>
-          </p:cNvPr>
-          <p:cNvSpPr>
-            <a:spLocks xmlns:a="http://schemas.openxmlformats.org/drawingml/2006/main" noGrp="1"/>
-          </p:cNvSpPr>
-          <p:nvPr/>
-        </p:nvSpPr>
-        <p:spPr>
-          <a:xfrm xmlns:a="http://schemas.openxmlformats.org/drawingml/2006/main">
-            <a:off x="1143000" y="3067050"/>
-            <a:ext cx="9715500" cy="552450"/>
+          <p:cNvPr id="12" name="">
+            <a:extLst xmlns:a="http://schemas.openxmlformats.org/drawingml/2006/main">
+              <a:ext uri="{FF2B5EF4-FFF2-40B4-BE49-F238E27FC236}">
+                <a16:creationId xmlns:a16="http://schemas.microsoft.com/office/drawing/2014/main" id="{06BA6338-6ABB-4F87-A225-A0A8FFE33F96}"/>
+              </a:ext>
+            </a:extLst>
+          </p:cNvPr>
+          <p:cNvSpPr>
+            <a:spLocks xmlns:a="http://schemas.openxmlformats.org/drawingml/2006/main" noGrp="1"/>
+          </p:cNvSpPr>
+          <p:nvPr/>
+        </p:nvSpPr>
+        <p:spPr>
+          <a:xfrm xmlns:a="http://schemas.openxmlformats.org/drawingml/2006/main">
+            <a:off x="1162050" y="4324350"/>
+            <a:ext cx="9715500" cy="514350"/>
           </a:xfrm>
           <a:prstGeom xmlns:a="http://schemas.openxmlformats.org/drawingml/2006/main" prst="rect">
             <a:avLst/>
@@ -3911,128 +4167,28 @@
                   <a:srgbClr val="334155"/>
                 </a:solidFill>
               </a:rPr>
-              <a:t>Residency protection: keep useful prefetched KV from being evicted too early.</a:t>
-            </a:r>
-          </a:p>
-        </p:txBody>
-      </p:sp>
-      <p:sp>
-        <p:nvSpPr>
-          <p:cNvPr id="9" name="">
-            <a:extLst xmlns:a="http://schemas.openxmlformats.org/drawingml/2006/main">
-              <a:ext uri="{FF2B5EF4-FFF2-40B4-BE49-F238E27FC236}">
-                <a16:creationId xmlns:a16="http://schemas.microsoft.com/office/drawing/2014/main" id="{76E21428-B143-46A2-88DE-76783CBAAC94}"/>
-              </a:ext>
-            </a:extLst>
-          </p:cNvPr>
-          <p:cNvSpPr>
-            <a:spLocks xmlns:a="http://schemas.openxmlformats.org/drawingml/2006/main" noGrp="1"/>
-          </p:cNvSpPr>
-          <p:nvPr/>
-        </p:nvSpPr>
-        <p:spPr>
-          <a:xfrm xmlns:a="http://schemas.openxmlformats.org/drawingml/2006/main">
-            <a:off x="857250" y="3733800"/>
-            <a:ext cx="190500" cy="304800"/>
-          </a:xfrm>
-          <a:prstGeom xmlns:a="http://schemas.openxmlformats.org/drawingml/2006/main" prst="rect">
-            <a:avLst/>
-          </a:prstGeom>
-          <a:noFill xmlns:a="http://schemas.openxmlformats.org/drawingml/2006/main"/>
-          <a:ln xmlns:a="http://schemas.openxmlformats.org/drawingml/2006/main" w="0">
-            <a:noFill/>
-            <a:prstDash val="solid"/>
-          </a:ln>
-        </p:spPr>
-        <p:txBody>
-          <a:bodyPr xmlns:a="http://schemas.openxmlformats.org/drawingml/2006/main" anchor="t"/>
-          <a:lstStyle xmlns:a="http://schemas.openxmlformats.org/drawingml/2006/main"/>
-          <a:p xmlns:a="http://schemas.openxmlformats.org/drawingml/2006/main">
-            <a:pPr algn="l">
-              <a:defRPr sz="2025" b="1">
-                <a:solidFill>
-                  <a:srgbClr val="0891B2"/>
-                </a:solidFill>
-              </a:defRPr>
-            </a:pPr>
-            <a:r>
-              <a:rPr sz="2025" b="1">
-                <a:solidFill>
-                  <a:srgbClr val="0891B2"/>
-                </a:solidFill>
-              </a:rPr>
-              <a:t>•</a:t>
-            </a:r>
-          </a:p>
-        </p:txBody>
-      </p:sp>
-      <p:sp>
-        <p:nvSpPr>
-          <p:cNvPr id="10" name="">
-            <a:extLst xmlns:a="http://schemas.openxmlformats.org/drawingml/2006/main">
-              <a:ext uri="{FF2B5EF4-FFF2-40B4-BE49-F238E27FC236}">
-                <a16:creationId xmlns:a16="http://schemas.microsoft.com/office/drawing/2014/main" id="{A368743A-D401-435C-9F1A-2FE1B385E614}"/>
-              </a:ext>
-            </a:extLst>
-          </p:cNvPr>
-          <p:cNvSpPr>
-            <a:spLocks xmlns:a="http://schemas.openxmlformats.org/drawingml/2006/main" noGrp="1"/>
-          </p:cNvSpPr>
-          <p:nvPr/>
-        </p:nvSpPr>
-        <p:spPr>
-          <a:xfrm xmlns:a="http://schemas.openxmlformats.org/drawingml/2006/main">
-            <a:off x="1143000" y="3752850"/>
-            <a:ext cx="9715500" cy="552450"/>
-          </a:xfrm>
-          <a:prstGeom xmlns:a="http://schemas.openxmlformats.org/drawingml/2006/main" prst="rect">
-            <a:avLst/>
-          </a:prstGeom>
-          <a:noFill xmlns:a="http://schemas.openxmlformats.org/drawingml/2006/main"/>
-          <a:ln xmlns:a="http://schemas.openxmlformats.org/drawingml/2006/main" w="0">
-            <a:noFill/>
-            <a:prstDash val="solid"/>
-          </a:ln>
-        </p:spPr>
-        <p:txBody>
-          <a:bodyPr xmlns:a="http://schemas.openxmlformats.org/drawingml/2006/main" anchor="t"/>
-          <a:lstStyle xmlns:a="http://schemas.openxmlformats.org/drawingml/2006/main"/>
-          <a:p xmlns:a="http://schemas.openxmlformats.org/drawingml/2006/main">
-            <a:pPr algn="l">
-              <a:defRPr sz="1875" b="0">
-                <a:solidFill>
-                  <a:srgbClr val="334155"/>
-                </a:solidFill>
-              </a:defRPr>
-            </a:pPr>
-            <a:r>
-              <a:rPr sz="1875" b="0">
-                <a:solidFill>
-                  <a:srgbClr val="334155"/>
-                </a:solidFill>
-              </a:rPr>
-              <a:t>Telemetry: count useful, late, wasted, and evicted-before-use movement.</a:t>
-            </a:r>
-          </a:p>
-        </p:txBody>
-      </p:sp>
-      <p:sp>
-        <p:nvSpPr>
-          <p:cNvPr id="11" name="">
-            <a:extLst xmlns:a="http://schemas.openxmlformats.org/drawingml/2006/main">
-              <a:ext uri="{FF2B5EF4-FFF2-40B4-BE49-F238E27FC236}">
-                <a16:creationId xmlns:a16="http://schemas.microsoft.com/office/drawing/2014/main" id="{EFEA2AE4-BD7F-4E37-B459-90B6B44105BC}"/>
-              </a:ext>
-            </a:extLst>
-          </p:cNvPr>
-          <p:cNvSpPr>
-            <a:spLocks xmlns:a="http://schemas.openxmlformats.org/drawingml/2006/main" noGrp="1"/>
-          </p:cNvSpPr>
-          <p:nvPr/>
-        </p:nvSpPr>
-        <p:spPr>
-          <a:xfrm xmlns:a="http://schemas.openxmlformats.org/drawingml/2006/main">
-            <a:off x="419100" y="5257800"/>
+              <a:t>Better effective HBM use through KV-aware residency and eviction choices.</a:t>
+            </a:r>
+          </a:p>
+        </p:txBody>
+      </p:sp>
+      <p:sp>
+        <p:nvSpPr>
+          <p:cNvPr id="13" name="">
+            <a:extLst xmlns:a="http://schemas.openxmlformats.org/drawingml/2006/main">
+              <a:ext uri="{FF2B5EF4-FFF2-40B4-BE49-F238E27FC236}">
+                <a16:creationId xmlns:a16="http://schemas.microsoft.com/office/drawing/2014/main" id="{3FA7312E-F183-431F-8F93-5DAE042BA5FB}"/>
+              </a:ext>
+            </a:extLst>
+          </p:cNvPr>
+          <p:cNvSpPr>
+            <a:spLocks xmlns:a="http://schemas.openxmlformats.org/drawingml/2006/main" noGrp="1"/>
+          </p:cNvSpPr>
+          <p:nvPr/>
+        </p:nvSpPr>
+        <p:spPr>
+          <a:xfrm xmlns:a="http://schemas.openxmlformats.org/drawingml/2006/main">
+            <a:off x="419100" y="5429250"/>
             <a:ext cx="11353800" cy="11430"/>
           </a:xfrm>
           <a:prstGeom xmlns:a="http://schemas.openxmlformats.org/drawingml/2006/main" prst="rect">
@@ -4049,22 +4205,22 @@
       </p:sp>
       <p:sp>
         <p:nvSpPr>
-          <p:cNvPr id="12" name="">
-            <a:extLst xmlns:a="http://schemas.openxmlformats.org/drawingml/2006/main">
-              <a:ext uri="{FF2B5EF4-FFF2-40B4-BE49-F238E27FC236}">
-                <a16:creationId xmlns:a16="http://schemas.microsoft.com/office/drawing/2014/main" id="{6DF91589-E793-4FA2-AD35-6D03A61B6932}"/>
-              </a:ext>
-            </a:extLst>
-          </p:cNvPr>
-          <p:cNvSpPr>
-            <a:spLocks xmlns:a="http://schemas.openxmlformats.org/drawingml/2006/main" noGrp="1"/>
-          </p:cNvSpPr>
-          <p:nvPr/>
-        </p:nvSpPr>
-        <p:spPr>
-          <a:xfrm xmlns:a="http://schemas.openxmlformats.org/drawingml/2006/main">
-            <a:off x="857250" y="5524500"/>
-            <a:ext cx="10191750" cy="476250"/>
+          <p:cNvPr id="14" name="">
+            <a:extLst xmlns:a="http://schemas.openxmlformats.org/drawingml/2006/main">
+              <a:ext uri="{FF2B5EF4-FFF2-40B4-BE49-F238E27FC236}">
+                <a16:creationId xmlns:a16="http://schemas.microsoft.com/office/drawing/2014/main" id="{639028E8-520B-4226-A2C0-8FAA493F2E8D}"/>
+              </a:ext>
+            </a:extLst>
+          </p:cNvPr>
+          <p:cNvSpPr>
+            <a:spLocks xmlns:a="http://schemas.openxmlformats.org/drawingml/2006/main" noGrp="1"/>
+          </p:cNvSpPr>
+          <p:nvPr/>
+        </p:nvSpPr>
+        <p:spPr>
+          <a:xfrm xmlns:a="http://schemas.openxmlformats.org/drawingml/2006/main">
+            <a:off x="876300" y="5657850"/>
+            <a:ext cx="9906000" cy="285750"/>
           </a:xfrm>
           <a:prstGeom xmlns:a="http://schemas.openxmlformats.org/drawingml/2006/main" prst="rect">
             <a:avLst/>
@@ -4080,29 +4236,29 @@
           <a:lstStyle xmlns:a="http://schemas.openxmlformats.org/drawingml/2006/main"/>
           <a:p xmlns:a="http://schemas.openxmlformats.org/drawingml/2006/main">
             <a:pPr algn="ctr">
-              <a:defRPr sz="1575" b="1">
+              <a:defRPr sz="1725" b="1">
                 <a:solidFill>
                   <a:srgbClr val="0F172A"/>
                 </a:solidFill>
               </a:defRPr>
             </a:pPr>
             <a:r>
-              <a:rPr sz="1575" b="1">
+              <a:rPr sz="1725" b="1">
                 <a:solidFill>
                   <a:srgbClr val="0F172A"/>
                 </a:solidFill>
               </a:rPr>
-              <a:t>Research question: how much replay latency and wasted movement can be avoided when KV movement has session context, priority, deadline, protection, and telemetry?</a:t>
-            </a:r>
-          </a:p>
-        </p:txBody>
-      </p:sp>
-      <p:sp>
-        <p:nvSpPr>
-          <p:cNvPr id="13" name="">
-            <a:extLst xmlns:a="http://schemas.openxmlformats.org/drawingml/2006/main">
-              <a:ext uri="{FF2B5EF4-FFF2-40B4-BE49-F238E27FC236}">
-                <a16:creationId xmlns:a16="http://schemas.microsoft.com/office/drawing/2014/main" id="{95978198-DB2C-4E0D-9A3D-1C740208B01F}"/>
+              <a:t>The prototype is designed to turn these targets into measured numbers.</a:t>
+            </a:r>
+          </a:p>
+        </p:txBody>
+      </p:sp>
+      <p:sp>
+        <p:nvSpPr>
+          <p:cNvPr id="15" name="">
+            <a:extLst xmlns:a="http://schemas.openxmlformats.org/drawingml/2006/main">
+              <a:ext uri="{FF2B5EF4-FFF2-40B4-BE49-F238E27FC236}">
+                <a16:creationId xmlns:a16="http://schemas.microsoft.com/office/drawing/2014/main" id="{3E425FD8-A71B-4051-BB24-F53DC7532F82}"/>
               </a:ext>
             </a:extLst>
           </p:cNvPr>
@@ -4149,10 +4305,10 @@
       </p:sp>
       <p:sp>
         <p:nvSpPr>
-          <p:cNvPr id="14" name="">
-            <a:extLst xmlns:a="http://schemas.openxmlformats.org/drawingml/2006/main">
-              <a:ext uri="{FF2B5EF4-FFF2-40B4-BE49-F238E27FC236}">
-                <a16:creationId xmlns:a16="http://schemas.microsoft.com/office/drawing/2014/main" id="{97F36FA5-D15F-4C9D-8554-C215CC38C810}"/>
+          <p:cNvPr id="16" name="">
+            <a:extLst xmlns:a="http://schemas.openxmlformats.org/drawingml/2006/main">
+              <a:ext uri="{FF2B5EF4-FFF2-40B4-BE49-F238E27FC236}">
+                <a16:creationId xmlns:a16="http://schemas.microsoft.com/office/drawing/2014/main" id="{69CB595C-9341-49C6-8E80-D836A1C5C1D8}"/>
               </a:ext>
             </a:extLst>
           </p:cNvPr>
@@ -4200,7 +4356,717 @@
     </p:spTree>
     <p:extLst>
       <p:ext uri="{BB962C8B-B14F-4D97-AF65-F5344CB8AC3E}">
-        <p14:creationId xmlns:p14="http://schemas.microsoft.com/office/powerpoint/2010/main" val="679460108"/>
+        <p14:creationId xmlns:p14="http://schemas.microsoft.com/office/powerpoint/2010/main" val="1432180523"/>
+      </p:ext>
+    </p:extLst>
+  </p:cSld>
+</p:sld>
+</file>
+
+<file path=ppt/slides/slide12.xml><?xml version="1.0" encoding="utf-8"?>
+<p:sld xmlns:p="http://schemas.openxmlformats.org/presentationml/2006/main">
+  <p:cSld>
+    <p:bg>
+      <p:bgPr>
+        <a:solidFill xmlns:a="http://schemas.openxmlformats.org/drawingml/2006/main">
+          <a:srgbClr val="FFFFFF"/>
+        </a:solidFill>
+      </p:bgPr>
+    </p:bg>
+    <p:spTree>
+      <p:nvGrpSpPr>
+        <p:cNvPr id="1" name=""/>
+        <p:cNvGrpSpPr/>
+        <p:nvPr/>
+      </p:nvGrpSpPr>
+      <p:grpSpPr>
+        <a:xfrm xmlns:a="http://schemas.openxmlformats.org/drawingml/2006/main"/>
+      </p:grpSpPr>
+      <p:sp>
+        <p:nvSpPr>
+          <p:cNvPr id="15" name="">
+            <a:extLst xmlns:a="http://schemas.openxmlformats.org/drawingml/2006/main">
+              <a:ext uri="{FF2B5EF4-FFF2-40B4-BE49-F238E27FC236}">
+                <a16:creationId xmlns:a16="http://schemas.microsoft.com/office/drawing/2014/main" id="{C6B4CE2F-9957-46EE-AA82-73CDE40669C9}"/>
+              </a:ext>
+            </a:extLst>
+          </p:cNvPr>
+          <p:cNvSpPr>
+            <a:spLocks xmlns:a="http://schemas.openxmlformats.org/drawingml/2006/main" noGrp="1"/>
+          </p:cNvSpPr>
+          <p:nvPr/>
+        </p:nvSpPr>
+        <p:spPr>
+          <a:xfrm xmlns:a="http://schemas.openxmlformats.org/drawingml/2006/main">
+            <a:off x="419100" y="323850"/>
+            <a:ext cx="10744200" cy="552450"/>
+          </a:xfrm>
+          <a:prstGeom xmlns:a="http://schemas.openxmlformats.org/drawingml/2006/main" prst="rect">
+            <a:avLst/>
+          </a:prstGeom>
+          <a:noFill xmlns:a="http://schemas.openxmlformats.org/drawingml/2006/main"/>
+          <a:ln xmlns:a="http://schemas.openxmlformats.org/drawingml/2006/main" w="0">
+            <a:noFill/>
+            <a:prstDash val="solid"/>
+          </a:ln>
+        </p:spPr>
+        <p:txBody>
+          <a:bodyPr xmlns:a="http://schemas.openxmlformats.org/drawingml/2006/main" anchor="t"/>
+          <a:lstStyle xmlns:a="http://schemas.openxmlformats.org/drawingml/2006/main"/>
+          <a:p xmlns:a="http://schemas.openxmlformats.org/drawingml/2006/main">
+            <a:pPr algn="l">
+              <a:defRPr sz="2925" b="1">
+                <a:solidFill>
+                  <a:srgbClr val="0F172A"/>
+                </a:solidFill>
+              </a:defRPr>
+            </a:pPr>
+            <a:r>
+              <a:rPr sz="2925" b="1">
+                <a:solidFill>
+                  <a:srgbClr val="0F172A"/>
+                </a:solidFill>
+              </a:rPr>
+              <a:t>Hardware support can make hints enforceable</a:t>
+            </a:r>
+          </a:p>
+        </p:txBody>
+      </p:sp>
+      <p:sp>
+        <p:nvSpPr>
+          <p:cNvPr id="2" name="">
+            <a:extLst xmlns:a="http://schemas.openxmlformats.org/drawingml/2006/main">
+              <a:ext uri="{FF2B5EF4-FFF2-40B4-BE49-F238E27FC236}">
+                <a16:creationId xmlns:a16="http://schemas.microsoft.com/office/drawing/2014/main" id="{C8BA4646-951F-4A26-B02C-3536C023CBBC}"/>
+              </a:ext>
+            </a:extLst>
+          </p:cNvPr>
+          <p:cNvSpPr>
+            <a:spLocks xmlns:a="http://schemas.openxmlformats.org/drawingml/2006/main" noGrp="1"/>
+          </p:cNvSpPr>
+          <p:nvPr/>
+        </p:nvSpPr>
+        <p:spPr>
+          <a:xfrm xmlns:a="http://schemas.openxmlformats.org/drawingml/2006/main">
+            <a:off x="438150" y="914400"/>
+            <a:ext cx="10477500" cy="457200"/>
+          </a:xfrm>
+          <a:prstGeom xmlns:a="http://schemas.openxmlformats.org/drawingml/2006/main" prst="rect">
+            <a:avLst/>
+          </a:prstGeom>
+          <a:noFill xmlns:a="http://schemas.openxmlformats.org/drawingml/2006/main"/>
+          <a:ln xmlns:a="http://schemas.openxmlformats.org/drawingml/2006/main" w="0">
+            <a:noFill/>
+            <a:prstDash val="solid"/>
+          </a:ln>
+        </p:spPr>
+        <p:txBody>
+          <a:bodyPr xmlns:a="http://schemas.openxmlformats.org/drawingml/2006/main" anchor="t"/>
+          <a:lstStyle xmlns:a="http://schemas.openxmlformats.org/drawingml/2006/main"/>
+          <a:p xmlns:a="http://schemas.openxmlformats.org/drawingml/2006/main">
+            <a:pPr algn="l">
+              <a:defRPr sz="1500" b="0">
+                <a:solidFill>
+                  <a:srgbClr val="64748B"/>
+                </a:solidFill>
+              </a:defRPr>
+            </a:pPr>
+            <a:r>
+              <a:rPr sz="1500" b="0">
+                <a:solidFill>
+                  <a:srgbClr val="64748B"/>
+                </a:solidFill>
+              </a:rPr>
+              <a:t>Treat KV as deadline-sensitive memory, not generic bytes.</a:t>
+            </a:r>
+          </a:p>
+        </p:txBody>
+      </p:sp>
+      <p:sp>
+        <p:nvSpPr>
+          <p:cNvPr id="3" name="">
+            <a:extLst xmlns:a="http://schemas.openxmlformats.org/drawingml/2006/main">
+              <a:ext uri="{FF2B5EF4-FFF2-40B4-BE49-F238E27FC236}">
+                <a16:creationId xmlns:a16="http://schemas.microsoft.com/office/drawing/2014/main" id="{4F4852DE-D899-4EFF-B849-F84FD246E05F}"/>
+              </a:ext>
+            </a:extLst>
+          </p:cNvPr>
+          <p:cNvSpPr>
+            <a:spLocks xmlns:a="http://schemas.openxmlformats.org/drawingml/2006/main" noGrp="1"/>
+          </p:cNvSpPr>
+          <p:nvPr/>
+        </p:nvSpPr>
+        <p:spPr>
+          <a:xfrm xmlns:a="http://schemas.openxmlformats.org/drawingml/2006/main">
+            <a:off x="857250" y="1676400"/>
+            <a:ext cx="190500" cy="304800"/>
+          </a:xfrm>
+          <a:prstGeom xmlns:a="http://schemas.openxmlformats.org/drawingml/2006/main" prst="rect">
+            <a:avLst/>
+          </a:prstGeom>
+          <a:noFill xmlns:a="http://schemas.openxmlformats.org/drawingml/2006/main"/>
+          <a:ln xmlns:a="http://schemas.openxmlformats.org/drawingml/2006/main" w="0">
+            <a:noFill/>
+            <a:prstDash val="solid"/>
+          </a:ln>
+        </p:spPr>
+        <p:txBody>
+          <a:bodyPr xmlns:a="http://schemas.openxmlformats.org/drawingml/2006/main" anchor="t"/>
+          <a:lstStyle xmlns:a="http://schemas.openxmlformats.org/drawingml/2006/main"/>
+          <a:p xmlns:a="http://schemas.openxmlformats.org/drawingml/2006/main">
+            <a:pPr algn="l">
+              <a:defRPr sz="2025" b="1">
+                <a:solidFill>
+                  <a:srgbClr val="2563EB"/>
+                </a:solidFill>
+              </a:defRPr>
+            </a:pPr>
+            <a:r>
+              <a:rPr sz="2025" b="1">
+                <a:solidFill>
+                  <a:srgbClr val="2563EB"/>
+                </a:solidFill>
+              </a:rPr>
+              <a:t>•</a:t>
+            </a:r>
+          </a:p>
+        </p:txBody>
+      </p:sp>
+      <p:sp>
+        <p:nvSpPr>
+          <p:cNvPr id="4" name="">
+            <a:extLst xmlns:a="http://schemas.openxmlformats.org/drawingml/2006/main">
+              <a:ext uri="{FF2B5EF4-FFF2-40B4-BE49-F238E27FC236}">
+                <a16:creationId xmlns:a16="http://schemas.microsoft.com/office/drawing/2014/main" id="{876932F4-7DEA-4FCA-9CAA-2DEE3ECE5417}"/>
+              </a:ext>
+            </a:extLst>
+          </p:cNvPr>
+          <p:cNvSpPr>
+            <a:spLocks xmlns:a="http://schemas.openxmlformats.org/drawingml/2006/main" noGrp="1"/>
+          </p:cNvSpPr>
+          <p:nvPr/>
+        </p:nvSpPr>
+        <p:spPr>
+          <a:xfrm xmlns:a="http://schemas.openxmlformats.org/drawingml/2006/main">
+            <a:off x="1143000" y="1695450"/>
+            <a:ext cx="9715500" cy="552450"/>
+          </a:xfrm>
+          <a:prstGeom xmlns:a="http://schemas.openxmlformats.org/drawingml/2006/main" prst="rect">
+            <a:avLst/>
+          </a:prstGeom>
+          <a:noFill xmlns:a="http://schemas.openxmlformats.org/drawingml/2006/main"/>
+          <a:ln xmlns:a="http://schemas.openxmlformats.org/drawingml/2006/main" w="0">
+            <a:noFill/>
+            <a:prstDash val="solid"/>
+          </a:ln>
+        </p:spPr>
+        <p:txBody>
+          <a:bodyPr xmlns:a="http://schemas.openxmlformats.org/drawingml/2006/main" anchor="t"/>
+          <a:lstStyle xmlns:a="http://schemas.openxmlformats.org/drawingml/2006/main"/>
+          <a:p xmlns:a="http://schemas.openxmlformats.org/drawingml/2006/main">
+            <a:pPr algn="l">
+              <a:defRPr sz="1875" b="0">
+                <a:solidFill>
+                  <a:srgbClr val="334155"/>
+                </a:solidFill>
+              </a:defRPr>
+            </a:pPr>
+            <a:r>
+              <a:rPr sz="1875" b="0">
+                <a:solidFill>
+                  <a:srgbClr val="334155"/>
+                </a:solidFill>
+              </a:rPr>
+              <a:t>KV page/session metadata: which agent owns this KV and how urgent is it?</a:t>
+            </a:r>
+          </a:p>
+        </p:txBody>
+      </p:sp>
+      <p:sp>
+        <p:nvSpPr>
+          <p:cNvPr id="5" name="">
+            <a:extLst xmlns:a="http://schemas.openxmlformats.org/drawingml/2006/main">
+              <a:ext uri="{FF2B5EF4-FFF2-40B4-BE49-F238E27FC236}">
+                <a16:creationId xmlns:a16="http://schemas.microsoft.com/office/drawing/2014/main" id="{D8973758-DDDC-40E4-AD2E-0A0ADB4641B0}"/>
+              </a:ext>
+            </a:extLst>
+          </p:cNvPr>
+          <p:cNvSpPr>
+            <a:spLocks xmlns:a="http://schemas.openxmlformats.org/drawingml/2006/main" noGrp="1"/>
+          </p:cNvSpPr>
+          <p:nvPr/>
+        </p:nvSpPr>
+        <p:spPr>
+          <a:xfrm xmlns:a="http://schemas.openxmlformats.org/drawingml/2006/main">
+            <a:off x="857250" y="2362200"/>
+            <a:ext cx="190500" cy="304800"/>
+          </a:xfrm>
+          <a:prstGeom xmlns:a="http://schemas.openxmlformats.org/drawingml/2006/main" prst="rect">
+            <a:avLst/>
+          </a:prstGeom>
+          <a:noFill xmlns:a="http://schemas.openxmlformats.org/drawingml/2006/main"/>
+          <a:ln xmlns:a="http://schemas.openxmlformats.org/drawingml/2006/main" w="0">
+            <a:noFill/>
+            <a:prstDash val="solid"/>
+          </a:ln>
+        </p:spPr>
+        <p:txBody>
+          <a:bodyPr xmlns:a="http://schemas.openxmlformats.org/drawingml/2006/main" anchor="t"/>
+          <a:lstStyle xmlns:a="http://schemas.openxmlformats.org/drawingml/2006/main"/>
+          <a:p xmlns:a="http://schemas.openxmlformats.org/drawingml/2006/main">
+            <a:pPr algn="l">
+              <a:defRPr sz="2025" b="1">
+                <a:solidFill>
+                  <a:srgbClr val="9333EA"/>
+                </a:solidFill>
+              </a:defRPr>
+            </a:pPr>
+            <a:r>
+              <a:rPr sz="2025" b="1">
+                <a:solidFill>
+                  <a:srgbClr val="9333EA"/>
+                </a:solidFill>
+              </a:rPr>
+              <a:t>•</a:t>
+            </a:r>
+          </a:p>
+        </p:txBody>
+      </p:sp>
+      <p:sp>
+        <p:nvSpPr>
+          <p:cNvPr id="6" name="">
+            <a:extLst xmlns:a="http://schemas.openxmlformats.org/drawingml/2006/main">
+              <a:ext uri="{FF2B5EF4-FFF2-40B4-BE49-F238E27FC236}">
+                <a16:creationId xmlns:a16="http://schemas.microsoft.com/office/drawing/2014/main" id="{F3879348-7A93-40D8-BE6A-74DD062F7D68}"/>
+              </a:ext>
+            </a:extLst>
+          </p:cNvPr>
+          <p:cNvSpPr>
+            <a:spLocks xmlns:a="http://schemas.openxmlformats.org/drawingml/2006/main" noGrp="1"/>
+          </p:cNvSpPr>
+          <p:nvPr/>
+        </p:nvSpPr>
+        <p:spPr>
+          <a:xfrm xmlns:a="http://schemas.openxmlformats.org/drawingml/2006/main">
+            <a:off x="1143000" y="2381250"/>
+            <a:ext cx="9715500" cy="552450"/>
+          </a:xfrm>
+          <a:prstGeom xmlns:a="http://schemas.openxmlformats.org/drawingml/2006/main" prst="rect">
+            <a:avLst/>
+          </a:prstGeom>
+          <a:noFill xmlns:a="http://schemas.openxmlformats.org/drawingml/2006/main"/>
+          <a:ln xmlns:a="http://schemas.openxmlformats.org/drawingml/2006/main" w="0">
+            <a:noFill/>
+            <a:prstDash val="solid"/>
+          </a:ln>
+        </p:spPr>
+        <p:txBody>
+          <a:bodyPr xmlns:a="http://schemas.openxmlformats.org/drawingml/2006/main" anchor="t"/>
+          <a:lstStyle xmlns:a="http://schemas.openxmlformats.org/drawingml/2006/main"/>
+          <a:p xmlns:a="http://schemas.openxmlformats.org/drawingml/2006/main">
+            <a:pPr algn="l">
+              <a:defRPr sz="1875" b="0">
+                <a:solidFill>
+                  <a:srgbClr val="334155"/>
+                </a:solidFill>
+              </a:defRPr>
+            </a:pPr>
+            <a:r>
+              <a:rPr sz="1875" b="0">
+                <a:solidFill>
+                  <a:srgbClr val="334155"/>
+                </a:solidFill>
+              </a:rPr>
+              <a:t>Deadline-aware migration queue: move urgent KV before less urgent traffic.</a:t>
+            </a:r>
+          </a:p>
+        </p:txBody>
+      </p:sp>
+      <p:sp>
+        <p:nvSpPr>
+          <p:cNvPr id="7" name="">
+            <a:extLst xmlns:a="http://schemas.openxmlformats.org/drawingml/2006/main">
+              <a:ext uri="{FF2B5EF4-FFF2-40B4-BE49-F238E27FC236}">
+                <a16:creationId xmlns:a16="http://schemas.microsoft.com/office/drawing/2014/main" id="{430CA2DD-3F4B-4152-83B5-E3D468BCC102}"/>
+              </a:ext>
+            </a:extLst>
+          </p:cNvPr>
+          <p:cNvSpPr>
+            <a:spLocks xmlns:a="http://schemas.openxmlformats.org/drawingml/2006/main" noGrp="1"/>
+          </p:cNvSpPr>
+          <p:nvPr/>
+        </p:nvSpPr>
+        <p:spPr>
+          <a:xfrm xmlns:a="http://schemas.openxmlformats.org/drawingml/2006/main">
+            <a:off x="857250" y="3048000"/>
+            <a:ext cx="190500" cy="304800"/>
+          </a:xfrm>
+          <a:prstGeom xmlns:a="http://schemas.openxmlformats.org/drawingml/2006/main" prst="rect">
+            <a:avLst/>
+          </a:prstGeom>
+          <a:noFill xmlns:a="http://schemas.openxmlformats.org/drawingml/2006/main"/>
+          <a:ln xmlns:a="http://schemas.openxmlformats.org/drawingml/2006/main" w="0">
+            <a:noFill/>
+            <a:prstDash val="solid"/>
+          </a:ln>
+        </p:spPr>
+        <p:txBody>
+          <a:bodyPr xmlns:a="http://schemas.openxmlformats.org/drawingml/2006/main" anchor="t"/>
+          <a:lstStyle xmlns:a="http://schemas.openxmlformats.org/drawingml/2006/main"/>
+          <a:p xmlns:a="http://schemas.openxmlformats.org/drawingml/2006/main">
+            <a:pPr algn="l">
+              <a:defRPr sz="2025" b="1">
+                <a:solidFill>
+                  <a:srgbClr val="16A34A"/>
+                </a:solidFill>
+              </a:defRPr>
+            </a:pPr>
+            <a:r>
+              <a:rPr sz="2025" b="1">
+                <a:solidFill>
+                  <a:srgbClr val="16A34A"/>
+                </a:solidFill>
+              </a:rPr>
+              <a:t>•</a:t>
+            </a:r>
+          </a:p>
+        </p:txBody>
+      </p:sp>
+      <p:sp>
+        <p:nvSpPr>
+          <p:cNvPr id="8" name="">
+            <a:extLst xmlns:a="http://schemas.openxmlformats.org/drawingml/2006/main">
+              <a:ext uri="{FF2B5EF4-FFF2-40B4-BE49-F238E27FC236}">
+                <a16:creationId xmlns:a16="http://schemas.microsoft.com/office/drawing/2014/main" id="{B8185251-AD8C-43E0-AAD5-FF1AF03A930D}"/>
+              </a:ext>
+            </a:extLst>
+          </p:cNvPr>
+          <p:cNvSpPr>
+            <a:spLocks xmlns:a="http://schemas.openxmlformats.org/drawingml/2006/main" noGrp="1"/>
+          </p:cNvSpPr>
+          <p:nvPr/>
+        </p:nvSpPr>
+        <p:spPr>
+          <a:xfrm xmlns:a="http://schemas.openxmlformats.org/drawingml/2006/main">
+            <a:off x="1143000" y="3067050"/>
+            <a:ext cx="9715500" cy="552450"/>
+          </a:xfrm>
+          <a:prstGeom xmlns:a="http://schemas.openxmlformats.org/drawingml/2006/main" prst="rect">
+            <a:avLst/>
+          </a:prstGeom>
+          <a:noFill xmlns:a="http://schemas.openxmlformats.org/drawingml/2006/main"/>
+          <a:ln xmlns:a="http://schemas.openxmlformats.org/drawingml/2006/main" w="0">
+            <a:noFill/>
+            <a:prstDash val="solid"/>
+          </a:ln>
+        </p:spPr>
+        <p:txBody>
+          <a:bodyPr xmlns:a="http://schemas.openxmlformats.org/drawingml/2006/main" anchor="t"/>
+          <a:lstStyle xmlns:a="http://schemas.openxmlformats.org/drawingml/2006/main"/>
+          <a:p xmlns:a="http://schemas.openxmlformats.org/drawingml/2006/main">
+            <a:pPr algn="l">
+              <a:defRPr sz="1875" b="0">
+                <a:solidFill>
+                  <a:srgbClr val="334155"/>
+                </a:solidFill>
+              </a:defRPr>
+            </a:pPr>
+            <a:r>
+              <a:rPr sz="1875" b="0">
+                <a:solidFill>
+                  <a:srgbClr val="334155"/>
+                </a:solidFill>
+              </a:rPr>
+              <a:t>Residency protection: keep useful prefetched KV from being evicted too early.</a:t>
+            </a:r>
+          </a:p>
+        </p:txBody>
+      </p:sp>
+      <p:sp>
+        <p:nvSpPr>
+          <p:cNvPr id="9" name="">
+            <a:extLst xmlns:a="http://schemas.openxmlformats.org/drawingml/2006/main">
+              <a:ext uri="{FF2B5EF4-FFF2-40B4-BE49-F238E27FC236}">
+                <a16:creationId xmlns:a16="http://schemas.microsoft.com/office/drawing/2014/main" id="{C9823D08-C122-4D61-8DD8-7C3F73109D73}"/>
+              </a:ext>
+            </a:extLst>
+          </p:cNvPr>
+          <p:cNvSpPr>
+            <a:spLocks xmlns:a="http://schemas.openxmlformats.org/drawingml/2006/main" noGrp="1"/>
+          </p:cNvSpPr>
+          <p:nvPr/>
+        </p:nvSpPr>
+        <p:spPr>
+          <a:xfrm xmlns:a="http://schemas.openxmlformats.org/drawingml/2006/main">
+            <a:off x="857250" y="3733800"/>
+            <a:ext cx="190500" cy="304800"/>
+          </a:xfrm>
+          <a:prstGeom xmlns:a="http://schemas.openxmlformats.org/drawingml/2006/main" prst="rect">
+            <a:avLst/>
+          </a:prstGeom>
+          <a:noFill xmlns:a="http://schemas.openxmlformats.org/drawingml/2006/main"/>
+          <a:ln xmlns:a="http://schemas.openxmlformats.org/drawingml/2006/main" w="0">
+            <a:noFill/>
+            <a:prstDash val="solid"/>
+          </a:ln>
+        </p:spPr>
+        <p:txBody>
+          <a:bodyPr xmlns:a="http://schemas.openxmlformats.org/drawingml/2006/main" anchor="t"/>
+          <a:lstStyle xmlns:a="http://schemas.openxmlformats.org/drawingml/2006/main"/>
+          <a:p xmlns:a="http://schemas.openxmlformats.org/drawingml/2006/main">
+            <a:pPr algn="l">
+              <a:defRPr sz="2025" b="1">
+                <a:solidFill>
+                  <a:srgbClr val="0891B2"/>
+                </a:solidFill>
+              </a:defRPr>
+            </a:pPr>
+            <a:r>
+              <a:rPr sz="2025" b="1">
+                <a:solidFill>
+                  <a:srgbClr val="0891B2"/>
+                </a:solidFill>
+              </a:rPr>
+              <a:t>•</a:t>
+            </a:r>
+          </a:p>
+        </p:txBody>
+      </p:sp>
+      <p:sp>
+        <p:nvSpPr>
+          <p:cNvPr id="10" name="">
+            <a:extLst xmlns:a="http://schemas.openxmlformats.org/drawingml/2006/main">
+              <a:ext uri="{FF2B5EF4-FFF2-40B4-BE49-F238E27FC236}">
+                <a16:creationId xmlns:a16="http://schemas.microsoft.com/office/drawing/2014/main" id="{8E3E0687-7278-4F44-BAD8-FC78975C012E}"/>
+              </a:ext>
+            </a:extLst>
+          </p:cNvPr>
+          <p:cNvSpPr>
+            <a:spLocks xmlns:a="http://schemas.openxmlformats.org/drawingml/2006/main" noGrp="1"/>
+          </p:cNvSpPr>
+          <p:nvPr/>
+        </p:nvSpPr>
+        <p:spPr>
+          <a:xfrm xmlns:a="http://schemas.openxmlformats.org/drawingml/2006/main">
+            <a:off x="1143000" y="3752850"/>
+            <a:ext cx="9715500" cy="552450"/>
+          </a:xfrm>
+          <a:prstGeom xmlns:a="http://schemas.openxmlformats.org/drawingml/2006/main" prst="rect">
+            <a:avLst/>
+          </a:prstGeom>
+          <a:noFill xmlns:a="http://schemas.openxmlformats.org/drawingml/2006/main"/>
+          <a:ln xmlns:a="http://schemas.openxmlformats.org/drawingml/2006/main" w="0">
+            <a:noFill/>
+            <a:prstDash val="solid"/>
+          </a:ln>
+        </p:spPr>
+        <p:txBody>
+          <a:bodyPr xmlns:a="http://schemas.openxmlformats.org/drawingml/2006/main" anchor="t"/>
+          <a:lstStyle xmlns:a="http://schemas.openxmlformats.org/drawingml/2006/main"/>
+          <a:p xmlns:a="http://schemas.openxmlformats.org/drawingml/2006/main">
+            <a:pPr algn="l">
+              <a:defRPr sz="1875" b="0">
+                <a:solidFill>
+                  <a:srgbClr val="334155"/>
+                </a:solidFill>
+              </a:defRPr>
+            </a:pPr>
+            <a:r>
+              <a:rPr sz="1875" b="0">
+                <a:solidFill>
+                  <a:srgbClr val="334155"/>
+                </a:solidFill>
+              </a:rPr>
+              <a:t>Telemetry: count useful, late, wasted, and evicted-before-use movement.</a:t>
+            </a:r>
+          </a:p>
+        </p:txBody>
+      </p:sp>
+      <p:sp>
+        <p:nvSpPr>
+          <p:cNvPr id="11" name="">
+            <a:extLst xmlns:a="http://schemas.openxmlformats.org/drawingml/2006/main">
+              <a:ext uri="{FF2B5EF4-FFF2-40B4-BE49-F238E27FC236}">
+                <a16:creationId xmlns:a16="http://schemas.microsoft.com/office/drawing/2014/main" id="{D5403DF6-E996-4CB5-BE90-7C7B3ECDB7D4}"/>
+              </a:ext>
+            </a:extLst>
+          </p:cNvPr>
+          <p:cNvSpPr>
+            <a:spLocks xmlns:a="http://schemas.openxmlformats.org/drawingml/2006/main" noGrp="1"/>
+          </p:cNvSpPr>
+          <p:nvPr/>
+        </p:nvSpPr>
+        <p:spPr>
+          <a:xfrm xmlns:a="http://schemas.openxmlformats.org/drawingml/2006/main">
+            <a:off x="419100" y="5257800"/>
+            <a:ext cx="11353800" cy="11430"/>
+          </a:xfrm>
+          <a:prstGeom xmlns:a="http://schemas.openxmlformats.org/drawingml/2006/main" prst="rect">
+            <a:avLst/>
+          </a:prstGeom>
+          <a:solidFill xmlns:a="http://schemas.openxmlformats.org/drawingml/2006/main">
+            <a:srgbClr val="CBD5E1"/>
+          </a:solidFill>
+          <a:ln xmlns:a="http://schemas.openxmlformats.org/drawingml/2006/main" w="0">
+            <a:noFill/>
+            <a:prstDash val="solid"/>
+          </a:ln>
+        </p:spPr>
+      </p:sp>
+      <p:sp>
+        <p:nvSpPr>
+          <p:cNvPr id="12" name="">
+            <a:extLst xmlns:a="http://schemas.openxmlformats.org/drawingml/2006/main">
+              <a:ext uri="{FF2B5EF4-FFF2-40B4-BE49-F238E27FC236}">
+                <a16:creationId xmlns:a16="http://schemas.microsoft.com/office/drawing/2014/main" id="{9CE9AFF2-BA4B-47AF-90D9-938EBB0CD3D0}"/>
+              </a:ext>
+            </a:extLst>
+          </p:cNvPr>
+          <p:cNvSpPr>
+            <a:spLocks xmlns:a="http://schemas.openxmlformats.org/drawingml/2006/main" noGrp="1"/>
+          </p:cNvSpPr>
+          <p:nvPr/>
+        </p:nvSpPr>
+        <p:spPr>
+          <a:xfrm xmlns:a="http://schemas.openxmlformats.org/drawingml/2006/main">
+            <a:off x="857250" y="5524500"/>
+            <a:ext cx="10191750" cy="476250"/>
+          </a:xfrm>
+          <a:prstGeom xmlns:a="http://schemas.openxmlformats.org/drawingml/2006/main" prst="rect">
+            <a:avLst/>
+          </a:prstGeom>
+          <a:noFill xmlns:a="http://schemas.openxmlformats.org/drawingml/2006/main"/>
+          <a:ln xmlns:a="http://schemas.openxmlformats.org/drawingml/2006/main" w="0">
+            <a:noFill/>
+            <a:prstDash val="solid"/>
+          </a:ln>
+        </p:spPr>
+        <p:txBody>
+          <a:bodyPr xmlns:a="http://schemas.openxmlformats.org/drawingml/2006/main" anchor="t"/>
+          <a:lstStyle xmlns:a="http://schemas.openxmlformats.org/drawingml/2006/main"/>
+          <a:p xmlns:a="http://schemas.openxmlformats.org/drawingml/2006/main">
+            <a:pPr algn="ctr">
+              <a:defRPr sz="1575" b="1">
+                <a:solidFill>
+                  <a:srgbClr val="0F172A"/>
+                </a:solidFill>
+              </a:defRPr>
+            </a:pPr>
+            <a:r>
+              <a:rPr sz="1575" b="1">
+                <a:solidFill>
+                  <a:srgbClr val="0F172A"/>
+                </a:solidFill>
+              </a:rPr>
+              <a:t>Research question: how much replay latency and wasted movement can be avoided when KV movement has session context, priority, deadline, protection, and telemetry?</a:t>
+            </a:r>
+          </a:p>
+        </p:txBody>
+      </p:sp>
+      <p:sp>
+        <p:nvSpPr>
+          <p:cNvPr id="13" name="">
+            <a:extLst xmlns:a="http://schemas.openxmlformats.org/drawingml/2006/main">
+              <a:ext uri="{FF2B5EF4-FFF2-40B4-BE49-F238E27FC236}">
+                <a16:creationId xmlns:a16="http://schemas.microsoft.com/office/drawing/2014/main" id="{881D0C17-6E5D-4173-9986-E3CAADF83BF4}"/>
+              </a:ext>
+            </a:extLst>
+          </p:cNvPr>
+          <p:cNvSpPr>
+            <a:spLocks xmlns:a="http://schemas.openxmlformats.org/drawingml/2006/main" noGrp="1"/>
+          </p:cNvSpPr>
+          <p:nvPr/>
+        </p:nvSpPr>
+        <p:spPr>
+          <a:xfrm xmlns:a="http://schemas.openxmlformats.org/drawingml/2006/main">
+            <a:off x="419100" y="6400800"/>
+            <a:ext cx="3619500" cy="209550"/>
+          </a:xfrm>
+          <a:prstGeom xmlns:a="http://schemas.openxmlformats.org/drawingml/2006/main" prst="rect">
+            <a:avLst/>
+          </a:prstGeom>
+          <a:noFill xmlns:a="http://schemas.openxmlformats.org/drawingml/2006/main"/>
+          <a:ln xmlns:a="http://schemas.openxmlformats.org/drawingml/2006/main" w="0">
+            <a:noFill/>
+            <a:prstDash val="solid"/>
+          </a:ln>
+        </p:spPr>
+        <p:txBody>
+          <a:bodyPr xmlns:a="http://schemas.openxmlformats.org/drawingml/2006/main" anchor="t"/>
+          <a:lstStyle xmlns:a="http://schemas.openxmlformats.org/drawingml/2006/main"/>
+          <a:p xmlns:a="http://schemas.openxmlformats.org/drawingml/2006/main">
+            <a:pPr algn="l">
+              <a:defRPr sz="975" b="0">
+                <a:solidFill>
+                  <a:srgbClr val="64748B"/>
+                </a:solidFill>
+              </a:defRPr>
+            </a:pPr>
+            <a:r>
+              <a:rPr sz="975" b="0">
+                <a:solidFill>
+                  <a:srgbClr val="64748B"/>
+                </a:solidFill>
+              </a:rPr>
+              <a:t>Agent-aware KV movement</a:t>
+            </a:r>
+          </a:p>
+        </p:txBody>
+      </p:sp>
+      <p:sp>
+        <p:nvSpPr>
+          <p:cNvPr id="14" name="">
+            <a:extLst xmlns:a="http://schemas.openxmlformats.org/drawingml/2006/main">
+              <a:ext uri="{FF2B5EF4-FFF2-40B4-BE49-F238E27FC236}">
+                <a16:creationId xmlns:a16="http://schemas.microsoft.com/office/drawing/2014/main" id="{90CD33D0-6E80-4F97-A505-3981B2AA1F69}"/>
+              </a:ext>
+            </a:extLst>
+          </p:cNvPr>
+          <p:cNvSpPr>
+            <a:spLocks xmlns:a="http://schemas.openxmlformats.org/drawingml/2006/main" noGrp="1"/>
+          </p:cNvSpPr>
+          <p:nvPr/>
+        </p:nvSpPr>
+        <p:spPr>
+          <a:xfrm xmlns:a="http://schemas.openxmlformats.org/drawingml/2006/main">
+            <a:off x="11315700" y="6400800"/>
+            <a:ext cx="438150" cy="209550"/>
+          </a:xfrm>
+          <a:prstGeom xmlns:a="http://schemas.openxmlformats.org/drawingml/2006/main" prst="rect">
+            <a:avLst/>
+          </a:prstGeom>
+          <a:noFill xmlns:a="http://schemas.openxmlformats.org/drawingml/2006/main"/>
+          <a:ln xmlns:a="http://schemas.openxmlformats.org/drawingml/2006/main" w="0">
+            <a:noFill/>
+            <a:prstDash val="solid"/>
+          </a:ln>
+        </p:spPr>
+        <p:txBody>
+          <a:bodyPr xmlns:a="http://schemas.openxmlformats.org/drawingml/2006/main" anchor="t"/>
+          <a:lstStyle xmlns:a="http://schemas.openxmlformats.org/drawingml/2006/main"/>
+          <a:p xmlns:a="http://schemas.openxmlformats.org/drawingml/2006/main">
+            <a:pPr algn="r">
+              <a:defRPr sz="975" b="0">
+                <a:solidFill>
+                  <a:srgbClr val="64748B"/>
+                </a:solidFill>
+              </a:defRPr>
+            </a:pPr>
+            <a:r>
+              <a:rPr sz="975" b="0">
+                <a:solidFill>
+                  <a:srgbClr val="64748B"/>
+                </a:solidFill>
+              </a:rPr>
+              <a:t>12</a:t>
+            </a:r>
+          </a:p>
+        </p:txBody>
+      </p:sp>
+    </p:spTree>
+    <p:extLst>
+      <p:ext uri="{BB962C8B-B14F-4D97-AF65-F5344CB8AC3E}">
+        <p14:creationId xmlns:p14="http://schemas.microsoft.com/office/powerpoint/2010/main" val="1981364023"/>
       </p:ext>
     </p:extLst>
   </p:cSld>
@@ -4228,10 +5094,10 @@
       </p:grpSpPr>
       <p:sp>
         <p:nvSpPr>
-          <p:cNvPr id="13" name="">
-            <a:extLst xmlns:a="http://schemas.openxmlformats.org/drawingml/2006/main">
-              <a:ext uri="{FF2B5EF4-FFF2-40B4-BE49-F238E27FC236}">
-                <a16:creationId xmlns:a16="http://schemas.microsoft.com/office/drawing/2014/main" id="{AC00B649-4EEA-491C-AF89-EFEF0E9BBB48}"/>
+          <p:cNvPr id="12" name="">
+            <a:extLst xmlns:a="http://schemas.openxmlformats.org/drawingml/2006/main">
+              <a:ext uri="{FF2B5EF4-FFF2-40B4-BE49-F238E27FC236}">
+                <a16:creationId xmlns:a16="http://schemas.microsoft.com/office/drawing/2014/main" id="{3CC51281-9FDC-4EB3-A6AD-CB29F39716F7}"/>
               </a:ext>
             </a:extLst>
           </p:cNvPr>
@@ -4281,7 +5147,7 @@
           <p:cNvPr id="2" name="">
             <a:extLst xmlns:a="http://schemas.openxmlformats.org/drawingml/2006/main">
               <a:ext uri="{FF2B5EF4-FFF2-40B4-BE49-F238E27FC236}">
-                <a16:creationId xmlns:a16="http://schemas.microsoft.com/office/drawing/2014/main" id="{8C5BB232-A6D5-4BB1-8B61-3219285FE92F}"/>
+                <a16:creationId xmlns:a16="http://schemas.microsoft.com/office/drawing/2014/main" id="{77788F02-BA0B-42A4-BBA0-A84F91360122}"/>
               </a:ext>
             </a:extLst>
           </p:cNvPr>
@@ -4331,7 +5197,7 @@
           <p:cNvPr id="3" name="">
             <a:extLst xmlns:a="http://schemas.openxmlformats.org/drawingml/2006/main">
               <a:ext uri="{FF2B5EF4-FFF2-40B4-BE49-F238E27FC236}">
-                <a16:creationId xmlns:a16="http://schemas.microsoft.com/office/drawing/2014/main" id="{476A1B60-7F4F-4922-96B5-AF12CC974761}"/>
+                <a16:creationId xmlns:a16="http://schemas.microsoft.com/office/drawing/2014/main" id="{06BCC0E1-994C-46E5-B2D1-5406224A279E}"/>
               </a:ext>
             </a:extLst>
           </p:cNvPr>
@@ -4381,7 +5247,7 @@
           <p:cNvPr id="4" name="">
             <a:extLst xmlns:a="http://schemas.openxmlformats.org/drawingml/2006/main">
               <a:ext uri="{FF2B5EF4-FFF2-40B4-BE49-F238E27FC236}">
-                <a16:creationId xmlns:a16="http://schemas.microsoft.com/office/drawing/2014/main" id="{BC91FB7A-BAEE-46E9-A5AB-3FBEE5D52AF2}"/>
+                <a16:creationId xmlns:a16="http://schemas.microsoft.com/office/drawing/2014/main" id="{3A8D7A4D-E741-41D4-88F7-F835002EEA6A}"/>
               </a:ext>
             </a:extLst>
           </p:cNvPr>
@@ -4431,7 +5297,7 @@
           <p:cNvPr id="5" name="">
             <a:extLst xmlns:a="http://schemas.openxmlformats.org/drawingml/2006/main">
               <a:ext uri="{FF2B5EF4-FFF2-40B4-BE49-F238E27FC236}">
-                <a16:creationId xmlns:a16="http://schemas.microsoft.com/office/drawing/2014/main" id="{503A79E9-7B85-47A6-83DA-57C3614EAECB}"/>
+                <a16:creationId xmlns:a16="http://schemas.microsoft.com/office/drawing/2014/main" id="{F795BF95-1DD1-4FD3-813D-018E3B474233}"/>
               </a:ext>
             </a:extLst>
           </p:cNvPr>
@@ -4481,7 +5347,7 @@
           <p:cNvPr id="6" name="">
             <a:extLst xmlns:a="http://schemas.openxmlformats.org/drawingml/2006/main">
               <a:ext uri="{FF2B5EF4-FFF2-40B4-BE49-F238E27FC236}">
-                <a16:creationId xmlns:a16="http://schemas.microsoft.com/office/drawing/2014/main" id="{46873607-86FE-443D-8E81-B01E70D4D110}"/>
+                <a16:creationId xmlns:a16="http://schemas.microsoft.com/office/drawing/2014/main" id="{A069A48E-8AEF-469A-A9F7-26D88F519D00}"/>
               </a:ext>
             </a:extLst>
           </p:cNvPr>
@@ -4531,7 +5397,7 @@
           <p:cNvPr id="7" name="">
             <a:extLst xmlns:a="http://schemas.openxmlformats.org/drawingml/2006/main">
               <a:ext uri="{FF2B5EF4-FFF2-40B4-BE49-F238E27FC236}">
-                <a16:creationId xmlns:a16="http://schemas.microsoft.com/office/drawing/2014/main" id="{A7FC6744-CA37-44F3-8CB0-FCD4BEF97038}"/>
+                <a16:creationId xmlns:a16="http://schemas.microsoft.com/office/drawing/2014/main" id="{C28CAFFC-707C-47D2-A352-04E31B47BA68}"/>
               </a:ext>
             </a:extLst>
           </p:cNvPr>
@@ -4581,7 +5447,7 @@
           <p:cNvPr id="8" name="">
             <a:extLst xmlns:a="http://schemas.openxmlformats.org/drawingml/2006/main">
               <a:ext uri="{FF2B5EF4-FFF2-40B4-BE49-F238E27FC236}">
-                <a16:creationId xmlns:a16="http://schemas.microsoft.com/office/drawing/2014/main" id="{82706FF2-4D96-4B33-8B8C-DF39760D3454}"/>
+                <a16:creationId xmlns:a16="http://schemas.microsoft.com/office/drawing/2014/main" id="{DDA21EFB-4FEF-44C8-896E-D4508A461359}"/>
               </a:ext>
             </a:extLst>
           </p:cNvPr>
@@ -4631,7 +5497,7 @@
           <p:cNvPr id="9" name="">
             <a:extLst xmlns:a="http://schemas.openxmlformats.org/drawingml/2006/main">
               <a:ext uri="{FF2B5EF4-FFF2-40B4-BE49-F238E27FC236}">
-                <a16:creationId xmlns:a16="http://schemas.microsoft.com/office/drawing/2014/main" id="{D9CD3F7B-D472-48D3-BF44-22339B9ABC23}"/>
+                <a16:creationId xmlns:a16="http://schemas.microsoft.com/office/drawing/2014/main" id="{29F4ABF6-EFF9-4EBE-B185-B6CD56CACCE3}"/>
               </a:ext>
             </a:extLst>
           </p:cNvPr>
@@ -4681,57 +5547,7 @@
           <p:cNvPr id="10" name="">
             <a:extLst xmlns:a="http://schemas.openxmlformats.org/drawingml/2006/main">
               <a:ext uri="{FF2B5EF4-FFF2-40B4-BE49-F238E27FC236}">
-                <a16:creationId xmlns:a16="http://schemas.microsoft.com/office/drawing/2014/main" id="{699F9EB5-6011-48B4-A48D-59E35635334E}"/>
-              </a:ext>
-            </a:extLst>
-          </p:cNvPr>
-          <p:cNvSpPr>
-            <a:spLocks xmlns:a="http://schemas.openxmlformats.org/drawingml/2006/main" noGrp="1"/>
-          </p:cNvSpPr>
-          <p:nvPr/>
-        </p:nvSpPr>
-        <p:spPr>
-          <a:xfrm xmlns:a="http://schemas.openxmlformats.org/drawingml/2006/main">
-            <a:off x="419100" y="6134100"/>
-            <a:ext cx="9334500" cy="190500"/>
-          </a:xfrm>
-          <a:prstGeom xmlns:a="http://schemas.openxmlformats.org/drawingml/2006/main" prst="rect">
-            <a:avLst/>
-          </a:prstGeom>
-          <a:noFill xmlns:a="http://schemas.openxmlformats.org/drawingml/2006/main"/>
-          <a:ln xmlns:a="http://schemas.openxmlformats.org/drawingml/2006/main" w="0">
-            <a:noFill/>
-            <a:prstDash val="solid"/>
-          </a:ln>
-        </p:spPr>
-        <p:txBody>
-          <a:bodyPr xmlns:a="http://schemas.openxmlformats.org/drawingml/2006/main" anchor="t"/>
-          <a:lstStyle xmlns:a="http://schemas.openxmlformats.org/drawingml/2006/main"/>
-          <a:p xmlns:a="http://schemas.openxmlformats.org/drawingml/2006/main">
-            <a:pPr algn="l">
-              <a:defRPr sz="825" b="0">
-                <a:solidFill>
-                  <a:srgbClr val="64748B"/>
-                </a:solidFill>
-              </a:defRPr>
-            </a:pPr>
-            <a:r>
-              <a:rPr sz="825" b="0">
-                <a:solidFill>
-                  <a:srgbClr val="64748B"/>
-                </a:solidFill>
-              </a:rPr>
-              <a:t>Source: latest_master_report.html, Experiment Setup And Manager Summary</a:t>
-            </a:r>
-          </a:p>
-        </p:txBody>
-      </p:sp>
-      <p:sp>
-        <p:nvSpPr>
-          <p:cNvPr id="11" name="">
-            <a:extLst xmlns:a="http://schemas.openxmlformats.org/drawingml/2006/main">
-              <a:ext uri="{FF2B5EF4-FFF2-40B4-BE49-F238E27FC236}">
-                <a16:creationId xmlns:a16="http://schemas.microsoft.com/office/drawing/2014/main" id="{48E4EE69-D57A-47DD-B5A2-F77D6185A98F}"/>
+                <a16:creationId xmlns:a16="http://schemas.microsoft.com/office/drawing/2014/main" id="{6827A1CF-FB0F-4EF9-9AAC-F6A29927364B}"/>
               </a:ext>
             </a:extLst>
           </p:cNvPr>
@@ -4778,10 +5594,10 @@
       </p:sp>
       <p:sp>
         <p:nvSpPr>
-          <p:cNvPr id="12" name="">
-            <a:extLst xmlns:a="http://schemas.openxmlformats.org/drawingml/2006/main">
-              <a:ext uri="{FF2B5EF4-FFF2-40B4-BE49-F238E27FC236}">
-                <a16:creationId xmlns:a16="http://schemas.microsoft.com/office/drawing/2014/main" id="{413920CA-C0E7-4ECA-8AA9-0290A0F00BF2}"/>
+          <p:cNvPr id="11" name="">
+            <a:extLst xmlns:a="http://schemas.openxmlformats.org/drawingml/2006/main">
+              <a:ext uri="{FF2B5EF4-FFF2-40B4-BE49-F238E27FC236}">
+                <a16:creationId xmlns:a16="http://schemas.microsoft.com/office/drawing/2014/main" id="{3FB59C64-BE46-458E-A085-895460376B36}"/>
               </a:ext>
             </a:extLst>
           </p:cNvPr>
@@ -4829,7 +5645,7 @@
     </p:spTree>
     <p:extLst>
       <p:ext uri="{BB962C8B-B14F-4D97-AF65-F5344CB8AC3E}">
-        <p14:creationId xmlns:p14="http://schemas.microsoft.com/office/powerpoint/2010/main" val="613856396"/>
+        <p14:creationId xmlns:p14="http://schemas.microsoft.com/office/powerpoint/2010/main" val="1019548047"/>
       </p:ext>
     </p:extLst>
   </p:cSld>
@@ -4857,10 +5673,10 @@
       </p:grpSpPr>
       <p:sp>
         <p:nvSpPr>
-          <p:cNvPr id="13" name="">
-            <a:extLst xmlns:a="http://schemas.openxmlformats.org/drawingml/2006/main">
-              <a:ext uri="{FF2B5EF4-FFF2-40B4-BE49-F238E27FC236}">
-                <a16:creationId xmlns:a16="http://schemas.microsoft.com/office/drawing/2014/main" id="{05EDAAFC-CE44-4CFA-8FC9-677E089F3E4A}"/>
+          <p:cNvPr id="22" name="">
+            <a:extLst xmlns:a="http://schemas.openxmlformats.org/drawingml/2006/main">
+              <a:ext uri="{FF2B5EF4-FFF2-40B4-BE49-F238E27FC236}">
+                <a16:creationId xmlns:a16="http://schemas.microsoft.com/office/drawing/2014/main" id="{6E2861C9-5F68-4128-BD76-9EC7AC6606CD}"/>
               </a:ext>
             </a:extLst>
           </p:cNvPr>
@@ -4910,7 +5726,7 @@
           <p:cNvPr id="2" name="">
             <a:extLst xmlns:a="http://schemas.openxmlformats.org/drawingml/2006/main">
               <a:ext uri="{FF2B5EF4-FFF2-40B4-BE49-F238E27FC236}">
-                <a16:creationId xmlns:a16="http://schemas.microsoft.com/office/drawing/2014/main" id="{43EAC5A1-B0CF-4C03-8AD0-A21504DE2B3D}"/>
+                <a16:creationId xmlns:a16="http://schemas.microsoft.com/office/drawing/2014/main" id="{15A5BA03-E95A-4F99-8439-A2B34E6C270A}"/>
               </a:ext>
             </a:extLst>
           </p:cNvPr>
@@ -4960,19 +5776,54 @@
           <p:cNvPr id="3" name="">
             <a:extLst xmlns:a="http://schemas.openxmlformats.org/drawingml/2006/main">
               <a:ext uri="{FF2B5EF4-FFF2-40B4-BE49-F238E27FC236}">
-                <a16:creationId xmlns:a16="http://schemas.microsoft.com/office/drawing/2014/main" id="{E68E1F2B-9AA2-4AB5-8853-D687978F43F4}"/>
-              </a:ext>
-            </a:extLst>
-          </p:cNvPr>
-          <p:cNvSpPr>
-            <a:spLocks xmlns:a="http://schemas.openxmlformats.org/drawingml/2006/main" noGrp="1"/>
-          </p:cNvSpPr>
-          <p:nvPr/>
-        </p:nvSpPr>
-        <p:spPr>
-          <a:xfrm xmlns:a="http://schemas.openxmlformats.org/drawingml/2006/main">
-            <a:off x="762000" y="2305050"/>
-            <a:ext cx="10668000" cy="742950"/>
+                <a16:creationId xmlns:a16="http://schemas.microsoft.com/office/drawing/2014/main" id="{452F4E55-BB3C-4086-BE0F-3B687FD7C425}"/>
+              </a:ext>
+            </a:extLst>
+          </p:cNvPr>
+          <p:cNvSpPr>
+            <a:spLocks xmlns:a="http://schemas.openxmlformats.org/drawingml/2006/main" noGrp="1"/>
+          </p:cNvSpPr>
+          <p:nvPr/>
+        </p:nvSpPr>
+        <p:spPr>
+          <a:xfrm xmlns:a="http://schemas.openxmlformats.org/drawingml/2006/main">
+            <a:off x="723900" y="1943100"/>
+            <a:ext cx="2243138" cy="990600"/>
+          </a:xfrm>
+          <a:prstGeom xmlns:a="http://schemas.openxmlformats.org/drawingml/2006/main" prst="roundRect">
+            <a:avLst>
+              <a:gd name="adj" fmla="val 5769"/>
+            </a:avLst>
+          </a:prstGeom>
+          <a:solidFill xmlns:a="http://schemas.openxmlformats.org/drawingml/2006/main">
+            <a:srgbClr val="FFFFFF"/>
+          </a:solidFill>
+          <a:ln xmlns:a="http://schemas.openxmlformats.org/drawingml/2006/main" w="13335">
+            <a:solidFill>
+              <a:srgbClr val="2563EB"/>
+            </a:solidFill>
+            <a:prstDash val="solid"/>
+          </a:ln>
+        </p:spPr>
+      </p:sp>
+      <p:sp>
+        <p:nvSpPr>
+          <p:cNvPr id="4" name="">
+            <a:extLst xmlns:a="http://schemas.openxmlformats.org/drawingml/2006/main">
+              <a:ext uri="{FF2B5EF4-FFF2-40B4-BE49-F238E27FC236}">
+                <a16:creationId xmlns:a16="http://schemas.microsoft.com/office/drawing/2014/main" id="{45FA16C7-E80E-40C2-8912-6A8FFD9A6938}"/>
+              </a:ext>
+            </a:extLst>
+          </p:cNvPr>
+          <p:cNvSpPr>
+            <a:spLocks xmlns:a="http://schemas.openxmlformats.org/drawingml/2006/main" noGrp="1"/>
+          </p:cNvSpPr>
+          <p:nvPr/>
+        </p:nvSpPr>
+        <p:spPr>
+          <a:xfrm xmlns:a="http://schemas.openxmlformats.org/drawingml/2006/main">
+            <a:off x="857250" y="2114550"/>
+            <a:ext cx="1976438" cy="723900"/>
           </a:xfrm>
           <a:prstGeom xmlns:a="http://schemas.openxmlformats.org/drawingml/2006/main" prst="rect">
             <a:avLst/>
@@ -4988,29 +5839,502 @@
           <a:lstStyle xmlns:a="http://schemas.openxmlformats.org/drawingml/2006/main"/>
           <a:p xmlns:a="http://schemas.openxmlformats.org/drawingml/2006/main">
             <a:pPr algn="ctr">
-              <a:defRPr sz="2850" b="1">
+              <a:defRPr sz="1575" b="1">
                 <a:solidFill>
                   <a:srgbClr val="0F172A"/>
                 </a:solidFill>
               </a:defRPr>
             </a:pPr>
             <a:r>
-              <a:rPr sz="2850" b="1">
+              <a:rPr sz="1575" b="1">
                 <a:solidFill>
                   <a:srgbClr val="0F172A"/>
                 </a:solidFill>
               </a:rPr>
-              <a:t>SWE-bench traces   →   DeepAgents   →   SGLang server</a:t>
-            </a:r>
-          </a:p>
-        </p:txBody>
-      </p:sp>
-      <p:sp>
-        <p:nvSpPr>
-          <p:cNvPr id="4" name="">
-            <a:extLst xmlns:a="http://schemas.openxmlformats.org/drawingml/2006/main">
-              <a:ext uri="{FF2B5EF4-FFF2-40B4-BE49-F238E27FC236}">
-                <a16:creationId xmlns:a16="http://schemas.microsoft.com/office/drawing/2014/main" id="{50CB75DE-AA18-4B18-B705-6FD0A3FE626D}"/>
+              <a:t>SWE-bench</a:t>
+            </a:r>
+          </a:p>
+          <a:p xmlns:a="http://schemas.openxmlformats.org/drawingml/2006/main">
+            <a:pPr algn="ctr">
+              <a:defRPr sz="1575" b="1">
+                <a:solidFill>
+                  <a:srgbClr val="0F172A"/>
+                </a:solidFill>
+              </a:defRPr>
+            </a:pPr>
+            <a:r>
+              <a:rPr sz="1575" b="1">
+                <a:solidFill>
+                  <a:srgbClr val="0F172A"/>
+                </a:solidFill>
+              </a:rPr>
+              <a:t>traces</a:t>
+            </a:r>
+          </a:p>
+        </p:txBody>
+      </p:sp>
+      <p:sp>
+        <p:nvSpPr>
+          <p:cNvPr id="5" name="">
+            <a:extLst xmlns:a="http://schemas.openxmlformats.org/drawingml/2006/main">
+              <a:ext uri="{FF2B5EF4-FFF2-40B4-BE49-F238E27FC236}">
+                <a16:creationId xmlns:a16="http://schemas.microsoft.com/office/drawing/2014/main" id="{E7BFF767-C121-499C-A5B0-0F2C9F7B8F03}"/>
+              </a:ext>
+            </a:extLst>
+          </p:cNvPr>
+          <p:cNvSpPr>
+            <a:spLocks xmlns:a="http://schemas.openxmlformats.org/drawingml/2006/main" noGrp="1"/>
+          </p:cNvSpPr>
+          <p:nvPr/>
+        </p:nvSpPr>
+        <p:spPr>
+          <a:xfrm xmlns:a="http://schemas.openxmlformats.org/drawingml/2006/main">
+            <a:off x="3043238" y="2209800"/>
+            <a:ext cx="438150" cy="381000"/>
+          </a:xfrm>
+          <a:prstGeom xmlns:a="http://schemas.openxmlformats.org/drawingml/2006/main" prst="rect">
+            <a:avLst/>
+          </a:prstGeom>
+          <a:noFill xmlns:a="http://schemas.openxmlformats.org/drawingml/2006/main"/>
+          <a:ln xmlns:a="http://schemas.openxmlformats.org/drawingml/2006/main" w="0">
+            <a:noFill/>
+            <a:prstDash val="solid"/>
+          </a:ln>
+        </p:spPr>
+        <p:txBody>
+          <a:bodyPr xmlns:a="http://schemas.openxmlformats.org/drawingml/2006/main" anchor="t"/>
+          <a:lstStyle xmlns:a="http://schemas.openxmlformats.org/drawingml/2006/main"/>
+          <a:p xmlns:a="http://schemas.openxmlformats.org/drawingml/2006/main">
+            <a:pPr algn="ctr">
+              <a:defRPr sz="2250" b="1">
+                <a:solidFill>
+                  <a:srgbClr val="64748B"/>
+                </a:solidFill>
+              </a:defRPr>
+            </a:pPr>
+            <a:r>
+              <a:rPr sz="2250" b="1">
+                <a:solidFill>
+                  <a:srgbClr val="64748B"/>
+                </a:solidFill>
+              </a:rPr>
+              <a:t>→</a:t>
+            </a:r>
+          </a:p>
+        </p:txBody>
+      </p:sp>
+      <p:sp>
+        <p:nvSpPr>
+          <p:cNvPr id="6" name="">
+            <a:extLst xmlns:a="http://schemas.openxmlformats.org/drawingml/2006/main">
+              <a:ext uri="{FF2B5EF4-FFF2-40B4-BE49-F238E27FC236}">
+                <a16:creationId xmlns:a16="http://schemas.microsoft.com/office/drawing/2014/main" id="{86629657-3D34-446B-AAC4-ACDFA24BF8C2}"/>
+              </a:ext>
+            </a:extLst>
+          </p:cNvPr>
+          <p:cNvSpPr>
+            <a:spLocks xmlns:a="http://schemas.openxmlformats.org/drawingml/2006/main" noGrp="1"/>
+          </p:cNvSpPr>
+          <p:nvPr/>
+        </p:nvSpPr>
+        <p:spPr>
+          <a:xfrm xmlns:a="http://schemas.openxmlformats.org/drawingml/2006/main">
+            <a:off x="3557588" y="1943100"/>
+            <a:ext cx="2243138" cy="990600"/>
+          </a:xfrm>
+          <a:prstGeom xmlns:a="http://schemas.openxmlformats.org/drawingml/2006/main" prst="roundRect">
+            <a:avLst>
+              <a:gd name="adj" fmla="val 5769"/>
+            </a:avLst>
+          </a:prstGeom>
+          <a:solidFill xmlns:a="http://schemas.openxmlformats.org/drawingml/2006/main">
+            <a:srgbClr val="FFFFFF"/>
+          </a:solidFill>
+          <a:ln xmlns:a="http://schemas.openxmlformats.org/drawingml/2006/main" w="13335">
+            <a:solidFill>
+              <a:srgbClr val="9333EA"/>
+            </a:solidFill>
+            <a:prstDash val="solid"/>
+          </a:ln>
+        </p:spPr>
+      </p:sp>
+      <p:sp>
+        <p:nvSpPr>
+          <p:cNvPr id="7" name="">
+            <a:extLst xmlns:a="http://schemas.openxmlformats.org/drawingml/2006/main">
+              <a:ext uri="{FF2B5EF4-FFF2-40B4-BE49-F238E27FC236}">
+                <a16:creationId xmlns:a16="http://schemas.microsoft.com/office/drawing/2014/main" id="{AB166912-B3FA-485F-85F6-9187A48BC734}"/>
+              </a:ext>
+            </a:extLst>
+          </p:cNvPr>
+          <p:cNvSpPr>
+            <a:spLocks xmlns:a="http://schemas.openxmlformats.org/drawingml/2006/main" noGrp="1"/>
+          </p:cNvSpPr>
+          <p:nvPr/>
+        </p:nvSpPr>
+        <p:spPr>
+          <a:xfrm xmlns:a="http://schemas.openxmlformats.org/drawingml/2006/main">
+            <a:off x="3690938" y="2114550"/>
+            <a:ext cx="1976438" cy="723900"/>
+          </a:xfrm>
+          <a:prstGeom xmlns:a="http://schemas.openxmlformats.org/drawingml/2006/main" prst="rect">
+            <a:avLst/>
+          </a:prstGeom>
+          <a:noFill xmlns:a="http://schemas.openxmlformats.org/drawingml/2006/main"/>
+          <a:ln xmlns:a="http://schemas.openxmlformats.org/drawingml/2006/main" w="0">
+            <a:noFill/>
+            <a:prstDash val="solid"/>
+          </a:ln>
+        </p:spPr>
+        <p:txBody>
+          <a:bodyPr xmlns:a="http://schemas.openxmlformats.org/drawingml/2006/main" anchor="ctr"/>
+          <a:lstStyle xmlns:a="http://schemas.openxmlformats.org/drawingml/2006/main"/>
+          <a:p xmlns:a="http://schemas.openxmlformats.org/drawingml/2006/main">
+            <a:pPr algn="ctr">
+              <a:defRPr sz="1575" b="1">
+                <a:solidFill>
+                  <a:srgbClr val="0F172A"/>
+                </a:solidFill>
+              </a:defRPr>
+            </a:pPr>
+            <a:r>
+              <a:rPr sz="1575" b="1">
+                <a:solidFill>
+                  <a:srgbClr val="0F172A"/>
+                </a:solidFill>
+              </a:rPr>
+              <a:t>DeepAgents</a:t>
+            </a:r>
+          </a:p>
+          <a:p xmlns:a="http://schemas.openxmlformats.org/drawingml/2006/main">
+            <a:pPr algn="ctr">
+              <a:defRPr sz="1575" b="1">
+                <a:solidFill>
+                  <a:srgbClr val="0F172A"/>
+                </a:solidFill>
+              </a:defRPr>
+            </a:pPr>
+            <a:r>
+              <a:rPr sz="1575" b="1">
+                <a:solidFill>
+                  <a:srgbClr val="0F172A"/>
+                </a:solidFill>
+              </a:rPr>
+              <a:t>tool loop</a:t>
+            </a:r>
+          </a:p>
+        </p:txBody>
+      </p:sp>
+      <p:sp>
+        <p:nvSpPr>
+          <p:cNvPr id="8" name="">
+            <a:extLst xmlns:a="http://schemas.openxmlformats.org/drawingml/2006/main">
+              <a:ext uri="{FF2B5EF4-FFF2-40B4-BE49-F238E27FC236}">
+                <a16:creationId xmlns:a16="http://schemas.microsoft.com/office/drawing/2014/main" id="{5CE23B28-612A-4B97-B4AA-15C0ADB97876}"/>
+              </a:ext>
+            </a:extLst>
+          </p:cNvPr>
+          <p:cNvSpPr>
+            <a:spLocks xmlns:a="http://schemas.openxmlformats.org/drawingml/2006/main" noGrp="1"/>
+          </p:cNvSpPr>
+          <p:nvPr/>
+        </p:nvSpPr>
+        <p:spPr>
+          <a:xfrm xmlns:a="http://schemas.openxmlformats.org/drawingml/2006/main">
+            <a:off x="5876925" y="2209800"/>
+            <a:ext cx="438150" cy="381000"/>
+          </a:xfrm>
+          <a:prstGeom xmlns:a="http://schemas.openxmlformats.org/drawingml/2006/main" prst="rect">
+            <a:avLst/>
+          </a:prstGeom>
+          <a:noFill xmlns:a="http://schemas.openxmlformats.org/drawingml/2006/main"/>
+          <a:ln xmlns:a="http://schemas.openxmlformats.org/drawingml/2006/main" w="0">
+            <a:noFill/>
+            <a:prstDash val="solid"/>
+          </a:ln>
+        </p:spPr>
+        <p:txBody>
+          <a:bodyPr xmlns:a="http://schemas.openxmlformats.org/drawingml/2006/main" anchor="t"/>
+          <a:lstStyle xmlns:a="http://schemas.openxmlformats.org/drawingml/2006/main"/>
+          <a:p xmlns:a="http://schemas.openxmlformats.org/drawingml/2006/main">
+            <a:pPr algn="ctr">
+              <a:defRPr sz="2250" b="1">
+                <a:solidFill>
+                  <a:srgbClr val="64748B"/>
+                </a:solidFill>
+              </a:defRPr>
+            </a:pPr>
+            <a:r>
+              <a:rPr sz="2250" b="1">
+                <a:solidFill>
+                  <a:srgbClr val="64748B"/>
+                </a:solidFill>
+              </a:rPr>
+              <a:t>→</a:t>
+            </a:r>
+          </a:p>
+        </p:txBody>
+      </p:sp>
+      <p:sp>
+        <p:nvSpPr>
+          <p:cNvPr id="9" name="">
+            <a:extLst xmlns:a="http://schemas.openxmlformats.org/drawingml/2006/main">
+              <a:ext uri="{FF2B5EF4-FFF2-40B4-BE49-F238E27FC236}">
+                <a16:creationId xmlns:a16="http://schemas.microsoft.com/office/drawing/2014/main" id="{6C039FF1-5160-490A-B103-8AD45E04CD30}"/>
+              </a:ext>
+            </a:extLst>
+          </p:cNvPr>
+          <p:cNvSpPr>
+            <a:spLocks xmlns:a="http://schemas.openxmlformats.org/drawingml/2006/main" noGrp="1"/>
+          </p:cNvSpPr>
+          <p:nvPr/>
+        </p:nvSpPr>
+        <p:spPr>
+          <a:xfrm xmlns:a="http://schemas.openxmlformats.org/drawingml/2006/main">
+            <a:off x="6391275" y="1943100"/>
+            <a:ext cx="2243138" cy="990600"/>
+          </a:xfrm>
+          <a:prstGeom xmlns:a="http://schemas.openxmlformats.org/drawingml/2006/main" prst="roundRect">
+            <a:avLst>
+              <a:gd name="adj" fmla="val 5769"/>
+            </a:avLst>
+          </a:prstGeom>
+          <a:solidFill xmlns:a="http://schemas.openxmlformats.org/drawingml/2006/main">
+            <a:srgbClr val="FFFFFF"/>
+          </a:solidFill>
+          <a:ln xmlns:a="http://schemas.openxmlformats.org/drawingml/2006/main" w="13335">
+            <a:solidFill>
+              <a:srgbClr val="0891B2"/>
+            </a:solidFill>
+            <a:prstDash val="solid"/>
+          </a:ln>
+        </p:spPr>
+      </p:sp>
+      <p:sp>
+        <p:nvSpPr>
+          <p:cNvPr id="10" name="">
+            <a:extLst xmlns:a="http://schemas.openxmlformats.org/drawingml/2006/main">
+              <a:ext uri="{FF2B5EF4-FFF2-40B4-BE49-F238E27FC236}">
+                <a16:creationId xmlns:a16="http://schemas.microsoft.com/office/drawing/2014/main" id="{3A00ED5F-8A3D-456E-8D8F-F22B2BA98435}"/>
+              </a:ext>
+            </a:extLst>
+          </p:cNvPr>
+          <p:cNvSpPr>
+            <a:spLocks xmlns:a="http://schemas.openxmlformats.org/drawingml/2006/main" noGrp="1"/>
+          </p:cNvSpPr>
+          <p:nvPr/>
+        </p:nvSpPr>
+        <p:spPr>
+          <a:xfrm xmlns:a="http://schemas.openxmlformats.org/drawingml/2006/main">
+            <a:off x="6524625" y="2114550"/>
+            <a:ext cx="1976438" cy="723900"/>
+          </a:xfrm>
+          <a:prstGeom xmlns:a="http://schemas.openxmlformats.org/drawingml/2006/main" prst="rect">
+            <a:avLst/>
+          </a:prstGeom>
+          <a:noFill xmlns:a="http://schemas.openxmlformats.org/drawingml/2006/main"/>
+          <a:ln xmlns:a="http://schemas.openxmlformats.org/drawingml/2006/main" w="0">
+            <a:noFill/>
+            <a:prstDash val="solid"/>
+          </a:ln>
+        </p:spPr>
+        <p:txBody>
+          <a:bodyPr xmlns:a="http://schemas.openxmlformats.org/drawingml/2006/main" anchor="ctr"/>
+          <a:lstStyle xmlns:a="http://schemas.openxmlformats.org/drawingml/2006/main"/>
+          <a:p xmlns:a="http://schemas.openxmlformats.org/drawingml/2006/main">
+            <a:pPr algn="ctr">
+              <a:defRPr sz="1575" b="1">
+                <a:solidFill>
+                  <a:srgbClr val="0F172A"/>
+                </a:solidFill>
+              </a:defRPr>
+            </a:pPr>
+            <a:r>
+              <a:rPr sz="1575" b="1">
+                <a:solidFill>
+                  <a:srgbClr val="0F172A"/>
+                </a:solidFill>
+              </a:rPr>
+              <a:t>SGLang</a:t>
+            </a:r>
+          </a:p>
+          <a:p xmlns:a="http://schemas.openxmlformats.org/drawingml/2006/main">
+            <a:pPr algn="ctr">
+              <a:defRPr sz="1575" b="1">
+                <a:solidFill>
+                  <a:srgbClr val="0F172A"/>
+                </a:solidFill>
+              </a:defRPr>
+            </a:pPr>
+            <a:r>
+              <a:rPr sz="1575" b="1">
+                <a:solidFill>
+                  <a:srgbClr val="0F172A"/>
+                </a:solidFill>
+              </a:rPr>
+              <a:t>server</a:t>
+            </a:r>
+          </a:p>
+        </p:txBody>
+      </p:sp>
+      <p:sp>
+        <p:nvSpPr>
+          <p:cNvPr id="11" name="">
+            <a:extLst xmlns:a="http://schemas.openxmlformats.org/drawingml/2006/main">
+              <a:ext uri="{FF2B5EF4-FFF2-40B4-BE49-F238E27FC236}">
+                <a16:creationId xmlns:a16="http://schemas.microsoft.com/office/drawing/2014/main" id="{62B0B214-E01D-4FC3-87E2-CD60B6D88A2A}"/>
+              </a:ext>
+            </a:extLst>
+          </p:cNvPr>
+          <p:cNvSpPr>
+            <a:spLocks xmlns:a="http://schemas.openxmlformats.org/drawingml/2006/main" noGrp="1"/>
+          </p:cNvSpPr>
+          <p:nvPr/>
+        </p:nvSpPr>
+        <p:spPr>
+          <a:xfrm xmlns:a="http://schemas.openxmlformats.org/drawingml/2006/main">
+            <a:off x="8710613" y="2209800"/>
+            <a:ext cx="438150" cy="381000"/>
+          </a:xfrm>
+          <a:prstGeom xmlns:a="http://schemas.openxmlformats.org/drawingml/2006/main" prst="rect">
+            <a:avLst/>
+          </a:prstGeom>
+          <a:noFill xmlns:a="http://schemas.openxmlformats.org/drawingml/2006/main"/>
+          <a:ln xmlns:a="http://schemas.openxmlformats.org/drawingml/2006/main" w="0">
+            <a:noFill/>
+            <a:prstDash val="solid"/>
+          </a:ln>
+        </p:spPr>
+        <p:txBody>
+          <a:bodyPr xmlns:a="http://schemas.openxmlformats.org/drawingml/2006/main" anchor="t"/>
+          <a:lstStyle xmlns:a="http://schemas.openxmlformats.org/drawingml/2006/main"/>
+          <a:p xmlns:a="http://schemas.openxmlformats.org/drawingml/2006/main">
+            <a:pPr algn="ctr">
+              <a:defRPr sz="2250" b="1">
+                <a:solidFill>
+                  <a:srgbClr val="64748B"/>
+                </a:solidFill>
+              </a:defRPr>
+            </a:pPr>
+            <a:r>
+              <a:rPr sz="2250" b="1">
+                <a:solidFill>
+                  <a:srgbClr val="64748B"/>
+                </a:solidFill>
+              </a:rPr>
+              <a:t>→</a:t>
+            </a:r>
+          </a:p>
+        </p:txBody>
+      </p:sp>
+      <p:sp>
+        <p:nvSpPr>
+          <p:cNvPr id="12" name="">
+            <a:extLst xmlns:a="http://schemas.openxmlformats.org/drawingml/2006/main">
+              <a:ext uri="{FF2B5EF4-FFF2-40B4-BE49-F238E27FC236}">
+                <a16:creationId xmlns:a16="http://schemas.microsoft.com/office/drawing/2014/main" id="{02A621AD-77DE-4207-A5B2-FC6900DC5B68}"/>
+              </a:ext>
+            </a:extLst>
+          </p:cNvPr>
+          <p:cNvSpPr>
+            <a:spLocks xmlns:a="http://schemas.openxmlformats.org/drawingml/2006/main" noGrp="1"/>
+          </p:cNvSpPr>
+          <p:nvPr/>
+        </p:nvSpPr>
+        <p:spPr>
+          <a:xfrm xmlns:a="http://schemas.openxmlformats.org/drawingml/2006/main">
+            <a:off x="9224963" y="1943100"/>
+            <a:ext cx="2243138" cy="990600"/>
+          </a:xfrm>
+          <a:prstGeom xmlns:a="http://schemas.openxmlformats.org/drawingml/2006/main" prst="roundRect">
+            <a:avLst>
+              <a:gd name="adj" fmla="val 5769"/>
+            </a:avLst>
+          </a:prstGeom>
+          <a:solidFill xmlns:a="http://schemas.openxmlformats.org/drawingml/2006/main">
+            <a:srgbClr val="FFFFFF"/>
+          </a:solidFill>
+          <a:ln xmlns:a="http://schemas.openxmlformats.org/drawingml/2006/main" w="13335">
+            <a:solidFill>
+              <a:srgbClr val="16A34A"/>
+            </a:solidFill>
+            <a:prstDash val="solid"/>
+          </a:ln>
+        </p:spPr>
+      </p:sp>
+      <p:sp>
+        <p:nvSpPr>
+          <p:cNvPr id="13" name="">
+            <a:extLst xmlns:a="http://schemas.openxmlformats.org/drawingml/2006/main">
+              <a:ext uri="{FF2B5EF4-FFF2-40B4-BE49-F238E27FC236}">
+                <a16:creationId xmlns:a16="http://schemas.microsoft.com/office/drawing/2014/main" id="{BFA7153B-1621-411E-8EC6-EB84C6AA76FA}"/>
+              </a:ext>
+            </a:extLst>
+          </p:cNvPr>
+          <p:cNvSpPr>
+            <a:spLocks xmlns:a="http://schemas.openxmlformats.org/drawingml/2006/main" noGrp="1"/>
+          </p:cNvSpPr>
+          <p:nvPr/>
+        </p:nvSpPr>
+        <p:spPr>
+          <a:xfrm xmlns:a="http://schemas.openxmlformats.org/drawingml/2006/main">
+            <a:off x="9358313" y="2114550"/>
+            <a:ext cx="1976438" cy="723900"/>
+          </a:xfrm>
+          <a:prstGeom xmlns:a="http://schemas.openxmlformats.org/drawingml/2006/main" prst="rect">
+            <a:avLst/>
+          </a:prstGeom>
+          <a:noFill xmlns:a="http://schemas.openxmlformats.org/drawingml/2006/main"/>
+          <a:ln xmlns:a="http://schemas.openxmlformats.org/drawingml/2006/main" w="0">
+            <a:noFill/>
+            <a:prstDash val="solid"/>
+          </a:ln>
+        </p:spPr>
+        <p:txBody>
+          <a:bodyPr xmlns:a="http://schemas.openxmlformats.org/drawingml/2006/main" anchor="ctr"/>
+          <a:lstStyle xmlns:a="http://schemas.openxmlformats.org/drawingml/2006/main"/>
+          <a:p xmlns:a="http://schemas.openxmlformats.org/drawingml/2006/main">
+            <a:pPr algn="ctr">
+              <a:defRPr sz="1575" b="1">
+                <a:solidFill>
+                  <a:srgbClr val="0F172A"/>
+                </a:solidFill>
+              </a:defRPr>
+            </a:pPr>
+            <a:r>
+              <a:rPr sz="1575" b="1">
+                <a:solidFill>
+                  <a:srgbClr val="0F172A"/>
+                </a:solidFill>
+              </a:rPr>
+              <a:t>KV/cache</a:t>
+            </a:r>
+          </a:p>
+          <a:p xmlns:a="http://schemas.openxmlformats.org/drawingml/2006/main">
+            <a:pPr algn="ctr">
+              <a:defRPr sz="1575" b="1">
+                <a:solidFill>
+                  <a:srgbClr val="0F172A"/>
+                </a:solidFill>
+              </a:defRPr>
+            </a:pPr>
+            <a:r>
+              <a:rPr sz="1575" b="1">
+                <a:solidFill>
+                  <a:srgbClr val="0F172A"/>
+                </a:solidFill>
+              </a:rPr>
+              <a:t>observations</a:t>
+            </a:r>
+          </a:p>
+        </p:txBody>
+      </p:sp>
+      <p:sp>
+        <p:nvSpPr>
+          <p:cNvPr id="14" name="">
+            <a:extLst xmlns:a="http://schemas.openxmlformats.org/drawingml/2006/main">
+              <a:ext uri="{FF2B5EF4-FFF2-40B4-BE49-F238E27FC236}">
+                <a16:creationId xmlns:a16="http://schemas.microsoft.com/office/drawing/2014/main" id="{1CE69650-A07F-42A3-AAB3-E7476934334C}"/>
               </a:ext>
             </a:extLst>
           </p:cNvPr>
@@ -5057,10 +6381,10 @@
       </p:sp>
       <p:sp>
         <p:nvSpPr>
-          <p:cNvPr id="5" name="">
-            <a:extLst xmlns:a="http://schemas.openxmlformats.org/drawingml/2006/main">
-              <a:ext uri="{FF2B5EF4-FFF2-40B4-BE49-F238E27FC236}">
-                <a16:creationId xmlns:a16="http://schemas.microsoft.com/office/drawing/2014/main" id="{202EF722-959F-4DC1-8360-1E7F09320084}"/>
+          <p:cNvPr id="15" name="">
+            <a:extLst xmlns:a="http://schemas.openxmlformats.org/drawingml/2006/main">
+              <a:ext uri="{FF2B5EF4-FFF2-40B4-BE49-F238E27FC236}">
+                <a16:creationId xmlns:a16="http://schemas.microsoft.com/office/drawing/2014/main" id="{769B8775-7239-468C-BC8C-30EA013C673A}"/>
               </a:ext>
             </a:extLst>
           </p:cNvPr>
@@ -5107,10 +6431,10 @@
       </p:sp>
       <p:sp>
         <p:nvSpPr>
-          <p:cNvPr id="6" name="">
-            <a:extLst xmlns:a="http://schemas.openxmlformats.org/drawingml/2006/main">
-              <a:ext uri="{FF2B5EF4-FFF2-40B4-BE49-F238E27FC236}">
-                <a16:creationId xmlns:a16="http://schemas.microsoft.com/office/drawing/2014/main" id="{1CD470D2-EE85-427E-8D04-25E372D8F78E}"/>
+          <p:cNvPr id="16" name="">
+            <a:extLst xmlns:a="http://schemas.openxmlformats.org/drawingml/2006/main">
+              <a:ext uri="{FF2B5EF4-FFF2-40B4-BE49-F238E27FC236}">
+                <a16:creationId xmlns:a16="http://schemas.microsoft.com/office/drawing/2014/main" id="{D4A4DCE5-1AA5-4946-81B6-821CBA8086F8}"/>
               </a:ext>
             </a:extLst>
           </p:cNvPr>
@@ -5157,10 +6481,10 @@
       </p:sp>
       <p:sp>
         <p:nvSpPr>
-          <p:cNvPr id="7" name="">
-            <a:extLst xmlns:a="http://schemas.openxmlformats.org/drawingml/2006/main">
-              <a:ext uri="{FF2B5EF4-FFF2-40B4-BE49-F238E27FC236}">
-                <a16:creationId xmlns:a16="http://schemas.microsoft.com/office/drawing/2014/main" id="{8ED1FCD4-46F3-45F7-A1E5-56EEE1CE5D7E}"/>
+          <p:cNvPr id="17" name="">
+            <a:extLst xmlns:a="http://schemas.openxmlformats.org/drawingml/2006/main">
+              <a:ext uri="{FF2B5EF4-FFF2-40B4-BE49-F238E27FC236}">
+                <a16:creationId xmlns:a16="http://schemas.microsoft.com/office/drawing/2014/main" id="{9A0DBE37-6841-4BE1-A936-542800883184}"/>
               </a:ext>
             </a:extLst>
           </p:cNvPr>
@@ -5207,10 +6531,10 @@
       </p:sp>
       <p:sp>
         <p:nvSpPr>
-          <p:cNvPr id="8" name="">
-            <a:extLst xmlns:a="http://schemas.openxmlformats.org/drawingml/2006/main">
-              <a:ext uri="{FF2B5EF4-FFF2-40B4-BE49-F238E27FC236}">
-                <a16:creationId xmlns:a16="http://schemas.microsoft.com/office/drawing/2014/main" id="{1C0270AB-E1B5-49BD-86FE-8295FFFA73A9}"/>
+          <p:cNvPr id="18" name="">
+            <a:extLst xmlns:a="http://schemas.openxmlformats.org/drawingml/2006/main">
+              <a:ext uri="{FF2B5EF4-FFF2-40B4-BE49-F238E27FC236}">
+                <a16:creationId xmlns:a16="http://schemas.microsoft.com/office/drawing/2014/main" id="{20166A04-AED4-47B7-8CDA-261624265F1F}"/>
               </a:ext>
             </a:extLst>
           </p:cNvPr>
@@ -5257,10 +6581,10 @@
       </p:sp>
       <p:sp>
         <p:nvSpPr>
-          <p:cNvPr id="9" name="">
-            <a:extLst xmlns:a="http://schemas.openxmlformats.org/drawingml/2006/main">
-              <a:ext uri="{FF2B5EF4-FFF2-40B4-BE49-F238E27FC236}">
-                <a16:creationId xmlns:a16="http://schemas.microsoft.com/office/drawing/2014/main" id="{CA9E6E5B-1FA3-4E60-A346-F23CF8F02A8E}"/>
+          <p:cNvPr id="19" name="">
+            <a:extLst xmlns:a="http://schemas.openxmlformats.org/drawingml/2006/main">
+              <a:ext uri="{FF2B5EF4-FFF2-40B4-BE49-F238E27FC236}">
+                <a16:creationId xmlns:a16="http://schemas.microsoft.com/office/drawing/2014/main" id="{099EBF12-1743-4795-902E-D1BFDE271BC4}"/>
               </a:ext>
             </a:extLst>
           </p:cNvPr>
@@ -5307,60 +6631,10 @@
       </p:sp>
       <p:sp>
         <p:nvSpPr>
-          <p:cNvPr id="10" name="">
-            <a:extLst xmlns:a="http://schemas.openxmlformats.org/drawingml/2006/main">
-              <a:ext uri="{FF2B5EF4-FFF2-40B4-BE49-F238E27FC236}">
-                <a16:creationId xmlns:a16="http://schemas.microsoft.com/office/drawing/2014/main" id="{E885C58E-DAF6-4453-B345-82AD8347C59F}"/>
-              </a:ext>
-            </a:extLst>
-          </p:cNvPr>
-          <p:cNvSpPr>
-            <a:spLocks xmlns:a="http://schemas.openxmlformats.org/drawingml/2006/main" noGrp="1"/>
-          </p:cNvSpPr>
-          <p:nvPr/>
-        </p:nvSpPr>
-        <p:spPr>
-          <a:xfrm xmlns:a="http://schemas.openxmlformats.org/drawingml/2006/main">
-            <a:off x="419100" y="6134100"/>
-            <a:ext cx="9334500" cy="190500"/>
-          </a:xfrm>
-          <a:prstGeom xmlns:a="http://schemas.openxmlformats.org/drawingml/2006/main" prst="rect">
-            <a:avLst/>
-          </a:prstGeom>
-          <a:noFill xmlns:a="http://schemas.openxmlformats.org/drawingml/2006/main"/>
-          <a:ln xmlns:a="http://schemas.openxmlformats.org/drawingml/2006/main" w="0">
-            <a:noFill/>
-            <a:prstDash val="solid"/>
-          </a:ln>
-        </p:spPr>
-        <p:txBody>
-          <a:bodyPr xmlns:a="http://schemas.openxmlformats.org/drawingml/2006/main" anchor="t"/>
-          <a:lstStyle xmlns:a="http://schemas.openxmlformats.org/drawingml/2006/main"/>
-          <a:p xmlns:a="http://schemas.openxmlformats.org/drawingml/2006/main">
-            <a:pPr algn="l">
-              <a:defRPr sz="825" b="0">
-                <a:solidFill>
-                  <a:srgbClr val="64748B"/>
-                </a:solidFill>
-              </a:defRPr>
-            </a:pPr>
-            <a:r>
-              <a:rPr sz="825" b="0">
-                <a:solidFill>
-                  <a:srgbClr val="64748B"/>
-                </a:solidFill>
-              </a:rPr>
-              <a:t>Source: latest_master_report.html, Experiment Setup And Manager Summary</a:t>
-            </a:r>
-          </a:p>
-        </p:txBody>
-      </p:sp>
-      <p:sp>
-        <p:nvSpPr>
-          <p:cNvPr id="11" name="">
-            <a:extLst xmlns:a="http://schemas.openxmlformats.org/drawingml/2006/main">
-              <a:ext uri="{FF2B5EF4-FFF2-40B4-BE49-F238E27FC236}">
-                <a16:creationId xmlns:a16="http://schemas.microsoft.com/office/drawing/2014/main" id="{517562BF-BBF6-4EB0-B9C6-8131BEDFA783}"/>
+          <p:cNvPr id="20" name="">
+            <a:extLst xmlns:a="http://schemas.openxmlformats.org/drawingml/2006/main">
+              <a:ext uri="{FF2B5EF4-FFF2-40B4-BE49-F238E27FC236}">
+                <a16:creationId xmlns:a16="http://schemas.microsoft.com/office/drawing/2014/main" id="{981A80A2-C487-4B63-9C4D-7D904D482F79}"/>
               </a:ext>
             </a:extLst>
           </p:cNvPr>
@@ -5407,10 +6681,10 @@
       </p:sp>
       <p:sp>
         <p:nvSpPr>
-          <p:cNvPr id="12" name="">
-            <a:extLst xmlns:a="http://schemas.openxmlformats.org/drawingml/2006/main">
-              <a:ext uri="{FF2B5EF4-FFF2-40B4-BE49-F238E27FC236}">
-                <a16:creationId xmlns:a16="http://schemas.microsoft.com/office/drawing/2014/main" id="{2EF5F4C4-0603-4322-AA0A-C0E42B3132ED}"/>
+          <p:cNvPr id="21" name="">
+            <a:extLst xmlns:a="http://schemas.openxmlformats.org/drawingml/2006/main">
+              <a:ext uri="{FF2B5EF4-FFF2-40B4-BE49-F238E27FC236}">
+                <a16:creationId xmlns:a16="http://schemas.microsoft.com/office/drawing/2014/main" id="{D056856B-4BFC-4185-9753-5BAF5B6C2901}"/>
               </a:ext>
             </a:extLst>
           </p:cNvPr>
@@ -5458,7 +6732,7 @@
     </p:spTree>
     <p:extLst>
       <p:ext uri="{BB962C8B-B14F-4D97-AF65-F5344CB8AC3E}">
-        <p14:creationId xmlns:p14="http://schemas.microsoft.com/office/powerpoint/2010/main" val="298855737"/>
+        <p14:creationId xmlns:p14="http://schemas.microsoft.com/office/powerpoint/2010/main" val="947024270"/>
       </p:ext>
     </p:extLst>
   </p:cSld>
@@ -5489,7 +6763,7 @@
           <p:cNvPr id="15" name="">
             <a:extLst xmlns:a="http://schemas.openxmlformats.org/drawingml/2006/main">
               <a:ext uri="{FF2B5EF4-FFF2-40B4-BE49-F238E27FC236}">
-                <a16:creationId xmlns:a16="http://schemas.microsoft.com/office/drawing/2014/main" id="{D099DDF8-60CF-4C85-BFA6-0F5C13C5EA10}"/>
+                <a16:creationId xmlns:a16="http://schemas.microsoft.com/office/drawing/2014/main" id="{524C366F-CE34-4B3F-BC1B-846FBF9F6DAF}"/>
               </a:ext>
             </a:extLst>
           </p:cNvPr>
@@ -5539,7 +6813,7 @@
           <p:cNvPr id="2" name="">
             <a:extLst xmlns:a="http://schemas.openxmlformats.org/drawingml/2006/main">
               <a:ext uri="{FF2B5EF4-FFF2-40B4-BE49-F238E27FC236}">
-                <a16:creationId xmlns:a16="http://schemas.microsoft.com/office/drawing/2014/main" id="{70667946-6A2F-431A-977A-61EBB9C5457A}"/>
+                <a16:creationId xmlns:a16="http://schemas.microsoft.com/office/drawing/2014/main" id="{72D34990-8603-47AD-B834-F6FFF0E85801}"/>
               </a:ext>
             </a:extLst>
           </p:cNvPr>
@@ -5589,7 +6863,7 @@
           <p:cNvPr id="3" name="">
             <a:extLst xmlns:a="http://schemas.openxmlformats.org/drawingml/2006/main">
               <a:ext uri="{FF2B5EF4-FFF2-40B4-BE49-F238E27FC236}">
-                <a16:creationId xmlns:a16="http://schemas.microsoft.com/office/drawing/2014/main" id="{115AACE9-0180-494D-9A5A-1219A9521611}"/>
+                <a16:creationId xmlns:a16="http://schemas.microsoft.com/office/drawing/2014/main" id="{BF82FFEC-E09D-4E79-A7FE-FB0F268B5E6C}"/>
               </a:ext>
             </a:extLst>
           </p:cNvPr>
@@ -5639,7 +6913,7 @@
           <p:cNvPr id="4" name="">
             <a:extLst xmlns:a="http://schemas.openxmlformats.org/drawingml/2006/main">
               <a:ext uri="{FF2B5EF4-FFF2-40B4-BE49-F238E27FC236}">
-                <a16:creationId xmlns:a16="http://schemas.microsoft.com/office/drawing/2014/main" id="{2433E807-025F-4070-9E82-C074E53C7829}"/>
+                <a16:creationId xmlns:a16="http://schemas.microsoft.com/office/drawing/2014/main" id="{7FB36E10-396B-4B33-84B3-8908C105A955}"/>
               </a:ext>
             </a:extLst>
           </p:cNvPr>
@@ -5689,7 +6963,7 @@
           <p:cNvPr id="5" name="">
             <a:extLst xmlns:a="http://schemas.openxmlformats.org/drawingml/2006/main">
               <a:ext uri="{FF2B5EF4-FFF2-40B4-BE49-F238E27FC236}">
-                <a16:creationId xmlns:a16="http://schemas.microsoft.com/office/drawing/2014/main" id="{819522EE-90BB-4DF7-8571-8E0AA958BE77}"/>
+                <a16:creationId xmlns:a16="http://schemas.microsoft.com/office/drawing/2014/main" id="{A5AA46D2-C52D-48F8-A886-934E031EA098}"/>
               </a:ext>
             </a:extLst>
           </p:cNvPr>
@@ -5739,7 +7013,7 @@
           <p:cNvPr id="6" name="">
             <a:extLst xmlns:a="http://schemas.openxmlformats.org/drawingml/2006/main">
               <a:ext uri="{FF2B5EF4-FFF2-40B4-BE49-F238E27FC236}">
-                <a16:creationId xmlns:a16="http://schemas.microsoft.com/office/drawing/2014/main" id="{636F7F6D-1324-410F-B65B-BB76ECA12C99}"/>
+                <a16:creationId xmlns:a16="http://schemas.microsoft.com/office/drawing/2014/main" id="{6357B22D-0BEA-4F41-91F6-BA4715F638F4}"/>
               </a:ext>
             </a:extLst>
           </p:cNvPr>
@@ -5789,7 +7063,7 @@
           <p:cNvPr id="7" name="">
             <a:extLst xmlns:a="http://schemas.openxmlformats.org/drawingml/2006/main">
               <a:ext uri="{FF2B5EF4-FFF2-40B4-BE49-F238E27FC236}">
-                <a16:creationId xmlns:a16="http://schemas.microsoft.com/office/drawing/2014/main" id="{C897D364-AB65-45A0-A1B0-7C7984F43972}"/>
+                <a16:creationId xmlns:a16="http://schemas.microsoft.com/office/drawing/2014/main" id="{373F2FF0-CF6D-4230-8C8A-FAEFFBC8A25D}"/>
               </a:ext>
             </a:extLst>
           </p:cNvPr>
@@ -5839,7 +7113,7 @@
           <p:cNvPr id="8" name="">
             <a:extLst xmlns:a="http://schemas.openxmlformats.org/drawingml/2006/main">
               <a:ext uri="{FF2B5EF4-FFF2-40B4-BE49-F238E27FC236}">
-                <a16:creationId xmlns:a16="http://schemas.microsoft.com/office/drawing/2014/main" id="{3CA6797C-F5A9-443B-9444-9289BCE3C3B0}"/>
+                <a16:creationId xmlns:a16="http://schemas.microsoft.com/office/drawing/2014/main" id="{C4F57CD4-10E9-429F-AAA0-5A533F4D1EA6}"/>
               </a:ext>
             </a:extLst>
           </p:cNvPr>
@@ -5889,7 +7163,7 @@
           <p:cNvPr id="9" name="">
             <a:extLst xmlns:a="http://schemas.openxmlformats.org/drawingml/2006/main">
               <a:ext uri="{FF2B5EF4-FFF2-40B4-BE49-F238E27FC236}">
-                <a16:creationId xmlns:a16="http://schemas.microsoft.com/office/drawing/2014/main" id="{293519CA-F7BF-48AD-9664-82CA7777D070}"/>
+                <a16:creationId xmlns:a16="http://schemas.microsoft.com/office/drawing/2014/main" id="{563921B5-8403-478E-BE4B-4629E8C858BB}"/>
               </a:ext>
             </a:extLst>
           </p:cNvPr>
@@ -5939,7 +7213,7 @@
           <p:cNvPr id="10" name="">
             <a:extLst xmlns:a="http://schemas.openxmlformats.org/drawingml/2006/main">
               <a:ext uri="{FF2B5EF4-FFF2-40B4-BE49-F238E27FC236}">
-                <a16:creationId xmlns:a16="http://schemas.microsoft.com/office/drawing/2014/main" id="{6011E1E7-459A-4DD1-AC1A-FB2AAFF0B60A}"/>
+                <a16:creationId xmlns:a16="http://schemas.microsoft.com/office/drawing/2014/main" id="{3810DEF7-2B6A-4E7C-809C-432AAAA7813C}"/>
               </a:ext>
             </a:extLst>
           </p:cNvPr>
@@ -5989,7 +7263,7 @@
           <p:cNvPr id="11" name="">
             <a:extLst xmlns:a="http://schemas.openxmlformats.org/drawingml/2006/main">
               <a:ext uri="{FF2B5EF4-FFF2-40B4-BE49-F238E27FC236}">
-                <a16:creationId xmlns:a16="http://schemas.microsoft.com/office/drawing/2014/main" id="{FB361BDA-069E-4988-B0ED-DFC5FE8F42A6}"/>
+                <a16:creationId xmlns:a16="http://schemas.microsoft.com/office/drawing/2014/main" id="{242C3F51-AA1F-493A-9044-FAA2B74E2689}"/>
               </a:ext>
             </a:extLst>
           </p:cNvPr>
@@ -6020,7 +7294,7 @@
           <p:cNvPr id="12" name="">
             <a:extLst xmlns:a="http://schemas.openxmlformats.org/drawingml/2006/main">
               <a:ext uri="{FF2B5EF4-FFF2-40B4-BE49-F238E27FC236}">
-                <a16:creationId xmlns:a16="http://schemas.microsoft.com/office/drawing/2014/main" id="{F8C9B73D-7DED-4749-8665-2272A1B38EBD}"/>
+                <a16:creationId xmlns:a16="http://schemas.microsoft.com/office/drawing/2014/main" id="{732F0D12-41B6-4C47-904A-2FD2F5A03FD1}"/>
               </a:ext>
             </a:extLst>
           </p:cNvPr>
@@ -6070,7 +7344,7 @@
           <p:cNvPr id="13" name="">
             <a:extLst xmlns:a="http://schemas.openxmlformats.org/drawingml/2006/main">
               <a:ext uri="{FF2B5EF4-FFF2-40B4-BE49-F238E27FC236}">
-                <a16:creationId xmlns:a16="http://schemas.microsoft.com/office/drawing/2014/main" id="{CFD6BF6D-FB11-4F89-8169-008EA63F339A}"/>
+                <a16:creationId xmlns:a16="http://schemas.microsoft.com/office/drawing/2014/main" id="{CEBFF4B2-7058-45AD-898D-581F11F2FCCC}"/>
               </a:ext>
             </a:extLst>
           </p:cNvPr>
@@ -6120,7 +7394,7 @@
           <p:cNvPr id="14" name="">
             <a:extLst xmlns:a="http://schemas.openxmlformats.org/drawingml/2006/main">
               <a:ext uri="{FF2B5EF4-FFF2-40B4-BE49-F238E27FC236}">
-                <a16:creationId xmlns:a16="http://schemas.microsoft.com/office/drawing/2014/main" id="{7F02B8AA-56F2-47A3-A2C2-BAADF9A5EDBB}"/>
+                <a16:creationId xmlns:a16="http://schemas.microsoft.com/office/drawing/2014/main" id="{C9244580-1673-41A2-96EA-656ED2EAFACE}"/>
               </a:ext>
             </a:extLst>
           </p:cNvPr>
@@ -6168,7 +7442,7 @@
     </p:spTree>
     <p:extLst>
       <p:ext uri="{BB962C8B-B14F-4D97-AF65-F5344CB8AC3E}">
-        <p14:creationId xmlns:p14="http://schemas.microsoft.com/office/powerpoint/2010/main" val="1889608842"/>
+        <p14:creationId xmlns:p14="http://schemas.microsoft.com/office/powerpoint/2010/main" val="707378012"/>
       </p:ext>
     </p:extLst>
   </p:cSld>
@@ -6196,10 +7470,10 @@
       </p:grpSpPr>
       <p:sp>
         <p:nvSpPr>
-          <p:cNvPr id="7" name="">
-            <a:extLst xmlns:a="http://schemas.openxmlformats.org/drawingml/2006/main">
-              <a:ext uri="{FF2B5EF4-FFF2-40B4-BE49-F238E27FC236}">
-                <a16:creationId xmlns:a16="http://schemas.microsoft.com/office/drawing/2014/main" id="{AA6ADB8B-BF7F-4205-9884-3C6AE8326CB1}"/>
+          <p:cNvPr id="6" name="">
+            <a:extLst xmlns:a="http://schemas.openxmlformats.org/drawingml/2006/main">
+              <a:ext uri="{FF2B5EF4-FFF2-40B4-BE49-F238E27FC236}">
+                <a16:creationId xmlns:a16="http://schemas.microsoft.com/office/drawing/2014/main" id="{B5CB5E58-3C5B-472C-9ACA-A57E00A07C2D}"/>
               </a:ext>
             </a:extLst>
           </p:cNvPr>
@@ -6249,7 +7523,7 @@
           <p:cNvPr id="2" name="">
             <a:extLst xmlns:a="http://schemas.openxmlformats.org/drawingml/2006/main">
               <a:ext uri="{FF2B5EF4-FFF2-40B4-BE49-F238E27FC236}">
-                <a16:creationId xmlns:a16="http://schemas.microsoft.com/office/drawing/2014/main" id="{92CC7DF5-9151-46B1-987C-8CFC254D946B}"/>
+                <a16:creationId xmlns:a16="http://schemas.microsoft.com/office/drawing/2014/main" id="{4C9280EB-B5F4-440A-A393-702204B0EBC1}"/>
               </a:ext>
             </a:extLst>
           </p:cNvPr>
@@ -6296,14 +7570,14 @@
       </p:sp>
       <p:pic>
         <p:nvPicPr>
-          <p:cNvPr id="9" name=""/>
+          <p:cNvPr id="8" name=""/>
           <p:cNvPicPr>
             <a:picLocks xmlns:a="http://schemas.openxmlformats.org/drawingml/2006/main" noChangeAspect="1"/>
           </p:cNvPicPr>
           <p:nvPr/>
         </p:nvPicPr>
         <p:blipFill>
-          <a:blip xmlns:r="http://schemas.openxmlformats.org/officeDocument/2006/relationships" xmlns:a="http://schemas.openxmlformats.org/drawingml/2006/main" r:embed="R565f879706f4468b"/>
+          <a:blip xmlns:r="http://schemas.openxmlformats.org/officeDocument/2006/relationships" xmlns:a="http://schemas.openxmlformats.org/drawingml/2006/main" r:embed="R4d822850def849d2"/>
           <a:stretch xmlns:a="http://schemas.openxmlformats.org/drawingml/2006/main"/>
         </p:blipFill>
         <p:spPr>
@@ -6321,57 +7595,7 @@
           <p:cNvPr id="4" name="">
             <a:extLst xmlns:a="http://schemas.openxmlformats.org/drawingml/2006/main">
               <a:ext uri="{FF2B5EF4-FFF2-40B4-BE49-F238E27FC236}">
-                <a16:creationId xmlns:a16="http://schemas.microsoft.com/office/drawing/2014/main" id="{8D765EE8-68FC-41F1-9957-982CCF9C1897}"/>
-              </a:ext>
-            </a:extLst>
-          </p:cNvPr>
-          <p:cNvSpPr>
-            <a:spLocks xmlns:a="http://schemas.openxmlformats.org/drawingml/2006/main" noGrp="1"/>
-          </p:cNvSpPr>
-          <p:nvPr/>
-        </p:nvSpPr>
-        <p:spPr>
-          <a:xfrm xmlns:a="http://schemas.openxmlformats.org/drawingml/2006/main">
-            <a:off x="419100" y="6134100"/>
-            <a:ext cx="9334500" cy="190500"/>
-          </a:xfrm>
-          <a:prstGeom xmlns:a="http://schemas.openxmlformats.org/drawingml/2006/main" prst="rect">
-            <a:avLst/>
-          </a:prstGeom>
-          <a:noFill xmlns:a="http://schemas.openxmlformats.org/drawingml/2006/main"/>
-          <a:ln xmlns:a="http://schemas.openxmlformats.org/drawingml/2006/main" w="0">
-            <a:noFill/>
-            <a:prstDash val="solid"/>
-          </a:ln>
-        </p:spPr>
-        <p:txBody>
-          <a:bodyPr xmlns:a="http://schemas.openxmlformats.org/drawingml/2006/main" anchor="t"/>
-          <a:lstStyle xmlns:a="http://schemas.openxmlformats.org/drawingml/2006/main"/>
-          <a:p xmlns:a="http://schemas.openxmlformats.org/drawingml/2006/main">
-            <a:pPr algn="l">
-              <a:defRPr sz="825" b="0">
-                <a:solidFill>
-                  <a:srgbClr val="64748B"/>
-                </a:solidFill>
-              </a:defRPr>
-            </a:pPr>
-            <a:r>
-              <a:rPr sz="825" b="0">
-                <a:solidFill>
-                  <a:srgbClr val="64748B"/>
-                </a:solidFill>
-              </a:rPr>
-              <a:t>Source: latest_master_report.html controlled run</a:t>
-            </a:r>
-          </a:p>
-        </p:txBody>
-      </p:sp>
-      <p:sp>
-        <p:nvSpPr>
-          <p:cNvPr id="5" name="">
-            <a:extLst xmlns:a="http://schemas.openxmlformats.org/drawingml/2006/main">
-              <a:ext uri="{FF2B5EF4-FFF2-40B4-BE49-F238E27FC236}">
-                <a16:creationId xmlns:a16="http://schemas.microsoft.com/office/drawing/2014/main" id="{F3D8D844-35EF-43D1-84E7-32F43F8FDB99}"/>
+                <a16:creationId xmlns:a16="http://schemas.microsoft.com/office/drawing/2014/main" id="{79FC21EA-CBAC-40DB-A312-903064AD1514}"/>
               </a:ext>
             </a:extLst>
           </p:cNvPr>
@@ -6418,10 +7642,10 @@
       </p:sp>
       <p:sp>
         <p:nvSpPr>
-          <p:cNvPr id="6" name="">
-            <a:extLst xmlns:a="http://schemas.openxmlformats.org/drawingml/2006/main">
-              <a:ext uri="{FF2B5EF4-FFF2-40B4-BE49-F238E27FC236}">
-                <a16:creationId xmlns:a16="http://schemas.microsoft.com/office/drawing/2014/main" id="{D0DE714B-E1C8-4B4E-A17E-8A240EE16738}"/>
+          <p:cNvPr id="5" name="">
+            <a:extLst xmlns:a="http://schemas.openxmlformats.org/drawingml/2006/main">
+              <a:ext uri="{FF2B5EF4-FFF2-40B4-BE49-F238E27FC236}">
+                <a16:creationId xmlns:a16="http://schemas.microsoft.com/office/drawing/2014/main" id="{A24A752F-DCA2-4B27-A6BA-82ED24E2307E}"/>
               </a:ext>
             </a:extLst>
           </p:cNvPr>
@@ -6469,7 +7693,7 @@
     </p:spTree>
     <p:extLst>
       <p:ext uri="{BB962C8B-B14F-4D97-AF65-F5344CB8AC3E}">
-        <p14:creationId xmlns:p14="http://schemas.microsoft.com/office/powerpoint/2010/main" val="311302887"/>
+        <p14:creationId xmlns:p14="http://schemas.microsoft.com/office/powerpoint/2010/main" val="1958997452"/>
       </p:ext>
     </p:extLst>
   </p:cSld>
@@ -6497,10 +7721,10 @@
       </p:grpSpPr>
       <p:sp>
         <p:nvSpPr>
-          <p:cNvPr id="12" name="">
-            <a:extLst xmlns:a="http://schemas.openxmlformats.org/drawingml/2006/main">
-              <a:ext uri="{FF2B5EF4-FFF2-40B4-BE49-F238E27FC236}">
-                <a16:creationId xmlns:a16="http://schemas.microsoft.com/office/drawing/2014/main" id="{3FC0132B-666E-41B8-AE90-0001F6A8337E}"/>
+          <p:cNvPr id="11" name="">
+            <a:extLst xmlns:a="http://schemas.openxmlformats.org/drawingml/2006/main">
+              <a:ext uri="{FF2B5EF4-FFF2-40B4-BE49-F238E27FC236}">
+                <a16:creationId xmlns:a16="http://schemas.microsoft.com/office/drawing/2014/main" id="{D07AE9E6-FCF5-49DE-99D6-31697F858267}"/>
               </a:ext>
             </a:extLst>
           </p:cNvPr>
@@ -6550,7 +7774,7 @@
           <p:cNvPr id="2" name="">
             <a:extLst xmlns:a="http://schemas.openxmlformats.org/drawingml/2006/main">
               <a:ext uri="{FF2B5EF4-FFF2-40B4-BE49-F238E27FC236}">
-                <a16:creationId xmlns:a16="http://schemas.microsoft.com/office/drawing/2014/main" id="{EFC3ADBA-4CDA-4EF1-8F2C-27CDB77E6C2F}"/>
+                <a16:creationId xmlns:a16="http://schemas.microsoft.com/office/drawing/2014/main" id="{7B253396-F255-40C2-A080-F191CE4428DF}"/>
               </a:ext>
             </a:extLst>
           </p:cNvPr>
@@ -6597,14 +7821,14 @@
       </p:sp>
       <p:pic>
         <p:nvPicPr>
-          <p:cNvPr id="14" name=""/>
+          <p:cNvPr id="13" name=""/>
           <p:cNvPicPr>
             <a:picLocks xmlns:a="http://schemas.openxmlformats.org/drawingml/2006/main" noChangeAspect="1"/>
           </p:cNvPicPr>
           <p:nvPr/>
         </p:nvPicPr>
         <p:blipFill>
-          <a:blip xmlns:r="http://schemas.openxmlformats.org/officeDocument/2006/relationships" xmlns:a="http://schemas.openxmlformats.org/drawingml/2006/main" r:embed="R24591ba0485e4c12"/>
+          <a:blip xmlns:r="http://schemas.openxmlformats.org/officeDocument/2006/relationships" xmlns:a="http://schemas.openxmlformats.org/drawingml/2006/main" r:embed="R3816c416c0ff44a5"/>
           <a:stretch xmlns:a="http://schemas.openxmlformats.org/drawingml/2006/main"/>
         </p:blipFill>
         <p:spPr>
@@ -6622,7 +7846,7 @@
           <p:cNvPr id="4" name="">
             <a:extLst xmlns:a="http://schemas.openxmlformats.org/drawingml/2006/main">
               <a:ext uri="{FF2B5EF4-FFF2-40B4-BE49-F238E27FC236}">
-                <a16:creationId xmlns:a16="http://schemas.microsoft.com/office/drawing/2014/main" id="{CF1A9AA5-0DDE-4C36-9AA4-0187BC1E8ADF}"/>
+                <a16:creationId xmlns:a16="http://schemas.microsoft.com/office/drawing/2014/main" id="{62337011-70F9-4A83-A098-84C858B104AF}"/>
               </a:ext>
             </a:extLst>
           </p:cNvPr>
@@ -6672,7 +7896,7 @@
           <p:cNvPr id="5" name="">
             <a:extLst xmlns:a="http://schemas.openxmlformats.org/drawingml/2006/main">
               <a:ext uri="{FF2B5EF4-FFF2-40B4-BE49-F238E27FC236}">
-                <a16:creationId xmlns:a16="http://schemas.microsoft.com/office/drawing/2014/main" id="{848A6E7C-524A-48B1-8A51-0C144F860AB5}"/>
+                <a16:creationId xmlns:a16="http://schemas.microsoft.com/office/drawing/2014/main" id="{203A934D-CF43-4741-89AF-82B72C328D51}"/>
               </a:ext>
             </a:extLst>
           </p:cNvPr>
@@ -6722,7 +7946,7 @@
           <p:cNvPr id="6" name="">
             <a:extLst xmlns:a="http://schemas.openxmlformats.org/drawingml/2006/main">
               <a:ext uri="{FF2B5EF4-FFF2-40B4-BE49-F238E27FC236}">
-                <a16:creationId xmlns:a16="http://schemas.microsoft.com/office/drawing/2014/main" id="{013A0A67-1C5E-4FEA-9E77-BFEFAE3BF47E}"/>
+                <a16:creationId xmlns:a16="http://schemas.microsoft.com/office/drawing/2014/main" id="{A379AC97-7B92-4FD1-BDDA-D28DE6C322F1}"/>
               </a:ext>
             </a:extLst>
           </p:cNvPr>
@@ -6772,7 +7996,7 @@
           <p:cNvPr id="7" name="">
             <a:extLst xmlns:a="http://schemas.openxmlformats.org/drawingml/2006/main">
               <a:ext uri="{FF2B5EF4-FFF2-40B4-BE49-F238E27FC236}">
-                <a16:creationId xmlns:a16="http://schemas.microsoft.com/office/drawing/2014/main" id="{748D1B02-9906-45B2-BF03-DC4A61673860}"/>
+                <a16:creationId xmlns:a16="http://schemas.microsoft.com/office/drawing/2014/main" id="{DA8DACC9-3D78-42CF-BBB2-B3337AEF9F23}"/>
               </a:ext>
             </a:extLst>
           </p:cNvPr>
@@ -6822,7 +8046,7 @@
           <p:cNvPr id="8" name="">
             <a:extLst xmlns:a="http://schemas.openxmlformats.org/drawingml/2006/main">
               <a:ext uri="{FF2B5EF4-FFF2-40B4-BE49-F238E27FC236}">
-                <a16:creationId xmlns:a16="http://schemas.microsoft.com/office/drawing/2014/main" id="{311822C4-208E-421B-B595-5ED32BAA710C}"/>
+                <a16:creationId xmlns:a16="http://schemas.microsoft.com/office/drawing/2014/main" id="{9ACFAB0A-D81C-4078-8027-E6DB1E3255A3}"/>
               </a:ext>
             </a:extLst>
           </p:cNvPr>
@@ -6872,57 +8096,7 @@
           <p:cNvPr id="9" name="">
             <a:extLst xmlns:a="http://schemas.openxmlformats.org/drawingml/2006/main">
               <a:ext uri="{FF2B5EF4-FFF2-40B4-BE49-F238E27FC236}">
-                <a16:creationId xmlns:a16="http://schemas.microsoft.com/office/drawing/2014/main" id="{18C51214-E419-4520-AD58-230FE6A3110C}"/>
-              </a:ext>
-            </a:extLst>
-          </p:cNvPr>
-          <p:cNvSpPr>
-            <a:spLocks xmlns:a="http://schemas.openxmlformats.org/drawingml/2006/main" noGrp="1"/>
-          </p:cNvSpPr>
-          <p:nvPr/>
-        </p:nvSpPr>
-        <p:spPr>
-          <a:xfrm xmlns:a="http://schemas.openxmlformats.org/drawingml/2006/main">
-            <a:off x="419100" y="6134100"/>
-            <a:ext cx="9334500" cy="190500"/>
-          </a:xfrm>
-          <a:prstGeom xmlns:a="http://schemas.openxmlformats.org/drawingml/2006/main" prst="rect">
-            <a:avLst/>
-          </a:prstGeom>
-          <a:noFill xmlns:a="http://schemas.openxmlformats.org/drawingml/2006/main"/>
-          <a:ln xmlns:a="http://schemas.openxmlformats.org/drawingml/2006/main" w="0">
-            <a:noFill/>
-            <a:prstDash val="solid"/>
-          </a:ln>
-        </p:spPr>
-        <p:txBody>
-          <a:bodyPr xmlns:a="http://schemas.openxmlformats.org/drawingml/2006/main" anchor="t"/>
-          <a:lstStyle xmlns:a="http://schemas.openxmlformats.org/drawingml/2006/main"/>
-          <a:p xmlns:a="http://schemas.openxmlformats.org/drawingml/2006/main">
-            <a:pPr algn="l">
-              <a:defRPr sz="825" b="0">
-                <a:solidFill>
-                  <a:srgbClr val="64748B"/>
-                </a:solidFill>
-              </a:defRPr>
-            </a:pPr>
-            <a:r>
-              <a:rPr sz="825" b="0">
-                <a:solidFill>
-                  <a:srgbClr val="64748B"/>
-                </a:solidFill>
-              </a:rPr>
-              <a:t>Source: backups/latest_master_report-1.html, Global Prefetch Margin</a:t>
-            </a:r>
-          </a:p>
-        </p:txBody>
-      </p:sp>
-      <p:sp>
-        <p:nvSpPr>
-          <p:cNvPr id="10" name="">
-            <a:extLst xmlns:a="http://schemas.openxmlformats.org/drawingml/2006/main">
-              <a:ext uri="{FF2B5EF4-FFF2-40B4-BE49-F238E27FC236}">
-                <a16:creationId xmlns:a16="http://schemas.microsoft.com/office/drawing/2014/main" id="{4AF83E6B-D6CD-4A42-B140-2BB89D61D0AE}"/>
+                <a16:creationId xmlns:a16="http://schemas.microsoft.com/office/drawing/2014/main" id="{D43398B7-02AB-420B-8AA7-369313BE8BA5}"/>
               </a:ext>
             </a:extLst>
           </p:cNvPr>
@@ -6969,10 +8143,10 @@
       </p:sp>
       <p:sp>
         <p:nvSpPr>
-          <p:cNvPr id="11" name="">
-            <a:extLst xmlns:a="http://schemas.openxmlformats.org/drawingml/2006/main">
-              <a:ext uri="{FF2B5EF4-FFF2-40B4-BE49-F238E27FC236}">
-                <a16:creationId xmlns:a16="http://schemas.microsoft.com/office/drawing/2014/main" id="{4993B0F6-F3B9-41B2-89C9-50DE7DA60BDE}"/>
+          <p:cNvPr id="10" name="">
+            <a:extLst xmlns:a="http://schemas.openxmlformats.org/drawingml/2006/main">
+              <a:ext uri="{FF2B5EF4-FFF2-40B4-BE49-F238E27FC236}">
+                <a16:creationId xmlns:a16="http://schemas.microsoft.com/office/drawing/2014/main" id="{268EEEF1-9E52-4174-A570-532EA29BC559}"/>
               </a:ext>
             </a:extLst>
           </p:cNvPr>
@@ -7020,7 +8194,7 @@
     </p:spTree>
     <p:extLst>
       <p:ext uri="{BB962C8B-B14F-4D97-AF65-F5344CB8AC3E}">
-        <p14:creationId xmlns:p14="http://schemas.microsoft.com/office/powerpoint/2010/main" val="634894223"/>
+        <p14:creationId xmlns:p14="http://schemas.microsoft.com/office/powerpoint/2010/main" val="1775054189"/>
       </p:ext>
     </p:extLst>
   </p:cSld>
@@ -7048,10 +8222,10 @@
       </p:grpSpPr>
       <p:sp>
         <p:nvSpPr>
-          <p:cNvPr id="14" name="">
-            <a:extLst xmlns:a="http://schemas.openxmlformats.org/drawingml/2006/main">
-              <a:ext uri="{FF2B5EF4-FFF2-40B4-BE49-F238E27FC236}">
-                <a16:creationId xmlns:a16="http://schemas.microsoft.com/office/drawing/2014/main" id="{E52AC5A3-099D-4479-A2FE-6A3DADCFC8F5}"/>
+          <p:cNvPr id="13" name="">
+            <a:extLst xmlns:a="http://schemas.openxmlformats.org/drawingml/2006/main">
+              <a:ext uri="{FF2B5EF4-FFF2-40B4-BE49-F238E27FC236}">
+                <a16:creationId xmlns:a16="http://schemas.microsoft.com/office/drawing/2014/main" id="{4671A170-8086-4D84-91D4-3F93A38573E5}"/>
               </a:ext>
             </a:extLst>
           </p:cNvPr>
@@ -7101,7 +8275,7 @@
           <p:cNvPr id="2" name="">
             <a:extLst xmlns:a="http://schemas.openxmlformats.org/drawingml/2006/main">
               <a:ext uri="{FF2B5EF4-FFF2-40B4-BE49-F238E27FC236}">
-                <a16:creationId xmlns:a16="http://schemas.microsoft.com/office/drawing/2014/main" id="{D43B8401-94AE-4D00-B1DF-C6087598D019}"/>
+                <a16:creationId xmlns:a16="http://schemas.microsoft.com/office/drawing/2014/main" id="{ACC0E34C-0653-49CD-9088-69E254D0C467}"/>
               </a:ext>
             </a:extLst>
           </p:cNvPr>
@@ -7148,14 +8322,14 @@
       </p:sp>
       <p:pic>
         <p:nvPicPr>
-          <p:cNvPr id="16" name=""/>
+          <p:cNvPr id="15" name=""/>
           <p:cNvPicPr>
             <a:picLocks xmlns:a="http://schemas.openxmlformats.org/drawingml/2006/main" noChangeAspect="1"/>
           </p:cNvPicPr>
           <p:nvPr/>
         </p:nvPicPr>
         <p:blipFill>
-          <a:blip xmlns:r="http://schemas.openxmlformats.org/officeDocument/2006/relationships" xmlns:a="http://schemas.openxmlformats.org/drawingml/2006/main" r:embed="Rd58270b99d6c4dc2"/>
+          <a:blip xmlns:r="http://schemas.openxmlformats.org/officeDocument/2006/relationships" xmlns:a="http://schemas.openxmlformats.org/drawingml/2006/main" r:embed="R6d4e49561f5243b2"/>
           <a:stretch xmlns:a="http://schemas.openxmlformats.org/drawingml/2006/main"/>
         </p:blipFill>
         <p:spPr>
@@ -7173,7 +8347,7 @@
           <p:cNvPr id="4" name="">
             <a:extLst xmlns:a="http://schemas.openxmlformats.org/drawingml/2006/main">
               <a:ext uri="{FF2B5EF4-FFF2-40B4-BE49-F238E27FC236}">
-                <a16:creationId xmlns:a16="http://schemas.microsoft.com/office/drawing/2014/main" id="{26C6B26E-A11C-4BC9-877A-A28A77371905}"/>
+                <a16:creationId xmlns:a16="http://schemas.microsoft.com/office/drawing/2014/main" id="{5026578A-6205-45FD-8088-710F876E010A}"/>
               </a:ext>
             </a:extLst>
           </p:cNvPr>
@@ -7223,7 +8397,7 @@
           <p:cNvPr id="5" name="">
             <a:extLst xmlns:a="http://schemas.openxmlformats.org/drawingml/2006/main">
               <a:ext uri="{FF2B5EF4-FFF2-40B4-BE49-F238E27FC236}">
-                <a16:creationId xmlns:a16="http://schemas.microsoft.com/office/drawing/2014/main" id="{B2888244-4713-49F1-8656-3C5D109888A0}"/>
+                <a16:creationId xmlns:a16="http://schemas.microsoft.com/office/drawing/2014/main" id="{8CFA7176-08C7-457C-99B0-0BC628541755}"/>
               </a:ext>
             </a:extLst>
           </p:cNvPr>
@@ -7273,7 +8447,7 @@
           <p:cNvPr id="6" name="">
             <a:extLst xmlns:a="http://schemas.openxmlformats.org/drawingml/2006/main">
               <a:ext uri="{FF2B5EF4-FFF2-40B4-BE49-F238E27FC236}">
-                <a16:creationId xmlns:a16="http://schemas.microsoft.com/office/drawing/2014/main" id="{EA71AAE6-909E-4143-834D-FA7F7F62F1FB}"/>
+                <a16:creationId xmlns:a16="http://schemas.microsoft.com/office/drawing/2014/main" id="{5B711EB1-F118-4D44-97E6-B13DAA85E356}"/>
               </a:ext>
             </a:extLst>
           </p:cNvPr>
@@ -7323,7 +8497,7 @@
           <p:cNvPr id="7" name="">
             <a:extLst xmlns:a="http://schemas.openxmlformats.org/drawingml/2006/main">
               <a:ext uri="{FF2B5EF4-FFF2-40B4-BE49-F238E27FC236}">
-                <a16:creationId xmlns:a16="http://schemas.microsoft.com/office/drawing/2014/main" id="{199F74D3-DD9E-452B-BD78-670830EE90AB}"/>
+                <a16:creationId xmlns:a16="http://schemas.microsoft.com/office/drawing/2014/main" id="{AA77F951-DF73-4EAA-BB56-D7530FF70DB6}"/>
               </a:ext>
             </a:extLst>
           </p:cNvPr>
@@ -7373,7 +8547,7 @@
           <p:cNvPr id="8" name="">
             <a:extLst xmlns:a="http://schemas.openxmlformats.org/drawingml/2006/main">
               <a:ext uri="{FF2B5EF4-FFF2-40B4-BE49-F238E27FC236}">
-                <a16:creationId xmlns:a16="http://schemas.microsoft.com/office/drawing/2014/main" id="{07DA02E2-F1D1-4B93-8D77-2CCF373A0434}"/>
+                <a16:creationId xmlns:a16="http://schemas.microsoft.com/office/drawing/2014/main" id="{E4C78BA4-AA07-491F-AEF3-D686E937DB57}"/>
               </a:ext>
             </a:extLst>
           </p:cNvPr>
@@ -7423,7 +8597,7 @@
           <p:cNvPr id="9" name="">
             <a:extLst xmlns:a="http://schemas.openxmlformats.org/drawingml/2006/main">
               <a:ext uri="{FF2B5EF4-FFF2-40B4-BE49-F238E27FC236}">
-                <a16:creationId xmlns:a16="http://schemas.microsoft.com/office/drawing/2014/main" id="{1E38723F-D7C7-4ABA-A9A3-78DA4D999543}"/>
+                <a16:creationId xmlns:a16="http://schemas.microsoft.com/office/drawing/2014/main" id="{A312E9B3-2F65-4B10-AA52-1B8814544951}"/>
               </a:ext>
             </a:extLst>
           </p:cNvPr>
@@ -7473,7 +8647,7 @@
           <p:cNvPr id="10" name="">
             <a:extLst xmlns:a="http://schemas.openxmlformats.org/drawingml/2006/main">
               <a:ext uri="{FF2B5EF4-FFF2-40B4-BE49-F238E27FC236}">
-                <a16:creationId xmlns:a16="http://schemas.microsoft.com/office/drawing/2014/main" id="{68BCDC75-535F-46F4-AC56-DC0A9EA4330E}"/>
+                <a16:creationId xmlns:a16="http://schemas.microsoft.com/office/drawing/2014/main" id="{AAB88C3C-53AF-498C-A113-1EBF66F3A819}"/>
               </a:ext>
             </a:extLst>
           </p:cNvPr>
@@ -7523,57 +8697,7 @@
           <p:cNvPr id="11" name="">
             <a:extLst xmlns:a="http://schemas.openxmlformats.org/drawingml/2006/main">
               <a:ext uri="{FF2B5EF4-FFF2-40B4-BE49-F238E27FC236}">
-                <a16:creationId xmlns:a16="http://schemas.microsoft.com/office/drawing/2014/main" id="{BD86E477-539D-4193-B6DB-5D8AC28D1573}"/>
-              </a:ext>
-            </a:extLst>
-          </p:cNvPr>
-          <p:cNvSpPr>
-            <a:spLocks xmlns:a="http://schemas.openxmlformats.org/drawingml/2006/main" noGrp="1"/>
-          </p:cNvSpPr>
-          <p:nvPr/>
-        </p:nvSpPr>
-        <p:spPr>
-          <a:xfrm xmlns:a="http://schemas.openxmlformats.org/drawingml/2006/main">
-            <a:off x="419100" y="6134100"/>
-            <a:ext cx="9334500" cy="190500"/>
-          </a:xfrm>
-          <a:prstGeom xmlns:a="http://schemas.openxmlformats.org/drawingml/2006/main" prst="rect">
-            <a:avLst/>
-          </a:prstGeom>
-          <a:noFill xmlns:a="http://schemas.openxmlformats.org/drawingml/2006/main"/>
-          <a:ln xmlns:a="http://schemas.openxmlformats.org/drawingml/2006/main" w="0">
-            <a:noFill/>
-            <a:prstDash val="solid"/>
-          </a:ln>
-        </p:spPr>
-        <p:txBody>
-          <a:bodyPr xmlns:a="http://schemas.openxmlformats.org/drawingml/2006/main" anchor="t"/>
-          <a:lstStyle xmlns:a="http://schemas.openxmlformats.org/drawingml/2006/main"/>
-          <a:p xmlns:a="http://schemas.openxmlformats.org/drawingml/2006/main">
-            <a:pPr algn="l">
-              <a:defRPr sz="825" b="0">
-                <a:solidFill>
-                  <a:srgbClr val="64748B"/>
-                </a:solidFill>
-              </a:defRPr>
-            </a:pPr>
-            <a:r>
-              <a:rPr sz="825" b="0">
-                <a:solidFill>
-                  <a:srgbClr val="64748B"/>
-                </a:solidFill>
-              </a:rPr>
-              <a:t>Source: latest_synthetic_master_report.html, Profiled Mechanism Timelines</a:t>
-            </a:r>
-          </a:p>
-        </p:txBody>
-      </p:sp>
-      <p:sp>
-        <p:nvSpPr>
-          <p:cNvPr id="12" name="">
-            <a:extLst xmlns:a="http://schemas.openxmlformats.org/drawingml/2006/main">
-              <a:ext uri="{FF2B5EF4-FFF2-40B4-BE49-F238E27FC236}">
-                <a16:creationId xmlns:a16="http://schemas.microsoft.com/office/drawing/2014/main" id="{33E7ABCD-2E72-4D61-8725-F18FF0ACAED2}"/>
+                <a16:creationId xmlns:a16="http://schemas.microsoft.com/office/drawing/2014/main" id="{95551343-5FE7-4061-92A0-68ABEDEBA00C}"/>
               </a:ext>
             </a:extLst>
           </p:cNvPr>
@@ -7620,10 +8744,10 @@
       </p:sp>
       <p:sp>
         <p:nvSpPr>
-          <p:cNvPr id="13" name="">
-            <a:extLst xmlns:a="http://schemas.openxmlformats.org/drawingml/2006/main">
-              <a:ext uri="{FF2B5EF4-FFF2-40B4-BE49-F238E27FC236}">
-                <a16:creationId xmlns:a16="http://schemas.microsoft.com/office/drawing/2014/main" id="{3F53CB0F-5CD2-491E-B6EC-9414B3F88A91}"/>
+          <p:cNvPr id="12" name="">
+            <a:extLst xmlns:a="http://schemas.openxmlformats.org/drawingml/2006/main">
+              <a:ext uri="{FF2B5EF4-FFF2-40B4-BE49-F238E27FC236}">
+                <a16:creationId xmlns:a16="http://schemas.microsoft.com/office/drawing/2014/main" id="{D0315A68-5F28-40A5-B14F-58BF2D2C9489}"/>
               </a:ext>
             </a:extLst>
           </p:cNvPr>
@@ -7671,7 +8795,7 @@
     </p:spTree>
     <p:extLst>
       <p:ext uri="{BB962C8B-B14F-4D97-AF65-F5344CB8AC3E}">
-        <p14:creationId xmlns:p14="http://schemas.microsoft.com/office/powerpoint/2010/main" val="495323221"/>
+        <p14:creationId xmlns:p14="http://schemas.microsoft.com/office/powerpoint/2010/main" val="1313210021"/>
       </p:ext>
     </p:extLst>
   </p:cSld>
@@ -7699,10 +8823,10 @@
       </p:grpSpPr>
       <p:sp>
         <p:nvSpPr>
-          <p:cNvPr id="10" name="">
-            <a:extLst xmlns:a="http://schemas.openxmlformats.org/drawingml/2006/main">
-              <a:ext uri="{FF2B5EF4-FFF2-40B4-BE49-F238E27FC236}">
-                <a16:creationId xmlns:a16="http://schemas.microsoft.com/office/drawing/2014/main" id="{9CD6CF57-5097-4588-B06F-E2BB3EFB325D}"/>
+          <p:cNvPr id="9" name="">
+            <a:extLst xmlns:a="http://schemas.openxmlformats.org/drawingml/2006/main">
+              <a:ext uri="{FF2B5EF4-FFF2-40B4-BE49-F238E27FC236}">
+                <a16:creationId xmlns:a16="http://schemas.microsoft.com/office/drawing/2014/main" id="{638350B1-C921-4273-800F-FE317B8F737C}"/>
               </a:ext>
             </a:extLst>
           </p:cNvPr>
@@ -7752,7 +8876,7 @@
           <p:cNvPr id="2" name="">
             <a:extLst xmlns:a="http://schemas.openxmlformats.org/drawingml/2006/main">
               <a:ext uri="{FF2B5EF4-FFF2-40B4-BE49-F238E27FC236}">
-                <a16:creationId xmlns:a16="http://schemas.microsoft.com/office/drawing/2014/main" id="{A54A5F45-A011-403D-BECA-D44565F93797}"/>
+                <a16:creationId xmlns:a16="http://schemas.microsoft.com/office/drawing/2014/main" id="{0D47E67F-B8E7-402A-84D6-C1BD43A319F3}"/>
               </a:ext>
             </a:extLst>
           </p:cNvPr>
@@ -7799,14 +8923,14 @@
       </p:sp>
       <p:pic>
         <p:nvPicPr>
-          <p:cNvPr id="12" name=""/>
+          <p:cNvPr id="11" name=""/>
           <p:cNvPicPr>
             <a:picLocks xmlns:a="http://schemas.openxmlformats.org/drawingml/2006/main" noChangeAspect="1"/>
           </p:cNvPicPr>
           <p:nvPr/>
         </p:nvPicPr>
         <p:blipFill>
-          <a:blip xmlns:r="http://schemas.openxmlformats.org/officeDocument/2006/relationships" xmlns:a="http://schemas.openxmlformats.org/drawingml/2006/main" r:embed="R4ec59d47238145f7"/>
+          <a:blip xmlns:r="http://schemas.openxmlformats.org/officeDocument/2006/relationships" xmlns:a="http://schemas.openxmlformats.org/drawingml/2006/main" r:embed="Rdd230e803e5d48ff"/>
           <a:stretch xmlns:a="http://schemas.openxmlformats.org/drawingml/2006/main"/>
         </p:blipFill>
         <p:spPr>
@@ -7824,7 +8948,7 @@
           <p:cNvPr id="4" name="">
             <a:extLst xmlns:a="http://schemas.openxmlformats.org/drawingml/2006/main">
               <a:ext uri="{FF2B5EF4-FFF2-40B4-BE49-F238E27FC236}">
-                <a16:creationId xmlns:a16="http://schemas.microsoft.com/office/drawing/2014/main" id="{901DCE38-BB11-418B-81BC-B09F88E986CC}"/>
+                <a16:creationId xmlns:a16="http://schemas.microsoft.com/office/drawing/2014/main" id="{6642B4B8-E3C2-4BD8-A14D-F83A0864728D}"/>
               </a:ext>
             </a:extLst>
           </p:cNvPr>
@@ -7874,7 +8998,7 @@
           <p:cNvPr id="5" name="">
             <a:extLst xmlns:a="http://schemas.openxmlformats.org/drawingml/2006/main">
               <a:ext uri="{FF2B5EF4-FFF2-40B4-BE49-F238E27FC236}">
-                <a16:creationId xmlns:a16="http://schemas.microsoft.com/office/drawing/2014/main" id="{51D3FBAA-DC3E-4F60-A445-852B85F5DBB5}"/>
+                <a16:creationId xmlns:a16="http://schemas.microsoft.com/office/drawing/2014/main" id="{BA86C5EA-D7FA-4704-86A6-E77E853BB62C}"/>
               </a:ext>
             </a:extLst>
           </p:cNvPr>
@@ -7924,7 +9048,7 @@
           <p:cNvPr id="6" name="">
             <a:extLst xmlns:a="http://schemas.openxmlformats.org/drawingml/2006/main">
               <a:ext uri="{FF2B5EF4-FFF2-40B4-BE49-F238E27FC236}">
-                <a16:creationId xmlns:a16="http://schemas.microsoft.com/office/drawing/2014/main" id="{1D98EAD6-FBBF-48C9-8BE0-0785C8578F21}"/>
+                <a16:creationId xmlns:a16="http://schemas.microsoft.com/office/drawing/2014/main" id="{723B0C4F-DA4B-4B58-ADE8-DB0C5FEF92EE}"/>
               </a:ext>
             </a:extLst>
           </p:cNvPr>
@@ -7974,57 +9098,7 @@
           <p:cNvPr id="7" name="">
             <a:extLst xmlns:a="http://schemas.openxmlformats.org/drawingml/2006/main">
               <a:ext uri="{FF2B5EF4-FFF2-40B4-BE49-F238E27FC236}">
-                <a16:creationId xmlns:a16="http://schemas.microsoft.com/office/drawing/2014/main" id="{F427FC2D-0DA2-48DD-90C8-6FAD78727591}"/>
-              </a:ext>
-            </a:extLst>
-          </p:cNvPr>
-          <p:cNvSpPr>
-            <a:spLocks xmlns:a="http://schemas.openxmlformats.org/drawingml/2006/main" noGrp="1"/>
-          </p:cNvSpPr>
-          <p:nvPr/>
-        </p:nvSpPr>
-        <p:spPr>
-          <a:xfrm xmlns:a="http://schemas.openxmlformats.org/drawingml/2006/main">
-            <a:off x="419100" y="6134100"/>
-            <a:ext cx="9334500" cy="190500"/>
-          </a:xfrm>
-          <a:prstGeom xmlns:a="http://schemas.openxmlformats.org/drawingml/2006/main" prst="rect">
-            <a:avLst/>
-          </a:prstGeom>
-          <a:noFill xmlns:a="http://schemas.openxmlformats.org/drawingml/2006/main"/>
-          <a:ln xmlns:a="http://schemas.openxmlformats.org/drawingml/2006/main" w="0">
-            <a:noFill/>
-            <a:prstDash val="solid"/>
-          </a:ln>
-        </p:spPr>
-        <p:txBody>
-          <a:bodyPr xmlns:a="http://schemas.openxmlformats.org/drawingml/2006/main" anchor="t"/>
-          <a:lstStyle xmlns:a="http://schemas.openxmlformats.org/drawingml/2006/main"/>
-          <a:p xmlns:a="http://schemas.openxmlformats.org/drawingml/2006/main">
-            <a:pPr algn="l">
-              <a:defRPr sz="825" b="0">
-                <a:solidFill>
-                  <a:srgbClr val="64748B"/>
-                </a:solidFill>
-              </a:defRPr>
-            </a:pPr>
-            <a:r>
-              <a:rPr sz="825" b="0">
-                <a:solidFill>
-                  <a:srgbClr val="64748B"/>
-                </a:solidFill>
-              </a:rPr>
-              <a:t>Source: latest_master_report.html, Global Replay H2D Readiness</a:t>
-            </a:r>
-          </a:p>
-        </p:txBody>
-      </p:sp>
-      <p:sp>
-        <p:nvSpPr>
-          <p:cNvPr id="8" name="">
-            <a:extLst xmlns:a="http://schemas.openxmlformats.org/drawingml/2006/main">
-              <a:ext uri="{FF2B5EF4-FFF2-40B4-BE49-F238E27FC236}">
-                <a16:creationId xmlns:a16="http://schemas.microsoft.com/office/drawing/2014/main" id="{AD64974A-8884-4235-9FC6-FE074C101044}"/>
+                <a16:creationId xmlns:a16="http://schemas.microsoft.com/office/drawing/2014/main" id="{A794DE88-BC86-41C8-87C6-EE32E60BD0B6}"/>
               </a:ext>
             </a:extLst>
           </p:cNvPr>
@@ -8071,10 +9145,10 @@
       </p:sp>
       <p:sp>
         <p:nvSpPr>
-          <p:cNvPr id="9" name="">
-            <a:extLst xmlns:a="http://schemas.openxmlformats.org/drawingml/2006/main">
-              <a:ext uri="{FF2B5EF4-FFF2-40B4-BE49-F238E27FC236}">
-                <a16:creationId xmlns:a16="http://schemas.microsoft.com/office/drawing/2014/main" id="{D21CAAFA-6549-4677-A5CB-40F8BBF561F9}"/>
+          <p:cNvPr id="8" name="">
+            <a:extLst xmlns:a="http://schemas.openxmlformats.org/drawingml/2006/main">
+              <a:ext uri="{FF2B5EF4-FFF2-40B4-BE49-F238E27FC236}">
+                <a16:creationId xmlns:a16="http://schemas.microsoft.com/office/drawing/2014/main" id="{C513AFAF-5FD3-45DD-9AA5-FA799B02F730}"/>
               </a:ext>
             </a:extLst>
           </p:cNvPr>
@@ -8122,7 +9196,7 @@
     </p:spTree>
     <p:extLst>
       <p:ext uri="{BB962C8B-B14F-4D97-AF65-F5344CB8AC3E}">
-        <p14:creationId xmlns:p14="http://schemas.microsoft.com/office/powerpoint/2010/main" val="1279703527"/>
+        <p14:creationId xmlns:p14="http://schemas.microsoft.com/office/powerpoint/2010/main" val="538688526"/>
       </p:ext>
     </p:extLst>
   </p:cSld>
@@ -8150,10 +9224,10 @@
       </p:grpSpPr>
       <p:sp>
         <p:nvSpPr>
-          <p:cNvPr id="8" name="">
-            <a:extLst xmlns:a="http://schemas.openxmlformats.org/drawingml/2006/main">
-              <a:ext uri="{FF2B5EF4-FFF2-40B4-BE49-F238E27FC236}">
-                <a16:creationId xmlns:a16="http://schemas.microsoft.com/office/drawing/2014/main" id="{134F0EFD-3F4E-43E0-9D59-23675673DC99}"/>
+          <p:cNvPr id="7" name="">
+            <a:extLst xmlns:a="http://schemas.openxmlformats.org/drawingml/2006/main">
+              <a:ext uri="{FF2B5EF4-FFF2-40B4-BE49-F238E27FC236}">
+                <a16:creationId xmlns:a16="http://schemas.microsoft.com/office/drawing/2014/main" id="{3EB62C9B-136D-455C-A49E-0FBAB85BC759}"/>
               </a:ext>
             </a:extLst>
           </p:cNvPr>
@@ -8203,7 +9277,7 @@
           <p:cNvPr id="2" name="">
             <a:extLst xmlns:a="http://schemas.openxmlformats.org/drawingml/2006/main">
               <a:ext uri="{FF2B5EF4-FFF2-40B4-BE49-F238E27FC236}">
-                <a16:creationId xmlns:a16="http://schemas.microsoft.com/office/drawing/2014/main" id="{E745B048-AAC8-4B7B-9050-EF260B05F7C2}"/>
+                <a16:creationId xmlns:a16="http://schemas.microsoft.com/office/drawing/2014/main" id="{C342B356-7711-4D18-A52C-FA85DE8C070B}"/>
               </a:ext>
             </a:extLst>
           </p:cNvPr>
@@ -8250,14 +9324,14 @@
       </p:sp>
       <p:pic>
         <p:nvPicPr>
-          <p:cNvPr id="10" name=""/>
+          <p:cNvPr id="9" name=""/>
           <p:cNvPicPr>
             <a:picLocks xmlns:a="http://schemas.openxmlformats.org/drawingml/2006/main" noChangeAspect="1"/>
           </p:cNvPicPr>
           <p:nvPr/>
         </p:nvPicPr>
         <p:blipFill>
-          <a:blip xmlns:r="http://schemas.openxmlformats.org/officeDocument/2006/relationships" xmlns:a="http://schemas.openxmlformats.org/drawingml/2006/main" r:embed="R977fd1f6a7364997"/>
+          <a:blip xmlns:r="http://schemas.openxmlformats.org/officeDocument/2006/relationships" xmlns:a="http://schemas.openxmlformats.org/drawingml/2006/main" r:embed="Rbb2cf4b31cc24e52"/>
           <a:stretch xmlns:a="http://schemas.openxmlformats.org/drawingml/2006/main"/>
         </p:blipFill>
         <p:spPr>
@@ -8275,7 +9349,7 @@
           <p:cNvPr id="4" name="">
             <a:extLst xmlns:a="http://schemas.openxmlformats.org/drawingml/2006/main">
               <a:ext uri="{FF2B5EF4-FFF2-40B4-BE49-F238E27FC236}">
-                <a16:creationId xmlns:a16="http://schemas.microsoft.com/office/drawing/2014/main" id="{097CE6D9-A3D5-458E-A829-BEA6DEC46415}"/>
+                <a16:creationId xmlns:a16="http://schemas.microsoft.com/office/drawing/2014/main" id="{9D23379E-A04A-43FB-9077-CA8E00D442A7}"/>
               </a:ext>
             </a:extLst>
           </p:cNvPr>
@@ -8325,57 +9399,7 @@
           <p:cNvPr id="5" name="">
             <a:extLst xmlns:a="http://schemas.openxmlformats.org/drawingml/2006/main">
               <a:ext uri="{FF2B5EF4-FFF2-40B4-BE49-F238E27FC236}">
-                <a16:creationId xmlns:a16="http://schemas.microsoft.com/office/drawing/2014/main" id="{22C6B8DD-0F70-4486-8AB9-50A539CBE3AA}"/>
-              </a:ext>
-            </a:extLst>
-          </p:cNvPr>
-          <p:cNvSpPr>
-            <a:spLocks xmlns:a="http://schemas.openxmlformats.org/drawingml/2006/main" noGrp="1"/>
-          </p:cNvSpPr>
-          <p:nvPr/>
-        </p:nvSpPr>
-        <p:spPr>
-          <a:xfrm xmlns:a="http://schemas.openxmlformats.org/drawingml/2006/main">
-            <a:off x="419100" y="6134100"/>
-            <a:ext cx="9334500" cy="190500"/>
-          </a:xfrm>
-          <a:prstGeom xmlns:a="http://schemas.openxmlformats.org/drawingml/2006/main" prst="rect">
-            <a:avLst/>
-          </a:prstGeom>
-          <a:noFill xmlns:a="http://schemas.openxmlformats.org/drawingml/2006/main"/>
-          <a:ln xmlns:a="http://schemas.openxmlformats.org/drawingml/2006/main" w="0">
-            <a:noFill/>
-            <a:prstDash val="solid"/>
-          </a:ln>
-        </p:spPr>
-        <p:txBody>
-          <a:bodyPr xmlns:a="http://schemas.openxmlformats.org/drawingml/2006/main" anchor="t"/>
-          <a:lstStyle xmlns:a="http://schemas.openxmlformats.org/drawingml/2006/main"/>
-          <a:p xmlns:a="http://schemas.openxmlformats.org/drawingml/2006/main">
-            <a:pPr algn="l">
-              <a:defRPr sz="825" b="0">
-                <a:solidFill>
-                  <a:srgbClr val="64748B"/>
-                </a:solidFill>
-              </a:defRPr>
-            </a:pPr>
-            <a:r>
-              <a:rPr sz="825" b="0">
-                <a:solidFill>
-                  <a:srgbClr val="64748B"/>
-                </a:solidFill>
-              </a:rPr>
-              <a:t>Source: latest_master_report.html, Replay Queue Timeline vs H2D Start</a:t>
-            </a:r>
-          </a:p>
-        </p:txBody>
-      </p:sp>
-      <p:sp>
-        <p:nvSpPr>
-          <p:cNvPr id="6" name="">
-            <a:extLst xmlns:a="http://schemas.openxmlformats.org/drawingml/2006/main">
-              <a:ext uri="{FF2B5EF4-FFF2-40B4-BE49-F238E27FC236}">
-                <a16:creationId xmlns:a16="http://schemas.microsoft.com/office/drawing/2014/main" id="{1C2DE477-474A-4C1B-973D-607C96324F39}"/>
+                <a16:creationId xmlns:a16="http://schemas.microsoft.com/office/drawing/2014/main" id="{8AF46321-33DF-4A20-A14F-C4E300BF72CB}"/>
               </a:ext>
             </a:extLst>
           </p:cNvPr>
@@ -8422,10 +9446,10 @@
       </p:sp>
       <p:sp>
         <p:nvSpPr>
-          <p:cNvPr id="7" name="">
-            <a:extLst xmlns:a="http://schemas.openxmlformats.org/drawingml/2006/main">
-              <a:ext uri="{FF2B5EF4-FFF2-40B4-BE49-F238E27FC236}">
-                <a16:creationId xmlns:a16="http://schemas.microsoft.com/office/drawing/2014/main" id="{A0CE2C64-972B-47FB-9D40-0D7449633744}"/>
+          <p:cNvPr id="6" name="">
+            <a:extLst xmlns:a="http://schemas.openxmlformats.org/drawingml/2006/main">
+              <a:ext uri="{FF2B5EF4-FFF2-40B4-BE49-F238E27FC236}">
+                <a16:creationId xmlns:a16="http://schemas.microsoft.com/office/drawing/2014/main" id="{B4A8BDEF-C57D-45CC-9279-0B3E18A652D8}"/>
               </a:ext>
             </a:extLst>
           </p:cNvPr>
@@ -8473,7 +9497,7 @@
     </p:spTree>
     <p:extLst>
       <p:ext uri="{BB962C8B-B14F-4D97-AF65-F5344CB8AC3E}">
-        <p14:creationId xmlns:p14="http://schemas.microsoft.com/office/powerpoint/2010/main" val="1934301508"/>
+        <p14:creationId xmlns:p14="http://schemas.microsoft.com/office/powerpoint/2010/main" val="2080746787"/>
       </p:ext>
     </p:extLst>
   </p:cSld>

--- a/sglang_direct_kv/artifacts/slides/agent_aware_kv_movement_manager_deck.pptx
+++ b/sglang_direct_kv/artifacts/slides/agent_aware_kv_movement_manager_deck.pptx
@@ -2,24 +2,24 @@
 <file path=ppt/presentation.xml><?xml version="1.0" encoding="utf-8"?>
 <p:presentation xmlns:p="http://schemas.openxmlformats.org/presentationml/2006/main">
   <p:sldMasterIdLst>
-    <p:sldMasterId xmlns:r="http://schemas.openxmlformats.org/officeDocument/2006/relationships" id="2147483648" r:id="R899d768b3d5f448e"/>
+    <p:sldMasterId xmlns:r="http://schemas.openxmlformats.org/officeDocument/2006/relationships" id="2147483648" r:id="R660986d3031a4505"/>
   </p:sldMasterIdLst>
   <p:notesMasterIdLst>
-    <p:notesMasterId xmlns:r="http://schemas.openxmlformats.org/officeDocument/2006/relationships" r:id="R8e3a05492f824db5"/>
+    <p:notesMasterId xmlns:r="http://schemas.openxmlformats.org/officeDocument/2006/relationships" r:id="Ra51744c5f07b4732"/>
   </p:notesMasterIdLst>
   <p:sldIdLst>
-    <p:sldId xmlns:r="http://schemas.openxmlformats.org/officeDocument/2006/relationships" id="256" r:id="Rd377b6085a8a40c8"/>
-    <p:sldId xmlns:r="http://schemas.openxmlformats.org/officeDocument/2006/relationships" id="257" r:id="R433929d20de746ae"/>
-    <p:sldId xmlns:r="http://schemas.openxmlformats.org/officeDocument/2006/relationships" id="258" r:id="R8cd0295ac3e649c9"/>
-    <p:sldId xmlns:r="http://schemas.openxmlformats.org/officeDocument/2006/relationships" id="259" r:id="R468f87e0b6a24835"/>
-    <p:sldId xmlns:r="http://schemas.openxmlformats.org/officeDocument/2006/relationships" id="260" r:id="R07edb9ecb3394432"/>
-    <p:sldId xmlns:r="http://schemas.openxmlformats.org/officeDocument/2006/relationships" id="261" r:id="R691e92a9768f4be2"/>
-    <p:sldId xmlns:r="http://schemas.openxmlformats.org/officeDocument/2006/relationships" id="262" r:id="R344f558b43f64ed4"/>
-    <p:sldId xmlns:r="http://schemas.openxmlformats.org/officeDocument/2006/relationships" id="263" r:id="R1b3732fe2589427a"/>
-    <p:sldId xmlns:r="http://schemas.openxmlformats.org/officeDocument/2006/relationships" id="264" r:id="R791187716dc0457a"/>
-    <p:sldId xmlns:r="http://schemas.openxmlformats.org/officeDocument/2006/relationships" id="265" r:id="R9de39528184c4195"/>
-    <p:sldId xmlns:r="http://schemas.openxmlformats.org/officeDocument/2006/relationships" id="266" r:id="R15f6bf842f224442"/>
-    <p:sldId xmlns:r="http://schemas.openxmlformats.org/officeDocument/2006/relationships" id="267" r:id="Rbf0e08b5fa924679"/>
+    <p:sldId xmlns:r="http://schemas.openxmlformats.org/officeDocument/2006/relationships" id="256" r:id="R443a9f967aac40bd"/>
+    <p:sldId xmlns:r="http://schemas.openxmlformats.org/officeDocument/2006/relationships" id="257" r:id="R1dc4f6dd977f4c1b"/>
+    <p:sldId xmlns:r="http://schemas.openxmlformats.org/officeDocument/2006/relationships" id="258" r:id="R33f3c6b7c3f74d09"/>
+    <p:sldId xmlns:r="http://schemas.openxmlformats.org/officeDocument/2006/relationships" id="259" r:id="Rf99a4d9ced3f40f2"/>
+    <p:sldId xmlns:r="http://schemas.openxmlformats.org/officeDocument/2006/relationships" id="260" r:id="R2f260ac653d1447f"/>
+    <p:sldId xmlns:r="http://schemas.openxmlformats.org/officeDocument/2006/relationships" id="261" r:id="Rc22b3acfbc024586"/>
+    <p:sldId xmlns:r="http://schemas.openxmlformats.org/officeDocument/2006/relationships" id="262" r:id="R2bdd170283fa4b86"/>
+    <p:sldId xmlns:r="http://schemas.openxmlformats.org/officeDocument/2006/relationships" id="263" r:id="R4b1662d392464e78"/>
+    <p:sldId xmlns:r="http://schemas.openxmlformats.org/officeDocument/2006/relationships" id="264" r:id="Raca4ed3f82e94266"/>
+    <p:sldId xmlns:r="http://schemas.openxmlformats.org/officeDocument/2006/relationships" id="265" r:id="R400cf00b9c95400f"/>
+    <p:sldId xmlns:r="http://schemas.openxmlformats.org/officeDocument/2006/relationships" id="266" r:id="Ra1b74e46bcd54c28"/>
+    <p:sldId xmlns:r="http://schemas.openxmlformats.org/officeDocument/2006/relationships" id="267" r:id="Rc89e3ac1aa7c45a0"/>
   </p:sldIdLst>
   <p:sldSz cx="12192000" cy="6858000"/>
   <p:notesSz cx="6858000" cy="9144000"/>
@@ -1158,12 +1158,17 @@
           <a:lstStyle xmlns:a="http://schemas.openxmlformats.org/drawingml/2006/main"/>
           <a:p xmlns:a="http://schemas.openxmlformats.org/drawingml/2006/main">
             <a:r>
-              <a:t>This is the main timeline slide. It should remain chart-dominant.</a:t>
-            </a:r>
-          </a:p>
-          <a:p xmlns:a="http://schemas.openxmlformats.org/drawingml/2006/main">
-            <a:r>
-              <a:t>The chart shows initial model turn, tool wait, replay path, H2D, recompute, prefill, and decode.</a:t>
+              <a:t>This is the main timeline slide. It now shows a readable crop of G00 through G03 instead of compressing all rows.</a:t>
+            </a:r>
+          </a:p>
+          <a:p xmlns:a="http://schemas.openxmlformats.org/drawingml/2006/main">
+            <a:r>
+              <a:t>The cropped chart shows initial model turn, tool wait, replay path, H2D, recompute, prefill, and decode.</a:t>
+            </a:r>
+          </a:p>
+          <a:p xmlns:a="http://schemas.openxmlformats.org/drawingml/2006/main">
+            <a:r>
+              <a:t>The full timeline remains available in latest_master_report.html.</a:t>
             </a:r>
           </a:p>
           <a:p xmlns:a="http://schemas.openxmlformats.org/drawingml/2006/main">
@@ -1656,7 +1661,7 @@
   </p:cSld>
   <p:clrMap bg1="lt1" tx1="dk1" bg2="lt2" tx2="dk2" accent1="accent1" accent2="accent2" accent3="accent3" accent4="accent4" accent5="accent5" accent6="accent6" hlink="hlink" folHlink="folHlink"/>
   <p:sldLayoutIdLst>
-    <p:sldLayoutId xmlns:r="http://schemas.openxmlformats.org/officeDocument/2006/relationships" id="2147483649" r:id="R9dd8673576d7441a"/>
+    <p:sldLayoutId xmlns:r="http://schemas.openxmlformats.org/officeDocument/2006/relationships" id="2147483649" r:id="Ree7888e845a14412"/>
   </p:sldLayoutIdLst>
   <p:txStyles>
     <p:titleStyle>
@@ -2207,7 +2212,7 @@
           <p:cNvPr id="12" name="">
             <a:extLst xmlns:a="http://schemas.openxmlformats.org/drawingml/2006/main">
               <a:ext uri="{FF2B5EF4-FFF2-40B4-BE49-F238E27FC236}">
-                <a16:creationId xmlns:a16="http://schemas.microsoft.com/office/drawing/2014/main" id="{6543091D-7A1B-427B-9CB4-3A4591A94195}"/>
+                <a16:creationId xmlns:a16="http://schemas.microsoft.com/office/drawing/2014/main" id="{9C2DE161-E611-4262-B733-5CD158F3DBBA}"/>
               </a:ext>
             </a:extLst>
           </p:cNvPr>
@@ -2257,7 +2262,7 @@
           <p:cNvPr id="2" name="">
             <a:extLst xmlns:a="http://schemas.openxmlformats.org/drawingml/2006/main">
               <a:ext uri="{FF2B5EF4-FFF2-40B4-BE49-F238E27FC236}">
-                <a16:creationId xmlns:a16="http://schemas.microsoft.com/office/drawing/2014/main" id="{C4925A30-F28D-4A6B-BA2D-33FE19F2E34D}"/>
+                <a16:creationId xmlns:a16="http://schemas.microsoft.com/office/drawing/2014/main" id="{45C3661D-E131-402E-AAAA-2FCE11314ED8}"/>
               </a:ext>
             </a:extLst>
           </p:cNvPr>
@@ -2307,7 +2312,7 @@
           <p:cNvPr id="3" name="">
             <a:extLst xmlns:a="http://schemas.openxmlformats.org/drawingml/2006/main">
               <a:ext uri="{FF2B5EF4-FFF2-40B4-BE49-F238E27FC236}">
-                <a16:creationId xmlns:a16="http://schemas.microsoft.com/office/drawing/2014/main" id="{F64297CF-480E-4B19-9A68-B2605682614E}"/>
+                <a16:creationId xmlns:a16="http://schemas.microsoft.com/office/drawing/2014/main" id="{FA2DD041-0C3E-4D53-A976-60EEEA027435}"/>
               </a:ext>
             </a:extLst>
           </p:cNvPr>
@@ -2338,7 +2343,7 @@
           <p:cNvPr id="4" name="">
             <a:extLst xmlns:a="http://schemas.openxmlformats.org/drawingml/2006/main">
               <a:ext uri="{FF2B5EF4-FFF2-40B4-BE49-F238E27FC236}">
-                <a16:creationId xmlns:a16="http://schemas.microsoft.com/office/drawing/2014/main" id="{A9BD2C76-8565-4C6F-BF64-8C98D033D2E1}"/>
+                <a16:creationId xmlns:a16="http://schemas.microsoft.com/office/drawing/2014/main" id="{0B21E43B-A4BB-4400-A440-10315E075255}"/>
               </a:ext>
             </a:extLst>
           </p:cNvPr>
@@ -2388,7 +2393,7 @@
           <p:cNvPr id="5" name="">
             <a:extLst xmlns:a="http://schemas.openxmlformats.org/drawingml/2006/main">
               <a:ext uri="{FF2B5EF4-FFF2-40B4-BE49-F238E27FC236}">
-                <a16:creationId xmlns:a16="http://schemas.microsoft.com/office/drawing/2014/main" id="{86B6D4D9-C071-4588-A0CB-37F3B93C48E0}"/>
+                <a16:creationId xmlns:a16="http://schemas.microsoft.com/office/drawing/2014/main" id="{5AD7DF86-6114-4CEE-8AC2-AA1DFF95FFAF}"/>
               </a:ext>
             </a:extLst>
           </p:cNvPr>
@@ -2438,7 +2443,7 @@
           <p:cNvPr id="6" name="">
             <a:extLst xmlns:a="http://schemas.openxmlformats.org/drawingml/2006/main">
               <a:ext uri="{FF2B5EF4-FFF2-40B4-BE49-F238E27FC236}">
-                <a16:creationId xmlns:a16="http://schemas.microsoft.com/office/drawing/2014/main" id="{E357A409-BDE7-44C3-87DB-064C08F832F2}"/>
+                <a16:creationId xmlns:a16="http://schemas.microsoft.com/office/drawing/2014/main" id="{C31B95AA-5D08-4016-8AA5-D0F32AA91D21}"/>
               </a:ext>
             </a:extLst>
           </p:cNvPr>
@@ -2488,7 +2493,7 @@
           <p:cNvPr id="7" name="">
             <a:extLst xmlns:a="http://schemas.openxmlformats.org/drawingml/2006/main">
               <a:ext uri="{FF2B5EF4-FFF2-40B4-BE49-F238E27FC236}">
-                <a16:creationId xmlns:a16="http://schemas.microsoft.com/office/drawing/2014/main" id="{C884BB1D-B896-46D3-9B02-0865E912AF12}"/>
+                <a16:creationId xmlns:a16="http://schemas.microsoft.com/office/drawing/2014/main" id="{AA973700-6C77-475C-8C91-56EAF055F9ED}"/>
               </a:ext>
             </a:extLst>
           </p:cNvPr>
@@ -2538,7 +2543,7 @@
           <p:cNvPr id="8" name="">
             <a:extLst xmlns:a="http://schemas.openxmlformats.org/drawingml/2006/main">
               <a:ext uri="{FF2B5EF4-FFF2-40B4-BE49-F238E27FC236}">
-                <a16:creationId xmlns:a16="http://schemas.microsoft.com/office/drawing/2014/main" id="{ED16BFC6-8729-4EFC-A995-1EFFC8A31624}"/>
+                <a16:creationId xmlns:a16="http://schemas.microsoft.com/office/drawing/2014/main" id="{06599A79-558A-47B7-B45B-F500320C8955}"/>
               </a:ext>
             </a:extLst>
           </p:cNvPr>
@@ -2588,7 +2593,7 @@
           <p:cNvPr id="9" name="">
             <a:extLst xmlns:a="http://schemas.openxmlformats.org/drawingml/2006/main">
               <a:ext uri="{FF2B5EF4-FFF2-40B4-BE49-F238E27FC236}">
-                <a16:creationId xmlns:a16="http://schemas.microsoft.com/office/drawing/2014/main" id="{057277D4-975A-446B-B44E-BD31CEE330E0}"/>
+                <a16:creationId xmlns:a16="http://schemas.microsoft.com/office/drawing/2014/main" id="{F699F22B-59F9-4ECA-A615-8AD5A3D08770}"/>
               </a:ext>
             </a:extLst>
           </p:cNvPr>
@@ -2638,7 +2643,7 @@
           <p:cNvPr id="10" name="">
             <a:extLst xmlns:a="http://schemas.openxmlformats.org/drawingml/2006/main">
               <a:ext uri="{FF2B5EF4-FFF2-40B4-BE49-F238E27FC236}">
-                <a16:creationId xmlns:a16="http://schemas.microsoft.com/office/drawing/2014/main" id="{F490E093-38BA-4121-8B63-6550B5F0EFE4}"/>
+                <a16:creationId xmlns:a16="http://schemas.microsoft.com/office/drawing/2014/main" id="{E9993F09-C781-4902-B1F0-4A50EFE91EBA}"/>
               </a:ext>
             </a:extLst>
           </p:cNvPr>
@@ -2688,7 +2693,7 @@
           <p:cNvPr id="11" name="">
             <a:extLst xmlns:a="http://schemas.openxmlformats.org/drawingml/2006/main">
               <a:ext uri="{FF2B5EF4-FFF2-40B4-BE49-F238E27FC236}">
-                <a16:creationId xmlns:a16="http://schemas.microsoft.com/office/drawing/2014/main" id="{69D55FF7-F253-4A5D-B199-8A6FA18BD5E7}"/>
+                <a16:creationId xmlns:a16="http://schemas.microsoft.com/office/drawing/2014/main" id="{F818A59E-BDB3-40AF-A166-0184570D9656}"/>
               </a:ext>
             </a:extLst>
           </p:cNvPr>
@@ -2736,7 +2741,7 @@
     </p:spTree>
     <p:extLst>
       <p:ext uri="{BB962C8B-B14F-4D97-AF65-F5344CB8AC3E}">
-        <p14:creationId xmlns:p14="http://schemas.microsoft.com/office/powerpoint/2010/main" val="1139630840"/>
+        <p14:creationId xmlns:p14="http://schemas.microsoft.com/office/powerpoint/2010/main" val="519333489"/>
       </p:ext>
     </p:extLst>
   </p:cSld>
@@ -2767,7 +2772,7 @@
           <p:cNvPr id="17" name="">
             <a:extLst xmlns:a="http://schemas.openxmlformats.org/drawingml/2006/main">
               <a:ext uri="{FF2B5EF4-FFF2-40B4-BE49-F238E27FC236}">
-                <a16:creationId xmlns:a16="http://schemas.microsoft.com/office/drawing/2014/main" id="{AD530860-9A8A-4888-B38D-E331E671FED7}"/>
+                <a16:creationId xmlns:a16="http://schemas.microsoft.com/office/drawing/2014/main" id="{399E9D64-0F62-496F-9093-33F4E55317B8}"/>
               </a:ext>
             </a:extLst>
           </p:cNvPr>
@@ -2817,7 +2822,7 @@
           <p:cNvPr id="2" name="">
             <a:extLst xmlns:a="http://schemas.openxmlformats.org/drawingml/2006/main">
               <a:ext uri="{FF2B5EF4-FFF2-40B4-BE49-F238E27FC236}">
-                <a16:creationId xmlns:a16="http://schemas.microsoft.com/office/drawing/2014/main" id="{308F1D59-09FE-4477-A218-8681AD2C8542}"/>
+                <a16:creationId xmlns:a16="http://schemas.microsoft.com/office/drawing/2014/main" id="{F147E563-6D64-459C-B06F-490ADD969CE9}"/>
               </a:ext>
             </a:extLst>
           </p:cNvPr>
@@ -2867,7 +2872,7 @@
           <p:cNvPr id="3" name="">
             <a:extLst xmlns:a="http://schemas.openxmlformats.org/drawingml/2006/main">
               <a:ext uri="{FF2B5EF4-FFF2-40B4-BE49-F238E27FC236}">
-                <a16:creationId xmlns:a16="http://schemas.microsoft.com/office/drawing/2014/main" id="{21463CB0-08ED-4506-8BB0-A9EDC311B992}"/>
+                <a16:creationId xmlns:a16="http://schemas.microsoft.com/office/drawing/2014/main" id="{B5698D55-8C1D-435B-8317-8D88145A6970}"/>
               </a:ext>
             </a:extLst>
           </p:cNvPr>
@@ -2917,7 +2922,7 @@
           <p:cNvPr id="4" name="">
             <a:extLst xmlns:a="http://schemas.openxmlformats.org/drawingml/2006/main">
               <a:ext uri="{FF2B5EF4-FFF2-40B4-BE49-F238E27FC236}">
-                <a16:creationId xmlns:a16="http://schemas.microsoft.com/office/drawing/2014/main" id="{F9AA8060-D775-462E-AE4D-5E12C3A6341A}"/>
+                <a16:creationId xmlns:a16="http://schemas.microsoft.com/office/drawing/2014/main" id="{549D50B5-D731-49E2-A29A-FD104178E50C}"/>
               </a:ext>
             </a:extLst>
           </p:cNvPr>
@@ -2967,7 +2972,7 @@
           <p:cNvPr id="5" name="">
             <a:extLst xmlns:a="http://schemas.openxmlformats.org/drawingml/2006/main">
               <a:ext uri="{FF2B5EF4-FFF2-40B4-BE49-F238E27FC236}">
-                <a16:creationId xmlns:a16="http://schemas.microsoft.com/office/drawing/2014/main" id="{6CD8B445-BF2E-45C2-810D-1201CED09F3A}"/>
+                <a16:creationId xmlns:a16="http://schemas.microsoft.com/office/drawing/2014/main" id="{C85E57E6-3A09-440B-94B8-2F189545D09E}"/>
               </a:ext>
             </a:extLst>
           </p:cNvPr>
@@ -3017,7 +3022,7 @@
           <p:cNvPr id="6" name="">
             <a:extLst xmlns:a="http://schemas.openxmlformats.org/drawingml/2006/main">
               <a:ext uri="{FF2B5EF4-FFF2-40B4-BE49-F238E27FC236}">
-                <a16:creationId xmlns:a16="http://schemas.microsoft.com/office/drawing/2014/main" id="{55567DCC-79FB-499C-975B-63F2B1EB8C38}"/>
+                <a16:creationId xmlns:a16="http://schemas.microsoft.com/office/drawing/2014/main" id="{81FB160B-3FAC-4EF7-88AF-E78084A66B8C}"/>
               </a:ext>
             </a:extLst>
           </p:cNvPr>
@@ -3067,7 +3072,7 @@
           <p:cNvPr id="7" name="">
             <a:extLst xmlns:a="http://schemas.openxmlformats.org/drawingml/2006/main">
               <a:ext uri="{FF2B5EF4-FFF2-40B4-BE49-F238E27FC236}">
-                <a16:creationId xmlns:a16="http://schemas.microsoft.com/office/drawing/2014/main" id="{11E7F8D9-EA30-4FD6-BB26-60702350C0F0}"/>
+                <a16:creationId xmlns:a16="http://schemas.microsoft.com/office/drawing/2014/main" id="{88DD0CB8-CF0A-4FB1-86EF-861DFA275B91}"/>
               </a:ext>
             </a:extLst>
           </p:cNvPr>
@@ -3117,7 +3122,7 @@
           <p:cNvPr id="8" name="">
             <a:extLst xmlns:a="http://schemas.openxmlformats.org/drawingml/2006/main">
               <a:ext uri="{FF2B5EF4-FFF2-40B4-BE49-F238E27FC236}">
-                <a16:creationId xmlns:a16="http://schemas.microsoft.com/office/drawing/2014/main" id="{43CAEB04-AFD6-4004-B47F-915F949BAD1D}"/>
+                <a16:creationId xmlns:a16="http://schemas.microsoft.com/office/drawing/2014/main" id="{27089430-C1B8-414B-BAE7-7DA1AFE1A0A8}"/>
               </a:ext>
             </a:extLst>
           </p:cNvPr>
@@ -3167,7 +3172,7 @@
           <p:cNvPr id="9" name="">
             <a:extLst xmlns:a="http://schemas.openxmlformats.org/drawingml/2006/main">
               <a:ext uri="{FF2B5EF4-FFF2-40B4-BE49-F238E27FC236}">
-                <a16:creationId xmlns:a16="http://schemas.microsoft.com/office/drawing/2014/main" id="{F49A0774-6B8F-47DC-A254-E2343962B4D6}"/>
+                <a16:creationId xmlns:a16="http://schemas.microsoft.com/office/drawing/2014/main" id="{8139AACC-046A-40E1-9C50-C8CAF7D74DC0}"/>
               </a:ext>
             </a:extLst>
           </p:cNvPr>
@@ -3217,7 +3222,7 @@
           <p:cNvPr id="10" name="">
             <a:extLst xmlns:a="http://schemas.openxmlformats.org/drawingml/2006/main">
               <a:ext uri="{FF2B5EF4-FFF2-40B4-BE49-F238E27FC236}">
-                <a16:creationId xmlns:a16="http://schemas.microsoft.com/office/drawing/2014/main" id="{F38F8FE4-B4C6-4CFD-B527-6B4112274950}"/>
+                <a16:creationId xmlns:a16="http://schemas.microsoft.com/office/drawing/2014/main" id="{F477F21D-6823-4103-B4BA-69EA42C30168}"/>
               </a:ext>
             </a:extLst>
           </p:cNvPr>
@@ -3267,7 +3272,7 @@
           <p:cNvPr id="11" name="">
             <a:extLst xmlns:a="http://schemas.openxmlformats.org/drawingml/2006/main">
               <a:ext uri="{FF2B5EF4-FFF2-40B4-BE49-F238E27FC236}">
-                <a16:creationId xmlns:a16="http://schemas.microsoft.com/office/drawing/2014/main" id="{377DDC15-10FE-4D52-9E1B-AE16CD8A0071}"/>
+                <a16:creationId xmlns:a16="http://schemas.microsoft.com/office/drawing/2014/main" id="{D810BB76-BC0A-47D9-8F83-25823BCCDD54}"/>
               </a:ext>
             </a:extLst>
           </p:cNvPr>
@@ -3317,7 +3322,7 @@
           <p:cNvPr id="12" name="">
             <a:extLst xmlns:a="http://schemas.openxmlformats.org/drawingml/2006/main">
               <a:ext uri="{FF2B5EF4-FFF2-40B4-BE49-F238E27FC236}">
-                <a16:creationId xmlns:a16="http://schemas.microsoft.com/office/drawing/2014/main" id="{C59EF465-7C4A-42EA-8AF0-9EC02FEC243D}"/>
+                <a16:creationId xmlns:a16="http://schemas.microsoft.com/office/drawing/2014/main" id="{7B30856C-F232-43F4-B994-851BEFB7A1B9}"/>
               </a:ext>
             </a:extLst>
           </p:cNvPr>
@@ -3367,7 +3372,7 @@
           <p:cNvPr id="13" name="">
             <a:extLst xmlns:a="http://schemas.openxmlformats.org/drawingml/2006/main">
               <a:ext uri="{FF2B5EF4-FFF2-40B4-BE49-F238E27FC236}">
-                <a16:creationId xmlns:a16="http://schemas.microsoft.com/office/drawing/2014/main" id="{F4C51755-B5FD-475B-A3B4-9A05CB6DC516}"/>
+                <a16:creationId xmlns:a16="http://schemas.microsoft.com/office/drawing/2014/main" id="{7CCC884A-F5FB-43F4-963B-CE9C74CEFB20}"/>
               </a:ext>
             </a:extLst>
           </p:cNvPr>
@@ -3398,7 +3403,7 @@
           <p:cNvPr id="14" name="">
             <a:extLst xmlns:a="http://schemas.openxmlformats.org/drawingml/2006/main">
               <a:ext uri="{FF2B5EF4-FFF2-40B4-BE49-F238E27FC236}">
-                <a16:creationId xmlns:a16="http://schemas.microsoft.com/office/drawing/2014/main" id="{9CD41DA1-610C-40E8-91BC-C8C0ED4AE028}"/>
+                <a16:creationId xmlns:a16="http://schemas.microsoft.com/office/drawing/2014/main" id="{BF8A7BBB-C244-4A92-A266-6D02BD69E2A0}"/>
               </a:ext>
             </a:extLst>
           </p:cNvPr>
@@ -3448,7 +3453,7 @@
           <p:cNvPr id="15" name="">
             <a:extLst xmlns:a="http://schemas.openxmlformats.org/drawingml/2006/main">
               <a:ext uri="{FF2B5EF4-FFF2-40B4-BE49-F238E27FC236}">
-                <a16:creationId xmlns:a16="http://schemas.microsoft.com/office/drawing/2014/main" id="{24FFF9B2-D60F-4260-81DD-43CEAE7CA20B}"/>
+                <a16:creationId xmlns:a16="http://schemas.microsoft.com/office/drawing/2014/main" id="{F77AB9F1-0129-451E-96CC-0D352A5CC40E}"/>
               </a:ext>
             </a:extLst>
           </p:cNvPr>
@@ -3498,7 +3503,7 @@
           <p:cNvPr id="16" name="">
             <a:extLst xmlns:a="http://schemas.openxmlformats.org/drawingml/2006/main">
               <a:ext uri="{FF2B5EF4-FFF2-40B4-BE49-F238E27FC236}">
-                <a16:creationId xmlns:a16="http://schemas.microsoft.com/office/drawing/2014/main" id="{EDC70FB8-D435-40B8-9E7F-CED5FDD8F262}"/>
+                <a16:creationId xmlns:a16="http://schemas.microsoft.com/office/drawing/2014/main" id="{2026B7DC-C6FB-4BC1-913B-98D6583289C7}"/>
               </a:ext>
             </a:extLst>
           </p:cNvPr>
@@ -3546,7 +3551,7 @@
     </p:spTree>
     <p:extLst>
       <p:ext uri="{BB962C8B-B14F-4D97-AF65-F5344CB8AC3E}">
-        <p14:creationId xmlns:p14="http://schemas.microsoft.com/office/powerpoint/2010/main" val="1065304262"/>
+        <p14:creationId xmlns:p14="http://schemas.microsoft.com/office/powerpoint/2010/main" val="1716994904"/>
       </p:ext>
     </p:extLst>
   </p:cSld>
@@ -3577,7 +3582,7 @@
           <p:cNvPr id="17" name="">
             <a:extLst xmlns:a="http://schemas.openxmlformats.org/drawingml/2006/main">
               <a:ext uri="{FF2B5EF4-FFF2-40B4-BE49-F238E27FC236}">
-                <a16:creationId xmlns:a16="http://schemas.microsoft.com/office/drawing/2014/main" id="{A17E71E8-B245-4850-A7AF-52DCE50A47FB}"/>
+                <a16:creationId xmlns:a16="http://schemas.microsoft.com/office/drawing/2014/main" id="{0915752A-C7B1-4DFA-92A7-DEFCC40F3E48}"/>
               </a:ext>
             </a:extLst>
           </p:cNvPr>
@@ -3627,7 +3632,7 @@
           <p:cNvPr id="2" name="">
             <a:extLst xmlns:a="http://schemas.openxmlformats.org/drawingml/2006/main">
               <a:ext uri="{FF2B5EF4-FFF2-40B4-BE49-F238E27FC236}">
-                <a16:creationId xmlns:a16="http://schemas.microsoft.com/office/drawing/2014/main" id="{087D382F-2747-4FE1-A2A0-A65681099C3D}"/>
+                <a16:creationId xmlns:a16="http://schemas.microsoft.com/office/drawing/2014/main" id="{998AD203-C032-4D04-82DF-A11A4629DD0E}"/>
               </a:ext>
             </a:extLst>
           </p:cNvPr>
@@ -3677,7 +3682,7 @@
           <p:cNvPr id="3" name="">
             <a:extLst xmlns:a="http://schemas.openxmlformats.org/drawingml/2006/main">
               <a:ext uri="{FF2B5EF4-FFF2-40B4-BE49-F238E27FC236}">
-                <a16:creationId xmlns:a16="http://schemas.microsoft.com/office/drawing/2014/main" id="{663BB759-66EF-4679-B1A9-1C036C6C1EB7}"/>
+                <a16:creationId xmlns:a16="http://schemas.microsoft.com/office/drawing/2014/main" id="{3AFAFCA3-9EF8-4E69-B854-219BFE1367B8}"/>
               </a:ext>
             </a:extLst>
           </p:cNvPr>
@@ -3727,7 +3732,7 @@
           <p:cNvPr id="4" name="">
             <a:extLst xmlns:a="http://schemas.openxmlformats.org/drawingml/2006/main">
               <a:ext uri="{FF2B5EF4-FFF2-40B4-BE49-F238E27FC236}">
-                <a16:creationId xmlns:a16="http://schemas.microsoft.com/office/drawing/2014/main" id="{1A1E89B1-B4F3-437B-B60D-684E2E3757BA}"/>
+                <a16:creationId xmlns:a16="http://schemas.microsoft.com/office/drawing/2014/main" id="{69F336FE-CDD9-4133-966A-E9A0AD09D280}"/>
               </a:ext>
             </a:extLst>
           </p:cNvPr>
@@ -3777,7 +3782,7 @@
           <p:cNvPr id="5" name="">
             <a:extLst xmlns:a="http://schemas.openxmlformats.org/drawingml/2006/main">
               <a:ext uri="{FF2B5EF4-FFF2-40B4-BE49-F238E27FC236}">
-                <a16:creationId xmlns:a16="http://schemas.microsoft.com/office/drawing/2014/main" id="{846EA34F-5FD7-42D3-9E0D-761201685738}"/>
+                <a16:creationId xmlns:a16="http://schemas.microsoft.com/office/drawing/2014/main" id="{A48ED84E-FB21-4227-870A-F00D16C80DD8}"/>
               </a:ext>
             </a:extLst>
           </p:cNvPr>
@@ -3827,7 +3832,7 @@
           <p:cNvPr id="6" name="">
             <a:extLst xmlns:a="http://schemas.openxmlformats.org/drawingml/2006/main">
               <a:ext uri="{FF2B5EF4-FFF2-40B4-BE49-F238E27FC236}">
-                <a16:creationId xmlns:a16="http://schemas.microsoft.com/office/drawing/2014/main" id="{BF975120-3ECA-4B75-98F1-F38341BFB05E}"/>
+                <a16:creationId xmlns:a16="http://schemas.microsoft.com/office/drawing/2014/main" id="{2D9B5E78-CD7F-4A97-B493-118F5B2FF0FD}"/>
               </a:ext>
             </a:extLst>
           </p:cNvPr>
@@ -3877,7 +3882,7 @@
           <p:cNvPr id="7" name="">
             <a:extLst xmlns:a="http://schemas.openxmlformats.org/drawingml/2006/main">
               <a:ext uri="{FF2B5EF4-FFF2-40B4-BE49-F238E27FC236}">
-                <a16:creationId xmlns:a16="http://schemas.microsoft.com/office/drawing/2014/main" id="{057E3B91-29B2-48BC-AB82-048B49F42177}"/>
+                <a16:creationId xmlns:a16="http://schemas.microsoft.com/office/drawing/2014/main" id="{C04281E1-C78E-4ADD-AF9A-47E5E5E2A7A6}"/>
               </a:ext>
             </a:extLst>
           </p:cNvPr>
@@ -3927,7 +3932,7 @@
           <p:cNvPr id="8" name="">
             <a:extLst xmlns:a="http://schemas.openxmlformats.org/drawingml/2006/main">
               <a:ext uri="{FF2B5EF4-FFF2-40B4-BE49-F238E27FC236}">
-                <a16:creationId xmlns:a16="http://schemas.microsoft.com/office/drawing/2014/main" id="{C9847812-B562-4EC3-9B77-B24497214908}"/>
+                <a16:creationId xmlns:a16="http://schemas.microsoft.com/office/drawing/2014/main" id="{4A98A2F2-11A8-4698-92CD-87C5C8C85B08}"/>
               </a:ext>
             </a:extLst>
           </p:cNvPr>
@@ -3977,7 +3982,7 @@
           <p:cNvPr id="9" name="">
             <a:extLst xmlns:a="http://schemas.openxmlformats.org/drawingml/2006/main">
               <a:ext uri="{FF2B5EF4-FFF2-40B4-BE49-F238E27FC236}">
-                <a16:creationId xmlns:a16="http://schemas.microsoft.com/office/drawing/2014/main" id="{5CDC1431-3E15-4D87-8FF1-EAF8903922B8}"/>
+                <a16:creationId xmlns:a16="http://schemas.microsoft.com/office/drawing/2014/main" id="{8F38DFD5-1B17-4D4F-BC77-6F39BFD670E8}"/>
               </a:ext>
             </a:extLst>
           </p:cNvPr>
@@ -4027,7 +4032,7 @@
           <p:cNvPr id="10" name="">
             <a:extLst xmlns:a="http://schemas.openxmlformats.org/drawingml/2006/main">
               <a:ext uri="{FF2B5EF4-FFF2-40B4-BE49-F238E27FC236}">
-                <a16:creationId xmlns:a16="http://schemas.microsoft.com/office/drawing/2014/main" id="{32167948-09C3-40B4-96AA-2E9B806C6247}"/>
+                <a16:creationId xmlns:a16="http://schemas.microsoft.com/office/drawing/2014/main" id="{36B49A24-00E6-450A-B223-24B8C5ED0D7D}"/>
               </a:ext>
             </a:extLst>
           </p:cNvPr>
@@ -4077,7 +4082,7 @@
           <p:cNvPr id="11" name="">
             <a:extLst xmlns:a="http://schemas.openxmlformats.org/drawingml/2006/main">
               <a:ext uri="{FF2B5EF4-FFF2-40B4-BE49-F238E27FC236}">
-                <a16:creationId xmlns:a16="http://schemas.microsoft.com/office/drawing/2014/main" id="{EEEA7C81-0285-467E-9749-DFCABDAA451A}"/>
+                <a16:creationId xmlns:a16="http://schemas.microsoft.com/office/drawing/2014/main" id="{32057DBB-7140-45F3-83C9-FB1737AE3659}"/>
               </a:ext>
             </a:extLst>
           </p:cNvPr>
@@ -4127,7 +4132,7 @@
           <p:cNvPr id="12" name="">
             <a:extLst xmlns:a="http://schemas.openxmlformats.org/drawingml/2006/main">
               <a:ext uri="{FF2B5EF4-FFF2-40B4-BE49-F238E27FC236}">
-                <a16:creationId xmlns:a16="http://schemas.microsoft.com/office/drawing/2014/main" id="{06BA6338-6ABB-4F87-A225-A0A8FFE33F96}"/>
+                <a16:creationId xmlns:a16="http://schemas.microsoft.com/office/drawing/2014/main" id="{691E0B30-6C14-4A18-8F42-CACC3ADBD9FB}"/>
               </a:ext>
             </a:extLst>
           </p:cNvPr>
@@ -4177,7 +4182,7 @@
           <p:cNvPr id="13" name="">
             <a:extLst xmlns:a="http://schemas.openxmlformats.org/drawingml/2006/main">
               <a:ext uri="{FF2B5EF4-FFF2-40B4-BE49-F238E27FC236}">
-                <a16:creationId xmlns:a16="http://schemas.microsoft.com/office/drawing/2014/main" id="{3FA7312E-F183-431F-8F93-5DAE042BA5FB}"/>
+                <a16:creationId xmlns:a16="http://schemas.microsoft.com/office/drawing/2014/main" id="{A2ACDE22-E435-4A47-BA79-CBC4C3F57866}"/>
               </a:ext>
             </a:extLst>
           </p:cNvPr>
@@ -4208,7 +4213,7 @@
           <p:cNvPr id="14" name="">
             <a:extLst xmlns:a="http://schemas.openxmlformats.org/drawingml/2006/main">
               <a:ext uri="{FF2B5EF4-FFF2-40B4-BE49-F238E27FC236}">
-                <a16:creationId xmlns:a16="http://schemas.microsoft.com/office/drawing/2014/main" id="{639028E8-520B-4226-A2C0-8FAA493F2E8D}"/>
+                <a16:creationId xmlns:a16="http://schemas.microsoft.com/office/drawing/2014/main" id="{9597EAE0-7FDC-47BD-94C4-F6CB41DE4630}"/>
               </a:ext>
             </a:extLst>
           </p:cNvPr>
@@ -4258,7 +4263,7 @@
           <p:cNvPr id="15" name="">
             <a:extLst xmlns:a="http://schemas.openxmlformats.org/drawingml/2006/main">
               <a:ext uri="{FF2B5EF4-FFF2-40B4-BE49-F238E27FC236}">
-                <a16:creationId xmlns:a16="http://schemas.microsoft.com/office/drawing/2014/main" id="{3E425FD8-A71B-4051-BB24-F53DC7532F82}"/>
+                <a16:creationId xmlns:a16="http://schemas.microsoft.com/office/drawing/2014/main" id="{8B3A3CF0-42FB-43DD-B389-E173B458016D}"/>
               </a:ext>
             </a:extLst>
           </p:cNvPr>
@@ -4308,7 +4313,7 @@
           <p:cNvPr id="16" name="">
             <a:extLst xmlns:a="http://schemas.openxmlformats.org/drawingml/2006/main">
               <a:ext uri="{FF2B5EF4-FFF2-40B4-BE49-F238E27FC236}">
-                <a16:creationId xmlns:a16="http://schemas.microsoft.com/office/drawing/2014/main" id="{69CB595C-9341-49C6-8E80-D836A1C5C1D8}"/>
+                <a16:creationId xmlns:a16="http://schemas.microsoft.com/office/drawing/2014/main" id="{9C7A32DF-6E6B-404A-8EF7-5B46E89D1D04}"/>
               </a:ext>
             </a:extLst>
           </p:cNvPr>
@@ -4356,7 +4361,7 @@
     </p:spTree>
     <p:extLst>
       <p:ext uri="{BB962C8B-B14F-4D97-AF65-F5344CB8AC3E}">
-        <p14:creationId xmlns:p14="http://schemas.microsoft.com/office/powerpoint/2010/main" val="1432180523"/>
+        <p14:creationId xmlns:p14="http://schemas.microsoft.com/office/powerpoint/2010/main" val="938142167"/>
       </p:ext>
     </p:extLst>
   </p:cSld>
@@ -4387,7 +4392,7 @@
           <p:cNvPr id="15" name="">
             <a:extLst xmlns:a="http://schemas.openxmlformats.org/drawingml/2006/main">
               <a:ext uri="{FF2B5EF4-FFF2-40B4-BE49-F238E27FC236}">
-                <a16:creationId xmlns:a16="http://schemas.microsoft.com/office/drawing/2014/main" id="{C6B4CE2F-9957-46EE-AA82-73CDE40669C9}"/>
+                <a16:creationId xmlns:a16="http://schemas.microsoft.com/office/drawing/2014/main" id="{6BB8D00A-E042-4CBF-8313-94F867FEEF9B}"/>
               </a:ext>
             </a:extLst>
           </p:cNvPr>
@@ -4437,7 +4442,7 @@
           <p:cNvPr id="2" name="">
             <a:extLst xmlns:a="http://schemas.openxmlformats.org/drawingml/2006/main">
               <a:ext uri="{FF2B5EF4-FFF2-40B4-BE49-F238E27FC236}">
-                <a16:creationId xmlns:a16="http://schemas.microsoft.com/office/drawing/2014/main" id="{C8BA4646-951F-4A26-B02C-3536C023CBBC}"/>
+                <a16:creationId xmlns:a16="http://schemas.microsoft.com/office/drawing/2014/main" id="{5010AEC4-16AC-4473-AD5D-4505F23E14DA}"/>
               </a:ext>
             </a:extLst>
           </p:cNvPr>
@@ -4487,7 +4492,7 @@
           <p:cNvPr id="3" name="">
             <a:extLst xmlns:a="http://schemas.openxmlformats.org/drawingml/2006/main">
               <a:ext uri="{FF2B5EF4-FFF2-40B4-BE49-F238E27FC236}">
-                <a16:creationId xmlns:a16="http://schemas.microsoft.com/office/drawing/2014/main" id="{4F4852DE-D899-4EFF-B849-F84FD246E05F}"/>
+                <a16:creationId xmlns:a16="http://schemas.microsoft.com/office/drawing/2014/main" id="{C7E432A2-2282-452E-9130-FCB89C98F303}"/>
               </a:ext>
             </a:extLst>
           </p:cNvPr>
@@ -4537,7 +4542,7 @@
           <p:cNvPr id="4" name="">
             <a:extLst xmlns:a="http://schemas.openxmlformats.org/drawingml/2006/main">
               <a:ext uri="{FF2B5EF4-FFF2-40B4-BE49-F238E27FC236}">
-                <a16:creationId xmlns:a16="http://schemas.microsoft.com/office/drawing/2014/main" id="{876932F4-7DEA-4FCA-9CAA-2DEE3ECE5417}"/>
+                <a16:creationId xmlns:a16="http://schemas.microsoft.com/office/drawing/2014/main" id="{38CA6EEE-E75D-4F26-ACB4-5BF45656AD8F}"/>
               </a:ext>
             </a:extLst>
           </p:cNvPr>
@@ -4587,7 +4592,7 @@
           <p:cNvPr id="5" name="">
             <a:extLst xmlns:a="http://schemas.openxmlformats.org/drawingml/2006/main">
               <a:ext uri="{FF2B5EF4-FFF2-40B4-BE49-F238E27FC236}">
-                <a16:creationId xmlns:a16="http://schemas.microsoft.com/office/drawing/2014/main" id="{D8973758-DDDC-40E4-AD2E-0A0ADB4641B0}"/>
+                <a16:creationId xmlns:a16="http://schemas.microsoft.com/office/drawing/2014/main" id="{39C2A197-DF65-48E1-A608-824465534BAE}"/>
               </a:ext>
             </a:extLst>
           </p:cNvPr>
@@ -4637,7 +4642,7 @@
           <p:cNvPr id="6" name="">
             <a:extLst xmlns:a="http://schemas.openxmlformats.org/drawingml/2006/main">
               <a:ext uri="{FF2B5EF4-FFF2-40B4-BE49-F238E27FC236}">
-                <a16:creationId xmlns:a16="http://schemas.microsoft.com/office/drawing/2014/main" id="{F3879348-7A93-40D8-BE6A-74DD062F7D68}"/>
+                <a16:creationId xmlns:a16="http://schemas.microsoft.com/office/drawing/2014/main" id="{53F43964-E35C-4881-AAF1-3B047B1DF6F8}"/>
               </a:ext>
             </a:extLst>
           </p:cNvPr>
@@ -4687,7 +4692,7 @@
           <p:cNvPr id="7" name="">
             <a:extLst xmlns:a="http://schemas.openxmlformats.org/drawingml/2006/main">
               <a:ext uri="{FF2B5EF4-FFF2-40B4-BE49-F238E27FC236}">
-                <a16:creationId xmlns:a16="http://schemas.microsoft.com/office/drawing/2014/main" id="{430CA2DD-3F4B-4152-83B5-E3D468BCC102}"/>
+                <a16:creationId xmlns:a16="http://schemas.microsoft.com/office/drawing/2014/main" id="{7FD36D02-A0F7-4056-845A-419218182DF2}"/>
               </a:ext>
             </a:extLst>
           </p:cNvPr>
@@ -4737,7 +4742,7 @@
           <p:cNvPr id="8" name="">
             <a:extLst xmlns:a="http://schemas.openxmlformats.org/drawingml/2006/main">
               <a:ext uri="{FF2B5EF4-FFF2-40B4-BE49-F238E27FC236}">
-                <a16:creationId xmlns:a16="http://schemas.microsoft.com/office/drawing/2014/main" id="{B8185251-AD8C-43E0-AAD5-FF1AF03A930D}"/>
+                <a16:creationId xmlns:a16="http://schemas.microsoft.com/office/drawing/2014/main" id="{869F8FC6-2572-4156-8D70-1A137464D9CC}"/>
               </a:ext>
             </a:extLst>
           </p:cNvPr>
@@ -4787,7 +4792,7 @@
           <p:cNvPr id="9" name="">
             <a:extLst xmlns:a="http://schemas.openxmlformats.org/drawingml/2006/main">
               <a:ext uri="{FF2B5EF4-FFF2-40B4-BE49-F238E27FC236}">
-                <a16:creationId xmlns:a16="http://schemas.microsoft.com/office/drawing/2014/main" id="{C9823D08-C122-4D61-8DD8-7C3F73109D73}"/>
+                <a16:creationId xmlns:a16="http://schemas.microsoft.com/office/drawing/2014/main" id="{F05F8CC5-C174-42B2-867E-10128B930290}"/>
               </a:ext>
             </a:extLst>
           </p:cNvPr>
@@ -4837,7 +4842,7 @@
           <p:cNvPr id="10" name="">
             <a:extLst xmlns:a="http://schemas.openxmlformats.org/drawingml/2006/main">
               <a:ext uri="{FF2B5EF4-FFF2-40B4-BE49-F238E27FC236}">
-                <a16:creationId xmlns:a16="http://schemas.microsoft.com/office/drawing/2014/main" id="{8E3E0687-7278-4F44-BAD8-FC78975C012E}"/>
+                <a16:creationId xmlns:a16="http://schemas.microsoft.com/office/drawing/2014/main" id="{F67B6D55-B6D3-4D78-B9B8-B58D7A317D19}"/>
               </a:ext>
             </a:extLst>
           </p:cNvPr>
@@ -4887,7 +4892,7 @@
           <p:cNvPr id="11" name="">
             <a:extLst xmlns:a="http://schemas.openxmlformats.org/drawingml/2006/main">
               <a:ext uri="{FF2B5EF4-FFF2-40B4-BE49-F238E27FC236}">
-                <a16:creationId xmlns:a16="http://schemas.microsoft.com/office/drawing/2014/main" id="{D5403DF6-E996-4CB5-BE90-7C7B3ECDB7D4}"/>
+                <a16:creationId xmlns:a16="http://schemas.microsoft.com/office/drawing/2014/main" id="{003716AF-2CC5-406D-9910-9A4D95003E05}"/>
               </a:ext>
             </a:extLst>
           </p:cNvPr>
@@ -4918,7 +4923,7 @@
           <p:cNvPr id="12" name="">
             <a:extLst xmlns:a="http://schemas.openxmlformats.org/drawingml/2006/main">
               <a:ext uri="{FF2B5EF4-FFF2-40B4-BE49-F238E27FC236}">
-                <a16:creationId xmlns:a16="http://schemas.microsoft.com/office/drawing/2014/main" id="{9CE9AFF2-BA4B-47AF-90D9-938EBB0CD3D0}"/>
+                <a16:creationId xmlns:a16="http://schemas.microsoft.com/office/drawing/2014/main" id="{BB56CCAB-31D5-4522-BB4A-89112E42E592}"/>
               </a:ext>
             </a:extLst>
           </p:cNvPr>
@@ -4968,7 +4973,7 @@
           <p:cNvPr id="13" name="">
             <a:extLst xmlns:a="http://schemas.openxmlformats.org/drawingml/2006/main">
               <a:ext uri="{FF2B5EF4-FFF2-40B4-BE49-F238E27FC236}">
-                <a16:creationId xmlns:a16="http://schemas.microsoft.com/office/drawing/2014/main" id="{881D0C17-6E5D-4173-9986-E3CAADF83BF4}"/>
+                <a16:creationId xmlns:a16="http://schemas.microsoft.com/office/drawing/2014/main" id="{FA6B60C7-F77F-41E7-B148-2349E4D8BEB7}"/>
               </a:ext>
             </a:extLst>
           </p:cNvPr>
@@ -5018,7 +5023,7 @@
           <p:cNvPr id="14" name="">
             <a:extLst xmlns:a="http://schemas.openxmlformats.org/drawingml/2006/main">
               <a:ext uri="{FF2B5EF4-FFF2-40B4-BE49-F238E27FC236}">
-                <a16:creationId xmlns:a16="http://schemas.microsoft.com/office/drawing/2014/main" id="{90CD33D0-6E80-4F97-A505-3981B2AA1F69}"/>
+                <a16:creationId xmlns:a16="http://schemas.microsoft.com/office/drawing/2014/main" id="{FEE829BC-C365-4AF3-BA29-69293093ABD6}"/>
               </a:ext>
             </a:extLst>
           </p:cNvPr>
@@ -5066,7 +5071,7 @@
     </p:spTree>
     <p:extLst>
       <p:ext uri="{BB962C8B-B14F-4D97-AF65-F5344CB8AC3E}">
-        <p14:creationId xmlns:p14="http://schemas.microsoft.com/office/powerpoint/2010/main" val="1981364023"/>
+        <p14:creationId xmlns:p14="http://schemas.microsoft.com/office/powerpoint/2010/main" val="908985294"/>
       </p:ext>
     </p:extLst>
   </p:cSld>
@@ -5097,7 +5102,7 @@
           <p:cNvPr id="12" name="">
             <a:extLst xmlns:a="http://schemas.openxmlformats.org/drawingml/2006/main">
               <a:ext uri="{FF2B5EF4-FFF2-40B4-BE49-F238E27FC236}">
-                <a16:creationId xmlns:a16="http://schemas.microsoft.com/office/drawing/2014/main" id="{3CC51281-9FDC-4EB3-A6AD-CB29F39716F7}"/>
+                <a16:creationId xmlns:a16="http://schemas.microsoft.com/office/drawing/2014/main" id="{0214A903-4877-4D6F-B48E-3A86B4C4572C}"/>
               </a:ext>
             </a:extLst>
           </p:cNvPr>
@@ -5147,7 +5152,7 @@
           <p:cNvPr id="2" name="">
             <a:extLst xmlns:a="http://schemas.openxmlformats.org/drawingml/2006/main">
               <a:ext uri="{FF2B5EF4-FFF2-40B4-BE49-F238E27FC236}">
-                <a16:creationId xmlns:a16="http://schemas.microsoft.com/office/drawing/2014/main" id="{77788F02-BA0B-42A4-BBA0-A84F91360122}"/>
+                <a16:creationId xmlns:a16="http://schemas.microsoft.com/office/drawing/2014/main" id="{B819FBBA-F596-4F7B-9888-36243BF89721}"/>
               </a:ext>
             </a:extLst>
           </p:cNvPr>
@@ -5197,7 +5202,7 @@
           <p:cNvPr id="3" name="">
             <a:extLst xmlns:a="http://schemas.openxmlformats.org/drawingml/2006/main">
               <a:ext uri="{FF2B5EF4-FFF2-40B4-BE49-F238E27FC236}">
-                <a16:creationId xmlns:a16="http://schemas.microsoft.com/office/drawing/2014/main" id="{06BCC0E1-994C-46E5-B2D1-5406224A279E}"/>
+                <a16:creationId xmlns:a16="http://schemas.microsoft.com/office/drawing/2014/main" id="{71576250-220D-44DD-9572-8C3216639949}"/>
               </a:ext>
             </a:extLst>
           </p:cNvPr>
@@ -5247,7 +5252,7 @@
           <p:cNvPr id="4" name="">
             <a:extLst xmlns:a="http://schemas.openxmlformats.org/drawingml/2006/main">
               <a:ext uri="{FF2B5EF4-FFF2-40B4-BE49-F238E27FC236}">
-                <a16:creationId xmlns:a16="http://schemas.microsoft.com/office/drawing/2014/main" id="{3A8D7A4D-E741-41D4-88F7-F835002EEA6A}"/>
+                <a16:creationId xmlns:a16="http://schemas.microsoft.com/office/drawing/2014/main" id="{86D7D8BF-7C48-4630-9784-973D204EBBEE}"/>
               </a:ext>
             </a:extLst>
           </p:cNvPr>
@@ -5297,7 +5302,7 @@
           <p:cNvPr id="5" name="">
             <a:extLst xmlns:a="http://schemas.openxmlformats.org/drawingml/2006/main">
               <a:ext uri="{FF2B5EF4-FFF2-40B4-BE49-F238E27FC236}">
-                <a16:creationId xmlns:a16="http://schemas.microsoft.com/office/drawing/2014/main" id="{F795BF95-1DD1-4FD3-813D-018E3B474233}"/>
+                <a16:creationId xmlns:a16="http://schemas.microsoft.com/office/drawing/2014/main" id="{93D95A12-1A23-4D53-BCC5-914C93D0DDF6}"/>
               </a:ext>
             </a:extLst>
           </p:cNvPr>
@@ -5347,7 +5352,7 @@
           <p:cNvPr id="6" name="">
             <a:extLst xmlns:a="http://schemas.openxmlformats.org/drawingml/2006/main">
               <a:ext uri="{FF2B5EF4-FFF2-40B4-BE49-F238E27FC236}">
-                <a16:creationId xmlns:a16="http://schemas.microsoft.com/office/drawing/2014/main" id="{A069A48E-8AEF-469A-A9F7-26D88F519D00}"/>
+                <a16:creationId xmlns:a16="http://schemas.microsoft.com/office/drawing/2014/main" id="{1DD8B41A-D374-4232-BE34-36A74B338545}"/>
               </a:ext>
             </a:extLst>
           </p:cNvPr>
@@ -5397,7 +5402,7 @@
           <p:cNvPr id="7" name="">
             <a:extLst xmlns:a="http://schemas.openxmlformats.org/drawingml/2006/main">
               <a:ext uri="{FF2B5EF4-FFF2-40B4-BE49-F238E27FC236}">
-                <a16:creationId xmlns:a16="http://schemas.microsoft.com/office/drawing/2014/main" id="{C28CAFFC-707C-47D2-A352-04E31B47BA68}"/>
+                <a16:creationId xmlns:a16="http://schemas.microsoft.com/office/drawing/2014/main" id="{F8DD4EA7-68BB-411C-AA8E-6863FE206F50}"/>
               </a:ext>
             </a:extLst>
           </p:cNvPr>
@@ -5447,7 +5452,7 @@
           <p:cNvPr id="8" name="">
             <a:extLst xmlns:a="http://schemas.openxmlformats.org/drawingml/2006/main">
               <a:ext uri="{FF2B5EF4-FFF2-40B4-BE49-F238E27FC236}">
-                <a16:creationId xmlns:a16="http://schemas.microsoft.com/office/drawing/2014/main" id="{DDA21EFB-4FEF-44C8-896E-D4508A461359}"/>
+                <a16:creationId xmlns:a16="http://schemas.microsoft.com/office/drawing/2014/main" id="{1C8D5E37-BA82-4188-B455-0E8C2DCA8947}"/>
               </a:ext>
             </a:extLst>
           </p:cNvPr>
@@ -5497,7 +5502,7 @@
           <p:cNvPr id="9" name="">
             <a:extLst xmlns:a="http://schemas.openxmlformats.org/drawingml/2006/main">
               <a:ext uri="{FF2B5EF4-FFF2-40B4-BE49-F238E27FC236}">
-                <a16:creationId xmlns:a16="http://schemas.microsoft.com/office/drawing/2014/main" id="{29F4ABF6-EFF9-4EBE-B185-B6CD56CACCE3}"/>
+                <a16:creationId xmlns:a16="http://schemas.microsoft.com/office/drawing/2014/main" id="{C55A4190-5409-428D-AE3B-9535F4AD1DDE}"/>
               </a:ext>
             </a:extLst>
           </p:cNvPr>
@@ -5547,7 +5552,7 @@
           <p:cNvPr id="10" name="">
             <a:extLst xmlns:a="http://schemas.openxmlformats.org/drawingml/2006/main">
               <a:ext uri="{FF2B5EF4-FFF2-40B4-BE49-F238E27FC236}">
-                <a16:creationId xmlns:a16="http://schemas.microsoft.com/office/drawing/2014/main" id="{6827A1CF-FB0F-4EF9-9AAC-F6A29927364B}"/>
+                <a16:creationId xmlns:a16="http://schemas.microsoft.com/office/drawing/2014/main" id="{9F911AD4-54DA-4BDB-A27E-01FD73237203}"/>
               </a:ext>
             </a:extLst>
           </p:cNvPr>
@@ -5597,7 +5602,7 @@
           <p:cNvPr id="11" name="">
             <a:extLst xmlns:a="http://schemas.openxmlformats.org/drawingml/2006/main">
               <a:ext uri="{FF2B5EF4-FFF2-40B4-BE49-F238E27FC236}">
-                <a16:creationId xmlns:a16="http://schemas.microsoft.com/office/drawing/2014/main" id="{3FB59C64-BE46-458E-A085-895460376B36}"/>
+                <a16:creationId xmlns:a16="http://schemas.microsoft.com/office/drawing/2014/main" id="{9495BC32-3E64-4ABB-88B1-01724A8C9824}"/>
               </a:ext>
             </a:extLst>
           </p:cNvPr>
@@ -5645,7 +5650,7 @@
     </p:spTree>
     <p:extLst>
       <p:ext uri="{BB962C8B-B14F-4D97-AF65-F5344CB8AC3E}">
-        <p14:creationId xmlns:p14="http://schemas.microsoft.com/office/powerpoint/2010/main" val="1019548047"/>
+        <p14:creationId xmlns:p14="http://schemas.microsoft.com/office/powerpoint/2010/main" val="1245650642"/>
       </p:ext>
     </p:extLst>
   </p:cSld>
@@ -5676,7 +5681,7 @@
           <p:cNvPr id="22" name="">
             <a:extLst xmlns:a="http://schemas.openxmlformats.org/drawingml/2006/main">
               <a:ext uri="{FF2B5EF4-FFF2-40B4-BE49-F238E27FC236}">
-                <a16:creationId xmlns:a16="http://schemas.microsoft.com/office/drawing/2014/main" id="{6E2861C9-5F68-4128-BD76-9EC7AC6606CD}"/>
+                <a16:creationId xmlns:a16="http://schemas.microsoft.com/office/drawing/2014/main" id="{10312D3C-5AC6-4EA9-A794-91A6A7F2FCB9}"/>
               </a:ext>
             </a:extLst>
           </p:cNvPr>
@@ -5726,7 +5731,7 @@
           <p:cNvPr id="2" name="">
             <a:extLst xmlns:a="http://schemas.openxmlformats.org/drawingml/2006/main">
               <a:ext uri="{FF2B5EF4-FFF2-40B4-BE49-F238E27FC236}">
-                <a16:creationId xmlns:a16="http://schemas.microsoft.com/office/drawing/2014/main" id="{15A5BA03-E95A-4F99-8439-A2B34E6C270A}"/>
+                <a16:creationId xmlns:a16="http://schemas.microsoft.com/office/drawing/2014/main" id="{8A0548C2-5826-488D-B1F1-22BD71C878F3}"/>
               </a:ext>
             </a:extLst>
           </p:cNvPr>
@@ -5776,7 +5781,7 @@
           <p:cNvPr id="3" name="">
             <a:extLst xmlns:a="http://schemas.openxmlformats.org/drawingml/2006/main">
               <a:ext uri="{FF2B5EF4-FFF2-40B4-BE49-F238E27FC236}">
-                <a16:creationId xmlns:a16="http://schemas.microsoft.com/office/drawing/2014/main" id="{452F4E55-BB3C-4086-BE0F-3B687FD7C425}"/>
+                <a16:creationId xmlns:a16="http://schemas.microsoft.com/office/drawing/2014/main" id="{7A583227-C72C-4870-A4AB-26A7F0325A69}"/>
               </a:ext>
             </a:extLst>
           </p:cNvPr>
@@ -5811,7 +5816,7 @@
           <p:cNvPr id="4" name="">
             <a:extLst xmlns:a="http://schemas.openxmlformats.org/drawingml/2006/main">
               <a:ext uri="{FF2B5EF4-FFF2-40B4-BE49-F238E27FC236}">
-                <a16:creationId xmlns:a16="http://schemas.microsoft.com/office/drawing/2014/main" id="{45FA16C7-E80E-40C2-8912-6A8FFD9A6938}"/>
+                <a16:creationId xmlns:a16="http://schemas.microsoft.com/office/drawing/2014/main" id="{69124CE2-0E7A-414A-A43F-BF80FC76B928}"/>
               </a:ext>
             </a:extLst>
           </p:cNvPr>
@@ -5878,7 +5883,7 @@
           <p:cNvPr id="5" name="">
             <a:extLst xmlns:a="http://schemas.openxmlformats.org/drawingml/2006/main">
               <a:ext uri="{FF2B5EF4-FFF2-40B4-BE49-F238E27FC236}">
-                <a16:creationId xmlns:a16="http://schemas.microsoft.com/office/drawing/2014/main" id="{E7BFF767-C121-499C-A5B0-0F2C9F7B8F03}"/>
+                <a16:creationId xmlns:a16="http://schemas.microsoft.com/office/drawing/2014/main" id="{4EE85025-0FC7-4A73-B66D-04BB04A845C9}"/>
               </a:ext>
             </a:extLst>
           </p:cNvPr>
@@ -5928,7 +5933,7 @@
           <p:cNvPr id="6" name="">
             <a:extLst xmlns:a="http://schemas.openxmlformats.org/drawingml/2006/main">
               <a:ext uri="{FF2B5EF4-FFF2-40B4-BE49-F238E27FC236}">
-                <a16:creationId xmlns:a16="http://schemas.microsoft.com/office/drawing/2014/main" id="{86629657-3D34-446B-AAC4-ACDFA24BF8C2}"/>
+                <a16:creationId xmlns:a16="http://schemas.microsoft.com/office/drawing/2014/main" id="{692CB88B-26EC-4AD0-BAFA-CB670F9FF2E2}"/>
               </a:ext>
             </a:extLst>
           </p:cNvPr>
@@ -5963,7 +5968,7 @@
           <p:cNvPr id="7" name="">
             <a:extLst xmlns:a="http://schemas.openxmlformats.org/drawingml/2006/main">
               <a:ext uri="{FF2B5EF4-FFF2-40B4-BE49-F238E27FC236}">
-                <a16:creationId xmlns:a16="http://schemas.microsoft.com/office/drawing/2014/main" id="{AB166912-B3FA-485F-85F6-9187A48BC734}"/>
+                <a16:creationId xmlns:a16="http://schemas.microsoft.com/office/drawing/2014/main" id="{EB4C16F5-0B5D-49C1-9EC6-7476A982D203}"/>
               </a:ext>
             </a:extLst>
           </p:cNvPr>
@@ -6030,7 +6035,7 @@
           <p:cNvPr id="8" name="">
             <a:extLst xmlns:a="http://schemas.openxmlformats.org/drawingml/2006/main">
               <a:ext uri="{FF2B5EF4-FFF2-40B4-BE49-F238E27FC236}">
-                <a16:creationId xmlns:a16="http://schemas.microsoft.com/office/drawing/2014/main" id="{5CE23B28-612A-4B97-B4AA-15C0ADB97876}"/>
+                <a16:creationId xmlns:a16="http://schemas.microsoft.com/office/drawing/2014/main" id="{F5E5B23B-9916-4E8D-9843-A0259640B12E}"/>
               </a:ext>
             </a:extLst>
           </p:cNvPr>
@@ -6080,7 +6085,7 @@
           <p:cNvPr id="9" name="">
             <a:extLst xmlns:a="http://schemas.openxmlformats.org/drawingml/2006/main">
               <a:ext uri="{FF2B5EF4-FFF2-40B4-BE49-F238E27FC236}">
-                <a16:creationId xmlns:a16="http://schemas.microsoft.com/office/drawing/2014/main" id="{6C039FF1-5160-490A-B103-8AD45E04CD30}"/>
+                <a16:creationId xmlns:a16="http://schemas.microsoft.com/office/drawing/2014/main" id="{82D3EA5A-DD27-4A2F-B366-FCCF188D0B4B}"/>
               </a:ext>
             </a:extLst>
           </p:cNvPr>
@@ -6115,7 +6120,7 @@
           <p:cNvPr id="10" name="">
             <a:extLst xmlns:a="http://schemas.openxmlformats.org/drawingml/2006/main">
               <a:ext uri="{FF2B5EF4-FFF2-40B4-BE49-F238E27FC236}">
-                <a16:creationId xmlns:a16="http://schemas.microsoft.com/office/drawing/2014/main" id="{3A00ED5F-8A3D-456E-8D8F-F22B2BA98435}"/>
+                <a16:creationId xmlns:a16="http://schemas.microsoft.com/office/drawing/2014/main" id="{D0C8E1C4-3538-47AE-BB0A-DE056346D7BC}"/>
               </a:ext>
             </a:extLst>
           </p:cNvPr>
@@ -6182,7 +6187,7 @@
           <p:cNvPr id="11" name="">
             <a:extLst xmlns:a="http://schemas.openxmlformats.org/drawingml/2006/main">
               <a:ext uri="{FF2B5EF4-FFF2-40B4-BE49-F238E27FC236}">
-                <a16:creationId xmlns:a16="http://schemas.microsoft.com/office/drawing/2014/main" id="{62B0B214-E01D-4FC3-87E2-CD60B6D88A2A}"/>
+                <a16:creationId xmlns:a16="http://schemas.microsoft.com/office/drawing/2014/main" id="{63A4743A-4513-4439-B640-682651DA02D6}"/>
               </a:ext>
             </a:extLst>
           </p:cNvPr>
@@ -6232,7 +6237,7 @@
           <p:cNvPr id="12" name="">
             <a:extLst xmlns:a="http://schemas.openxmlformats.org/drawingml/2006/main">
               <a:ext uri="{FF2B5EF4-FFF2-40B4-BE49-F238E27FC236}">
-                <a16:creationId xmlns:a16="http://schemas.microsoft.com/office/drawing/2014/main" id="{02A621AD-77DE-4207-A5B2-FC6900DC5B68}"/>
+                <a16:creationId xmlns:a16="http://schemas.microsoft.com/office/drawing/2014/main" id="{08048A5B-619F-47D3-A115-91629D1A45CA}"/>
               </a:ext>
             </a:extLst>
           </p:cNvPr>
@@ -6267,7 +6272,7 @@
           <p:cNvPr id="13" name="">
             <a:extLst xmlns:a="http://schemas.openxmlformats.org/drawingml/2006/main">
               <a:ext uri="{FF2B5EF4-FFF2-40B4-BE49-F238E27FC236}">
-                <a16:creationId xmlns:a16="http://schemas.microsoft.com/office/drawing/2014/main" id="{BFA7153B-1621-411E-8EC6-EB84C6AA76FA}"/>
+                <a16:creationId xmlns:a16="http://schemas.microsoft.com/office/drawing/2014/main" id="{ABCB61B2-1A7B-4D7A-8B12-21E5CB1179A0}"/>
               </a:ext>
             </a:extLst>
           </p:cNvPr>
@@ -6334,7 +6339,7 @@
           <p:cNvPr id="14" name="">
             <a:extLst xmlns:a="http://schemas.openxmlformats.org/drawingml/2006/main">
               <a:ext uri="{FF2B5EF4-FFF2-40B4-BE49-F238E27FC236}">
-                <a16:creationId xmlns:a16="http://schemas.microsoft.com/office/drawing/2014/main" id="{1CE69650-A07F-42A3-AAB3-E7476934334C}"/>
+                <a16:creationId xmlns:a16="http://schemas.microsoft.com/office/drawing/2014/main" id="{219E9940-5C9E-4EC6-A69A-827CE649F03D}"/>
               </a:ext>
             </a:extLst>
           </p:cNvPr>
@@ -6384,7 +6389,7 @@
           <p:cNvPr id="15" name="">
             <a:extLst xmlns:a="http://schemas.openxmlformats.org/drawingml/2006/main">
               <a:ext uri="{FF2B5EF4-FFF2-40B4-BE49-F238E27FC236}">
-                <a16:creationId xmlns:a16="http://schemas.microsoft.com/office/drawing/2014/main" id="{769B8775-7239-468C-BC8C-30EA013C673A}"/>
+                <a16:creationId xmlns:a16="http://schemas.microsoft.com/office/drawing/2014/main" id="{BDA228D9-52A0-48FF-825A-DAE3A8B68D5A}"/>
               </a:ext>
             </a:extLst>
           </p:cNvPr>
@@ -6434,7 +6439,7 @@
           <p:cNvPr id="16" name="">
             <a:extLst xmlns:a="http://schemas.openxmlformats.org/drawingml/2006/main">
               <a:ext uri="{FF2B5EF4-FFF2-40B4-BE49-F238E27FC236}">
-                <a16:creationId xmlns:a16="http://schemas.microsoft.com/office/drawing/2014/main" id="{D4A4DCE5-1AA5-4946-81B6-821CBA8086F8}"/>
+                <a16:creationId xmlns:a16="http://schemas.microsoft.com/office/drawing/2014/main" id="{949173BC-1186-4C49-BB7D-CEBE71A14DDB}"/>
               </a:ext>
             </a:extLst>
           </p:cNvPr>
@@ -6484,7 +6489,7 @@
           <p:cNvPr id="17" name="">
             <a:extLst xmlns:a="http://schemas.openxmlformats.org/drawingml/2006/main">
               <a:ext uri="{FF2B5EF4-FFF2-40B4-BE49-F238E27FC236}">
-                <a16:creationId xmlns:a16="http://schemas.microsoft.com/office/drawing/2014/main" id="{9A0DBE37-6841-4BE1-A936-542800883184}"/>
+                <a16:creationId xmlns:a16="http://schemas.microsoft.com/office/drawing/2014/main" id="{5A4BF536-1780-484A-A81D-22D33B90F6BB}"/>
               </a:ext>
             </a:extLst>
           </p:cNvPr>
@@ -6534,7 +6539,7 @@
           <p:cNvPr id="18" name="">
             <a:extLst xmlns:a="http://schemas.openxmlformats.org/drawingml/2006/main">
               <a:ext uri="{FF2B5EF4-FFF2-40B4-BE49-F238E27FC236}">
-                <a16:creationId xmlns:a16="http://schemas.microsoft.com/office/drawing/2014/main" id="{20166A04-AED4-47B7-8CDA-261624265F1F}"/>
+                <a16:creationId xmlns:a16="http://schemas.microsoft.com/office/drawing/2014/main" id="{40CBD32F-9C76-4090-967E-7EDBEF52065A}"/>
               </a:ext>
             </a:extLst>
           </p:cNvPr>
@@ -6584,7 +6589,7 @@
           <p:cNvPr id="19" name="">
             <a:extLst xmlns:a="http://schemas.openxmlformats.org/drawingml/2006/main">
               <a:ext uri="{FF2B5EF4-FFF2-40B4-BE49-F238E27FC236}">
-                <a16:creationId xmlns:a16="http://schemas.microsoft.com/office/drawing/2014/main" id="{099EBF12-1743-4795-902E-D1BFDE271BC4}"/>
+                <a16:creationId xmlns:a16="http://schemas.microsoft.com/office/drawing/2014/main" id="{E9EA22CF-9461-43DA-91A6-B06223394848}"/>
               </a:ext>
             </a:extLst>
           </p:cNvPr>
@@ -6634,7 +6639,7 @@
           <p:cNvPr id="20" name="">
             <a:extLst xmlns:a="http://schemas.openxmlformats.org/drawingml/2006/main">
               <a:ext uri="{FF2B5EF4-FFF2-40B4-BE49-F238E27FC236}">
-                <a16:creationId xmlns:a16="http://schemas.microsoft.com/office/drawing/2014/main" id="{981A80A2-C487-4B63-9C4D-7D904D482F79}"/>
+                <a16:creationId xmlns:a16="http://schemas.microsoft.com/office/drawing/2014/main" id="{006F0B6F-A4AC-4B8C-BE59-4AC5DB49798F}"/>
               </a:ext>
             </a:extLst>
           </p:cNvPr>
@@ -6684,7 +6689,7 @@
           <p:cNvPr id="21" name="">
             <a:extLst xmlns:a="http://schemas.openxmlformats.org/drawingml/2006/main">
               <a:ext uri="{FF2B5EF4-FFF2-40B4-BE49-F238E27FC236}">
-                <a16:creationId xmlns:a16="http://schemas.microsoft.com/office/drawing/2014/main" id="{D056856B-4BFC-4185-9753-5BAF5B6C2901}"/>
+                <a16:creationId xmlns:a16="http://schemas.microsoft.com/office/drawing/2014/main" id="{E3C72460-7EC8-44DB-941A-68EADBE160B2}"/>
               </a:ext>
             </a:extLst>
           </p:cNvPr>
@@ -6732,7 +6737,7 @@
     </p:spTree>
     <p:extLst>
       <p:ext uri="{BB962C8B-B14F-4D97-AF65-F5344CB8AC3E}">
-        <p14:creationId xmlns:p14="http://schemas.microsoft.com/office/powerpoint/2010/main" val="947024270"/>
+        <p14:creationId xmlns:p14="http://schemas.microsoft.com/office/powerpoint/2010/main" val="876670144"/>
       </p:ext>
     </p:extLst>
   </p:cSld>
@@ -6763,7 +6768,7 @@
           <p:cNvPr id="15" name="">
             <a:extLst xmlns:a="http://schemas.openxmlformats.org/drawingml/2006/main">
               <a:ext uri="{FF2B5EF4-FFF2-40B4-BE49-F238E27FC236}">
-                <a16:creationId xmlns:a16="http://schemas.microsoft.com/office/drawing/2014/main" id="{524C366F-CE34-4B3F-BC1B-846FBF9F6DAF}"/>
+                <a16:creationId xmlns:a16="http://schemas.microsoft.com/office/drawing/2014/main" id="{F4B4F162-5588-4747-8482-69912614F0A4}"/>
               </a:ext>
             </a:extLst>
           </p:cNvPr>
@@ -6813,7 +6818,7 @@
           <p:cNvPr id="2" name="">
             <a:extLst xmlns:a="http://schemas.openxmlformats.org/drawingml/2006/main">
               <a:ext uri="{FF2B5EF4-FFF2-40B4-BE49-F238E27FC236}">
-                <a16:creationId xmlns:a16="http://schemas.microsoft.com/office/drawing/2014/main" id="{72D34990-8603-47AD-B834-F6FFF0E85801}"/>
+                <a16:creationId xmlns:a16="http://schemas.microsoft.com/office/drawing/2014/main" id="{1D37321D-0146-43BC-9810-69227E71B285}"/>
               </a:ext>
             </a:extLst>
           </p:cNvPr>
@@ -6863,7 +6868,7 @@
           <p:cNvPr id="3" name="">
             <a:extLst xmlns:a="http://schemas.openxmlformats.org/drawingml/2006/main">
               <a:ext uri="{FF2B5EF4-FFF2-40B4-BE49-F238E27FC236}">
-                <a16:creationId xmlns:a16="http://schemas.microsoft.com/office/drawing/2014/main" id="{BF82FFEC-E09D-4E79-A7FE-FB0F268B5E6C}"/>
+                <a16:creationId xmlns:a16="http://schemas.microsoft.com/office/drawing/2014/main" id="{6B1B5FF6-3F06-48E8-BDA3-7AD4C68441E3}"/>
               </a:ext>
             </a:extLst>
           </p:cNvPr>
@@ -6913,7 +6918,7 @@
           <p:cNvPr id="4" name="">
             <a:extLst xmlns:a="http://schemas.openxmlformats.org/drawingml/2006/main">
               <a:ext uri="{FF2B5EF4-FFF2-40B4-BE49-F238E27FC236}">
-                <a16:creationId xmlns:a16="http://schemas.microsoft.com/office/drawing/2014/main" id="{7FB36E10-396B-4B33-84B3-8908C105A955}"/>
+                <a16:creationId xmlns:a16="http://schemas.microsoft.com/office/drawing/2014/main" id="{BD10B93F-C08B-4DFE-A887-A602EB3BF485}"/>
               </a:ext>
             </a:extLst>
           </p:cNvPr>
@@ -6963,7 +6968,7 @@
           <p:cNvPr id="5" name="">
             <a:extLst xmlns:a="http://schemas.openxmlformats.org/drawingml/2006/main">
               <a:ext uri="{FF2B5EF4-FFF2-40B4-BE49-F238E27FC236}">
-                <a16:creationId xmlns:a16="http://schemas.microsoft.com/office/drawing/2014/main" id="{A5AA46D2-C52D-48F8-A886-934E031EA098}"/>
+                <a16:creationId xmlns:a16="http://schemas.microsoft.com/office/drawing/2014/main" id="{2F09F9F7-049B-42FD-939A-D3E36FF201D5}"/>
               </a:ext>
             </a:extLst>
           </p:cNvPr>
@@ -7013,7 +7018,7 @@
           <p:cNvPr id="6" name="">
             <a:extLst xmlns:a="http://schemas.openxmlformats.org/drawingml/2006/main">
               <a:ext uri="{FF2B5EF4-FFF2-40B4-BE49-F238E27FC236}">
-                <a16:creationId xmlns:a16="http://schemas.microsoft.com/office/drawing/2014/main" id="{6357B22D-0BEA-4F41-91F6-BA4715F638F4}"/>
+                <a16:creationId xmlns:a16="http://schemas.microsoft.com/office/drawing/2014/main" id="{22A3F2E9-CCFE-458D-9EA0-BC00465BE40E}"/>
               </a:ext>
             </a:extLst>
           </p:cNvPr>
@@ -7063,7 +7068,7 @@
           <p:cNvPr id="7" name="">
             <a:extLst xmlns:a="http://schemas.openxmlformats.org/drawingml/2006/main">
               <a:ext uri="{FF2B5EF4-FFF2-40B4-BE49-F238E27FC236}">
-                <a16:creationId xmlns:a16="http://schemas.microsoft.com/office/drawing/2014/main" id="{373F2FF0-CF6D-4230-8C8A-FAEFFBC8A25D}"/>
+                <a16:creationId xmlns:a16="http://schemas.microsoft.com/office/drawing/2014/main" id="{A3EA0753-2EA4-4627-A5B2-C5D4F0CBA521}"/>
               </a:ext>
             </a:extLst>
           </p:cNvPr>
@@ -7113,7 +7118,7 @@
           <p:cNvPr id="8" name="">
             <a:extLst xmlns:a="http://schemas.openxmlformats.org/drawingml/2006/main">
               <a:ext uri="{FF2B5EF4-FFF2-40B4-BE49-F238E27FC236}">
-                <a16:creationId xmlns:a16="http://schemas.microsoft.com/office/drawing/2014/main" id="{C4F57CD4-10E9-429F-AAA0-5A533F4D1EA6}"/>
+                <a16:creationId xmlns:a16="http://schemas.microsoft.com/office/drawing/2014/main" id="{A347428D-9091-456E-85B7-7D321637F945}"/>
               </a:ext>
             </a:extLst>
           </p:cNvPr>
@@ -7163,7 +7168,7 @@
           <p:cNvPr id="9" name="">
             <a:extLst xmlns:a="http://schemas.openxmlformats.org/drawingml/2006/main">
               <a:ext uri="{FF2B5EF4-FFF2-40B4-BE49-F238E27FC236}">
-                <a16:creationId xmlns:a16="http://schemas.microsoft.com/office/drawing/2014/main" id="{563921B5-8403-478E-BE4B-4629E8C858BB}"/>
+                <a16:creationId xmlns:a16="http://schemas.microsoft.com/office/drawing/2014/main" id="{DCCE03A7-0BB6-42F1-BDEA-5DA59B6FAC18}"/>
               </a:ext>
             </a:extLst>
           </p:cNvPr>
@@ -7213,7 +7218,7 @@
           <p:cNvPr id="10" name="">
             <a:extLst xmlns:a="http://schemas.openxmlformats.org/drawingml/2006/main">
               <a:ext uri="{FF2B5EF4-FFF2-40B4-BE49-F238E27FC236}">
-                <a16:creationId xmlns:a16="http://schemas.microsoft.com/office/drawing/2014/main" id="{3810DEF7-2B6A-4E7C-809C-432AAAA7813C}"/>
+                <a16:creationId xmlns:a16="http://schemas.microsoft.com/office/drawing/2014/main" id="{A6AC3CFC-2A88-437A-8C51-013816955484}"/>
               </a:ext>
             </a:extLst>
           </p:cNvPr>
@@ -7263,7 +7268,7 @@
           <p:cNvPr id="11" name="">
             <a:extLst xmlns:a="http://schemas.openxmlformats.org/drawingml/2006/main">
               <a:ext uri="{FF2B5EF4-FFF2-40B4-BE49-F238E27FC236}">
-                <a16:creationId xmlns:a16="http://schemas.microsoft.com/office/drawing/2014/main" id="{242C3F51-AA1F-493A-9044-FAA2B74E2689}"/>
+                <a16:creationId xmlns:a16="http://schemas.microsoft.com/office/drawing/2014/main" id="{B8A0E14F-7B79-4746-9CFE-925D40906446}"/>
               </a:ext>
             </a:extLst>
           </p:cNvPr>
@@ -7294,7 +7299,7 @@
           <p:cNvPr id="12" name="">
             <a:extLst xmlns:a="http://schemas.openxmlformats.org/drawingml/2006/main">
               <a:ext uri="{FF2B5EF4-FFF2-40B4-BE49-F238E27FC236}">
-                <a16:creationId xmlns:a16="http://schemas.microsoft.com/office/drawing/2014/main" id="{732F0D12-41B6-4C47-904A-2FD2F5A03FD1}"/>
+                <a16:creationId xmlns:a16="http://schemas.microsoft.com/office/drawing/2014/main" id="{B4BBA6D2-CA23-4266-9A78-3BC96E4E8E21}"/>
               </a:ext>
             </a:extLst>
           </p:cNvPr>
@@ -7344,7 +7349,7 @@
           <p:cNvPr id="13" name="">
             <a:extLst xmlns:a="http://schemas.openxmlformats.org/drawingml/2006/main">
               <a:ext uri="{FF2B5EF4-FFF2-40B4-BE49-F238E27FC236}">
-                <a16:creationId xmlns:a16="http://schemas.microsoft.com/office/drawing/2014/main" id="{CEBFF4B2-7058-45AD-898D-581F11F2FCCC}"/>
+                <a16:creationId xmlns:a16="http://schemas.microsoft.com/office/drawing/2014/main" id="{8A998F70-F113-477D-A5E9-5F2007229FB3}"/>
               </a:ext>
             </a:extLst>
           </p:cNvPr>
@@ -7394,7 +7399,7 @@
           <p:cNvPr id="14" name="">
             <a:extLst xmlns:a="http://schemas.openxmlformats.org/drawingml/2006/main">
               <a:ext uri="{FF2B5EF4-FFF2-40B4-BE49-F238E27FC236}">
-                <a16:creationId xmlns:a16="http://schemas.microsoft.com/office/drawing/2014/main" id="{C9244580-1673-41A2-96EA-656ED2EAFACE}"/>
+                <a16:creationId xmlns:a16="http://schemas.microsoft.com/office/drawing/2014/main" id="{09B5FA8D-3BCA-4566-BAB7-B720F8DA3FDF}"/>
               </a:ext>
             </a:extLst>
           </p:cNvPr>
@@ -7442,7 +7447,7 @@
     </p:spTree>
     <p:extLst>
       <p:ext uri="{BB962C8B-B14F-4D97-AF65-F5344CB8AC3E}">
-        <p14:creationId xmlns:p14="http://schemas.microsoft.com/office/powerpoint/2010/main" val="707378012"/>
+        <p14:creationId xmlns:p14="http://schemas.microsoft.com/office/powerpoint/2010/main" val="427654349"/>
       </p:ext>
     </p:extLst>
   </p:cSld>
@@ -7470,10 +7475,10 @@
       </p:grpSpPr>
       <p:sp>
         <p:nvSpPr>
-          <p:cNvPr id="6" name="">
-            <a:extLst xmlns:a="http://schemas.openxmlformats.org/drawingml/2006/main">
-              <a:ext uri="{FF2B5EF4-FFF2-40B4-BE49-F238E27FC236}">
-                <a16:creationId xmlns:a16="http://schemas.microsoft.com/office/drawing/2014/main" id="{B5CB5E58-3C5B-472C-9ACA-A57E00A07C2D}"/>
+          <p:cNvPr id="7" name="">
+            <a:extLst xmlns:a="http://schemas.openxmlformats.org/drawingml/2006/main">
+              <a:ext uri="{FF2B5EF4-FFF2-40B4-BE49-F238E27FC236}">
+                <a16:creationId xmlns:a16="http://schemas.microsoft.com/office/drawing/2014/main" id="{A09C2A0C-D04D-48FD-A7AA-AE83D36D0BDE}"/>
               </a:ext>
             </a:extLst>
           </p:cNvPr>
@@ -7523,7 +7528,7 @@
           <p:cNvPr id="2" name="">
             <a:extLst xmlns:a="http://schemas.openxmlformats.org/drawingml/2006/main">
               <a:ext uri="{FF2B5EF4-FFF2-40B4-BE49-F238E27FC236}">
-                <a16:creationId xmlns:a16="http://schemas.microsoft.com/office/drawing/2014/main" id="{4C9280EB-B5F4-440A-A393-702204B0EBC1}"/>
+                <a16:creationId xmlns:a16="http://schemas.microsoft.com/office/drawing/2014/main" id="{8F04FD3D-74BF-42A8-9A7C-6899816AE0AC}"/>
               </a:ext>
             </a:extLst>
           </p:cNvPr>
@@ -7563,27 +7568,27 @@
                   <a:srgbClr val="64748B"/>
                 </a:solidFill>
               </a:rPr>
-              <a:t>The timeline shows where replay spends time before the first useful token.</a:t>
+              <a:t>Each row is one tool-gap replay; the replay path shows where time goes before the first token.</a:t>
             </a:r>
           </a:p>
         </p:txBody>
       </p:sp>
       <p:pic>
         <p:nvPicPr>
-          <p:cNvPr id="8" name=""/>
+          <p:cNvPr id="9" name=""/>
           <p:cNvPicPr>
             <a:picLocks xmlns:a="http://schemas.openxmlformats.org/drawingml/2006/main" noChangeAspect="1"/>
           </p:cNvPicPr>
           <p:nvPr/>
         </p:nvPicPr>
         <p:blipFill>
-          <a:blip xmlns:r="http://schemas.openxmlformats.org/officeDocument/2006/relationships" xmlns:a="http://schemas.openxmlformats.org/drawingml/2006/main" r:embed="R4d822850def849d2"/>
+          <a:blip xmlns:r="http://schemas.openxmlformats.org/officeDocument/2006/relationships" xmlns:a="http://schemas.openxmlformats.org/drawingml/2006/main" r:embed="R4150a337e9ec487f"/>
           <a:stretch xmlns:a="http://schemas.openxmlformats.org/drawingml/2006/main"/>
         </p:blipFill>
         <p:spPr>
           <a:xfrm xmlns:a="http://schemas.openxmlformats.org/drawingml/2006/main">
-            <a:off x="468276" y="1295400"/>
-            <a:ext cx="11255448" cy="4629150"/>
+            <a:off x="1024101" y="1295400"/>
+            <a:ext cx="10143798" cy="4171950"/>
           </a:xfrm>
           <a:prstGeom xmlns:a="http://schemas.openxmlformats.org/drawingml/2006/main" prst="rect">
             <a:avLst/>
@@ -7595,7 +7600,57 @@
           <p:cNvPr id="4" name="">
             <a:extLst xmlns:a="http://schemas.openxmlformats.org/drawingml/2006/main">
               <a:ext uri="{FF2B5EF4-FFF2-40B4-BE49-F238E27FC236}">
-                <a16:creationId xmlns:a16="http://schemas.microsoft.com/office/drawing/2014/main" id="{79FC21EA-CBAC-40DB-A312-903064AD1514}"/>
+                <a16:creationId xmlns:a16="http://schemas.microsoft.com/office/drawing/2014/main" id="{4E637304-7CF4-413F-838E-706688D7508E}"/>
+              </a:ext>
+            </a:extLst>
+          </p:cNvPr>
+          <p:cNvSpPr>
+            <a:spLocks xmlns:a="http://schemas.openxmlformats.org/drawingml/2006/main" noGrp="1"/>
+          </p:cNvSpPr>
+          <p:nvPr/>
+        </p:nvSpPr>
+        <p:spPr>
+          <a:xfrm xmlns:a="http://schemas.openxmlformats.org/drawingml/2006/main">
+            <a:off x="952500" y="5619750"/>
+            <a:ext cx="10287000" cy="266700"/>
+          </a:xfrm>
+          <a:prstGeom xmlns:a="http://schemas.openxmlformats.org/drawingml/2006/main" prst="rect">
+            <a:avLst/>
+          </a:prstGeom>
+          <a:noFill xmlns:a="http://schemas.openxmlformats.org/drawingml/2006/main"/>
+          <a:ln xmlns:a="http://schemas.openxmlformats.org/drawingml/2006/main" w="0">
+            <a:noFill/>
+            <a:prstDash val="solid"/>
+          </a:ln>
+        </p:spPr>
+        <p:txBody>
+          <a:bodyPr xmlns:a="http://schemas.openxmlformats.org/drawingml/2006/main" anchor="t"/>
+          <a:lstStyle xmlns:a="http://schemas.openxmlformats.org/drawingml/2006/main"/>
+          <a:p xmlns:a="http://schemas.openxmlformats.org/drawingml/2006/main">
+            <a:pPr algn="ctr">
+              <a:defRPr sz="1725" b="1">
+                <a:solidFill>
+                  <a:srgbClr val="64748B"/>
+                </a:solidFill>
+              </a:defRPr>
+            </a:pPr>
+            <a:r>
+              <a:rPr sz="1725" b="1">
+                <a:solidFill>
+                  <a:srgbClr val="64748B"/>
+                </a:solidFill>
+              </a:rPr>
+              <a:t>... more replay gaps observed in the full report</a:t>
+            </a:r>
+          </a:p>
+        </p:txBody>
+      </p:sp>
+      <p:sp>
+        <p:nvSpPr>
+          <p:cNvPr id="5" name="">
+            <a:extLst xmlns:a="http://schemas.openxmlformats.org/drawingml/2006/main">
+              <a:ext uri="{FF2B5EF4-FFF2-40B4-BE49-F238E27FC236}">
+                <a16:creationId xmlns:a16="http://schemas.microsoft.com/office/drawing/2014/main" id="{B03724F4-B3F8-4BC8-83FA-CA2CB8F7709E}"/>
               </a:ext>
             </a:extLst>
           </p:cNvPr>
@@ -7642,10 +7697,10 @@
       </p:sp>
       <p:sp>
         <p:nvSpPr>
-          <p:cNvPr id="5" name="">
-            <a:extLst xmlns:a="http://schemas.openxmlformats.org/drawingml/2006/main">
-              <a:ext uri="{FF2B5EF4-FFF2-40B4-BE49-F238E27FC236}">
-                <a16:creationId xmlns:a16="http://schemas.microsoft.com/office/drawing/2014/main" id="{A24A752F-DCA2-4B27-A6BA-82ED24E2307E}"/>
+          <p:cNvPr id="6" name="">
+            <a:extLst xmlns:a="http://schemas.openxmlformats.org/drawingml/2006/main">
+              <a:ext uri="{FF2B5EF4-FFF2-40B4-BE49-F238E27FC236}">
+                <a16:creationId xmlns:a16="http://schemas.microsoft.com/office/drawing/2014/main" id="{EDC63988-5859-43FA-A553-4F1311019966}"/>
               </a:ext>
             </a:extLst>
           </p:cNvPr>
@@ -7693,7 +7748,7 @@
     </p:spTree>
     <p:extLst>
       <p:ext uri="{BB962C8B-B14F-4D97-AF65-F5344CB8AC3E}">
-        <p14:creationId xmlns:p14="http://schemas.microsoft.com/office/powerpoint/2010/main" val="1958997452"/>
+        <p14:creationId xmlns:p14="http://schemas.microsoft.com/office/powerpoint/2010/main" val="653779735"/>
       </p:ext>
     </p:extLst>
   </p:cSld>
@@ -7724,7 +7779,7 @@
           <p:cNvPr id="11" name="">
             <a:extLst xmlns:a="http://schemas.openxmlformats.org/drawingml/2006/main">
               <a:ext uri="{FF2B5EF4-FFF2-40B4-BE49-F238E27FC236}">
-                <a16:creationId xmlns:a16="http://schemas.microsoft.com/office/drawing/2014/main" id="{D07AE9E6-FCF5-49DE-99D6-31697F858267}"/>
+                <a16:creationId xmlns:a16="http://schemas.microsoft.com/office/drawing/2014/main" id="{FB11BD36-A475-4CAF-B2DD-DEFFC67DBDF6}"/>
               </a:ext>
             </a:extLst>
           </p:cNvPr>
@@ -7774,7 +7829,7 @@
           <p:cNvPr id="2" name="">
             <a:extLst xmlns:a="http://schemas.openxmlformats.org/drawingml/2006/main">
               <a:ext uri="{FF2B5EF4-FFF2-40B4-BE49-F238E27FC236}">
-                <a16:creationId xmlns:a16="http://schemas.microsoft.com/office/drawing/2014/main" id="{7B253396-F255-40C2-A080-F191CE4428DF}"/>
+                <a16:creationId xmlns:a16="http://schemas.microsoft.com/office/drawing/2014/main" id="{AE5E1168-66AE-4BDD-92C9-C454CA9E5B7E}"/>
               </a:ext>
             </a:extLst>
           </p:cNvPr>
@@ -7828,7 +7883,7 @@
           <p:nvPr/>
         </p:nvPicPr>
         <p:blipFill>
-          <a:blip xmlns:r="http://schemas.openxmlformats.org/officeDocument/2006/relationships" xmlns:a="http://schemas.openxmlformats.org/drawingml/2006/main" r:embed="R3816c416c0ff44a5"/>
+          <a:blip xmlns:r="http://schemas.openxmlformats.org/officeDocument/2006/relationships" xmlns:a="http://schemas.openxmlformats.org/drawingml/2006/main" r:embed="R7d60b54b0d0747a6"/>
           <a:stretch xmlns:a="http://schemas.openxmlformats.org/drawingml/2006/main"/>
         </p:blipFill>
         <p:spPr>
@@ -7846,7 +7901,7 @@
           <p:cNvPr id="4" name="">
             <a:extLst xmlns:a="http://schemas.openxmlformats.org/drawingml/2006/main">
               <a:ext uri="{FF2B5EF4-FFF2-40B4-BE49-F238E27FC236}">
-                <a16:creationId xmlns:a16="http://schemas.microsoft.com/office/drawing/2014/main" id="{62337011-70F9-4A83-A098-84C858B104AF}"/>
+                <a16:creationId xmlns:a16="http://schemas.microsoft.com/office/drawing/2014/main" id="{4ADED076-709E-4095-8904-CF0D751BE6F5}"/>
               </a:ext>
             </a:extLst>
           </p:cNvPr>
@@ -7896,7 +7951,7 @@
           <p:cNvPr id="5" name="">
             <a:extLst xmlns:a="http://schemas.openxmlformats.org/drawingml/2006/main">
               <a:ext uri="{FF2B5EF4-FFF2-40B4-BE49-F238E27FC236}">
-                <a16:creationId xmlns:a16="http://schemas.microsoft.com/office/drawing/2014/main" id="{203A934D-CF43-4741-89AF-82B72C328D51}"/>
+                <a16:creationId xmlns:a16="http://schemas.microsoft.com/office/drawing/2014/main" id="{C646962C-FF02-4B20-B553-C1ED9D25CD09}"/>
               </a:ext>
             </a:extLst>
           </p:cNvPr>
@@ -7946,7 +8001,7 @@
           <p:cNvPr id="6" name="">
             <a:extLst xmlns:a="http://schemas.openxmlformats.org/drawingml/2006/main">
               <a:ext uri="{FF2B5EF4-FFF2-40B4-BE49-F238E27FC236}">
-                <a16:creationId xmlns:a16="http://schemas.microsoft.com/office/drawing/2014/main" id="{A379AC97-7B92-4FD1-BDDA-D28DE6C322F1}"/>
+                <a16:creationId xmlns:a16="http://schemas.microsoft.com/office/drawing/2014/main" id="{909897E7-54F6-4416-87F1-064332E448EE}"/>
               </a:ext>
             </a:extLst>
           </p:cNvPr>
@@ -7996,7 +8051,7 @@
           <p:cNvPr id="7" name="">
             <a:extLst xmlns:a="http://schemas.openxmlformats.org/drawingml/2006/main">
               <a:ext uri="{FF2B5EF4-FFF2-40B4-BE49-F238E27FC236}">
-                <a16:creationId xmlns:a16="http://schemas.microsoft.com/office/drawing/2014/main" id="{DA8DACC9-3D78-42CF-BBB2-B3337AEF9F23}"/>
+                <a16:creationId xmlns:a16="http://schemas.microsoft.com/office/drawing/2014/main" id="{47BB8C4A-89D1-4CDA-B399-30109A90E2C2}"/>
               </a:ext>
             </a:extLst>
           </p:cNvPr>
@@ -8046,7 +8101,7 @@
           <p:cNvPr id="8" name="">
             <a:extLst xmlns:a="http://schemas.openxmlformats.org/drawingml/2006/main">
               <a:ext uri="{FF2B5EF4-FFF2-40B4-BE49-F238E27FC236}">
-                <a16:creationId xmlns:a16="http://schemas.microsoft.com/office/drawing/2014/main" id="{9ACFAB0A-D81C-4078-8027-E6DB1E3255A3}"/>
+                <a16:creationId xmlns:a16="http://schemas.microsoft.com/office/drawing/2014/main" id="{774D1A36-1F59-4A90-94E9-98443A1E5A1D}"/>
               </a:ext>
             </a:extLst>
           </p:cNvPr>
@@ -8096,7 +8151,7 @@
           <p:cNvPr id="9" name="">
             <a:extLst xmlns:a="http://schemas.openxmlformats.org/drawingml/2006/main">
               <a:ext uri="{FF2B5EF4-FFF2-40B4-BE49-F238E27FC236}">
-                <a16:creationId xmlns:a16="http://schemas.microsoft.com/office/drawing/2014/main" id="{D43398B7-02AB-420B-8AA7-369313BE8BA5}"/>
+                <a16:creationId xmlns:a16="http://schemas.microsoft.com/office/drawing/2014/main" id="{F2249596-BDD9-4FA5-90DF-D3F0DD443725}"/>
               </a:ext>
             </a:extLst>
           </p:cNvPr>
@@ -8146,7 +8201,7 @@
           <p:cNvPr id="10" name="">
             <a:extLst xmlns:a="http://schemas.openxmlformats.org/drawingml/2006/main">
               <a:ext uri="{FF2B5EF4-FFF2-40B4-BE49-F238E27FC236}">
-                <a16:creationId xmlns:a16="http://schemas.microsoft.com/office/drawing/2014/main" id="{268EEEF1-9E52-4174-A570-532EA29BC559}"/>
+                <a16:creationId xmlns:a16="http://schemas.microsoft.com/office/drawing/2014/main" id="{8625E1F9-F113-42C8-A344-1865570C9E6B}"/>
               </a:ext>
             </a:extLst>
           </p:cNvPr>
@@ -8194,7 +8249,7 @@
     </p:spTree>
     <p:extLst>
       <p:ext uri="{BB962C8B-B14F-4D97-AF65-F5344CB8AC3E}">
-        <p14:creationId xmlns:p14="http://schemas.microsoft.com/office/powerpoint/2010/main" val="1775054189"/>
+        <p14:creationId xmlns:p14="http://schemas.microsoft.com/office/powerpoint/2010/main" val="512601409"/>
       </p:ext>
     </p:extLst>
   </p:cSld>
@@ -8225,7 +8280,7 @@
           <p:cNvPr id="13" name="">
             <a:extLst xmlns:a="http://schemas.openxmlformats.org/drawingml/2006/main">
               <a:ext uri="{FF2B5EF4-FFF2-40B4-BE49-F238E27FC236}">
-                <a16:creationId xmlns:a16="http://schemas.microsoft.com/office/drawing/2014/main" id="{4671A170-8086-4D84-91D4-3F93A38573E5}"/>
+                <a16:creationId xmlns:a16="http://schemas.microsoft.com/office/drawing/2014/main" id="{8192C54A-6898-4329-A70E-FC180B335280}"/>
               </a:ext>
             </a:extLst>
           </p:cNvPr>
@@ -8275,7 +8330,7 @@
           <p:cNvPr id="2" name="">
             <a:extLst xmlns:a="http://schemas.openxmlformats.org/drawingml/2006/main">
               <a:ext uri="{FF2B5EF4-FFF2-40B4-BE49-F238E27FC236}">
-                <a16:creationId xmlns:a16="http://schemas.microsoft.com/office/drawing/2014/main" id="{ACC0E34C-0653-49CD-9088-69E254D0C467}"/>
+                <a16:creationId xmlns:a16="http://schemas.microsoft.com/office/drawing/2014/main" id="{D791AAE8-0A74-4585-9813-9BB9E1D97AEE}"/>
               </a:ext>
             </a:extLst>
           </p:cNvPr>
@@ -8329,7 +8384,7 @@
           <p:nvPr/>
         </p:nvPicPr>
         <p:blipFill>
-          <a:blip xmlns:r="http://schemas.openxmlformats.org/officeDocument/2006/relationships" xmlns:a="http://schemas.openxmlformats.org/drawingml/2006/main" r:embed="R6d4e49561f5243b2"/>
+          <a:blip xmlns:r="http://schemas.openxmlformats.org/officeDocument/2006/relationships" xmlns:a="http://schemas.openxmlformats.org/drawingml/2006/main" r:embed="R67a320ad8d814d10"/>
           <a:stretch xmlns:a="http://schemas.openxmlformats.org/drawingml/2006/main"/>
         </p:blipFill>
         <p:spPr>
@@ -8347,7 +8402,7 @@
           <p:cNvPr id="4" name="">
             <a:extLst xmlns:a="http://schemas.openxmlformats.org/drawingml/2006/main">
               <a:ext uri="{FF2B5EF4-FFF2-40B4-BE49-F238E27FC236}">
-                <a16:creationId xmlns:a16="http://schemas.microsoft.com/office/drawing/2014/main" id="{5026578A-6205-45FD-8088-710F876E010A}"/>
+                <a16:creationId xmlns:a16="http://schemas.microsoft.com/office/drawing/2014/main" id="{CD2250E6-D362-42CA-BCBC-1F6135D12609}"/>
               </a:ext>
             </a:extLst>
           </p:cNvPr>
@@ -8397,7 +8452,7 @@
           <p:cNvPr id="5" name="">
             <a:extLst xmlns:a="http://schemas.openxmlformats.org/drawingml/2006/main">
               <a:ext uri="{FF2B5EF4-FFF2-40B4-BE49-F238E27FC236}">
-                <a16:creationId xmlns:a16="http://schemas.microsoft.com/office/drawing/2014/main" id="{8CFA7176-08C7-457C-99B0-0BC628541755}"/>
+                <a16:creationId xmlns:a16="http://schemas.microsoft.com/office/drawing/2014/main" id="{A706E735-D169-48C8-8E8C-F7609764713C}"/>
               </a:ext>
             </a:extLst>
           </p:cNvPr>
@@ -8447,7 +8502,7 @@
           <p:cNvPr id="6" name="">
             <a:extLst xmlns:a="http://schemas.openxmlformats.org/drawingml/2006/main">
               <a:ext uri="{FF2B5EF4-FFF2-40B4-BE49-F238E27FC236}">
-                <a16:creationId xmlns:a16="http://schemas.microsoft.com/office/drawing/2014/main" id="{5B711EB1-F118-4D44-97E6-B13DAA85E356}"/>
+                <a16:creationId xmlns:a16="http://schemas.microsoft.com/office/drawing/2014/main" id="{6EFA9B0D-FC89-42C6-B365-5C75450D1EE9}"/>
               </a:ext>
             </a:extLst>
           </p:cNvPr>
@@ -8497,7 +8552,7 @@
           <p:cNvPr id="7" name="">
             <a:extLst xmlns:a="http://schemas.openxmlformats.org/drawingml/2006/main">
               <a:ext uri="{FF2B5EF4-FFF2-40B4-BE49-F238E27FC236}">
-                <a16:creationId xmlns:a16="http://schemas.microsoft.com/office/drawing/2014/main" id="{AA77F951-DF73-4EAA-BB56-D7530FF70DB6}"/>
+                <a16:creationId xmlns:a16="http://schemas.microsoft.com/office/drawing/2014/main" id="{F81CC9E7-5855-46BD-867D-EF8737D81938}"/>
               </a:ext>
             </a:extLst>
           </p:cNvPr>
@@ -8547,7 +8602,7 @@
           <p:cNvPr id="8" name="">
             <a:extLst xmlns:a="http://schemas.openxmlformats.org/drawingml/2006/main">
               <a:ext uri="{FF2B5EF4-FFF2-40B4-BE49-F238E27FC236}">
-                <a16:creationId xmlns:a16="http://schemas.microsoft.com/office/drawing/2014/main" id="{E4C78BA4-AA07-491F-AEF3-D686E937DB57}"/>
+                <a16:creationId xmlns:a16="http://schemas.microsoft.com/office/drawing/2014/main" id="{6D695476-62F0-44D7-8C13-CE5F346D2882}"/>
               </a:ext>
             </a:extLst>
           </p:cNvPr>
@@ -8597,7 +8652,7 @@
           <p:cNvPr id="9" name="">
             <a:extLst xmlns:a="http://schemas.openxmlformats.org/drawingml/2006/main">
               <a:ext uri="{FF2B5EF4-FFF2-40B4-BE49-F238E27FC236}">
-                <a16:creationId xmlns:a16="http://schemas.microsoft.com/office/drawing/2014/main" id="{A312E9B3-2F65-4B10-AA52-1B8814544951}"/>
+                <a16:creationId xmlns:a16="http://schemas.microsoft.com/office/drawing/2014/main" id="{9FDF1C9B-C680-4C49-9EFB-C48530A3AE90}"/>
               </a:ext>
             </a:extLst>
           </p:cNvPr>
@@ -8647,7 +8702,7 @@
           <p:cNvPr id="10" name="">
             <a:extLst xmlns:a="http://schemas.openxmlformats.org/drawingml/2006/main">
               <a:ext uri="{FF2B5EF4-FFF2-40B4-BE49-F238E27FC236}">
-                <a16:creationId xmlns:a16="http://schemas.microsoft.com/office/drawing/2014/main" id="{AAB88C3C-53AF-498C-A113-1EBF66F3A819}"/>
+                <a16:creationId xmlns:a16="http://schemas.microsoft.com/office/drawing/2014/main" id="{7EE69568-803B-4B3B-93BA-61848935F87F}"/>
               </a:ext>
             </a:extLst>
           </p:cNvPr>
@@ -8697,7 +8752,7 @@
           <p:cNvPr id="11" name="">
             <a:extLst xmlns:a="http://schemas.openxmlformats.org/drawingml/2006/main">
               <a:ext uri="{FF2B5EF4-FFF2-40B4-BE49-F238E27FC236}">
-                <a16:creationId xmlns:a16="http://schemas.microsoft.com/office/drawing/2014/main" id="{95551343-5FE7-4061-92A0-68ABEDEBA00C}"/>
+                <a16:creationId xmlns:a16="http://schemas.microsoft.com/office/drawing/2014/main" id="{1D51C70C-ED81-4D60-9754-D8FBC4E00040}"/>
               </a:ext>
             </a:extLst>
           </p:cNvPr>
@@ -8747,7 +8802,7 @@
           <p:cNvPr id="12" name="">
             <a:extLst xmlns:a="http://schemas.openxmlformats.org/drawingml/2006/main">
               <a:ext uri="{FF2B5EF4-FFF2-40B4-BE49-F238E27FC236}">
-                <a16:creationId xmlns:a16="http://schemas.microsoft.com/office/drawing/2014/main" id="{D0315A68-5F28-40A5-B14F-58BF2D2C9489}"/>
+                <a16:creationId xmlns:a16="http://schemas.microsoft.com/office/drawing/2014/main" id="{2EDFE697-5744-404A-8834-B8171F56C19F}"/>
               </a:ext>
             </a:extLst>
           </p:cNvPr>
@@ -8795,7 +8850,7 @@
     </p:spTree>
     <p:extLst>
       <p:ext uri="{BB962C8B-B14F-4D97-AF65-F5344CB8AC3E}">
-        <p14:creationId xmlns:p14="http://schemas.microsoft.com/office/powerpoint/2010/main" val="1313210021"/>
+        <p14:creationId xmlns:p14="http://schemas.microsoft.com/office/powerpoint/2010/main" val="1383535827"/>
       </p:ext>
     </p:extLst>
   </p:cSld>
@@ -8826,7 +8881,7 @@
           <p:cNvPr id="9" name="">
             <a:extLst xmlns:a="http://schemas.openxmlformats.org/drawingml/2006/main">
               <a:ext uri="{FF2B5EF4-FFF2-40B4-BE49-F238E27FC236}">
-                <a16:creationId xmlns:a16="http://schemas.microsoft.com/office/drawing/2014/main" id="{638350B1-C921-4273-800F-FE317B8F737C}"/>
+                <a16:creationId xmlns:a16="http://schemas.microsoft.com/office/drawing/2014/main" id="{7797D703-B8FB-4033-9EC2-71E63ACD7D27}"/>
               </a:ext>
             </a:extLst>
           </p:cNvPr>
@@ -8876,7 +8931,7 @@
           <p:cNvPr id="2" name="">
             <a:extLst xmlns:a="http://schemas.openxmlformats.org/drawingml/2006/main">
               <a:ext uri="{FF2B5EF4-FFF2-40B4-BE49-F238E27FC236}">
-                <a16:creationId xmlns:a16="http://schemas.microsoft.com/office/drawing/2014/main" id="{0D47E67F-B8E7-402A-84D6-C1BD43A319F3}"/>
+                <a16:creationId xmlns:a16="http://schemas.microsoft.com/office/drawing/2014/main" id="{85344845-725D-4644-BE59-6C4D3E4D0641}"/>
               </a:ext>
             </a:extLst>
           </p:cNvPr>
@@ -8930,7 +8985,7 @@
           <p:nvPr/>
         </p:nvPicPr>
         <p:blipFill>
-          <a:blip xmlns:r="http://schemas.openxmlformats.org/officeDocument/2006/relationships" xmlns:a="http://schemas.openxmlformats.org/drawingml/2006/main" r:embed="Rdd230e803e5d48ff"/>
+          <a:blip xmlns:r="http://schemas.openxmlformats.org/officeDocument/2006/relationships" xmlns:a="http://schemas.openxmlformats.org/drawingml/2006/main" r:embed="Rf5da76c6325b4799"/>
           <a:stretch xmlns:a="http://schemas.openxmlformats.org/drawingml/2006/main"/>
         </p:blipFill>
         <p:spPr>
@@ -8948,7 +9003,7 @@
           <p:cNvPr id="4" name="">
             <a:extLst xmlns:a="http://schemas.openxmlformats.org/drawingml/2006/main">
               <a:ext uri="{FF2B5EF4-FFF2-40B4-BE49-F238E27FC236}">
-                <a16:creationId xmlns:a16="http://schemas.microsoft.com/office/drawing/2014/main" id="{6642B4B8-E3C2-4BD8-A14D-F83A0864728D}"/>
+                <a16:creationId xmlns:a16="http://schemas.microsoft.com/office/drawing/2014/main" id="{492A8882-634D-4AFC-BEE1-DD00A256903C}"/>
               </a:ext>
             </a:extLst>
           </p:cNvPr>
@@ -8998,7 +9053,7 @@
           <p:cNvPr id="5" name="">
             <a:extLst xmlns:a="http://schemas.openxmlformats.org/drawingml/2006/main">
               <a:ext uri="{FF2B5EF4-FFF2-40B4-BE49-F238E27FC236}">
-                <a16:creationId xmlns:a16="http://schemas.microsoft.com/office/drawing/2014/main" id="{BA86C5EA-D7FA-4704-86A6-E77E853BB62C}"/>
+                <a16:creationId xmlns:a16="http://schemas.microsoft.com/office/drawing/2014/main" id="{FCCE234D-12B7-4E98-A285-74E31BF82ECE}"/>
               </a:ext>
             </a:extLst>
           </p:cNvPr>
@@ -9048,7 +9103,7 @@
           <p:cNvPr id="6" name="">
             <a:extLst xmlns:a="http://schemas.openxmlformats.org/drawingml/2006/main">
               <a:ext uri="{FF2B5EF4-FFF2-40B4-BE49-F238E27FC236}">
-                <a16:creationId xmlns:a16="http://schemas.microsoft.com/office/drawing/2014/main" id="{723B0C4F-DA4B-4B58-ADE8-DB0C5FEF92EE}"/>
+                <a16:creationId xmlns:a16="http://schemas.microsoft.com/office/drawing/2014/main" id="{0C867DED-AAFB-4941-9541-48A203367148}"/>
               </a:ext>
             </a:extLst>
           </p:cNvPr>
@@ -9098,7 +9153,7 @@
           <p:cNvPr id="7" name="">
             <a:extLst xmlns:a="http://schemas.openxmlformats.org/drawingml/2006/main">
               <a:ext uri="{FF2B5EF4-FFF2-40B4-BE49-F238E27FC236}">
-                <a16:creationId xmlns:a16="http://schemas.microsoft.com/office/drawing/2014/main" id="{A794DE88-BC86-41C8-87C6-EE32E60BD0B6}"/>
+                <a16:creationId xmlns:a16="http://schemas.microsoft.com/office/drawing/2014/main" id="{248DBFF0-43F9-4A41-AD0E-5548FE748641}"/>
               </a:ext>
             </a:extLst>
           </p:cNvPr>
@@ -9148,7 +9203,7 @@
           <p:cNvPr id="8" name="">
             <a:extLst xmlns:a="http://schemas.openxmlformats.org/drawingml/2006/main">
               <a:ext uri="{FF2B5EF4-FFF2-40B4-BE49-F238E27FC236}">
-                <a16:creationId xmlns:a16="http://schemas.microsoft.com/office/drawing/2014/main" id="{C513AFAF-5FD3-45DD-9AA5-FA799B02F730}"/>
+                <a16:creationId xmlns:a16="http://schemas.microsoft.com/office/drawing/2014/main" id="{B8D2C932-C29E-4DC8-955C-2C6DFB6B55CC}"/>
               </a:ext>
             </a:extLst>
           </p:cNvPr>
@@ -9196,7 +9251,7 @@
     </p:spTree>
     <p:extLst>
       <p:ext uri="{BB962C8B-B14F-4D97-AF65-F5344CB8AC3E}">
-        <p14:creationId xmlns:p14="http://schemas.microsoft.com/office/powerpoint/2010/main" val="538688526"/>
+        <p14:creationId xmlns:p14="http://schemas.microsoft.com/office/powerpoint/2010/main" val="1890699639"/>
       </p:ext>
     </p:extLst>
   </p:cSld>
@@ -9227,7 +9282,7 @@
           <p:cNvPr id="7" name="">
             <a:extLst xmlns:a="http://schemas.openxmlformats.org/drawingml/2006/main">
               <a:ext uri="{FF2B5EF4-FFF2-40B4-BE49-F238E27FC236}">
-                <a16:creationId xmlns:a16="http://schemas.microsoft.com/office/drawing/2014/main" id="{3EB62C9B-136D-455C-A49E-0FBAB85BC759}"/>
+                <a16:creationId xmlns:a16="http://schemas.microsoft.com/office/drawing/2014/main" id="{2DC40D5E-8534-4652-8003-699C26D67F89}"/>
               </a:ext>
             </a:extLst>
           </p:cNvPr>
@@ -9277,7 +9332,7 @@
           <p:cNvPr id="2" name="">
             <a:extLst xmlns:a="http://schemas.openxmlformats.org/drawingml/2006/main">
               <a:ext uri="{FF2B5EF4-FFF2-40B4-BE49-F238E27FC236}">
-                <a16:creationId xmlns:a16="http://schemas.microsoft.com/office/drawing/2014/main" id="{C342B356-7711-4D18-A52C-FA85DE8C070B}"/>
+                <a16:creationId xmlns:a16="http://schemas.microsoft.com/office/drawing/2014/main" id="{207C936F-7DAD-4600-8BDA-6561AF89598E}"/>
               </a:ext>
             </a:extLst>
           </p:cNvPr>
@@ -9331,7 +9386,7 @@
           <p:nvPr/>
         </p:nvPicPr>
         <p:blipFill>
-          <a:blip xmlns:r="http://schemas.openxmlformats.org/officeDocument/2006/relationships" xmlns:a="http://schemas.openxmlformats.org/drawingml/2006/main" r:embed="Rbb2cf4b31cc24e52"/>
+          <a:blip xmlns:r="http://schemas.openxmlformats.org/officeDocument/2006/relationships" xmlns:a="http://schemas.openxmlformats.org/drawingml/2006/main" r:embed="Rd0b858a0a6e24cbf"/>
           <a:stretch xmlns:a="http://schemas.openxmlformats.org/drawingml/2006/main"/>
         </p:blipFill>
         <p:spPr>
@@ -9349,7 +9404,7 @@
           <p:cNvPr id="4" name="">
             <a:extLst xmlns:a="http://schemas.openxmlformats.org/drawingml/2006/main">
               <a:ext uri="{FF2B5EF4-FFF2-40B4-BE49-F238E27FC236}">
-                <a16:creationId xmlns:a16="http://schemas.microsoft.com/office/drawing/2014/main" id="{9D23379E-A04A-43FB-9077-CA8E00D442A7}"/>
+                <a16:creationId xmlns:a16="http://schemas.microsoft.com/office/drawing/2014/main" id="{FA586958-AC4D-471D-8DAD-470CB9B1BE70}"/>
               </a:ext>
             </a:extLst>
           </p:cNvPr>
@@ -9399,7 +9454,7 @@
           <p:cNvPr id="5" name="">
             <a:extLst xmlns:a="http://schemas.openxmlformats.org/drawingml/2006/main">
               <a:ext uri="{FF2B5EF4-FFF2-40B4-BE49-F238E27FC236}">
-                <a16:creationId xmlns:a16="http://schemas.microsoft.com/office/drawing/2014/main" id="{8AF46321-33DF-4A20-A14F-C4E300BF72CB}"/>
+                <a16:creationId xmlns:a16="http://schemas.microsoft.com/office/drawing/2014/main" id="{4E7D5F67-6A27-49E7-BB73-F04E173E7FBB}"/>
               </a:ext>
             </a:extLst>
           </p:cNvPr>
@@ -9449,7 +9504,7 @@
           <p:cNvPr id="6" name="">
             <a:extLst xmlns:a="http://schemas.openxmlformats.org/drawingml/2006/main">
               <a:ext uri="{FF2B5EF4-FFF2-40B4-BE49-F238E27FC236}">
-                <a16:creationId xmlns:a16="http://schemas.microsoft.com/office/drawing/2014/main" id="{B4A8BDEF-C57D-45CC-9279-0B3E18A652D8}"/>
+                <a16:creationId xmlns:a16="http://schemas.microsoft.com/office/drawing/2014/main" id="{C7E6B456-54D0-418B-8B77-5DFC5DD61B83}"/>
               </a:ext>
             </a:extLst>
           </p:cNvPr>
@@ -9497,7 +9552,7 @@
     </p:spTree>
     <p:extLst>
       <p:ext uri="{BB962C8B-B14F-4D97-AF65-F5344CB8AC3E}">
-        <p14:creationId xmlns:p14="http://schemas.microsoft.com/office/powerpoint/2010/main" val="2080746787"/>
+        <p14:creationId xmlns:p14="http://schemas.microsoft.com/office/powerpoint/2010/main" val="977719600"/>
       </p:ext>
     </p:extLst>
   </p:cSld>

--- a/sglang_direct_kv/artifacts/slides/agent_aware_kv_movement_manager_deck.pptx
+++ b/sglang_direct_kv/artifacts/slides/agent_aware_kv_movement_manager_deck.pptx
@@ -2,24 +2,24 @@
 <file path=ppt/presentation.xml><?xml version="1.0" encoding="utf-8"?>
 <p:presentation xmlns:p="http://schemas.openxmlformats.org/presentationml/2006/main">
   <p:sldMasterIdLst>
-    <p:sldMasterId xmlns:r="http://schemas.openxmlformats.org/officeDocument/2006/relationships" id="2147483648" r:id="R660986d3031a4505"/>
+    <p:sldMasterId xmlns:r="http://schemas.openxmlformats.org/officeDocument/2006/relationships" id="2147483648" r:id="R40d3942bad664423"/>
   </p:sldMasterIdLst>
   <p:notesMasterIdLst>
-    <p:notesMasterId xmlns:r="http://schemas.openxmlformats.org/officeDocument/2006/relationships" r:id="Ra51744c5f07b4732"/>
+    <p:notesMasterId xmlns:r="http://schemas.openxmlformats.org/officeDocument/2006/relationships" r:id="R4d113a97877a4b1a"/>
   </p:notesMasterIdLst>
   <p:sldIdLst>
-    <p:sldId xmlns:r="http://schemas.openxmlformats.org/officeDocument/2006/relationships" id="256" r:id="R443a9f967aac40bd"/>
-    <p:sldId xmlns:r="http://schemas.openxmlformats.org/officeDocument/2006/relationships" id="257" r:id="R1dc4f6dd977f4c1b"/>
-    <p:sldId xmlns:r="http://schemas.openxmlformats.org/officeDocument/2006/relationships" id="258" r:id="R33f3c6b7c3f74d09"/>
-    <p:sldId xmlns:r="http://schemas.openxmlformats.org/officeDocument/2006/relationships" id="259" r:id="Rf99a4d9ced3f40f2"/>
-    <p:sldId xmlns:r="http://schemas.openxmlformats.org/officeDocument/2006/relationships" id="260" r:id="R2f260ac653d1447f"/>
-    <p:sldId xmlns:r="http://schemas.openxmlformats.org/officeDocument/2006/relationships" id="261" r:id="Rc22b3acfbc024586"/>
-    <p:sldId xmlns:r="http://schemas.openxmlformats.org/officeDocument/2006/relationships" id="262" r:id="R2bdd170283fa4b86"/>
-    <p:sldId xmlns:r="http://schemas.openxmlformats.org/officeDocument/2006/relationships" id="263" r:id="R4b1662d392464e78"/>
-    <p:sldId xmlns:r="http://schemas.openxmlformats.org/officeDocument/2006/relationships" id="264" r:id="Raca4ed3f82e94266"/>
-    <p:sldId xmlns:r="http://schemas.openxmlformats.org/officeDocument/2006/relationships" id="265" r:id="R400cf00b9c95400f"/>
-    <p:sldId xmlns:r="http://schemas.openxmlformats.org/officeDocument/2006/relationships" id="266" r:id="Ra1b74e46bcd54c28"/>
-    <p:sldId xmlns:r="http://schemas.openxmlformats.org/officeDocument/2006/relationships" id="267" r:id="Rc89e3ac1aa7c45a0"/>
+    <p:sldId xmlns:r="http://schemas.openxmlformats.org/officeDocument/2006/relationships" id="256" r:id="R5dcec6d074154950"/>
+    <p:sldId xmlns:r="http://schemas.openxmlformats.org/officeDocument/2006/relationships" id="257" r:id="R06ca5600d27144bf"/>
+    <p:sldId xmlns:r="http://schemas.openxmlformats.org/officeDocument/2006/relationships" id="258" r:id="R1365626a08f14d75"/>
+    <p:sldId xmlns:r="http://schemas.openxmlformats.org/officeDocument/2006/relationships" id="259" r:id="Rbc12651a76144b9e"/>
+    <p:sldId xmlns:r="http://schemas.openxmlformats.org/officeDocument/2006/relationships" id="260" r:id="R92ef069b993c46fe"/>
+    <p:sldId xmlns:r="http://schemas.openxmlformats.org/officeDocument/2006/relationships" id="261" r:id="Re24b14165cef44e6"/>
+    <p:sldId xmlns:r="http://schemas.openxmlformats.org/officeDocument/2006/relationships" id="262" r:id="R75712280d49944ed"/>
+    <p:sldId xmlns:r="http://schemas.openxmlformats.org/officeDocument/2006/relationships" id="263" r:id="R4e08a2964863474b"/>
+    <p:sldId xmlns:r="http://schemas.openxmlformats.org/officeDocument/2006/relationships" id="264" r:id="R428e6f7cdb654358"/>
+    <p:sldId xmlns:r="http://schemas.openxmlformats.org/officeDocument/2006/relationships" id="265" r:id="Rd8aa53cf8f614e1f"/>
+    <p:sldId xmlns:r="http://schemas.openxmlformats.org/officeDocument/2006/relationships" id="266" r:id="R3443f83985f44ee5"/>
+    <p:sldId xmlns:r="http://schemas.openxmlformats.org/officeDocument/2006/relationships" id="267" r:id="R0143f6f7023d4dd2"/>
   </p:sldIdLst>
   <p:sldSz cx="12192000" cy="6858000"/>
   <p:notesSz cx="6858000" cy="9144000"/>
@@ -658,7 +658,17 @@
           </a:p>
           <a:p xmlns:a="http://schemas.openxmlformats.org/drawingml/2006/main">
             <a:r>
-              <a:t>The user previously asked for impact statements like 20% lower latency. Keep claims conservative until clean manager-grade measurements are available.</a:t>
+              <a:t>The table ties each benefit estimate to an observed mechanism: late replay H2D, recompute after KV loss, late hint completion, and wasted prefetch.</a:t>
+            </a:r>
+          </a:p>
+          <a:p xmlns:a="http://schemas.openxmlformats.org/drawingml/2006/main">
+            <a:r>
+              <a:t>Low-end gains are plausible when KV is already mostly resident and only small stalls remain.</a:t>
+            </a:r>
+          </a:p>
+          <a:p xmlns:a="http://schemas.openxmlformats.org/drawingml/2006/main">
+            <a:r>
+              <a:t>High-end gains are plausible when contexts are long, cache pressure is high, and replay falls back to H2D reload or recompute.</a:t>
             </a:r>
           </a:p>
           <a:p xmlns:a="http://schemas.openxmlformats.org/drawingml/2006/main">
@@ -1661,7 +1671,7 @@
   </p:cSld>
   <p:clrMap bg1="lt1" tx1="dk1" bg2="lt2" tx2="dk2" accent1="accent1" accent2="accent2" accent3="accent3" accent4="accent4" accent5="accent5" accent6="accent6" hlink="hlink" folHlink="folHlink"/>
   <p:sldLayoutIdLst>
-    <p:sldLayoutId xmlns:r="http://schemas.openxmlformats.org/officeDocument/2006/relationships" id="2147483649" r:id="Ree7888e845a14412"/>
+    <p:sldLayoutId xmlns:r="http://schemas.openxmlformats.org/officeDocument/2006/relationships" id="2147483649" r:id="R58678bbb0051414a"/>
   </p:sldLayoutIdLst>
   <p:txStyles>
     <p:titleStyle>
@@ -2212,7 +2222,7 @@
           <p:cNvPr id="12" name="">
             <a:extLst xmlns:a="http://schemas.openxmlformats.org/drawingml/2006/main">
               <a:ext uri="{FF2B5EF4-FFF2-40B4-BE49-F238E27FC236}">
-                <a16:creationId xmlns:a16="http://schemas.microsoft.com/office/drawing/2014/main" id="{9C2DE161-E611-4262-B733-5CD158F3DBBA}"/>
+                <a16:creationId xmlns:a16="http://schemas.microsoft.com/office/drawing/2014/main" id="{2BE8AC51-12DF-490F-B70B-0D599428BA7E}"/>
               </a:ext>
             </a:extLst>
           </p:cNvPr>
@@ -2262,7 +2272,7 @@
           <p:cNvPr id="2" name="">
             <a:extLst xmlns:a="http://schemas.openxmlformats.org/drawingml/2006/main">
               <a:ext uri="{FF2B5EF4-FFF2-40B4-BE49-F238E27FC236}">
-                <a16:creationId xmlns:a16="http://schemas.microsoft.com/office/drawing/2014/main" id="{45C3661D-E131-402E-AAAA-2FCE11314ED8}"/>
+                <a16:creationId xmlns:a16="http://schemas.microsoft.com/office/drawing/2014/main" id="{4A36DC6C-D510-428A-9767-5E5944A41475}"/>
               </a:ext>
             </a:extLst>
           </p:cNvPr>
@@ -2312,7 +2322,7 @@
           <p:cNvPr id="3" name="">
             <a:extLst xmlns:a="http://schemas.openxmlformats.org/drawingml/2006/main">
               <a:ext uri="{FF2B5EF4-FFF2-40B4-BE49-F238E27FC236}">
-                <a16:creationId xmlns:a16="http://schemas.microsoft.com/office/drawing/2014/main" id="{FA2DD041-0C3E-4D53-A976-60EEEA027435}"/>
+                <a16:creationId xmlns:a16="http://schemas.microsoft.com/office/drawing/2014/main" id="{0D4EE2CF-12A0-4A99-907E-273C1D33B94F}"/>
               </a:ext>
             </a:extLst>
           </p:cNvPr>
@@ -2343,7 +2353,7 @@
           <p:cNvPr id="4" name="">
             <a:extLst xmlns:a="http://schemas.openxmlformats.org/drawingml/2006/main">
               <a:ext uri="{FF2B5EF4-FFF2-40B4-BE49-F238E27FC236}">
-                <a16:creationId xmlns:a16="http://schemas.microsoft.com/office/drawing/2014/main" id="{0B21E43B-A4BB-4400-A440-10315E075255}"/>
+                <a16:creationId xmlns:a16="http://schemas.microsoft.com/office/drawing/2014/main" id="{AFDF0CBA-F550-4283-9D1D-99B526B7529F}"/>
               </a:ext>
             </a:extLst>
           </p:cNvPr>
@@ -2393,7 +2403,7 @@
           <p:cNvPr id="5" name="">
             <a:extLst xmlns:a="http://schemas.openxmlformats.org/drawingml/2006/main">
               <a:ext uri="{FF2B5EF4-FFF2-40B4-BE49-F238E27FC236}">
-                <a16:creationId xmlns:a16="http://schemas.microsoft.com/office/drawing/2014/main" id="{5AD7DF86-6114-4CEE-8AC2-AA1DFF95FFAF}"/>
+                <a16:creationId xmlns:a16="http://schemas.microsoft.com/office/drawing/2014/main" id="{6F98A2D3-3AB4-442D-B4DE-EFAFE4A4A861}"/>
               </a:ext>
             </a:extLst>
           </p:cNvPr>
@@ -2443,7 +2453,7 @@
           <p:cNvPr id="6" name="">
             <a:extLst xmlns:a="http://schemas.openxmlformats.org/drawingml/2006/main">
               <a:ext uri="{FF2B5EF4-FFF2-40B4-BE49-F238E27FC236}">
-                <a16:creationId xmlns:a16="http://schemas.microsoft.com/office/drawing/2014/main" id="{C31B95AA-5D08-4016-8AA5-D0F32AA91D21}"/>
+                <a16:creationId xmlns:a16="http://schemas.microsoft.com/office/drawing/2014/main" id="{F9E8F69B-E58E-4A44-8786-F99964D252E9}"/>
               </a:ext>
             </a:extLst>
           </p:cNvPr>
@@ -2493,7 +2503,7 @@
           <p:cNvPr id="7" name="">
             <a:extLst xmlns:a="http://schemas.openxmlformats.org/drawingml/2006/main">
               <a:ext uri="{FF2B5EF4-FFF2-40B4-BE49-F238E27FC236}">
-                <a16:creationId xmlns:a16="http://schemas.microsoft.com/office/drawing/2014/main" id="{AA973700-6C77-475C-8C91-56EAF055F9ED}"/>
+                <a16:creationId xmlns:a16="http://schemas.microsoft.com/office/drawing/2014/main" id="{1979369D-7927-4796-9A72-5E0E95732E4B}"/>
               </a:ext>
             </a:extLst>
           </p:cNvPr>
@@ -2543,7 +2553,7 @@
           <p:cNvPr id="8" name="">
             <a:extLst xmlns:a="http://schemas.openxmlformats.org/drawingml/2006/main">
               <a:ext uri="{FF2B5EF4-FFF2-40B4-BE49-F238E27FC236}">
-                <a16:creationId xmlns:a16="http://schemas.microsoft.com/office/drawing/2014/main" id="{06599A79-558A-47B7-B45B-F500320C8955}"/>
+                <a16:creationId xmlns:a16="http://schemas.microsoft.com/office/drawing/2014/main" id="{86BD44E5-C814-4771-847F-EC61D2E96C03}"/>
               </a:ext>
             </a:extLst>
           </p:cNvPr>
@@ -2593,7 +2603,7 @@
           <p:cNvPr id="9" name="">
             <a:extLst xmlns:a="http://schemas.openxmlformats.org/drawingml/2006/main">
               <a:ext uri="{FF2B5EF4-FFF2-40B4-BE49-F238E27FC236}">
-                <a16:creationId xmlns:a16="http://schemas.microsoft.com/office/drawing/2014/main" id="{F699F22B-59F9-4ECA-A615-8AD5A3D08770}"/>
+                <a16:creationId xmlns:a16="http://schemas.microsoft.com/office/drawing/2014/main" id="{84569A75-B9E3-41A0-B4B9-B0A3783D816E}"/>
               </a:ext>
             </a:extLst>
           </p:cNvPr>
@@ -2643,7 +2653,7 @@
           <p:cNvPr id="10" name="">
             <a:extLst xmlns:a="http://schemas.openxmlformats.org/drawingml/2006/main">
               <a:ext uri="{FF2B5EF4-FFF2-40B4-BE49-F238E27FC236}">
-                <a16:creationId xmlns:a16="http://schemas.microsoft.com/office/drawing/2014/main" id="{E9993F09-C781-4902-B1F0-4A50EFE91EBA}"/>
+                <a16:creationId xmlns:a16="http://schemas.microsoft.com/office/drawing/2014/main" id="{846158E8-77EE-4599-87D5-186387181BAD}"/>
               </a:ext>
             </a:extLst>
           </p:cNvPr>
@@ -2693,7 +2703,7 @@
           <p:cNvPr id="11" name="">
             <a:extLst xmlns:a="http://schemas.openxmlformats.org/drawingml/2006/main">
               <a:ext uri="{FF2B5EF4-FFF2-40B4-BE49-F238E27FC236}">
-                <a16:creationId xmlns:a16="http://schemas.microsoft.com/office/drawing/2014/main" id="{F818A59E-BDB3-40AF-A166-0184570D9656}"/>
+                <a16:creationId xmlns:a16="http://schemas.microsoft.com/office/drawing/2014/main" id="{1662F6F2-F813-493F-BB83-1B8958ED0252}"/>
               </a:ext>
             </a:extLst>
           </p:cNvPr>
@@ -2741,7 +2751,7 @@
     </p:spTree>
     <p:extLst>
       <p:ext uri="{BB962C8B-B14F-4D97-AF65-F5344CB8AC3E}">
-        <p14:creationId xmlns:p14="http://schemas.microsoft.com/office/powerpoint/2010/main" val="519333489"/>
+        <p14:creationId xmlns:p14="http://schemas.microsoft.com/office/powerpoint/2010/main" val="779423332"/>
       </p:ext>
     </p:extLst>
   </p:cSld>
@@ -2772,7 +2782,7 @@
           <p:cNvPr id="17" name="">
             <a:extLst xmlns:a="http://schemas.openxmlformats.org/drawingml/2006/main">
               <a:ext uri="{FF2B5EF4-FFF2-40B4-BE49-F238E27FC236}">
-                <a16:creationId xmlns:a16="http://schemas.microsoft.com/office/drawing/2014/main" id="{399E9D64-0F62-496F-9093-33F4E55317B8}"/>
+                <a16:creationId xmlns:a16="http://schemas.microsoft.com/office/drawing/2014/main" id="{0909186F-299F-4F0A-A072-48757DBCAE02}"/>
               </a:ext>
             </a:extLst>
           </p:cNvPr>
@@ -2822,7 +2832,7 @@
           <p:cNvPr id="2" name="">
             <a:extLst xmlns:a="http://schemas.openxmlformats.org/drawingml/2006/main">
               <a:ext uri="{FF2B5EF4-FFF2-40B4-BE49-F238E27FC236}">
-                <a16:creationId xmlns:a16="http://schemas.microsoft.com/office/drawing/2014/main" id="{F147E563-6D64-459C-B06F-490ADD969CE9}"/>
+                <a16:creationId xmlns:a16="http://schemas.microsoft.com/office/drawing/2014/main" id="{4A88393E-98CD-458C-B2C0-2798CF88B3E7}"/>
               </a:ext>
             </a:extLst>
           </p:cNvPr>
@@ -2872,7 +2882,7 @@
           <p:cNvPr id="3" name="">
             <a:extLst xmlns:a="http://schemas.openxmlformats.org/drawingml/2006/main">
               <a:ext uri="{FF2B5EF4-FFF2-40B4-BE49-F238E27FC236}">
-                <a16:creationId xmlns:a16="http://schemas.microsoft.com/office/drawing/2014/main" id="{B5698D55-8C1D-435B-8317-8D88145A6970}"/>
+                <a16:creationId xmlns:a16="http://schemas.microsoft.com/office/drawing/2014/main" id="{EF11D1F2-7F96-4791-BDE8-9640A48C7A8B}"/>
               </a:ext>
             </a:extLst>
           </p:cNvPr>
@@ -2922,7 +2932,7 @@
           <p:cNvPr id="4" name="">
             <a:extLst xmlns:a="http://schemas.openxmlformats.org/drawingml/2006/main">
               <a:ext uri="{FF2B5EF4-FFF2-40B4-BE49-F238E27FC236}">
-                <a16:creationId xmlns:a16="http://schemas.microsoft.com/office/drawing/2014/main" id="{549D50B5-D731-49E2-A29A-FD104178E50C}"/>
+                <a16:creationId xmlns:a16="http://schemas.microsoft.com/office/drawing/2014/main" id="{587D8C23-1119-41C4-8145-1C0AE95A5B78}"/>
               </a:ext>
             </a:extLst>
           </p:cNvPr>
@@ -2972,7 +2982,7 @@
           <p:cNvPr id="5" name="">
             <a:extLst xmlns:a="http://schemas.openxmlformats.org/drawingml/2006/main">
               <a:ext uri="{FF2B5EF4-FFF2-40B4-BE49-F238E27FC236}">
-                <a16:creationId xmlns:a16="http://schemas.microsoft.com/office/drawing/2014/main" id="{C85E57E6-3A09-440B-94B8-2F189545D09E}"/>
+                <a16:creationId xmlns:a16="http://schemas.microsoft.com/office/drawing/2014/main" id="{1C9EB440-8330-4926-9E2E-C476D03A967E}"/>
               </a:ext>
             </a:extLst>
           </p:cNvPr>
@@ -3022,7 +3032,7 @@
           <p:cNvPr id="6" name="">
             <a:extLst xmlns:a="http://schemas.openxmlformats.org/drawingml/2006/main">
               <a:ext uri="{FF2B5EF4-FFF2-40B4-BE49-F238E27FC236}">
-                <a16:creationId xmlns:a16="http://schemas.microsoft.com/office/drawing/2014/main" id="{81FB160B-3FAC-4EF7-88AF-E78084A66B8C}"/>
+                <a16:creationId xmlns:a16="http://schemas.microsoft.com/office/drawing/2014/main" id="{5D4AC944-59FC-4FAF-98A8-5C0D93B32F81}"/>
               </a:ext>
             </a:extLst>
           </p:cNvPr>
@@ -3072,7 +3082,7 @@
           <p:cNvPr id="7" name="">
             <a:extLst xmlns:a="http://schemas.openxmlformats.org/drawingml/2006/main">
               <a:ext uri="{FF2B5EF4-FFF2-40B4-BE49-F238E27FC236}">
-                <a16:creationId xmlns:a16="http://schemas.microsoft.com/office/drawing/2014/main" id="{88DD0CB8-CF0A-4FB1-86EF-861DFA275B91}"/>
+                <a16:creationId xmlns:a16="http://schemas.microsoft.com/office/drawing/2014/main" id="{8D98494F-EFE6-4668-B8A8-AA63DE8FD7CD}"/>
               </a:ext>
             </a:extLst>
           </p:cNvPr>
@@ -3122,7 +3132,7 @@
           <p:cNvPr id="8" name="">
             <a:extLst xmlns:a="http://schemas.openxmlformats.org/drawingml/2006/main">
               <a:ext uri="{FF2B5EF4-FFF2-40B4-BE49-F238E27FC236}">
-                <a16:creationId xmlns:a16="http://schemas.microsoft.com/office/drawing/2014/main" id="{27089430-C1B8-414B-BAE7-7DA1AFE1A0A8}"/>
+                <a16:creationId xmlns:a16="http://schemas.microsoft.com/office/drawing/2014/main" id="{62A54583-B8AC-4007-AFFA-D144C98A5DC7}"/>
               </a:ext>
             </a:extLst>
           </p:cNvPr>
@@ -3172,7 +3182,7 @@
           <p:cNvPr id="9" name="">
             <a:extLst xmlns:a="http://schemas.openxmlformats.org/drawingml/2006/main">
               <a:ext uri="{FF2B5EF4-FFF2-40B4-BE49-F238E27FC236}">
-                <a16:creationId xmlns:a16="http://schemas.microsoft.com/office/drawing/2014/main" id="{8139AACC-046A-40E1-9C50-C8CAF7D74DC0}"/>
+                <a16:creationId xmlns:a16="http://schemas.microsoft.com/office/drawing/2014/main" id="{6418B938-7E7C-4B95-A8CD-1580DC5167CC}"/>
               </a:ext>
             </a:extLst>
           </p:cNvPr>
@@ -3222,7 +3232,7 @@
           <p:cNvPr id="10" name="">
             <a:extLst xmlns:a="http://schemas.openxmlformats.org/drawingml/2006/main">
               <a:ext uri="{FF2B5EF4-FFF2-40B4-BE49-F238E27FC236}">
-                <a16:creationId xmlns:a16="http://schemas.microsoft.com/office/drawing/2014/main" id="{F477F21D-6823-4103-B4BA-69EA42C30168}"/>
+                <a16:creationId xmlns:a16="http://schemas.microsoft.com/office/drawing/2014/main" id="{64CE8A19-588D-485C-8D1D-974BB44CF09B}"/>
               </a:ext>
             </a:extLst>
           </p:cNvPr>
@@ -3272,7 +3282,7 @@
           <p:cNvPr id="11" name="">
             <a:extLst xmlns:a="http://schemas.openxmlformats.org/drawingml/2006/main">
               <a:ext uri="{FF2B5EF4-FFF2-40B4-BE49-F238E27FC236}">
-                <a16:creationId xmlns:a16="http://schemas.microsoft.com/office/drawing/2014/main" id="{D810BB76-BC0A-47D9-8F83-25823BCCDD54}"/>
+                <a16:creationId xmlns:a16="http://schemas.microsoft.com/office/drawing/2014/main" id="{16F47999-2E50-4376-8CB3-782293C942C3}"/>
               </a:ext>
             </a:extLst>
           </p:cNvPr>
@@ -3322,7 +3332,7 @@
           <p:cNvPr id="12" name="">
             <a:extLst xmlns:a="http://schemas.openxmlformats.org/drawingml/2006/main">
               <a:ext uri="{FF2B5EF4-FFF2-40B4-BE49-F238E27FC236}">
-                <a16:creationId xmlns:a16="http://schemas.microsoft.com/office/drawing/2014/main" id="{7B30856C-F232-43F4-B994-851BEFB7A1B9}"/>
+                <a16:creationId xmlns:a16="http://schemas.microsoft.com/office/drawing/2014/main" id="{35D53424-E5EF-495F-A691-A7D970DC5AF9}"/>
               </a:ext>
             </a:extLst>
           </p:cNvPr>
@@ -3372,7 +3382,7 @@
           <p:cNvPr id="13" name="">
             <a:extLst xmlns:a="http://schemas.openxmlformats.org/drawingml/2006/main">
               <a:ext uri="{FF2B5EF4-FFF2-40B4-BE49-F238E27FC236}">
-                <a16:creationId xmlns:a16="http://schemas.microsoft.com/office/drawing/2014/main" id="{7CCC884A-F5FB-43F4-963B-CE9C74CEFB20}"/>
+                <a16:creationId xmlns:a16="http://schemas.microsoft.com/office/drawing/2014/main" id="{E40A1E29-39A0-4831-8297-2F8A6782D6FA}"/>
               </a:ext>
             </a:extLst>
           </p:cNvPr>
@@ -3403,7 +3413,7 @@
           <p:cNvPr id="14" name="">
             <a:extLst xmlns:a="http://schemas.openxmlformats.org/drawingml/2006/main">
               <a:ext uri="{FF2B5EF4-FFF2-40B4-BE49-F238E27FC236}">
-                <a16:creationId xmlns:a16="http://schemas.microsoft.com/office/drawing/2014/main" id="{BF8A7BBB-C244-4A92-A266-6D02BD69E2A0}"/>
+                <a16:creationId xmlns:a16="http://schemas.microsoft.com/office/drawing/2014/main" id="{5BB5ED05-9F3B-4725-8A99-CF91D7E31A2C}"/>
               </a:ext>
             </a:extLst>
           </p:cNvPr>
@@ -3453,7 +3463,7 @@
           <p:cNvPr id="15" name="">
             <a:extLst xmlns:a="http://schemas.openxmlformats.org/drawingml/2006/main">
               <a:ext uri="{FF2B5EF4-FFF2-40B4-BE49-F238E27FC236}">
-                <a16:creationId xmlns:a16="http://schemas.microsoft.com/office/drawing/2014/main" id="{F77AB9F1-0129-451E-96CC-0D352A5CC40E}"/>
+                <a16:creationId xmlns:a16="http://schemas.microsoft.com/office/drawing/2014/main" id="{7E5EDB16-C868-4D2D-AC11-42D4459C0F43}"/>
               </a:ext>
             </a:extLst>
           </p:cNvPr>
@@ -3503,7 +3513,7 @@
           <p:cNvPr id="16" name="">
             <a:extLst xmlns:a="http://schemas.openxmlformats.org/drawingml/2006/main">
               <a:ext uri="{FF2B5EF4-FFF2-40B4-BE49-F238E27FC236}">
-                <a16:creationId xmlns:a16="http://schemas.microsoft.com/office/drawing/2014/main" id="{2026B7DC-C6FB-4BC1-913B-98D6583289C7}"/>
+                <a16:creationId xmlns:a16="http://schemas.microsoft.com/office/drawing/2014/main" id="{C363CAAA-A22F-452D-9262-ED1DE289DDA3}"/>
               </a:ext>
             </a:extLst>
           </p:cNvPr>
@@ -3551,7 +3561,7 @@
     </p:spTree>
     <p:extLst>
       <p:ext uri="{BB962C8B-B14F-4D97-AF65-F5344CB8AC3E}">
-        <p14:creationId xmlns:p14="http://schemas.microsoft.com/office/powerpoint/2010/main" val="1716994904"/>
+        <p14:creationId xmlns:p14="http://schemas.microsoft.com/office/powerpoint/2010/main" val="406075102"/>
       </p:ext>
     </p:extLst>
   </p:cSld>
@@ -3579,10 +3589,10 @@
       </p:grpSpPr>
       <p:sp>
         <p:nvSpPr>
-          <p:cNvPr id="17" name="">
-            <a:extLst xmlns:a="http://schemas.openxmlformats.org/drawingml/2006/main">
-              <a:ext uri="{FF2B5EF4-FFF2-40B4-BE49-F238E27FC236}">
-                <a16:creationId xmlns:a16="http://schemas.microsoft.com/office/drawing/2014/main" id="{0915752A-C7B1-4DFA-92A7-DEFCC40F3E48}"/>
+          <p:cNvPr id="44" name="">
+            <a:extLst xmlns:a="http://schemas.openxmlformats.org/drawingml/2006/main">
+              <a:ext uri="{FF2B5EF4-FFF2-40B4-BE49-F238E27FC236}">
+                <a16:creationId xmlns:a16="http://schemas.microsoft.com/office/drawing/2014/main" id="{C9BEB51E-4CE4-4925-A706-CA51504F6AF4}"/>
               </a:ext>
             </a:extLst>
           </p:cNvPr>
@@ -3632,7 +3642,7 @@
           <p:cNvPr id="2" name="">
             <a:extLst xmlns:a="http://schemas.openxmlformats.org/drawingml/2006/main">
               <a:ext uri="{FF2B5EF4-FFF2-40B4-BE49-F238E27FC236}">
-                <a16:creationId xmlns:a16="http://schemas.microsoft.com/office/drawing/2014/main" id="{998AD203-C032-4D04-82DF-A11A4629DD0E}"/>
+                <a16:creationId xmlns:a16="http://schemas.microsoft.com/office/drawing/2014/main" id="{B1A445DC-2DBE-41D6-A284-D4D5B4322341}"/>
               </a:ext>
             </a:extLst>
           </p:cNvPr>
@@ -3672,7 +3682,7 @@
                   <a:srgbClr val="64748B"/>
                 </a:solidFill>
               </a:rPr>
-              <a:t>These are ballpark research targets for tool-heavy agent workloads, not final measured claims.</a:t>
+              <a:t>The ranges are tied to observed failure modes, not standalone guesses.</a:t>
             </a:r>
           </a:p>
         </p:txBody>
@@ -3682,549 +3692,1782 @@
           <p:cNvPr id="3" name="">
             <a:extLst xmlns:a="http://schemas.openxmlformats.org/drawingml/2006/main">
               <a:ext uri="{FF2B5EF4-FFF2-40B4-BE49-F238E27FC236}">
-                <a16:creationId xmlns:a16="http://schemas.microsoft.com/office/drawing/2014/main" id="{3AFAFCA3-9EF8-4E69-B854-219BFE1367B8}"/>
-              </a:ext>
-            </a:extLst>
-          </p:cNvPr>
-          <p:cNvSpPr>
-            <a:spLocks xmlns:a="http://schemas.openxmlformats.org/drawingml/2006/main" noGrp="1"/>
-          </p:cNvSpPr>
-          <p:nvPr/>
-        </p:nvSpPr>
-        <p:spPr>
-          <a:xfrm xmlns:a="http://schemas.openxmlformats.org/drawingml/2006/main">
-            <a:off x="876300" y="1562100"/>
-            <a:ext cx="190500" cy="304800"/>
-          </a:xfrm>
-          <a:prstGeom xmlns:a="http://schemas.openxmlformats.org/drawingml/2006/main" prst="rect">
-            <a:avLst/>
-          </a:prstGeom>
-          <a:noFill xmlns:a="http://schemas.openxmlformats.org/drawingml/2006/main"/>
-          <a:ln xmlns:a="http://schemas.openxmlformats.org/drawingml/2006/main" w="0">
-            <a:noFill/>
-            <a:prstDash val="solid"/>
-          </a:ln>
-        </p:spPr>
-        <p:txBody>
-          <a:bodyPr xmlns:a="http://schemas.openxmlformats.org/drawingml/2006/main" anchor="t"/>
-          <a:lstStyle xmlns:a="http://schemas.openxmlformats.org/drawingml/2006/main"/>
-          <a:p xmlns:a="http://schemas.openxmlformats.org/drawingml/2006/main">
-            <a:pPr algn="l">
-              <a:defRPr sz="2025" b="1">
+                <a16:creationId xmlns:a16="http://schemas.microsoft.com/office/drawing/2014/main" id="{0A48BA8D-68CD-4B54-8A58-7F59B86751C8}"/>
+              </a:ext>
+            </a:extLst>
+          </p:cNvPr>
+          <p:cNvSpPr>
+            <a:spLocks xmlns:a="http://schemas.openxmlformats.org/drawingml/2006/main" noGrp="1"/>
+          </p:cNvSpPr>
+          <p:nvPr/>
+        </p:nvSpPr>
+        <p:spPr>
+          <a:xfrm xmlns:a="http://schemas.openxmlformats.org/drawingml/2006/main">
+            <a:off x="514350" y="1485900"/>
+            <a:ext cx="10906125" cy="381000"/>
+          </a:xfrm>
+          <a:prstGeom xmlns:a="http://schemas.openxmlformats.org/drawingml/2006/main" prst="rect">
+            <a:avLst/>
+          </a:prstGeom>
+          <a:solidFill xmlns:a="http://schemas.openxmlformats.org/drawingml/2006/main">
+            <a:srgbClr val="EEF2FF"/>
+          </a:solidFill>
+          <a:ln xmlns:a="http://schemas.openxmlformats.org/drawingml/2006/main" w="9525">
+            <a:solidFill>
+              <a:srgbClr val="CBD5E1"/>
+            </a:solidFill>
+            <a:prstDash val="solid"/>
+          </a:ln>
+        </p:spPr>
+      </p:sp>
+      <p:sp>
+        <p:nvSpPr>
+          <p:cNvPr id="4" name="">
+            <a:extLst xmlns:a="http://schemas.openxmlformats.org/drawingml/2006/main">
+              <a:ext uri="{FF2B5EF4-FFF2-40B4-BE49-F238E27FC236}">
+                <a16:creationId xmlns:a16="http://schemas.microsoft.com/office/drawing/2014/main" id="{4C8DC447-E395-4491-90E9-1C5688383ED3}"/>
+              </a:ext>
+            </a:extLst>
+          </p:cNvPr>
+          <p:cNvSpPr>
+            <a:spLocks xmlns:a="http://schemas.openxmlformats.org/drawingml/2006/main" noGrp="1"/>
+          </p:cNvSpPr>
+          <p:nvPr/>
+        </p:nvSpPr>
+        <p:spPr>
+          <a:xfrm xmlns:a="http://schemas.openxmlformats.org/drawingml/2006/main">
+            <a:off x="600075" y="1581150"/>
+            <a:ext cx="2305050" cy="266700"/>
+          </a:xfrm>
+          <a:prstGeom xmlns:a="http://schemas.openxmlformats.org/drawingml/2006/main" prst="rect">
+            <a:avLst/>
+          </a:prstGeom>
+          <a:noFill xmlns:a="http://schemas.openxmlformats.org/drawingml/2006/main"/>
+          <a:ln xmlns:a="http://schemas.openxmlformats.org/drawingml/2006/main" w="0">
+            <a:noFill/>
+            <a:prstDash val="solid"/>
+          </a:ln>
+        </p:spPr>
+        <p:txBody>
+          <a:bodyPr xmlns:a="http://schemas.openxmlformats.org/drawingml/2006/main" anchor="ctr"/>
+          <a:lstStyle xmlns:a="http://schemas.openxmlformats.org/drawingml/2006/main"/>
+          <a:p xmlns:a="http://schemas.openxmlformats.org/drawingml/2006/main">
+            <a:pPr algn="l">
+              <a:defRPr sz="1125" b="1">
+                <a:solidFill>
+                  <a:srgbClr val="0F172A"/>
+                </a:solidFill>
+              </a:defRPr>
+            </a:pPr>
+            <a:r>
+              <a:rPr sz="1125" b="1">
+                <a:solidFill>
+                  <a:srgbClr val="0F172A"/>
+                </a:solidFill>
+              </a:rPr>
+              <a:t>Observed in our traces</a:t>
+            </a:r>
+          </a:p>
+        </p:txBody>
+      </p:sp>
+      <p:sp>
+        <p:nvSpPr>
+          <p:cNvPr id="5" name="">
+            <a:extLst xmlns:a="http://schemas.openxmlformats.org/drawingml/2006/main">
+              <a:ext uri="{FF2B5EF4-FFF2-40B4-BE49-F238E27FC236}">
+                <a16:creationId xmlns:a16="http://schemas.microsoft.com/office/drawing/2014/main" id="{D21E7E54-B614-4473-94B6-BD3460361472}"/>
+              </a:ext>
+            </a:extLst>
+          </p:cNvPr>
+          <p:cNvSpPr>
+            <a:spLocks xmlns:a="http://schemas.openxmlformats.org/drawingml/2006/main" noGrp="1"/>
+          </p:cNvSpPr>
+          <p:nvPr/>
+        </p:nvSpPr>
+        <p:spPr>
+          <a:xfrm xmlns:a="http://schemas.openxmlformats.org/drawingml/2006/main">
+            <a:off x="3076575" y="1581150"/>
+            <a:ext cx="2209800" cy="266700"/>
+          </a:xfrm>
+          <a:prstGeom xmlns:a="http://schemas.openxmlformats.org/drawingml/2006/main" prst="rect">
+            <a:avLst/>
+          </a:prstGeom>
+          <a:noFill xmlns:a="http://schemas.openxmlformats.org/drawingml/2006/main"/>
+          <a:ln xmlns:a="http://schemas.openxmlformats.org/drawingml/2006/main" w="0">
+            <a:noFill/>
+            <a:prstDash val="solid"/>
+          </a:ln>
+        </p:spPr>
+        <p:txBody>
+          <a:bodyPr xmlns:a="http://schemas.openxmlformats.org/drawingml/2006/main" anchor="ctr"/>
+          <a:lstStyle xmlns:a="http://schemas.openxmlformats.org/drawingml/2006/main"/>
+          <a:p xmlns:a="http://schemas.openxmlformats.org/drawingml/2006/main">
+            <a:pPr algn="l">
+              <a:defRPr sz="1125" b="1">
+                <a:solidFill>
+                  <a:srgbClr val="0F172A"/>
+                </a:solidFill>
+              </a:defRPr>
+            </a:pPr>
+            <a:r>
+              <a:rPr sz="1125" b="1">
+                <a:solidFill>
+                  <a:srgbClr val="0F172A"/>
+                </a:solidFill>
+              </a:rPr>
+              <a:t>Hardware assist</a:t>
+            </a:r>
+          </a:p>
+        </p:txBody>
+      </p:sp>
+      <p:sp>
+        <p:nvSpPr>
+          <p:cNvPr id="6" name="">
+            <a:extLst xmlns:a="http://schemas.openxmlformats.org/drawingml/2006/main">
+              <a:ext uri="{FF2B5EF4-FFF2-40B4-BE49-F238E27FC236}">
+                <a16:creationId xmlns:a16="http://schemas.microsoft.com/office/drawing/2014/main" id="{518E3EE8-E58D-4ED8-9281-F896CBD46A86}"/>
+              </a:ext>
+            </a:extLst>
+          </p:cNvPr>
+          <p:cNvSpPr>
+            <a:spLocks xmlns:a="http://schemas.openxmlformats.org/drawingml/2006/main" noGrp="1"/>
+          </p:cNvSpPr>
+          <p:nvPr/>
+        </p:nvSpPr>
+        <p:spPr>
+          <a:xfrm xmlns:a="http://schemas.openxmlformats.org/drawingml/2006/main">
+            <a:off x="5457825" y="1581150"/>
+            <a:ext cx="3495675" cy="266700"/>
+          </a:xfrm>
+          <a:prstGeom xmlns:a="http://schemas.openxmlformats.org/drawingml/2006/main" prst="rect">
+            <a:avLst/>
+          </a:prstGeom>
+          <a:noFill xmlns:a="http://schemas.openxmlformats.org/drawingml/2006/main"/>
+          <a:ln xmlns:a="http://schemas.openxmlformats.org/drawingml/2006/main" w="0">
+            <a:noFill/>
+            <a:prstDash val="solid"/>
+          </a:ln>
+        </p:spPr>
+        <p:txBody>
+          <a:bodyPr xmlns:a="http://schemas.openxmlformats.org/drawingml/2006/main" anchor="ctr"/>
+          <a:lstStyle xmlns:a="http://schemas.openxmlformats.org/drawingml/2006/main"/>
+          <a:p xmlns:a="http://schemas.openxmlformats.org/drawingml/2006/main">
+            <a:pPr algn="l">
+              <a:defRPr sz="1125" b="1">
+                <a:solidFill>
+                  <a:srgbClr val="0F172A"/>
+                </a:solidFill>
+              </a:defRPr>
+            </a:pPr>
+            <a:r>
+              <a:rPr sz="1125" b="1">
+                <a:solidFill>
+                  <a:srgbClr val="0F172A"/>
+                </a:solidFill>
+              </a:rPr>
+              <a:t>Why it moves the number</a:t>
+            </a:r>
+          </a:p>
+        </p:txBody>
+      </p:sp>
+      <p:sp>
+        <p:nvSpPr>
+          <p:cNvPr id="7" name="">
+            <a:extLst xmlns:a="http://schemas.openxmlformats.org/drawingml/2006/main">
+              <a:ext uri="{FF2B5EF4-FFF2-40B4-BE49-F238E27FC236}">
+                <a16:creationId xmlns:a16="http://schemas.microsoft.com/office/drawing/2014/main" id="{CBB1DB0F-2035-40EC-8998-93FF00840625}"/>
+              </a:ext>
+            </a:extLst>
+          </p:cNvPr>
+          <p:cNvSpPr>
+            <a:spLocks xmlns:a="http://schemas.openxmlformats.org/drawingml/2006/main" noGrp="1"/>
+          </p:cNvSpPr>
+          <p:nvPr/>
+        </p:nvSpPr>
+        <p:spPr>
+          <a:xfrm xmlns:a="http://schemas.openxmlformats.org/drawingml/2006/main">
+            <a:off x="9124950" y="1581150"/>
+            <a:ext cx="2209800" cy="266700"/>
+          </a:xfrm>
+          <a:prstGeom xmlns:a="http://schemas.openxmlformats.org/drawingml/2006/main" prst="rect">
+            <a:avLst/>
+          </a:prstGeom>
+          <a:noFill xmlns:a="http://schemas.openxmlformats.org/drawingml/2006/main"/>
+          <a:ln xmlns:a="http://schemas.openxmlformats.org/drawingml/2006/main" w="0">
+            <a:noFill/>
+            <a:prstDash val="solid"/>
+          </a:ln>
+        </p:spPr>
+        <p:txBody>
+          <a:bodyPr xmlns:a="http://schemas.openxmlformats.org/drawingml/2006/main" anchor="ctr"/>
+          <a:lstStyle xmlns:a="http://schemas.openxmlformats.org/drawingml/2006/main"/>
+          <a:p xmlns:a="http://schemas.openxmlformats.org/drawingml/2006/main">
+            <a:pPr algn="l">
+              <a:defRPr sz="1125" b="1">
+                <a:solidFill>
+                  <a:srgbClr val="0F172A"/>
+                </a:solidFill>
+              </a:defRPr>
+            </a:pPr>
+            <a:r>
+              <a:rPr sz="1125" b="1">
+                <a:solidFill>
+                  <a:srgbClr val="0F172A"/>
+                </a:solidFill>
+              </a:rPr>
+              <a:t>Target impact</a:t>
+            </a:r>
+          </a:p>
+        </p:txBody>
+      </p:sp>
+      <p:sp>
+        <p:nvSpPr>
+          <p:cNvPr id="8" name="">
+            <a:extLst xmlns:a="http://schemas.openxmlformats.org/drawingml/2006/main">
+              <a:ext uri="{FF2B5EF4-FFF2-40B4-BE49-F238E27FC236}">
+                <a16:creationId xmlns:a16="http://schemas.microsoft.com/office/drawing/2014/main" id="{E5134F14-23A3-4FE0-AC4D-9D95E91E94FD}"/>
+              </a:ext>
+            </a:extLst>
+          </p:cNvPr>
+          <p:cNvSpPr>
+            <a:spLocks xmlns:a="http://schemas.openxmlformats.org/drawingml/2006/main" noGrp="1"/>
+          </p:cNvSpPr>
+          <p:nvPr/>
+        </p:nvSpPr>
+        <p:spPr>
+          <a:xfrm xmlns:a="http://schemas.openxmlformats.org/drawingml/2006/main">
+            <a:off x="514350" y="1866900"/>
+            <a:ext cx="10906125" cy="628650"/>
+          </a:xfrm>
+          <a:prstGeom xmlns:a="http://schemas.openxmlformats.org/drawingml/2006/main" prst="rect">
+            <a:avLst/>
+          </a:prstGeom>
+          <a:solidFill xmlns:a="http://schemas.openxmlformats.org/drawingml/2006/main">
+            <a:srgbClr val="FFFFFF"/>
+          </a:solidFill>
+          <a:ln xmlns:a="http://schemas.openxmlformats.org/drawingml/2006/main" w="7620">
+            <a:solidFill>
+              <a:srgbClr val="CBD5E1"/>
+            </a:solidFill>
+            <a:prstDash val="solid"/>
+          </a:ln>
+        </p:spPr>
+      </p:sp>
+      <p:sp>
+        <p:nvSpPr>
+          <p:cNvPr id="9" name="">
+            <a:extLst xmlns:a="http://schemas.openxmlformats.org/drawingml/2006/main">
+              <a:ext uri="{FF2B5EF4-FFF2-40B4-BE49-F238E27FC236}">
+                <a16:creationId xmlns:a16="http://schemas.microsoft.com/office/drawing/2014/main" id="{ABFB8220-236F-45CB-8D7B-2082AA85C7C6}"/>
+              </a:ext>
+            </a:extLst>
+          </p:cNvPr>
+          <p:cNvSpPr>
+            <a:spLocks xmlns:a="http://schemas.openxmlformats.org/drawingml/2006/main" noGrp="1"/>
+          </p:cNvSpPr>
+          <p:nvPr/>
+        </p:nvSpPr>
+        <p:spPr>
+          <a:xfrm xmlns:a="http://schemas.openxmlformats.org/drawingml/2006/main">
+            <a:off x="600075" y="1952625"/>
+            <a:ext cx="2305050" cy="495300"/>
+          </a:xfrm>
+          <a:prstGeom xmlns:a="http://schemas.openxmlformats.org/drawingml/2006/main" prst="rect">
+            <a:avLst/>
+          </a:prstGeom>
+          <a:noFill xmlns:a="http://schemas.openxmlformats.org/drawingml/2006/main"/>
+          <a:ln xmlns:a="http://schemas.openxmlformats.org/drawingml/2006/main" w="0">
+            <a:noFill/>
+            <a:prstDash val="solid"/>
+          </a:ln>
+        </p:spPr>
+        <p:txBody>
+          <a:bodyPr xmlns:a="http://schemas.openxmlformats.org/drawingml/2006/main" anchor="ctr"/>
+          <a:lstStyle xmlns:a="http://schemas.openxmlformats.org/drawingml/2006/main"/>
+          <a:p xmlns:a="http://schemas.openxmlformats.org/drawingml/2006/main">
+            <a:pPr algn="l">
+              <a:defRPr sz="1125" b="1">
+                <a:solidFill>
+                  <a:srgbClr val="DC2626"/>
+                </a:solidFill>
+              </a:defRPr>
+            </a:pPr>
+            <a:r>
+              <a:rPr sz="1125" b="1">
+                <a:solidFill>
+                  <a:srgbClr val="DC2626"/>
+                </a:solidFill>
+              </a:rPr>
+              <a:t>Late replay H2D</a:t>
+            </a:r>
+          </a:p>
+        </p:txBody>
+      </p:sp>
+      <p:sp>
+        <p:nvSpPr>
+          <p:cNvPr id="10" name="">
+            <a:extLst xmlns:a="http://schemas.openxmlformats.org/drawingml/2006/main">
+              <a:ext uri="{FF2B5EF4-FFF2-40B4-BE49-F238E27FC236}">
+                <a16:creationId xmlns:a16="http://schemas.microsoft.com/office/drawing/2014/main" id="{1B944896-6C53-472E-8BE5-94614E9E7C17}"/>
+              </a:ext>
+            </a:extLst>
+          </p:cNvPr>
+          <p:cNvSpPr>
+            <a:spLocks xmlns:a="http://schemas.openxmlformats.org/drawingml/2006/main" noGrp="1"/>
+          </p:cNvSpPr>
+          <p:nvPr/>
+        </p:nvSpPr>
+        <p:spPr>
+          <a:xfrm xmlns:a="http://schemas.openxmlformats.org/drawingml/2006/main">
+            <a:off x="3076575" y="1952625"/>
+            <a:ext cx="2209800" cy="495300"/>
+          </a:xfrm>
+          <a:prstGeom xmlns:a="http://schemas.openxmlformats.org/drawingml/2006/main" prst="rect">
+            <a:avLst/>
+          </a:prstGeom>
+          <a:noFill xmlns:a="http://schemas.openxmlformats.org/drawingml/2006/main"/>
+          <a:ln xmlns:a="http://schemas.openxmlformats.org/drawingml/2006/main" w="0">
+            <a:noFill/>
+            <a:prstDash val="solid"/>
+          </a:ln>
+        </p:spPr>
+        <p:txBody>
+          <a:bodyPr xmlns:a="http://schemas.openxmlformats.org/drawingml/2006/main" anchor="ctr"/>
+          <a:lstStyle xmlns:a="http://schemas.openxmlformats.org/drawingml/2006/main"/>
+          <a:p xmlns:a="http://schemas.openxmlformats.org/drawingml/2006/main">
+            <a:pPr algn="l">
+              <a:defRPr sz="1125" b="0">
+                <a:solidFill>
+                  <a:srgbClr val="334155"/>
+                </a:solidFill>
+              </a:defRPr>
+            </a:pPr>
+            <a:r>
+              <a:rPr sz="1125" b="0">
+                <a:solidFill>
+                  <a:srgbClr val="334155"/>
+                </a:solidFill>
+              </a:rPr>
+              <a:t>deadline-aware KV queue</a:t>
+            </a:r>
+          </a:p>
+        </p:txBody>
+      </p:sp>
+      <p:sp>
+        <p:nvSpPr>
+          <p:cNvPr id="11" name="">
+            <a:extLst xmlns:a="http://schemas.openxmlformats.org/drawingml/2006/main">
+              <a:ext uri="{FF2B5EF4-FFF2-40B4-BE49-F238E27FC236}">
+                <a16:creationId xmlns:a16="http://schemas.microsoft.com/office/drawing/2014/main" id="{4A95457C-6754-4E7C-A608-230CC9DAA33E}"/>
+              </a:ext>
+            </a:extLst>
+          </p:cNvPr>
+          <p:cNvSpPr>
+            <a:spLocks xmlns:a="http://schemas.openxmlformats.org/drawingml/2006/main" noGrp="1"/>
+          </p:cNvSpPr>
+          <p:nvPr/>
+        </p:nvSpPr>
+        <p:spPr>
+          <a:xfrm xmlns:a="http://schemas.openxmlformats.org/drawingml/2006/main">
+            <a:off x="5457825" y="1952625"/>
+            <a:ext cx="3495675" cy="495300"/>
+          </a:xfrm>
+          <a:prstGeom xmlns:a="http://schemas.openxmlformats.org/drawingml/2006/main" prst="rect">
+            <a:avLst/>
+          </a:prstGeom>
+          <a:noFill xmlns:a="http://schemas.openxmlformats.org/drawingml/2006/main"/>
+          <a:ln xmlns:a="http://schemas.openxmlformats.org/drawingml/2006/main" w="0">
+            <a:noFill/>
+            <a:prstDash val="solid"/>
+          </a:ln>
+        </p:spPr>
+        <p:txBody>
+          <a:bodyPr xmlns:a="http://schemas.openxmlformats.org/drawingml/2006/main" anchor="ctr"/>
+          <a:lstStyle xmlns:a="http://schemas.openxmlformats.org/drawingml/2006/main"/>
+          <a:p xmlns:a="http://schemas.openxmlformats.org/drawingml/2006/main">
+            <a:pPr algn="l">
+              <a:defRPr sz="1125" b="0">
+                <a:solidFill>
+                  <a:srgbClr val="334155"/>
+                </a:solidFill>
+              </a:defRPr>
+            </a:pPr>
+            <a:r>
+              <a:rPr sz="1125" b="0">
+                <a:solidFill>
+                  <a:srgbClr val="334155"/>
+                </a:solidFill>
+              </a:rPr>
+              <a:t>cuts time spent waiting for urgent KV</a:t>
+            </a:r>
+          </a:p>
+        </p:txBody>
+      </p:sp>
+      <p:sp>
+        <p:nvSpPr>
+          <p:cNvPr id="12" name="">
+            <a:extLst xmlns:a="http://schemas.openxmlformats.org/drawingml/2006/main">
+              <a:ext uri="{FF2B5EF4-FFF2-40B4-BE49-F238E27FC236}">
+                <a16:creationId xmlns:a16="http://schemas.microsoft.com/office/drawing/2014/main" id="{C88DF3DE-418F-4A38-A1AF-6D82D9AE12C3}"/>
+              </a:ext>
+            </a:extLst>
+          </p:cNvPr>
+          <p:cNvSpPr>
+            <a:spLocks xmlns:a="http://schemas.openxmlformats.org/drawingml/2006/main" noGrp="1"/>
+          </p:cNvSpPr>
+          <p:nvPr/>
+        </p:nvSpPr>
+        <p:spPr>
+          <a:xfrm xmlns:a="http://schemas.openxmlformats.org/drawingml/2006/main">
+            <a:off x="9124950" y="1952625"/>
+            <a:ext cx="2209800" cy="495300"/>
+          </a:xfrm>
+          <a:prstGeom xmlns:a="http://schemas.openxmlformats.org/drawingml/2006/main" prst="rect">
+            <a:avLst/>
+          </a:prstGeom>
+          <a:noFill xmlns:a="http://schemas.openxmlformats.org/drawingml/2006/main"/>
+          <a:ln xmlns:a="http://schemas.openxmlformats.org/drawingml/2006/main" w="0">
+            <a:noFill/>
+            <a:prstDash val="solid"/>
+          </a:ln>
+        </p:spPr>
+        <p:txBody>
+          <a:bodyPr xmlns:a="http://schemas.openxmlformats.org/drawingml/2006/main" anchor="ctr"/>
+          <a:lstStyle xmlns:a="http://schemas.openxmlformats.org/drawingml/2006/main"/>
+          <a:p xmlns:a="http://schemas.openxmlformats.org/drawingml/2006/main">
+            <a:pPr algn="l">
+              <a:defRPr sz="1125" b="1">
                 <a:solidFill>
                   <a:srgbClr val="2563EB"/>
                 </a:solidFill>
               </a:defRPr>
             </a:pPr>
             <a:r>
-              <a:rPr sz="2025" b="1">
+              <a:rPr sz="1125" b="1">
                 <a:solidFill>
                   <a:srgbClr val="2563EB"/>
                 </a:solidFill>
               </a:rPr>
-              <a:t>•</a:t>
-            </a:r>
-          </a:p>
-        </p:txBody>
-      </p:sp>
-      <p:sp>
-        <p:nvSpPr>
-          <p:cNvPr id="4" name="">
-            <a:extLst xmlns:a="http://schemas.openxmlformats.org/drawingml/2006/main">
-              <a:ext uri="{FF2B5EF4-FFF2-40B4-BE49-F238E27FC236}">
-                <a16:creationId xmlns:a16="http://schemas.microsoft.com/office/drawing/2014/main" id="{69F336FE-CDD9-4133-966A-E9A0AD09D280}"/>
-              </a:ext>
-            </a:extLst>
-          </p:cNvPr>
-          <p:cNvSpPr>
-            <a:spLocks xmlns:a="http://schemas.openxmlformats.org/drawingml/2006/main" noGrp="1"/>
-          </p:cNvSpPr>
-          <p:nvPr/>
-        </p:nvSpPr>
-        <p:spPr>
-          <a:xfrm xmlns:a="http://schemas.openxmlformats.org/drawingml/2006/main">
-            <a:off x="1162050" y="1581150"/>
-            <a:ext cx="9715500" cy="514350"/>
-          </a:xfrm>
-          <a:prstGeom xmlns:a="http://schemas.openxmlformats.org/drawingml/2006/main" prst="rect">
-            <a:avLst/>
-          </a:prstGeom>
-          <a:noFill xmlns:a="http://schemas.openxmlformats.org/drawingml/2006/main"/>
-          <a:ln xmlns:a="http://schemas.openxmlformats.org/drawingml/2006/main" w="0">
-            <a:noFill/>
-            <a:prstDash val="solid"/>
-          </a:ln>
-        </p:spPr>
-        <p:txBody>
-          <a:bodyPr xmlns:a="http://schemas.openxmlformats.org/drawingml/2006/main" anchor="t"/>
-          <a:lstStyle xmlns:a="http://schemas.openxmlformats.org/drawingml/2006/main"/>
-          <a:p xmlns:a="http://schemas.openxmlformats.org/drawingml/2006/main">
-            <a:pPr algn="l">
-              <a:defRPr sz="1875" b="0">
+              <a:t>10-20% replay latency</a:t>
+            </a:r>
+          </a:p>
+        </p:txBody>
+      </p:sp>
+      <p:sp>
+        <p:nvSpPr>
+          <p:cNvPr id="13" name="">
+            <a:extLst xmlns:a="http://schemas.openxmlformats.org/drawingml/2006/main">
+              <a:ext uri="{FF2B5EF4-FFF2-40B4-BE49-F238E27FC236}">
+                <a16:creationId xmlns:a16="http://schemas.microsoft.com/office/drawing/2014/main" id="{43F9E836-9FA0-46AA-91A1-343DB91D5A2A}"/>
+              </a:ext>
+            </a:extLst>
+          </p:cNvPr>
+          <p:cNvSpPr>
+            <a:spLocks xmlns:a="http://schemas.openxmlformats.org/drawingml/2006/main" noGrp="1"/>
+          </p:cNvSpPr>
+          <p:nvPr/>
+        </p:nvSpPr>
+        <p:spPr>
+          <a:xfrm xmlns:a="http://schemas.openxmlformats.org/drawingml/2006/main">
+            <a:off x="514350" y="2495550"/>
+            <a:ext cx="10906125" cy="628650"/>
+          </a:xfrm>
+          <a:prstGeom xmlns:a="http://schemas.openxmlformats.org/drawingml/2006/main" prst="rect">
+            <a:avLst/>
+          </a:prstGeom>
+          <a:solidFill xmlns:a="http://schemas.openxmlformats.org/drawingml/2006/main">
+            <a:srgbClr val="F8FAFC"/>
+          </a:solidFill>
+          <a:ln xmlns:a="http://schemas.openxmlformats.org/drawingml/2006/main" w="7620">
+            <a:solidFill>
+              <a:srgbClr val="CBD5E1"/>
+            </a:solidFill>
+            <a:prstDash val="solid"/>
+          </a:ln>
+        </p:spPr>
+      </p:sp>
+      <p:sp>
+        <p:nvSpPr>
+          <p:cNvPr id="14" name="">
+            <a:extLst xmlns:a="http://schemas.openxmlformats.org/drawingml/2006/main">
+              <a:ext uri="{FF2B5EF4-FFF2-40B4-BE49-F238E27FC236}">
+                <a16:creationId xmlns:a16="http://schemas.microsoft.com/office/drawing/2014/main" id="{400E382B-1EBA-4A9D-A7FF-85068CC0DFDD}"/>
+              </a:ext>
+            </a:extLst>
+          </p:cNvPr>
+          <p:cNvSpPr>
+            <a:spLocks xmlns:a="http://schemas.openxmlformats.org/drawingml/2006/main" noGrp="1"/>
+          </p:cNvSpPr>
+          <p:nvPr/>
+        </p:nvSpPr>
+        <p:spPr>
+          <a:xfrm xmlns:a="http://schemas.openxmlformats.org/drawingml/2006/main">
+            <a:off x="600075" y="2581275"/>
+            <a:ext cx="2305050" cy="495300"/>
+          </a:xfrm>
+          <a:prstGeom xmlns:a="http://schemas.openxmlformats.org/drawingml/2006/main" prst="rect">
+            <a:avLst/>
+          </a:prstGeom>
+          <a:noFill xmlns:a="http://schemas.openxmlformats.org/drawingml/2006/main"/>
+          <a:ln xmlns:a="http://schemas.openxmlformats.org/drawingml/2006/main" w="0">
+            <a:noFill/>
+            <a:prstDash val="solid"/>
+          </a:ln>
+        </p:spPr>
+        <p:txBody>
+          <a:bodyPr xmlns:a="http://schemas.openxmlformats.org/drawingml/2006/main" anchor="ctr"/>
+          <a:lstStyle xmlns:a="http://schemas.openxmlformats.org/drawingml/2006/main"/>
+          <a:p xmlns:a="http://schemas.openxmlformats.org/drawingml/2006/main">
+            <a:pPr algn="l">
+              <a:defRPr sz="1125" b="1">
+                <a:solidFill>
+                  <a:srgbClr val="CA8A04"/>
+                </a:solidFill>
+              </a:defRPr>
+            </a:pPr>
+            <a:r>
+              <a:rPr sz="1125" b="1">
+                <a:solidFill>
+                  <a:srgbClr val="CA8A04"/>
+                </a:solidFill>
+              </a:rPr>
+              <a:t>Replay recomputes old prefix</a:t>
+            </a:r>
+          </a:p>
+        </p:txBody>
+      </p:sp>
+      <p:sp>
+        <p:nvSpPr>
+          <p:cNvPr id="15" name="">
+            <a:extLst xmlns:a="http://schemas.openxmlformats.org/drawingml/2006/main">
+              <a:ext uri="{FF2B5EF4-FFF2-40B4-BE49-F238E27FC236}">
+                <a16:creationId xmlns:a16="http://schemas.microsoft.com/office/drawing/2014/main" id="{019C9FE1-AD6D-44E9-B7BE-A52810251BD3}"/>
+              </a:ext>
+            </a:extLst>
+          </p:cNvPr>
+          <p:cNvSpPr>
+            <a:spLocks xmlns:a="http://schemas.openxmlformats.org/drawingml/2006/main" noGrp="1"/>
+          </p:cNvSpPr>
+          <p:nvPr/>
+        </p:nvSpPr>
+        <p:spPr>
+          <a:xfrm xmlns:a="http://schemas.openxmlformats.org/drawingml/2006/main">
+            <a:off x="3076575" y="2581275"/>
+            <a:ext cx="2209800" cy="495300"/>
+          </a:xfrm>
+          <a:prstGeom xmlns:a="http://schemas.openxmlformats.org/drawingml/2006/main" prst="rect">
+            <a:avLst/>
+          </a:prstGeom>
+          <a:noFill xmlns:a="http://schemas.openxmlformats.org/drawingml/2006/main"/>
+          <a:ln xmlns:a="http://schemas.openxmlformats.org/drawingml/2006/main" w="0">
+            <a:noFill/>
+            <a:prstDash val="solid"/>
+          </a:ln>
+        </p:spPr>
+        <p:txBody>
+          <a:bodyPr xmlns:a="http://schemas.openxmlformats.org/drawingml/2006/main" anchor="ctr"/>
+          <a:lstStyle xmlns:a="http://schemas.openxmlformats.org/drawingml/2006/main"/>
+          <a:p xmlns:a="http://schemas.openxmlformats.org/drawingml/2006/main">
+            <a:pPr algn="l">
+              <a:defRPr sz="1125" b="0">
                 <a:solidFill>
                   <a:srgbClr val="334155"/>
                 </a:solidFill>
               </a:defRPr>
             </a:pPr>
             <a:r>
-              <a:rPr sz="1875" b="0">
+              <a:rPr sz="1125" b="0">
                 <a:solidFill>
                   <a:srgbClr val="334155"/>
                 </a:solidFill>
               </a:rPr>
-              <a:t>10-30% lower post-tool replay latency when urgent KV is ready before replay.</a:t>
-            </a:r>
-          </a:p>
-        </p:txBody>
-      </p:sp>
-      <p:sp>
-        <p:nvSpPr>
-          <p:cNvPr id="5" name="">
-            <a:extLst xmlns:a="http://schemas.openxmlformats.org/drawingml/2006/main">
-              <a:ext uri="{FF2B5EF4-FFF2-40B4-BE49-F238E27FC236}">
-                <a16:creationId xmlns:a16="http://schemas.microsoft.com/office/drawing/2014/main" id="{A48ED84E-FB21-4227-870A-F00D16C80DD8}"/>
-              </a:ext>
-            </a:extLst>
-          </p:cNvPr>
-          <p:cNvSpPr>
-            <a:spLocks xmlns:a="http://schemas.openxmlformats.org/drawingml/2006/main" noGrp="1"/>
-          </p:cNvSpPr>
-          <p:nvPr/>
-        </p:nvSpPr>
-        <p:spPr>
-          <a:xfrm xmlns:a="http://schemas.openxmlformats.org/drawingml/2006/main">
-            <a:off x="876300" y="2247900"/>
-            <a:ext cx="190500" cy="304800"/>
-          </a:xfrm>
-          <a:prstGeom xmlns:a="http://schemas.openxmlformats.org/drawingml/2006/main" prst="rect">
-            <a:avLst/>
-          </a:prstGeom>
-          <a:noFill xmlns:a="http://schemas.openxmlformats.org/drawingml/2006/main"/>
-          <a:ln xmlns:a="http://schemas.openxmlformats.org/drawingml/2006/main" w="0">
-            <a:noFill/>
-            <a:prstDash val="solid"/>
-          </a:ln>
-        </p:spPr>
-        <p:txBody>
-          <a:bodyPr xmlns:a="http://schemas.openxmlformats.org/drawingml/2006/main" anchor="t"/>
-          <a:lstStyle xmlns:a="http://schemas.openxmlformats.org/drawingml/2006/main"/>
-          <a:p xmlns:a="http://schemas.openxmlformats.org/drawingml/2006/main">
-            <a:pPr algn="l">
-              <a:defRPr sz="2025" b="1">
+              <a:t>residency protection</a:t>
+            </a:r>
+          </a:p>
+        </p:txBody>
+      </p:sp>
+      <p:sp>
+        <p:nvSpPr>
+          <p:cNvPr id="16" name="">
+            <a:extLst xmlns:a="http://schemas.openxmlformats.org/drawingml/2006/main">
+              <a:ext uri="{FF2B5EF4-FFF2-40B4-BE49-F238E27FC236}">
+                <a16:creationId xmlns:a16="http://schemas.microsoft.com/office/drawing/2014/main" id="{423FA0F1-FB27-4EB9-9ACE-6CAAFF4DC8BA}"/>
+              </a:ext>
+            </a:extLst>
+          </p:cNvPr>
+          <p:cNvSpPr>
+            <a:spLocks xmlns:a="http://schemas.openxmlformats.org/drawingml/2006/main" noGrp="1"/>
+          </p:cNvSpPr>
+          <p:nvPr/>
+        </p:nvSpPr>
+        <p:spPr>
+          <a:xfrm xmlns:a="http://schemas.openxmlformats.org/drawingml/2006/main">
+            <a:off x="5457825" y="2581275"/>
+            <a:ext cx="3495675" cy="495300"/>
+          </a:xfrm>
+          <a:prstGeom xmlns:a="http://schemas.openxmlformats.org/drawingml/2006/main" prst="rect">
+            <a:avLst/>
+          </a:prstGeom>
+          <a:noFill xmlns:a="http://schemas.openxmlformats.org/drawingml/2006/main"/>
+          <a:ln xmlns:a="http://schemas.openxmlformats.org/drawingml/2006/main" w="0">
+            <a:noFill/>
+            <a:prstDash val="solid"/>
+          </a:ln>
+        </p:spPr>
+        <p:txBody>
+          <a:bodyPr xmlns:a="http://schemas.openxmlformats.org/drawingml/2006/main" anchor="ctr"/>
+          <a:lstStyle xmlns:a="http://schemas.openxmlformats.org/drawingml/2006/main"/>
+          <a:p xmlns:a="http://schemas.openxmlformats.org/drawingml/2006/main">
+            <a:pPr algn="l">
+              <a:defRPr sz="1125" b="0">
+                <a:solidFill>
+                  <a:srgbClr val="334155"/>
+                </a:solidFill>
+              </a:defRPr>
+            </a:pPr>
+            <a:r>
+              <a:rPr sz="1125" b="0">
+                <a:solidFill>
+                  <a:srgbClr val="334155"/>
+                </a:solidFill>
+              </a:rPr>
+              <a:t>keeps useful KV available until reuse</a:t>
+            </a:r>
+          </a:p>
+        </p:txBody>
+      </p:sp>
+      <p:sp>
+        <p:nvSpPr>
+          <p:cNvPr id="17" name="">
+            <a:extLst xmlns:a="http://schemas.openxmlformats.org/drawingml/2006/main">
+              <a:ext uri="{FF2B5EF4-FFF2-40B4-BE49-F238E27FC236}">
+                <a16:creationId xmlns:a16="http://schemas.microsoft.com/office/drawing/2014/main" id="{789C0981-73BC-436E-B1C4-253CFD5A5FD1}"/>
+              </a:ext>
+            </a:extLst>
+          </p:cNvPr>
+          <p:cNvSpPr>
+            <a:spLocks xmlns:a="http://schemas.openxmlformats.org/drawingml/2006/main" noGrp="1"/>
+          </p:cNvSpPr>
+          <p:nvPr/>
+        </p:nvSpPr>
+        <p:spPr>
+          <a:xfrm xmlns:a="http://schemas.openxmlformats.org/drawingml/2006/main">
+            <a:off x="9124950" y="2581275"/>
+            <a:ext cx="2209800" cy="495300"/>
+          </a:xfrm>
+          <a:prstGeom xmlns:a="http://schemas.openxmlformats.org/drawingml/2006/main" prst="rect">
+            <a:avLst/>
+          </a:prstGeom>
+          <a:noFill xmlns:a="http://schemas.openxmlformats.org/drawingml/2006/main"/>
+          <a:ln xmlns:a="http://schemas.openxmlformats.org/drawingml/2006/main" w="0">
+            <a:noFill/>
+            <a:prstDash val="solid"/>
+          </a:ln>
+        </p:spPr>
+        <p:txBody>
+          <a:bodyPr xmlns:a="http://schemas.openxmlformats.org/drawingml/2006/main" anchor="ctr"/>
+          <a:lstStyle xmlns:a="http://schemas.openxmlformats.org/drawingml/2006/main"/>
+          <a:p xmlns:a="http://schemas.openxmlformats.org/drawingml/2006/main">
+            <a:pPr algn="l">
+              <a:defRPr sz="1125" b="1">
                 <a:solidFill>
                   <a:srgbClr val="9333EA"/>
                 </a:solidFill>
               </a:defRPr>
             </a:pPr>
             <a:r>
-              <a:rPr sz="2025" b="1">
+              <a:rPr sz="1125" b="1">
                 <a:solidFill>
                   <a:srgbClr val="9333EA"/>
                 </a:solidFill>
               </a:rPr>
-              <a:t>•</a:t>
-            </a:r>
-          </a:p>
-        </p:txBody>
-      </p:sp>
-      <p:sp>
-        <p:nvSpPr>
-          <p:cNvPr id="6" name="">
-            <a:extLst xmlns:a="http://schemas.openxmlformats.org/drawingml/2006/main">
-              <a:ext uri="{FF2B5EF4-FFF2-40B4-BE49-F238E27FC236}">
-                <a16:creationId xmlns:a16="http://schemas.microsoft.com/office/drawing/2014/main" id="{2D9B5E78-CD7F-4A97-B493-118F5B2FF0FD}"/>
-              </a:ext>
-            </a:extLst>
-          </p:cNvPr>
-          <p:cNvSpPr>
-            <a:spLocks xmlns:a="http://schemas.openxmlformats.org/drawingml/2006/main" noGrp="1"/>
-          </p:cNvSpPr>
-          <p:nvPr/>
-        </p:nvSpPr>
-        <p:spPr>
-          <a:xfrm xmlns:a="http://schemas.openxmlformats.org/drawingml/2006/main">
-            <a:off x="1162050" y="2266950"/>
-            <a:ext cx="9715500" cy="514350"/>
-          </a:xfrm>
-          <a:prstGeom xmlns:a="http://schemas.openxmlformats.org/drawingml/2006/main" prst="rect">
-            <a:avLst/>
-          </a:prstGeom>
-          <a:noFill xmlns:a="http://schemas.openxmlformats.org/drawingml/2006/main"/>
-          <a:ln xmlns:a="http://schemas.openxmlformats.org/drawingml/2006/main" w="0">
-            <a:noFill/>
-            <a:prstDash val="solid"/>
-          </a:ln>
-        </p:spPr>
-        <p:txBody>
-          <a:bodyPr xmlns:a="http://schemas.openxmlformats.org/drawingml/2006/main" anchor="t"/>
-          <a:lstStyle xmlns:a="http://schemas.openxmlformats.org/drawingml/2006/main"/>
-          <a:p xmlns:a="http://schemas.openxmlformats.org/drawingml/2006/main">
-            <a:pPr algn="l">
-              <a:defRPr sz="1875" b="0">
+              <a:t>up to 20-30%</a:t>
+            </a:r>
+          </a:p>
+        </p:txBody>
+      </p:sp>
+      <p:sp>
+        <p:nvSpPr>
+          <p:cNvPr id="18" name="">
+            <a:extLst xmlns:a="http://schemas.openxmlformats.org/drawingml/2006/main">
+              <a:ext uri="{FF2B5EF4-FFF2-40B4-BE49-F238E27FC236}">
+                <a16:creationId xmlns:a16="http://schemas.microsoft.com/office/drawing/2014/main" id="{9D9381C7-ABE4-47AC-B032-DEBE03B10F85}"/>
+              </a:ext>
+            </a:extLst>
+          </p:cNvPr>
+          <p:cNvSpPr>
+            <a:spLocks xmlns:a="http://schemas.openxmlformats.org/drawingml/2006/main" noGrp="1"/>
+          </p:cNvSpPr>
+          <p:nvPr/>
+        </p:nvSpPr>
+        <p:spPr>
+          <a:xfrm xmlns:a="http://schemas.openxmlformats.org/drawingml/2006/main">
+            <a:off x="514350" y="3124200"/>
+            <a:ext cx="10906125" cy="628650"/>
+          </a:xfrm>
+          <a:prstGeom xmlns:a="http://schemas.openxmlformats.org/drawingml/2006/main" prst="rect">
+            <a:avLst/>
+          </a:prstGeom>
+          <a:solidFill xmlns:a="http://schemas.openxmlformats.org/drawingml/2006/main">
+            <a:srgbClr val="FFFFFF"/>
+          </a:solidFill>
+          <a:ln xmlns:a="http://schemas.openxmlformats.org/drawingml/2006/main" w="7620">
+            <a:solidFill>
+              <a:srgbClr val="CBD5E1"/>
+            </a:solidFill>
+            <a:prstDash val="solid"/>
+          </a:ln>
+        </p:spPr>
+      </p:sp>
+      <p:sp>
+        <p:nvSpPr>
+          <p:cNvPr id="19" name="">
+            <a:extLst xmlns:a="http://schemas.openxmlformats.org/drawingml/2006/main">
+              <a:ext uri="{FF2B5EF4-FFF2-40B4-BE49-F238E27FC236}">
+                <a16:creationId xmlns:a16="http://schemas.microsoft.com/office/drawing/2014/main" id="{A6172B88-46C9-4964-B18A-29D3E3AC4579}"/>
+              </a:ext>
+            </a:extLst>
+          </p:cNvPr>
+          <p:cNvSpPr>
+            <a:spLocks xmlns:a="http://schemas.openxmlformats.org/drawingml/2006/main" noGrp="1"/>
+          </p:cNvSpPr>
+          <p:nvPr/>
+        </p:nvSpPr>
+        <p:spPr>
+          <a:xfrm xmlns:a="http://schemas.openxmlformats.org/drawingml/2006/main">
+            <a:off x="600075" y="3209925"/>
+            <a:ext cx="2305050" cy="495300"/>
+          </a:xfrm>
+          <a:prstGeom xmlns:a="http://schemas.openxmlformats.org/drawingml/2006/main" prst="rect">
+            <a:avLst/>
+          </a:prstGeom>
+          <a:noFill xmlns:a="http://schemas.openxmlformats.org/drawingml/2006/main"/>
+          <a:ln xmlns:a="http://schemas.openxmlformats.org/drawingml/2006/main" w="0">
+            <a:noFill/>
+            <a:prstDash val="solid"/>
+          </a:ln>
+        </p:spPr>
+        <p:txBody>
+          <a:bodyPr xmlns:a="http://schemas.openxmlformats.org/drawingml/2006/main" anchor="ctr"/>
+          <a:lstStyle xmlns:a="http://schemas.openxmlformats.org/drawingml/2006/main"/>
+          <a:p xmlns:a="http://schemas.openxmlformats.org/drawingml/2006/main">
+            <a:pPr algn="l">
+              <a:defRPr sz="1125" b="1">
+                <a:solidFill>
+                  <a:srgbClr val="9333EA"/>
+                </a:solidFill>
+              </a:defRPr>
+            </a:pPr>
+            <a:r>
+              <a:rPr sz="1125" b="1">
+                <a:solidFill>
+                  <a:srgbClr val="9333EA"/>
+                </a:solidFill>
+              </a:rPr>
+              <a:t>Hints finish after deadline</a:t>
+            </a:r>
+          </a:p>
+        </p:txBody>
+      </p:sp>
+      <p:sp>
+        <p:nvSpPr>
+          <p:cNvPr id="20" name="">
+            <a:extLst xmlns:a="http://schemas.openxmlformats.org/drawingml/2006/main">
+              <a:ext uri="{FF2B5EF4-FFF2-40B4-BE49-F238E27FC236}">
+                <a16:creationId xmlns:a16="http://schemas.microsoft.com/office/drawing/2014/main" id="{A9418E71-4CE4-4075-8DD0-8FBB88D3C6E2}"/>
+              </a:ext>
+            </a:extLst>
+          </p:cNvPr>
+          <p:cNvSpPr>
+            <a:spLocks xmlns:a="http://schemas.openxmlformats.org/drawingml/2006/main" noGrp="1"/>
+          </p:cNvSpPr>
+          <p:nvPr/>
+        </p:nvSpPr>
+        <p:spPr>
+          <a:xfrm xmlns:a="http://schemas.openxmlformats.org/drawingml/2006/main">
+            <a:off x="3076575" y="3209925"/>
+            <a:ext cx="2209800" cy="495300"/>
+          </a:xfrm>
+          <a:prstGeom xmlns:a="http://schemas.openxmlformats.org/drawingml/2006/main" prst="rect">
+            <a:avLst/>
+          </a:prstGeom>
+          <a:noFill xmlns:a="http://schemas.openxmlformats.org/drawingml/2006/main"/>
+          <a:ln xmlns:a="http://schemas.openxmlformats.org/drawingml/2006/main" w="0">
+            <a:noFill/>
+            <a:prstDash val="solid"/>
+          </a:ln>
+        </p:spPr>
+        <p:txBody>
+          <a:bodyPr xmlns:a="http://schemas.openxmlformats.org/drawingml/2006/main" anchor="ctr"/>
+          <a:lstStyle xmlns:a="http://schemas.openxmlformats.org/drawingml/2006/main"/>
+          <a:p xmlns:a="http://schemas.openxmlformats.org/drawingml/2006/main">
+            <a:pPr algn="l">
+              <a:defRPr sz="1125" b="0">
                 <a:solidFill>
                   <a:srgbClr val="334155"/>
                 </a:solidFill>
               </a:defRPr>
             </a:pPr>
             <a:r>
-              <a:rPr sz="1875" b="0">
+              <a:rPr sz="1125" b="0">
                 <a:solidFill>
                   <a:srgbClr val="334155"/>
                 </a:solidFill>
               </a:rPr>
-              <a:t>20-50% fewer late KV reloads with deadline-aware movement scheduling.</a:t>
-            </a:r>
-          </a:p>
-        </p:txBody>
-      </p:sp>
-      <p:sp>
-        <p:nvSpPr>
-          <p:cNvPr id="7" name="">
-            <a:extLst xmlns:a="http://schemas.openxmlformats.org/drawingml/2006/main">
-              <a:ext uri="{FF2B5EF4-FFF2-40B4-BE49-F238E27FC236}">
-                <a16:creationId xmlns:a16="http://schemas.microsoft.com/office/drawing/2014/main" id="{C04281E1-C78E-4ADD-AF9A-47E5E5E2A7A6}"/>
-              </a:ext>
-            </a:extLst>
-          </p:cNvPr>
-          <p:cNvSpPr>
-            <a:spLocks xmlns:a="http://schemas.openxmlformats.org/drawingml/2006/main" noGrp="1"/>
-          </p:cNvSpPr>
-          <p:nvPr/>
-        </p:nvSpPr>
-        <p:spPr>
-          <a:xfrm xmlns:a="http://schemas.openxmlformats.org/drawingml/2006/main">
-            <a:off x="876300" y="2933700"/>
-            <a:ext cx="190500" cy="304800"/>
-          </a:xfrm>
-          <a:prstGeom xmlns:a="http://schemas.openxmlformats.org/drawingml/2006/main" prst="rect">
-            <a:avLst/>
-          </a:prstGeom>
-          <a:noFill xmlns:a="http://schemas.openxmlformats.org/drawingml/2006/main"/>
-          <a:ln xmlns:a="http://schemas.openxmlformats.org/drawingml/2006/main" w="0">
-            <a:noFill/>
-            <a:prstDash val="solid"/>
-          </a:ln>
-        </p:spPr>
-        <p:txBody>
-          <a:bodyPr xmlns:a="http://schemas.openxmlformats.org/drawingml/2006/main" anchor="t"/>
-          <a:lstStyle xmlns:a="http://schemas.openxmlformats.org/drawingml/2006/main"/>
-          <a:p xmlns:a="http://schemas.openxmlformats.org/drawingml/2006/main">
-            <a:pPr algn="l">
-              <a:defRPr sz="2025" b="1">
+              <a:t>session priority metadata</a:t>
+            </a:r>
+          </a:p>
+        </p:txBody>
+      </p:sp>
+      <p:sp>
+        <p:nvSpPr>
+          <p:cNvPr id="21" name="">
+            <a:extLst xmlns:a="http://schemas.openxmlformats.org/drawingml/2006/main">
+              <a:ext uri="{FF2B5EF4-FFF2-40B4-BE49-F238E27FC236}">
+                <a16:creationId xmlns:a16="http://schemas.microsoft.com/office/drawing/2014/main" id="{85C97FC5-629A-478E-9073-4F40CCF9B670}"/>
+              </a:ext>
+            </a:extLst>
+          </p:cNvPr>
+          <p:cNvSpPr>
+            <a:spLocks xmlns:a="http://schemas.openxmlformats.org/drawingml/2006/main" noGrp="1"/>
+          </p:cNvSpPr>
+          <p:nvPr/>
+        </p:nvSpPr>
+        <p:spPr>
+          <a:xfrm xmlns:a="http://schemas.openxmlformats.org/drawingml/2006/main">
+            <a:off x="5457825" y="3209925"/>
+            <a:ext cx="3495675" cy="495300"/>
+          </a:xfrm>
+          <a:prstGeom xmlns:a="http://schemas.openxmlformats.org/drawingml/2006/main" prst="rect">
+            <a:avLst/>
+          </a:prstGeom>
+          <a:noFill xmlns:a="http://schemas.openxmlformats.org/drawingml/2006/main"/>
+          <a:ln xmlns:a="http://schemas.openxmlformats.org/drawingml/2006/main" w="0">
+            <a:noFill/>
+            <a:prstDash val="solid"/>
+          </a:ln>
+        </p:spPr>
+        <p:txBody>
+          <a:bodyPr xmlns:a="http://schemas.openxmlformats.org/drawingml/2006/main" anchor="ctr"/>
+          <a:lstStyle xmlns:a="http://schemas.openxmlformats.org/drawingml/2006/main"/>
+          <a:p xmlns:a="http://schemas.openxmlformats.org/drawingml/2006/main">
+            <a:pPr algn="l">
+              <a:defRPr sz="1125" b="0">
+                <a:solidFill>
+                  <a:srgbClr val="334155"/>
+                </a:solidFill>
+              </a:defRPr>
+            </a:pPr>
+            <a:r>
+              <a:rPr sz="1125" b="0">
+                <a:solidFill>
+                  <a:srgbClr val="334155"/>
+                </a:solidFill>
+              </a:rPr>
+              <a:t>lets urgent agents preempt low-value movement</a:t>
+            </a:r>
+          </a:p>
+        </p:txBody>
+      </p:sp>
+      <p:sp>
+        <p:nvSpPr>
+          <p:cNvPr id="22" name="">
+            <a:extLst xmlns:a="http://schemas.openxmlformats.org/drawingml/2006/main">
+              <a:ext uri="{FF2B5EF4-FFF2-40B4-BE49-F238E27FC236}">
+                <a16:creationId xmlns:a16="http://schemas.microsoft.com/office/drawing/2014/main" id="{293005FE-C61F-4419-BFE7-7A9789E0CCDC}"/>
+              </a:ext>
+            </a:extLst>
+          </p:cNvPr>
+          <p:cNvSpPr>
+            <a:spLocks xmlns:a="http://schemas.openxmlformats.org/drawingml/2006/main" noGrp="1"/>
+          </p:cNvSpPr>
+          <p:nvPr/>
+        </p:nvSpPr>
+        <p:spPr>
+          <a:xfrm xmlns:a="http://schemas.openxmlformats.org/drawingml/2006/main">
+            <a:off x="9124950" y="3209925"/>
+            <a:ext cx="2209800" cy="495300"/>
+          </a:xfrm>
+          <a:prstGeom xmlns:a="http://schemas.openxmlformats.org/drawingml/2006/main" prst="rect">
+            <a:avLst/>
+          </a:prstGeom>
+          <a:noFill xmlns:a="http://schemas.openxmlformats.org/drawingml/2006/main"/>
+          <a:ln xmlns:a="http://schemas.openxmlformats.org/drawingml/2006/main" w="0">
+            <a:noFill/>
+            <a:prstDash val="solid"/>
+          </a:ln>
+        </p:spPr>
+        <p:txBody>
+          <a:bodyPr xmlns:a="http://schemas.openxmlformats.org/drawingml/2006/main" anchor="ctr"/>
+          <a:lstStyle xmlns:a="http://schemas.openxmlformats.org/drawingml/2006/main"/>
+          <a:p xmlns:a="http://schemas.openxmlformats.org/drawingml/2006/main">
+            <a:pPr algn="l">
+              <a:defRPr sz="1125" b="1">
+                <a:solidFill>
+                  <a:srgbClr val="16A34A"/>
+                </a:solidFill>
+              </a:defRPr>
+            </a:pPr>
+            <a:r>
+              <a:rPr sz="1125" b="1">
+                <a:solidFill>
+                  <a:srgbClr val="16A34A"/>
+                </a:solidFill>
+              </a:rPr>
+              <a:t>20-50% fewer late reloads</a:t>
+            </a:r>
+          </a:p>
+        </p:txBody>
+      </p:sp>
+      <p:sp>
+        <p:nvSpPr>
+          <p:cNvPr id="23" name="">
+            <a:extLst xmlns:a="http://schemas.openxmlformats.org/drawingml/2006/main">
+              <a:ext uri="{FF2B5EF4-FFF2-40B4-BE49-F238E27FC236}">
+                <a16:creationId xmlns:a16="http://schemas.microsoft.com/office/drawing/2014/main" id="{60531866-68C7-47EF-B369-094086949282}"/>
+              </a:ext>
+            </a:extLst>
+          </p:cNvPr>
+          <p:cNvSpPr>
+            <a:spLocks xmlns:a="http://schemas.openxmlformats.org/drawingml/2006/main" noGrp="1"/>
+          </p:cNvSpPr>
+          <p:nvPr/>
+        </p:nvSpPr>
+        <p:spPr>
+          <a:xfrm xmlns:a="http://schemas.openxmlformats.org/drawingml/2006/main">
+            <a:off x="514350" y="3752850"/>
+            <a:ext cx="10906125" cy="628650"/>
+          </a:xfrm>
+          <a:prstGeom xmlns:a="http://schemas.openxmlformats.org/drawingml/2006/main" prst="rect">
+            <a:avLst/>
+          </a:prstGeom>
+          <a:solidFill xmlns:a="http://schemas.openxmlformats.org/drawingml/2006/main">
+            <a:srgbClr val="F8FAFC"/>
+          </a:solidFill>
+          <a:ln xmlns:a="http://schemas.openxmlformats.org/drawingml/2006/main" w="7620">
+            <a:solidFill>
+              <a:srgbClr val="CBD5E1"/>
+            </a:solidFill>
+            <a:prstDash val="solid"/>
+          </a:ln>
+        </p:spPr>
+      </p:sp>
+      <p:sp>
+        <p:nvSpPr>
+          <p:cNvPr id="24" name="">
+            <a:extLst xmlns:a="http://schemas.openxmlformats.org/drawingml/2006/main">
+              <a:ext uri="{FF2B5EF4-FFF2-40B4-BE49-F238E27FC236}">
+                <a16:creationId xmlns:a16="http://schemas.microsoft.com/office/drawing/2014/main" id="{3B0F4BC0-95FC-4922-AADB-B914F2CD58D1}"/>
+              </a:ext>
+            </a:extLst>
+          </p:cNvPr>
+          <p:cNvSpPr>
+            <a:spLocks xmlns:a="http://schemas.openxmlformats.org/drawingml/2006/main" noGrp="1"/>
+          </p:cNvSpPr>
+          <p:nvPr/>
+        </p:nvSpPr>
+        <p:spPr>
+          <a:xfrm xmlns:a="http://schemas.openxmlformats.org/drawingml/2006/main">
+            <a:off x="600075" y="3838575"/>
+            <a:ext cx="2305050" cy="495300"/>
+          </a:xfrm>
+          <a:prstGeom xmlns:a="http://schemas.openxmlformats.org/drawingml/2006/main" prst="rect">
+            <a:avLst/>
+          </a:prstGeom>
+          <a:noFill xmlns:a="http://schemas.openxmlformats.org/drawingml/2006/main"/>
+          <a:ln xmlns:a="http://schemas.openxmlformats.org/drawingml/2006/main" w="0">
+            <a:noFill/>
+            <a:prstDash val="solid"/>
+          </a:ln>
+        </p:spPr>
+        <p:txBody>
+          <a:bodyPr xmlns:a="http://schemas.openxmlformats.org/drawingml/2006/main" anchor="ctr"/>
+          <a:lstStyle xmlns:a="http://schemas.openxmlformats.org/drawingml/2006/main"/>
+          <a:p xmlns:a="http://schemas.openxmlformats.org/drawingml/2006/main">
+            <a:pPr algn="l">
+              <a:defRPr sz="1125" b="1">
+                <a:solidFill>
+                  <a:srgbClr val="0891B2"/>
+                </a:solidFill>
+              </a:defRPr>
+            </a:pPr>
+            <a:r>
+              <a:rPr sz="1125" b="1">
+                <a:solidFill>
+                  <a:srgbClr val="0891B2"/>
+                </a:solidFill>
+              </a:rPr>
+              <a:t>Useful prefetch is wasted</a:t>
+            </a:r>
+          </a:p>
+        </p:txBody>
+      </p:sp>
+      <p:sp>
+        <p:nvSpPr>
+          <p:cNvPr id="25" name="">
+            <a:extLst xmlns:a="http://schemas.openxmlformats.org/drawingml/2006/main">
+              <a:ext uri="{FF2B5EF4-FFF2-40B4-BE49-F238E27FC236}">
+                <a16:creationId xmlns:a16="http://schemas.microsoft.com/office/drawing/2014/main" id="{E338A250-3F34-41EB-95BE-DB3AEABF20AC}"/>
+              </a:ext>
+            </a:extLst>
+          </p:cNvPr>
+          <p:cNvSpPr>
+            <a:spLocks xmlns:a="http://schemas.openxmlformats.org/drawingml/2006/main" noGrp="1"/>
+          </p:cNvSpPr>
+          <p:nvPr/>
+        </p:nvSpPr>
+        <p:spPr>
+          <a:xfrm xmlns:a="http://schemas.openxmlformats.org/drawingml/2006/main">
+            <a:off x="3076575" y="3838575"/>
+            <a:ext cx="2209800" cy="495300"/>
+          </a:xfrm>
+          <a:prstGeom xmlns:a="http://schemas.openxmlformats.org/drawingml/2006/main" prst="rect">
+            <a:avLst/>
+          </a:prstGeom>
+          <a:noFill xmlns:a="http://schemas.openxmlformats.org/drawingml/2006/main"/>
+          <a:ln xmlns:a="http://schemas.openxmlformats.org/drawingml/2006/main" w="0">
+            <a:noFill/>
+            <a:prstDash val="solid"/>
+          </a:ln>
+        </p:spPr>
+        <p:txBody>
+          <a:bodyPr xmlns:a="http://schemas.openxmlformats.org/drawingml/2006/main" anchor="ctr"/>
+          <a:lstStyle xmlns:a="http://schemas.openxmlformats.org/drawingml/2006/main"/>
+          <a:p xmlns:a="http://schemas.openxmlformats.org/drawingml/2006/main">
+            <a:pPr algn="l">
+              <a:defRPr sz="1125" b="0">
+                <a:solidFill>
+                  <a:srgbClr val="334155"/>
+                </a:solidFill>
+              </a:defRPr>
+            </a:pPr>
+            <a:r>
+              <a:rPr sz="1125" b="0">
+                <a:solidFill>
+                  <a:srgbClr val="334155"/>
+                </a:solidFill>
+              </a:rPr>
+              <a:t>KV-aware telemetry</a:t>
+            </a:r>
+          </a:p>
+        </p:txBody>
+      </p:sp>
+      <p:sp>
+        <p:nvSpPr>
+          <p:cNvPr id="26" name="">
+            <a:extLst xmlns:a="http://schemas.openxmlformats.org/drawingml/2006/main">
+              <a:ext uri="{FF2B5EF4-FFF2-40B4-BE49-F238E27FC236}">
+                <a16:creationId xmlns:a16="http://schemas.microsoft.com/office/drawing/2014/main" id="{DBEEC0E7-FA74-4B64-9821-799B51DC5FE8}"/>
+              </a:ext>
+            </a:extLst>
+          </p:cNvPr>
+          <p:cNvSpPr>
+            <a:spLocks xmlns:a="http://schemas.openxmlformats.org/drawingml/2006/main" noGrp="1"/>
+          </p:cNvSpPr>
+          <p:nvPr/>
+        </p:nvSpPr>
+        <p:spPr>
+          <a:xfrm xmlns:a="http://schemas.openxmlformats.org/drawingml/2006/main">
+            <a:off x="5457825" y="3838575"/>
+            <a:ext cx="3495675" cy="495300"/>
+          </a:xfrm>
+          <a:prstGeom xmlns:a="http://schemas.openxmlformats.org/drawingml/2006/main" prst="rect">
+            <a:avLst/>
+          </a:prstGeom>
+          <a:noFill xmlns:a="http://schemas.openxmlformats.org/drawingml/2006/main"/>
+          <a:ln xmlns:a="http://schemas.openxmlformats.org/drawingml/2006/main" w="0">
+            <a:noFill/>
+            <a:prstDash val="solid"/>
+          </a:ln>
+        </p:spPr>
+        <p:txBody>
+          <a:bodyPr xmlns:a="http://schemas.openxmlformats.org/drawingml/2006/main" anchor="ctr"/>
+          <a:lstStyle xmlns:a="http://schemas.openxmlformats.org/drawingml/2006/main"/>
+          <a:p xmlns:a="http://schemas.openxmlformats.org/drawingml/2006/main">
+            <a:pPr algn="l">
+              <a:defRPr sz="1125" b="0">
+                <a:solidFill>
+                  <a:srgbClr val="334155"/>
+                </a:solidFill>
+              </a:defRPr>
+            </a:pPr>
+            <a:r>
+              <a:rPr sz="1125" b="0">
+                <a:solidFill>
+                  <a:srgbClr val="334155"/>
+                </a:solidFill>
+              </a:rPr>
+              <a:t>detects late, wasted, and evicted-before-use KV</a:t>
+            </a:r>
+          </a:p>
+        </p:txBody>
+      </p:sp>
+      <p:sp>
+        <p:nvSpPr>
+          <p:cNvPr id="27" name="">
+            <a:extLst xmlns:a="http://schemas.openxmlformats.org/drawingml/2006/main">
+              <a:ext uri="{FF2B5EF4-FFF2-40B4-BE49-F238E27FC236}">
+                <a16:creationId xmlns:a16="http://schemas.microsoft.com/office/drawing/2014/main" id="{84D1EA7E-03F6-4715-8325-C6E0DA1F4F53}"/>
+              </a:ext>
+            </a:extLst>
+          </p:cNvPr>
+          <p:cNvSpPr>
+            <a:spLocks xmlns:a="http://schemas.openxmlformats.org/drawingml/2006/main" noGrp="1"/>
+          </p:cNvSpPr>
+          <p:nvPr/>
+        </p:nvSpPr>
+        <p:spPr>
+          <a:xfrm xmlns:a="http://schemas.openxmlformats.org/drawingml/2006/main">
+            <a:off x="9124950" y="3838575"/>
+            <a:ext cx="2209800" cy="495300"/>
+          </a:xfrm>
+          <a:prstGeom xmlns:a="http://schemas.openxmlformats.org/drawingml/2006/main" prst="rect">
+            <a:avLst/>
+          </a:prstGeom>
+          <a:noFill xmlns:a="http://schemas.openxmlformats.org/drawingml/2006/main"/>
+          <a:ln xmlns:a="http://schemas.openxmlformats.org/drawingml/2006/main" w="0">
+            <a:noFill/>
+            <a:prstDash val="solid"/>
+          </a:ln>
+        </p:spPr>
+        <p:txBody>
+          <a:bodyPr xmlns:a="http://schemas.openxmlformats.org/drawingml/2006/main" anchor="ctr"/>
+          <a:lstStyle xmlns:a="http://schemas.openxmlformats.org/drawingml/2006/main"/>
+          <a:p xmlns:a="http://schemas.openxmlformats.org/drawingml/2006/main">
+            <a:pPr algn="l">
+              <a:defRPr sz="1125" b="1">
+                <a:solidFill>
+                  <a:srgbClr val="0891B2"/>
+                </a:solidFill>
+              </a:defRPr>
+            </a:pPr>
+            <a:r>
+              <a:rPr sz="1125" b="1">
+                <a:solidFill>
+                  <a:srgbClr val="0891B2"/>
+                </a:solidFill>
+              </a:rPr>
+              <a:t>less bandwidth waste</a:t>
+            </a:r>
+          </a:p>
+        </p:txBody>
+      </p:sp>
+      <p:sp>
+        <p:nvSpPr>
+          <p:cNvPr id="28" name="">
+            <a:extLst xmlns:a="http://schemas.openxmlformats.org/drawingml/2006/main">
+              <a:ext uri="{FF2B5EF4-FFF2-40B4-BE49-F238E27FC236}">
+                <a16:creationId xmlns:a16="http://schemas.microsoft.com/office/drawing/2014/main" id="{6B1E9538-3885-4B5E-A4F9-760C0697A257}"/>
+              </a:ext>
+            </a:extLst>
+          </p:cNvPr>
+          <p:cNvSpPr>
+            <a:spLocks xmlns:a="http://schemas.openxmlformats.org/drawingml/2006/main" noGrp="1"/>
+          </p:cNvSpPr>
+          <p:nvPr/>
+        </p:nvSpPr>
+        <p:spPr>
+          <a:xfrm xmlns:a="http://schemas.openxmlformats.org/drawingml/2006/main">
+            <a:off x="609600" y="4591050"/>
+            <a:ext cx="2381250" cy="266700"/>
+          </a:xfrm>
+          <a:prstGeom xmlns:a="http://schemas.openxmlformats.org/drawingml/2006/main" prst="rect">
+            <a:avLst/>
+          </a:prstGeom>
+          <a:noFill xmlns:a="http://schemas.openxmlformats.org/drawingml/2006/main"/>
+          <a:ln xmlns:a="http://schemas.openxmlformats.org/drawingml/2006/main" w="0">
+            <a:noFill/>
+            <a:prstDash val="solid"/>
+          </a:ln>
+        </p:spPr>
+        <p:txBody>
+          <a:bodyPr xmlns:a="http://schemas.openxmlformats.org/drawingml/2006/main" anchor="t"/>
+          <a:lstStyle xmlns:a="http://schemas.openxmlformats.org/drawingml/2006/main"/>
+          <a:p xmlns:a="http://schemas.openxmlformats.org/drawingml/2006/main">
+            <a:pPr algn="l">
+              <a:defRPr sz="1500" b="1">
+                <a:solidFill>
+                  <a:srgbClr val="0F172A"/>
+                </a:solidFill>
+              </a:defRPr>
+            </a:pPr>
+            <a:r>
+              <a:rPr sz="1500" b="1">
+                <a:solidFill>
+                  <a:srgbClr val="0F172A"/>
+                </a:solidFill>
+              </a:rPr>
+              <a:t>Range rationale</a:t>
+            </a:r>
+          </a:p>
+        </p:txBody>
+      </p:sp>
+      <p:sp>
+        <p:nvSpPr>
+          <p:cNvPr id="29" name="">
+            <a:extLst xmlns:a="http://schemas.openxmlformats.org/drawingml/2006/main">
+              <a:ext uri="{FF2B5EF4-FFF2-40B4-BE49-F238E27FC236}">
+                <a16:creationId xmlns:a16="http://schemas.microsoft.com/office/drawing/2014/main" id="{6B852242-037E-4AD6-BD2A-1709DD5294EB}"/>
+              </a:ext>
+            </a:extLst>
+          </p:cNvPr>
+          <p:cNvSpPr>
+            <a:spLocks xmlns:a="http://schemas.openxmlformats.org/drawingml/2006/main" noGrp="1"/>
+          </p:cNvSpPr>
+          <p:nvPr/>
+        </p:nvSpPr>
+        <p:spPr>
+          <a:xfrm xmlns:a="http://schemas.openxmlformats.org/drawingml/2006/main">
+            <a:off x="609600" y="4857750"/>
+            <a:ext cx="10668000" cy="323850"/>
+          </a:xfrm>
+          <a:prstGeom xmlns:a="http://schemas.openxmlformats.org/drawingml/2006/main" prst="rect">
+            <a:avLst/>
+          </a:prstGeom>
+          <a:solidFill xmlns:a="http://schemas.openxmlformats.org/drawingml/2006/main">
+            <a:srgbClr val="F1F5F9"/>
+          </a:solidFill>
+          <a:ln xmlns:a="http://schemas.openxmlformats.org/drawingml/2006/main" w="9525">
+            <a:solidFill>
+              <a:srgbClr val="CBD5E1"/>
+            </a:solidFill>
+            <a:prstDash val="solid"/>
+          </a:ln>
+        </p:spPr>
+      </p:sp>
+      <p:sp>
+        <p:nvSpPr>
+          <p:cNvPr id="30" name="">
+            <a:extLst xmlns:a="http://schemas.openxmlformats.org/drawingml/2006/main">
+              <a:ext uri="{FF2B5EF4-FFF2-40B4-BE49-F238E27FC236}">
+                <a16:creationId xmlns:a16="http://schemas.microsoft.com/office/drawing/2014/main" id="{FAD62488-C574-4F7A-8D30-CACAA71337DF}"/>
+              </a:ext>
+            </a:extLst>
+          </p:cNvPr>
+          <p:cNvSpPr>
+            <a:spLocks xmlns:a="http://schemas.openxmlformats.org/drawingml/2006/main" noGrp="1"/>
+          </p:cNvSpPr>
+          <p:nvPr/>
+        </p:nvSpPr>
+        <p:spPr>
+          <a:xfrm xmlns:a="http://schemas.openxmlformats.org/drawingml/2006/main">
+            <a:off x="695325" y="4953000"/>
+            <a:ext cx="2019300" cy="209550"/>
+          </a:xfrm>
+          <a:prstGeom xmlns:a="http://schemas.openxmlformats.org/drawingml/2006/main" prst="rect">
+            <a:avLst/>
+          </a:prstGeom>
+          <a:noFill xmlns:a="http://schemas.openxmlformats.org/drawingml/2006/main"/>
+          <a:ln xmlns:a="http://schemas.openxmlformats.org/drawingml/2006/main" w="0">
+            <a:noFill/>
+            <a:prstDash val="solid"/>
+          </a:ln>
+        </p:spPr>
+        <p:txBody>
+          <a:bodyPr xmlns:a="http://schemas.openxmlformats.org/drawingml/2006/main" anchor="ctr"/>
+          <a:lstStyle xmlns:a="http://schemas.openxmlformats.org/drawingml/2006/main"/>
+          <a:p xmlns:a="http://schemas.openxmlformats.org/drawingml/2006/main">
+            <a:pPr algn="l">
+              <a:defRPr sz="1050" b="1">
+                <a:solidFill>
+                  <a:srgbClr val="0F172A"/>
+                </a:solidFill>
+              </a:defRPr>
+            </a:pPr>
+            <a:r>
+              <a:rPr sz="1050" b="1">
+                <a:solidFill>
+                  <a:srgbClr val="0F172A"/>
+                </a:solidFill>
+              </a:rPr>
+              <a:t>Range</a:t>
+            </a:r>
+          </a:p>
+        </p:txBody>
+      </p:sp>
+      <p:sp>
+        <p:nvSpPr>
+          <p:cNvPr id="31" name="">
+            <a:extLst xmlns:a="http://schemas.openxmlformats.org/drawingml/2006/main">
+              <a:ext uri="{FF2B5EF4-FFF2-40B4-BE49-F238E27FC236}">
+                <a16:creationId xmlns:a16="http://schemas.microsoft.com/office/drawing/2014/main" id="{E3355BC7-3D95-42D0-85AC-F85F37A39D60}"/>
+              </a:ext>
+            </a:extLst>
+          </p:cNvPr>
+          <p:cNvSpPr>
+            <a:spLocks xmlns:a="http://schemas.openxmlformats.org/drawingml/2006/main" noGrp="1"/>
+          </p:cNvSpPr>
+          <p:nvPr/>
+        </p:nvSpPr>
+        <p:spPr>
+          <a:xfrm xmlns:a="http://schemas.openxmlformats.org/drawingml/2006/main">
+            <a:off x="2886075" y="4953000"/>
+            <a:ext cx="4591050" cy="209550"/>
+          </a:xfrm>
+          <a:prstGeom xmlns:a="http://schemas.openxmlformats.org/drawingml/2006/main" prst="rect">
+            <a:avLst/>
+          </a:prstGeom>
+          <a:noFill xmlns:a="http://schemas.openxmlformats.org/drawingml/2006/main"/>
+          <a:ln xmlns:a="http://schemas.openxmlformats.org/drawingml/2006/main" w="0">
+            <a:noFill/>
+            <a:prstDash val="solid"/>
+          </a:ln>
+        </p:spPr>
+        <p:txBody>
+          <a:bodyPr xmlns:a="http://schemas.openxmlformats.org/drawingml/2006/main" anchor="ctr"/>
+          <a:lstStyle xmlns:a="http://schemas.openxmlformats.org/drawingml/2006/main"/>
+          <a:p xmlns:a="http://schemas.openxmlformats.org/drawingml/2006/main">
+            <a:pPr algn="l">
+              <a:defRPr sz="1050" b="1">
+                <a:solidFill>
+                  <a:srgbClr val="0F172A"/>
+                </a:solidFill>
+              </a:defRPr>
+            </a:pPr>
+            <a:r>
+              <a:rPr sz="1050" b="1">
+                <a:solidFill>
+                  <a:srgbClr val="0F172A"/>
+                </a:solidFill>
+              </a:rPr>
+              <a:t>When it applies</a:t>
+            </a:r>
+          </a:p>
+        </p:txBody>
+      </p:sp>
+      <p:sp>
+        <p:nvSpPr>
+          <p:cNvPr id="32" name="">
+            <a:extLst xmlns:a="http://schemas.openxmlformats.org/drawingml/2006/main">
+              <a:ext uri="{FF2B5EF4-FFF2-40B4-BE49-F238E27FC236}">
+                <a16:creationId xmlns:a16="http://schemas.microsoft.com/office/drawing/2014/main" id="{36C27F19-E49F-4D71-8229-6BCF30BA4766}"/>
+              </a:ext>
+            </a:extLst>
+          </p:cNvPr>
+          <p:cNvSpPr>
+            <a:spLocks xmlns:a="http://schemas.openxmlformats.org/drawingml/2006/main" noGrp="1"/>
+          </p:cNvSpPr>
+          <p:nvPr/>
+        </p:nvSpPr>
+        <p:spPr>
+          <a:xfrm xmlns:a="http://schemas.openxmlformats.org/drawingml/2006/main">
+            <a:off x="7648575" y="4953000"/>
+            <a:ext cx="3543300" cy="209550"/>
+          </a:xfrm>
+          <a:prstGeom xmlns:a="http://schemas.openxmlformats.org/drawingml/2006/main" prst="rect">
+            <a:avLst/>
+          </a:prstGeom>
+          <a:noFill xmlns:a="http://schemas.openxmlformats.org/drawingml/2006/main"/>
+          <a:ln xmlns:a="http://schemas.openxmlformats.org/drawingml/2006/main" w="0">
+            <a:noFill/>
+            <a:prstDash val="solid"/>
+          </a:ln>
+        </p:spPr>
+        <p:txBody>
+          <a:bodyPr xmlns:a="http://schemas.openxmlformats.org/drawingml/2006/main" anchor="ctr"/>
+          <a:lstStyle xmlns:a="http://schemas.openxmlformats.org/drawingml/2006/main"/>
+          <a:p xmlns:a="http://schemas.openxmlformats.org/drawingml/2006/main">
+            <a:pPr algn="l">
+              <a:defRPr sz="1050" b="1">
+                <a:solidFill>
+                  <a:srgbClr val="0F172A"/>
+                </a:solidFill>
+              </a:defRPr>
+            </a:pPr>
+            <a:r>
+              <a:rPr sz="1050" b="1">
+                <a:solidFill>
+                  <a:srgbClr val="0F172A"/>
+                </a:solidFill>
+              </a:rPr>
+              <a:t>Reason</a:t>
+            </a:r>
+          </a:p>
+        </p:txBody>
+      </p:sp>
+      <p:sp>
+        <p:nvSpPr>
+          <p:cNvPr id="33" name="">
+            <a:extLst xmlns:a="http://schemas.openxmlformats.org/drawingml/2006/main">
+              <a:ext uri="{FF2B5EF4-FFF2-40B4-BE49-F238E27FC236}">
+                <a16:creationId xmlns:a16="http://schemas.microsoft.com/office/drawing/2014/main" id="{ABF17381-88CB-45DA-961D-470E12EF03FE}"/>
+              </a:ext>
+            </a:extLst>
+          </p:cNvPr>
+          <p:cNvSpPr>
+            <a:spLocks xmlns:a="http://schemas.openxmlformats.org/drawingml/2006/main" noGrp="1"/>
+          </p:cNvSpPr>
+          <p:nvPr/>
+        </p:nvSpPr>
+        <p:spPr>
+          <a:xfrm xmlns:a="http://schemas.openxmlformats.org/drawingml/2006/main">
+            <a:off x="609600" y="5181600"/>
+            <a:ext cx="10668000" cy="361950"/>
+          </a:xfrm>
+          <a:prstGeom xmlns:a="http://schemas.openxmlformats.org/drawingml/2006/main" prst="rect">
+            <a:avLst/>
+          </a:prstGeom>
+          <a:solidFill xmlns:a="http://schemas.openxmlformats.org/drawingml/2006/main">
+            <a:srgbClr val="FFFFFF"/>
+          </a:solidFill>
+          <a:ln xmlns:a="http://schemas.openxmlformats.org/drawingml/2006/main" w="7620">
+            <a:solidFill>
+              <a:srgbClr val="CBD5E1"/>
+            </a:solidFill>
+            <a:prstDash val="solid"/>
+          </a:ln>
+        </p:spPr>
+      </p:sp>
+      <p:sp>
+        <p:nvSpPr>
+          <p:cNvPr id="34" name="">
+            <a:extLst xmlns:a="http://schemas.openxmlformats.org/drawingml/2006/main">
+              <a:ext uri="{FF2B5EF4-FFF2-40B4-BE49-F238E27FC236}">
+                <a16:creationId xmlns:a16="http://schemas.microsoft.com/office/drawing/2014/main" id="{D3E75873-5A83-40D1-B44B-E350B69E6671}"/>
+              </a:ext>
+            </a:extLst>
+          </p:cNvPr>
+          <p:cNvSpPr>
+            <a:spLocks xmlns:a="http://schemas.openxmlformats.org/drawingml/2006/main" noGrp="1"/>
+          </p:cNvSpPr>
+          <p:nvPr/>
+        </p:nvSpPr>
+        <p:spPr>
+          <a:xfrm xmlns:a="http://schemas.openxmlformats.org/drawingml/2006/main">
+            <a:off x="695325" y="5267325"/>
+            <a:ext cx="2019300" cy="228600"/>
+          </a:xfrm>
+          <a:prstGeom xmlns:a="http://schemas.openxmlformats.org/drawingml/2006/main" prst="rect">
+            <a:avLst/>
+          </a:prstGeom>
+          <a:noFill xmlns:a="http://schemas.openxmlformats.org/drawingml/2006/main"/>
+          <a:ln xmlns:a="http://schemas.openxmlformats.org/drawingml/2006/main" w="0">
+            <a:noFill/>
+            <a:prstDash val="solid"/>
+          </a:ln>
+        </p:spPr>
+        <p:txBody>
+          <a:bodyPr xmlns:a="http://schemas.openxmlformats.org/drawingml/2006/main" anchor="ctr"/>
+          <a:lstStyle xmlns:a="http://schemas.openxmlformats.org/drawingml/2006/main"/>
+          <a:p xmlns:a="http://schemas.openxmlformats.org/drawingml/2006/main">
+            <a:pPr algn="l">
+              <a:defRPr sz="1050" b="1">
+                <a:solidFill>
+                  <a:srgbClr val="2563EB"/>
+                </a:solidFill>
+              </a:defRPr>
+            </a:pPr>
+            <a:r>
+              <a:rPr sz="1050" b="1">
+                <a:solidFill>
+                  <a:srgbClr val="2563EB"/>
+                </a:solidFill>
+              </a:rPr>
+              <a:t>Low end: 10-15%</a:t>
+            </a:r>
+          </a:p>
+        </p:txBody>
+      </p:sp>
+      <p:sp>
+        <p:nvSpPr>
+          <p:cNvPr id="35" name="">
+            <a:extLst xmlns:a="http://schemas.openxmlformats.org/drawingml/2006/main">
+              <a:ext uri="{FF2B5EF4-FFF2-40B4-BE49-F238E27FC236}">
+                <a16:creationId xmlns:a16="http://schemas.microsoft.com/office/drawing/2014/main" id="{98E28E80-1178-4D29-8307-3B099EED6F78}"/>
+              </a:ext>
+            </a:extLst>
+          </p:cNvPr>
+          <p:cNvSpPr>
+            <a:spLocks xmlns:a="http://schemas.openxmlformats.org/drawingml/2006/main" noGrp="1"/>
+          </p:cNvSpPr>
+          <p:nvPr/>
+        </p:nvSpPr>
+        <p:spPr>
+          <a:xfrm xmlns:a="http://schemas.openxmlformats.org/drawingml/2006/main">
+            <a:off x="2886075" y="5267325"/>
+            <a:ext cx="4591050" cy="228600"/>
+          </a:xfrm>
+          <a:prstGeom xmlns:a="http://schemas.openxmlformats.org/drawingml/2006/main" prst="rect">
+            <a:avLst/>
+          </a:prstGeom>
+          <a:noFill xmlns:a="http://schemas.openxmlformats.org/drawingml/2006/main"/>
+          <a:ln xmlns:a="http://schemas.openxmlformats.org/drawingml/2006/main" w="0">
+            <a:noFill/>
+            <a:prstDash val="solid"/>
+          </a:ln>
+        </p:spPr>
+        <p:txBody>
+          <a:bodyPr xmlns:a="http://schemas.openxmlformats.org/drawingml/2006/main" anchor="ctr"/>
+          <a:lstStyle xmlns:a="http://schemas.openxmlformats.org/drawingml/2006/main"/>
+          <a:p xmlns:a="http://schemas.openxmlformats.org/drawingml/2006/main">
+            <a:pPr algn="l">
+              <a:defRPr sz="1050" b="0">
+                <a:solidFill>
+                  <a:srgbClr val="334155"/>
+                </a:solidFill>
+              </a:defRPr>
+            </a:pPr>
+            <a:r>
+              <a:rPr sz="1050" b="0">
+                <a:solidFill>
+                  <a:srgbClr val="334155"/>
+                </a:solidFill>
+              </a:rPr>
+              <a:t>KV is mostly hot, contexts are short, or pressure is light.</a:t>
+            </a:r>
+          </a:p>
+        </p:txBody>
+      </p:sp>
+      <p:sp>
+        <p:nvSpPr>
+          <p:cNvPr id="36" name="">
+            <a:extLst xmlns:a="http://schemas.openxmlformats.org/drawingml/2006/main">
+              <a:ext uri="{FF2B5EF4-FFF2-40B4-BE49-F238E27FC236}">
+                <a16:creationId xmlns:a16="http://schemas.microsoft.com/office/drawing/2014/main" id="{ECBAF44D-5376-4FB1-A561-1C97E755FC10}"/>
+              </a:ext>
+            </a:extLst>
+          </p:cNvPr>
+          <p:cNvSpPr>
+            <a:spLocks xmlns:a="http://schemas.openxmlformats.org/drawingml/2006/main" noGrp="1"/>
+          </p:cNvSpPr>
+          <p:nvPr/>
+        </p:nvSpPr>
+        <p:spPr>
+          <a:xfrm xmlns:a="http://schemas.openxmlformats.org/drawingml/2006/main">
+            <a:off x="7648575" y="5267325"/>
+            <a:ext cx="3543300" cy="228600"/>
+          </a:xfrm>
+          <a:prstGeom xmlns:a="http://schemas.openxmlformats.org/drawingml/2006/main" prst="rect">
+            <a:avLst/>
+          </a:prstGeom>
+          <a:noFill xmlns:a="http://schemas.openxmlformats.org/drawingml/2006/main"/>
+          <a:ln xmlns:a="http://schemas.openxmlformats.org/drawingml/2006/main" w="0">
+            <a:noFill/>
+            <a:prstDash val="solid"/>
+          </a:ln>
+        </p:spPr>
+        <p:txBody>
+          <a:bodyPr xmlns:a="http://schemas.openxmlformats.org/drawingml/2006/main" anchor="ctr"/>
+          <a:lstStyle xmlns:a="http://schemas.openxmlformats.org/drawingml/2006/main"/>
+          <a:p xmlns:a="http://schemas.openxmlformats.org/drawingml/2006/main">
+            <a:pPr algn="l">
+              <a:defRPr sz="1050" b="0">
+                <a:solidFill>
+                  <a:srgbClr val="334155"/>
+                </a:solidFill>
+              </a:defRPr>
+            </a:pPr>
+            <a:r>
+              <a:rPr sz="1050" b="0">
+                <a:solidFill>
+                  <a:srgbClr val="334155"/>
+                </a:solidFill>
+              </a:rPr>
+              <a:t>Hardware mainly removes small replay stalls.</a:t>
+            </a:r>
+          </a:p>
+        </p:txBody>
+      </p:sp>
+      <p:sp>
+        <p:nvSpPr>
+          <p:cNvPr id="37" name="">
+            <a:extLst xmlns:a="http://schemas.openxmlformats.org/drawingml/2006/main">
+              <a:ext uri="{FF2B5EF4-FFF2-40B4-BE49-F238E27FC236}">
+                <a16:creationId xmlns:a16="http://schemas.microsoft.com/office/drawing/2014/main" id="{6BDE23D1-365B-492D-9889-F8706AD0A995}"/>
+              </a:ext>
+            </a:extLst>
+          </p:cNvPr>
+          <p:cNvSpPr>
+            <a:spLocks xmlns:a="http://schemas.openxmlformats.org/drawingml/2006/main" noGrp="1"/>
+          </p:cNvSpPr>
+          <p:nvPr/>
+        </p:nvSpPr>
+        <p:spPr>
+          <a:xfrm xmlns:a="http://schemas.openxmlformats.org/drawingml/2006/main">
+            <a:off x="609600" y="5543550"/>
+            <a:ext cx="10668000" cy="361950"/>
+          </a:xfrm>
+          <a:prstGeom xmlns:a="http://schemas.openxmlformats.org/drawingml/2006/main" prst="rect">
+            <a:avLst/>
+          </a:prstGeom>
+          <a:solidFill xmlns:a="http://schemas.openxmlformats.org/drawingml/2006/main">
+            <a:srgbClr val="F8FAFC"/>
+          </a:solidFill>
+          <a:ln xmlns:a="http://schemas.openxmlformats.org/drawingml/2006/main" w="7620">
+            <a:solidFill>
+              <a:srgbClr val="CBD5E1"/>
+            </a:solidFill>
+            <a:prstDash val="solid"/>
+          </a:ln>
+        </p:spPr>
+      </p:sp>
+      <p:sp>
+        <p:nvSpPr>
+          <p:cNvPr id="38" name="">
+            <a:extLst xmlns:a="http://schemas.openxmlformats.org/drawingml/2006/main">
+              <a:ext uri="{FF2B5EF4-FFF2-40B4-BE49-F238E27FC236}">
+                <a16:creationId xmlns:a16="http://schemas.microsoft.com/office/drawing/2014/main" id="{7BE61C62-835F-4575-83E8-B04EB02CCF05}"/>
+              </a:ext>
+            </a:extLst>
+          </p:cNvPr>
+          <p:cNvSpPr>
+            <a:spLocks xmlns:a="http://schemas.openxmlformats.org/drawingml/2006/main" noGrp="1"/>
+          </p:cNvSpPr>
+          <p:nvPr/>
+        </p:nvSpPr>
+        <p:spPr>
+          <a:xfrm xmlns:a="http://schemas.openxmlformats.org/drawingml/2006/main">
+            <a:off x="695325" y="5629275"/>
+            <a:ext cx="2019300" cy="228600"/>
+          </a:xfrm>
+          <a:prstGeom xmlns:a="http://schemas.openxmlformats.org/drawingml/2006/main" prst="rect">
+            <a:avLst/>
+          </a:prstGeom>
+          <a:noFill xmlns:a="http://schemas.openxmlformats.org/drawingml/2006/main"/>
+          <a:ln xmlns:a="http://schemas.openxmlformats.org/drawingml/2006/main" w="0">
+            <a:noFill/>
+            <a:prstDash val="solid"/>
+          </a:ln>
+        </p:spPr>
+        <p:txBody>
+          <a:bodyPr xmlns:a="http://schemas.openxmlformats.org/drawingml/2006/main" anchor="ctr"/>
+          <a:lstStyle xmlns:a="http://schemas.openxmlformats.org/drawingml/2006/main"/>
+          <a:p xmlns:a="http://schemas.openxmlformats.org/drawingml/2006/main">
+            <a:pPr algn="l">
+              <a:defRPr sz="1050" b="1">
                 <a:solidFill>
                   <a:srgbClr val="DC2626"/>
                 </a:solidFill>
               </a:defRPr>
             </a:pPr>
             <a:r>
-              <a:rPr sz="2025" b="1">
+              <a:rPr sz="1050" b="1">
                 <a:solidFill>
                   <a:srgbClr val="DC2626"/>
                 </a:solidFill>
               </a:rPr>
-              <a:t>•</a:t>
-            </a:r>
-          </a:p>
-        </p:txBody>
-      </p:sp>
-      <p:sp>
-        <p:nvSpPr>
-          <p:cNvPr id="8" name="">
-            <a:extLst xmlns:a="http://schemas.openxmlformats.org/drawingml/2006/main">
-              <a:ext uri="{FF2B5EF4-FFF2-40B4-BE49-F238E27FC236}">
-                <a16:creationId xmlns:a16="http://schemas.microsoft.com/office/drawing/2014/main" id="{4A98A2F2-11A8-4698-92CD-87C5C8C85B08}"/>
-              </a:ext>
-            </a:extLst>
-          </p:cNvPr>
-          <p:cNvSpPr>
-            <a:spLocks xmlns:a="http://schemas.openxmlformats.org/drawingml/2006/main" noGrp="1"/>
-          </p:cNvSpPr>
-          <p:nvPr/>
-        </p:nvSpPr>
-        <p:spPr>
-          <a:xfrm xmlns:a="http://schemas.openxmlformats.org/drawingml/2006/main">
-            <a:off x="1162050" y="2952750"/>
-            <a:ext cx="9715500" cy="514350"/>
-          </a:xfrm>
-          <a:prstGeom xmlns:a="http://schemas.openxmlformats.org/drawingml/2006/main" prst="rect">
-            <a:avLst/>
-          </a:prstGeom>
-          <a:noFill xmlns:a="http://schemas.openxmlformats.org/drawingml/2006/main"/>
-          <a:ln xmlns:a="http://schemas.openxmlformats.org/drawingml/2006/main" w="0">
-            <a:noFill/>
-            <a:prstDash val="solid"/>
-          </a:ln>
-        </p:spPr>
-        <p:txBody>
-          <a:bodyPr xmlns:a="http://schemas.openxmlformats.org/drawingml/2006/main" anchor="t"/>
-          <a:lstStyle xmlns:a="http://schemas.openxmlformats.org/drawingml/2006/main"/>
-          <a:p xmlns:a="http://schemas.openxmlformats.org/drawingml/2006/main">
-            <a:pPr algn="l">
-              <a:defRPr sz="1875" b="0">
+              <a:t>High end: 25-30%+</a:t>
+            </a:r>
+          </a:p>
+        </p:txBody>
+      </p:sp>
+      <p:sp>
+        <p:nvSpPr>
+          <p:cNvPr id="39" name="">
+            <a:extLst xmlns:a="http://schemas.openxmlformats.org/drawingml/2006/main">
+              <a:ext uri="{FF2B5EF4-FFF2-40B4-BE49-F238E27FC236}">
+                <a16:creationId xmlns:a16="http://schemas.microsoft.com/office/drawing/2014/main" id="{2C6C85F1-3AC8-4547-8C0B-2C9FCCF65336}"/>
+              </a:ext>
+            </a:extLst>
+          </p:cNvPr>
+          <p:cNvSpPr>
+            <a:spLocks xmlns:a="http://schemas.openxmlformats.org/drawingml/2006/main" noGrp="1"/>
+          </p:cNvSpPr>
+          <p:nvPr/>
+        </p:nvSpPr>
+        <p:spPr>
+          <a:xfrm xmlns:a="http://schemas.openxmlformats.org/drawingml/2006/main">
+            <a:off x="2886075" y="5629275"/>
+            <a:ext cx="4591050" cy="228600"/>
+          </a:xfrm>
+          <a:prstGeom xmlns:a="http://schemas.openxmlformats.org/drawingml/2006/main" prst="rect">
+            <a:avLst/>
+          </a:prstGeom>
+          <a:noFill xmlns:a="http://schemas.openxmlformats.org/drawingml/2006/main"/>
+          <a:ln xmlns:a="http://schemas.openxmlformats.org/drawingml/2006/main" w="0">
+            <a:noFill/>
+            <a:prstDash val="solid"/>
+          </a:ln>
+        </p:spPr>
+        <p:txBody>
+          <a:bodyPr xmlns:a="http://schemas.openxmlformats.org/drawingml/2006/main" anchor="ctr"/>
+          <a:lstStyle xmlns:a="http://schemas.openxmlformats.org/drawingml/2006/main"/>
+          <a:p xmlns:a="http://schemas.openxmlformats.org/drawingml/2006/main">
+            <a:pPr algn="l">
+              <a:defRPr sz="1050" b="0">
                 <a:solidFill>
                   <a:srgbClr val="334155"/>
                 </a:solidFill>
               </a:defRPr>
             </a:pPr>
             <a:r>
-              <a:rPr sz="1875" b="0">
+              <a:rPr sz="1050" b="0">
                 <a:solidFill>
                   <a:srgbClr val="334155"/>
                 </a:solidFill>
               </a:rPr>
-              <a:t>Lower tail latency by prioritizing soon-resuming agent sessions.</a:t>
-            </a:r>
-          </a:p>
-        </p:txBody>
-      </p:sp>
-      <p:sp>
-        <p:nvSpPr>
-          <p:cNvPr id="9" name="">
-            <a:extLst xmlns:a="http://schemas.openxmlformats.org/drawingml/2006/main">
-              <a:ext uri="{FF2B5EF4-FFF2-40B4-BE49-F238E27FC236}">
-                <a16:creationId xmlns:a16="http://schemas.microsoft.com/office/drawing/2014/main" id="{8F38DFD5-1B17-4D4F-BC77-6F39BFD670E8}"/>
-              </a:ext>
-            </a:extLst>
-          </p:cNvPr>
-          <p:cNvSpPr>
-            <a:spLocks xmlns:a="http://schemas.openxmlformats.org/drawingml/2006/main" noGrp="1"/>
-          </p:cNvSpPr>
-          <p:nvPr/>
-        </p:nvSpPr>
-        <p:spPr>
-          <a:xfrm xmlns:a="http://schemas.openxmlformats.org/drawingml/2006/main">
-            <a:off x="876300" y="3619500"/>
-            <a:ext cx="190500" cy="304800"/>
-          </a:xfrm>
-          <a:prstGeom xmlns:a="http://schemas.openxmlformats.org/drawingml/2006/main" prst="rect">
-            <a:avLst/>
-          </a:prstGeom>
-          <a:noFill xmlns:a="http://schemas.openxmlformats.org/drawingml/2006/main"/>
-          <a:ln xmlns:a="http://schemas.openxmlformats.org/drawingml/2006/main" w="0">
-            <a:noFill/>
-            <a:prstDash val="solid"/>
-          </a:ln>
-        </p:spPr>
-        <p:txBody>
-          <a:bodyPr xmlns:a="http://schemas.openxmlformats.org/drawingml/2006/main" anchor="t"/>
-          <a:lstStyle xmlns:a="http://schemas.openxmlformats.org/drawingml/2006/main"/>
-          <a:p xmlns:a="http://schemas.openxmlformats.org/drawingml/2006/main">
-            <a:pPr algn="l">
-              <a:defRPr sz="2025" b="1">
-                <a:solidFill>
-                  <a:srgbClr val="0891B2"/>
-                </a:solidFill>
-              </a:defRPr>
-            </a:pPr>
-            <a:r>
-              <a:rPr sz="2025" b="1">
-                <a:solidFill>
-                  <a:srgbClr val="0891B2"/>
-                </a:solidFill>
-              </a:rPr>
-              <a:t>•</a:t>
-            </a:r>
-          </a:p>
-        </p:txBody>
-      </p:sp>
-      <p:sp>
-        <p:nvSpPr>
-          <p:cNvPr id="10" name="">
-            <a:extLst xmlns:a="http://schemas.openxmlformats.org/drawingml/2006/main">
-              <a:ext uri="{FF2B5EF4-FFF2-40B4-BE49-F238E27FC236}">
-                <a16:creationId xmlns:a16="http://schemas.microsoft.com/office/drawing/2014/main" id="{36B49A24-00E6-450A-B223-24B8C5ED0D7D}"/>
-              </a:ext>
-            </a:extLst>
-          </p:cNvPr>
-          <p:cNvSpPr>
-            <a:spLocks xmlns:a="http://schemas.openxmlformats.org/drawingml/2006/main" noGrp="1"/>
-          </p:cNvSpPr>
-          <p:nvPr/>
-        </p:nvSpPr>
-        <p:spPr>
-          <a:xfrm xmlns:a="http://schemas.openxmlformats.org/drawingml/2006/main">
-            <a:off x="1162050" y="3638550"/>
-            <a:ext cx="9715500" cy="514350"/>
-          </a:xfrm>
-          <a:prstGeom xmlns:a="http://schemas.openxmlformats.org/drawingml/2006/main" prst="rect">
-            <a:avLst/>
-          </a:prstGeom>
-          <a:noFill xmlns:a="http://schemas.openxmlformats.org/drawingml/2006/main"/>
-          <a:ln xmlns:a="http://schemas.openxmlformats.org/drawingml/2006/main" w="0">
-            <a:noFill/>
-            <a:prstDash val="solid"/>
-          </a:ln>
-        </p:spPr>
-        <p:txBody>
-          <a:bodyPr xmlns:a="http://schemas.openxmlformats.org/drawingml/2006/main" anchor="t"/>
-          <a:lstStyle xmlns:a="http://schemas.openxmlformats.org/drawingml/2006/main"/>
-          <a:p xmlns:a="http://schemas.openxmlformats.org/drawingml/2006/main">
-            <a:pPr algn="l">
-              <a:defRPr sz="1875" b="0">
+              <a:t>Long contexts, high pressure, frequent offload/reload, or recompute.</a:t>
+            </a:r>
+          </a:p>
+        </p:txBody>
+      </p:sp>
+      <p:sp>
+        <p:nvSpPr>
+          <p:cNvPr id="40" name="">
+            <a:extLst xmlns:a="http://schemas.openxmlformats.org/drawingml/2006/main">
+              <a:ext uri="{FF2B5EF4-FFF2-40B4-BE49-F238E27FC236}">
+                <a16:creationId xmlns:a16="http://schemas.microsoft.com/office/drawing/2014/main" id="{71048D73-7EBF-4C8B-ACB3-6EF2DB3F1FB8}"/>
+              </a:ext>
+            </a:extLst>
+          </p:cNvPr>
+          <p:cNvSpPr>
+            <a:spLocks xmlns:a="http://schemas.openxmlformats.org/drawingml/2006/main" noGrp="1"/>
+          </p:cNvSpPr>
+          <p:nvPr/>
+        </p:nvSpPr>
+        <p:spPr>
+          <a:xfrm xmlns:a="http://schemas.openxmlformats.org/drawingml/2006/main">
+            <a:off x="7648575" y="5629275"/>
+            <a:ext cx="3543300" cy="228600"/>
+          </a:xfrm>
+          <a:prstGeom xmlns:a="http://schemas.openxmlformats.org/drawingml/2006/main" prst="rect">
+            <a:avLst/>
+          </a:prstGeom>
+          <a:noFill xmlns:a="http://schemas.openxmlformats.org/drawingml/2006/main"/>
+          <a:ln xmlns:a="http://schemas.openxmlformats.org/drawingml/2006/main" w="0">
+            <a:noFill/>
+            <a:prstDash val="solid"/>
+          </a:ln>
+        </p:spPr>
+        <p:txBody>
+          <a:bodyPr xmlns:a="http://schemas.openxmlformats.org/drawingml/2006/main" anchor="ctr"/>
+          <a:lstStyle xmlns:a="http://schemas.openxmlformats.org/drawingml/2006/main"/>
+          <a:p xmlns:a="http://schemas.openxmlformats.org/drawingml/2006/main">
+            <a:pPr algn="l">
+              <a:defRPr sz="1050" b="0">
                 <a:solidFill>
                   <a:srgbClr val="334155"/>
                 </a:solidFill>
               </a:defRPr>
             </a:pPr>
             <a:r>
-              <a:rPr sz="1875" b="0">
+              <a:rPr sz="1050" b="0">
                 <a:solidFill>
                   <a:srgbClr val="334155"/>
                 </a:solidFill>
               </a:rPr>
-              <a:t>Less wasted bandwidth by avoiding too-early or evicted-before-use prefetch.</a:t>
-            </a:r>
-          </a:p>
-        </p:txBody>
-      </p:sp>
-      <p:sp>
-        <p:nvSpPr>
-          <p:cNvPr id="11" name="">
-            <a:extLst xmlns:a="http://schemas.openxmlformats.org/drawingml/2006/main">
-              <a:ext uri="{FF2B5EF4-FFF2-40B4-BE49-F238E27FC236}">
-                <a16:creationId xmlns:a16="http://schemas.microsoft.com/office/drawing/2014/main" id="{32057DBB-7140-45F3-83C9-FB1737AE3659}"/>
-              </a:ext>
-            </a:extLst>
-          </p:cNvPr>
-          <p:cNvSpPr>
-            <a:spLocks xmlns:a="http://schemas.openxmlformats.org/drawingml/2006/main" noGrp="1"/>
-          </p:cNvSpPr>
-          <p:nvPr/>
-        </p:nvSpPr>
-        <p:spPr>
-          <a:xfrm xmlns:a="http://schemas.openxmlformats.org/drawingml/2006/main">
-            <a:off x="876300" y="4305300"/>
-            <a:ext cx="190500" cy="304800"/>
-          </a:xfrm>
-          <a:prstGeom xmlns:a="http://schemas.openxmlformats.org/drawingml/2006/main" prst="rect">
-            <a:avLst/>
-          </a:prstGeom>
-          <a:noFill xmlns:a="http://schemas.openxmlformats.org/drawingml/2006/main"/>
-          <a:ln xmlns:a="http://schemas.openxmlformats.org/drawingml/2006/main" w="0">
-            <a:noFill/>
-            <a:prstDash val="solid"/>
-          </a:ln>
-        </p:spPr>
-        <p:txBody>
-          <a:bodyPr xmlns:a="http://schemas.openxmlformats.org/drawingml/2006/main" anchor="t"/>
-          <a:lstStyle xmlns:a="http://schemas.openxmlformats.org/drawingml/2006/main"/>
-          <a:p xmlns:a="http://schemas.openxmlformats.org/drawingml/2006/main">
-            <a:pPr algn="l">
-              <a:defRPr sz="2025" b="1">
-                <a:solidFill>
-                  <a:srgbClr val="16A34A"/>
-                </a:solidFill>
-              </a:defRPr>
-            </a:pPr>
-            <a:r>
-              <a:rPr sz="2025" b="1">
-                <a:solidFill>
-                  <a:srgbClr val="16A34A"/>
-                </a:solidFill>
-              </a:rPr>
-              <a:t>•</a:t>
-            </a:r>
-          </a:p>
-        </p:txBody>
-      </p:sp>
-      <p:sp>
-        <p:nvSpPr>
-          <p:cNvPr id="12" name="">
-            <a:extLst xmlns:a="http://schemas.openxmlformats.org/drawingml/2006/main">
-              <a:ext uri="{FF2B5EF4-FFF2-40B4-BE49-F238E27FC236}">
-                <a16:creationId xmlns:a16="http://schemas.microsoft.com/office/drawing/2014/main" id="{691E0B30-6C14-4A18-8F42-CACC3ADBD9FB}"/>
-              </a:ext>
-            </a:extLst>
-          </p:cNvPr>
-          <p:cNvSpPr>
-            <a:spLocks xmlns:a="http://schemas.openxmlformats.org/drawingml/2006/main" noGrp="1"/>
-          </p:cNvSpPr>
-          <p:nvPr/>
-        </p:nvSpPr>
-        <p:spPr>
-          <a:xfrm xmlns:a="http://schemas.openxmlformats.org/drawingml/2006/main">
-            <a:off x="1162050" y="4324350"/>
-            <a:ext cx="9715500" cy="514350"/>
-          </a:xfrm>
-          <a:prstGeom xmlns:a="http://schemas.openxmlformats.org/drawingml/2006/main" prst="rect">
-            <a:avLst/>
-          </a:prstGeom>
-          <a:noFill xmlns:a="http://schemas.openxmlformats.org/drawingml/2006/main"/>
-          <a:ln xmlns:a="http://schemas.openxmlformats.org/drawingml/2006/main" w="0">
-            <a:noFill/>
-            <a:prstDash val="solid"/>
-          </a:ln>
-        </p:spPr>
-        <p:txBody>
-          <a:bodyPr xmlns:a="http://schemas.openxmlformats.org/drawingml/2006/main" anchor="t"/>
-          <a:lstStyle xmlns:a="http://schemas.openxmlformats.org/drawingml/2006/main"/>
-          <a:p xmlns:a="http://schemas.openxmlformats.org/drawingml/2006/main">
-            <a:pPr algn="l">
-              <a:defRPr sz="1875" b="0">
-                <a:solidFill>
-                  <a:srgbClr val="334155"/>
-                </a:solidFill>
-              </a:defRPr>
-            </a:pPr>
-            <a:r>
-              <a:rPr sz="1875" b="0">
-                <a:solidFill>
-                  <a:srgbClr val="334155"/>
-                </a:solidFill>
-              </a:rPr>
-              <a:t>Better effective HBM use through KV-aware residency and eviction choices.</a:t>
-            </a:r>
-          </a:p>
-        </p:txBody>
-      </p:sp>
-      <p:sp>
-        <p:nvSpPr>
-          <p:cNvPr id="13" name="">
-            <a:extLst xmlns:a="http://schemas.openxmlformats.org/drawingml/2006/main">
-              <a:ext uri="{FF2B5EF4-FFF2-40B4-BE49-F238E27FC236}">
-                <a16:creationId xmlns:a16="http://schemas.microsoft.com/office/drawing/2014/main" id="{A2ACDE22-E435-4A47-BA79-CBC4C3F57866}"/>
-              </a:ext>
-            </a:extLst>
-          </p:cNvPr>
-          <p:cNvSpPr>
-            <a:spLocks xmlns:a="http://schemas.openxmlformats.org/drawingml/2006/main" noGrp="1"/>
-          </p:cNvSpPr>
-          <p:nvPr/>
-        </p:nvSpPr>
-        <p:spPr>
-          <a:xfrm xmlns:a="http://schemas.openxmlformats.org/drawingml/2006/main">
-            <a:off x="419100" y="5429250"/>
-            <a:ext cx="11353800" cy="11430"/>
-          </a:xfrm>
-          <a:prstGeom xmlns:a="http://schemas.openxmlformats.org/drawingml/2006/main" prst="rect">
-            <a:avLst/>
-          </a:prstGeom>
-          <a:solidFill xmlns:a="http://schemas.openxmlformats.org/drawingml/2006/main">
-            <a:srgbClr val="CBD5E1"/>
-          </a:solidFill>
-          <a:ln xmlns:a="http://schemas.openxmlformats.org/drawingml/2006/main" w="0">
-            <a:noFill/>
-            <a:prstDash val="solid"/>
-          </a:ln>
-        </p:spPr>
-      </p:sp>
-      <p:sp>
-        <p:nvSpPr>
-          <p:cNvPr id="14" name="">
-            <a:extLst xmlns:a="http://schemas.openxmlformats.org/drawingml/2006/main">
-              <a:ext uri="{FF2B5EF4-FFF2-40B4-BE49-F238E27FC236}">
-                <a16:creationId xmlns:a16="http://schemas.microsoft.com/office/drawing/2014/main" id="{9597EAE0-7FDC-47BD-94C4-F6CB41DE4630}"/>
-              </a:ext>
-            </a:extLst>
-          </p:cNvPr>
-          <p:cNvSpPr>
-            <a:spLocks xmlns:a="http://schemas.openxmlformats.org/drawingml/2006/main" noGrp="1"/>
-          </p:cNvSpPr>
-          <p:nvPr/>
-        </p:nvSpPr>
-        <p:spPr>
-          <a:xfrm xmlns:a="http://schemas.openxmlformats.org/drawingml/2006/main">
-            <a:off x="876300" y="5657850"/>
+              <a:t>Hardware avoids the expensive replay path.</a:t>
+            </a:r>
+          </a:p>
+        </p:txBody>
+      </p:sp>
+      <p:sp>
+        <p:nvSpPr>
+          <p:cNvPr id="41" name="">
+            <a:extLst xmlns:a="http://schemas.openxmlformats.org/drawingml/2006/main">
+              <a:ext uri="{FF2B5EF4-FFF2-40B4-BE49-F238E27FC236}">
+                <a16:creationId xmlns:a16="http://schemas.microsoft.com/office/drawing/2014/main" id="{3D16E2E6-695B-427B-A2BA-D569A2270624}"/>
+              </a:ext>
+            </a:extLst>
+          </p:cNvPr>
+          <p:cNvSpPr>
+            <a:spLocks xmlns:a="http://schemas.openxmlformats.org/drawingml/2006/main" noGrp="1"/>
+          </p:cNvSpPr>
+          <p:nvPr/>
+        </p:nvSpPr>
+        <p:spPr>
+          <a:xfrm xmlns:a="http://schemas.openxmlformats.org/drawingml/2006/main">
+            <a:off x="876300" y="6029325"/>
             <a:ext cx="9906000" cy="285750"/>
           </a:xfrm>
           <a:prstGeom xmlns:a="http://schemas.openxmlformats.org/drawingml/2006/main" prst="rect">
@@ -4241,29 +5484,29 @@
           <a:lstStyle xmlns:a="http://schemas.openxmlformats.org/drawingml/2006/main"/>
           <a:p xmlns:a="http://schemas.openxmlformats.org/drawingml/2006/main">
             <a:pPr algn="ctr">
-              <a:defRPr sz="1725" b="1">
+              <a:defRPr sz="1425" b="1">
                 <a:solidFill>
                   <a:srgbClr val="0F172A"/>
                 </a:solidFill>
               </a:defRPr>
             </a:pPr>
             <a:r>
-              <a:rPr sz="1725" b="1">
+              <a:rPr sz="1425" b="1">
                 <a:solidFill>
                   <a:srgbClr val="0F172A"/>
                 </a:solidFill>
               </a:rPr>
-              <a:t>The prototype is designed to turn these targets into measured numbers.</a:t>
-            </a:r>
-          </a:p>
-        </p:txBody>
-      </p:sp>
-      <p:sp>
-        <p:nvSpPr>
-          <p:cNvPr id="15" name="">
-            <a:extLst xmlns:a="http://schemas.openxmlformats.org/drawingml/2006/main">
-              <a:ext uri="{FF2B5EF4-FFF2-40B4-BE49-F238E27FC236}">
-                <a16:creationId xmlns:a16="http://schemas.microsoft.com/office/drawing/2014/main" id="{8B3A3CF0-42FB-43DD-B389-E173B458016D}"/>
+              <a:t>Framing: these are conservative research targets; the prototype is meant to turn them into measured numbers.</a:t>
+            </a:r>
+          </a:p>
+        </p:txBody>
+      </p:sp>
+      <p:sp>
+        <p:nvSpPr>
+          <p:cNvPr id="42" name="">
+            <a:extLst xmlns:a="http://schemas.openxmlformats.org/drawingml/2006/main">
+              <a:ext uri="{FF2B5EF4-FFF2-40B4-BE49-F238E27FC236}">
+                <a16:creationId xmlns:a16="http://schemas.microsoft.com/office/drawing/2014/main" id="{83F94061-1833-4185-B3F0-29FA684265A9}"/>
               </a:ext>
             </a:extLst>
           </p:cNvPr>
@@ -4310,10 +5553,10 @@
       </p:sp>
       <p:sp>
         <p:nvSpPr>
-          <p:cNvPr id="16" name="">
-            <a:extLst xmlns:a="http://schemas.openxmlformats.org/drawingml/2006/main">
-              <a:ext uri="{FF2B5EF4-FFF2-40B4-BE49-F238E27FC236}">
-                <a16:creationId xmlns:a16="http://schemas.microsoft.com/office/drawing/2014/main" id="{9C7A32DF-6E6B-404A-8EF7-5B46E89D1D04}"/>
+          <p:cNvPr id="43" name="">
+            <a:extLst xmlns:a="http://schemas.openxmlformats.org/drawingml/2006/main">
+              <a:ext uri="{FF2B5EF4-FFF2-40B4-BE49-F238E27FC236}">
+                <a16:creationId xmlns:a16="http://schemas.microsoft.com/office/drawing/2014/main" id="{A8B5DDA3-30C9-494B-8E37-79B3106E508F}"/>
               </a:ext>
             </a:extLst>
           </p:cNvPr>
@@ -4361,7 +5604,7 @@
     </p:spTree>
     <p:extLst>
       <p:ext uri="{BB962C8B-B14F-4D97-AF65-F5344CB8AC3E}">
-        <p14:creationId xmlns:p14="http://schemas.microsoft.com/office/powerpoint/2010/main" val="938142167"/>
+        <p14:creationId xmlns:p14="http://schemas.microsoft.com/office/powerpoint/2010/main" val="496324710"/>
       </p:ext>
     </p:extLst>
   </p:cSld>
@@ -4392,7 +5635,7 @@
           <p:cNvPr id="15" name="">
             <a:extLst xmlns:a="http://schemas.openxmlformats.org/drawingml/2006/main">
               <a:ext uri="{FF2B5EF4-FFF2-40B4-BE49-F238E27FC236}">
-                <a16:creationId xmlns:a16="http://schemas.microsoft.com/office/drawing/2014/main" id="{6BB8D00A-E042-4CBF-8313-94F867FEEF9B}"/>
+                <a16:creationId xmlns:a16="http://schemas.microsoft.com/office/drawing/2014/main" id="{57FF6920-A6BF-4A4F-A963-9BC9D42DBA0B}"/>
               </a:ext>
             </a:extLst>
           </p:cNvPr>
@@ -4442,7 +5685,7 @@
           <p:cNvPr id="2" name="">
             <a:extLst xmlns:a="http://schemas.openxmlformats.org/drawingml/2006/main">
               <a:ext uri="{FF2B5EF4-FFF2-40B4-BE49-F238E27FC236}">
-                <a16:creationId xmlns:a16="http://schemas.microsoft.com/office/drawing/2014/main" id="{5010AEC4-16AC-4473-AD5D-4505F23E14DA}"/>
+                <a16:creationId xmlns:a16="http://schemas.microsoft.com/office/drawing/2014/main" id="{22C3FB72-7F7D-45CA-8CAA-EB17BB02B42D}"/>
               </a:ext>
             </a:extLst>
           </p:cNvPr>
@@ -4492,7 +5735,7 @@
           <p:cNvPr id="3" name="">
             <a:extLst xmlns:a="http://schemas.openxmlformats.org/drawingml/2006/main">
               <a:ext uri="{FF2B5EF4-FFF2-40B4-BE49-F238E27FC236}">
-                <a16:creationId xmlns:a16="http://schemas.microsoft.com/office/drawing/2014/main" id="{C7E432A2-2282-452E-9130-FCB89C98F303}"/>
+                <a16:creationId xmlns:a16="http://schemas.microsoft.com/office/drawing/2014/main" id="{F29F3426-107A-49BA-8F95-2B2111188A12}"/>
               </a:ext>
             </a:extLst>
           </p:cNvPr>
@@ -4542,7 +5785,7 @@
           <p:cNvPr id="4" name="">
             <a:extLst xmlns:a="http://schemas.openxmlformats.org/drawingml/2006/main">
               <a:ext uri="{FF2B5EF4-FFF2-40B4-BE49-F238E27FC236}">
-                <a16:creationId xmlns:a16="http://schemas.microsoft.com/office/drawing/2014/main" id="{38CA6EEE-E75D-4F26-ACB4-5BF45656AD8F}"/>
+                <a16:creationId xmlns:a16="http://schemas.microsoft.com/office/drawing/2014/main" id="{B67F276E-06E0-477E-934A-47FC1F0E55B3}"/>
               </a:ext>
             </a:extLst>
           </p:cNvPr>
@@ -4592,7 +5835,7 @@
           <p:cNvPr id="5" name="">
             <a:extLst xmlns:a="http://schemas.openxmlformats.org/drawingml/2006/main">
               <a:ext uri="{FF2B5EF4-FFF2-40B4-BE49-F238E27FC236}">
-                <a16:creationId xmlns:a16="http://schemas.microsoft.com/office/drawing/2014/main" id="{39C2A197-DF65-48E1-A608-824465534BAE}"/>
+                <a16:creationId xmlns:a16="http://schemas.microsoft.com/office/drawing/2014/main" id="{D14FFE8F-4AFE-4F53-B466-CBBFF05FA262}"/>
               </a:ext>
             </a:extLst>
           </p:cNvPr>
@@ -4642,7 +5885,7 @@
           <p:cNvPr id="6" name="">
             <a:extLst xmlns:a="http://schemas.openxmlformats.org/drawingml/2006/main">
               <a:ext uri="{FF2B5EF4-FFF2-40B4-BE49-F238E27FC236}">
-                <a16:creationId xmlns:a16="http://schemas.microsoft.com/office/drawing/2014/main" id="{53F43964-E35C-4881-AAF1-3B047B1DF6F8}"/>
+                <a16:creationId xmlns:a16="http://schemas.microsoft.com/office/drawing/2014/main" id="{6B4750E0-9356-4DDE-8CA9-5CA794160CD0}"/>
               </a:ext>
             </a:extLst>
           </p:cNvPr>
@@ -4692,7 +5935,7 @@
           <p:cNvPr id="7" name="">
             <a:extLst xmlns:a="http://schemas.openxmlformats.org/drawingml/2006/main">
               <a:ext uri="{FF2B5EF4-FFF2-40B4-BE49-F238E27FC236}">
-                <a16:creationId xmlns:a16="http://schemas.microsoft.com/office/drawing/2014/main" id="{7FD36D02-A0F7-4056-845A-419218182DF2}"/>
+                <a16:creationId xmlns:a16="http://schemas.microsoft.com/office/drawing/2014/main" id="{8A347B0F-D736-4503-A755-E0212033ADAB}"/>
               </a:ext>
             </a:extLst>
           </p:cNvPr>
@@ -4742,7 +5985,7 @@
           <p:cNvPr id="8" name="">
             <a:extLst xmlns:a="http://schemas.openxmlformats.org/drawingml/2006/main">
               <a:ext uri="{FF2B5EF4-FFF2-40B4-BE49-F238E27FC236}">
-                <a16:creationId xmlns:a16="http://schemas.microsoft.com/office/drawing/2014/main" id="{869F8FC6-2572-4156-8D70-1A137464D9CC}"/>
+                <a16:creationId xmlns:a16="http://schemas.microsoft.com/office/drawing/2014/main" id="{38052B10-C9F3-4995-91D9-C5CE375822E6}"/>
               </a:ext>
             </a:extLst>
           </p:cNvPr>
@@ -4792,7 +6035,7 @@
           <p:cNvPr id="9" name="">
             <a:extLst xmlns:a="http://schemas.openxmlformats.org/drawingml/2006/main">
               <a:ext uri="{FF2B5EF4-FFF2-40B4-BE49-F238E27FC236}">
-                <a16:creationId xmlns:a16="http://schemas.microsoft.com/office/drawing/2014/main" id="{F05F8CC5-C174-42B2-867E-10128B930290}"/>
+                <a16:creationId xmlns:a16="http://schemas.microsoft.com/office/drawing/2014/main" id="{CA153E0A-45DA-483C-8DBA-3DB57AC72815}"/>
               </a:ext>
             </a:extLst>
           </p:cNvPr>
@@ -4842,7 +6085,7 @@
           <p:cNvPr id="10" name="">
             <a:extLst xmlns:a="http://schemas.openxmlformats.org/drawingml/2006/main">
               <a:ext uri="{FF2B5EF4-FFF2-40B4-BE49-F238E27FC236}">
-                <a16:creationId xmlns:a16="http://schemas.microsoft.com/office/drawing/2014/main" id="{F67B6D55-B6D3-4D78-B9B8-B58D7A317D19}"/>
+                <a16:creationId xmlns:a16="http://schemas.microsoft.com/office/drawing/2014/main" id="{CAB8B715-1E09-44EB-9423-980AF2C0C312}"/>
               </a:ext>
             </a:extLst>
           </p:cNvPr>
@@ -4892,7 +6135,7 @@
           <p:cNvPr id="11" name="">
             <a:extLst xmlns:a="http://schemas.openxmlformats.org/drawingml/2006/main">
               <a:ext uri="{FF2B5EF4-FFF2-40B4-BE49-F238E27FC236}">
-                <a16:creationId xmlns:a16="http://schemas.microsoft.com/office/drawing/2014/main" id="{003716AF-2CC5-406D-9910-9A4D95003E05}"/>
+                <a16:creationId xmlns:a16="http://schemas.microsoft.com/office/drawing/2014/main" id="{9A5644F5-9A20-467E-A72B-9016BD4CC8FA}"/>
               </a:ext>
             </a:extLst>
           </p:cNvPr>
@@ -4923,7 +6166,7 @@
           <p:cNvPr id="12" name="">
             <a:extLst xmlns:a="http://schemas.openxmlformats.org/drawingml/2006/main">
               <a:ext uri="{FF2B5EF4-FFF2-40B4-BE49-F238E27FC236}">
-                <a16:creationId xmlns:a16="http://schemas.microsoft.com/office/drawing/2014/main" id="{BB56CCAB-31D5-4522-BB4A-89112E42E592}"/>
+                <a16:creationId xmlns:a16="http://schemas.microsoft.com/office/drawing/2014/main" id="{6AB716F4-E1D2-433A-B8D1-38767E4E5E34}"/>
               </a:ext>
             </a:extLst>
           </p:cNvPr>
@@ -4973,7 +6216,7 @@
           <p:cNvPr id="13" name="">
             <a:extLst xmlns:a="http://schemas.openxmlformats.org/drawingml/2006/main">
               <a:ext uri="{FF2B5EF4-FFF2-40B4-BE49-F238E27FC236}">
-                <a16:creationId xmlns:a16="http://schemas.microsoft.com/office/drawing/2014/main" id="{FA6B60C7-F77F-41E7-B148-2349E4D8BEB7}"/>
+                <a16:creationId xmlns:a16="http://schemas.microsoft.com/office/drawing/2014/main" id="{65472C9F-39F7-42E3-A5CE-645F885A1B37}"/>
               </a:ext>
             </a:extLst>
           </p:cNvPr>
@@ -5023,7 +6266,7 @@
           <p:cNvPr id="14" name="">
             <a:extLst xmlns:a="http://schemas.openxmlformats.org/drawingml/2006/main">
               <a:ext uri="{FF2B5EF4-FFF2-40B4-BE49-F238E27FC236}">
-                <a16:creationId xmlns:a16="http://schemas.microsoft.com/office/drawing/2014/main" id="{FEE829BC-C365-4AF3-BA29-69293093ABD6}"/>
+                <a16:creationId xmlns:a16="http://schemas.microsoft.com/office/drawing/2014/main" id="{9318CD37-BC14-4927-AE5A-6B94EC7F3BFA}"/>
               </a:ext>
             </a:extLst>
           </p:cNvPr>
@@ -5071,7 +6314,7 @@
     </p:spTree>
     <p:extLst>
       <p:ext uri="{BB962C8B-B14F-4D97-AF65-F5344CB8AC3E}">
-        <p14:creationId xmlns:p14="http://schemas.microsoft.com/office/powerpoint/2010/main" val="908985294"/>
+        <p14:creationId xmlns:p14="http://schemas.microsoft.com/office/powerpoint/2010/main" val="1254036893"/>
       </p:ext>
     </p:extLst>
   </p:cSld>
@@ -5102,7 +6345,7 @@
           <p:cNvPr id="12" name="">
             <a:extLst xmlns:a="http://schemas.openxmlformats.org/drawingml/2006/main">
               <a:ext uri="{FF2B5EF4-FFF2-40B4-BE49-F238E27FC236}">
-                <a16:creationId xmlns:a16="http://schemas.microsoft.com/office/drawing/2014/main" id="{0214A903-4877-4D6F-B48E-3A86B4C4572C}"/>
+                <a16:creationId xmlns:a16="http://schemas.microsoft.com/office/drawing/2014/main" id="{B8032C68-68D8-4E50-9C99-15ACDF549D4B}"/>
               </a:ext>
             </a:extLst>
           </p:cNvPr>
@@ -5152,7 +6395,7 @@
           <p:cNvPr id="2" name="">
             <a:extLst xmlns:a="http://schemas.openxmlformats.org/drawingml/2006/main">
               <a:ext uri="{FF2B5EF4-FFF2-40B4-BE49-F238E27FC236}">
-                <a16:creationId xmlns:a16="http://schemas.microsoft.com/office/drawing/2014/main" id="{B819FBBA-F596-4F7B-9888-36243BF89721}"/>
+                <a16:creationId xmlns:a16="http://schemas.microsoft.com/office/drawing/2014/main" id="{7D159159-C98C-4037-80B6-758E50588C20}"/>
               </a:ext>
             </a:extLst>
           </p:cNvPr>
@@ -5202,7 +6445,7 @@
           <p:cNvPr id="3" name="">
             <a:extLst xmlns:a="http://schemas.openxmlformats.org/drawingml/2006/main">
               <a:ext uri="{FF2B5EF4-FFF2-40B4-BE49-F238E27FC236}">
-                <a16:creationId xmlns:a16="http://schemas.microsoft.com/office/drawing/2014/main" id="{71576250-220D-44DD-9572-8C3216639949}"/>
+                <a16:creationId xmlns:a16="http://schemas.microsoft.com/office/drawing/2014/main" id="{F5AC69A0-D315-4264-A736-A12809F64593}"/>
               </a:ext>
             </a:extLst>
           </p:cNvPr>
@@ -5252,7 +6495,7 @@
           <p:cNvPr id="4" name="">
             <a:extLst xmlns:a="http://schemas.openxmlformats.org/drawingml/2006/main">
               <a:ext uri="{FF2B5EF4-FFF2-40B4-BE49-F238E27FC236}">
-                <a16:creationId xmlns:a16="http://schemas.microsoft.com/office/drawing/2014/main" id="{86D7D8BF-7C48-4630-9784-973D204EBBEE}"/>
+                <a16:creationId xmlns:a16="http://schemas.microsoft.com/office/drawing/2014/main" id="{FF16EFAB-93F6-4E59-BA78-7FDD2F720A99}"/>
               </a:ext>
             </a:extLst>
           </p:cNvPr>
@@ -5302,7 +6545,7 @@
           <p:cNvPr id="5" name="">
             <a:extLst xmlns:a="http://schemas.openxmlformats.org/drawingml/2006/main">
               <a:ext uri="{FF2B5EF4-FFF2-40B4-BE49-F238E27FC236}">
-                <a16:creationId xmlns:a16="http://schemas.microsoft.com/office/drawing/2014/main" id="{93D95A12-1A23-4D53-BCC5-914C93D0DDF6}"/>
+                <a16:creationId xmlns:a16="http://schemas.microsoft.com/office/drawing/2014/main" id="{29EA0E5D-ECA5-4093-9736-0CE354546050}"/>
               </a:ext>
             </a:extLst>
           </p:cNvPr>
@@ -5352,7 +6595,7 @@
           <p:cNvPr id="6" name="">
             <a:extLst xmlns:a="http://schemas.openxmlformats.org/drawingml/2006/main">
               <a:ext uri="{FF2B5EF4-FFF2-40B4-BE49-F238E27FC236}">
-                <a16:creationId xmlns:a16="http://schemas.microsoft.com/office/drawing/2014/main" id="{1DD8B41A-D374-4232-BE34-36A74B338545}"/>
+                <a16:creationId xmlns:a16="http://schemas.microsoft.com/office/drawing/2014/main" id="{1C52FF47-2DCF-4F70-B466-7DD95BE1A772}"/>
               </a:ext>
             </a:extLst>
           </p:cNvPr>
@@ -5402,7 +6645,7 @@
           <p:cNvPr id="7" name="">
             <a:extLst xmlns:a="http://schemas.openxmlformats.org/drawingml/2006/main">
               <a:ext uri="{FF2B5EF4-FFF2-40B4-BE49-F238E27FC236}">
-                <a16:creationId xmlns:a16="http://schemas.microsoft.com/office/drawing/2014/main" id="{F8DD4EA7-68BB-411C-AA8E-6863FE206F50}"/>
+                <a16:creationId xmlns:a16="http://schemas.microsoft.com/office/drawing/2014/main" id="{E7523849-E8A3-47D8-A752-ABBD87847193}"/>
               </a:ext>
             </a:extLst>
           </p:cNvPr>
@@ -5452,7 +6695,7 @@
           <p:cNvPr id="8" name="">
             <a:extLst xmlns:a="http://schemas.openxmlformats.org/drawingml/2006/main">
               <a:ext uri="{FF2B5EF4-FFF2-40B4-BE49-F238E27FC236}">
-                <a16:creationId xmlns:a16="http://schemas.microsoft.com/office/drawing/2014/main" id="{1C8D5E37-BA82-4188-B455-0E8C2DCA8947}"/>
+                <a16:creationId xmlns:a16="http://schemas.microsoft.com/office/drawing/2014/main" id="{9719DDCB-3290-4CB9-88FC-470C3CEF3EED}"/>
               </a:ext>
             </a:extLst>
           </p:cNvPr>
@@ -5502,7 +6745,7 @@
           <p:cNvPr id="9" name="">
             <a:extLst xmlns:a="http://schemas.openxmlformats.org/drawingml/2006/main">
               <a:ext uri="{FF2B5EF4-FFF2-40B4-BE49-F238E27FC236}">
-                <a16:creationId xmlns:a16="http://schemas.microsoft.com/office/drawing/2014/main" id="{C55A4190-5409-428D-AE3B-9535F4AD1DDE}"/>
+                <a16:creationId xmlns:a16="http://schemas.microsoft.com/office/drawing/2014/main" id="{6AAAF10B-62CF-450C-B501-27E3C23856C0}"/>
               </a:ext>
             </a:extLst>
           </p:cNvPr>
@@ -5552,7 +6795,7 @@
           <p:cNvPr id="10" name="">
             <a:extLst xmlns:a="http://schemas.openxmlformats.org/drawingml/2006/main">
               <a:ext uri="{FF2B5EF4-FFF2-40B4-BE49-F238E27FC236}">
-                <a16:creationId xmlns:a16="http://schemas.microsoft.com/office/drawing/2014/main" id="{9F911AD4-54DA-4BDB-A27E-01FD73237203}"/>
+                <a16:creationId xmlns:a16="http://schemas.microsoft.com/office/drawing/2014/main" id="{241BE25E-8A1B-4E3C-9E66-9831F905403D}"/>
               </a:ext>
             </a:extLst>
           </p:cNvPr>
@@ -5602,7 +6845,7 @@
           <p:cNvPr id="11" name="">
             <a:extLst xmlns:a="http://schemas.openxmlformats.org/drawingml/2006/main">
               <a:ext uri="{FF2B5EF4-FFF2-40B4-BE49-F238E27FC236}">
-                <a16:creationId xmlns:a16="http://schemas.microsoft.com/office/drawing/2014/main" id="{9495BC32-3E64-4ABB-88B1-01724A8C9824}"/>
+                <a16:creationId xmlns:a16="http://schemas.microsoft.com/office/drawing/2014/main" id="{0654C8BF-1FB4-45F6-BF0C-5B83AD32AC81}"/>
               </a:ext>
             </a:extLst>
           </p:cNvPr>
@@ -5650,7 +6893,7 @@
     </p:spTree>
     <p:extLst>
       <p:ext uri="{BB962C8B-B14F-4D97-AF65-F5344CB8AC3E}">
-        <p14:creationId xmlns:p14="http://schemas.microsoft.com/office/powerpoint/2010/main" val="1245650642"/>
+        <p14:creationId xmlns:p14="http://schemas.microsoft.com/office/powerpoint/2010/main" val="1258909754"/>
       </p:ext>
     </p:extLst>
   </p:cSld>
@@ -5681,7 +6924,7 @@
           <p:cNvPr id="22" name="">
             <a:extLst xmlns:a="http://schemas.openxmlformats.org/drawingml/2006/main">
               <a:ext uri="{FF2B5EF4-FFF2-40B4-BE49-F238E27FC236}">
-                <a16:creationId xmlns:a16="http://schemas.microsoft.com/office/drawing/2014/main" id="{10312D3C-5AC6-4EA9-A794-91A6A7F2FCB9}"/>
+                <a16:creationId xmlns:a16="http://schemas.microsoft.com/office/drawing/2014/main" id="{58C8B68F-261E-48B8-B1C2-257B1A54212B}"/>
               </a:ext>
             </a:extLst>
           </p:cNvPr>
@@ -5731,7 +6974,7 @@
           <p:cNvPr id="2" name="">
             <a:extLst xmlns:a="http://schemas.openxmlformats.org/drawingml/2006/main">
               <a:ext uri="{FF2B5EF4-FFF2-40B4-BE49-F238E27FC236}">
-                <a16:creationId xmlns:a16="http://schemas.microsoft.com/office/drawing/2014/main" id="{8A0548C2-5826-488D-B1F1-22BD71C878F3}"/>
+                <a16:creationId xmlns:a16="http://schemas.microsoft.com/office/drawing/2014/main" id="{D4595595-CA61-49A5-813A-99BE2BB12F96}"/>
               </a:ext>
             </a:extLst>
           </p:cNvPr>
@@ -5781,7 +7024,7 @@
           <p:cNvPr id="3" name="">
             <a:extLst xmlns:a="http://schemas.openxmlformats.org/drawingml/2006/main">
               <a:ext uri="{FF2B5EF4-FFF2-40B4-BE49-F238E27FC236}">
-                <a16:creationId xmlns:a16="http://schemas.microsoft.com/office/drawing/2014/main" id="{7A583227-C72C-4870-A4AB-26A7F0325A69}"/>
+                <a16:creationId xmlns:a16="http://schemas.microsoft.com/office/drawing/2014/main" id="{CACF41CA-D2AD-472C-AB46-1A499C7C17A2}"/>
               </a:ext>
             </a:extLst>
           </p:cNvPr>
@@ -5816,7 +7059,7 @@
           <p:cNvPr id="4" name="">
             <a:extLst xmlns:a="http://schemas.openxmlformats.org/drawingml/2006/main">
               <a:ext uri="{FF2B5EF4-FFF2-40B4-BE49-F238E27FC236}">
-                <a16:creationId xmlns:a16="http://schemas.microsoft.com/office/drawing/2014/main" id="{69124CE2-0E7A-414A-A43F-BF80FC76B928}"/>
+                <a16:creationId xmlns:a16="http://schemas.microsoft.com/office/drawing/2014/main" id="{1E61DC6F-666F-42DB-99DB-280732054B98}"/>
               </a:ext>
             </a:extLst>
           </p:cNvPr>
@@ -5883,7 +7126,7 @@
           <p:cNvPr id="5" name="">
             <a:extLst xmlns:a="http://schemas.openxmlformats.org/drawingml/2006/main">
               <a:ext uri="{FF2B5EF4-FFF2-40B4-BE49-F238E27FC236}">
-                <a16:creationId xmlns:a16="http://schemas.microsoft.com/office/drawing/2014/main" id="{4EE85025-0FC7-4A73-B66D-04BB04A845C9}"/>
+                <a16:creationId xmlns:a16="http://schemas.microsoft.com/office/drawing/2014/main" id="{D76F8753-24D0-4CA2-AA06-EBDCB4D652BE}"/>
               </a:ext>
             </a:extLst>
           </p:cNvPr>
@@ -5933,7 +7176,7 @@
           <p:cNvPr id="6" name="">
             <a:extLst xmlns:a="http://schemas.openxmlformats.org/drawingml/2006/main">
               <a:ext uri="{FF2B5EF4-FFF2-40B4-BE49-F238E27FC236}">
-                <a16:creationId xmlns:a16="http://schemas.microsoft.com/office/drawing/2014/main" id="{692CB88B-26EC-4AD0-BAFA-CB670F9FF2E2}"/>
+                <a16:creationId xmlns:a16="http://schemas.microsoft.com/office/drawing/2014/main" id="{88ED699D-3AF6-4906-82E5-5140B21FE4AA}"/>
               </a:ext>
             </a:extLst>
           </p:cNvPr>
@@ -5968,7 +7211,7 @@
           <p:cNvPr id="7" name="">
             <a:extLst xmlns:a="http://schemas.openxmlformats.org/drawingml/2006/main">
               <a:ext uri="{FF2B5EF4-FFF2-40B4-BE49-F238E27FC236}">
-                <a16:creationId xmlns:a16="http://schemas.microsoft.com/office/drawing/2014/main" id="{EB4C16F5-0B5D-49C1-9EC6-7476A982D203}"/>
+                <a16:creationId xmlns:a16="http://schemas.microsoft.com/office/drawing/2014/main" id="{4A4D3AD1-3A7F-4797-9F46-1EB04CB4BE6E}"/>
               </a:ext>
             </a:extLst>
           </p:cNvPr>
@@ -6035,7 +7278,7 @@
           <p:cNvPr id="8" name="">
             <a:extLst xmlns:a="http://schemas.openxmlformats.org/drawingml/2006/main">
               <a:ext uri="{FF2B5EF4-FFF2-40B4-BE49-F238E27FC236}">
-                <a16:creationId xmlns:a16="http://schemas.microsoft.com/office/drawing/2014/main" id="{F5E5B23B-9916-4E8D-9843-A0259640B12E}"/>
+                <a16:creationId xmlns:a16="http://schemas.microsoft.com/office/drawing/2014/main" id="{FAD6A26B-2D54-4ED4-8AA1-2AA078C8F0AA}"/>
               </a:ext>
             </a:extLst>
           </p:cNvPr>
@@ -6085,7 +7328,7 @@
           <p:cNvPr id="9" name="">
             <a:extLst xmlns:a="http://schemas.openxmlformats.org/drawingml/2006/main">
               <a:ext uri="{FF2B5EF4-FFF2-40B4-BE49-F238E27FC236}">
-                <a16:creationId xmlns:a16="http://schemas.microsoft.com/office/drawing/2014/main" id="{82D3EA5A-DD27-4A2F-B366-FCCF188D0B4B}"/>
+                <a16:creationId xmlns:a16="http://schemas.microsoft.com/office/drawing/2014/main" id="{CB38301F-CF08-4907-9249-3FD3048C3270}"/>
               </a:ext>
             </a:extLst>
           </p:cNvPr>
@@ -6120,7 +7363,7 @@
           <p:cNvPr id="10" name="">
             <a:extLst xmlns:a="http://schemas.openxmlformats.org/drawingml/2006/main">
               <a:ext uri="{FF2B5EF4-FFF2-40B4-BE49-F238E27FC236}">
-                <a16:creationId xmlns:a16="http://schemas.microsoft.com/office/drawing/2014/main" id="{D0C8E1C4-3538-47AE-BB0A-DE056346D7BC}"/>
+                <a16:creationId xmlns:a16="http://schemas.microsoft.com/office/drawing/2014/main" id="{0B183D6D-AE2F-4961-B1E2-0BCBF2C63E94}"/>
               </a:ext>
             </a:extLst>
           </p:cNvPr>
@@ -6187,7 +7430,7 @@
           <p:cNvPr id="11" name="">
             <a:extLst xmlns:a="http://schemas.openxmlformats.org/drawingml/2006/main">
               <a:ext uri="{FF2B5EF4-FFF2-40B4-BE49-F238E27FC236}">
-                <a16:creationId xmlns:a16="http://schemas.microsoft.com/office/drawing/2014/main" id="{63A4743A-4513-4439-B640-682651DA02D6}"/>
+                <a16:creationId xmlns:a16="http://schemas.microsoft.com/office/drawing/2014/main" id="{6AEA85BB-478D-4ECC-88CE-653DC4F40D8C}"/>
               </a:ext>
             </a:extLst>
           </p:cNvPr>
@@ -6237,7 +7480,7 @@
           <p:cNvPr id="12" name="">
             <a:extLst xmlns:a="http://schemas.openxmlformats.org/drawingml/2006/main">
               <a:ext uri="{FF2B5EF4-FFF2-40B4-BE49-F238E27FC236}">
-                <a16:creationId xmlns:a16="http://schemas.microsoft.com/office/drawing/2014/main" id="{08048A5B-619F-47D3-A115-91629D1A45CA}"/>
+                <a16:creationId xmlns:a16="http://schemas.microsoft.com/office/drawing/2014/main" id="{268FFA50-31C1-40A3-8C92-0B995F5CE0CE}"/>
               </a:ext>
             </a:extLst>
           </p:cNvPr>
@@ -6272,7 +7515,7 @@
           <p:cNvPr id="13" name="">
             <a:extLst xmlns:a="http://schemas.openxmlformats.org/drawingml/2006/main">
               <a:ext uri="{FF2B5EF4-FFF2-40B4-BE49-F238E27FC236}">
-                <a16:creationId xmlns:a16="http://schemas.microsoft.com/office/drawing/2014/main" id="{ABCB61B2-1A7B-4D7A-8B12-21E5CB1179A0}"/>
+                <a16:creationId xmlns:a16="http://schemas.microsoft.com/office/drawing/2014/main" id="{AF86E3E3-11C7-41E1-A9FF-00C2AD55BAFF}"/>
               </a:ext>
             </a:extLst>
           </p:cNvPr>
@@ -6339,7 +7582,7 @@
           <p:cNvPr id="14" name="">
             <a:extLst xmlns:a="http://schemas.openxmlformats.org/drawingml/2006/main">
               <a:ext uri="{FF2B5EF4-FFF2-40B4-BE49-F238E27FC236}">
-                <a16:creationId xmlns:a16="http://schemas.microsoft.com/office/drawing/2014/main" id="{219E9940-5C9E-4EC6-A69A-827CE649F03D}"/>
+                <a16:creationId xmlns:a16="http://schemas.microsoft.com/office/drawing/2014/main" id="{D0BA1036-B8C6-4767-B710-F1BBB980F267}"/>
               </a:ext>
             </a:extLst>
           </p:cNvPr>
@@ -6389,7 +7632,7 @@
           <p:cNvPr id="15" name="">
             <a:extLst xmlns:a="http://schemas.openxmlformats.org/drawingml/2006/main">
               <a:ext uri="{FF2B5EF4-FFF2-40B4-BE49-F238E27FC236}">
-                <a16:creationId xmlns:a16="http://schemas.microsoft.com/office/drawing/2014/main" id="{BDA228D9-52A0-48FF-825A-DAE3A8B68D5A}"/>
+                <a16:creationId xmlns:a16="http://schemas.microsoft.com/office/drawing/2014/main" id="{4ACC93DD-B8DF-4914-B627-F3D4D0CD4FFA}"/>
               </a:ext>
             </a:extLst>
           </p:cNvPr>
@@ -6439,7 +7682,7 @@
           <p:cNvPr id="16" name="">
             <a:extLst xmlns:a="http://schemas.openxmlformats.org/drawingml/2006/main">
               <a:ext uri="{FF2B5EF4-FFF2-40B4-BE49-F238E27FC236}">
-                <a16:creationId xmlns:a16="http://schemas.microsoft.com/office/drawing/2014/main" id="{949173BC-1186-4C49-BB7D-CEBE71A14DDB}"/>
+                <a16:creationId xmlns:a16="http://schemas.microsoft.com/office/drawing/2014/main" id="{3B9EDF85-5D83-424A-960F-B2D793EF8EA4}"/>
               </a:ext>
             </a:extLst>
           </p:cNvPr>
@@ -6489,7 +7732,7 @@
           <p:cNvPr id="17" name="">
             <a:extLst xmlns:a="http://schemas.openxmlformats.org/drawingml/2006/main">
               <a:ext uri="{FF2B5EF4-FFF2-40B4-BE49-F238E27FC236}">
-                <a16:creationId xmlns:a16="http://schemas.microsoft.com/office/drawing/2014/main" id="{5A4BF536-1780-484A-A81D-22D33B90F6BB}"/>
+                <a16:creationId xmlns:a16="http://schemas.microsoft.com/office/drawing/2014/main" id="{C59F22D1-9137-43DC-9200-1AE4145E96D7}"/>
               </a:ext>
             </a:extLst>
           </p:cNvPr>
@@ -6539,7 +7782,7 @@
           <p:cNvPr id="18" name="">
             <a:extLst xmlns:a="http://schemas.openxmlformats.org/drawingml/2006/main">
               <a:ext uri="{FF2B5EF4-FFF2-40B4-BE49-F238E27FC236}">
-                <a16:creationId xmlns:a16="http://schemas.microsoft.com/office/drawing/2014/main" id="{40CBD32F-9C76-4090-967E-7EDBEF52065A}"/>
+                <a16:creationId xmlns:a16="http://schemas.microsoft.com/office/drawing/2014/main" id="{433AADAD-D5F9-4EA1-8B39-8B1F7C47E2BA}"/>
               </a:ext>
             </a:extLst>
           </p:cNvPr>
@@ -6589,7 +7832,7 @@
           <p:cNvPr id="19" name="">
             <a:extLst xmlns:a="http://schemas.openxmlformats.org/drawingml/2006/main">
               <a:ext uri="{FF2B5EF4-FFF2-40B4-BE49-F238E27FC236}">
-                <a16:creationId xmlns:a16="http://schemas.microsoft.com/office/drawing/2014/main" id="{E9EA22CF-9461-43DA-91A6-B06223394848}"/>
+                <a16:creationId xmlns:a16="http://schemas.microsoft.com/office/drawing/2014/main" id="{3B93C9A2-D2F6-4CB3-8FC4-6904602EA6BA}"/>
               </a:ext>
             </a:extLst>
           </p:cNvPr>
@@ -6639,7 +7882,7 @@
           <p:cNvPr id="20" name="">
             <a:extLst xmlns:a="http://schemas.openxmlformats.org/drawingml/2006/main">
               <a:ext uri="{FF2B5EF4-FFF2-40B4-BE49-F238E27FC236}">
-                <a16:creationId xmlns:a16="http://schemas.microsoft.com/office/drawing/2014/main" id="{006F0B6F-A4AC-4B8C-BE59-4AC5DB49798F}"/>
+                <a16:creationId xmlns:a16="http://schemas.microsoft.com/office/drawing/2014/main" id="{6872D377-1DB9-4B96-BAA5-7B07590C6AF7}"/>
               </a:ext>
             </a:extLst>
           </p:cNvPr>
@@ -6689,7 +7932,7 @@
           <p:cNvPr id="21" name="">
             <a:extLst xmlns:a="http://schemas.openxmlformats.org/drawingml/2006/main">
               <a:ext uri="{FF2B5EF4-FFF2-40B4-BE49-F238E27FC236}">
-                <a16:creationId xmlns:a16="http://schemas.microsoft.com/office/drawing/2014/main" id="{E3C72460-7EC8-44DB-941A-68EADBE160B2}"/>
+                <a16:creationId xmlns:a16="http://schemas.microsoft.com/office/drawing/2014/main" id="{45F6FF87-08F6-4483-B464-35BC1D98FBA7}"/>
               </a:ext>
             </a:extLst>
           </p:cNvPr>
@@ -6737,7 +7980,7 @@
     </p:spTree>
     <p:extLst>
       <p:ext uri="{BB962C8B-B14F-4D97-AF65-F5344CB8AC3E}">
-        <p14:creationId xmlns:p14="http://schemas.microsoft.com/office/powerpoint/2010/main" val="876670144"/>
+        <p14:creationId xmlns:p14="http://schemas.microsoft.com/office/powerpoint/2010/main" val="337880034"/>
       </p:ext>
     </p:extLst>
   </p:cSld>
@@ -6768,7 +8011,7 @@
           <p:cNvPr id="15" name="">
             <a:extLst xmlns:a="http://schemas.openxmlformats.org/drawingml/2006/main">
               <a:ext uri="{FF2B5EF4-FFF2-40B4-BE49-F238E27FC236}">
-                <a16:creationId xmlns:a16="http://schemas.microsoft.com/office/drawing/2014/main" id="{F4B4F162-5588-4747-8482-69912614F0A4}"/>
+                <a16:creationId xmlns:a16="http://schemas.microsoft.com/office/drawing/2014/main" id="{09A504ED-D1F0-4BCF-AAD4-3E2433BAEC4D}"/>
               </a:ext>
             </a:extLst>
           </p:cNvPr>
@@ -6818,7 +8061,7 @@
           <p:cNvPr id="2" name="">
             <a:extLst xmlns:a="http://schemas.openxmlformats.org/drawingml/2006/main">
               <a:ext uri="{FF2B5EF4-FFF2-40B4-BE49-F238E27FC236}">
-                <a16:creationId xmlns:a16="http://schemas.microsoft.com/office/drawing/2014/main" id="{1D37321D-0146-43BC-9810-69227E71B285}"/>
+                <a16:creationId xmlns:a16="http://schemas.microsoft.com/office/drawing/2014/main" id="{68B2278D-3BC7-4413-B38F-F10586ED9345}"/>
               </a:ext>
             </a:extLst>
           </p:cNvPr>
@@ -6868,7 +8111,7 @@
           <p:cNvPr id="3" name="">
             <a:extLst xmlns:a="http://schemas.openxmlformats.org/drawingml/2006/main">
               <a:ext uri="{FF2B5EF4-FFF2-40B4-BE49-F238E27FC236}">
-                <a16:creationId xmlns:a16="http://schemas.microsoft.com/office/drawing/2014/main" id="{6B1B5FF6-3F06-48E8-BDA3-7AD4C68441E3}"/>
+                <a16:creationId xmlns:a16="http://schemas.microsoft.com/office/drawing/2014/main" id="{0785AB17-1DF2-4113-90B6-C9E7F1307098}"/>
               </a:ext>
             </a:extLst>
           </p:cNvPr>
@@ -6918,7 +8161,7 @@
           <p:cNvPr id="4" name="">
             <a:extLst xmlns:a="http://schemas.openxmlformats.org/drawingml/2006/main">
               <a:ext uri="{FF2B5EF4-FFF2-40B4-BE49-F238E27FC236}">
-                <a16:creationId xmlns:a16="http://schemas.microsoft.com/office/drawing/2014/main" id="{BD10B93F-C08B-4DFE-A887-A602EB3BF485}"/>
+                <a16:creationId xmlns:a16="http://schemas.microsoft.com/office/drawing/2014/main" id="{E432BAD8-991A-44ED-9DA3-2457524271A3}"/>
               </a:ext>
             </a:extLst>
           </p:cNvPr>
@@ -6968,7 +8211,7 @@
           <p:cNvPr id="5" name="">
             <a:extLst xmlns:a="http://schemas.openxmlformats.org/drawingml/2006/main">
               <a:ext uri="{FF2B5EF4-FFF2-40B4-BE49-F238E27FC236}">
-                <a16:creationId xmlns:a16="http://schemas.microsoft.com/office/drawing/2014/main" id="{2F09F9F7-049B-42FD-939A-D3E36FF201D5}"/>
+                <a16:creationId xmlns:a16="http://schemas.microsoft.com/office/drawing/2014/main" id="{A9BFD9E2-0872-4DFA-ADDF-E50B1B7A7EAE}"/>
               </a:ext>
             </a:extLst>
           </p:cNvPr>
@@ -7018,7 +8261,7 @@
           <p:cNvPr id="6" name="">
             <a:extLst xmlns:a="http://schemas.openxmlformats.org/drawingml/2006/main">
               <a:ext uri="{FF2B5EF4-FFF2-40B4-BE49-F238E27FC236}">
-                <a16:creationId xmlns:a16="http://schemas.microsoft.com/office/drawing/2014/main" id="{22A3F2E9-CCFE-458D-9EA0-BC00465BE40E}"/>
+                <a16:creationId xmlns:a16="http://schemas.microsoft.com/office/drawing/2014/main" id="{459E9D6B-371A-4ACF-9A21-4E0323D4F274}"/>
               </a:ext>
             </a:extLst>
           </p:cNvPr>
@@ -7068,7 +8311,7 @@
           <p:cNvPr id="7" name="">
             <a:extLst xmlns:a="http://schemas.openxmlformats.org/drawingml/2006/main">
               <a:ext uri="{FF2B5EF4-FFF2-40B4-BE49-F238E27FC236}">
-                <a16:creationId xmlns:a16="http://schemas.microsoft.com/office/drawing/2014/main" id="{A3EA0753-2EA4-4627-A5B2-C5D4F0CBA521}"/>
+                <a16:creationId xmlns:a16="http://schemas.microsoft.com/office/drawing/2014/main" id="{82D8BDE3-CC5B-410A-88B7-403020489D38}"/>
               </a:ext>
             </a:extLst>
           </p:cNvPr>
@@ -7118,7 +8361,7 @@
           <p:cNvPr id="8" name="">
             <a:extLst xmlns:a="http://schemas.openxmlformats.org/drawingml/2006/main">
               <a:ext uri="{FF2B5EF4-FFF2-40B4-BE49-F238E27FC236}">
-                <a16:creationId xmlns:a16="http://schemas.microsoft.com/office/drawing/2014/main" id="{A347428D-9091-456E-85B7-7D321637F945}"/>
+                <a16:creationId xmlns:a16="http://schemas.microsoft.com/office/drawing/2014/main" id="{F166C464-1515-4A80-9E7E-5203316C4B94}"/>
               </a:ext>
             </a:extLst>
           </p:cNvPr>
@@ -7168,7 +8411,7 @@
           <p:cNvPr id="9" name="">
             <a:extLst xmlns:a="http://schemas.openxmlformats.org/drawingml/2006/main">
               <a:ext uri="{FF2B5EF4-FFF2-40B4-BE49-F238E27FC236}">
-                <a16:creationId xmlns:a16="http://schemas.microsoft.com/office/drawing/2014/main" id="{DCCE03A7-0BB6-42F1-BDEA-5DA59B6FAC18}"/>
+                <a16:creationId xmlns:a16="http://schemas.microsoft.com/office/drawing/2014/main" id="{6DE31DEF-8F63-49CB-8455-C14319ACE546}"/>
               </a:ext>
             </a:extLst>
           </p:cNvPr>
@@ -7218,7 +8461,7 @@
           <p:cNvPr id="10" name="">
             <a:extLst xmlns:a="http://schemas.openxmlformats.org/drawingml/2006/main">
               <a:ext uri="{FF2B5EF4-FFF2-40B4-BE49-F238E27FC236}">
-                <a16:creationId xmlns:a16="http://schemas.microsoft.com/office/drawing/2014/main" id="{A6AC3CFC-2A88-437A-8C51-013816955484}"/>
+                <a16:creationId xmlns:a16="http://schemas.microsoft.com/office/drawing/2014/main" id="{C4677FBF-2706-4758-83AB-7306E4790457}"/>
               </a:ext>
             </a:extLst>
           </p:cNvPr>
@@ -7268,7 +8511,7 @@
           <p:cNvPr id="11" name="">
             <a:extLst xmlns:a="http://schemas.openxmlformats.org/drawingml/2006/main">
               <a:ext uri="{FF2B5EF4-FFF2-40B4-BE49-F238E27FC236}">
-                <a16:creationId xmlns:a16="http://schemas.microsoft.com/office/drawing/2014/main" id="{B8A0E14F-7B79-4746-9CFE-925D40906446}"/>
+                <a16:creationId xmlns:a16="http://schemas.microsoft.com/office/drawing/2014/main" id="{2354027A-D097-4DA0-BDDF-23100CD5061A}"/>
               </a:ext>
             </a:extLst>
           </p:cNvPr>
@@ -7299,7 +8542,7 @@
           <p:cNvPr id="12" name="">
             <a:extLst xmlns:a="http://schemas.openxmlformats.org/drawingml/2006/main">
               <a:ext uri="{FF2B5EF4-FFF2-40B4-BE49-F238E27FC236}">
-                <a16:creationId xmlns:a16="http://schemas.microsoft.com/office/drawing/2014/main" id="{B4BBA6D2-CA23-4266-9A78-3BC96E4E8E21}"/>
+                <a16:creationId xmlns:a16="http://schemas.microsoft.com/office/drawing/2014/main" id="{96B9E938-6151-4C16-993D-80075D6C130C}"/>
               </a:ext>
             </a:extLst>
           </p:cNvPr>
@@ -7349,7 +8592,7 @@
           <p:cNvPr id="13" name="">
             <a:extLst xmlns:a="http://schemas.openxmlformats.org/drawingml/2006/main">
               <a:ext uri="{FF2B5EF4-FFF2-40B4-BE49-F238E27FC236}">
-                <a16:creationId xmlns:a16="http://schemas.microsoft.com/office/drawing/2014/main" id="{8A998F70-F113-477D-A5E9-5F2007229FB3}"/>
+                <a16:creationId xmlns:a16="http://schemas.microsoft.com/office/drawing/2014/main" id="{C4E9F532-5FC9-483D-A0A8-0A691F375FB1}"/>
               </a:ext>
             </a:extLst>
           </p:cNvPr>
@@ -7399,7 +8642,7 @@
           <p:cNvPr id="14" name="">
             <a:extLst xmlns:a="http://schemas.openxmlformats.org/drawingml/2006/main">
               <a:ext uri="{FF2B5EF4-FFF2-40B4-BE49-F238E27FC236}">
-                <a16:creationId xmlns:a16="http://schemas.microsoft.com/office/drawing/2014/main" id="{09B5FA8D-3BCA-4566-BAB7-B720F8DA3FDF}"/>
+                <a16:creationId xmlns:a16="http://schemas.microsoft.com/office/drawing/2014/main" id="{A9C268DE-EF80-462C-A3B1-9ADF1D5B714E}"/>
               </a:ext>
             </a:extLst>
           </p:cNvPr>
@@ -7447,7 +8690,7 @@
     </p:spTree>
     <p:extLst>
       <p:ext uri="{BB962C8B-B14F-4D97-AF65-F5344CB8AC3E}">
-        <p14:creationId xmlns:p14="http://schemas.microsoft.com/office/powerpoint/2010/main" val="427654349"/>
+        <p14:creationId xmlns:p14="http://schemas.microsoft.com/office/powerpoint/2010/main" val="843098074"/>
       </p:ext>
     </p:extLst>
   </p:cSld>
@@ -7478,7 +8721,7 @@
           <p:cNvPr id="7" name="">
             <a:extLst xmlns:a="http://schemas.openxmlformats.org/drawingml/2006/main">
               <a:ext uri="{FF2B5EF4-FFF2-40B4-BE49-F238E27FC236}">
-                <a16:creationId xmlns:a16="http://schemas.microsoft.com/office/drawing/2014/main" id="{A09C2A0C-D04D-48FD-A7AA-AE83D36D0BDE}"/>
+                <a16:creationId xmlns:a16="http://schemas.microsoft.com/office/drawing/2014/main" id="{F6EB642C-5B29-40CF-91F5-8791F9E735E5}"/>
               </a:ext>
             </a:extLst>
           </p:cNvPr>
@@ -7528,7 +8771,7 @@
           <p:cNvPr id="2" name="">
             <a:extLst xmlns:a="http://schemas.openxmlformats.org/drawingml/2006/main">
               <a:ext uri="{FF2B5EF4-FFF2-40B4-BE49-F238E27FC236}">
-                <a16:creationId xmlns:a16="http://schemas.microsoft.com/office/drawing/2014/main" id="{8F04FD3D-74BF-42A8-9A7C-6899816AE0AC}"/>
+                <a16:creationId xmlns:a16="http://schemas.microsoft.com/office/drawing/2014/main" id="{3989FB80-91BE-49E4-B8D2-9F52CB063719}"/>
               </a:ext>
             </a:extLst>
           </p:cNvPr>
@@ -7582,7 +8825,7 @@
           <p:nvPr/>
         </p:nvPicPr>
         <p:blipFill>
-          <a:blip xmlns:r="http://schemas.openxmlformats.org/officeDocument/2006/relationships" xmlns:a="http://schemas.openxmlformats.org/drawingml/2006/main" r:embed="R4150a337e9ec487f"/>
+          <a:blip xmlns:r="http://schemas.openxmlformats.org/officeDocument/2006/relationships" xmlns:a="http://schemas.openxmlformats.org/drawingml/2006/main" r:embed="Rd1675278ea7a4416"/>
           <a:stretch xmlns:a="http://schemas.openxmlformats.org/drawingml/2006/main"/>
         </p:blipFill>
         <p:spPr>
@@ -7600,7 +8843,7 @@
           <p:cNvPr id="4" name="">
             <a:extLst xmlns:a="http://schemas.openxmlformats.org/drawingml/2006/main">
               <a:ext uri="{FF2B5EF4-FFF2-40B4-BE49-F238E27FC236}">
-                <a16:creationId xmlns:a16="http://schemas.microsoft.com/office/drawing/2014/main" id="{4E637304-7CF4-413F-838E-706688D7508E}"/>
+                <a16:creationId xmlns:a16="http://schemas.microsoft.com/office/drawing/2014/main" id="{73D9F1E0-4CDF-4EC7-BD83-D07F50E0B7F4}"/>
               </a:ext>
             </a:extLst>
           </p:cNvPr>
@@ -7650,7 +8893,7 @@
           <p:cNvPr id="5" name="">
             <a:extLst xmlns:a="http://schemas.openxmlformats.org/drawingml/2006/main">
               <a:ext uri="{FF2B5EF4-FFF2-40B4-BE49-F238E27FC236}">
-                <a16:creationId xmlns:a16="http://schemas.microsoft.com/office/drawing/2014/main" id="{B03724F4-B3F8-4BC8-83FA-CA2CB8F7709E}"/>
+                <a16:creationId xmlns:a16="http://schemas.microsoft.com/office/drawing/2014/main" id="{4ED53949-7F52-4E29-B9F0-42C42A3FC374}"/>
               </a:ext>
             </a:extLst>
           </p:cNvPr>
@@ -7700,7 +8943,7 @@
           <p:cNvPr id="6" name="">
             <a:extLst xmlns:a="http://schemas.openxmlformats.org/drawingml/2006/main">
               <a:ext uri="{FF2B5EF4-FFF2-40B4-BE49-F238E27FC236}">
-                <a16:creationId xmlns:a16="http://schemas.microsoft.com/office/drawing/2014/main" id="{EDC63988-5859-43FA-A553-4F1311019966}"/>
+                <a16:creationId xmlns:a16="http://schemas.microsoft.com/office/drawing/2014/main" id="{883CD310-6664-44B5-8937-5E779FDB9C15}"/>
               </a:ext>
             </a:extLst>
           </p:cNvPr>
@@ -7748,7 +8991,7 @@
     </p:spTree>
     <p:extLst>
       <p:ext uri="{BB962C8B-B14F-4D97-AF65-F5344CB8AC3E}">
-        <p14:creationId xmlns:p14="http://schemas.microsoft.com/office/powerpoint/2010/main" val="653779735"/>
+        <p14:creationId xmlns:p14="http://schemas.microsoft.com/office/powerpoint/2010/main" val="910095904"/>
       </p:ext>
     </p:extLst>
   </p:cSld>
@@ -7779,7 +9022,7 @@
           <p:cNvPr id="11" name="">
             <a:extLst xmlns:a="http://schemas.openxmlformats.org/drawingml/2006/main">
               <a:ext uri="{FF2B5EF4-FFF2-40B4-BE49-F238E27FC236}">
-                <a16:creationId xmlns:a16="http://schemas.microsoft.com/office/drawing/2014/main" id="{FB11BD36-A475-4CAF-B2DD-DEFFC67DBDF6}"/>
+                <a16:creationId xmlns:a16="http://schemas.microsoft.com/office/drawing/2014/main" id="{45DEDB76-9A0B-45B9-8BC7-92B842B99444}"/>
               </a:ext>
             </a:extLst>
           </p:cNvPr>
@@ -7829,7 +9072,7 @@
           <p:cNvPr id="2" name="">
             <a:extLst xmlns:a="http://schemas.openxmlformats.org/drawingml/2006/main">
               <a:ext uri="{FF2B5EF4-FFF2-40B4-BE49-F238E27FC236}">
-                <a16:creationId xmlns:a16="http://schemas.microsoft.com/office/drawing/2014/main" id="{AE5E1168-66AE-4BDD-92C9-C454CA9E5B7E}"/>
+                <a16:creationId xmlns:a16="http://schemas.microsoft.com/office/drawing/2014/main" id="{7B312CE4-0653-4CC1-A011-C38E24005B80}"/>
               </a:ext>
             </a:extLst>
           </p:cNvPr>
@@ -7883,7 +9126,7 @@
           <p:nvPr/>
         </p:nvPicPr>
         <p:blipFill>
-          <a:blip xmlns:r="http://schemas.openxmlformats.org/officeDocument/2006/relationships" xmlns:a="http://schemas.openxmlformats.org/drawingml/2006/main" r:embed="R7d60b54b0d0747a6"/>
+          <a:blip xmlns:r="http://schemas.openxmlformats.org/officeDocument/2006/relationships" xmlns:a="http://schemas.openxmlformats.org/drawingml/2006/main" r:embed="R7d62aa19976848e3"/>
           <a:stretch xmlns:a="http://schemas.openxmlformats.org/drawingml/2006/main"/>
         </p:blipFill>
         <p:spPr>
@@ -7901,7 +9144,7 @@
           <p:cNvPr id="4" name="">
             <a:extLst xmlns:a="http://schemas.openxmlformats.org/drawingml/2006/main">
               <a:ext uri="{FF2B5EF4-FFF2-40B4-BE49-F238E27FC236}">
-                <a16:creationId xmlns:a16="http://schemas.microsoft.com/office/drawing/2014/main" id="{4ADED076-709E-4095-8904-CF0D751BE6F5}"/>
+                <a16:creationId xmlns:a16="http://schemas.microsoft.com/office/drawing/2014/main" id="{B77D43B4-1A83-4397-B653-ED6B82C973E0}"/>
               </a:ext>
             </a:extLst>
           </p:cNvPr>
@@ -7951,7 +9194,7 @@
           <p:cNvPr id="5" name="">
             <a:extLst xmlns:a="http://schemas.openxmlformats.org/drawingml/2006/main">
               <a:ext uri="{FF2B5EF4-FFF2-40B4-BE49-F238E27FC236}">
-                <a16:creationId xmlns:a16="http://schemas.microsoft.com/office/drawing/2014/main" id="{C646962C-FF02-4B20-B553-C1ED9D25CD09}"/>
+                <a16:creationId xmlns:a16="http://schemas.microsoft.com/office/drawing/2014/main" id="{61F16353-F6C2-4940-9355-2E598FAF0EA8}"/>
               </a:ext>
             </a:extLst>
           </p:cNvPr>
@@ -8001,7 +9244,7 @@
           <p:cNvPr id="6" name="">
             <a:extLst xmlns:a="http://schemas.openxmlformats.org/drawingml/2006/main">
               <a:ext uri="{FF2B5EF4-FFF2-40B4-BE49-F238E27FC236}">
-                <a16:creationId xmlns:a16="http://schemas.microsoft.com/office/drawing/2014/main" id="{909897E7-54F6-4416-87F1-064332E448EE}"/>
+                <a16:creationId xmlns:a16="http://schemas.microsoft.com/office/drawing/2014/main" id="{7869CA2A-555D-433E-8A14-ADE2ABB3D093}"/>
               </a:ext>
             </a:extLst>
           </p:cNvPr>
@@ -8051,7 +9294,7 @@
           <p:cNvPr id="7" name="">
             <a:extLst xmlns:a="http://schemas.openxmlformats.org/drawingml/2006/main">
               <a:ext uri="{FF2B5EF4-FFF2-40B4-BE49-F238E27FC236}">
-                <a16:creationId xmlns:a16="http://schemas.microsoft.com/office/drawing/2014/main" id="{47BB8C4A-89D1-4CDA-B399-30109A90E2C2}"/>
+                <a16:creationId xmlns:a16="http://schemas.microsoft.com/office/drawing/2014/main" id="{1E778660-C82E-476E-8143-BA4F27F2B49C}"/>
               </a:ext>
             </a:extLst>
           </p:cNvPr>
@@ -8101,7 +9344,7 @@
           <p:cNvPr id="8" name="">
             <a:extLst xmlns:a="http://schemas.openxmlformats.org/drawingml/2006/main">
               <a:ext uri="{FF2B5EF4-FFF2-40B4-BE49-F238E27FC236}">
-                <a16:creationId xmlns:a16="http://schemas.microsoft.com/office/drawing/2014/main" id="{774D1A36-1F59-4A90-94E9-98443A1E5A1D}"/>
+                <a16:creationId xmlns:a16="http://schemas.microsoft.com/office/drawing/2014/main" id="{7FF06F40-DCFB-4687-B1AA-A347499496AF}"/>
               </a:ext>
             </a:extLst>
           </p:cNvPr>
@@ -8151,7 +9394,7 @@
           <p:cNvPr id="9" name="">
             <a:extLst xmlns:a="http://schemas.openxmlformats.org/drawingml/2006/main">
               <a:ext uri="{FF2B5EF4-FFF2-40B4-BE49-F238E27FC236}">
-                <a16:creationId xmlns:a16="http://schemas.microsoft.com/office/drawing/2014/main" id="{F2249596-BDD9-4FA5-90DF-D3F0DD443725}"/>
+                <a16:creationId xmlns:a16="http://schemas.microsoft.com/office/drawing/2014/main" id="{24A5E46C-95D7-49ED-93F4-9DD6C4E0640F}"/>
               </a:ext>
             </a:extLst>
           </p:cNvPr>
@@ -8201,7 +9444,7 @@
           <p:cNvPr id="10" name="">
             <a:extLst xmlns:a="http://schemas.openxmlformats.org/drawingml/2006/main">
               <a:ext uri="{FF2B5EF4-FFF2-40B4-BE49-F238E27FC236}">
-                <a16:creationId xmlns:a16="http://schemas.microsoft.com/office/drawing/2014/main" id="{8625E1F9-F113-42C8-A344-1865570C9E6B}"/>
+                <a16:creationId xmlns:a16="http://schemas.microsoft.com/office/drawing/2014/main" id="{3828E3EF-5D5C-4C46-BCFA-0E96C935ECF9}"/>
               </a:ext>
             </a:extLst>
           </p:cNvPr>
@@ -8249,7 +9492,7 @@
     </p:spTree>
     <p:extLst>
       <p:ext uri="{BB962C8B-B14F-4D97-AF65-F5344CB8AC3E}">
-        <p14:creationId xmlns:p14="http://schemas.microsoft.com/office/powerpoint/2010/main" val="512601409"/>
+        <p14:creationId xmlns:p14="http://schemas.microsoft.com/office/powerpoint/2010/main" val="1079977351"/>
       </p:ext>
     </p:extLst>
   </p:cSld>
@@ -8280,7 +9523,7 @@
           <p:cNvPr id="13" name="">
             <a:extLst xmlns:a="http://schemas.openxmlformats.org/drawingml/2006/main">
               <a:ext uri="{FF2B5EF4-FFF2-40B4-BE49-F238E27FC236}">
-                <a16:creationId xmlns:a16="http://schemas.microsoft.com/office/drawing/2014/main" id="{8192C54A-6898-4329-A70E-FC180B335280}"/>
+                <a16:creationId xmlns:a16="http://schemas.microsoft.com/office/drawing/2014/main" id="{420A89CC-69AD-497C-AF8D-FA5079C6EE06}"/>
               </a:ext>
             </a:extLst>
           </p:cNvPr>
@@ -8330,7 +9573,7 @@
           <p:cNvPr id="2" name="">
             <a:extLst xmlns:a="http://schemas.openxmlformats.org/drawingml/2006/main">
               <a:ext uri="{FF2B5EF4-FFF2-40B4-BE49-F238E27FC236}">
-                <a16:creationId xmlns:a16="http://schemas.microsoft.com/office/drawing/2014/main" id="{D791AAE8-0A74-4585-9813-9BB9E1D97AEE}"/>
+                <a16:creationId xmlns:a16="http://schemas.microsoft.com/office/drawing/2014/main" id="{E469EF6B-D2DB-433F-B7D1-59EE7517313E}"/>
               </a:ext>
             </a:extLst>
           </p:cNvPr>
@@ -8384,7 +9627,7 @@
           <p:nvPr/>
         </p:nvPicPr>
         <p:blipFill>
-          <a:blip xmlns:r="http://schemas.openxmlformats.org/officeDocument/2006/relationships" xmlns:a="http://schemas.openxmlformats.org/drawingml/2006/main" r:embed="R67a320ad8d814d10"/>
+          <a:blip xmlns:r="http://schemas.openxmlformats.org/officeDocument/2006/relationships" xmlns:a="http://schemas.openxmlformats.org/drawingml/2006/main" r:embed="Rffc454e21491477a"/>
           <a:stretch xmlns:a="http://schemas.openxmlformats.org/drawingml/2006/main"/>
         </p:blipFill>
         <p:spPr>
@@ -8402,7 +9645,7 @@
           <p:cNvPr id="4" name="">
             <a:extLst xmlns:a="http://schemas.openxmlformats.org/drawingml/2006/main">
               <a:ext uri="{FF2B5EF4-FFF2-40B4-BE49-F238E27FC236}">
-                <a16:creationId xmlns:a16="http://schemas.microsoft.com/office/drawing/2014/main" id="{CD2250E6-D362-42CA-BCBC-1F6135D12609}"/>
+                <a16:creationId xmlns:a16="http://schemas.microsoft.com/office/drawing/2014/main" id="{5822D81E-5978-483F-BB48-2944842FD18F}"/>
               </a:ext>
             </a:extLst>
           </p:cNvPr>
@@ -8452,7 +9695,7 @@
           <p:cNvPr id="5" name="">
             <a:extLst xmlns:a="http://schemas.openxmlformats.org/drawingml/2006/main">
               <a:ext uri="{FF2B5EF4-FFF2-40B4-BE49-F238E27FC236}">
-                <a16:creationId xmlns:a16="http://schemas.microsoft.com/office/drawing/2014/main" id="{A706E735-D169-48C8-8E8C-F7609764713C}"/>
+                <a16:creationId xmlns:a16="http://schemas.microsoft.com/office/drawing/2014/main" id="{F296E73F-2FC1-4D37-828C-0165FB21803F}"/>
               </a:ext>
             </a:extLst>
           </p:cNvPr>
@@ -8502,7 +9745,7 @@
           <p:cNvPr id="6" name="">
             <a:extLst xmlns:a="http://schemas.openxmlformats.org/drawingml/2006/main">
               <a:ext uri="{FF2B5EF4-FFF2-40B4-BE49-F238E27FC236}">
-                <a16:creationId xmlns:a16="http://schemas.microsoft.com/office/drawing/2014/main" id="{6EFA9B0D-FC89-42C6-B365-5C75450D1EE9}"/>
+                <a16:creationId xmlns:a16="http://schemas.microsoft.com/office/drawing/2014/main" id="{77C01BB6-9C5E-4401-95D9-864684348BA0}"/>
               </a:ext>
             </a:extLst>
           </p:cNvPr>
@@ -8552,7 +9795,7 @@
           <p:cNvPr id="7" name="">
             <a:extLst xmlns:a="http://schemas.openxmlformats.org/drawingml/2006/main">
               <a:ext uri="{FF2B5EF4-FFF2-40B4-BE49-F238E27FC236}">
-                <a16:creationId xmlns:a16="http://schemas.microsoft.com/office/drawing/2014/main" id="{F81CC9E7-5855-46BD-867D-EF8737D81938}"/>
+                <a16:creationId xmlns:a16="http://schemas.microsoft.com/office/drawing/2014/main" id="{50724CF8-DC14-4C4E-87A1-94E2FC01C63B}"/>
               </a:ext>
             </a:extLst>
           </p:cNvPr>
@@ -8602,7 +9845,7 @@
           <p:cNvPr id="8" name="">
             <a:extLst xmlns:a="http://schemas.openxmlformats.org/drawingml/2006/main">
               <a:ext uri="{FF2B5EF4-FFF2-40B4-BE49-F238E27FC236}">
-                <a16:creationId xmlns:a16="http://schemas.microsoft.com/office/drawing/2014/main" id="{6D695476-62F0-44D7-8C13-CE5F346D2882}"/>
+                <a16:creationId xmlns:a16="http://schemas.microsoft.com/office/drawing/2014/main" id="{BC8BB289-4DDE-46E7-8352-B627B59EDE62}"/>
               </a:ext>
             </a:extLst>
           </p:cNvPr>
@@ -8652,7 +9895,7 @@
           <p:cNvPr id="9" name="">
             <a:extLst xmlns:a="http://schemas.openxmlformats.org/drawingml/2006/main">
               <a:ext uri="{FF2B5EF4-FFF2-40B4-BE49-F238E27FC236}">
-                <a16:creationId xmlns:a16="http://schemas.microsoft.com/office/drawing/2014/main" id="{9FDF1C9B-C680-4C49-9EFB-C48530A3AE90}"/>
+                <a16:creationId xmlns:a16="http://schemas.microsoft.com/office/drawing/2014/main" id="{BB975225-ED79-4E81-A012-E44E2FE233AA}"/>
               </a:ext>
             </a:extLst>
           </p:cNvPr>
@@ -8702,7 +9945,7 @@
           <p:cNvPr id="10" name="">
             <a:extLst xmlns:a="http://schemas.openxmlformats.org/drawingml/2006/main">
               <a:ext uri="{FF2B5EF4-FFF2-40B4-BE49-F238E27FC236}">
-                <a16:creationId xmlns:a16="http://schemas.microsoft.com/office/drawing/2014/main" id="{7EE69568-803B-4B3B-93BA-61848935F87F}"/>
+                <a16:creationId xmlns:a16="http://schemas.microsoft.com/office/drawing/2014/main" id="{C938E1E5-7678-4BE5-AFF4-5E9D406E2010}"/>
               </a:ext>
             </a:extLst>
           </p:cNvPr>
@@ -8752,7 +9995,7 @@
           <p:cNvPr id="11" name="">
             <a:extLst xmlns:a="http://schemas.openxmlformats.org/drawingml/2006/main">
               <a:ext uri="{FF2B5EF4-FFF2-40B4-BE49-F238E27FC236}">
-                <a16:creationId xmlns:a16="http://schemas.microsoft.com/office/drawing/2014/main" id="{1D51C70C-ED81-4D60-9754-D8FBC4E00040}"/>
+                <a16:creationId xmlns:a16="http://schemas.microsoft.com/office/drawing/2014/main" id="{844740DF-B636-460D-97C1-AD4E8E63F06A}"/>
               </a:ext>
             </a:extLst>
           </p:cNvPr>
@@ -8802,7 +10045,7 @@
           <p:cNvPr id="12" name="">
             <a:extLst xmlns:a="http://schemas.openxmlformats.org/drawingml/2006/main">
               <a:ext uri="{FF2B5EF4-FFF2-40B4-BE49-F238E27FC236}">
-                <a16:creationId xmlns:a16="http://schemas.microsoft.com/office/drawing/2014/main" id="{2EDFE697-5744-404A-8834-B8171F56C19F}"/>
+                <a16:creationId xmlns:a16="http://schemas.microsoft.com/office/drawing/2014/main" id="{1F1A2E76-8942-4151-BF81-4A93E85AFEEF}"/>
               </a:ext>
             </a:extLst>
           </p:cNvPr>
@@ -8850,7 +10093,7 @@
     </p:spTree>
     <p:extLst>
       <p:ext uri="{BB962C8B-B14F-4D97-AF65-F5344CB8AC3E}">
-        <p14:creationId xmlns:p14="http://schemas.microsoft.com/office/powerpoint/2010/main" val="1383535827"/>
+        <p14:creationId xmlns:p14="http://schemas.microsoft.com/office/powerpoint/2010/main" val="1528600922"/>
       </p:ext>
     </p:extLst>
   </p:cSld>
@@ -8881,7 +10124,7 @@
           <p:cNvPr id="9" name="">
             <a:extLst xmlns:a="http://schemas.openxmlformats.org/drawingml/2006/main">
               <a:ext uri="{FF2B5EF4-FFF2-40B4-BE49-F238E27FC236}">
-                <a16:creationId xmlns:a16="http://schemas.microsoft.com/office/drawing/2014/main" id="{7797D703-B8FB-4033-9EC2-71E63ACD7D27}"/>
+                <a16:creationId xmlns:a16="http://schemas.microsoft.com/office/drawing/2014/main" id="{5DF5D210-C04A-45D1-A4AA-45D8A764DC74}"/>
               </a:ext>
             </a:extLst>
           </p:cNvPr>
@@ -8931,7 +10174,7 @@
           <p:cNvPr id="2" name="">
             <a:extLst xmlns:a="http://schemas.openxmlformats.org/drawingml/2006/main">
               <a:ext uri="{FF2B5EF4-FFF2-40B4-BE49-F238E27FC236}">
-                <a16:creationId xmlns:a16="http://schemas.microsoft.com/office/drawing/2014/main" id="{85344845-725D-4644-BE59-6C4D3E4D0641}"/>
+                <a16:creationId xmlns:a16="http://schemas.microsoft.com/office/drawing/2014/main" id="{FE4FFDE3-75E1-46D0-833B-0E3869F3D7C3}"/>
               </a:ext>
             </a:extLst>
           </p:cNvPr>
@@ -8985,7 +10228,7 @@
           <p:nvPr/>
         </p:nvPicPr>
         <p:blipFill>
-          <a:blip xmlns:r="http://schemas.openxmlformats.org/officeDocument/2006/relationships" xmlns:a="http://schemas.openxmlformats.org/drawingml/2006/main" r:embed="Rf5da76c6325b4799"/>
+          <a:blip xmlns:r="http://schemas.openxmlformats.org/officeDocument/2006/relationships" xmlns:a="http://schemas.openxmlformats.org/drawingml/2006/main" r:embed="R83551dee1ca24116"/>
           <a:stretch xmlns:a="http://schemas.openxmlformats.org/drawingml/2006/main"/>
         </p:blipFill>
         <p:spPr>
@@ -9003,7 +10246,7 @@
           <p:cNvPr id="4" name="">
             <a:extLst xmlns:a="http://schemas.openxmlformats.org/drawingml/2006/main">
               <a:ext uri="{FF2B5EF4-FFF2-40B4-BE49-F238E27FC236}">
-                <a16:creationId xmlns:a16="http://schemas.microsoft.com/office/drawing/2014/main" id="{492A8882-634D-4AFC-BEE1-DD00A256903C}"/>
+                <a16:creationId xmlns:a16="http://schemas.microsoft.com/office/drawing/2014/main" id="{4FCF7857-70C1-4435-A928-1B258A0FACE1}"/>
               </a:ext>
             </a:extLst>
           </p:cNvPr>
@@ -9053,7 +10296,7 @@
           <p:cNvPr id="5" name="">
             <a:extLst xmlns:a="http://schemas.openxmlformats.org/drawingml/2006/main">
               <a:ext uri="{FF2B5EF4-FFF2-40B4-BE49-F238E27FC236}">
-                <a16:creationId xmlns:a16="http://schemas.microsoft.com/office/drawing/2014/main" id="{FCCE234D-12B7-4E98-A285-74E31BF82ECE}"/>
+                <a16:creationId xmlns:a16="http://schemas.microsoft.com/office/drawing/2014/main" id="{D41D5194-78B9-49F7-A082-7971DF82B795}"/>
               </a:ext>
             </a:extLst>
           </p:cNvPr>
@@ -9103,7 +10346,7 @@
           <p:cNvPr id="6" name="">
             <a:extLst xmlns:a="http://schemas.openxmlformats.org/drawingml/2006/main">
               <a:ext uri="{FF2B5EF4-FFF2-40B4-BE49-F238E27FC236}">
-                <a16:creationId xmlns:a16="http://schemas.microsoft.com/office/drawing/2014/main" id="{0C867DED-AAFB-4941-9541-48A203367148}"/>
+                <a16:creationId xmlns:a16="http://schemas.microsoft.com/office/drawing/2014/main" id="{DF79C20E-972E-4653-8879-34F973531F4E}"/>
               </a:ext>
             </a:extLst>
           </p:cNvPr>
@@ -9153,7 +10396,7 @@
           <p:cNvPr id="7" name="">
             <a:extLst xmlns:a="http://schemas.openxmlformats.org/drawingml/2006/main">
               <a:ext uri="{FF2B5EF4-FFF2-40B4-BE49-F238E27FC236}">
-                <a16:creationId xmlns:a16="http://schemas.microsoft.com/office/drawing/2014/main" id="{248DBFF0-43F9-4A41-AD0E-5548FE748641}"/>
+                <a16:creationId xmlns:a16="http://schemas.microsoft.com/office/drawing/2014/main" id="{6ED84EEA-141E-4C1B-ABF4-4594CB70F98C}"/>
               </a:ext>
             </a:extLst>
           </p:cNvPr>
@@ -9203,7 +10446,7 @@
           <p:cNvPr id="8" name="">
             <a:extLst xmlns:a="http://schemas.openxmlformats.org/drawingml/2006/main">
               <a:ext uri="{FF2B5EF4-FFF2-40B4-BE49-F238E27FC236}">
-                <a16:creationId xmlns:a16="http://schemas.microsoft.com/office/drawing/2014/main" id="{B8D2C932-C29E-4DC8-955C-2C6DFB6B55CC}"/>
+                <a16:creationId xmlns:a16="http://schemas.microsoft.com/office/drawing/2014/main" id="{FBA3D3DB-73F5-4D97-9477-CD7B8666EC2D}"/>
               </a:ext>
             </a:extLst>
           </p:cNvPr>
@@ -9251,7 +10494,7 @@
     </p:spTree>
     <p:extLst>
       <p:ext uri="{BB962C8B-B14F-4D97-AF65-F5344CB8AC3E}">
-        <p14:creationId xmlns:p14="http://schemas.microsoft.com/office/powerpoint/2010/main" val="1890699639"/>
+        <p14:creationId xmlns:p14="http://schemas.microsoft.com/office/powerpoint/2010/main" val="1106869428"/>
       </p:ext>
     </p:extLst>
   </p:cSld>
@@ -9282,7 +10525,7 @@
           <p:cNvPr id="7" name="">
             <a:extLst xmlns:a="http://schemas.openxmlformats.org/drawingml/2006/main">
               <a:ext uri="{FF2B5EF4-FFF2-40B4-BE49-F238E27FC236}">
-                <a16:creationId xmlns:a16="http://schemas.microsoft.com/office/drawing/2014/main" id="{2DC40D5E-8534-4652-8003-699C26D67F89}"/>
+                <a16:creationId xmlns:a16="http://schemas.microsoft.com/office/drawing/2014/main" id="{CDBEF49C-69B0-4F0E-951C-27ECBDB7FE28}"/>
               </a:ext>
             </a:extLst>
           </p:cNvPr>
@@ -9332,7 +10575,7 @@
           <p:cNvPr id="2" name="">
             <a:extLst xmlns:a="http://schemas.openxmlformats.org/drawingml/2006/main">
               <a:ext uri="{FF2B5EF4-FFF2-40B4-BE49-F238E27FC236}">
-                <a16:creationId xmlns:a16="http://schemas.microsoft.com/office/drawing/2014/main" id="{207C936F-7DAD-4600-8BDA-6561AF89598E}"/>
+                <a16:creationId xmlns:a16="http://schemas.microsoft.com/office/drawing/2014/main" id="{F48DE9FB-5859-4DE0-AC11-C626FF7B7073}"/>
               </a:ext>
             </a:extLst>
           </p:cNvPr>
@@ -9386,7 +10629,7 @@
           <p:nvPr/>
         </p:nvPicPr>
         <p:blipFill>
-          <a:blip xmlns:r="http://schemas.openxmlformats.org/officeDocument/2006/relationships" xmlns:a="http://schemas.openxmlformats.org/drawingml/2006/main" r:embed="Rd0b858a0a6e24cbf"/>
+          <a:blip xmlns:r="http://schemas.openxmlformats.org/officeDocument/2006/relationships" xmlns:a="http://schemas.openxmlformats.org/drawingml/2006/main" r:embed="R12ea939e569f430e"/>
           <a:stretch xmlns:a="http://schemas.openxmlformats.org/drawingml/2006/main"/>
         </p:blipFill>
         <p:spPr>
@@ -9404,7 +10647,7 @@
           <p:cNvPr id="4" name="">
             <a:extLst xmlns:a="http://schemas.openxmlformats.org/drawingml/2006/main">
               <a:ext uri="{FF2B5EF4-FFF2-40B4-BE49-F238E27FC236}">
-                <a16:creationId xmlns:a16="http://schemas.microsoft.com/office/drawing/2014/main" id="{FA586958-AC4D-471D-8DAD-470CB9B1BE70}"/>
+                <a16:creationId xmlns:a16="http://schemas.microsoft.com/office/drawing/2014/main" id="{F9361A23-936D-4741-9FCB-14880B88186F}"/>
               </a:ext>
             </a:extLst>
           </p:cNvPr>
@@ -9454,7 +10697,7 @@
           <p:cNvPr id="5" name="">
             <a:extLst xmlns:a="http://schemas.openxmlformats.org/drawingml/2006/main">
               <a:ext uri="{FF2B5EF4-FFF2-40B4-BE49-F238E27FC236}">
-                <a16:creationId xmlns:a16="http://schemas.microsoft.com/office/drawing/2014/main" id="{4E7D5F67-6A27-49E7-BB73-F04E173E7FBB}"/>
+                <a16:creationId xmlns:a16="http://schemas.microsoft.com/office/drawing/2014/main" id="{C6547F55-D01C-4F76-8864-D776F41855EE}"/>
               </a:ext>
             </a:extLst>
           </p:cNvPr>
@@ -9504,7 +10747,7 @@
           <p:cNvPr id="6" name="">
             <a:extLst xmlns:a="http://schemas.openxmlformats.org/drawingml/2006/main">
               <a:ext uri="{FF2B5EF4-FFF2-40B4-BE49-F238E27FC236}">
-                <a16:creationId xmlns:a16="http://schemas.microsoft.com/office/drawing/2014/main" id="{C7E6B456-54D0-418B-8B77-5DFC5DD61B83}"/>
+                <a16:creationId xmlns:a16="http://schemas.microsoft.com/office/drawing/2014/main" id="{9F4613CE-FDCF-4F2D-9FD0-28DC6C1321DC}"/>
               </a:ext>
             </a:extLst>
           </p:cNvPr>
@@ -9552,7 +10795,7 @@
     </p:spTree>
     <p:extLst>
       <p:ext uri="{BB962C8B-B14F-4D97-AF65-F5344CB8AC3E}">
-        <p14:creationId xmlns:p14="http://schemas.microsoft.com/office/powerpoint/2010/main" val="977719600"/>
+        <p14:creationId xmlns:p14="http://schemas.microsoft.com/office/powerpoint/2010/main" val="914692184"/>
       </p:ext>
     </p:extLst>
   </p:cSld>

--- a/sglang_direct_kv/artifacts/slides/agent_aware_kv_movement_manager_deck.pptx
+++ b/sglang_direct_kv/artifacts/slides/agent_aware_kv_movement_manager_deck.pptx
@@ -2,24 +2,24 @@
 <file path=ppt/presentation.xml><?xml version="1.0" encoding="utf-8"?>
 <p:presentation xmlns:p="http://schemas.openxmlformats.org/presentationml/2006/main">
   <p:sldMasterIdLst>
-    <p:sldMasterId xmlns:r="http://schemas.openxmlformats.org/officeDocument/2006/relationships" id="2147483648" r:id="R40d3942bad664423"/>
+    <p:sldMasterId xmlns:r="http://schemas.openxmlformats.org/officeDocument/2006/relationships" id="2147483648" r:id="Rdd19941f25ac4c9f"/>
   </p:sldMasterIdLst>
   <p:notesMasterIdLst>
-    <p:notesMasterId xmlns:r="http://schemas.openxmlformats.org/officeDocument/2006/relationships" r:id="R4d113a97877a4b1a"/>
+    <p:notesMasterId xmlns:r="http://schemas.openxmlformats.org/officeDocument/2006/relationships" r:id="R3b9ab355ed5148dd"/>
   </p:notesMasterIdLst>
   <p:sldIdLst>
-    <p:sldId xmlns:r="http://schemas.openxmlformats.org/officeDocument/2006/relationships" id="256" r:id="R5dcec6d074154950"/>
-    <p:sldId xmlns:r="http://schemas.openxmlformats.org/officeDocument/2006/relationships" id="257" r:id="R06ca5600d27144bf"/>
-    <p:sldId xmlns:r="http://schemas.openxmlformats.org/officeDocument/2006/relationships" id="258" r:id="R1365626a08f14d75"/>
-    <p:sldId xmlns:r="http://schemas.openxmlformats.org/officeDocument/2006/relationships" id="259" r:id="Rbc12651a76144b9e"/>
-    <p:sldId xmlns:r="http://schemas.openxmlformats.org/officeDocument/2006/relationships" id="260" r:id="R92ef069b993c46fe"/>
-    <p:sldId xmlns:r="http://schemas.openxmlformats.org/officeDocument/2006/relationships" id="261" r:id="Re24b14165cef44e6"/>
-    <p:sldId xmlns:r="http://schemas.openxmlformats.org/officeDocument/2006/relationships" id="262" r:id="R75712280d49944ed"/>
-    <p:sldId xmlns:r="http://schemas.openxmlformats.org/officeDocument/2006/relationships" id="263" r:id="R4e08a2964863474b"/>
-    <p:sldId xmlns:r="http://schemas.openxmlformats.org/officeDocument/2006/relationships" id="264" r:id="R428e6f7cdb654358"/>
-    <p:sldId xmlns:r="http://schemas.openxmlformats.org/officeDocument/2006/relationships" id="265" r:id="Rd8aa53cf8f614e1f"/>
-    <p:sldId xmlns:r="http://schemas.openxmlformats.org/officeDocument/2006/relationships" id="266" r:id="R3443f83985f44ee5"/>
-    <p:sldId xmlns:r="http://schemas.openxmlformats.org/officeDocument/2006/relationships" id="267" r:id="R0143f6f7023d4dd2"/>
+    <p:sldId xmlns:r="http://schemas.openxmlformats.org/officeDocument/2006/relationships" id="256" r:id="R3747018f52a847ed"/>
+    <p:sldId xmlns:r="http://schemas.openxmlformats.org/officeDocument/2006/relationships" id="257" r:id="R10fb33f07ceb472a"/>
+    <p:sldId xmlns:r="http://schemas.openxmlformats.org/officeDocument/2006/relationships" id="258" r:id="R1ff5d80340db4d44"/>
+    <p:sldId xmlns:r="http://schemas.openxmlformats.org/officeDocument/2006/relationships" id="259" r:id="R4b61aa6434d84c08"/>
+    <p:sldId xmlns:r="http://schemas.openxmlformats.org/officeDocument/2006/relationships" id="260" r:id="R1e9c2c7fe8b641bd"/>
+    <p:sldId xmlns:r="http://schemas.openxmlformats.org/officeDocument/2006/relationships" id="261" r:id="Rbe6f11dc51634325"/>
+    <p:sldId xmlns:r="http://schemas.openxmlformats.org/officeDocument/2006/relationships" id="262" r:id="R0256c9fd73004179"/>
+    <p:sldId xmlns:r="http://schemas.openxmlformats.org/officeDocument/2006/relationships" id="263" r:id="Ra8f0a96523904ac3"/>
+    <p:sldId xmlns:r="http://schemas.openxmlformats.org/officeDocument/2006/relationships" id="264" r:id="R309071f66e354c5b"/>
+    <p:sldId xmlns:r="http://schemas.openxmlformats.org/officeDocument/2006/relationships" id="265" r:id="R30f277db03c14201"/>
+    <p:sldId xmlns:r="http://schemas.openxmlformats.org/officeDocument/2006/relationships" id="266" r:id="R4e067635c6524ff7"/>
+    <p:sldId xmlns:r="http://schemas.openxmlformats.org/officeDocument/2006/relationships" id="267" r:id="Ra1672ae8f55b4568"/>
   </p:sldIdLst>
   <p:sldSz cx="12192000" cy="6858000"/>
   <p:notesSz cx="6858000" cy="9144000"/>
@@ -653,27 +653,27 @@
           <a:lstStyle xmlns:a="http://schemas.openxmlformats.org/drawingml/2006/main"/>
           <a:p xmlns:a="http://schemas.openxmlformats.org/drawingml/2006/main">
             <a:r>
-              <a:t>This slide intentionally frames benefits as ballpark expectations and research targets.</a:t>
-            </a:r>
-          </a:p>
-          <a:p xmlns:a="http://schemas.openxmlformats.org/drawingml/2006/main">
-            <a:r>
-              <a:t>The table ties each benefit estimate to an observed mechanism: late replay H2D, recompute after KV loss, late hint completion, and wasted prefetch.</a:t>
-            </a:r>
-          </a:p>
-          <a:p xmlns:a="http://schemas.openxmlformats.org/drawingml/2006/main">
-            <a:r>
-              <a:t>Low-end gains are plausible when KV is already mostly resident and only small stalls remain.</a:t>
-            </a:r>
-          </a:p>
-          <a:p xmlns:a="http://schemas.openxmlformats.org/drawingml/2006/main">
-            <a:r>
-              <a:t>High-end gains are plausible when contexts are long, cache pressure is high, and replay falls back to H2D reload or recompute.</a:t>
-            </a:r>
-          </a:p>
-          <a:p xmlns:a="http://schemas.openxmlformats.org/drawingml/2006/main">
-            <a:r>
-              <a:t>Potential benefit ranges are internal proposal estimates based on observed late prefetch/replay H2D patterns and expected gains from deadline-aware KV movement.</a:t>
+              <a:t>This slide intentionally avoids internal terms such as H2D and replay-prefill on the visible canvas.</a:t>
+            </a:r>
+          </a:p>
+          <a:p xmlns:a="http://schemas.openxmlformats.org/drawingml/2006/main">
+            <a:r>
+              <a:t>Translate for technical discussion: faster agent resume corresponds to lowering post-tool replay latency when KV is ready earlier.</a:t>
+            </a:r>
+          </a:p>
+          <a:p xmlns:a="http://schemas.openxmlformats.org/drawingml/2006/main">
+            <a:r>
+              <a:t>Fewer wasted memory movements corresponds to reducing late prefetches, evicted-before-use KV, and redundant reloads.</a:t>
+            </a:r>
+          </a:p>
+          <a:p xmlns:a="http://schemas.openxmlformats.org/drawingml/2006/main">
+            <a:r>
+              <a:t>More predictable tail latency corresponds to reducing p95/p99 stalls caused by context-agnostic memory scheduling.</a:t>
+            </a:r>
+          </a:p>
+          <a:p xmlns:a="http://schemas.openxmlformats.org/drawingml/2006/main">
+            <a:r>
+              <a:t>Potential benefit ranges are conservative internal proposal targets based on observed late prefetch/replay H2D patterns and expected gains from deadline-aware KV movement.</a:t>
             </a:r>
           </a:p>
           <a:p xmlns:a="http://schemas.openxmlformats.org/drawingml/2006/main">
@@ -1671,7 +1671,7 @@
   </p:cSld>
   <p:clrMap bg1="lt1" tx1="dk1" bg2="lt2" tx2="dk2" accent1="accent1" accent2="accent2" accent3="accent3" accent4="accent4" accent5="accent5" accent6="accent6" hlink="hlink" folHlink="folHlink"/>
   <p:sldLayoutIdLst>
-    <p:sldLayoutId xmlns:r="http://schemas.openxmlformats.org/officeDocument/2006/relationships" id="2147483649" r:id="R58678bbb0051414a"/>
+    <p:sldLayoutId xmlns:r="http://schemas.openxmlformats.org/officeDocument/2006/relationships" id="2147483649" r:id="Re294e6d64ab644ea"/>
   </p:sldLayoutIdLst>
   <p:txStyles>
     <p:titleStyle>
@@ -2222,7 +2222,7 @@
           <p:cNvPr id="12" name="">
             <a:extLst xmlns:a="http://schemas.openxmlformats.org/drawingml/2006/main">
               <a:ext uri="{FF2B5EF4-FFF2-40B4-BE49-F238E27FC236}">
-                <a16:creationId xmlns:a16="http://schemas.microsoft.com/office/drawing/2014/main" id="{2BE8AC51-12DF-490F-B70B-0D599428BA7E}"/>
+                <a16:creationId xmlns:a16="http://schemas.microsoft.com/office/drawing/2014/main" id="{F999D096-759A-4CF7-80BC-AEEC8EDCD149}"/>
               </a:ext>
             </a:extLst>
           </p:cNvPr>
@@ -2272,7 +2272,7 @@
           <p:cNvPr id="2" name="">
             <a:extLst xmlns:a="http://schemas.openxmlformats.org/drawingml/2006/main">
               <a:ext uri="{FF2B5EF4-FFF2-40B4-BE49-F238E27FC236}">
-                <a16:creationId xmlns:a16="http://schemas.microsoft.com/office/drawing/2014/main" id="{4A36DC6C-D510-428A-9767-5E5944A41475}"/>
+                <a16:creationId xmlns:a16="http://schemas.microsoft.com/office/drawing/2014/main" id="{D64462A8-A55B-4784-8D10-DFAEFC955DC2}"/>
               </a:ext>
             </a:extLst>
           </p:cNvPr>
@@ -2322,7 +2322,7 @@
           <p:cNvPr id="3" name="">
             <a:extLst xmlns:a="http://schemas.openxmlformats.org/drawingml/2006/main">
               <a:ext uri="{FF2B5EF4-FFF2-40B4-BE49-F238E27FC236}">
-                <a16:creationId xmlns:a16="http://schemas.microsoft.com/office/drawing/2014/main" id="{0D4EE2CF-12A0-4A99-907E-273C1D33B94F}"/>
+                <a16:creationId xmlns:a16="http://schemas.microsoft.com/office/drawing/2014/main" id="{551B11E0-FF31-4E0B-8F1B-D266111653E9}"/>
               </a:ext>
             </a:extLst>
           </p:cNvPr>
@@ -2353,7 +2353,7 @@
           <p:cNvPr id="4" name="">
             <a:extLst xmlns:a="http://schemas.openxmlformats.org/drawingml/2006/main">
               <a:ext uri="{FF2B5EF4-FFF2-40B4-BE49-F238E27FC236}">
-                <a16:creationId xmlns:a16="http://schemas.microsoft.com/office/drawing/2014/main" id="{AFDF0CBA-F550-4283-9D1D-99B526B7529F}"/>
+                <a16:creationId xmlns:a16="http://schemas.microsoft.com/office/drawing/2014/main" id="{86EBA2A1-B361-410A-8182-8067D38FF181}"/>
               </a:ext>
             </a:extLst>
           </p:cNvPr>
@@ -2403,7 +2403,7 @@
           <p:cNvPr id="5" name="">
             <a:extLst xmlns:a="http://schemas.openxmlformats.org/drawingml/2006/main">
               <a:ext uri="{FF2B5EF4-FFF2-40B4-BE49-F238E27FC236}">
-                <a16:creationId xmlns:a16="http://schemas.microsoft.com/office/drawing/2014/main" id="{6F98A2D3-3AB4-442D-B4DE-EFAFE4A4A861}"/>
+                <a16:creationId xmlns:a16="http://schemas.microsoft.com/office/drawing/2014/main" id="{B1693AB9-A175-4515-84EC-B4231DD9F598}"/>
               </a:ext>
             </a:extLst>
           </p:cNvPr>
@@ -2453,7 +2453,7 @@
           <p:cNvPr id="6" name="">
             <a:extLst xmlns:a="http://schemas.openxmlformats.org/drawingml/2006/main">
               <a:ext uri="{FF2B5EF4-FFF2-40B4-BE49-F238E27FC236}">
-                <a16:creationId xmlns:a16="http://schemas.microsoft.com/office/drawing/2014/main" id="{F9E8F69B-E58E-4A44-8786-F99964D252E9}"/>
+                <a16:creationId xmlns:a16="http://schemas.microsoft.com/office/drawing/2014/main" id="{0436163B-6727-4BB7-A387-3D9853679692}"/>
               </a:ext>
             </a:extLst>
           </p:cNvPr>
@@ -2503,7 +2503,7 @@
           <p:cNvPr id="7" name="">
             <a:extLst xmlns:a="http://schemas.openxmlformats.org/drawingml/2006/main">
               <a:ext uri="{FF2B5EF4-FFF2-40B4-BE49-F238E27FC236}">
-                <a16:creationId xmlns:a16="http://schemas.microsoft.com/office/drawing/2014/main" id="{1979369D-7927-4796-9A72-5E0E95732E4B}"/>
+                <a16:creationId xmlns:a16="http://schemas.microsoft.com/office/drawing/2014/main" id="{4EB4A988-1C85-4C5E-B8B5-76DE39C0EB13}"/>
               </a:ext>
             </a:extLst>
           </p:cNvPr>
@@ -2553,7 +2553,7 @@
           <p:cNvPr id="8" name="">
             <a:extLst xmlns:a="http://schemas.openxmlformats.org/drawingml/2006/main">
               <a:ext uri="{FF2B5EF4-FFF2-40B4-BE49-F238E27FC236}">
-                <a16:creationId xmlns:a16="http://schemas.microsoft.com/office/drawing/2014/main" id="{86BD44E5-C814-4771-847F-EC61D2E96C03}"/>
+                <a16:creationId xmlns:a16="http://schemas.microsoft.com/office/drawing/2014/main" id="{771150D8-8CF0-4A3E-9E97-E0D8FC4948FE}"/>
               </a:ext>
             </a:extLst>
           </p:cNvPr>
@@ -2603,7 +2603,7 @@
           <p:cNvPr id="9" name="">
             <a:extLst xmlns:a="http://schemas.openxmlformats.org/drawingml/2006/main">
               <a:ext uri="{FF2B5EF4-FFF2-40B4-BE49-F238E27FC236}">
-                <a16:creationId xmlns:a16="http://schemas.microsoft.com/office/drawing/2014/main" id="{84569A75-B9E3-41A0-B4B9-B0A3783D816E}"/>
+                <a16:creationId xmlns:a16="http://schemas.microsoft.com/office/drawing/2014/main" id="{19049D14-8459-44DA-8F7B-7464BB3D6058}"/>
               </a:ext>
             </a:extLst>
           </p:cNvPr>
@@ -2653,7 +2653,7 @@
           <p:cNvPr id="10" name="">
             <a:extLst xmlns:a="http://schemas.openxmlformats.org/drawingml/2006/main">
               <a:ext uri="{FF2B5EF4-FFF2-40B4-BE49-F238E27FC236}">
-                <a16:creationId xmlns:a16="http://schemas.microsoft.com/office/drawing/2014/main" id="{846158E8-77EE-4599-87D5-186387181BAD}"/>
+                <a16:creationId xmlns:a16="http://schemas.microsoft.com/office/drawing/2014/main" id="{5ED37489-5E99-4C6A-B836-2681A11EE898}"/>
               </a:ext>
             </a:extLst>
           </p:cNvPr>
@@ -2703,7 +2703,7 @@
           <p:cNvPr id="11" name="">
             <a:extLst xmlns:a="http://schemas.openxmlformats.org/drawingml/2006/main">
               <a:ext uri="{FF2B5EF4-FFF2-40B4-BE49-F238E27FC236}">
-                <a16:creationId xmlns:a16="http://schemas.microsoft.com/office/drawing/2014/main" id="{1662F6F2-F813-493F-BB83-1B8958ED0252}"/>
+                <a16:creationId xmlns:a16="http://schemas.microsoft.com/office/drawing/2014/main" id="{034DCA3F-84B8-4721-8ECA-05EB7D57D81E}"/>
               </a:ext>
             </a:extLst>
           </p:cNvPr>
@@ -2751,7 +2751,7 @@
     </p:spTree>
     <p:extLst>
       <p:ext uri="{BB962C8B-B14F-4D97-AF65-F5344CB8AC3E}">
-        <p14:creationId xmlns:p14="http://schemas.microsoft.com/office/powerpoint/2010/main" val="779423332"/>
+        <p14:creationId xmlns:p14="http://schemas.microsoft.com/office/powerpoint/2010/main" val="919480083"/>
       </p:ext>
     </p:extLst>
   </p:cSld>
@@ -2782,7 +2782,7 @@
           <p:cNvPr id="17" name="">
             <a:extLst xmlns:a="http://schemas.openxmlformats.org/drawingml/2006/main">
               <a:ext uri="{FF2B5EF4-FFF2-40B4-BE49-F238E27FC236}">
-                <a16:creationId xmlns:a16="http://schemas.microsoft.com/office/drawing/2014/main" id="{0909186F-299F-4F0A-A072-48757DBCAE02}"/>
+                <a16:creationId xmlns:a16="http://schemas.microsoft.com/office/drawing/2014/main" id="{A58CD9DE-7C59-4F93-AE45-D91BB5A7451F}"/>
               </a:ext>
             </a:extLst>
           </p:cNvPr>
@@ -2832,7 +2832,7 @@
           <p:cNvPr id="2" name="">
             <a:extLst xmlns:a="http://schemas.openxmlformats.org/drawingml/2006/main">
               <a:ext uri="{FF2B5EF4-FFF2-40B4-BE49-F238E27FC236}">
-                <a16:creationId xmlns:a16="http://schemas.microsoft.com/office/drawing/2014/main" id="{4A88393E-98CD-458C-B2C0-2798CF88B3E7}"/>
+                <a16:creationId xmlns:a16="http://schemas.microsoft.com/office/drawing/2014/main" id="{8AC5B8B2-5A48-4A1E-92A2-1962CE762B25}"/>
               </a:ext>
             </a:extLst>
           </p:cNvPr>
@@ -2882,7 +2882,7 @@
           <p:cNvPr id="3" name="">
             <a:extLst xmlns:a="http://schemas.openxmlformats.org/drawingml/2006/main">
               <a:ext uri="{FF2B5EF4-FFF2-40B4-BE49-F238E27FC236}">
-                <a16:creationId xmlns:a16="http://schemas.microsoft.com/office/drawing/2014/main" id="{EF11D1F2-7F96-4791-BDE8-9640A48C7A8B}"/>
+                <a16:creationId xmlns:a16="http://schemas.microsoft.com/office/drawing/2014/main" id="{AABBCCF7-70F7-4EF6-A01F-3A831DC23DD6}"/>
               </a:ext>
             </a:extLst>
           </p:cNvPr>
@@ -2932,7 +2932,7 @@
           <p:cNvPr id="4" name="">
             <a:extLst xmlns:a="http://schemas.openxmlformats.org/drawingml/2006/main">
               <a:ext uri="{FF2B5EF4-FFF2-40B4-BE49-F238E27FC236}">
-                <a16:creationId xmlns:a16="http://schemas.microsoft.com/office/drawing/2014/main" id="{587D8C23-1119-41C4-8145-1C0AE95A5B78}"/>
+                <a16:creationId xmlns:a16="http://schemas.microsoft.com/office/drawing/2014/main" id="{F1B23511-75DF-467F-9087-119AFF50FA38}"/>
               </a:ext>
             </a:extLst>
           </p:cNvPr>
@@ -2982,7 +2982,7 @@
           <p:cNvPr id="5" name="">
             <a:extLst xmlns:a="http://schemas.openxmlformats.org/drawingml/2006/main">
               <a:ext uri="{FF2B5EF4-FFF2-40B4-BE49-F238E27FC236}">
-                <a16:creationId xmlns:a16="http://schemas.microsoft.com/office/drawing/2014/main" id="{1C9EB440-8330-4926-9E2E-C476D03A967E}"/>
+                <a16:creationId xmlns:a16="http://schemas.microsoft.com/office/drawing/2014/main" id="{06A3EC39-6CA7-4A35-8214-93C22DF1D211}"/>
               </a:ext>
             </a:extLst>
           </p:cNvPr>
@@ -3032,7 +3032,7 @@
           <p:cNvPr id="6" name="">
             <a:extLst xmlns:a="http://schemas.openxmlformats.org/drawingml/2006/main">
               <a:ext uri="{FF2B5EF4-FFF2-40B4-BE49-F238E27FC236}">
-                <a16:creationId xmlns:a16="http://schemas.microsoft.com/office/drawing/2014/main" id="{5D4AC944-59FC-4FAF-98A8-5C0D93B32F81}"/>
+                <a16:creationId xmlns:a16="http://schemas.microsoft.com/office/drawing/2014/main" id="{75412647-D8B8-4CF0-8957-515A58D453A2}"/>
               </a:ext>
             </a:extLst>
           </p:cNvPr>
@@ -3082,7 +3082,7 @@
           <p:cNvPr id="7" name="">
             <a:extLst xmlns:a="http://schemas.openxmlformats.org/drawingml/2006/main">
               <a:ext uri="{FF2B5EF4-FFF2-40B4-BE49-F238E27FC236}">
-                <a16:creationId xmlns:a16="http://schemas.microsoft.com/office/drawing/2014/main" id="{8D98494F-EFE6-4668-B8A8-AA63DE8FD7CD}"/>
+                <a16:creationId xmlns:a16="http://schemas.microsoft.com/office/drawing/2014/main" id="{4F28DCCB-43CF-482D-9FC4-AC0292C6FCBF}"/>
               </a:ext>
             </a:extLst>
           </p:cNvPr>
@@ -3132,7 +3132,7 @@
           <p:cNvPr id="8" name="">
             <a:extLst xmlns:a="http://schemas.openxmlformats.org/drawingml/2006/main">
               <a:ext uri="{FF2B5EF4-FFF2-40B4-BE49-F238E27FC236}">
-                <a16:creationId xmlns:a16="http://schemas.microsoft.com/office/drawing/2014/main" id="{62A54583-B8AC-4007-AFFA-D144C98A5DC7}"/>
+                <a16:creationId xmlns:a16="http://schemas.microsoft.com/office/drawing/2014/main" id="{2B421B0F-2E07-4406-B27F-5003B5EE01A8}"/>
               </a:ext>
             </a:extLst>
           </p:cNvPr>
@@ -3182,7 +3182,7 @@
           <p:cNvPr id="9" name="">
             <a:extLst xmlns:a="http://schemas.openxmlformats.org/drawingml/2006/main">
               <a:ext uri="{FF2B5EF4-FFF2-40B4-BE49-F238E27FC236}">
-                <a16:creationId xmlns:a16="http://schemas.microsoft.com/office/drawing/2014/main" id="{6418B938-7E7C-4B95-A8CD-1580DC5167CC}"/>
+                <a16:creationId xmlns:a16="http://schemas.microsoft.com/office/drawing/2014/main" id="{10AC94F0-21D7-49CF-8511-B6F052F0B9A0}"/>
               </a:ext>
             </a:extLst>
           </p:cNvPr>
@@ -3232,7 +3232,7 @@
           <p:cNvPr id="10" name="">
             <a:extLst xmlns:a="http://schemas.openxmlformats.org/drawingml/2006/main">
               <a:ext uri="{FF2B5EF4-FFF2-40B4-BE49-F238E27FC236}">
-                <a16:creationId xmlns:a16="http://schemas.microsoft.com/office/drawing/2014/main" id="{64CE8A19-588D-485C-8D1D-974BB44CF09B}"/>
+                <a16:creationId xmlns:a16="http://schemas.microsoft.com/office/drawing/2014/main" id="{CAF8F4E6-F19C-431A-B1EB-029082E95DF2}"/>
               </a:ext>
             </a:extLst>
           </p:cNvPr>
@@ -3282,7 +3282,7 @@
           <p:cNvPr id="11" name="">
             <a:extLst xmlns:a="http://schemas.openxmlformats.org/drawingml/2006/main">
               <a:ext uri="{FF2B5EF4-FFF2-40B4-BE49-F238E27FC236}">
-                <a16:creationId xmlns:a16="http://schemas.microsoft.com/office/drawing/2014/main" id="{16F47999-2E50-4376-8CB3-782293C942C3}"/>
+                <a16:creationId xmlns:a16="http://schemas.microsoft.com/office/drawing/2014/main" id="{AD871F86-7098-45EE-B2E4-EA7D79CB99B0}"/>
               </a:ext>
             </a:extLst>
           </p:cNvPr>
@@ -3332,7 +3332,7 @@
           <p:cNvPr id="12" name="">
             <a:extLst xmlns:a="http://schemas.openxmlformats.org/drawingml/2006/main">
               <a:ext uri="{FF2B5EF4-FFF2-40B4-BE49-F238E27FC236}">
-                <a16:creationId xmlns:a16="http://schemas.microsoft.com/office/drawing/2014/main" id="{35D53424-E5EF-495F-A691-A7D970DC5AF9}"/>
+                <a16:creationId xmlns:a16="http://schemas.microsoft.com/office/drawing/2014/main" id="{D8F91BBE-0ACC-4C87-A921-462948210056}"/>
               </a:ext>
             </a:extLst>
           </p:cNvPr>
@@ -3382,7 +3382,7 @@
           <p:cNvPr id="13" name="">
             <a:extLst xmlns:a="http://schemas.openxmlformats.org/drawingml/2006/main">
               <a:ext uri="{FF2B5EF4-FFF2-40B4-BE49-F238E27FC236}">
-                <a16:creationId xmlns:a16="http://schemas.microsoft.com/office/drawing/2014/main" id="{E40A1E29-39A0-4831-8297-2F8A6782D6FA}"/>
+                <a16:creationId xmlns:a16="http://schemas.microsoft.com/office/drawing/2014/main" id="{786513C9-A431-4695-8AE7-851F7F9CB91B}"/>
               </a:ext>
             </a:extLst>
           </p:cNvPr>
@@ -3413,7 +3413,7 @@
           <p:cNvPr id="14" name="">
             <a:extLst xmlns:a="http://schemas.openxmlformats.org/drawingml/2006/main">
               <a:ext uri="{FF2B5EF4-FFF2-40B4-BE49-F238E27FC236}">
-                <a16:creationId xmlns:a16="http://schemas.microsoft.com/office/drawing/2014/main" id="{5BB5ED05-9F3B-4725-8A99-CF91D7E31A2C}"/>
+                <a16:creationId xmlns:a16="http://schemas.microsoft.com/office/drawing/2014/main" id="{537E4755-2015-45BF-B890-323D8ED931D8}"/>
               </a:ext>
             </a:extLst>
           </p:cNvPr>
@@ -3463,7 +3463,7 @@
           <p:cNvPr id="15" name="">
             <a:extLst xmlns:a="http://schemas.openxmlformats.org/drawingml/2006/main">
               <a:ext uri="{FF2B5EF4-FFF2-40B4-BE49-F238E27FC236}">
-                <a16:creationId xmlns:a16="http://schemas.microsoft.com/office/drawing/2014/main" id="{7E5EDB16-C868-4D2D-AC11-42D4459C0F43}"/>
+                <a16:creationId xmlns:a16="http://schemas.microsoft.com/office/drawing/2014/main" id="{91B6AC60-DF40-43FA-8CF3-B3D6EDFB7885}"/>
               </a:ext>
             </a:extLst>
           </p:cNvPr>
@@ -3513,7 +3513,7 @@
           <p:cNvPr id="16" name="">
             <a:extLst xmlns:a="http://schemas.openxmlformats.org/drawingml/2006/main">
               <a:ext uri="{FF2B5EF4-FFF2-40B4-BE49-F238E27FC236}">
-                <a16:creationId xmlns:a16="http://schemas.microsoft.com/office/drawing/2014/main" id="{C363CAAA-A22F-452D-9262-ED1DE289DDA3}"/>
+                <a16:creationId xmlns:a16="http://schemas.microsoft.com/office/drawing/2014/main" id="{3439C747-162C-4542-B2E9-D51832D83C12}"/>
               </a:ext>
             </a:extLst>
           </p:cNvPr>
@@ -3561,7 +3561,7 @@
     </p:spTree>
     <p:extLst>
       <p:ext uri="{BB962C8B-B14F-4D97-AF65-F5344CB8AC3E}">
-        <p14:creationId xmlns:p14="http://schemas.microsoft.com/office/powerpoint/2010/main" val="406075102"/>
+        <p14:creationId xmlns:p14="http://schemas.microsoft.com/office/powerpoint/2010/main" val="1851075174"/>
       </p:ext>
     </p:extLst>
   </p:cSld>
@@ -3589,10 +3589,10 @@
       </p:grpSpPr>
       <p:sp>
         <p:nvSpPr>
-          <p:cNvPr id="44" name="">
-            <a:extLst xmlns:a="http://schemas.openxmlformats.org/drawingml/2006/main">
-              <a:ext uri="{FF2B5EF4-FFF2-40B4-BE49-F238E27FC236}">
-                <a16:creationId xmlns:a16="http://schemas.microsoft.com/office/drawing/2014/main" id="{C9BEB51E-4CE4-4925-A706-CA51504F6AF4}"/>
+          <p:cNvPr id="22" name="">
+            <a:extLst xmlns:a="http://schemas.openxmlformats.org/drawingml/2006/main">
+              <a:ext uri="{FF2B5EF4-FFF2-40B4-BE49-F238E27FC236}">
+                <a16:creationId xmlns:a16="http://schemas.microsoft.com/office/drawing/2014/main" id="{3AECBB62-54C9-4112-85B4-18ACEE28F499}"/>
               </a:ext>
             </a:extLst>
           </p:cNvPr>
@@ -3642,7 +3642,7 @@
           <p:cNvPr id="2" name="">
             <a:extLst xmlns:a="http://schemas.openxmlformats.org/drawingml/2006/main">
               <a:ext uri="{FF2B5EF4-FFF2-40B4-BE49-F238E27FC236}">
-                <a16:creationId xmlns:a16="http://schemas.microsoft.com/office/drawing/2014/main" id="{B1A445DC-2DBE-41D6-A284-D4D5B4322341}"/>
+                <a16:creationId xmlns:a16="http://schemas.microsoft.com/office/drawing/2014/main" id="{A8BD059F-89E3-46CA-8FDF-0AE0708D9BBC}"/>
               </a:ext>
             </a:extLst>
           </p:cNvPr>
@@ -3682,7 +3682,7 @@
                   <a:srgbClr val="64748B"/>
                 </a:solidFill>
               </a:rPr>
-              <a:t>The ranges are tied to observed failure modes, not standalone guesses.</a:t>
+              <a:t>Simple targets for tool-heavy coding-agent workloads.</a:t>
             </a:r>
           </a:p>
         </p:txBody>
@@ -3692,779 +3692,790 @@
           <p:cNvPr id="3" name="">
             <a:extLst xmlns:a="http://schemas.openxmlformats.org/drawingml/2006/main">
               <a:ext uri="{FF2B5EF4-FFF2-40B4-BE49-F238E27FC236}">
-                <a16:creationId xmlns:a16="http://schemas.microsoft.com/office/drawing/2014/main" id="{0A48BA8D-68CD-4B54-8A58-7F59B86751C8}"/>
-              </a:ext>
-            </a:extLst>
-          </p:cNvPr>
-          <p:cNvSpPr>
-            <a:spLocks xmlns:a="http://schemas.openxmlformats.org/drawingml/2006/main" noGrp="1"/>
-          </p:cNvSpPr>
-          <p:nvPr/>
-        </p:nvSpPr>
-        <p:spPr>
-          <a:xfrm xmlns:a="http://schemas.openxmlformats.org/drawingml/2006/main">
-            <a:off x="514350" y="1485900"/>
-            <a:ext cx="10906125" cy="381000"/>
+                <a16:creationId xmlns:a16="http://schemas.microsoft.com/office/drawing/2014/main" id="{FC8D48C4-AD5D-4499-BD26-90907D0B8874}"/>
+              </a:ext>
+            </a:extLst>
+          </p:cNvPr>
+          <p:cNvSpPr>
+            <a:spLocks xmlns:a="http://schemas.openxmlformats.org/drawingml/2006/main" noGrp="1"/>
+          </p:cNvSpPr>
+          <p:nvPr/>
+        </p:nvSpPr>
+        <p:spPr>
+          <a:xfrm xmlns:a="http://schemas.openxmlformats.org/drawingml/2006/main">
+            <a:off x="685800" y="1562100"/>
+            <a:ext cx="533400" cy="342900"/>
+          </a:xfrm>
+          <a:prstGeom xmlns:a="http://schemas.openxmlformats.org/drawingml/2006/main" prst="rect">
+            <a:avLst/>
+          </a:prstGeom>
+          <a:noFill xmlns:a="http://schemas.openxmlformats.org/drawingml/2006/main"/>
+          <a:ln xmlns:a="http://schemas.openxmlformats.org/drawingml/2006/main" w="0">
+            <a:noFill/>
+            <a:prstDash val="solid"/>
+          </a:ln>
+        </p:spPr>
+        <p:txBody>
+          <a:bodyPr xmlns:a="http://schemas.openxmlformats.org/drawingml/2006/main" anchor="t"/>
+          <a:lstStyle xmlns:a="http://schemas.openxmlformats.org/drawingml/2006/main"/>
+          <a:p xmlns:a="http://schemas.openxmlformats.org/drawingml/2006/main">
+            <a:pPr algn="l">
+              <a:defRPr sz="1875" b="1">
+                <a:solidFill>
+                  <a:srgbClr val="2563EB"/>
+                </a:solidFill>
+              </a:defRPr>
+            </a:pPr>
+            <a:r>
+              <a:rPr sz="1875" b="1">
+                <a:solidFill>
+                  <a:srgbClr val="2563EB"/>
+                </a:solidFill>
+              </a:rPr>
+              <a:t>1.</a:t>
+            </a:r>
+          </a:p>
+        </p:txBody>
+      </p:sp>
+      <p:sp>
+        <p:nvSpPr>
+          <p:cNvPr id="4" name="">
+            <a:extLst xmlns:a="http://schemas.openxmlformats.org/drawingml/2006/main">
+              <a:ext uri="{FF2B5EF4-FFF2-40B4-BE49-F238E27FC236}">
+                <a16:creationId xmlns:a16="http://schemas.microsoft.com/office/drawing/2014/main" id="{92375BAA-E69E-449F-B345-2CA90298BD8B}"/>
+              </a:ext>
+            </a:extLst>
+          </p:cNvPr>
+          <p:cNvSpPr>
+            <a:spLocks xmlns:a="http://schemas.openxmlformats.org/drawingml/2006/main" noGrp="1"/>
+          </p:cNvSpPr>
+          <p:nvPr/>
+        </p:nvSpPr>
+        <p:spPr>
+          <a:xfrm xmlns:a="http://schemas.openxmlformats.org/drawingml/2006/main">
+            <a:off x="1123950" y="1562100"/>
+            <a:ext cx="5334000" cy="323850"/>
+          </a:xfrm>
+          <a:prstGeom xmlns:a="http://schemas.openxmlformats.org/drawingml/2006/main" prst="rect">
+            <a:avLst/>
+          </a:prstGeom>
+          <a:noFill xmlns:a="http://schemas.openxmlformats.org/drawingml/2006/main"/>
+          <a:ln xmlns:a="http://schemas.openxmlformats.org/drawingml/2006/main" w="0">
+            <a:noFill/>
+            <a:prstDash val="solid"/>
+          </a:ln>
+        </p:spPr>
+        <p:txBody>
+          <a:bodyPr xmlns:a="http://schemas.openxmlformats.org/drawingml/2006/main" anchor="t"/>
+          <a:lstStyle xmlns:a="http://schemas.openxmlformats.org/drawingml/2006/main"/>
+          <a:p xmlns:a="http://schemas.openxmlformats.org/drawingml/2006/main">
+            <a:pPr algn="l">
+              <a:defRPr sz="1875" b="1">
+                <a:solidFill>
+                  <a:srgbClr val="0F172A"/>
+                </a:solidFill>
+              </a:defRPr>
+            </a:pPr>
+            <a:r>
+              <a:rPr sz="1875" b="1">
+                <a:solidFill>
+                  <a:srgbClr val="0F172A"/>
+                </a:solidFill>
+              </a:rPr>
+              <a:t>Faster agent resume after tools</a:t>
+            </a:r>
+          </a:p>
+        </p:txBody>
+      </p:sp>
+      <p:sp>
+        <p:nvSpPr>
+          <p:cNvPr id="5" name="">
+            <a:extLst xmlns:a="http://schemas.openxmlformats.org/drawingml/2006/main">
+              <a:ext uri="{FF2B5EF4-FFF2-40B4-BE49-F238E27FC236}">
+                <a16:creationId xmlns:a16="http://schemas.microsoft.com/office/drawing/2014/main" id="{F8AAA9C0-5E92-40EE-A0BE-D0ED8DBB3696}"/>
+              </a:ext>
+            </a:extLst>
+          </p:cNvPr>
+          <p:cNvSpPr>
+            <a:spLocks xmlns:a="http://schemas.openxmlformats.org/drawingml/2006/main" noGrp="1"/>
+          </p:cNvSpPr>
+          <p:nvPr/>
+        </p:nvSpPr>
+        <p:spPr>
+          <a:xfrm xmlns:a="http://schemas.openxmlformats.org/drawingml/2006/main">
+            <a:off x="1123950" y="1924050"/>
+            <a:ext cx="6572250" cy="285750"/>
+          </a:xfrm>
+          <a:prstGeom xmlns:a="http://schemas.openxmlformats.org/drawingml/2006/main" prst="rect">
+            <a:avLst/>
+          </a:prstGeom>
+          <a:noFill xmlns:a="http://schemas.openxmlformats.org/drawingml/2006/main"/>
+          <a:ln xmlns:a="http://schemas.openxmlformats.org/drawingml/2006/main" w="0">
+            <a:noFill/>
+            <a:prstDash val="solid"/>
+          </a:ln>
+        </p:spPr>
+        <p:txBody>
+          <a:bodyPr xmlns:a="http://schemas.openxmlformats.org/drawingml/2006/main" anchor="t"/>
+          <a:lstStyle xmlns:a="http://schemas.openxmlformats.org/drawingml/2006/main"/>
+          <a:p xmlns:a="http://schemas.openxmlformats.org/drawingml/2006/main">
+            <a:pPr algn="l">
+              <a:defRPr sz="1575" b="1">
+                <a:solidFill>
+                  <a:srgbClr val="2563EB"/>
+                </a:solidFill>
+              </a:defRPr>
+            </a:pPr>
+            <a:r>
+              <a:rPr sz="1575" b="1">
+                <a:solidFill>
+                  <a:srgbClr val="2563EB"/>
+                </a:solidFill>
+              </a:rPr>
+              <a:t>Target: 10-30% lower post-tool latency</a:t>
+            </a:r>
+          </a:p>
+        </p:txBody>
+      </p:sp>
+      <p:sp>
+        <p:nvSpPr>
+          <p:cNvPr id="6" name="">
+            <a:extLst xmlns:a="http://schemas.openxmlformats.org/drawingml/2006/main">
+              <a:ext uri="{FF2B5EF4-FFF2-40B4-BE49-F238E27FC236}">
+                <a16:creationId xmlns:a16="http://schemas.microsoft.com/office/drawing/2014/main" id="{D85D6261-142F-4D85-8F5C-CB594E66A20F}"/>
+              </a:ext>
+            </a:extLst>
+          </p:cNvPr>
+          <p:cNvSpPr>
+            <a:spLocks xmlns:a="http://schemas.openxmlformats.org/drawingml/2006/main" noGrp="1"/>
+          </p:cNvSpPr>
+          <p:nvPr/>
+        </p:nvSpPr>
+        <p:spPr>
+          <a:xfrm xmlns:a="http://schemas.openxmlformats.org/drawingml/2006/main">
+            <a:off x="1123950" y="2247900"/>
+            <a:ext cx="9334500" cy="428625"/>
+          </a:xfrm>
+          <a:prstGeom xmlns:a="http://schemas.openxmlformats.org/drawingml/2006/main" prst="rect">
+            <a:avLst/>
+          </a:prstGeom>
+          <a:noFill xmlns:a="http://schemas.openxmlformats.org/drawingml/2006/main"/>
+          <a:ln xmlns:a="http://schemas.openxmlformats.org/drawingml/2006/main" w="0">
+            <a:noFill/>
+            <a:prstDash val="solid"/>
+          </a:ln>
+        </p:spPr>
+        <p:txBody>
+          <a:bodyPr xmlns:a="http://schemas.openxmlformats.org/drawingml/2006/main" anchor="t"/>
+          <a:lstStyle xmlns:a="http://schemas.openxmlformats.org/drawingml/2006/main"/>
+          <a:p xmlns:a="http://schemas.openxmlformats.org/drawingml/2006/main">
+            <a:pPr algn="l">
+              <a:defRPr sz="1350" b="0">
+                <a:solidFill>
+                  <a:srgbClr val="334155"/>
+                </a:solidFill>
+              </a:defRPr>
+            </a:pPr>
+            <a:r>
+              <a:rPr sz="1350" b="0">
+                <a:solidFill>
+                  <a:srgbClr val="334155"/>
+                </a:solidFill>
+              </a:rPr>
+              <a:t>Why: our traces show the next model turn can wait because useful KV is not ready when the agent resumes.</a:t>
+            </a:r>
+          </a:p>
+        </p:txBody>
+      </p:sp>
+      <p:sp>
+        <p:nvSpPr>
+          <p:cNvPr id="7" name="">
+            <a:extLst xmlns:a="http://schemas.openxmlformats.org/drawingml/2006/main">
+              <a:ext uri="{FF2B5EF4-FFF2-40B4-BE49-F238E27FC236}">
+                <a16:creationId xmlns:a16="http://schemas.microsoft.com/office/drawing/2014/main" id="{8B8BF92F-D1B6-4284-9DC4-58D74208D3B1}"/>
+              </a:ext>
+            </a:extLst>
+          </p:cNvPr>
+          <p:cNvSpPr>
+            <a:spLocks xmlns:a="http://schemas.openxmlformats.org/drawingml/2006/main" noGrp="1"/>
+          </p:cNvSpPr>
+          <p:nvPr/>
+        </p:nvSpPr>
+        <p:spPr>
+          <a:xfrm xmlns:a="http://schemas.openxmlformats.org/drawingml/2006/main">
+            <a:off x="419100" y="2647950"/>
+            <a:ext cx="11353800" cy="11430"/>
           </a:xfrm>
           <a:prstGeom xmlns:a="http://schemas.openxmlformats.org/drawingml/2006/main" prst="rect">
             <a:avLst/>
           </a:prstGeom>
           <a:solidFill xmlns:a="http://schemas.openxmlformats.org/drawingml/2006/main">
-            <a:srgbClr val="EEF2FF"/>
+            <a:srgbClr val="E2E8F0"/>
           </a:solidFill>
-          <a:ln xmlns:a="http://schemas.openxmlformats.org/drawingml/2006/main" w="9525">
-            <a:solidFill>
-              <a:srgbClr val="CBD5E1"/>
-            </a:solidFill>
-            <a:prstDash val="solid"/>
-          </a:ln>
-        </p:spPr>
-      </p:sp>
-      <p:sp>
-        <p:nvSpPr>
-          <p:cNvPr id="4" name="">
-            <a:extLst xmlns:a="http://schemas.openxmlformats.org/drawingml/2006/main">
-              <a:ext uri="{FF2B5EF4-FFF2-40B4-BE49-F238E27FC236}">
-                <a16:creationId xmlns:a16="http://schemas.microsoft.com/office/drawing/2014/main" id="{4C8DC447-E395-4491-90E9-1C5688383ED3}"/>
-              </a:ext>
-            </a:extLst>
-          </p:cNvPr>
-          <p:cNvSpPr>
-            <a:spLocks xmlns:a="http://schemas.openxmlformats.org/drawingml/2006/main" noGrp="1"/>
-          </p:cNvSpPr>
-          <p:nvPr/>
-        </p:nvSpPr>
-        <p:spPr>
-          <a:xfrm xmlns:a="http://schemas.openxmlformats.org/drawingml/2006/main">
-            <a:off x="600075" y="1581150"/>
-            <a:ext cx="2305050" cy="266700"/>
-          </a:xfrm>
-          <a:prstGeom xmlns:a="http://schemas.openxmlformats.org/drawingml/2006/main" prst="rect">
-            <a:avLst/>
-          </a:prstGeom>
-          <a:noFill xmlns:a="http://schemas.openxmlformats.org/drawingml/2006/main"/>
-          <a:ln xmlns:a="http://schemas.openxmlformats.org/drawingml/2006/main" w="0">
-            <a:noFill/>
-            <a:prstDash val="solid"/>
-          </a:ln>
-        </p:spPr>
-        <p:txBody>
-          <a:bodyPr xmlns:a="http://schemas.openxmlformats.org/drawingml/2006/main" anchor="ctr"/>
-          <a:lstStyle xmlns:a="http://schemas.openxmlformats.org/drawingml/2006/main"/>
-          <a:p xmlns:a="http://schemas.openxmlformats.org/drawingml/2006/main">
-            <a:pPr algn="l">
-              <a:defRPr sz="1125" b="1">
+          <a:ln xmlns:a="http://schemas.openxmlformats.org/drawingml/2006/main" w="0">
+            <a:noFill/>
+            <a:prstDash val="solid"/>
+          </a:ln>
+        </p:spPr>
+      </p:sp>
+      <p:sp>
+        <p:nvSpPr>
+          <p:cNvPr id="8" name="">
+            <a:extLst xmlns:a="http://schemas.openxmlformats.org/drawingml/2006/main">
+              <a:ext uri="{FF2B5EF4-FFF2-40B4-BE49-F238E27FC236}">
+                <a16:creationId xmlns:a16="http://schemas.microsoft.com/office/drawing/2014/main" id="{1C48B3DF-63EE-4DD2-B3D5-587D861B78B4}"/>
+              </a:ext>
+            </a:extLst>
+          </p:cNvPr>
+          <p:cNvSpPr>
+            <a:spLocks xmlns:a="http://schemas.openxmlformats.org/drawingml/2006/main" noGrp="1"/>
+          </p:cNvSpPr>
+          <p:nvPr/>
+        </p:nvSpPr>
+        <p:spPr>
+          <a:xfrm xmlns:a="http://schemas.openxmlformats.org/drawingml/2006/main">
+            <a:off x="685800" y="2781300"/>
+            <a:ext cx="533400" cy="342900"/>
+          </a:xfrm>
+          <a:prstGeom xmlns:a="http://schemas.openxmlformats.org/drawingml/2006/main" prst="rect">
+            <a:avLst/>
+          </a:prstGeom>
+          <a:noFill xmlns:a="http://schemas.openxmlformats.org/drawingml/2006/main"/>
+          <a:ln xmlns:a="http://schemas.openxmlformats.org/drawingml/2006/main" w="0">
+            <a:noFill/>
+            <a:prstDash val="solid"/>
+          </a:ln>
+        </p:spPr>
+        <p:txBody>
+          <a:bodyPr xmlns:a="http://schemas.openxmlformats.org/drawingml/2006/main" anchor="t"/>
+          <a:lstStyle xmlns:a="http://schemas.openxmlformats.org/drawingml/2006/main"/>
+          <a:p xmlns:a="http://schemas.openxmlformats.org/drawingml/2006/main">
+            <a:pPr algn="l">
+              <a:defRPr sz="1875" b="1">
+                <a:solidFill>
+                  <a:srgbClr val="9333EA"/>
+                </a:solidFill>
+              </a:defRPr>
+            </a:pPr>
+            <a:r>
+              <a:rPr sz="1875" b="1">
+                <a:solidFill>
+                  <a:srgbClr val="9333EA"/>
+                </a:solidFill>
+              </a:rPr>
+              <a:t>2.</a:t>
+            </a:r>
+          </a:p>
+        </p:txBody>
+      </p:sp>
+      <p:sp>
+        <p:nvSpPr>
+          <p:cNvPr id="9" name="">
+            <a:extLst xmlns:a="http://schemas.openxmlformats.org/drawingml/2006/main">
+              <a:ext uri="{FF2B5EF4-FFF2-40B4-BE49-F238E27FC236}">
+                <a16:creationId xmlns:a16="http://schemas.microsoft.com/office/drawing/2014/main" id="{67BDA0E0-DE61-4427-B6E0-E69EAEF32AEE}"/>
+              </a:ext>
+            </a:extLst>
+          </p:cNvPr>
+          <p:cNvSpPr>
+            <a:spLocks xmlns:a="http://schemas.openxmlformats.org/drawingml/2006/main" noGrp="1"/>
+          </p:cNvSpPr>
+          <p:nvPr/>
+        </p:nvSpPr>
+        <p:spPr>
+          <a:xfrm xmlns:a="http://schemas.openxmlformats.org/drawingml/2006/main">
+            <a:off x="1123950" y="2781300"/>
+            <a:ext cx="5334000" cy="323850"/>
+          </a:xfrm>
+          <a:prstGeom xmlns:a="http://schemas.openxmlformats.org/drawingml/2006/main" prst="rect">
+            <a:avLst/>
+          </a:prstGeom>
+          <a:noFill xmlns:a="http://schemas.openxmlformats.org/drawingml/2006/main"/>
+          <a:ln xmlns:a="http://schemas.openxmlformats.org/drawingml/2006/main" w="0">
+            <a:noFill/>
+            <a:prstDash val="solid"/>
+          </a:ln>
+        </p:spPr>
+        <p:txBody>
+          <a:bodyPr xmlns:a="http://schemas.openxmlformats.org/drawingml/2006/main" anchor="t"/>
+          <a:lstStyle xmlns:a="http://schemas.openxmlformats.org/drawingml/2006/main"/>
+          <a:p xmlns:a="http://schemas.openxmlformats.org/drawingml/2006/main">
+            <a:pPr algn="l">
+              <a:defRPr sz="1875" b="1">
                 <a:solidFill>
                   <a:srgbClr val="0F172A"/>
                 </a:solidFill>
               </a:defRPr>
             </a:pPr>
             <a:r>
-              <a:rPr sz="1125" b="1">
+              <a:rPr sz="1875" b="1">
                 <a:solidFill>
                   <a:srgbClr val="0F172A"/>
                 </a:solidFill>
               </a:rPr>
-              <a:t>Observed in our traces</a:t>
-            </a:r>
-          </a:p>
-        </p:txBody>
-      </p:sp>
-      <p:sp>
-        <p:nvSpPr>
-          <p:cNvPr id="5" name="">
-            <a:extLst xmlns:a="http://schemas.openxmlformats.org/drawingml/2006/main">
-              <a:ext uri="{FF2B5EF4-FFF2-40B4-BE49-F238E27FC236}">
-                <a16:creationId xmlns:a16="http://schemas.microsoft.com/office/drawing/2014/main" id="{D21E7E54-B614-4473-94B6-BD3460361472}"/>
-              </a:ext>
-            </a:extLst>
-          </p:cNvPr>
-          <p:cNvSpPr>
-            <a:spLocks xmlns:a="http://schemas.openxmlformats.org/drawingml/2006/main" noGrp="1"/>
-          </p:cNvSpPr>
-          <p:nvPr/>
-        </p:nvSpPr>
-        <p:spPr>
-          <a:xfrm xmlns:a="http://schemas.openxmlformats.org/drawingml/2006/main">
-            <a:off x="3076575" y="1581150"/>
-            <a:ext cx="2209800" cy="266700"/>
-          </a:xfrm>
-          <a:prstGeom xmlns:a="http://schemas.openxmlformats.org/drawingml/2006/main" prst="rect">
-            <a:avLst/>
-          </a:prstGeom>
-          <a:noFill xmlns:a="http://schemas.openxmlformats.org/drawingml/2006/main"/>
-          <a:ln xmlns:a="http://schemas.openxmlformats.org/drawingml/2006/main" w="0">
-            <a:noFill/>
-            <a:prstDash val="solid"/>
-          </a:ln>
-        </p:spPr>
-        <p:txBody>
-          <a:bodyPr xmlns:a="http://schemas.openxmlformats.org/drawingml/2006/main" anchor="ctr"/>
-          <a:lstStyle xmlns:a="http://schemas.openxmlformats.org/drawingml/2006/main"/>
-          <a:p xmlns:a="http://schemas.openxmlformats.org/drawingml/2006/main">
-            <a:pPr algn="l">
-              <a:defRPr sz="1125" b="1">
+              <a:t>Fewer wasted memory movements</a:t>
+            </a:r>
+          </a:p>
+        </p:txBody>
+      </p:sp>
+      <p:sp>
+        <p:nvSpPr>
+          <p:cNvPr id="10" name="">
+            <a:extLst xmlns:a="http://schemas.openxmlformats.org/drawingml/2006/main">
+              <a:ext uri="{FF2B5EF4-FFF2-40B4-BE49-F238E27FC236}">
+                <a16:creationId xmlns:a16="http://schemas.microsoft.com/office/drawing/2014/main" id="{33CADE34-C19B-49C0-BFDC-58254C6C91AC}"/>
+              </a:ext>
+            </a:extLst>
+          </p:cNvPr>
+          <p:cNvSpPr>
+            <a:spLocks xmlns:a="http://schemas.openxmlformats.org/drawingml/2006/main" noGrp="1"/>
+          </p:cNvSpPr>
+          <p:nvPr/>
+        </p:nvSpPr>
+        <p:spPr>
+          <a:xfrm xmlns:a="http://schemas.openxmlformats.org/drawingml/2006/main">
+            <a:off x="1123950" y="3143250"/>
+            <a:ext cx="6572250" cy="285750"/>
+          </a:xfrm>
+          <a:prstGeom xmlns:a="http://schemas.openxmlformats.org/drawingml/2006/main" prst="rect">
+            <a:avLst/>
+          </a:prstGeom>
+          <a:noFill xmlns:a="http://schemas.openxmlformats.org/drawingml/2006/main"/>
+          <a:ln xmlns:a="http://schemas.openxmlformats.org/drawingml/2006/main" w="0">
+            <a:noFill/>
+            <a:prstDash val="solid"/>
+          </a:ln>
+        </p:spPr>
+        <p:txBody>
+          <a:bodyPr xmlns:a="http://schemas.openxmlformats.org/drawingml/2006/main" anchor="t"/>
+          <a:lstStyle xmlns:a="http://schemas.openxmlformats.org/drawingml/2006/main"/>
+          <a:p xmlns:a="http://schemas.openxmlformats.org/drawingml/2006/main">
+            <a:pPr algn="l">
+              <a:defRPr sz="1575" b="1">
+                <a:solidFill>
+                  <a:srgbClr val="9333EA"/>
+                </a:solidFill>
+              </a:defRPr>
+            </a:pPr>
+            <a:r>
+              <a:rPr sz="1575" b="1">
+                <a:solidFill>
+                  <a:srgbClr val="9333EA"/>
+                </a:solidFill>
+              </a:rPr>
+              <a:t>Target: 20-50% fewer late or wasted KV reloads</a:t>
+            </a:r>
+          </a:p>
+        </p:txBody>
+      </p:sp>
+      <p:sp>
+        <p:nvSpPr>
+          <p:cNvPr id="11" name="">
+            <a:extLst xmlns:a="http://schemas.openxmlformats.org/drawingml/2006/main">
+              <a:ext uri="{FF2B5EF4-FFF2-40B4-BE49-F238E27FC236}">
+                <a16:creationId xmlns:a16="http://schemas.microsoft.com/office/drawing/2014/main" id="{9A58081A-E0D2-4F1F-AE26-AE1DE0D62AE4}"/>
+              </a:ext>
+            </a:extLst>
+          </p:cNvPr>
+          <p:cNvSpPr>
+            <a:spLocks xmlns:a="http://schemas.openxmlformats.org/drawingml/2006/main" noGrp="1"/>
+          </p:cNvSpPr>
+          <p:nvPr/>
+        </p:nvSpPr>
+        <p:spPr>
+          <a:xfrm xmlns:a="http://schemas.openxmlformats.org/drawingml/2006/main">
+            <a:off x="1123950" y="3467100"/>
+            <a:ext cx="9334500" cy="428625"/>
+          </a:xfrm>
+          <a:prstGeom xmlns:a="http://schemas.openxmlformats.org/drawingml/2006/main" prst="rect">
+            <a:avLst/>
+          </a:prstGeom>
+          <a:noFill xmlns:a="http://schemas.openxmlformats.org/drawingml/2006/main"/>
+          <a:ln xmlns:a="http://schemas.openxmlformats.org/drawingml/2006/main" w="0">
+            <a:noFill/>
+            <a:prstDash val="solid"/>
+          </a:ln>
+        </p:spPr>
+        <p:txBody>
+          <a:bodyPr xmlns:a="http://schemas.openxmlformats.org/drawingml/2006/main" anchor="t"/>
+          <a:lstStyle xmlns:a="http://schemas.openxmlformats.org/drawingml/2006/main"/>
+          <a:p xmlns:a="http://schemas.openxmlformats.org/drawingml/2006/main">
+            <a:pPr algn="l">
+              <a:defRPr sz="1350" b="0">
+                <a:solidFill>
+                  <a:srgbClr val="334155"/>
+                </a:solidFill>
+              </a:defRPr>
+            </a:pPr>
+            <a:r>
+              <a:rPr sz="1350" b="0">
+                <a:solidFill>
+                  <a:srgbClr val="334155"/>
+                </a:solidFill>
+              </a:rPr>
+              <a:t>Why: memory movement can finish too late, or useful KV can be moved but not reused in time.</a:t>
+            </a:r>
+          </a:p>
+        </p:txBody>
+      </p:sp>
+      <p:sp>
+        <p:nvSpPr>
+          <p:cNvPr id="12" name="">
+            <a:extLst xmlns:a="http://schemas.openxmlformats.org/drawingml/2006/main">
+              <a:ext uri="{FF2B5EF4-FFF2-40B4-BE49-F238E27FC236}">
+                <a16:creationId xmlns:a16="http://schemas.microsoft.com/office/drawing/2014/main" id="{9A81C263-E4DC-4DF9-8D0F-C2C074E796F6}"/>
+              </a:ext>
+            </a:extLst>
+          </p:cNvPr>
+          <p:cNvSpPr>
+            <a:spLocks xmlns:a="http://schemas.openxmlformats.org/drawingml/2006/main" noGrp="1"/>
+          </p:cNvSpPr>
+          <p:nvPr/>
+        </p:nvSpPr>
+        <p:spPr>
+          <a:xfrm xmlns:a="http://schemas.openxmlformats.org/drawingml/2006/main">
+            <a:off x="419100" y="3867150"/>
+            <a:ext cx="11353800" cy="11430"/>
+          </a:xfrm>
+          <a:prstGeom xmlns:a="http://schemas.openxmlformats.org/drawingml/2006/main" prst="rect">
+            <a:avLst/>
+          </a:prstGeom>
+          <a:solidFill xmlns:a="http://schemas.openxmlformats.org/drawingml/2006/main">
+            <a:srgbClr val="E2E8F0"/>
+          </a:solidFill>
+          <a:ln xmlns:a="http://schemas.openxmlformats.org/drawingml/2006/main" w="0">
+            <a:noFill/>
+            <a:prstDash val="solid"/>
+          </a:ln>
+        </p:spPr>
+      </p:sp>
+      <p:sp>
+        <p:nvSpPr>
+          <p:cNvPr id="13" name="">
+            <a:extLst xmlns:a="http://schemas.openxmlformats.org/drawingml/2006/main">
+              <a:ext uri="{FF2B5EF4-FFF2-40B4-BE49-F238E27FC236}">
+                <a16:creationId xmlns:a16="http://schemas.microsoft.com/office/drawing/2014/main" id="{D2ECB64A-A1C4-4C79-B216-F24A8600962D}"/>
+              </a:ext>
+            </a:extLst>
+          </p:cNvPr>
+          <p:cNvSpPr>
+            <a:spLocks xmlns:a="http://schemas.openxmlformats.org/drawingml/2006/main" noGrp="1"/>
+          </p:cNvSpPr>
+          <p:nvPr/>
+        </p:nvSpPr>
+        <p:spPr>
+          <a:xfrm xmlns:a="http://schemas.openxmlformats.org/drawingml/2006/main">
+            <a:off x="685800" y="4000500"/>
+            <a:ext cx="533400" cy="342900"/>
+          </a:xfrm>
+          <a:prstGeom xmlns:a="http://schemas.openxmlformats.org/drawingml/2006/main" prst="rect">
+            <a:avLst/>
+          </a:prstGeom>
+          <a:noFill xmlns:a="http://schemas.openxmlformats.org/drawingml/2006/main"/>
+          <a:ln xmlns:a="http://schemas.openxmlformats.org/drawingml/2006/main" w="0">
+            <a:noFill/>
+            <a:prstDash val="solid"/>
+          </a:ln>
+        </p:spPr>
+        <p:txBody>
+          <a:bodyPr xmlns:a="http://schemas.openxmlformats.org/drawingml/2006/main" anchor="t"/>
+          <a:lstStyle xmlns:a="http://schemas.openxmlformats.org/drawingml/2006/main"/>
+          <a:p xmlns:a="http://schemas.openxmlformats.org/drawingml/2006/main">
+            <a:pPr algn="l">
+              <a:defRPr sz="1875" b="1">
+                <a:solidFill>
+                  <a:srgbClr val="16A34A"/>
+                </a:solidFill>
+              </a:defRPr>
+            </a:pPr>
+            <a:r>
+              <a:rPr sz="1875" b="1">
+                <a:solidFill>
+                  <a:srgbClr val="16A34A"/>
+                </a:solidFill>
+              </a:rPr>
+              <a:t>3.</a:t>
+            </a:r>
+          </a:p>
+        </p:txBody>
+      </p:sp>
+      <p:sp>
+        <p:nvSpPr>
+          <p:cNvPr id="14" name="">
+            <a:extLst xmlns:a="http://schemas.openxmlformats.org/drawingml/2006/main">
+              <a:ext uri="{FF2B5EF4-FFF2-40B4-BE49-F238E27FC236}">
+                <a16:creationId xmlns:a16="http://schemas.microsoft.com/office/drawing/2014/main" id="{09F01511-E20C-4C52-BF81-0E93F2EAE940}"/>
+              </a:ext>
+            </a:extLst>
+          </p:cNvPr>
+          <p:cNvSpPr>
+            <a:spLocks xmlns:a="http://schemas.openxmlformats.org/drawingml/2006/main" noGrp="1"/>
+          </p:cNvSpPr>
+          <p:nvPr/>
+        </p:nvSpPr>
+        <p:spPr>
+          <a:xfrm xmlns:a="http://schemas.openxmlformats.org/drawingml/2006/main">
+            <a:off x="1123950" y="4000500"/>
+            <a:ext cx="5334000" cy="323850"/>
+          </a:xfrm>
+          <a:prstGeom xmlns:a="http://schemas.openxmlformats.org/drawingml/2006/main" prst="rect">
+            <a:avLst/>
+          </a:prstGeom>
+          <a:noFill xmlns:a="http://schemas.openxmlformats.org/drawingml/2006/main"/>
+          <a:ln xmlns:a="http://schemas.openxmlformats.org/drawingml/2006/main" w="0">
+            <a:noFill/>
+            <a:prstDash val="solid"/>
+          </a:ln>
+        </p:spPr>
+        <p:txBody>
+          <a:bodyPr xmlns:a="http://schemas.openxmlformats.org/drawingml/2006/main" anchor="t"/>
+          <a:lstStyle xmlns:a="http://schemas.openxmlformats.org/drawingml/2006/main"/>
+          <a:p xmlns:a="http://schemas.openxmlformats.org/drawingml/2006/main">
+            <a:pPr algn="l">
+              <a:defRPr sz="1875" b="1">
                 <a:solidFill>
                   <a:srgbClr val="0F172A"/>
                 </a:solidFill>
               </a:defRPr>
             </a:pPr>
             <a:r>
-              <a:rPr sz="1125" b="1">
+              <a:rPr sz="1875" b="1">
                 <a:solidFill>
                   <a:srgbClr val="0F172A"/>
                 </a:solidFill>
               </a:rPr>
-              <a:t>Hardware assist</a:t>
-            </a:r>
-          </a:p>
-        </p:txBody>
-      </p:sp>
-      <p:sp>
-        <p:nvSpPr>
-          <p:cNvPr id="6" name="">
-            <a:extLst xmlns:a="http://schemas.openxmlformats.org/drawingml/2006/main">
-              <a:ext uri="{FF2B5EF4-FFF2-40B4-BE49-F238E27FC236}">
-                <a16:creationId xmlns:a16="http://schemas.microsoft.com/office/drawing/2014/main" id="{518E3EE8-E58D-4ED8-9281-F896CBD46A86}"/>
-              </a:ext>
-            </a:extLst>
-          </p:cNvPr>
-          <p:cNvSpPr>
-            <a:spLocks xmlns:a="http://schemas.openxmlformats.org/drawingml/2006/main" noGrp="1"/>
-          </p:cNvSpPr>
-          <p:nvPr/>
-        </p:nvSpPr>
-        <p:spPr>
-          <a:xfrm xmlns:a="http://schemas.openxmlformats.org/drawingml/2006/main">
-            <a:off x="5457825" y="1581150"/>
-            <a:ext cx="3495675" cy="266700"/>
-          </a:xfrm>
-          <a:prstGeom xmlns:a="http://schemas.openxmlformats.org/drawingml/2006/main" prst="rect">
-            <a:avLst/>
-          </a:prstGeom>
-          <a:noFill xmlns:a="http://schemas.openxmlformats.org/drawingml/2006/main"/>
-          <a:ln xmlns:a="http://schemas.openxmlformats.org/drawingml/2006/main" w="0">
-            <a:noFill/>
-            <a:prstDash val="solid"/>
-          </a:ln>
-        </p:spPr>
-        <p:txBody>
-          <a:bodyPr xmlns:a="http://schemas.openxmlformats.org/drawingml/2006/main" anchor="ctr"/>
-          <a:lstStyle xmlns:a="http://schemas.openxmlformats.org/drawingml/2006/main"/>
-          <a:p xmlns:a="http://schemas.openxmlformats.org/drawingml/2006/main">
-            <a:pPr algn="l">
-              <a:defRPr sz="1125" b="1">
+              <a:t>More predictable tail latency</a:t>
+            </a:r>
+          </a:p>
+        </p:txBody>
+      </p:sp>
+      <p:sp>
+        <p:nvSpPr>
+          <p:cNvPr id="15" name="">
+            <a:extLst xmlns:a="http://schemas.openxmlformats.org/drawingml/2006/main">
+              <a:ext uri="{FF2B5EF4-FFF2-40B4-BE49-F238E27FC236}">
+                <a16:creationId xmlns:a16="http://schemas.microsoft.com/office/drawing/2014/main" id="{E99FB8C6-D4C0-4E88-A0A2-5C436EEF1FB0}"/>
+              </a:ext>
+            </a:extLst>
+          </p:cNvPr>
+          <p:cNvSpPr>
+            <a:spLocks xmlns:a="http://schemas.openxmlformats.org/drawingml/2006/main" noGrp="1"/>
+          </p:cNvSpPr>
+          <p:nvPr/>
+        </p:nvSpPr>
+        <p:spPr>
+          <a:xfrm xmlns:a="http://schemas.openxmlformats.org/drawingml/2006/main">
+            <a:off x="1123950" y="4362450"/>
+            <a:ext cx="6572250" cy="285750"/>
+          </a:xfrm>
+          <a:prstGeom xmlns:a="http://schemas.openxmlformats.org/drawingml/2006/main" prst="rect">
+            <a:avLst/>
+          </a:prstGeom>
+          <a:noFill xmlns:a="http://schemas.openxmlformats.org/drawingml/2006/main"/>
+          <a:ln xmlns:a="http://schemas.openxmlformats.org/drawingml/2006/main" w="0">
+            <a:noFill/>
+            <a:prstDash val="solid"/>
+          </a:ln>
+        </p:spPr>
+        <p:txBody>
+          <a:bodyPr xmlns:a="http://schemas.openxmlformats.org/drawingml/2006/main" anchor="t"/>
+          <a:lstStyle xmlns:a="http://schemas.openxmlformats.org/drawingml/2006/main"/>
+          <a:p xmlns:a="http://schemas.openxmlformats.org/drawingml/2006/main">
+            <a:pPr algn="l">
+              <a:defRPr sz="1575" b="1">
+                <a:solidFill>
+                  <a:srgbClr val="16A34A"/>
+                </a:solidFill>
+              </a:defRPr>
+            </a:pPr>
+            <a:r>
+              <a:rPr sz="1575" b="1">
+                <a:solidFill>
+                  <a:srgbClr val="16A34A"/>
+                </a:solidFill>
+              </a:rPr>
+              <a:t>Target: lower p95/p99 agent-resume stalls</a:t>
+            </a:r>
+          </a:p>
+        </p:txBody>
+      </p:sp>
+      <p:sp>
+        <p:nvSpPr>
+          <p:cNvPr id="16" name="">
+            <a:extLst xmlns:a="http://schemas.openxmlformats.org/drawingml/2006/main">
+              <a:ext uri="{FF2B5EF4-FFF2-40B4-BE49-F238E27FC236}">
+                <a16:creationId xmlns:a16="http://schemas.microsoft.com/office/drawing/2014/main" id="{C865F086-731A-4783-80E8-3893553F584F}"/>
+              </a:ext>
+            </a:extLst>
+          </p:cNvPr>
+          <p:cNvSpPr>
+            <a:spLocks xmlns:a="http://schemas.openxmlformats.org/drawingml/2006/main" noGrp="1"/>
+          </p:cNvSpPr>
+          <p:nvPr/>
+        </p:nvSpPr>
+        <p:spPr>
+          <a:xfrm xmlns:a="http://schemas.openxmlformats.org/drawingml/2006/main">
+            <a:off x="1123950" y="4686300"/>
+            <a:ext cx="9334500" cy="428625"/>
+          </a:xfrm>
+          <a:prstGeom xmlns:a="http://schemas.openxmlformats.org/drawingml/2006/main" prst="rect">
+            <a:avLst/>
+          </a:prstGeom>
+          <a:noFill xmlns:a="http://schemas.openxmlformats.org/drawingml/2006/main"/>
+          <a:ln xmlns:a="http://schemas.openxmlformats.org/drawingml/2006/main" w="0">
+            <a:noFill/>
+            <a:prstDash val="solid"/>
+          </a:ln>
+        </p:spPr>
+        <p:txBody>
+          <a:bodyPr xmlns:a="http://schemas.openxmlformats.org/drawingml/2006/main" anchor="t"/>
+          <a:lstStyle xmlns:a="http://schemas.openxmlformats.org/drawingml/2006/main"/>
+          <a:p xmlns:a="http://schemas.openxmlformats.org/drawingml/2006/main">
+            <a:pPr algn="l">
+              <a:defRPr sz="1350" b="0">
+                <a:solidFill>
+                  <a:srgbClr val="334155"/>
+                </a:solidFill>
+              </a:defRPr>
+            </a:pPr>
+            <a:r>
+              <a:rPr sz="1350" b="0">
+                <a:solidFill>
+                  <a:srgbClr val="334155"/>
+                </a:solidFill>
+              </a:rPr>
+              <a:t>Why: urgent agent KV currently competes with ordinary memory traffic without deadline or priority context.</a:t>
+            </a:r>
+          </a:p>
+        </p:txBody>
+      </p:sp>
+      <p:sp>
+        <p:nvSpPr>
+          <p:cNvPr id="17" name="">
+            <a:extLst xmlns:a="http://schemas.openxmlformats.org/drawingml/2006/main">
+              <a:ext uri="{FF2B5EF4-FFF2-40B4-BE49-F238E27FC236}">
+                <a16:creationId xmlns:a16="http://schemas.microsoft.com/office/drawing/2014/main" id="{B7CCE12D-B2F8-4E75-BB7A-A8157236C3B1}"/>
+              </a:ext>
+            </a:extLst>
+          </p:cNvPr>
+          <p:cNvSpPr>
+            <a:spLocks xmlns:a="http://schemas.openxmlformats.org/drawingml/2006/main" noGrp="1"/>
+          </p:cNvSpPr>
+          <p:nvPr/>
+        </p:nvSpPr>
+        <p:spPr>
+          <a:xfrm xmlns:a="http://schemas.openxmlformats.org/drawingml/2006/main">
+            <a:off x="419100" y="5334000"/>
+            <a:ext cx="11353800" cy="11430"/>
+          </a:xfrm>
+          <a:prstGeom xmlns:a="http://schemas.openxmlformats.org/drawingml/2006/main" prst="rect">
+            <a:avLst/>
+          </a:prstGeom>
+          <a:solidFill xmlns:a="http://schemas.openxmlformats.org/drawingml/2006/main">
+            <a:srgbClr val="CBD5E1"/>
+          </a:solidFill>
+          <a:ln xmlns:a="http://schemas.openxmlformats.org/drawingml/2006/main" w="0">
+            <a:noFill/>
+            <a:prstDash val="solid"/>
+          </a:ln>
+        </p:spPr>
+      </p:sp>
+      <p:sp>
+        <p:nvSpPr>
+          <p:cNvPr id="18" name="">
+            <a:extLst xmlns:a="http://schemas.openxmlformats.org/drawingml/2006/main">
+              <a:ext uri="{FF2B5EF4-FFF2-40B4-BE49-F238E27FC236}">
+                <a16:creationId xmlns:a16="http://schemas.microsoft.com/office/drawing/2014/main" id="{6C6CDA8D-8973-4D17-862E-551A0640D0F4}"/>
+              </a:ext>
+            </a:extLst>
+          </p:cNvPr>
+          <p:cNvSpPr>
+            <a:spLocks xmlns:a="http://schemas.openxmlformats.org/drawingml/2006/main" noGrp="1"/>
+          </p:cNvSpPr>
+          <p:nvPr/>
+        </p:nvSpPr>
+        <p:spPr>
+          <a:xfrm xmlns:a="http://schemas.openxmlformats.org/drawingml/2006/main">
+            <a:off x="876300" y="5562600"/>
+            <a:ext cx="2952750" cy="266700"/>
+          </a:xfrm>
+          <a:prstGeom xmlns:a="http://schemas.openxmlformats.org/drawingml/2006/main" prst="rect">
+            <a:avLst/>
+          </a:prstGeom>
+          <a:noFill xmlns:a="http://schemas.openxmlformats.org/drawingml/2006/main"/>
+          <a:ln xmlns:a="http://schemas.openxmlformats.org/drawingml/2006/main" w="0">
+            <a:noFill/>
+            <a:prstDash val="solid"/>
+          </a:ln>
+        </p:spPr>
+        <p:txBody>
+          <a:bodyPr xmlns:a="http://schemas.openxmlformats.org/drawingml/2006/main" anchor="t"/>
+          <a:lstStyle xmlns:a="http://schemas.openxmlformats.org/drawingml/2006/main"/>
+          <a:p xmlns:a="http://schemas.openxmlformats.org/drawingml/2006/main">
+            <a:pPr algn="l">
+              <a:defRPr sz="1500" b="1">
                 <a:solidFill>
                   <a:srgbClr val="0F172A"/>
                 </a:solidFill>
               </a:defRPr>
             </a:pPr>
             <a:r>
-              <a:rPr sz="1125" b="1">
+              <a:rPr sz="1500" b="1">
                 <a:solidFill>
                   <a:srgbClr val="0F172A"/>
                 </a:solidFill>
               </a:rPr>
-              <a:t>Why it moves the number</a:t>
-            </a:r>
-          </a:p>
-        </p:txBody>
-      </p:sp>
-      <p:sp>
-        <p:nvSpPr>
-          <p:cNvPr id="7" name="">
-            <a:extLst xmlns:a="http://schemas.openxmlformats.org/drawingml/2006/main">
-              <a:ext uri="{FF2B5EF4-FFF2-40B4-BE49-F238E27FC236}">
-                <a16:creationId xmlns:a16="http://schemas.microsoft.com/office/drawing/2014/main" id="{CBB1DB0F-2035-40EC-8998-93FF00840625}"/>
-              </a:ext>
-            </a:extLst>
-          </p:cNvPr>
-          <p:cNvSpPr>
-            <a:spLocks xmlns:a="http://schemas.openxmlformats.org/drawingml/2006/main" noGrp="1"/>
-          </p:cNvSpPr>
-          <p:nvPr/>
-        </p:nvSpPr>
-        <p:spPr>
-          <a:xfrm xmlns:a="http://schemas.openxmlformats.org/drawingml/2006/main">
-            <a:off x="9124950" y="1581150"/>
-            <a:ext cx="2209800" cy="266700"/>
-          </a:xfrm>
-          <a:prstGeom xmlns:a="http://schemas.openxmlformats.org/drawingml/2006/main" prst="rect">
-            <a:avLst/>
-          </a:prstGeom>
-          <a:noFill xmlns:a="http://schemas.openxmlformats.org/drawingml/2006/main"/>
-          <a:ln xmlns:a="http://schemas.openxmlformats.org/drawingml/2006/main" w="0">
-            <a:noFill/>
-            <a:prstDash val="solid"/>
-          </a:ln>
-        </p:spPr>
-        <p:txBody>
-          <a:bodyPr xmlns:a="http://schemas.openxmlformats.org/drawingml/2006/main" anchor="ctr"/>
-          <a:lstStyle xmlns:a="http://schemas.openxmlformats.org/drawingml/2006/main"/>
-          <a:p xmlns:a="http://schemas.openxmlformats.org/drawingml/2006/main">
-            <a:pPr algn="l">
-              <a:defRPr sz="1125" b="1">
+              <a:t>Hardware support to test</a:t>
+            </a:r>
+          </a:p>
+        </p:txBody>
+      </p:sp>
+      <p:sp>
+        <p:nvSpPr>
+          <p:cNvPr id="19" name="">
+            <a:extLst xmlns:a="http://schemas.openxmlformats.org/drawingml/2006/main">
+              <a:ext uri="{FF2B5EF4-FFF2-40B4-BE49-F238E27FC236}">
+                <a16:creationId xmlns:a16="http://schemas.microsoft.com/office/drawing/2014/main" id="{5FD3D6B7-A0E6-4078-9750-92005DA716AF}"/>
+              </a:ext>
+            </a:extLst>
+          </p:cNvPr>
+          <p:cNvSpPr>
+            <a:spLocks xmlns:a="http://schemas.openxmlformats.org/drawingml/2006/main" noGrp="1"/>
+          </p:cNvSpPr>
+          <p:nvPr/>
+        </p:nvSpPr>
+        <p:spPr>
+          <a:xfrm xmlns:a="http://schemas.openxmlformats.org/drawingml/2006/main">
+            <a:off x="876300" y="5867400"/>
+            <a:ext cx="9810750" cy="342900"/>
+          </a:xfrm>
+          <a:prstGeom xmlns:a="http://schemas.openxmlformats.org/drawingml/2006/main" prst="rect">
+            <a:avLst/>
+          </a:prstGeom>
+          <a:noFill xmlns:a="http://schemas.openxmlformats.org/drawingml/2006/main"/>
+          <a:ln xmlns:a="http://schemas.openxmlformats.org/drawingml/2006/main" w="0">
+            <a:noFill/>
+            <a:prstDash val="solid"/>
+          </a:ln>
+        </p:spPr>
+        <p:txBody>
+          <a:bodyPr xmlns:a="http://schemas.openxmlformats.org/drawingml/2006/main" anchor="t"/>
+          <a:lstStyle xmlns:a="http://schemas.openxmlformats.org/drawingml/2006/main"/>
+          <a:p xmlns:a="http://schemas.openxmlformats.org/drawingml/2006/main">
+            <a:pPr algn="l">
+              <a:defRPr sz="1425" b="1">
                 <a:solidFill>
                   <a:srgbClr val="0F172A"/>
                 </a:solidFill>
               </a:defRPr>
             </a:pPr>
             <a:r>
-              <a:rPr sz="1125" b="1">
+              <a:rPr sz="1425" b="1">
                 <a:solidFill>
                   <a:srgbClr val="0F172A"/>
                 </a:solidFill>
               </a:rPr>
-              <a:t>Target impact</a:t>
-            </a:r>
-          </a:p>
-        </p:txBody>
-      </p:sp>
-      <p:sp>
-        <p:nvSpPr>
-          <p:cNvPr id="8" name="">
-            <a:extLst xmlns:a="http://schemas.openxmlformats.org/drawingml/2006/main">
-              <a:ext uri="{FF2B5EF4-FFF2-40B4-BE49-F238E27FC236}">
-                <a16:creationId xmlns:a16="http://schemas.microsoft.com/office/drawing/2014/main" id="{E5134F14-23A3-4FE0-AC4D-9D95E91E94FD}"/>
-              </a:ext>
-            </a:extLst>
-          </p:cNvPr>
-          <p:cNvSpPr>
-            <a:spLocks xmlns:a="http://schemas.openxmlformats.org/drawingml/2006/main" noGrp="1"/>
-          </p:cNvSpPr>
-          <p:nvPr/>
-        </p:nvSpPr>
-        <p:spPr>
-          <a:xfrm xmlns:a="http://schemas.openxmlformats.org/drawingml/2006/main">
-            <a:off x="514350" y="1866900"/>
-            <a:ext cx="10906125" cy="628650"/>
-          </a:xfrm>
-          <a:prstGeom xmlns:a="http://schemas.openxmlformats.org/drawingml/2006/main" prst="rect">
-            <a:avLst/>
-          </a:prstGeom>
-          <a:solidFill xmlns:a="http://schemas.openxmlformats.org/drawingml/2006/main">
-            <a:srgbClr val="FFFFFF"/>
-          </a:solidFill>
-          <a:ln xmlns:a="http://schemas.openxmlformats.org/drawingml/2006/main" w="7620">
-            <a:solidFill>
-              <a:srgbClr val="CBD5E1"/>
-            </a:solidFill>
-            <a:prstDash val="solid"/>
-          </a:ln>
-        </p:spPr>
-      </p:sp>
-      <p:sp>
-        <p:nvSpPr>
-          <p:cNvPr id="9" name="">
-            <a:extLst xmlns:a="http://schemas.openxmlformats.org/drawingml/2006/main">
-              <a:ext uri="{FF2B5EF4-FFF2-40B4-BE49-F238E27FC236}">
-                <a16:creationId xmlns:a16="http://schemas.microsoft.com/office/drawing/2014/main" id="{ABFB8220-236F-45CB-8D7B-2082AA85C7C6}"/>
-              </a:ext>
-            </a:extLst>
-          </p:cNvPr>
-          <p:cNvSpPr>
-            <a:spLocks xmlns:a="http://schemas.openxmlformats.org/drawingml/2006/main" noGrp="1"/>
-          </p:cNvSpPr>
-          <p:nvPr/>
-        </p:nvSpPr>
-        <p:spPr>
-          <a:xfrm xmlns:a="http://schemas.openxmlformats.org/drawingml/2006/main">
-            <a:off x="600075" y="1952625"/>
-            <a:ext cx="2305050" cy="495300"/>
-          </a:xfrm>
-          <a:prstGeom xmlns:a="http://schemas.openxmlformats.org/drawingml/2006/main" prst="rect">
-            <a:avLst/>
-          </a:prstGeom>
-          <a:noFill xmlns:a="http://schemas.openxmlformats.org/drawingml/2006/main"/>
-          <a:ln xmlns:a="http://schemas.openxmlformats.org/drawingml/2006/main" w="0">
-            <a:noFill/>
-            <a:prstDash val="solid"/>
-          </a:ln>
-        </p:spPr>
-        <p:txBody>
-          <a:bodyPr xmlns:a="http://schemas.openxmlformats.org/drawingml/2006/main" anchor="ctr"/>
-          <a:lstStyle xmlns:a="http://schemas.openxmlformats.org/drawingml/2006/main"/>
-          <a:p xmlns:a="http://schemas.openxmlformats.org/drawingml/2006/main">
-            <a:pPr algn="l">
-              <a:defRPr sz="1125" b="1">
-                <a:solidFill>
-                  <a:srgbClr val="DC2626"/>
-                </a:solidFill>
-              </a:defRPr>
-            </a:pPr>
-            <a:r>
-              <a:rPr sz="1125" b="1">
-                <a:solidFill>
-                  <a:srgbClr val="DC2626"/>
-                </a:solidFill>
-              </a:rPr>
-              <a:t>Late replay H2D</a:t>
-            </a:r>
-          </a:p>
-        </p:txBody>
-      </p:sp>
-      <p:sp>
-        <p:nvSpPr>
-          <p:cNvPr id="10" name="">
-            <a:extLst xmlns:a="http://schemas.openxmlformats.org/drawingml/2006/main">
-              <a:ext uri="{FF2B5EF4-FFF2-40B4-BE49-F238E27FC236}">
-                <a16:creationId xmlns:a16="http://schemas.microsoft.com/office/drawing/2014/main" id="{1B944896-6C53-472E-8BE5-94614E9E7C17}"/>
-              </a:ext>
-            </a:extLst>
-          </p:cNvPr>
-          <p:cNvSpPr>
-            <a:spLocks xmlns:a="http://schemas.openxmlformats.org/drawingml/2006/main" noGrp="1"/>
-          </p:cNvSpPr>
-          <p:nvPr/>
-        </p:nvSpPr>
-        <p:spPr>
-          <a:xfrm xmlns:a="http://schemas.openxmlformats.org/drawingml/2006/main">
-            <a:off x="3076575" y="1952625"/>
-            <a:ext cx="2209800" cy="495300"/>
-          </a:xfrm>
-          <a:prstGeom xmlns:a="http://schemas.openxmlformats.org/drawingml/2006/main" prst="rect">
-            <a:avLst/>
-          </a:prstGeom>
-          <a:noFill xmlns:a="http://schemas.openxmlformats.org/drawingml/2006/main"/>
-          <a:ln xmlns:a="http://schemas.openxmlformats.org/drawingml/2006/main" w="0">
-            <a:noFill/>
-            <a:prstDash val="solid"/>
-          </a:ln>
-        </p:spPr>
-        <p:txBody>
-          <a:bodyPr xmlns:a="http://schemas.openxmlformats.org/drawingml/2006/main" anchor="ctr"/>
-          <a:lstStyle xmlns:a="http://schemas.openxmlformats.org/drawingml/2006/main"/>
-          <a:p xmlns:a="http://schemas.openxmlformats.org/drawingml/2006/main">
-            <a:pPr algn="l">
-              <a:defRPr sz="1125" b="0">
-                <a:solidFill>
-                  <a:srgbClr val="334155"/>
-                </a:solidFill>
-              </a:defRPr>
-            </a:pPr>
-            <a:r>
-              <a:rPr sz="1125" b="0">
-                <a:solidFill>
-                  <a:srgbClr val="334155"/>
-                </a:solidFill>
-              </a:rPr>
-              <a:t>deadline-aware KV queue</a:t>
-            </a:r>
-          </a:p>
-        </p:txBody>
-      </p:sp>
-      <p:sp>
-        <p:nvSpPr>
-          <p:cNvPr id="11" name="">
-            <a:extLst xmlns:a="http://schemas.openxmlformats.org/drawingml/2006/main">
-              <a:ext uri="{FF2B5EF4-FFF2-40B4-BE49-F238E27FC236}">
-                <a16:creationId xmlns:a16="http://schemas.microsoft.com/office/drawing/2014/main" id="{4A95457C-6754-4E7C-A608-230CC9DAA33E}"/>
-              </a:ext>
-            </a:extLst>
-          </p:cNvPr>
-          <p:cNvSpPr>
-            <a:spLocks xmlns:a="http://schemas.openxmlformats.org/drawingml/2006/main" noGrp="1"/>
-          </p:cNvSpPr>
-          <p:nvPr/>
-        </p:nvSpPr>
-        <p:spPr>
-          <a:xfrm xmlns:a="http://schemas.openxmlformats.org/drawingml/2006/main">
-            <a:off x="5457825" y="1952625"/>
-            <a:ext cx="3495675" cy="495300"/>
-          </a:xfrm>
-          <a:prstGeom xmlns:a="http://schemas.openxmlformats.org/drawingml/2006/main" prst="rect">
-            <a:avLst/>
-          </a:prstGeom>
-          <a:noFill xmlns:a="http://schemas.openxmlformats.org/drawingml/2006/main"/>
-          <a:ln xmlns:a="http://schemas.openxmlformats.org/drawingml/2006/main" w="0">
-            <a:noFill/>
-            <a:prstDash val="solid"/>
-          </a:ln>
-        </p:spPr>
-        <p:txBody>
-          <a:bodyPr xmlns:a="http://schemas.openxmlformats.org/drawingml/2006/main" anchor="ctr"/>
-          <a:lstStyle xmlns:a="http://schemas.openxmlformats.org/drawingml/2006/main"/>
-          <a:p xmlns:a="http://schemas.openxmlformats.org/drawingml/2006/main">
-            <a:pPr algn="l">
-              <a:defRPr sz="1125" b="0">
-                <a:solidFill>
-                  <a:srgbClr val="334155"/>
-                </a:solidFill>
-              </a:defRPr>
-            </a:pPr>
-            <a:r>
-              <a:rPr sz="1125" b="0">
-                <a:solidFill>
-                  <a:srgbClr val="334155"/>
-                </a:solidFill>
-              </a:rPr>
-              <a:t>cuts time spent waiting for urgent KV</a:t>
-            </a:r>
-          </a:p>
-        </p:txBody>
-      </p:sp>
-      <p:sp>
-        <p:nvSpPr>
-          <p:cNvPr id="12" name="">
-            <a:extLst xmlns:a="http://schemas.openxmlformats.org/drawingml/2006/main">
-              <a:ext uri="{FF2B5EF4-FFF2-40B4-BE49-F238E27FC236}">
-                <a16:creationId xmlns:a16="http://schemas.microsoft.com/office/drawing/2014/main" id="{C88DF3DE-418F-4A38-A1AF-6D82D9AE12C3}"/>
-              </a:ext>
-            </a:extLst>
-          </p:cNvPr>
-          <p:cNvSpPr>
-            <a:spLocks xmlns:a="http://schemas.openxmlformats.org/drawingml/2006/main" noGrp="1"/>
-          </p:cNvSpPr>
-          <p:nvPr/>
-        </p:nvSpPr>
-        <p:spPr>
-          <a:xfrm xmlns:a="http://schemas.openxmlformats.org/drawingml/2006/main">
-            <a:off x="9124950" y="1952625"/>
-            <a:ext cx="2209800" cy="495300"/>
-          </a:xfrm>
-          <a:prstGeom xmlns:a="http://schemas.openxmlformats.org/drawingml/2006/main" prst="rect">
-            <a:avLst/>
-          </a:prstGeom>
-          <a:noFill xmlns:a="http://schemas.openxmlformats.org/drawingml/2006/main"/>
-          <a:ln xmlns:a="http://schemas.openxmlformats.org/drawingml/2006/main" w="0">
-            <a:noFill/>
-            <a:prstDash val="solid"/>
-          </a:ln>
-        </p:spPr>
-        <p:txBody>
-          <a:bodyPr xmlns:a="http://schemas.openxmlformats.org/drawingml/2006/main" anchor="ctr"/>
-          <a:lstStyle xmlns:a="http://schemas.openxmlformats.org/drawingml/2006/main"/>
-          <a:p xmlns:a="http://schemas.openxmlformats.org/drawingml/2006/main">
-            <a:pPr algn="l">
-              <a:defRPr sz="1125" b="1">
-                <a:solidFill>
-                  <a:srgbClr val="2563EB"/>
-                </a:solidFill>
-              </a:defRPr>
-            </a:pPr>
-            <a:r>
-              <a:rPr sz="1125" b="1">
-                <a:solidFill>
-                  <a:srgbClr val="2563EB"/>
-                </a:solidFill>
-              </a:rPr>
-              <a:t>10-20% replay latency</a:t>
-            </a:r>
-          </a:p>
-        </p:txBody>
-      </p:sp>
-      <p:sp>
-        <p:nvSpPr>
-          <p:cNvPr id="13" name="">
-            <a:extLst xmlns:a="http://schemas.openxmlformats.org/drawingml/2006/main">
-              <a:ext uri="{FF2B5EF4-FFF2-40B4-BE49-F238E27FC236}">
-                <a16:creationId xmlns:a16="http://schemas.microsoft.com/office/drawing/2014/main" id="{43F9E836-9FA0-46AA-91A1-343DB91D5A2A}"/>
-              </a:ext>
-            </a:extLst>
-          </p:cNvPr>
-          <p:cNvSpPr>
-            <a:spLocks xmlns:a="http://schemas.openxmlformats.org/drawingml/2006/main" noGrp="1"/>
-          </p:cNvSpPr>
-          <p:nvPr/>
-        </p:nvSpPr>
-        <p:spPr>
-          <a:xfrm xmlns:a="http://schemas.openxmlformats.org/drawingml/2006/main">
-            <a:off x="514350" y="2495550"/>
-            <a:ext cx="10906125" cy="628650"/>
-          </a:xfrm>
-          <a:prstGeom xmlns:a="http://schemas.openxmlformats.org/drawingml/2006/main" prst="rect">
-            <a:avLst/>
-          </a:prstGeom>
-          <a:solidFill xmlns:a="http://schemas.openxmlformats.org/drawingml/2006/main">
-            <a:srgbClr val="F8FAFC"/>
-          </a:solidFill>
-          <a:ln xmlns:a="http://schemas.openxmlformats.org/drawingml/2006/main" w="7620">
-            <a:solidFill>
-              <a:srgbClr val="CBD5E1"/>
-            </a:solidFill>
-            <a:prstDash val="solid"/>
-          </a:ln>
-        </p:spPr>
-      </p:sp>
-      <p:sp>
-        <p:nvSpPr>
-          <p:cNvPr id="14" name="">
-            <a:extLst xmlns:a="http://schemas.openxmlformats.org/drawingml/2006/main">
-              <a:ext uri="{FF2B5EF4-FFF2-40B4-BE49-F238E27FC236}">
-                <a16:creationId xmlns:a16="http://schemas.microsoft.com/office/drawing/2014/main" id="{400E382B-1EBA-4A9D-A7FF-85068CC0DFDD}"/>
-              </a:ext>
-            </a:extLst>
-          </p:cNvPr>
-          <p:cNvSpPr>
-            <a:spLocks xmlns:a="http://schemas.openxmlformats.org/drawingml/2006/main" noGrp="1"/>
-          </p:cNvSpPr>
-          <p:nvPr/>
-        </p:nvSpPr>
-        <p:spPr>
-          <a:xfrm xmlns:a="http://schemas.openxmlformats.org/drawingml/2006/main">
-            <a:off x="600075" y="2581275"/>
-            <a:ext cx="2305050" cy="495300"/>
-          </a:xfrm>
-          <a:prstGeom xmlns:a="http://schemas.openxmlformats.org/drawingml/2006/main" prst="rect">
-            <a:avLst/>
-          </a:prstGeom>
-          <a:noFill xmlns:a="http://schemas.openxmlformats.org/drawingml/2006/main"/>
-          <a:ln xmlns:a="http://schemas.openxmlformats.org/drawingml/2006/main" w="0">
-            <a:noFill/>
-            <a:prstDash val="solid"/>
-          </a:ln>
-        </p:spPr>
-        <p:txBody>
-          <a:bodyPr xmlns:a="http://schemas.openxmlformats.org/drawingml/2006/main" anchor="ctr"/>
-          <a:lstStyle xmlns:a="http://schemas.openxmlformats.org/drawingml/2006/main"/>
-          <a:p xmlns:a="http://schemas.openxmlformats.org/drawingml/2006/main">
-            <a:pPr algn="l">
-              <a:defRPr sz="1125" b="1">
-                <a:solidFill>
-                  <a:srgbClr val="CA8A04"/>
-                </a:solidFill>
-              </a:defRPr>
-            </a:pPr>
-            <a:r>
-              <a:rPr sz="1125" b="1">
-                <a:solidFill>
-                  <a:srgbClr val="CA8A04"/>
-                </a:solidFill>
-              </a:rPr>
-              <a:t>Replay recomputes old prefix</a:t>
-            </a:r>
-          </a:p>
-        </p:txBody>
-      </p:sp>
-      <p:sp>
-        <p:nvSpPr>
-          <p:cNvPr id="15" name="">
-            <a:extLst xmlns:a="http://schemas.openxmlformats.org/drawingml/2006/main">
-              <a:ext uri="{FF2B5EF4-FFF2-40B4-BE49-F238E27FC236}">
-                <a16:creationId xmlns:a16="http://schemas.microsoft.com/office/drawing/2014/main" id="{019C9FE1-AD6D-44E9-B7BE-A52810251BD3}"/>
-              </a:ext>
-            </a:extLst>
-          </p:cNvPr>
-          <p:cNvSpPr>
-            <a:spLocks xmlns:a="http://schemas.openxmlformats.org/drawingml/2006/main" noGrp="1"/>
-          </p:cNvSpPr>
-          <p:nvPr/>
-        </p:nvSpPr>
-        <p:spPr>
-          <a:xfrm xmlns:a="http://schemas.openxmlformats.org/drawingml/2006/main">
-            <a:off x="3076575" y="2581275"/>
-            <a:ext cx="2209800" cy="495300"/>
-          </a:xfrm>
-          <a:prstGeom xmlns:a="http://schemas.openxmlformats.org/drawingml/2006/main" prst="rect">
-            <a:avLst/>
-          </a:prstGeom>
-          <a:noFill xmlns:a="http://schemas.openxmlformats.org/drawingml/2006/main"/>
-          <a:ln xmlns:a="http://schemas.openxmlformats.org/drawingml/2006/main" w="0">
-            <a:noFill/>
-            <a:prstDash val="solid"/>
-          </a:ln>
-        </p:spPr>
-        <p:txBody>
-          <a:bodyPr xmlns:a="http://schemas.openxmlformats.org/drawingml/2006/main" anchor="ctr"/>
-          <a:lstStyle xmlns:a="http://schemas.openxmlformats.org/drawingml/2006/main"/>
-          <a:p xmlns:a="http://schemas.openxmlformats.org/drawingml/2006/main">
-            <a:pPr algn="l">
-              <a:defRPr sz="1125" b="0">
-                <a:solidFill>
-                  <a:srgbClr val="334155"/>
-                </a:solidFill>
-              </a:defRPr>
-            </a:pPr>
-            <a:r>
-              <a:rPr sz="1125" b="0">
-                <a:solidFill>
-                  <a:srgbClr val="334155"/>
-                </a:solidFill>
-              </a:rPr>
-              <a:t>residency protection</a:t>
-            </a:r>
-          </a:p>
-        </p:txBody>
-      </p:sp>
-      <p:sp>
-        <p:nvSpPr>
-          <p:cNvPr id="16" name="">
-            <a:extLst xmlns:a="http://schemas.openxmlformats.org/drawingml/2006/main">
-              <a:ext uri="{FF2B5EF4-FFF2-40B4-BE49-F238E27FC236}">
-                <a16:creationId xmlns:a16="http://schemas.microsoft.com/office/drawing/2014/main" id="{423FA0F1-FB27-4EB9-9ACE-6CAAFF4DC8BA}"/>
-              </a:ext>
-            </a:extLst>
-          </p:cNvPr>
-          <p:cNvSpPr>
-            <a:spLocks xmlns:a="http://schemas.openxmlformats.org/drawingml/2006/main" noGrp="1"/>
-          </p:cNvSpPr>
-          <p:nvPr/>
-        </p:nvSpPr>
-        <p:spPr>
-          <a:xfrm xmlns:a="http://schemas.openxmlformats.org/drawingml/2006/main">
-            <a:off x="5457825" y="2581275"/>
-            <a:ext cx="3495675" cy="495300"/>
-          </a:xfrm>
-          <a:prstGeom xmlns:a="http://schemas.openxmlformats.org/drawingml/2006/main" prst="rect">
-            <a:avLst/>
-          </a:prstGeom>
-          <a:noFill xmlns:a="http://schemas.openxmlformats.org/drawingml/2006/main"/>
-          <a:ln xmlns:a="http://schemas.openxmlformats.org/drawingml/2006/main" w="0">
-            <a:noFill/>
-            <a:prstDash val="solid"/>
-          </a:ln>
-        </p:spPr>
-        <p:txBody>
-          <a:bodyPr xmlns:a="http://schemas.openxmlformats.org/drawingml/2006/main" anchor="ctr"/>
-          <a:lstStyle xmlns:a="http://schemas.openxmlformats.org/drawingml/2006/main"/>
-          <a:p xmlns:a="http://schemas.openxmlformats.org/drawingml/2006/main">
-            <a:pPr algn="l">
-              <a:defRPr sz="1125" b="0">
-                <a:solidFill>
-                  <a:srgbClr val="334155"/>
-                </a:solidFill>
-              </a:defRPr>
-            </a:pPr>
-            <a:r>
-              <a:rPr sz="1125" b="0">
-                <a:solidFill>
-                  <a:srgbClr val="334155"/>
-                </a:solidFill>
-              </a:rPr>
-              <a:t>keeps useful KV available until reuse</a:t>
-            </a:r>
-          </a:p>
-        </p:txBody>
-      </p:sp>
-      <p:sp>
-        <p:nvSpPr>
-          <p:cNvPr id="17" name="">
-            <a:extLst xmlns:a="http://schemas.openxmlformats.org/drawingml/2006/main">
-              <a:ext uri="{FF2B5EF4-FFF2-40B4-BE49-F238E27FC236}">
-                <a16:creationId xmlns:a16="http://schemas.microsoft.com/office/drawing/2014/main" id="{789C0981-73BC-436E-B1C4-253CFD5A5FD1}"/>
-              </a:ext>
-            </a:extLst>
-          </p:cNvPr>
-          <p:cNvSpPr>
-            <a:spLocks xmlns:a="http://schemas.openxmlformats.org/drawingml/2006/main" noGrp="1"/>
-          </p:cNvSpPr>
-          <p:nvPr/>
-        </p:nvSpPr>
-        <p:spPr>
-          <a:xfrm xmlns:a="http://schemas.openxmlformats.org/drawingml/2006/main">
-            <a:off x="9124950" y="2581275"/>
-            <a:ext cx="2209800" cy="495300"/>
-          </a:xfrm>
-          <a:prstGeom xmlns:a="http://schemas.openxmlformats.org/drawingml/2006/main" prst="rect">
-            <a:avLst/>
-          </a:prstGeom>
-          <a:noFill xmlns:a="http://schemas.openxmlformats.org/drawingml/2006/main"/>
-          <a:ln xmlns:a="http://schemas.openxmlformats.org/drawingml/2006/main" w="0">
-            <a:noFill/>
-            <a:prstDash val="solid"/>
-          </a:ln>
-        </p:spPr>
-        <p:txBody>
-          <a:bodyPr xmlns:a="http://schemas.openxmlformats.org/drawingml/2006/main" anchor="ctr"/>
-          <a:lstStyle xmlns:a="http://schemas.openxmlformats.org/drawingml/2006/main"/>
-          <a:p xmlns:a="http://schemas.openxmlformats.org/drawingml/2006/main">
-            <a:pPr algn="l">
-              <a:defRPr sz="1125" b="1">
-                <a:solidFill>
-                  <a:srgbClr val="9333EA"/>
-                </a:solidFill>
-              </a:defRPr>
-            </a:pPr>
-            <a:r>
-              <a:rPr sz="1125" b="1">
-                <a:solidFill>
-                  <a:srgbClr val="9333EA"/>
-                </a:solidFill>
-              </a:rPr>
-              <a:t>up to 20-30%</a:t>
-            </a:r>
-          </a:p>
-        </p:txBody>
-      </p:sp>
-      <p:sp>
-        <p:nvSpPr>
-          <p:cNvPr id="18" name="">
-            <a:extLst xmlns:a="http://schemas.openxmlformats.org/drawingml/2006/main">
-              <a:ext uri="{FF2B5EF4-FFF2-40B4-BE49-F238E27FC236}">
-                <a16:creationId xmlns:a16="http://schemas.microsoft.com/office/drawing/2014/main" id="{9D9381C7-ABE4-47AC-B032-DEBE03B10F85}"/>
-              </a:ext>
-            </a:extLst>
-          </p:cNvPr>
-          <p:cNvSpPr>
-            <a:spLocks xmlns:a="http://schemas.openxmlformats.org/drawingml/2006/main" noGrp="1"/>
-          </p:cNvSpPr>
-          <p:nvPr/>
-        </p:nvSpPr>
-        <p:spPr>
-          <a:xfrm xmlns:a="http://schemas.openxmlformats.org/drawingml/2006/main">
-            <a:off x="514350" y="3124200"/>
-            <a:ext cx="10906125" cy="628650"/>
-          </a:xfrm>
-          <a:prstGeom xmlns:a="http://schemas.openxmlformats.org/drawingml/2006/main" prst="rect">
-            <a:avLst/>
-          </a:prstGeom>
-          <a:solidFill xmlns:a="http://schemas.openxmlformats.org/drawingml/2006/main">
-            <a:srgbClr val="FFFFFF"/>
-          </a:solidFill>
-          <a:ln xmlns:a="http://schemas.openxmlformats.org/drawingml/2006/main" w="7620">
-            <a:solidFill>
-              <a:srgbClr val="CBD5E1"/>
-            </a:solidFill>
-            <a:prstDash val="solid"/>
-          </a:ln>
-        </p:spPr>
-      </p:sp>
-      <p:sp>
-        <p:nvSpPr>
-          <p:cNvPr id="19" name="">
-            <a:extLst xmlns:a="http://schemas.openxmlformats.org/drawingml/2006/main">
-              <a:ext uri="{FF2B5EF4-FFF2-40B4-BE49-F238E27FC236}">
-                <a16:creationId xmlns:a16="http://schemas.microsoft.com/office/drawing/2014/main" id="{A6172B88-46C9-4964-B18A-29D3E3AC4579}"/>
-              </a:ext>
-            </a:extLst>
-          </p:cNvPr>
-          <p:cNvSpPr>
-            <a:spLocks xmlns:a="http://schemas.openxmlformats.org/drawingml/2006/main" noGrp="1"/>
-          </p:cNvSpPr>
-          <p:nvPr/>
-        </p:nvSpPr>
-        <p:spPr>
-          <a:xfrm xmlns:a="http://schemas.openxmlformats.org/drawingml/2006/main">
-            <a:off x="600075" y="3209925"/>
-            <a:ext cx="2305050" cy="495300"/>
-          </a:xfrm>
-          <a:prstGeom xmlns:a="http://schemas.openxmlformats.org/drawingml/2006/main" prst="rect">
-            <a:avLst/>
-          </a:prstGeom>
-          <a:noFill xmlns:a="http://schemas.openxmlformats.org/drawingml/2006/main"/>
-          <a:ln xmlns:a="http://schemas.openxmlformats.org/drawingml/2006/main" w="0">
-            <a:noFill/>
-            <a:prstDash val="solid"/>
-          </a:ln>
-        </p:spPr>
-        <p:txBody>
-          <a:bodyPr xmlns:a="http://schemas.openxmlformats.org/drawingml/2006/main" anchor="ctr"/>
-          <a:lstStyle xmlns:a="http://schemas.openxmlformats.org/drawingml/2006/main"/>
-          <a:p xmlns:a="http://schemas.openxmlformats.org/drawingml/2006/main">
-            <a:pPr algn="l">
-              <a:defRPr sz="1125" b="1">
-                <a:solidFill>
-                  <a:srgbClr val="9333EA"/>
-                </a:solidFill>
-              </a:defRPr>
-            </a:pPr>
-            <a:r>
-              <a:rPr sz="1125" b="1">
-                <a:solidFill>
-                  <a:srgbClr val="9333EA"/>
-                </a:solidFill>
-              </a:rPr>
-              <a:t>Hints finish after deadline</a:t>
+              <a:t>KV/session metadata, deadline-aware movement queues, temporary KV protection, and useful/late/wasted telemetry.</a:t>
             </a:r>
           </a:p>
         </p:txBody>
@@ -4474,1039 +4485,7 @@
           <p:cNvPr id="20" name="">
             <a:extLst xmlns:a="http://schemas.openxmlformats.org/drawingml/2006/main">
               <a:ext uri="{FF2B5EF4-FFF2-40B4-BE49-F238E27FC236}">
-                <a16:creationId xmlns:a16="http://schemas.microsoft.com/office/drawing/2014/main" id="{A9418E71-4CE4-4075-8DD0-8FBB88D3C6E2}"/>
-              </a:ext>
-            </a:extLst>
-          </p:cNvPr>
-          <p:cNvSpPr>
-            <a:spLocks xmlns:a="http://schemas.openxmlformats.org/drawingml/2006/main" noGrp="1"/>
-          </p:cNvSpPr>
-          <p:nvPr/>
-        </p:nvSpPr>
-        <p:spPr>
-          <a:xfrm xmlns:a="http://schemas.openxmlformats.org/drawingml/2006/main">
-            <a:off x="3076575" y="3209925"/>
-            <a:ext cx="2209800" cy="495300"/>
-          </a:xfrm>
-          <a:prstGeom xmlns:a="http://schemas.openxmlformats.org/drawingml/2006/main" prst="rect">
-            <a:avLst/>
-          </a:prstGeom>
-          <a:noFill xmlns:a="http://schemas.openxmlformats.org/drawingml/2006/main"/>
-          <a:ln xmlns:a="http://schemas.openxmlformats.org/drawingml/2006/main" w="0">
-            <a:noFill/>
-            <a:prstDash val="solid"/>
-          </a:ln>
-        </p:spPr>
-        <p:txBody>
-          <a:bodyPr xmlns:a="http://schemas.openxmlformats.org/drawingml/2006/main" anchor="ctr"/>
-          <a:lstStyle xmlns:a="http://schemas.openxmlformats.org/drawingml/2006/main"/>
-          <a:p xmlns:a="http://schemas.openxmlformats.org/drawingml/2006/main">
-            <a:pPr algn="l">
-              <a:defRPr sz="1125" b="0">
-                <a:solidFill>
-                  <a:srgbClr val="334155"/>
-                </a:solidFill>
-              </a:defRPr>
-            </a:pPr>
-            <a:r>
-              <a:rPr sz="1125" b="0">
-                <a:solidFill>
-                  <a:srgbClr val="334155"/>
-                </a:solidFill>
-              </a:rPr>
-              <a:t>session priority metadata</a:t>
-            </a:r>
-          </a:p>
-        </p:txBody>
-      </p:sp>
-      <p:sp>
-        <p:nvSpPr>
-          <p:cNvPr id="21" name="">
-            <a:extLst xmlns:a="http://schemas.openxmlformats.org/drawingml/2006/main">
-              <a:ext uri="{FF2B5EF4-FFF2-40B4-BE49-F238E27FC236}">
-                <a16:creationId xmlns:a16="http://schemas.microsoft.com/office/drawing/2014/main" id="{85C97FC5-629A-478E-9073-4F40CCF9B670}"/>
-              </a:ext>
-            </a:extLst>
-          </p:cNvPr>
-          <p:cNvSpPr>
-            <a:spLocks xmlns:a="http://schemas.openxmlformats.org/drawingml/2006/main" noGrp="1"/>
-          </p:cNvSpPr>
-          <p:nvPr/>
-        </p:nvSpPr>
-        <p:spPr>
-          <a:xfrm xmlns:a="http://schemas.openxmlformats.org/drawingml/2006/main">
-            <a:off x="5457825" y="3209925"/>
-            <a:ext cx="3495675" cy="495300"/>
-          </a:xfrm>
-          <a:prstGeom xmlns:a="http://schemas.openxmlformats.org/drawingml/2006/main" prst="rect">
-            <a:avLst/>
-          </a:prstGeom>
-          <a:noFill xmlns:a="http://schemas.openxmlformats.org/drawingml/2006/main"/>
-          <a:ln xmlns:a="http://schemas.openxmlformats.org/drawingml/2006/main" w="0">
-            <a:noFill/>
-            <a:prstDash val="solid"/>
-          </a:ln>
-        </p:spPr>
-        <p:txBody>
-          <a:bodyPr xmlns:a="http://schemas.openxmlformats.org/drawingml/2006/main" anchor="ctr"/>
-          <a:lstStyle xmlns:a="http://schemas.openxmlformats.org/drawingml/2006/main"/>
-          <a:p xmlns:a="http://schemas.openxmlformats.org/drawingml/2006/main">
-            <a:pPr algn="l">
-              <a:defRPr sz="1125" b="0">
-                <a:solidFill>
-                  <a:srgbClr val="334155"/>
-                </a:solidFill>
-              </a:defRPr>
-            </a:pPr>
-            <a:r>
-              <a:rPr sz="1125" b="0">
-                <a:solidFill>
-                  <a:srgbClr val="334155"/>
-                </a:solidFill>
-              </a:rPr>
-              <a:t>lets urgent agents preempt low-value movement</a:t>
-            </a:r>
-          </a:p>
-        </p:txBody>
-      </p:sp>
-      <p:sp>
-        <p:nvSpPr>
-          <p:cNvPr id="22" name="">
-            <a:extLst xmlns:a="http://schemas.openxmlformats.org/drawingml/2006/main">
-              <a:ext uri="{FF2B5EF4-FFF2-40B4-BE49-F238E27FC236}">
-                <a16:creationId xmlns:a16="http://schemas.microsoft.com/office/drawing/2014/main" id="{293005FE-C61F-4419-BFE7-7A9789E0CCDC}"/>
-              </a:ext>
-            </a:extLst>
-          </p:cNvPr>
-          <p:cNvSpPr>
-            <a:spLocks xmlns:a="http://schemas.openxmlformats.org/drawingml/2006/main" noGrp="1"/>
-          </p:cNvSpPr>
-          <p:nvPr/>
-        </p:nvSpPr>
-        <p:spPr>
-          <a:xfrm xmlns:a="http://schemas.openxmlformats.org/drawingml/2006/main">
-            <a:off x="9124950" y="3209925"/>
-            <a:ext cx="2209800" cy="495300"/>
-          </a:xfrm>
-          <a:prstGeom xmlns:a="http://schemas.openxmlformats.org/drawingml/2006/main" prst="rect">
-            <a:avLst/>
-          </a:prstGeom>
-          <a:noFill xmlns:a="http://schemas.openxmlformats.org/drawingml/2006/main"/>
-          <a:ln xmlns:a="http://schemas.openxmlformats.org/drawingml/2006/main" w="0">
-            <a:noFill/>
-            <a:prstDash val="solid"/>
-          </a:ln>
-        </p:spPr>
-        <p:txBody>
-          <a:bodyPr xmlns:a="http://schemas.openxmlformats.org/drawingml/2006/main" anchor="ctr"/>
-          <a:lstStyle xmlns:a="http://schemas.openxmlformats.org/drawingml/2006/main"/>
-          <a:p xmlns:a="http://schemas.openxmlformats.org/drawingml/2006/main">
-            <a:pPr algn="l">
-              <a:defRPr sz="1125" b="1">
-                <a:solidFill>
-                  <a:srgbClr val="16A34A"/>
-                </a:solidFill>
-              </a:defRPr>
-            </a:pPr>
-            <a:r>
-              <a:rPr sz="1125" b="1">
-                <a:solidFill>
-                  <a:srgbClr val="16A34A"/>
-                </a:solidFill>
-              </a:rPr>
-              <a:t>20-50% fewer late reloads</a:t>
-            </a:r>
-          </a:p>
-        </p:txBody>
-      </p:sp>
-      <p:sp>
-        <p:nvSpPr>
-          <p:cNvPr id="23" name="">
-            <a:extLst xmlns:a="http://schemas.openxmlformats.org/drawingml/2006/main">
-              <a:ext uri="{FF2B5EF4-FFF2-40B4-BE49-F238E27FC236}">
-                <a16:creationId xmlns:a16="http://schemas.microsoft.com/office/drawing/2014/main" id="{60531866-68C7-47EF-B369-094086949282}"/>
-              </a:ext>
-            </a:extLst>
-          </p:cNvPr>
-          <p:cNvSpPr>
-            <a:spLocks xmlns:a="http://schemas.openxmlformats.org/drawingml/2006/main" noGrp="1"/>
-          </p:cNvSpPr>
-          <p:nvPr/>
-        </p:nvSpPr>
-        <p:spPr>
-          <a:xfrm xmlns:a="http://schemas.openxmlformats.org/drawingml/2006/main">
-            <a:off x="514350" y="3752850"/>
-            <a:ext cx="10906125" cy="628650"/>
-          </a:xfrm>
-          <a:prstGeom xmlns:a="http://schemas.openxmlformats.org/drawingml/2006/main" prst="rect">
-            <a:avLst/>
-          </a:prstGeom>
-          <a:solidFill xmlns:a="http://schemas.openxmlformats.org/drawingml/2006/main">
-            <a:srgbClr val="F8FAFC"/>
-          </a:solidFill>
-          <a:ln xmlns:a="http://schemas.openxmlformats.org/drawingml/2006/main" w="7620">
-            <a:solidFill>
-              <a:srgbClr val="CBD5E1"/>
-            </a:solidFill>
-            <a:prstDash val="solid"/>
-          </a:ln>
-        </p:spPr>
-      </p:sp>
-      <p:sp>
-        <p:nvSpPr>
-          <p:cNvPr id="24" name="">
-            <a:extLst xmlns:a="http://schemas.openxmlformats.org/drawingml/2006/main">
-              <a:ext uri="{FF2B5EF4-FFF2-40B4-BE49-F238E27FC236}">
-                <a16:creationId xmlns:a16="http://schemas.microsoft.com/office/drawing/2014/main" id="{3B0F4BC0-95FC-4922-AADB-B914F2CD58D1}"/>
-              </a:ext>
-            </a:extLst>
-          </p:cNvPr>
-          <p:cNvSpPr>
-            <a:spLocks xmlns:a="http://schemas.openxmlformats.org/drawingml/2006/main" noGrp="1"/>
-          </p:cNvSpPr>
-          <p:nvPr/>
-        </p:nvSpPr>
-        <p:spPr>
-          <a:xfrm xmlns:a="http://schemas.openxmlformats.org/drawingml/2006/main">
-            <a:off x="600075" y="3838575"/>
-            <a:ext cx="2305050" cy="495300"/>
-          </a:xfrm>
-          <a:prstGeom xmlns:a="http://schemas.openxmlformats.org/drawingml/2006/main" prst="rect">
-            <a:avLst/>
-          </a:prstGeom>
-          <a:noFill xmlns:a="http://schemas.openxmlformats.org/drawingml/2006/main"/>
-          <a:ln xmlns:a="http://schemas.openxmlformats.org/drawingml/2006/main" w="0">
-            <a:noFill/>
-            <a:prstDash val="solid"/>
-          </a:ln>
-        </p:spPr>
-        <p:txBody>
-          <a:bodyPr xmlns:a="http://schemas.openxmlformats.org/drawingml/2006/main" anchor="ctr"/>
-          <a:lstStyle xmlns:a="http://schemas.openxmlformats.org/drawingml/2006/main"/>
-          <a:p xmlns:a="http://schemas.openxmlformats.org/drawingml/2006/main">
-            <a:pPr algn="l">
-              <a:defRPr sz="1125" b="1">
-                <a:solidFill>
-                  <a:srgbClr val="0891B2"/>
-                </a:solidFill>
-              </a:defRPr>
-            </a:pPr>
-            <a:r>
-              <a:rPr sz="1125" b="1">
-                <a:solidFill>
-                  <a:srgbClr val="0891B2"/>
-                </a:solidFill>
-              </a:rPr>
-              <a:t>Useful prefetch is wasted</a:t>
-            </a:r>
-          </a:p>
-        </p:txBody>
-      </p:sp>
-      <p:sp>
-        <p:nvSpPr>
-          <p:cNvPr id="25" name="">
-            <a:extLst xmlns:a="http://schemas.openxmlformats.org/drawingml/2006/main">
-              <a:ext uri="{FF2B5EF4-FFF2-40B4-BE49-F238E27FC236}">
-                <a16:creationId xmlns:a16="http://schemas.microsoft.com/office/drawing/2014/main" id="{E338A250-3F34-41EB-95BE-DB3AEABF20AC}"/>
-              </a:ext>
-            </a:extLst>
-          </p:cNvPr>
-          <p:cNvSpPr>
-            <a:spLocks xmlns:a="http://schemas.openxmlformats.org/drawingml/2006/main" noGrp="1"/>
-          </p:cNvSpPr>
-          <p:nvPr/>
-        </p:nvSpPr>
-        <p:spPr>
-          <a:xfrm xmlns:a="http://schemas.openxmlformats.org/drawingml/2006/main">
-            <a:off x="3076575" y="3838575"/>
-            <a:ext cx="2209800" cy="495300"/>
-          </a:xfrm>
-          <a:prstGeom xmlns:a="http://schemas.openxmlformats.org/drawingml/2006/main" prst="rect">
-            <a:avLst/>
-          </a:prstGeom>
-          <a:noFill xmlns:a="http://schemas.openxmlformats.org/drawingml/2006/main"/>
-          <a:ln xmlns:a="http://schemas.openxmlformats.org/drawingml/2006/main" w="0">
-            <a:noFill/>
-            <a:prstDash val="solid"/>
-          </a:ln>
-        </p:spPr>
-        <p:txBody>
-          <a:bodyPr xmlns:a="http://schemas.openxmlformats.org/drawingml/2006/main" anchor="ctr"/>
-          <a:lstStyle xmlns:a="http://schemas.openxmlformats.org/drawingml/2006/main"/>
-          <a:p xmlns:a="http://schemas.openxmlformats.org/drawingml/2006/main">
-            <a:pPr algn="l">
-              <a:defRPr sz="1125" b="0">
-                <a:solidFill>
-                  <a:srgbClr val="334155"/>
-                </a:solidFill>
-              </a:defRPr>
-            </a:pPr>
-            <a:r>
-              <a:rPr sz="1125" b="0">
-                <a:solidFill>
-                  <a:srgbClr val="334155"/>
-                </a:solidFill>
-              </a:rPr>
-              <a:t>KV-aware telemetry</a:t>
-            </a:r>
-          </a:p>
-        </p:txBody>
-      </p:sp>
-      <p:sp>
-        <p:nvSpPr>
-          <p:cNvPr id="26" name="">
-            <a:extLst xmlns:a="http://schemas.openxmlformats.org/drawingml/2006/main">
-              <a:ext uri="{FF2B5EF4-FFF2-40B4-BE49-F238E27FC236}">
-                <a16:creationId xmlns:a16="http://schemas.microsoft.com/office/drawing/2014/main" id="{DBEEC0E7-FA74-4B64-9821-799B51DC5FE8}"/>
-              </a:ext>
-            </a:extLst>
-          </p:cNvPr>
-          <p:cNvSpPr>
-            <a:spLocks xmlns:a="http://schemas.openxmlformats.org/drawingml/2006/main" noGrp="1"/>
-          </p:cNvSpPr>
-          <p:nvPr/>
-        </p:nvSpPr>
-        <p:spPr>
-          <a:xfrm xmlns:a="http://schemas.openxmlformats.org/drawingml/2006/main">
-            <a:off x="5457825" y="3838575"/>
-            <a:ext cx="3495675" cy="495300"/>
-          </a:xfrm>
-          <a:prstGeom xmlns:a="http://schemas.openxmlformats.org/drawingml/2006/main" prst="rect">
-            <a:avLst/>
-          </a:prstGeom>
-          <a:noFill xmlns:a="http://schemas.openxmlformats.org/drawingml/2006/main"/>
-          <a:ln xmlns:a="http://schemas.openxmlformats.org/drawingml/2006/main" w="0">
-            <a:noFill/>
-            <a:prstDash val="solid"/>
-          </a:ln>
-        </p:spPr>
-        <p:txBody>
-          <a:bodyPr xmlns:a="http://schemas.openxmlformats.org/drawingml/2006/main" anchor="ctr"/>
-          <a:lstStyle xmlns:a="http://schemas.openxmlformats.org/drawingml/2006/main"/>
-          <a:p xmlns:a="http://schemas.openxmlformats.org/drawingml/2006/main">
-            <a:pPr algn="l">
-              <a:defRPr sz="1125" b="0">
-                <a:solidFill>
-                  <a:srgbClr val="334155"/>
-                </a:solidFill>
-              </a:defRPr>
-            </a:pPr>
-            <a:r>
-              <a:rPr sz="1125" b="0">
-                <a:solidFill>
-                  <a:srgbClr val="334155"/>
-                </a:solidFill>
-              </a:rPr>
-              <a:t>detects late, wasted, and evicted-before-use KV</a:t>
-            </a:r>
-          </a:p>
-        </p:txBody>
-      </p:sp>
-      <p:sp>
-        <p:nvSpPr>
-          <p:cNvPr id="27" name="">
-            <a:extLst xmlns:a="http://schemas.openxmlformats.org/drawingml/2006/main">
-              <a:ext uri="{FF2B5EF4-FFF2-40B4-BE49-F238E27FC236}">
-                <a16:creationId xmlns:a16="http://schemas.microsoft.com/office/drawing/2014/main" id="{84D1EA7E-03F6-4715-8325-C6E0DA1F4F53}"/>
-              </a:ext>
-            </a:extLst>
-          </p:cNvPr>
-          <p:cNvSpPr>
-            <a:spLocks xmlns:a="http://schemas.openxmlformats.org/drawingml/2006/main" noGrp="1"/>
-          </p:cNvSpPr>
-          <p:nvPr/>
-        </p:nvSpPr>
-        <p:spPr>
-          <a:xfrm xmlns:a="http://schemas.openxmlformats.org/drawingml/2006/main">
-            <a:off x="9124950" y="3838575"/>
-            <a:ext cx="2209800" cy="495300"/>
-          </a:xfrm>
-          <a:prstGeom xmlns:a="http://schemas.openxmlformats.org/drawingml/2006/main" prst="rect">
-            <a:avLst/>
-          </a:prstGeom>
-          <a:noFill xmlns:a="http://schemas.openxmlformats.org/drawingml/2006/main"/>
-          <a:ln xmlns:a="http://schemas.openxmlformats.org/drawingml/2006/main" w="0">
-            <a:noFill/>
-            <a:prstDash val="solid"/>
-          </a:ln>
-        </p:spPr>
-        <p:txBody>
-          <a:bodyPr xmlns:a="http://schemas.openxmlformats.org/drawingml/2006/main" anchor="ctr"/>
-          <a:lstStyle xmlns:a="http://schemas.openxmlformats.org/drawingml/2006/main"/>
-          <a:p xmlns:a="http://schemas.openxmlformats.org/drawingml/2006/main">
-            <a:pPr algn="l">
-              <a:defRPr sz="1125" b="1">
-                <a:solidFill>
-                  <a:srgbClr val="0891B2"/>
-                </a:solidFill>
-              </a:defRPr>
-            </a:pPr>
-            <a:r>
-              <a:rPr sz="1125" b="1">
-                <a:solidFill>
-                  <a:srgbClr val="0891B2"/>
-                </a:solidFill>
-              </a:rPr>
-              <a:t>less bandwidth waste</a:t>
-            </a:r>
-          </a:p>
-        </p:txBody>
-      </p:sp>
-      <p:sp>
-        <p:nvSpPr>
-          <p:cNvPr id="28" name="">
-            <a:extLst xmlns:a="http://schemas.openxmlformats.org/drawingml/2006/main">
-              <a:ext uri="{FF2B5EF4-FFF2-40B4-BE49-F238E27FC236}">
-                <a16:creationId xmlns:a16="http://schemas.microsoft.com/office/drawing/2014/main" id="{6B1E9538-3885-4B5E-A4F9-760C0697A257}"/>
-              </a:ext>
-            </a:extLst>
-          </p:cNvPr>
-          <p:cNvSpPr>
-            <a:spLocks xmlns:a="http://schemas.openxmlformats.org/drawingml/2006/main" noGrp="1"/>
-          </p:cNvSpPr>
-          <p:nvPr/>
-        </p:nvSpPr>
-        <p:spPr>
-          <a:xfrm xmlns:a="http://schemas.openxmlformats.org/drawingml/2006/main">
-            <a:off x="609600" y="4591050"/>
-            <a:ext cx="2381250" cy="266700"/>
-          </a:xfrm>
-          <a:prstGeom xmlns:a="http://schemas.openxmlformats.org/drawingml/2006/main" prst="rect">
-            <a:avLst/>
-          </a:prstGeom>
-          <a:noFill xmlns:a="http://schemas.openxmlformats.org/drawingml/2006/main"/>
-          <a:ln xmlns:a="http://schemas.openxmlformats.org/drawingml/2006/main" w="0">
-            <a:noFill/>
-            <a:prstDash val="solid"/>
-          </a:ln>
-        </p:spPr>
-        <p:txBody>
-          <a:bodyPr xmlns:a="http://schemas.openxmlformats.org/drawingml/2006/main" anchor="t"/>
-          <a:lstStyle xmlns:a="http://schemas.openxmlformats.org/drawingml/2006/main"/>
-          <a:p xmlns:a="http://schemas.openxmlformats.org/drawingml/2006/main">
-            <a:pPr algn="l">
-              <a:defRPr sz="1500" b="1">
-                <a:solidFill>
-                  <a:srgbClr val="0F172A"/>
-                </a:solidFill>
-              </a:defRPr>
-            </a:pPr>
-            <a:r>
-              <a:rPr sz="1500" b="1">
-                <a:solidFill>
-                  <a:srgbClr val="0F172A"/>
-                </a:solidFill>
-              </a:rPr>
-              <a:t>Range rationale</a:t>
-            </a:r>
-          </a:p>
-        </p:txBody>
-      </p:sp>
-      <p:sp>
-        <p:nvSpPr>
-          <p:cNvPr id="29" name="">
-            <a:extLst xmlns:a="http://schemas.openxmlformats.org/drawingml/2006/main">
-              <a:ext uri="{FF2B5EF4-FFF2-40B4-BE49-F238E27FC236}">
-                <a16:creationId xmlns:a16="http://schemas.microsoft.com/office/drawing/2014/main" id="{6B852242-037E-4AD6-BD2A-1709DD5294EB}"/>
-              </a:ext>
-            </a:extLst>
-          </p:cNvPr>
-          <p:cNvSpPr>
-            <a:spLocks xmlns:a="http://schemas.openxmlformats.org/drawingml/2006/main" noGrp="1"/>
-          </p:cNvSpPr>
-          <p:nvPr/>
-        </p:nvSpPr>
-        <p:spPr>
-          <a:xfrm xmlns:a="http://schemas.openxmlformats.org/drawingml/2006/main">
-            <a:off x="609600" y="4857750"/>
-            <a:ext cx="10668000" cy="323850"/>
-          </a:xfrm>
-          <a:prstGeom xmlns:a="http://schemas.openxmlformats.org/drawingml/2006/main" prst="rect">
-            <a:avLst/>
-          </a:prstGeom>
-          <a:solidFill xmlns:a="http://schemas.openxmlformats.org/drawingml/2006/main">
-            <a:srgbClr val="F1F5F9"/>
-          </a:solidFill>
-          <a:ln xmlns:a="http://schemas.openxmlformats.org/drawingml/2006/main" w="9525">
-            <a:solidFill>
-              <a:srgbClr val="CBD5E1"/>
-            </a:solidFill>
-            <a:prstDash val="solid"/>
-          </a:ln>
-        </p:spPr>
-      </p:sp>
-      <p:sp>
-        <p:nvSpPr>
-          <p:cNvPr id="30" name="">
-            <a:extLst xmlns:a="http://schemas.openxmlformats.org/drawingml/2006/main">
-              <a:ext uri="{FF2B5EF4-FFF2-40B4-BE49-F238E27FC236}">
-                <a16:creationId xmlns:a16="http://schemas.microsoft.com/office/drawing/2014/main" id="{FAD62488-C574-4F7A-8D30-CACAA71337DF}"/>
-              </a:ext>
-            </a:extLst>
-          </p:cNvPr>
-          <p:cNvSpPr>
-            <a:spLocks xmlns:a="http://schemas.openxmlformats.org/drawingml/2006/main" noGrp="1"/>
-          </p:cNvSpPr>
-          <p:nvPr/>
-        </p:nvSpPr>
-        <p:spPr>
-          <a:xfrm xmlns:a="http://schemas.openxmlformats.org/drawingml/2006/main">
-            <a:off x="695325" y="4953000"/>
-            <a:ext cx="2019300" cy="209550"/>
-          </a:xfrm>
-          <a:prstGeom xmlns:a="http://schemas.openxmlformats.org/drawingml/2006/main" prst="rect">
-            <a:avLst/>
-          </a:prstGeom>
-          <a:noFill xmlns:a="http://schemas.openxmlformats.org/drawingml/2006/main"/>
-          <a:ln xmlns:a="http://schemas.openxmlformats.org/drawingml/2006/main" w="0">
-            <a:noFill/>
-            <a:prstDash val="solid"/>
-          </a:ln>
-        </p:spPr>
-        <p:txBody>
-          <a:bodyPr xmlns:a="http://schemas.openxmlformats.org/drawingml/2006/main" anchor="ctr"/>
-          <a:lstStyle xmlns:a="http://schemas.openxmlformats.org/drawingml/2006/main"/>
-          <a:p xmlns:a="http://schemas.openxmlformats.org/drawingml/2006/main">
-            <a:pPr algn="l">
-              <a:defRPr sz="1050" b="1">
-                <a:solidFill>
-                  <a:srgbClr val="0F172A"/>
-                </a:solidFill>
-              </a:defRPr>
-            </a:pPr>
-            <a:r>
-              <a:rPr sz="1050" b="1">
-                <a:solidFill>
-                  <a:srgbClr val="0F172A"/>
-                </a:solidFill>
-              </a:rPr>
-              <a:t>Range</a:t>
-            </a:r>
-          </a:p>
-        </p:txBody>
-      </p:sp>
-      <p:sp>
-        <p:nvSpPr>
-          <p:cNvPr id="31" name="">
-            <a:extLst xmlns:a="http://schemas.openxmlformats.org/drawingml/2006/main">
-              <a:ext uri="{FF2B5EF4-FFF2-40B4-BE49-F238E27FC236}">
-                <a16:creationId xmlns:a16="http://schemas.microsoft.com/office/drawing/2014/main" id="{E3355BC7-3D95-42D0-85AC-F85F37A39D60}"/>
-              </a:ext>
-            </a:extLst>
-          </p:cNvPr>
-          <p:cNvSpPr>
-            <a:spLocks xmlns:a="http://schemas.openxmlformats.org/drawingml/2006/main" noGrp="1"/>
-          </p:cNvSpPr>
-          <p:nvPr/>
-        </p:nvSpPr>
-        <p:spPr>
-          <a:xfrm xmlns:a="http://schemas.openxmlformats.org/drawingml/2006/main">
-            <a:off x="2886075" y="4953000"/>
-            <a:ext cx="4591050" cy="209550"/>
-          </a:xfrm>
-          <a:prstGeom xmlns:a="http://schemas.openxmlformats.org/drawingml/2006/main" prst="rect">
-            <a:avLst/>
-          </a:prstGeom>
-          <a:noFill xmlns:a="http://schemas.openxmlformats.org/drawingml/2006/main"/>
-          <a:ln xmlns:a="http://schemas.openxmlformats.org/drawingml/2006/main" w="0">
-            <a:noFill/>
-            <a:prstDash val="solid"/>
-          </a:ln>
-        </p:spPr>
-        <p:txBody>
-          <a:bodyPr xmlns:a="http://schemas.openxmlformats.org/drawingml/2006/main" anchor="ctr"/>
-          <a:lstStyle xmlns:a="http://schemas.openxmlformats.org/drawingml/2006/main"/>
-          <a:p xmlns:a="http://schemas.openxmlformats.org/drawingml/2006/main">
-            <a:pPr algn="l">
-              <a:defRPr sz="1050" b="1">
-                <a:solidFill>
-                  <a:srgbClr val="0F172A"/>
-                </a:solidFill>
-              </a:defRPr>
-            </a:pPr>
-            <a:r>
-              <a:rPr sz="1050" b="1">
-                <a:solidFill>
-                  <a:srgbClr val="0F172A"/>
-                </a:solidFill>
-              </a:rPr>
-              <a:t>When it applies</a:t>
-            </a:r>
-          </a:p>
-        </p:txBody>
-      </p:sp>
-      <p:sp>
-        <p:nvSpPr>
-          <p:cNvPr id="32" name="">
-            <a:extLst xmlns:a="http://schemas.openxmlformats.org/drawingml/2006/main">
-              <a:ext uri="{FF2B5EF4-FFF2-40B4-BE49-F238E27FC236}">
-                <a16:creationId xmlns:a16="http://schemas.microsoft.com/office/drawing/2014/main" id="{36C27F19-E49F-4D71-8229-6BCF30BA4766}"/>
-              </a:ext>
-            </a:extLst>
-          </p:cNvPr>
-          <p:cNvSpPr>
-            <a:spLocks xmlns:a="http://schemas.openxmlformats.org/drawingml/2006/main" noGrp="1"/>
-          </p:cNvSpPr>
-          <p:nvPr/>
-        </p:nvSpPr>
-        <p:spPr>
-          <a:xfrm xmlns:a="http://schemas.openxmlformats.org/drawingml/2006/main">
-            <a:off x="7648575" y="4953000"/>
-            <a:ext cx="3543300" cy="209550"/>
-          </a:xfrm>
-          <a:prstGeom xmlns:a="http://schemas.openxmlformats.org/drawingml/2006/main" prst="rect">
-            <a:avLst/>
-          </a:prstGeom>
-          <a:noFill xmlns:a="http://schemas.openxmlformats.org/drawingml/2006/main"/>
-          <a:ln xmlns:a="http://schemas.openxmlformats.org/drawingml/2006/main" w="0">
-            <a:noFill/>
-            <a:prstDash val="solid"/>
-          </a:ln>
-        </p:spPr>
-        <p:txBody>
-          <a:bodyPr xmlns:a="http://schemas.openxmlformats.org/drawingml/2006/main" anchor="ctr"/>
-          <a:lstStyle xmlns:a="http://schemas.openxmlformats.org/drawingml/2006/main"/>
-          <a:p xmlns:a="http://schemas.openxmlformats.org/drawingml/2006/main">
-            <a:pPr algn="l">
-              <a:defRPr sz="1050" b="1">
-                <a:solidFill>
-                  <a:srgbClr val="0F172A"/>
-                </a:solidFill>
-              </a:defRPr>
-            </a:pPr>
-            <a:r>
-              <a:rPr sz="1050" b="1">
-                <a:solidFill>
-                  <a:srgbClr val="0F172A"/>
-                </a:solidFill>
-              </a:rPr>
-              <a:t>Reason</a:t>
-            </a:r>
-          </a:p>
-        </p:txBody>
-      </p:sp>
-      <p:sp>
-        <p:nvSpPr>
-          <p:cNvPr id="33" name="">
-            <a:extLst xmlns:a="http://schemas.openxmlformats.org/drawingml/2006/main">
-              <a:ext uri="{FF2B5EF4-FFF2-40B4-BE49-F238E27FC236}">
-                <a16:creationId xmlns:a16="http://schemas.microsoft.com/office/drawing/2014/main" id="{ABF17381-88CB-45DA-961D-470E12EF03FE}"/>
-              </a:ext>
-            </a:extLst>
-          </p:cNvPr>
-          <p:cNvSpPr>
-            <a:spLocks xmlns:a="http://schemas.openxmlformats.org/drawingml/2006/main" noGrp="1"/>
-          </p:cNvSpPr>
-          <p:nvPr/>
-        </p:nvSpPr>
-        <p:spPr>
-          <a:xfrm xmlns:a="http://schemas.openxmlformats.org/drawingml/2006/main">
-            <a:off x="609600" y="5181600"/>
-            <a:ext cx="10668000" cy="361950"/>
-          </a:xfrm>
-          <a:prstGeom xmlns:a="http://schemas.openxmlformats.org/drawingml/2006/main" prst="rect">
-            <a:avLst/>
-          </a:prstGeom>
-          <a:solidFill xmlns:a="http://schemas.openxmlformats.org/drawingml/2006/main">
-            <a:srgbClr val="FFFFFF"/>
-          </a:solidFill>
-          <a:ln xmlns:a="http://schemas.openxmlformats.org/drawingml/2006/main" w="7620">
-            <a:solidFill>
-              <a:srgbClr val="CBD5E1"/>
-            </a:solidFill>
-            <a:prstDash val="solid"/>
-          </a:ln>
-        </p:spPr>
-      </p:sp>
-      <p:sp>
-        <p:nvSpPr>
-          <p:cNvPr id="34" name="">
-            <a:extLst xmlns:a="http://schemas.openxmlformats.org/drawingml/2006/main">
-              <a:ext uri="{FF2B5EF4-FFF2-40B4-BE49-F238E27FC236}">
-                <a16:creationId xmlns:a16="http://schemas.microsoft.com/office/drawing/2014/main" id="{D3E75873-5A83-40D1-B44B-E350B69E6671}"/>
-              </a:ext>
-            </a:extLst>
-          </p:cNvPr>
-          <p:cNvSpPr>
-            <a:spLocks xmlns:a="http://schemas.openxmlformats.org/drawingml/2006/main" noGrp="1"/>
-          </p:cNvSpPr>
-          <p:nvPr/>
-        </p:nvSpPr>
-        <p:spPr>
-          <a:xfrm xmlns:a="http://schemas.openxmlformats.org/drawingml/2006/main">
-            <a:off x="695325" y="5267325"/>
-            <a:ext cx="2019300" cy="228600"/>
-          </a:xfrm>
-          <a:prstGeom xmlns:a="http://schemas.openxmlformats.org/drawingml/2006/main" prst="rect">
-            <a:avLst/>
-          </a:prstGeom>
-          <a:noFill xmlns:a="http://schemas.openxmlformats.org/drawingml/2006/main"/>
-          <a:ln xmlns:a="http://schemas.openxmlformats.org/drawingml/2006/main" w="0">
-            <a:noFill/>
-            <a:prstDash val="solid"/>
-          </a:ln>
-        </p:spPr>
-        <p:txBody>
-          <a:bodyPr xmlns:a="http://schemas.openxmlformats.org/drawingml/2006/main" anchor="ctr"/>
-          <a:lstStyle xmlns:a="http://schemas.openxmlformats.org/drawingml/2006/main"/>
-          <a:p xmlns:a="http://schemas.openxmlformats.org/drawingml/2006/main">
-            <a:pPr algn="l">
-              <a:defRPr sz="1050" b="1">
-                <a:solidFill>
-                  <a:srgbClr val="2563EB"/>
-                </a:solidFill>
-              </a:defRPr>
-            </a:pPr>
-            <a:r>
-              <a:rPr sz="1050" b="1">
-                <a:solidFill>
-                  <a:srgbClr val="2563EB"/>
-                </a:solidFill>
-              </a:rPr>
-              <a:t>Low end: 10-15%</a:t>
-            </a:r>
-          </a:p>
-        </p:txBody>
-      </p:sp>
-      <p:sp>
-        <p:nvSpPr>
-          <p:cNvPr id="35" name="">
-            <a:extLst xmlns:a="http://schemas.openxmlformats.org/drawingml/2006/main">
-              <a:ext uri="{FF2B5EF4-FFF2-40B4-BE49-F238E27FC236}">
-                <a16:creationId xmlns:a16="http://schemas.microsoft.com/office/drawing/2014/main" id="{98E28E80-1178-4D29-8307-3B099EED6F78}"/>
-              </a:ext>
-            </a:extLst>
-          </p:cNvPr>
-          <p:cNvSpPr>
-            <a:spLocks xmlns:a="http://schemas.openxmlformats.org/drawingml/2006/main" noGrp="1"/>
-          </p:cNvSpPr>
-          <p:nvPr/>
-        </p:nvSpPr>
-        <p:spPr>
-          <a:xfrm xmlns:a="http://schemas.openxmlformats.org/drawingml/2006/main">
-            <a:off x="2886075" y="5267325"/>
-            <a:ext cx="4591050" cy="228600"/>
-          </a:xfrm>
-          <a:prstGeom xmlns:a="http://schemas.openxmlformats.org/drawingml/2006/main" prst="rect">
-            <a:avLst/>
-          </a:prstGeom>
-          <a:noFill xmlns:a="http://schemas.openxmlformats.org/drawingml/2006/main"/>
-          <a:ln xmlns:a="http://schemas.openxmlformats.org/drawingml/2006/main" w="0">
-            <a:noFill/>
-            <a:prstDash val="solid"/>
-          </a:ln>
-        </p:spPr>
-        <p:txBody>
-          <a:bodyPr xmlns:a="http://schemas.openxmlformats.org/drawingml/2006/main" anchor="ctr"/>
-          <a:lstStyle xmlns:a="http://schemas.openxmlformats.org/drawingml/2006/main"/>
-          <a:p xmlns:a="http://schemas.openxmlformats.org/drawingml/2006/main">
-            <a:pPr algn="l">
-              <a:defRPr sz="1050" b="0">
-                <a:solidFill>
-                  <a:srgbClr val="334155"/>
-                </a:solidFill>
-              </a:defRPr>
-            </a:pPr>
-            <a:r>
-              <a:rPr sz="1050" b="0">
-                <a:solidFill>
-                  <a:srgbClr val="334155"/>
-                </a:solidFill>
-              </a:rPr>
-              <a:t>KV is mostly hot, contexts are short, or pressure is light.</a:t>
-            </a:r>
-          </a:p>
-        </p:txBody>
-      </p:sp>
-      <p:sp>
-        <p:nvSpPr>
-          <p:cNvPr id="36" name="">
-            <a:extLst xmlns:a="http://schemas.openxmlformats.org/drawingml/2006/main">
-              <a:ext uri="{FF2B5EF4-FFF2-40B4-BE49-F238E27FC236}">
-                <a16:creationId xmlns:a16="http://schemas.microsoft.com/office/drawing/2014/main" id="{ECBAF44D-5376-4FB1-A561-1C97E755FC10}"/>
-              </a:ext>
-            </a:extLst>
-          </p:cNvPr>
-          <p:cNvSpPr>
-            <a:spLocks xmlns:a="http://schemas.openxmlformats.org/drawingml/2006/main" noGrp="1"/>
-          </p:cNvSpPr>
-          <p:nvPr/>
-        </p:nvSpPr>
-        <p:spPr>
-          <a:xfrm xmlns:a="http://schemas.openxmlformats.org/drawingml/2006/main">
-            <a:off x="7648575" y="5267325"/>
-            <a:ext cx="3543300" cy="228600"/>
-          </a:xfrm>
-          <a:prstGeom xmlns:a="http://schemas.openxmlformats.org/drawingml/2006/main" prst="rect">
-            <a:avLst/>
-          </a:prstGeom>
-          <a:noFill xmlns:a="http://schemas.openxmlformats.org/drawingml/2006/main"/>
-          <a:ln xmlns:a="http://schemas.openxmlformats.org/drawingml/2006/main" w="0">
-            <a:noFill/>
-            <a:prstDash val="solid"/>
-          </a:ln>
-        </p:spPr>
-        <p:txBody>
-          <a:bodyPr xmlns:a="http://schemas.openxmlformats.org/drawingml/2006/main" anchor="ctr"/>
-          <a:lstStyle xmlns:a="http://schemas.openxmlformats.org/drawingml/2006/main"/>
-          <a:p xmlns:a="http://schemas.openxmlformats.org/drawingml/2006/main">
-            <a:pPr algn="l">
-              <a:defRPr sz="1050" b="0">
-                <a:solidFill>
-                  <a:srgbClr val="334155"/>
-                </a:solidFill>
-              </a:defRPr>
-            </a:pPr>
-            <a:r>
-              <a:rPr sz="1050" b="0">
-                <a:solidFill>
-                  <a:srgbClr val="334155"/>
-                </a:solidFill>
-              </a:rPr>
-              <a:t>Hardware mainly removes small replay stalls.</a:t>
-            </a:r>
-          </a:p>
-        </p:txBody>
-      </p:sp>
-      <p:sp>
-        <p:nvSpPr>
-          <p:cNvPr id="37" name="">
-            <a:extLst xmlns:a="http://schemas.openxmlformats.org/drawingml/2006/main">
-              <a:ext uri="{FF2B5EF4-FFF2-40B4-BE49-F238E27FC236}">
-                <a16:creationId xmlns:a16="http://schemas.microsoft.com/office/drawing/2014/main" id="{6BDE23D1-365B-492D-9889-F8706AD0A995}"/>
-              </a:ext>
-            </a:extLst>
-          </p:cNvPr>
-          <p:cNvSpPr>
-            <a:spLocks xmlns:a="http://schemas.openxmlformats.org/drawingml/2006/main" noGrp="1"/>
-          </p:cNvSpPr>
-          <p:nvPr/>
-        </p:nvSpPr>
-        <p:spPr>
-          <a:xfrm xmlns:a="http://schemas.openxmlformats.org/drawingml/2006/main">
-            <a:off x="609600" y="5543550"/>
-            <a:ext cx="10668000" cy="361950"/>
-          </a:xfrm>
-          <a:prstGeom xmlns:a="http://schemas.openxmlformats.org/drawingml/2006/main" prst="rect">
-            <a:avLst/>
-          </a:prstGeom>
-          <a:solidFill xmlns:a="http://schemas.openxmlformats.org/drawingml/2006/main">
-            <a:srgbClr val="F8FAFC"/>
-          </a:solidFill>
-          <a:ln xmlns:a="http://schemas.openxmlformats.org/drawingml/2006/main" w="7620">
-            <a:solidFill>
-              <a:srgbClr val="CBD5E1"/>
-            </a:solidFill>
-            <a:prstDash val="solid"/>
-          </a:ln>
-        </p:spPr>
-      </p:sp>
-      <p:sp>
-        <p:nvSpPr>
-          <p:cNvPr id="38" name="">
-            <a:extLst xmlns:a="http://schemas.openxmlformats.org/drawingml/2006/main">
-              <a:ext uri="{FF2B5EF4-FFF2-40B4-BE49-F238E27FC236}">
-                <a16:creationId xmlns:a16="http://schemas.microsoft.com/office/drawing/2014/main" id="{7BE61C62-835F-4575-83E8-B04EB02CCF05}"/>
-              </a:ext>
-            </a:extLst>
-          </p:cNvPr>
-          <p:cNvSpPr>
-            <a:spLocks xmlns:a="http://schemas.openxmlformats.org/drawingml/2006/main" noGrp="1"/>
-          </p:cNvSpPr>
-          <p:nvPr/>
-        </p:nvSpPr>
-        <p:spPr>
-          <a:xfrm xmlns:a="http://schemas.openxmlformats.org/drawingml/2006/main">
-            <a:off x="695325" y="5629275"/>
-            <a:ext cx="2019300" cy="228600"/>
-          </a:xfrm>
-          <a:prstGeom xmlns:a="http://schemas.openxmlformats.org/drawingml/2006/main" prst="rect">
-            <a:avLst/>
-          </a:prstGeom>
-          <a:noFill xmlns:a="http://schemas.openxmlformats.org/drawingml/2006/main"/>
-          <a:ln xmlns:a="http://schemas.openxmlformats.org/drawingml/2006/main" w="0">
-            <a:noFill/>
-            <a:prstDash val="solid"/>
-          </a:ln>
-        </p:spPr>
-        <p:txBody>
-          <a:bodyPr xmlns:a="http://schemas.openxmlformats.org/drawingml/2006/main" anchor="ctr"/>
-          <a:lstStyle xmlns:a="http://schemas.openxmlformats.org/drawingml/2006/main"/>
-          <a:p xmlns:a="http://schemas.openxmlformats.org/drawingml/2006/main">
-            <a:pPr algn="l">
-              <a:defRPr sz="1050" b="1">
-                <a:solidFill>
-                  <a:srgbClr val="DC2626"/>
-                </a:solidFill>
-              </a:defRPr>
-            </a:pPr>
-            <a:r>
-              <a:rPr sz="1050" b="1">
-                <a:solidFill>
-                  <a:srgbClr val="DC2626"/>
-                </a:solidFill>
-              </a:rPr>
-              <a:t>High end: 25-30%+</a:t>
-            </a:r>
-          </a:p>
-        </p:txBody>
-      </p:sp>
-      <p:sp>
-        <p:nvSpPr>
-          <p:cNvPr id="39" name="">
-            <a:extLst xmlns:a="http://schemas.openxmlformats.org/drawingml/2006/main">
-              <a:ext uri="{FF2B5EF4-FFF2-40B4-BE49-F238E27FC236}">
-                <a16:creationId xmlns:a16="http://schemas.microsoft.com/office/drawing/2014/main" id="{2C6C85F1-3AC8-4547-8C0B-2C9FCCF65336}"/>
-              </a:ext>
-            </a:extLst>
-          </p:cNvPr>
-          <p:cNvSpPr>
-            <a:spLocks xmlns:a="http://schemas.openxmlformats.org/drawingml/2006/main" noGrp="1"/>
-          </p:cNvSpPr>
-          <p:nvPr/>
-        </p:nvSpPr>
-        <p:spPr>
-          <a:xfrm xmlns:a="http://schemas.openxmlformats.org/drawingml/2006/main">
-            <a:off x="2886075" y="5629275"/>
-            <a:ext cx="4591050" cy="228600"/>
-          </a:xfrm>
-          <a:prstGeom xmlns:a="http://schemas.openxmlformats.org/drawingml/2006/main" prst="rect">
-            <a:avLst/>
-          </a:prstGeom>
-          <a:noFill xmlns:a="http://schemas.openxmlformats.org/drawingml/2006/main"/>
-          <a:ln xmlns:a="http://schemas.openxmlformats.org/drawingml/2006/main" w="0">
-            <a:noFill/>
-            <a:prstDash val="solid"/>
-          </a:ln>
-        </p:spPr>
-        <p:txBody>
-          <a:bodyPr xmlns:a="http://schemas.openxmlformats.org/drawingml/2006/main" anchor="ctr"/>
-          <a:lstStyle xmlns:a="http://schemas.openxmlformats.org/drawingml/2006/main"/>
-          <a:p xmlns:a="http://schemas.openxmlformats.org/drawingml/2006/main">
-            <a:pPr algn="l">
-              <a:defRPr sz="1050" b="0">
-                <a:solidFill>
-                  <a:srgbClr val="334155"/>
-                </a:solidFill>
-              </a:defRPr>
-            </a:pPr>
-            <a:r>
-              <a:rPr sz="1050" b="0">
-                <a:solidFill>
-                  <a:srgbClr val="334155"/>
-                </a:solidFill>
-              </a:rPr>
-              <a:t>Long contexts, high pressure, frequent offload/reload, or recompute.</a:t>
-            </a:r>
-          </a:p>
-        </p:txBody>
-      </p:sp>
-      <p:sp>
-        <p:nvSpPr>
-          <p:cNvPr id="40" name="">
-            <a:extLst xmlns:a="http://schemas.openxmlformats.org/drawingml/2006/main">
-              <a:ext uri="{FF2B5EF4-FFF2-40B4-BE49-F238E27FC236}">
-                <a16:creationId xmlns:a16="http://schemas.microsoft.com/office/drawing/2014/main" id="{71048D73-7EBF-4C8B-ACB3-6EF2DB3F1FB8}"/>
-              </a:ext>
-            </a:extLst>
-          </p:cNvPr>
-          <p:cNvSpPr>
-            <a:spLocks xmlns:a="http://schemas.openxmlformats.org/drawingml/2006/main" noGrp="1"/>
-          </p:cNvSpPr>
-          <p:nvPr/>
-        </p:nvSpPr>
-        <p:spPr>
-          <a:xfrm xmlns:a="http://schemas.openxmlformats.org/drawingml/2006/main">
-            <a:off x="7648575" y="5629275"/>
-            <a:ext cx="3543300" cy="228600"/>
-          </a:xfrm>
-          <a:prstGeom xmlns:a="http://schemas.openxmlformats.org/drawingml/2006/main" prst="rect">
-            <a:avLst/>
-          </a:prstGeom>
-          <a:noFill xmlns:a="http://schemas.openxmlformats.org/drawingml/2006/main"/>
-          <a:ln xmlns:a="http://schemas.openxmlformats.org/drawingml/2006/main" w="0">
-            <a:noFill/>
-            <a:prstDash val="solid"/>
-          </a:ln>
-        </p:spPr>
-        <p:txBody>
-          <a:bodyPr xmlns:a="http://schemas.openxmlformats.org/drawingml/2006/main" anchor="ctr"/>
-          <a:lstStyle xmlns:a="http://schemas.openxmlformats.org/drawingml/2006/main"/>
-          <a:p xmlns:a="http://schemas.openxmlformats.org/drawingml/2006/main">
-            <a:pPr algn="l">
-              <a:defRPr sz="1050" b="0">
-                <a:solidFill>
-                  <a:srgbClr val="334155"/>
-                </a:solidFill>
-              </a:defRPr>
-            </a:pPr>
-            <a:r>
-              <a:rPr sz="1050" b="0">
-                <a:solidFill>
-                  <a:srgbClr val="334155"/>
-                </a:solidFill>
-              </a:rPr>
-              <a:t>Hardware avoids the expensive replay path.</a:t>
-            </a:r>
-          </a:p>
-        </p:txBody>
-      </p:sp>
-      <p:sp>
-        <p:nvSpPr>
-          <p:cNvPr id="41" name="">
-            <a:extLst xmlns:a="http://schemas.openxmlformats.org/drawingml/2006/main">
-              <a:ext uri="{FF2B5EF4-FFF2-40B4-BE49-F238E27FC236}">
-                <a16:creationId xmlns:a16="http://schemas.microsoft.com/office/drawing/2014/main" id="{3D16E2E6-695B-427B-A2BA-D569A2270624}"/>
-              </a:ext>
-            </a:extLst>
-          </p:cNvPr>
-          <p:cNvSpPr>
-            <a:spLocks xmlns:a="http://schemas.openxmlformats.org/drawingml/2006/main" noGrp="1"/>
-          </p:cNvSpPr>
-          <p:nvPr/>
-        </p:nvSpPr>
-        <p:spPr>
-          <a:xfrm xmlns:a="http://schemas.openxmlformats.org/drawingml/2006/main">
-            <a:off x="876300" y="6029325"/>
-            <a:ext cx="9906000" cy="285750"/>
-          </a:xfrm>
-          <a:prstGeom xmlns:a="http://schemas.openxmlformats.org/drawingml/2006/main" prst="rect">
-            <a:avLst/>
-          </a:prstGeom>
-          <a:noFill xmlns:a="http://schemas.openxmlformats.org/drawingml/2006/main"/>
-          <a:ln xmlns:a="http://schemas.openxmlformats.org/drawingml/2006/main" w="0">
-            <a:noFill/>
-            <a:prstDash val="solid"/>
-          </a:ln>
-        </p:spPr>
-        <p:txBody>
-          <a:bodyPr xmlns:a="http://schemas.openxmlformats.org/drawingml/2006/main" anchor="t"/>
-          <a:lstStyle xmlns:a="http://schemas.openxmlformats.org/drawingml/2006/main"/>
-          <a:p xmlns:a="http://schemas.openxmlformats.org/drawingml/2006/main">
-            <a:pPr algn="ctr">
-              <a:defRPr sz="1425" b="1">
-                <a:solidFill>
-                  <a:srgbClr val="0F172A"/>
-                </a:solidFill>
-              </a:defRPr>
-            </a:pPr>
-            <a:r>
-              <a:rPr sz="1425" b="1">
-                <a:solidFill>
-                  <a:srgbClr val="0F172A"/>
-                </a:solidFill>
-              </a:rPr>
-              <a:t>Framing: these are conservative research targets; the prototype is meant to turn them into measured numbers.</a:t>
-            </a:r>
-          </a:p>
-        </p:txBody>
-      </p:sp>
-      <p:sp>
-        <p:nvSpPr>
-          <p:cNvPr id="42" name="">
-            <a:extLst xmlns:a="http://schemas.openxmlformats.org/drawingml/2006/main">
-              <a:ext uri="{FF2B5EF4-FFF2-40B4-BE49-F238E27FC236}">
-                <a16:creationId xmlns:a16="http://schemas.microsoft.com/office/drawing/2014/main" id="{83F94061-1833-4185-B3F0-29FA684265A9}"/>
+                <a16:creationId xmlns:a16="http://schemas.microsoft.com/office/drawing/2014/main" id="{4B25D72D-63FE-410C-B487-FD327FA7C694}"/>
               </a:ext>
             </a:extLst>
           </p:cNvPr>
@@ -5553,10 +4532,10 @@
       </p:sp>
       <p:sp>
         <p:nvSpPr>
-          <p:cNvPr id="43" name="">
-            <a:extLst xmlns:a="http://schemas.openxmlformats.org/drawingml/2006/main">
-              <a:ext uri="{FF2B5EF4-FFF2-40B4-BE49-F238E27FC236}">
-                <a16:creationId xmlns:a16="http://schemas.microsoft.com/office/drawing/2014/main" id="{A8B5DDA3-30C9-494B-8E37-79B3106E508F}"/>
+          <p:cNvPr id="21" name="">
+            <a:extLst xmlns:a="http://schemas.openxmlformats.org/drawingml/2006/main">
+              <a:ext uri="{FF2B5EF4-FFF2-40B4-BE49-F238E27FC236}">
+                <a16:creationId xmlns:a16="http://schemas.microsoft.com/office/drawing/2014/main" id="{8973D742-CCA8-4568-BD95-5B776A2C38DE}"/>
               </a:ext>
             </a:extLst>
           </p:cNvPr>
@@ -5604,7 +4583,7 @@
     </p:spTree>
     <p:extLst>
       <p:ext uri="{BB962C8B-B14F-4D97-AF65-F5344CB8AC3E}">
-        <p14:creationId xmlns:p14="http://schemas.microsoft.com/office/powerpoint/2010/main" val="496324710"/>
+        <p14:creationId xmlns:p14="http://schemas.microsoft.com/office/powerpoint/2010/main" val="1347979260"/>
       </p:ext>
     </p:extLst>
   </p:cSld>
@@ -5635,7 +4614,7 @@
           <p:cNvPr id="15" name="">
             <a:extLst xmlns:a="http://schemas.openxmlformats.org/drawingml/2006/main">
               <a:ext uri="{FF2B5EF4-FFF2-40B4-BE49-F238E27FC236}">
-                <a16:creationId xmlns:a16="http://schemas.microsoft.com/office/drawing/2014/main" id="{57FF6920-A6BF-4A4F-A963-9BC9D42DBA0B}"/>
+                <a16:creationId xmlns:a16="http://schemas.microsoft.com/office/drawing/2014/main" id="{754CDFBF-37DE-4685-941A-14325A8001D9}"/>
               </a:ext>
             </a:extLst>
           </p:cNvPr>
@@ -5685,7 +4664,7 @@
           <p:cNvPr id="2" name="">
             <a:extLst xmlns:a="http://schemas.openxmlformats.org/drawingml/2006/main">
               <a:ext uri="{FF2B5EF4-FFF2-40B4-BE49-F238E27FC236}">
-                <a16:creationId xmlns:a16="http://schemas.microsoft.com/office/drawing/2014/main" id="{22C3FB72-7F7D-45CA-8CAA-EB17BB02B42D}"/>
+                <a16:creationId xmlns:a16="http://schemas.microsoft.com/office/drawing/2014/main" id="{88ED46AE-C6C2-4A2E-A3F2-027149212E84}"/>
               </a:ext>
             </a:extLst>
           </p:cNvPr>
@@ -5735,7 +4714,7 @@
           <p:cNvPr id="3" name="">
             <a:extLst xmlns:a="http://schemas.openxmlformats.org/drawingml/2006/main">
               <a:ext uri="{FF2B5EF4-FFF2-40B4-BE49-F238E27FC236}">
-                <a16:creationId xmlns:a16="http://schemas.microsoft.com/office/drawing/2014/main" id="{F29F3426-107A-49BA-8F95-2B2111188A12}"/>
+                <a16:creationId xmlns:a16="http://schemas.microsoft.com/office/drawing/2014/main" id="{9A0A206A-C485-406C-9FDD-813C57BD7355}"/>
               </a:ext>
             </a:extLst>
           </p:cNvPr>
@@ -5785,7 +4764,7 @@
           <p:cNvPr id="4" name="">
             <a:extLst xmlns:a="http://schemas.openxmlformats.org/drawingml/2006/main">
               <a:ext uri="{FF2B5EF4-FFF2-40B4-BE49-F238E27FC236}">
-                <a16:creationId xmlns:a16="http://schemas.microsoft.com/office/drawing/2014/main" id="{B67F276E-06E0-477E-934A-47FC1F0E55B3}"/>
+                <a16:creationId xmlns:a16="http://schemas.microsoft.com/office/drawing/2014/main" id="{C242997F-85E9-4FFE-B216-4C5EC65FF57D}"/>
               </a:ext>
             </a:extLst>
           </p:cNvPr>
@@ -5835,7 +4814,7 @@
           <p:cNvPr id="5" name="">
             <a:extLst xmlns:a="http://schemas.openxmlformats.org/drawingml/2006/main">
               <a:ext uri="{FF2B5EF4-FFF2-40B4-BE49-F238E27FC236}">
-                <a16:creationId xmlns:a16="http://schemas.microsoft.com/office/drawing/2014/main" id="{D14FFE8F-4AFE-4F53-B466-CBBFF05FA262}"/>
+                <a16:creationId xmlns:a16="http://schemas.microsoft.com/office/drawing/2014/main" id="{8D9756C0-B7AA-4133-8552-12ADB803185C}"/>
               </a:ext>
             </a:extLst>
           </p:cNvPr>
@@ -5885,7 +4864,7 @@
           <p:cNvPr id="6" name="">
             <a:extLst xmlns:a="http://schemas.openxmlformats.org/drawingml/2006/main">
               <a:ext uri="{FF2B5EF4-FFF2-40B4-BE49-F238E27FC236}">
-                <a16:creationId xmlns:a16="http://schemas.microsoft.com/office/drawing/2014/main" id="{6B4750E0-9356-4DDE-8CA9-5CA794160CD0}"/>
+                <a16:creationId xmlns:a16="http://schemas.microsoft.com/office/drawing/2014/main" id="{F045540A-E436-4EA3-9D6E-8DEA6F35DB6F}"/>
               </a:ext>
             </a:extLst>
           </p:cNvPr>
@@ -5935,7 +4914,7 @@
           <p:cNvPr id="7" name="">
             <a:extLst xmlns:a="http://schemas.openxmlformats.org/drawingml/2006/main">
               <a:ext uri="{FF2B5EF4-FFF2-40B4-BE49-F238E27FC236}">
-                <a16:creationId xmlns:a16="http://schemas.microsoft.com/office/drawing/2014/main" id="{8A347B0F-D736-4503-A755-E0212033ADAB}"/>
+                <a16:creationId xmlns:a16="http://schemas.microsoft.com/office/drawing/2014/main" id="{A9B5C110-53A2-4824-8D10-A67E44DAE0FC}"/>
               </a:ext>
             </a:extLst>
           </p:cNvPr>
@@ -5985,7 +4964,7 @@
           <p:cNvPr id="8" name="">
             <a:extLst xmlns:a="http://schemas.openxmlformats.org/drawingml/2006/main">
               <a:ext uri="{FF2B5EF4-FFF2-40B4-BE49-F238E27FC236}">
-                <a16:creationId xmlns:a16="http://schemas.microsoft.com/office/drawing/2014/main" id="{38052B10-C9F3-4995-91D9-C5CE375822E6}"/>
+                <a16:creationId xmlns:a16="http://schemas.microsoft.com/office/drawing/2014/main" id="{D3BE5191-7EEC-425E-AEED-50E5B0101147}"/>
               </a:ext>
             </a:extLst>
           </p:cNvPr>
@@ -6035,7 +5014,7 @@
           <p:cNvPr id="9" name="">
             <a:extLst xmlns:a="http://schemas.openxmlformats.org/drawingml/2006/main">
               <a:ext uri="{FF2B5EF4-FFF2-40B4-BE49-F238E27FC236}">
-                <a16:creationId xmlns:a16="http://schemas.microsoft.com/office/drawing/2014/main" id="{CA153E0A-45DA-483C-8DBA-3DB57AC72815}"/>
+                <a16:creationId xmlns:a16="http://schemas.microsoft.com/office/drawing/2014/main" id="{7403CB6C-EDBF-4802-8945-141FAF9FD8BB}"/>
               </a:ext>
             </a:extLst>
           </p:cNvPr>
@@ -6085,7 +5064,7 @@
           <p:cNvPr id="10" name="">
             <a:extLst xmlns:a="http://schemas.openxmlformats.org/drawingml/2006/main">
               <a:ext uri="{FF2B5EF4-FFF2-40B4-BE49-F238E27FC236}">
-                <a16:creationId xmlns:a16="http://schemas.microsoft.com/office/drawing/2014/main" id="{CAB8B715-1E09-44EB-9423-980AF2C0C312}"/>
+                <a16:creationId xmlns:a16="http://schemas.microsoft.com/office/drawing/2014/main" id="{DF68B0F6-33F1-4FD5-B64C-F1CF9B14B8D2}"/>
               </a:ext>
             </a:extLst>
           </p:cNvPr>
@@ -6135,7 +5114,7 @@
           <p:cNvPr id="11" name="">
             <a:extLst xmlns:a="http://schemas.openxmlformats.org/drawingml/2006/main">
               <a:ext uri="{FF2B5EF4-FFF2-40B4-BE49-F238E27FC236}">
-                <a16:creationId xmlns:a16="http://schemas.microsoft.com/office/drawing/2014/main" id="{9A5644F5-9A20-467E-A72B-9016BD4CC8FA}"/>
+                <a16:creationId xmlns:a16="http://schemas.microsoft.com/office/drawing/2014/main" id="{3718519A-617B-42C9-AFC3-755F13A4A955}"/>
               </a:ext>
             </a:extLst>
           </p:cNvPr>
@@ -6166,7 +5145,7 @@
           <p:cNvPr id="12" name="">
             <a:extLst xmlns:a="http://schemas.openxmlformats.org/drawingml/2006/main">
               <a:ext uri="{FF2B5EF4-FFF2-40B4-BE49-F238E27FC236}">
-                <a16:creationId xmlns:a16="http://schemas.microsoft.com/office/drawing/2014/main" id="{6AB716F4-E1D2-433A-B8D1-38767E4E5E34}"/>
+                <a16:creationId xmlns:a16="http://schemas.microsoft.com/office/drawing/2014/main" id="{67F2B537-61E6-4009-8382-92606EF41800}"/>
               </a:ext>
             </a:extLst>
           </p:cNvPr>
@@ -6216,7 +5195,7 @@
           <p:cNvPr id="13" name="">
             <a:extLst xmlns:a="http://schemas.openxmlformats.org/drawingml/2006/main">
               <a:ext uri="{FF2B5EF4-FFF2-40B4-BE49-F238E27FC236}">
-                <a16:creationId xmlns:a16="http://schemas.microsoft.com/office/drawing/2014/main" id="{65472C9F-39F7-42E3-A5CE-645F885A1B37}"/>
+                <a16:creationId xmlns:a16="http://schemas.microsoft.com/office/drawing/2014/main" id="{D728E630-EFDD-4C29-9848-DCF76AC7839D}"/>
               </a:ext>
             </a:extLst>
           </p:cNvPr>
@@ -6266,7 +5245,7 @@
           <p:cNvPr id="14" name="">
             <a:extLst xmlns:a="http://schemas.openxmlformats.org/drawingml/2006/main">
               <a:ext uri="{FF2B5EF4-FFF2-40B4-BE49-F238E27FC236}">
-                <a16:creationId xmlns:a16="http://schemas.microsoft.com/office/drawing/2014/main" id="{9318CD37-BC14-4927-AE5A-6B94EC7F3BFA}"/>
+                <a16:creationId xmlns:a16="http://schemas.microsoft.com/office/drawing/2014/main" id="{2674D2E0-1582-42AF-BFBA-8083A2FAF00D}"/>
               </a:ext>
             </a:extLst>
           </p:cNvPr>
@@ -6314,7 +5293,7 @@
     </p:spTree>
     <p:extLst>
       <p:ext uri="{BB962C8B-B14F-4D97-AF65-F5344CB8AC3E}">
-        <p14:creationId xmlns:p14="http://schemas.microsoft.com/office/powerpoint/2010/main" val="1254036893"/>
+        <p14:creationId xmlns:p14="http://schemas.microsoft.com/office/powerpoint/2010/main" val="907000079"/>
       </p:ext>
     </p:extLst>
   </p:cSld>
@@ -6345,7 +5324,7 @@
           <p:cNvPr id="12" name="">
             <a:extLst xmlns:a="http://schemas.openxmlformats.org/drawingml/2006/main">
               <a:ext uri="{FF2B5EF4-FFF2-40B4-BE49-F238E27FC236}">
-                <a16:creationId xmlns:a16="http://schemas.microsoft.com/office/drawing/2014/main" id="{B8032C68-68D8-4E50-9C99-15ACDF549D4B}"/>
+                <a16:creationId xmlns:a16="http://schemas.microsoft.com/office/drawing/2014/main" id="{F366AEBA-B025-4BA6-A3C0-AD2A00AFEA51}"/>
               </a:ext>
             </a:extLst>
           </p:cNvPr>
@@ -6395,7 +5374,7 @@
           <p:cNvPr id="2" name="">
             <a:extLst xmlns:a="http://schemas.openxmlformats.org/drawingml/2006/main">
               <a:ext uri="{FF2B5EF4-FFF2-40B4-BE49-F238E27FC236}">
-                <a16:creationId xmlns:a16="http://schemas.microsoft.com/office/drawing/2014/main" id="{7D159159-C98C-4037-80B6-758E50588C20}"/>
+                <a16:creationId xmlns:a16="http://schemas.microsoft.com/office/drawing/2014/main" id="{1C02FFB4-E9CC-489E-8400-15C3FF99D7AF}"/>
               </a:ext>
             </a:extLst>
           </p:cNvPr>
@@ -6445,7 +5424,7 @@
           <p:cNvPr id="3" name="">
             <a:extLst xmlns:a="http://schemas.openxmlformats.org/drawingml/2006/main">
               <a:ext uri="{FF2B5EF4-FFF2-40B4-BE49-F238E27FC236}">
-                <a16:creationId xmlns:a16="http://schemas.microsoft.com/office/drawing/2014/main" id="{F5AC69A0-D315-4264-A736-A12809F64593}"/>
+                <a16:creationId xmlns:a16="http://schemas.microsoft.com/office/drawing/2014/main" id="{B800EDAA-52C7-465D-8796-098C1F63E466}"/>
               </a:ext>
             </a:extLst>
           </p:cNvPr>
@@ -6495,7 +5474,7 @@
           <p:cNvPr id="4" name="">
             <a:extLst xmlns:a="http://schemas.openxmlformats.org/drawingml/2006/main">
               <a:ext uri="{FF2B5EF4-FFF2-40B4-BE49-F238E27FC236}">
-                <a16:creationId xmlns:a16="http://schemas.microsoft.com/office/drawing/2014/main" id="{FF16EFAB-93F6-4E59-BA78-7FDD2F720A99}"/>
+                <a16:creationId xmlns:a16="http://schemas.microsoft.com/office/drawing/2014/main" id="{A082A6C2-0157-4520-AFA4-F6A7E4718D8C}"/>
               </a:ext>
             </a:extLst>
           </p:cNvPr>
@@ -6545,7 +5524,7 @@
           <p:cNvPr id="5" name="">
             <a:extLst xmlns:a="http://schemas.openxmlformats.org/drawingml/2006/main">
               <a:ext uri="{FF2B5EF4-FFF2-40B4-BE49-F238E27FC236}">
-                <a16:creationId xmlns:a16="http://schemas.microsoft.com/office/drawing/2014/main" id="{29EA0E5D-ECA5-4093-9736-0CE354546050}"/>
+                <a16:creationId xmlns:a16="http://schemas.microsoft.com/office/drawing/2014/main" id="{B2AED248-E203-4F84-A524-BA17FF42E15A}"/>
               </a:ext>
             </a:extLst>
           </p:cNvPr>
@@ -6595,7 +5574,7 @@
           <p:cNvPr id="6" name="">
             <a:extLst xmlns:a="http://schemas.openxmlformats.org/drawingml/2006/main">
               <a:ext uri="{FF2B5EF4-FFF2-40B4-BE49-F238E27FC236}">
-                <a16:creationId xmlns:a16="http://schemas.microsoft.com/office/drawing/2014/main" id="{1C52FF47-2DCF-4F70-B466-7DD95BE1A772}"/>
+                <a16:creationId xmlns:a16="http://schemas.microsoft.com/office/drawing/2014/main" id="{8AEA97EA-D02A-4607-BA23-E70F0BA3484D}"/>
               </a:ext>
             </a:extLst>
           </p:cNvPr>
@@ -6645,7 +5624,7 @@
           <p:cNvPr id="7" name="">
             <a:extLst xmlns:a="http://schemas.openxmlformats.org/drawingml/2006/main">
               <a:ext uri="{FF2B5EF4-FFF2-40B4-BE49-F238E27FC236}">
-                <a16:creationId xmlns:a16="http://schemas.microsoft.com/office/drawing/2014/main" id="{E7523849-E8A3-47D8-A752-ABBD87847193}"/>
+                <a16:creationId xmlns:a16="http://schemas.microsoft.com/office/drawing/2014/main" id="{A498B437-4B4A-4F1D-85DA-CFF98080719F}"/>
               </a:ext>
             </a:extLst>
           </p:cNvPr>
@@ -6695,7 +5674,7 @@
           <p:cNvPr id="8" name="">
             <a:extLst xmlns:a="http://schemas.openxmlformats.org/drawingml/2006/main">
               <a:ext uri="{FF2B5EF4-FFF2-40B4-BE49-F238E27FC236}">
-                <a16:creationId xmlns:a16="http://schemas.microsoft.com/office/drawing/2014/main" id="{9719DDCB-3290-4CB9-88FC-470C3CEF3EED}"/>
+                <a16:creationId xmlns:a16="http://schemas.microsoft.com/office/drawing/2014/main" id="{29D5D00D-7E4C-4E77-A85F-BE570151DAD2}"/>
               </a:ext>
             </a:extLst>
           </p:cNvPr>
@@ -6745,7 +5724,7 @@
           <p:cNvPr id="9" name="">
             <a:extLst xmlns:a="http://schemas.openxmlformats.org/drawingml/2006/main">
               <a:ext uri="{FF2B5EF4-FFF2-40B4-BE49-F238E27FC236}">
-                <a16:creationId xmlns:a16="http://schemas.microsoft.com/office/drawing/2014/main" id="{6AAAF10B-62CF-450C-B501-27E3C23856C0}"/>
+                <a16:creationId xmlns:a16="http://schemas.microsoft.com/office/drawing/2014/main" id="{1A54D267-D753-4738-8EF1-4C8D87E2A077}"/>
               </a:ext>
             </a:extLst>
           </p:cNvPr>
@@ -6795,7 +5774,7 @@
           <p:cNvPr id="10" name="">
             <a:extLst xmlns:a="http://schemas.openxmlformats.org/drawingml/2006/main">
               <a:ext uri="{FF2B5EF4-FFF2-40B4-BE49-F238E27FC236}">
-                <a16:creationId xmlns:a16="http://schemas.microsoft.com/office/drawing/2014/main" id="{241BE25E-8A1B-4E3C-9E66-9831F905403D}"/>
+                <a16:creationId xmlns:a16="http://schemas.microsoft.com/office/drawing/2014/main" id="{9B69446A-ECB9-40FB-A18F-D766A8AFFCB3}"/>
               </a:ext>
             </a:extLst>
           </p:cNvPr>
@@ -6845,7 +5824,7 @@
           <p:cNvPr id="11" name="">
             <a:extLst xmlns:a="http://schemas.openxmlformats.org/drawingml/2006/main">
               <a:ext uri="{FF2B5EF4-FFF2-40B4-BE49-F238E27FC236}">
-                <a16:creationId xmlns:a16="http://schemas.microsoft.com/office/drawing/2014/main" id="{0654C8BF-1FB4-45F6-BF0C-5B83AD32AC81}"/>
+                <a16:creationId xmlns:a16="http://schemas.microsoft.com/office/drawing/2014/main" id="{E8C47FE8-C06C-40D1-BDD5-4A1C720723C5}"/>
               </a:ext>
             </a:extLst>
           </p:cNvPr>
@@ -6893,7 +5872,7 @@
     </p:spTree>
     <p:extLst>
       <p:ext uri="{BB962C8B-B14F-4D97-AF65-F5344CB8AC3E}">
-        <p14:creationId xmlns:p14="http://schemas.microsoft.com/office/powerpoint/2010/main" val="1258909754"/>
+        <p14:creationId xmlns:p14="http://schemas.microsoft.com/office/powerpoint/2010/main" val="1632150991"/>
       </p:ext>
     </p:extLst>
   </p:cSld>
@@ -6924,7 +5903,7 @@
           <p:cNvPr id="22" name="">
             <a:extLst xmlns:a="http://schemas.openxmlformats.org/drawingml/2006/main">
               <a:ext uri="{FF2B5EF4-FFF2-40B4-BE49-F238E27FC236}">
-                <a16:creationId xmlns:a16="http://schemas.microsoft.com/office/drawing/2014/main" id="{58C8B68F-261E-48B8-B1C2-257B1A54212B}"/>
+                <a16:creationId xmlns:a16="http://schemas.microsoft.com/office/drawing/2014/main" id="{CF627859-AB02-4C7D-8A06-48E8BA78DF11}"/>
               </a:ext>
             </a:extLst>
           </p:cNvPr>
@@ -6974,7 +5953,7 @@
           <p:cNvPr id="2" name="">
             <a:extLst xmlns:a="http://schemas.openxmlformats.org/drawingml/2006/main">
               <a:ext uri="{FF2B5EF4-FFF2-40B4-BE49-F238E27FC236}">
-                <a16:creationId xmlns:a16="http://schemas.microsoft.com/office/drawing/2014/main" id="{D4595595-CA61-49A5-813A-99BE2BB12F96}"/>
+                <a16:creationId xmlns:a16="http://schemas.microsoft.com/office/drawing/2014/main" id="{6B42BE96-28C6-4609-B997-9E0CB5225432}"/>
               </a:ext>
             </a:extLst>
           </p:cNvPr>
@@ -7024,7 +6003,7 @@
           <p:cNvPr id="3" name="">
             <a:extLst xmlns:a="http://schemas.openxmlformats.org/drawingml/2006/main">
               <a:ext uri="{FF2B5EF4-FFF2-40B4-BE49-F238E27FC236}">
-                <a16:creationId xmlns:a16="http://schemas.microsoft.com/office/drawing/2014/main" id="{CACF41CA-D2AD-472C-AB46-1A499C7C17A2}"/>
+                <a16:creationId xmlns:a16="http://schemas.microsoft.com/office/drawing/2014/main" id="{4DCC4CE1-7DCF-4913-B82C-BA66EFF48997}"/>
               </a:ext>
             </a:extLst>
           </p:cNvPr>
@@ -7059,7 +6038,7 @@
           <p:cNvPr id="4" name="">
             <a:extLst xmlns:a="http://schemas.openxmlformats.org/drawingml/2006/main">
               <a:ext uri="{FF2B5EF4-FFF2-40B4-BE49-F238E27FC236}">
-                <a16:creationId xmlns:a16="http://schemas.microsoft.com/office/drawing/2014/main" id="{1E61DC6F-666F-42DB-99DB-280732054B98}"/>
+                <a16:creationId xmlns:a16="http://schemas.microsoft.com/office/drawing/2014/main" id="{D07B01CA-847D-44E9-A191-53B80012434D}"/>
               </a:ext>
             </a:extLst>
           </p:cNvPr>
@@ -7126,7 +6105,7 @@
           <p:cNvPr id="5" name="">
             <a:extLst xmlns:a="http://schemas.openxmlformats.org/drawingml/2006/main">
               <a:ext uri="{FF2B5EF4-FFF2-40B4-BE49-F238E27FC236}">
-                <a16:creationId xmlns:a16="http://schemas.microsoft.com/office/drawing/2014/main" id="{D76F8753-24D0-4CA2-AA06-EBDCB4D652BE}"/>
+                <a16:creationId xmlns:a16="http://schemas.microsoft.com/office/drawing/2014/main" id="{0B2305FF-C99E-4244-8FFE-0971A775A042}"/>
               </a:ext>
             </a:extLst>
           </p:cNvPr>
@@ -7176,7 +6155,7 @@
           <p:cNvPr id="6" name="">
             <a:extLst xmlns:a="http://schemas.openxmlformats.org/drawingml/2006/main">
               <a:ext uri="{FF2B5EF4-FFF2-40B4-BE49-F238E27FC236}">
-                <a16:creationId xmlns:a16="http://schemas.microsoft.com/office/drawing/2014/main" id="{88ED699D-3AF6-4906-82E5-5140B21FE4AA}"/>
+                <a16:creationId xmlns:a16="http://schemas.microsoft.com/office/drawing/2014/main" id="{F51AB654-A528-4F5A-9950-6E2940A608DB}"/>
               </a:ext>
             </a:extLst>
           </p:cNvPr>
@@ -7211,7 +6190,7 @@
           <p:cNvPr id="7" name="">
             <a:extLst xmlns:a="http://schemas.openxmlformats.org/drawingml/2006/main">
               <a:ext uri="{FF2B5EF4-FFF2-40B4-BE49-F238E27FC236}">
-                <a16:creationId xmlns:a16="http://schemas.microsoft.com/office/drawing/2014/main" id="{4A4D3AD1-3A7F-4797-9F46-1EB04CB4BE6E}"/>
+                <a16:creationId xmlns:a16="http://schemas.microsoft.com/office/drawing/2014/main" id="{98782638-8633-49D7-9F9E-6CAC908380A1}"/>
               </a:ext>
             </a:extLst>
           </p:cNvPr>
@@ -7278,7 +6257,7 @@
           <p:cNvPr id="8" name="">
             <a:extLst xmlns:a="http://schemas.openxmlformats.org/drawingml/2006/main">
               <a:ext uri="{FF2B5EF4-FFF2-40B4-BE49-F238E27FC236}">
-                <a16:creationId xmlns:a16="http://schemas.microsoft.com/office/drawing/2014/main" id="{FAD6A26B-2D54-4ED4-8AA1-2AA078C8F0AA}"/>
+                <a16:creationId xmlns:a16="http://schemas.microsoft.com/office/drawing/2014/main" id="{0F152DED-FE32-49C2-A6D8-3F104BFE08FD}"/>
               </a:ext>
             </a:extLst>
           </p:cNvPr>
@@ -7328,7 +6307,7 @@
           <p:cNvPr id="9" name="">
             <a:extLst xmlns:a="http://schemas.openxmlformats.org/drawingml/2006/main">
               <a:ext uri="{FF2B5EF4-FFF2-40B4-BE49-F238E27FC236}">
-                <a16:creationId xmlns:a16="http://schemas.microsoft.com/office/drawing/2014/main" id="{CB38301F-CF08-4907-9249-3FD3048C3270}"/>
+                <a16:creationId xmlns:a16="http://schemas.microsoft.com/office/drawing/2014/main" id="{9ACC85D3-694C-489F-B442-19DBD80494D0}"/>
               </a:ext>
             </a:extLst>
           </p:cNvPr>
@@ -7363,7 +6342,7 @@
           <p:cNvPr id="10" name="">
             <a:extLst xmlns:a="http://schemas.openxmlformats.org/drawingml/2006/main">
               <a:ext uri="{FF2B5EF4-FFF2-40B4-BE49-F238E27FC236}">
-                <a16:creationId xmlns:a16="http://schemas.microsoft.com/office/drawing/2014/main" id="{0B183D6D-AE2F-4961-B1E2-0BCBF2C63E94}"/>
+                <a16:creationId xmlns:a16="http://schemas.microsoft.com/office/drawing/2014/main" id="{A9FEAF2A-CFBB-4AA4-9BFE-23191E9717D4}"/>
               </a:ext>
             </a:extLst>
           </p:cNvPr>
@@ -7430,7 +6409,7 @@
           <p:cNvPr id="11" name="">
             <a:extLst xmlns:a="http://schemas.openxmlformats.org/drawingml/2006/main">
               <a:ext uri="{FF2B5EF4-FFF2-40B4-BE49-F238E27FC236}">
-                <a16:creationId xmlns:a16="http://schemas.microsoft.com/office/drawing/2014/main" id="{6AEA85BB-478D-4ECC-88CE-653DC4F40D8C}"/>
+                <a16:creationId xmlns:a16="http://schemas.microsoft.com/office/drawing/2014/main" id="{0A11457D-1C9A-4B5F-96EB-1F4FB101D392}"/>
               </a:ext>
             </a:extLst>
           </p:cNvPr>
@@ -7480,7 +6459,7 @@
           <p:cNvPr id="12" name="">
             <a:extLst xmlns:a="http://schemas.openxmlformats.org/drawingml/2006/main">
               <a:ext uri="{FF2B5EF4-FFF2-40B4-BE49-F238E27FC236}">
-                <a16:creationId xmlns:a16="http://schemas.microsoft.com/office/drawing/2014/main" id="{268FFA50-31C1-40A3-8C92-0B995F5CE0CE}"/>
+                <a16:creationId xmlns:a16="http://schemas.microsoft.com/office/drawing/2014/main" id="{45123D2E-16F3-46CB-89A8-9BEF07410FF1}"/>
               </a:ext>
             </a:extLst>
           </p:cNvPr>
@@ -7515,7 +6494,7 @@
           <p:cNvPr id="13" name="">
             <a:extLst xmlns:a="http://schemas.openxmlformats.org/drawingml/2006/main">
               <a:ext uri="{FF2B5EF4-FFF2-40B4-BE49-F238E27FC236}">
-                <a16:creationId xmlns:a16="http://schemas.microsoft.com/office/drawing/2014/main" id="{AF86E3E3-11C7-41E1-A9FF-00C2AD55BAFF}"/>
+                <a16:creationId xmlns:a16="http://schemas.microsoft.com/office/drawing/2014/main" id="{138EC3F0-85B9-439D-9B72-0C8FEA314104}"/>
               </a:ext>
             </a:extLst>
           </p:cNvPr>
@@ -7582,7 +6561,7 @@
           <p:cNvPr id="14" name="">
             <a:extLst xmlns:a="http://schemas.openxmlformats.org/drawingml/2006/main">
               <a:ext uri="{FF2B5EF4-FFF2-40B4-BE49-F238E27FC236}">
-                <a16:creationId xmlns:a16="http://schemas.microsoft.com/office/drawing/2014/main" id="{D0BA1036-B8C6-4767-B710-F1BBB980F267}"/>
+                <a16:creationId xmlns:a16="http://schemas.microsoft.com/office/drawing/2014/main" id="{6B294024-E17D-48BE-A71C-850663A7A560}"/>
               </a:ext>
             </a:extLst>
           </p:cNvPr>
@@ -7632,7 +6611,7 @@
           <p:cNvPr id="15" name="">
             <a:extLst xmlns:a="http://schemas.openxmlformats.org/drawingml/2006/main">
               <a:ext uri="{FF2B5EF4-FFF2-40B4-BE49-F238E27FC236}">
-                <a16:creationId xmlns:a16="http://schemas.microsoft.com/office/drawing/2014/main" id="{4ACC93DD-B8DF-4914-B627-F3D4D0CD4FFA}"/>
+                <a16:creationId xmlns:a16="http://schemas.microsoft.com/office/drawing/2014/main" id="{7BCE3C3B-4971-4BB7-BD21-53CDF3FD3E81}"/>
               </a:ext>
             </a:extLst>
           </p:cNvPr>
@@ -7682,7 +6661,7 @@
           <p:cNvPr id="16" name="">
             <a:extLst xmlns:a="http://schemas.openxmlformats.org/drawingml/2006/main">
               <a:ext uri="{FF2B5EF4-FFF2-40B4-BE49-F238E27FC236}">
-                <a16:creationId xmlns:a16="http://schemas.microsoft.com/office/drawing/2014/main" id="{3B9EDF85-5D83-424A-960F-B2D793EF8EA4}"/>
+                <a16:creationId xmlns:a16="http://schemas.microsoft.com/office/drawing/2014/main" id="{CC82C95E-4814-46D0-BB6F-06DFA2BCB605}"/>
               </a:ext>
             </a:extLst>
           </p:cNvPr>
@@ -7732,7 +6711,7 @@
           <p:cNvPr id="17" name="">
             <a:extLst xmlns:a="http://schemas.openxmlformats.org/drawingml/2006/main">
               <a:ext uri="{FF2B5EF4-FFF2-40B4-BE49-F238E27FC236}">
-                <a16:creationId xmlns:a16="http://schemas.microsoft.com/office/drawing/2014/main" id="{C59F22D1-9137-43DC-9200-1AE4145E96D7}"/>
+                <a16:creationId xmlns:a16="http://schemas.microsoft.com/office/drawing/2014/main" id="{E2F65A74-33BA-471C-A26C-D12F415FA817}"/>
               </a:ext>
             </a:extLst>
           </p:cNvPr>
@@ -7782,7 +6761,7 @@
           <p:cNvPr id="18" name="">
             <a:extLst xmlns:a="http://schemas.openxmlformats.org/drawingml/2006/main">
               <a:ext uri="{FF2B5EF4-FFF2-40B4-BE49-F238E27FC236}">
-                <a16:creationId xmlns:a16="http://schemas.microsoft.com/office/drawing/2014/main" id="{433AADAD-D5F9-4EA1-8B39-8B1F7C47E2BA}"/>
+                <a16:creationId xmlns:a16="http://schemas.microsoft.com/office/drawing/2014/main" id="{4A68D147-703E-4637-AC5F-C9C0656F5DE3}"/>
               </a:ext>
             </a:extLst>
           </p:cNvPr>
@@ -7832,7 +6811,7 @@
           <p:cNvPr id="19" name="">
             <a:extLst xmlns:a="http://schemas.openxmlformats.org/drawingml/2006/main">
               <a:ext uri="{FF2B5EF4-FFF2-40B4-BE49-F238E27FC236}">
-                <a16:creationId xmlns:a16="http://schemas.microsoft.com/office/drawing/2014/main" id="{3B93C9A2-D2F6-4CB3-8FC4-6904602EA6BA}"/>
+                <a16:creationId xmlns:a16="http://schemas.microsoft.com/office/drawing/2014/main" id="{E74A9A7A-F300-4F31-97EB-257E8CFC3F03}"/>
               </a:ext>
             </a:extLst>
           </p:cNvPr>
@@ -7882,7 +6861,7 @@
           <p:cNvPr id="20" name="">
             <a:extLst xmlns:a="http://schemas.openxmlformats.org/drawingml/2006/main">
               <a:ext uri="{FF2B5EF4-FFF2-40B4-BE49-F238E27FC236}">
-                <a16:creationId xmlns:a16="http://schemas.microsoft.com/office/drawing/2014/main" id="{6872D377-1DB9-4B96-BAA5-7B07590C6AF7}"/>
+                <a16:creationId xmlns:a16="http://schemas.microsoft.com/office/drawing/2014/main" id="{931EF4F4-01E2-4DAF-AB06-4C753BF5C5D8}"/>
               </a:ext>
             </a:extLst>
           </p:cNvPr>
@@ -7932,7 +6911,7 @@
           <p:cNvPr id="21" name="">
             <a:extLst xmlns:a="http://schemas.openxmlformats.org/drawingml/2006/main">
               <a:ext uri="{FF2B5EF4-FFF2-40B4-BE49-F238E27FC236}">
-                <a16:creationId xmlns:a16="http://schemas.microsoft.com/office/drawing/2014/main" id="{45F6FF87-08F6-4483-B464-35BC1D98FBA7}"/>
+                <a16:creationId xmlns:a16="http://schemas.microsoft.com/office/drawing/2014/main" id="{F85F8079-4B4D-40CA-93B3-5733C0B9FA1E}"/>
               </a:ext>
             </a:extLst>
           </p:cNvPr>
@@ -7980,7 +6959,7 @@
     </p:spTree>
     <p:extLst>
       <p:ext uri="{BB962C8B-B14F-4D97-AF65-F5344CB8AC3E}">
-        <p14:creationId xmlns:p14="http://schemas.microsoft.com/office/powerpoint/2010/main" val="337880034"/>
+        <p14:creationId xmlns:p14="http://schemas.microsoft.com/office/powerpoint/2010/main" val="1302581043"/>
       </p:ext>
     </p:extLst>
   </p:cSld>
@@ -8011,7 +6990,7 @@
           <p:cNvPr id="15" name="">
             <a:extLst xmlns:a="http://schemas.openxmlformats.org/drawingml/2006/main">
               <a:ext uri="{FF2B5EF4-FFF2-40B4-BE49-F238E27FC236}">
-                <a16:creationId xmlns:a16="http://schemas.microsoft.com/office/drawing/2014/main" id="{09A504ED-D1F0-4BCF-AAD4-3E2433BAEC4D}"/>
+                <a16:creationId xmlns:a16="http://schemas.microsoft.com/office/drawing/2014/main" id="{79602FB3-19F6-4E32-B98E-A1D9E0BA98A7}"/>
               </a:ext>
             </a:extLst>
           </p:cNvPr>
@@ -8061,7 +7040,7 @@
           <p:cNvPr id="2" name="">
             <a:extLst xmlns:a="http://schemas.openxmlformats.org/drawingml/2006/main">
               <a:ext uri="{FF2B5EF4-FFF2-40B4-BE49-F238E27FC236}">
-                <a16:creationId xmlns:a16="http://schemas.microsoft.com/office/drawing/2014/main" id="{68B2278D-3BC7-4413-B38F-F10586ED9345}"/>
+                <a16:creationId xmlns:a16="http://schemas.microsoft.com/office/drawing/2014/main" id="{D7556F94-9E43-4C0F-9C5A-5D6B37C6DFB7}"/>
               </a:ext>
             </a:extLst>
           </p:cNvPr>
@@ -8111,7 +7090,7 @@
           <p:cNvPr id="3" name="">
             <a:extLst xmlns:a="http://schemas.openxmlformats.org/drawingml/2006/main">
               <a:ext uri="{FF2B5EF4-FFF2-40B4-BE49-F238E27FC236}">
-                <a16:creationId xmlns:a16="http://schemas.microsoft.com/office/drawing/2014/main" id="{0785AB17-1DF2-4113-90B6-C9E7F1307098}"/>
+                <a16:creationId xmlns:a16="http://schemas.microsoft.com/office/drawing/2014/main" id="{09BDFCE1-A0DE-4214-99F7-B73FC2AAFE31}"/>
               </a:ext>
             </a:extLst>
           </p:cNvPr>
@@ -8161,7 +7140,7 @@
           <p:cNvPr id="4" name="">
             <a:extLst xmlns:a="http://schemas.openxmlformats.org/drawingml/2006/main">
               <a:ext uri="{FF2B5EF4-FFF2-40B4-BE49-F238E27FC236}">
-                <a16:creationId xmlns:a16="http://schemas.microsoft.com/office/drawing/2014/main" id="{E432BAD8-991A-44ED-9DA3-2457524271A3}"/>
+                <a16:creationId xmlns:a16="http://schemas.microsoft.com/office/drawing/2014/main" id="{19F8B51E-1714-42B6-9EBB-7DDF11681CAC}"/>
               </a:ext>
             </a:extLst>
           </p:cNvPr>
@@ -8211,7 +7190,7 @@
           <p:cNvPr id="5" name="">
             <a:extLst xmlns:a="http://schemas.openxmlformats.org/drawingml/2006/main">
               <a:ext uri="{FF2B5EF4-FFF2-40B4-BE49-F238E27FC236}">
-                <a16:creationId xmlns:a16="http://schemas.microsoft.com/office/drawing/2014/main" id="{A9BFD9E2-0872-4DFA-ADDF-E50B1B7A7EAE}"/>
+                <a16:creationId xmlns:a16="http://schemas.microsoft.com/office/drawing/2014/main" id="{DFBE21A4-6EDD-40E9-80F6-C3E24D50F9D8}"/>
               </a:ext>
             </a:extLst>
           </p:cNvPr>
@@ -8261,7 +7240,7 @@
           <p:cNvPr id="6" name="">
             <a:extLst xmlns:a="http://schemas.openxmlformats.org/drawingml/2006/main">
               <a:ext uri="{FF2B5EF4-FFF2-40B4-BE49-F238E27FC236}">
-                <a16:creationId xmlns:a16="http://schemas.microsoft.com/office/drawing/2014/main" id="{459E9D6B-371A-4ACF-9A21-4E0323D4F274}"/>
+                <a16:creationId xmlns:a16="http://schemas.microsoft.com/office/drawing/2014/main" id="{5B269D25-3E5D-4D04-AF67-1460883832E0}"/>
               </a:ext>
             </a:extLst>
           </p:cNvPr>
@@ -8311,7 +7290,7 @@
           <p:cNvPr id="7" name="">
             <a:extLst xmlns:a="http://schemas.openxmlformats.org/drawingml/2006/main">
               <a:ext uri="{FF2B5EF4-FFF2-40B4-BE49-F238E27FC236}">
-                <a16:creationId xmlns:a16="http://schemas.microsoft.com/office/drawing/2014/main" id="{82D8BDE3-CC5B-410A-88B7-403020489D38}"/>
+                <a16:creationId xmlns:a16="http://schemas.microsoft.com/office/drawing/2014/main" id="{528310A9-45D1-4AD1-A3B5-92FB1F5ECA01}"/>
               </a:ext>
             </a:extLst>
           </p:cNvPr>
@@ -8361,7 +7340,7 @@
           <p:cNvPr id="8" name="">
             <a:extLst xmlns:a="http://schemas.openxmlformats.org/drawingml/2006/main">
               <a:ext uri="{FF2B5EF4-FFF2-40B4-BE49-F238E27FC236}">
-                <a16:creationId xmlns:a16="http://schemas.microsoft.com/office/drawing/2014/main" id="{F166C464-1515-4A80-9E7E-5203316C4B94}"/>
+                <a16:creationId xmlns:a16="http://schemas.microsoft.com/office/drawing/2014/main" id="{AE85884D-6F56-426C-8EE9-798EA0CD5293}"/>
               </a:ext>
             </a:extLst>
           </p:cNvPr>
@@ -8411,7 +7390,7 @@
           <p:cNvPr id="9" name="">
             <a:extLst xmlns:a="http://schemas.openxmlformats.org/drawingml/2006/main">
               <a:ext uri="{FF2B5EF4-FFF2-40B4-BE49-F238E27FC236}">
-                <a16:creationId xmlns:a16="http://schemas.microsoft.com/office/drawing/2014/main" id="{6DE31DEF-8F63-49CB-8455-C14319ACE546}"/>
+                <a16:creationId xmlns:a16="http://schemas.microsoft.com/office/drawing/2014/main" id="{403A50A0-6F3A-451C-A412-18896299D078}"/>
               </a:ext>
             </a:extLst>
           </p:cNvPr>
@@ -8461,7 +7440,7 @@
           <p:cNvPr id="10" name="">
             <a:extLst xmlns:a="http://schemas.openxmlformats.org/drawingml/2006/main">
               <a:ext uri="{FF2B5EF4-FFF2-40B4-BE49-F238E27FC236}">
-                <a16:creationId xmlns:a16="http://schemas.microsoft.com/office/drawing/2014/main" id="{C4677FBF-2706-4758-83AB-7306E4790457}"/>
+                <a16:creationId xmlns:a16="http://schemas.microsoft.com/office/drawing/2014/main" id="{2DFDE137-9658-4239-913D-3C1B62B790AF}"/>
               </a:ext>
             </a:extLst>
           </p:cNvPr>
@@ -8511,7 +7490,7 @@
           <p:cNvPr id="11" name="">
             <a:extLst xmlns:a="http://schemas.openxmlformats.org/drawingml/2006/main">
               <a:ext uri="{FF2B5EF4-FFF2-40B4-BE49-F238E27FC236}">
-                <a16:creationId xmlns:a16="http://schemas.microsoft.com/office/drawing/2014/main" id="{2354027A-D097-4DA0-BDDF-23100CD5061A}"/>
+                <a16:creationId xmlns:a16="http://schemas.microsoft.com/office/drawing/2014/main" id="{2AF7C44A-E089-4380-B706-A2191DDA7CC4}"/>
               </a:ext>
             </a:extLst>
           </p:cNvPr>
@@ -8542,7 +7521,7 @@
           <p:cNvPr id="12" name="">
             <a:extLst xmlns:a="http://schemas.openxmlformats.org/drawingml/2006/main">
               <a:ext uri="{FF2B5EF4-FFF2-40B4-BE49-F238E27FC236}">
-                <a16:creationId xmlns:a16="http://schemas.microsoft.com/office/drawing/2014/main" id="{96B9E938-6151-4C16-993D-80075D6C130C}"/>
+                <a16:creationId xmlns:a16="http://schemas.microsoft.com/office/drawing/2014/main" id="{5F1369A4-A693-406E-8690-616C886FEA22}"/>
               </a:ext>
             </a:extLst>
           </p:cNvPr>
@@ -8592,7 +7571,7 @@
           <p:cNvPr id="13" name="">
             <a:extLst xmlns:a="http://schemas.openxmlformats.org/drawingml/2006/main">
               <a:ext uri="{FF2B5EF4-FFF2-40B4-BE49-F238E27FC236}">
-                <a16:creationId xmlns:a16="http://schemas.microsoft.com/office/drawing/2014/main" id="{C4E9F532-5FC9-483D-A0A8-0A691F375FB1}"/>
+                <a16:creationId xmlns:a16="http://schemas.microsoft.com/office/drawing/2014/main" id="{54FF001E-154C-4FDC-9A26-58272C0F4785}"/>
               </a:ext>
             </a:extLst>
           </p:cNvPr>
@@ -8642,7 +7621,7 @@
           <p:cNvPr id="14" name="">
             <a:extLst xmlns:a="http://schemas.openxmlformats.org/drawingml/2006/main">
               <a:ext uri="{FF2B5EF4-FFF2-40B4-BE49-F238E27FC236}">
-                <a16:creationId xmlns:a16="http://schemas.microsoft.com/office/drawing/2014/main" id="{A9C268DE-EF80-462C-A3B1-9ADF1D5B714E}"/>
+                <a16:creationId xmlns:a16="http://schemas.microsoft.com/office/drawing/2014/main" id="{632D79FC-1D1C-4608-A194-D6DFDBF2DD8E}"/>
               </a:ext>
             </a:extLst>
           </p:cNvPr>
@@ -8690,7 +7669,7 @@
     </p:spTree>
     <p:extLst>
       <p:ext uri="{BB962C8B-B14F-4D97-AF65-F5344CB8AC3E}">
-        <p14:creationId xmlns:p14="http://schemas.microsoft.com/office/powerpoint/2010/main" val="843098074"/>
+        <p14:creationId xmlns:p14="http://schemas.microsoft.com/office/powerpoint/2010/main" val="2079089837"/>
       </p:ext>
     </p:extLst>
   </p:cSld>
@@ -8721,7 +7700,7 @@
           <p:cNvPr id="7" name="">
             <a:extLst xmlns:a="http://schemas.openxmlformats.org/drawingml/2006/main">
               <a:ext uri="{FF2B5EF4-FFF2-40B4-BE49-F238E27FC236}">
-                <a16:creationId xmlns:a16="http://schemas.microsoft.com/office/drawing/2014/main" id="{F6EB642C-5B29-40CF-91F5-8791F9E735E5}"/>
+                <a16:creationId xmlns:a16="http://schemas.microsoft.com/office/drawing/2014/main" id="{26743AEB-9A7E-469F-89C5-FBF353603AF5}"/>
               </a:ext>
             </a:extLst>
           </p:cNvPr>
@@ -8771,7 +7750,7 @@
           <p:cNvPr id="2" name="">
             <a:extLst xmlns:a="http://schemas.openxmlformats.org/drawingml/2006/main">
               <a:ext uri="{FF2B5EF4-FFF2-40B4-BE49-F238E27FC236}">
-                <a16:creationId xmlns:a16="http://schemas.microsoft.com/office/drawing/2014/main" id="{3989FB80-91BE-49E4-B8D2-9F52CB063719}"/>
+                <a16:creationId xmlns:a16="http://schemas.microsoft.com/office/drawing/2014/main" id="{3570B6B9-0AE0-4999-8C5A-7E0439CB1F24}"/>
               </a:ext>
             </a:extLst>
           </p:cNvPr>
@@ -8825,7 +7804,7 @@
           <p:nvPr/>
         </p:nvPicPr>
         <p:blipFill>
-          <a:blip xmlns:r="http://schemas.openxmlformats.org/officeDocument/2006/relationships" xmlns:a="http://schemas.openxmlformats.org/drawingml/2006/main" r:embed="Rd1675278ea7a4416"/>
+          <a:blip xmlns:r="http://schemas.openxmlformats.org/officeDocument/2006/relationships" xmlns:a="http://schemas.openxmlformats.org/drawingml/2006/main" r:embed="R03398cad322343bb"/>
           <a:stretch xmlns:a="http://schemas.openxmlformats.org/drawingml/2006/main"/>
         </p:blipFill>
         <p:spPr>
@@ -8843,7 +7822,7 @@
           <p:cNvPr id="4" name="">
             <a:extLst xmlns:a="http://schemas.openxmlformats.org/drawingml/2006/main">
               <a:ext uri="{FF2B5EF4-FFF2-40B4-BE49-F238E27FC236}">
-                <a16:creationId xmlns:a16="http://schemas.microsoft.com/office/drawing/2014/main" id="{73D9F1E0-4CDF-4EC7-BD83-D07F50E0B7F4}"/>
+                <a16:creationId xmlns:a16="http://schemas.microsoft.com/office/drawing/2014/main" id="{3ED940DF-D65F-4087-A1C9-D65A50DE7C4A}"/>
               </a:ext>
             </a:extLst>
           </p:cNvPr>
@@ -8893,7 +7872,7 @@
           <p:cNvPr id="5" name="">
             <a:extLst xmlns:a="http://schemas.openxmlformats.org/drawingml/2006/main">
               <a:ext uri="{FF2B5EF4-FFF2-40B4-BE49-F238E27FC236}">
-                <a16:creationId xmlns:a16="http://schemas.microsoft.com/office/drawing/2014/main" id="{4ED53949-7F52-4E29-B9F0-42C42A3FC374}"/>
+                <a16:creationId xmlns:a16="http://schemas.microsoft.com/office/drawing/2014/main" id="{B778906D-D0CB-465D-9F03-E8C4DFCF0AEC}"/>
               </a:ext>
             </a:extLst>
           </p:cNvPr>
@@ -8943,7 +7922,7 @@
           <p:cNvPr id="6" name="">
             <a:extLst xmlns:a="http://schemas.openxmlformats.org/drawingml/2006/main">
               <a:ext uri="{FF2B5EF4-FFF2-40B4-BE49-F238E27FC236}">
-                <a16:creationId xmlns:a16="http://schemas.microsoft.com/office/drawing/2014/main" id="{883CD310-6664-44B5-8937-5E779FDB9C15}"/>
+                <a16:creationId xmlns:a16="http://schemas.microsoft.com/office/drawing/2014/main" id="{AC803546-A1C5-485E-922E-D66550EF21EE}"/>
               </a:ext>
             </a:extLst>
           </p:cNvPr>
@@ -8991,7 +7970,7 @@
     </p:spTree>
     <p:extLst>
       <p:ext uri="{BB962C8B-B14F-4D97-AF65-F5344CB8AC3E}">
-        <p14:creationId xmlns:p14="http://schemas.microsoft.com/office/powerpoint/2010/main" val="910095904"/>
+        <p14:creationId xmlns:p14="http://schemas.microsoft.com/office/powerpoint/2010/main" val="1110477544"/>
       </p:ext>
     </p:extLst>
   </p:cSld>
@@ -9022,7 +8001,7 @@
           <p:cNvPr id="11" name="">
             <a:extLst xmlns:a="http://schemas.openxmlformats.org/drawingml/2006/main">
               <a:ext uri="{FF2B5EF4-FFF2-40B4-BE49-F238E27FC236}">
-                <a16:creationId xmlns:a16="http://schemas.microsoft.com/office/drawing/2014/main" id="{45DEDB76-9A0B-45B9-8BC7-92B842B99444}"/>
+                <a16:creationId xmlns:a16="http://schemas.microsoft.com/office/drawing/2014/main" id="{88ABBCBB-4814-4CEF-A3A6-B9450AA22B42}"/>
               </a:ext>
             </a:extLst>
           </p:cNvPr>
@@ -9072,7 +8051,7 @@
           <p:cNvPr id="2" name="">
             <a:extLst xmlns:a="http://schemas.openxmlformats.org/drawingml/2006/main">
               <a:ext uri="{FF2B5EF4-FFF2-40B4-BE49-F238E27FC236}">
-                <a16:creationId xmlns:a16="http://schemas.microsoft.com/office/drawing/2014/main" id="{7B312CE4-0653-4CC1-A011-C38E24005B80}"/>
+                <a16:creationId xmlns:a16="http://schemas.microsoft.com/office/drawing/2014/main" id="{B91841CD-EC97-44C4-919C-62076185024B}"/>
               </a:ext>
             </a:extLst>
           </p:cNvPr>
@@ -9126,7 +8105,7 @@
           <p:nvPr/>
         </p:nvPicPr>
         <p:blipFill>
-          <a:blip xmlns:r="http://schemas.openxmlformats.org/officeDocument/2006/relationships" xmlns:a="http://schemas.openxmlformats.org/drawingml/2006/main" r:embed="R7d62aa19976848e3"/>
+          <a:blip xmlns:r="http://schemas.openxmlformats.org/officeDocument/2006/relationships" xmlns:a="http://schemas.openxmlformats.org/drawingml/2006/main" r:embed="R87c2d830d1a44fa8"/>
           <a:stretch xmlns:a="http://schemas.openxmlformats.org/drawingml/2006/main"/>
         </p:blipFill>
         <p:spPr>
@@ -9144,7 +8123,7 @@
           <p:cNvPr id="4" name="">
             <a:extLst xmlns:a="http://schemas.openxmlformats.org/drawingml/2006/main">
               <a:ext uri="{FF2B5EF4-FFF2-40B4-BE49-F238E27FC236}">
-                <a16:creationId xmlns:a16="http://schemas.microsoft.com/office/drawing/2014/main" id="{B77D43B4-1A83-4397-B653-ED6B82C973E0}"/>
+                <a16:creationId xmlns:a16="http://schemas.microsoft.com/office/drawing/2014/main" id="{8600001A-CF78-485B-A09F-C3F566273B70}"/>
               </a:ext>
             </a:extLst>
           </p:cNvPr>
@@ -9194,7 +8173,7 @@
           <p:cNvPr id="5" name="">
             <a:extLst xmlns:a="http://schemas.openxmlformats.org/drawingml/2006/main">
               <a:ext uri="{FF2B5EF4-FFF2-40B4-BE49-F238E27FC236}">
-                <a16:creationId xmlns:a16="http://schemas.microsoft.com/office/drawing/2014/main" id="{61F16353-F6C2-4940-9355-2E598FAF0EA8}"/>
+                <a16:creationId xmlns:a16="http://schemas.microsoft.com/office/drawing/2014/main" id="{64B0B5A8-E70A-4335-AA47-F16118BDA9E4}"/>
               </a:ext>
             </a:extLst>
           </p:cNvPr>
@@ -9244,7 +8223,7 @@
           <p:cNvPr id="6" name="">
             <a:extLst xmlns:a="http://schemas.openxmlformats.org/drawingml/2006/main">
               <a:ext uri="{FF2B5EF4-FFF2-40B4-BE49-F238E27FC236}">
-                <a16:creationId xmlns:a16="http://schemas.microsoft.com/office/drawing/2014/main" id="{7869CA2A-555D-433E-8A14-ADE2ABB3D093}"/>
+                <a16:creationId xmlns:a16="http://schemas.microsoft.com/office/drawing/2014/main" id="{23E74176-2669-449B-BB38-8E7D1B88FBCE}"/>
               </a:ext>
             </a:extLst>
           </p:cNvPr>
@@ -9294,7 +8273,7 @@
           <p:cNvPr id="7" name="">
             <a:extLst xmlns:a="http://schemas.openxmlformats.org/drawingml/2006/main">
               <a:ext uri="{FF2B5EF4-FFF2-40B4-BE49-F238E27FC236}">
-                <a16:creationId xmlns:a16="http://schemas.microsoft.com/office/drawing/2014/main" id="{1E778660-C82E-476E-8143-BA4F27F2B49C}"/>
+                <a16:creationId xmlns:a16="http://schemas.microsoft.com/office/drawing/2014/main" id="{7E758037-1C1B-4577-9E57-C468AF046CD0}"/>
               </a:ext>
             </a:extLst>
           </p:cNvPr>
@@ -9344,7 +8323,7 @@
           <p:cNvPr id="8" name="">
             <a:extLst xmlns:a="http://schemas.openxmlformats.org/drawingml/2006/main">
               <a:ext uri="{FF2B5EF4-FFF2-40B4-BE49-F238E27FC236}">
-                <a16:creationId xmlns:a16="http://schemas.microsoft.com/office/drawing/2014/main" id="{7FF06F40-DCFB-4687-B1AA-A347499496AF}"/>
+                <a16:creationId xmlns:a16="http://schemas.microsoft.com/office/drawing/2014/main" id="{FC5E5F24-6A8E-4DF5-9EC9-6B75889E37F1}"/>
               </a:ext>
             </a:extLst>
           </p:cNvPr>
@@ -9394,7 +8373,7 @@
           <p:cNvPr id="9" name="">
             <a:extLst xmlns:a="http://schemas.openxmlformats.org/drawingml/2006/main">
               <a:ext uri="{FF2B5EF4-FFF2-40B4-BE49-F238E27FC236}">
-                <a16:creationId xmlns:a16="http://schemas.microsoft.com/office/drawing/2014/main" id="{24A5E46C-95D7-49ED-93F4-9DD6C4E0640F}"/>
+                <a16:creationId xmlns:a16="http://schemas.microsoft.com/office/drawing/2014/main" id="{398B5DAF-0AD4-472E-9BD9-D58908EF7667}"/>
               </a:ext>
             </a:extLst>
           </p:cNvPr>
@@ -9444,7 +8423,7 @@
           <p:cNvPr id="10" name="">
             <a:extLst xmlns:a="http://schemas.openxmlformats.org/drawingml/2006/main">
               <a:ext uri="{FF2B5EF4-FFF2-40B4-BE49-F238E27FC236}">
-                <a16:creationId xmlns:a16="http://schemas.microsoft.com/office/drawing/2014/main" id="{3828E3EF-5D5C-4C46-BCFA-0E96C935ECF9}"/>
+                <a16:creationId xmlns:a16="http://schemas.microsoft.com/office/drawing/2014/main" id="{EF8B686E-92F2-44F4-864C-36D801EFCF09}"/>
               </a:ext>
             </a:extLst>
           </p:cNvPr>
@@ -9492,7 +8471,7 @@
     </p:spTree>
     <p:extLst>
       <p:ext uri="{BB962C8B-B14F-4D97-AF65-F5344CB8AC3E}">
-        <p14:creationId xmlns:p14="http://schemas.microsoft.com/office/powerpoint/2010/main" val="1079977351"/>
+        <p14:creationId xmlns:p14="http://schemas.microsoft.com/office/powerpoint/2010/main" val="2019135362"/>
       </p:ext>
     </p:extLst>
   </p:cSld>
@@ -9523,7 +8502,7 @@
           <p:cNvPr id="13" name="">
             <a:extLst xmlns:a="http://schemas.openxmlformats.org/drawingml/2006/main">
               <a:ext uri="{FF2B5EF4-FFF2-40B4-BE49-F238E27FC236}">
-                <a16:creationId xmlns:a16="http://schemas.microsoft.com/office/drawing/2014/main" id="{420A89CC-69AD-497C-AF8D-FA5079C6EE06}"/>
+                <a16:creationId xmlns:a16="http://schemas.microsoft.com/office/drawing/2014/main" id="{6E83292B-0B01-46F3-A76F-0ECDC5E6329E}"/>
               </a:ext>
             </a:extLst>
           </p:cNvPr>
@@ -9573,7 +8552,7 @@
           <p:cNvPr id="2" name="">
             <a:extLst xmlns:a="http://schemas.openxmlformats.org/drawingml/2006/main">
               <a:ext uri="{FF2B5EF4-FFF2-40B4-BE49-F238E27FC236}">
-                <a16:creationId xmlns:a16="http://schemas.microsoft.com/office/drawing/2014/main" id="{E469EF6B-D2DB-433F-B7D1-59EE7517313E}"/>
+                <a16:creationId xmlns:a16="http://schemas.microsoft.com/office/drawing/2014/main" id="{7754D688-5339-430E-AA96-C54C58D83C38}"/>
               </a:ext>
             </a:extLst>
           </p:cNvPr>
@@ -9627,7 +8606,7 @@
           <p:nvPr/>
         </p:nvPicPr>
         <p:blipFill>
-          <a:blip xmlns:r="http://schemas.openxmlformats.org/officeDocument/2006/relationships" xmlns:a="http://schemas.openxmlformats.org/drawingml/2006/main" r:embed="Rffc454e21491477a"/>
+          <a:blip xmlns:r="http://schemas.openxmlformats.org/officeDocument/2006/relationships" xmlns:a="http://schemas.openxmlformats.org/drawingml/2006/main" r:embed="Rd228ce6e9bb1404b"/>
           <a:stretch xmlns:a="http://schemas.openxmlformats.org/drawingml/2006/main"/>
         </p:blipFill>
         <p:spPr>
@@ -9645,7 +8624,7 @@
           <p:cNvPr id="4" name="">
             <a:extLst xmlns:a="http://schemas.openxmlformats.org/drawingml/2006/main">
               <a:ext uri="{FF2B5EF4-FFF2-40B4-BE49-F238E27FC236}">
-                <a16:creationId xmlns:a16="http://schemas.microsoft.com/office/drawing/2014/main" id="{5822D81E-5978-483F-BB48-2944842FD18F}"/>
+                <a16:creationId xmlns:a16="http://schemas.microsoft.com/office/drawing/2014/main" id="{9D4344C6-5ED8-4FBD-938A-BAC0603D8AF2}"/>
               </a:ext>
             </a:extLst>
           </p:cNvPr>
@@ -9695,7 +8674,7 @@
           <p:cNvPr id="5" name="">
             <a:extLst xmlns:a="http://schemas.openxmlformats.org/drawingml/2006/main">
               <a:ext uri="{FF2B5EF4-FFF2-40B4-BE49-F238E27FC236}">
-                <a16:creationId xmlns:a16="http://schemas.microsoft.com/office/drawing/2014/main" id="{F296E73F-2FC1-4D37-828C-0165FB21803F}"/>
+                <a16:creationId xmlns:a16="http://schemas.microsoft.com/office/drawing/2014/main" id="{009C32C1-6DE0-439E-9479-48886417E459}"/>
               </a:ext>
             </a:extLst>
           </p:cNvPr>
@@ -9745,7 +8724,7 @@
           <p:cNvPr id="6" name="">
             <a:extLst xmlns:a="http://schemas.openxmlformats.org/drawingml/2006/main">
               <a:ext uri="{FF2B5EF4-FFF2-40B4-BE49-F238E27FC236}">
-                <a16:creationId xmlns:a16="http://schemas.microsoft.com/office/drawing/2014/main" id="{77C01BB6-9C5E-4401-95D9-864684348BA0}"/>
+                <a16:creationId xmlns:a16="http://schemas.microsoft.com/office/drawing/2014/main" id="{4DA370AC-4C17-4451-8A4F-988FD5B33221}"/>
               </a:ext>
             </a:extLst>
           </p:cNvPr>
@@ -9795,7 +8774,7 @@
           <p:cNvPr id="7" name="">
             <a:extLst xmlns:a="http://schemas.openxmlformats.org/drawingml/2006/main">
               <a:ext uri="{FF2B5EF4-FFF2-40B4-BE49-F238E27FC236}">
-                <a16:creationId xmlns:a16="http://schemas.microsoft.com/office/drawing/2014/main" id="{50724CF8-DC14-4C4E-87A1-94E2FC01C63B}"/>
+                <a16:creationId xmlns:a16="http://schemas.microsoft.com/office/drawing/2014/main" id="{FE6021CB-FA97-4961-82BD-25FA9C5A8F58}"/>
               </a:ext>
             </a:extLst>
           </p:cNvPr>
@@ -9845,7 +8824,7 @@
           <p:cNvPr id="8" name="">
             <a:extLst xmlns:a="http://schemas.openxmlformats.org/drawingml/2006/main">
               <a:ext uri="{FF2B5EF4-FFF2-40B4-BE49-F238E27FC236}">
-                <a16:creationId xmlns:a16="http://schemas.microsoft.com/office/drawing/2014/main" id="{BC8BB289-4DDE-46E7-8352-B627B59EDE62}"/>
+                <a16:creationId xmlns:a16="http://schemas.microsoft.com/office/drawing/2014/main" id="{AB8BC059-BA36-4134-B61A-17FFFC7BDCD1}"/>
               </a:ext>
             </a:extLst>
           </p:cNvPr>
@@ -9895,7 +8874,7 @@
           <p:cNvPr id="9" name="">
             <a:extLst xmlns:a="http://schemas.openxmlformats.org/drawingml/2006/main">
               <a:ext uri="{FF2B5EF4-FFF2-40B4-BE49-F238E27FC236}">
-                <a16:creationId xmlns:a16="http://schemas.microsoft.com/office/drawing/2014/main" id="{BB975225-ED79-4E81-A012-E44E2FE233AA}"/>
+                <a16:creationId xmlns:a16="http://schemas.microsoft.com/office/drawing/2014/main" id="{9554BC66-6BF2-4F61-989A-D1169EC6FEE9}"/>
               </a:ext>
             </a:extLst>
           </p:cNvPr>
@@ -9945,7 +8924,7 @@
           <p:cNvPr id="10" name="">
             <a:extLst xmlns:a="http://schemas.openxmlformats.org/drawingml/2006/main">
               <a:ext uri="{FF2B5EF4-FFF2-40B4-BE49-F238E27FC236}">
-                <a16:creationId xmlns:a16="http://schemas.microsoft.com/office/drawing/2014/main" id="{C938E1E5-7678-4BE5-AFF4-5E9D406E2010}"/>
+                <a16:creationId xmlns:a16="http://schemas.microsoft.com/office/drawing/2014/main" id="{9614F956-0C27-4FC3-B76B-84EBA31EBB35}"/>
               </a:ext>
             </a:extLst>
           </p:cNvPr>
@@ -9995,7 +8974,7 @@
           <p:cNvPr id="11" name="">
             <a:extLst xmlns:a="http://schemas.openxmlformats.org/drawingml/2006/main">
               <a:ext uri="{FF2B5EF4-FFF2-40B4-BE49-F238E27FC236}">
-                <a16:creationId xmlns:a16="http://schemas.microsoft.com/office/drawing/2014/main" id="{844740DF-B636-460D-97C1-AD4E8E63F06A}"/>
+                <a16:creationId xmlns:a16="http://schemas.microsoft.com/office/drawing/2014/main" id="{40156F5A-55F3-4497-9472-E4A56C93380E}"/>
               </a:ext>
             </a:extLst>
           </p:cNvPr>
@@ -10045,7 +9024,7 @@
           <p:cNvPr id="12" name="">
             <a:extLst xmlns:a="http://schemas.openxmlformats.org/drawingml/2006/main">
               <a:ext uri="{FF2B5EF4-FFF2-40B4-BE49-F238E27FC236}">
-                <a16:creationId xmlns:a16="http://schemas.microsoft.com/office/drawing/2014/main" id="{1F1A2E76-8942-4151-BF81-4A93E85AFEEF}"/>
+                <a16:creationId xmlns:a16="http://schemas.microsoft.com/office/drawing/2014/main" id="{9DE791F6-22B9-4448-AA9F-1DAA91072499}"/>
               </a:ext>
             </a:extLst>
           </p:cNvPr>
@@ -10093,7 +9072,7 @@
     </p:spTree>
     <p:extLst>
       <p:ext uri="{BB962C8B-B14F-4D97-AF65-F5344CB8AC3E}">
-        <p14:creationId xmlns:p14="http://schemas.microsoft.com/office/powerpoint/2010/main" val="1528600922"/>
+        <p14:creationId xmlns:p14="http://schemas.microsoft.com/office/powerpoint/2010/main" val="2004647577"/>
       </p:ext>
     </p:extLst>
   </p:cSld>
@@ -10124,7 +9103,7 @@
           <p:cNvPr id="9" name="">
             <a:extLst xmlns:a="http://schemas.openxmlformats.org/drawingml/2006/main">
               <a:ext uri="{FF2B5EF4-FFF2-40B4-BE49-F238E27FC236}">
-                <a16:creationId xmlns:a16="http://schemas.microsoft.com/office/drawing/2014/main" id="{5DF5D210-C04A-45D1-A4AA-45D8A764DC74}"/>
+                <a16:creationId xmlns:a16="http://schemas.microsoft.com/office/drawing/2014/main" id="{326D6C0B-3424-4847-B5B0-3A43647A9B27}"/>
               </a:ext>
             </a:extLst>
           </p:cNvPr>
@@ -10174,7 +9153,7 @@
           <p:cNvPr id="2" name="">
             <a:extLst xmlns:a="http://schemas.openxmlformats.org/drawingml/2006/main">
               <a:ext uri="{FF2B5EF4-FFF2-40B4-BE49-F238E27FC236}">
-                <a16:creationId xmlns:a16="http://schemas.microsoft.com/office/drawing/2014/main" id="{FE4FFDE3-75E1-46D0-833B-0E3869F3D7C3}"/>
+                <a16:creationId xmlns:a16="http://schemas.microsoft.com/office/drawing/2014/main" id="{44159568-B40A-4C56-ACFE-7D4F3F18014E}"/>
               </a:ext>
             </a:extLst>
           </p:cNvPr>
@@ -10228,7 +9207,7 @@
           <p:nvPr/>
         </p:nvPicPr>
         <p:blipFill>
-          <a:blip xmlns:r="http://schemas.openxmlformats.org/officeDocument/2006/relationships" xmlns:a="http://schemas.openxmlformats.org/drawingml/2006/main" r:embed="R83551dee1ca24116"/>
+          <a:blip xmlns:r="http://schemas.openxmlformats.org/officeDocument/2006/relationships" xmlns:a="http://schemas.openxmlformats.org/drawingml/2006/main" r:embed="R41f096c445f74206"/>
           <a:stretch xmlns:a="http://schemas.openxmlformats.org/drawingml/2006/main"/>
         </p:blipFill>
         <p:spPr>
@@ -10246,7 +9225,7 @@
           <p:cNvPr id="4" name="">
             <a:extLst xmlns:a="http://schemas.openxmlformats.org/drawingml/2006/main">
               <a:ext uri="{FF2B5EF4-FFF2-40B4-BE49-F238E27FC236}">
-                <a16:creationId xmlns:a16="http://schemas.microsoft.com/office/drawing/2014/main" id="{4FCF7857-70C1-4435-A928-1B258A0FACE1}"/>
+                <a16:creationId xmlns:a16="http://schemas.microsoft.com/office/drawing/2014/main" id="{18484F47-FB31-45C5-9D1F-8A936800544B}"/>
               </a:ext>
             </a:extLst>
           </p:cNvPr>
@@ -10296,7 +9275,7 @@
           <p:cNvPr id="5" name="">
             <a:extLst xmlns:a="http://schemas.openxmlformats.org/drawingml/2006/main">
               <a:ext uri="{FF2B5EF4-FFF2-40B4-BE49-F238E27FC236}">
-                <a16:creationId xmlns:a16="http://schemas.microsoft.com/office/drawing/2014/main" id="{D41D5194-78B9-49F7-A082-7971DF82B795}"/>
+                <a16:creationId xmlns:a16="http://schemas.microsoft.com/office/drawing/2014/main" id="{88E88A13-E27C-4A29-BB81-5EB038DD2ED5}"/>
               </a:ext>
             </a:extLst>
           </p:cNvPr>
@@ -10346,7 +9325,7 @@
           <p:cNvPr id="6" name="">
             <a:extLst xmlns:a="http://schemas.openxmlformats.org/drawingml/2006/main">
               <a:ext uri="{FF2B5EF4-FFF2-40B4-BE49-F238E27FC236}">
-                <a16:creationId xmlns:a16="http://schemas.microsoft.com/office/drawing/2014/main" id="{DF79C20E-972E-4653-8879-34F973531F4E}"/>
+                <a16:creationId xmlns:a16="http://schemas.microsoft.com/office/drawing/2014/main" id="{044F57E4-038E-498F-8B9C-748C4C0CEA24}"/>
               </a:ext>
             </a:extLst>
           </p:cNvPr>
@@ -10396,7 +9375,7 @@
           <p:cNvPr id="7" name="">
             <a:extLst xmlns:a="http://schemas.openxmlformats.org/drawingml/2006/main">
               <a:ext uri="{FF2B5EF4-FFF2-40B4-BE49-F238E27FC236}">
-                <a16:creationId xmlns:a16="http://schemas.microsoft.com/office/drawing/2014/main" id="{6ED84EEA-141E-4C1B-ABF4-4594CB70F98C}"/>
+                <a16:creationId xmlns:a16="http://schemas.microsoft.com/office/drawing/2014/main" id="{62112945-5444-4047-BEF0-AE3A334A7EB2}"/>
               </a:ext>
             </a:extLst>
           </p:cNvPr>
@@ -10446,7 +9425,7 @@
           <p:cNvPr id="8" name="">
             <a:extLst xmlns:a="http://schemas.openxmlformats.org/drawingml/2006/main">
               <a:ext uri="{FF2B5EF4-FFF2-40B4-BE49-F238E27FC236}">
-                <a16:creationId xmlns:a16="http://schemas.microsoft.com/office/drawing/2014/main" id="{FBA3D3DB-73F5-4D97-9477-CD7B8666EC2D}"/>
+                <a16:creationId xmlns:a16="http://schemas.microsoft.com/office/drawing/2014/main" id="{50DC2D51-0D07-4781-B20A-5496E6D21953}"/>
               </a:ext>
             </a:extLst>
           </p:cNvPr>
@@ -10494,7 +9473,7 @@
     </p:spTree>
     <p:extLst>
       <p:ext uri="{BB962C8B-B14F-4D97-AF65-F5344CB8AC3E}">
-        <p14:creationId xmlns:p14="http://schemas.microsoft.com/office/powerpoint/2010/main" val="1106869428"/>
+        <p14:creationId xmlns:p14="http://schemas.microsoft.com/office/powerpoint/2010/main" val="489482019"/>
       </p:ext>
     </p:extLst>
   </p:cSld>
@@ -10525,7 +9504,7 @@
           <p:cNvPr id="7" name="">
             <a:extLst xmlns:a="http://schemas.openxmlformats.org/drawingml/2006/main">
               <a:ext uri="{FF2B5EF4-FFF2-40B4-BE49-F238E27FC236}">
-                <a16:creationId xmlns:a16="http://schemas.microsoft.com/office/drawing/2014/main" id="{CDBEF49C-69B0-4F0E-951C-27ECBDB7FE28}"/>
+                <a16:creationId xmlns:a16="http://schemas.microsoft.com/office/drawing/2014/main" id="{5CB119E4-6D86-40F2-A3C1-E58EFD9478B4}"/>
               </a:ext>
             </a:extLst>
           </p:cNvPr>
@@ -10575,7 +9554,7 @@
           <p:cNvPr id="2" name="">
             <a:extLst xmlns:a="http://schemas.openxmlformats.org/drawingml/2006/main">
               <a:ext uri="{FF2B5EF4-FFF2-40B4-BE49-F238E27FC236}">
-                <a16:creationId xmlns:a16="http://schemas.microsoft.com/office/drawing/2014/main" id="{F48DE9FB-5859-4DE0-AC11-C626FF7B7073}"/>
+                <a16:creationId xmlns:a16="http://schemas.microsoft.com/office/drawing/2014/main" id="{61E7D273-34CF-4C08-8FA8-45201B7F7EDD}"/>
               </a:ext>
             </a:extLst>
           </p:cNvPr>
@@ -10629,7 +9608,7 @@
           <p:nvPr/>
         </p:nvPicPr>
         <p:blipFill>
-          <a:blip xmlns:r="http://schemas.openxmlformats.org/officeDocument/2006/relationships" xmlns:a="http://schemas.openxmlformats.org/drawingml/2006/main" r:embed="R12ea939e569f430e"/>
+          <a:blip xmlns:r="http://schemas.openxmlformats.org/officeDocument/2006/relationships" xmlns:a="http://schemas.openxmlformats.org/drawingml/2006/main" r:embed="R07ce41db95e24293"/>
           <a:stretch xmlns:a="http://schemas.openxmlformats.org/drawingml/2006/main"/>
         </p:blipFill>
         <p:spPr>
@@ -10647,7 +9626,7 @@
           <p:cNvPr id="4" name="">
             <a:extLst xmlns:a="http://schemas.openxmlformats.org/drawingml/2006/main">
               <a:ext uri="{FF2B5EF4-FFF2-40B4-BE49-F238E27FC236}">
-                <a16:creationId xmlns:a16="http://schemas.microsoft.com/office/drawing/2014/main" id="{F9361A23-936D-4741-9FCB-14880B88186F}"/>
+                <a16:creationId xmlns:a16="http://schemas.microsoft.com/office/drawing/2014/main" id="{DAB5A899-D014-4DF6-ABAC-BF0EF10BCD2B}"/>
               </a:ext>
             </a:extLst>
           </p:cNvPr>
@@ -10697,7 +9676,7 @@
           <p:cNvPr id="5" name="">
             <a:extLst xmlns:a="http://schemas.openxmlformats.org/drawingml/2006/main">
               <a:ext uri="{FF2B5EF4-FFF2-40B4-BE49-F238E27FC236}">
-                <a16:creationId xmlns:a16="http://schemas.microsoft.com/office/drawing/2014/main" id="{C6547F55-D01C-4F76-8864-D776F41855EE}"/>
+                <a16:creationId xmlns:a16="http://schemas.microsoft.com/office/drawing/2014/main" id="{147F55FA-BA0B-4F73-87FC-3E09630F81EA}"/>
               </a:ext>
             </a:extLst>
           </p:cNvPr>
@@ -10747,7 +9726,7 @@
           <p:cNvPr id="6" name="">
             <a:extLst xmlns:a="http://schemas.openxmlformats.org/drawingml/2006/main">
               <a:ext uri="{FF2B5EF4-FFF2-40B4-BE49-F238E27FC236}">
-                <a16:creationId xmlns:a16="http://schemas.microsoft.com/office/drawing/2014/main" id="{9F4613CE-FDCF-4F2D-9FD0-28DC6C1321DC}"/>
+                <a16:creationId xmlns:a16="http://schemas.microsoft.com/office/drawing/2014/main" id="{9AC1B0B1-A822-4C89-A1EE-93F2D1ACE404}"/>
               </a:ext>
             </a:extLst>
           </p:cNvPr>
@@ -10795,7 +9774,7 @@
     </p:spTree>
     <p:extLst>
       <p:ext uri="{BB962C8B-B14F-4D97-AF65-F5344CB8AC3E}">
-        <p14:creationId xmlns:p14="http://schemas.microsoft.com/office/powerpoint/2010/main" val="914692184"/>
+        <p14:creationId xmlns:p14="http://schemas.microsoft.com/office/powerpoint/2010/main" val="1083802453"/>
       </p:ext>
     </p:extLst>
   </p:cSld>
